--- a/Java/Java #4/TR/Java #4.pptx
+++ b/Java/Java #4/TR/Java #4.pptx
@@ -6,6 +6,7 @@
   </p:sldMasterIdLst>
   <p:sldIdLst>
     <p:sldId id="256" r:id="rId3"/>
+    <p:sldId id="257" r:id="rId4"/>
   </p:sldIdLst>
   <p:sldSz cx="9144000" cy="6858000"/>
   <p:notesSz cx="7772400" cy="10058400"/>
@@ -63,7 +64,7 @@
         <p:txBody>
           <a:bodyPr/>
           <a:p>
-            <a:fld id="{DCE4CBD1-D7C4-4F34-9036-AC198C607F66}" type="slidenum">
+            <a:fld id="{F60247D1-78FC-4F72-8D72-60A5AE1DAAE3}" type="slidenum">
               <a:t>&lt;#&gt;</a:t>
             </a:fld>
           </a:p>
@@ -272,7 +273,7 @@
         <p:txBody>
           <a:bodyPr/>
           <a:p>
-            <a:fld id="{C908E292-B89F-47A5-ACD8-0700F72873E5}" type="slidenum">
+            <a:fld id="{40D4C535-A920-48B4-9A5C-450530658A18}" type="slidenum">
               <a:t>&lt;#&gt;</a:t>
             </a:fld>
           </a:p>
@@ -567,7 +568,7 @@
         <p:txBody>
           <a:bodyPr/>
           <a:p>
-            <a:fld id="{F2087179-DC17-44A1-8A51-2AB69EC23FA3}" type="slidenum">
+            <a:fld id="{618393B9-FE15-4D2F-9EC1-6326D8D21B04}" type="slidenum">
               <a:t>&lt;#&gt;</a:t>
             </a:fld>
           </a:p>
@@ -948,7 +949,7 @@
         <p:txBody>
           <a:bodyPr/>
           <a:p>
-            <a:fld id="{6DD0A84A-B11F-4F3C-B58A-69C63E62D1C4}" type="slidenum">
+            <a:fld id="{11255BB1-1EF6-4B8B-8D1B-23B0116F9E5D}" type="slidenum">
               <a:t>&lt;#&gt;</a:t>
             </a:fld>
           </a:p>
@@ -1111,7 +1112,7 @@
         <p:txBody>
           <a:bodyPr/>
           <a:p>
-            <a:fld id="{088A7A0D-8E7C-42A7-9100-209233A24EE5}" type="slidenum">
+            <a:fld id="{871ADD75-68A9-4C24-BB04-1822EC63CC78}" type="slidenum">
               <a:t>&lt;#&gt;</a:t>
             </a:fld>
           </a:p>
@@ -1277,7 +1278,7 @@
         <p:txBody>
           <a:bodyPr/>
           <a:p>
-            <a:fld id="{EBDF338B-1C58-483B-B7F1-EF6C6595CFE7}" type="slidenum">
+            <a:fld id="{950B5877-214B-4352-92CD-1D68A1186AC1}" type="slidenum">
               <a:t>&lt;#&gt;</a:t>
             </a:fld>
           </a:p>
@@ -1486,7 +1487,7 @@
         <p:txBody>
           <a:bodyPr/>
           <a:p>
-            <a:fld id="{4B4F4871-62E3-4BD0-BCDF-3A8F7AD7BD9B}" type="slidenum">
+            <a:fld id="{A1D22C89-7494-44E1-9311-BFB1C6230E0B}" type="slidenum">
               <a:t>&lt;#&gt;</a:t>
             </a:fld>
           </a:p>
@@ -1609,7 +1610,7 @@
         <p:txBody>
           <a:bodyPr/>
           <a:p>
-            <a:fld id="{38E67938-0DB4-425D-9D88-C32EE997917D}" type="slidenum">
+            <a:fld id="{6930FB38-4D45-4151-8CBF-B9E7311F8371}" type="slidenum">
               <a:t>&lt;#&gt;</a:t>
             </a:fld>
           </a:p>
@@ -1730,7 +1731,7 @@
         <p:txBody>
           <a:bodyPr/>
           <a:p>
-            <a:fld id="{DABE9158-A076-4697-91B1-05788391855C}" type="slidenum">
+            <a:fld id="{BCC5E572-AF18-4FEC-80A8-75BA437B8C07}" type="slidenum">
               <a:t>&lt;#&gt;</a:t>
             </a:fld>
           </a:p>
@@ -1982,7 +1983,7 @@
         <p:txBody>
           <a:bodyPr/>
           <a:p>
-            <a:fld id="{CD269E4A-620D-4DA8-BFB6-4E47648C7359}" type="slidenum">
+            <a:fld id="{F838E774-D7DB-49B1-B440-62357F310FDE}" type="slidenum">
               <a:t>&lt;#&gt;</a:t>
             </a:fld>
           </a:p>
@@ -2234,7 +2235,7 @@
         <p:txBody>
           <a:bodyPr/>
           <a:p>
-            <a:fld id="{533E361B-FA6C-40AE-ABCF-FDB794E42524}" type="slidenum">
+            <a:fld id="{8852DCEC-8EC1-4C97-BD34-AFC2F80ADEF6}" type="slidenum">
               <a:t>&lt;#&gt;</a:t>
             </a:fld>
           </a:p>
@@ -2486,7 +2487,7 @@
         <p:txBody>
           <a:bodyPr/>
           <a:p>
-            <a:fld id="{C27DF376-13BF-4D01-B3A3-3B97796231C9}" type="slidenum">
+            <a:fld id="{BDA57AB3-B3D5-4AE7-80FD-B352A1EB879B}" type="slidenum">
               <a:t>&lt;#&gt;</a:t>
             </a:fld>
           </a:p>
@@ -2555,7 +2556,7 @@
         <p:spPr>
           <a:xfrm>
             <a:off x="3124080" y="6356520"/>
-            <a:ext cx="2894400" cy="363960"/>
+            <a:ext cx="2894040" cy="363600"/>
           </a:xfrm>
           <a:prstGeom prst="rect">
             <a:avLst/>
@@ -2627,7 +2628,7 @@
         <p:spPr>
           <a:xfrm>
             <a:off x="6553080" y="6356520"/>
-            <a:ext cx="2132640" cy="363960"/>
+            <a:ext cx="2132280" cy="363600"/>
           </a:xfrm>
           <a:prstGeom prst="rect">
             <a:avLst/>
@@ -2668,7 +2669,7 @@
                 <a:tab algn="l" pos="0"/>
               </a:tabLst>
             </a:pPr>
-            <a:fld id="{4B588D96-C308-42DF-A0B9-BF6D7E668345}" type="slidenum">
+            <a:fld id="{42378A55-3BCB-435A-8BB3-0DD552915C06}" type="slidenum">
               <a:rPr b="0" lang="en-US" sz="1200" spc="-1" strike="noStrike">
                 <a:solidFill>
                   <a:srgbClr val="8b8b8b"/>
@@ -2699,7 +2700,7 @@
         <p:spPr>
           <a:xfrm>
             <a:off x="457200" y="6356520"/>
-            <a:ext cx="2132640" cy="363960"/>
+            <a:ext cx="2132280" cy="363600"/>
           </a:xfrm>
           <a:prstGeom prst="rect">
             <a:avLst/>
@@ -2792,7 +2793,7 @@
         <p:spPr>
           <a:xfrm>
             <a:off x="0" y="0"/>
-            <a:ext cx="12187800" cy="6856920"/>
+            <a:ext cx="12187440" cy="6856560"/>
           </a:xfrm>
           <a:prstGeom prst="rect">
             <a:avLst/>
@@ -2852,7 +2853,7 @@
         <p:spPr>
           <a:xfrm>
             <a:off x="0" y="0"/>
-            <a:ext cx="17280" cy="6856920"/>
+            <a:ext cx="16920" cy="6856560"/>
           </a:xfrm>
           <a:prstGeom prst="rect">
             <a:avLst/>
@@ -2912,7 +2913,7 @@
         <p:spPr>
           <a:xfrm>
             <a:off x="914400" y="0"/>
-            <a:ext cx="17280" cy="6856920"/>
+            <a:ext cx="16920" cy="6856560"/>
           </a:xfrm>
           <a:prstGeom prst="rect">
             <a:avLst/>
@@ -2972,7 +2973,7 @@
         <p:spPr>
           <a:xfrm>
             <a:off x="1828800" y="0"/>
-            <a:ext cx="17280" cy="6856920"/>
+            <a:ext cx="16920" cy="6856560"/>
           </a:xfrm>
           <a:prstGeom prst="rect">
             <a:avLst/>
@@ -3032,7 +3033,7 @@
         <p:spPr>
           <a:xfrm>
             <a:off x="2743200" y="0"/>
-            <a:ext cx="17280" cy="6856920"/>
+            <a:ext cx="16920" cy="6856560"/>
           </a:xfrm>
           <a:prstGeom prst="rect">
             <a:avLst/>
@@ -3092,7 +3093,7 @@
         <p:spPr>
           <a:xfrm>
             <a:off x="3657600" y="0"/>
-            <a:ext cx="17280" cy="6856920"/>
+            <a:ext cx="16920" cy="6856560"/>
           </a:xfrm>
           <a:prstGeom prst="rect">
             <a:avLst/>
@@ -3152,7 +3153,7 @@
         <p:spPr>
           <a:xfrm>
             <a:off x="4572000" y="0"/>
-            <a:ext cx="17280" cy="6856920"/>
+            <a:ext cx="16920" cy="6856560"/>
           </a:xfrm>
           <a:prstGeom prst="rect">
             <a:avLst/>
@@ -3212,7 +3213,7 @@
         <p:spPr>
           <a:xfrm>
             <a:off x="5486400" y="0"/>
-            <a:ext cx="17280" cy="6856920"/>
+            <a:ext cx="16920" cy="6856560"/>
           </a:xfrm>
           <a:prstGeom prst="rect">
             <a:avLst/>
@@ -3272,7 +3273,7 @@
         <p:spPr>
           <a:xfrm>
             <a:off x="6400800" y="0"/>
-            <a:ext cx="17280" cy="6856920"/>
+            <a:ext cx="16920" cy="6856560"/>
           </a:xfrm>
           <a:prstGeom prst="rect">
             <a:avLst/>
@@ -3332,7 +3333,7 @@
         <p:spPr>
           <a:xfrm>
             <a:off x="7315200" y="0"/>
-            <a:ext cx="17280" cy="6856920"/>
+            <a:ext cx="16920" cy="6856560"/>
           </a:xfrm>
           <a:prstGeom prst="rect">
             <a:avLst/>
@@ -3392,7 +3393,7 @@
         <p:spPr>
           <a:xfrm>
             <a:off x="8229600" y="0"/>
-            <a:ext cx="17280" cy="6856920"/>
+            <a:ext cx="16920" cy="6856560"/>
           </a:xfrm>
           <a:prstGeom prst="rect">
             <a:avLst/>
@@ -3452,7 +3453,7 @@
         <p:spPr>
           <a:xfrm>
             <a:off x="9144000" y="0"/>
-            <a:ext cx="17280" cy="6856920"/>
+            <a:ext cx="16920" cy="6856560"/>
           </a:xfrm>
           <a:prstGeom prst="rect">
             <a:avLst/>
@@ -3512,7 +3513,7 @@
         <p:spPr>
           <a:xfrm>
             <a:off x="10058400" y="0"/>
-            <a:ext cx="17280" cy="6856920"/>
+            <a:ext cx="16920" cy="6856560"/>
           </a:xfrm>
           <a:prstGeom prst="rect">
             <a:avLst/>
@@ -3572,7 +3573,7 @@
         <p:spPr>
           <a:xfrm>
             <a:off x="10972800" y="0"/>
-            <a:ext cx="17280" cy="6856920"/>
+            <a:ext cx="16920" cy="6856560"/>
           </a:xfrm>
           <a:prstGeom prst="rect">
             <a:avLst/>
@@ -3632,7 +3633,7 @@
         <p:spPr>
           <a:xfrm>
             <a:off x="11887200" y="0"/>
-            <a:ext cx="17280" cy="6856920"/>
+            <a:ext cx="16920" cy="6856560"/>
           </a:xfrm>
           <a:prstGeom prst="rect">
             <a:avLst/>
@@ -3692,7 +3693,7 @@
         <p:spPr>
           <a:xfrm>
             <a:off x="0" y="0"/>
-            <a:ext cx="318960" cy="6856920"/>
+            <a:ext cx="318600" cy="6856560"/>
           </a:xfrm>
           <a:prstGeom prst="rect">
             <a:avLst/>
@@ -3752,7 +3753,7 @@
         <p:spPr>
           <a:xfrm>
             <a:off x="9875520" y="365760"/>
-            <a:ext cx="2010600" cy="501840"/>
+            <a:ext cx="2010240" cy="501480"/>
           </a:xfrm>
           <a:prstGeom prst="roundRect">
             <a:avLst>
@@ -3880,7 +3881,7 @@
         <p:spPr>
           <a:xfrm>
             <a:off x="3070440" y="1495080"/>
-            <a:ext cx="5938920" cy="1248120"/>
+            <a:ext cx="5938560" cy="1247400"/>
           </a:xfrm>
           <a:prstGeom prst="rect">
             <a:avLst/>
@@ -4003,7 +4004,7 @@
         <p:spPr>
           <a:xfrm>
             <a:off x="987480" y="3182040"/>
-            <a:ext cx="3290760" cy="2742120"/>
+            <a:ext cx="3290400" cy="2741760"/>
           </a:xfrm>
           <a:prstGeom prst="roundRect">
             <a:avLst>
@@ -4065,7 +4066,7 @@
         <p:spPr>
           <a:xfrm>
             <a:off x="914400" y="3108960"/>
-            <a:ext cx="3290760" cy="2742120"/>
+            <a:ext cx="3290400" cy="2741760"/>
           </a:xfrm>
           <a:prstGeom prst="roundRect">
             <a:avLst>
@@ -4199,7 +4200,7 @@
         <p:spPr>
           <a:xfrm>
             <a:off x="4507920" y="3182040"/>
-            <a:ext cx="3290760" cy="2742120"/>
+            <a:ext cx="3290400" cy="2741760"/>
           </a:xfrm>
           <a:prstGeom prst="roundRect">
             <a:avLst>
@@ -4261,7 +4262,7 @@
         <p:spPr>
           <a:xfrm>
             <a:off x="4434840" y="3108960"/>
-            <a:ext cx="3290760" cy="2742120"/>
+            <a:ext cx="3290400" cy="2741760"/>
           </a:xfrm>
           <a:prstGeom prst="roundRect">
             <a:avLst>
@@ -4519,7 +4520,7 @@
         <p:spPr>
           <a:xfrm>
             <a:off x="8028360" y="3182040"/>
-            <a:ext cx="3290760" cy="2742120"/>
+            <a:ext cx="3290400" cy="2741760"/>
           </a:xfrm>
           <a:prstGeom prst="roundRect">
             <a:avLst>
@@ -4581,7 +4582,7 @@
         <p:spPr>
           <a:xfrm>
             <a:off x="7955280" y="2971800"/>
-            <a:ext cx="3931920" cy="3657600"/>
+            <a:ext cx="3931560" cy="3657240"/>
           </a:xfrm>
           <a:prstGeom prst="roundRect">
             <a:avLst>
@@ -5002,6 +5003,2151 @@
       <p:sp>
         <p:nvSpPr>
           <p:cNvPr id="64" name="TextBox 26"/>
+          <p:cNvSpPr/>
+          <p:nvPr/>
+        </p:nvSpPr>
+        <p:spPr>
+          <a:xfrm>
+            <a:off x="4600080" y="6446520"/>
+            <a:ext cx="3051360" cy="363960"/>
+          </a:xfrm>
+          <a:prstGeom prst="rect">
+            <a:avLst/>
+          </a:prstGeom>
+          <a:noFill/>
+          <a:ln w="0">
+            <a:noFill/>
+          </a:ln>
+        </p:spPr>
+        <p:style>
+          <a:lnRef idx="0"/>
+          <a:fillRef idx="0"/>
+          <a:effectRef idx="0"/>
+          <a:fontRef idx="minor"/>
+        </p:style>
+        <p:txBody>
+          <a:bodyPr wrap="none" lIns="90000" rIns="90000" tIns="45000" bIns="45000" anchor="t">
+            <a:spAutoFit/>
+          </a:bodyPr>
+          <a:p>
+            <a:pPr>
+              <a:lnSpc>
+                <a:spcPct val="100000"/>
+              </a:lnSpc>
+            </a:pPr>
+            <a:r>
+              <a:rPr b="0" lang="en-US" sz="1800" spc="-1" strike="noStrike">
+                <a:solidFill>
+                  <a:srgbClr val="000000"/>
+                </a:solidFill>
+                <a:latin typeface="Calibri"/>
+                <a:ea typeface="DejaVu Sans"/>
+              </a:rPr>
+              <a:t>Java • Ultra Premium Template</a:t>
+            </a:r>
+            <a:endParaRPr b="0" lang="en-US" sz="1800" spc="-1" strike="noStrike">
+              <a:solidFill>
+                <a:srgbClr val="000000"/>
+              </a:solidFill>
+              <a:latin typeface="Arial"/>
+            </a:endParaRPr>
+          </a:p>
+        </p:txBody>
+      </p:sp>
+    </p:spTree>
+  </p:cSld>
+  <mc:AlternateContent>
+    <mc:Choice Requires="p14">
+      <p:transition spd="slow" p14:dur="2000"/>
+    </mc:Choice>
+    <mc:Fallback>
+      <p:transition spd="slow"/>
+    </mc:Fallback>
+  </mc:AlternateContent>
+</p:sld>
+</file>
+
+<file path=ppt/slides/slide2.xml><?xml version="1.0" encoding="utf-8"?>
+<p:sld xmlns:a="http://schemas.openxmlformats.org/drawingml/2006/main" xmlns:p="http://schemas.openxmlformats.org/presentationml/2006/main" xmlns:r="http://schemas.openxmlformats.org/officeDocument/2006/relationships" xmlns:p14="http://schemas.microsoft.com/office/powerpoint/2010/main" xmlns:p15="http://schemas.microsoft.com/office/powerpoint/2012/main" xmlns:mc="http://schemas.openxmlformats.org/markup-compatibility/2006">
+  <p:cSld>
+    <p:spTree>
+      <p:nvGrpSpPr>
+        <p:cNvPr id="1" name=""/>
+        <p:cNvGrpSpPr/>
+        <p:nvPr/>
+      </p:nvGrpSpPr>
+      <p:grpSpPr>
+        <a:xfrm>
+          <a:off x="0" y="0"/>
+          <a:ext cx="0" cy="0"/>
+          <a:chOff x="0" y="0"/>
+          <a:chExt cx="0" cy="0"/>
+        </a:xfrm>
+      </p:grpSpPr>
+      <p:sp>
+        <p:nvSpPr>
+          <p:cNvPr id="65" name="Rectangle 32"/>
+          <p:cNvSpPr/>
+          <p:nvPr/>
+        </p:nvSpPr>
+        <p:spPr>
+          <a:xfrm>
+            <a:off x="0" y="0"/>
+            <a:ext cx="12187800" cy="6856920"/>
+          </a:xfrm>
+          <a:prstGeom prst="rect">
+            <a:avLst/>
+          </a:prstGeom>
+          <a:solidFill>
+            <a:srgbClr val="0b0b0d"/>
+          </a:solidFill>
+          <a:ln>
+            <a:noFill/>
+          </a:ln>
+          <a:effectLst>
+            <a:outerShdw blurRad="39960" dir="5400000" dist="23040" rotWithShape="0">
+              <a:srgbClr val="000000">
+                <a:alpha val="35000"/>
+              </a:srgbClr>
+            </a:outerShdw>
+          </a:effectLst>
+        </p:spPr>
+        <p:style>
+          <a:lnRef idx="1">
+            <a:schemeClr val="accent1"/>
+          </a:lnRef>
+          <a:fillRef idx="3">
+            <a:schemeClr val="accent1"/>
+          </a:fillRef>
+          <a:effectRef idx="2">
+            <a:schemeClr val="accent1"/>
+          </a:effectRef>
+          <a:fontRef idx="minor"/>
+        </p:style>
+        <p:txBody>
+          <a:bodyPr lIns="90000" rIns="90000" tIns="45000" bIns="45000" anchor="ctr">
+            <a:noAutofit/>
+          </a:bodyPr>
+          <a:p>
+            <a:endParaRPr b="0" lang="en-US" sz="1800" spc="-1" strike="noStrike">
+              <a:solidFill>
+                <a:schemeClr val="lt1"/>
+              </a:solidFill>
+              <a:latin typeface="Calibri"/>
+              <a:ea typeface="DejaVu Sans"/>
+            </a:endParaRPr>
+          </a:p>
+        </p:txBody>
+      </p:sp>
+      <p:sp>
+        <p:nvSpPr>
+          <p:cNvPr id="66" name="Rectangle 33"/>
+          <p:cNvSpPr/>
+          <p:nvPr/>
+        </p:nvSpPr>
+        <p:spPr>
+          <a:xfrm>
+            <a:off x="0" y="0"/>
+            <a:ext cx="17280" cy="6856920"/>
+          </a:xfrm>
+          <a:prstGeom prst="rect">
+            <a:avLst/>
+          </a:prstGeom>
+          <a:solidFill>
+            <a:srgbClr val="121216"/>
+          </a:solidFill>
+          <a:ln>
+            <a:noFill/>
+          </a:ln>
+          <a:effectLst>
+            <a:outerShdw blurRad="39960" dir="5400000" dist="23040" rotWithShape="0">
+              <a:srgbClr val="000000">
+                <a:alpha val="35000"/>
+              </a:srgbClr>
+            </a:outerShdw>
+          </a:effectLst>
+        </p:spPr>
+        <p:style>
+          <a:lnRef idx="1">
+            <a:schemeClr val="accent1"/>
+          </a:lnRef>
+          <a:fillRef idx="3">
+            <a:schemeClr val="accent1"/>
+          </a:fillRef>
+          <a:effectRef idx="2">
+            <a:schemeClr val="accent1"/>
+          </a:effectRef>
+          <a:fontRef idx="minor"/>
+        </p:style>
+        <p:txBody>
+          <a:bodyPr lIns="90000" rIns="90000" tIns="45000" bIns="45000" anchor="ctr">
+            <a:noAutofit/>
+          </a:bodyPr>
+          <a:p>
+            <a:endParaRPr b="0" lang="en-US" sz="1800" spc="-1" strike="noStrike">
+              <a:solidFill>
+                <a:schemeClr val="lt1"/>
+              </a:solidFill>
+              <a:latin typeface="Calibri"/>
+              <a:ea typeface="DejaVu Sans"/>
+            </a:endParaRPr>
+          </a:p>
+        </p:txBody>
+      </p:sp>
+      <p:sp>
+        <p:nvSpPr>
+          <p:cNvPr id="67" name="Rectangle 34"/>
+          <p:cNvSpPr/>
+          <p:nvPr/>
+        </p:nvSpPr>
+        <p:spPr>
+          <a:xfrm>
+            <a:off x="914400" y="0"/>
+            <a:ext cx="17280" cy="6856920"/>
+          </a:xfrm>
+          <a:prstGeom prst="rect">
+            <a:avLst/>
+          </a:prstGeom>
+          <a:solidFill>
+            <a:srgbClr val="121216"/>
+          </a:solidFill>
+          <a:ln>
+            <a:noFill/>
+          </a:ln>
+          <a:effectLst>
+            <a:outerShdw blurRad="39960" dir="5400000" dist="23040" rotWithShape="0">
+              <a:srgbClr val="000000">
+                <a:alpha val="35000"/>
+              </a:srgbClr>
+            </a:outerShdw>
+          </a:effectLst>
+        </p:spPr>
+        <p:style>
+          <a:lnRef idx="1">
+            <a:schemeClr val="accent1"/>
+          </a:lnRef>
+          <a:fillRef idx="3">
+            <a:schemeClr val="accent1"/>
+          </a:fillRef>
+          <a:effectRef idx="2">
+            <a:schemeClr val="accent1"/>
+          </a:effectRef>
+          <a:fontRef idx="minor"/>
+        </p:style>
+        <p:txBody>
+          <a:bodyPr lIns="90000" rIns="90000" tIns="45000" bIns="45000" anchor="ctr">
+            <a:noAutofit/>
+          </a:bodyPr>
+          <a:p>
+            <a:endParaRPr b="0" lang="en-US" sz="1800" spc="-1" strike="noStrike">
+              <a:solidFill>
+                <a:schemeClr val="lt1"/>
+              </a:solidFill>
+              <a:latin typeface="Calibri"/>
+              <a:ea typeface="DejaVu Sans"/>
+            </a:endParaRPr>
+          </a:p>
+        </p:txBody>
+      </p:sp>
+      <p:sp>
+        <p:nvSpPr>
+          <p:cNvPr id="68" name="Rectangle 35"/>
+          <p:cNvSpPr/>
+          <p:nvPr/>
+        </p:nvSpPr>
+        <p:spPr>
+          <a:xfrm>
+            <a:off x="1828800" y="0"/>
+            <a:ext cx="17280" cy="6856920"/>
+          </a:xfrm>
+          <a:prstGeom prst="rect">
+            <a:avLst/>
+          </a:prstGeom>
+          <a:solidFill>
+            <a:srgbClr val="121216"/>
+          </a:solidFill>
+          <a:ln>
+            <a:noFill/>
+          </a:ln>
+          <a:effectLst>
+            <a:outerShdw blurRad="39960" dir="5400000" dist="23040" rotWithShape="0">
+              <a:srgbClr val="000000">
+                <a:alpha val="35000"/>
+              </a:srgbClr>
+            </a:outerShdw>
+          </a:effectLst>
+        </p:spPr>
+        <p:style>
+          <a:lnRef idx="1">
+            <a:schemeClr val="accent1"/>
+          </a:lnRef>
+          <a:fillRef idx="3">
+            <a:schemeClr val="accent1"/>
+          </a:fillRef>
+          <a:effectRef idx="2">
+            <a:schemeClr val="accent1"/>
+          </a:effectRef>
+          <a:fontRef idx="minor"/>
+        </p:style>
+        <p:txBody>
+          <a:bodyPr lIns="90000" rIns="90000" tIns="45000" bIns="45000" anchor="ctr">
+            <a:noAutofit/>
+          </a:bodyPr>
+          <a:p>
+            <a:endParaRPr b="0" lang="en-US" sz="1800" spc="-1" strike="noStrike">
+              <a:solidFill>
+                <a:schemeClr val="lt1"/>
+              </a:solidFill>
+              <a:latin typeface="Calibri"/>
+              <a:ea typeface="DejaVu Sans"/>
+            </a:endParaRPr>
+          </a:p>
+        </p:txBody>
+      </p:sp>
+      <p:sp>
+        <p:nvSpPr>
+          <p:cNvPr id="69" name="Rectangle 36"/>
+          <p:cNvSpPr/>
+          <p:nvPr/>
+        </p:nvSpPr>
+        <p:spPr>
+          <a:xfrm>
+            <a:off x="2743200" y="0"/>
+            <a:ext cx="17280" cy="6856920"/>
+          </a:xfrm>
+          <a:prstGeom prst="rect">
+            <a:avLst/>
+          </a:prstGeom>
+          <a:solidFill>
+            <a:srgbClr val="121216"/>
+          </a:solidFill>
+          <a:ln>
+            <a:noFill/>
+          </a:ln>
+          <a:effectLst>
+            <a:outerShdw blurRad="39960" dir="5400000" dist="23040" rotWithShape="0">
+              <a:srgbClr val="000000">
+                <a:alpha val="35000"/>
+              </a:srgbClr>
+            </a:outerShdw>
+          </a:effectLst>
+        </p:spPr>
+        <p:style>
+          <a:lnRef idx="1">
+            <a:schemeClr val="accent1"/>
+          </a:lnRef>
+          <a:fillRef idx="3">
+            <a:schemeClr val="accent1"/>
+          </a:fillRef>
+          <a:effectRef idx="2">
+            <a:schemeClr val="accent1"/>
+          </a:effectRef>
+          <a:fontRef idx="minor"/>
+        </p:style>
+        <p:txBody>
+          <a:bodyPr lIns="90000" rIns="90000" tIns="45000" bIns="45000" anchor="ctr">
+            <a:noAutofit/>
+          </a:bodyPr>
+          <a:p>
+            <a:endParaRPr b="0" lang="en-US" sz="1800" spc="-1" strike="noStrike">
+              <a:solidFill>
+                <a:schemeClr val="lt1"/>
+              </a:solidFill>
+              <a:latin typeface="Calibri"/>
+              <a:ea typeface="DejaVu Sans"/>
+            </a:endParaRPr>
+          </a:p>
+        </p:txBody>
+      </p:sp>
+      <p:sp>
+        <p:nvSpPr>
+          <p:cNvPr id="70" name="Rectangle 37"/>
+          <p:cNvSpPr/>
+          <p:nvPr/>
+        </p:nvSpPr>
+        <p:spPr>
+          <a:xfrm>
+            <a:off x="3657600" y="0"/>
+            <a:ext cx="17280" cy="6856920"/>
+          </a:xfrm>
+          <a:prstGeom prst="rect">
+            <a:avLst/>
+          </a:prstGeom>
+          <a:solidFill>
+            <a:srgbClr val="121216"/>
+          </a:solidFill>
+          <a:ln>
+            <a:noFill/>
+          </a:ln>
+          <a:effectLst>
+            <a:outerShdw blurRad="39960" dir="5400000" dist="23040" rotWithShape="0">
+              <a:srgbClr val="000000">
+                <a:alpha val="35000"/>
+              </a:srgbClr>
+            </a:outerShdw>
+          </a:effectLst>
+        </p:spPr>
+        <p:style>
+          <a:lnRef idx="1">
+            <a:schemeClr val="accent1"/>
+          </a:lnRef>
+          <a:fillRef idx="3">
+            <a:schemeClr val="accent1"/>
+          </a:fillRef>
+          <a:effectRef idx="2">
+            <a:schemeClr val="accent1"/>
+          </a:effectRef>
+          <a:fontRef idx="minor"/>
+        </p:style>
+        <p:txBody>
+          <a:bodyPr lIns="90000" rIns="90000" tIns="45000" bIns="45000" anchor="ctr">
+            <a:noAutofit/>
+          </a:bodyPr>
+          <a:p>
+            <a:endParaRPr b="0" lang="en-US" sz="1800" spc="-1" strike="noStrike">
+              <a:solidFill>
+                <a:schemeClr val="lt1"/>
+              </a:solidFill>
+              <a:latin typeface="Calibri"/>
+              <a:ea typeface="DejaVu Sans"/>
+            </a:endParaRPr>
+          </a:p>
+        </p:txBody>
+      </p:sp>
+      <p:sp>
+        <p:nvSpPr>
+          <p:cNvPr id="71" name="Rectangle 38"/>
+          <p:cNvSpPr/>
+          <p:nvPr/>
+        </p:nvSpPr>
+        <p:spPr>
+          <a:xfrm>
+            <a:off x="4572000" y="0"/>
+            <a:ext cx="17280" cy="6856920"/>
+          </a:xfrm>
+          <a:prstGeom prst="rect">
+            <a:avLst/>
+          </a:prstGeom>
+          <a:solidFill>
+            <a:srgbClr val="121216"/>
+          </a:solidFill>
+          <a:ln>
+            <a:noFill/>
+          </a:ln>
+          <a:effectLst>
+            <a:outerShdw blurRad="39960" dir="5400000" dist="23040" rotWithShape="0">
+              <a:srgbClr val="000000">
+                <a:alpha val="35000"/>
+              </a:srgbClr>
+            </a:outerShdw>
+          </a:effectLst>
+        </p:spPr>
+        <p:style>
+          <a:lnRef idx="1">
+            <a:schemeClr val="accent1"/>
+          </a:lnRef>
+          <a:fillRef idx="3">
+            <a:schemeClr val="accent1"/>
+          </a:fillRef>
+          <a:effectRef idx="2">
+            <a:schemeClr val="accent1"/>
+          </a:effectRef>
+          <a:fontRef idx="minor"/>
+        </p:style>
+        <p:txBody>
+          <a:bodyPr lIns="90000" rIns="90000" tIns="45000" bIns="45000" anchor="ctr">
+            <a:noAutofit/>
+          </a:bodyPr>
+          <a:p>
+            <a:endParaRPr b="0" lang="en-US" sz="1800" spc="-1" strike="noStrike">
+              <a:solidFill>
+                <a:schemeClr val="lt1"/>
+              </a:solidFill>
+              <a:latin typeface="Calibri"/>
+              <a:ea typeface="DejaVu Sans"/>
+            </a:endParaRPr>
+          </a:p>
+        </p:txBody>
+      </p:sp>
+      <p:sp>
+        <p:nvSpPr>
+          <p:cNvPr id="72" name="Rectangle 39"/>
+          <p:cNvSpPr/>
+          <p:nvPr/>
+        </p:nvSpPr>
+        <p:spPr>
+          <a:xfrm>
+            <a:off x="5486400" y="0"/>
+            <a:ext cx="17280" cy="6856920"/>
+          </a:xfrm>
+          <a:prstGeom prst="rect">
+            <a:avLst/>
+          </a:prstGeom>
+          <a:solidFill>
+            <a:srgbClr val="121216"/>
+          </a:solidFill>
+          <a:ln>
+            <a:noFill/>
+          </a:ln>
+          <a:effectLst>
+            <a:outerShdw blurRad="39960" dir="5400000" dist="23040" rotWithShape="0">
+              <a:srgbClr val="000000">
+                <a:alpha val="35000"/>
+              </a:srgbClr>
+            </a:outerShdw>
+          </a:effectLst>
+        </p:spPr>
+        <p:style>
+          <a:lnRef idx="1">
+            <a:schemeClr val="accent1"/>
+          </a:lnRef>
+          <a:fillRef idx="3">
+            <a:schemeClr val="accent1"/>
+          </a:fillRef>
+          <a:effectRef idx="2">
+            <a:schemeClr val="accent1"/>
+          </a:effectRef>
+          <a:fontRef idx="minor"/>
+        </p:style>
+        <p:txBody>
+          <a:bodyPr lIns="90000" rIns="90000" tIns="45000" bIns="45000" anchor="ctr">
+            <a:noAutofit/>
+          </a:bodyPr>
+          <a:p>
+            <a:endParaRPr b="0" lang="en-US" sz="1800" spc="-1" strike="noStrike">
+              <a:solidFill>
+                <a:schemeClr val="lt1"/>
+              </a:solidFill>
+              <a:latin typeface="Calibri"/>
+              <a:ea typeface="DejaVu Sans"/>
+            </a:endParaRPr>
+          </a:p>
+        </p:txBody>
+      </p:sp>
+      <p:sp>
+        <p:nvSpPr>
+          <p:cNvPr id="73" name="Rectangle 40"/>
+          <p:cNvSpPr/>
+          <p:nvPr/>
+        </p:nvSpPr>
+        <p:spPr>
+          <a:xfrm>
+            <a:off x="6400800" y="0"/>
+            <a:ext cx="17280" cy="6856920"/>
+          </a:xfrm>
+          <a:prstGeom prst="rect">
+            <a:avLst/>
+          </a:prstGeom>
+          <a:solidFill>
+            <a:srgbClr val="121216"/>
+          </a:solidFill>
+          <a:ln>
+            <a:noFill/>
+          </a:ln>
+          <a:effectLst>
+            <a:outerShdw blurRad="39960" dir="5400000" dist="23040" rotWithShape="0">
+              <a:srgbClr val="000000">
+                <a:alpha val="35000"/>
+              </a:srgbClr>
+            </a:outerShdw>
+          </a:effectLst>
+        </p:spPr>
+        <p:style>
+          <a:lnRef idx="1">
+            <a:schemeClr val="accent1"/>
+          </a:lnRef>
+          <a:fillRef idx="3">
+            <a:schemeClr val="accent1"/>
+          </a:fillRef>
+          <a:effectRef idx="2">
+            <a:schemeClr val="accent1"/>
+          </a:effectRef>
+          <a:fontRef idx="minor"/>
+        </p:style>
+        <p:txBody>
+          <a:bodyPr lIns="90000" rIns="90000" tIns="45000" bIns="45000" anchor="ctr">
+            <a:noAutofit/>
+          </a:bodyPr>
+          <a:p>
+            <a:endParaRPr b="0" lang="en-US" sz="1800" spc="-1" strike="noStrike">
+              <a:solidFill>
+                <a:schemeClr val="lt1"/>
+              </a:solidFill>
+              <a:latin typeface="Calibri"/>
+              <a:ea typeface="DejaVu Sans"/>
+            </a:endParaRPr>
+          </a:p>
+        </p:txBody>
+      </p:sp>
+      <p:sp>
+        <p:nvSpPr>
+          <p:cNvPr id="74" name="Rectangle 41"/>
+          <p:cNvSpPr/>
+          <p:nvPr/>
+        </p:nvSpPr>
+        <p:spPr>
+          <a:xfrm>
+            <a:off x="7315200" y="0"/>
+            <a:ext cx="17280" cy="6856920"/>
+          </a:xfrm>
+          <a:prstGeom prst="rect">
+            <a:avLst/>
+          </a:prstGeom>
+          <a:solidFill>
+            <a:srgbClr val="121216"/>
+          </a:solidFill>
+          <a:ln>
+            <a:noFill/>
+          </a:ln>
+          <a:effectLst>
+            <a:outerShdw blurRad="39960" dir="5400000" dist="23040" rotWithShape="0">
+              <a:srgbClr val="000000">
+                <a:alpha val="35000"/>
+              </a:srgbClr>
+            </a:outerShdw>
+          </a:effectLst>
+        </p:spPr>
+        <p:style>
+          <a:lnRef idx="1">
+            <a:schemeClr val="accent1"/>
+          </a:lnRef>
+          <a:fillRef idx="3">
+            <a:schemeClr val="accent1"/>
+          </a:fillRef>
+          <a:effectRef idx="2">
+            <a:schemeClr val="accent1"/>
+          </a:effectRef>
+          <a:fontRef idx="minor"/>
+        </p:style>
+        <p:txBody>
+          <a:bodyPr lIns="90000" rIns="90000" tIns="45000" bIns="45000" anchor="ctr">
+            <a:noAutofit/>
+          </a:bodyPr>
+          <a:p>
+            <a:endParaRPr b="0" lang="en-US" sz="1800" spc="-1" strike="noStrike">
+              <a:solidFill>
+                <a:schemeClr val="lt1"/>
+              </a:solidFill>
+              <a:latin typeface="Calibri"/>
+              <a:ea typeface="DejaVu Sans"/>
+            </a:endParaRPr>
+          </a:p>
+        </p:txBody>
+      </p:sp>
+      <p:sp>
+        <p:nvSpPr>
+          <p:cNvPr id="75" name="Rectangle 42"/>
+          <p:cNvSpPr/>
+          <p:nvPr/>
+        </p:nvSpPr>
+        <p:spPr>
+          <a:xfrm>
+            <a:off x="8229600" y="0"/>
+            <a:ext cx="17280" cy="6856920"/>
+          </a:xfrm>
+          <a:prstGeom prst="rect">
+            <a:avLst/>
+          </a:prstGeom>
+          <a:solidFill>
+            <a:srgbClr val="121216"/>
+          </a:solidFill>
+          <a:ln>
+            <a:noFill/>
+          </a:ln>
+          <a:effectLst>
+            <a:outerShdw blurRad="39960" dir="5400000" dist="23040" rotWithShape="0">
+              <a:srgbClr val="000000">
+                <a:alpha val="35000"/>
+              </a:srgbClr>
+            </a:outerShdw>
+          </a:effectLst>
+        </p:spPr>
+        <p:style>
+          <a:lnRef idx="1">
+            <a:schemeClr val="accent1"/>
+          </a:lnRef>
+          <a:fillRef idx="3">
+            <a:schemeClr val="accent1"/>
+          </a:fillRef>
+          <a:effectRef idx="2">
+            <a:schemeClr val="accent1"/>
+          </a:effectRef>
+          <a:fontRef idx="minor"/>
+        </p:style>
+        <p:txBody>
+          <a:bodyPr lIns="90000" rIns="90000" tIns="45000" bIns="45000" anchor="ctr">
+            <a:noAutofit/>
+          </a:bodyPr>
+          <a:p>
+            <a:endParaRPr b="0" lang="en-US" sz="1800" spc="-1" strike="noStrike">
+              <a:solidFill>
+                <a:schemeClr val="lt1"/>
+              </a:solidFill>
+              <a:latin typeface="Calibri"/>
+              <a:ea typeface="DejaVu Sans"/>
+            </a:endParaRPr>
+          </a:p>
+        </p:txBody>
+      </p:sp>
+      <p:sp>
+        <p:nvSpPr>
+          <p:cNvPr id="76" name="Rectangle 43"/>
+          <p:cNvSpPr/>
+          <p:nvPr/>
+        </p:nvSpPr>
+        <p:spPr>
+          <a:xfrm>
+            <a:off x="9144000" y="0"/>
+            <a:ext cx="17280" cy="6856920"/>
+          </a:xfrm>
+          <a:prstGeom prst="rect">
+            <a:avLst/>
+          </a:prstGeom>
+          <a:solidFill>
+            <a:srgbClr val="121216"/>
+          </a:solidFill>
+          <a:ln>
+            <a:noFill/>
+          </a:ln>
+          <a:effectLst>
+            <a:outerShdw blurRad="39960" dir="5400000" dist="23040" rotWithShape="0">
+              <a:srgbClr val="000000">
+                <a:alpha val="35000"/>
+              </a:srgbClr>
+            </a:outerShdw>
+          </a:effectLst>
+        </p:spPr>
+        <p:style>
+          <a:lnRef idx="1">
+            <a:schemeClr val="accent1"/>
+          </a:lnRef>
+          <a:fillRef idx="3">
+            <a:schemeClr val="accent1"/>
+          </a:fillRef>
+          <a:effectRef idx="2">
+            <a:schemeClr val="accent1"/>
+          </a:effectRef>
+          <a:fontRef idx="minor"/>
+        </p:style>
+        <p:txBody>
+          <a:bodyPr lIns="90000" rIns="90000" tIns="45000" bIns="45000" anchor="ctr">
+            <a:noAutofit/>
+          </a:bodyPr>
+          <a:p>
+            <a:endParaRPr b="0" lang="en-US" sz="1800" spc="-1" strike="noStrike">
+              <a:solidFill>
+                <a:schemeClr val="lt1"/>
+              </a:solidFill>
+              <a:latin typeface="Calibri"/>
+              <a:ea typeface="DejaVu Sans"/>
+            </a:endParaRPr>
+          </a:p>
+        </p:txBody>
+      </p:sp>
+      <p:sp>
+        <p:nvSpPr>
+          <p:cNvPr id="77" name="Rectangle 44"/>
+          <p:cNvSpPr/>
+          <p:nvPr/>
+        </p:nvSpPr>
+        <p:spPr>
+          <a:xfrm>
+            <a:off x="10058400" y="0"/>
+            <a:ext cx="17280" cy="6856920"/>
+          </a:xfrm>
+          <a:prstGeom prst="rect">
+            <a:avLst/>
+          </a:prstGeom>
+          <a:solidFill>
+            <a:srgbClr val="121216"/>
+          </a:solidFill>
+          <a:ln>
+            <a:noFill/>
+          </a:ln>
+          <a:effectLst>
+            <a:outerShdw blurRad="39960" dir="5400000" dist="23040" rotWithShape="0">
+              <a:srgbClr val="000000">
+                <a:alpha val="35000"/>
+              </a:srgbClr>
+            </a:outerShdw>
+          </a:effectLst>
+        </p:spPr>
+        <p:style>
+          <a:lnRef idx="1">
+            <a:schemeClr val="accent1"/>
+          </a:lnRef>
+          <a:fillRef idx="3">
+            <a:schemeClr val="accent1"/>
+          </a:fillRef>
+          <a:effectRef idx="2">
+            <a:schemeClr val="accent1"/>
+          </a:effectRef>
+          <a:fontRef idx="minor"/>
+        </p:style>
+        <p:txBody>
+          <a:bodyPr lIns="90000" rIns="90000" tIns="45000" bIns="45000" anchor="ctr">
+            <a:noAutofit/>
+          </a:bodyPr>
+          <a:p>
+            <a:endParaRPr b="0" lang="en-US" sz="1800" spc="-1" strike="noStrike">
+              <a:solidFill>
+                <a:schemeClr val="lt1"/>
+              </a:solidFill>
+              <a:latin typeface="Calibri"/>
+              <a:ea typeface="DejaVu Sans"/>
+            </a:endParaRPr>
+          </a:p>
+        </p:txBody>
+      </p:sp>
+      <p:sp>
+        <p:nvSpPr>
+          <p:cNvPr id="78" name="Rectangle 45"/>
+          <p:cNvSpPr/>
+          <p:nvPr/>
+        </p:nvSpPr>
+        <p:spPr>
+          <a:xfrm>
+            <a:off x="10972800" y="0"/>
+            <a:ext cx="17280" cy="6856920"/>
+          </a:xfrm>
+          <a:prstGeom prst="rect">
+            <a:avLst/>
+          </a:prstGeom>
+          <a:solidFill>
+            <a:srgbClr val="121216"/>
+          </a:solidFill>
+          <a:ln>
+            <a:noFill/>
+          </a:ln>
+          <a:effectLst>
+            <a:outerShdw blurRad="39960" dir="5400000" dist="23040" rotWithShape="0">
+              <a:srgbClr val="000000">
+                <a:alpha val="35000"/>
+              </a:srgbClr>
+            </a:outerShdw>
+          </a:effectLst>
+        </p:spPr>
+        <p:style>
+          <a:lnRef idx="1">
+            <a:schemeClr val="accent1"/>
+          </a:lnRef>
+          <a:fillRef idx="3">
+            <a:schemeClr val="accent1"/>
+          </a:fillRef>
+          <a:effectRef idx="2">
+            <a:schemeClr val="accent1"/>
+          </a:effectRef>
+          <a:fontRef idx="minor"/>
+        </p:style>
+        <p:txBody>
+          <a:bodyPr lIns="90000" rIns="90000" tIns="45000" bIns="45000" anchor="ctr">
+            <a:noAutofit/>
+          </a:bodyPr>
+          <a:p>
+            <a:endParaRPr b="0" lang="en-US" sz="1800" spc="-1" strike="noStrike">
+              <a:solidFill>
+                <a:schemeClr val="lt1"/>
+              </a:solidFill>
+              <a:latin typeface="Calibri"/>
+              <a:ea typeface="DejaVu Sans"/>
+            </a:endParaRPr>
+          </a:p>
+        </p:txBody>
+      </p:sp>
+      <p:sp>
+        <p:nvSpPr>
+          <p:cNvPr id="79" name="Rectangle 46"/>
+          <p:cNvSpPr/>
+          <p:nvPr/>
+        </p:nvSpPr>
+        <p:spPr>
+          <a:xfrm>
+            <a:off x="11887200" y="0"/>
+            <a:ext cx="17280" cy="6856920"/>
+          </a:xfrm>
+          <a:prstGeom prst="rect">
+            <a:avLst/>
+          </a:prstGeom>
+          <a:solidFill>
+            <a:srgbClr val="121216"/>
+          </a:solidFill>
+          <a:ln>
+            <a:noFill/>
+          </a:ln>
+          <a:effectLst>
+            <a:outerShdw blurRad="39960" dir="5400000" dist="23040" rotWithShape="0">
+              <a:srgbClr val="000000">
+                <a:alpha val="35000"/>
+              </a:srgbClr>
+            </a:outerShdw>
+          </a:effectLst>
+        </p:spPr>
+        <p:style>
+          <a:lnRef idx="1">
+            <a:schemeClr val="accent1"/>
+          </a:lnRef>
+          <a:fillRef idx="3">
+            <a:schemeClr val="accent1"/>
+          </a:fillRef>
+          <a:effectRef idx="2">
+            <a:schemeClr val="accent1"/>
+          </a:effectRef>
+          <a:fontRef idx="minor"/>
+        </p:style>
+        <p:txBody>
+          <a:bodyPr lIns="90000" rIns="90000" tIns="45000" bIns="45000" anchor="ctr">
+            <a:noAutofit/>
+          </a:bodyPr>
+          <a:p>
+            <a:endParaRPr b="0" lang="en-US" sz="1800" spc="-1" strike="noStrike">
+              <a:solidFill>
+                <a:schemeClr val="lt1"/>
+              </a:solidFill>
+              <a:latin typeface="Calibri"/>
+              <a:ea typeface="DejaVu Sans"/>
+            </a:endParaRPr>
+          </a:p>
+        </p:txBody>
+      </p:sp>
+      <p:sp>
+        <p:nvSpPr>
+          <p:cNvPr id="80" name="Rectangle 47"/>
+          <p:cNvSpPr/>
+          <p:nvPr/>
+        </p:nvSpPr>
+        <p:spPr>
+          <a:xfrm>
+            <a:off x="0" y="0"/>
+            <a:ext cx="318960" cy="6856920"/>
+          </a:xfrm>
+          <a:prstGeom prst="rect">
+            <a:avLst/>
+          </a:prstGeom>
+          <a:solidFill>
+            <a:srgbClr val="ff8c00"/>
+          </a:solidFill>
+          <a:ln>
+            <a:noFill/>
+          </a:ln>
+          <a:effectLst>
+            <a:outerShdw blurRad="39960" dir="5400000" dist="23040" rotWithShape="0">
+              <a:srgbClr val="000000">
+                <a:alpha val="35000"/>
+              </a:srgbClr>
+            </a:outerShdw>
+          </a:effectLst>
+        </p:spPr>
+        <p:style>
+          <a:lnRef idx="1">
+            <a:schemeClr val="accent1"/>
+          </a:lnRef>
+          <a:fillRef idx="3">
+            <a:schemeClr val="accent1"/>
+          </a:fillRef>
+          <a:effectRef idx="2">
+            <a:schemeClr val="accent1"/>
+          </a:effectRef>
+          <a:fontRef idx="minor"/>
+        </p:style>
+        <p:txBody>
+          <a:bodyPr lIns="90000" rIns="90000" tIns="45000" bIns="45000" anchor="ctr">
+            <a:noAutofit/>
+          </a:bodyPr>
+          <a:p>
+            <a:endParaRPr b="0" lang="en-US" sz="1800" spc="-1" strike="noStrike">
+              <a:solidFill>
+                <a:schemeClr val="lt1"/>
+              </a:solidFill>
+              <a:latin typeface="Calibri"/>
+              <a:ea typeface="DejaVu Sans"/>
+            </a:endParaRPr>
+          </a:p>
+        </p:txBody>
+      </p:sp>
+      <p:sp>
+        <p:nvSpPr>
+          <p:cNvPr id="81" name="Rounded Rectangle 8"/>
+          <p:cNvSpPr/>
+          <p:nvPr/>
+        </p:nvSpPr>
+        <p:spPr>
+          <a:xfrm>
+            <a:off x="9875520" y="365760"/>
+            <a:ext cx="2010600" cy="501840"/>
+          </a:xfrm>
+          <a:prstGeom prst="roundRect">
+            <a:avLst>
+              <a:gd name="adj" fmla="val 16667"/>
+            </a:avLst>
+          </a:prstGeom>
+          <a:solidFill>
+            <a:srgbClr val="1e1e24"/>
+          </a:solidFill>
+          <a:ln>
+            <a:solidFill>
+              <a:srgbClr val="ff8c00"/>
+            </a:solidFill>
+            <a:round/>
+          </a:ln>
+          <a:effectLst>
+            <a:outerShdw blurRad="39960" dir="5400000" dist="23040" rotWithShape="0">
+              <a:srgbClr val="000000">
+                <a:alpha val="35000"/>
+              </a:srgbClr>
+            </a:outerShdw>
+          </a:effectLst>
+        </p:spPr>
+        <p:style>
+          <a:lnRef idx="1">
+            <a:schemeClr val="accent1"/>
+          </a:lnRef>
+          <a:fillRef idx="3">
+            <a:schemeClr val="accent1"/>
+          </a:fillRef>
+          <a:effectRef idx="2">
+            <a:schemeClr val="accent1"/>
+          </a:effectRef>
+          <a:fontRef idx="minor"/>
+        </p:style>
+        <p:txBody>
+          <a:bodyPr lIns="90000" rIns="90000" tIns="45000" bIns="45000" anchor="ctr">
+            <a:noAutofit/>
+          </a:bodyPr>
+          <a:p>
+            <a:pPr algn="ctr">
+              <a:lnSpc>
+                <a:spcPct val="100000"/>
+              </a:lnSpc>
+            </a:pPr>
+            <a:r>
+              <a:rPr b="1" lang="en-US" sz="1400" spc="-1" strike="noStrike">
+                <a:solidFill>
+                  <a:srgbClr val="ffb45a"/>
+                </a:solidFill>
+                <a:latin typeface="Calibri"/>
+                <a:ea typeface="DejaVu Sans"/>
+              </a:rPr>
+              <a:t>JAVA TEMELLERI</a:t>
+            </a:r>
+            <a:endParaRPr b="0" lang="en-US" sz="1400" spc="-1" strike="noStrike">
+              <a:solidFill>
+                <a:srgbClr val="ffffff"/>
+              </a:solidFill>
+              <a:latin typeface="Arial"/>
+            </a:endParaRPr>
+          </a:p>
+        </p:txBody>
+      </p:sp>
+      <p:sp>
+        <p:nvSpPr>
+          <p:cNvPr id="82" name="TextBox 4"/>
+          <p:cNvSpPr/>
+          <p:nvPr/>
+        </p:nvSpPr>
+        <p:spPr>
+          <a:xfrm>
+            <a:off x="723240" y="914400"/>
+            <a:ext cx="9524880" cy="639000"/>
+          </a:xfrm>
+          <a:prstGeom prst="rect">
+            <a:avLst/>
+          </a:prstGeom>
+          <a:noFill/>
+          <a:ln w="0">
+            <a:noFill/>
+          </a:ln>
+        </p:spPr>
+        <p:style>
+          <a:lnRef idx="0"/>
+          <a:fillRef idx="0"/>
+          <a:effectRef idx="0"/>
+          <a:fontRef idx="minor"/>
+        </p:style>
+        <p:txBody>
+          <a:bodyPr wrap="none" lIns="90000" rIns="90000" tIns="45000" bIns="45000" anchor="t">
+            <a:spAutoFit/>
+          </a:bodyPr>
+          <a:p>
+            <a:pPr>
+              <a:lnSpc>
+                <a:spcPct val="100000"/>
+              </a:lnSpc>
+            </a:pPr>
+            <a:r>
+              <a:rPr b="1" lang="en-US" sz="3600" spc="-1" strike="noStrike">
+                <a:solidFill>
+                  <a:srgbClr val="f5f5f5"/>
+                </a:solidFill>
+                <a:latin typeface="Calibri"/>
+                <a:ea typeface="DejaVu Sans"/>
+              </a:rPr>
+              <a:t>Java’da Saat Dilimi (Timezone) ve Bölgesel Zaman</a:t>
+            </a:r>
+            <a:endParaRPr b="0" lang="en-US" sz="3600" spc="-1" strike="noStrike">
+              <a:solidFill>
+                <a:srgbClr val="000000"/>
+              </a:solidFill>
+              <a:latin typeface="Arial"/>
+            </a:endParaRPr>
+          </a:p>
+        </p:txBody>
+      </p:sp>
+      <p:sp>
+        <p:nvSpPr>
+          <p:cNvPr id="83" name="TextBox 5"/>
+          <p:cNvSpPr/>
+          <p:nvPr/>
+        </p:nvSpPr>
+        <p:spPr>
+          <a:xfrm>
+            <a:off x="1778760" y="1828800"/>
+            <a:ext cx="7932240" cy="819720"/>
+          </a:xfrm>
+          <a:prstGeom prst="rect">
+            <a:avLst/>
+          </a:prstGeom>
+          <a:noFill/>
+          <a:ln w="0">
+            <a:noFill/>
+          </a:ln>
+        </p:spPr>
+        <p:style>
+          <a:lnRef idx="0"/>
+          <a:fillRef idx="0"/>
+          <a:effectRef idx="0"/>
+          <a:fontRef idx="minor"/>
+        </p:style>
+        <p:txBody>
+          <a:bodyPr wrap="none" lIns="90000" rIns="90000" tIns="45000" bIns="45000" anchor="t">
+            <a:spAutoFit/>
+          </a:bodyPr>
+          <a:p>
+            <a:pPr>
+              <a:lnSpc>
+                <a:spcPct val="100000"/>
+              </a:lnSpc>
+            </a:pPr>
+            <a:r>
+              <a:rPr b="0" lang="en-US" sz="1600" spc="-1" strike="noStrike">
+                <a:solidFill>
+                  <a:srgbClr val="aaaaaa"/>
+                </a:solidFill>
+                <a:latin typeface="Calibri"/>
+                <a:ea typeface="DejaVu Sans"/>
+              </a:rPr>
+              <a:t>Java’da saat dilimi yönetimi, farklı bölgelerin zamanını doğru şekilde hesaplamak için kullanılır. </a:t>
+            </a:r>
+            <a:endParaRPr b="0" lang="en-US" sz="1600" spc="-1" strike="noStrike">
+              <a:solidFill>
+                <a:srgbClr val="000000"/>
+              </a:solidFill>
+              <a:latin typeface="Arial"/>
+            </a:endParaRPr>
+          </a:p>
+          <a:p>
+            <a:pPr>
+              <a:lnSpc>
+                <a:spcPct val="100000"/>
+              </a:lnSpc>
+            </a:pPr>
+            <a:r>
+              <a:rPr b="0" lang="en-US" sz="1600" spc="-1" strike="noStrike">
+                <a:solidFill>
+                  <a:srgbClr val="aaaaaa"/>
+                </a:solidFill>
+                <a:latin typeface="Calibri"/>
+                <a:ea typeface="DejaVu Sans"/>
+              </a:rPr>
+              <a:t>ZoneId ile bölge seçilir, ZonedDateTime ile o bölgenin güncel tarih ve saati </a:t>
+            </a:r>
+            <a:endParaRPr b="0" lang="en-US" sz="1600" spc="-1" strike="noStrike">
+              <a:solidFill>
+                <a:srgbClr val="000000"/>
+              </a:solidFill>
+              <a:latin typeface="Arial"/>
+            </a:endParaRPr>
+          </a:p>
+          <a:p>
+            <a:pPr>
+              <a:lnSpc>
+                <a:spcPct val="100000"/>
+              </a:lnSpc>
+            </a:pPr>
+            <a:r>
+              <a:rPr b="0" lang="en-US" sz="1600" spc="-1" strike="noStrike">
+                <a:solidFill>
+                  <a:srgbClr val="aaaaaa"/>
+                </a:solidFill>
+                <a:latin typeface="Calibri"/>
+                <a:ea typeface="DejaVu Sans"/>
+              </a:rPr>
+              <a:t>alınır. Bu yapı sayesinde global uygulamalarda her kullanıcıya doğru zaman gösterilir.</a:t>
+            </a:r>
+            <a:endParaRPr b="0" lang="en-US" sz="1600" spc="-1" strike="noStrike">
+              <a:solidFill>
+                <a:srgbClr val="000000"/>
+              </a:solidFill>
+              <a:latin typeface="Arial"/>
+            </a:endParaRPr>
+          </a:p>
+        </p:txBody>
+      </p:sp>
+      <p:sp>
+        <p:nvSpPr>
+          <p:cNvPr id="84" name="Rounded Rectangle 9"/>
+          <p:cNvSpPr/>
+          <p:nvPr/>
+        </p:nvSpPr>
+        <p:spPr>
+          <a:xfrm>
+            <a:off x="987480" y="3182040"/>
+            <a:ext cx="3290760" cy="2742120"/>
+          </a:xfrm>
+          <a:prstGeom prst="roundRect">
+            <a:avLst>
+              <a:gd name="adj" fmla="val 16667"/>
+            </a:avLst>
+          </a:prstGeom>
+          <a:solidFill>
+            <a:srgbClr val="08080a"/>
+          </a:solidFill>
+          <a:ln>
+            <a:noFill/>
+          </a:ln>
+          <a:effectLst>
+            <a:outerShdw blurRad="39960" dir="5400000" dist="23040" rotWithShape="0">
+              <a:srgbClr val="000000">
+                <a:alpha val="35000"/>
+              </a:srgbClr>
+            </a:outerShdw>
+          </a:effectLst>
+        </p:spPr>
+        <p:style>
+          <a:lnRef idx="1">
+            <a:schemeClr val="accent1"/>
+          </a:lnRef>
+          <a:fillRef idx="3">
+            <a:schemeClr val="accent1"/>
+          </a:fillRef>
+          <a:effectRef idx="2">
+            <a:schemeClr val="accent1"/>
+          </a:effectRef>
+          <a:fontRef idx="minor"/>
+        </p:style>
+        <p:txBody>
+          <a:bodyPr lIns="90000" rIns="90000" tIns="45000" bIns="45000" anchor="ctr">
+            <a:noAutofit/>
+          </a:bodyPr>
+          <a:p>
+            <a:endParaRPr b="0" lang="en-US" sz="1800" spc="-1" strike="noStrike">
+              <a:solidFill>
+                <a:schemeClr val="lt1"/>
+              </a:solidFill>
+              <a:latin typeface="Calibri"/>
+              <a:ea typeface="DejaVu Sans"/>
+            </a:endParaRPr>
+          </a:p>
+        </p:txBody>
+      </p:sp>
+      <p:sp>
+        <p:nvSpPr>
+          <p:cNvPr id="85" name="Rounded Rectangle 10"/>
+          <p:cNvSpPr/>
+          <p:nvPr/>
+        </p:nvSpPr>
+        <p:spPr>
+          <a:xfrm>
+            <a:off x="914400" y="3108960"/>
+            <a:ext cx="3290760" cy="2742120"/>
+          </a:xfrm>
+          <a:prstGeom prst="roundRect">
+            <a:avLst>
+              <a:gd name="adj" fmla="val 16667"/>
+            </a:avLst>
+          </a:prstGeom>
+          <a:solidFill>
+            <a:srgbClr val="16161c"/>
+          </a:solidFill>
+          <a:ln>
+            <a:solidFill>
+              <a:srgbClr val="464655"/>
+            </a:solidFill>
+            <a:round/>
+          </a:ln>
+          <a:effectLst>
+            <a:outerShdw blurRad="39960" dir="5400000" dist="23040" rotWithShape="0">
+              <a:srgbClr val="000000">
+                <a:alpha val="35000"/>
+              </a:srgbClr>
+            </a:outerShdw>
+          </a:effectLst>
+        </p:spPr>
+        <p:style>
+          <a:lnRef idx="1">
+            <a:schemeClr val="accent1"/>
+          </a:lnRef>
+          <a:fillRef idx="3">
+            <a:schemeClr val="accent1"/>
+          </a:fillRef>
+          <a:effectRef idx="2">
+            <a:schemeClr val="accent1"/>
+          </a:effectRef>
+          <a:fontRef idx="minor"/>
+        </p:style>
+        <p:txBody>
+          <a:bodyPr lIns="90000" rIns="90000" tIns="45000" bIns="45000" anchor="ctr">
+            <a:noAutofit/>
+          </a:bodyPr>
+          <a:p>
+            <a:pPr marL="216000" indent="-216000">
+              <a:lnSpc>
+                <a:spcPct val="100000"/>
+              </a:lnSpc>
+              <a:buClr>
+                <a:srgbClr val="ffffff"/>
+              </a:buClr>
+              <a:buFont typeface="Wingdings" charset="2"/>
+              <a:buChar char=""/>
+            </a:pPr>
+            <a:r>
+              <a:rPr b="1" lang="en-US" sz="1800" spc="-1" strike="noStrike">
+                <a:solidFill>
+                  <a:schemeClr val="lt1"/>
+                </a:solidFill>
+                <a:latin typeface="Calibri"/>
+                <a:ea typeface="DejaVu Sans"/>
+              </a:rPr>
+              <a:t>ZoneId → Saat dilimini temsil eder</a:t>
+            </a:r>
+            <a:endParaRPr b="1" lang="en-US" sz="1800" spc="-1" strike="noStrike">
+              <a:solidFill>
+                <a:srgbClr val="ffffff"/>
+              </a:solidFill>
+              <a:latin typeface="Arial"/>
+            </a:endParaRPr>
+          </a:p>
+          <a:p>
+            <a:pPr marL="216000" indent="-216000">
+              <a:lnSpc>
+                <a:spcPct val="100000"/>
+              </a:lnSpc>
+              <a:buClr>
+                <a:srgbClr val="ffffff"/>
+              </a:buClr>
+              <a:buFont typeface="Wingdings" charset="2"/>
+              <a:buChar char=""/>
+            </a:pPr>
+            <a:r>
+              <a:rPr b="1" lang="en-US" sz="1800" spc="-1" strike="noStrike">
+                <a:solidFill>
+                  <a:schemeClr val="lt1"/>
+                </a:solidFill>
+                <a:latin typeface="Calibri"/>
+                <a:ea typeface="DejaVu Sans"/>
+              </a:rPr>
+              <a:t>ZonedDateTime → Saat dilimi ile birlikte tarih ve saat bilgisini tutar</a:t>
+            </a:r>
+            <a:endParaRPr b="1" lang="en-US" sz="1800" spc="-1" strike="noStrike">
+              <a:solidFill>
+                <a:srgbClr val="ffffff"/>
+              </a:solidFill>
+              <a:latin typeface="Arial"/>
+            </a:endParaRPr>
+          </a:p>
+          <a:p>
+            <a:pPr marL="216000" indent="-216000">
+              <a:lnSpc>
+                <a:spcPct val="100000"/>
+              </a:lnSpc>
+              <a:buClr>
+                <a:srgbClr val="ffffff"/>
+              </a:buClr>
+              <a:buFont typeface="Wingdings" charset="2"/>
+              <a:buChar char=""/>
+            </a:pPr>
+            <a:r>
+              <a:rPr b="1" lang="en-US" sz="1800" spc="-1" strike="noStrike">
+                <a:solidFill>
+                  <a:schemeClr val="lt1"/>
+                </a:solidFill>
+                <a:latin typeface="Calibri"/>
+                <a:ea typeface="DejaVu Sans"/>
+              </a:rPr>
+              <a:t>Her bölge için farklı UTC offset otomatik hesaplanır</a:t>
+            </a:r>
+            <a:endParaRPr b="1" lang="en-US" sz="1800" spc="-1" strike="noStrike">
+              <a:solidFill>
+                <a:srgbClr val="ffffff"/>
+              </a:solidFill>
+              <a:latin typeface="Arial"/>
+            </a:endParaRPr>
+          </a:p>
+          <a:p>
+            <a:pPr marL="216000" indent="-216000">
+              <a:lnSpc>
+                <a:spcPct val="100000"/>
+              </a:lnSpc>
+              <a:buClr>
+                <a:srgbClr val="ffffff"/>
+              </a:buClr>
+              <a:buFont typeface="Wingdings" charset="2"/>
+              <a:buChar char=""/>
+            </a:pPr>
+            <a:r>
+              <a:rPr b="1" lang="en-US" sz="1800" spc="-1" strike="noStrike">
+                <a:solidFill>
+                  <a:schemeClr val="lt1"/>
+                </a:solidFill>
+                <a:latin typeface="Calibri"/>
+                <a:ea typeface="DejaVu Sans"/>
+              </a:rPr>
+              <a:t>Yaz saati / kış saati değişimleri otomatik yönetilir</a:t>
+            </a:r>
+            <a:endParaRPr b="1" lang="en-US" sz="1800" spc="-1" strike="noStrike">
+              <a:solidFill>
+                <a:srgbClr val="ffffff"/>
+              </a:solidFill>
+              <a:latin typeface="Arial"/>
+            </a:endParaRPr>
+          </a:p>
+        </p:txBody>
+      </p:sp>
+      <p:sp>
+        <p:nvSpPr>
+          <p:cNvPr id="86" name="Rounded Rectangle 11"/>
+          <p:cNvSpPr/>
+          <p:nvPr/>
+        </p:nvSpPr>
+        <p:spPr>
+          <a:xfrm>
+            <a:off x="4507920" y="3182040"/>
+            <a:ext cx="3290760" cy="2742120"/>
+          </a:xfrm>
+          <a:prstGeom prst="roundRect">
+            <a:avLst>
+              <a:gd name="adj" fmla="val 16667"/>
+            </a:avLst>
+          </a:prstGeom>
+          <a:solidFill>
+            <a:srgbClr val="08080a"/>
+          </a:solidFill>
+          <a:ln>
+            <a:noFill/>
+          </a:ln>
+          <a:effectLst>
+            <a:outerShdw blurRad="39960" dir="5400000" dist="23040" rotWithShape="0">
+              <a:srgbClr val="000000">
+                <a:alpha val="35000"/>
+              </a:srgbClr>
+            </a:outerShdw>
+          </a:effectLst>
+        </p:spPr>
+        <p:style>
+          <a:lnRef idx="1">
+            <a:schemeClr val="accent1"/>
+          </a:lnRef>
+          <a:fillRef idx="3">
+            <a:schemeClr val="accent1"/>
+          </a:fillRef>
+          <a:effectRef idx="2">
+            <a:schemeClr val="accent1"/>
+          </a:effectRef>
+          <a:fontRef idx="minor"/>
+        </p:style>
+        <p:txBody>
+          <a:bodyPr lIns="90000" rIns="90000" tIns="45000" bIns="45000" anchor="ctr">
+            <a:noAutofit/>
+          </a:bodyPr>
+          <a:p>
+            <a:endParaRPr b="0" lang="en-US" sz="1800" spc="-1" strike="noStrike">
+              <a:solidFill>
+                <a:schemeClr val="lt1"/>
+              </a:solidFill>
+              <a:latin typeface="Calibri"/>
+              <a:ea typeface="DejaVu Sans"/>
+            </a:endParaRPr>
+          </a:p>
+        </p:txBody>
+      </p:sp>
+      <p:sp>
+        <p:nvSpPr>
+          <p:cNvPr id="87" name="Rounded Rectangle 12"/>
+          <p:cNvSpPr/>
+          <p:nvPr/>
+        </p:nvSpPr>
+        <p:spPr>
+          <a:xfrm>
+            <a:off x="4434840" y="3108960"/>
+            <a:ext cx="3290760" cy="2742120"/>
+          </a:xfrm>
+          <a:prstGeom prst="roundRect">
+            <a:avLst>
+              <a:gd name="adj" fmla="val 16667"/>
+            </a:avLst>
+          </a:prstGeom>
+          <a:solidFill>
+            <a:srgbClr val="16161c"/>
+          </a:solidFill>
+          <a:ln>
+            <a:solidFill>
+              <a:srgbClr val="464655"/>
+            </a:solidFill>
+            <a:round/>
+          </a:ln>
+          <a:effectLst>
+            <a:outerShdw blurRad="39960" dir="5400000" dist="23040" rotWithShape="0">
+              <a:srgbClr val="000000">
+                <a:alpha val="35000"/>
+              </a:srgbClr>
+            </a:outerShdw>
+          </a:effectLst>
+        </p:spPr>
+        <p:style>
+          <a:lnRef idx="1">
+            <a:schemeClr val="accent1"/>
+          </a:lnRef>
+          <a:fillRef idx="3">
+            <a:schemeClr val="accent1"/>
+          </a:fillRef>
+          <a:effectRef idx="2">
+            <a:schemeClr val="accent1"/>
+          </a:effectRef>
+          <a:fontRef idx="minor"/>
+        </p:style>
+        <p:txBody>
+          <a:bodyPr lIns="90000" rIns="90000" tIns="45000" bIns="45000" anchor="ctr">
+            <a:noAutofit/>
+          </a:bodyPr>
+          <a:p>
+            <a:pPr>
+              <a:lnSpc>
+                <a:spcPct val="100000"/>
+              </a:lnSpc>
+            </a:pPr>
+            <a:r>
+              <a:rPr b="0" lang="en-US" sz="1800" spc="-1" strike="noStrike">
+                <a:solidFill>
+                  <a:schemeClr val="lt1"/>
+                </a:solidFill>
+                <a:latin typeface="Calibri"/>
+                <a:ea typeface="DejaVu Sans"/>
+              </a:rPr>
+              <a:t>Program Başlar</a:t>
+            </a:r>
+            <a:endParaRPr b="0" lang="en-US" sz="1800" spc="-1" strike="noStrike">
+              <a:solidFill>
+                <a:srgbClr val="ffffff"/>
+              </a:solidFill>
+              <a:latin typeface="Arial"/>
+            </a:endParaRPr>
+          </a:p>
+          <a:p>
+            <a:pPr>
+              <a:lnSpc>
+                <a:spcPct val="100000"/>
+              </a:lnSpc>
+            </a:pPr>
+            <a:r>
+              <a:rPr b="0" lang="en-US" sz="1800" spc="-1" strike="noStrike">
+                <a:solidFill>
+                  <a:schemeClr val="lt1"/>
+                </a:solidFill>
+                <a:latin typeface="Calibri"/>
+                <a:ea typeface="DejaVu Sans"/>
+              </a:rPr>
+              <a:t>↓</a:t>
+            </a:r>
+            <a:endParaRPr b="0" lang="en-US" sz="1800" spc="-1" strike="noStrike">
+              <a:solidFill>
+                <a:srgbClr val="ffffff"/>
+              </a:solidFill>
+              <a:latin typeface="Arial"/>
+            </a:endParaRPr>
+          </a:p>
+          <a:p>
+            <a:pPr>
+              <a:lnSpc>
+                <a:spcPct val="100000"/>
+              </a:lnSpc>
+            </a:pPr>
+            <a:r>
+              <a:rPr b="0" lang="en-US" sz="1800" spc="-1" strike="noStrike">
+                <a:solidFill>
+                  <a:schemeClr val="lt1"/>
+                </a:solidFill>
+                <a:latin typeface="Calibri"/>
+                <a:ea typeface="DejaVu Sans"/>
+              </a:rPr>
+              <a:t>Saat Dilimi Seçilir (ZoneId)</a:t>
+            </a:r>
+            <a:endParaRPr b="0" lang="en-US" sz="1800" spc="-1" strike="noStrike">
+              <a:solidFill>
+                <a:srgbClr val="ffffff"/>
+              </a:solidFill>
+              <a:latin typeface="Arial"/>
+            </a:endParaRPr>
+          </a:p>
+          <a:p>
+            <a:pPr>
+              <a:lnSpc>
+                <a:spcPct val="100000"/>
+              </a:lnSpc>
+            </a:pPr>
+            <a:r>
+              <a:rPr b="0" lang="en-US" sz="1800" spc="-1" strike="noStrike">
+                <a:solidFill>
+                  <a:schemeClr val="lt1"/>
+                </a:solidFill>
+                <a:latin typeface="Calibri"/>
+                <a:ea typeface="DejaVu Sans"/>
+              </a:rPr>
+              <a:t>↓</a:t>
+            </a:r>
+            <a:endParaRPr b="0" lang="en-US" sz="1800" spc="-1" strike="noStrike">
+              <a:solidFill>
+                <a:srgbClr val="ffffff"/>
+              </a:solidFill>
+              <a:latin typeface="Arial"/>
+            </a:endParaRPr>
+          </a:p>
+          <a:p>
+            <a:pPr>
+              <a:lnSpc>
+                <a:spcPct val="100000"/>
+              </a:lnSpc>
+            </a:pPr>
+            <a:r>
+              <a:rPr b="0" lang="en-US" sz="1800" spc="-1" strike="noStrike">
+                <a:solidFill>
+                  <a:schemeClr val="lt1"/>
+                </a:solidFill>
+                <a:latin typeface="Calibri"/>
+                <a:ea typeface="DejaVu Sans"/>
+              </a:rPr>
+              <a:t>O Bölgeye Ait Zaman Alınır (ZonedDateTime)</a:t>
+            </a:r>
+            <a:endParaRPr b="0" lang="en-US" sz="1800" spc="-1" strike="noStrike">
+              <a:solidFill>
+                <a:srgbClr val="ffffff"/>
+              </a:solidFill>
+              <a:latin typeface="Arial"/>
+            </a:endParaRPr>
+          </a:p>
+          <a:p>
+            <a:pPr>
+              <a:lnSpc>
+                <a:spcPct val="100000"/>
+              </a:lnSpc>
+            </a:pPr>
+            <a:r>
+              <a:rPr b="0" lang="en-US" sz="1800" spc="-1" strike="noStrike">
+                <a:solidFill>
+                  <a:schemeClr val="lt1"/>
+                </a:solidFill>
+                <a:latin typeface="Calibri"/>
+                <a:ea typeface="DejaVu Sans"/>
+              </a:rPr>
+              <a:t>↓</a:t>
+            </a:r>
+            <a:endParaRPr b="0" lang="en-US" sz="1800" spc="-1" strike="noStrike">
+              <a:solidFill>
+                <a:srgbClr val="ffffff"/>
+              </a:solidFill>
+              <a:latin typeface="Arial"/>
+            </a:endParaRPr>
+          </a:p>
+          <a:p>
+            <a:pPr>
+              <a:lnSpc>
+                <a:spcPct val="100000"/>
+              </a:lnSpc>
+            </a:pPr>
+            <a:r>
+              <a:rPr b="0" lang="en-US" sz="1800" spc="-1" strike="noStrike">
+                <a:solidFill>
+                  <a:schemeClr val="lt1"/>
+                </a:solidFill>
+                <a:latin typeface="Calibri"/>
+                <a:ea typeface="DejaVu Sans"/>
+              </a:rPr>
+              <a:t>İşlem / Formatlama Yapılır</a:t>
+            </a:r>
+            <a:endParaRPr b="0" lang="en-US" sz="1800" spc="-1" strike="noStrike">
+              <a:solidFill>
+                <a:srgbClr val="ffffff"/>
+              </a:solidFill>
+              <a:latin typeface="Arial"/>
+            </a:endParaRPr>
+          </a:p>
+          <a:p>
+            <a:pPr>
+              <a:lnSpc>
+                <a:spcPct val="100000"/>
+              </a:lnSpc>
+            </a:pPr>
+            <a:r>
+              <a:rPr b="0" lang="en-US" sz="1800" spc="-1" strike="noStrike">
+                <a:solidFill>
+                  <a:schemeClr val="lt1"/>
+                </a:solidFill>
+                <a:latin typeface="Calibri"/>
+                <a:ea typeface="DejaVu Sans"/>
+              </a:rPr>
+              <a:t>↓</a:t>
+            </a:r>
+            <a:endParaRPr b="0" lang="en-US" sz="1800" spc="-1" strike="noStrike">
+              <a:solidFill>
+                <a:srgbClr val="ffffff"/>
+              </a:solidFill>
+              <a:latin typeface="Arial"/>
+            </a:endParaRPr>
+          </a:p>
+          <a:p>
+            <a:pPr>
+              <a:lnSpc>
+                <a:spcPct val="100000"/>
+              </a:lnSpc>
+            </a:pPr>
+            <a:r>
+              <a:rPr b="0" lang="en-US" sz="1800" spc="-1" strike="noStrike">
+                <a:solidFill>
+                  <a:schemeClr val="lt1"/>
+                </a:solidFill>
+                <a:latin typeface="Calibri"/>
+                <a:ea typeface="DejaVu Sans"/>
+              </a:rPr>
+              <a:t>Sonuç Kullanıcıya Gösterilir</a:t>
+            </a:r>
+            <a:endParaRPr b="0" lang="en-US" sz="1800" spc="-1" strike="noStrike">
+              <a:solidFill>
+                <a:srgbClr val="ffffff"/>
+              </a:solidFill>
+              <a:latin typeface="Arial"/>
+            </a:endParaRPr>
+          </a:p>
+        </p:txBody>
+      </p:sp>
+      <p:sp>
+        <p:nvSpPr>
+          <p:cNvPr id="88" name="Rounded Rectangle 13"/>
+          <p:cNvSpPr/>
+          <p:nvPr/>
+        </p:nvSpPr>
+        <p:spPr>
+          <a:xfrm>
+            <a:off x="8028360" y="3182040"/>
+            <a:ext cx="3290760" cy="2742120"/>
+          </a:xfrm>
+          <a:prstGeom prst="roundRect">
+            <a:avLst>
+              <a:gd name="adj" fmla="val 16667"/>
+            </a:avLst>
+          </a:prstGeom>
+          <a:solidFill>
+            <a:srgbClr val="08080a"/>
+          </a:solidFill>
+          <a:ln>
+            <a:noFill/>
+          </a:ln>
+          <a:effectLst>
+            <a:outerShdw blurRad="39960" dir="5400000" dist="23040" rotWithShape="0">
+              <a:srgbClr val="000000">
+                <a:alpha val="35000"/>
+              </a:srgbClr>
+            </a:outerShdw>
+          </a:effectLst>
+        </p:spPr>
+        <p:style>
+          <a:lnRef idx="1">
+            <a:schemeClr val="accent1"/>
+          </a:lnRef>
+          <a:fillRef idx="3">
+            <a:schemeClr val="accent1"/>
+          </a:fillRef>
+          <a:effectRef idx="2">
+            <a:schemeClr val="accent1"/>
+          </a:effectRef>
+          <a:fontRef idx="minor"/>
+        </p:style>
+        <p:txBody>
+          <a:bodyPr lIns="90000" rIns="90000" tIns="45000" bIns="45000" anchor="ctr">
+            <a:noAutofit/>
+          </a:bodyPr>
+          <a:p>
+            <a:endParaRPr b="0" lang="en-US" sz="1800" spc="-1" strike="noStrike">
+              <a:solidFill>
+                <a:schemeClr val="lt1"/>
+              </a:solidFill>
+              <a:latin typeface="Calibri"/>
+              <a:ea typeface="DejaVu Sans"/>
+            </a:endParaRPr>
+          </a:p>
+        </p:txBody>
+      </p:sp>
+      <p:sp>
+        <p:nvSpPr>
+          <p:cNvPr id="89" name="Rounded Rectangle 14"/>
+          <p:cNvSpPr/>
+          <p:nvPr/>
+        </p:nvSpPr>
+        <p:spPr>
+          <a:xfrm>
+            <a:off x="7955280" y="3108960"/>
+            <a:ext cx="3703320" cy="3063240"/>
+          </a:xfrm>
+          <a:prstGeom prst="roundRect">
+            <a:avLst>
+              <a:gd name="adj" fmla="val 16667"/>
+            </a:avLst>
+          </a:prstGeom>
+          <a:solidFill>
+            <a:srgbClr val="16161c"/>
+          </a:solidFill>
+          <a:ln>
+            <a:solidFill>
+              <a:srgbClr val="464655"/>
+            </a:solidFill>
+            <a:round/>
+          </a:ln>
+          <a:effectLst>
+            <a:outerShdw blurRad="39960" dir="5400000" dist="23040" rotWithShape="0">
+              <a:srgbClr val="000000">
+                <a:alpha val="35000"/>
+              </a:srgbClr>
+            </a:outerShdw>
+          </a:effectLst>
+        </p:spPr>
+        <p:style>
+          <a:lnRef idx="1">
+            <a:schemeClr val="accent1"/>
+          </a:lnRef>
+          <a:fillRef idx="3">
+            <a:schemeClr val="accent1"/>
+          </a:fillRef>
+          <a:effectRef idx="2">
+            <a:schemeClr val="accent1"/>
+          </a:effectRef>
+          <a:fontRef idx="minor"/>
+        </p:style>
+        <p:txBody>
+          <a:bodyPr lIns="90000" rIns="90000" tIns="45000" bIns="45000" anchor="ctr">
+            <a:noAutofit/>
+          </a:bodyPr>
+          <a:p>
+            <a:pPr algn="ctr">
+              <a:lnSpc>
+                <a:spcPct val="100000"/>
+              </a:lnSpc>
+            </a:pPr>
+            <a:r>
+              <a:rPr b="0" lang="en-US" sz="1200" spc="-1" strike="noStrike">
+                <a:solidFill>
+                  <a:srgbClr val="78ffc8"/>
+                </a:solidFill>
+                <a:latin typeface="Consolas"/>
+                <a:ea typeface="DejaVu Sans"/>
+              </a:rPr>
+              <a:t>public class TimezoneExample {</a:t>
+            </a:r>
+            <a:endParaRPr b="0" lang="en-US" sz="1200" spc="-1" strike="noStrike">
+              <a:solidFill>
+                <a:srgbClr val="ffffff"/>
+              </a:solidFill>
+              <a:latin typeface="Arial"/>
+            </a:endParaRPr>
+          </a:p>
+          <a:p>
+            <a:pPr algn="ctr">
+              <a:lnSpc>
+                <a:spcPct val="100000"/>
+              </a:lnSpc>
+            </a:pPr>
+            <a:r>
+              <a:rPr b="0" lang="en-US" sz="1200" spc="-1" strike="noStrike">
+                <a:solidFill>
+                  <a:srgbClr val="78ffc8"/>
+                </a:solidFill>
+                <a:latin typeface="Consolas"/>
+                <a:ea typeface="DejaVu Sans"/>
+              </a:rPr>
+              <a:t>    </a:t>
+            </a:r>
+            <a:r>
+              <a:rPr b="0" lang="en-US" sz="1200" spc="-1" strike="noStrike">
+                <a:solidFill>
+                  <a:srgbClr val="78ffc8"/>
+                </a:solidFill>
+                <a:latin typeface="Consolas"/>
+                <a:ea typeface="DejaVu Sans"/>
+              </a:rPr>
+              <a:t>public static void main(String[] args) {</a:t>
+            </a:r>
+            <a:endParaRPr b="0" lang="en-US" sz="1200" spc="-1" strike="noStrike">
+              <a:solidFill>
+                <a:srgbClr val="ffffff"/>
+              </a:solidFill>
+              <a:latin typeface="Arial"/>
+            </a:endParaRPr>
+          </a:p>
+          <a:p>
+            <a:pPr algn="ctr">
+              <a:lnSpc>
+                <a:spcPct val="100000"/>
+              </a:lnSpc>
+            </a:pPr>
+            <a:r>
+              <a:rPr b="0" lang="en-US" sz="1200" spc="-1" strike="noStrike">
+                <a:solidFill>
+                  <a:srgbClr val="78ffc8"/>
+                </a:solidFill>
+                <a:latin typeface="Consolas"/>
+                <a:ea typeface="DejaVu Sans"/>
+              </a:rPr>
+              <a:t>        </a:t>
+            </a:r>
+            <a:r>
+              <a:rPr b="0" lang="en-US" sz="1200" spc="-1" strike="noStrike">
+                <a:solidFill>
+                  <a:srgbClr val="78ffc8"/>
+                </a:solidFill>
+                <a:latin typeface="Consolas"/>
+                <a:ea typeface="DejaVu Sans"/>
+              </a:rPr>
+              <a:t>ZoneId istanbul = ZoneId.of("Europe/Istanbul");</a:t>
+            </a:r>
+            <a:endParaRPr b="0" lang="en-US" sz="1200" spc="-1" strike="noStrike">
+              <a:solidFill>
+                <a:srgbClr val="ffffff"/>
+              </a:solidFill>
+              <a:latin typeface="Arial"/>
+            </a:endParaRPr>
+          </a:p>
+          <a:p>
+            <a:pPr algn="ctr">
+              <a:lnSpc>
+                <a:spcPct val="100000"/>
+              </a:lnSpc>
+            </a:pPr>
+            <a:r>
+              <a:rPr b="0" lang="en-US" sz="1200" spc="-1" strike="noStrike">
+                <a:solidFill>
+                  <a:srgbClr val="78ffc8"/>
+                </a:solidFill>
+                <a:latin typeface="Consolas"/>
+                <a:ea typeface="DejaVu Sans"/>
+              </a:rPr>
+              <a:t>        </a:t>
+            </a:r>
+            <a:r>
+              <a:rPr b="0" lang="en-US" sz="1200" spc="-1" strike="noStrike">
+                <a:solidFill>
+                  <a:srgbClr val="78ffc8"/>
+                </a:solidFill>
+                <a:latin typeface="Consolas"/>
+                <a:ea typeface="DejaVu Sans"/>
+              </a:rPr>
+              <a:t>ZoneId newYork = ZoneId.of("America/New_York");</a:t>
+            </a:r>
+            <a:endParaRPr b="0" lang="en-US" sz="1200" spc="-1" strike="noStrike">
+              <a:solidFill>
+                <a:srgbClr val="ffffff"/>
+              </a:solidFill>
+              <a:latin typeface="Arial"/>
+            </a:endParaRPr>
+          </a:p>
+          <a:p>
+            <a:pPr algn="ctr">
+              <a:lnSpc>
+                <a:spcPct val="100000"/>
+              </a:lnSpc>
+            </a:pPr>
+            <a:r>
+              <a:rPr b="0" lang="en-US" sz="1200" spc="-1" strike="noStrike">
+                <a:solidFill>
+                  <a:srgbClr val="78ffc8"/>
+                </a:solidFill>
+                <a:latin typeface="Consolas"/>
+                <a:ea typeface="DejaVu Sans"/>
+              </a:rPr>
+              <a:t>        </a:t>
+            </a:r>
+            <a:r>
+              <a:rPr b="0" lang="en-US" sz="1200" spc="-1" strike="noStrike">
+                <a:solidFill>
+                  <a:srgbClr val="78ffc8"/>
+                </a:solidFill>
+                <a:latin typeface="Consolas"/>
+                <a:ea typeface="DejaVu Sans"/>
+              </a:rPr>
+              <a:t>ZonedDateTime timeInIstanbul = ZonedDateTime.now(istanbul);</a:t>
+            </a:r>
+            <a:endParaRPr b="0" lang="en-US" sz="1200" spc="-1" strike="noStrike">
+              <a:solidFill>
+                <a:srgbClr val="ffffff"/>
+              </a:solidFill>
+              <a:latin typeface="Arial"/>
+            </a:endParaRPr>
+          </a:p>
+          <a:p>
+            <a:pPr algn="ctr">
+              <a:lnSpc>
+                <a:spcPct val="100000"/>
+              </a:lnSpc>
+            </a:pPr>
+            <a:r>
+              <a:rPr b="0" lang="en-US" sz="1200" spc="-1" strike="noStrike">
+                <a:solidFill>
+                  <a:srgbClr val="78ffc8"/>
+                </a:solidFill>
+                <a:latin typeface="Consolas"/>
+                <a:ea typeface="DejaVu Sans"/>
+              </a:rPr>
+              <a:t>        </a:t>
+            </a:r>
+            <a:r>
+              <a:rPr b="0" lang="en-US" sz="1200" spc="-1" strike="noStrike">
+                <a:solidFill>
+                  <a:srgbClr val="78ffc8"/>
+                </a:solidFill>
+                <a:latin typeface="Consolas"/>
+                <a:ea typeface="DejaVu Sans"/>
+              </a:rPr>
+              <a:t>ZonedDateTime timeInNewYork = ZonedDateTime.now(newYork);</a:t>
+            </a:r>
+            <a:endParaRPr b="0" lang="en-US" sz="1200" spc="-1" strike="noStrike">
+              <a:solidFill>
+                <a:srgbClr val="ffffff"/>
+              </a:solidFill>
+              <a:latin typeface="Arial"/>
+            </a:endParaRPr>
+          </a:p>
+          <a:p>
+            <a:pPr algn="ctr">
+              <a:lnSpc>
+                <a:spcPct val="100000"/>
+              </a:lnSpc>
+            </a:pPr>
+            <a:r>
+              <a:rPr b="0" lang="en-US" sz="1200" spc="-1" strike="noStrike">
+                <a:solidFill>
+                  <a:srgbClr val="78ffc8"/>
+                </a:solidFill>
+                <a:latin typeface="Consolas"/>
+                <a:ea typeface="DejaVu Sans"/>
+              </a:rPr>
+              <a:t>        </a:t>
+            </a:r>
+            <a:r>
+              <a:rPr b="0" lang="en-US" sz="1200" spc="-1" strike="noStrike">
+                <a:solidFill>
+                  <a:srgbClr val="78ffc8"/>
+                </a:solidFill>
+                <a:latin typeface="Consolas"/>
+                <a:ea typeface="DejaVu Sans"/>
+              </a:rPr>
+              <a:t>System.out.println("İstanbul Saati: " + timeInIstanbul);</a:t>
+            </a:r>
+            <a:endParaRPr b="0" lang="en-US" sz="1200" spc="-1" strike="noStrike">
+              <a:solidFill>
+                <a:srgbClr val="ffffff"/>
+              </a:solidFill>
+              <a:latin typeface="Arial"/>
+            </a:endParaRPr>
+          </a:p>
+          <a:p>
+            <a:pPr algn="ctr">
+              <a:lnSpc>
+                <a:spcPct val="100000"/>
+              </a:lnSpc>
+            </a:pPr>
+            <a:r>
+              <a:rPr b="0" lang="en-US" sz="1200" spc="-1" strike="noStrike">
+                <a:solidFill>
+                  <a:srgbClr val="78ffc8"/>
+                </a:solidFill>
+                <a:latin typeface="Consolas"/>
+                <a:ea typeface="DejaVu Sans"/>
+              </a:rPr>
+              <a:t>        </a:t>
+            </a:r>
+            <a:r>
+              <a:rPr b="0" lang="en-US" sz="1200" spc="-1" strike="noStrike">
+                <a:solidFill>
+                  <a:srgbClr val="78ffc8"/>
+                </a:solidFill>
+                <a:latin typeface="Consolas"/>
+                <a:ea typeface="DejaVu Sans"/>
+              </a:rPr>
+              <a:t>System.out.println("New York Saati: " + timeInNewYork);</a:t>
+            </a:r>
+            <a:endParaRPr b="0" lang="en-US" sz="1200" spc="-1" strike="noStrike">
+              <a:solidFill>
+                <a:srgbClr val="ffffff"/>
+              </a:solidFill>
+              <a:latin typeface="Arial"/>
+            </a:endParaRPr>
+          </a:p>
+          <a:p>
+            <a:pPr algn="ctr">
+              <a:lnSpc>
+                <a:spcPct val="100000"/>
+              </a:lnSpc>
+            </a:pPr>
+            <a:r>
+              <a:rPr b="0" lang="en-US" sz="1200" spc="-1" strike="noStrike">
+                <a:solidFill>
+                  <a:srgbClr val="78ffc8"/>
+                </a:solidFill>
+                <a:latin typeface="Consolas"/>
+                <a:ea typeface="DejaVu Sans"/>
+              </a:rPr>
+              <a:t>    </a:t>
+            </a:r>
+            <a:r>
+              <a:rPr b="0" lang="en-US" sz="1200" spc="-1" strike="noStrike">
+                <a:solidFill>
+                  <a:srgbClr val="78ffc8"/>
+                </a:solidFill>
+                <a:latin typeface="Consolas"/>
+                <a:ea typeface="DejaVu Sans"/>
+              </a:rPr>
+              <a:t>}</a:t>
+            </a:r>
+            <a:endParaRPr b="0" lang="en-US" sz="1200" spc="-1" strike="noStrike">
+              <a:solidFill>
+                <a:srgbClr val="ffffff"/>
+              </a:solidFill>
+              <a:latin typeface="Arial"/>
+            </a:endParaRPr>
+          </a:p>
+          <a:p>
+            <a:pPr algn="ctr">
+              <a:lnSpc>
+                <a:spcPct val="100000"/>
+              </a:lnSpc>
+            </a:pPr>
+            <a:r>
+              <a:rPr b="0" lang="en-US" sz="1200" spc="-1" strike="noStrike">
+                <a:solidFill>
+                  <a:srgbClr val="78ffc8"/>
+                </a:solidFill>
+                <a:latin typeface="Consolas"/>
+                <a:ea typeface="DejaVu Sans"/>
+              </a:rPr>
+              <a:t>}</a:t>
+            </a:r>
+            <a:endParaRPr b="0" lang="en-US" sz="1200" spc="-1" strike="noStrike">
+              <a:solidFill>
+                <a:srgbClr val="ffffff"/>
+              </a:solidFill>
+              <a:latin typeface="Arial"/>
+            </a:endParaRPr>
+          </a:p>
+        </p:txBody>
+      </p:sp>
+      <p:sp>
+        <p:nvSpPr>
+          <p:cNvPr id="90" name="TextBox 6"/>
           <p:cNvSpPr/>
           <p:nvPr/>
         </p:nvSpPr>

--- a/Java/Java #4/TR/Java #4.pptx
+++ b/Java/Java #4/TR/Java #4.pptx
@@ -7,6 +7,7 @@
   <p:sldIdLst>
     <p:sldId id="256" r:id="rId3"/>
     <p:sldId id="257" r:id="rId4"/>
+    <p:sldId id="258" r:id="rId5"/>
   </p:sldIdLst>
   <p:sldSz cx="9144000" cy="6858000"/>
   <p:notesSz cx="7772400" cy="10058400"/>
@@ -64,7 +65,7 @@
         <p:txBody>
           <a:bodyPr/>
           <a:p>
-            <a:fld id="{F60247D1-78FC-4F72-8D72-60A5AE1DAAE3}" type="slidenum">
+            <a:fld id="{15CA44A1-314A-40B3-A672-24CCAB97BF63}" type="slidenum">
               <a:t>&lt;#&gt;</a:t>
             </a:fld>
           </a:p>
@@ -115,7 +116,7 @@
       </p:grpSpPr>
       <p:sp>
         <p:nvSpPr>
-          <p:cNvPr id="24" name="PlaceHolder 1"/>
+          <p:cNvPr id="26" name="PlaceHolder 1"/>
           <p:cNvSpPr>
             <a:spLocks noGrp="1"/>
           </p:cNvSpPr>
@@ -155,7 +156,7 @@
       </p:sp>
       <p:sp>
         <p:nvSpPr>
-          <p:cNvPr id="25" name="PlaceHolder 2"/>
+          <p:cNvPr id="27" name="PlaceHolder 2"/>
           <p:cNvSpPr>
             <a:spLocks noGrp="1"/>
           </p:cNvSpPr>
@@ -198,7 +199,7 @@
       </p:sp>
       <p:sp>
         <p:nvSpPr>
-          <p:cNvPr id="26" name="PlaceHolder 3"/>
+          <p:cNvPr id="28" name="PlaceHolder 3"/>
           <p:cNvSpPr>
             <a:spLocks noGrp="1"/>
           </p:cNvSpPr>
@@ -273,7 +274,7 @@
         <p:txBody>
           <a:bodyPr/>
           <a:p>
-            <a:fld id="{40D4C535-A920-48B4-9A5C-450530658A18}" type="slidenum">
+            <a:fld id="{DA3AC267-244E-40D2-9281-5B2D390F7A43}" type="slidenum">
               <a:t>&lt;#&gt;</a:t>
             </a:fld>
           </a:p>
@@ -324,7 +325,7 @@
       </p:grpSpPr>
       <p:sp>
         <p:nvSpPr>
-          <p:cNvPr id="27" name="PlaceHolder 1"/>
+          <p:cNvPr id="29" name="PlaceHolder 1"/>
           <p:cNvSpPr>
             <a:spLocks noGrp="1"/>
           </p:cNvSpPr>
@@ -364,7 +365,7 @@
       </p:sp>
       <p:sp>
         <p:nvSpPr>
-          <p:cNvPr id="28" name="PlaceHolder 2"/>
+          <p:cNvPr id="30" name="PlaceHolder 2"/>
           <p:cNvSpPr>
             <a:spLocks noGrp="1"/>
           </p:cNvSpPr>
@@ -407,7 +408,7 @@
       </p:sp>
       <p:sp>
         <p:nvSpPr>
-          <p:cNvPr id="29" name="PlaceHolder 3"/>
+          <p:cNvPr id="31" name="PlaceHolder 3"/>
           <p:cNvSpPr>
             <a:spLocks noGrp="1"/>
           </p:cNvSpPr>
@@ -450,7 +451,7 @@
       </p:sp>
       <p:sp>
         <p:nvSpPr>
-          <p:cNvPr id="30" name="PlaceHolder 4"/>
+          <p:cNvPr id="32" name="PlaceHolder 4"/>
           <p:cNvSpPr>
             <a:spLocks noGrp="1"/>
           </p:cNvSpPr>
@@ -493,7 +494,7 @@
       </p:sp>
       <p:sp>
         <p:nvSpPr>
-          <p:cNvPr id="31" name="PlaceHolder 5"/>
+          <p:cNvPr id="33" name="PlaceHolder 5"/>
           <p:cNvSpPr>
             <a:spLocks noGrp="1"/>
           </p:cNvSpPr>
@@ -568,7 +569,7 @@
         <p:txBody>
           <a:bodyPr/>
           <a:p>
-            <a:fld id="{618393B9-FE15-4D2F-9EC1-6326D8D21B04}" type="slidenum">
+            <a:fld id="{227472ED-6233-4B44-A600-511729FED479}" type="slidenum">
               <a:t>&lt;#&gt;</a:t>
             </a:fld>
           </a:p>
@@ -619,7 +620,7 @@
       </p:grpSpPr>
       <p:sp>
         <p:nvSpPr>
-          <p:cNvPr id="32" name="PlaceHolder 1"/>
+          <p:cNvPr id="34" name="PlaceHolder 1"/>
           <p:cNvSpPr>
             <a:spLocks noGrp="1"/>
           </p:cNvSpPr>
@@ -659,7 +660,7 @@
       </p:sp>
       <p:sp>
         <p:nvSpPr>
-          <p:cNvPr id="33" name="PlaceHolder 2"/>
+          <p:cNvPr id="35" name="PlaceHolder 2"/>
           <p:cNvSpPr>
             <a:spLocks noGrp="1"/>
           </p:cNvSpPr>
@@ -702,7 +703,7 @@
       </p:sp>
       <p:sp>
         <p:nvSpPr>
-          <p:cNvPr id="34" name="PlaceHolder 3"/>
+          <p:cNvPr id="36" name="PlaceHolder 3"/>
           <p:cNvSpPr>
             <a:spLocks noGrp="1"/>
           </p:cNvSpPr>
@@ -745,7 +746,7 @@
       </p:sp>
       <p:sp>
         <p:nvSpPr>
-          <p:cNvPr id="35" name="PlaceHolder 4"/>
+          <p:cNvPr id="37" name="PlaceHolder 4"/>
           <p:cNvSpPr>
             <a:spLocks noGrp="1"/>
           </p:cNvSpPr>
@@ -788,7 +789,7 @@
       </p:sp>
       <p:sp>
         <p:nvSpPr>
-          <p:cNvPr id="36" name="PlaceHolder 5"/>
+          <p:cNvPr id="38" name="PlaceHolder 5"/>
           <p:cNvSpPr>
             <a:spLocks noGrp="1"/>
           </p:cNvSpPr>
@@ -831,7 +832,7 @@
       </p:sp>
       <p:sp>
         <p:nvSpPr>
-          <p:cNvPr id="37" name="PlaceHolder 6"/>
+          <p:cNvPr id="39" name="PlaceHolder 6"/>
           <p:cNvSpPr>
             <a:spLocks noGrp="1"/>
           </p:cNvSpPr>
@@ -874,7 +875,7 @@
       </p:sp>
       <p:sp>
         <p:nvSpPr>
-          <p:cNvPr id="38" name="PlaceHolder 7"/>
+          <p:cNvPr id="40" name="PlaceHolder 7"/>
           <p:cNvSpPr>
             <a:spLocks noGrp="1"/>
           </p:cNvSpPr>
@@ -949,7 +950,7 @@
         <p:txBody>
           <a:bodyPr/>
           <a:p>
-            <a:fld id="{11255BB1-1EF6-4B8B-8D1B-23B0116F9E5D}" type="slidenum">
+            <a:fld id="{6C3484BA-4E5C-4FE6-A6B7-BCFCCE86DC49}" type="slidenum">
               <a:t>&lt;#&gt;</a:t>
             </a:fld>
           </a:p>
@@ -1000,7 +1001,7 @@
       </p:grpSpPr>
       <p:sp>
         <p:nvSpPr>
-          <p:cNvPr id="3" name="PlaceHolder 1"/>
+          <p:cNvPr id="5" name="PlaceHolder 1"/>
           <p:cNvSpPr>
             <a:spLocks noGrp="1"/>
           </p:cNvSpPr>
@@ -1040,7 +1041,7 @@
       </p:sp>
       <p:sp>
         <p:nvSpPr>
-          <p:cNvPr id="4" name="PlaceHolder 2"/>
+          <p:cNvPr id="6" name="PlaceHolder 2"/>
           <p:cNvSpPr>
             <a:spLocks noGrp="1"/>
           </p:cNvSpPr>
@@ -1112,7 +1113,7 @@
         <p:txBody>
           <a:bodyPr/>
           <a:p>
-            <a:fld id="{871ADD75-68A9-4C24-BB04-1822EC63CC78}" type="slidenum">
+            <a:fld id="{913ABC4A-7D35-4E33-9093-9D3BD315D5DF}" type="slidenum">
               <a:t>&lt;#&gt;</a:t>
             </a:fld>
           </a:p>
@@ -1163,7 +1164,7 @@
       </p:grpSpPr>
       <p:sp>
         <p:nvSpPr>
-          <p:cNvPr id="5" name="PlaceHolder 1"/>
+          <p:cNvPr id="7" name="PlaceHolder 1"/>
           <p:cNvSpPr>
             <a:spLocks noGrp="1"/>
           </p:cNvSpPr>
@@ -1203,7 +1204,7 @@
       </p:sp>
       <p:sp>
         <p:nvSpPr>
-          <p:cNvPr id="6" name="PlaceHolder 2"/>
+          <p:cNvPr id="8" name="PlaceHolder 2"/>
           <p:cNvSpPr>
             <a:spLocks noGrp="1"/>
           </p:cNvSpPr>
@@ -1278,7 +1279,7 @@
         <p:txBody>
           <a:bodyPr/>
           <a:p>
-            <a:fld id="{950B5877-214B-4352-92CD-1D68A1186AC1}" type="slidenum">
+            <a:fld id="{495D1120-BD16-4343-97BF-FF8EC9EF3690}" type="slidenum">
               <a:t>&lt;#&gt;</a:t>
             </a:fld>
           </a:p>
@@ -1329,7 +1330,7 @@
       </p:grpSpPr>
       <p:sp>
         <p:nvSpPr>
-          <p:cNvPr id="7" name="PlaceHolder 1"/>
+          <p:cNvPr id="9" name="PlaceHolder 1"/>
           <p:cNvSpPr>
             <a:spLocks noGrp="1"/>
           </p:cNvSpPr>
@@ -1369,7 +1370,7 @@
       </p:sp>
       <p:sp>
         <p:nvSpPr>
-          <p:cNvPr id="8" name="PlaceHolder 2"/>
+          <p:cNvPr id="10" name="PlaceHolder 2"/>
           <p:cNvSpPr>
             <a:spLocks noGrp="1"/>
           </p:cNvSpPr>
@@ -1412,7 +1413,7 @@
       </p:sp>
       <p:sp>
         <p:nvSpPr>
-          <p:cNvPr id="9" name="PlaceHolder 3"/>
+          <p:cNvPr id="11" name="PlaceHolder 3"/>
           <p:cNvSpPr>
             <a:spLocks noGrp="1"/>
           </p:cNvSpPr>
@@ -1487,7 +1488,7 @@
         <p:txBody>
           <a:bodyPr/>
           <a:p>
-            <a:fld id="{A1D22C89-7494-44E1-9311-BFB1C6230E0B}" type="slidenum">
+            <a:fld id="{EF0AB9FE-A55D-4B23-9B82-AD5052FA8324}" type="slidenum">
               <a:t>&lt;#&gt;</a:t>
             </a:fld>
           </a:p>
@@ -1538,7 +1539,7 @@
       </p:grpSpPr>
       <p:sp>
         <p:nvSpPr>
-          <p:cNvPr id="10" name="PlaceHolder 1"/>
+          <p:cNvPr id="12" name="PlaceHolder 1"/>
           <p:cNvSpPr>
             <a:spLocks noGrp="1"/>
           </p:cNvSpPr>
@@ -1610,7 +1611,7 @@
         <p:txBody>
           <a:bodyPr/>
           <a:p>
-            <a:fld id="{6930FB38-4D45-4151-8CBF-B9E7311F8371}" type="slidenum">
+            <a:fld id="{0B490EBD-3238-4211-83EA-3A64D9BF9E5B}" type="slidenum">
               <a:t>&lt;#&gt;</a:t>
             </a:fld>
           </a:p>
@@ -1661,7 +1662,7 @@
       </p:grpSpPr>
       <p:sp>
         <p:nvSpPr>
-          <p:cNvPr id="11" name="PlaceHolder 1"/>
+          <p:cNvPr id="13" name="PlaceHolder 1"/>
           <p:cNvSpPr>
             <a:spLocks noGrp="1"/>
           </p:cNvSpPr>
@@ -1731,7 +1732,7 @@
         <p:txBody>
           <a:bodyPr/>
           <a:p>
-            <a:fld id="{BCC5E572-AF18-4FEC-80A8-75BA437B8C07}" type="slidenum">
+            <a:fld id="{AC2A5516-1556-460F-B62F-0193D988B699}" type="slidenum">
               <a:t>&lt;#&gt;</a:t>
             </a:fld>
           </a:p>
@@ -1782,7 +1783,7 @@
       </p:grpSpPr>
       <p:sp>
         <p:nvSpPr>
-          <p:cNvPr id="12" name="PlaceHolder 1"/>
+          <p:cNvPr id="14" name="PlaceHolder 1"/>
           <p:cNvSpPr>
             <a:spLocks noGrp="1"/>
           </p:cNvSpPr>
@@ -1822,7 +1823,7 @@
       </p:sp>
       <p:sp>
         <p:nvSpPr>
-          <p:cNvPr id="13" name="PlaceHolder 2"/>
+          <p:cNvPr id="15" name="PlaceHolder 2"/>
           <p:cNvSpPr>
             <a:spLocks noGrp="1"/>
           </p:cNvSpPr>
@@ -1865,7 +1866,7 @@
       </p:sp>
       <p:sp>
         <p:nvSpPr>
-          <p:cNvPr id="14" name="PlaceHolder 3"/>
+          <p:cNvPr id="16" name="PlaceHolder 3"/>
           <p:cNvSpPr>
             <a:spLocks noGrp="1"/>
           </p:cNvSpPr>
@@ -1908,7 +1909,7 @@
       </p:sp>
       <p:sp>
         <p:nvSpPr>
-          <p:cNvPr id="15" name="PlaceHolder 4"/>
+          <p:cNvPr id="17" name="PlaceHolder 4"/>
           <p:cNvSpPr>
             <a:spLocks noGrp="1"/>
           </p:cNvSpPr>
@@ -1983,7 +1984,7 @@
         <p:txBody>
           <a:bodyPr/>
           <a:p>
-            <a:fld id="{F838E774-D7DB-49B1-B440-62357F310FDE}" type="slidenum">
+            <a:fld id="{48F8BF1D-7337-4CA2-A582-DC47D04C456D}" type="slidenum">
               <a:t>&lt;#&gt;</a:t>
             </a:fld>
           </a:p>
@@ -2034,7 +2035,7 @@
       </p:grpSpPr>
       <p:sp>
         <p:nvSpPr>
-          <p:cNvPr id="16" name="PlaceHolder 1"/>
+          <p:cNvPr id="18" name="PlaceHolder 1"/>
           <p:cNvSpPr>
             <a:spLocks noGrp="1"/>
           </p:cNvSpPr>
@@ -2074,7 +2075,7 @@
       </p:sp>
       <p:sp>
         <p:nvSpPr>
-          <p:cNvPr id="17" name="PlaceHolder 2"/>
+          <p:cNvPr id="19" name="PlaceHolder 2"/>
           <p:cNvSpPr>
             <a:spLocks noGrp="1"/>
           </p:cNvSpPr>
@@ -2117,7 +2118,7 @@
       </p:sp>
       <p:sp>
         <p:nvSpPr>
-          <p:cNvPr id="18" name="PlaceHolder 3"/>
+          <p:cNvPr id="20" name="PlaceHolder 3"/>
           <p:cNvSpPr>
             <a:spLocks noGrp="1"/>
           </p:cNvSpPr>
@@ -2160,7 +2161,7 @@
       </p:sp>
       <p:sp>
         <p:nvSpPr>
-          <p:cNvPr id="19" name="PlaceHolder 4"/>
+          <p:cNvPr id="21" name="PlaceHolder 4"/>
           <p:cNvSpPr>
             <a:spLocks noGrp="1"/>
           </p:cNvSpPr>
@@ -2235,7 +2236,7 @@
         <p:txBody>
           <a:bodyPr/>
           <a:p>
-            <a:fld id="{8852DCEC-8EC1-4C97-BD34-AFC2F80ADEF6}" type="slidenum">
+            <a:fld id="{6B7EBEFD-A888-4326-8BAD-992B934B91E9}" type="slidenum">
               <a:t>&lt;#&gt;</a:t>
             </a:fld>
           </a:p>
@@ -2286,7 +2287,7 @@
       </p:grpSpPr>
       <p:sp>
         <p:nvSpPr>
-          <p:cNvPr id="20" name="PlaceHolder 1"/>
+          <p:cNvPr id="22" name="PlaceHolder 1"/>
           <p:cNvSpPr>
             <a:spLocks noGrp="1"/>
           </p:cNvSpPr>
@@ -2326,7 +2327,7 @@
       </p:sp>
       <p:sp>
         <p:nvSpPr>
-          <p:cNvPr id="21" name="PlaceHolder 2"/>
+          <p:cNvPr id="23" name="PlaceHolder 2"/>
           <p:cNvSpPr>
             <a:spLocks noGrp="1"/>
           </p:cNvSpPr>
@@ -2369,7 +2370,7 @@
       </p:sp>
       <p:sp>
         <p:nvSpPr>
-          <p:cNvPr id="22" name="PlaceHolder 3"/>
+          <p:cNvPr id="24" name="PlaceHolder 3"/>
           <p:cNvSpPr>
             <a:spLocks noGrp="1"/>
           </p:cNvSpPr>
@@ -2412,7 +2413,7 @@
       </p:sp>
       <p:sp>
         <p:nvSpPr>
-          <p:cNvPr id="23" name="PlaceHolder 4"/>
+          <p:cNvPr id="25" name="PlaceHolder 4"/>
           <p:cNvSpPr>
             <a:spLocks noGrp="1"/>
           </p:cNvSpPr>
@@ -2487,7 +2488,7 @@
         <p:txBody>
           <a:bodyPr/>
           <a:p>
-            <a:fld id="{BDA57AB3-B3D5-4AE7-80FD-B352A1EB879B}" type="slidenum">
+            <a:fld id="{F313669A-FA5D-4B93-98AC-19547919E9FB}" type="slidenum">
               <a:t>&lt;#&gt;</a:t>
             </a:fld>
           </a:p>
@@ -2556,7 +2557,7 @@
         <p:spPr>
           <a:xfrm>
             <a:off x="3124080" y="6356520"/>
-            <a:ext cx="2894040" cy="363600"/>
+            <a:ext cx="2893680" cy="363240"/>
           </a:xfrm>
           <a:prstGeom prst="rect">
             <a:avLst/>
@@ -2628,7 +2629,7 @@
         <p:spPr>
           <a:xfrm>
             <a:off x="6553080" y="6356520"/>
-            <a:ext cx="2132280" cy="363600"/>
+            <a:ext cx="2131920" cy="363240"/>
           </a:xfrm>
           <a:prstGeom prst="rect">
             <a:avLst/>
@@ -2669,7 +2670,7 @@
                 <a:tab algn="l" pos="0"/>
               </a:tabLst>
             </a:pPr>
-            <a:fld id="{42378A55-3BCB-435A-8BB3-0DD552915C06}" type="slidenum">
+            <a:fld id="{64233886-89FB-47E6-BFD8-43CD08992A06}" type="slidenum">
               <a:rPr b="0" lang="en-US" sz="1200" spc="-1" strike="noStrike">
                 <a:solidFill>
                   <a:srgbClr val="8b8b8b"/>
@@ -2700,7 +2701,7 @@
         <p:spPr>
           <a:xfrm>
             <a:off x="457200" y="6356520"/>
-            <a:ext cx="2132280" cy="363600"/>
+            <a:ext cx="2131920" cy="363240"/>
           </a:xfrm>
           <a:prstGeom prst="rect">
             <a:avLst/>
@@ -2743,6 +2744,280 @@
                 <a:srgbClr val="000000"/>
               </a:solidFill>
               <a:latin typeface="Times New Roman"/>
+            </a:endParaRPr>
+          </a:p>
+        </p:txBody>
+      </p:sp>
+      <p:sp>
+        <p:nvSpPr>
+          <p:cNvPr id="3" name="PlaceHolder 4"/>
+          <p:cNvSpPr>
+            <a:spLocks noGrp="1"/>
+          </p:cNvSpPr>
+          <p:nvPr>
+            <p:ph type="title"/>
+          </p:nvPr>
+        </p:nvSpPr>
+        <p:spPr>
+          <a:xfrm>
+            <a:off x="457200" y="273600"/>
+            <a:ext cx="8229240" cy="1144800"/>
+          </a:xfrm>
+          <a:prstGeom prst="rect">
+            <a:avLst/>
+          </a:prstGeom>
+          <a:noFill/>
+          <a:ln w="0">
+            <a:noFill/>
+          </a:ln>
+        </p:spPr>
+        <p:txBody>
+          <a:bodyPr lIns="0" rIns="0" tIns="0" bIns="0" anchor="ctr">
+            <a:noAutofit/>
+          </a:bodyPr>
+          <a:p>
+            <a:pPr indent="0" algn="ctr">
+              <a:buNone/>
+            </a:pPr>
+            <a:r>
+              <a:rPr b="0" lang="en-US" sz="4400" spc="-1" strike="noStrike">
+                <a:solidFill>
+                  <a:srgbClr val="000000"/>
+                </a:solidFill>
+                <a:latin typeface="Arial"/>
+              </a:rPr>
+              <a:t>Click to edit the title text format</a:t>
+            </a:r>
+            <a:endParaRPr b="0" lang="en-US" sz="4400" spc="-1" strike="noStrike">
+              <a:solidFill>
+                <a:srgbClr val="000000"/>
+              </a:solidFill>
+              <a:latin typeface="Arial"/>
+            </a:endParaRPr>
+          </a:p>
+        </p:txBody>
+      </p:sp>
+      <p:sp>
+        <p:nvSpPr>
+          <p:cNvPr id="4" name="PlaceHolder 5"/>
+          <p:cNvSpPr>
+            <a:spLocks noGrp="1"/>
+          </p:cNvSpPr>
+          <p:nvPr>
+            <p:ph type="body"/>
+          </p:nvPr>
+        </p:nvSpPr>
+        <p:spPr>
+          <a:xfrm>
+            <a:off x="457200" y="1604520"/>
+            <a:ext cx="8229240" cy="3977280"/>
+          </a:xfrm>
+          <a:prstGeom prst="rect">
+            <a:avLst/>
+          </a:prstGeom>
+          <a:noFill/>
+          <a:ln w="0">
+            <a:noFill/>
+          </a:ln>
+        </p:spPr>
+        <p:txBody>
+          <a:bodyPr lIns="0" rIns="0" tIns="0" bIns="0" anchor="t">
+            <a:normAutofit/>
+          </a:bodyPr>
+          <a:p>
+            <a:pPr marL="432000" indent="-324000">
+              <a:spcBef>
+                <a:spcPts val="1417"/>
+              </a:spcBef>
+              <a:buClr>
+                <a:srgbClr val="000000"/>
+              </a:buClr>
+              <a:buSzPct val="45000"/>
+              <a:buFont typeface="Wingdings" charset="2"/>
+              <a:buChar char=""/>
+            </a:pPr>
+            <a:r>
+              <a:rPr b="0" lang="en-US" sz="3200" spc="-1" strike="noStrike">
+                <a:solidFill>
+                  <a:srgbClr val="000000"/>
+                </a:solidFill>
+                <a:latin typeface="Arial"/>
+              </a:rPr>
+              <a:t>Click to edit the outline text format</a:t>
+            </a:r>
+            <a:endParaRPr b="0" lang="en-US" sz="3200" spc="-1" strike="noStrike">
+              <a:solidFill>
+                <a:srgbClr val="000000"/>
+              </a:solidFill>
+              <a:latin typeface="Arial"/>
+            </a:endParaRPr>
+          </a:p>
+          <a:p>
+            <a:pPr lvl="1" marL="864000" indent="-324000">
+              <a:spcBef>
+                <a:spcPts val="1134"/>
+              </a:spcBef>
+              <a:buClr>
+                <a:srgbClr val="000000"/>
+              </a:buClr>
+              <a:buSzPct val="75000"/>
+              <a:buFont typeface="Symbol" charset="2"/>
+              <a:buChar char=""/>
+            </a:pPr>
+            <a:r>
+              <a:rPr b="0" lang="en-US" sz="2800" spc="-1" strike="noStrike">
+                <a:solidFill>
+                  <a:srgbClr val="000000"/>
+                </a:solidFill>
+                <a:latin typeface="Arial"/>
+              </a:rPr>
+              <a:t>Second Outline Level</a:t>
+            </a:r>
+            <a:endParaRPr b="0" lang="en-US" sz="2800" spc="-1" strike="noStrike">
+              <a:solidFill>
+                <a:srgbClr val="000000"/>
+              </a:solidFill>
+              <a:latin typeface="Arial"/>
+            </a:endParaRPr>
+          </a:p>
+          <a:p>
+            <a:pPr lvl="2" marL="1296000" indent="-288000">
+              <a:spcBef>
+                <a:spcPts val="850"/>
+              </a:spcBef>
+              <a:buClr>
+                <a:srgbClr val="000000"/>
+              </a:buClr>
+              <a:buSzPct val="45000"/>
+              <a:buFont typeface="Wingdings" charset="2"/>
+              <a:buChar char=""/>
+            </a:pPr>
+            <a:r>
+              <a:rPr b="0" lang="en-US" sz="2400" spc="-1" strike="noStrike">
+                <a:solidFill>
+                  <a:srgbClr val="000000"/>
+                </a:solidFill>
+                <a:latin typeface="Arial"/>
+              </a:rPr>
+              <a:t>Third Outline Level</a:t>
+            </a:r>
+            <a:endParaRPr b="0" lang="en-US" sz="2400" spc="-1" strike="noStrike">
+              <a:solidFill>
+                <a:srgbClr val="000000"/>
+              </a:solidFill>
+              <a:latin typeface="Arial"/>
+            </a:endParaRPr>
+          </a:p>
+          <a:p>
+            <a:pPr lvl="3" marL="1728000" indent="-216000">
+              <a:spcBef>
+                <a:spcPts val="567"/>
+              </a:spcBef>
+              <a:buClr>
+                <a:srgbClr val="000000"/>
+              </a:buClr>
+              <a:buSzPct val="75000"/>
+              <a:buFont typeface="Symbol" charset="2"/>
+              <a:buChar char=""/>
+            </a:pPr>
+            <a:r>
+              <a:rPr b="0" lang="en-US" sz="2000" spc="-1" strike="noStrike">
+                <a:solidFill>
+                  <a:srgbClr val="000000"/>
+                </a:solidFill>
+                <a:latin typeface="Arial"/>
+              </a:rPr>
+              <a:t>Fourth Outline Level</a:t>
+            </a:r>
+            <a:endParaRPr b="0" lang="en-US" sz="2000" spc="-1" strike="noStrike">
+              <a:solidFill>
+                <a:srgbClr val="000000"/>
+              </a:solidFill>
+              <a:latin typeface="Arial"/>
+            </a:endParaRPr>
+          </a:p>
+          <a:p>
+            <a:pPr lvl="4" marL="2160000" indent="-216000">
+              <a:spcBef>
+                <a:spcPts val="283"/>
+              </a:spcBef>
+              <a:buClr>
+                <a:srgbClr val="000000"/>
+              </a:buClr>
+              <a:buSzPct val="45000"/>
+              <a:buFont typeface="Wingdings" charset="2"/>
+              <a:buChar char=""/>
+            </a:pPr>
+            <a:r>
+              <a:rPr b="0" lang="en-US" sz="2000" spc="-1" strike="noStrike">
+                <a:solidFill>
+                  <a:srgbClr val="000000"/>
+                </a:solidFill>
+                <a:latin typeface="Arial"/>
+              </a:rPr>
+              <a:t>Fifth Outline Level</a:t>
+            </a:r>
+            <a:endParaRPr b="0" lang="en-US" sz="2000" spc="-1" strike="noStrike">
+              <a:solidFill>
+                <a:srgbClr val="000000"/>
+              </a:solidFill>
+              <a:latin typeface="Arial"/>
+            </a:endParaRPr>
+          </a:p>
+          <a:p>
+            <a:pPr lvl="5" marL="2592000" indent="-216000">
+              <a:spcBef>
+                <a:spcPts val="283"/>
+              </a:spcBef>
+              <a:buClr>
+                <a:srgbClr val="000000"/>
+              </a:buClr>
+              <a:buSzPct val="45000"/>
+              <a:buFont typeface="Wingdings" charset="2"/>
+              <a:buChar char=""/>
+            </a:pPr>
+            <a:r>
+              <a:rPr b="0" lang="en-US" sz="2000" spc="-1" strike="noStrike">
+                <a:solidFill>
+                  <a:srgbClr val="000000"/>
+                </a:solidFill>
+                <a:latin typeface="Arial"/>
+              </a:rPr>
+              <a:t>Sixth Outline Level</a:t>
+            </a:r>
+            <a:endParaRPr b="0" lang="en-US" sz="2000" spc="-1" strike="noStrike">
+              <a:solidFill>
+                <a:srgbClr val="000000"/>
+              </a:solidFill>
+              <a:latin typeface="Arial"/>
+            </a:endParaRPr>
+          </a:p>
+          <a:p>
+            <a:pPr lvl="6" marL="3024000" indent="-216000">
+              <a:spcBef>
+                <a:spcPts val="283"/>
+              </a:spcBef>
+              <a:buClr>
+                <a:srgbClr val="000000"/>
+              </a:buClr>
+              <a:buSzPct val="45000"/>
+              <a:buFont typeface="Wingdings" charset="2"/>
+              <a:buChar char=""/>
+            </a:pPr>
+            <a:r>
+              <a:rPr b="0" lang="en-US" sz="2000" spc="-1" strike="noStrike">
+                <a:solidFill>
+                  <a:srgbClr val="000000"/>
+                </a:solidFill>
+                <a:latin typeface="Arial"/>
+              </a:rPr>
+              <a:t>Seventh Outline Level</a:t>
+            </a:r>
+            <a:endParaRPr b="0" lang="en-US" sz="2000" spc="-1" strike="noStrike">
+              <a:solidFill>
+                <a:srgbClr val="000000"/>
+              </a:solidFill>
+              <a:latin typeface="Arial"/>
             </a:endParaRPr>
           </a:p>
         </p:txBody>
@@ -2786,14 +3061,14 @@
       </p:grpSpPr>
       <p:sp>
         <p:nvSpPr>
-          <p:cNvPr id="39" name="Rectangle 1"/>
+          <p:cNvPr id="41" name="Rectangle 1"/>
           <p:cNvSpPr/>
           <p:nvPr/>
         </p:nvSpPr>
         <p:spPr>
           <a:xfrm>
             <a:off x="0" y="0"/>
-            <a:ext cx="12187440" cy="6856560"/>
+            <a:ext cx="12187080" cy="6856200"/>
           </a:xfrm>
           <a:prstGeom prst="rect">
             <a:avLst/>
@@ -2846,14 +3121,14 @@
       </p:sp>
       <p:sp>
         <p:nvSpPr>
-          <p:cNvPr id="40" name="Rectangle 2"/>
+          <p:cNvPr id="42" name="Rectangle 2"/>
           <p:cNvSpPr/>
           <p:nvPr/>
         </p:nvSpPr>
         <p:spPr>
           <a:xfrm>
             <a:off x="0" y="0"/>
-            <a:ext cx="16920" cy="6856560"/>
+            <a:ext cx="16560" cy="6856200"/>
           </a:xfrm>
           <a:prstGeom prst="rect">
             <a:avLst/>
@@ -2906,14 +3181,14 @@
       </p:sp>
       <p:sp>
         <p:nvSpPr>
-          <p:cNvPr id="41" name="Rectangle 3"/>
+          <p:cNvPr id="43" name="Rectangle 3"/>
           <p:cNvSpPr/>
           <p:nvPr/>
         </p:nvSpPr>
         <p:spPr>
           <a:xfrm>
             <a:off x="914400" y="0"/>
-            <a:ext cx="16920" cy="6856560"/>
+            <a:ext cx="16560" cy="6856200"/>
           </a:xfrm>
           <a:prstGeom prst="rect">
             <a:avLst/>
@@ -2966,14 +3241,14 @@
       </p:sp>
       <p:sp>
         <p:nvSpPr>
-          <p:cNvPr id="42" name="Rectangle 4"/>
+          <p:cNvPr id="44" name="Rectangle 4"/>
           <p:cNvSpPr/>
           <p:nvPr/>
         </p:nvSpPr>
         <p:spPr>
           <a:xfrm>
             <a:off x="1828800" y="0"/>
-            <a:ext cx="16920" cy="6856560"/>
+            <a:ext cx="16560" cy="6856200"/>
           </a:xfrm>
           <a:prstGeom prst="rect">
             <a:avLst/>
@@ -3026,14 +3301,14 @@
       </p:sp>
       <p:sp>
         <p:nvSpPr>
-          <p:cNvPr id="43" name="Rectangle 5"/>
+          <p:cNvPr id="45" name="Rectangle 5"/>
           <p:cNvSpPr/>
           <p:nvPr/>
         </p:nvSpPr>
         <p:spPr>
           <a:xfrm>
             <a:off x="2743200" y="0"/>
-            <a:ext cx="16920" cy="6856560"/>
+            <a:ext cx="16560" cy="6856200"/>
           </a:xfrm>
           <a:prstGeom prst="rect">
             <a:avLst/>
@@ -3086,14 +3361,14 @@
       </p:sp>
       <p:sp>
         <p:nvSpPr>
-          <p:cNvPr id="44" name="Rectangle 6"/>
+          <p:cNvPr id="46" name="Rectangle 6"/>
           <p:cNvSpPr/>
           <p:nvPr/>
         </p:nvSpPr>
         <p:spPr>
           <a:xfrm>
             <a:off x="3657600" y="0"/>
-            <a:ext cx="16920" cy="6856560"/>
+            <a:ext cx="16560" cy="6856200"/>
           </a:xfrm>
           <a:prstGeom prst="rect">
             <a:avLst/>
@@ -3146,14 +3421,14 @@
       </p:sp>
       <p:sp>
         <p:nvSpPr>
-          <p:cNvPr id="45" name="Rectangle 7"/>
+          <p:cNvPr id="47" name="Rectangle 7"/>
           <p:cNvSpPr/>
           <p:nvPr/>
         </p:nvSpPr>
         <p:spPr>
           <a:xfrm>
             <a:off x="4572000" y="0"/>
-            <a:ext cx="16920" cy="6856560"/>
+            <a:ext cx="16560" cy="6856200"/>
           </a:xfrm>
           <a:prstGeom prst="rect">
             <a:avLst/>
@@ -3206,14 +3481,14 @@
       </p:sp>
       <p:sp>
         <p:nvSpPr>
-          <p:cNvPr id="46" name="Rectangle 8"/>
+          <p:cNvPr id="48" name="Rectangle 8"/>
           <p:cNvSpPr/>
           <p:nvPr/>
         </p:nvSpPr>
         <p:spPr>
           <a:xfrm>
             <a:off x="5486400" y="0"/>
-            <a:ext cx="16920" cy="6856560"/>
+            <a:ext cx="16560" cy="6856200"/>
           </a:xfrm>
           <a:prstGeom prst="rect">
             <a:avLst/>
@@ -3266,14 +3541,14 @@
       </p:sp>
       <p:sp>
         <p:nvSpPr>
-          <p:cNvPr id="47" name="Rectangle 9"/>
+          <p:cNvPr id="49" name="Rectangle 9"/>
           <p:cNvSpPr/>
           <p:nvPr/>
         </p:nvSpPr>
         <p:spPr>
           <a:xfrm>
             <a:off x="6400800" y="0"/>
-            <a:ext cx="16920" cy="6856560"/>
+            <a:ext cx="16560" cy="6856200"/>
           </a:xfrm>
           <a:prstGeom prst="rect">
             <a:avLst/>
@@ -3326,14 +3601,14 @@
       </p:sp>
       <p:sp>
         <p:nvSpPr>
-          <p:cNvPr id="48" name="Rectangle 10"/>
+          <p:cNvPr id="50" name="Rectangle 10"/>
           <p:cNvSpPr/>
           <p:nvPr/>
         </p:nvSpPr>
         <p:spPr>
           <a:xfrm>
             <a:off x="7315200" y="0"/>
-            <a:ext cx="16920" cy="6856560"/>
+            <a:ext cx="16560" cy="6856200"/>
           </a:xfrm>
           <a:prstGeom prst="rect">
             <a:avLst/>
@@ -3386,14 +3661,14 @@
       </p:sp>
       <p:sp>
         <p:nvSpPr>
-          <p:cNvPr id="49" name="Rectangle 11"/>
+          <p:cNvPr id="51" name="Rectangle 11"/>
           <p:cNvSpPr/>
           <p:nvPr/>
         </p:nvSpPr>
         <p:spPr>
           <a:xfrm>
             <a:off x="8229600" y="0"/>
-            <a:ext cx="16920" cy="6856560"/>
+            <a:ext cx="16560" cy="6856200"/>
           </a:xfrm>
           <a:prstGeom prst="rect">
             <a:avLst/>
@@ -3446,14 +3721,14 @@
       </p:sp>
       <p:sp>
         <p:nvSpPr>
-          <p:cNvPr id="50" name="Rectangle 12"/>
+          <p:cNvPr id="52" name="Rectangle 12"/>
           <p:cNvSpPr/>
           <p:nvPr/>
         </p:nvSpPr>
         <p:spPr>
           <a:xfrm>
             <a:off x="9144000" y="0"/>
-            <a:ext cx="16920" cy="6856560"/>
+            <a:ext cx="16560" cy="6856200"/>
           </a:xfrm>
           <a:prstGeom prst="rect">
             <a:avLst/>
@@ -3506,14 +3781,14 @@
       </p:sp>
       <p:sp>
         <p:nvSpPr>
-          <p:cNvPr id="51" name="Rectangle 13"/>
+          <p:cNvPr id="53" name="Rectangle 13"/>
           <p:cNvSpPr/>
           <p:nvPr/>
         </p:nvSpPr>
         <p:spPr>
           <a:xfrm>
             <a:off x="10058400" y="0"/>
-            <a:ext cx="16920" cy="6856560"/>
+            <a:ext cx="16560" cy="6856200"/>
           </a:xfrm>
           <a:prstGeom prst="rect">
             <a:avLst/>
@@ -3566,14 +3841,14 @@
       </p:sp>
       <p:sp>
         <p:nvSpPr>
-          <p:cNvPr id="52" name="Rectangle 14"/>
+          <p:cNvPr id="54" name="Rectangle 14"/>
           <p:cNvSpPr/>
           <p:nvPr/>
         </p:nvSpPr>
         <p:spPr>
           <a:xfrm>
             <a:off x="10972800" y="0"/>
-            <a:ext cx="16920" cy="6856560"/>
+            <a:ext cx="16560" cy="6856200"/>
           </a:xfrm>
           <a:prstGeom prst="rect">
             <a:avLst/>
@@ -3626,14 +3901,14 @@
       </p:sp>
       <p:sp>
         <p:nvSpPr>
-          <p:cNvPr id="53" name="Rectangle 15"/>
+          <p:cNvPr id="55" name="Rectangle 15"/>
           <p:cNvSpPr/>
           <p:nvPr/>
         </p:nvSpPr>
         <p:spPr>
           <a:xfrm>
             <a:off x="11887200" y="0"/>
-            <a:ext cx="16920" cy="6856560"/>
+            <a:ext cx="16560" cy="6856200"/>
           </a:xfrm>
           <a:prstGeom prst="rect">
             <a:avLst/>
@@ -3686,14 +3961,14 @@
       </p:sp>
       <p:sp>
         <p:nvSpPr>
-          <p:cNvPr id="54" name="Rectangle 16"/>
+          <p:cNvPr id="56" name="Rectangle 16"/>
           <p:cNvSpPr/>
           <p:nvPr/>
         </p:nvSpPr>
         <p:spPr>
           <a:xfrm>
             <a:off x="0" y="0"/>
-            <a:ext cx="318600" cy="6856560"/>
+            <a:ext cx="318240" cy="6856200"/>
           </a:xfrm>
           <a:prstGeom prst="rect">
             <a:avLst/>
@@ -3746,14 +4021,14 @@
       </p:sp>
       <p:sp>
         <p:nvSpPr>
-          <p:cNvPr id="55" name="Rounded Rectangle 17"/>
+          <p:cNvPr id="57" name="Rounded Rectangle 17"/>
           <p:cNvSpPr/>
           <p:nvPr/>
         </p:nvSpPr>
         <p:spPr>
           <a:xfrm>
             <a:off x="9875520" y="365760"/>
-            <a:ext cx="2010240" cy="501480"/>
+            <a:ext cx="2009880" cy="501120"/>
           </a:xfrm>
           <a:prstGeom prst="roundRect">
             <a:avLst>
@@ -3820,7 +4095,7 @@
       </p:sp>
       <p:sp>
         <p:nvSpPr>
-          <p:cNvPr id="56" name="TextBox 18"/>
+          <p:cNvPr id="58" name="TextBox 18"/>
           <p:cNvSpPr/>
           <p:nvPr/>
         </p:nvSpPr>
@@ -3874,14 +4149,14 @@
       </p:sp>
       <p:sp>
         <p:nvSpPr>
-          <p:cNvPr id="57" name="TextBox 19"/>
+          <p:cNvPr id="59" name="TextBox 19"/>
           <p:cNvSpPr/>
           <p:nvPr/>
         </p:nvSpPr>
         <p:spPr>
           <a:xfrm>
             <a:off x="3070440" y="1495080"/>
-            <a:ext cx="5938560" cy="1247400"/>
+            <a:ext cx="5938200" cy="1247400"/>
           </a:xfrm>
           <a:prstGeom prst="rect">
             <a:avLst/>
@@ -3997,14 +4272,14 @@
       </p:sp>
       <p:sp>
         <p:nvSpPr>
-          <p:cNvPr id="58" name="Rounded Rectangle 20"/>
+          <p:cNvPr id="60" name="Rounded Rectangle 20"/>
           <p:cNvSpPr/>
           <p:nvPr/>
         </p:nvSpPr>
         <p:spPr>
           <a:xfrm>
             <a:off x="987480" y="3182040"/>
-            <a:ext cx="3290400" cy="2741760"/>
+            <a:ext cx="3290040" cy="2741400"/>
           </a:xfrm>
           <a:prstGeom prst="roundRect">
             <a:avLst>
@@ -4059,14 +4334,14 @@
       </p:sp>
       <p:sp>
         <p:nvSpPr>
-          <p:cNvPr id="59" name="Rounded Rectangle 21"/>
+          <p:cNvPr id="61" name="Rounded Rectangle 21"/>
           <p:cNvSpPr/>
           <p:nvPr/>
         </p:nvSpPr>
         <p:spPr>
           <a:xfrm>
             <a:off x="914400" y="3108960"/>
-            <a:ext cx="3290400" cy="2741760"/>
+            <a:ext cx="3290040" cy="2741400"/>
           </a:xfrm>
           <a:prstGeom prst="roundRect">
             <a:avLst>
@@ -4193,14 +4468,14 @@
       </p:sp>
       <p:sp>
         <p:nvSpPr>
-          <p:cNvPr id="60" name="Rounded Rectangle 22"/>
+          <p:cNvPr id="62" name="Rounded Rectangle 22"/>
           <p:cNvSpPr/>
           <p:nvPr/>
         </p:nvSpPr>
         <p:spPr>
           <a:xfrm>
             <a:off x="4507920" y="3182040"/>
-            <a:ext cx="3290400" cy="2741760"/>
+            <a:ext cx="3290040" cy="2741400"/>
           </a:xfrm>
           <a:prstGeom prst="roundRect">
             <a:avLst>
@@ -4255,14 +4530,14 @@
       </p:sp>
       <p:sp>
         <p:nvSpPr>
-          <p:cNvPr id="61" name="Rounded Rectangle 23"/>
+          <p:cNvPr id="63" name="Rounded Rectangle 23"/>
           <p:cNvSpPr/>
           <p:nvPr/>
         </p:nvSpPr>
         <p:spPr>
           <a:xfrm>
             <a:off x="4434840" y="3108960"/>
-            <a:ext cx="3290400" cy="2741760"/>
+            <a:ext cx="3290040" cy="2741400"/>
           </a:xfrm>
           <a:prstGeom prst="roundRect">
             <a:avLst>
@@ -4513,14 +4788,14 @@
       </p:sp>
       <p:sp>
         <p:nvSpPr>
-          <p:cNvPr id="62" name="Rounded Rectangle 24"/>
+          <p:cNvPr id="64" name="Rounded Rectangle 24"/>
           <p:cNvSpPr/>
           <p:nvPr/>
         </p:nvSpPr>
         <p:spPr>
           <a:xfrm>
             <a:off x="8028360" y="3182040"/>
-            <a:ext cx="3290400" cy="2741760"/>
+            <a:ext cx="3290040" cy="2741400"/>
           </a:xfrm>
           <a:prstGeom prst="roundRect">
             <a:avLst>
@@ -4575,14 +4850,14 @@
       </p:sp>
       <p:sp>
         <p:nvSpPr>
-          <p:cNvPr id="63" name="Rounded Rectangle 25"/>
+          <p:cNvPr id="65" name="Rounded Rectangle 25"/>
           <p:cNvSpPr/>
           <p:nvPr/>
         </p:nvSpPr>
         <p:spPr>
           <a:xfrm>
             <a:off x="7955280" y="2971800"/>
-            <a:ext cx="3931560" cy="3657240"/>
+            <a:ext cx="3931200" cy="3656880"/>
           </a:xfrm>
           <a:prstGeom prst="roundRect">
             <a:avLst>
@@ -5002,14 +5277,14 @@
       </p:sp>
       <p:sp>
         <p:nvSpPr>
-          <p:cNvPr id="64" name="TextBox 26"/>
+          <p:cNvPr id="66" name="TextBox 26"/>
           <p:cNvSpPr/>
           <p:nvPr/>
         </p:nvSpPr>
         <p:spPr>
           <a:xfrm>
             <a:off x="4600080" y="6446520"/>
-            <a:ext cx="3051360" cy="363960"/>
+            <a:ext cx="3051000" cy="363960"/>
           </a:xfrm>
           <a:prstGeom prst="rect">
             <a:avLst/>
@@ -5086,14 +5361,14 @@
       </p:grpSpPr>
       <p:sp>
         <p:nvSpPr>
-          <p:cNvPr id="65" name="Rectangle 32"/>
+          <p:cNvPr id="67" name="Rectangle 32"/>
           <p:cNvSpPr/>
           <p:nvPr/>
         </p:nvSpPr>
         <p:spPr>
           <a:xfrm>
             <a:off x="0" y="0"/>
-            <a:ext cx="12187800" cy="6856920"/>
+            <a:ext cx="12187440" cy="6856560"/>
           </a:xfrm>
           <a:prstGeom prst="rect">
             <a:avLst/>
@@ -5129,6 +5404,11 @@
             <a:noAutofit/>
           </a:bodyPr>
           <a:p>
+            <a:pPr>
+              <a:lnSpc>
+                <a:spcPct val="100000"/>
+              </a:lnSpc>
+            </a:pPr>
             <a:endParaRPr b="0" lang="en-US" sz="1800" spc="-1" strike="noStrike">
               <a:solidFill>
                 <a:schemeClr val="lt1"/>
@@ -5141,14 +5421,14 @@
       </p:sp>
       <p:sp>
         <p:nvSpPr>
-          <p:cNvPr id="66" name="Rectangle 33"/>
+          <p:cNvPr id="68" name="Rectangle 33"/>
           <p:cNvSpPr/>
           <p:nvPr/>
         </p:nvSpPr>
         <p:spPr>
           <a:xfrm>
             <a:off x="0" y="0"/>
-            <a:ext cx="17280" cy="6856920"/>
+            <a:ext cx="16920" cy="6856560"/>
           </a:xfrm>
           <a:prstGeom prst="rect">
             <a:avLst/>
@@ -5184,6 +5464,11 @@
             <a:noAutofit/>
           </a:bodyPr>
           <a:p>
+            <a:pPr>
+              <a:lnSpc>
+                <a:spcPct val="100000"/>
+              </a:lnSpc>
+            </a:pPr>
             <a:endParaRPr b="0" lang="en-US" sz="1800" spc="-1" strike="noStrike">
               <a:solidFill>
                 <a:schemeClr val="lt1"/>
@@ -5196,14 +5481,14 @@
       </p:sp>
       <p:sp>
         <p:nvSpPr>
-          <p:cNvPr id="67" name="Rectangle 34"/>
+          <p:cNvPr id="69" name="Rectangle 34"/>
           <p:cNvSpPr/>
           <p:nvPr/>
         </p:nvSpPr>
         <p:spPr>
           <a:xfrm>
             <a:off x="914400" y="0"/>
-            <a:ext cx="17280" cy="6856920"/>
+            <a:ext cx="16920" cy="6856560"/>
           </a:xfrm>
           <a:prstGeom prst="rect">
             <a:avLst/>
@@ -5239,6 +5524,11 @@
             <a:noAutofit/>
           </a:bodyPr>
           <a:p>
+            <a:pPr>
+              <a:lnSpc>
+                <a:spcPct val="100000"/>
+              </a:lnSpc>
+            </a:pPr>
             <a:endParaRPr b="0" lang="en-US" sz="1800" spc="-1" strike="noStrike">
               <a:solidFill>
                 <a:schemeClr val="lt1"/>
@@ -5251,14 +5541,14 @@
       </p:sp>
       <p:sp>
         <p:nvSpPr>
-          <p:cNvPr id="68" name="Rectangle 35"/>
+          <p:cNvPr id="70" name="Rectangle 35"/>
           <p:cNvSpPr/>
           <p:nvPr/>
         </p:nvSpPr>
         <p:spPr>
           <a:xfrm>
             <a:off x="1828800" y="0"/>
-            <a:ext cx="17280" cy="6856920"/>
+            <a:ext cx="16920" cy="6856560"/>
           </a:xfrm>
           <a:prstGeom prst="rect">
             <a:avLst/>
@@ -5294,6 +5584,11 @@
             <a:noAutofit/>
           </a:bodyPr>
           <a:p>
+            <a:pPr>
+              <a:lnSpc>
+                <a:spcPct val="100000"/>
+              </a:lnSpc>
+            </a:pPr>
             <a:endParaRPr b="0" lang="en-US" sz="1800" spc="-1" strike="noStrike">
               <a:solidFill>
                 <a:schemeClr val="lt1"/>
@@ -5306,14 +5601,14 @@
       </p:sp>
       <p:sp>
         <p:nvSpPr>
-          <p:cNvPr id="69" name="Rectangle 36"/>
+          <p:cNvPr id="71" name="Rectangle 36"/>
           <p:cNvSpPr/>
           <p:nvPr/>
         </p:nvSpPr>
         <p:spPr>
           <a:xfrm>
             <a:off x="2743200" y="0"/>
-            <a:ext cx="17280" cy="6856920"/>
+            <a:ext cx="16920" cy="6856560"/>
           </a:xfrm>
           <a:prstGeom prst="rect">
             <a:avLst/>
@@ -5349,6 +5644,11 @@
             <a:noAutofit/>
           </a:bodyPr>
           <a:p>
+            <a:pPr>
+              <a:lnSpc>
+                <a:spcPct val="100000"/>
+              </a:lnSpc>
+            </a:pPr>
             <a:endParaRPr b="0" lang="en-US" sz="1800" spc="-1" strike="noStrike">
               <a:solidFill>
                 <a:schemeClr val="lt1"/>
@@ -5361,14 +5661,14 @@
       </p:sp>
       <p:sp>
         <p:nvSpPr>
-          <p:cNvPr id="70" name="Rectangle 37"/>
+          <p:cNvPr id="72" name="Rectangle 37"/>
           <p:cNvSpPr/>
           <p:nvPr/>
         </p:nvSpPr>
         <p:spPr>
           <a:xfrm>
             <a:off x="3657600" y="0"/>
-            <a:ext cx="17280" cy="6856920"/>
+            <a:ext cx="16920" cy="6856560"/>
           </a:xfrm>
           <a:prstGeom prst="rect">
             <a:avLst/>
@@ -5404,6 +5704,11 @@
             <a:noAutofit/>
           </a:bodyPr>
           <a:p>
+            <a:pPr>
+              <a:lnSpc>
+                <a:spcPct val="100000"/>
+              </a:lnSpc>
+            </a:pPr>
             <a:endParaRPr b="0" lang="en-US" sz="1800" spc="-1" strike="noStrike">
               <a:solidFill>
                 <a:schemeClr val="lt1"/>
@@ -5416,14 +5721,14 @@
       </p:sp>
       <p:sp>
         <p:nvSpPr>
-          <p:cNvPr id="71" name="Rectangle 38"/>
+          <p:cNvPr id="73" name="Rectangle 38"/>
           <p:cNvSpPr/>
           <p:nvPr/>
         </p:nvSpPr>
         <p:spPr>
           <a:xfrm>
             <a:off x="4572000" y="0"/>
-            <a:ext cx="17280" cy="6856920"/>
+            <a:ext cx="16920" cy="6856560"/>
           </a:xfrm>
           <a:prstGeom prst="rect">
             <a:avLst/>
@@ -5459,6 +5764,11 @@
             <a:noAutofit/>
           </a:bodyPr>
           <a:p>
+            <a:pPr>
+              <a:lnSpc>
+                <a:spcPct val="100000"/>
+              </a:lnSpc>
+            </a:pPr>
             <a:endParaRPr b="0" lang="en-US" sz="1800" spc="-1" strike="noStrike">
               <a:solidFill>
                 <a:schemeClr val="lt1"/>
@@ -5471,14 +5781,14 @@
       </p:sp>
       <p:sp>
         <p:nvSpPr>
-          <p:cNvPr id="72" name="Rectangle 39"/>
+          <p:cNvPr id="74" name="Rectangle 39"/>
           <p:cNvSpPr/>
           <p:nvPr/>
         </p:nvSpPr>
         <p:spPr>
           <a:xfrm>
             <a:off x="5486400" y="0"/>
-            <a:ext cx="17280" cy="6856920"/>
+            <a:ext cx="16920" cy="6856560"/>
           </a:xfrm>
           <a:prstGeom prst="rect">
             <a:avLst/>
@@ -5514,6 +5824,11 @@
             <a:noAutofit/>
           </a:bodyPr>
           <a:p>
+            <a:pPr>
+              <a:lnSpc>
+                <a:spcPct val="100000"/>
+              </a:lnSpc>
+            </a:pPr>
             <a:endParaRPr b="0" lang="en-US" sz="1800" spc="-1" strike="noStrike">
               <a:solidFill>
                 <a:schemeClr val="lt1"/>
@@ -5526,14 +5841,14 @@
       </p:sp>
       <p:sp>
         <p:nvSpPr>
-          <p:cNvPr id="73" name="Rectangle 40"/>
+          <p:cNvPr id="75" name="Rectangle 40"/>
           <p:cNvSpPr/>
           <p:nvPr/>
         </p:nvSpPr>
         <p:spPr>
           <a:xfrm>
             <a:off x="6400800" y="0"/>
-            <a:ext cx="17280" cy="6856920"/>
+            <a:ext cx="16920" cy="6856560"/>
           </a:xfrm>
           <a:prstGeom prst="rect">
             <a:avLst/>
@@ -5569,6 +5884,11 @@
             <a:noAutofit/>
           </a:bodyPr>
           <a:p>
+            <a:pPr>
+              <a:lnSpc>
+                <a:spcPct val="100000"/>
+              </a:lnSpc>
+            </a:pPr>
             <a:endParaRPr b="0" lang="en-US" sz="1800" spc="-1" strike="noStrike">
               <a:solidFill>
                 <a:schemeClr val="lt1"/>
@@ -5581,14 +5901,14 @@
       </p:sp>
       <p:sp>
         <p:nvSpPr>
-          <p:cNvPr id="74" name="Rectangle 41"/>
+          <p:cNvPr id="76" name="Rectangle 41"/>
           <p:cNvSpPr/>
           <p:nvPr/>
         </p:nvSpPr>
         <p:spPr>
           <a:xfrm>
             <a:off x="7315200" y="0"/>
-            <a:ext cx="17280" cy="6856920"/>
+            <a:ext cx="16920" cy="6856560"/>
           </a:xfrm>
           <a:prstGeom prst="rect">
             <a:avLst/>
@@ -5624,6 +5944,11 @@
             <a:noAutofit/>
           </a:bodyPr>
           <a:p>
+            <a:pPr>
+              <a:lnSpc>
+                <a:spcPct val="100000"/>
+              </a:lnSpc>
+            </a:pPr>
             <a:endParaRPr b="0" lang="en-US" sz="1800" spc="-1" strike="noStrike">
               <a:solidFill>
                 <a:schemeClr val="lt1"/>
@@ -5636,14 +5961,14 @@
       </p:sp>
       <p:sp>
         <p:nvSpPr>
-          <p:cNvPr id="75" name="Rectangle 42"/>
+          <p:cNvPr id="77" name="Rectangle 42"/>
           <p:cNvSpPr/>
           <p:nvPr/>
         </p:nvSpPr>
         <p:spPr>
           <a:xfrm>
             <a:off x="8229600" y="0"/>
-            <a:ext cx="17280" cy="6856920"/>
+            <a:ext cx="16920" cy="6856560"/>
           </a:xfrm>
           <a:prstGeom prst="rect">
             <a:avLst/>
@@ -5679,6 +6004,11 @@
             <a:noAutofit/>
           </a:bodyPr>
           <a:p>
+            <a:pPr>
+              <a:lnSpc>
+                <a:spcPct val="100000"/>
+              </a:lnSpc>
+            </a:pPr>
             <a:endParaRPr b="0" lang="en-US" sz="1800" spc="-1" strike="noStrike">
               <a:solidFill>
                 <a:schemeClr val="lt1"/>
@@ -5691,14 +6021,14 @@
       </p:sp>
       <p:sp>
         <p:nvSpPr>
-          <p:cNvPr id="76" name="Rectangle 43"/>
+          <p:cNvPr id="78" name="Rectangle 43"/>
           <p:cNvSpPr/>
           <p:nvPr/>
         </p:nvSpPr>
         <p:spPr>
           <a:xfrm>
             <a:off x="9144000" y="0"/>
-            <a:ext cx="17280" cy="6856920"/>
+            <a:ext cx="16920" cy="6856560"/>
           </a:xfrm>
           <a:prstGeom prst="rect">
             <a:avLst/>
@@ -5734,6 +6064,11 @@
             <a:noAutofit/>
           </a:bodyPr>
           <a:p>
+            <a:pPr>
+              <a:lnSpc>
+                <a:spcPct val="100000"/>
+              </a:lnSpc>
+            </a:pPr>
             <a:endParaRPr b="0" lang="en-US" sz="1800" spc="-1" strike="noStrike">
               <a:solidFill>
                 <a:schemeClr val="lt1"/>
@@ -5746,14 +6081,14 @@
       </p:sp>
       <p:sp>
         <p:nvSpPr>
-          <p:cNvPr id="77" name="Rectangle 44"/>
+          <p:cNvPr id="79" name="Rectangle 44"/>
           <p:cNvSpPr/>
           <p:nvPr/>
         </p:nvSpPr>
         <p:spPr>
           <a:xfrm>
             <a:off x="10058400" y="0"/>
-            <a:ext cx="17280" cy="6856920"/>
+            <a:ext cx="16920" cy="6856560"/>
           </a:xfrm>
           <a:prstGeom prst="rect">
             <a:avLst/>
@@ -5789,6 +6124,11 @@
             <a:noAutofit/>
           </a:bodyPr>
           <a:p>
+            <a:pPr>
+              <a:lnSpc>
+                <a:spcPct val="100000"/>
+              </a:lnSpc>
+            </a:pPr>
             <a:endParaRPr b="0" lang="en-US" sz="1800" spc="-1" strike="noStrike">
               <a:solidFill>
                 <a:schemeClr val="lt1"/>
@@ -5801,14 +6141,14 @@
       </p:sp>
       <p:sp>
         <p:nvSpPr>
-          <p:cNvPr id="78" name="Rectangle 45"/>
+          <p:cNvPr id="80" name="Rectangle 45"/>
           <p:cNvSpPr/>
           <p:nvPr/>
         </p:nvSpPr>
         <p:spPr>
           <a:xfrm>
             <a:off x="10972800" y="0"/>
-            <a:ext cx="17280" cy="6856920"/>
+            <a:ext cx="16920" cy="6856560"/>
           </a:xfrm>
           <a:prstGeom prst="rect">
             <a:avLst/>
@@ -5844,6 +6184,11 @@
             <a:noAutofit/>
           </a:bodyPr>
           <a:p>
+            <a:pPr>
+              <a:lnSpc>
+                <a:spcPct val="100000"/>
+              </a:lnSpc>
+            </a:pPr>
             <a:endParaRPr b="0" lang="en-US" sz="1800" spc="-1" strike="noStrike">
               <a:solidFill>
                 <a:schemeClr val="lt1"/>
@@ -5856,14 +6201,14 @@
       </p:sp>
       <p:sp>
         <p:nvSpPr>
-          <p:cNvPr id="79" name="Rectangle 46"/>
+          <p:cNvPr id="81" name="Rectangle 46"/>
           <p:cNvSpPr/>
           <p:nvPr/>
         </p:nvSpPr>
         <p:spPr>
           <a:xfrm>
             <a:off x="11887200" y="0"/>
-            <a:ext cx="17280" cy="6856920"/>
+            <a:ext cx="16920" cy="6856560"/>
           </a:xfrm>
           <a:prstGeom prst="rect">
             <a:avLst/>
@@ -5899,6 +6244,11 @@
             <a:noAutofit/>
           </a:bodyPr>
           <a:p>
+            <a:pPr>
+              <a:lnSpc>
+                <a:spcPct val="100000"/>
+              </a:lnSpc>
+            </a:pPr>
             <a:endParaRPr b="0" lang="en-US" sz="1800" spc="-1" strike="noStrike">
               <a:solidFill>
                 <a:schemeClr val="lt1"/>
@@ -5911,14 +6261,14 @@
       </p:sp>
       <p:sp>
         <p:nvSpPr>
-          <p:cNvPr id="80" name="Rectangle 47"/>
+          <p:cNvPr id="82" name="Rectangle 47"/>
           <p:cNvSpPr/>
           <p:nvPr/>
         </p:nvSpPr>
         <p:spPr>
           <a:xfrm>
             <a:off x="0" y="0"/>
-            <a:ext cx="318960" cy="6856920"/>
+            <a:ext cx="318600" cy="6856560"/>
           </a:xfrm>
           <a:prstGeom prst="rect">
             <a:avLst/>
@@ -5954,6 +6304,11 @@
             <a:noAutofit/>
           </a:bodyPr>
           <a:p>
+            <a:pPr>
+              <a:lnSpc>
+                <a:spcPct val="100000"/>
+              </a:lnSpc>
+            </a:pPr>
             <a:endParaRPr b="0" lang="en-US" sz="1800" spc="-1" strike="noStrike">
               <a:solidFill>
                 <a:schemeClr val="lt1"/>
@@ -5966,14 +6321,14 @@
       </p:sp>
       <p:sp>
         <p:nvSpPr>
-          <p:cNvPr id="81" name="Rounded Rectangle 8"/>
+          <p:cNvPr id="83" name="Rounded Rectangle 8"/>
           <p:cNvSpPr/>
           <p:nvPr/>
         </p:nvSpPr>
         <p:spPr>
           <a:xfrm>
             <a:off x="9875520" y="365760"/>
-            <a:ext cx="2010600" cy="501840"/>
+            <a:ext cx="2010240" cy="501480"/>
           </a:xfrm>
           <a:prstGeom prst="roundRect">
             <a:avLst>
@@ -6040,14 +6395,14 @@
       </p:sp>
       <p:sp>
         <p:nvSpPr>
-          <p:cNvPr id="82" name="TextBox 4"/>
+          <p:cNvPr id="84" name="TextBox 4"/>
           <p:cNvSpPr/>
           <p:nvPr/>
         </p:nvSpPr>
         <p:spPr>
           <a:xfrm>
             <a:off x="723240" y="914400"/>
-            <a:ext cx="9524880" cy="639000"/>
+            <a:ext cx="9524520" cy="638280"/>
           </a:xfrm>
           <a:prstGeom prst="rect">
             <a:avLst/>
@@ -6094,7 +6449,7 @@
       </p:sp>
       <p:sp>
         <p:nvSpPr>
-          <p:cNvPr id="83" name="TextBox 5"/>
+          <p:cNvPr id="85" name="TextBox 5"/>
           <p:cNvSpPr/>
           <p:nvPr/>
         </p:nvSpPr>
@@ -6194,14 +6549,14 @@
       </p:sp>
       <p:sp>
         <p:nvSpPr>
-          <p:cNvPr id="84" name="Rounded Rectangle 9"/>
+          <p:cNvPr id="86" name="Rounded Rectangle 9"/>
           <p:cNvSpPr/>
           <p:nvPr/>
         </p:nvSpPr>
         <p:spPr>
           <a:xfrm>
             <a:off x="987480" y="3182040"/>
-            <a:ext cx="3290760" cy="2742120"/>
+            <a:ext cx="3290400" cy="2741760"/>
           </a:xfrm>
           <a:prstGeom prst="roundRect">
             <a:avLst>
@@ -6239,6 +6594,11 @@
             <a:noAutofit/>
           </a:bodyPr>
           <a:p>
+            <a:pPr>
+              <a:lnSpc>
+                <a:spcPct val="100000"/>
+              </a:lnSpc>
+            </a:pPr>
             <a:endParaRPr b="0" lang="en-US" sz="1800" spc="-1" strike="noStrike">
               <a:solidFill>
                 <a:schemeClr val="lt1"/>
@@ -6251,14 +6611,14 @@
       </p:sp>
       <p:sp>
         <p:nvSpPr>
-          <p:cNvPr id="85" name="Rounded Rectangle 10"/>
+          <p:cNvPr id="87" name="Rounded Rectangle 10"/>
           <p:cNvSpPr/>
           <p:nvPr/>
         </p:nvSpPr>
         <p:spPr>
           <a:xfrm>
             <a:off x="914400" y="3108960"/>
-            <a:ext cx="3290760" cy="2742120"/>
+            <a:ext cx="3290400" cy="2741760"/>
           </a:xfrm>
           <a:prstGeom prst="roundRect">
             <a:avLst>
@@ -6319,7 +6679,7 @@
               </a:rPr>
               <a:t>ZoneId → Saat dilimini temsil eder</a:t>
             </a:r>
-            <a:endParaRPr b="1" lang="en-US" sz="1800" spc="-1" strike="noStrike">
+            <a:endParaRPr b="0" lang="en-US" sz="1800" spc="-1" strike="noStrike">
               <a:solidFill>
                 <a:srgbClr val="ffffff"/>
               </a:solidFill>
@@ -6347,7 +6707,7 @@
               </a:rPr>
               <a:t>ZonedDateTime → Saat dilimi ile birlikte tarih ve saat bilgisini tutar</a:t>
             </a:r>
-            <a:endParaRPr b="1" lang="en-US" sz="1800" spc="-1" strike="noStrike">
+            <a:endParaRPr b="0" lang="en-US" sz="1800" spc="-1" strike="noStrike">
               <a:solidFill>
                 <a:srgbClr val="ffffff"/>
               </a:solidFill>
@@ -6375,7 +6735,7 @@
               </a:rPr>
               <a:t>Her bölge için farklı UTC offset otomatik hesaplanır</a:t>
             </a:r>
-            <a:endParaRPr b="1" lang="en-US" sz="1800" spc="-1" strike="noStrike">
+            <a:endParaRPr b="0" lang="en-US" sz="1800" spc="-1" strike="noStrike">
               <a:solidFill>
                 <a:srgbClr val="ffffff"/>
               </a:solidFill>
@@ -6403,7 +6763,7 @@
               </a:rPr>
               <a:t>Yaz saati / kış saati değişimleri otomatik yönetilir</a:t>
             </a:r>
-            <a:endParaRPr b="1" lang="en-US" sz="1800" spc="-1" strike="noStrike">
+            <a:endParaRPr b="0" lang="en-US" sz="1800" spc="-1" strike="noStrike">
               <a:solidFill>
                 <a:srgbClr val="ffffff"/>
               </a:solidFill>
@@ -6414,14 +6774,14 @@
       </p:sp>
       <p:sp>
         <p:nvSpPr>
-          <p:cNvPr id="86" name="Rounded Rectangle 11"/>
+          <p:cNvPr id="88" name="Rounded Rectangle 11"/>
           <p:cNvSpPr/>
           <p:nvPr/>
         </p:nvSpPr>
         <p:spPr>
           <a:xfrm>
             <a:off x="4507920" y="3182040"/>
-            <a:ext cx="3290760" cy="2742120"/>
+            <a:ext cx="3290400" cy="2741760"/>
           </a:xfrm>
           <a:prstGeom prst="roundRect">
             <a:avLst>
@@ -6459,6 +6819,11 @@
             <a:noAutofit/>
           </a:bodyPr>
           <a:p>
+            <a:pPr>
+              <a:lnSpc>
+                <a:spcPct val="100000"/>
+              </a:lnSpc>
+            </a:pPr>
             <a:endParaRPr b="0" lang="en-US" sz="1800" spc="-1" strike="noStrike">
               <a:solidFill>
                 <a:schemeClr val="lt1"/>
@@ -6471,14 +6836,14 @@
       </p:sp>
       <p:sp>
         <p:nvSpPr>
-          <p:cNvPr id="87" name="Rounded Rectangle 12"/>
+          <p:cNvPr id="89" name="Rounded Rectangle 12"/>
           <p:cNvSpPr/>
           <p:nvPr/>
         </p:nvSpPr>
         <p:spPr>
           <a:xfrm>
             <a:off x="4434840" y="3108960"/>
-            <a:ext cx="3290760" cy="2742120"/>
+            <a:ext cx="3290400" cy="2741760"/>
           </a:xfrm>
           <a:prstGeom prst="roundRect">
             <a:avLst>
@@ -6729,14 +7094,14 @@
       </p:sp>
       <p:sp>
         <p:nvSpPr>
-          <p:cNvPr id="88" name="Rounded Rectangle 13"/>
+          <p:cNvPr id="90" name="Rounded Rectangle 13"/>
           <p:cNvSpPr/>
           <p:nvPr/>
         </p:nvSpPr>
         <p:spPr>
           <a:xfrm>
             <a:off x="8028360" y="3182040"/>
-            <a:ext cx="3290760" cy="2742120"/>
+            <a:ext cx="3290400" cy="2741760"/>
           </a:xfrm>
           <a:prstGeom prst="roundRect">
             <a:avLst>
@@ -6774,6 +7139,11 @@
             <a:noAutofit/>
           </a:bodyPr>
           <a:p>
+            <a:pPr>
+              <a:lnSpc>
+                <a:spcPct val="100000"/>
+              </a:lnSpc>
+            </a:pPr>
             <a:endParaRPr b="0" lang="en-US" sz="1800" spc="-1" strike="noStrike">
               <a:solidFill>
                 <a:schemeClr val="lt1"/>
@@ -6786,14 +7156,14 @@
       </p:sp>
       <p:sp>
         <p:nvSpPr>
-          <p:cNvPr id="89" name="Rounded Rectangle 14"/>
+          <p:cNvPr id="91" name="Rounded Rectangle 14"/>
           <p:cNvSpPr/>
           <p:nvPr/>
         </p:nvSpPr>
         <p:spPr>
           <a:xfrm>
             <a:off x="7955280" y="3108960"/>
-            <a:ext cx="3703320" cy="3063240"/>
+            <a:ext cx="3702960" cy="3062880"/>
           </a:xfrm>
           <a:prstGeom prst="roundRect">
             <a:avLst>
@@ -7147,14 +7517,2164 @@
       </p:sp>
       <p:sp>
         <p:nvSpPr>
-          <p:cNvPr id="90" name="TextBox 6"/>
+          <p:cNvPr id="92" name="TextBox 6"/>
           <p:cNvSpPr/>
           <p:nvPr/>
         </p:nvSpPr>
         <p:spPr>
           <a:xfrm>
             <a:off x="4600080" y="6446520"/>
-            <a:ext cx="3051720" cy="363960"/>
+            <a:ext cx="3051360" cy="363960"/>
+          </a:xfrm>
+          <a:prstGeom prst="rect">
+            <a:avLst/>
+          </a:prstGeom>
+          <a:noFill/>
+          <a:ln w="0">
+            <a:noFill/>
+          </a:ln>
+        </p:spPr>
+        <p:style>
+          <a:lnRef idx="0"/>
+          <a:fillRef idx="0"/>
+          <a:effectRef idx="0"/>
+          <a:fontRef idx="minor"/>
+        </p:style>
+        <p:txBody>
+          <a:bodyPr wrap="none" lIns="90000" rIns="90000" tIns="45000" bIns="45000" anchor="t">
+            <a:spAutoFit/>
+          </a:bodyPr>
+          <a:p>
+            <a:pPr>
+              <a:lnSpc>
+                <a:spcPct val="100000"/>
+              </a:lnSpc>
+            </a:pPr>
+            <a:r>
+              <a:rPr b="0" lang="en-US" sz="1800" spc="-1" strike="noStrike">
+                <a:solidFill>
+                  <a:srgbClr val="000000"/>
+                </a:solidFill>
+                <a:latin typeface="Calibri"/>
+                <a:ea typeface="DejaVu Sans"/>
+              </a:rPr>
+              <a:t>Java • Ultra Premium Template</a:t>
+            </a:r>
+            <a:endParaRPr b="0" lang="en-US" sz="1800" spc="-1" strike="noStrike">
+              <a:solidFill>
+                <a:srgbClr val="000000"/>
+              </a:solidFill>
+              <a:latin typeface="Arial"/>
+            </a:endParaRPr>
+          </a:p>
+        </p:txBody>
+      </p:sp>
+    </p:spTree>
+  </p:cSld>
+  <mc:AlternateContent>
+    <mc:Choice Requires="p14">
+      <p:transition spd="slow" p14:dur="2000"/>
+    </mc:Choice>
+    <mc:Fallback>
+      <p:transition spd="slow"/>
+    </mc:Fallback>
+  </mc:AlternateContent>
+</p:sld>
+</file>
+
+<file path=ppt/slides/slide3.xml><?xml version="1.0" encoding="utf-8"?>
+<p:sld xmlns:a="http://schemas.openxmlformats.org/drawingml/2006/main" xmlns:p="http://schemas.openxmlformats.org/presentationml/2006/main" xmlns:r="http://schemas.openxmlformats.org/officeDocument/2006/relationships" xmlns:p14="http://schemas.microsoft.com/office/powerpoint/2010/main" xmlns:p15="http://schemas.microsoft.com/office/powerpoint/2012/main" xmlns:mc="http://schemas.openxmlformats.org/markup-compatibility/2006">
+  <p:cSld>
+    <p:spTree>
+      <p:nvGrpSpPr>
+        <p:cNvPr id="1" name=""/>
+        <p:cNvGrpSpPr/>
+        <p:nvPr/>
+      </p:nvGrpSpPr>
+      <p:grpSpPr>
+        <a:xfrm>
+          <a:off x="0" y="0"/>
+          <a:ext cx="0" cy="0"/>
+          <a:chOff x="0" y="0"/>
+          <a:chExt cx="0" cy="0"/>
+        </a:xfrm>
+      </p:grpSpPr>
+      <p:sp>
+        <p:nvSpPr>
+          <p:cNvPr id="93" name="Rectangle 17"/>
+          <p:cNvSpPr/>
+          <p:nvPr/>
+        </p:nvSpPr>
+        <p:spPr>
+          <a:xfrm>
+            <a:off x="0" y="0"/>
+            <a:ext cx="12187440" cy="6856560"/>
+          </a:xfrm>
+          <a:prstGeom prst="rect">
+            <a:avLst/>
+          </a:prstGeom>
+          <a:solidFill>
+            <a:srgbClr val="0b0b0d"/>
+          </a:solidFill>
+          <a:ln>
+            <a:noFill/>
+          </a:ln>
+          <a:effectLst>
+            <a:outerShdw blurRad="39960" dir="5400000" dist="23040" rotWithShape="0">
+              <a:srgbClr val="000000">
+                <a:alpha val="35000"/>
+              </a:srgbClr>
+            </a:outerShdw>
+          </a:effectLst>
+        </p:spPr>
+        <p:style>
+          <a:lnRef idx="1">
+            <a:schemeClr val="accent1"/>
+          </a:lnRef>
+          <a:fillRef idx="3">
+            <a:schemeClr val="accent1"/>
+          </a:fillRef>
+          <a:effectRef idx="2">
+            <a:schemeClr val="accent1"/>
+          </a:effectRef>
+          <a:fontRef idx="minor"/>
+        </p:style>
+        <p:txBody>
+          <a:bodyPr lIns="90000" rIns="90000" tIns="45000" bIns="45000" anchor="ctr">
+            <a:noAutofit/>
+          </a:bodyPr>
+          <a:p>
+            <a:endParaRPr b="0" lang="en-US" sz="1800" spc="-1" strike="noStrike">
+              <a:solidFill>
+                <a:schemeClr val="lt1"/>
+              </a:solidFill>
+              <a:latin typeface="Calibri"/>
+              <a:ea typeface="DejaVu Sans"/>
+            </a:endParaRPr>
+          </a:p>
+        </p:txBody>
+      </p:sp>
+      <p:sp>
+        <p:nvSpPr>
+          <p:cNvPr id="94" name="Rectangle 18"/>
+          <p:cNvSpPr/>
+          <p:nvPr/>
+        </p:nvSpPr>
+        <p:spPr>
+          <a:xfrm>
+            <a:off x="0" y="0"/>
+            <a:ext cx="16920" cy="6856560"/>
+          </a:xfrm>
+          <a:prstGeom prst="rect">
+            <a:avLst/>
+          </a:prstGeom>
+          <a:solidFill>
+            <a:srgbClr val="121216"/>
+          </a:solidFill>
+          <a:ln>
+            <a:noFill/>
+          </a:ln>
+          <a:effectLst>
+            <a:outerShdw blurRad="39960" dir="5400000" dist="23040" rotWithShape="0">
+              <a:srgbClr val="000000">
+                <a:alpha val="35000"/>
+              </a:srgbClr>
+            </a:outerShdw>
+          </a:effectLst>
+        </p:spPr>
+        <p:style>
+          <a:lnRef idx="1">
+            <a:schemeClr val="accent1"/>
+          </a:lnRef>
+          <a:fillRef idx="3">
+            <a:schemeClr val="accent1"/>
+          </a:fillRef>
+          <a:effectRef idx="2">
+            <a:schemeClr val="accent1"/>
+          </a:effectRef>
+          <a:fontRef idx="minor"/>
+        </p:style>
+        <p:txBody>
+          <a:bodyPr lIns="90000" rIns="90000" tIns="45000" bIns="45000" anchor="ctr">
+            <a:noAutofit/>
+          </a:bodyPr>
+          <a:p>
+            <a:endParaRPr b="0" lang="en-US" sz="1800" spc="-1" strike="noStrike">
+              <a:solidFill>
+                <a:schemeClr val="lt1"/>
+              </a:solidFill>
+              <a:latin typeface="Calibri"/>
+              <a:ea typeface="DejaVu Sans"/>
+            </a:endParaRPr>
+          </a:p>
+        </p:txBody>
+      </p:sp>
+      <p:sp>
+        <p:nvSpPr>
+          <p:cNvPr id="95" name="Rectangle 19"/>
+          <p:cNvSpPr/>
+          <p:nvPr/>
+        </p:nvSpPr>
+        <p:spPr>
+          <a:xfrm>
+            <a:off x="914400" y="0"/>
+            <a:ext cx="16920" cy="6856560"/>
+          </a:xfrm>
+          <a:prstGeom prst="rect">
+            <a:avLst/>
+          </a:prstGeom>
+          <a:solidFill>
+            <a:srgbClr val="121216"/>
+          </a:solidFill>
+          <a:ln>
+            <a:noFill/>
+          </a:ln>
+          <a:effectLst>
+            <a:outerShdw blurRad="39960" dir="5400000" dist="23040" rotWithShape="0">
+              <a:srgbClr val="000000">
+                <a:alpha val="35000"/>
+              </a:srgbClr>
+            </a:outerShdw>
+          </a:effectLst>
+        </p:spPr>
+        <p:style>
+          <a:lnRef idx="1">
+            <a:schemeClr val="accent1"/>
+          </a:lnRef>
+          <a:fillRef idx="3">
+            <a:schemeClr val="accent1"/>
+          </a:fillRef>
+          <a:effectRef idx="2">
+            <a:schemeClr val="accent1"/>
+          </a:effectRef>
+          <a:fontRef idx="minor"/>
+        </p:style>
+        <p:txBody>
+          <a:bodyPr lIns="90000" rIns="90000" tIns="45000" bIns="45000" anchor="ctr">
+            <a:noAutofit/>
+          </a:bodyPr>
+          <a:p>
+            <a:endParaRPr b="0" lang="en-US" sz="1800" spc="-1" strike="noStrike">
+              <a:solidFill>
+                <a:schemeClr val="lt1"/>
+              </a:solidFill>
+              <a:latin typeface="Calibri"/>
+              <a:ea typeface="DejaVu Sans"/>
+            </a:endParaRPr>
+          </a:p>
+        </p:txBody>
+      </p:sp>
+      <p:sp>
+        <p:nvSpPr>
+          <p:cNvPr id="96" name="Rectangle 20"/>
+          <p:cNvSpPr/>
+          <p:nvPr/>
+        </p:nvSpPr>
+        <p:spPr>
+          <a:xfrm>
+            <a:off x="1828800" y="0"/>
+            <a:ext cx="16920" cy="6856560"/>
+          </a:xfrm>
+          <a:prstGeom prst="rect">
+            <a:avLst/>
+          </a:prstGeom>
+          <a:solidFill>
+            <a:srgbClr val="121216"/>
+          </a:solidFill>
+          <a:ln>
+            <a:noFill/>
+          </a:ln>
+          <a:effectLst>
+            <a:outerShdw blurRad="39960" dir="5400000" dist="23040" rotWithShape="0">
+              <a:srgbClr val="000000">
+                <a:alpha val="35000"/>
+              </a:srgbClr>
+            </a:outerShdw>
+          </a:effectLst>
+        </p:spPr>
+        <p:style>
+          <a:lnRef idx="1">
+            <a:schemeClr val="accent1"/>
+          </a:lnRef>
+          <a:fillRef idx="3">
+            <a:schemeClr val="accent1"/>
+          </a:fillRef>
+          <a:effectRef idx="2">
+            <a:schemeClr val="accent1"/>
+          </a:effectRef>
+          <a:fontRef idx="minor"/>
+        </p:style>
+        <p:txBody>
+          <a:bodyPr lIns="90000" rIns="90000" tIns="45000" bIns="45000" anchor="ctr">
+            <a:noAutofit/>
+          </a:bodyPr>
+          <a:p>
+            <a:endParaRPr b="0" lang="en-US" sz="1800" spc="-1" strike="noStrike">
+              <a:solidFill>
+                <a:schemeClr val="lt1"/>
+              </a:solidFill>
+              <a:latin typeface="Calibri"/>
+              <a:ea typeface="DejaVu Sans"/>
+            </a:endParaRPr>
+          </a:p>
+        </p:txBody>
+      </p:sp>
+      <p:sp>
+        <p:nvSpPr>
+          <p:cNvPr id="97" name="Rectangle 21"/>
+          <p:cNvSpPr/>
+          <p:nvPr/>
+        </p:nvSpPr>
+        <p:spPr>
+          <a:xfrm>
+            <a:off x="2743200" y="0"/>
+            <a:ext cx="16920" cy="6856560"/>
+          </a:xfrm>
+          <a:prstGeom prst="rect">
+            <a:avLst/>
+          </a:prstGeom>
+          <a:solidFill>
+            <a:srgbClr val="121216"/>
+          </a:solidFill>
+          <a:ln>
+            <a:noFill/>
+          </a:ln>
+          <a:effectLst>
+            <a:outerShdw blurRad="39960" dir="5400000" dist="23040" rotWithShape="0">
+              <a:srgbClr val="000000">
+                <a:alpha val="35000"/>
+              </a:srgbClr>
+            </a:outerShdw>
+          </a:effectLst>
+        </p:spPr>
+        <p:style>
+          <a:lnRef idx="1">
+            <a:schemeClr val="accent1"/>
+          </a:lnRef>
+          <a:fillRef idx="3">
+            <a:schemeClr val="accent1"/>
+          </a:fillRef>
+          <a:effectRef idx="2">
+            <a:schemeClr val="accent1"/>
+          </a:effectRef>
+          <a:fontRef idx="minor"/>
+        </p:style>
+        <p:txBody>
+          <a:bodyPr lIns="90000" rIns="90000" tIns="45000" bIns="45000" anchor="ctr">
+            <a:noAutofit/>
+          </a:bodyPr>
+          <a:p>
+            <a:endParaRPr b="0" lang="en-US" sz="1800" spc="-1" strike="noStrike">
+              <a:solidFill>
+                <a:schemeClr val="lt1"/>
+              </a:solidFill>
+              <a:latin typeface="Calibri"/>
+              <a:ea typeface="DejaVu Sans"/>
+            </a:endParaRPr>
+          </a:p>
+        </p:txBody>
+      </p:sp>
+      <p:sp>
+        <p:nvSpPr>
+          <p:cNvPr id="98" name="Rectangle 22"/>
+          <p:cNvSpPr/>
+          <p:nvPr/>
+        </p:nvSpPr>
+        <p:spPr>
+          <a:xfrm>
+            <a:off x="3657600" y="0"/>
+            <a:ext cx="16920" cy="6856560"/>
+          </a:xfrm>
+          <a:prstGeom prst="rect">
+            <a:avLst/>
+          </a:prstGeom>
+          <a:solidFill>
+            <a:srgbClr val="121216"/>
+          </a:solidFill>
+          <a:ln>
+            <a:noFill/>
+          </a:ln>
+          <a:effectLst>
+            <a:outerShdw blurRad="39960" dir="5400000" dist="23040" rotWithShape="0">
+              <a:srgbClr val="000000">
+                <a:alpha val="35000"/>
+              </a:srgbClr>
+            </a:outerShdw>
+          </a:effectLst>
+        </p:spPr>
+        <p:style>
+          <a:lnRef idx="1">
+            <a:schemeClr val="accent1"/>
+          </a:lnRef>
+          <a:fillRef idx="3">
+            <a:schemeClr val="accent1"/>
+          </a:fillRef>
+          <a:effectRef idx="2">
+            <a:schemeClr val="accent1"/>
+          </a:effectRef>
+          <a:fontRef idx="minor"/>
+        </p:style>
+        <p:txBody>
+          <a:bodyPr lIns="90000" rIns="90000" tIns="45000" bIns="45000" anchor="ctr">
+            <a:noAutofit/>
+          </a:bodyPr>
+          <a:p>
+            <a:endParaRPr b="0" lang="en-US" sz="1800" spc="-1" strike="noStrike">
+              <a:solidFill>
+                <a:schemeClr val="lt1"/>
+              </a:solidFill>
+              <a:latin typeface="Calibri"/>
+              <a:ea typeface="DejaVu Sans"/>
+            </a:endParaRPr>
+          </a:p>
+        </p:txBody>
+      </p:sp>
+      <p:sp>
+        <p:nvSpPr>
+          <p:cNvPr id="99" name="Rectangle 23"/>
+          <p:cNvSpPr/>
+          <p:nvPr/>
+        </p:nvSpPr>
+        <p:spPr>
+          <a:xfrm>
+            <a:off x="4572000" y="0"/>
+            <a:ext cx="16920" cy="6856560"/>
+          </a:xfrm>
+          <a:prstGeom prst="rect">
+            <a:avLst/>
+          </a:prstGeom>
+          <a:solidFill>
+            <a:srgbClr val="121216"/>
+          </a:solidFill>
+          <a:ln>
+            <a:noFill/>
+          </a:ln>
+          <a:effectLst>
+            <a:outerShdw blurRad="39960" dir="5400000" dist="23040" rotWithShape="0">
+              <a:srgbClr val="000000">
+                <a:alpha val="35000"/>
+              </a:srgbClr>
+            </a:outerShdw>
+          </a:effectLst>
+        </p:spPr>
+        <p:style>
+          <a:lnRef idx="1">
+            <a:schemeClr val="accent1"/>
+          </a:lnRef>
+          <a:fillRef idx="3">
+            <a:schemeClr val="accent1"/>
+          </a:fillRef>
+          <a:effectRef idx="2">
+            <a:schemeClr val="accent1"/>
+          </a:effectRef>
+          <a:fontRef idx="minor"/>
+        </p:style>
+        <p:txBody>
+          <a:bodyPr lIns="90000" rIns="90000" tIns="45000" bIns="45000" anchor="ctr">
+            <a:noAutofit/>
+          </a:bodyPr>
+          <a:p>
+            <a:endParaRPr b="0" lang="en-US" sz="1800" spc="-1" strike="noStrike">
+              <a:solidFill>
+                <a:schemeClr val="lt1"/>
+              </a:solidFill>
+              <a:latin typeface="Calibri"/>
+              <a:ea typeface="DejaVu Sans"/>
+            </a:endParaRPr>
+          </a:p>
+        </p:txBody>
+      </p:sp>
+      <p:sp>
+        <p:nvSpPr>
+          <p:cNvPr id="100" name="Rectangle 24"/>
+          <p:cNvSpPr/>
+          <p:nvPr/>
+        </p:nvSpPr>
+        <p:spPr>
+          <a:xfrm>
+            <a:off x="5486400" y="0"/>
+            <a:ext cx="16920" cy="6856560"/>
+          </a:xfrm>
+          <a:prstGeom prst="rect">
+            <a:avLst/>
+          </a:prstGeom>
+          <a:solidFill>
+            <a:srgbClr val="121216"/>
+          </a:solidFill>
+          <a:ln>
+            <a:noFill/>
+          </a:ln>
+          <a:effectLst>
+            <a:outerShdw blurRad="39960" dir="5400000" dist="23040" rotWithShape="0">
+              <a:srgbClr val="000000">
+                <a:alpha val="35000"/>
+              </a:srgbClr>
+            </a:outerShdw>
+          </a:effectLst>
+        </p:spPr>
+        <p:style>
+          <a:lnRef idx="1">
+            <a:schemeClr val="accent1"/>
+          </a:lnRef>
+          <a:fillRef idx="3">
+            <a:schemeClr val="accent1"/>
+          </a:fillRef>
+          <a:effectRef idx="2">
+            <a:schemeClr val="accent1"/>
+          </a:effectRef>
+          <a:fontRef idx="minor"/>
+        </p:style>
+        <p:txBody>
+          <a:bodyPr lIns="90000" rIns="90000" tIns="45000" bIns="45000" anchor="ctr">
+            <a:noAutofit/>
+          </a:bodyPr>
+          <a:p>
+            <a:endParaRPr b="0" lang="en-US" sz="1800" spc="-1" strike="noStrike">
+              <a:solidFill>
+                <a:schemeClr val="lt1"/>
+              </a:solidFill>
+              <a:latin typeface="Calibri"/>
+              <a:ea typeface="DejaVu Sans"/>
+            </a:endParaRPr>
+          </a:p>
+        </p:txBody>
+      </p:sp>
+      <p:sp>
+        <p:nvSpPr>
+          <p:cNvPr id="101" name="Rectangle 25"/>
+          <p:cNvSpPr/>
+          <p:nvPr/>
+        </p:nvSpPr>
+        <p:spPr>
+          <a:xfrm>
+            <a:off x="6400800" y="0"/>
+            <a:ext cx="16920" cy="6856560"/>
+          </a:xfrm>
+          <a:prstGeom prst="rect">
+            <a:avLst/>
+          </a:prstGeom>
+          <a:solidFill>
+            <a:srgbClr val="121216"/>
+          </a:solidFill>
+          <a:ln>
+            <a:noFill/>
+          </a:ln>
+          <a:effectLst>
+            <a:outerShdw blurRad="39960" dir="5400000" dist="23040" rotWithShape="0">
+              <a:srgbClr val="000000">
+                <a:alpha val="35000"/>
+              </a:srgbClr>
+            </a:outerShdw>
+          </a:effectLst>
+        </p:spPr>
+        <p:style>
+          <a:lnRef idx="1">
+            <a:schemeClr val="accent1"/>
+          </a:lnRef>
+          <a:fillRef idx="3">
+            <a:schemeClr val="accent1"/>
+          </a:fillRef>
+          <a:effectRef idx="2">
+            <a:schemeClr val="accent1"/>
+          </a:effectRef>
+          <a:fontRef idx="minor"/>
+        </p:style>
+        <p:txBody>
+          <a:bodyPr lIns="90000" rIns="90000" tIns="45000" bIns="45000" anchor="ctr">
+            <a:noAutofit/>
+          </a:bodyPr>
+          <a:p>
+            <a:endParaRPr b="0" lang="en-US" sz="1800" spc="-1" strike="noStrike">
+              <a:solidFill>
+                <a:schemeClr val="lt1"/>
+              </a:solidFill>
+              <a:latin typeface="Calibri"/>
+              <a:ea typeface="DejaVu Sans"/>
+            </a:endParaRPr>
+          </a:p>
+        </p:txBody>
+      </p:sp>
+      <p:sp>
+        <p:nvSpPr>
+          <p:cNvPr id="102" name="Rectangle 26"/>
+          <p:cNvSpPr/>
+          <p:nvPr/>
+        </p:nvSpPr>
+        <p:spPr>
+          <a:xfrm>
+            <a:off x="7315200" y="0"/>
+            <a:ext cx="16920" cy="6856560"/>
+          </a:xfrm>
+          <a:prstGeom prst="rect">
+            <a:avLst/>
+          </a:prstGeom>
+          <a:solidFill>
+            <a:srgbClr val="121216"/>
+          </a:solidFill>
+          <a:ln>
+            <a:noFill/>
+          </a:ln>
+          <a:effectLst>
+            <a:outerShdw blurRad="39960" dir="5400000" dist="23040" rotWithShape="0">
+              <a:srgbClr val="000000">
+                <a:alpha val="35000"/>
+              </a:srgbClr>
+            </a:outerShdw>
+          </a:effectLst>
+        </p:spPr>
+        <p:style>
+          <a:lnRef idx="1">
+            <a:schemeClr val="accent1"/>
+          </a:lnRef>
+          <a:fillRef idx="3">
+            <a:schemeClr val="accent1"/>
+          </a:fillRef>
+          <a:effectRef idx="2">
+            <a:schemeClr val="accent1"/>
+          </a:effectRef>
+          <a:fontRef idx="minor"/>
+        </p:style>
+        <p:txBody>
+          <a:bodyPr lIns="90000" rIns="90000" tIns="45000" bIns="45000" anchor="ctr">
+            <a:noAutofit/>
+          </a:bodyPr>
+          <a:p>
+            <a:endParaRPr b="0" lang="en-US" sz="1800" spc="-1" strike="noStrike">
+              <a:solidFill>
+                <a:schemeClr val="lt1"/>
+              </a:solidFill>
+              <a:latin typeface="Calibri"/>
+              <a:ea typeface="DejaVu Sans"/>
+            </a:endParaRPr>
+          </a:p>
+        </p:txBody>
+      </p:sp>
+      <p:sp>
+        <p:nvSpPr>
+          <p:cNvPr id="103" name="Rectangle 27"/>
+          <p:cNvSpPr/>
+          <p:nvPr/>
+        </p:nvSpPr>
+        <p:spPr>
+          <a:xfrm>
+            <a:off x="8229600" y="0"/>
+            <a:ext cx="16920" cy="6856560"/>
+          </a:xfrm>
+          <a:prstGeom prst="rect">
+            <a:avLst/>
+          </a:prstGeom>
+          <a:solidFill>
+            <a:srgbClr val="121216"/>
+          </a:solidFill>
+          <a:ln>
+            <a:noFill/>
+          </a:ln>
+          <a:effectLst>
+            <a:outerShdw blurRad="39960" dir="5400000" dist="23040" rotWithShape="0">
+              <a:srgbClr val="000000">
+                <a:alpha val="35000"/>
+              </a:srgbClr>
+            </a:outerShdw>
+          </a:effectLst>
+        </p:spPr>
+        <p:style>
+          <a:lnRef idx="1">
+            <a:schemeClr val="accent1"/>
+          </a:lnRef>
+          <a:fillRef idx="3">
+            <a:schemeClr val="accent1"/>
+          </a:fillRef>
+          <a:effectRef idx="2">
+            <a:schemeClr val="accent1"/>
+          </a:effectRef>
+          <a:fontRef idx="minor"/>
+        </p:style>
+        <p:txBody>
+          <a:bodyPr lIns="90000" rIns="90000" tIns="45000" bIns="45000" anchor="ctr">
+            <a:noAutofit/>
+          </a:bodyPr>
+          <a:p>
+            <a:endParaRPr b="0" lang="en-US" sz="1800" spc="-1" strike="noStrike">
+              <a:solidFill>
+                <a:schemeClr val="lt1"/>
+              </a:solidFill>
+              <a:latin typeface="Calibri"/>
+              <a:ea typeface="DejaVu Sans"/>
+            </a:endParaRPr>
+          </a:p>
+        </p:txBody>
+      </p:sp>
+      <p:sp>
+        <p:nvSpPr>
+          <p:cNvPr id="104" name="Rectangle 28"/>
+          <p:cNvSpPr/>
+          <p:nvPr/>
+        </p:nvSpPr>
+        <p:spPr>
+          <a:xfrm>
+            <a:off x="9144000" y="0"/>
+            <a:ext cx="16920" cy="6856560"/>
+          </a:xfrm>
+          <a:prstGeom prst="rect">
+            <a:avLst/>
+          </a:prstGeom>
+          <a:solidFill>
+            <a:srgbClr val="121216"/>
+          </a:solidFill>
+          <a:ln>
+            <a:noFill/>
+          </a:ln>
+          <a:effectLst>
+            <a:outerShdw blurRad="39960" dir="5400000" dist="23040" rotWithShape="0">
+              <a:srgbClr val="000000">
+                <a:alpha val="35000"/>
+              </a:srgbClr>
+            </a:outerShdw>
+          </a:effectLst>
+        </p:spPr>
+        <p:style>
+          <a:lnRef idx="1">
+            <a:schemeClr val="accent1"/>
+          </a:lnRef>
+          <a:fillRef idx="3">
+            <a:schemeClr val="accent1"/>
+          </a:fillRef>
+          <a:effectRef idx="2">
+            <a:schemeClr val="accent1"/>
+          </a:effectRef>
+          <a:fontRef idx="minor"/>
+        </p:style>
+        <p:txBody>
+          <a:bodyPr lIns="90000" rIns="90000" tIns="45000" bIns="45000" anchor="ctr">
+            <a:noAutofit/>
+          </a:bodyPr>
+          <a:p>
+            <a:endParaRPr b="0" lang="en-US" sz="1800" spc="-1" strike="noStrike">
+              <a:solidFill>
+                <a:schemeClr val="lt1"/>
+              </a:solidFill>
+              <a:latin typeface="Calibri"/>
+              <a:ea typeface="DejaVu Sans"/>
+            </a:endParaRPr>
+          </a:p>
+        </p:txBody>
+      </p:sp>
+      <p:sp>
+        <p:nvSpPr>
+          <p:cNvPr id="105" name="Rectangle 29"/>
+          <p:cNvSpPr/>
+          <p:nvPr/>
+        </p:nvSpPr>
+        <p:spPr>
+          <a:xfrm>
+            <a:off x="10058400" y="0"/>
+            <a:ext cx="16920" cy="6856560"/>
+          </a:xfrm>
+          <a:prstGeom prst="rect">
+            <a:avLst/>
+          </a:prstGeom>
+          <a:solidFill>
+            <a:srgbClr val="121216"/>
+          </a:solidFill>
+          <a:ln>
+            <a:noFill/>
+          </a:ln>
+          <a:effectLst>
+            <a:outerShdw blurRad="39960" dir="5400000" dist="23040" rotWithShape="0">
+              <a:srgbClr val="000000">
+                <a:alpha val="35000"/>
+              </a:srgbClr>
+            </a:outerShdw>
+          </a:effectLst>
+        </p:spPr>
+        <p:style>
+          <a:lnRef idx="1">
+            <a:schemeClr val="accent1"/>
+          </a:lnRef>
+          <a:fillRef idx="3">
+            <a:schemeClr val="accent1"/>
+          </a:fillRef>
+          <a:effectRef idx="2">
+            <a:schemeClr val="accent1"/>
+          </a:effectRef>
+          <a:fontRef idx="minor"/>
+        </p:style>
+        <p:txBody>
+          <a:bodyPr lIns="90000" rIns="90000" tIns="45000" bIns="45000" anchor="ctr">
+            <a:noAutofit/>
+          </a:bodyPr>
+          <a:p>
+            <a:endParaRPr b="0" lang="en-US" sz="1800" spc="-1" strike="noStrike">
+              <a:solidFill>
+                <a:schemeClr val="lt1"/>
+              </a:solidFill>
+              <a:latin typeface="Calibri"/>
+              <a:ea typeface="DejaVu Sans"/>
+            </a:endParaRPr>
+          </a:p>
+        </p:txBody>
+      </p:sp>
+      <p:sp>
+        <p:nvSpPr>
+          <p:cNvPr id="106" name="Rectangle 30"/>
+          <p:cNvSpPr/>
+          <p:nvPr/>
+        </p:nvSpPr>
+        <p:spPr>
+          <a:xfrm>
+            <a:off x="10972800" y="0"/>
+            <a:ext cx="16920" cy="6856560"/>
+          </a:xfrm>
+          <a:prstGeom prst="rect">
+            <a:avLst/>
+          </a:prstGeom>
+          <a:solidFill>
+            <a:srgbClr val="121216"/>
+          </a:solidFill>
+          <a:ln>
+            <a:noFill/>
+          </a:ln>
+          <a:effectLst>
+            <a:outerShdw blurRad="39960" dir="5400000" dist="23040" rotWithShape="0">
+              <a:srgbClr val="000000">
+                <a:alpha val="35000"/>
+              </a:srgbClr>
+            </a:outerShdw>
+          </a:effectLst>
+        </p:spPr>
+        <p:style>
+          <a:lnRef idx="1">
+            <a:schemeClr val="accent1"/>
+          </a:lnRef>
+          <a:fillRef idx="3">
+            <a:schemeClr val="accent1"/>
+          </a:fillRef>
+          <a:effectRef idx="2">
+            <a:schemeClr val="accent1"/>
+          </a:effectRef>
+          <a:fontRef idx="minor"/>
+        </p:style>
+        <p:txBody>
+          <a:bodyPr lIns="90000" rIns="90000" tIns="45000" bIns="45000" anchor="ctr">
+            <a:noAutofit/>
+          </a:bodyPr>
+          <a:p>
+            <a:endParaRPr b="0" lang="en-US" sz="1800" spc="-1" strike="noStrike">
+              <a:solidFill>
+                <a:schemeClr val="lt1"/>
+              </a:solidFill>
+              <a:latin typeface="Calibri"/>
+              <a:ea typeface="DejaVu Sans"/>
+            </a:endParaRPr>
+          </a:p>
+        </p:txBody>
+      </p:sp>
+      <p:sp>
+        <p:nvSpPr>
+          <p:cNvPr id="107" name="Rectangle 31"/>
+          <p:cNvSpPr/>
+          <p:nvPr/>
+        </p:nvSpPr>
+        <p:spPr>
+          <a:xfrm>
+            <a:off x="11887200" y="0"/>
+            <a:ext cx="16920" cy="6856560"/>
+          </a:xfrm>
+          <a:prstGeom prst="rect">
+            <a:avLst/>
+          </a:prstGeom>
+          <a:solidFill>
+            <a:srgbClr val="121216"/>
+          </a:solidFill>
+          <a:ln>
+            <a:noFill/>
+          </a:ln>
+          <a:effectLst>
+            <a:outerShdw blurRad="39960" dir="5400000" dist="23040" rotWithShape="0">
+              <a:srgbClr val="000000">
+                <a:alpha val="35000"/>
+              </a:srgbClr>
+            </a:outerShdw>
+          </a:effectLst>
+        </p:spPr>
+        <p:style>
+          <a:lnRef idx="1">
+            <a:schemeClr val="accent1"/>
+          </a:lnRef>
+          <a:fillRef idx="3">
+            <a:schemeClr val="accent1"/>
+          </a:fillRef>
+          <a:effectRef idx="2">
+            <a:schemeClr val="accent1"/>
+          </a:effectRef>
+          <a:fontRef idx="minor"/>
+        </p:style>
+        <p:txBody>
+          <a:bodyPr lIns="90000" rIns="90000" tIns="45000" bIns="45000" anchor="ctr">
+            <a:noAutofit/>
+          </a:bodyPr>
+          <a:p>
+            <a:endParaRPr b="0" lang="en-US" sz="1800" spc="-1" strike="noStrike">
+              <a:solidFill>
+                <a:schemeClr val="lt1"/>
+              </a:solidFill>
+              <a:latin typeface="Calibri"/>
+              <a:ea typeface="DejaVu Sans"/>
+            </a:endParaRPr>
+          </a:p>
+        </p:txBody>
+      </p:sp>
+      <p:sp>
+        <p:nvSpPr>
+          <p:cNvPr id="108" name="Rectangle 48"/>
+          <p:cNvSpPr/>
+          <p:nvPr/>
+        </p:nvSpPr>
+        <p:spPr>
+          <a:xfrm>
+            <a:off x="0" y="0"/>
+            <a:ext cx="318600" cy="6856560"/>
+          </a:xfrm>
+          <a:prstGeom prst="rect">
+            <a:avLst/>
+          </a:prstGeom>
+          <a:solidFill>
+            <a:srgbClr val="ff8c00"/>
+          </a:solidFill>
+          <a:ln>
+            <a:noFill/>
+          </a:ln>
+          <a:effectLst>
+            <a:outerShdw blurRad="39960" dir="5400000" dist="23040" rotWithShape="0">
+              <a:srgbClr val="000000">
+                <a:alpha val="35000"/>
+              </a:srgbClr>
+            </a:outerShdw>
+          </a:effectLst>
+        </p:spPr>
+        <p:style>
+          <a:lnRef idx="1">
+            <a:schemeClr val="accent1"/>
+          </a:lnRef>
+          <a:fillRef idx="3">
+            <a:schemeClr val="accent1"/>
+          </a:fillRef>
+          <a:effectRef idx="2">
+            <a:schemeClr val="accent1"/>
+          </a:effectRef>
+          <a:fontRef idx="minor"/>
+        </p:style>
+        <p:txBody>
+          <a:bodyPr lIns="90000" rIns="90000" tIns="45000" bIns="45000" anchor="ctr">
+            <a:noAutofit/>
+          </a:bodyPr>
+          <a:p>
+            <a:endParaRPr b="0" lang="en-US" sz="1800" spc="-1" strike="noStrike">
+              <a:solidFill>
+                <a:schemeClr val="lt1"/>
+              </a:solidFill>
+              <a:latin typeface="Calibri"/>
+              <a:ea typeface="DejaVu Sans"/>
+            </a:endParaRPr>
+          </a:p>
+        </p:txBody>
+      </p:sp>
+      <p:sp>
+        <p:nvSpPr>
+          <p:cNvPr id="109" name="Rounded Rectangle 15"/>
+          <p:cNvSpPr/>
+          <p:nvPr/>
+        </p:nvSpPr>
+        <p:spPr>
+          <a:xfrm>
+            <a:off x="9875520" y="365760"/>
+            <a:ext cx="2010240" cy="501480"/>
+          </a:xfrm>
+          <a:prstGeom prst="roundRect">
+            <a:avLst>
+              <a:gd name="adj" fmla="val 16667"/>
+            </a:avLst>
+          </a:prstGeom>
+          <a:solidFill>
+            <a:srgbClr val="1e1e24"/>
+          </a:solidFill>
+          <a:ln>
+            <a:solidFill>
+              <a:srgbClr val="ff8c00"/>
+            </a:solidFill>
+            <a:round/>
+          </a:ln>
+          <a:effectLst>
+            <a:outerShdw blurRad="39960" dir="5400000" dist="23040" rotWithShape="0">
+              <a:srgbClr val="000000">
+                <a:alpha val="35000"/>
+              </a:srgbClr>
+            </a:outerShdw>
+          </a:effectLst>
+        </p:spPr>
+        <p:style>
+          <a:lnRef idx="1">
+            <a:schemeClr val="accent1"/>
+          </a:lnRef>
+          <a:fillRef idx="3">
+            <a:schemeClr val="accent1"/>
+          </a:fillRef>
+          <a:effectRef idx="2">
+            <a:schemeClr val="accent1"/>
+          </a:effectRef>
+          <a:fontRef idx="minor"/>
+        </p:style>
+        <p:txBody>
+          <a:bodyPr lIns="90000" rIns="90000" tIns="45000" bIns="45000" anchor="ctr">
+            <a:noAutofit/>
+          </a:bodyPr>
+          <a:p>
+            <a:pPr algn="ctr">
+              <a:lnSpc>
+                <a:spcPct val="100000"/>
+              </a:lnSpc>
+            </a:pPr>
+            <a:r>
+              <a:rPr b="1" lang="en-US" sz="1400" spc="-1" strike="noStrike">
+                <a:solidFill>
+                  <a:srgbClr val="ffb45a"/>
+                </a:solidFill>
+                <a:latin typeface="Calibri"/>
+                <a:ea typeface="DejaVu Sans"/>
+              </a:rPr>
+              <a:t>JAVA TEMELLERI</a:t>
+            </a:r>
+            <a:endParaRPr b="0" lang="en-US" sz="1400" spc="-1" strike="noStrike">
+              <a:solidFill>
+                <a:srgbClr val="ffffff"/>
+              </a:solidFill>
+              <a:latin typeface="Arial"/>
+            </a:endParaRPr>
+          </a:p>
+        </p:txBody>
+      </p:sp>
+      <p:sp>
+        <p:nvSpPr>
+          <p:cNvPr id="110" name="TextBox 7"/>
+          <p:cNvSpPr/>
+          <p:nvPr/>
+        </p:nvSpPr>
+        <p:spPr>
+          <a:xfrm>
+            <a:off x="942480" y="914400"/>
+            <a:ext cx="9085680" cy="638280"/>
+          </a:xfrm>
+          <a:prstGeom prst="rect">
+            <a:avLst/>
+          </a:prstGeom>
+          <a:noFill/>
+          <a:ln w="0">
+            <a:noFill/>
+          </a:ln>
+        </p:spPr>
+        <p:style>
+          <a:lnRef idx="0"/>
+          <a:fillRef idx="0"/>
+          <a:effectRef idx="0"/>
+          <a:fontRef idx="minor"/>
+        </p:style>
+        <p:txBody>
+          <a:bodyPr wrap="none" lIns="90000" rIns="90000" tIns="45000" bIns="45000" anchor="t">
+            <a:spAutoFit/>
+          </a:bodyPr>
+          <a:p>
+            <a:pPr>
+              <a:lnSpc>
+                <a:spcPct val="100000"/>
+              </a:lnSpc>
+            </a:pPr>
+            <a:r>
+              <a:rPr b="1" lang="en-US" sz="3600" spc="-1" strike="noStrike">
+                <a:solidFill>
+                  <a:srgbClr val="f5f5f5"/>
+                </a:solidFill>
+                <a:latin typeface="Calibri"/>
+                <a:ea typeface="DejaVu Sans"/>
+              </a:rPr>
+              <a:t>Java’da LocalDate, LocalTime ve LocalDateTime</a:t>
+            </a:r>
+            <a:endParaRPr b="0" lang="en-US" sz="3600" spc="-1" strike="noStrike">
+              <a:solidFill>
+                <a:srgbClr val="000000"/>
+              </a:solidFill>
+              <a:latin typeface="Arial"/>
+            </a:endParaRPr>
+          </a:p>
+        </p:txBody>
+      </p:sp>
+      <p:sp>
+        <p:nvSpPr>
+          <p:cNvPr id="111" name="TextBox 8"/>
+          <p:cNvSpPr/>
+          <p:nvPr/>
+        </p:nvSpPr>
+        <p:spPr>
+          <a:xfrm>
+            <a:off x="1149480" y="1828800"/>
+            <a:ext cx="9190800" cy="576360"/>
+          </a:xfrm>
+          <a:prstGeom prst="rect">
+            <a:avLst/>
+          </a:prstGeom>
+          <a:noFill/>
+          <a:ln w="0">
+            <a:noFill/>
+          </a:ln>
+        </p:spPr>
+        <p:style>
+          <a:lnRef idx="0"/>
+          <a:fillRef idx="0"/>
+          <a:effectRef idx="0"/>
+          <a:fontRef idx="minor"/>
+        </p:style>
+        <p:txBody>
+          <a:bodyPr wrap="none" lIns="90000" rIns="90000" tIns="45000" bIns="45000" anchor="t">
+            <a:spAutoFit/>
+          </a:bodyPr>
+          <a:p>
+            <a:pPr>
+              <a:lnSpc>
+                <a:spcPct val="100000"/>
+              </a:lnSpc>
+            </a:pPr>
+            <a:r>
+              <a:rPr b="0" lang="en-US" sz="1600" spc="-1" strike="noStrike">
+                <a:solidFill>
+                  <a:srgbClr val="aaaaaa"/>
+                </a:solidFill>
+                <a:latin typeface="Calibri"/>
+                <a:ea typeface="DejaVu Sans"/>
+              </a:rPr>
+              <a:t>Java’da tarih ve saat işlemleri sadece saat dilimine bağlı değildir. Bazı durumlarda sadece tarih, sadece saat ya </a:t>
+            </a:r>
+            <a:endParaRPr b="0" lang="en-US" sz="1600" spc="-1" strike="noStrike">
+              <a:solidFill>
+                <a:srgbClr val="000000"/>
+              </a:solidFill>
+              <a:latin typeface="Arial"/>
+            </a:endParaRPr>
+          </a:p>
+          <a:p>
+            <a:pPr>
+              <a:lnSpc>
+                <a:spcPct val="100000"/>
+              </a:lnSpc>
+            </a:pPr>
+            <a:r>
+              <a:rPr b="0" lang="en-US" sz="1600" spc="-1" strike="noStrike">
+                <a:solidFill>
+                  <a:srgbClr val="aaaaaa"/>
+                </a:solidFill>
+                <a:latin typeface="Calibri"/>
+                <a:ea typeface="DejaVu Sans"/>
+              </a:rPr>
+              <a:t>da ikisinin birleşimi gerekir. Bu ihtiyaçlar için LocalDate, LocalTime ve LocalDateTime sınıfları kullanılır.</a:t>
+            </a:r>
+            <a:endParaRPr b="0" lang="en-US" sz="1600" spc="-1" strike="noStrike">
+              <a:solidFill>
+                <a:srgbClr val="000000"/>
+              </a:solidFill>
+              <a:latin typeface="Arial"/>
+            </a:endParaRPr>
+          </a:p>
+        </p:txBody>
+      </p:sp>
+      <p:sp>
+        <p:nvSpPr>
+          <p:cNvPr id="112" name="Rounded Rectangle 16"/>
+          <p:cNvSpPr/>
+          <p:nvPr/>
+        </p:nvSpPr>
+        <p:spPr>
+          <a:xfrm>
+            <a:off x="987480" y="3182040"/>
+            <a:ext cx="3290400" cy="2741760"/>
+          </a:xfrm>
+          <a:prstGeom prst="roundRect">
+            <a:avLst>
+              <a:gd name="adj" fmla="val 16667"/>
+            </a:avLst>
+          </a:prstGeom>
+          <a:solidFill>
+            <a:srgbClr val="08080a"/>
+          </a:solidFill>
+          <a:ln>
+            <a:noFill/>
+          </a:ln>
+          <a:effectLst>
+            <a:outerShdw blurRad="39960" dir="5400000" dist="23040" rotWithShape="0">
+              <a:srgbClr val="000000">
+                <a:alpha val="35000"/>
+              </a:srgbClr>
+            </a:outerShdw>
+          </a:effectLst>
+        </p:spPr>
+        <p:style>
+          <a:lnRef idx="1">
+            <a:schemeClr val="accent1"/>
+          </a:lnRef>
+          <a:fillRef idx="3">
+            <a:schemeClr val="accent1"/>
+          </a:fillRef>
+          <a:effectRef idx="2">
+            <a:schemeClr val="accent1"/>
+          </a:effectRef>
+          <a:fontRef idx="minor"/>
+        </p:style>
+        <p:txBody>
+          <a:bodyPr lIns="90000" rIns="90000" tIns="45000" bIns="45000" anchor="ctr">
+            <a:noAutofit/>
+          </a:bodyPr>
+          <a:p>
+            <a:endParaRPr b="0" lang="en-US" sz="1800" spc="-1" strike="noStrike">
+              <a:solidFill>
+                <a:schemeClr val="lt1"/>
+              </a:solidFill>
+              <a:latin typeface="Calibri"/>
+              <a:ea typeface="DejaVu Sans"/>
+            </a:endParaRPr>
+          </a:p>
+        </p:txBody>
+      </p:sp>
+      <p:sp>
+        <p:nvSpPr>
+          <p:cNvPr id="113" name="Rounded Rectangle 18"/>
+          <p:cNvSpPr/>
+          <p:nvPr/>
+        </p:nvSpPr>
+        <p:spPr>
+          <a:xfrm>
+            <a:off x="914400" y="3108960"/>
+            <a:ext cx="3290400" cy="3063240"/>
+          </a:xfrm>
+          <a:prstGeom prst="roundRect">
+            <a:avLst>
+              <a:gd name="adj" fmla="val 16667"/>
+            </a:avLst>
+          </a:prstGeom>
+          <a:solidFill>
+            <a:srgbClr val="16161c"/>
+          </a:solidFill>
+          <a:ln>
+            <a:solidFill>
+              <a:srgbClr val="464655"/>
+            </a:solidFill>
+            <a:round/>
+          </a:ln>
+          <a:effectLst>
+            <a:outerShdw blurRad="39960" dir="5400000" dist="23040" rotWithShape="0">
+              <a:srgbClr val="000000">
+                <a:alpha val="35000"/>
+              </a:srgbClr>
+            </a:outerShdw>
+          </a:effectLst>
+        </p:spPr>
+        <p:style>
+          <a:lnRef idx="1">
+            <a:schemeClr val="accent1"/>
+          </a:lnRef>
+          <a:fillRef idx="3">
+            <a:schemeClr val="accent1"/>
+          </a:fillRef>
+          <a:effectRef idx="2">
+            <a:schemeClr val="accent1"/>
+          </a:effectRef>
+          <a:fontRef idx="minor"/>
+        </p:style>
+        <p:txBody>
+          <a:bodyPr lIns="90000" rIns="90000" tIns="45000" bIns="45000" anchor="ctr">
+            <a:noAutofit/>
+          </a:bodyPr>
+          <a:p>
+            <a:pPr marL="216000" indent="-216000">
+              <a:lnSpc>
+                <a:spcPct val="100000"/>
+              </a:lnSpc>
+              <a:buClr>
+                <a:srgbClr val="ffffff"/>
+              </a:buClr>
+              <a:buFont typeface="Wingdings" charset="2"/>
+              <a:buChar char=""/>
+            </a:pPr>
+            <a:r>
+              <a:rPr b="1" lang="en-US" sz="1800" spc="-1" strike="noStrike">
+                <a:solidFill>
+                  <a:schemeClr val="lt1"/>
+                </a:solidFill>
+                <a:latin typeface="Calibri"/>
+                <a:ea typeface="DejaVu Sans"/>
+              </a:rPr>
+              <a:t>LocalDate → Sadece tarih bilgisini tutar (yıl, ay, gün)</a:t>
+            </a:r>
+            <a:endParaRPr b="0" lang="en-US" sz="1800" spc="-1" strike="noStrike">
+              <a:solidFill>
+                <a:srgbClr val="ffffff"/>
+              </a:solidFill>
+              <a:latin typeface="Arial"/>
+            </a:endParaRPr>
+          </a:p>
+          <a:p>
+            <a:pPr marL="216000" indent="-216000">
+              <a:lnSpc>
+                <a:spcPct val="100000"/>
+              </a:lnSpc>
+              <a:buClr>
+                <a:srgbClr val="ffffff"/>
+              </a:buClr>
+              <a:buFont typeface="Wingdings" charset="2"/>
+              <a:buChar char=""/>
+            </a:pPr>
+            <a:r>
+              <a:rPr b="1" lang="en-US" sz="1800" spc="-1" strike="noStrike">
+                <a:solidFill>
+                  <a:schemeClr val="lt1"/>
+                </a:solidFill>
+                <a:latin typeface="Calibri"/>
+                <a:ea typeface="DejaVu Sans"/>
+              </a:rPr>
+              <a:t>LocalTime → Sadece saat bilgisini tutar (saat, dakika, saniye)</a:t>
+            </a:r>
+            <a:endParaRPr b="0" lang="en-US" sz="1800" spc="-1" strike="noStrike">
+              <a:solidFill>
+                <a:srgbClr val="ffffff"/>
+              </a:solidFill>
+              <a:latin typeface="Arial"/>
+            </a:endParaRPr>
+          </a:p>
+          <a:p>
+            <a:pPr marL="216000" indent="-216000">
+              <a:lnSpc>
+                <a:spcPct val="100000"/>
+              </a:lnSpc>
+              <a:buClr>
+                <a:srgbClr val="ffffff"/>
+              </a:buClr>
+              <a:buFont typeface="Wingdings" charset="2"/>
+              <a:buChar char=""/>
+            </a:pPr>
+            <a:r>
+              <a:rPr b="1" lang="en-US" sz="1800" spc="-1" strike="noStrike">
+                <a:solidFill>
+                  <a:schemeClr val="lt1"/>
+                </a:solidFill>
+                <a:latin typeface="Calibri"/>
+                <a:ea typeface="DejaVu Sans"/>
+              </a:rPr>
+              <a:t>LocalDateTime → Tarih ve saat bilgisini birlikte tutar</a:t>
+            </a:r>
+            <a:endParaRPr b="0" lang="en-US" sz="1800" spc="-1" strike="noStrike">
+              <a:solidFill>
+                <a:srgbClr val="ffffff"/>
+              </a:solidFill>
+              <a:latin typeface="Arial"/>
+            </a:endParaRPr>
+          </a:p>
+          <a:p>
+            <a:pPr marL="216000" indent="-216000">
+              <a:lnSpc>
+                <a:spcPct val="100000"/>
+              </a:lnSpc>
+              <a:buClr>
+                <a:srgbClr val="ffffff"/>
+              </a:buClr>
+              <a:buFont typeface="Wingdings" charset="2"/>
+              <a:buChar char=""/>
+            </a:pPr>
+            <a:r>
+              <a:rPr b="1" lang="en-US" sz="1800" spc="-1" strike="noStrike">
+                <a:solidFill>
+                  <a:schemeClr val="lt1"/>
+                </a:solidFill>
+                <a:latin typeface="Calibri"/>
+                <a:ea typeface="DejaVu Sans"/>
+              </a:rPr>
+              <a:t>Saat dilimi (timezone) içermezler</a:t>
+            </a:r>
+            <a:endParaRPr b="0" lang="en-US" sz="1800" spc="-1" strike="noStrike">
+              <a:solidFill>
+                <a:srgbClr val="ffffff"/>
+              </a:solidFill>
+              <a:latin typeface="Arial"/>
+            </a:endParaRPr>
+          </a:p>
+          <a:p>
+            <a:pPr marL="216000" indent="-216000">
+              <a:lnSpc>
+                <a:spcPct val="100000"/>
+              </a:lnSpc>
+              <a:buClr>
+                <a:srgbClr val="ffffff"/>
+              </a:buClr>
+              <a:buFont typeface="Wingdings" charset="2"/>
+              <a:buChar char=""/>
+            </a:pPr>
+            <a:r>
+              <a:rPr b="1" lang="en-US" sz="1800" spc="-1" strike="noStrike">
+                <a:solidFill>
+                  <a:schemeClr val="lt1"/>
+                </a:solidFill>
+                <a:latin typeface="Calibri"/>
+                <a:ea typeface="DejaVu Sans"/>
+              </a:rPr>
+              <a:t>Daha basit ve performanslı kullanım sağlar</a:t>
+            </a:r>
+            <a:endParaRPr b="0" lang="en-US" sz="1800" spc="-1" strike="noStrike">
+              <a:solidFill>
+                <a:srgbClr val="ffffff"/>
+              </a:solidFill>
+              <a:latin typeface="Arial"/>
+            </a:endParaRPr>
+          </a:p>
+        </p:txBody>
+      </p:sp>
+      <p:sp>
+        <p:nvSpPr>
+          <p:cNvPr id="114" name="Rounded Rectangle 19"/>
+          <p:cNvSpPr/>
+          <p:nvPr/>
+        </p:nvSpPr>
+        <p:spPr>
+          <a:xfrm>
+            <a:off x="4507920" y="3182040"/>
+            <a:ext cx="3290400" cy="2741760"/>
+          </a:xfrm>
+          <a:prstGeom prst="roundRect">
+            <a:avLst>
+              <a:gd name="adj" fmla="val 16667"/>
+            </a:avLst>
+          </a:prstGeom>
+          <a:solidFill>
+            <a:srgbClr val="08080a"/>
+          </a:solidFill>
+          <a:ln>
+            <a:noFill/>
+          </a:ln>
+          <a:effectLst>
+            <a:outerShdw blurRad="39960" dir="5400000" dist="23040" rotWithShape="0">
+              <a:srgbClr val="000000">
+                <a:alpha val="35000"/>
+              </a:srgbClr>
+            </a:outerShdw>
+          </a:effectLst>
+        </p:spPr>
+        <p:style>
+          <a:lnRef idx="1">
+            <a:schemeClr val="accent1"/>
+          </a:lnRef>
+          <a:fillRef idx="3">
+            <a:schemeClr val="accent1"/>
+          </a:fillRef>
+          <a:effectRef idx="2">
+            <a:schemeClr val="accent1"/>
+          </a:effectRef>
+          <a:fontRef idx="minor"/>
+        </p:style>
+        <p:txBody>
+          <a:bodyPr lIns="90000" rIns="90000" tIns="45000" bIns="45000" anchor="ctr">
+            <a:noAutofit/>
+          </a:bodyPr>
+          <a:p>
+            <a:endParaRPr b="0" lang="en-US" sz="1800" spc="-1" strike="noStrike">
+              <a:solidFill>
+                <a:schemeClr val="lt1"/>
+              </a:solidFill>
+              <a:latin typeface="Calibri"/>
+              <a:ea typeface="DejaVu Sans"/>
+            </a:endParaRPr>
+          </a:p>
+        </p:txBody>
+      </p:sp>
+      <p:sp>
+        <p:nvSpPr>
+          <p:cNvPr id="115" name="Rounded Rectangle 26"/>
+          <p:cNvSpPr/>
+          <p:nvPr/>
+        </p:nvSpPr>
+        <p:spPr>
+          <a:xfrm>
+            <a:off x="4434840" y="3108960"/>
+            <a:ext cx="3290400" cy="2741760"/>
+          </a:xfrm>
+          <a:prstGeom prst="roundRect">
+            <a:avLst>
+              <a:gd name="adj" fmla="val 16667"/>
+            </a:avLst>
+          </a:prstGeom>
+          <a:solidFill>
+            <a:srgbClr val="16161c"/>
+          </a:solidFill>
+          <a:ln>
+            <a:solidFill>
+              <a:srgbClr val="464655"/>
+            </a:solidFill>
+            <a:round/>
+          </a:ln>
+          <a:effectLst>
+            <a:outerShdw blurRad="39960" dir="5400000" dist="23040" rotWithShape="0">
+              <a:srgbClr val="000000">
+                <a:alpha val="35000"/>
+              </a:srgbClr>
+            </a:outerShdw>
+          </a:effectLst>
+        </p:spPr>
+        <p:style>
+          <a:lnRef idx="1">
+            <a:schemeClr val="accent1"/>
+          </a:lnRef>
+          <a:fillRef idx="3">
+            <a:schemeClr val="accent1"/>
+          </a:fillRef>
+          <a:effectRef idx="2">
+            <a:schemeClr val="accent1"/>
+          </a:effectRef>
+          <a:fontRef idx="minor"/>
+        </p:style>
+        <p:txBody>
+          <a:bodyPr lIns="90000" rIns="90000" tIns="45000" bIns="45000" anchor="ctr">
+            <a:noAutofit/>
+          </a:bodyPr>
+          <a:p>
+            <a:pPr>
+              <a:lnSpc>
+                <a:spcPct val="100000"/>
+              </a:lnSpc>
+            </a:pPr>
+            <a:r>
+              <a:rPr b="0" lang="en-US" sz="1800" spc="-1" strike="noStrike">
+                <a:solidFill>
+                  <a:schemeClr val="lt1"/>
+                </a:solidFill>
+                <a:latin typeface="Calibri"/>
+                <a:ea typeface="DejaVu Sans"/>
+              </a:rPr>
+              <a:t>Program Başlar</a:t>
+            </a:r>
+            <a:endParaRPr b="0" lang="en-US" sz="1800" spc="-1" strike="noStrike">
+              <a:solidFill>
+                <a:srgbClr val="ffffff"/>
+              </a:solidFill>
+              <a:latin typeface="Arial"/>
+            </a:endParaRPr>
+          </a:p>
+          <a:p>
+            <a:pPr>
+              <a:lnSpc>
+                <a:spcPct val="100000"/>
+              </a:lnSpc>
+            </a:pPr>
+            <a:r>
+              <a:rPr b="0" lang="en-US" sz="1800" spc="-1" strike="noStrike">
+                <a:solidFill>
+                  <a:schemeClr val="lt1"/>
+                </a:solidFill>
+                <a:latin typeface="Calibri"/>
+                <a:ea typeface="DejaVu Sans"/>
+              </a:rPr>
+              <a:t>↓</a:t>
+            </a:r>
+            <a:endParaRPr b="0" lang="en-US" sz="1800" spc="-1" strike="noStrike">
+              <a:solidFill>
+                <a:srgbClr val="ffffff"/>
+              </a:solidFill>
+              <a:latin typeface="Arial"/>
+            </a:endParaRPr>
+          </a:p>
+          <a:p>
+            <a:pPr>
+              <a:lnSpc>
+                <a:spcPct val="100000"/>
+              </a:lnSpc>
+            </a:pPr>
+            <a:r>
+              <a:rPr b="0" lang="en-US" sz="1800" spc="-1" strike="noStrike">
+                <a:solidFill>
+                  <a:schemeClr val="lt1"/>
+                </a:solidFill>
+                <a:latin typeface="Calibri"/>
+                <a:ea typeface="DejaVu Sans"/>
+              </a:rPr>
+              <a:t>Uygun Sınıf Seçilir (LocalDate / LocalTime / LocalDateTime)</a:t>
+            </a:r>
+            <a:endParaRPr b="0" lang="en-US" sz="1800" spc="-1" strike="noStrike">
+              <a:solidFill>
+                <a:srgbClr val="ffffff"/>
+              </a:solidFill>
+              <a:latin typeface="Arial"/>
+            </a:endParaRPr>
+          </a:p>
+          <a:p>
+            <a:pPr>
+              <a:lnSpc>
+                <a:spcPct val="100000"/>
+              </a:lnSpc>
+            </a:pPr>
+            <a:r>
+              <a:rPr b="0" lang="en-US" sz="1800" spc="-1" strike="noStrike">
+                <a:solidFill>
+                  <a:schemeClr val="lt1"/>
+                </a:solidFill>
+                <a:latin typeface="Calibri"/>
+                <a:ea typeface="DejaVu Sans"/>
+              </a:rPr>
+              <a:t>↓</a:t>
+            </a:r>
+            <a:endParaRPr b="0" lang="en-US" sz="1800" spc="-1" strike="noStrike">
+              <a:solidFill>
+                <a:srgbClr val="ffffff"/>
+              </a:solidFill>
+              <a:latin typeface="Arial"/>
+            </a:endParaRPr>
+          </a:p>
+          <a:p>
+            <a:pPr>
+              <a:lnSpc>
+                <a:spcPct val="100000"/>
+              </a:lnSpc>
+            </a:pPr>
+            <a:r>
+              <a:rPr b="0" lang="en-US" sz="1800" spc="-1" strike="noStrike">
+                <a:solidFill>
+                  <a:schemeClr val="lt1"/>
+                </a:solidFill>
+                <a:latin typeface="Calibri"/>
+                <a:ea typeface="DejaVu Sans"/>
+              </a:rPr>
+              <a:t>Güncel Değer Alınır</a:t>
+            </a:r>
+            <a:endParaRPr b="0" lang="en-US" sz="1800" spc="-1" strike="noStrike">
+              <a:solidFill>
+                <a:srgbClr val="ffffff"/>
+              </a:solidFill>
+              <a:latin typeface="Arial"/>
+            </a:endParaRPr>
+          </a:p>
+          <a:p>
+            <a:pPr>
+              <a:lnSpc>
+                <a:spcPct val="100000"/>
+              </a:lnSpc>
+            </a:pPr>
+            <a:r>
+              <a:rPr b="0" lang="en-US" sz="1800" spc="-1" strike="noStrike">
+                <a:solidFill>
+                  <a:schemeClr val="lt1"/>
+                </a:solidFill>
+                <a:latin typeface="Calibri"/>
+                <a:ea typeface="DejaVu Sans"/>
+              </a:rPr>
+              <a:t>↓</a:t>
+            </a:r>
+            <a:endParaRPr b="0" lang="en-US" sz="1800" spc="-1" strike="noStrike">
+              <a:solidFill>
+                <a:srgbClr val="ffffff"/>
+              </a:solidFill>
+              <a:latin typeface="Arial"/>
+            </a:endParaRPr>
+          </a:p>
+          <a:p>
+            <a:pPr>
+              <a:lnSpc>
+                <a:spcPct val="100000"/>
+              </a:lnSpc>
+            </a:pPr>
+            <a:r>
+              <a:rPr b="0" lang="en-US" sz="1800" spc="-1" strike="noStrike">
+                <a:solidFill>
+                  <a:schemeClr val="lt1"/>
+                </a:solidFill>
+                <a:latin typeface="Calibri"/>
+                <a:ea typeface="DejaVu Sans"/>
+              </a:rPr>
+              <a:t>İşlem / Formatlama Yapılır</a:t>
+            </a:r>
+            <a:endParaRPr b="0" lang="en-US" sz="1800" spc="-1" strike="noStrike">
+              <a:solidFill>
+                <a:srgbClr val="ffffff"/>
+              </a:solidFill>
+              <a:latin typeface="Arial"/>
+            </a:endParaRPr>
+          </a:p>
+          <a:p>
+            <a:pPr>
+              <a:lnSpc>
+                <a:spcPct val="100000"/>
+              </a:lnSpc>
+            </a:pPr>
+            <a:r>
+              <a:rPr b="0" lang="en-US" sz="1800" spc="-1" strike="noStrike">
+                <a:solidFill>
+                  <a:schemeClr val="lt1"/>
+                </a:solidFill>
+                <a:latin typeface="Calibri"/>
+                <a:ea typeface="DejaVu Sans"/>
+              </a:rPr>
+              <a:t>↓</a:t>
+            </a:r>
+            <a:endParaRPr b="0" lang="en-US" sz="1800" spc="-1" strike="noStrike">
+              <a:solidFill>
+                <a:srgbClr val="ffffff"/>
+              </a:solidFill>
+              <a:latin typeface="Arial"/>
+            </a:endParaRPr>
+          </a:p>
+          <a:p>
+            <a:pPr>
+              <a:lnSpc>
+                <a:spcPct val="100000"/>
+              </a:lnSpc>
+            </a:pPr>
+            <a:r>
+              <a:rPr b="0" lang="en-US" sz="1800" spc="-1" strike="noStrike">
+                <a:solidFill>
+                  <a:schemeClr val="lt1"/>
+                </a:solidFill>
+                <a:latin typeface="Calibri"/>
+                <a:ea typeface="DejaVu Sans"/>
+              </a:rPr>
+              <a:t>Sonuç Ekrana Yazdırılır</a:t>
+            </a:r>
+            <a:endParaRPr b="0" lang="en-US" sz="1800" spc="-1" strike="noStrike">
+              <a:solidFill>
+                <a:srgbClr val="ffffff"/>
+              </a:solidFill>
+              <a:latin typeface="Arial"/>
+            </a:endParaRPr>
+          </a:p>
+        </p:txBody>
+      </p:sp>
+      <p:sp>
+        <p:nvSpPr>
+          <p:cNvPr id="116" name="Rounded Rectangle 27"/>
+          <p:cNvSpPr/>
+          <p:nvPr/>
+        </p:nvSpPr>
+        <p:spPr>
+          <a:xfrm>
+            <a:off x="8028360" y="3182040"/>
+            <a:ext cx="3290400" cy="2741760"/>
+          </a:xfrm>
+          <a:prstGeom prst="roundRect">
+            <a:avLst>
+              <a:gd name="adj" fmla="val 16667"/>
+            </a:avLst>
+          </a:prstGeom>
+          <a:solidFill>
+            <a:srgbClr val="08080a"/>
+          </a:solidFill>
+          <a:ln>
+            <a:noFill/>
+          </a:ln>
+          <a:effectLst>
+            <a:outerShdw blurRad="39960" dir="5400000" dist="23040" rotWithShape="0">
+              <a:srgbClr val="000000">
+                <a:alpha val="35000"/>
+              </a:srgbClr>
+            </a:outerShdw>
+          </a:effectLst>
+        </p:spPr>
+        <p:style>
+          <a:lnRef idx="1">
+            <a:schemeClr val="accent1"/>
+          </a:lnRef>
+          <a:fillRef idx="3">
+            <a:schemeClr val="accent1"/>
+          </a:fillRef>
+          <a:effectRef idx="2">
+            <a:schemeClr val="accent1"/>
+          </a:effectRef>
+          <a:fontRef idx="minor"/>
+        </p:style>
+        <p:txBody>
+          <a:bodyPr lIns="90000" rIns="90000" tIns="45000" bIns="45000" anchor="ctr">
+            <a:noAutofit/>
+          </a:bodyPr>
+          <a:p>
+            <a:endParaRPr b="0" lang="en-US" sz="1800" spc="-1" strike="noStrike">
+              <a:solidFill>
+                <a:schemeClr val="lt1"/>
+              </a:solidFill>
+              <a:latin typeface="Calibri"/>
+              <a:ea typeface="DejaVu Sans"/>
+            </a:endParaRPr>
+          </a:p>
+        </p:txBody>
+      </p:sp>
+      <p:sp>
+        <p:nvSpPr>
+          <p:cNvPr id="117" name="Rounded Rectangle 28"/>
+          <p:cNvSpPr/>
+          <p:nvPr/>
+        </p:nvSpPr>
+        <p:spPr>
+          <a:xfrm>
+            <a:off x="7955280" y="3108960"/>
+            <a:ext cx="3702960" cy="3062880"/>
+          </a:xfrm>
+          <a:prstGeom prst="roundRect">
+            <a:avLst>
+              <a:gd name="adj" fmla="val 16667"/>
+            </a:avLst>
+          </a:prstGeom>
+          <a:solidFill>
+            <a:srgbClr val="16161c"/>
+          </a:solidFill>
+          <a:ln>
+            <a:solidFill>
+              <a:srgbClr val="464655"/>
+            </a:solidFill>
+            <a:round/>
+          </a:ln>
+          <a:effectLst>
+            <a:outerShdw blurRad="39960" dir="5400000" dist="23040" rotWithShape="0">
+              <a:srgbClr val="000000">
+                <a:alpha val="35000"/>
+              </a:srgbClr>
+            </a:outerShdw>
+          </a:effectLst>
+        </p:spPr>
+        <p:style>
+          <a:lnRef idx="1">
+            <a:schemeClr val="accent1"/>
+          </a:lnRef>
+          <a:fillRef idx="3">
+            <a:schemeClr val="accent1"/>
+          </a:fillRef>
+          <a:effectRef idx="2">
+            <a:schemeClr val="accent1"/>
+          </a:effectRef>
+          <a:fontRef idx="minor"/>
+        </p:style>
+        <p:txBody>
+          <a:bodyPr lIns="90000" rIns="90000" tIns="45000" bIns="45000" anchor="ctr">
+            <a:noAutofit/>
+          </a:bodyPr>
+          <a:p>
+            <a:pPr algn="ctr">
+              <a:lnSpc>
+                <a:spcPct val="100000"/>
+              </a:lnSpc>
+            </a:pPr>
+            <a:r>
+              <a:rPr b="0" lang="en-US" sz="1200" spc="-1" strike="noStrike">
+                <a:solidFill>
+                  <a:srgbClr val="78ffc8"/>
+                </a:solidFill>
+                <a:latin typeface="Consolas"/>
+                <a:ea typeface="DejaVu Sans"/>
+              </a:rPr>
+              <a:t>public class LocalDateTimeExample {</a:t>
+            </a:r>
+            <a:endParaRPr b="0" lang="en-US" sz="1200" spc="-1" strike="noStrike">
+              <a:solidFill>
+                <a:srgbClr val="ffffff"/>
+              </a:solidFill>
+              <a:latin typeface="Arial"/>
+            </a:endParaRPr>
+          </a:p>
+          <a:p>
+            <a:pPr algn="ctr">
+              <a:lnSpc>
+                <a:spcPct val="100000"/>
+              </a:lnSpc>
+            </a:pPr>
+            <a:r>
+              <a:rPr b="0" lang="en-US" sz="1200" spc="-1" strike="noStrike">
+                <a:solidFill>
+                  <a:srgbClr val="78ffc8"/>
+                </a:solidFill>
+                <a:latin typeface="Consolas"/>
+                <a:ea typeface="DejaVu Sans"/>
+              </a:rPr>
+              <a:t>    </a:t>
+            </a:r>
+            <a:r>
+              <a:rPr b="0" lang="en-US" sz="1200" spc="-1" strike="noStrike">
+                <a:solidFill>
+                  <a:srgbClr val="78ffc8"/>
+                </a:solidFill>
+                <a:latin typeface="Consolas"/>
+                <a:ea typeface="DejaVu Sans"/>
+              </a:rPr>
+              <a:t>public static void main(String[] args) {</a:t>
+            </a:r>
+            <a:endParaRPr b="0" lang="en-US" sz="1200" spc="-1" strike="noStrike">
+              <a:solidFill>
+                <a:srgbClr val="ffffff"/>
+              </a:solidFill>
+              <a:latin typeface="Arial"/>
+            </a:endParaRPr>
+          </a:p>
+          <a:p>
+            <a:pPr algn="ctr">
+              <a:lnSpc>
+                <a:spcPct val="100000"/>
+              </a:lnSpc>
+            </a:pPr>
+            <a:r>
+              <a:rPr b="0" lang="en-US" sz="1200" spc="-1" strike="noStrike">
+                <a:solidFill>
+                  <a:srgbClr val="78ffc8"/>
+                </a:solidFill>
+                <a:latin typeface="Consolas"/>
+                <a:ea typeface="DejaVu Sans"/>
+              </a:rPr>
+              <a:t>        </a:t>
+            </a:r>
+            <a:r>
+              <a:rPr b="0" lang="en-US" sz="1200" spc="-1" strike="noStrike">
+                <a:solidFill>
+                  <a:srgbClr val="78ffc8"/>
+                </a:solidFill>
+                <a:latin typeface="Consolas"/>
+                <a:ea typeface="DejaVu Sans"/>
+              </a:rPr>
+              <a:t>LocalDate date = LocalDate.now();</a:t>
+            </a:r>
+            <a:endParaRPr b="0" lang="en-US" sz="1200" spc="-1" strike="noStrike">
+              <a:solidFill>
+                <a:srgbClr val="ffffff"/>
+              </a:solidFill>
+              <a:latin typeface="Arial"/>
+            </a:endParaRPr>
+          </a:p>
+          <a:p>
+            <a:pPr algn="ctr">
+              <a:lnSpc>
+                <a:spcPct val="100000"/>
+              </a:lnSpc>
+            </a:pPr>
+            <a:r>
+              <a:rPr b="0" lang="en-US" sz="1200" spc="-1" strike="noStrike">
+                <a:solidFill>
+                  <a:srgbClr val="78ffc8"/>
+                </a:solidFill>
+                <a:latin typeface="Consolas"/>
+                <a:ea typeface="DejaVu Sans"/>
+              </a:rPr>
+              <a:t>        </a:t>
+            </a:r>
+            <a:r>
+              <a:rPr b="0" lang="en-US" sz="1200" spc="-1" strike="noStrike">
+                <a:solidFill>
+                  <a:srgbClr val="78ffc8"/>
+                </a:solidFill>
+                <a:latin typeface="Consolas"/>
+                <a:ea typeface="DejaVu Sans"/>
+              </a:rPr>
+              <a:t>LocalTime time = LocalTime.now();</a:t>
+            </a:r>
+            <a:endParaRPr b="0" lang="en-US" sz="1200" spc="-1" strike="noStrike">
+              <a:solidFill>
+                <a:srgbClr val="ffffff"/>
+              </a:solidFill>
+              <a:latin typeface="Arial"/>
+            </a:endParaRPr>
+          </a:p>
+          <a:p>
+            <a:pPr algn="ctr">
+              <a:lnSpc>
+                <a:spcPct val="100000"/>
+              </a:lnSpc>
+            </a:pPr>
+            <a:r>
+              <a:rPr b="0" lang="en-US" sz="1200" spc="-1" strike="noStrike">
+                <a:solidFill>
+                  <a:srgbClr val="78ffc8"/>
+                </a:solidFill>
+                <a:latin typeface="Consolas"/>
+                <a:ea typeface="DejaVu Sans"/>
+              </a:rPr>
+              <a:t>        </a:t>
+            </a:r>
+            <a:r>
+              <a:rPr b="0" lang="en-US" sz="1200" spc="-1" strike="noStrike">
+                <a:solidFill>
+                  <a:srgbClr val="78ffc8"/>
+                </a:solidFill>
+                <a:latin typeface="Consolas"/>
+                <a:ea typeface="DejaVu Sans"/>
+              </a:rPr>
+              <a:t>LocalDateTime dateTime = LocalDateTime.now();</a:t>
+            </a:r>
+            <a:endParaRPr b="0" lang="en-US" sz="1200" spc="-1" strike="noStrike">
+              <a:solidFill>
+                <a:srgbClr val="ffffff"/>
+              </a:solidFill>
+              <a:latin typeface="Arial"/>
+            </a:endParaRPr>
+          </a:p>
+          <a:p>
+            <a:pPr algn="ctr">
+              <a:lnSpc>
+                <a:spcPct val="100000"/>
+              </a:lnSpc>
+            </a:pPr>
+            <a:r>
+              <a:rPr b="0" lang="en-US" sz="1200" spc="-1" strike="noStrike">
+                <a:solidFill>
+                  <a:srgbClr val="78ffc8"/>
+                </a:solidFill>
+                <a:latin typeface="Consolas"/>
+                <a:ea typeface="DejaVu Sans"/>
+              </a:rPr>
+              <a:t>        </a:t>
+            </a:r>
+            <a:r>
+              <a:rPr b="0" lang="en-US" sz="1200" spc="-1" strike="noStrike">
+                <a:solidFill>
+                  <a:srgbClr val="78ffc8"/>
+                </a:solidFill>
+                <a:latin typeface="Consolas"/>
+                <a:ea typeface="DejaVu Sans"/>
+              </a:rPr>
+              <a:t>System.out.println("Tarih: " + date);</a:t>
+            </a:r>
+            <a:endParaRPr b="0" lang="en-US" sz="1200" spc="-1" strike="noStrike">
+              <a:solidFill>
+                <a:srgbClr val="ffffff"/>
+              </a:solidFill>
+              <a:latin typeface="Arial"/>
+            </a:endParaRPr>
+          </a:p>
+          <a:p>
+            <a:pPr algn="ctr">
+              <a:lnSpc>
+                <a:spcPct val="100000"/>
+              </a:lnSpc>
+            </a:pPr>
+            <a:r>
+              <a:rPr b="0" lang="en-US" sz="1200" spc="-1" strike="noStrike">
+                <a:solidFill>
+                  <a:srgbClr val="78ffc8"/>
+                </a:solidFill>
+                <a:latin typeface="Consolas"/>
+                <a:ea typeface="DejaVu Sans"/>
+              </a:rPr>
+              <a:t>        </a:t>
+            </a:r>
+            <a:r>
+              <a:rPr b="0" lang="en-US" sz="1200" spc="-1" strike="noStrike">
+                <a:solidFill>
+                  <a:srgbClr val="78ffc8"/>
+                </a:solidFill>
+                <a:latin typeface="Consolas"/>
+                <a:ea typeface="DejaVu Sans"/>
+              </a:rPr>
+              <a:t>System.out.println("Saat: " + time);</a:t>
+            </a:r>
+            <a:endParaRPr b="0" lang="en-US" sz="1200" spc="-1" strike="noStrike">
+              <a:solidFill>
+                <a:srgbClr val="ffffff"/>
+              </a:solidFill>
+              <a:latin typeface="Arial"/>
+            </a:endParaRPr>
+          </a:p>
+          <a:p>
+            <a:pPr algn="ctr">
+              <a:lnSpc>
+                <a:spcPct val="100000"/>
+              </a:lnSpc>
+            </a:pPr>
+            <a:r>
+              <a:rPr b="0" lang="en-US" sz="1200" spc="-1" strike="noStrike">
+                <a:solidFill>
+                  <a:srgbClr val="78ffc8"/>
+                </a:solidFill>
+                <a:latin typeface="Consolas"/>
+                <a:ea typeface="DejaVu Sans"/>
+              </a:rPr>
+              <a:t>        </a:t>
+            </a:r>
+            <a:r>
+              <a:rPr b="0" lang="en-US" sz="1200" spc="-1" strike="noStrike">
+                <a:solidFill>
+                  <a:srgbClr val="78ffc8"/>
+                </a:solidFill>
+                <a:latin typeface="Consolas"/>
+                <a:ea typeface="DejaVu Sans"/>
+              </a:rPr>
+              <a:t>System.out.println("Tarih ve Saat: " + dateTime);</a:t>
+            </a:r>
+            <a:endParaRPr b="0" lang="en-US" sz="1200" spc="-1" strike="noStrike">
+              <a:solidFill>
+                <a:srgbClr val="ffffff"/>
+              </a:solidFill>
+              <a:latin typeface="Arial"/>
+            </a:endParaRPr>
+          </a:p>
+          <a:p>
+            <a:pPr algn="ctr">
+              <a:lnSpc>
+                <a:spcPct val="100000"/>
+              </a:lnSpc>
+            </a:pPr>
+            <a:r>
+              <a:rPr b="0" lang="en-US" sz="1200" spc="-1" strike="noStrike">
+                <a:solidFill>
+                  <a:srgbClr val="78ffc8"/>
+                </a:solidFill>
+                <a:latin typeface="Consolas"/>
+                <a:ea typeface="DejaVu Sans"/>
+              </a:rPr>
+              <a:t>    </a:t>
+            </a:r>
+            <a:r>
+              <a:rPr b="0" lang="en-US" sz="1200" spc="-1" strike="noStrike">
+                <a:solidFill>
+                  <a:srgbClr val="78ffc8"/>
+                </a:solidFill>
+                <a:latin typeface="Consolas"/>
+                <a:ea typeface="DejaVu Sans"/>
+              </a:rPr>
+              <a:t>}</a:t>
+            </a:r>
+            <a:endParaRPr b="0" lang="en-US" sz="1200" spc="-1" strike="noStrike">
+              <a:solidFill>
+                <a:srgbClr val="ffffff"/>
+              </a:solidFill>
+              <a:latin typeface="Arial"/>
+            </a:endParaRPr>
+          </a:p>
+          <a:p>
+            <a:pPr algn="ctr">
+              <a:lnSpc>
+                <a:spcPct val="100000"/>
+              </a:lnSpc>
+            </a:pPr>
+            <a:r>
+              <a:rPr b="0" lang="en-US" sz="1200" spc="-1" strike="noStrike">
+                <a:solidFill>
+                  <a:srgbClr val="78ffc8"/>
+                </a:solidFill>
+                <a:latin typeface="Consolas"/>
+                <a:ea typeface="DejaVu Sans"/>
+              </a:rPr>
+              <a:t>}</a:t>
+            </a:r>
+            <a:endParaRPr b="0" lang="en-US" sz="1200" spc="-1" strike="noStrike">
+              <a:solidFill>
+                <a:srgbClr val="ffffff"/>
+              </a:solidFill>
+              <a:latin typeface="Arial"/>
+            </a:endParaRPr>
+          </a:p>
+        </p:txBody>
+      </p:sp>
+      <p:sp>
+        <p:nvSpPr>
+          <p:cNvPr id="118" name="TextBox 9"/>
+          <p:cNvSpPr/>
+          <p:nvPr/>
+        </p:nvSpPr>
+        <p:spPr>
+          <a:xfrm>
+            <a:off x="4600080" y="6446520"/>
+            <a:ext cx="3051360" cy="363960"/>
           </a:xfrm>
           <a:prstGeom prst="rect">
             <a:avLst/>

--- a/Java/Java #4/TR/Java #4.pptx
+++ b/Java/Java #4/TR/Java #4.pptx
@@ -8,6 +8,7 @@
     <p:sldId id="256" r:id="rId3"/>
     <p:sldId id="257" r:id="rId4"/>
     <p:sldId id="258" r:id="rId5"/>
+    <p:sldId id="259" r:id="rId6"/>
   </p:sldIdLst>
   <p:sldSz cx="9144000" cy="6858000"/>
   <p:notesSz cx="7772400" cy="10058400"/>
@@ -65,7 +66,7 @@
         <p:txBody>
           <a:bodyPr/>
           <a:p>
-            <a:fld id="{15CA44A1-314A-40B3-A672-24CCAB97BF63}" type="slidenum">
+            <a:fld id="{4E237EF7-9486-4736-8CB0-9A72AF14BDB7}" type="slidenum">
               <a:t>&lt;#&gt;</a:t>
             </a:fld>
           </a:p>
@@ -274,7 +275,7 @@
         <p:txBody>
           <a:bodyPr/>
           <a:p>
-            <a:fld id="{DA3AC267-244E-40D2-9281-5B2D390F7A43}" type="slidenum">
+            <a:fld id="{B4EB03F6-B2BB-465D-859E-E9588EC25CA1}" type="slidenum">
               <a:t>&lt;#&gt;</a:t>
             </a:fld>
           </a:p>
@@ -569,7 +570,7 @@
         <p:txBody>
           <a:bodyPr/>
           <a:p>
-            <a:fld id="{227472ED-6233-4B44-A600-511729FED479}" type="slidenum">
+            <a:fld id="{37BAB4E7-F5D1-4AD4-82BD-795197C2DA05}" type="slidenum">
               <a:t>&lt;#&gt;</a:t>
             </a:fld>
           </a:p>
@@ -950,7 +951,7 @@
         <p:txBody>
           <a:bodyPr/>
           <a:p>
-            <a:fld id="{6C3484BA-4E5C-4FE6-A6B7-BCFCCE86DC49}" type="slidenum">
+            <a:fld id="{DC508BFD-050B-4531-AB0F-BFA3651C4C73}" type="slidenum">
               <a:t>&lt;#&gt;</a:t>
             </a:fld>
           </a:p>
@@ -1113,7 +1114,7 @@
         <p:txBody>
           <a:bodyPr/>
           <a:p>
-            <a:fld id="{913ABC4A-7D35-4E33-9093-9D3BD315D5DF}" type="slidenum">
+            <a:fld id="{94B1C525-7CAC-40F6-97CC-79391994AA8A}" type="slidenum">
               <a:t>&lt;#&gt;</a:t>
             </a:fld>
           </a:p>
@@ -1279,7 +1280,7 @@
         <p:txBody>
           <a:bodyPr/>
           <a:p>
-            <a:fld id="{495D1120-BD16-4343-97BF-FF8EC9EF3690}" type="slidenum">
+            <a:fld id="{0DFADF52-EDF6-429F-A6B3-44F94CAE9AD5}" type="slidenum">
               <a:t>&lt;#&gt;</a:t>
             </a:fld>
           </a:p>
@@ -1488,7 +1489,7 @@
         <p:txBody>
           <a:bodyPr/>
           <a:p>
-            <a:fld id="{EF0AB9FE-A55D-4B23-9B82-AD5052FA8324}" type="slidenum">
+            <a:fld id="{01A79DE0-8D72-467A-B0A1-B030E62D9A36}" type="slidenum">
               <a:t>&lt;#&gt;</a:t>
             </a:fld>
           </a:p>
@@ -1611,7 +1612,7 @@
         <p:txBody>
           <a:bodyPr/>
           <a:p>
-            <a:fld id="{0B490EBD-3238-4211-83EA-3A64D9BF9E5B}" type="slidenum">
+            <a:fld id="{543353BA-9DF1-4FF3-BF8A-21C5195619F0}" type="slidenum">
               <a:t>&lt;#&gt;</a:t>
             </a:fld>
           </a:p>
@@ -1732,7 +1733,7 @@
         <p:txBody>
           <a:bodyPr/>
           <a:p>
-            <a:fld id="{AC2A5516-1556-460F-B62F-0193D988B699}" type="slidenum">
+            <a:fld id="{1653FD4A-1D26-4398-863B-78A6F0E4D260}" type="slidenum">
               <a:t>&lt;#&gt;</a:t>
             </a:fld>
           </a:p>
@@ -1984,7 +1985,7 @@
         <p:txBody>
           <a:bodyPr/>
           <a:p>
-            <a:fld id="{48F8BF1D-7337-4CA2-A582-DC47D04C456D}" type="slidenum">
+            <a:fld id="{70B97B89-F195-4800-AD17-3AAE19066FF4}" type="slidenum">
               <a:t>&lt;#&gt;</a:t>
             </a:fld>
           </a:p>
@@ -2236,7 +2237,7 @@
         <p:txBody>
           <a:bodyPr/>
           <a:p>
-            <a:fld id="{6B7EBEFD-A888-4326-8BAD-992B934B91E9}" type="slidenum">
+            <a:fld id="{6290CAF9-7F40-4FB2-9E22-A3303CEAEEED}" type="slidenum">
               <a:t>&lt;#&gt;</a:t>
             </a:fld>
           </a:p>
@@ -2488,7 +2489,7 @@
         <p:txBody>
           <a:bodyPr/>
           <a:p>
-            <a:fld id="{F313669A-FA5D-4B93-98AC-19547919E9FB}" type="slidenum">
+            <a:fld id="{107957FB-8771-43AE-B991-4FD9C4A72DD4}" type="slidenum">
               <a:t>&lt;#&gt;</a:t>
             </a:fld>
           </a:p>
@@ -2557,7 +2558,7 @@
         <p:spPr>
           <a:xfrm>
             <a:off x="3124080" y="6356520"/>
-            <a:ext cx="2893680" cy="363240"/>
+            <a:ext cx="2893320" cy="362880"/>
           </a:xfrm>
           <a:prstGeom prst="rect">
             <a:avLst/>
@@ -2629,7 +2630,7 @@
         <p:spPr>
           <a:xfrm>
             <a:off x="6553080" y="6356520"/>
-            <a:ext cx="2131920" cy="363240"/>
+            <a:ext cx="2131560" cy="362880"/>
           </a:xfrm>
           <a:prstGeom prst="rect">
             <a:avLst/>
@@ -2670,7 +2671,7 @@
                 <a:tab algn="l" pos="0"/>
               </a:tabLst>
             </a:pPr>
-            <a:fld id="{64233886-89FB-47E6-BFD8-43CD08992A06}" type="slidenum">
+            <a:fld id="{5A704B8A-4568-41F5-B777-768E5C1895C6}" type="slidenum">
               <a:rPr b="0" lang="en-US" sz="1200" spc="-1" strike="noStrike">
                 <a:solidFill>
                   <a:srgbClr val="8b8b8b"/>
@@ -2701,7 +2702,7 @@
         <p:spPr>
           <a:xfrm>
             <a:off x="457200" y="6356520"/>
-            <a:ext cx="2131920" cy="363240"/>
+            <a:ext cx="2131560" cy="362880"/>
           </a:xfrm>
           <a:prstGeom prst="rect">
             <a:avLst/>
@@ -3068,7 +3069,7 @@
         <p:spPr>
           <a:xfrm>
             <a:off x="0" y="0"/>
-            <a:ext cx="12187080" cy="6856200"/>
+            <a:ext cx="12186720" cy="6855840"/>
           </a:xfrm>
           <a:prstGeom prst="rect">
             <a:avLst/>
@@ -3128,7 +3129,7 @@
         <p:spPr>
           <a:xfrm>
             <a:off x="0" y="0"/>
-            <a:ext cx="16560" cy="6856200"/>
+            <a:ext cx="16200" cy="6855840"/>
           </a:xfrm>
           <a:prstGeom prst="rect">
             <a:avLst/>
@@ -3188,7 +3189,7 @@
         <p:spPr>
           <a:xfrm>
             <a:off x="914400" y="0"/>
-            <a:ext cx="16560" cy="6856200"/>
+            <a:ext cx="16200" cy="6855840"/>
           </a:xfrm>
           <a:prstGeom prst="rect">
             <a:avLst/>
@@ -3248,7 +3249,7 @@
         <p:spPr>
           <a:xfrm>
             <a:off x="1828800" y="0"/>
-            <a:ext cx="16560" cy="6856200"/>
+            <a:ext cx="16200" cy="6855840"/>
           </a:xfrm>
           <a:prstGeom prst="rect">
             <a:avLst/>
@@ -3308,7 +3309,7 @@
         <p:spPr>
           <a:xfrm>
             <a:off x="2743200" y="0"/>
-            <a:ext cx="16560" cy="6856200"/>
+            <a:ext cx="16200" cy="6855840"/>
           </a:xfrm>
           <a:prstGeom prst="rect">
             <a:avLst/>
@@ -3368,7 +3369,7 @@
         <p:spPr>
           <a:xfrm>
             <a:off x="3657600" y="0"/>
-            <a:ext cx="16560" cy="6856200"/>
+            <a:ext cx="16200" cy="6855840"/>
           </a:xfrm>
           <a:prstGeom prst="rect">
             <a:avLst/>
@@ -3428,7 +3429,7 @@
         <p:spPr>
           <a:xfrm>
             <a:off x="4572000" y="0"/>
-            <a:ext cx="16560" cy="6856200"/>
+            <a:ext cx="16200" cy="6855840"/>
           </a:xfrm>
           <a:prstGeom prst="rect">
             <a:avLst/>
@@ -3488,7 +3489,7 @@
         <p:spPr>
           <a:xfrm>
             <a:off x="5486400" y="0"/>
-            <a:ext cx="16560" cy="6856200"/>
+            <a:ext cx="16200" cy="6855840"/>
           </a:xfrm>
           <a:prstGeom prst="rect">
             <a:avLst/>
@@ -3548,7 +3549,7 @@
         <p:spPr>
           <a:xfrm>
             <a:off x="6400800" y="0"/>
-            <a:ext cx="16560" cy="6856200"/>
+            <a:ext cx="16200" cy="6855840"/>
           </a:xfrm>
           <a:prstGeom prst="rect">
             <a:avLst/>
@@ -3608,7 +3609,7 @@
         <p:spPr>
           <a:xfrm>
             <a:off x="7315200" y="0"/>
-            <a:ext cx="16560" cy="6856200"/>
+            <a:ext cx="16200" cy="6855840"/>
           </a:xfrm>
           <a:prstGeom prst="rect">
             <a:avLst/>
@@ -3668,7 +3669,7 @@
         <p:spPr>
           <a:xfrm>
             <a:off x="8229600" y="0"/>
-            <a:ext cx="16560" cy="6856200"/>
+            <a:ext cx="16200" cy="6855840"/>
           </a:xfrm>
           <a:prstGeom prst="rect">
             <a:avLst/>
@@ -3728,7 +3729,7 @@
         <p:spPr>
           <a:xfrm>
             <a:off x="9144000" y="0"/>
-            <a:ext cx="16560" cy="6856200"/>
+            <a:ext cx="16200" cy="6855840"/>
           </a:xfrm>
           <a:prstGeom prst="rect">
             <a:avLst/>
@@ -3788,7 +3789,7 @@
         <p:spPr>
           <a:xfrm>
             <a:off x="10058400" y="0"/>
-            <a:ext cx="16560" cy="6856200"/>
+            <a:ext cx="16200" cy="6855840"/>
           </a:xfrm>
           <a:prstGeom prst="rect">
             <a:avLst/>
@@ -3848,7 +3849,7 @@
         <p:spPr>
           <a:xfrm>
             <a:off x="10972800" y="0"/>
-            <a:ext cx="16560" cy="6856200"/>
+            <a:ext cx="16200" cy="6855840"/>
           </a:xfrm>
           <a:prstGeom prst="rect">
             <a:avLst/>
@@ -3908,7 +3909,7 @@
         <p:spPr>
           <a:xfrm>
             <a:off x="11887200" y="0"/>
-            <a:ext cx="16560" cy="6856200"/>
+            <a:ext cx="16200" cy="6855840"/>
           </a:xfrm>
           <a:prstGeom prst="rect">
             <a:avLst/>
@@ -3968,7 +3969,7 @@
         <p:spPr>
           <a:xfrm>
             <a:off x="0" y="0"/>
-            <a:ext cx="318240" cy="6856200"/>
+            <a:ext cx="317880" cy="6855840"/>
           </a:xfrm>
           <a:prstGeom prst="rect">
             <a:avLst/>
@@ -4028,7 +4029,7 @@
         <p:spPr>
           <a:xfrm>
             <a:off x="9875520" y="365760"/>
-            <a:ext cx="2009880" cy="501120"/>
+            <a:ext cx="2009520" cy="500760"/>
           </a:xfrm>
           <a:prstGeom prst="roundRect">
             <a:avLst>
@@ -4156,7 +4157,7 @@
         <p:spPr>
           <a:xfrm>
             <a:off x="3070440" y="1495080"/>
-            <a:ext cx="5938200" cy="1247400"/>
+            <a:ext cx="5937840" cy="1247400"/>
           </a:xfrm>
           <a:prstGeom prst="rect">
             <a:avLst/>
@@ -4279,7 +4280,7 @@
         <p:spPr>
           <a:xfrm>
             <a:off x="987480" y="3182040"/>
-            <a:ext cx="3290040" cy="2741400"/>
+            <a:ext cx="3289680" cy="2741040"/>
           </a:xfrm>
           <a:prstGeom prst="roundRect">
             <a:avLst>
@@ -4341,7 +4342,7 @@
         <p:spPr>
           <a:xfrm>
             <a:off x="914400" y="3108960"/>
-            <a:ext cx="3290040" cy="2741400"/>
+            <a:ext cx="3289680" cy="2741040"/>
           </a:xfrm>
           <a:prstGeom prst="roundRect">
             <a:avLst>
@@ -4475,7 +4476,7 @@
         <p:spPr>
           <a:xfrm>
             <a:off x="4507920" y="3182040"/>
-            <a:ext cx="3290040" cy="2741400"/>
+            <a:ext cx="3289680" cy="2741040"/>
           </a:xfrm>
           <a:prstGeom prst="roundRect">
             <a:avLst>
@@ -4537,7 +4538,7 @@
         <p:spPr>
           <a:xfrm>
             <a:off x="4434840" y="3108960"/>
-            <a:ext cx="3290040" cy="2741400"/>
+            <a:ext cx="3289680" cy="2741040"/>
           </a:xfrm>
           <a:prstGeom prst="roundRect">
             <a:avLst>
@@ -4795,7 +4796,7 @@
         <p:spPr>
           <a:xfrm>
             <a:off x="8028360" y="3182040"/>
-            <a:ext cx="3290040" cy="2741400"/>
+            <a:ext cx="3289680" cy="2741040"/>
           </a:xfrm>
           <a:prstGeom prst="roundRect">
             <a:avLst>
@@ -4857,7 +4858,7 @@
         <p:spPr>
           <a:xfrm>
             <a:off x="7955280" y="2971800"/>
-            <a:ext cx="3931200" cy="3656880"/>
+            <a:ext cx="3930840" cy="3656520"/>
           </a:xfrm>
           <a:prstGeom prst="roundRect">
             <a:avLst>
@@ -5368,7 +5369,7 @@
         <p:spPr>
           <a:xfrm>
             <a:off x="0" y="0"/>
-            <a:ext cx="12187440" cy="6856560"/>
+            <a:ext cx="12187080" cy="6856200"/>
           </a:xfrm>
           <a:prstGeom prst="rect">
             <a:avLst/>
@@ -5428,7 +5429,7 @@
         <p:spPr>
           <a:xfrm>
             <a:off x="0" y="0"/>
-            <a:ext cx="16920" cy="6856560"/>
+            <a:ext cx="16560" cy="6856200"/>
           </a:xfrm>
           <a:prstGeom prst="rect">
             <a:avLst/>
@@ -5488,7 +5489,7 @@
         <p:spPr>
           <a:xfrm>
             <a:off x="914400" y="0"/>
-            <a:ext cx="16920" cy="6856560"/>
+            <a:ext cx="16560" cy="6856200"/>
           </a:xfrm>
           <a:prstGeom prst="rect">
             <a:avLst/>
@@ -5548,7 +5549,7 @@
         <p:spPr>
           <a:xfrm>
             <a:off x="1828800" y="0"/>
-            <a:ext cx="16920" cy="6856560"/>
+            <a:ext cx="16560" cy="6856200"/>
           </a:xfrm>
           <a:prstGeom prst="rect">
             <a:avLst/>
@@ -5608,7 +5609,7 @@
         <p:spPr>
           <a:xfrm>
             <a:off x="2743200" y="0"/>
-            <a:ext cx="16920" cy="6856560"/>
+            <a:ext cx="16560" cy="6856200"/>
           </a:xfrm>
           <a:prstGeom prst="rect">
             <a:avLst/>
@@ -5668,7 +5669,7 @@
         <p:spPr>
           <a:xfrm>
             <a:off x="3657600" y="0"/>
-            <a:ext cx="16920" cy="6856560"/>
+            <a:ext cx="16560" cy="6856200"/>
           </a:xfrm>
           <a:prstGeom prst="rect">
             <a:avLst/>
@@ -5728,7 +5729,7 @@
         <p:spPr>
           <a:xfrm>
             <a:off x="4572000" y="0"/>
-            <a:ext cx="16920" cy="6856560"/>
+            <a:ext cx="16560" cy="6856200"/>
           </a:xfrm>
           <a:prstGeom prst="rect">
             <a:avLst/>
@@ -5788,7 +5789,7 @@
         <p:spPr>
           <a:xfrm>
             <a:off x="5486400" y="0"/>
-            <a:ext cx="16920" cy="6856560"/>
+            <a:ext cx="16560" cy="6856200"/>
           </a:xfrm>
           <a:prstGeom prst="rect">
             <a:avLst/>
@@ -5848,7 +5849,7 @@
         <p:spPr>
           <a:xfrm>
             <a:off x="6400800" y="0"/>
-            <a:ext cx="16920" cy="6856560"/>
+            <a:ext cx="16560" cy="6856200"/>
           </a:xfrm>
           <a:prstGeom prst="rect">
             <a:avLst/>
@@ -5908,7 +5909,7 @@
         <p:spPr>
           <a:xfrm>
             <a:off x="7315200" y="0"/>
-            <a:ext cx="16920" cy="6856560"/>
+            <a:ext cx="16560" cy="6856200"/>
           </a:xfrm>
           <a:prstGeom prst="rect">
             <a:avLst/>
@@ -5968,7 +5969,7 @@
         <p:spPr>
           <a:xfrm>
             <a:off x="8229600" y="0"/>
-            <a:ext cx="16920" cy="6856560"/>
+            <a:ext cx="16560" cy="6856200"/>
           </a:xfrm>
           <a:prstGeom prst="rect">
             <a:avLst/>
@@ -6028,7 +6029,7 @@
         <p:spPr>
           <a:xfrm>
             <a:off x="9144000" y="0"/>
-            <a:ext cx="16920" cy="6856560"/>
+            <a:ext cx="16560" cy="6856200"/>
           </a:xfrm>
           <a:prstGeom prst="rect">
             <a:avLst/>
@@ -6088,7 +6089,7 @@
         <p:spPr>
           <a:xfrm>
             <a:off x="10058400" y="0"/>
-            <a:ext cx="16920" cy="6856560"/>
+            <a:ext cx="16560" cy="6856200"/>
           </a:xfrm>
           <a:prstGeom prst="rect">
             <a:avLst/>
@@ -6148,7 +6149,7 @@
         <p:spPr>
           <a:xfrm>
             <a:off x="10972800" y="0"/>
-            <a:ext cx="16920" cy="6856560"/>
+            <a:ext cx="16560" cy="6856200"/>
           </a:xfrm>
           <a:prstGeom prst="rect">
             <a:avLst/>
@@ -6208,7 +6209,7 @@
         <p:spPr>
           <a:xfrm>
             <a:off x="11887200" y="0"/>
-            <a:ext cx="16920" cy="6856560"/>
+            <a:ext cx="16560" cy="6856200"/>
           </a:xfrm>
           <a:prstGeom prst="rect">
             <a:avLst/>
@@ -6268,7 +6269,7 @@
         <p:spPr>
           <a:xfrm>
             <a:off x="0" y="0"/>
-            <a:ext cx="318600" cy="6856560"/>
+            <a:ext cx="318240" cy="6856200"/>
           </a:xfrm>
           <a:prstGeom prst="rect">
             <a:avLst/>
@@ -6328,7 +6329,7 @@
         <p:spPr>
           <a:xfrm>
             <a:off x="9875520" y="365760"/>
-            <a:ext cx="2010240" cy="501480"/>
+            <a:ext cx="2009880" cy="501120"/>
           </a:xfrm>
           <a:prstGeom prst="roundRect">
             <a:avLst>
@@ -6402,7 +6403,7 @@
         <p:spPr>
           <a:xfrm>
             <a:off x="723240" y="914400"/>
-            <a:ext cx="9524520" cy="638280"/>
+            <a:ext cx="9524160" cy="638280"/>
           </a:xfrm>
           <a:prstGeom prst="rect">
             <a:avLst/>
@@ -6556,7 +6557,7 @@
         <p:spPr>
           <a:xfrm>
             <a:off x="987480" y="3182040"/>
-            <a:ext cx="3290400" cy="2741760"/>
+            <a:ext cx="3290040" cy="2741400"/>
           </a:xfrm>
           <a:prstGeom prst="roundRect">
             <a:avLst>
@@ -6618,7 +6619,7 @@
         <p:spPr>
           <a:xfrm>
             <a:off x="914400" y="3108960"/>
-            <a:ext cx="3290400" cy="2741760"/>
+            <a:ext cx="3290040" cy="2741400"/>
           </a:xfrm>
           <a:prstGeom prst="roundRect">
             <a:avLst>
@@ -6781,7 +6782,7 @@
         <p:spPr>
           <a:xfrm>
             <a:off x="4507920" y="3182040"/>
-            <a:ext cx="3290400" cy="2741760"/>
+            <a:ext cx="3290040" cy="2741400"/>
           </a:xfrm>
           <a:prstGeom prst="roundRect">
             <a:avLst>
@@ -6843,7 +6844,7 @@
         <p:spPr>
           <a:xfrm>
             <a:off x="4434840" y="3108960"/>
-            <a:ext cx="3290400" cy="2741760"/>
+            <a:ext cx="3290040" cy="2741400"/>
           </a:xfrm>
           <a:prstGeom prst="roundRect">
             <a:avLst>
@@ -7101,7 +7102,7 @@
         <p:spPr>
           <a:xfrm>
             <a:off x="8028360" y="3182040"/>
-            <a:ext cx="3290400" cy="2741760"/>
+            <a:ext cx="3290040" cy="2741400"/>
           </a:xfrm>
           <a:prstGeom prst="roundRect">
             <a:avLst>
@@ -7163,7 +7164,7 @@
         <p:spPr>
           <a:xfrm>
             <a:off x="7955280" y="3108960"/>
-            <a:ext cx="3702960" cy="3062880"/>
+            <a:ext cx="3702600" cy="3062520"/>
           </a:xfrm>
           <a:prstGeom prst="roundRect">
             <a:avLst>
@@ -7524,7 +7525,7 @@
         <p:spPr>
           <a:xfrm>
             <a:off x="4600080" y="6446520"/>
-            <a:ext cx="3051360" cy="363960"/>
+            <a:ext cx="3051000" cy="363960"/>
           </a:xfrm>
           <a:prstGeom prst="rect">
             <a:avLst/>
@@ -7608,7 +7609,7 @@
         <p:spPr>
           <a:xfrm>
             <a:off x="0" y="0"/>
-            <a:ext cx="12187440" cy="6856560"/>
+            <a:ext cx="12187080" cy="6856200"/>
           </a:xfrm>
           <a:prstGeom prst="rect">
             <a:avLst/>
@@ -7644,6 +7645,11 @@
             <a:noAutofit/>
           </a:bodyPr>
           <a:p>
+            <a:pPr>
+              <a:lnSpc>
+                <a:spcPct val="100000"/>
+              </a:lnSpc>
+            </a:pPr>
             <a:endParaRPr b="0" lang="en-US" sz="1800" spc="-1" strike="noStrike">
               <a:solidFill>
                 <a:schemeClr val="lt1"/>
@@ -7663,7 +7669,7 @@
         <p:spPr>
           <a:xfrm>
             <a:off x="0" y="0"/>
-            <a:ext cx="16920" cy="6856560"/>
+            <a:ext cx="16560" cy="6856200"/>
           </a:xfrm>
           <a:prstGeom prst="rect">
             <a:avLst/>
@@ -7699,6 +7705,11 @@
             <a:noAutofit/>
           </a:bodyPr>
           <a:p>
+            <a:pPr>
+              <a:lnSpc>
+                <a:spcPct val="100000"/>
+              </a:lnSpc>
+            </a:pPr>
             <a:endParaRPr b="0" lang="en-US" sz="1800" spc="-1" strike="noStrike">
               <a:solidFill>
                 <a:schemeClr val="lt1"/>
@@ -7718,7 +7729,7 @@
         <p:spPr>
           <a:xfrm>
             <a:off x="914400" y="0"/>
-            <a:ext cx="16920" cy="6856560"/>
+            <a:ext cx="16560" cy="6856200"/>
           </a:xfrm>
           <a:prstGeom prst="rect">
             <a:avLst/>
@@ -7754,6 +7765,11 @@
             <a:noAutofit/>
           </a:bodyPr>
           <a:p>
+            <a:pPr>
+              <a:lnSpc>
+                <a:spcPct val="100000"/>
+              </a:lnSpc>
+            </a:pPr>
             <a:endParaRPr b="0" lang="en-US" sz="1800" spc="-1" strike="noStrike">
               <a:solidFill>
                 <a:schemeClr val="lt1"/>
@@ -7773,7 +7789,7 @@
         <p:spPr>
           <a:xfrm>
             <a:off x="1828800" y="0"/>
-            <a:ext cx="16920" cy="6856560"/>
+            <a:ext cx="16560" cy="6856200"/>
           </a:xfrm>
           <a:prstGeom prst="rect">
             <a:avLst/>
@@ -7809,6 +7825,11 @@
             <a:noAutofit/>
           </a:bodyPr>
           <a:p>
+            <a:pPr>
+              <a:lnSpc>
+                <a:spcPct val="100000"/>
+              </a:lnSpc>
+            </a:pPr>
             <a:endParaRPr b="0" lang="en-US" sz="1800" spc="-1" strike="noStrike">
               <a:solidFill>
                 <a:schemeClr val="lt1"/>
@@ -7828,7 +7849,7 @@
         <p:spPr>
           <a:xfrm>
             <a:off x="2743200" y="0"/>
-            <a:ext cx="16920" cy="6856560"/>
+            <a:ext cx="16560" cy="6856200"/>
           </a:xfrm>
           <a:prstGeom prst="rect">
             <a:avLst/>
@@ -7864,6 +7885,11 @@
             <a:noAutofit/>
           </a:bodyPr>
           <a:p>
+            <a:pPr>
+              <a:lnSpc>
+                <a:spcPct val="100000"/>
+              </a:lnSpc>
+            </a:pPr>
             <a:endParaRPr b="0" lang="en-US" sz="1800" spc="-1" strike="noStrike">
               <a:solidFill>
                 <a:schemeClr val="lt1"/>
@@ -7883,7 +7909,7 @@
         <p:spPr>
           <a:xfrm>
             <a:off x="3657600" y="0"/>
-            <a:ext cx="16920" cy="6856560"/>
+            <a:ext cx="16560" cy="6856200"/>
           </a:xfrm>
           <a:prstGeom prst="rect">
             <a:avLst/>
@@ -7919,6 +7945,11 @@
             <a:noAutofit/>
           </a:bodyPr>
           <a:p>
+            <a:pPr>
+              <a:lnSpc>
+                <a:spcPct val="100000"/>
+              </a:lnSpc>
+            </a:pPr>
             <a:endParaRPr b="0" lang="en-US" sz="1800" spc="-1" strike="noStrike">
               <a:solidFill>
                 <a:schemeClr val="lt1"/>
@@ -7938,7 +7969,7 @@
         <p:spPr>
           <a:xfrm>
             <a:off x="4572000" y="0"/>
-            <a:ext cx="16920" cy="6856560"/>
+            <a:ext cx="16560" cy="6856200"/>
           </a:xfrm>
           <a:prstGeom prst="rect">
             <a:avLst/>
@@ -7974,6 +8005,11 @@
             <a:noAutofit/>
           </a:bodyPr>
           <a:p>
+            <a:pPr>
+              <a:lnSpc>
+                <a:spcPct val="100000"/>
+              </a:lnSpc>
+            </a:pPr>
             <a:endParaRPr b="0" lang="en-US" sz="1800" spc="-1" strike="noStrike">
               <a:solidFill>
                 <a:schemeClr val="lt1"/>
@@ -7993,7 +8029,7 @@
         <p:spPr>
           <a:xfrm>
             <a:off x="5486400" y="0"/>
-            <a:ext cx="16920" cy="6856560"/>
+            <a:ext cx="16560" cy="6856200"/>
           </a:xfrm>
           <a:prstGeom prst="rect">
             <a:avLst/>
@@ -8029,6 +8065,11 @@
             <a:noAutofit/>
           </a:bodyPr>
           <a:p>
+            <a:pPr>
+              <a:lnSpc>
+                <a:spcPct val="100000"/>
+              </a:lnSpc>
+            </a:pPr>
             <a:endParaRPr b="0" lang="en-US" sz="1800" spc="-1" strike="noStrike">
               <a:solidFill>
                 <a:schemeClr val="lt1"/>
@@ -8048,7 +8089,7 @@
         <p:spPr>
           <a:xfrm>
             <a:off x="6400800" y="0"/>
-            <a:ext cx="16920" cy="6856560"/>
+            <a:ext cx="16560" cy="6856200"/>
           </a:xfrm>
           <a:prstGeom prst="rect">
             <a:avLst/>
@@ -8084,6 +8125,11 @@
             <a:noAutofit/>
           </a:bodyPr>
           <a:p>
+            <a:pPr>
+              <a:lnSpc>
+                <a:spcPct val="100000"/>
+              </a:lnSpc>
+            </a:pPr>
             <a:endParaRPr b="0" lang="en-US" sz="1800" spc="-1" strike="noStrike">
               <a:solidFill>
                 <a:schemeClr val="lt1"/>
@@ -8103,7 +8149,7 @@
         <p:spPr>
           <a:xfrm>
             <a:off x="7315200" y="0"/>
-            <a:ext cx="16920" cy="6856560"/>
+            <a:ext cx="16560" cy="6856200"/>
           </a:xfrm>
           <a:prstGeom prst="rect">
             <a:avLst/>
@@ -8139,6 +8185,11 @@
             <a:noAutofit/>
           </a:bodyPr>
           <a:p>
+            <a:pPr>
+              <a:lnSpc>
+                <a:spcPct val="100000"/>
+              </a:lnSpc>
+            </a:pPr>
             <a:endParaRPr b="0" lang="en-US" sz="1800" spc="-1" strike="noStrike">
               <a:solidFill>
                 <a:schemeClr val="lt1"/>
@@ -8158,7 +8209,7 @@
         <p:spPr>
           <a:xfrm>
             <a:off x="8229600" y="0"/>
-            <a:ext cx="16920" cy="6856560"/>
+            <a:ext cx="16560" cy="6856200"/>
           </a:xfrm>
           <a:prstGeom prst="rect">
             <a:avLst/>
@@ -8194,6 +8245,11 @@
             <a:noAutofit/>
           </a:bodyPr>
           <a:p>
+            <a:pPr>
+              <a:lnSpc>
+                <a:spcPct val="100000"/>
+              </a:lnSpc>
+            </a:pPr>
             <a:endParaRPr b="0" lang="en-US" sz="1800" spc="-1" strike="noStrike">
               <a:solidFill>
                 <a:schemeClr val="lt1"/>
@@ -8213,7 +8269,7 @@
         <p:spPr>
           <a:xfrm>
             <a:off x="9144000" y="0"/>
-            <a:ext cx="16920" cy="6856560"/>
+            <a:ext cx="16560" cy="6856200"/>
           </a:xfrm>
           <a:prstGeom prst="rect">
             <a:avLst/>
@@ -8249,6 +8305,11 @@
             <a:noAutofit/>
           </a:bodyPr>
           <a:p>
+            <a:pPr>
+              <a:lnSpc>
+                <a:spcPct val="100000"/>
+              </a:lnSpc>
+            </a:pPr>
             <a:endParaRPr b="0" lang="en-US" sz="1800" spc="-1" strike="noStrike">
               <a:solidFill>
                 <a:schemeClr val="lt1"/>
@@ -8268,7 +8329,7 @@
         <p:spPr>
           <a:xfrm>
             <a:off x="10058400" y="0"/>
-            <a:ext cx="16920" cy="6856560"/>
+            <a:ext cx="16560" cy="6856200"/>
           </a:xfrm>
           <a:prstGeom prst="rect">
             <a:avLst/>
@@ -8304,6 +8365,11 @@
             <a:noAutofit/>
           </a:bodyPr>
           <a:p>
+            <a:pPr>
+              <a:lnSpc>
+                <a:spcPct val="100000"/>
+              </a:lnSpc>
+            </a:pPr>
             <a:endParaRPr b="0" lang="en-US" sz="1800" spc="-1" strike="noStrike">
               <a:solidFill>
                 <a:schemeClr val="lt1"/>
@@ -8323,7 +8389,7 @@
         <p:spPr>
           <a:xfrm>
             <a:off x="10972800" y="0"/>
-            <a:ext cx="16920" cy="6856560"/>
+            <a:ext cx="16560" cy="6856200"/>
           </a:xfrm>
           <a:prstGeom prst="rect">
             <a:avLst/>
@@ -8359,6 +8425,11 @@
             <a:noAutofit/>
           </a:bodyPr>
           <a:p>
+            <a:pPr>
+              <a:lnSpc>
+                <a:spcPct val="100000"/>
+              </a:lnSpc>
+            </a:pPr>
             <a:endParaRPr b="0" lang="en-US" sz="1800" spc="-1" strike="noStrike">
               <a:solidFill>
                 <a:schemeClr val="lt1"/>
@@ -8378,7 +8449,7 @@
         <p:spPr>
           <a:xfrm>
             <a:off x="11887200" y="0"/>
-            <a:ext cx="16920" cy="6856560"/>
+            <a:ext cx="16560" cy="6856200"/>
           </a:xfrm>
           <a:prstGeom prst="rect">
             <a:avLst/>
@@ -8414,6 +8485,11 @@
             <a:noAutofit/>
           </a:bodyPr>
           <a:p>
+            <a:pPr>
+              <a:lnSpc>
+                <a:spcPct val="100000"/>
+              </a:lnSpc>
+            </a:pPr>
             <a:endParaRPr b="0" lang="en-US" sz="1800" spc="-1" strike="noStrike">
               <a:solidFill>
                 <a:schemeClr val="lt1"/>
@@ -8433,7 +8509,7 @@
         <p:spPr>
           <a:xfrm>
             <a:off x="0" y="0"/>
-            <a:ext cx="318600" cy="6856560"/>
+            <a:ext cx="318240" cy="6856200"/>
           </a:xfrm>
           <a:prstGeom prst="rect">
             <a:avLst/>
@@ -8469,6 +8545,11 @@
             <a:noAutofit/>
           </a:bodyPr>
           <a:p>
+            <a:pPr>
+              <a:lnSpc>
+                <a:spcPct val="100000"/>
+              </a:lnSpc>
+            </a:pPr>
             <a:endParaRPr b="0" lang="en-US" sz="1800" spc="-1" strike="noStrike">
               <a:solidFill>
                 <a:schemeClr val="lt1"/>
@@ -8488,7 +8569,7 @@
         <p:spPr>
           <a:xfrm>
             <a:off x="9875520" y="365760"/>
-            <a:ext cx="2010240" cy="501480"/>
+            <a:ext cx="2009880" cy="501120"/>
           </a:xfrm>
           <a:prstGeom prst="roundRect">
             <a:avLst>
@@ -8562,7 +8643,7 @@
         <p:spPr>
           <a:xfrm>
             <a:off x="942480" y="914400"/>
-            <a:ext cx="9085680" cy="638280"/>
+            <a:ext cx="9085320" cy="638280"/>
           </a:xfrm>
           <a:prstGeom prst="rect">
             <a:avLst/>
@@ -8616,7 +8697,7 @@
         <p:spPr>
           <a:xfrm>
             <a:off x="1149480" y="1828800"/>
-            <a:ext cx="9190800" cy="576360"/>
+            <a:ext cx="9190440" cy="576360"/>
           </a:xfrm>
           <a:prstGeom prst="rect">
             <a:avLst/>
@@ -8693,7 +8774,7 @@
         <p:spPr>
           <a:xfrm>
             <a:off x="987480" y="3182040"/>
-            <a:ext cx="3290400" cy="2741760"/>
+            <a:ext cx="3290040" cy="2741400"/>
           </a:xfrm>
           <a:prstGeom prst="roundRect">
             <a:avLst>
@@ -8731,6 +8812,11 @@
             <a:noAutofit/>
           </a:bodyPr>
           <a:p>
+            <a:pPr>
+              <a:lnSpc>
+                <a:spcPct val="100000"/>
+              </a:lnSpc>
+            </a:pPr>
             <a:endParaRPr b="0" lang="en-US" sz="1800" spc="-1" strike="noStrike">
               <a:solidFill>
                 <a:schemeClr val="lt1"/>
@@ -8750,7 +8836,7 @@
         <p:spPr>
           <a:xfrm>
             <a:off x="914400" y="3108960"/>
-            <a:ext cx="3290400" cy="3063240"/>
+            <a:ext cx="3290040" cy="3062880"/>
           </a:xfrm>
           <a:prstGeom prst="roundRect">
             <a:avLst>
@@ -8941,7 +9027,7 @@
         <p:spPr>
           <a:xfrm>
             <a:off x="4507920" y="3182040"/>
-            <a:ext cx="3290400" cy="2741760"/>
+            <a:ext cx="3290040" cy="2741400"/>
           </a:xfrm>
           <a:prstGeom prst="roundRect">
             <a:avLst>
@@ -8979,6 +9065,11 @@
             <a:noAutofit/>
           </a:bodyPr>
           <a:p>
+            <a:pPr>
+              <a:lnSpc>
+                <a:spcPct val="100000"/>
+              </a:lnSpc>
+            </a:pPr>
             <a:endParaRPr b="0" lang="en-US" sz="1800" spc="-1" strike="noStrike">
               <a:solidFill>
                 <a:schemeClr val="lt1"/>
@@ -8998,7 +9089,7 @@
         <p:spPr>
           <a:xfrm>
             <a:off x="4434840" y="3108960"/>
-            <a:ext cx="3290400" cy="2741760"/>
+            <a:ext cx="3290040" cy="2741400"/>
           </a:xfrm>
           <a:prstGeom prst="roundRect">
             <a:avLst>
@@ -9256,7 +9347,7 @@
         <p:spPr>
           <a:xfrm>
             <a:off x="8028360" y="3182040"/>
-            <a:ext cx="3290400" cy="2741760"/>
+            <a:ext cx="3290040" cy="2741400"/>
           </a:xfrm>
           <a:prstGeom prst="roundRect">
             <a:avLst>
@@ -9294,6 +9385,11 @@
             <a:noAutofit/>
           </a:bodyPr>
           <a:p>
+            <a:pPr>
+              <a:lnSpc>
+                <a:spcPct val="100000"/>
+              </a:lnSpc>
+            </a:pPr>
             <a:endParaRPr b="0" lang="en-US" sz="1800" spc="-1" strike="noStrike">
               <a:solidFill>
                 <a:schemeClr val="lt1"/>
@@ -9313,7 +9409,7 @@
         <p:spPr>
           <a:xfrm>
             <a:off x="7955280" y="3108960"/>
-            <a:ext cx="3702960" cy="3062880"/>
+            <a:ext cx="3702600" cy="3062520"/>
           </a:xfrm>
           <a:prstGeom prst="roundRect">
             <a:avLst>
@@ -9674,7 +9770,2226 @@
         <p:spPr>
           <a:xfrm>
             <a:off x="4600080" y="6446520"/>
-            <a:ext cx="3051360" cy="363960"/>
+            <a:ext cx="3051000" cy="363960"/>
+          </a:xfrm>
+          <a:prstGeom prst="rect">
+            <a:avLst/>
+          </a:prstGeom>
+          <a:noFill/>
+          <a:ln w="0">
+            <a:noFill/>
+          </a:ln>
+        </p:spPr>
+        <p:style>
+          <a:lnRef idx="0"/>
+          <a:fillRef idx="0"/>
+          <a:effectRef idx="0"/>
+          <a:fontRef idx="minor"/>
+        </p:style>
+        <p:txBody>
+          <a:bodyPr wrap="none" lIns="90000" rIns="90000" tIns="45000" bIns="45000" anchor="t">
+            <a:spAutoFit/>
+          </a:bodyPr>
+          <a:p>
+            <a:pPr>
+              <a:lnSpc>
+                <a:spcPct val="100000"/>
+              </a:lnSpc>
+            </a:pPr>
+            <a:r>
+              <a:rPr b="0" lang="en-US" sz="1800" spc="-1" strike="noStrike">
+                <a:solidFill>
+                  <a:srgbClr val="000000"/>
+                </a:solidFill>
+                <a:latin typeface="Calibri"/>
+                <a:ea typeface="DejaVu Sans"/>
+              </a:rPr>
+              <a:t>Java • Ultra Premium Template</a:t>
+            </a:r>
+            <a:endParaRPr b="0" lang="en-US" sz="1800" spc="-1" strike="noStrike">
+              <a:solidFill>
+                <a:srgbClr val="000000"/>
+              </a:solidFill>
+              <a:latin typeface="Arial"/>
+            </a:endParaRPr>
+          </a:p>
+        </p:txBody>
+      </p:sp>
+    </p:spTree>
+  </p:cSld>
+  <mc:AlternateContent>
+    <mc:Choice Requires="p14">
+      <p:transition spd="slow" p14:dur="2000"/>
+    </mc:Choice>
+    <mc:Fallback>
+      <p:transition spd="slow"/>
+    </mc:Fallback>
+  </mc:AlternateContent>
+</p:sld>
+</file>
+
+<file path=ppt/slides/slide4.xml><?xml version="1.0" encoding="utf-8"?>
+<p:sld xmlns:a="http://schemas.openxmlformats.org/drawingml/2006/main" xmlns:p="http://schemas.openxmlformats.org/presentationml/2006/main" xmlns:r="http://schemas.openxmlformats.org/officeDocument/2006/relationships" xmlns:p14="http://schemas.microsoft.com/office/powerpoint/2010/main" xmlns:p15="http://schemas.microsoft.com/office/powerpoint/2012/main" xmlns:mc="http://schemas.openxmlformats.org/markup-compatibility/2006">
+  <p:cSld>
+    <p:spTree>
+      <p:nvGrpSpPr>
+        <p:cNvPr id="1" name=""/>
+        <p:cNvGrpSpPr/>
+        <p:nvPr/>
+      </p:nvGrpSpPr>
+      <p:grpSpPr>
+        <a:xfrm>
+          <a:off x="0" y="0"/>
+          <a:ext cx="0" cy="0"/>
+          <a:chOff x="0" y="0"/>
+          <a:chExt cx="0" cy="0"/>
+        </a:xfrm>
+      </p:grpSpPr>
+      <p:sp>
+        <p:nvSpPr>
+          <p:cNvPr id="119" name="Rectangle 49"/>
+          <p:cNvSpPr/>
+          <p:nvPr/>
+        </p:nvSpPr>
+        <p:spPr>
+          <a:xfrm>
+            <a:off x="0" y="0"/>
+            <a:ext cx="12187080" cy="6856200"/>
+          </a:xfrm>
+          <a:prstGeom prst="rect">
+            <a:avLst/>
+          </a:prstGeom>
+          <a:solidFill>
+            <a:srgbClr val="0b0b0d"/>
+          </a:solidFill>
+          <a:ln>
+            <a:noFill/>
+          </a:ln>
+          <a:effectLst>
+            <a:outerShdw blurRad="39960" dir="5400000" dist="23040" rotWithShape="0">
+              <a:srgbClr val="000000">
+                <a:alpha val="35000"/>
+              </a:srgbClr>
+            </a:outerShdw>
+          </a:effectLst>
+        </p:spPr>
+        <p:style>
+          <a:lnRef idx="1">
+            <a:schemeClr val="accent1"/>
+          </a:lnRef>
+          <a:fillRef idx="3">
+            <a:schemeClr val="accent1"/>
+          </a:fillRef>
+          <a:effectRef idx="2">
+            <a:schemeClr val="accent1"/>
+          </a:effectRef>
+          <a:fontRef idx="minor"/>
+        </p:style>
+        <p:txBody>
+          <a:bodyPr lIns="90000" rIns="90000" tIns="45000" bIns="45000" anchor="ctr">
+            <a:noAutofit/>
+          </a:bodyPr>
+          <a:p>
+            <a:endParaRPr b="0" lang="en-US" sz="1800" spc="-1" strike="noStrike">
+              <a:solidFill>
+                <a:schemeClr val="lt1"/>
+              </a:solidFill>
+              <a:latin typeface="Calibri"/>
+              <a:ea typeface="DejaVu Sans"/>
+            </a:endParaRPr>
+          </a:p>
+        </p:txBody>
+      </p:sp>
+      <p:sp>
+        <p:nvSpPr>
+          <p:cNvPr id="120" name="Rectangle 50"/>
+          <p:cNvSpPr/>
+          <p:nvPr/>
+        </p:nvSpPr>
+        <p:spPr>
+          <a:xfrm>
+            <a:off x="0" y="0"/>
+            <a:ext cx="16560" cy="6856200"/>
+          </a:xfrm>
+          <a:prstGeom prst="rect">
+            <a:avLst/>
+          </a:prstGeom>
+          <a:solidFill>
+            <a:srgbClr val="121216"/>
+          </a:solidFill>
+          <a:ln>
+            <a:noFill/>
+          </a:ln>
+          <a:effectLst>
+            <a:outerShdw blurRad="39960" dir="5400000" dist="23040" rotWithShape="0">
+              <a:srgbClr val="000000">
+                <a:alpha val="35000"/>
+              </a:srgbClr>
+            </a:outerShdw>
+          </a:effectLst>
+        </p:spPr>
+        <p:style>
+          <a:lnRef idx="1">
+            <a:schemeClr val="accent1"/>
+          </a:lnRef>
+          <a:fillRef idx="3">
+            <a:schemeClr val="accent1"/>
+          </a:fillRef>
+          <a:effectRef idx="2">
+            <a:schemeClr val="accent1"/>
+          </a:effectRef>
+          <a:fontRef idx="minor"/>
+        </p:style>
+        <p:txBody>
+          <a:bodyPr lIns="90000" rIns="90000" tIns="45000" bIns="45000" anchor="ctr">
+            <a:noAutofit/>
+          </a:bodyPr>
+          <a:p>
+            <a:endParaRPr b="0" lang="en-US" sz="1800" spc="-1" strike="noStrike">
+              <a:solidFill>
+                <a:schemeClr val="lt1"/>
+              </a:solidFill>
+              <a:latin typeface="Calibri"/>
+              <a:ea typeface="DejaVu Sans"/>
+            </a:endParaRPr>
+          </a:p>
+        </p:txBody>
+      </p:sp>
+      <p:sp>
+        <p:nvSpPr>
+          <p:cNvPr id="121" name="Rectangle 51"/>
+          <p:cNvSpPr/>
+          <p:nvPr/>
+        </p:nvSpPr>
+        <p:spPr>
+          <a:xfrm>
+            <a:off x="914400" y="0"/>
+            <a:ext cx="16560" cy="6856200"/>
+          </a:xfrm>
+          <a:prstGeom prst="rect">
+            <a:avLst/>
+          </a:prstGeom>
+          <a:solidFill>
+            <a:srgbClr val="121216"/>
+          </a:solidFill>
+          <a:ln>
+            <a:noFill/>
+          </a:ln>
+          <a:effectLst>
+            <a:outerShdw blurRad="39960" dir="5400000" dist="23040" rotWithShape="0">
+              <a:srgbClr val="000000">
+                <a:alpha val="35000"/>
+              </a:srgbClr>
+            </a:outerShdw>
+          </a:effectLst>
+        </p:spPr>
+        <p:style>
+          <a:lnRef idx="1">
+            <a:schemeClr val="accent1"/>
+          </a:lnRef>
+          <a:fillRef idx="3">
+            <a:schemeClr val="accent1"/>
+          </a:fillRef>
+          <a:effectRef idx="2">
+            <a:schemeClr val="accent1"/>
+          </a:effectRef>
+          <a:fontRef idx="minor"/>
+        </p:style>
+        <p:txBody>
+          <a:bodyPr lIns="90000" rIns="90000" tIns="45000" bIns="45000" anchor="ctr">
+            <a:noAutofit/>
+          </a:bodyPr>
+          <a:p>
+            <a:endParaRPr b="0" lang="en-US" sz="1800" spc="-1" strike="noStrike">
+              <a:solidFill>
+                <a:schemeClr val="lt1"/>
+              </a:solidFill>
+              <a:latin typeface="Calibri"/>
+              <a:ea typeface="DejaVu Sans"/>
+            </a:endParaRPr>
+          </a:p>
+        </p:txBody>
+      </p:sp>
+      <p:sp>
+        <p:nvSpPr>
+          <p:cNvPr id="122" name="Rectangle 52"/>
+          <p:cNvSpPr/>
+          <p:nvPr/>
+        </p:nvSpPr>
+        <p:spPr>
+          <a:xfrm>
+            <a:off x="1828800" y="0"/>
+            <a:ext cx="16560" cy="6856200"/>
+          </a:xfrm>
+          <a:prstGeom prst="rect">
+            <a:avLst/>
+          </a:prstGeom>
+          <a:solidFill>
+            <a:srgbClr val="121216"/>
+          </a:solidFill>
+          <a:ln>
+            <a:noFill/>
+          </a:ln>
+          <a:effectLst>
+            <a:outerShdw blurRad="39960" dir="5400000" dist="23040" rotWithShape="0">
+              <a:srgbClr val="000000">
+                <a:alpha val="35000"/>
+              </a:srgbClr>
+            </a:outerShdw>
+          </a:effectLst>
+        </p:spPr>
+        <p:style>
+          <a:lnRef idx="1">
+            <a:schemeClr val="accent1"/>
+          </a:lnRef>
+          <a:fillRef idx="3">
+            <a:schemeClr val="accent1"/>
+          </a:fillRef>
+          <a:effectRef idx="2">
+            <a:schemeClr val="accent1"/>
+          </a:effectRef>
+          <a:fontRef idx="minor"/>
+        </p:style>
+        <p:txBody>
+          <a:bodyPr lIns="90000" rIns="90000" tIns="45000" bIns="45000" anchor="ctr">
+            <a:noAutofit/>
+          </a:bodyPr>
+          <a:p>
+            <a:endParaRPr b="0" lang="en-US" sz="1800" spc="-1" strike="noStrike">
+              <a:solidFill>
+                <a:schemeClr val="lt1"/>
+              </a:solidFill>
+              <a:latin typeface="Calibri"/>
+              <a:ea typeface="DejaVu Sans"/>
+            </a:endParaRPr>
+          </a:p>
+        </p:txBody>
+      </p:sp>
+      <p:sp>
+        <p:nvSpPr>
+          <p:cNvPr id="123" name="Rectangle 53"/>
+          <p:cNvSpPr/>
+          <p:nvPr/>
+        </p:nvSpPr>
+        <p:spPr>
+          <a:xfrm>
+            <a:off x="2743200" y="0"/>
+            <a:ext cx="16560" cy="6856200"/>
+          </a:xfrm>
+          <a:prstGeom prst="rect">
+            <a:avLst/>
+          </a:prstGeom>
+          <a:solidFill>
+            <a:srgbClr val="121216"/>
+          </a:solidFill>
+          <a:ln>
+            <a:noFill/>
+          </a:ln>
+          <a:effectLst>
+            <a:outerShdw blurRad="39960" dir="5400000" dist="23040" rotWithShape="0">
+              <a:srgbClr val="000000">
+                <a:alpha val="35000"/>
+              </a:srgbClr>
+            </a:outerShdw>
+          </a:effectLst>
+        </p:spPr>
+        <p:style>
+          <a:lnRef idx="1">
+            <a:schemeClr val="accent1"/>
+          </a:lnRef>
+          <a:fillRef idx="3">
+            <a:schemeClr val="accent1"/>
+          </a:fillRef>
+          <a:effectRef idx="2">
+            <a:schemeClr val="accent1"/>
+          </a:effectRef>
+          <a:fontRef idx="minor"/>
+        </p:style>
+        <p:txBody>
+          <a:bodyPr lIns="90000" rIns="90000" tIns="45000" bIns="45000" anchor="ctr">
+            <a:noAutofit/>
+          </a:bodyPr>
+          <a:p>
+            <a:endParaRPr b="0" lang="en-US" sz="1800" spc="-1" strike="noStrike">
+              <a:solidFill>
+                <a:schemeClr val="lt1"/>
+              </a:solidFill>
+              <a:latin typeface="Calibri"/>
+              <a:ea typeface="DejaVu Sans"/>
+            </a:endParaRPr>
+          </a:p>
+        </p:txBody>
+      </p:sp>
+      <p:sp>
+        <p:nvSpPr>
+          <p:cNvPr id="124" name="Rectangle 54"/>
+          <p:cNvSpPr/>
+          <p:nvPr/>
+        </p:nvSpPr>
+        <p:spPr>
+          <a:xfrm>
+            <a:off x="3657600" y="0"/>
+            <a:ext cx="16560" cy="6856200"/>
+          </a:xfrm>
+          <a:prstGeom prst="rect">
+            <a:avLst/>
+          </a:prstGeom>
+          <a:solidFill>
+            <a:srgbClr val="121216"/>
+          </a:solidFill>
+          <a:ln>
+            <a:noFill/>
+          </a:ln>
+          <a:effectLst>
+            <a:outerShdw blurRad="39960" dir="5400000" dist="23040" rotWithShape="0">
+              <a:srgbClr val="000000">
+                <a:alpha val="35000"/>
+              </a:srgbClr>
+            </a:outerShdw>
+          </a:effectLst>
+        </p:spPr>
+        <p:style>
+          <a:lnRef idx="1">
+            <a:schemeClr val="accent1"/>
+          </a:lnRef>
+          <a:fillRef idx="3">
+            <a:schemeClr val="accent1"/>
+          </a:fillRef>
+          <a:effectRef idx="2">
+            <a:schemeClr val="accent1"/>
+          </a:effectRef>
+          <a:fontRef idx="minor"/>
+        </p:style>
+        <p:txBody>
+          <a:bodyPr lIns="90000" rIns="90000" tIns="45000" bIns="45000" anchor="ctr">
+            <a:noAutofit/>
+          </a:bodyPr>
+          <a:p>
+            <a:endParaRPr b="0" lang="en-US" sz="1800" spc="-1" strike="noStrike">
+              <a:solidFill>
+                <a:schemeClr val="lt1"/>
+              </a:solidFill>
+              <a:latin typeface="Calibri"/>
+              <a:ea typeface="DejaVu Sans"/>
+            </a:endParaRPr>
+          </a:p>
+        </p:txBody>
+      </p:sp>
+      <p:sp>
+        <p:nvSpPr>
+          <p:cNvPr id="125" name="Rectangle 55"/>
+          <p:cNvSpPr/>
+          <p:nvPr/>
+        </p:nvSpPr>
+        <p:spPr>
+          <a:xfrm>
+            <a:off x="4572000" y="0"/>
+            <a:ext cx="16560" cy="6856200"/>
+          </a:xfrm>
+          <a:prstGeom prst="rect">
+            <a:avLst/>
+          </a:prstGeom>
+          <a:solidFill>
+            <a:srgbClr val="121216"/>
+          </a:solidFill>
+          <a:ln>
+            <a:noFill/>
+          </a:ln>
+          <a:effectLst>
+            <a:outerShdw blurRad="39960" dir="5400000" dist="23040" rotWithShape="0">
+              <a:srgbClr val="000000">
+                <a:alpha val="35000"/>
+              </a:srgbClr>
+            </a:outerShdw>
+          </a:effectLst>
+        </p:spPr>
+        <p:style>
+          <a:lnRef idx="1">
+            <a:schemeClr val="accent1"/>
+          </a:lnRef>
+          <a:fillRef idx="3">
+            <a:schemeClr val="accent1"/>
+          </a:fillRef>
+          <a:effectRef idx="2">
+            <a:schemeClr val="accent1"/>
+          </a:effectRef>
+          <a:fontRef idx="minor"/>
+        </p:style>
+        <p:txBody>
+          <a:bodyPr lIns="90000" rIns="90000" tIns="45000" bIns="45000" anchor="ctr">
+            <a:noAutofit/>
+          </a:bodyPr>
+          <a:p>
+            <a:endParaRPr b="0" lang="en-US" sz="1800" spc="-1" strike="noStrike">
+              <a:solidFill>
+                <a:schemeClr val="lt1"/>
+              </a:solidFill>
+              <a:latin typeface="Calibri"/>
+              <a:ea typeface="DejaVu Sans"/>
+            </a:endParaRPr>
+          </a:p>
+        </p:txBody>
+      </p:sp>
+      <p:sp>
+        <p:nvSpPr>
+          <p:cNvPr id="126" name="Rectangle 56"/>
+          <p:cNvSpPr/>
+          <p:nvPr/>
+        </p:nvSpPr>
+        <p:spPr>
+          <a:xfrm>
+            <a:off x="5486400" y="0"/>
+            <a:ext cx="16560" cy="6856200"/>
+          </a:xfrm>
+          <a:prstGeom prst="rect">
+            <a:avLst/>
+          </a:prstGeom>
+          <a:solidFill>
+            <a:srgbClr val="121216"/>
+          </a:solidFill>
+          <a:ln>
+            <a:noFill/>
+          </a:ln>
+          <a:effectLst>
+            <a:outerShdw blurRad="39960" dir="5400000" dist="23040" rotWithShape="0">
+              <a:srgbClr val="000000">
+                <a:alpha val="35000"/>
+              </a:srgbClr>
+            </a:outerShdw>
+          </a:effectLst>
+        </p:spPr>
+        <p:style>
+          <a:lnRef idx="1">
+            <a:schemeClr val="accent1"/>
+          </a:lnRef>
+          <a:fillRef idx="3">
+            <a:schemeClr val="accent1"/>
+          </a:fillRef>
+          <a:effectRef idx="2">
+            <a:schemeClr val="accent1"/>
+          </a:effectRef>
+          <a:fontRef idx="minor"/>
+        </p:style>
+        <p:txBody>
+          <a:bodyPr lIns="90000" rIns="90000" tIns="45000" bIns="45000" anchor="ctr">
+            <a:noAutofit/>
+          </a:bodyPr>
+          <a:p>
+            <a:endParaRPr b="0" lang="en-US" sz="1800" spc="-1" strike="noStrike">
+              <a:solidFill>
+                <a:schemeClr val="lt1"/>
+              </a:solidFill>
+              <a:latin typeface="Calibri"/>
+              <a:ea typeface="DejaVu Sans"/>
+            </a:endParaRPr>
+          </a:p>
+        </p:txBody>
+      </p:sp>
+      <p:sp>
+        <p:nvSpPr>
+          <p:cNvPr id="127" name="Rectangle 57"/>
+          <p:cNvSpPr/>
+          <p:nvPr/>
+        </p:nvSpPr>
+        <p:spPr>
+          <a:xfrm>
+            <a:off x="6400800" y="0"/>
+            <a:ext cx="16560" cy="6856200"/>
+          </a:xfrm>
+          <a:prstGeom prst="rect">
+            <a:avLst/>
+          </a:prstGeom>
+          <a:solidFill>
+            <a:srgbClr val="121216"/>
+          </a:solidFill>
+          <a:ln>
+            <a:noFill/>
+          </a:ln>
+          <a:effectLst>
+            <a:outerShdw blurRad="39960" dir="5400000" dist="23040" rotWithShape="0">
+              <a:srgbClr val="000000">
+                <a:alpha val="35000"/>
+              </a:srgbClr>
+            </a:outerShdw>
+          </a:effectLst>
+        </p:spPr>
+        <p:style>
+          <a:lnRef idx="1">
+            <a:schemeClr val="accent1"/>
+          </a:lnRef>
+          <a:fillRef idx="3">
+            <a:schemeClr val="accent1"/>
+          </a:fillRef>
+          <a:effectRef idx="2">
+            <a:schemeClr val="accent1"/>
+          </a:effectRef>
+          <a:fontRef idx="minor"/>
+        </p:style>
+        <p:txBody>
+          <a:bodyPr lIns="90000" rIns="90000" tIns="45000" bIns="45000" anchor="ctr">
+            <a:noAutofit/>
+          </a:bodyPr>
+          <a:p>
+            <a:endParaRPr b="0" lang="en-US" sz="1800" spc="-1" strike="noStrike">
+              <a:solidFill>
+                <a:schemeClr val="lt1"/>
+              </a:solidFill>
+              <a:latin typeface="Calibri"/>
+              <a:ea typeface="DejaVu Sans"/>
+            </a:endParaRPr>
+          </a:p>
+        </p:txBody>
+      </p:sp>
+      <p:sp>
+        <p:nvSpPr>
+          <p:cNvPr id="128" name="Rectangle 58"/>
+          <p:cNvSpPr/>
+          <p:nvPr/>
+        </p:nvSpPr>
+        <p:spPr>
+          <a:xfrm>
+            <a:off x="7315200" y="0"/>
+            <a:ext cx="16560" cy="6856200"/>
+          </a:xfrm>
+          <a:prstGeom prst="rect">
+            <a:avLst/>
+          </a:prstGeom>
+          <a:solidFill>
+            <a:srgbClr val="121216"/>
+          </a:solidFill>
+          <a:ln>
+            <a:noFill/>
+          </a:ln>
+          <a:effectLst>
+            <a:outerShdw blurRad="39960" dir="5400000" dist="23040" rotWithShape="0">
+              <a:srgbClr val="000000">
+                <a:alpha val="35000"/>
+              </a:srgbClr>
+            </a:outerShdw>
+          </a:effectLst>
+        </p:spPr>
+        <p:style>
+          <a:lnRef idx="1">
+            <a:schemeClr val="accent1"/>
+          </a:lnRef>
+          <a:fillRef idx="3">
+            <a:schemeClr val="accent1"/>
+          </a:fillRef>
+          <a:effectRef idx="2">
+            <a:schemeClr val="accent1"/>
+          </a:effectRef>
+          <a:fontRef idx="minor"/>
+        </p:style>
+        <p:txBody>
+          <a:bodyPr lIns="90000" rIns="90000" tIns="45000" bIns="45000" anchor="ctr">
+            <a:noAutofit/>
+          </a:bodyPr>
+          <a:p>
+            <a:endParaRPr b="0" lang="en-US" sz="1800" spc="-1" strike="noStrike">
+              <a:solidFill>
+                <a:schemeClr val="lt1"/>
+              </a:solidFill>
+              <a:latin typeface="Calibri"/>
+              <a:ea typeface="DejaVu Sans"/>
+            </a:endParaRPr>
+          </a:p>
+        </p:txBody>
+      </p:sp>
+      <p:sp>
+        <p:nvSpPr>
+          <p:cNvPr id="129" name="Rectangle 59"/>
+          <p:cNvSpPr/>
+          <p:nvPr/>
+        </p:nvSpPr>
+        <p:spPr>
+          <a:xfrm>
+            <a:off x="8229600" y="0"/>
+            <a:ext cx="16560" cy="6856200"/>
+          </a:xfrm>
+          <a:prstGeom prst="rect">
+            <a:avLst/>
+          </a:prstGeom>
+          <a:solidFill>
+            <a:srgbClr val="121216"/>
+          </a:solidFill>
+          <a:ln>
+            <a:noFill/>
+          </a:ln>
+          <a:effectLst>
+            <a:outerShdw blurRad="39960" dir="5400000" dist="23040" rotWithShape="0">
+              <a:srgbClr val="000000">
+                <a:alpha val="35000"/>
+              </a:srgbClr>
+            </a:outerShdw>
+          </a:effectLst>
+        </p:spPr>
+        <p:style>
+          <a:lnRef idx="1">
+            <a:schemeClr val="accent1"/>
+          </a:lnRef>
+          <a:fillRef idx="3">
+            <a:schemeClr val="accent1"/>
+          </a:fillRef>
+          <a:effectRef idx="2">
+            <a:schemeClr val="accent1"/>
+          </a:effectRef>
+          <a:fontRef idx="minor"/>
+        </p:style>
+        <p:txBody>
+          <a:bodyPr lIns="90000" rIns="90000" tIns="45000" bIns="45000" anchor="ctr">
+            <a:noAutofit/>
+          </a:bodyPr>
+          <a:p>
+            <a:endParaRPr b="0" lang="en-US" sz="1800" spc="-1" strike="noStrike">
+              <a:solidFill>
+                <a:schemeClr val="lt1"/>
+              </a:solidFill>
+              <a:latin typeface="Calibri"/>
+              <a:ea typeface="DejaVu Sans"/>
+            </a:endParaRPr>
+          </a:p>
+        </p:txBody>
+      </p:sp>
+      <p:sp>
+        <p:nvSpPr>
+          <p:cNvPr id="130" name="Rectangle 60"/>
+          <p:cNvSpPr/>
+          <p:nvPr/>
+        </p:nvSpPr>
+        <p:spPr>
+          <a:xfrm>
+            <a:off x="9144000" y="0"/>
+            <a:ext cx="16560" cy="6856200"/>
+          </a:xfrm>
+          <a:prstGeom prst="rect">
+            <a:avLst/>
+          </a:prstGeom>
+          <a:solidFill>
+            <a:srgbClr val="121216"/>
+          </a:solidFill>
+          <a:ln>
+            <a:noFill/>
+          </a:ln>
+          <a:effectLst>
+            <a:outerShdw blurRad="39960" dir="5400000" dist="23040" rotWithShape="0">
+              <a:srgbClr val="000000">
+                <a:alpha val="35000"/>
+              </a:srgbClr>
+            </a:outerShdw>
+          </a:effectLst>
+        </p:spPr>
+        <p:style>
+          <a:lnRef idx="1">
+            <a:schemeClr val="accent1"/>
+          </a:lnRef>
+          <a:fillRef idx="3">
+            <a:schemeClr val="accent1"/>
+          </a:fillRef>
+          <a:effectRef idx="2">
+            <a:schemeClr val="accent1"/>
+          </a:effectRef>
+          <a:fontRef idx="minor"/>
+        </p:style>
+        <p:txBody>
+          <a:bodyPr lIns="90000" rIns="90000" tIns="45000" bIns="45000" anchor="ctr">
+            <a:noAutofit/>
+          </a:bodyPr>
+          <a:p>
+            <a:endParaRPr b="0" lang="en-US" sz="1800" spc="-1" strike="noStrike">
+              <a:solidFill>
+                <a:schemeClr val="lt1"/>
+              </a:solidFill>
+              <a:latin typeface="Calibri"/>
+              <a:ea typeface="DejaVu Sans"/>
+            </a:endParaRPr>
+          </a:p>
+        </p:txBody>
+      </p:sp>
+      <p:sp>
+        <p:nvSpPr>
+          <p:cNvPr id="131" name="Rectangle 61"/>
+          <p:cNvSpPr/>
+          <p:nvPr/>
+        </p:nvSpPr>
+        <p:spPr>
+          <a:xfrm>
+            <a:off x="10058400" y="0"/>
+            <a:ext cx="16560" cy="6856200"/>
+          </a:xfrm>
+          <a:prstGeom prst="rect">
+            <a:avLst/>
+          </a:prstGeom>
+          <a:solidFill>
+            <a:srgbClr val="121216"/>
+          </a:solidFill>
+          <a:ln>
+            <a:noFill/>
+          </a:ln>
+          <a:effectLst>
+            <a:outerShdw blurRad="39960" dir="5400000" dist="23040" rotWithShape="0">
+              <a:srgbClr val="000000">
+                <a:alpha val="35000"/>
+              </a:srgbClr>
+            </a:outerShdw>
+          </a:effectLst>
+        </p:spPr>
+        <p:style>
+          <a:lnRef idx="1">
+            <a:schemeClr val="accent1"/>
+          </a:lnRef>
+          <a:fillRef idx="3">
+            <a:schemeClr val="accent1"/>
+          </a:fillRef>
+          <a:effectRef idx="2">
+            <a:schemeClr val="accent1"/>
+          </a:effectRef>
+          <a:fontRef idx="minor"/>
+        </p:style>
+        <p:txBody>
+          <a:bodyPr lIns="90000" rIns="90000" tIns="45000" bIns="45000" anchor="ctr">
+            <a:noAutofit/>
+          </a:bodyPr>
+          <a:p>
+            <a:endParaRPr b="0" lang="en-US" sz="1800" spc="-1" strike="noStrike">
+              <a:solidFill>
+                <a:schemeClr val="lt1"/>
+              </a:solidFill>
+              <a:latin typeface="Calibri"/>
+              <a:ea typeface="DejaVu Sans"/>
+            </a:endParaRPr>
+          </a:p>
+        </p:txBody>
+      </p:sp>
+      <p:sp>
+        <p:nvSpPr>
+          <p:cNvPr id="132" name="Rectangle 62"/>
+          <p:cNvSpPr/>
+          <p:nvPr/>
+        </p:nvSpPr>
+        <p:spPr>
+          <a:xfrm>
+            <a:off x="10972800" y="0"/>
+            <a:ext cx="16560" cy="6856200"/>
+          </a:xfrm>
+          <a:prstGeom prst="rect">
+            <a:avLst/>
+          </a:prstGeom>
+          <a:solidFill>
+            <a:srgbClr val="121216"/>
+          </a:solidFill>
+          <a:ln>
+            <a:noFill/>
+          </a:ln>
+          <a:effectLst>
+            <a:outerShdw blurRad="39960" dir="5400000" dist="23040" rotWithShape="0">
+              <a:srgbClr val="000000">
+                <a:alpha val="35000"/>
+              </a:srgbClr>
+            </a:outerShdw>
+          </a:effectLst>
+        </p:spPr>
+        <p:style>
+          <a:lnRef idx="1">
+            <a:schemeClr val="accent1"/>
+          </a:lnRef>
+          <a:fillRef idx="3">
+            <a:schemeClr val="accent1"/>
+          </a:fillRef>
+          <a:effectRef idx="2">
+            <a:schemeClr val="accent1"/>
+          </a:effectRef>
+          <a:fontRef idx="minor"/>
+        </p:style>
+        <p:txBody>
+          <a:bodyPr lIns="90000" rIns="90000" tIns="45000" bIns="45000" anchor="ctr">
+            <a:noAutofit/>
+          </a:bodyPr>
+          <a:p>
+            <a:endParaRPr b="0" lang="en-US" sz="1800" spc="-1" strike="noStrike">
+              <a:solidFill>
+                <a:schemeClr val="lt1"/>
+              </a:solidFill>
+              <a:latin typeface="Calibri"/>
+              <a:ea typeface="DejaVu Sans"/>
+            </a:endParaRPr>
+          </a:p>
+        </p:txBody>
+      </p:sp>
+      <p:sp>
+        <p:nvSpPr>
+          <p:cNvPr id="133" name="Rectangle 63"/>
+          <p:cNvSpPr/>
+          <p:nvPr/>
+        </p:nvSpPr>
+        <p:spPr>
+          <a:xfrm>
+            <a:off x="11887200" y="0"/>
+            <a:ext cx="16560" cy="6856200"/>
+          </a:xfrm>
+          <a:prstGeom prst="rect">
+            <a:avLst/>
+          </a:prstGeom>
+          <a:solidFill>
+            <a:srgbClr val="121216"/>
+          </a:solidFill>
+          <a:ln>
+            <a:noFill/>
+          </a:ln>
+          <a:effectLst>
+            <a:outerShdw blurRad="39960" dir="5400000" dist="23040" rotWithShape="0">
+              <a:srgbClr val="000000">
+                <a:alpha val="35000"/>
+              </a:srgbClr>
+            </a:outerShdw>
+          </a:effectLst>
+        </p:spPr>
+        <p:style>
+          <a:lnRef idx="1">
+            <a:schemeClr val="accent1"/>
+          </a:lnRef>
+          <a:fillRef idx="3">
+            <a:schemeClr val="accent1"/>
+          </a:fillRef>
+          <a:effectRef idx="2">
+            <a:schemeClr val="accent1"/>
+          </a:effectRef>
+          <a:fontRef idx="minor"/>
+        </p:style>
+        <p:txBody>
+          <a:bodyPr lIns="90000" rIns="90000" tIns="45000" bIns="45000" anchor="ctr">
+            <a:noAutofit/>
+          </a:bodyPr>
+          <a:p>
+            <a:endParaRPr b="0" lang="en-US" sz="1800" spc="-1" strike="noStrike">
+              <a:solidFill>
+                <a:schemeClr val="lt1"/>
+              </a:solidFill>
+              <a:latin typeface="Calibri"/>
+              <a:ea typeface="DejaVu Sans"/>
+            </a:endParaRPr>
+          </a:p>
+        </p:txBody>
+      </p:sp>
+      <p:sp>
+        <p:nvSpPr>
+          <p:cNvPr id="134" name="Rectangle 64"/>
+          <p:cNvSpPr/>
+          <p:nvPr/>
+        </p:nvSpPr>
+        <p:spPr>
+          <a:xfrm>
+            <a:off x="0" y="0"/>
+            <a:ext cx="318240" cy="6856200"/>
+          </a:xfrm>
+          <a:prstGeom prst="rect">
+            <a:avLst/>
+          </a:prstGeom>
+          <a:solidFill>
+            <a:srgbClr val="ff8c00"/>
+          </a:solidFill>
+          <a:ln>
+            <a:noFill/>
+          </a:ln>
+          <a:effectLst>
+            <a:outerShdw blurRad="39960" dir="5400000" dist="23040" rotWithShape="0">
+              <a:srgbClr val="000000">
+                <a:alpha val="35000"/>
+              </a:srgbClr>
+            </a:outerShdw>
+          </a:effectLst>
+        </p:spPr>
+        <p:style>
+          <a:lnRef idx="1">
+            <a:schemeClr val="accent1"/>
+          </a:lnRef>
+          <a:fillRef idx="3">
+            <a:schemeClr val="accent1"/>
+          </a:fillRef>
+          <a:effectRef idx="2">
+            <a:schemeClr val="accent1"/>
+          </a:effectRef>
+          <a:fontRef idx="minor"/>
+        </p:style>
+        <p:txBody>
+          <a:bodyPr lIns="90000" rIns="90000" tIns="45000" bIns="45000" anchor="ctr">
+            <a:noAutofit/>
+          </a:bodyPr>
+          <a:p>
+            <a:endParaRPr b="0" lang="en-US" sz="1800" spc="-1" strike="noStrike">
+              <a:solidFill>
+                <a:schemeClr val="lt1"/>
+              </a:solidFill>
+              <a:latin typeface="Calibri"/>
+              <a:ea typeface="DejaVu Sans"/>
+            </a:endParaRPr>
+          </a:p>
+        </p:txBody>
+      </p:sp>
+      <p:sp>
+        <p:nvSpPr>
+          <p:cNvPr id="135" name="Rounded Rectangle 29"/>
+          <p:cNvSpPr/>
+          <p:nvPr/>
+        </p:nvSpPr>
+        <p:spPr>
+          <a:xfrm>
+            <a:off x="9875520" y="365760"/>
+            <a:ext cx="2009880" cy="501120"/>
+          </a:xfrm>
+          <a:prstGeom prst="roundRect">
+            <a:avLst>
+              <a:gd name="adj" fmla="val 16667"/>
+            </a:avLst>
+          </a:prstGeom>
+          <a:solidFill>
+            <a:srgbClr val="1e1e24"/>
+          </a:solidFill>
+          <a:ln>
+            <a:solidFill>
+              <a:srgbClr val="ff8c00"/>
+            </a:solidFill>
+            <a:round/>
+          </a:ln>
+          <a:effectLst>
+            <a:outerShdw blurRad="39960" dir="5400000" dist="23040" rotWithShape="0">
+              <a:srgbClr val="000000">
+                <a:alpha val="35000"/>
+              </a:srgbClr>
+            </a:outerShdw>
+          </a:effectLst>
+        </p:spPr>
+        <p:style>
+          <a:lnRef idx="1">
+            <a:schemeClr val="accent1"/>
+          </a:lnRef>
+          <a:fillRef idx="3">
+            <a:schemeClr val="accent1"/>
+          </a:fillRef>
+          <a:effectRef idx="2">
+            <a:schemeClr val="accent1"/>
+          </a:effectRef>
+          <a:fontRef idx="minor"/>
+        </p:style>
+        <p:txBody>
+          <a:bodyPr lIns="90000" rIns="90000" tIns="45000" bIns="45000" anchor="ctr">
+            <a:noAutofit/>
+          </a:bodyPr>
+          <a:p>
+            <a:pPr algn="ctr">
+              <a:lnSpc>
+                <a:spcPct val="100000"/>
+              </a:lnSpc>
+            </a:pPr>
+            <a:r>
+              <a:rPr b="1" lang="en-US" sz="1400" spc="-1" strike="noStrike">
+                <a:solidFill>
+                  <a:srgbClr val="ffb45a"/>
+                </a:solidFill>
+                <a:latin typeface="Calibri"/>
+                <a:ea typeface="DejaVu Sans"/>
+              </a:rPr>
+              <a:t>JAVA TEMELLERI</a:t>
+            </a:r>
+            <a:endParaRPr b="0" lang="en-US" sz="1400" spc="-1" strike="noStrike">
+              <a:solidFill>
+                <a:srgbClr val="ffffff"/>
+              </a:solidFill>
+              <a:latin typeface="Arial"/>
+            </a:endParaRPr>
+          </a:p>
+        </p:txBody>
+      </p:sp>
+      <p:sp>
+        <p:nvSpPr>
+          <p:cNvPr id="136" name="TextBox 10"/>
+          <p:cNvSpPr/>
+          <p:nvPr/>
+        </p:nvSpPr>
+        <p:spPr>
+          <a:xfrm>
+            <a:off x="2796840" y="914400"/>
+            <a:ext cx="5376240" cy="638280"/>
+          </a:xfrm>
+          <a:prstGeom prst="rect">
+            <a:avLst/>
+          </a:prstGeom>
+          <a:noFill/>
+          <a:ln w="0">
+            <a:noFill/>
+          </a:ln>
+        </p:spPr>
+        <p:style>
+          <a:lnRef idx="0"/>
+          <a:fillRef idx="0"/>
+          <a:effectRef idx="0"/>
+          <a:fontRef idx="minor"/>
+        </p:style>
+        <p:txBody>
+          <a:bodyPr wrap="none" lIns="90000" rIns="90000" tIns="45000" bIns="45000" anchor="t">
+            <a:spAutoFit/>
+          </a:bodyPr>
+          <a:p>
+            <a:pPr>
+              <a:lnSpc>
+                <a:spcPct val="100000"/>
+              </a:lnSpc>
+            </a:pPr>
+            <a:r>
+              <a:rPr b="1" lang="en-US" sz="3600" spc="-1" strike="noStrike">
+                <a:solidFill>
+                  <a:srgbClr val="f5f5f5"/>
+                </a:solidFill>
+                <a:latin typeface="Calibri"/>
+                <a:ea typeface="DejaVu Sans"/>
+              </a:rPr>
+              <a:t>Java’da DateTimeFormatter</a:t>
+            </a:r>
+            <a:endParaRPr b="0" lang="en-US" sz="3600" spc="-1" strike="noStrike">
+              <a:solidFill>
+                <a:srgbClr val="000000"/>
+              </a:solidFill>
+              <a:latin typeface="Arial"/>
+            </a:endParaRPr>
+          </a:p>
+        </p:txBody>
+      </p:sp>
+      <p:sp>
+        <p:nvSpPr>
+          <p:cNvPr id="137" name="TextBox 11"/>
+          <p:cNvSpPr/>
+          <p:nvPr/>
+        </p:nvSpPr>
+        <p:spPr>
+          <a:xfrm>
+            <a:off x="1149480" y="1828800"/>
+            <a:ext cx="9190440" cy="576360"/>
+          </a:xfrm>
+          <a:prstGeom prst="rect">
+            <a:avLst/>
+          </a:prstGeom>
+          <a:noFill/>
+          <a:ln w="0">
+            <a:noFill/>
+          </a:ln>
+        </p:spPr>
+        <p:style>
+          <a:lnRef idx="0"/>
+          <a:fillRef idx="0"/>
+          <a:effectRef idx="0"/>
+          <a:fontRef idx="minor"/>
+        </p:style>
+        <p:txBody>
+          <a:bodyPr wrap="none" lIns="90000" rIns="90000" tIns="45000" bIns="45000" anchor="t">
+            <a:spAutoFit/>
+          </a:bodyPr>
+          <a:p>
+            <a:pPr>
+              <a:lnSpc>
+                <a:spcPct val="100000"/>
+              </a:lnSpc>
+            </a:pPr>
+            <a:r>
+              <a:rPr b="0" lang="en-US" sz="1600" spc="-1" strike="noStrike">
+                <a:solidFill>
+                  <a:srgbClr val="aaaaaa"/>
+                </a:solidFill>
+                <a:latin typeface="Calibri"/>
+                <a:ea typeface="DejaVu Sans"/>
+              </a:rPr>
+              <a:t>Java’da tarih ve saat işlemleri sadece saat dilimine bağlı değildir. Bazı durumlarda sadece tarih, sadece saat ya </a:t>
+            </a:r>
+            <a:endParaRPr b="0" lang="en-US" sz="1600" spc="-1" strike="noStrike">
+              <a:solidFill>
+                <a:srgbClr val="000000"/>
+              </a:solidFill>
+              <a:latin typeface="Arial"/>
+            </a:endParaRPr>
+          </a:p>
+          <a:p>
+            <a:pPr>
+              <a:lnSpc>
+                <a:spcPct val="100000"/>
+              </a:lnSpc>
+            </a:pPr>
+            <a:r>
+              <a:rPr b="0" lang="en-US" sz="1600" spc="-1" strike="noStrike">
+                <a:solidFill>
+                  <a:srgbClr val="aaaaaa"/>
+                </a:solidFill>
+                <a:latin typeface="Calibri"/>
+                <a:ea typeface="DejaVu Sans"/>
+              </a:rPr>
+              <a:t>da ikisinin birleşimi gerekir. Bu ihtiyaçlar için LocalDate, LocalTime ve LocalDateTime sınıfları kullanılır.</a:t>
+            </a:r>
+            <a:endParaRPr b="0" lang="en-US" sz="1600" spc="-1" strike="noStrike">
+              <a:solidFill>
+                <a:srgbClr val="000000"/>
+              </a:solidFill>
+              <a:latin typeface="Arial"/>
+            </a:endParaRPr>
+          </a:p>
+        </p:txBody>
+      </p:sp>
+      <p:sp>
+        <p:nvSpPr>
+          <p:cNvPr id="138" name="Rounded Rectangle 30"/>
+          <p:cNvSpPr/>
+          <p:nvPr/>
+        </p:nvSpPr>
+        <p:spPr>
+          <a:xfrm>
+            <a:off x="987480" y="3182040"/>
+            <a:ext cx="3290040" cy="2741400"/>
+          </a:xfrm>
+          <a:prstGeom prst="roundRect">
+            <a:avLst>
+              <a:gd name="adj" fmla="val 16667"/>
+            </a:avLst>
+          </a:prstGeom>
+          <a:solidFill>
+            <a:srgbClr val="08080a"/>
+          </a:solidFill>
+          <a:ln>
+            <a:noFill/>
+          </a:ln>
+          <a:effectLst>
+            <a:outerShdw blurRad="39960" dir="5400000" dist="23040" rotWithShape="0">
+              <a:srgbClr val="000000">
+                <a:alpha val="35000"/>
+              </a:srgbClr>
+            </a:outerShdw>
+          </a:effectLst>
+        </p:spPr>
+        <p:style>
+          <a:lnRef idx="1">
+            <a:schemeClr val="accent1"/>
+          </a:lnRef>
+          <a:fillRef idx="3">
+            <a:schemeClr val="accent1"/>
+          </a:fillRef>
+          <a:effectRef idx="2">
+            <a:schemeClr val="accent1"/>
+          </a:effectRef>
+          <a:fontRef idx="minor"/>
+        </p:style>
+        <p:txBody>
+          <a:bodyPr lIns="90000" rIns="90000" tIns="45000" bIns="45000" anchor="ctr">
+            <a:noAutofit/>
+          </a:bodyPr>
+          <a:p>
+            <a:endParaRPr b="0" lang="en-US" sz="1800" spc="-1" strike="noStrike">
+              <a:solidFill>
+                <a:schemeClr val="lt1"/>
+              </a:solidFill>
+              <a:latin typeface="Calibri"/>
+              <a:ea typeface="DejaVu Sans"/>
+            </a:endParaRPr>
+          </a:p>
+        </p:txBody>
+      </p:sp>
+      <p:sp>
+        <p:nvSpPr>
+          <p:cNvPr id="139" name="Rounded Rectangle 31"/>
+          <p:cNvSpPr/>
+          <p:nvPr/>
+        </p:nvSpPr>
+        <p:spPr>
+          <a:xfrm>
+            <a:off x="914400" y="3108960"/>
+            <a:ext cx="3290040" cy="3062880"/>
+          </a:xfrm>
+          <a:prstGeom prst="roundRect">
+            <a:avLst>
+              <a:gd name="adj" fmla="val 16667"/>
+            </a:avLst>
+          </a:prstGeom>
+          <a:solidFill>
+            <a:srgbClr val="16161c"/>
+          </a:solidFill>
+          <a:ln>
+            <a:solidFill>
+              <a:srgbClr val="464655"/>
+            </a:solidFill>
+            <a:round/>
+          </a:ln>
+          <a:effectLst>
+            <a:outerShdw blurRad="39960" dir="5400000" dist="23040" rotWithShape="0">
+              <a:srgbClr val="000000">
+                <a:alpha val="35000"/>
+              </a:srgbClr>
+            </a:outerShdw>
+          </a:effectLst>
+        </p:spPr>
+        <p:style>
+          <a:lnRef idx="1">
+            <a:schemeClr val="accent1"/>
+          </a:lnRef>
+          <a:fillRef idx="3">
+            <a:schemeClr val="accent1"/>
+          </a:fillRef>
+          <a:effectRef idx="2">
+            <a:schemeClr val="accent1"/>
+          </a:effectRef>
+          <a:fontRef idx="minor"/>
+        </p:style>
+        <p:txBody>
+          <a:bodyPr lIns="90000" rIns="90000" tIns="45000" bIns="45000" anchor="ctr">
+            <a:noAutofit/>
+          </a:bodyPr>
+          <a:p>
+            <a:pPr marL="216000" indent="-216000">
+              <a:lnSpc>
+                <a:spcPct val="100000"/>
+              </a:lnSpc>
+              <a:buClr>
+                <a:srgbClr val="ffffff"/>
+              </a:buClr>
+              <a:buFont typeface="Wingdings" charset="2"/>
+              <a:buChar char=""/>
+            </a:pPr>
+            <a:r>
+              <a:rPr b="1" lang="en-US" sz="1600" spc="-1" strike="noStrike">
+                <a:solidFill>
+                  <a:schemeClr val="lt1"/>
+                </a:solidFill>
+                <a:latin typeface="Calibri"/>
+                <a:ea typeface="DejaVu Sans"/>
+              </a:rPr>
+              <a:t>DateTimeFormatter → Tarih ve saat verilerini formatlar</a:t>
+            </a:r>
+            <a:endParaRPr b="0" lang="en-US" sz="1600" spc="-1" strike="noStrike">
+              <a:solidFill>
+                <a:srgbClr val="ffffff"/>
+              </a:solidFill>
+              <a:latin typeface="Arial"/>
+            </a:endParaRPr>
+          </a:p>
+          <a:p>
+            <a:pPr marL="216000" indent="-216000">
+              <a:lnSpc>
+                <a:spcPct val="100000"/>
+              </a:lnSpc>
+              <a:buClr>
+                <a:srgbClr val="ffffff"/>
+              </a:buClr>
+              <a:buFont typeface="Wingdings" charset="2"/>
+              <a:buChar char=""/>
+            </a:pPr>
+            <a:r>
+              <a:rPr b="1" lang="en-US" sz="1600" spc="-1" strike="noStrike">
+                <a:solidFill>
+                  <a:schemeClr val="lt1"/>
+                </a:solidFill>
+                <a:latin typeface="Calibri"/>
+                <a:ea typeface="DejaVu Sans"/>
+              </a:rPr>
+              <a:t>Özel format desenlerini destekler (dd/MM/yyyy, HH:mm vb.)</a:t>
+            </a:r>
+            <a:endParaRPr b="0" lang="en-US" sz="1600" spc="-1" strike="noStrike">
+              <a:solidFill>
+                <a:srgbClr val="ffffff"/>
+              </a:solidFill>
+              <a:latin typeface="Arial"/>
+            </a:endParaRPr>
+          </a:p>
+          <a:p>
+            <a:pPr marL="216000" indent="-216000">
+              <a:lnSpc>
+                <a:spcPct val="100000"/>
+              </a:lnSpc>
+              <a:buClr>
+                <a:srgbClr val="ffffff"/>
+              </a:buClr>
+              <a:buFont typeface="Wingdings" charset="2"/>
+              <a:buChar char=""/>
+            </a:pPr>
+            <a:r>
+              <a:rPr b="1" lang="en-US" sz="1600" spc="-1" strike="noStrike">
+                <a:solidFill>
+                  <a:schemeClr val="lt1"/>
+                </a:solidFill>
+                <a:latin typeface="Calibri"/>
+                <a:ea typeface="DejaVu Sans"/>
+              </a:rPr>
+              <a:t>LocalDateTime, ZonedDateTime gibi sınıflarla kullanılabilir</a:t>
+            </a:r>
+            <a:endParaRPr b="0" lang="en-US" sz="1600" spc="-1" strike="noStrike">
+              <a:solidFill>
+                <a:srgbClr val="ffffff"/>
+              </a:solidFill>
+              <a:latin typeface="Arial"/>
+            </a:endParaRPr>
+          </a:p>
+          <a:p>
+            <a:pPr marL="216000" indent="-216000">
+              <a:lnSpc>
+                <a:spcPct val="100000"/>
+              </a:lnSpc>
+              <a:buClr>
+                <a:srgbClr val="ffffff"/>
+              </a:buClr>
+              <a:buFont typeface="Wingdings" charset="2"/>
+              <a:buChar char=""/>
+            </a:pPr>
+            <a:r>
+              <a:rPr b="1" lang="en-US" sz="1600" spc="-1" strike="noStrike">
+                <a:solidFill>
+                  <a:schemeClr val="lt1"/>
+                </a:solidFill>
+                <a:latin typeface="Calibri"/>
+                <a:ea typeface="DejaVu Sans"/>
+              </a:rPr>
+              <a:t>Yerel (locale) tabanlı formatlama sağlar (dil desteği)</a:t>
+            </a:r>
+            <a:endParaRPr b="0" lang="en-US" sz="1600" spc="-1" strike="noStrike">
+              <a:solidFill>
+                <a:srgbClr val="ffffff"/>
+              </a:solidFill>
+              <a:latin typeface="Arial"/>
+            </a:endParaRPr>
+          </a:p>
+          <a:p>
+            <a:pPr marL="216000" indent="-216000">
+              <a:lnSpc>
+                <a:spcPct val="100000"/>
+              </a:lnSpc>
+              <a:buClr>
+                <a:srgbClr val="ffffff"/>
+              </a:buClr>
+              <a:buFont typeface="Wingdings" charset="2"/>
+              <a:buChar char=""/>
+            </a:pPr>
+            <a:r>
+              <a:rPr b="1" lang="en-US" sz="1600" spc="-1" strike="noStrike">
+                <a:solidFill>
+                  <a:schemeClr val="lt1"/>
+                </a:solidFill>
+                <a:latin typeface="Calibri"/>
+                <a:ea typeface="DejaVu Sans"/>
+              </a:rPr>
+              <a:t>Tarih-saat çıktısının okunabilirliğini artırır</a:t>
+            </a:r>
+            <a:endParaRPr b="0" lang="en-US" sz="1600" spc="-1" strike="noStrike">
+              <a:solidFill>
+                <a:srgbClr val="ffffff"/>
+              </a:solidFill>
+              <a:latin typeface="Arial"/>
+            </a:endParaRPr>
+          </a:p>
+        </p:txBody>
+      </p:sp>
+      <p:sp>
+        <p:nvSpPr>
+          <p:cNvPr id="140" name="Rounded Rectangle 32"/>
+          <p:cNvSpPr/>
+          <p:nvPr/>
+        </p:nvSpPr>
+        <p:spPr>
+          <a:xfrm>
+            <a:off x="4507920" y="3182040"/>
+            <a:ext cx="3290040" cy="2741400"/>
+          </a:xfrm>
+          <a:prstGeom prst="roundRect">
+            <a:avLst>
+              <a:gd name="adj" fmla="val 16667"/>
+            </a:avLst>
+          </a:prstGeom>
+          <a:solidFill>
+            <a:srgbClr val="08080a"/>
+          </a:solidFill>
+          <a:ln>
+            <a:noFill/>
+          </a:ln>
+          <a:effectLst>
+            <a:outerShdw blurRad="39960" dir="5400000" dist="23040" rotWithShape="0">
+              <a:srgbClr val="000000">
+                <a:alpha val="35000"/>
+              </a:srgbClr>
+            </a:outerShdw>
+          </a:effectLst>
+        </p:spPr>
+        <p:style>
+          <a:lnRef idx="1">
+            <a:schemeClr val="accent1"/>
+          </a:lnRef>
+          <a:fillRef idx="3">
+            <a:schemeClr val="accent1"/>
+          </a:fillRef>
+          <a:effectRef idx="2">
+            <a:schemeClr val="accent1"/>
+          </a:effectRef>
+          <a:fontRef idx="minor"/>
+        </p:style>
+        <p:txBody>
+          <a:bodyPr lIns="90000" rIns="90000" tIns="45000" bIns="45000" anchor="ctr">
+            <a:noAutofit/>
+          </a:bodyPr>
+          <a:p>
+            <a:endParaRPr b="0" lang="en-US" sz="1800" spc="-1" strike="noStrike">
+              <a:solidFill>
+                <a:schemeClr val="lt1"/>
+              </a:solidFill>
+              <a:latin typeface="Calibri"/>
+              <a:ea typeface="DejaVu Sans"/>
+            </a:endParaRPr>
+          </a:p>
+        </p:txBody>
+      </p:sp>
+      <p:sp>
+        <p:nvSpPr>
+          <p:cNvPr id="141" name="Rounded Rectangle 33"/>
+          <p:cNvSpPr/>
+          <p:nvPr/>
+        </p:nvSpPr>
+        <p:spPr>
+          <a:xfrm>
+            <a:off x="4434840" y="3108960"/>
+            <a:ext cx="3290040" cy="2741400"/>
+          </a:xfrm>
+          <a:prstGeom prst="roundRect">
+            <a:avLst>
+              <a:gd name="adj" fmla="val 16667"/>
+            </a:avLst>
+          </a:prstGeom>
+          <a:solidFill>
+            <a:srgbClr val="16161c"/>
+          </a:solidFill>
+          <a:ln>
+            <a:solidFill>
+              <a:srgbClr val="464655"/>
+            </a:solidFill>
+            <a:round/>
+          </a:ln>
+          <a:effectLst>
+            <a:outerShdw blurRad="39960" dir="5400000" dist="23040" rotWithShape="0">
+              <a:srgbClr val="000000">
+                <a:alpha val="35000"/>
+              </a:srgbClr>
+            </a:outerShdw>
+          </a:effectLst>
+        </p:spPr>
+        <p:style>
+          <a:lnRef idx="1">
+            <a:schemeClr val="accent1"/>
+          </a:lnRef>
+          <a:fillRef idx="3">
+            <a:schemeClr val="accent1"/>
+          </a:fillRef>
+          <a:effectRef idx="2">
+            <a:schemeClr val="accent1"/>
+          </a:effectRef>
+          <a:fontRef idx="minor"/>
+        </p:style>
+        <p:txBody>
+          <a:bodyPr lIns="90000" rIns="90000" tIns="45000" bIns="45000" anchor="ctr">
+            <a:noAutofit/>
+          </a:bodyPr>
+          <a:p>
+            <a:pPr>
+              <a:lnSpc>
+                <a:spcPct val="100000"/>
+              </a:lnSpc>
+            </a:pPr>
+            <a:r>
+              <a:rPr b="0" lang="en-US" sz="1800" spc="-1" strike="noStrike">
+                <a:solidFill>
+                  <a:schemeClr val="lt1"/>
+                </a:solidFill>
+                <a:latin typeface="Calibri"/>
+                <a:ea typeface="DejaVu Sans"/>
+              </a:rPr>
+              <a:t>Uygulama çalışır</a:t>
+            </a:r>
+            <a:endParaRPr b="0" lang="en-US" sz="1800" spc="-1" strike="noStrike">
+              <a:solidFill>
+                <a:srgbClr val="ffffff"/>
+              </a:solidFill>
+              <a:latin typeface="Arial"/>
+            </a:endParaRPr>
+          </a:p>
+          <a:p>
+            <a:pPr>
+              <a:lnSpc>
+                <a:spcPct val="100000"/>
+              </a:lnSpc>
+            </a:pPr>
+            <a:r>
+              <a:rPr b="0" lang="en-US" sz="1800" spc="-1" strike="noStrike">
+                <a:solidFill>
+                  <a:schemeClr val="lt1"/>
+                </a:solidFill>
+                <a:latin typeface="Calibri"/>
+                <a:ea typeface="DejaVu Sans"/>
+              </a:rPr>
+              <a:t>Tarih/Saat bilgisine ihtiyaç duyulur</a:t>
+            </a:r>
+            <a:endParaRPr b="0" lang="en-US" sz="1800" spc="-1" strike="noStrike">
+              <a:solidFill>
+                <a:srgbClr val="ffffff"/>
+              </a:solidFill>
+              <a:latin typeface="Arial"/>
+            </a:endParaRPr>
+          </a:p>
+          <a:p>
+            <a:pPr>
+              <a:lnSpc>
+                <a:spcPct val="100000"/>
+              </a:lnSpc>
+            </a:pPr>
+            <a:r>
+              <a:rPr b="0" lang="en-US" sz="1800" spc="-1" strike="noStrike">
+                <a:solidFill>
+                  <a:schemeClr val="lt1"/>
+                </a:solidFill>
+                <a:latin typeface="Calibri"/>
+                <a:ea typeface="DejaVu Sans"/>
+              </a:rPr>
+              <a:t>Bir tarih-saat nesnesi oluşturulur</a:t>
+            </a:r>
+            <a:endParaRPr b="0" lang="en-US" sz="1800" spc="-1" strike="noStrike">
+              <a:solidFill>
+                <a:srgbClr val="ffffff"/>
+              </a:solidFill>
+              <a:latin typeface="Arial"/>
+            </a:endParaRPr>
+          </a:p>
+          <a:p>
+            <a:pPr>
+              <a:lnSpc>
+                <a:spcPct val="100000"/>
+              </a:lnSpc>
+            </a:pPr>
+            <a:r>
+              <a:rPr b="0" lang="en-US" sz="1800" spc="-1" strike="noStrike">
+                <a:solidFill>
+                  <a:schemeClr val="lt1"/>
+                </a:solidFill>
+                <a:latin typeface="Calibri"/>
+                <a:ea typeface="DejaVu Sans"/>
+              </a:rPr>
+              <a:t>Özel bir format deseni belirlenir</a:t>
+            </a:r>
+            <a:endParaRPr b="0" lang="en-US" sz="1800" spc="-1" strike="noStrike">
+              <a:solidFill>
+                <a:srgbClr val="ffffff"/>
+              </a:solidFill>
+              <a:latin typeface="Arial"/>
+            </a:endParaRPr>
+          </a:p>
+          <a:p>
+            <a:pPr>
+              <a:lnSpc>
+                <a:spcPct val="100000"/>
+              </a:lnSpc>
+            </a:pPr>
+            <a:r>
+              <a:rPr b="0" lang="en-US" sz="1800" spc="-1" strike="noStrike">
+                <a:solidFill>
+                  <a:schemeClr val="lt1"/>
+                </a:solidFill>
+                <a:latin typeface="Calibri"/>
+                <a:ea typeface="DejaVu Sans"/>
+              </a:rPr>
+              <a:t>Formatter veriyi işler</a:t>
+            </a:r>
+            <a:endParaRPr b="0" lang="en-US" sz="1800" spc="-1" strike="noStrike">
+              <a:solidFill>
+                <a:srgbClr val="ffffff"/>
+              </a:solidFill>
+              <a:latin typeface="Arial"/>
+            </a:endParaRPr>
+          </a:p>
+          <a:p>
+            <a:pPr>
+              <a:lnSpc>
+                <a:spcPct val="100000"/>
+              </a:lnSpc>
+            </a:pPr>
+            <a:r>
+              <a:rPr b="0" lang="en-US" sz="1800" spc="-1" strike="noStrike">
+                <a:solidFill>
+                  <a:schemeClr val="lt1"/>
+                </a:solidFill>
+                <a:latin typeface="Calibri"/>
+                <a:ea typeface="DejaVu Sans"/>
+              </a:rPr>
+              <a:t>Okunabilir bir çıktı üretilir</a:t>
+            </a:r>
+            <a:endParaRPr b="0" lang="en-US" sz="1800" spc="-1" strike="noStrike">
+              <a:solidFill>
+                <a:srgbClr val="ffffff"/>
+              </a:solidFill>
+              <a:latin typeface="Arial"/>
+            </a:endParaRPr>
+          </a:p>
+          <a:p>
+            <a:pPr>
+              <a:lnSpc>
+                <a:spcPct val="100000"/>
+              </a:lnSpc>
+            </a:pPr>
+            <a:r>
+              <a:rPr b="0" lang="en-US" sz="1800" spc="-1" strike="noStrike">
+                <a:solidFill>
+                  <a:schemeClr val="lt1"/>
+                </a:solidFill>
+                <a:latin typeface="Calibri"/>
+                <a:ea typeface="DejaVu Sans"/>
+              </a:rPr>
+              <a:t>Sonuç kullanıcıya gösterilir</a:t>
+            </a:r>
+            <a:endParaRPr b="0" lang="en-US" sz="1800" spc="-1" strike="noStrike">
+              <a:solidFill>
+                <a:srgbClr val="ffffff"/>
+              </a:solidFill>
+              <a:latin typeface="Arial"/>
+            </a:endParaRPr>
+          </a:p>
+        </p:txBody>
+      </p:sp>
+      <p:sp>
+        <p:nvSpPr>
+          <p:cNvPr id="142" name="Rounded Rectangle 34"/>
+          <p:cNvSpPr/>
+          <p:nvPr/>
+        </p:nvSpPr>
+        <p:spPr>
+          <a:xfrm>
+            <a:off x="8028360" y="3182040"/>
+            <a:ext cx="3290040" cy="2741400"/>
+          </a:xfrm>
+          <a:prstGeom prst="roundRect">
+            <a:avLst>
+              <a:gd name="adj" fmla="val 16667"/>
+            </a:avLst>
+          </a:prstGeom>
+          <a:solidFill>
+            <a:srgbClr val="08080a"/>
+          </a:solidFill>
+          <a:ln>
+            <a:noFill/>
+          </a:ln>
+          <a:effectLst>
+            <a:outerShdw blurRad="39960" dir="5400000" dist="23040" rotWithShape="0">
+              <a:srgbClr val="000000">
+                <a:alpha val="35000"/>
+              </a:srgbClr>
+            </a:outerShdw>
+          </a:effectLst>
+        </p:spPr>
+        <p:style>
+          <a:lnRef idx="1">
+            <a:schemeClr val="accent1"/>
+          </a:lnRef>
+          <a:fillRef idx="3">
+            <a:schemeClr val="accent1"/>
+          </a:fillRef>
+          <a:effectRef idx="2">
+            <a:schemeClr val="accent1"/>
+          </a:effectRef>
+          <a:fontRef idx="minor"/>
+        </p:style>
+        <p:txBody>
+          <a:bodyPr lIns="90000" rIns="90000" tIns="45000" bIns="45000" anchor="ctr">
+            <a:noAutofit/>
+          </a:bodyPr>
+          <a:p>
+            <a:endParaRPr b="0" lang="en-US" sz="1800" spc="-1" strike="noStrike">
+              <a:solidFill>
+                <a:schemeClr val="lt1"/>
+              </a:solidFill>
+              <a:latin typeface="Calibri"/>
+              <a:ea typeface="DejaVu Sans"/>
+            </a:endParaRPr>
+          </a:p>
+        </p:txBody>
+      </p:sp>
+      <p:sp>
+        <p:nvSpPr>
+          <p:cNvPr id="143" name="Rounded Rectangle 35"/>
+          <p:cNvSpPr/>
+          <p:nvPr/>
+        </p:nvSpPr>
+        <p:spPr>
+          <a:xfrm>
+            <a:off x="7955280" y="2743200"/>
+            <a:ext cx="3702600" cy="3657600"/>
+          </a:xfrm>
+          <a:prstGeom prst="roundRect">
+            <a:avLst>
+              <a:gd name="adj" fmla="val 16667"/>
+            </a:avLst>
+          </a:prstGeom>
+          <a:solidFill>
+            <a:srgbClr val="16161c"/>
+          </a:solidFill>
+          <a:ln>
+            <a:solidFill>
+              <a:srgbClr val="464655"/>
+            </a:solidFill>
+            <a:round/>
+          </a:ln>
+          <a:effectLst>
+            <a:outerShdw blurRad="39960" dir="5400000" dist="23040" rotWithShape="0">
+              <a:srgbClr val="000000">
+                <a:alpha val="35000"/>
+              </a:srgbClr>
+            </a:outerShdw>
+          </a:effectLst>
+        </p:spPr>
+        <p:style>
+          <a:lnRef idx="1">
+            <a:schemeClr val="accent1"/>
+          </a:lnRef>
+          <a:fillRef idx="3">
+            <a:schemeClr val="accent1"/>
+          </a:fillRef>
+          <a:effectRef idx="2">
+            <a:schemeClr val="accent1"/>
+          </a:effectRef>
+          <a:fontRef idx="minor"/>
+        </p:style>
+        <p:txBody>
+          <a:bodyPr lIns="90000" rIns="90000" tIns="45000" bIns="45000" anchor="ctr">
+            <a:noAutofit/>
+          </a:bodyPr>
+          <a:p>
+            <a:pPr algn="ctr">
+              <a:lnSpc>
+                <a:spcPct val="100000"/>
+              </a:lnSpc>
+            </a:pPr>
+            <a:r>
+              <a:rPr b="0" lang="en-US" sz="1050" spc="-1" strike="noStrike">
+                <a:solidFill>
+                  <a:srgbClr val="78ffc8"/>
+                </a:solidFill>
+                <a:latin typeface="Consolas"/>
+                <a:ea typeface="DejaVu Sans"/>
+              </a:rPr>
+              <a:t>import java.time.LocalDateTime;</a:t>
+            </a:r>
+            <a:endParaRPr b="0" lang="en-US" sz="1050" spc="-1" strike="noStrike">
+              <a:solidFill>
+                <a:srgbClr val="ffffff"/>
+              </a:solidFill>
+              <a:latin typeface="Arial"/>
+            </a:endParaRPr>
+          </a:p>
+          <a:p>
+            <a:pPr algn="ctr">
+              <a:lnSpc>
+                <a:spcPct val="100000"/>
+              </a:lnSpc>
+            </a:pPr>
+            <a:r>
+              <a:rPr b="0" lang="en-US" sz="1050" spc="-1" strike="noStrike">
+                <a:solidFill>
+                  <a:srgbClr val="78ffc8"/>
+                </a:solidFill>
+                <a:latin typeface="Consolas"/>
+                <a:ea typeface="DejaVu Sans"/>
+              </a:rPr>
+              <a:t>import java.time.format.DateTimeFormatter;</a:t>
+            </a:r>
+            <a:endParaRPr b="0" lang="en-US" sz="1050" spc="-1" strike="noStrike">
+              <a:solidFill>
+                <a:srgbClr val="ffffff"/>
+              </a:solidFill>
+              <a:latin typeface="Arial"/>
+            </a:endParaRPr>
+          </a:p>
+          <a:p>
+            <a:pPr algn="ctr">
+              <a:lnSpc>
+                <a:spcPct val="100000"/>
+              </a:lnSpc>
+            </a:pPr>
+            <a:r>
+              <a:rPr b="0" lang="en-US" sz="1050" spc="-1" strike="noStrike">
+                <a:solidFill>
+                  <a:srgbClr val="78ffc8"/>
+                </a:solidFill>
+                <a:latin typeface="Consolas"/>
+                <a:ea typeface="DejaVu Sans"/>
+              </a:rPr>
+              <a:t>import java.util.Locale;</a:t>
+            </a:r>
+            <a:endParaRPr b="0" lang="en-US" sz="1050" spc="-1" strike="noStrike">
+              <a:solidFill>
+                <a:srgbClr val="ffffff"/>
+              </a:solidFill>
+              <a:latin typeface="Arial"/>
+            </a:endParaRPr>
+          </a:p>
+          <a:p>
+            <a:pPr algn="ctr">
+              <a:lnSpc>
+                <a:spcPct val="100000"/>
+              </a:lnSpc>
+            </a:pPr>
+            <a:r>
+              <a:rPr b="0" lang="en-US" sz="1050" spc="-1" strike="noStrike">
+                <a:solidFill>
+                  <a:srgbClr val="78ffc8"/>
+                </a:solidFill>
+                <a:latin typeface="Consolas"/>
+                <a:ea typeface="DejaVu Sans"/>
+              </a:rPr>
+              <a:t>public class LocaleFormatterExample {</a:t>
+            </a:r>
+            <a:endParaRPr b="0" lang="en-US" sz="1050" spc="-1" strike="noStrike">
+              <a:solidFill>
+                <a:srgbClr val="ffffff"/>
+              </a:solidFill>
+              <a:latin typeface="Arial"/>
+            </a:endParaRPr>
+          </a:p>
+          <a:p>
+            <a:pPr algn="ctr">
+              <a:lnSpc>
+                <a:spcPct val="100000"/>
+              </a:lnSpc>
+            </a:pPr>
+            <a:r>
+              <a:rPr b="0" lang="en-US" sz="1050" spc="-1" strike="noStrike">
+                <a:solidFill>
+                  <a:srgbClr val="78ffc8"/>
+                </a:solidFill>
+                <a:latin typeface="Consolas"/>
+                <a:ea typeface="DejaVu Sans"/>
+              </a:rPr>
+              <a:t>    </a:t>
+            </a:r>
+            <a:r>
+              <a:rPr b="0" lang="en-US" sz="1050" spc="-1" strike="noStrike">
+                <a:solidFill>
+                  <a:srgbClr val="78ffc8"/>
+                </a:solidFill>
+                <a:latin typeface="Consolas"/>
+                <a:ea typeface="DejaVu Sans"/>
+              </a:rPr>
+              <a:t>public static void main(String[] args) {</a:t>
+            </a:r>
+            <a:endParaRPr b="0" lang="en-US" sz="1050" spc="-1" strike="noStrike">
+              <a:solidFill>
+                <a:srgbClr val="ffffff"/>
+              </a:solidFill>
+              <a:latin typeface="Arial"/>
+            </a:endParaRPr>
+          </a:p>
+          <a:p>
+            <a:pPr algn="ctr">
+              <a:lnSpc>
+                <a:spcPct val="100000"/>
+              </a:lnSpc>
+            </a:pPr>
+            <a:r>
+              <a:rPr b="0" lang="en-US" sz="1050" spc="-1" strike="noStrike">
+                <a:solidFill>
+                  <a:srgbClr val="78ffc8"/>
+                </a:solidFill>
+                <a:latin typeface="Consolas"/>
+                <a:ea typeface="DejaVu Sans"/>
+              </a:rPr>
+              <a:t>        </a:t>
+            </a:r>
+            <a:r>
+              <a:rPr b="0" lang="en-US" sz="1050" spc="-1" strike="noStrike">
+                <a:solidFill>
+                  <a:srgbClr val="78ffc8"/>
+                </a:solidFill>
+                <a:latin typeface="Consolas"/>
+                <a:ea typeface="DejaVu Sans"/>
+              </a:rPr>
+              <a:t>LocalDateTime now = LocalDateTime.now();</a:t>
+            </a:r>
+            <a:endParaRPr b="0" lang="en-US" sz="1050" spc="-1" strike="noStrike">
+              <a:solidFill>
+                <a:srgbClr val="ffffff"/>
+              </a:solidFill>
+              <a:latin typeface="Arial"/>
+            </a:endParaRPr>
+          </a:p>
+          <a:p>
+            <a:pPr algn="ctr">
+              <a:lnSpc>
+                <a:spcPct val="100000"/>
+              </a:lnSpc>
+            </a:pPr>
+            <a:r>
+              <a:rPr b="0" lang="en-US" sz="1050" spc="-1" strike="noStrike">
+                <a:solidFill>
+                  <a:srgbClr val="78ffc8"/>
+                </a:solidFill>
+                <a:latin typeface="Consolas"/>
+                <a:ea typeface="DejaVu Sans"/>
+              </a:rPr>
+              <a:t>        </a:t>
+            </a:r>
+            <a:r>
+              <a:rPr b="0" lang="en-US" sz="1050" spc="-1" strike="noStrike">
+                <a:solidFill>
+                  <a:srgbClr val="78ffc8"/>
+                </a:solidFill>
+                <a:latin typeface="Consolas"/>
+                <a:ea typeface="DejaVu Sans"/>
+              </a:rPr>
+              <a:t>DateTimeFormatter formatterTR =</a:t>
+            </a:r>
+            <a:endParaRPr b="0" lang="en-US" sz="1050" spc="-1" strike="noStrike">
+              <a:solidFill>
+                <a:srgbClr val="ffffff"/>
+              </a:solidFill>
+              <a:latin typeface="Arial"/>
+            </a:endParaRPr>
+          </a:p>
+          <a:p>
+            <a:pPr algn="ctr">
+              <a:lnSpc>
+                <a:spcPct val="100000"/>
+              </a:lnSpc>
+            </a:pPr>
+            <a:r>
+              <a:rPr b="0" lang="en-US" sz="1050" spc="-1" strike="noStrike">
+                <a:solidFill>
+                  <a:srgbClr val="78ffc8"/>
+                </a:solidFill>
+                <a:latin typeface="Consolas"/>
+                <a:ea typeface="DejaVu Sans"/>
+              </a:rPr>
+              <a:t>                </a:t>
+            </a:r>
+            <a:r>
+              <a:rPr b="0" lang="en-US" sz="1050" spc="-1" strike="noStrike">
+                <a:solidFill>
+                  <a:srgbClr val="78ffc8"/>
+                </a:solidFill>
+                <a:latin typeface="Consolas"/>
+                <a:ea typeface="DejaVu Sans"/>
+              </a:rPr>
+              <a:t>DateTimeFormatter.ofPattern("dd MMMM yyyy HH:mm", new Locale("tr", "TR"));</a:t>
+            </a:r>
+            <a:endParaRPr b="0" lang="en-US" sz="1050" spc="-1" strike="noStrike">
+              <a:solidFill>
+                <a:srgbClr val="ffffff"/>
+              </a:solidFill>
+              <a:latin typeface="Arial"/>
+            </a:endParaRPr>
+          </a:p>
+          <a:p>
+            <a:pPr algn="ctr">
+              <a:lnSpc>
+                <a:spcPct val="100000"/>
+              </a:lnSpc>
+            </a:pPr>
+            <a:endParaRPr b="0" lang="en-US" sz="1050" spc="-1" strike="noStrike">
+              <a:solidFill>
+                <a:srgbClr val="ffffff"/>
+              </a:solidFill>
+              <a:latin typeface="Arial"/>
+            </a:endParaRPr>
+          </a:p>
+          <a:p>
+            <a:pPr algn="ctr">
+              <a:lnSpc>
+                <a:spcPct val="100000"/>
+              </a:lnSpc>
+            </a:pPr>
+            <a:r>
+              <a:rPr b="0" lang="en-US" sz="1050" spc="-1" strike="noStrike">
+                <a:solidFill>
+                  <a:srgbClr val="78ffc8"/>
+                </a:solidFill>
+                <a:latin typeface="Consolas"/>
+                <a:ea typeface="DejaVu Sans"/>
+              </a:rPr>
+              <a:t>        </a:t>
+            </a:r>
+            <a:r>
+              <a:rPr b="0" lang="en-US" sz="1050" spc="-1" strike="noStrike">
+                <a:solidFill>
+                  <a:srgbClr val="78ffc8"/>
+                </a:solidFill>
+                <a:latin typeface="Consolas"/>
+                <a:ea typeface="DejaVu Sans"/>
+              </a:rPr>
+              <a:t>DateTimeFormatter formatterUS =</a:t>
+            </a:r>
+            <a:endParaRPr b="0" lang="en-US" sz="1050" spc="-1" strike="noStrike">
+              <a:solidFill>
+                <a:srgbClr val="ffffff"/>
+              </a:solidFill>
+              <a:latin typeface="Arial"/>
+            </a:endParaRPr>
+          </a:p>
+          <a:p>
+            <a:pPr algn="ctr">
+              <a:lnSpc>
+                <a:spcPct val="100000"/>
+              </a:lnSpc>
+            </a:pPr>
+            <a:r>
+              <a:rPr b="0" lang="en-US" sz="1050" spc="-1" strike="noStrike">
+                <a:solidFill>
+                  <a:srgbClr val="78ffc8"/>
+                </a:solidFill>
+                <a:latin typeface="Consolas"/>
+                <a:ea typeface="DejaVu Sans"/>
+              </a:rPr>
+              <a:t>                </a:t>
+            </a:r>
+            <a:r>
+              <a:rPr b="0" lang="en-US" sz="1050" spc="-1" strike="noStrike">
+                <a:solidFill>
+                  <a:srgbClr val="78ffc8"/>
+                </a:solidFill>
+                <a:latin typeface="Consolas"/>
+                <a:ea typeface="DejaVu Sans"/>
+              </a:rPr>
+              <a:t>DateTimeFormatter.ofPattern("MMMM dd, yyyy hh:mm a", Locale.US);</a:t>
+            </a:r>
+            <a:endParaRPr b="0" lang="en-US" sz="1050" spc="-1" strike="noStrike">
+              <a:solidFill>
+                <a:srgbClr val="ffffff"/>
+              </a:solidFill>
+              <a:latin typeface="Arial"/>
+            </a:endParaRPr>
+          </a:p>
+          <a:p>
+            <a:pPr algn="ctr">
+              <a:lnSpc>
+                <a:spcPct val="100000"/>
+              </a:lnSpc>
+            </a:pPr>
+            <a:r>
+              <a:rPr b="0" lang="en-US" sz="1050" spc="-1" strike="noStrike">
+                <a:solidFill>
+                  <a:srgbClr val="78ffc8"/>
+                </a:solidFill>
+                <a:latin typeface="Consolas"/>
+                <a:ea typeface="DejaVu Sans"/>
+              </a:rPr>
+              <a:t>        </a:t>
+            </a:r>
+            <a:r>
+              <a:rPr b="0" lang="en-US" sz="1050" spc="-1" strike="noStrike">
+                <a:solidFill>
+                  <a:srgbClr val="78ffc8"/>
+                </a:solidFill>
+                <a:latin typeface="Consolas"/>
+                <a:ea typeface="DejaVu Sans"/>
+              </a:rPr>
+              <a:t>System.out.println("Türkçe Format: " + now.format(formatterTR));</a:t>
+            </a:r>
+            <a:endParaRPr b="0" lang="en-US" sz="1050" spc="-1" strike="noStrike">
+              <a:solidFill>
+                <a:srgbClr val="ffffff"/>
+              </a:solidFill>
+              <a:latin typeface="Arial"/>
+            </a:endParaRPr>
+          </a:p>
+          <a:p>
+            <a:pPr algn="ctr">
+              <a:lnSpc>
+                <a:spcPct val="100000"/>
+              </a:lnSpc>
+            </a:pPr>
+            <a:r>
+              <a:rPr b="0" lang="en-US" sz="1050" spc="-1" strike="noStrike">
+                <a:solidFill>
+                  <a:srgbClr val="78ffc8"/>
+                </a:solidFill>
+                <a:latin typeface="Consolas"/>
+                <a:ea typeface="DejaVu Sans"/>
+              </a:rPr>
+              <a:t>        </a:t>
+            </a:r>
+            <a:r>
+              <a:rPr b="0" lang="en-US" sz="1050" spc="-1" strike="noStrike">
+                <a:solidFill>
+                  <a:srgbClr val="78ffc8"/>
+                </a:solidFill>
+                <a:latin typeface="Consolas"/>
+                <a:ea typeface="DejaVu Sans"/>
+              </a:rPr>
+              <a:t>System.out.println("ABD Formatı: " + now.format(formatterUS));</a:t>
+            </a:r>
+            <a:endParaRPr b="0" lang="en-US" sz="1050" spc="-1" strike="noStrike">
+              <a:solidFill>
+                <a:srgbClr val="ffffff"/>
+              </a:solidFill>
+              <a:latin typeface="Arial"/>
+            </a:endParaRPr>
+          </a:p>
+          <a:p>
+            <a:pPr algn="ctr">
+              <a:lnSpc>
+                <a:spcPct val="100000"/>
+              </a:lnSpc>
+            </a:pPr>
+            <a:r>
+              <a:rPr b="0" lang="en-US" sz="1050" spc="-1" strike="noStrike">
+                <a:solidFill>
+                  <a:srgbClr val="78ffc8"/>
+                </a:solidFill>
+                <a:latin typeface="Consolas"/>
+                <a:ea typeface="DejaVu Sans"/>
+              </a:rPr>
+              <a:t>    </a:t>
+            </a:r>
+            <a:r>
+              <a:rPr b="0" lang="en-US" sz="1050" spc="-1" strike="noStrike">
+                <a:solidFill>
+                  <a:srgbClr val="78ffc8"/>
+                </a:solidFill>
+                <a:latin typeface="Consolas"/>
+                <a:ea typeface="DejaVu Sans"/>
+              </a:rPr>
+              <a:t>}</a:t>
+            </a:r>
+            <a:endParaRPr b="0" lang="en-US" sz="1050" spc="-1" strike="noStrike">
+              <a:solidFill>
+                <a:srgbClr val="ffffff"/>
+              </a:solidFill>
+              <a:latin typeface="Arial"/>
+            </a:endParaRPr>
+          </a:p>
+          <a:p>
+            <a:pPr algn="ctr">
+              <a:lnSpc>
+                <a:spcPct val="100000"/>
+              </a:lnSpc>
+            </a:pPr>
+            <a:r>
+              <a:rPr b="0" lang="en-US" sz="1050" spc="-1" strike="noStrike">
+                <a:solidFill>
+                  <a:srgbClr val="78ffc8"/>
+                </a:solidFill>
+                <a:latin typeface="Consolas"/>
+                <a:ea typeface="DejaVu Sans"/>
+              </a:rPr>
+              <a:t>}</a:t>
+            </a:r>
+            <a:endParaRPr b="0" lang="en-US" sz="1050" spc="-1" strike="noStrike">
+              <a:solidFill>
+                <a:srgbClr val="ffffff"/>
+              </a:solidFill>
+              <a:latin typeface="Arial"/>
+            </a:endParaRPr>
+          </a:p>
+        </p:txBody>
+      </p:sp>
+      <p:sp>
+        <p:nvSpPr>
+          <p:cNvPr id="144" name="TextBox 12"/>
+          <p:cNvSpPr/>
+          <p:nvPr/>
+        </p:nvSpPr>
+        <p:spPr>
+          <a:xfrm>
+            <a:off x="4600080" y="6446520"/>
+            <a:ext cx="3051000" cy="363960"/>
           </a:xfrm>
           <a:prstGeom prst="rect">
             <a:avLst/>

--- a/Java/Java #4/TR/Java #4.pptx
+++ b/Java/Java #4/TR/Java #4.pptx
@@ -9,6 +9,7 @@
     <p:sldId id="257" r:id="rId4"/>
     <p:sldId id="258" r:id="rId5"/>
     <p:sldId id="259" r:id="rId6"/>
+    <p:sldId id="260" r:id="rId7"/>
   </p:sldIdLst>
   <p:sldSz cx="9144000" cy="6858000"/>
   <p:notesSz cx="7772400" cy="10058400"/>
@@ -66,7 +67,7 @@
         <p:txBody>
           <a:bodyPr/>
           <a:p>
-            <a:fld id="{4E237EF7-9486-4736-8CB0-9A72AF14BDB7}" type="slidenum">
+            <a:fld id="{DF224ACC-67A9-47F9-8037-FBC130BE750E}" type="slidenum">
               <a:t>&lt;#&gt;</a:t>
             </a:fld>
           </a:p>
@@ -275,7 +276,7 @@
         <p:txBody>
           <a:bodyPr/>
           <a:p>
-            <a:fld id="{B4EB03F6-B2BB-465D-859E-E9588EC25CA1}" type="slidenum">
+            <a:fld id="{DAE570C1-8457-4719-91BB-5F9D90D21530}" type="slidenum">
               <a:t>&lt;#&gt;</a:t>
             </a:fld>
           </a:p>
@@ -570,7 +571,7 @@
         <p:txBody>
           <a:bodyPr/>
           <a:p>
-            <a:fld id="{37BAB4E7-F5D1-4AD4-82BD-795197C2DA05}" type="slidenum">
+            <a:fld id="{9CDCF49F-DE4A-4D0F-BD32-8C54960AC170}" type="slidenum">
               <a:t>&lt;#&gt;</a:t>
             </a:fld>
           </a:p>
@@ -951,7 +952,7 @@
         <p:txBody>
           <a:bodyPr/>
           <a:p>
-            <a:fld id="{DC508BFD-050B-4531-AB0F-BFA3651C4C73}" type="slidenum">
+            <a:fld id="{C17872D0-3650-4831-8578-8CBE64DBF576}" type="slidenum">
               <a:t>&lt;#&gt;</a:t>
             </a:fld>
           </a:p>
@@ -1114,7 +1115,7 @@
         <p:txBody>
           <a:bodyPr/>
           <a:p>
-            <a:fld id="{94B1C525-7CAC-40F6-97CC-79391994AA8A}" type="slidenum">
+            <a:fld id="{93317658-4E9F-4C4F-B42D-9755235759D2}" type="slidenum">
               <a:t>&lt;#&gt;</a:t>
             </a:fld>
           </a:p>
@@ -1280,7 +1281,7 @@
         <p:txBody>
           <a:bodyPr/>
           <a:p>
-            <a:fld id="{0DFADF52-EDF6-429F-A6B3-44F94CAE9AD5}" type="slidenum">
+            <a:fld id="{1D3058E4-88C5-4C23-9278-652BCB1D9770}" type="slidenum">
               <a:t>&lt;#&gt;</a:t>
             </a:fld>
           </a:p>
@@ -1489,7 +1490,7 @@
         <p:txBody>
           <a:bodyPr/>
           <a:p>
-            <a:fld id="{01A79DE0-8D72-467A-B0A1-B030E62D9A36}" type="slidenum">
+            <a:fld id="{47FC67CD-68AC-4F6A-8659-08FFE63BDEE1}" type="slidenum">
               <a:t>&lt;#&gt;</a:t>
             </a:fld>
           </a:p>
@@ -1612,7 +1613,7 @@
         <p:txBody>
           <a:bodyPr/>
           <a:p>
-            <a:fld id="{543353BA-9DF1-4FF3-BF8A-21C5195619F0}" type="slidenum">
+            <a:fld id="{BAE59157-7320-4158-992B-63F4F29B82BF}" type="slidenum">
               <a:t>&lt;#&gt;</a:t>
             </a:fld>
           </a:p>
@@ -1733,7 +1734,7 @@
         <p:txBody>
           <a:bodyPr/>
           <a:p>
-            <a:fld id="{1653FD4A-1D26-4398-863B-78A6F0E4D260}" type="slidenum">
+            <a:fld id="{A270DB8C-FDA6-4D42-AC0D-66F4262BDF80}" type="slidenum">
               <a:t>&lt;#&gt;</a:t>
             </a:fld>
           </a:p>
@@ -1985,7 +1986,7 @@
         <p:txBody>
           <a:bodyPr/>
           <a:p>
-            <a:fld id="{70B97B89-F195-4800-AD17-3AAE19066FF4}" type="slidenum">
+            <a:fld id="{EF04D17F-6083-4BCA-B275-7C67A220D125}" type="slidenum">
               <a:t>&lt;#&gt;</a:t>
             </a:fld>
           </a:p>
@@ -2237,7 +2238,7 @@
         <p:txBody>
           <a:bodyPr/>
           <a:p>
-            <a:fld id="{6290CAF9-7F40-4FB2-9E22-A3303CEAEEED}" type="slidenum">
+            <a:fld id="{DB822391-53C9-4C52-9440-1ABD0EBAC5DB}" type="slidenum">
               <a:t>&lt;#&gt;</a:t>
             </a:fld>
           </a:p>
@@ -2489,7 +2490,7 @@
         <p:txBody>
           <a:bodyPr/>
           <a:p>
-            <a:fld id="{107957FB-8771-43AE-B991-4FD9C4A72DD4}" type="slidenum">
+            <a:fld id="{659E0486-20AC-4D6C-B9AE-6A14374A3E32}" type="slidenum">
               <a:t>&lt;#&gt;</a:t>
             </a:fld>
           </a:p>
@@ -2558,7 +2559,7 @@
         <p:spPr>
           <a:xfrm>
             <a:off x="3124080" y="6356520"/>
-            <a:ext cx="2893320" cy="362880"/>
+            <a:ext cx="2892960" cy="362520"/>
           </a:xfrm>
           <a:prstGeom prst="rect">
             <a:avLst/>
@@ -2630,7 +2631,7 @@
         <p:spPr>
           <a:xfrm>
             <a:off x="6553080" y="6356520"/>
-            <a:ext cx="2131560" cy="362880"/>
+            <a:ext cx="2131200" cy="362520"/>
           </a:xfrm>
           <a:prstGeom prst="rect">
             <a:avLst/>
@@ -2671,7 +2672,7 @@
                 <a:tab algn="l" pos="0"/>
               </a:tabLst>
             </a:pPr>
-            <a:fld id="{5A704B8A-4568-41F5-B777-768E5C1895C6}" type="slidenum">
+            <a:fld id="{BC4AC5C8-E78C-4240-BB80-31A1419AE5ED}" type="slidenum">
               <a:rPr b="0" lang="en-US" sz="1200" spc="-1" strike="noStrike">
                 <a:solidFill>
                   <a:srgbClr val="8b8b8b"/>
@@ -2702,7 +2703,7 @@
         <p:spPr>
           <a:xfrm>
             <a:off x="457200" y="6356520"/>
-            <a:ext cx="2131560" cy="362880"/>
+            <a:ext cx="2131200" cy="362520"/>
           </a:xfrm>
           <a:prstGeom prst="rect">
             <a:avLst/>
@@ -3069,7 +3070,7 @@
         <p:spPr>
           <a:xfrm>
             <a:off x="0" y="0"/>
-            <a:ext cx="12186720" cy="6855840"/>
+            <a:ext cx="12186360" cy="6855480"/>
           </a:xfrm>
           <a:prstGeom prst="rect">
             <a:avLst/>
@@ -3129,7 +3130,7 @@
         <p:spPr>
           <a:xfrm>
             <a:off x="0" y="0"/>
-            <a:ext cx="16200" cy="6855840"/>
+            <a:ext cx="15840" cy="6855480"/>
           </a:xfrm>
           <a:prstGeom prst="rect">
             <a:avLst/>
@@ -3189,7 +3190,7 @@
         <p:spPr>
           <a:xfrm>
             <a:off x="914400" y="0"/>
-            <a:ext cx="16200" cy="6855840"/>
+            <a:ext cx="15840" cy="6855480"/>
           </a:xfrm>
           <a:prstGeom prst="rect">
             <a:avLst/>
@@ -3249,7 +3250,7 @@
         <p:spPr>
           <a:xfrm>
             <a:off x="1828800" y="0"/>
-            <a:ext cx="16200" cy="6855840"/>
+            <a:ext cx="15840" cy="6855480"/>
           </a:xfrm>
           <a:prstGeom prst="rect">
             <a:avLst/>
@@ -3309,7 +3310,7 @@
         <p:spPr>
           <a:xfrm>
             <a:off x="2743200" y="0"/>
-            <a:ext cx="16200" cy="6855840"/>
+            <a:ext cx="15840" cy="6855480"/>
           </a:xfrm>
           <a:prstGeom prst="rect">
             <a:avLst/>
@@ -3369,7 +3370,7 @@
         <p:spPr>
           <a:xfrm>
             <a:off x="3657600" y="0"/>
-            <a:ext cx="16200" cy="6855840"/>
+            <a:ext cx="15840" cy="6855480"/>
           </a:xfrm>
           <a:prstGeom prst="rect">
             <a:avLst/>
@@ -3429,7 +3430,7 @@
         <p:spPr>
           <a:xfrm>
             <a:off x="4572000" y="0"/>
-            <a:ext cx="16200" cy="6855840"/>
+            <a:ext cx="15840" cy="6855480"/>
           </a:xfrm>
           <a:prstGeom prst="rect">
             <a:avLst/>
@@ -3489,7 +3490,7 @@
         <p:spPr>
           <a:xfrm>
             <a:off x="5486400" y="0"/>
-            <a:ext cx="16200" cy="6855840"/>
+            <a:ext cx="15840" cy="6855480"/>
           </a:xfrm>
           <a:prstGeom prst="rect">
             <a:avLst/>
@@ -3549,7 +3550,7 @@
         <p:spPr>
           <a:xfrm>
             <a:off x="6400800" y="0"/>
-            <a:ext cx="16200" cy="6855840"/>
+            <a:ext cx="15840" cy="6855480"/>
           </a:xfrm>
           <a:prstGeom prst="rect">
             <a:avLst/>
@@ -3609,7 +3610,7 @@
         <p:spPr>
           <a:xfrm>
             <a:off x="7315200" y="0"/>
-            <a:ext cx="16200" cy="6855840"/>
+            <a:ext cx="15840" cy="6855480"/>
           </a:xfrm>
           <a:prstGeom prst="rect">
             <a:avLst/>
@@ -3669,7 +3670,7 @@
         <p:spPr>
           <a:xfrm>
             <a:off x="8229600" y="0"/>
-            <a:ext cx="16200" cy="6855840"/>
+            <a:ext cx="15840" cy="6855480"/>
           </a:xfrm>
           <a:prstGeom prst="rect">
             <a:avLst/>
@@ -3729,7 +3730,7 @@
         <p:spPr>
           <a:xfrm>
             <a:off x="9144000" y="0"/>
-            <a:ext cx="16200" cy="6855840"/>
+            <a:ext cx="15840" cy="6855480"/>
           </a:xfrm>
           <a:prstGeom prst="rect">
             <a:avLst/>
@@ -3789,7 +3790,7 @@
         <p:spPr>
           <a:xfrm>
             <a:off x="10058400" y="0"/>
-            <a:ext cx="16200" cy="6855840"/>
+            <a:ext cx="15840" cy="6855480"/>
           </a:xfrm>
           <a:prstGeom prst="rect">
             <a:avLst/>
@@ -3849,7 +3850,7 @@
         <p:spPr>
           <a:xfrm>
             <a:off x="10972800" y="0"/>
-            <a:ext cx="16200" cy="6855840"/>
+            <a:ext cx="15840" cy="6855480"/>
           </a:xfrm>
           <a:prstGeom prst="rect">
             <a:avLst/>
@@ -3909,7 +3910,7 @@
         <p:spPr>
           <a:xfrm>
             <a:off x="11887200" y="0"/>
-            <a:ext cx="16200" cy="6855840"/>
+            <a:ext cx="15840" cy="6855480"/>
           </a:xfrm>
           <a:prstGeom prst="rect">
             <a:avLst/>
@@ -3969,7 +3970,7 @@
         <p:spPr>
           <a:xfrm>
             <a:off x="0" y="0"/>
-            <a:ext cx="317880" cy="6855840"/>
+            <a:ext cx="317520" cy="6855480"/>
           </a:xfrm>
           <a:prstGeom prst="rect">
             <a:avLst/>
@@ -4029,7 +4030,7 @@
         <p:spPr>
           <a:xfrm>
             <a:off x="9875520" y="365760"/>
-            <a:ext cx="2009520" cy="500760"/>
+            <a:ext cx="2009160" cy="500400"/>
           </a:xfrm>
           <a:prstGeom prst="roundRect">
             <a:avLst>
@@ -4157,7 +4158,7 @@
         <p:spPr>
           <a:xfrm>
             <a:off x="3070440" y="1495080"/>
-            <a:ext cx="5937840" cy="1247400"/>
+            <a:ext cx="5937480" cy="1247400"/>
           </a:xfrm>
           <a:prstGeom prst="rect">
             <a:avLst/>
@@ -4280,7 +4281,7 @@
         <p:spPr>
           <a:xfrm>
             <a:off x="987480" y="3182040"/>
-            <a:ext cx="3289680" cy="2741040"/>
+            <a:ext cx="3289320" cy="2740680"/>
           </a:xfrm>
           <a:prstGeom prst="roundRect">
             <a:avLst>
@@ -4342,7 +4343,7 @@
         <p:spPr>
           <a:xfrm>
             <a:off x="914400" y="3108960"/>
-            <a:ext cx="3289680" cy="2741040"/>
+            <a:ext cx="3289320" cy="2740680"/>
           </a:xfrm>
           <a:prstGeom prst="roundRect">
             <a:avLst>
@@ -4476,7 +4477,7 @@
         <p:spPr>
           <a:xfrm>
             <a:off x="4507920" y="3182040"/>
-            <a:ext cx="3289680" cy="2741040"/>
+            <a:ext cx="3289320" cy="2740680"/>
           </a:xfrm>
           <a:prstGeom prst="roundRect">
             <a:avLst>
@@ -4538,7 +4539,7 @@
         <p:spPr>
           <a:xfrm>
             <a:off x="4434840" y="3108960"/>
-            <a:ext cx="3289680" cy="2741040"/>
+            <a:ext cx="3289320" cy="2740680"/>
           </a:xfrm>
           <a:prstGeom prst="roundRect">
             <a:avLst>
@@ -4796,7 +4797,7 @@
         <p:spPr>
           <a:xfrm>
             <a:off x="8028360" y="3182040"/>
-            <a:ext cx="3289680" cy="2741040"/>
+            <a:ext cx="3289320" cy="2740680"/>
           </a:xfrm>
           <a:prstGeom prst="roundRect">
             <a:avLst>
@@ -4858,7 +4859,7 @@
         <p:spPr>
           <a:xfrm>
             <a:off x="7955280" y="2971800"/>
-            <a:ext cx="3930840" cy="3656520"/>
+            <a:ext cx="3930480" cy="3656160"/>
           </a:xfrm>
           <a:prstGeom prst="roundRect">
             <a:avLst>
@@ -5369,7 +5370,7 @@
         <p:spPr>
           <a:xfrm>
             <a:off x="0" y="0"/>
-            <a:ext cx="12187080" cy="6856200"/>
+            <a:ext cx="12186720" cy="6855840"/>
           </a:xfrm>
           <a:prstGeom prst="rect">
             <a:avLst/>
@@ -5429,7 +5430,7 @@
         <p:spPr>
           <a:xfrm>
             <a:off x="0" y="0"/>
-            <a:ext cx="16560" cy="6856200"/>
+            <a:ext cx="16200" cy="6855840"/>
           </a:xfrm>
           <a:prstGeom prst="rect">
             <a:avLst/>
@@ -5489,7 +5490,7 @@
         <p:spPr>
           <a:xfrm>
             <a:off x="914400" y="0"/>
-            <a:ext cx="16560" cy="6856200"/>
+            <a:ext cx="16200" cy="6855840"/>
           </a:xfrm>
           <a:prstGeom prst="rect">
             <a:avLst/>
@@ -5549,7 +5550,7 @@
         <p:spPr>
           <a:xfrm>
             <a:off x="1828800" y="0"/>
-            <a:ext cx="16560" cy="6856200"/>
+            <a:ext cx="16200" cy="6855840"/>
           </a:xfrm>
           <a:prstGeom prst="rect">
             <a:avLst/>
@@ -5609,7 +5610,7 @@
         <p:spPr>
           <a:xfrm>
             <a:off x="2743200" y="0"/>
-            <a:ext cx="16560" cy="6856200"/>
+            <a:ext cx="16200" cy="6855840"/>
           </a:xfrm>
           <a:prstGeom prst="rect">
             <a:avLst/>
@@ -5669,7 +5670,7 @@
         <p:spPr>
           <a:xfrm>
             <a:off x="3657600" y="0"/>
-            <a:ext cx="16560" cy="6856200"/>
+            <a:ext cx="16200" cy="6855840"/>
           </a:xfrm>
           <a:prstGeom prst="rect">
             <a:avLst/>
@@ -5729,7 +5730,7 @@
         <p:spPr>
           <a:xfrm>
             <a:off x="4572000" y="0"/>
-            <a:ext cx="16560" cy="6856200"/>
+            <a:ext cx="16200" cy="6855840"/>
           </a:xfrm>
           <a:prstGeom prst="rect">
             <a:avLst/>
@@ -5789,7 +5790,7 @@
         <p:spPr>
           <a:xfrm>
             <a:off x="5486400" y="0"/>
-            <a:ext cx="16560" cy="6856200"/>
+            <a:ext cx="16200" cy="6855840"/>
           </a:xfrm>
           <a:prstGeom prst="rect">
             <a:avLst/>
@@ -5849,7 +5850,7 @@
         <p:spPr>
           <a:xfrm>
             <a:off x="6400800" y="0"/>
-            <a:ext cx="16560" cy="6856200"/>
+            <a:ext cx="16200" cy="6855840"/>
           </a:xfrm>
           <a:prstGeom prst="rect">
             <a:avLst/>
@@ -5909,7 +5910,7 @@
         <p:spPr>
           <a:xfrm>
             <a:off x="7315200" y="0"/>
-            <a:ext cx="16560" cy="6856200"/>
+            <a:ext cx="16200" cy="6855840"/>
           </a:xfrm>
           <a:prstGeom prst="rect">
             <a:avLst/>
@@ -5969,7 +5970,7 @@
         <p:spPr>
           <a:xfrm>
             <a:off x="8229600" y="0"/>
-            <a:ext cx="16560" cy="6856200"/>
+            <a:ext cx="16200" cy="6855840"/>
           </a:xfrm>
           <a:prstGeom prst="rect">
             <a:avLst/>
@@ -6029,7 +6030,7 @@
         <p:spPr>
           <a:xfrm>
             <a:off x="9144000" y="0"/>
-            <a:ext cx="16560" cy="6856200"/>
+            <a:ext cx="16200" cy="6855840"/>
           </a:xfrm>
           <a:prstGeom prst="rect">
             <a:avLst/>
@@ -6089,7 +6090,7 @@
         <p:spPr>
           <a:xfrm>
             <a:off x="10058400" y="0"/>
-            <a:ext cx="16560" cy="6856200"/>
+            <a:ext cx="16200" cy="6855840"/>
           </a:xfrm>
           <a:prstGeom prst="rect">
             <a:avLst/>
@@ -6149,7 +6150,7 @@
         <p:spPr>
           <a:xfrm>
             <a:off x="10972800" y="0"/>
-            <a:ext cx="16560" cy="6856200"/>
+            <a:ext cx="16200" cy="6855840"/>
           </a:xfrm>
           <a:prstGeom prst="rect">
             <a:avLst/>
@@ -6209,7 +6210,7 @@
         <p:spPr>
           <a:xfrm>
             <a:off x="11887200" y="0"/>
-            <a:ext cx="16560" cy="6856200"/>
+            <a:ext cx="16200" cy="6855840"/>
           </a:xfrm>
           <a:prstGeom prst="rect">
             <a:avLst/>
@@ -6269,7 +6270,7 @@
         <p:spPr>
           <a:xfrm>
             <a:off x="0" y="0"/>
-            <a:ext cx="318240" cy="6856200"/>
+            <a:ext cx="317880" cy="6855840"/>
           </a:xfrm>
           <a:prstGeom prst="rect">
             <a:avLst/>
@@ -6329,7 +6330,7 @@
         <p:spPr>
           <a:xfrm>
             <a:off x="9875520" y="365760"/>
-            <a:ext cx="2009880" cy="501120"/>
+            <a:ext cx="2009520" cy="500760"/>
           </a:xfrm>
           <a:prstGeom prst="roundRect">
             <a:avLst>
@@ -6403,7 +6404,7 @@
         <p:spPr>
           <a:xfrm>
             <a:off x="723240" y="914400"/>
-            <a:ext cx="9524160" cy="638280"/>
+            <a:ext cx="9523800" cy="638280"/>
           </a:xfrm>
           <a:prstGeom prst="rect">
             <a:avLst/>
@@ -6557,7 +6558,7 @@
         <p:spPr>
           <a:xfrm>
             <a:off x="987480" y="3182040"/>
-            <a:ext cx="3290040" cy="2741400"/>
+            <a:ext cx="3289680" cy="2741040"/>
           </a:xfrm>
           <a:prstGeom prst="roundRect">
             <a:avLst>
@@ -6619,7 +6620,7 @@
         <p:spPr>
           <a:xfrm>
             <a:off x="914400" y="3108960"/>
-            <a:ext cx="3290040" cy="2741400"/>
+            <a:ext cx="3289680" cy="2741040"/>
           </a:xfrm>
           <a:prstGeom prst="roundRect">
             <a:avLst>
@@ -6782,7 +6783,7 @@
         <p:spPr>
           <a:xfrm>
             <a:off x="4507920" y="3182040"/>
-            <a:ext cx="3290040" cy="2741400"/>
+            <a:ext cx="3289680" cy="2741040"/>
           </a:xfrm>
           <a:prstGeom prst="roundRect">
             <a:avLst>
@@ -6844,7 +6845,7 @@
         <p:spPr>
           <a:xfrm>
             <a:off x="4434840" y="3108960"/>
-            <a:ext cx="3290040" cy="2741400"/>
+            <a:ext cx="3289680" cy="2741040"/>
           </a:xfrm>
           <a:prstGeom prst="roundRect">
             <a:avLst>
@@ -7102,7 +7103,7 @@
         <p:spPr>
           <a:xfrm>
             <a:off x="8028360" y="3182040"/>
-            <a:ext cx="3290040" cy="2741400"/>
+            <a:ext cx="3289680" cy="2741040"/>
           </a:xfrm>
           <a:prstGeom prst="roundRect">
             <a:avLst>
@@ -7164,7 +7165,7 @@
         <p:spPr>
           <a:xfrm>
             <a:off x="7955280" y="3108960"/>
-            <a:ext cx="3702600" cy="3062520"/>
+            <a:ext cx="3702240" cy="3062160"/>
           </a:xfrm>
           <a:prstGeom prst="roundRect">
             <a:avLst>
@@ -7609,7 +7610,7 @@
         <p:spPr>
           <a:xfrm>
             <a:off x="0" y="0"/>
-            <a:ext cx="12187080" cy="6856200"/>
+            <a:ext cx="12186720" cy="6855840"/>
           </a:xfrm>
           <a:prstGeom prst="rect">
             <a:avLst/>
@@ -7669,7 +7670,7 @@
         <p:spPr>
           <a:xfrm>
             <a:off x="0" y="0"/>
-            <a:ext cx="16560" cy="6856200"/>
+            <a:ext cx="16200" cy="6855840"/>
           </a:xfrm>
           <a:prstGeom prst="rect">
             <a:avLst/>
@@ -7729,7 +7730,7 @@
         <p:spPr>
           <a:xfrm>
             <a:off x="914400" y="0"/>
-            <a:ext cx="16560" cy="6856200"/>
+            <a:ext cx="16200" cy="6855840"/>
           </a:xfrm>
           <a:prstGeom prst="rect">
             <a:avLst/>
@@ -7789,7 +7790,7 @@
         <p:spPr>
           <a:xfrm>
             <a:off x="1828800" y="0"/>
-            <a:ext cx="16560" cy="6856200"/>
+            <a:ext cx="16200" cy="6855840"/>
           </a:xfrm>
           <a:prstGeom prst="rect">
             <a:avLst/>
@@ -7849,7 +7850,7 @@
         <p:spPr>
           <a:xfrm>
             <a:off x="2743200" y="0"/>
-            <a:ext cx="16560" cy="6856200"/>
+            <a:ext cx="16200" cy="6855840"/>
           </a:xfrm>
           <a:prstGeom prst="rect">
             <a:avLst/>
@@ -7909,7 +7910,7 @@
         <p:spPr>
           <a:xfrm>
             <a:off x="3657600" y="0"/>
-            <a:ext cx="16560" cy="6856200"/>
+            <a:ext cx="16200" cy="6855840"/>
           </a:xfrm>
           <a:prstGeom prst="rect">
             <a:avLst/>
@@ -7969,7 +7970,7 @@
         <p:spPr>
           <a:xfrm>
             <a:off x="4572000" y="0"/>
-            <a:ext cx="16560" cy="6856200"/>
+            <a:ext cx="16200" cy="6855840"/>
           </a:xfrm>
           <a:prstGeom prst="rect">
             <a:avLst/>
@@ -8029,7 +8030,7 @@
         <p:spPr>
           <a:xfrm>
             <a:off x="5486400" y="0"/>
-            <a:ext cx="16560" cy="6856200"/>
+            <a:ext cx="16200" cy="6855840"/>
           </a:xfrm>
           <a:prstGeom prst="rect">
             <a:avLst/>
@@ -8089,7 +8090,7 @@
         <p:spPr>
           <a:xfrm>
             <a:off x="6400800" y="0"/>
-            <a:ext cx="16560" cy="6856200"/>
+            <a:ext cx="16200" cy="6855840"/>
           </a:xfrm>
           <a:prstGeom prst="rect">
             <a:avLst/>
@@ -8149,7 +8150,7 @@
         <p:spPr>
           <a:xfrm>
             <a:off x="7315200" y="0"/>
-            <a:ext cx="16560" cy="6856200"/>
+            <a:ext cx="16200" cy="6855840"/>
           </a:xfrm>
           <a:prstGeom prst="rect">
             <a:avLst/>
@@ -8209,7 +8210,7 @@
         <p:spPr>
           <a:xfrm>
             <a:off x="8229600" y="0"/>
-            <a:ext cx="16560" cy="6856200"/>
+            <a:ext cx="16200" cy="6855840"/>
           </a:xfrm>
           <a:prstGeom prst="rect">
             <a:avLst/>
@@ -8269,7 +8270,7 @@
         <p:spPr>
           <a:xfrm>
             <a:off x="9144000" y="0"/>
-            <a:ext cx="16560" cy="6856200"/>
+            <a:ext cx="16200" cy="6855840"/>
           </a:xfrm>
           <a:prstGeom prst="rect">
             <a:avLst/>
@@ -8329,7 +8330,7 @@
         <p:spPr>
           <a:xfrm>
             <a:off x="10058400" y="0"/>
-            <a:ext cx="16560" cy="6856200"/>
+            <a:ext cx="16200" cy="6855840"/>
           </a:xfrm>
           <a:prstGeom prst="rect">
             <a:avLst/>
@@ -8389,7 +8390,7 @@
         <p:spPr>
           <a:xfrm>
             <a:off x="10972800" y="0"/>
-            <a:ext cx="16560" cy="6856200"/>
+            <a:ext cx="16200" cy="6855840"/>
           </a:xfrm>
           <a:prstGeom prst="rect">
             <a:avLst/>
@@ -8449,7 +8450,7 @@
         <p:spPr>
           <a:xfrm>
             <a:off x="11887200" y="0"/>
-            <a:ext cx="16560" cy="6856200"/>
+            <a:ext cx="16200" cy="6855840"/>
           </a:xfrm>
           <a:prstGeom prst="rect">
             <a:avLst/>
@@ -8509,7 +8510,7 @@
         <p:spPr>
           <a:xfrm>
             <a:off x="0" y="0"/>
-            <a:ext cx="318240" cy="6856200"/>
+            <a:ext cx="317880" cy="6855840"/>
           </a:xfrm>
           <a:prstGeom prst="rect">
             <a:avLst/>
@@ -8569,7 +8570,7 @@
         <p:spPr>
           <a:xfrm>
             <a:off x="9875520" y="365760"/>
-            <a:ext cx="2009880" cy="501120"/>
+            <a:ext cx="2009520" cy="500760"/>
           </a:xfrm>
           <a:prstGeom prst="roundRect">
             <a:avLst>
@@ -8643,7 +8644,7 @@
         <p:spPr>
           <a:xfrm>
             <a:off x="942480" y="914400"/>
-            <a:ext cx="9085320" cy="638280"/>
+            <a:ext cx="9084960" cy="638280"/>
           </a:xfrm>
           <a:prstGeom prst="rect">
             <a:avLst/>
@@ -8697,7 +8698,7 @@
         <p:spPr>
           <a:xfrm>
             <a:off x="1149480" y="1828800"/>
-            <a:ext cx="9190440" cy="576360"/>
+            <a:ext cx="9190080" cy="576360"/>
           </a:xfrm>
           <a:prstGeom prst="rect">
             <a:avLst/>
@@ -8774,7 +8775,7 @@
         <p:spPr>
           <a:xfrm>
             <a:off x="987480" y="3182040"/>
-            <a:ext cx="3290040" cy="2741400"/>
+            <a:ext cx="3289680" cy="2741040"/>
           </a:xfrm>
           <a:prstGeom prst="roundRect">
             <a:avLst>
@@ -8836,7 +8837,7 @@
         <p:spPr>
           <a:xfrm>
             <a:off x="914400" y="3108960"/>
-            <a:ext cx="3290040" cy="3062880"/>
+            <a:ext cx="3289680" cy="3062520"/>
           </a:xfrm>
           <a:prstGeom prst="roundRect">
             <a:avLst>
@@ -9027,7 +9028,7 @@
         <p:spPr>
           <a:xfrm>
             <a:off x="4507920" y="3182040"/>
-            <a:ext cx="3290040" cy="2741400"/>
+            <a:ext cx="3289680" cy="2741040"/>
           </a:xfrm>
           <a:prstGeom prst="roundRect">
             <a:avLst>
@@ -9089,7 +9090,7 @@
         <p:spPr>
           <a:xfrm>
             <a:off x="4434840" y="3108960"/>
-            <a:ext cx="3290040" cy="2741400"/>
+            <a:ext cx="3289680" cy="2741040"/>
           </a:xfrm>
           <a:prstGeom prst="roundRect">
             <a:avLst>
@@ -9347,7 +9348,7 @@
         <p:spPr>
           <a:xfrm>
             <a:off x="8028360" y="3182040"/>
-            <a:ext cx="3290040" cy="2741400"/>
+            <a:ext cx="3289680" cy="2741040"/>
           </a:xfrm>
           <a:prstGeom prst="roundRect">
             <a:avLst>
@@ -9409,7 +9410,7 @@
         <p:spPr>
           <a:xfrm>
             <a:off x="7955280" y="3108960"/>
-            <a:ext cx="3702600" cy="3062520"/>
+            <a:ext cx="3702240" cy="3062160"/>
           </a:xfrm>
           <a:prstGeom prst="roundRect">
             <a:avLst>
@@ -9854,7 +9855,7 @@
         <p:spPr>
           <a:xfrm>
             <a:off x="0" y="0"/>
-            <a:ext cx="12187080" cy="6856200"/>
+            <a:ext cx="12186720" cy="6855840"/>
           </a:xfrm>
           <a:prstGeom prst="rect">
             <a:avLst/>
@@ -9890,6 +9891,11 @@
             <a:noAutofit/>
           </a:bodyPr>
           <a:p>
+            <a:pPr>
+              <a:lnSpc>
+                <a:spcPct val="100000"/>
+              </a:lnSpc>
+            </a:pPr>
             <a:endParaRPr b="0" lang="en-US" sz="1800" spc="-1" strike="noStrike">
               <a:solidFill>
                 <a:schemeClr val="lt1"/>
@@ -9909,7 +9915,7 @@
         <p:spPr>
           <a:xfrm>
             <a:off x="0" y="0"/>
-            <a:ext cx="16560" cy="6856200"/>
+            <a:ext cx="16200" cy="6855840"/>
           </a:xfrm>
           <a:prstGeom prst="rect">
             <a:avLst/>
@@ -9945,6 +9951,11 @@
             <a:noAutofit/>
           </a:bodyPr>
           <a:p>
+            <a:pPr>
+              <a:lnSpc>
+                <a:spcPct val="100000"/>
+              </a:lnSpc>
+            </a:pPr>
             <a:endParaRPr b="0" lang="en-US" sz="1800" spc="-1" strike="noStrike">
               <a:solidFill>
                 <a:schemeClr val="lt1"/>
@@ -9964,7 +9975,7 @@
         <p:spPr>
           <a:xfrm>
             <a:off x="914400" y="0"/>
-            <a:ext cx="16560" cy="6856200"/>
+            <a:ext cx="16200" cy="6855840"/>
           </a:xfrm>
           <a:prstGeom prst="rect">
             <a:avLst/>
@@ -10000,6 +10011,11 @@
             <a:noAutofit/>
           </a:bodyPr>
           <a:p>
+            <a:pPr>
+              <a:lnSpc>
+                <a:spcPct val="100000"/>
+              </a:lnSpc>
+            </a:pPr>
             <a:endParaRPr b="0" lang="en-US" sz="1800" spc="-1" strike="noStrike">
               <a:solidFill>
                 <a:schemeClr val="lt1"/>
@@ -10019,7 +10035,7 @@
         <p:spPr>
           <a:xfrm>
             <a:off x="1828800" y="0"/>
-            <a:ext cx="16560" cy="6856200"/>
+            <a:ext cx="16200" cy="6855840"/>
           </a:xfrm>
           <a:prstGeom prst="rect">
             <a:avLst/>
@@ -10055,6 +10071,11 @@
             <a:noAutofit/>
           </a:bodyPr>
           <a:p>
+            <a:pPr>
+              <a:lnSpc>
+                <a:spcPct val="100000"/>
+              </a:lnSpc>
+            </a:pPr>
             <a:endParaRPr b="0" lang="en-US" sz="1800" spc="-1" strike="noStrike">
               <a:solidFill>
                 <a:schemeClr val="lt1"/>
@@ -10074,7 +10095,7 @@
         <p:spPr>
           <a:xfrm>
             <a:off x="2743200" y="0"/>
-            <a:ext cx="16560" cy="6856200"/>
+            <a:ext cx="16200" cy="6855840"/>
           </a:xfrm>
           <a:prstGeom prst="rect">
             <a:avLst/>
@@ -10110,6 +10131,11 @@
             <a:noAutofit/>
           </a:bodyPr>
           <a:p>
+            <a:pPr>
+              <a:lnSpc>
+                <a:spcPct val="100000"/>
+              </a:lnSpc>
+            </a:pPr>
             <a:endParaRPr b="0" lang="en-US" sz="1800" spc="-1" strike="noStrike">
               <a:solidFill>
                 <a:schemeClr val="lt1"/>
@@ -10129,7 +10155,7 @@
         <p:spPr>
           <a:xfrm>
             <a:off x="3657600" y="0"/>
-            <a:ext cx="16560" cy="6856200"/>
+            <a:ext cx="16200" cy="6855840"/>
           </a:xfrm>
           <a:prstGeom prst="rect">
             <a:avLst/>
@@ -10165,6 +10191,11 @@
             <a:noAutofit/>
           </a:bodyPr>
           <a:p>
+            <a:pPr>
+              <a:lnSpc>
+                <a:spcPct val="100000"/>
+              </a:lnSpc>
+            </a:pPr>
             <a:endParaRPr b="0" lang="en-US" sz="1800" spc="-1" strike="noStrike">
               <a:solidFill>
                 <a:schemeClr val="lt1"/>
@@ -10184,7 +10215,7 @@
         <p:spPr>
           <a:xfrm>
             <a:off x="4572000" y="0"/>
-            <a:ext cx="16560" cy="6856200"/>
+            <a:ext cx="16200" cy="6855840"/>
           </a:xfrm>
           <a:prstGeom prst="rect">
             <a:avLst/>
@@ -10220,6 +10251,11 @@
             <a:noAutofit/>
           </a:bodyPr>
           <a:p>
+            <a:pPr>
+              <a:lnSpc>
+                <a:spcPct val="100000"/>
+              </a:lnSpc>
+            </a:pPr>
             <a:endParaRPr b="0" lang="en-US" sz="1800" spc="-1" strike="noStrike">
               <a:solidFill>
                 <a:schemeClr val="lt1"/>
@@ -10239,7 +10275,7 @@
         <p:spPr>
           <a:xfrm>
             <a:off x="5486400" y="0"/>
-            <a:ext cx="16560" cy="6856200"/>
+            <a:ext cx="16200" cy="6855840"/>
           </a:xfrm>
           <a:prstGeom prst="rect">
             <a:avLst/>
@@ -10275,6 +10311,11 @@
             <a:noAutofit/>
           </a:bodyPr>
           <a:p>
+            <a:pPr>
+              <a:lnSpc>
+                <a:spcPct val="100000"/>
+              </a:lnSpc>
+            </a:pPr>
             <a:endParaRPr b="0" lang="en-US" sz="1800" spc="-1" strike="noStrike">
               <a:solidFill>
                 <a:schemeClr val="lt1"/>
@@ -10294,7 +10335,7 @@
         <p:spPr>
           <a:xfrm>
             <a:off x="6400800" y="0"/>
-            <a:ext cx="16560" cy="6856200"/>
+            <a:ext cx="16200" cy="6855840"/>
           </a:xfrm>
           <a:prstGeom prst="rect">
             <a:avLst/>
@@ -10330,6 +10371,11 @@
             <a:noAutofit/>
           </a:bodyPr>
           <a:p>
+            <a:pPr>
+              <a:lnSpc>
+                <a:spcPct val="100000"/>
+              </a:lnSpc>
+            </a:pPr>
             <a:endParaRPr b="0" lang="en-US" sz="1800" spc="-1" strike="noStrike">
               <a:solidFill>
                 <a:schemeClr val="lt1"/>
@@ -10349,7 +10395,7 @@
         <p:spPr>
           <a:xfrm>
             <a:off x="7315200" y="0"/>
-            <a:ext cx="16560" cy="6856200"/>
+            <a:ext cx="16200" cy="6855840"/>
           </a:xfrm>
           <a:prstGeom prst="rect">
             <a:avLst/>
@@ -10385,6 +10431,11 @@
             <a:noAutofit/>
           </a:bodyPr>
           <a:p>
+            <a:pPr>
+              <a:lnSpc>
+                <a:spcPct val="100000"/>
+              </a:lnSpc>
+            </a:pPr>
             <a:endParaRPr b="0" lang="en-US" sz="1800" spc="-1" strike="noStrike">
               <a:solidFill>
                 <a:schemeClr val="lt1"/>
@@ -10404,7 +10455,7 @@
         <p:spPr>
           <a:xfrm>
             <a:off x="8229600" y="0"/>
-            <a:ext cx="16560" cy="6856200"/>
+            <a:ext cx="16200" cy="6855840"/>
           </a:xfrm>
           <a:prstGeom prst="rect">
             <a:avLst/>
@@ -10440,6 +10491,11 @@
             <a:noAutofit/>
           </a:bodyPr>
           <a:p>
+            <a:pPr>
+              <a:lnSpc>
+                <a:spcPct val="100000"/>
+              </a:lnSpc>
+            </a:pPr>
             <a:endParaRPr b="0" lang="en-US" sz="1800" spc="-1" strike="noStrike">
               <a:solidFill>
                 <a:schemeClr val="lt1"/>
@@ -10459,7 +10515,7 @@
         <p:spPr>
           <a:xfrm>
             <a:off x="9144000" y="0"/>
-            <a:ext cx="16560" cy="6856200"/>
+            <a:ext cx="16200" cy="6855840"/>
           </a:xfrm>
           <a:prstGeom prst="rect">
             <a:avLst/>
@@ -10495,6 +10551,11 @@
             <a:noAutofit/>
           </a:bodyPr>
           <a:p>
+            <a:pPr>
+              <a:lnSpc>
+                <a:spcPct val="100000"/>
+              </a:lnSpc>
+            </a:pPr>
             <a:endParaRPr b="0" lang="en-US" sz="1800" spc="-1" strike="noStrike">
               <a:solidFill>
                 <a:schemeClr val="lt1"/>
@@ -10514,7 +10575,7 @@
         <p:spPr>
           <a:xfrm>
             <a:off x="10058400" y="0"/>
-            <a:ext cx="16560" cy="6856200"/>
+            <a:ext cx="16200" cy="6855840"/>
           </a:xfrm>
           <a:prstGeom prst="rect">
             <a:avLst/>
@@ -10550,6 +10611,11 @@
             <a:noAutofit/>
           </a:bodyPr>
           <a:p>
+            <a:pPr>
+              <a:lnSpc>
+                <a:spcPct val="100000"/>
+              </a:lnSpc>
+            </a:pPr>
             <a:endParaRPr b="0" lang="en-US" sz="1800" spc="-1" strike="noStrike">
               <a:solidFill>
                 <a:schemeClr val="lt1"/>
@@ -10569,7 +10635,7 @@
         <p:spPr>
           <a:xfrm>
             <a:off x="10972800" y="0"/>
-            <a:ext cx="16560" cy="6856200"/>
+            <a:ext cx="16200" cy="6855840"/>
           </a:xfrm>
           <a:prstGeom prst="rect">
             <a:avLst/>
@@ -10605,6 +10671,11 @@
             <a:noAutofit/>
           </a:bodyPr>
           <a:p>
+            <a:pPr>
+              <a:lnSpc>
+                <a:spcPct val="100000"/>
+              </a:lnSpc>
+            </a:pPr>
             <a:endParaRPr b="0" lang="en-US" sz="1800" spc="-1" strike="noStrike">
               <a:solidFill>
                 <a:schemeClr val="lt1"/>
@@ -10624,7 +10695,7 @@
         <p:spPr>
           <a:xfrm>
             <a:off x="11887200" y="0"/>
-            <a:ext cx="16560" cy="6856200"/>
+            <a:ext cx="16200" cy="6855840"/>
           </a:xfrm>
           <a:prstGeom prst="rect">
             <a:avLst/>
@@ -10660,6 +10731,11 @@
             <a:noAutofit/>
           </a:bodyPr>
           <a:p>
+            <a:pPr>
+              <a:lnSpc>
+                <a:spcPct val="100000"/>
+              </a:lnSpc>
+            </a:pPr>
             <a:endParaRPr b="0" lang="en-US" sz="1800" spc="-1" strike="noStrike">
               <a:solidFill>
                 <a:schemeClr val="lt1"/>
@@ -10679,7 +10755,7 @@
         <p:spPr>
           <a:xfrm>
             <a:off x="0" y="0"/>
-            <a:ext cx="318240" cy="6856200"/>
+            <a:ext cx="317880" cy="6855840"/>
           </a:xfrm>
           <a:prstGeom prst="rect">
             <a:avLst/>
@@ -10715,6 +10791,11 @@
             <a:noAutofit/>
           </a:bodyPr>
           <a:p>
+            <a:pPr>
+              <a:lnSpc>
+                <a:spcPct val="100000"/>
+              </a:lnSpc>
+            </a:pPr>
             <a:endParaRPr b="0" lang="en-US" sz="1800" spc="-1" strike="noStrike">
               <a:solidFill>
                 <a:schemeClr val="lt1"/>
@@ -10734,7 +10815,7 @@
         <p:spPr>
           <a:xfrm>
             <a:off x="9875520" y="365760"/>
-            <a:ext cx="2009880" cy="501120"/>
+            <a:ext cx="2009520" cy="500760"/>
           </a:xfrm>
           <a:prstGeom prst="roundRect">
             <a:avLst>
@@ -10808,7 +10889,7 @@
         <p:spPr>
           <a:xfrm>
             <a:off x="2796840" y="914400"/>
-            <a:ext cx="5376240" cy="638280"/>
+            <a:ext cx="5375880" cy="638280"/>
           </a:xfrm>
           <a:prstGeom prst="rect">
             <a:avLst/>
@@ -10862,7 +10943,7 @@
         <p:spPr>
           <a:xfrm>
             <a:off x="1149480" y="1828800"/>
-            <a:ext cx="9190440" cy="576360"/>
+            <a:ext cx="9190080" cy="576360"/>
           </a:xfrm>
           <a:prstGeom prst="rect">
             <a:avLst/>
@@ -10939,7 +11020,7 @@
         <p:spPr>
           <a:xfrm>
             <a:off x="987480" y="3182040"/>
-            <a:ext cx="3290040" cy="2741400"/>
+            <a:ext cx="3289680" cy="2741040"/>
           </a:xfrm>
           <a:prstGeom prst="roundRect">
             <a:avLst>
@@ -10977,6 +11058,11 @@
             <a:noAutofit/>
           </a:bodyPr>
           <a:p>
+            <a:pPr>
+              <a:lnSpc>
+                <a:spcPct val="100000"/>
+              </a:lnSpc>
+            </a:pPr>
             <a:endParaRPr b="0" lang="en-US" sz="1800" spc="-1" strike="noStrike">
               <a:solidFill>
                 <a:schemeClr val="lt1"/>
@@ -10996,7 +11082,7 @@
         <p:spPr>
           <a:xfrm>
             <a:off x="914400" y="3108960"/>
-            <a:ext cx="3290040" cy="3062880"/>
+            <a:ext cx="3289680" cy="3062520"/>
           </a:xfrm>
           <a:prstGeom prst="roundRect">
             <a:avLst>
@@ -11187,7 +11273,7 @@
         <p:spPr>
           <a:xfrm>
             <a:off x="4507920" y="3182040"/>
-            <a:ext cx="3290040" cy="2741400"/>
+            <a:ext cx="3289680" cy="2741040"/>
           </a:xfrm>
           <a:prstGeom prst="roundRect">
             <a:avLst>
@@ -11225,6 +11311,11 @@
             <a:noAutofit/>
           </a:bodyPr>
           <a:p>
+            <a:pPr>
+              <a:lnSpc>
+                <a:spcPct val="100000"/>
+              </a:lnSpc>
+            </a:pPr>
             <a:endParaRPr b="0" lang="en-US" sz="1800" spc="-1" strike="noStrike">
               <a:solidFill>
                 <a:schemeClr val="lt1"/>
@@ -11244,7 +11335,7 @@
         <p:spPr>
           <a:xfrm>
             <a:off x="4434840" y="3108960"/>
-            <a:ext cx="3290040" cy="2741400"/>
+            <a:ext cx="3289680" cy="2741040"/>
           </a:xfrm>
           <a:prstGeom prst="roundRect">
             <a:avLst>
@@ -11456,7 +11547,7 @@
         <p:spPr>
           <a:xfrm>
             <a:off x="8028360" y="3182040"/>
-            <a:ext cx="3290040" cy="2741400"/>
+            <a:ext cx="3289680" cy="2741040"/>
           </a:xfrm>
           <a:prstGeom prst="roundRect">
             <a:avLst>
@@ -11494,6 +11585,11 @@
             <a:noAutofit/>
           </a:bodyPr>
           <a:p>
+            <a:pPr>
+              <a:lnSpc>
+                <a:spcPct val="100000"/>
+              </a:lnSpc>
+            </a:pPr>
             <a:endParaRPr b="0" lang="en-US" sz="1800" spc="-1" strike="noStrike">
               <a:solidFill>
                 <a:schemeClr val="lt1"/>
@@ -11513,7 +11609,7 @@
         <p:spPr>
           <a:xfrm>
             <a:off x="7955280" y="2743200"/>
-            <a:ext cx="3702600" cy="3657600"/>
+            <a:ext cx="3702240" cy="3657240"/>
           </a:xfrm>
           <a:prstGeom prst="roundRect">
             <a:avLst>
@@ -11983,6 +12079,2131 @@
       <p:sp>
         <p:nvSpPr>
           <p:cNvPr id="144" name="TextBox 12"/>
+          <p:cNvSpPr/>
+          <p:nvPr/>
+        </p:nvSpPr>
+        <p:spPr>
+          <a:xfrm>
+            <a:off x="4600080" y="6446520"/>
+            <a:ext cx="3051000" cy="363960"/>
+          </a:xfrm>
+          <a:prstGeom prst="rect">
+            <a:avLst/>
+          </a:prstGeom>
+          <a:noFill/>
+          <a:ln w="0">
+            <a:noFill/>
+          </a:ln>
+        </p:spPr>
+        <p:style>
+          <a:lnRef idx="0"/>
+          <a:fillRef idx="0"/>
+          <a:effectRef idx="0"/>
+          <a:fontRef idx="minor"/>
+        </p:style>
+        <p:txBody>
+          <a:bodyPr wrap="none" lIns="90000" rIns="90000" tIns="45000" bIns="45000" anchor="t">
+            <a:spAutoFit/>
+          </a:bodyPr>
+          <a:p>
+            <a:pPr>
+              <a:lnSpc>
+                <a:spcPct val="100000"/>
+              </a:lnSpc>
+            </a:pPr>
+            <a:r>
+              <a:rPr b="0" lang="en-US" sz="1800" spc="-1" strike="noStrike">
+                <a:solidFill>
+                  <a:srgbClr val="000000"/>
+                </a:solidFill>
+                <a:latin typeface="Calibri"/>
+                <a:ea typeface="DejaVu Sans"/>
+              </a:rPr>
+              <a:t>Java • Ultra Premium Template</a:t>
+            </a:r>
+            <a:endParaRPr b="0" lang="en-US" sz="1800" spc="-1" strike="noStrike">
+              <a:solidFill>
+                <a:srgbClr val="000000"/>
+              </a:solidFill>
+              <a:latin typeface="Arial"/>
+            </a:endParaRPr>
+          </a:p>
+        </p:txBody>
+      </p:sp>
+    </p:spTree>
+  </p:cSld>
+  <mc:AlternateContent>
+    <mc:Choice Requires="p14">
+      <p:transition spd="slow" p14:dur="2000"/>
+    </mc:Choice>
+    <mc:Fallback>
+      <p:transition spd="slow"/>
+    </mc:Fallback>
+  </mc:AlternateContent>
+</p:sld>
+</file>
+
+<file path=ppt/slides/slide5.xml><?xml version="1.0" encoding="utf-8"?>
+<p:sld xmlns:a="http://schemas.openxmlformats.org/drawingml/2006/main" xmlns:p="http://schemas.openxmlformats.org/presentationml/2006/main" xmlns:r="http://schemas.openxmlformats.org/officeDocument/2006/relationships" xmlns:p14="http://schemas.microsoft.com/office/powerpoint/2010/main" xmlns:p15="http://schemas.microsoft.com/office/powerpoint/2012/main" xmlns:mc="http://schemas.openxmlformats.org/markup-compatibility/2006">
+  <p:cSld>
+    <p:spTree>
+      <p:nvGrpSpPr>
+        <p:cNvPr id="1" name=""/>
+        <p:cNvGrpSpPr/>
+        <p:nvPr/>
+      </p:nvGrpSpPr>
+      <p:grpSpPr>
+        <a:xfrm>
+          <a:off x="0" y="0"/>
+          <a:ext cx="0" cy="0"/>
+          <a:chOff x="0" y="0"/>
+          <a:chExt cx="0" cy="0"/>
+        </a:xfrm>
+      </p:grpSpPr>
+      <p:sp>
+        <p:nvSpPr>
+          <p:cNvPr id="145" name="Rectangle 65"/>
+          <p:cNvSpPr/>
+          <p:nvPr/>
+        </p:nvSpPr>
+        <p:spPr>
+          <a:xfrm>
+            <a:off x="0" y="0"/>
+            <a:ext cx="12186720" cy="6855840"/>
+          </a:xfrm>
+          <a:prstGeom prst="rect">
+            <a:avLst/>
+          </a:prstGeom>
+          <a:solidFill>
+            <a:srgbClr val="0b0b0d"/>
+          </a:solidFill>
+          <a:ln>
+            <a:noFill/>
+          </a:ln>
+          <a:effectLst>
+            <a:outerShdw blurRad="39960" dir="5400000" dist="23040" rotWithShape="0">
+              <a:srgbClr val="000000">
+                <a:alpha val="35000"/>
+              </a:srgbClr>
+            </a:outerShdw>
+          </a:effectLst>
+        </p:spPr>
+        <p:style>
+          <a:lnRef idx="1">
+            <a:schemeClr val="accent1"/>
+          </a:lnRef>
+          <a:fillRef idx="3">
+            <a:schemeClr val="accent1"/>
+          </a:fillRef>
+          <a:effectRef idx="2">
+            <a:schemeClr val="accent1"/>
+          </a:effectRef>
+          <a:fontRef idx="minor"/>
+        </p:style>
+        <p:txBody>
+          <a:bodyPr lIns="90000" rIns="90000" tIns="45000" bIns="45000" anchor="ctr">
+            <a:noAutofit/>
+          </a:bodyPr>
+          <a:p>
+            <a:endParaRPr b="0" lang="en-US" sz="1800" spc="-1" strike="noStrike">
+              <a:solidFill>
+                <a:schemeClr val="lt1"/>
+              </a:solidFill>
+              <a:latin typeface="Calibri"/>
+              <a:ea typeface="DejaVu Sans"/>
+            </a:endParaRPr>
+          </a:p>
+        </p:txBody>
+      </p:sp>
+      <p:sp>
+        <p:nvSpPr>
+          <p:cNvPr id="146" name="Rectangle 66"/>
+          <p:cNvSpPr/>
+          <p:nvPr/>
+        </p:nvSpPr>
+        <p:spPr>
+          <a:xfrm>
+            <a:off x="0" y="0"/>
+            <a:ext cx="16200" cy="6855840"/>
+          </a:xfrm>
+          <a:prstGeom prst="rect">
+            <a:avLst/>
+          </a:prstGeom>
+          <a:solidFill>
+            <a:srgbClr val="121216"/>
+          </a:solidFill>
+          <a:ln>
+            <a:noFill/>
+          </a:ln>
+          <a:effectLst>
+            <a:outerShdw blurRad="39960" dir="5400000" dist="23040" rotWithShape="0">
+              <a:srgbClr val="000000">
+                <a:alpha val="35000"/>
+              </a:srgbClr>
+            </a:outerShdw>
+          </a:effectLst>
+        </p:spPr>
+        <p:style>
+          <a:lnRef idx="1">
+            <a:schemeClr val="accent1"/>
+          </a:lnRef>
+          <a:fillRef idx="3">
+            <a:schemeClr val="accent1"/>
+          </a:fillRef>
+          <a:effectRef idx="2">
+            <a:schemeClr val="accent1"/>
+          </a:effectRef>
+          <a:fontRef idx="minor"/>
+        </p:style>
+        <p:txBody>
+          <a:bodyPr lIns="90000" rIns="90000" tIns="45000" bIns="45000" anchor="ctr">
+            <a:noAutofit/>
+          </a:bodyPr>
+          <a:p>
+            <a:endParaRPr b="0" lang="en-US" sz="1800" spc="-1" strike="noStrike">
+              <a:solidFill>
+                <a:schemeClr val="lt1"/>
+              </a:solidFill>
+              <a:latin typeface="Calibri"/>
+              <a:ea typeface="DejaVu Sans"/>
+            </a:endParaRPr>
+          </a:p>
+        </p:txBody>
+      </p:sp>
+      <p:sp>
+        <p:nvSpPr>
+          <p:cNvPr id="147" name="Rectangle 67"/>
+          <p:cNvSpPr/>
+          <p:nvPr/>
+        </p:nvSpPr>
+        <p:spPr>
+          <a:xfrm>
+            <a:off x="914400" y="0"/>
+            <a:ext cx="16200" cy="6855840"/>
+          </a:xfrm>
+          <a:prstGeom prst="rect">
+            <a:avLst/>
+          </a:prstGeom>
+          <a:solidFill>
+            <a:srgbClr val="121216"/>
+          </a:solidFill>
+          <a:ln>
+            <a:noFill/>
+          </a:ln>
+          <a:effectLst>
+            <a:outerShdw blurRad="39960" dir="5400000" dist="23040" rotWithShape="0">
+              <a:srgbClr val="000000">
+                <a:alpha val="35000"/>
+              </a:srgbClr>
+            </a:outerShdw>
+          </a:effectLst>
+        </p:spPr>
+        <p:style>
+          <a:lnRef idx="1">
+            <a:schemeClr val="accent1"/>
+          </a:lnRef>
+          <a:fillRef idx="3">
+            <a:schemeClr val="accent1"/>
+          </a:fillRef>
+          <a:effectRef idx="2">
+            <a:schemeClr val="accent1"/>
+          </a:effectRef>
+          <a:fontRef idx="minor"/>
+        </p:style>
+        <p:txBody>
+          <a:bodyPr lIns="90000" rIns="90000" tIns="45000" bIns="45000" anchor="ctr">
+            <a:noAutofit/>
+          </a:bodyPr>
+          <a:p>
+            <a:endParaRPr b="0" lang="en-US" sz="1800" spc="-1" strike="noStrike">
+              <a:solidFill>
+                <a:schemeClr val="lt1"/>
+              </a:solidFill>
+              <a:latin typeface="Calibri"/>
+              <a:ea typeface="DejaVu Sans"/>
+            </a:endParaRPr>
+          </a:p>
+        </p:txBody>
+      </p:sp>
+      <p:sp>
+        <p:nvSpPr>
+          <p:cNvPr id="148" name="Rectangle 68"/>
+          <p:cNvSpPr/>
+          <p:nvPr/>
+        </p:nvSpPr>
+        <p:spPr>
+          <a:xfrm>
+            <a:off x="1828800" y="0"/>
+            <a:ext cx="16200" cy="6855840"/>
+          </a:xfrm>
+          <a:prstGeom prst="rect">
+            <a:avLst/>
+          </a:prstGeom>
+          <a:solidFill>
+            <a:srgbClr val="121216"/>
+          </a:solidFill>
+          <a:ln>
+            <a:noFill/>
+          </a:ln>
+          <a:effectLst>
+            <a:outerShdw blurRad="39960" dir="5400000" dist="23040" rotWithShape="0">
+              <a:srgbClr val="000000">
+                <a:alpha val="35000"/>
+              </a:srgbClr>
+            </a:outerShdw>
+          </a:effectLst>
+        </p:spPr>
+        <p:style>
+          <a:lnRef idx="1">
+            <a:schemeClr val="accent1"/>
+          </a:lnRef>
+          <a:fillRef idx="3">
+            <a:schemeClr val="accent1"/>
+          </a:fillRef>
+          <a:effectRef idx="2">
+            <a:schemeClr val="accent1"/>
+          </a:effectRef>
+          <a:fontRef idx="minor"/>
+        </p:style>
+        <p:txBody>
+          <a:bodyPr lIns="90000" rIns="90000" tIns="45000" bIns="45000" anchor="ctr">
+            <a:noAutofit/>
+          </a:bodyPr>
+          <a:p>
+            <a:endParaRPr b="0" lang="en-US" sz="1800" spc="-1" strike="noStrike">
+              <a:solidFill>
+                <a:schemeClr val="lt1"/>
+              </a:solidFill>
+              <a:latin typeface="Calibri"/>
+              <a:ea typeface="DejaVu Sans"/>
+            </a:endParaRPr>
+          </a:p>
+        </p:txBody>
+      </p:sp>
+      <p:sp>
+        <p:nvSpPr>
+          <p:cNvPr id="149" name="Rectangle 69"/>
+          <p:cNvSpPr/>
+          <p:nvPr/>
+        </p:nvSpPr>
+        <p:spPr>
+          <a:xfrm>
+            <a:off x="2743200" y="0"/>
+            <a:ext cx="16200" cy="6855840"/>
+          </a:xfrm>
+          <a:prstGeom prst="rect">
+            <a:avLst/>
+          </a:prstGeom>
+          <a:solidFill>
+            <a:srgbClr val="121216"/>
+          </a:solidFill>
+          <a:ln>
+            <a:noFill/>
+          </a:ln>
+          <a:effectLst>
+            <a:outerShdw blurRad="39960" dir="5400000" dist="23040" rotWithShape="0">
+              <a:srgbClr val="000000">
+                <a:alpha val="35000"/>
+              </a:srgbClr>
+            </a:outerShdw>
+          </a:effectLst>
+        </p:spPr>
+        <p:style>
+          <a:lnRef idx="1">
+            <a:schemeClr val="accent1"/>
+          </a:lnRef>
+          <a:fillRef idx="3">
+            <a:schemeClr val="accent1"/>
+          </a:fillRef>
+          <a:effectRef idx="2">
+            <a:schemeClr val="accent1"/>
+          </a:effectRef>
+          <a:fontRef idx="minor"/>
+        </p:style>
+        <p:txBody>
+          <a:bodyPr lIns="90000" rIns="90000" tIns="45000" bIns="45000" anchor="ctr">
+            <a:noAutofit/>
+          </a:bodyPr>
+          <a:p>
+            <a:endParaRPr b="0" lang="en-US" sz="1800" spc="-1" strike="noStrike">
+              <a:solidFill>
+                <a:schemeClr val="lt1"/>
+              </a:solidFill>
+              <a:latin typeface="Calibri"/>
+              <a:ea typeface="DejaVu Sans"/>
+            </a:endParaRPr>
+          </a:p>
+        </p:txBody>
+      </p:sp>
+      <p:sp>
+        <p:nvSpPr>
+          <p:cNvPr id="150" name="Rectangle 70"/>
+          <p:cNvSpPr/>
+          <p:nvPr/>
+        </p:nvSpPr>
+        <p:spPr>
+          <a:xfrm>
+            <a:off x="3657600" y="0"/>
+            <a:ext cx="16200" cy="6855840"/>
+          </a:xfrm>
+          <a:prstGeom prst="rect">
+            <a:avLst/>
+          </a:prstGeom>
+          <a:solidFill>
+            <a:srgbClr val="121216"/>
+          </a:solidFill>
+          <a:ln>
+            <a:noFill/>
+          </a:ln>
+          <a:effectLst>
+            <a:outerShdw blurRad="39960" dir="5400000" dist="23040" rotWithShape="0">
+              <a:srgbClr val="000000">
+                <a:alpha val="35000"/>
+              </a:srgbClr>
+            </a:outerShdw>
+          </a:effectLst>
+        </p:spPr>
+        <p:style>
+          <a:lnRef idx="1">
+            <a:schemeClr val="accent1"/>
+          </a:lnRef>
+          <a:fillRef idx="3">
+            <a:schemeClr val="accent1"/>
+          </a:fillRef>
+          <a:effectRef idx="2">
+            <a:schemeClr val="accent1"/>
+          </a:effectRef>
+          <a:fontRef idx="minor"/>
+        </p:style>
+        <p:txBody>
+          <a:bodyPr lIns="90000" rIns="90000" tIns="45000" bIns="45000" anchor="ctr">
+            <a:noAutofit/>
+          </a:bodyPr>
+          <a:p>
+            <a:endParaRPr b="0" lang="en-US" sz="1800" spc="-1" strike="noStrike">
+              <a:solidFill>
+                <a:schemeClr val="lt1"/>
+              </a:solidFill>
+              <a:latin typeface="Calibri"/>
+              <a:ea typeface="DejaVu Sans"/>
+            </a:endParaRPr>
+          </a:p>
+        </p:txBody>
+      </p:sp>
+      <p:sp>
+        <p:nvSpPr>
+          <p:cNvPr id="151" name="Rectangle 71"/>
+          <p:cNvSpPr/>
+          <p:nvPr/>
+        </p:nvSpPr>
+        <p:spPr>
+          <a:xfrm>
+            <a:off x="4572000" y="0"/>
+            <a:ext cx="16200" cy="6855840"/>
+          </a:xfrm>
+          <a:prstGeom prst="rect">
+            <a:avLst/>
+          </a:prstGeom>
+          <a:solidFill>
+            <a:srgbClr val="121216"/>
+          </a:solidFill>
+          <a:ln>
+            <a:noFill/>
+          </a:ln>
+          <a:effectLst>
+            <a:outerShdw blurRad="39960" dir="5400000" dist="23040" rotWithShape="0">
+              <a:srgbClr val="000000">
+                <a:alpha val="35000"/>
+              </a:srgbClr>
+            </a:outerShdw>
+          </a:effectLst>
+        </p:spPr>
+        <p:style>
+          <a:lnRef idx="1">
+            <a:schemeClr val="accent1"/>
+          </a:lnRef>
+          <a:fillRef idx="3">
+            <a:schemeClr val="accent1"/>
+          </a:fillRef>
+          <a:effectRef idx="2">
+            <a:schemeClr val="accent1"/>
+          </a:effectRef>
+          <a:fontRef idx="minor"/>
+        </p:style>
+        <p:txBody>
+          <a:bodyPr lIns="90000" rIns="90000" tIns="45000" bIns="45000" anchor="ctr">
+            <a:noAutofit/>
+          </a:bodyPr>
+          <a:p>
+            <a:endParaRPr b="0" lang="en-US" sz="1800" spc="-1" strike="noStrike">
+              <a:solidFill>
+                <a:schemeClr val="lt1"/>
+              </a:solidFill>
+              <a:latin typeface="Calibri"/>
+              <a:ea typeface="DejaVu Sans"/>
+            </a:endParaRPr>
+          </a:p>
+        </p:txBody>
+      </p:sp>
+      <p:sp>
+        <p:nvSpPr>
+          <p:cNvPr id="152" name="Rectangle 72"/>
+          <p:cNvSpPr/>
+          <p:nvPr/>
+        </p:nvSpPr>
+        <p:spPr>
+          <a:xfrm>
+            <a:off x="5486400" y="0"/>
+            <a:ext cx="16200" cy="6855840"/>
+          </a:xfrm>
+          <a:prstGeom prst="rect">
+            <a:avLst/>
+          </a:prstGeom>
+          <a:solidFill>
+            <a:srgbClr val="121216"/>
+          </a:solidFill>
+          <a:ln>
+            <a:noFill/>
+          </a:ln>
+          <a:effectLst>
+            <a:outerShdw blurRad="39960" dir="5400000" dist="23040" rotWithShape="0">
+              <a:srgbClr val="000000">
+                <a:alpha val="35000"/>
+              </a:srgbClr>
+            </a:outerShdw>
+          </a:effectLst>
+        </p:spPr>
+        <p:style>
+          <a:lnRef idx="1">
+            <a:schemeClr val="accent1"/>
+          </a:lnRef>
+          <a:fillRef idx="3">
+            <a:schemeClr val="accent1"/>
+          </a:fillRef>
+          <a:effectRef idx="2">
+            <a:schemeClr val="accent1"/>
+          </a:effectRef>
+          <a:fontRef idx="minor"/>
+        </p:style>
+        <p:txBody>
+          <a:bodyPr lIns="90000" rIns="90000" tIns="45000" bIns="45000" anchor="ctr">
+            <a:noAutofit/>
+          </a:bodyPr>
+          <a:p>
+            <a:endParaRPr b="0" lang="en-US" sz="1800" spc="-1" strike="noStrike">
+              <a:solidFill>
+                <a:schemeClr val="lt1"/>
+              </a:solidFill>
+              <a:latin typeface="Calibri"/>
+              <a:ea typeface="DejaVu Sans"/>
+            </a:endParaRPr>
+          </a:p>
+        </p:txBody>
+      </p:sp>
+      <p:sp>
+        <p:nvSpPr>
+          <p:cNvPr id="153" name="Rectangle 73"/>
+          <p:cNvSpPr/>
+          <p:nvPr/>
+        </p:nvSpPr>
+        <p:spPr>
+          <a:xfrm>
+            <a:off x="6400800" y="0"/>
+            <a:ext cx="16200" cy="6855840"/>
+          </a:xfrm>
+          <a:prstGeom prst="rect">
+            <a:avLst/>
+          </a:prstGeom>
+          <a:solidFill>
+            <a:srgbClr val="121216"/>
+          </a:solidFill>
+          <a:ln>
+            <a:noFill/>
+          </a:ln>
+          <a:effectLst>
+            <a:outerShdw blurRad="39960" dir="5400000" dist="23040" rotWithShape="0">
+              <a:srgbClr val="000000">
+                <a:alpha val="35000"/>
+              </a:srgbClr>
+            </a:outerShdw>
+          </a:effectLst>
+        </p:spPr>
+        <p:style>
+          <a:lnRef idx="1">
+            <a:schemeClr val="accent1"/>
+          </a:lnRef>
+          <a:fillRef idx="3">
+            <a:schemeClr val="accent1"/>
+          </a:fillRef>
+          <a:effectRef idx="2">
+            <a:schemeClr val="accent1"/>
+          </a:effectRef>
+          <a:fontRef idx="minor"/>
+        </p:style>
+        <p:txBody>
+          <a:bodyPr lIns="90000" rIns="90000" tIns="45000" bIns="45000" anchor="ctr">
+            <a:noAutofit/>
+          </a:bodyPr>
+          <a:p>
+            <a:endParaRPr b="0" lang="en-US" sz="1800" spc="-1" strike="noStrike">
+              <a:solidFill>
+                <a:schemeClr val="lt1"/>
+              </a:solidFill>
+              <a:latin typeface="Calibri"/>
+              <a:ea typeface="DejaVu Sans"/>
+            </a:endParaRPr>
+          </a:p>
+        </p:txBody>
+      </p:sp>
+      <p:sp>
+        <p:nvSpPr>
+          <p:cNvPr id="154" name="Rectangle 74"/>
+          <p:cNvSpPr/>
+          <p:nvPr/>
+        </p:nvSpPr>
+        <p:spPr>
+          <a:xfrm>
+            <a:off x="7315200" y="0"/>
+            <a:ext cx="16200" cy="6855840"/>
+          </a:xfrm>
+          <a:prstGeom prst="rect">
+            <a:avLst/>
+          </a:prstGeom>
+          <a:solidFill>
+            <a:srgbClr val="121216"/>
+          </a:solidFill>
+          <a:ln>
+            <a:noFill/>
+          </a:ln>
+          <a:effectLst>
+            <a:outerShdw blurRad="39960" dir="5400000" dist="23040" rotWithShape="0">
+              <a:srgbClr val="000000">
+                <a:alpha val="35000"/>
+              </a:srgbClr>
+            </a:outerShdw>
+          </a:effectLst>
+        </p:spPr>
+        <p:style>
+          <a:lnRef idx="1">
+            <a:schemeClr val="accent1"/>
+          </a:lnRef>
+          <a:fillRef idx="3">
+            <a:schemeClr val="accent1"/>
+          </a:fillRef>
+          <a:effectRef idx="2">
+            <a:schemeClr val="accent1"/>
+          </a:effectRef>
+          <a:fontRef idx="minor"/>
+        </p:style>
+        <p:txBody>
+          <a:bodyPr lIns="90000" rIns="90000" tIns="45000" bIns="45000" anchor="ctr">
+            <a:noAutofit/>
+          </a:bodyPr>
+          <a:p>
+            <a:endParaRPr b="0" lang="en-US" sz="1800" spc="-1" strike="noStrike">
+              <a:solidFill>
+                <a:schemeClr val="lt1"/>
+              </a:solidFill>
+              <a:latin typeface="Calibri"/>
+              <a:ea typeface="DejaVu Sans"/>
+            </a:endParaRPr>
+          </a:p>
+        </p:txBody>
+      </p:sp>
+      <p:sp>
+        <p:nvSpPr>
+          <p:cNvPr id="155" name="Rectangle 75"/>
+          <p:cNvSpPr/>
+          <p:nvPr/>
+        </p:nvSpPr>
+        <p:spPr>
+          <a:xfrm>
+            <a:off x="8229600" y="0"/>
+            <a:ext cx="16200" cy="6855840"/>
+          </a:xfrm>
+          <a:prstGeom prst="rect">
+            <a:avLst/>
+          </a:prstGeom>
+          <a:solidFill>
+            <a:srgbClr val="121216"/>
+          </a:solidFill>
+          <a:ln>
+            <a:noFill/>
+          </a:ln>
+          <a:effectLst>
+            <a:outerShdw blurRad="39960" dir="5400000" dist="23040" rotWithShape="0">
+              <a:srgbClr val="000000">
+                <a:alpha val="35000"/>
+              </a:srgbClr>
+            </a:outerShdw>
+          </a:effectLst>
+        </p:spPr>
+        <p:style>
+          <a:lnRef idx="1">
+            <a:schemeClr val="accent1"/>
+          </a:lnRef>
+          <a:fillRef idx="3">
+            <a:schemeClr val="accent1"/>
+          </a:fillRef>
+          <a:effectRef idx="2">
+            <a:schemeClr val="accent1"/>
+          </a:effectRef>
+          <a:fontRef idx="minor"/>
+        </p:style>
+        <p:txBody>
+          <a:bodyPr lIns="90000" rIns="90000" tIns="45000" bIns="45000" anchor="ctr">
+            <a:noAutofit/>
+          </a:bodyPr>
+          <a:p>
+            <a:endParaRPr b="0" lang="en-US" sz="1800" spc="-1" strike="noStrike">
+              <a:solidFill>
+                <a:schemeClr val="lt1"/>
+              </a:solidFill>
+              <a:latin typeface="Calibri"/>
+              <a:ea typeface="DejaVu Sans"/>
+            </a:endParaRPr>
+          </a:p>
+        </p:txBody>
+      </p:sp>
+      <p:sp>
+        <p:nvSpPr>
+          <p:cNvPr id="156" name="Rectangle 76"/>
+          <p:cNvSpPr/>
+          <p:nvPr/>
+        </p:nvSpPr>
+        <p:spPr>
+          <a:xfrm>
+            <a:off x="9144000" y="0"/>
+            <a:ext cx="16200" cy="6855840"/>
+          </a:xfrm>
+          <a:prstGeom prst="rect">
+            <a:avLst/>
+          </a:prstGeom>
+          <a:solidFill>
+            <a:srgbClr val="121216"/>
+          </a:solidFill>
+          <a:ln>
+            <a:noFill/>
+          </a:ln>
+          <a:effectLst>
+            <a:outerShdw blurRad="39960" dir="5400000" dist="23040" rotWithShape="0">
+              <a:srgbClr val="000000">
+                <a:alpha val="35000"/>
+              </a:srgbClr>
+            </a:outerShdw>
+          </a:effectLst>
+        </p:spPr>
+        <p:style>
+          <a:lnRef idx="1">
+            <a:schemeClr val="accent1"/>
+          </a:lnRef>
+          <a:fillRef idx="3">
+            <a:schemeClr val="accent1"/>
+          </a:fillRef>
+          <a:effectRef idx="2">
+            <a:schemeClr val="accent1"/>
+          </a:effectRef>
+          <a:fontRef idx="minor"/>
+        </p:style>
+        <p:txBody>
+          <a:bodyPr lIns="90000" rIns="90000" tIns="45000" bIns="45000" anchor="ctr">
+            <a:noAutofit/>
+          </a:bodyPr>
+          <a:p>
+            <a:endParaRPr b="0" lang="en-US" sz="1800" spc="-1" strike="noStrike">
+              <a:solidFill>
+                <a:schemeClr val="lt1"/>
+              </a:solidFill>
+              <a:latin typeface="Calibri"/>
+              <a:ea typeface="DejaVu Sans"/>
+            </a:endParaRPr>
+          </a:p>
+        </p:txBody>
+      </p:sp>
+      <p:sp>
+        <p:nvSpPr>
+          <p:cNvPr id="157" name="Rectangle 77"/>
+          <p:cNvSpPr/>
+          <p:nvPr/>
+        </p:nvSpPr>
+        <p:spPr>
+          <a:xfrm>
+            <a:off x="10058400" y="0"/>
+            <a:ext cx="16200" cy="6855840"/>
+          </a:xfrm>
+          <a:prstGeom prst="rect">
+            <a:avLst/>
+          </a:prstGeom>
+          <a:solidFill>
+            <a:srgbClr val="121216"/>
+          </a:solidFill>
+          <a:ln>
+            <a:noFill/>
+          </a:ln>
+          <a:effectLst>
+            <a:outerShdw blurRad="39960" dir="5400000" dist="23040" rotWithShape="0">
+              <a:srgbClr val="000000">
+                <a:alpha val="35000"/>
+              </a:srgbClr>
+            </a:outerShdw>
+          </a:effectLst>
+        </p:spPr>
+        <p:style>
+          <a:lnRef idx="1">
+            <a:schemeClr val="accent1"/>
+          </a:lnRef>
+          <a:fillRef idx="3">
+            <a:schemeClr val="accent1"/>
+          </a:fillRef>
+          <a:effectRef idx="2">
+            <a:schemeClr val="accent1"/>
+          </a:effectRef>
+          <a:fontRef idx="minor"/>
+        </p:style>
+        <p:txBody>
+          <a:bodyPr lIns="90000" rIns="90000" tIns="45000" bIns="45000" anchor="ctr">
+            <a:noAutofit/>
+          </a:bodyPr>
+          <a:p>
+            <a:endParaRPr b="0" lang="en-US" sz="1800" spc="-1" strike="noStrike">
+              <a:solidFill>
+                <a:schemeClr val="lt1"/>
+              </a:solidFill>
+              <a:latin typeface="Calibri"/>
+              <a:ea typeface="DejaVu Sans"/>
+            </a:endParaRPr>
+          </a:p>
+        </p:txBody>
+      </p:sp>
+      <p:sp>
+        <p:nvSpPr>
+          <p:cNvPr id="158" name="Rectangle 78"/>
+          <p:cNvSpPr/>
+          <p:nvPr/>
+        </p:nvSpPr>
+        <p:spPr>
+          <a:xfrm>
+            <a:off x="10972800" y="0"/>
+            <a:ext cx="16200" cy="6855840"/>
+          </a:xfrm>
+          <a:prstGeom prst="rect">
+            <a:avLst/>
+          </a:prstGeom>
+          <a:solidFill>
+            <a:srgbClr val="121216"/>
+          </a:solidFill>
+          <a:ln>
+            <a:noFill/>
+          </a:ln>
+          <a:effectLst>
+            <a:outerShdw blurRad="39960" dir="5400000" dist="23040" rotWithShape="0">
+              <a:srgbClr val="000000">
+                <a:alpha val="35000"/>
+              </a:srgbClr>
+            </a:outerShdw>
+          </a:effectLst>
+        </p:spPr>
+        <p:style>
+          <a:lnRef idx="1">
+            <a:schemeClr val="accent1"/>
+          </a:lnRef>
+          <a:fillRef idx="3">
+            <a:schemeClr val="accent1"/>
+          </a:fillRef>
+          <a:effectRef idx="2">
+            <a:schemeClr val="accent1"/>
+          </a:effectRef>
+          <a:fontRef idx="minor"/>
+        </p:style>
+        <p:txBody>
+          <a:bodyPr lIns="90000" rIns="90000" tIns="45000" bIns="45000" anchor="ctr">
+            <a:noAutofit/>
+          </a:bodyPr>
+          <a:p>
+            <a:endParaRPr b="0" lang="en-US" sz="1800" spc="-1" strike="noStrike">
+              <a:solidFill>
+                <a:schemeClr val="lt1"/>
+              </a:solidFill>
+              <a:latin typeface="Calibri"/>
+              <a:ea typeface="DejaVu Sans"/>
+            </a:endParaRPr>
+          </a:p>
+        </p:txBody>
+      </p:sp>
+      <p:sp>
+        <p:nvSpPr>
+          <p:cNvPr id="159" name="Rectangle 79"/>
+          <p:cNvSpPr/>
+          <p:nvPr/>
+        </p:nvSpPr>
+        <p:spPr>
+          <a:xfrm>
+            <a:off x="11887200" y="0"/>
+            <a:ext cx="16200" cy="6855840"/>
+          </a:xfrm>
+          <a:prstGeom prst="rect">
+            <a:avLst/>
+          </a:prstGeom>
+          <a:solidFill>
+            <a:srgbClr val="121216"/>
+          </a:solidFill>
+          <a:ln>
+            <a:noFill/>
+          </a:ln>
+          <a:effectLst>
+            <a:outerShdw blurRad="39960" dir="5400000" dist="23040" rotWithShape="0">
+              <a:srgbClr val="000000">
+                <a:alpha val="35000"/>
+              </a:srgbClr>
+            </a:outerShdw>
+          </a:effectLst>
+        </p:spPr>
+        <p:style>
+          <a:lnRef idx="1">
+            <a:schemeClr val="accent1"/>
+          </a:lnRef>
+          <a:fillRef idx="3">
+            <a:schemeClr val="accent1"/>
+          </a:fillRef>
+          <a:effectRef idx="2">
+            <a:schemeClr val="accent1"/>
+          </a:effectRef>
+          <a:fontRef idx="minor"/>
+        </p:style>
+        <p:txBody>
+          <a:bodyPr lIns="90000" rIns="90000" tIns="45000" bIns="45000" anchor="ctr">
+            <a:noAutofit/>
+          </a:bodyPr>
+          <a:p>
+            <a:endParaRPr b="0" lang="en-US" sz="1800" spc="-1" strike="noStrike">
+              <a:solidFill>
+                <a:schemeClr val="lt1"/>
+              </a:solidFill>
+              <a:latin typeface="Calibri"/>
+              <a:ea typeface="DejaVu Sans"/>
+            </a:endParaRPr>
+          </a:p>
+        </p:txBody>
+      </p:sp>
+      <p:sp>
+        <p:nvSpPr>
+          <p:cNvPr id="160" name="Rectangle 80"/>
+          <p:cNvSpPr/>
+          <p:nvPr/>
+        </p:nvSpPr>
+        <p:spPr>
+          <a:xfrm>
+            <a:off x="0" y="0"/>
+            <a:ext cx="317880" cy="6855840"/>
+          </a:xfrm>
+          <a:prstGeom prst="rect">
+            <a:avLst/>
+          </a:prstGeom>
+          <a:solidFill>
+            <a:srgbClr val="ff8c00"/>
+          </a:solidFill>
+          <a:ln>
+            <a:noFill/>
+          </a:ln>
+          <a:effectLst>
+            <a:outerShdw blurRad="39960" dir="5400000" dist="23040" rotWithShape="0">
+              <a:srgbClr val="000000">
+                <a:alpha val="35000"/>
+              </a:srgbClr>
+            </a:outerShdw>
+          </a:effectLst>
+        </p:spPr>
+        <p:style>
+          <a:lnRef idx="1">
+            <a:schemeClr val="accent1"/>
+          </a:lnRef>
+          <a:fillRef idx="3">
+            <a:schemeClr val="accent1"/>
+          </a:fillRef>
+          <a:effectRef idx="2">
+            <a:schemeClr val="accent1"/>
+          </a:effectRef>
+          <a:fontRef idx="minor"/>
+        </p:style>
+        <p:txBody>
+          <a:bodyPr lIns="90000" rIns="90000" tIns="45000" bIns="45000" anchor="ctr">
+            <a:noAutofit/>
+          </a:bodyPr>
+          <a:p>
+            <a:endParaRPr b="0" lang="en-US" sz="1800" spc="-1" strike="noStrike">
+              <a:solidFill>
+                <a:schemeClr val="lt1"/>
+              </a:solidFill>
+              <a:latin typeface="Calibri"/>
+              <a:ea typeface="DejaVu Sans"/>
+            </a:endParaRPr>
+          </a:p>
+        </p:txBody>
+      </p:sp>
+      <p:sp>
+        <p:nvSpPr>
+          <p:cNvPr id="161" name="Rounded Rectangle 36"/>
+          <p:cNvSpPr/>
+          <p:nvPr/>
+        </p:nvSpPr>
+        <p:spPr>
+          <a:xfrm>
+            <a:off x="9875520" y="365760"/>
+            <a:ext cx="2009520" cy="500760"/>
+          </a:xfrm>
+          <a:prstGeom prst="roundRect">
+            <a:avLst>
+              <a:gd name="adj" fmla="val 16667"/>
+            </a:avLst>
+          </a:prstGeom>
+          <a:solidFill>
+            <a:srgbClr val="1e1e24"/>
+          </a:solidFill>
+          <a:ln>
+            <a:solidFill>
+              <a:srgbClr val="ff8c00"/>
+            </a:solidFill>
+            <a:round/>
+          </a:ln>
+          <a:effectLst>
+            <a:outerShdw blurRad="39960" dir="5400000" dist="23040" rotWithShape="0">
+              <a:srgbClr val="000000">
+                <a:alpha val="35000"/>
+              </a:srgbClr>
+            </a:outerShdw>
+          </a:effectLst>
+        </p:spPr>
+        <p:style>
+          <a:lnRef idx="1">
+            <a:schemeClr val="accent1"/>
+          </a:lnRef>
+          <a:fillRef idx="3">
+            <a:schemeClr val="accent1"/>
+          </a:fillRef>
+          <a:effectRef idx="2">
+            <a:schemeClr val="accent1"/>
+          </a:effectRef>
+          <a:fontRef idx="minor"/>
+        </p:style>
+        <p:txBody>
+          <a:bodyPr lIns="90000" rIns="90000" tIns="45000" bIns="45000" anchor="ctr">
+            <a:noAutofit/>
+          </a:bodyPr>
+          <a:p>
+            <a:pPr algn="ctr">
+              <a:lnSpc>
+                <a:spcPct val="100000"/>
+              </a:lnSpc>
+            </a:pPr>
+            <a:r>
+              <a:rPr b="1" lang="en-US" sz="1400" spc="-1" strike="noStrike">
+                <a:solidFill>
+                  <a:srgbClr val="ffb45a"/>
+                </a:solidFill>
+                <a:latin typeface="Calibri"/>
+                <a:ea typeface="DejaVu Sans"/>
+              </a:rPr>
+              <a:t>JAVA TEMELLERI</a:t>
+            </a:r>
+            <a:endParaRPr b="0" lang="en-US" sz="1400" spc="-1" strike="noStrike">
+              <a:solidFill>
+                <a:srgbClr val="ffffff"/>
+              </a:solidFill>
+              <a:latin typeface="Arial"/>
+            </a:endParaRPr>
+          </a:p>
+        </p:txBody>
+      </p:sp>
+      <p:sp>
+        <p:nvSpPr>
+          <p:cNvPr id="162" name="TextBox 13"/>
+          <p:cNvSpPr/>
+          <p:nvPr/>
+        </p:nvSpPr>
+        <p:spPr>
+          <a:xfrm>
+            <a:off x="2099160" y="914400"/>
+            <a:ext cx="6772320" cy="638280"/>
+          </a:xfrm>
+          <a:prstGeom prst="rect">
+            <a:avLst/>
+          </a:prstGeom>
+          <a:noFill/>
+          <a:ln w="0">
+            <a:noFill/>
+          </a:ln>
+        </p:spPr>
+        <p:style>
+          <a:lnRef idx="0"/>
+          <a:fillRef idx="0"/>
+          <a:effectRef idx="0"/>
+          <a:fontRef idx="minor"/>
+        </p:style>
+        <p:txBody>
+          <a:bodyPr wrap="none" lIns="90000" rIns="90000" tIns="45000" bIns="45000" anchor="t">
+            <a:spAutoFit/>
+          </a:bodyPr>
+          <a:p>
+            <a:pPr>
+              <a:lnSpc>
+                <a:spcPct val="100000"/>
+              </a:lnSpc>
+            </a:pPr>
+            <a:r>
+              <a:rPr b="1" lang="en-US" sz="3600" spc="-1" strike="noStrike">
+                <a:solidFill>
+                  <a:srgbClr val="f5f5f5"/>
+                </a:solidFill>
+                <a:latin typeface="Calibri"/>
+                <a:ea typeface="DejaVu Sans"/>
+              </a:rPr>
+              <a:t>Java’da Tarih ve Saat Parsing İşlemi</a:t>
+            </a:r>
+            <a:endParaRPr b="0" lang="en-US" sz="3600" spc="-1" strike="noStrike">
+              <a:solidFill>
+                <a:srgbClr val="000000"/>
+              </a:solidFill>
+              <a:latin typeface="Arial"/>
+            </a:endParaRPr>
+          </a:p>
+        </p:txBody>
+      </p:sp>
+      <p:sp>
+        <p:nvSpPr>
+          <p:cNvPr id="163" name="TextBox 14"/>
+          <p:cNvSpPr/>
+          <p:nvPr/>
+        </p:nvSpPr>
+        <p:spPr>
+          <a:xfrm>
+            <a:off x="1196640" y="1828800"/>
+            <a:ext cx="9095040" cy="576360"/>
+          </a:xfrm>
+          <a:prstGeom prst="rect">
+            <a:avLst/>
+          </a:prstGeom>
+          <a:noFill/>
+          <a:ln w="0">
+            <a:noFill/>
+          </a:ln>
+        </p:spPr>
+        <p:style>
+          <a:lnRef idx="0"/>
+          <a:fillRef idx="0"/>
+          <a:effectRef idx="0"/>
+          <a:fontRef idx="minor"/>
+        </p:style>
+        <p:txBody>
+          <a:bodyPr wrap="none" lIns="90000" rIns="90000" tIns="45000" bIns="45000" anchor="t">
+            <a:spAutoFit/>
+          </a:bodyPr>
+          <a:p>
+            <a:pPr>
+              <a:lnSpc>
+                <a:spcPct val="100000"/>
+              </a:lnSpc>
+            </a:pPr>
+            <a:r>
+              <a:rPr b="0" lang="en-US" sz="1600" spc="-1" strike="noStrike">
+                <a:solidFill>
+                  <a:srgbClr val="aaaaaa"/>
+                </a:solidFill>
+                <a:latin typeface="Calibri"/>
+                <a:ea typeface="DejaVu Sans"/>
+              </a:rPr>
+              <a:t>Java’da parsing, metin (String) formatındaki tarih değerlerini uygulama içinde kullanılabilecek yapılandırılmış </a:t>
+            </a:r>
+            <a:endParaRPr b="0" lang="en-US" sz="1600" spc="-1" strike="noStrike">
+              <a:solidFill>
+                <a:srgbClr val="000000"/>
+              </a:solidFill>
+              <a:latin typeface="Arial"/>
+            </a:endParaRPr>
+          </a:p>
+          <a:p>
+            <a:pPr>
+              <a:lnSpc>
+                <a:spcPct val="100000"/>
+              </a:lnSpc>
+            </a:pPr>
+            <a:r>
+              <a:rPr b="0" lang="en-US" sz="1600" spc="-1" strike="noStrike">
+                <a:solidFill>
+                  <a:srgbClr val="aaaaaa"/>
+                </a:solidFill>
+                <a:latin typeface="Calibri"/>
+                <a:ea typeface="DejaVu Sans"/>
+              </a:rPr>
+              <a:t>tarih-saat nesnelerine dönüştürme işlemidir.</a:t>
+            </a:r>
+            <a:endParaRPr b="0" lang="en-US" sz="1600" spc="-1" strike="noStrike">
+              <a:solidFill>
+                <a:srgbClr val="000000"/>
+              </a:solidFill>
+              <a:latin typeface="Arial"/>
+            </a:endParaRPr>
+          </a:p>
+        </p:txBody>
+      </p:sp>
+      <p:sp>
+        <p:nvSpPr>
+          <p:cNvPr id="164" name="Rounded Rectangle 37"/>
+          <p:cNvSpPr/>
+          <p:nvPr/>
+        </p:nvSpPr>
+        <p:spPr>
+          <a:xfrm>
+            <a:off x="987480" y="3182040"/>
+            <a:ext cx="3289680" cy="2741040"/>
+          </a:xfrm>
+          <a:prstGeom prst="roundRect">
+            <a:avLst>
+              <a:gd name="adj" fmla="val 16667"/>
+            </a:avLst>
+          </a:prstGeom>
+          <a:solidFill>
+            <a:srgbClr val="08080a"/>
+          </a:solidFill>
+          <a:ln>
+            <a:noFill/>
+          </a:ln>
+          <a:effectLst>
+            <a:outerShdw blurRad="39960" dir="5400000" dist="23040" rotWithShape="0">
+              <a:srgbClr val="000000">
+                <a:alpha val="35000"/>
+              </a:srgbClr>
+            </a:outerShdw>
+          </a:effectLst>
+        </p:spPr>
+        <p:style>
+          <a:lnRef idx="1">
+            <a:schemeClr val="accent1"/>
+          </a:lnRef>
+          <a:fillRef idx="3">
+            <a:schemeClr val="accent1"/>
+          </a:fillRef>
+          <a:effectRef idx="2">
+            <a:schemeClr val="accent1"/>
+          </a:effectRef>
+          <a:fontRef idx="minor"/>
+        </p:style>
+        <p:txBody>
+          <a:bodyPr lIns="90000" rIns="90000" tIns="45000" bIns="45000" anchor="ctr">
+            <a:noAutofit/>
+          </a:bodyPr>
+          <a:p>
+            <a:endParaRPr b="0" lang="en-US" sz="1800" spc="-1" strike="noStrike">
+              <a:solidFill>
+                <a:schemeClr val="lt1"/>
+              </a:solidFill>
+              <a:latin typeface="Calibri"/>
+              <a:ea typeface="DejaVu Sans"/>
+            </a:endParaRPr>
+          </a:p>
+        </p:txBody>
+      </p:sp>
+      <p:sp>
+        <p:nvSpPr>
+          <p:cNvPr id="165" name="Rounded Rectangle 38"/>
+          <p:cNvSpPr/>
+          <p:nvPr/>
+        </p:nvSpPr>
+        <p:spPr>
+          <a:xfrm>
+            <a:off x="457200" y="2514600"/>
+            <a:ext cx="3746880" cy="4114800"/>
+          </a:xfrm>
+          <a:prstGeom prst="roundRect">
+            <a:avLst>
+              <a:gd name="adj" fmla="val 16667"/>
+            </a:avLst>
+          </a:prstGeom>
+          <a:solidFill>
+            <a:srgbClr val="16161c"/>
+          </a:solidFill>
+          <a:ln>
+            <a:solidFill>
+              <a:srgbClr val="464655"/>
+            </a:solidFill>
+            <a:round/>
+          </a:ln>
+          <a:effectLst>
+            <a:outerShdw blurRad="39960" dir="5400000" dist="23040" rotWithShape="0">
+              <a:srgbClr val="000000">
+                <a:alpha val="35000"/>
+              </a:srgbClr>
+            </a:outerShdw>
+          </a:effectLst>
+        </p:spPr>
+        <p:style>
+          <a:lnRef idx="1">
+            <a:schemeClr val="accent1"/>
+          </a:lnRef>
+          <a:fillRef idx="3">
+            <a:schemeClr val="accent1"/>
+          </a:fillRef>
+          <a:effectRef idx="2">
+            <a:schemeClr val="accent1"/>
+          </a:effectRef>
+          <a:fontRef idx="minor"/>
+        </p:style>
+        <p:txBody>
+          <a:bodyPr lIns="90000" rIns="90000" tIns="45000" bIns="45000" anchor="ctr">
+            <a:noAutofit/>
+          </a:bodyPr>
+          <a:p>
+            <a:pPr>
+              <a:lnSpc>
+                <a:spcPct val="100000"/>
+              </a:lnSpc>
+            </a:pPr>
+            <a:r>
+              <a:rPr b="1" lang="en-US" sz="1800" spc="-1" strike="noStrike">
+                <a:solidFill>
+                  <a:schemeClr val="lt1"/>
+                </a:solidFill>
+                <a:latin typeface="Calibri"/>
+                <a:ea typeface="DejaVu Sans"/>
+              </a:rPr>
+              <a:t>Tarihler genellikle düz metin olarak gelir.</a:t>
+            </a:r>
+            <a:endParaRPr b="0" lang="en-US" sz="1800" spc="-1" strike="noStrike">
+              <a:solidFill>
+                <a:srgbClr val="ffffff"/>
+              </a:solidFill>
+              <a:latin typeface="Arial"/>
+            </a:endParaRPr>
+          </a:p>
+          <a:p>
+            <a:pPr>
+              <a:lnSpc>
+                <a:spcPct val="100000"/>
+              </a:lnSpc>
+            </a:pPr>
+            <a:r>
+              <a:rPr b="1" lang="en-US" sz="1800" spc="-1" strike="noStrike">
+                <a:solidFill>
+                  <a:schemeClr val="lt1"/>
+                </a:solidFill>
+                <a:latin typeface="Calibri"/>
+                <a:ea typeface="DejaVu Sans"/>
+              </a:rPr>
+              <a:t>Metinler üzerinde hesaplama veya karşılaştırma yapılamaz.</a:t>
+            </a:r>
+            <a:endParaRPr b="0" lang="en-US" sz="1800" spc="-1" strike="noStrike">
+              <a:solidFill>
+                <a:srgbClr val="ffffff"/>
+              </a:solidFill>
+              <a:latin typeface="Arial"/>
+            </a:endParaRPr>
+          </a:p>
+          <a:p>
+            <a:pPr>
+              <a:lnSpc>
+                <a:spcPct val="100000"/>
+              </a:lnSpc>
+            </a:pPr>
+            <a:r>
+              <a:rPr b="1" lang="en-US" sz="1800" spc="-1" strike="noStrike">
+                <a:solidFill>
+                  <a:schemeClr val="lt1"/>
+                </a:solidFill>
+                <a:latin typeface="Calibri"/>
+                <a:ea typeface="DejaVu Sans"/>
+              </a:rPr>
+              <a:t>Bu yüzden gerçek bir tarih nesnesine dönüştürülmelidir.</a:t>
+            </a:r>
+            <a:endParaRPr b="0" lang="en-US" sz="1800" spc="-1" strike="noStrike">
+              <a:solidFill>
+                <a:srgbClr val="ffffff"/>
+              </a:solidFill>
+              <a:latin typeface="Arial"/>
+            </a:endParaRPr>
+          </a:p>
+          <a:p>
+            <a:pPr>
+              <a:lnSpc>
+                <a:spcPct val="100000"/>
+              </a:lnSpc>
+            </a:pPr>
+            <a:endParaRPr b="0" lang="en-US" sz="1800" spc="-1" strike="noStrike">
+              <a:solidFill>
+                <a:srgbClr val="ffffff"/>
+              </a:solidFill>
+              <a:latin typeface="Arial"/>
+            </a:endParaRPr>
+          </a:p>
+          <a:p>
+            <a:pPr>
+              <a:lnSpc>
+                <a:spcPct val="100000"/>
+              </a:lnSpc>
+            </a:pPr>
+            <a:r>
+              <a:rPr b="0" lang="en-US" sz="1800" spc="-1" strike="noStrike">
+                <a:solidFill>
+                  <a:schemeClr val="lt1"/>
+                </a:solidFill>
+                <a:latin typeface="Calibri"/>
+                <a:ea typeface="DejaVu Sans"/>
+              </a:rPr>
+              <a:t>Bir pattern, metnin nasıl okunacağını belirler.</a:t>
+            </a:r>
+            <a:endParaRPr b="0" lang="en-US" sz="1800" spc="-1" strike="noStrike">
+              <a:solidFill>
+                <a:srgbClr val="ffffff"/>
+              </a:solidFill>
+              <a:latin typeface="Arial"/>
+            </a:endParaRPr>
+          </a:p>
+          <a:p>
+            <a:pPr>
+              <a:lnSpc>
+                <a:spcPct val="100000"/>
+              </a:lnSpc>
+            </a:pPr>
+            <a:r>
+              <a:rPr b="0" lang="en-US" sz="1800" spc="-1" strike="noStrike">
+                <a:solidFill>
+                  <a:schemeClr val="lt1"/>
+                </a:solidFill>
+                <a:latin typeface="Calibri"/>
+                <a:ea typeface="DejaVu Sans"/>
+              </a:rPr>
+              <a:t>Formatter bu kurala sıkı sıkıya bağlı kalır.</a:t>
+            </a:r>
+            <a:endParaRPr b="0" lang="en-US" sz="1800" spc="-1" strike="noStrike">
+              <a:solidFill>
+                <a:srgbClr val="ffffff"/>
+              </a:solidFill>
+              <a:latin typeface="Arial"/>
+            </a:endParaRPr>
+          </a:p>
+          <a:p>
+            <a:pPr>
+              <a:lnSpc>
+                <a:spcPct val="100000"/>
+              </a:lnSpc>
+            </a:pPr>
+            <a:endParaRPr b="0" lang="en-US" sz="1800" spc="-1" strike="noStrike">
+              <a:solidFill>
+                <a:srgbClr val="ffffff"/>
+              </a:solidFill>
+              <a:latin typeface="Arial"/>
+            </a:endParaRPr>
+          </a:p>
+          <a:p>
+            <a:pPr>
+              <a:lnSpc>
+                <a:spcPct val="100000"/>
+              </a:lnSpc>
+            </a:pPr>
+            <a:r>
+              <a:rPr b="0" lang="en-US" sz="1800" spc="-1" strike="noStrike">
+                <a:solidFill>
+                  <a:schemeClr val="lt1"/>
+                </a:solidFill>
+                <a:latin typeface="Calibri"/>
+                <a:ea typeface="DejaVu Sans"/>
+              </a:rPr>
+              <a:t>Format eşleşirse dönüşüm başarılı olur.</a:t>
+            </a:r>
+            <a:endParaRPr b="0" lang="en-US" sz="1800" spc="-1" strike="noStrike">
+              <a:solidFill>
+                <a:srgbClr val="ffffff"/>
+              </a:solidFill>
+              <a:latin typeface="Arial"/>
+            </a:endParaRPr>
+          </a:p>
+          <a:p>
+            <a:pPr>
+              <a:lnSpc>
+                <a:spcPct val="100000"/>
+              </a:lnSpc>
+            </a:pPr>
+            <a:r>
+              <a:rPr b="0" lang="en-US" sz="1800" spc="-1" strike="noStrike">
+                <a:solidFill>
+                  <a:schemeClr val="lt1"/>
+                </a:solidFill>
+                <a:latin typeface="Calibri"/>
+                <a:ea typeface="DejaVu Sans"/>
+              </a:rPr>
+              <a:t>Eşleşmezse hata oluşur.</a:t>
+            </a:r>
+            <a:endParaRPr b="0" lang="en-US" sz="1800" spc="-1" strike="noStrike">
+              <a:solidFill>
+                <a:srgbClr val="ffffff"/>
+              </a:solidFill>
+              <a:latin typeface="Arial"/>
+            </a:endParaRPr>
+          </a:p>
+        </p:txBody>
+      </p:sp>
+      <p:sp>
+        <p:nvSpPr>
+          <p:cNvPr id="166" name="Rounded Rectangle 39"/>
+          <p:cNvSpPr/>
+          <p:nvPr/>
+        </p:nvSpPr>
+        <p:spPr>
+          <a:xfrm>
+            <a:off x="4507920" y="3182040"/>
+            <a:ext cx="3289680" cy="2741040"/>
+          </a:xfrm>
+          <a:prstGeom prst="roundRect">
+            <a:avLst>
+              <a:gd name="adj" fmla="val 16667"/>
+            </a:avLst>
+          </a:prstGeom>
+          <a:solidFill>
+            <a:srgbClr val="08080a"/>
+          </a:solidFill>
+          <a:ln>
+            <a:noFill/>
+          </a:ln>
+          <a:effectLst>
+            <a:outerShdw blurRad="39960" dir="5400000" dist="23040" rotWithShape="0">
+              <a:srgbClr val="000000">
+                <a:alpha val="35000"/>
+              </a:srgbClr>
+            </a:outerShdw>
+          </a:effectLst>
+        </p:spPr>
+        <p:style>
+          <a:lnRef idx="1">
+            <a:schemeClr val="accent1"/>
+          </a:lnRef>
+          <a:fillRef idx="3">
+            <a:schemeClr val="accent1"/>
+          </a:fillRef>
+          <a:effectRef idx="2">
+            <a:schemeClr val="accent1"/>
+          </a:effectRef>
+          <a:fontRef idx="minor"/>
+        </p:style>
+        <p:txBody>
+          <a:bodyPr lIns="90000" rIns="90000" tIns="45000" bIns="45000" anchor="ctr">
+            <a:noAutofit/>
+          </a:bodyPr>
+          <a:p>
+            <a:endParaRPr b="0" lang="en-US" sz="1800" spc="-1" strike="noStrike">
+              <a:solidFill>
+                <a:schemeClr val="lt1"/>
+              </a:solidFill>
+              <a:latin typeface="Calibri"/>
+              <a:ea typeface="DejaVu Sans"/>
+            </a:endParaRPr>
+          </a:p>
+        </p:txBody>
+      </p:sp>
+      <p:sp>
+        <p:nvSpPr>
+          <p:cNvPr id="167" name="Rounded Rectangle 40"/>
+          <p:cNvSpPr/>
+          <p:nvPr/>
+        </p:nvSpPr>
+        <p:spPr>
+          <a:xfrm>
+            <a:off x="4434840" y="2971800"/>
+            <a:ext cx="3289680" cy="3427920"/>
+          </a:xfrm>
+          <a:prstGeom prst="roundRect">
+            <a:avLst>
+              <a:gd name="adj" fmla="val 16667"/>
+            </a:avLst>
+          </a:prstGeom>
+          <a:solidFill>
+            <a:srgbClr val="16161c"/>
+          </a:solidFill>
+          <a:ln>
+            <a:solidFill>
+              <a:srgbClr val="464655"/>
+            </a:solidFill>
+            <a:round/>
+          </a:ln>
+          <a:effectLst>
+            <a:outerShdw blurRad="39960" dir="5400000" dist="23040" rotWithShape="0">
+              <a:srgbClr val="000000">
+                <a:alpha val="35000"/>
+              </a:srgbClr>
+            </a:outerShdw>
+          </a:effectLst>
+        </p:spPr>
+        <p:style>
+          <a:lnRef idx="1">
+            <a:schemeClr val="accent1"/>
+          </a:lnRef>
+          <a:fillRef idx="3">
+            <a:schemeClr val="accent1"/>
+          </a:fillRef>
+          <a:effectRef idx="2">
+            <a:schemeClr val="accent1"/>
+          </a:effectRef>
+          <a:fontRef idx="minor"/>
+        </p:style>
+        <p:txBody>
+          <a:bodyPr lIns="90000" rIns="90000" tIns="45000" bIns="45000" anchor="ctr">
+            <a:noAutofit/>
+          </a:bodyPr>
+          <a:p>
+            <a:pPr marL="216000" indent="-216000">
+              <a:lnSpc>
+                <a:spcPct val="100000"/>
+              </a:lnSpc>
+              <a:buClr>
+                <a:srgbClr val="ffffff"/>
+              </a:buClr>
+              <a:buFont typeface="Wingdings" charset="2"/>
+              <a:buChar char=""/>
+            </a:pPr>
+            <a:r>
+              <a:rPr b="0" lang="en-US" sz="1800" spc="-1" strike="noStrike">
+                <a:solidFill>
+                  <a:schemeClr val="lt1"/>
+                </a:solidFill>
+                <a:latin typeface="Calibri"/>
+                <a:ea typeface="DejaVu Sans"/>
+              </a:rPr>
+              <a:t>Ham metin veri sisteme girer</a:t>
+            </a:r>
+            <a:endParaRPr b="0" lang="en-US" sz="1800" spc="-1" strike="noStrike">
+              <a:solidFill>
+                <a:srgbClr val="ffffff"/>
+              </a:solidFill>
+              <a:latin typeface="Arial"/>
+            </a:endParaRPr>
+          </a:p>
+          <a:p>
+            <a:pPr marL="216000" indent="-216000">
+              <a:lnSpc>
+                <a:spcPct val="100000"/>
+              </a:lnSpc>
+              <a:buClr>
+                <a:srgbClr val="ffffff"/>
+              </a:buClr>
+              <a:buFont typeface="Wingdings" charset="2"/>
+              <a:buChar char=""/>
+            </a:pPr>
+            <a:r>
+              <a:rPr b="0" lang="en-US" sz="1800" spc="-1" strike="noStrike">
+                <a:solidFill>
+                  <a:schemeClr val="lt1"/>
+                </a:solidFill>
+                <a:latin typeface="Calibri"/>
+                <a:ea typeface="DejaVu Sans"/>
+              </a:rPr>
+              <a:t>Sistem beklenen tarih yapısını belirler</a:t>
+            </a:r>
+            <a:endParaRPr b="0" lang="en-US" sz="1800" spc="-1" strike="noStrike">
+              <a:solidFill>
+                <a:srgbClr val="ffffff"/>
+              </a:solidFill>
+              <a:latin typeface="Arial"/>
+            </a:endParaRPr>
+          </a:p>
+          <a:p>
+            <a:pPr marL="216000" indent="-216000">
+              <a:lnSpc>
+                <a:spcPct val="100000"/>
+              </a:lnSpc>
+              <a:buClr>
+                <a:srgbClr val="ffffff"/>
+              </a:buClr>
+              <a:buFont typeface="Wingdings" charset="2"/>
+              <a:buChar char=""/>
+            </a:pPr>
+            <a:r>
+              <a:rPr b="0" lang="en-US" sz="1800" spc="-1" strike="noStrike">
+                <a:solidFill>
+                  <a:schemeClr val="lt1"/>
+                </a:solidFill>
+                <a:latin typeface="Calibri"/>
+                <a:ea typeface="DejaVu Sans"/>
+              </a:rPr>
+              <a:t>Bir dönüşüm kuralı (pattern) hazırlanır</a:t>
+            </a:r>
+            <a:endParaRPr b="0" lang="en-US" sz="1800" spc="-1" strike="noStrike">
+              <a:solidFill>
+                <a:srgbClr val="ffffff"/>
+              </a:solidFill>
+              <a:latin typeface="Arial"/>
+            </a:endParaRPr>
+          </a:p>
+          <a:p>
+            <a:pPr marL="216000" indent="-216000">
+              <a:lnSpc>
+                <a:spcPct val="100000"/>
+              </a:lnSpc>
+              <a:buClr>
+                <a:srgbClr val="ffffff"/>
+              </a:buClr>
+              <a:buFont typeface="Wingdings" charset="2"/>
+              <a:buChar char=""/>
+            </a:pPr>
+            <a:r>
+              <a:rPr b="0" lang="en-US" sz="1800" spc="-1" strike="noStrike">
+                <a:solidFill>
+                  <a:schemeClr val="lt1"/>
+                </a:solidFill>
+                <a:latin typeface="Calibri"/>
+                <a:ea typeface="DejaVu Sans"/>
+              </a:rPr>
+              <a:t>Metin bu kurala göre yorumlanır</a:t>
+            </a:r>
+            <a:endParaRPr b="0" lang="en-US" sz="1800" spc="-1" strike="noStrike">
+              <a:solidFill>
+                <a:srgbClr val="ffffff"/>
+              </a:solidFill>
+              <a:latin typeface="Arial"/>
+            </a:endParaRPr>
+          </a:p>
+          <a:p>
+            <a:pPr marL="216000" indent="-216000">
+              <a:lnSpc>
+                <a:spcPct val="100000"/>
+              </a:lnSpc>
+              <a:buClr>
+                <a:srgbClr val="ffffff"/>
+              </a:buClr>
+              <a:buFont typeface="Wingdings" charset="2"/>
+              <a:buChar char=""/>
+            </a:pPr>
+            <a:r>
+              <a:rPr b="0" lang="en-US" sz="1800" spc="-1" strike="noStrike">
+                <a:solidFill>
+                  <a:schemeClr val="lt1"/>
+                </a:solidFill>
+                <a:latin typeface="Calibri"/>
+                <a:ea typeface="DejaVu Sans"/>
+              </a:rPr>
+              <a:t>Geçerli bir tarih-saat nesnesi oluşturulur</a:t>
+            </a:r>
+            <a:endParaRPr b="0" lang="en-US" sz="1800" spc="-1" strike="noStrike">
+              <a:solidFill>
+                <a:srgbClr val="ffffff"/>
+              </a:solidFill>
+              <a:latin typeface="Arial"/>
+            </a:endParaRPr>
+          </a:p>
+          <a:p>
+            <a:pPr marL="216000" indent="-216000">
+              <a:lnSpc>
+                <a:spcPct val="100000"/>
+              </a:lnSpc>
+              <a:buClr>
+                <a:srgbClr val="ffffff"/>
+              </a:buClr>
+              <a:buFont typeface="Wingdings" charset="2"/>
+              <a:buChar char=""/>
+            </a:pPr>
+            <a:r>
+              <a:rPr b="0" lang="en-US" sz="1800" spc="-1" strike="noStrike">
+                <a:solidFill>
+                  <a:schemeClr val="lt1"/>
+                </a:solidFill>
+                <a:latin typeface="Calibri"/>
+                <a:ea typeface="DejaVu Sans"/>
+              </a:rPr>
+              <a:t>Nesne işlemler için kullanılabilir hale gelir</a:t>
+            </a:r>
+            <a:endParaRPr b="0" lang="en-US" sz="1800" spc="-1" strike="noStrike">
+              <a:solidFill>
+                <a:srgbClr val="ffffff"/>
+              </a:solidFill>
+              <a:latin typeface="Arial"/>
+            </a:endParaRPr>
+          </a:p>
+        </p:txBody>
+      </p:sp>
+      <p:sp>
+        <p:nvSpPr>
+          <p:cNvPr id="168" name="Rounded Rectangle 41"/>
+          <p:cNvSpPr/>
+          <p:nvPr/>
+        </p:nvSpPr>
+        <p:spPr>
+          <a:xfrm>
+            <a:off x="8028360" y="3182040"/>
+            <a:ext cx="3289680" cy="2741040"/>
+          </a:xfrm>
+          <a:prstGeom prst="roundRect">
+            <a:avLst>
+              <a:gd name="adj" fmla="val 16667"/>
+            </a:avLst>
+          </a:prstGeom>
+          <a:solidFill>
+            <a:srgbClr val="08080a"/>
+          </a:solidFill>
+          <a:ln>
+            <a:noFill/>
+          </a:ln>
+          <a:effectLst>
+            <a:outerShdw blurRad="39960" dir="5400000" dist="23040" rotWithShape="0">
+              <a:srgbClr val="000000">
+                <a:alpha val="35000"/>
+              </a:srgbClr>
+            </a:outerShdw>
+          </a:effectLst>
+        </p:spPr>
+        <p:style>
+          <a:lnRef idx="1">
+            <a:schemeClr val="accent1"/>
+          </a:lnRef>
+          <a:fillRef idx="3">
+            <a:schemeClr val="accent1"/>
+          </a:fillRef>
+          <a:effectRef idx="2">
+            <a:schemeClr val="accent1"/>
+          </a:effectRef>
+          <a:fontRef idx="minor"/>
+        </p:style>
+        <p:txBody>
+          <a:bodyPr lIns="90000" rIns="90000" tIns="45000" bIns="45000" anchor="ctr">
+            <a:noAutofit/>
+          </a:bodyPr>
+          <a:p>
+            <a:endParaRPr b="0" lang="en-US" sz="1800" spc="-1" strike="noStrike">
+              <a:solidFill>
+                <a:schemeClr val="lt1"/>
+              </a:solidFill>
+              <a:latin typeface="Calibri"/>
+              <a:ea typeface="DejaVu Sans"/>
+            </a:endParaRPr>
+          </a:p>
+        </p:txBody>
+      </p:sp>
+      <p:sp>
+        <p:nvSpPr>
+          <p:cNvPr id="169" name="Rounded Rectangle 42"/>
+          <p:cNvSpPr/>
+          <p:nvPr/>
+        </p:nvSpPr>
+        <p:spPr>
+          <a:xfrm>
+            <a:off x="8001000" y="3200400"/>
+            <a:ext cx="3474720" cy="2743200"/>
+          </a:xfrm>
+          <a:prstGeom prst="roundRect">
+            <a:avLst>
+              <a:gd name="adj" fmla="val 16667"/>
+            </a:avLst>
+          </a:prstGeom>
+          <a:solidFill>
+            <a:srgbClr val="16161c"/>
+          </a:solidFill>
+          <a:ln>
+            <a:solidFill>
+              <a:srgbClr val="464655"/>
+            </a:solidFill>
+            <a:round/>
+          </a:ln>
+          <a:effectLst>
+            <a:outerShdw blurRad="39960" dir="5400000" dist="23040" rotWithShape="0">
+              <a:srgbClr val="000000">
+                <a:alpha val="35000"/>
+              </a:srgbClr>
+            </a:outerShdw>
+          </a:effectLst>
+        </p:spPr>
+        <p:style>
+          <a:lnRef idx="1">
+            <a:schemeClr val="accent1"/>
+          </a:lnRef>
+          <a:fillRef idx="3">
+            <a:schemeClr val="accent1"/>
+          </a:fillRef>
+          <a:effectRef idx="2">
+            <a:schemeClr val="accent1"/>
+          </a:effectRef>
+          <a:fontRef idx="minor"/>
+        </p:style>
+        <p:txBody>
+          <a:bodyPr lIns="90000" rIns="90000" tIns="45000" bIns="45000" anchor="ctr">
+            <a:noAutofit/>
+          </a:bodyPr>
+          <a:p>
+            <a:pPr algn="ctr">
+              <a:lnSpc>
+                <a:spcPct val="100000"/>
+              </a:lnSpc>
+            </a:pPr>
+            <a:r>
+              <a:rPr b="0" lang="en-US" sz="1100" spc="-1" strike="noStrike">
+                <a:solidFill>
+                  <a:srgbClr val="78ffc8"/>
+                </a:solidFill>
+                <a:latin typeface="Consolas"/>
+                <a:ea typeface="DejaVu Sans"/>
+              </a:rPr>
+              <a:t>public class ParsingExample {</a:t>
+            </a:r>
+            <a:endParaRPr b="0" lang="en-US" sz="1100" spc="-1" strike="noStrike">
+              <a:solidFill>
+                <a:srgbClr val="ffffff"/>
+              </a:solidFill>
+              <a:latin typeface="Arial"/>
+            </a:endParaRPr>
+          </a:p>
+          <a:p>
+            <a:pPr algn="ctr">
+              <a:lnSpc>
+                <a:spcPct val="100000"/>
+              </a:lnSpc>
+            </a:pPr>
+            <a:r>
+              <a:rPr b="0" lang="en-US" sz="1100" spc="-1" strike="noStrike">
+                <a:solidFill>
+                  <a:srgbClr val="78ffc8"/>
+                </a:solidFill>
+                <a:latin typeface="Consolas"/>
+                <a:ea typeface="DejaVu Sans"/>
+              </a:rPr>
+              <a:t>    </a:t>
+            </a:r>
+            <a:r>
+              <a:rPr b="0" lang="en-US" sz="1100" spc="-1" strike="noStrike">
+                <a:solidFill>
+                  <a:srgbClr val="78ffc8"/>
+                </a:solidFill>
+                <a:latin typeface="Consolas"/>
+                <a:ea typeface="DejaVu Sans"/>
+              </a:rPr>
+              <a:t>public static void main(String[] args) {</a:t>
+            </a:r>
+            <a:endParaRPr b="0" lang="en-US" sz="1100" spc="-1" strike="noStrike">
+              <a:solidFill>
+                <a:srgbClr val="ffffff"/>
+              </a:solidFill>
+              <a:latin typeface="Arial"/>
+            </a:endParaRPr>
+          </a:p>
+          <a:p>
+            <a:pPr algn="ctr">
+              <a:lnSpc>
+                <a:spcPct val="100000"/>
+              </a:lnSpc>
+            </a:pPr>
+            <a:r>
+              <a:rPr b="0" lang="en-US" sz="1100" spc="-1" strike="noStrike">
+                <a:solidFill>
+                  <a:srgbClr val="78ffc8"/>
+                </a:solidFill>
+                <a:latin typeface="Consolas"/>
+                <a:ea typeface="DejaVu Sans"/>
+              </a:rPr>
+              <a:t>        </a:t>
+            </a:r>
+            <a:r>
+              <a:rPr b="0" lang="en-US" sz="1100" spc="-1" strike="noStrike">
+                <a:solidFill>
+                  <a:srgbClr val="78ffc8"/>
+                </a:solidFill>
+                <a:latin typeface="Consolas"/>
+                <a:ea typeface="DejaVu Sans"/>
+              </a:rPr>
+              <a:t>String dateText = "28/04/2026";</a:t>
+            </a:r>
+            <a:endParaRPr b="0" lang="en-US" sz="1100" spc="-1" strike="noStrike">
+              <a:solidFill>
+                <a:srgbClr val="ffffff"/>
+              </a:solidFill>
+              <a:latin typeface="Arial"/>
+            </a:endParaRPr>
+          </a:p>
+          <a:p>
+            <a:pPr algn="ctr">
+              <a:lnSpc>
+                <a:spcPct val="100000"/>
+              </a:lnSpc>
+            </a:pPr>
+            <a:r>
+              <a:rPr b="0" lang="en-US" sz="1100" spc="-1" strike="noStrike">
+                <a:solidFill>
+                  <a:srgbClr val="78ffc8"/>
+                </a:solidFill>
+                <a:latin typeface="Consolas"/>
+                <a:ea typeface="DejaVu Sans"/>
+              </a:rPr>
+              <a:t>        </a:t>
+            </a:r>
+            <a:r>
+              <a:rPr b="0" lang="en-US" sz="1100" spc="-1" strike="noStrike">
+                <a:solidFill>
+                  <a:srgbClr val="78ffc8"/>
+                </a:solidFill>
+                <a:latin typeface="Consolas"/>
+                <a:ea typeface="DejaVu Sans"/>
+              </a:rPr>
+              <a:t>DateTimeFormatter formatter =</a:t>
+            </a:r>
+            <a:endParaRPr b="0" lang="en-US" sz="1100" spc="-1" strike="noStrike">
+              <a:solidFill>
+                <a:srgbClr val="ffffff"/>
+              </a:solidFill>
+              <a:latin typeface="Arial"/>
+            </a:endParaRPr>
+          </a:p>
+          <a:p>
+            <a:pPr algn="ctr">
+              <a:lnSpc>
+                <a:spcPct val="100000"/>
+              </a:lnSpc>
+            </a:pPr>
+            <a:r>
+              <a:rPr b="0" lang="en-US" sz="1100" spc="-1" strike="noStrike">
+                <a:solidFill>
+                  <a:srgbClr val="78ffc8"/>
+                </a:solidFill>
+                <a:latin typeface="Consolas"/>
+                <a:ea typeface="DejaVu Sans"/>
+              </a:rPr>
+              <a:t>                </a:t>
+            </a:r>
+            <a:r>
+              <a:rPr b="0" lang="en-US" sz="1100" spc="-1" strike="noStrike">
+                <a:solidFill>
+                  <a:srgbClr val="78ffc8"/>
+                </a:solidFill>
+                <a:latin typeface="Consolas"/>
+                <a:ea typeface="DejaVu Sans"/>
+              </a:rPr>
+              <a:t>DateTimeFormatter.ofPattern("dd/MM/yyyy");</a:t>
+            </a:r>
+            <a:endParaRPr b="0" lang="en-US" sz="1100" spc="-1" strike="noStrike">
+              <a:solidFill>
+                <a:srgbClr val="ffffff"/>
+              </a:solidFill>
+              <a:latin typeface="Arial"/>
+            </a:endParaRPr>
+          </a:p>
+          <a:p>
+            <a:pPr algn="ctr">
+              <a:lnSpc>
+                <a:spcPct val="100000"/>
+              </a:lnSpc>
+            </a:pPr>
+            <a:r>
+              <a:rPr b="0" lang="en-US" sz="1100" spc="-1" strike="noStrike">
+                <a:solidFill>
+                  <a:srgbClr val="78ffc8"/>
+                </a:solidFill>
+                <a:latin typeface="Consolas"/>
+                <a:ea typeface="DejaVu Sans"/>
+              </a:rPr>
+              <a:t>        </a:t>
+            </a:r>
+            <a:r>
+              <a:rPr b="0" lang="en-US" sz="1100" spc="-1" strike="noStrike">
+                <a:solidFill>
+                  <a:srgbClr val="78ffc8"/>
+                </a:solidFill>
+                <a:latin typeface="Consolas"/>
+                <a:ea typeface="DejaVu Sans"/>
+              </a:rPr>
+              <a:t>LocalDate date = LocalDate.parse(dateText, formatter);</a:t>
+            </a:r>
+            <a:endParaRPr b="0" lang="en-US" sz="1100" spc="-1" strike="noStrike">
+              <a:solidFill>
+                <a:srgbClr val="ffffff"/>
+              </a:solidFill>
+              <a:latin typeface="Arial"/>
+            </a:endParaRPr>
+          </a:p>
+          <a:p>
+            <a:pPr algn="ctr">
+              <a:lnSpc>
+                <a:spcPct val="100000"/>
+              </a:lnSpc>
+            </a:pPr>
+            <a:r>
+              <a:rPr b="0" lang="en-US" sz="1100" spc="-1" strike="noStrike">
+                <a:solidFill>
+                  <a:srgbClr val="78ffc8"/>
+                </a:solidFill>
+                <a:latin typeface="Consolas"/>
+                <a:ea typeface="DejaVu Sans"/>
+              </a:rPr>
+              <a:t>        </a:t>
+            </a:r>
+            <a:r>
+              <a:rPr b="0" lang="en-US" sz="1100" spc="-1" strike="noStrike">
+                <a:solidFill>
+                  <a:srgbClr val="78ffc8"/>
+                </a:solidFill>
+                <a:latin typeface="Consolas"/>
+                <a:ea typeface="DejaVu Sans"/>
+              </a:rPr>
+              <a:t>System.out.println("Ayrıştırılmış Tarih: " + date);</a:t>
+            </a:r>
+            <a:endParaRPr b="0" lang="en-US" sz="1100" spc="-1" strike="noStrike">
+              <a:solidFill>
+                <a:srgbClr val="ffffff"/>
+              </a:solidFill>
+              <a:latin typeface="Arial"/>
+            </a:endParaRPr>
+          </a:p>
+          <a:p>
+            <a:pPr algn="ctr">
+              <a:lnSpc>
+                <a:spcPct val="100000"/>
+              </a:lnSpc>
+            </a:pPr>
+            <a:r>
+              <a:rPr b="0" lang="en-US" sz="1100" spc="-1" strike="noStrike">
+                <a:solidFill>
+                  <a:srgbClr val="78ffc8"/>
+                </a:solidFill>
+                <a:latin typeface="Consolas"/>
+                <a:ea typeface="DejaVu Sans"/>
+              </a:rPr>
+              <a:t>    </a:t>
+            </a:r>
+            <a:r>
+              <a:rPr b="0" lang="en-US" sz="1100" spc="-1" strike="noStrike">
+                <a:solidFill>
+                  <a:srgbClr val="78ffc8"/>
+                </a:solidFill>
+                <a:latin typeface="Consolas"/>
+                <a:ea typeface="DejaVu Sans"/>
+              </a:rPr>
+              <a:t>}</a:t>
+            </a:r>
+            <a:endParaRPr b="0" lang="en-US" sz="1100" spc="-1" strike="noStrike">
+              <a:solidFill>
+                <a:srgbClr val="ffffff"/>
+              </a:solidFill>
+              <a:latin typeface="Arial"/>
+            </a:endParaRPr>
+          </a:p>
+          <a:p>
+            <a:pPr algn="ctr">
+              <a:lnSpc>
+                <a:spcPct val="100000"/>
+              </a:lnSpc>
+            </a:pPr>
+            <a:r>
+              <a:rPr b="0" lang="en-US" sz="1100" spc="-1" strike="noStrike">
+                <a:solidFill>
+                  <a:srgbClr val="78ffc8"/>
+                </a:solidFill>
+                <a:latin typeface="Consolas"/>
+                <a:ea typeface="DejaVu Sans"/>
+              </a:rPr>
+              <a:t>}</a:t>
+            </a:r>
+            <a:endParaRPr b="0" lang="en-US" sz="1100" spc="-1" strike="noStrike">
+              <a:solidFill>
+                <a:srgbClr val="ffffff"/>
+              </a:solidFill>
+              <a:latin typeface="Arial"/>
+            </a:endParaRPr>
+          </a:p>
+        </p:txBody>
+      </p:sp>
+      <p:sp>
+        <p:nvSpPr>
+          <p:cNvPr id="170" name="TextBox 15"/>
           <p:cNvSpPr/>
           <p:nvPr/>
         </p:nvSpPr>

--- a/Java/Java #4/TR/Java #4.pptx
+++ b/Java/Java #4/TR/Java #4.pptx
@@ -10,6 +10,7 @@
     <p:sldId id="258" r:id="rId5"/>
     <p:sldId id="259" r:id="rId6"/>
     <p:sldId id="260" r:id="rId7"/>
+    <p:sldId id="261" r:id="rId8"/>
   </p:sldIdLst>
   <p:sldSz cx="9144000" cy="6858000"/>
   <p:notesSz cx="7772400" cy="10058400"/>
@@ -67,7 +68,7 @@
         <p:txBody>
           <a:bodyPr/>
           <a:p>
-            <a:fld id="{DF224ACC-67A9-47F9-8037-FBC130BE750E}" type="slidenum">
+            <a:fld id="{41B16E91-23CA-4444-88AA-8270CB3AE394}" type="slidenum">
               <a:t>&lt;#&gt;</a:t>
             </a:fld>
           </a:p>
@@ -276,7 +277,7 @@
         <p:txBody>
           <a:bodyPr/>
           <a:p>
-            <a:fld id="{DAE570C1-8457-4719-91BB-5F9D90D21530}" type="slidenum">
+            <a:fld id="{EB567FFF-7AA3-470F-920E-53C15DDE13A9}" type="slidenum">
               <a:t>&lt;#&gt;</a:t>
             </a:fld>
           </a:p>
@@ -571,7 +572,7 @@
         <p:txBody>
           <a:bodyPr/>
           <a:p>
-            <a:fld id="{9CDCF49F-DE4A-4D0F-BD32-8C54960AC170}" type="slidenum">
+            <a:fld id="{5F0F8A3F-4ED0-43C1-8110-60455F75BEA3}" type="slidenum">
               <a:t>&lt;#&gt;</a:t>
             </a:fld>
           </a:p>
@@ -952,7 +953,7 @@
         <p:txBody>
           <a:bodyPr/>
           <a:p>
-            <a:fld id="{C17872D0-3650-4831-8578-8CBE64DBF576}" type="slidenum">
+            <a:fld id="{F1C296EC-524A-43F2-AB46-99152196EBBC}" type="slidenum">
               <a:t>&lt;#&gt;</a:t>
             </a:fld>
           </a:p>
@@ -1115,7 +1116,7 @@
         <p:txBody>
           <a:bodyPr/>
           <a:p>
-            <a:fld id="{93317658-4E9F-4C4F-B42D-9755235759D2}" type="slidenum">
+            <a:fld id="{4D4C5257-92F3-44B3-9D57-787C5D5CEA96}" type="slidenum">
               <a:t>&lt;#&gt;</a:t>
             </a:fld>
           </a:p>
@@ -1281,7 +1282,7 @@
         <p:txBody>
           <a:bodyPr/>
           <a:p>
-            <a:fld id="{1D3058E4-88C5-4C23-9278-652BCB1D9770}" type="slidenum">
+            <a:fld id="{BB93F601-373A-48EC-813F-13C84A917A23}" type="slidenum">
               <a:t>&lt;#&gt;</a:t>
             </a:fld>
           </a:p>
@@ -1490,7 +1491,7 @@
         <p:txBody>
           <a:bodyPr/>
           <a:p>
-            <a:fld id="{47FC67CD-68AC-4F6A-8659-08FFE63BDEE1}" type="slidenum">
+            <a:fld id="{E4BA1044-C756-4778-B9BB-AE0CDCD6DDF6}" type="slidenum">
               <a:t>&lt;#&gt;</a:t>
             </a:fld>
           </a:p>
@@ -1613,7 +1614,7 @@
         <p:txBody>
           <a:bodyPr/>
           <a:p>
-            <a:fld id="{BAE59157-7320-4158-992B-63F4F29B82BF}" type="slidenum">
+            <a:fld id="{6926C590-CE1B-41D2-BC1B-43446608AC4F}" type="slidenum">
               <a:t>&lt;#&gt;</a:t>
             </a:fld>
           </a:p>
@@ -1734,7 +1735,7 @@
         <p:txBody>
           <a:bodyPr/>
           <a:p>
-            <a:fld id="{A270DB8C-FDA6-4D42-AC0D-66F4262BDF80}" type="slidenum">
+            <a:fld id="{E0424883-C7C4-4F12-8D43-96DC2ECA5D87}" type="slidenum">
               <a:t>&lt;#&gt;</a:t>
             </a:fld>
           </a:p>
@@ -1986,7 +1987,7 @@
         <p:txBody>
           <a:bodyPr/>
           <a:p>
-            <a:fld id="{EF04D17F-6083-4BCA-B275-7C67A220D125}" type="slidenum">
+            <a:fld id="{55EF66D6-687F-4E42-8C6D-0F4023F9157F}" type="slidenum">
               <a:t>&lt;#&gt;</a:t>
             </a:fld>
           </a:p>
@@ -2238,7 +2239,7 @@
         <p:txBody>
           <a:bodyPr/>
           <a:p>
-            <a:fld id="{DB822391-53C9-4C52-9440-1ABD0EBAC5DB}" type="slidenum">
+            <a:fld id="{D70ED2C8-A00C-4559-8A7D-B884A3654D5A}" type="slidenum">
               <a:t>&lt;#&gt;</a:t>
             </a:fld>
           </a:p>
@@ -2490,7 +2491,7 @@
         <p:txBody>
           <a:bodyPr/>
           <a:p>
-            <a:fld id="{659E0486-20AC-4D6C-B9AE-6A14374A3E32}" type="slidenum">
+            <a:fld id="{7B5848CC-7E00-4037-A765-8CD4F98A1759}" type="slidenum">
               <a:t>&lt;#&gt;</a:t>
             </a:fld>
           </a:p>
@@ -2559,7 +2560,7 @@
         <p:spPr>
           <a:xfrm>
             <a:off x="3124080" y="6356520"/>
-            <a:ext cx="2892960" cy="362520"/>
+            <a:ext cx="2892600" cy="362160"/>
           </a:xfrm>
           <a:prstGeom prst="rect">
             <a:avLst/>
@@ -2631,7 +2632,7 @@
         <p:spPr>
           <a:xfrm>
             <a:off x="6553080" y="6356520"/>
-            <a:ext cx="2131200" cy="362520"/>
+            <a:ext cx="2130840" cy="362160"/>
           </a:xfrm>
           <a:prstGeom prst="rect">
             <a:avLst/>
@@ -2672,7 +2673,7 @@
                 <a:tab algn="l" pos="0"/>
               </a:tabLst>
             </a:pPr>
-            <a:fld id="{BC4AC5C8-E78C-4240-BB80-31A1419AE5ED}" type="slidenum">
+            <a:fld id="{1ABF933E-74EE-4B6C-AD9B-0CDBA8862101}" type="slidenum">
               <a:rPr b="0" lang="en-US" sz="1200" spc="-1" strike="noStrike">
                 <a:solidFill>
                   <a:srgbClr val="8b8b8b"/>
@@ -2703,7 +2704,7 @@
         <p:spPr>
           <a:xfrm>
             <a:off x="457200" y="6356520"/>
-            <a:ext cx="2131200" cy="362520"/>
+            <a:ext cx="2130840" cy="362160"/>
           </a:xfrm>
           <a:prstGeom prst="rect">
             <a:avLst/>
@@ -3070,7 +3071,7 @@
         <p:spPr>
           <a:xfrm>
             <a:off x="0" y="0"/>
-            <a:ext cx="12186360" cy="6855480"/>
+            <a:ext cx="12186000" cy="6855120"/>
           </a:xfrm>
           <a:prstGeom prst="rect">
             <a:avLst/>
@@ -3130,7 +3131,7 @@
         <p:spPr>
           <a:xfrm>
             <a:off x="0" y="0"/>
-            <a:ext cx="15840" cy="6855480"/>
+            <a:ext cx="15480" cy="6855120"/>
           </a:xfrm>
           <a:prstGeom prst="rect">
             <a:avLst/>
@@ -3190,7 +3191,7 @@
         <p:spPr>
           <a:xfrm>
             <a:off x="914400" y="0"/>
-            <a:ext cx="15840" cy="6855480"/>
+            <a:ext cx="15480" cy="6855120"/>
           </a:xfrm>
           <a:prstGeom prst="rect">
             <a:avLst/>
@@ -3250,7 +3251,7 @@
         <p:spPr>
           <a:xfrm>
             <a:off x="1828800" y="0"/>
-            <a:ext cx="15840" cy="6855480"/>
+            <a:ext cx="15480" cy="6855120"/>
           </a:xfrm>
           <a:prstGeom prst="rect">
             <a:avLst/>
@@ -3310,7 +3311,7 @@
         <p:spPr>
           <a:xfrm>
             <a:off x="2743200" y="0"/>
-            <a:ext cx="15840" cy="6855480"/>
+            <a:ext cx="15480" cy="6855120"/>
           </a:xfrm>
           <a:prstGeom prst="rect">
             <a:avLst/>
@@ -3370,7 +3371,7 @@
         <p:spPr>
           <a:xfrm>
             <a:off x="3657600" y="0"/>
-            <a:ext cx="15840" cy="6855480"/>
+            <a:ext cx="15480" cy="6855120"/>
           </a:xfrm>
           <a:prstGeom prst="rect">
             <a:avLst/>
@@ -3430,7 +3431,7 @@
         <p:spPr>
           <a:xfrm>
             <a:off x="4572000" y="0"/>
-            <a:ext cx="15840" cy="6855480"/>
+            <a:ext cx="15480" cy="6855120"/>
           </a:xfrm>
           <a:prstGeom prst="rect">
             <a:avLst/>
@@ -3490,7 +3491,7 @@
         <p:spPr>
           <a:xfrm>
             <a:off x="5486400" y="0"/>
-            <a:ext cx="15840" cy="6855480"/>
+            <a:ext cx="15480" cy="6855120"/>
           </a:xfrm>
           <a:prstGeom prst="rect">
             <a:avLst/>
@@ -3550,7 +3551,7 @@
         <p:spPr>
           <a:xfrm>
             <a:off x="6400800" y="0"/>
-            <a:ext cx="15840" cy="6855480"/>
+            <a:ext cx="15480" cy="6855120"/>
           </a:xfrm>
           <a:prstGeom prst="rect">
             <a:avLst/>
@@ -3610,7 +3611,7 @@
         <p:spPr>
           <a:xfrm>
             <a:off x="7315200" y="0"/>
-            <a:ext cx="15840" cy="6855480"/>
+            <a:ext cx="15480" cy="6855120"/>
           </a:xfrm>
           <a:prstGeom prst="rect">
             <a:avLst/>
@@ -3670,7 +3671,7 @@
         <p:spPr>
           <a:xfrm>
             <a:off x="8229600" y="0"/>
-            <a:ext cx="15840" cy="6855480"/>
+            <a:ext cx="15480" cy="6855120"/>
           </a:xfrm>
           <a:prstGeom prst="rect">
             <a:avLst/>
@@ -3730,7 +3731,7 @@
         <p:spPr>
           <a:xfrm>
             <a:off x="9144000" y="0"/>
-            <a:ext cx="15840" cy="6855480"/>
+            <a:ext cx="15480" cy="6855120"/>
           </a:xfrm>
           <a:prstGeom prst="rect">
             <a:avLst/>
@@ -3790,7 +3791,7 @@
         <p:spPr>
           <a:xfrm>
             <a:off x="10058400" y="0"/>
-            <a:ext cx="15840" cy="6855480"/>
+            <a:ext cx="15480" cy="6855120"/>
           </a:xfrm>
           <a:prstGeom prst="rect">
             <a:avLst/>
@@ -3850,7 +3851,7 @@
         <p:spPr>
           <a:xfrm>
             <a:off x="10972800" y="0"/>
-            <a:ext cx="15840" cy="6855480"/>
+            <a:ext cx="15480" cy="6855120"/>
           </a:xfrm>
           <a:prstGeom prst="rect">
             <a:avLst/>
@@ -3910,7 +3911,7 @@
         <p:spPr>
           <a:xfrm>
             <a:off x="11887200" y="0"/>
-            <a:ext cx="15840" cy="6855480"/>
+            <a:ext cx="15480" cy="6855120"/>
           </a:xfrm>
           <a:prstGeom prst="rect">
             <a:avLst/>
@@ -3970,7 +3971,7 @@
         <p:spPr>
           <a:xfrm>
             <a:off x="0" y="0"/>
-            <a:ext cx="317520" cy="6855480"/>
+            <a:ext cx="317160" cy="6855120"/>
           </a:xfrm>
           <a:prstGeom prst="rect">
             <a:avLst/>
@@ -4030,7 +4031,7 @@
         <p:spPr>
           <a:xfrm>
             <a:off x="9875520" y="365760"/>
-            <a:ext cx="2009160" cy="500400"/>
+            <a:ext cx="2008800" cy="500040"/>
           </a:xfrm>
           <a:prstGeom prst="roundRect">
             <a:avLst>
@@ -4281,7 +4282,7 @@
         <p:spPr>
           <a:xfrm>
             <a:off x="987480" y="3182040"/>
-            <a:ext cx="3289320" cy="2740680"/>
+            <a:ext cx="3288960" cy="2740320"/>
           </a:xfrm>
           <a:prstGeom prst="roundRect">
             <a:avLst>
@@ -4343,7 +4344,7 @@
         <p:spPr>
           <a:xfrm>
             <a:off x="914400" y="3108960"/>
-            <a:ext cx="3289320" cy="2740680"/>
+            <a:ext cx="3288960" cy="2740320"/>
           </a:xfrm>
           <a:prstGeom prst="roundRect">
             <a:avLst>
@@ -4477,7 +4478,7 @@
         <p:spPr>
           <a:xfrm>
             <a:off x="4507920" y="3182040"/>
-            <a:ext cx="3289320" cy="2740680"/>
+            <a:ext cx="3288960" cy="2740320"/>
           </a:xfrm>
           <a:prstGeom prst="roundRect">
             <a:avLst>
@@ -4539,7 +4540,7 @@
         <p:spPr>
           <a:xfrm>
             <a:off x="4434840" y="3108960"/>
-            <a:ext cx="3289320" cy="2740680"/>
+            <a:ext cx="3288960" cy="2740320"/>
           </a:xfrm>
           <a:prstGeom prst="roundRect">
             <a:avLst>
@@ -4797,7 +4798,7 @@
         <p:spPr>
           <a:xfrm>
             <a:off x="8028360" y="3182040"/>
-            <a:ext cx="3289320" cy="2740680"/>
+            <a:ext cx="3288960" cy="2740320"/>
           </a:xfrm>
           <a:prstGeom prst="roundRect">
             <a:avLst>
@@ -4859,7 +4860,7 @@
         <p:spPr>
           <a:xfrm>
             <a:off x="7955280" y="2971800"/>
-            <a:ext cx="3930480" cy="3656160"/>
+            <a:ext cx="3930120" cy="3655800"/>
           </a:xfrm>
           <a:prstGeom prst="roundRect">
             <a:avLst>
@@ -5370,7 +5371,7 @@
         <p:spPr>
           <a:xfrm>
             <a:off x="0" y="0"/>
-            <a:ext cx="12186720" cy="6855840"/>
+            <a:ext cx="12186360" cy="6855480"/>
           </a:xfrm>
           <a:prstGeom prst="rect">
             <a:avLst/>
@@ -5430,7 +5431,7 @@
         <p:spPr>
           <a:xfrm>
             <a:off x="0" y="0"/>
-            <a:ext cx="16200" cy="6855840"/>
+            <a:ext cx="15840" cy="6855480"/>
           </a:xfrm>
           <a:prstGeom prst="rect">
             <a:avLst/>
@@ -5490,7 +5491,7 @@
         <p:spPr>
           <a:xfrm>
             <a:off x="914400" y="0"/>
-            <a:ext cx="16200" cy="6855840"/>
+            <a:ext cx="15840" cy="6855480"/>
           </a:xfrm>
           <a:prstGeom prst="rect">
             <a:avLst/>
@@ -5550,7 +5551,7 @@
         <p:spPr>
           <a:xfrm>
             <a:off x="1828800" y="0"/>
-            <a:ext cx="16200" cy="6855840"/>
+            <a:ext cx="15840" cy="6855480"/>
           </a:xfrm>
           <a:prstGeom prst="rect">
             <a:avLst/>
@@ -5610,7 +5611,7 @@
         <p:spPr>
           <a:xfrm>
             <a:off x="2743200" y="0"/>
-            <a:ext cx="16200" cy="6855840"/>
+            <a:ext cx="15840" cy="6855480"/>
           </a:xfrm>
           <a:prstGeom prst="rect">
             <a:avLst/>
@@ -5670,7 +5671,7 @@
         <p:spPr>
           <a:xfrm>
             <a:off x="3657600" y="0"/>
-            <a:ext cx="16200" cy="6855840"/>
+            <a:ext cx="15840" cy="6855480"/>
           </a:xfrm>
           <a:prstGeom prst="rect">
             <a:avLst/>
@@ -5730,7 +5731,7 @@
         <p:spPr>
           <a:xfrm>
             <a:off x="4572000" y="0"/>
-            <a:ext cx="16200" cy="6855840"/>
+            <a:ext cx="15840" cy="6855480"/>
           </a:xfrm>
           <a:prstGeom prst="rect">
             <a:avLst/>
@@ -5790,7 +5791,7 @@
         <p:spPr>
           <a:xfrm>
             <a:off x="5486400" y="0"/>
-            <a:ext cx="16200" cy="6855840"/>
+            <a:ext cx="15840" cy="6855480"/>
           </a:xfrm>
           <a:prstGeom prst="rect">
             <a:avLst/>
@@ -5850,7 +5851,7 @@
         <p:spPr>
           <a:xfrm>
             <a:off x="6400800" y="0"/>
-            <a:ext cx="16200" cy="6855840"/>
+            <a:ext cx="15840" cy="6855480"/>
           </a:xfrm>
           <a:prstGeom prst="rect">
             <a:avLst/>
@@ -5910,7 +5911,7 @@
         <p:spPr>
           <a:xfrm>
             <a:off x="7315200" y="0"/>
-            <a:ext cx="16200" cy="6855840"/>
+            <a:ext cx="15840" cy="6855480"/>
           </a:xfrm>
           <a:prstGeom prst="rect">
             <a:avLst/>
@@ -5970,7 +5971,7 @@
         <p:spPr>
           <a:xfrm>
             <a:off x="8229600" y="0"/>
-            <a:ext cx="16200" cy="6855840"/>
+            <a:ext cx="15840" cy="6855480"/>
           </a:xfrm>
           <a:prstGeom prst="rect">
             <a:avLst/>
@@ -6030,7 +6031,7 @@
         <p:spPr>
           <a:xfrm>
             <a:off x="9144000" y="0"/>
-            <a:ext cx="16200" cy="6855840"/>
+            <a:ext cx="15840" cy="6855480"/>
           </a:xfrm>
           <a:prstGeom prst="rect">
             <a:avLst/>
@@ -6090,7 +6091,7 @@
         <p:spPr>
           <a:xfrm>
             <a:off x="10058400" y="0"/>
-            <a:ext cx="16200" cy="6855840"/>
+            <a:ext cx="15840" cy="6855480"/>
           </a:xfrm>
           <a:prstGeom prst="rect">
             <a:avLst/>
@@ -6150,7 +6151,7 @@
         <p:spPr>
           <a:xfrm>
             <a:off x="10972800" y="0"/>
-            <a:ext cx="16200" cy="6855840"/>
+            <a:ext cx="15840" cy="6855480"/>
           </a:xfrm>
           <a:prstGeom prst="rect">
             <a:avLst/>
@@ -6210,7 +6211,7 @@
         <p:spPr>
           <a:xfrm>
             <a:off x="11887200" y="0"/>
-            <a:ext cx="16200" cy="6855840"/>
+            <a:ext cx="15840" cy="6855480"/>
           </a:xfrm>
           <a:prstGeom prst="rect">
             <a:avLst/>
@@ -6270,7 +6271,7 @@
         <p:spPr>
           <a:xfrm>
             <a:off x="0" y="0"/>
-            <a:ext cx="317880" cy="6855840"/>
+            <a:ext cx="317520" cy="6855480"/>
           </a:xfrm>
           <a:prstGeom prst="rect">
             <a:avLst/>
@@ -6330,7 +6331,7 @@
         <p:spPr>
           <a:xfrm>
             <a:off x="9875520" y="365760"/>
-            <a:ext cx="2009520" cy="500760"/>
+            <a:ext cx="2009160" cy="500400"/>
           </a:xfrm>
           <a:prstGeom prst="roundRect">
             <a:avLst>
@@ -6404,7 +6405,7 @@
         <p:spPr>
           <a:xfrm>
             <a:off x="723240" y="914400"/>
-            <a:ext cx="9523800" cy="638280"/>
+            <a:ext cx="9523440" cy="638280"/>
           </a:xfrm>
           <a:prstGeom prst="rect">
             <a:avLst/>
@@ -6558,7 +6559,7 @@
         <p:spPr>
           <a:xfrm>
             <a:off x="987480" y="3182040"/>
-            <a:ext cx="3289680" cy="2741040"/>
+            <a:ext cx="3289320" cy="2740680"/>
           </a:xfrm>
           <a:prstGeom prst="roundRect">
             <a:avLst>
@@ -6620,7 +6621,7 @@
         <p:spPr>
           <a:xfrm>
             <a:off x="914400" y="3108960"/>
-            <a:ext cx="3289680" cy="2741040"/>
+            <a:ext cx="3289320" cy="2740680"/>
           </a:xfrm>
           <a:prstGeom prst="roundRect">
             <a:avLst>
@@ -6783,7 +6784,7 @@
         <p:spPr>
           <a:xfrm>
             <a:off x="4507920" y="3182040"/>
-            <a:ext cx="3289680" cy="2741040"/>
+            <a:ext cx="3289320" cy="2740680"/>
           </a:xfrm>
           <a:prstGeom prst="roundRect">
             <a:avLst>
@@ -6845,7 +6846,7 @@
         <p:spPr>
           <a:xfrm>
             <a:off x="4434840" y="3108960"/>
-            <a:ext cx="3289680" cy="2741040"/>
+            <a:ext cx="3289320" cy="2740680"/>
           </a:xfrm>
           <a:prstGeom prst="roundRect">
             <a:avLst>
@@ -7103,7 +7104,7 @@
         <p:spPr>
           <a:xfrm>
             <a:off x="8028360" y="3182040"/>
-            <a:ext cx="3289680" cy="2741040"/>
+            <a:ext cx="3289320" cy="2740680"/>
           </a:xfrm>
           <a:prstGeom prst="roundRect">
             <a:avLst>
@@ -7165,7 +7166,7 @@
         <p:spPr>
           <a:xfrm>
             <a:off x="7955280" y="3108960"/>
-            <a:ext cx="3702240" cy="3062160"/>
+            <a:ext cx="3701880" cy="3061800"/>
           </a:xfrm>
           <a:prstGeom prst="roundRect">
             <a:avLst>
@@ -7610,7 +7611,7 @@
         <p:spPr>
           <a:xfrm>
             <a:off x="0" y="0"/>
-            <a:ext cx="12186720" cy="6855840"/>
+            <a:ext cx="12186360" cy="6855480"/>
           </a:xfrm>
           <a:prstGeom prst="rect">
             <a:avLst/>
@@ -7670,7 +7671,7 @@
         <p:spPr>
           <a:xfrm>
             <a:off x="0" y="0"/>
-            <a:ext cx="16200" cy="6855840"/>
+            <a:ext cx="15840" cy="6855480"/>
           </a:xfrm>
           <a:prstGeom prst="rect">
             <a:avLst/>
@@ -7730,7 +7731,7 @@
         <p:spPr>
           <a:xfrm>
             <a:off x="914400" y="0"/>
-            <a:ext cx="16200" cy="6855840"/>
+            <a:ext cx="15840" cy="6855480"/>
           </a:xfrm>
           <a:prstGeom prst="rect">
             <a:avLst/>
@@ -7790,7 +7791,7 @@
         <p:spPr>
           <a:xfrm>
             <a:off x="1828800" y="0"/>
-            <a:ext cx="16200" cy="6855840"/>
+            <a:ext cx="15840" cy="6855480"/>
           </a:xfrm>
           <a:prstGeom prst="rect">
             <a:avLst/>
@@ -7850,7 +7851,7 @@
         <p:spPr>
           <a:xfrm>
             <a:off x="2743200" y="0"/>
-            <a:ext cx="16200" cy="6855840"/>
+            <a:ext cx="15840" cy="6855480"/>
           </a:xfrm>
           <a:prstGeom prst="rect">
             <a:avLst/>
@@ -7910,7 +7911,7 @@
         <p:spPr>
           <a:xfrm>
             <a:off x="3657600" y="0"/>
-            <a:ext cx="16200" cy="6855840"/>
+            <a:ext cx="15840" cy="6855480"/>
           </a:xfrm>
           <a:prstGeom prst="rect">
             <a:avLst/>
@@ -7970,7 +7971,7 @@
         <p:spPr>
           <a:xfrm>
             <a:off x="4572000" y="0"/>
-            <a:ext cx="16200" cy="6855840"/>
+            <a:ext cx="15840" cy="6855480"/>
           </a:xfrm>
           <a:prstGeom prst="rect">
             <a:avLst/>
@@ -8030,7 +8031,7 @@
         <p:spPr>
           <a:xfrm>
             <a:off x="5486400" y="0"/>
-            <a:ext cx="16200" cy="6855840"/>
+            <a:ext cx="15840" cy="6855480"/>
           </a:xfrm>
           <a:prstGeom prst="rect">
             <a:avLst/>
@@ -8090,7 +8091,7 @@
         <p:spPr>
           <a:xfrm>
             <a:off x="6400800" y="0"/>
-            <a:ext cx="16200" cy="6855840"/>
+            <a:ext cx="15840" cy="6855480"/>
           </a:xfrm>
           <a:prstGeom prst="rect">
             <a:avLst/>
@@ -8150,7 +8151,7 @@
         <p:spPr>
           <a:xfrm>
             <a:off x="7315200" y="0"/>
-            <a:ext cx="16200" cy="6855840"/>
+            <a:ext cx="15840" cy="6855480"/>
           </a:xfrm>
           <a:prstGeom prst="rect">
             <a:avLst/>
@@ -8210,7 +8211,7 @@
         <p:spPr>
           <a:xfrm>
             <a:off x="8229600" y="0"/>
-            <a:ext cx="16200" cy="6855840"/>
+            <a:ext cx="15840" cy="6855480"/>
           </a:xfrm>
           <a:prstGeom prst="rect">
             <a:avLst/>
@@ -8270,7 +8271,7 @@
         <p:spPr>
           <a:xfrm>
             <a:off x="9144000" y="0"/>
-            <a:ext cx="16200" cy="6855840"/>
+            <a:ext cx="15840" cy="6855480"/>
           </a:xfrm>
           <a:prstGeom prst="rect">
             <a:avLst/>
@@ -8330,7 +8331,7 @@
         <p:spPr>
           <a:xfrm>
             <a:off x="10058400" y="0"/>
-            <a:ext cx="16200" cy="6855840"/>
+            <a:ext cx="15840" cy="6855480"/>
           </a:xfrm>
           <a:prstGeom prst="rect">
             <a:avLst/>
@@ -8390,7 +8391,7 @@
         <p:spPr>
           <a:xfrm>
             <a:off x="10972800" y="0"/>
-            <a:ext cx="16200" cy="6855840"/>
+            <a:ext cx="15840" cy="6855480"/>
           </a:xfrm>
           <a:prstGeom prst="rect">
             <a:avLst/>
@@ -8450,7 +8451,7 @@
         <p:spPr>
           <a:xfrm>
             <a:off x="11887200" y="0"/>
-            <a:ext cx="16200" cy="6855840"/>
+            <a:ext cx="15840" cy="6855480"/>
           </a:xfrm>
           <a:prstGeom prst="rect">
             <a:avLst/>
@@ -8510,7 +8511,7 @@
         <p:spPr>
           <a:xfrm>
             <a:off x="0" y="0"/>
-            <a:ext cx="317880" cy="6855840"/>
+            <a:ext cx="317520" cy="6855480"/>
           </a:xfrm>
           <a:prstGeom prst="rect">
             <a:avLst/>
@@ -8570,7 +8571,7 @@
         <p:spPr>
           <a:xfrm>
             <a:off x="9875520" y="365760"/>
-            <a:ext cx="2009520" cy="500760"/>
+            <a:ext cx="2009160" cy="500400"/>
           </a:xfrm>
           <a:prstGeom prst="roundRect">
             <a:avLst>
@@ -8644,7 +8645,7 @@
         <p:spPr>
           <a:xfrm>
             <a:off x="942480" y="914400"/>
-            <a:ext cx="9084960" cy="638280"/>
+            <a:ext cx="9084600" cy="638280"/>
           </a:xfrm>
           <a:prstGeom prst="rect">
             <a:avLst/>
@@ -8698,7 +8699,7 @@
         <p:spPr>
           <a:xfrm>
             <a:off x="1149480" y="1828800"/>
-            <a:ext cx="9190080" cy="576360"/>
+            <a:ext cx="9189720" cy="576360"/>
           </a:xfrm>
           <a:prstGeom prst="rect">
             <a:avLst/>
@@ -8775,7 +8776,7 @@
         <p:spPr>
           <a:xfrm>
             <a:off x="987480" y="3182040"/>
-            <a:ext cx="3289680" cy="2741040"/>
+            <a:ext cx="3289320" cy="2740680"/>
           </a:xfrm>
           <a:prstGeom prst="roundRect">
             <a:avLst>
@@ -8837,7 +8838,7 @@
         <p:spPr>
           <a:xfrm>
             <a:off x="914400" y="3108960"/>
-            <a:ext cx="3289680" cy="3062520"/>
+            <a:ext cx="3289320" cy="3062160"/>
           </a:xfrm>
           <a:prstGeom prst="roundRect">
             <a:avLst>
@@ -9028,7 +9029,7 @@
         <p:spPr>
           <a:xfrm>
             <a:off x="4507920" y="3182040"/>
-            <a:ext cx="3289680" cy="2741040"/>
+            <a:ext cx="3289320" cy="2740680"/>
           </a:xfrm>
           <a:prstGeom prst="roundRect">
             <a:avLst>
@@ -9090,7 +9091,7 @@
         <p:spPr>
           <a:xfrm>
             <a:off x="4434840" y="3108960"/>
-            <a:ext cx="3289680" cy="2741040"/>
+            <a:ext cx="3289320" cy="2740680"/>
           </a:xfrm>
           <a:prstGeom prst="roundRect">
             <a:avLst>
@@ -9348,7 +9349,7 @@
         <p:spPr>
           <a:xfrm>
             <a:off x="8028360" y="3182040"/>
-            <a:ext cx="3289680" cy="2741040"/>
+            <a:ext cx="3289320" cy="2740680"/>
           </a:xfrm>
           <a:prstGeom prst="roundRect">
             <a:avLst>
@@ -9410,7 +9411,7 @@
         <p:spPr>
           <a:xfrm>
             <a:off x="7955280" y="3108960"/>
-            <a:ext cx="3702240" cy="3062160"/>
+            <a:ext cx="3701880" cy="3061800"/>
           </a:xfrm>
           <a:prstGeom prst="roundRect">
             <a:avLst>
@@ -9855,7 +9856,7 @@
         <p:spPr>
           <a:xfrm>
             <a:off x="0" y="0"/>
-            <a:ext cx="12186720" cy="6855840"/>
+            <a:ext cx="12186360" cy="6855480"/>
           </a:xfrm>
           <a:prstGeom prst="rect">
             <a:avLst/>
@@ -9915,7 +9916,7 @@
         <p:spPr>
           <a:xfrm>
             <a:off x="0" y="0"/>
-            <a:ext cx="16200" cy="6855840"/>
+            <a:ext cx="15840" cy="6855480"/>
           </a:xfrm>
           <a:prstGeom prst="rect">
             <a:avLst/>
@@ -9975,7 +9976,7 @@
         <p:spPr>
           <a:xfrm>
             <a:off x="914400" y="0"/>
-            <a:ext cx="16200" cy="6855840"/>
+            <a:ext cx="15840" cy="6855480"/>
           </a:xfrm>
           <a:prstGeom prst="rect">
             <a:avLst/>
@@ -10035,7 +10036,7 @@
         <p:spPr>
           <a:xfrm>
             <a:off x="1828800" y="0"/>
-            <a:ext cx="16200" cy="6855840"/>
+            <a:ext cx="15840" cy="6855480"/>
           </a:xfrm>
           <a:prstGeom prst="rect">
             <a:avLst/>
@@ -10095,7 +10096,7 @@
         <p:spPr>
           <a:xfrm>
             <a:off x="2743200" y="0"/>
-            <a:ext cx="16200" cy="6855840"/>
+            <a:ext cx="15840" cy="6855480"/>
           </a:xfrm>
           <a:prstGeom prst="rect">
             <a:avLst/>
@@ -10155,7 +10156,7 @@
         <p:spPr>
           <a:xfrm>
             <a:off x="3657600" y="0"/>
-            <a:ext cx="16200" cy="6855840"/>
+            <a:ext cx="15840" cy="6855480"/>
           </a:xfrm>
           <a:prstGeom prst="rect">
             <a:avLst/>
@@ -10215,7 +10216,7 @@
         <p:spPr>
           <a:xfrm>
             <a:off x="4572000" y="0"/>
-            <a:ext cx="16200" cy="6855840"/>
+            <a:ext cx="15840" cy="6855480"/>
           </a:xfrm>
           <a:prstGeom prst="rect">
             <a:avLst/>
@@ -10275,7 +10276,7 @@
         <p:spPr>
           <a:xfrm>
             <a:off x="5486400" y="0"/>
-            <a:ext cx="16200" cy="6855840"/>
+            <a:ext cx="15840" cy="6855480"/>
           </a:xfrm>
           <a:prstGeom prst="rect">
             <a:avLst/>
@@ -10335,7 +10336,7 @@
         <p:spPr>
           <a:xfrm>
             <a:off x="6400800" y="0"/>
-            <a:ext cx="16200" cy="6855840"/>
+            <a:ext cx="15840" cy="6855480"/>
           </a:xfrm>
           <a:prstGeom prst="rect">
             <a:avLst/>
@@ -10395,7 +10396,7 @@
         <p:spPr>
           <a:xfrm>
             <a:off x="7315200" y="0"/>
-            <a:ext cx="16200" cy="6855840"/>
+            <a:ext cx="15840" cy="6855480"/>
           </a:xfrm>
           <a:prstGeom prst="rect">
             <a:avLst/>
@@ -10455,7 +10456,7 @@
         <p:spPr>
           <a:xfrm>
             <a:off x="8229600" y="0"/>
-            <a:ext cx="16200" cy="6855840"/>
+            <a:ext cx="15840" cy="6855480"/>
           </a:xfrm>
           <a:prstGeom prst="rect">
             <a:avLst/>
@@ -10515,7 +10516,7 @@
         <p:spPr>
           <a:xfrm>
             <a:off x="9144000" y="0"/>
-            <a:ext cx="16200" cy="6855840"/>
+            <a:ext cx="15840" cy="6855480"/>
           </a:xfrm>
           <a:prstGeom prst="rect">
             <a:avLst/>
@@ -10575,7 +10576,7 @@
         <p:spPr>
           <a:xfrm>
             <a:off x="10058400" y="0"/>
-            <a:ext cx="16200" cy="6855840"/>
+            <a:ext cx="15840" cy="6855480"/>
           </a:xfrm>
           <a:prstGeom prst="rect">
             <a:avLst/>
@@ -10635,7 +10636,7 @@
         <p:spPr>
           <a:xfrm>
             <a:off x="10972800" y="0"/>
-            <a:ext cx="16200" cy="6855840"/>
+            <a:ext cx="15840" cy="6855480"/>
           </a:xfrm>
           <a:prstGeom prst="rect">
             <a:avLst/>
@@ -10695,7 +10696,7 @@
         <p:spPr>
           <a:xfrm>
             <a:off x="11887200" y="0"/>
-            <a:ext cx="16200" cy="6855840"/>
+            <a:ext cx="15840" cy="6855480"/>
           </a:xfrm>
           <a:prstGeom prst="rect">
             <a:avLst/>
@@ -10755,7 +10756,7 @@
         <p:spPr>
           <a:xfrm>
             <a:off x="0" y="0"/>
-            <a:ext cx="317880" cy="6855840"/>
+            <a:ext cx="317520" cy="6855480"/>
           </a:xfrm>
           <a:prstGeom prst="rect">
             <a:avLst/>
@@ -10815,7 +10816,7 @@
         <p:spPr>
           <a:xfrm>
             <a:off x="9875520" y="365760"/>
-            <a:ext cx="2009520" cy="500760"/>
+            <a:ext cx="2009160" cy="500400"/>
           </a:xfrm>
           <a:prstGeom prst="roundRect">
             <a:avLst>
@@ -10889,7 +10890,7 @@
         <p:spPr>
           <a:xfrm>
             <a:off x="2796840" y="914400"/>
-            <a:ext cx="5375880" cy="638280"/>
+            <a:ext cx="5375520" cy="638280"/>
           </a:xfrm>
           <a:prstGeom prst="rect">
             <a:avLst/>
@@ -10943,7 +10944,7 @@
         <p:spPr>
           <a:xfrm>
             <a:off x="1149480" y="1828800"/>
-            <a:ext cx="9190080" cy="576360"/>
+            <a:ext cx="9189720" cy="576360"/>
           </a:xfrm>
           <a:prstGeom prst="rect">
             <a:avLst/>
@@ -11020,7 +11021,7 @@
         <p:spPr>
           <a:xfrm>
             <a:off x="987480" y="3182040"/>
-            <a:ext cx="3289680" cy="2741040"/>
+            <a:ext cx="3289320" cy="2740680"/>
           </a:xfrm>
           <a:prstGeom prst="roundRect">
             <a:avLst>
@@ -11082,7 +11083,7 @@
         <p:spPr>
           <a:xfrm>
             <a:off x="914400" y="3108960"/>
-            <a:ext cx="3289680" cy="3062520"/>
+            <a:ext cx="3289320" cy="3062160"/>
           </a:xfrm>
           <a:prstGeom prst="roundRect">
             <a:avLst>
@@ -11273,7 +11274,7 @@
         <p:spPr>
           <a:xfrm>
             <a:off x="4507920" y="3182040"/>
-            <a:ext cx="3289680" cy="2741040"/>
+            <a:ext cx="3289320" cy="2740680"/>
           </a:xfrm>
           <a:prstGeom prst="roundRect">
             <a:avLst>
@@ -11335,7 +11336,7 @@
         <p:spPr>
           <a:xfrm>
             <a:off x="4434840" y="3108960"/>
-            <a:ext cx="3289680" cy="2741040"/>
+            <a:ext cx="3289320" cy="2740680"/>
           </a:xfrm>
           <a:prstGeom prst="roundRect">
             <a:avLst>
@@ -11547,7 +11548,7 @@
         <p:spPr>
           <a:xfrm>
             <a:off x="8028360" y="3182040"/>
-            <a:ext cx="3289680" cy="2741040"/>
+            <a:ext cx="3289320" cy="2740680"/>
           </a:xfrm>
           <a:prstGeom prst="roundRect">
             <a:avLst>
@@ -11609,7 +11610,7 @@
         <p:spPr>
           <a:xfrm>
             <a:off x="7955280" y="2743200"/>
-            <a:ext cx="3702240" cy="3657240"/>
+            <a:ext cx="3701880" cy="3656880"/>
           </a:xfrm>
           <a:prstGeom prst="roundRect">
             <a:avLst>
@@ -12169,7 +12170,7 @@
         <p:spPr>
           <a:xfrm>
             <a:off x="0" y="0"/>
-            <a:ext cx="12186720" cy="6855840"/>
+            <a:ext cx="12186360" cy="6855480"/>
           </a:xfrm>
           <a:prstGeom prst="rect">
             <a:avLst/>
@@ -12205,6 +12206,11 @@
             <a:noAutofit/>
           </a:bodyPr>
           <a:p>
+            <a:pPr>
+              <a:lnSpc>
+                <a:spcPct val="100000"/>
+              </a:lnSpc>
+            </a:pPr>
             <a:endParaRPr b="0" lang="en-US" sz="1800" spc="-1" strike="noStrike">
               <a:solidFill>
                 <a:schemeClr val="lt1"/>
@@ -12224,7 +12230,7 @@
         <p:spPr>
           <a:xfrm>
             <a:off x="0" y="0"/>
-            <a:ext cx="16200" cy="6855840"/>
+            <a:ext cx="15840" cy="6855480"/>
           </a:xfrm>
           <a:prstGeom prst="rect">
             <a:avLst/>
@@ -12260,6 +12266,11 @@
             <a:noAutofit/>
           </a:bodyPr>
           <a:p>
+            <a:pPr>
+              <a:lnSpc>
+                <a:spcPct val="100000"/>
+              </a:lnSpc>
+            </a:pPr>
             <a:endParaRPr b="0" lang="en-US" sz="1800" spc="-1" strike="noStrike">
               <a:solidFill>
                 <a:schemeClr val="lt1"/>
@@ -12279,7 +12290,7 @@
         <p:spPr>
           <a:xfrm>
             <a:off x="914400" y="0"/>
-            <a:ext cx="16200" cy="6855840"/>
+            <a:ext cx="15840" cy="6855480"/>
           </a:xfrm>
           <a:prstGeom prst="rect">
             <a:avLst/>
@@ -12315,6 +12326,11 @@
             <a:noAutofit/>
           </a:bodyPr>
           <a:p>
+            <a:pPr>
+              <a:lnSpc>
+                <a:spcPct val="100000"/>
+              </a:lnSpc>
+            </a:pPr>
             <a:endParaRPr b="0" lang="en-US" sz="1800" spc="-1" strike="noStrike">
               <a:solidFill>
                 <a:schemeClr val="lt1"/>
@@ -12334,7 +12350,7 @@
         <p:spPr>
           <a:xfrm>
             <a:off x="1828800" y="0"/>
-            <a:ext cx="16200" cy="6855840"/>
+            <a:ext cx="15840" cy="6855480"/>
           </a:xfrm>
           <a:prstGeom prst="rect">
             <a:avLst/>
@@ -12370,6 +12386,11 @@
             <a:noAutofit/>
           </a:bodyPr>
           <a:p>
+            <a:pPr>
+              <a:lnSpc>
+                <a:spcPct val="100000"/>
+              </a:lnSpc>
+            </a:pPr>
             <a:endParaRPr b="0" lang="en-US" sz="1800" spc="-1" strike="noStrike">
               <a:solidFill>
                 <a:schemeClr val="lt1"/>
@@ -12389,7 +12410,7 @@
         <p:spPr>
           <a:xfrm>
             <a:off x="2743200" y="0"/>
-            <a:ext cx="16200" cy="6855840"/>
+            <a:ext cx="15840" cy="6855480"/>
           </a:xfrm>
           <a:prstGeom prst="rect">
             <a:avLst/>
@@ -12425,6 +12446,11 @@
             <a:noAutofit/>
           </a:bodyPr>
           <a:p>
+            <a:pPr>
+              <a:lnSpc>
+                <a:spcPct val="100000"/>
+              </a:lnSpc>
+            </a:pPr>
             <a:endParaRPr b="0" lang="en-US" sz="1800" spc="-1" strike="noStrike">
               <a:solidFill>
                 <a:schemeClr val="lt1"/>
@@ -12444,7 +12470,7 @@
         <p:spPr>
           <a:xfrm>
             <a:off x="3657600" y="0"/>
-            <a:ext cx="16200" cy="6855840"/>
+            <a:ext cx="15840" cy="6855480"/>
           </a:xfrm>
           <a:prstGeom prst="rect">
             <a:avLst/>
@@ -12480,6 +12506,11 @@
             <a:noAutofit/>
           </a:bodyPr>
           <a:p>
+            <a:pPr>
+              <a:lnSpc>
+                <a:spcPct val="100000"/>
+              </a:lnSpc>
+            </a:pPr>
             <a:endParaRPr b="0" lang="en-US" sz="1800" spc="-1" strike="noStrike">
               <a:solidFill>
                 <a:schemeClr val="lt1"/>
@@ -12499,7 +12530,7 @@
         <p:spPr>
           <a:xfrm>
             <a:off x="4572000" y="0"/>
-            <a:ext cx="16200" cy="6855840"/>
+            <a:ext cx="15840" cy="6855480"/>
           </a:xfrm>
           <a:prstGeom prst="rect">
             <a:avLst/>
@@ -12535,6 +12566,11 @@
             <a:noAutofit/>
           </a:bodyPr>
           <a:p>
+            <a:pPr>
+              <a:lnSpc>
+                <a:spcPct val="100000"/>
+              </a:lnSpc>
+            </a:pPr>
             <a:endParaRPr b="0" lang="en-US" sz="1800" spc="-1" strike="noStrike">
               <a:solidFill>
                 <a:schemeClr val="lt1"/>
@@ -12554,7 +12590,7 @@
         <p:spPr>
           <a:xfrm>
             <a:off x="5486400" y="0"/>
-            <a:ext cx="16200" cy="6855840"/>
+            <a:ext cx="15840" cy="6855480"/>
           </a:xfrm>
           <a:prstGeom prst="rect">
             <a:avLst/>
@@ -12590,6 +12626,11 @@
             <a:noAutofit/>
           </a:bodyPr>
           <a:p>
+            <a:pPr>
+              <a:lnSpc>
+                <a:spcPct val="100000"/>
+              </a:lnSpc>
+            </a:pPr>
             <a:endParaRPr b="0" lang="en-US" sz="1800" spc="-1" strike="noStrike">
               <a:solidFill>
                 <a:schemeClr val="lt1"/>
@@ -12609,7 +12650,7 @@
         <p:spPr>
           <a:xfrm>
             <a:off x="6400800" y="0"/>
-            <a:ext cx="16200" cy="6855840"/>
+            <a:ext cx="15840" cy="6855480"/>
           </a:xfrm>
           <a:prstGeom prst="rect">
             <a:avLst/>
@@ -12645,6 +12686,11 @@
             <a:noAutofit/>
           </a:bodyPr>
           <a:p>
+            <a:pPr>
+              <a:lnSpc>
+                <a:spcPct val="100000"/>
+              </a:lnSpc>
+            </a:pPr>
             <a:endParaRPr b="0" lang="en-US" sz="1800" spc="-1" strike="noStrike">
               <a:solidFill>
                 <a:schemeClr val="lt1"/>
@@ -12664,7 +12710,7 @@
         <p:spPr>
           <a:xfrm>
             <a:off x="7315200" y="0"/>
-            <a:ext cx="16200" cy="6855840"/>
+            <a:ext cx="15840" cy="6855480"/>
           </a:xfrm>
           <a:prstGeom prst="rect">
             <a:avLst/>
@@ -12700,6 +12746,11 @@
             <a:noAutofit/>
           </a:bodyPr>
           <a:p>
+            <a:pPr>
+              <a:lnSpc>
+                <a:spcPct val="100000"/>
+              </a:lnSpc>
+            </a:pPr>
             <a:endParaRPr b="0" lang="en-US" sz="1800" spc="-1" strike="noStrike">
               <a:solidFill>
                 <a:schemeClr val="lt1"/>
@@ -12719,7 +12770,7 @@
         <p:spPr>
           <a:xfrm>
             <a:off x="8229600" y="0"/>
-            <a:ext cx="16200" cy="6855840"/>
+            <a:ext cx="15840" cy="6855480"/>
           </a:xfrm>
           <a:prstGeom prst="rect">
             <a:avLst/>
@@ -12755,6 +12806,11 @@
             <a:noAutofit/>
           </a:bodyPr>
           <a:p>
+            <a:pPr>
+              <a:lnSpc>
+                <a:spcPct val="100000"/>
+              </a:lnSpc>
+            </a:pPr>
             <a:endParaRPr b="0" lang="en-US" sz="1800" spc="-1" strike="noStrike">
               <a:solidFill>
                 <a:schemeClr val="lt1"/>
@@ -12774,7 +12830,7 @@
         <p:spPr>
           <a:xfrm>
             <a:off x="9144000" y="0"/>
-            <a:ext cx="16200" cy="6855840"/>
+            <a:ext cx="15840" cy="6855480"/>
           </a:xfrm>
           <a:prstGeom prst="rect">
             <a:avLst/>
@@ -12810,6 +12866,11 @@
             <a:noAutofit/>
           </a:bodyPr>
           <a:p>
+            <a:pPr>
+              <a:lnSpc>
+                <a:spcPct val="100000"/>
+              </a:lnSpc>
+            </a:pPr>
             <a:endParaRPr b="0" lang="en-US" sz="1800" spc="-1" strike="noStrike">
               <a:solidFill>
                 <a:schemeClr val="lt1"/>
@@ -12829,7 +12890,7 @@
         <p:spPr>
           <a:xfrm>
             <a:off x="10058400" y="0"/>
-            <a:ext cx="16200" cy="6855840"/>
+            <a:ext cx="15840" cy="6855480"/>
           </a:xfrm>
           <a:prstGeom prst="rect">
             <a:avLst/>
@@ -12865,6 +12926,11 @@
             <a:noAutofit/>
           </a:bodyPr>
           <a:p>
+            <a:pPr>
+              <a:lnSpc>
+                <a:spcPct val="100000"/>
+              </a:lnSpc>
+            </a:pPr>
             <a:endParaRPr b="0" lang="en-US" sz="1800" spc="-1" strike="noStrike">
               <a:solidFill>
                 <a:schemeClr val="lt1"/>
@@ -12884,7 +12950,7 @@
         <p:spPr>
           <a:xfrm>
             <a:off x="10972800" y="0"/>
-            <a:ext cx="16200" cy="6855840"/>
+            <a:ext cx="15840" cy="6855480"/>
           </a:xfrm>
           <a:prstGeom prst="rect">
             <a:avLst/>
@@ -12920,6 +12986,11 @@
             <a:noAutofit/>
           </a:bodyPr>
           <a:p>
+            <a:pPr>
+              <a:lnSpc>
+                <a:spcPct val="100000"/>
+              </a:lnSpc>
+            </a:pPr>
             <a:endParaRPr b="0" lang="en-US" sz="1800" spc="-1" strike="noStrike">
               <a:solidFill>
                 <a:schemeClr val="lt1"/>
@@ -12939,7 +13010,7 @@
         <p:spPr>
           <a:xfrm>
             <a:off x="11887200" y="0"/>
-            <a:ext cx="16200" cy="6855840"/>
+            <a:ext cx="15840" cy="6855480"/>
           </a:xfrm>
           <a:prstGeom prst="rect">
             <a:avLst/>
@@ -12975,6 +13046,11 @@
             <a:noAutofit/>
           </a:bodyPr>
           <a:p>
+            <a:pPr>
+              <a:lnSpc>
+                <a:spcPct val="100000"/>
+              </a:lnSpc>
+            </a:pPr>
             <a:endParaRPr b="0" lang="en-US" sz="1800" spc="-1" strike="noStrike">
               <a:solidFill>
                 <a:schemeClr val="lt1"/>
@@ -12994,7 +13070,7 @@
         <p:spPr>
           <a:xfrm>
             <a:off x="0" y="0"/>
-            <a:ext cx="317880" cy="6855840"/>
+            <a:ext cx="317520" cy="6855480"/>
           </a:xfrm>
           <a:prstGeom prst="rect">
             <a:avLst/>
@@ -13030,6 +13106,11 @@
             <a:noAutofit/>
           </a:bodyPr>
           <a:p>
+            <a:pPr>
+              <a:lnSpc>
+                <a:spcPct val="100000"/>
+              </a:lnSpc>
+            </a:pPr>
             <a:endParaRPr b="0" lang="en-US" sz="1800" spc="-1" strike="noStrike">
               <a:solidFill>
                 <a:schemeClr val="lt1"/>
@@ -13049,7 +13130,7 @@
         <p:spPr>
           <a:xfrm>
             <a:off x="9875520" y="365760"/>
-            <a:ext cx="2009520" cy="500760"/>
+            <a:ext cx="2009160" cy="500400"/>
           </a:xfrm>
           <a:prstGeom prst="roundRect">
             <a:avLst>
@@ -13177,7 +13258,7 @@
         <p:spPr>
           <a:xfrm>
             <a:off x="1196640" y="1828800"/>
-            <a:ext cx="9095040" cy="576360"/>
+            <a:ext cx="9094680" cy="576360"/>
           </a:xfrm>
           <a:prstGeom prst="rect">
             <a:avLst/>
@@ -13254,7 +13335,7 @@
         <p:spPr>
           <a:xfrm>
             <a:off x="987480" y="3182040"/>
-            <a:ext cx="3289680" cy="2741040"/>
+            <a:ext cx="3289320" cy="2740680"/>
           </a:xfrm>
           <a:prstGeom prst="roundRect">
             <a:avLst>
@@ -13292,6 +13373,11 @@
             <a:noAutofit/>
           </a:bodyPr>
           <a:p>
+            <a:pPr>
+              <a:lnSpc>
+                <a:spcPct val="100000"/>
+              </a:lnSpc>
+            </a:pPr>
             <a:endParaRPr b="0" lang="en-US" sz="1800" spc="-1" strike="noStrike">
               <a:solidFill>
                 <a:schemeClr val="lt1"/>
@@ -13311,7 +13397,7 @@
         <p:spPr>
           <a:xfrm>
             <a:off x="457200" y="2514600"/>
-            <a:ext cx="3746880" cy="4114800"/>
+            <a:ext cx="3746520" cy="4114440"/>
           </a:xfrm>
           <a:prstGeom prst="roundRect">
             <a:avLst>
@@ -13549,7 +13635,7 @@
         <p:spPr>
           <a:xfrm>
             <a:off x="4507920" y="3182040"/>
-            <a:ext cx="3289680" cy="2741040"/>
+            <a:ext cx="3289320" cy="2740680"/>
           </a:xfrm>
           <a:prstGeom prst="roundRect">
             <a:avLst>
@@ -13587,6 +13673,11 @@
             <a:noAutofit/>
           </a:bodyPr>
           <a:p>
+            <a:pPr>
+              <a:lnSpc>
+                <a:spcPct val="100000"/>
+              </a:lnSpc>
+            </a:pPr>
             <a:endParaRPr b="0" lang="en-US" sz="1800" spc="-1" strike="noStrike">
               <a:solidFill>
                 <a:schemeClr val="lt1"/>
@@ -13606,7 +13697,7 @@
         <p:spPr>
           <a:xfrm>
             <a:off x="4434840" y="2971800"/>
-            <a:ext cx="3289680" cy="3427920"/>
+            <a:ext cx="3289320" cy="3427560"/>
           </a:xfrm>
           <a:prstGeom prst="roundRect">
             <a:avLst>
@@ -13825,7 +13916,7 @@
         <p:spPr>
           <a:xfrm>
             <a:off x="8028360" y="3182040"/>
-            <a:ext cx="3289680" cy="2741040"/>
+            <a:ext cx="3289320" cy="2740680"/>
           </a:xfrm>
           <a:prstGeom prst="roundRect">
             <a:avLst>
@@ -13863,6 +13954,11 @@
             <a:noAutofit/>
           </a:bodyPr>
           <a:p>
+            <a:pPr>
+              <a:lnSpc>
+                <a:spcPct val="100000"/>
+              </a:lnSpc>
+            </a:pPr>
             <a:endParaRPr b="0" lang="en-US" sz="1800" spc="-1" strike="noStrike">
               <a:solidFill>
                 <a:schemeClr val="lt1"/>
@@ -13882,7 +13978,7 @@
         <p:spPr>
           <a:xfrm>
             <a:off x="8001000" y="3200400"/>
-            <a:ext cx="3474720" cy="2743200"/>
+            <a:ext cx="3474360" cy="2742840"/>
           </a:xfrm>
           <a:prstGeom prst="roundRect">
             <a:avLst>
@@ -14204,6 +14300,2417 @@
       <p:sp>
         <p:nvSpPr>
           <p:cNvPr id="170" name="TextBox 15"/>
+          <p:cNvSpPr/>
+          <p:nvPr/>
+        </p:nvSpPr>
+        <p:spPr>
+          <a:xfrm>
+            <a:off x="4600080" y="6446520"/>
+            <a:ext cx="3051000" cy="363960"/>
+          </a:xfrm>
+          <a:prstGeom prst="rect">
+            <a:avLst/>
+          </a:prstGeom>
+          <a:noFill/>
+          <a:ln w="0">
+            <a:noFill/>
+          </a:ln>
+        </p:spPr>
+        <p:style>
+          <a:lnRef idx="0"/>
+          <a:fillRef idx="0"/>
+          <a:effectRef idx="0"/>
+          <a:fontRef idx="minor"/>
+        </p:style>
+        <p:txBody>
+          <a:bodyPr wrap="none" lIns="90000" rIns="90000" tIns="45000" bIns="45000" anchor="t">
+            <a:spAutoFit/>
+          </a:bodyPr>
+          <a:p>
+            <a:pPr>
+              <a:lnSpc>
+                <a:spcPct val="100000"/>
+              </a:lnSpc>
+            </a:pPr>
+            <a:r>
+              <a:rPr b="0" lang="en-US" sz="1800" spc="-1" strike="noStrike">
+                <a:solidFill>
+                  <a:srgbClr val="000000"/>
+                </a:solidFill>
+                <a:latin typeface="Calibri"/>
+                <a:ea typeface="DejaVu Sans"/>
+              </a:rPr>
+              <a:t>Java • Ultra Premium Template</a:t>
+            </a:r>
+            <a:endParaRPr b="0" lang="en-US" sz="1800" spc="-1" strike="noStrike">
+              <a:solidFill>
+                <a:srgbClr val="000000"/>
+              </a:solidFill>
+              <a:latin typeface="Arial"/>
+            </a:endParaRPr>
+          </a:p>
+        </p:txBody>
+      </p:sp>
+    </p:spTree>
+  </p:cSld>
+  <mc:AlternateContent>
+    <mc:Choice Requires="p14">
+      <p:transition spd="slow" p14:dur="2000"/>
+    </mc:Choice>
+    <mc:Fallback>
+      <p:transition spd="slow"/>
+    </mc:Fallback>
+  </mc:AlternateContent>
+</p:sld>
+</file>
+
+<file path=ppt/slides/slide6.xml><?xml version="1.0" encoding="utf-8"?>
+<p:sld xmlns:a="http://schemas.openxmlformats.org/drawingml/2006/main" xmlns:p="http://schemas.openxmlformats.org/presentationml/2006/main" xmlns:r="http://schemas.openxmlformats.org/officeDocument/2006/relationships" xmlns:p14="http://schemas.microsoft.com/office/powerpoint/2010/main" xmlns:p15="http://schemas.microsoft.com/office/powerpoint/2012/main" xmlns:mc="http://schemas.openxmlformats.org/markup-compatibility/2006">
+  <p:cSld>
+    <p:spTree>
+      <p:nvGrpSpPr>
+        <p:cNvPr id="1" name=""/>
+        <p:cNvGrpSpPr/>
+        <p:nvPr/>
+      </p:nvGrpSpPr>
+      <p:grpSpPr>
+        <a:xfrm>
+          <a:off x="0" y="0"/>
+          <a:ext cx="0" cy="0"/>
+          <a:chOff x="0" y="0"/>
+          <a:chExt cx="0" cy="0"/>
+        </a:xfrm>
+      </p:grpSpPr>
+      <p:sp>
+        <p:nvSpPr>
+          <p:cNvPr id="171" name="Rectangle 81"/>
+          <p:cNvSpPr/>
+          <p:nvPr/>
+        </p:nvSpPr>
+        <p:spPr>
+          <a:xfrm>
+            <a:off x="0" y="0"/>
+            <a:ext cx="12186360" cy="6855480"/>
+          </a:xfrm>
+          <a:prstGeom prst="rect">
+            <a:avLst/>
+          </a:prstGeom>
+          <a:solidFill>
+            <a:srgbClr val="0b0b0d"/>
+          </a:solidFill>
+          <a:ln>
+            <a:noFill/>
+          </a:ln>
+          <a:effectLst>
+            <a:outerShdw blurRad="39960" dir="5400000" dist="23040" rotWithShape="0">
+              <a:srgbClr val="000000">
+                <a:alpha val="35000"/>
+              </a:srgbClr>
+            </a:outerShdw>
+          </a:effectLst>
+        </p:spPr>
+        <p:style>
+          <a:lnRef idx="1">
+            <a:schemeClr val="accent1"/>
+          </a:lnRef>
+          <a:fillRef idx="3">
+            <a:schemeClr val="accent1"/>
+          </a:fillRef>
+          <a:effectRef idx="2">
+            <a:schemeClr val="accent1"/>
+          </a:effectRef>
+          <a:fontRef idx="minor"/>
+        </p:style>
+        <p:txBody>
+          <a:bodyPr lIns="90000" rIns="90000" tIns="45000" bIns="45000" anchor="ctr">
+            <a:noAutofit/>
+          </a:bodyPr>
+          <a:p>
+            <a:endParaRPr b="0" lang="en-US" sz="1800" spc="-1" strike="noStrike">
+              <a:solidFill>
+                <a:schemeClr val="lt1"/>
+              </a:solidFill>
+              <a:latin typeface="Calibri"/>
+              <a:ea typeface="DejaVu Sans"/>
+            </a:endParaRPr>
+          </a:p>
+        </p:txBody>
+      </p:sp>
+      <p:sp>
+        <p:nvSpPr>
+          <p:cNvPr id="172" name="Rectangle 82"/>
+          <p:cNvSpPr/>
+          <p:nvPr/>
+        </p:nvSpPr>
+        <p:spPr>
+          <a:xfrm>
+            <a:off x="0" y="0"/>
+            <a:ext cx="15840" cy="6855480"/>
+          </a:xfrm>
+          <a:prstGeom prst="rect">
+            <a:avLst/>
+          </a:prstGeom>
+          <a:solidFill>
+            <a:srgbClr val="121216"/>
+          </a:solidFill>
+          <a:ln>
+            <a:noFill/>
+          </a:ln>
+          <a:effectLst>
+            <a:outerShdw blurRad="39960" dir="5400000" dist="23040" rotWithShape="0">
+              <a:srgbClr val="000000">
+                <a:alpha val="35000"/>
+              </a:srgbClr>
+            </a:outerShdw>
+          </a:effectLst>
+        </p:spPr>
+        <p:style>
+          <a:lnRef idx="1">
+            <a:schemeClr val="accent1"/>
+          </a:lnRef>
+          <a:fillRef idx="3">
+            <a:schemeClr val="accent1"/>
+          </a:fillRef>
+          <a:effectRef idx="2">
+            <a:schemeClr val="accent1"/>
+          </a:effectRef>
+          <a:fontRef idx="minor"/>
+        </p:style>
+        <p:txBody>
+          <a:bodyPr lIns="90000" rIns="90000" tIns="45000" bIns="45000" anchor="ctr">
+            <a:noAutofit/>
+          </a:bodyPr>
+          <a:p>
+            <a:endParaRPr b="0" lang="en-US" sz="1800" spc="-1" strike="noStrike">
+              <a:solidFill>
+                <a:schemeClr val="lt1"/>
+              </a:solidFill>
+              <a:latin typeface="Calibri"/>
+              <a:ea typeface="DejaVu Sans"/>
+            </a:endParaRPr>
+          </a:p>
+        </p:txBody>
+      </p:sp>
+      <p:sp>
+        <p:nvSpPr>
+          <p:cNvPr id="173" name="Rectangle 83"/>
+          <p:cNvSpPr/>
+          <p:nvPr/>
+        </p:nvSpPr>
+        <p:spPr>
+          <a:xfrm>
+            <a:off x="914400" y="0"/>
+            <a:ext cx="15840" cy="6855480"/>
+          </a:xfrm>
+          <a:prstGeom prst="rect">
+            <a:avLst/>
+          </a:prstGeom>
+          <a:solidFill>
+            <a:srgbClr val="121216"/>
+          </a:solidFill>
+          <a:ln>
+            <a:noFill/>
+          </a:ln>
+          <a:effectLst>
+            <a:outerShdw blurRad="39960" dir="5400000" dist="23040" rotWithShape="0">
+              <a:srgbClr val="000000">
+                <a:alpha val="35000"/>
+              </a:srgbClr>
+            </a:outerShdw>
+          </a:effectLst>
+        </p:spPr>
+        <p:style>
+          <a:lnRef idx="1">
+            <a:schemeClr val="accent1"/>
+          </a:lnRef>
+          <a:fillRef idx="3">
+            <a:schemeClr val="accent1"/>
+          </a:fillRef>
+          <a:effectRef idx="2">
+            <a:schemeClr val="accent1"/>
+          </a:effectRef>
+          <a:fontRef idx="minor"/>
+        </p:style>
+        <p:txBody>
+          <a:bodyPr lIns="90000" rIns="90000" tIns="45000" bIns="45000" anchor="ctr">
+            <a:noAutofit/>
+          </a:bodyPr>
+          <a:p>
+            <a:endParaRPr b="0" lang="en-US" sz="1800" spc="-1" strike="noStrike">
+              <a:solidFill>
+                <a:schemeClr val="lt1"/>
+              </a:solidFill>
+              <a:latin typeface="Calibri"/>
+              <a:ea typeface="DejaVu Sans"/>
+            </a:endParaRPr>
+          </a:p>
+        </p:txBody>
+      </p:sp>
+      <p:sp>
+        <p:nvSpPr>
+          <p:cNvPr id="174" name="Rectangle 84"/>
+          <p:cNvSpPr/>
+          <p:nvPr/>
+        </p:nvSpPr>
+        <p:spPr>
+          <a:xfrm>
+            <a:off x="1828800" y="0"/>
+            <a:ext cx="15840" cy="6855480"/>
+          </a:xfrm>
+          <a:prstGeom prst="rect">
+            <a:avLst/>
+          </a:prstGeom>
+          <a:solidFill>
+            <a:srgbClr val="121216"/>
+          </a:solidFill>
+          <a:ln>
+            <a:noFill/>
+          </a:ln>
+          <a:effectLst>
+            <a:outerShdw blurRad="39960" dir="5400000" dist="23040" rotWithShape="0">
+              <a:srgbClr val="000000">
+                <a:alpha val="35000"/>
+              </a:srgbClr>
+            </a:outerShdw>
+          </a:effectLst>
+        </p:spPr>
+        <p:style>
+          <a:lnRef idx="1">
+            <a:schemeClr val="accent1"/>
+          </a:lnRef>
+          <a:fillRef idx="3">
+            <a:schemeClr val="accent1"/>
+          </a:fillRef>
+          <a:effectRef idx="2">
+            <a:schemeClr val="accent1"/>
+          </a:effectRef>
+          <a:fontRef idx="minor"/>
+        </p:style>
+        <p:txBody>
+          <a:bodyPr lIns="90000" rIns="90000" tIns="45000" bIns="45000" anchor="ctr">
+            <a:noAutofit/>
+          </a:bodyPr>
+          <a:p>
+            <a:endParaRPr b="0" lang="en-US" sz="1800" spc="-1" strike="noStrike">
+              <a:solidFill>
+                <a:schemeClr val="lt1"/>
+              </a:solidFill>
+              <a:latin typeface="Calibri"/>
+              <a:ea typeface="DejaVu Sans"/>
+            </a:endParaRPr>
+          </a:p>
+        </p:txBody>
+      </p:sp>
+      <p:sp>
+        <p:nvSpPr>
+          <p:cNvPr id="175" name="Rectangle 85"/>
+          <p:cNvSpPr/>
+          <p:nvPr/>
+        </p:nvSpPr>
+        <p:spPr>
+          <a:xfrm>
+            <a:off x="2743200" y="0"/>
+            <a:ext cx="15840" cy="6855480"/>
+          </a:xfrm>
+          <a:prstGeom prst="rect">
+            <a:avLst/>
+          </a:prstGeom>
+          <a:solidFill>
+            <a:srgbClr val="121216"/>
+          </a:solidFill>
+          <a:ln>
+            <a:noFill/>
+          </a:ln>
+          <a:effectLst>
+            <a:outerShdw blurRad="39960" dir="5400000" dist="23040" rotWithShape="0">
+              <a:srgbClr val="000000">
+                <a:alpha val="35000"/>
+              </a:srgbClr>
+            </a:outerShdw>
+          </a:effectLst>
+        </p:spPr>
+        <p:style>
+          <a:lnRef idx="1">
+            <a:schemeClr val="accent1"/>
+          </a:lnRef>
+          <a:fillRef idx="3">
+            <a:schemeClr val="accent1"/>
+          </a:fillRef>
+          <a:effectRef idx="2">
+            <a:schemeClr val="accent1"/>
+          </a:effectRef>
+          <a:fontRef idx="minor"/>
+        </p:style>
+        <p:txBody>
+          <a:bodyPr lIns="90000" rIns="90000" tIns="45000" bIns="45000" anchor="ctr">
+            <a:noAutofit/>
+          </a:bodyPr>
+          <a:p>
+            <a:endParaRPr b="0" lang="en-US" sz="1800" spc="-1" strike="noStrike">
+              <a:solidFill>
+                <a:schemeClr val="lt1"/>
+              </a:solidFill>
+              <a:latin typeface="Calibri"/>
+              <a:ea typeface="DejaVu Sans"/>
+            </a:endParaRPr>
+          </a:p>
+        </p:txBody>
+      </p:sp>
+      <p:sp>
+        <p:nvSpPr>
+          <p:cNvPr id="176" name="Rectangle 86"/>
+          <p:cNvSpPr/>
+          <p:nvPr/>
+        </p:nvSpPr>
+        <p:spPr>
+          <a:xfrm>
+            <a:off x="3657600" y="0"/>
+            <a:ext cx="15840" cy="6855480"/>
+          </a:xfrm>
+          <a:prstGeom prst="rect">
+            <a:avLst/>
+          </a:prstGeom>
+          <a:solidFill>
+            <a:srgbClr val="121216"/>
+          </a:solidFill>
+          <a:ln>
+            <a:noFill/>
+          </a:ln>
+          <a:effectLst>
+            <a:outerShdw blurRad="39960" dir="5400000" dist="23040" rotWithShape="0">
+              <a:srgbClr val="000000">
+                <a:alpha val="35000"/>
+              </a:srgbClr>
+            </a:outerShdw>
+          </a:effectLst>
+        </p:spPr>
+        <p:style>
+          <a:lnRef idx="1">
+            <a:schemeClr val="accent1"/>
+          </a:lnRef>
+          <a:fillRef idx="3">
+            <a:schemeClr val="accent1"/>
+          </a:fillRef>
+          <a:effectRef idx="2">
+            <a:schemeClr val="accent1"/>
+          </a:effectRef>
+          <a:fontRef idx="minor"/>
+        </p:style>
+        <p:txBody>
+          <a:bodyPr lIns="90000" rIns="90000" tIns="45000" bIns="45000" anchor="ctr">
+            <a:noAutofit/>
+          </a:bodyPr>
+          <a:p>
+            <a:endParaRPr b="0" lang="en-US" sz="1800" spc="-1" strike="noStrike">
+              <a:solidFill>
+                <a:schemeClr val="lt1"/>
+              </a:solidFill>
+              <a:latin typeface="Calibri"/>
+              <a:ea typeface="DejaVu Sans"/>
+            </a:endParaRPr>
+          </a:p>
+        </p:txBody>
+      </p:sp>
+      <p:sp>
+        <p:nvSpPr>
+          <p:cNvPr id="177" name="Rectangle 87"/>
+          <p:cNvSpPr/>
+          <p:nvPr/>
+        </p:nvSpPr>
+        <p:spPr>
+          <a:xfrm>
+            <a:off x="4572000" y="0"/>
+            <a:ext cx="15840" cy="6855480"/>
+          </a:xfrm>
+          <a:prstGeom prst="rect">
+            <a:avLst/>
+          </a:prstGeom>
+          <a:solidFill>
+            <a:srgbClr val="121216"/>
+          </a:solidFill>
+          <a:ln>
+            <a:noFill/>
+          </a:ln>
+          <a:effectLst>
+            <a:outerShdw blurRad="39960" dir="5400000" dist="23040" rotWithShape="0">
+              <a:srgbClr val="000000">
+                <a:alpha val="35000"/>
+              </a:srgbClr>
+            </a:outerShdw>
+          </a:effectLst>
+        </p:spPr>
+        <p:style>
+          <a:lnRef idx="1">
+            <a:schemeClr val="accent1"/>
+          </a:lnRef>
+          <a:fillRef idx="3">
+            <a:schemeClr val="accent1"/>
+          </a:fillRef>
+          <a:effectRef idx="2">
+            <a:schemeClr val="accent1"/>
+          </a:effectRef>
+          <a:fontRef idx="minor"/>
+        </p:style>
+        <p:txBody>
+          <a:bodyPr lIns="90000" rIns="90000" tIns="45000" bIns="45000" anchor="ctr">
+            <a:noAutofit/>
+          </a:bodyPr>
+          <a:p>
+            <a:endParaRPr b="0" lang="en-US" sz="1800" spc="-1" strike="noStrike">
+              <a:solidFill>
+                <a:schemeClr val="lt1"/>
+              </a:solidFill>
+              <a:latin typeface="Calibri"/>
+              <a:ea typeface="DejaVu Sans"/>
+            </a:endParaRPr>
+          </a:p>
+        </p:txBody>
+      </p:sp>
+      <p:sp>
+        <p:nvSpPr>
+          <p:cNvPr id="178" name="Rectangle 88"/>
+          <p:cNvSpPr/>
+          <p:nvPr/>
+        </p:nvSpPr>
+        <p:spPr>
+          <a:xfrm>
+            <a:off x="5486400" y="0"/>
+            <a:ext cx="15840" cy="6855480"/>
+          </a:xfrm>
+          <a:prstGeom prst="rect">
+            <a:avLst/>
+          </a:prstGeom>
+          <a:solidFill>
+            <a:srgbClr val="121216"/>
+          </a:solidFill>
+          <a:ln>
+            <a:noFill/>
+          </a:ln>
+          <a:effectLst>
+            <a:outerShdw blurRad="39960" dir="5400000" dist="23040" rotWithShape="0">
+              <a:srgbClr val="000000">
+                <a:alpha val="35000"/>
+              </a:srgbClr>
+            </a:outerShdw>
+          </a:effectLst>
+        </p:spPr>
+        <p:style>
+          <a:lnRef idx="1">
+            <a:schemeClr val="accent1"/>
+          </a:lnRef>
+          <a:fillRef idx="3">
+            <a:schemeClr val="accent1"/>
+          </a:fillRef>
+          <a:effectRef idx="2">
+            <a:schemeClr val="accent1"/>
+          </a:effectRef>
+          <a:fontRef idx="minor"/>
+        </p:style>
+        <p:txBody>
+          <a:bodyPr lIns="90000" rIns="90000" tIns="45000" bIns="45000" anchor="ctr">
+            <a:noAutofit/>
+          </a:bodyPr>
+          <a:p>
+            <a:endParaRPr b="0" lang="en-US" sz="1800" spc="-1" strike="noStrike">
+              <a:solidFill>
+                <a:schemeClr val="lt1"/>
+              </a:solidFill>
+              <a:latin typeface="Calibri"/>
+              <a:ea typeface="DejaVu Sans"/>
+            </a:endParaRPr>
+          </a:p>
+        </p:txBody>
+      </p:sp>
+      <p:sp>
+        <p:nvSpPr>
+          <p:cNvPr id="179" name="Rectangle 89"/>
+          <p:cNvSpPr/>
+          <p:nvPr/>
+        </p:nvSpPr>
+        <p:spPr>
+          <a:xfrm>
+            <a:off x="6400800" y="0"/>
+            <a:ext cx="15840" cy="6855480"/>
+          </a:xfrm>
+          <a:prstGeom prst="rect">
+            <a:avLst/>
+          </a:prstGeom>
+          <a:solidFill>
+            <a:srgbClr val="121216"/>
+          </a:solidFill>
+          <a:ln>
+            <a:noFill/>
+          </a:ln>
+          <a:effectLst>
+            <a:outerShdw blurRad="39960" dir="5400000" dist="23040" rotWithShape="0">
+              <a:srgbClr val="000000">
+                <a:alpha val="35000"/>
+              </a:srgbClr>
+            </a:outerShdw>
+          </a:effectLst>
+        </p:spPr>
+        <p:style>
+          <a:lnRef idx="1">
+            <a:schemeClr val="accent1"/>
+          </a:lnRef>
+          <a:fillRef idx="3">
+            <a:schemeClr val="accent1"/>
+          </a:fillRef>
+          <a:effectRef idx="2">
+            <a:schemeClr val="accent1"/>
+          </a:effectRef>
+          <a:fontRef idx="minor"/>
+        </p:style>
+        <p:txBody>
+          <a:bodyPr lIns="90000" rIns="90000" tIns="45000" bIns="45000" anchor="ctr">
+            <a:noAutofit/>
+          </a:bodyPr>
+          <a:p>
+            <a:endParaRPr b="0" lang="en-US" sz="1800" spc="-1" strike="noStrike">
+              <a:solidFill>
+                <a:schemeClr val="lt1"/>
+              </a:solidFill>
+              <a:latin typeface="Calibri"/>
+              <a:ea typeface="DejaVu Sans"/>
+            </a:endParaRPr>
+          </a:p>
+        </p:txBody>
+      </p:sp>
+      <p:sp>
+        <p:nvSpPr>
+          <p:cNvPr id="180" name="Rectangle 90"/>
+          <p:cNvSpPr/>
+          <p:nvPr/>
+        </p:nvSpPr>
+        <p:spPr>
+          <a:xfrm>
+            <a:off x="7315200" y="0"/>
+            <a:ext cx="15840" cy="6855480"/>
+          </a:xfrm>
+          <a:prstGeom prst="rect">
+            <a:avLst/>
+          </a:prstGeom>
+          <a:solidFill>
+            <a:srgbClr val="121216"/>
+          </a:solidFill>
+          <a:ln>
+            <a:noFill/>
+          </a:ln>
+          <a:effectLst>
+            <a:outerShdw blurRad="39960" dir="5400000" dist="23040" rotWithShape="0">
+              <a:srgbClr val="000000">
+                <a:alpha val="35000"/>
+              </a:srgbClr>
+            </a:outerShdw>
+          </a:effectLst>
+        </p:spPr>
+        <p:style>
+          <a:lnRef idx="1">
+            <a:schemeClr val="accent1"/>
+          </a:lnRef>
+          <a:fillRef idx="3">
+            <a:schemeClr val="accent1"/>
+          </a:fillRef>
+          <a:effectRef idx="2">
+            <a:schemeClr val="accent1"/>
+          </a:effectRef>
+          <a:fontRef idx="minor"/>
+        </p:style>
+        <p:txBody>
+          <a:bodyPr lIns="90000" rIns="90000" tIns="45000" bIns="45000" anchor="ctr">
+            <a:noAutofit/>
+          </a:bodyPr>
+          <a:p>
+            <a:endParaRPr b="0" lang="en-US" sz="1800" spc="-1" strike="noStrike">
+              <a:solidFill>
+                <a:schemeClr val="lt1"/>
+              </a:solidFill>
+              <a:latin typeface="Calibri"/>
+              <a:ea typeface="DejaVu Sans"/>
+            </a:endParaRPr>
+          </a:p>
+        </p:txBody>
+      </p:sp>
+      <p:sp>
+        <p:nvSpPr>
+          <p:cNvPr id="181" name="Rectangle 91"/>
+          <p:cNvSpPr/>
+          <p:nvPr/>
+        </p:nvSpPr>
+        <p:spPr>
+          <a:xfrm>
+            <a:off x="8229600" y="0"/>
+            <a:ext cx="15840" cy="6855480"/>
+          </a:xfrm>
+          <a:prstGeom prst="rect">
+            <a:avLst/>
+          </a:prstGeom>
+          <a:solidFill>
+            <a:srgbClr val="121216"/>
+          </a:solidFill>
+          <a:ln>
+            <a:noFill/>
+          </a:ln>
+          <a:effectLst>
+            <a:outerShdw blurRad="39960" dir="5400000" dist="23040" rotWithShape="0">
+              <a:srgbClr val="000000">
+                <a:alpha val="35000"/>
+              </a:srgbClr>
+            </a:outerShdw>
+          </a:effectLst>
+        </p:spPr>
+        <p:style>
+          <a:lnRef idx="1">
+            <a:schemeClr val="accent1"/>
+          </a:lnRef>
+          <a:fillRef idx="3">
+            <a:schemeClr val="accent1"/>
+          </a:fillRef>
+          <a:effectRef idx="2">
+            <a:schemeClr val="accent1"/>
+          </a:effectRef>
+          <a:fontRef idx="minor"/>
+        </p:style>
+        <p:txBody>
+          <a:bodyPr lIns="90000" rIns="90000" tIns="45000" bIns="45000" anchor="ctr">
+            <a:noAutofit/>
+          </a:bodyPr>
+          <a:p>
+            <a:endParaRPr b="0" lang="en-US" sz="1800" spc="-1" strike="noStrike">
+              <a:solidFill>
+                <a:schemeClr val="lt1"/>
+              </a:solidFill>
+              <a:latin typeface="Calibri"/>
+              <a:ea typeface="DejaVu Sans"/>
+            </a:endParaRPr>
+          </a:p>
+        </p:txBody>
+      </p:sp>
+      <p:sp>
+        <p:nvSpPr>
+          <p:cNvPr id="182" name="Rectangle 92"/>
+          <p:cNvSpPr/>
+          <p:nvPr/>
+        </p:nvSpPr>
+        <p:spPr>
+          <a:xfrm>
+            <a:off x="9144000" y="0"/>
+            <a:ext cx="15840" cy="6855480"/>
+          </a:xfrm>
+          <a:prstGeom prst="rect">
+            <a:avLst/>
+          </a:prstGeom>
+          <a:solidFill>
+            <a:srgbClr val="121216"/>
+          </a:solidFill>
+          <a:ln>
+            <a:noFill/>
+          </a:ln>
+          <a:effectLst>
+            <a:outerShdw blurRad="39960" dir="5400000" dist="23040" rotWithShape="0">
+              <a:srgbClr val="000000">
+                <a:alpha val="35000"/>
+              </a:srgbClr>
+            </a:outerShdw>
+          </a:effectLst>
+        </p:spPr>
+        <p:style>
+          <a:lnRef idx="1">
+            <a:schemeClr val="accent1"/>
+          </a:lnRef>
+          <a:fillRef idx="3">
+            <a:schemeClr val="accent1"/>
+          </a:fillRef>
+          <a:effectRef idx="2">
+            <a:schemeClr val="accent1"/>
+          </a:effectRef>
+          <a:fontRef idx="minor"/>
+        </p:style>
+        <p:txBody>
+          <a:bodyPr lIns="90000" rIns="90000" tIns="45000" bIns="45000" anchor="ctr">
+            <a:noAutofit/>
+          </a:bodyPr>
+          <a:p>
+            <a:endParaRPr b="0" lang="en-US" sz="1800" spc="-1" strike="noStrike">
+              <a:solidFill>
+                <a:schemeClr val="lt1"/>
+              </a:solidFill>
+              <a:latin typeface="Calibri"/>
+              <a:ea typeface="DejaVu Sans"/>
+            </a:endParaRPr>
+          </a:p>
+        </p:txBody>
+      </p:sp>
+      <p:sp>
+        <p:nvSpPr>
+          <p:cNvPr id="183" name="Rectangle 93"/>
+          <p:cNvSpPr/>
+          <p:nvPr/>
+        </p:nvSpPr>
+        <p:spPr>
+          <a:xfrm>
+            <a:off x="10058400" y="0"/>
+            <a:ext cx="15840" cy="6855480"/>
+          </a:xfrm>
+          <a:prstGeom prst="rect">
+            <a:avLst/>
+          </a:prstGeom>
+          <a:solidFill>
+            <a:srgbClr val="121216"/>
+          </a:solidFill>
+          <a:ln>
+            <a:noFill/>
+          </a:ln>
+          <a:effectLst>
+            <a:outerShdw blurRad="39960" dir="5400000" dist="23040" rotWithShape="0">
+              <a:srgbClr val="000000">
+                <a:alpha val="35000"/>
+              </a:srgbClr>
+            </a:outerShdw>
+          </a:effectLst>
+        </p:spPr>
+        <p:style>
+          <a:lnRef idx="1">
+            <a:schemeClr val="accent1"/>
+          </a:lnRef>
+          <a:fillRef idx="3">
+            <a:schemeClr val="accent1"/>
+          </a:fillRef>
+          <a:effectRef idx="2">
+            <a:schemeClr val="accent1"/>
+          </a:effectRef>
+          <a:fontRef idx="minor"/>
+        </p:style>
+        <p:txBody>
+          <a:bodyPr lIns="90000" rIns="90000" tIns="45000" bIns="45000" anchor="ctr">
+            <a:noAutofit/>
+          </a:bodyPr>
+          <a:p>
+            <a:endParaRPr b="0" lang="en-US" sz="1800" spc="-1" strike="noStrike">
+              <a:solidFill>
+                <a:schemeClr val="lt1"/>
+              </a:solidFill>
+              <a:latin typeface="Calibri"/>
+              <a:ea typeface="DejaVu Sans"/>
+            </a:endParaRPr>
+          </a:p>
+        </p:txBody>
+      </p:sp>
+      <p:sp>
+        <p:nvSpPr>
+          <p:cNvPr id="184" name="Rectangle 94"/>
+          <p:cNvSpPr/>
+          <p:nvPr/>
+        </p:nvSpPr>
+        <p:spPr>
+          <a:xfrm>
+            <a:off x="10972800" y="0"/>
+            <a:ext cx="15840" cy="6855480"/>
+          </a:xfrm>
+          <a:prstGeom prst="rect">
+            <a:avLst/>
+          </a:prstGeom>
+          <a:solidFill>
+            <a:srgbClr val="121216"/>
+          </a:solidFill>
+          <a:ln>
+            <a:noFill/>
+          </a:ln>
+          <a:effectLst>
+            <a:outerShdw blurRad="39960" dir="5400000" dist="23040" rotWithShape="0">
+              <a:srgbClr val="000000">
+                <a:alpha val="35000"/>
+              </a:srgbClr>
+            </a:outerShdw>
+          </a:effectLst>
+        </p:spPr>
+        <p:style>
+          <a:lnRef idx="1">
+            <a:schemeClr val="accent1"/>
+          </a:lnRef>
+          <a:fillRef idx="3">
+            <a:schemeClr val="accent1"/>
+          </a:fillRef>
+          <a:effectRef idx="2">
+            <a:schemeClr val="accent1"/>
+          </a:effectRef>
+          <a:fontRef idx="minor"/>
+        </p:style>
+        <p:txBody>
+          <a:bodyPr lIns="90000" rIns="90000" tIns="45000" bIns="45000" anchor="ctr">
+            <a:noAutofit/>
+          </a:bodyPr>
+          <a:p>
+            <a:endParaRPr b="0" lang="en-US" sz="1800" spc="-1" strike="noStrike">
+              <a:solidFill>
+                <a:schemeClr val="lt1"/>
+              </a:solidFill>
+              <a:latin typeface="Calibri"/>
+              <a:ea typeface="DejaVu Sans"/>
+            </a:endParaRPr>
+          </a:p>
+        </p:txBody>
+      </p:sp>
+      <p:sp>
+        <p:nvSpPr>
+          <p:cNvPr id="185" name="Rectangle 95"/>
+          <p:cNvSpPr/>
+          <p:nvPr/>
+        </p:nvSpPr>
+        <p:spPr>
+          <a:xfrm>
+            <a:off x="11887200" y="0"/>
+            <a:ext cx="15840" cy="6855480"/>
+          </a:xfrm>
+          <a:prstGeom prst="rect">
+            <a:avLst/>
+          </a:prstGeom>
+          <a:solidFill>
+            <a:srgbClr val="121216"/>
+          </a:solidFill>
+          <a:ln>
+            <a:noFill/>
+          </a:ln>
+          <a:effectLst>
+            <a:outerShdw blurRad="39960" dir="5400000" dist="23040" rotWithShape="0">
+              <a:srgbClr val="000000">
+                <a:alpha val="35000"/>
+              </a:srgbClr>
+            </a:outerShdw>
+          </a:effectLst>
+        </p:spPr>
+        <p:style>
+          <a:lnRef idx="1">
+            <a:schemeClr val="accent1"/>
+          </a:lnRef>
+          <a:fillRef idx="3">
+            <a:schemeClr val="accent1"/>
+          </a:fillRef>
+          <a:effectRef idx="2">
+            <a:schemeClr val="accent1"/>
+          </a:effectRef>
+          <a:fontRef idx="minor"/>
+        </p:style>
+        <p:txBody>
+          <a:bodyPr lIns="90000" rIns="90000" tIns="45000" bIns="45000" anchor="ctr">
+            <a:noAutofit/>
+          </a:bodyPr>
+          <a:p>
+            <a:endParaRPr b="0" lang="en-US" sz="1800" spc="-1" strike="noStrike">
+              <a:solidFill>
+                <a:schemeClr val="lt1"/>
+              </a:solidFill>
+              <a:latin typeface="Calibri"/>
+              <a:ea typeface="DejaVu Sans"/>
+            </a:endParaRPr>
+          </a:p>
+        </p:txBody>
+      </p:sp>
+      <p:sp>
+        <p:nvSpPr>
+          <p:cNvPr id="186" name="Rectangle 96"/>
+          <p:cNvSpPr/>
+          <p:nvPr/>
+        </p:nvSpPr>
+        <p:spPr>
+          <a:xfrm>
+            <a:off x="0" y="0"/>
+            <a:ext cx="317520" cy="6855480"/>
+          </a:xfrm>
+          <a:prstGeom prst="rect">
+            <a:avLst/>
+          </a:prstGeom>
+          <a:solidFill>
+            <a:srgbClr val="ff8c00"/>
+          </a:solidFill>
+          <a:ln>
+            <a:noFill/>
+          </a:ln>
+          <a:effectLst>
+            <a:outerShdw blurRad="39960" dir="5400000" dist="23040" rotWithShape="0">
+              <a:srgbClr val="000000">
+                <a:alpha val="35000"/>
+              </a:srgbClr>
+            </a:outerShdw>
+          </a:effectLst>
+        </p:spPr>
+        <p:style>
+          <a:lnRef idx="1">
+            <a:schemeClr val="accent1"/>
+          </a:lnRef>
+          <a:fillRef idx="3">
+            <a:schemeClr val="accent1"/>
+          </a:fillRef>
+          <a:effectRef idx="2">
+            <a:schemeClr val="accent1"/>
+          </a:effectRef>
+          <a:fontRef idx="minor"/>
+        </p:style>
+        <p:txBody>
+          <a:bodyPr lIns="90000" rIns="90000" tIns="45000" bIns="45000" anchor="ctr">
+            <a:noAutofit/>
+          </a:bodyPr>
+          <a:p>
+            <a:endParaRPr b="0" lang="en-US" sz="1800" spc="-1" strike="noStrike">
+              <a:solidFill>
+                <a:schemeClr val="lt1"/>
+              </a:solidFill>
+              <a:latin typeface="Calibri"/>
+              <a:ea typeface="DejaVu Sans"/>
+            </a:endParaRPr>
+          </a:p>
+        </p:txBody>
+      </p:sp>
+      <p:sp>
+        <p:nvSpPr>
+          <p:cNvPr id="187" name="Rounded Rectangle 43"/>
+          <p:cNvSpPr/>
+          <p:nvPr/>
+        </p:nvSpPr>
+        <p:spPr>
+          <a:xfrm>
+            <a:off x="9875520" y="365760"/>
+            <a:ext cx="2009160" cy="500400"/>
+          </a:xfrm>
+          <a:prstGeom prst="roundRect">
+            <a:avLst>
+              <a:gd name="adj" fmla="val 16667"/>
+            </a:avLst>
+          </a:prstGeom>
+          <a:solidFill>
+            <a:srgbClr val="1e1e24"/>
+          </a:solidFill>
+          <a:ln>
+            <a:solidFill>
+              <a:srgbClr val="ff8c00"/>
+            </a:solidFill>
+            <a:round/>
+          </a:ln>
+          <a:effectLst>
+            <a:outerShdw blurRad="39960" dir="5400000" dist="23040" rotWithShape="0">
+              <a:srgbClr val="000000">
+                <a:alpha val="35000"/>
+              </a:srgbClr>
+            </a:outerShdw>
+          </a:effectLst>
+        </p:spPr>
+        <p:style>
+          <a:lnRef idx="1">
+            <a:schemeClr val="accent1"/>
+          </a:lnRef>
+          <a:fillRef idx="3">
+            <a:schemeClr val="accent1"/>
+          </a:fillRef>
+          <a:effectRef idx="2">
+            <a:schemeClr val="accent1"/>
+          </a:effectRef>
+          <a:fontRef idx="minor"/>
+        </p:style>
+        <p:txBody>
+          <a:bodyPr lIns="90000" rIns="90000" tIns="45000" bIns="45000" anchor="ctr">
+            <a:noAutofit/>
+          </a:bodyPr>
+          <a:p>
+            <a:pPr algn="ctr">
+              <a:lnSpc>
+                <a:spcPct val="100000"/>
+              </a:lnSpc>
+            </a:pPr>
+            <a:r>
+              <a:rPr b="1" lang="en-US" sz="1400" spc="-1" strike="noStrike">
+                <a:solidFill>
+                  <a:srgbClr val="ffb45a"/>
+                </a:solidFill>
+                <a:latin typeface="Calibri"/>
+                <a:ea typeface="DejaVu Sans"/>
+              </a:rPr>
+              <a:t>JAVA TEMELLERI</a:t>
+            </a:r>
+            <a:endParaRPr b="0" lang="en-US" sz="1400" spc="-1" strike="noStrike">
+              <a:solidFill>
+                <a:srgbClr val="ffffff"/>
+              </a:solidFill>
+              <a:latin typeface="Arial"/>
+            </a:endParaRPr>
+          </a:p>
+        </p:txBody>
+      </p:sp>
+      <p:sp>
+        <p:nvSpPr>
+          <p:cNvPr id="188" name="TextBox 16"/>
+          <p:cNvSpPr/>
+          <p:nvPr/>
+        </p:nvSpPr>
+        <p:spPr>
+          <a:xfrm>
+            <a:off x="1540440" y="914400"/>
+            <a:ext cx="7889400" cy="516960"/>
+          </a:xfrm>
+          <a:prstGeom prst="rect">
+            <a:avLst/>
+          </a:prstGeom>
+          <a:noFill/>
+          <a:ln w="0">
+            <a:noFill/>
+          </a:ln>
+        </p:spPr>
+        <p:style>
+          <a:lnRef idx="0"/>
+          <a:fillRef idx="0"/>
+          <a:effectRef idx="0"/>
+          <a:fontRef idx="minor"/>
+        </p:style>
+        <p:txBody>
+          <a:bodyPr wrap="none" lIns="90000" rIns="90000" tIns="45000" bIns="45000" anchor="t">
+            <a:spAutoFit/>
+          </a:bodyPr>
+          <a:p>
+            <a:pPr>
+              <a:lnSpc>
+                <a:spcPct val="100000"/>
+              </a:lnSpc>
+            </a:pPr>
+            <a:r>
+              <a:rPr b="1" lang="en-US" sz="2800" spc="-1" strike="noStrike">
+                <a:solidFill>
+                  <a:srgbClr val="f5f5f5"/>
+                </a:solidFill>
+                <a:latin typeface="Calibri"/>
+                <a:ea typeface="DejaVu Sans"/>
+              </a:rPr>
+              <a:t>Java’da Period ve Duration (Zaman Farkı Hesaplama)</a:t>
+            </a:r>
+            <a:endParaRPr b="0" lang="en-US" sz="2800" spc="-1" strike="noStrike">
+              <a:solidFill>
+                <a:srgbClr val="000000"/>
+              </a:solidFill>
+              <a:latin typeface="Arial"/>
+            </a:endParaRPr>
+          </a:p>
+        </p:txBody>
+      </p:sp>
+      <p:sp>
+        <p:nvSpPr>
+          <p:cNvPr id="189" name="TextBox 17"/>
+          <p:cNvSpPr/>
+          <p:nvPr/>
+        </p:nvSpPr>
+        <p:spPr>
+          <a:xfrm>
+            <a:off x="880200" y="1600200"/>
+            <a:ext cx="9727560" cy="576360"/>
+          </a:xfrm>
+          <a:prstGeom prst="rect">
+            <a:avLst/>
+          </a:prstGeom>
+          <a:noFill/>
+          <a:ln w="0">
+            <a:noFill/>
+          </a:ln>
+        </p:spPr>
+        <p:style>
+          <a:lnRef idx="0"/>
+          <a:fillRef idx="0"/>
+          <a:effectRef idx="0"/>
+          <a:fontRef idx="minor"/>
+        </p:style>
+        <p:txBody>
+          <a:bodyPr wrap="none" lIns="90000" rIns="90000" tIns="45000" bIns="45000" anchor="t">
+            <a:spAutoFit/>
+          </a:bodyPr>
+          <a:p>
+            <a:pPr>
+              <a:lnSpc>
+                <a:spcPct val="100000"/>
+              </a:lnSpc>
+            </a:pPr>
+            <a:r>
+              <a:rPr b="0" lang="en-US" sz="1600" spc="-1" strike="noStrike">
+                <a:solidFill>
+                  <a:srgbClr val="aaaaaa"/>
+                </a:solidFill>
+                <a:latin typeface="Calibri"/>
+                <a:ea typeface="DejaVu Sans"/>
+              </a:rPr>
+              <a:t>Java'da iki tarih veya iki saat arasındaki zaman farkını ölçmek, tarihlere belirli süreler ekleyip çıkarmak için tarih bazlı </a:t>
+            </a:r>
+            <a:endParaRPr b="0" lang="en-US" sz="1600" spc="-1" strike="noStrike">
+              <a:solidFill>
+                <a:srgbClr val="000000"/>
+              </a:solidFill>
+              <a:latin typeface="Arial"/>
+            </a:endParaRPr>
+          </a:p>
+          <a:p>
+            <a:pPr>
+              <a:lnSpc>
+                <a:spcPct val="100000"/>
+              </a:lnSpc>
+            </a:pPr>
+            <a:r>
+              <a:rPr b="0" lang="en-US" sz="1600" spc="-1" strike="noStrike">
+                <a:solidFill>
+                  <a:srgbClr val="aaaaaa"/>
+                </a:solidFill>
+                <a:latin typeface="Calibri"/>
+                <a:ea typeface="DejaVu Sans"/>
+              </a:rPr>
+              <a:t>ölçümlerde Period, saat bazlı ölçümlerde ise Duration sınıfları kullanılır.</a:t>
+            </a:r>
+            <a:endParaRPr b="0" lang="en-US" sz="1600" spc="-1" strike="noStrike">
+              <a:solidFill>
+                <a:srgbClr val="000000"/>
+              </a:solidFill>
+              <a:latin typeface="Arial"/>
+            </a:endParaRPr>
+          </a:p>
+        </p:txBody>
+      </p:sp>
+      <p:sp>
+        <p:nvSpPr>
+          <p:cNvPr id="190" name="Rounded Rectangle 44"/>
+          <p:cNvSpPr/>
+          <p:nvPr/>
+        </p:nvSpPr>
+        <p:spPr>
+          <a:xfrm>
+            <a:off x="987480" y="3182040"/>
+            <a:ext cx="3289320" cy="2740680"/>
+          </a:xfrm>
+          <a:prstGeom prst="roundRect">
+            <a:avLst>
+              <a:gd name="adj" fmla="val 16667"/>
+            </a:avLst>
+          </a:prstGeom>
+          <a:solidFill>
+            <a:srgbClr val="08080a"/>
+          </a:solidFill>
+          <a:ln>
+            <a:noFill/>
+          </a:ln>
+          <a:effectLst>
+            <a:outerShdw blurRad="39960" dir="5400000" dist="23040" rotWithShape="0">
+              <a:srgbClr val="000000">
+                <a:alpha val="35000"/>
+              </a:srgbClr>
+            </a:outerShdw>
+          </a:effectLst>
+        </p:spPr>
+        <p:style>
+          <a:lnRef idx="1">
+            <a:schemeClr val="accent1"/>
+          </a:lnRef>
+          <a:fillRef idx="3">
+            <a:schemeClr val="accent1"/>
+          </a:fillRef>
+          <a:effectRef idx="2">
+            <a:schemeClr val="accent1"/>
+          </a:effectRef>
+          <a:fontRef idx="minor"/>
+        </p:style>
+        <p:txBody>
+          <a:bodyPr lIns="90000" rIns="90000" tIns="45000" bIns="45000" anchor="ctr">
+            <a:noAutofit/>
+          </a:bodyPr>
+          <a:p>
+            <a:endParaRPr b="0" lang="en-US" sz="1800" spc="-1" strike="noStrike">
+              <a:solidFill>
+                <a:schemeClr val="lt1"/>
+              </a:solidFill>
+              <a:latin typeface="Calibri"/>
+              <a:ea typeface="DejaVu Sans"/>
+            </a:endParaRPr>
+          </a:p>
+        </p:txBody>
+      </p:sp>
+      <p:sp>
+        <p:nvSpPr>
+          <p:cNvPr id="191" name="Rounded Rectangle 45"/>
+          <p:cNvSpPr/>
+          <p:nvPr/>
+        </p:nvSpPr>
+        <p:spPr>
+          <a:xfrm>
+            <a:off x="457200" y="2514600"/>
+            <a:ext cx="3746520" cy="4114440"/>
+          </a:xfrm>
+          <a:prstGeom prst="roundRect">
+            <a:avLst>
+              <a:gd name="adj" fmla="val 16667"/>
+            </a:avLst>
+          </a:prstGeom>
+          <a:solidFill>
+            <a:srgbClr val="16161c"/>
+          </a:solidFill>
+          <a:ln>
+            <a:solidFill>
+              <a:srgbClr val="464655"/>
+            </a:solidFill>
+            <a:round/>
+          </a:ln>
+          <a:effectLst>
+            <a:outerShdw blurRad="39960" dir="5400000" dist="23040" rotWithShape="0">
+              <a:srgbClr val="000000">
+                <a:alpha val="35000"/>
+              </a:srgbClr>
+            </a:outerShdw>
+          </a:effectLst>
+        </p:spPr>
+        <p:style>
+          <a:lnRef idx="1">
+            <a:schemeClr val="accent1"/>
+          </a:lnRef>
+          <a:fillRef idx="3">
+            <a:schemeClr val="accent1"/>
+          </a:fillRef>
+          <a:effectRef idx="2">
+            <a:schemeClr val="accent1"/>
+          </a:effectRef>
+          <a:fontRef idx="minor"/>
+        </p:style>
+        <p:txBody>
+          <a:bodyPr lIns="90000" rIns="90000" tIns="45000" bIns="45000" anchor="ctr">
+            <a:noAutofit/>
+          </a:bodyPr>
+          <a:p>
+            <a:pPr>
+              <a:lnSpc>
+                <a:spcPct val="100000"/>
+              </a:lnSpc>
+            </a:pPr>
+            <a:r>
+              <a:rPr b="1" lang="en-US" sz="1300" spc="-1" strike="noStrike">
+                <a:solidFill>
+                  <a:schemeClr val="lt1"/>
+                </a:solidFill>
+                <a:latin typeface="Calibri"/>
+                <a:ea typeface="DejaVu Sans"/>
+              </a:rPr>
+              <a:t>Period: </a:t>
+            </a:r>
+            <a:r>
+              <a:rPr b="0" lang="en-US" sz="1300" spc="-1" strike="noStrike">
+                <a:solidFill>
+                  <a:schemeClr val="lt1"/>
+                </a:solidFill>
+                <a:latin typeface="Calibri"/>
+                <a:ea typeface="DejaVu Sans"/>
+              </a:rPr>
+              <a:t>Tarihsel farkları (yıl, ay, gün) ifade eder. Genellikle LocalDate nesneleri ile kullanılır.</a:t>
+            </a:r>
+            <a:endParaRPr b="0" lang="en-US" sz="1300" spc="-1" strike="noStrike">
+              <a:solidFill>
+                <a:srgbClr val="ffffff"/>
+              </a:solidFill>
+              <a:latin typeface="Arial"/>
+            </a:endParaRPr>
+          </a:p>
+          <a:p>
+            <a:pPr>
+              <a:lnSpc>
+                <a:spcPct val="100000"/>
+              </a:lnSpc>
+            </a:pPr>
+            <a:endParaRPr b="0" lang="en-US" sz="1300" spc="-1" strike="noStrike">
+              <a:solidFill>
+                <a:srgbClr val="ffffff"/>
+              </a:solidFill>
+              <a:latin typeface="Arial"/>
+            </a:endParaRPr>
+          </a:p>
+          <a:p>
+            <a:pPr>
+              <a:lnSpc>
+                <a:spcPct val="100000"/>
+              </a:lnSpc>
+            </a:pPr>
+            <a:r>
+              <a:rPr b="1" lang="en-US" sz="1300" spc="-1" strike="noStrike">
+                <a:solidFill>
+                  <a:schemeClr val="lt1"/>
+                </a:solidFill>
+                <a:latin typeface="Calibri"/>
+                <a:ea typeface="DejaVu Sans"/>
+              </a:rPr>
+              <a:t>Duration: </a:t>
+            </a:r>
+            <a:r>
+              <a:rPr b="0" lang="en-US" sz="1300" spc="-1" strike="noStrike">
+                <a:solidFill>
+                  <a:schemeClr val="lt1"/>
+                </a:solidFill>
+                <a:latin typeface="Calibri"/>
+                <a:ea typeface="DejaVu Sans"/>
+              </a:rPr>
+              <a:t>Zamansal farkları (saat, dakika, saniye, nanosaniye) ifade eder. Genellikle LocalTime veya LocalDateTime nesneleri ile kullanılır.</a:t>
+            </a:r>
+            <a:endParaRPr b="0" lang="en-US" sz="1300" spc="-1" strike="noStrike">
+              <a:solidFill>
+                <a:srgbClr val="ffffff"/>
+              </a:solidFill>
+              <a:latin typeface="Arial"/>
+            </a:endParaRPr>
+          </a:p>
+          <a:p>
+            <a:pPr>
+              <a:lnSpc>
+                <a:spcPct val="100000"/>
+              </a:lnSpc>
+            </a:pPr>
+            <a:endParaRPr b="0" lang="en-US" sz="1300" spc="-1" strike="noStrike">
+              <a:solidFill>
+                <a:srgbClr val="ffffff"/>
+              </a:solidFill>
+              <a:latin typeface="Arial"/>
+            </a:endParaRPr>
+          </a:p>
+          <a:p>
+            <a:pPr marL="216000" indent="-216000">
+              <a:lnSpc>
+                <a:spcPct val="100000"/>
+              </a:lnSpc>
+              <a:buClr>
+                <a:srgbClr val="ffffff"/>
+              </a:buClr>
+              <a:buFont typeface="Wingdings" charset="2"/>
+              <a:buChar char=""/>
+            </a:pPr>
+            <a:r>
+              <a:rPr b="0" lang="en-US" sz="1300" spc="-1" strike="noStrike">
+                <a:solidFill>
+                  <a:schemeClr val="lt1"/>
+                </a:solidFill>
+                <a:latin typeface="Calibri"/>
+                <a:ea typeface="DejaVu Sans"/>
+              </a:rPr>
+              <a:t>İki tarih/saat noktası arasındaki farkı bulmak için between() metodu kullanılır.</a:t>
+            </a:r>
+            <a:endParaRPr b="0" lang="en-US" sz="1300" spc="-1" strike="noStrike">
+              <a:solidFill>
+                <a:srgbClr val="ffffff"/>
+              </a:solidFill>
+              <a:latin typeface="Arial"/>
+            </a:endParaRPr>
+          </a:p>
+          <a:p>
+            <a:pPr marL="216000" indent="-216000">
+              <a:lnSpc>
+                <a:spcPct val="100000"/>
+              </a:lnSpc>
+              <a:buClr>
+                <a:srgbClr val="ffffff"/>
+              </a:buClr>
+              <a:buFont typeface="Wingdings" charset="2"/>
+              <a:buChar char=""/>
+            </a:pPr>
+            <a:endParaRPr b="0" lang="en-US" sz="1300" spc="-1" strike="noStrike">
+              <a:solidFill>
+                <a:srgbClr val="ffffff"/>
+              </a:solidFill>
+              <a:latin typeface="Arial"/>
+            </a:endParaRPr>
+          </a:p>
+          <a:p>
+            <a:pPr marL="216000" indent="-216000">
+              <a:lnSpc>
+                <a:spcPct val="100000"/>
+              </a:lnSpc>
+              <a:buClr>
+                <a:srgbClr val="ffffff"/>
+              </a:buClr>
+              <a:buFont typeface="Wingdings" charset="2"/>
+              <a:buChar char=""/>
+            </a:pPr>
+            <a:r>
+              <a:rPr b="0" lang="en-US" sz="1300" spc="-1" strike="noStrike">
+                <a:solidFill>
+                  <a:schemeClr val="lt1"/>
+                </a:solidFill>
+                <a:latin typeface="Calibri"/>
+                <a:ea typeface="DejaVu Sans"/>
+              </a:rPr>
+              <a:t>Mevcut bir tarihe süre eklemek veya çıkarmak için plus() ve minus() metotlarıyla birlikte kullanılabilirler.</a:t>
+            </a:r>
+            <a:endParaRPr b="0" lang="en-US" sz="1300" spc="-1" strike="noStrike">
+              <a:solidFill>
+                <a:srgbClr val="ffffff"/>
+              </a:solidFill>
+              <a:latin typeface="Arial"/>
+            </a:endParaRPr>
+          </a:p>
+          <a:p>
+            <a:pPr marL="216000" indent="-216000">
+              <a:lnSpc>
+                <a:spcPct val="100000"/>
+              </a:lnSpc>
+              <a:buClr>
+                <a:srgbClr val="ffffff"/>
+              </a:buClr>
+              <a:buFont typeface="Wingdings" charset="2"/>
+              <a:buChar char=""/>
+            </a:pPr>
+            <a:endParaRPr b="0" lang="en-US" sz="1300" spc="-1" strike="noStrike">
+              <a:solidFill>
+                <a:srgbClr val="ffffff"/>
+              </a:solidFill>
+              <a:latin typeface="Arial"/>
+            </a:endParaRPr>
+          </a:p>
+          <a:p>
+            <a:pPr marL="216000" indent="-216000">
+              <a:lnSpc>
+                <a:spcPct val="100000"/>
+              </a:lnSpc>
+              <a:buClr>
+                <a:srgbClr val="ffffff"/>
+              </a:buClr>
+              <a:buFont typeface="Wingdings" charset="2"/>
+              <a:buChar char=""/>
+            </a:pPr>
+            <a:r>
+              <a:rPr b="0" lang="en-US" sz="1300" spc="-1" strike="noStrike">
+                <a:solidFill>
+                  <a:schemeClr val="lt1"/>
+                </a:solidFill>
+                <a:latin typeface="Calibri"/>
+                <a:ea typeface="DejaVu Sans"/>
+              </a:rPr>
+              <a:t>Yaz saati gibi karmaşık durumları yönetirken manuel matematiksel hesaplamalar yerine bu API'leri kullanmak hataları önler.</a:t>
+            </a:r>
+            <a:endParaRPr b="0" lang="en-US" sz="1300" spc="-1" strike="noStrike">
+              <a:solidFill>
+                <a:srgbClr val="ffffff"/>
+              </a:solidFill>
+              <a:latin typeface="Arial"/>
+            </a:endParaRPr>
+          </a:p>
+        </p:txBody>
+      </p:sp>
+      <p:sp>
+        <p:nvSpPr>
+          <p:cNvPr id="192" name="Rounded Rectangle 46"/>
+          <p:cNvSpPr/>
+          <p:nvPr/>
+        </p:nvSpPr>
+        <p:spPr>
+          <a:xfrm>
+            <a:off x="4507920" y="3182040"/>
+            <a:ext cx="3289320" cy="2740680"/>
+          </a:xfrm>
+          <a:prstGeom prst="roundRect">
+            <a:avLst>
+              <a:gd name="adj" fmla="val 16667"/>
+            </a:avLst>
+          </a:prstGeom>
+          <a:solidFill>
+            <a:srgbClr val="08080a"/>
+          </a:solidFill>
+          <a:ln>
+            <a:noFill/>
+          </a:ln>
+          <a:effectLst>
+            <a:outerShdw blurRad="39960" dir="5400000" dist="23040" rotWithShape="0">
+              <a:srgbClr val="000000">
+                <a:alpha val="35000"/>
+              </a:srgbClr>
+            </a:outerShdw>
+          </a:effectLst>
+        </p:spPr>
+        <p:style>
+          <a:lnRef idx="1">
+            <a:schemeClr val="accent1"/>
+          </a:lnRef>
+          <a:fillRef idx="3">
+            <a:schemeClr val="accent1"/>
+          </a:fillRef>
+          <a:effectRef idx="2">
+            <a:schemeClr val="accent1"/>
+          </a:effectRef>
+          <a:fontRef idx="minor"/>
+        </p:style>
+        <p:txBody>
+          <a:bodyPr lIns="90000" rIns="90000" tIns="45000" bIns="45000" anchor="ctr">
+            <a:noAutofit/>
+          </a:bodyPr>
+          <a:p>
+            <a:endParaRPr b="0" lang="en-US" sz="1800" spc="-1" strike="noStrike">
+              <a:solidFill>
+                <a:schemeClr val="lt1"/>
+              </a:solidFill>
+              <a:latin typeface="Calibri"/>
+              <a:ea typeface="DejaVu Sans"/>
+            </a:endParaRPr>
+          </a:p>
+        </p:txBody>
+      </p:sp>
+      <p:sp>
+        <p:nvSpPr>
+          <p:cNvPr id="193" name="Rounded Rectangle 47"/>
+          <p:cNvSpPr/>
+          <p:nvPr/>
+        </p:nvSpPr>
+        <p:spPr>
+          <a:xfrm>
+            <a:off x="4434840" y="2514600"/>
+            <a:ext cx="3289320" cy="3884760"/>
+          </a:xfrm>
+          <a:prstGeom prst="roundRect">
+            <a:avLst>
+              <a:gd name="adj" fmla="val 16667"/>
+            </a:avLst>
+          </a:prstGeom>
+          <a:solidFill>
+            <a:srgbClr val="16161c"/>
+          </a:solidFill>
+          <a:ln>
+            <a:solidFill>
+              <a:srgbClr val="464655"/>
+            </a:solidFill>
+            <a:round/>
+          </a:ln>
+          <a:effectLst>
+            <a:outerShdw blurRad="39960" dir="5400000" dist="23040" rotWithShape="0">
+              <a:srgbClr val="000000">
+                <a:alpha val="35000"/>
+              </a:srgbClr>
+            </a:outerShdw>
+          </a:effectLst>
+        </p:spPr>
+        <p:style>
+          <a:lnRef idx="1">
+            <a:schemeClr val="accent1"/>
+          </a:lnRef>
+          <a:fillRef idx="3">
+            <a:schemeClr val="accent1"/>
+          </a:fillRef>
+          <a:effectRef idx="2">
+            <a:schemeClr val="accent1"/>
+          </a:effectRef>
+          <a:fontRef idx="minor"/>
+        </p:style>
+        <p:txBody>
+          <a:bodyPr lIns="90000" rIns="90000" tIns="45000" bIns="45000" anchor="ctr">
+            <a:noAutofit/>
+          </a:bodyPr>
+          <a:p>
+            <a:pPr>
+              <a:lnSpc>
+                <a:spcPct val="100000"/>
+              </a:lnSpc>
+            </a:pPr>
+            <a:r>
+              <a:rPr b="0" lang="en-US" sz="1800" spc="-1" strike="noStrike">
+                <a:solidFill>
+                  <a:schemeClr val="lt1"/>
+                </a:solidFill>
+                <a:latin typeface="Calibri"/>
+                <a:ea typeface="DejaVu Sans"/>
+              </a:rPr>
+              <a:t>↓ </a:t>
+            </a:r>
+            <a:r>
+              <a:rPr b="0" lang="en-US" sz="1800" spc="-1" strike="noStrike">
+                <a:solidFill>
+                  <a:schemeClr val="lt1"/>
+                </a:solidFill>
+                <a:latin typeface="Calibri"/>
+                <a:ea typeface="DejaVu Sans"/>
+              </a:rPr>
+              <a:t>Başlangıç ve bitiş zamanları (Tarih/Saat nesneleri) oluşturulur</a:t>
+            </a:r>
+            <a:endParaRPr b="0" lang="en-US" sz="1800" spc="-1" strike="noStrike">
+              <a:solidFill>
+                <a:srgbClr val="ffffff"/>
+              </a:solidFill>
+              <a:latin typeface="Arial"/>
+            </a:endParaRPr>
+          </a:p>
+          <a:p>
+            <a:pPr>
+              <a:lnSpc>
+                <a:spcPct val="100000"/>
+              </a:lnSpc>
+            </a:pPr>
+            <a:r>
+              <a:rPr b="0" lang="en-US" sz="1800" spc="-1" strike="noStrike">
+                <a:solidFill>
+                  <a:schemeClr val="lt1"/>
+                </a:solidFill>
+                <a:latin typeface="Calibri"/>
+                <a:ea typeface="DejaVu Sans"/>
+              </a:rPr>
+              <a:t>↓ </a:t>
+            </a:r>
+            <a:r>
+              <a:rPr b="0" lang="en-US" sz="1800" spc="-1" strike="noStrike">
+                <a:solidFill>
+                  <a:schemeClr val="lt1"/>
+                </a:solidFill>
+                <a:latin typeface="Calibri"/>
+                <a:ea typeface="DejaVu Sans"/>
+              </a:rPr>
+              <a:t>İhtiyaca göre uygun sınıf (Period veya Duration) seçilir</a:t>
+            </a:r>
+            <a:endParaRPr b="0" lang="en-US" sz="1800" spc="-1" strike="noStrike">
+              <a:solidFill>
+                <a:srgbClr val="ffffff"/>
+              </a:solidFill>
+              <a:latin typeface="Arial"/>
+            </a:endParaRPr>
+          </a:p>
+          <a:p>
+            <a:pPr>
+              <a:lnSpc>
+                <a:spcPct val="100000"/>
+              </a:lnSpc>
+            </a:pPr>
+            <a:r>
+              <a:rPr b="0" lang="en-US" sz="1800" spc="-1" strike="noStrike">
+                <a:solidFill>
+                  <a:schemeClr val="lt1"/>
+                </a:solidFill>
+                <a:latin typeface="Calibri"/>
+                <a:ea typeface="DejaVu Sans"/>
+              </a:rPr>
+              <a:t>↓ </a:t>
+            </a:r>
+            <a:r>
+              <a:rPr b="0" lang="en-US" sz="1800" spc="-1" strike="noStrike">
+                <a:solidFill>
+                  <a:schemeClr val="lt1"/>
+                </a:solidFill>
+                <a:latin typeface="Calibri"/>
+                <a:ea typeface="DejaVu Sans"/>
+              </a:rPr>
+              <a:t>between() metodu çağrılarak iki zaman arasındaki fark hesaplanır</a:t>
+            </a:r>
+            <a:endParaRPr b="0" lang="en-US" sz="1800" spc="-1" strike="noStrike">
+              <a:solidFill>
+                <a:srgbClr val="ffffff"/>
+              </a:solidFill>
+              <a:latin typeface="Arial"/>
+            </a:endParaRPr>
+          </a:p>
+          <a:p>
+            <a:pPr>
+              <a:lnSpc>
+                <a:spcPct val="100000"/>
+              </a:lnSpc>
+            </a:pPr>
+            <a:r>
+              <a:rPr b="0" lang="en-US" sz="1800" spc="-1" strike="noStrike">
+                <a:solidFill>
+                  <a:schemeClr val="lt1"/>
+                </a:solidFill>
+                <a:latin typeface="Calibri"/>
+                <a:ea typeface="DejaVu Sans"/>
+              </a:rPr>
+              <a:t>↓ </a:t>
+            </a:r>
+            <a:r>
+              <a:rPr b="0" lang="en-US" sz="1800" spc="-1" strike="noStrike">
+                <a:solidFill>
+                  <a:schemeClr val="lt1"/>
+                </a:solidFill>
+                <a:latin typeface="Calibri"/>
+                <a:ea typeface="DejaVu Sans"/>
+              </a:rPr>
+              <a:t>İlgili metotlar (örn: getDays(), toHours()) ile farkın detayı alınır</a:t>
+            </a:r>
+            <a:endParaRPr b="0" lang="en-US" sz="1800" spc="-1" strike="noStrike">
+              <a:solidFill>
+                <a:srgbClr val="ffffff"/>
+              </a:solidFill>
+              <a:latin typeface="Arial"/>
+            </a:endParaRPr>
+          </a:p>
+          <a:p>
+            <a:pPr>
+              <a:lnSpc>
+                <a:spcPct val="100000"/>
+              </a:lnSpc>
+            </a:pPr>
+            <a:r>
+              <a:rPr b="0" lang="en-US" sz="1800" spc="-1" strike="noStrike">
+                <a:solidFill>
+                  <a:schemeClr val="lt1"/>
+                </a:solidFill>
+                <a:latin typeface="Calibri"/>
+                <a:ea typeface="DejaVu Sans"/>
+              </a:rPr>
+              <a:t>↓ </a:t>
+            </a:r>
+            <a:r>
+              <a:rPr b="0" lang="en-US" sz="1800" spc="-1" strike="noStrike">
+                <a:solidFill>
+                  <a:schemeClr val="lt1"/>
+                </a:solidFill>
+                <a:latin typeface="Calibri"/>
+                <a:ea typeface="DejaVu Sans"/>
+              </a:rPr>
+              <a:t>Sonuç ekrana yazdırılır veya farklı bir iş mantığında kullanılır</a:t>
+            </a:r>
+            <a:endParaRPr b="0" lang="en-US" sz="1800" spc="-1" strike="noStrike">
+              <a:solidFill>
+                <a:srgbClr val="ffffff"/>
+              </a:solidFill>
+              <a:latin typeface="Arial"/>
+            </a:endParaRPr>
+          </a:p>
+        </p:txBody>
+      </p:sp>
+      <p:sp>
+        <p:nvSpPr>
+          <p:cNvPr id="194" name="Rounded Rectangle 48"/>
+          <p:cNvSpPr/>
+          <p:nvPr/>
+        </p:nvSpPr>
+        <p:spPr>
+          <a:xfrm>
+            <a:off x="8028360" y="3182040"/>
+            <a:ext cx="3289320" cy="2740680"/>
+          </a:xfrm>
+          <a:prstGeom prst="roundRect">
+            <a:avLst>
+              <a:gd name="adj" fmla="val 16667"/>
+            </a:avLst>
+          </a:prstGeom>
+          <a:solidFill>
+            <a:srgbClr val="08080a"/>
+          </a:solidFill>
+          <a:ln>
+            <a:noFill/>
+          </a:ln>
+          <a:effectLst>
+            <a:outerShdw blurRad="39960" dir="5400000" dist="23040" rotWithShape="0">
+              <a:srgbClr val="000000">
+                <a:alpha val="35000"/>
+              </a:srgbClr>
+            </a:outerShdw>
+          </a:effectLst>
+        </p:spPr>
+        <p:style>
+          <a:lnRef idx="1">
+            <a:schemeClr val="accent1"/>
+          </a:lnRef>
+          <a:fillRef idx="3">
+            <a:schemeClr val="accent1"/>
+          </a:fillRef>
+          <a:effectRef idx="2">
+            <a:schemeClr val="accent1"/>
+          </a:effectRef>
+          <a:fontRef idx="minor"/>
+        </p:style>
+        <p:txBody>
+          <a:bodyPr lIns="90000" rIns="90000" tIns="45000" bIns="45000" anchor="ctr">
+            <a:noAutofit/>
+          </a:bodyPr>
+          <a:p>
+            <a:endParaRPr b="0" lang="en-US" sz="1800" spc="-1" strike="noStrike">
+              <a:solidFill>
+                <a:schemeClr val="lt1"/>
+              </a:solidFill>
+              <a:latin typeface="Calibri"/>
+              <a:ea typeface="DejaVu Sans"/>
+            </a:endParaRPr>
+          </a:p>
+        </p:txBody>
+      </p:sp>
+      <p:sp>
+        <p:nvSpPr>
+          <p:cNvPr id="195" name="Rounded Rectangle 49"/>
+          <p:cNvSpPr/>
+          <p:nvPr/>
+        </p:nvSpPr>
+        <p:spPr>
+          <a:xfrm>
+            <a:off x="8001000" y="2514600"/>
+            <a:ext cx="3474360" cy="3886200"/>
+          </a:xfrm>
+          <a:prstGeom prst="roundRect">
+            <a:avLst>
+              <a:gd name="adj" fmla="val 16667"/>
+            </a:avLst>
+          </a:prstGeom>
+          <a:solidFill>
+            <a:srgbClr val="16161c"/>
+          </a:solidFill>
+          <a:ln>
+            <a:solidFill>
+              <a:srgbClr val="464655"/>
+            </a:solidFill>
+            <a:round/>
+          </a:ln>
+          <a:effectLst>
+            <a:outerShdw blurRad="39960" dir="5400000" dist="23040" rotWithShape="0">
+              <a:srgbClr val="000000">
+                <a:alpha val="35000"/>
+              </a:srgbClr>
+            </a:outerShdw>
+          </a:effectLst>
+        </p:spPr>
+        <p:style>
+          <a:lnRef idx="1">
+            <a:schemeClr val="accent1"/>
+          </a:lnRef>
+          <a:fillRef idx="3">
+            <a:schemeClr val="accent1"/>
+          </a:fillRef>
+          <a:effectRef idx="2">
+            <a:schemeClr val="accent1"/>
+          </a:effectRef>
+          <a:fontRef idx="minor"/>
+        </p:style>
+        <p:txBody>
+          <a:bodyPr lIns="90000" rIns="90000" tIns="45000" bIns="45000" anchor="ctr">
+            <a:noAutofit/>
+          </a:bodyPr>
+          <a:p>
+            <a:pPr algn="ctr">
+              <a:lnSpc>
+                <a:spcPct val="100000"/>
+              </a:lnSpc>
+            </a:pPr>
+            <a:r>
+              <a:rPr b="0" lang="en-US" sz="900" spc="-1" strike="noStrike">
+                <a:solidFill>
+                  <a:srgbClr val="78ffc8"/>
+                </a:solidFill>
+                <a:latin typeface="Consolas"/>
+                <a:ea typeface="DejaVu Sans"/>
+              </a:rPr>
+              <a:t>public class DurationPeriodExample {</a:t>
+            </a:r>
+            <a:endParaRPr b="0" lang="en-US" sz="900" spc="-1" strike="noStrike">
+              <a:solidFill>
+                <a:srgbClr val="ffffff"/>
+              </a:solidFill>
+              <a:latin typeface="Arial"/>
+            </a:endParaRPr>
+          </a:p>
+          <a:p>
+            <a:pPr algn="ctr">
+              <a:lnSpc>
+                <a:spcPct val="100000"/>
+              </a:lnSpc>
+            </a:pPr>
+            <a:r>
+              <a:rPr b="0" lang="en-US" sz="900" spc="-1" strike="noStrike">
+                <a:solidFill>
+                  <a:srgbClr val="78ffc8"/>
+                </a:solidFill>
+                <a:latin typeface="Consolas"/>
+                <a:ea typeface="DejaVu Sans"/>
+              </a:rPr>
+              <a:t>    </a:t>
+            </a:r>
+            <a:r>
+              <a:rPr b="0" lang="en-US" sz="900" spc="-1" strike="noStrike">
+                <a:solidFill>
+                  <a:srgbClr val="78ffc8"/>
+                </a:solidFill>
+                <a:latin typeface="Consolas"/>
+                <a:ea typeface="DejaVu Sans"/>
+              </a:rPr>
+              <a:t>public static void main(String[] args) {</a:t>
+            </a:r>
+            <a:endParaRPr b="0" lang="en-US" sz="900" spc="-1" strike="noStrike">
+              <a:solidFill>
+                <a:srgbClr val="ffffff"/>
+              </a:solidFill>
+              <a:latin typeface="Arial"/>
+            </a:endParaRPr>
+          </a:p>
+          <a:p>
+            <a:pPr algn="ctr">
+              <a:lnSpc>
+                <a:spcPct val="100000"/>
+              </a:lnSpc>
+            </a:pPr>
+            <a:r>
+              <a:rPr b="0" lang="en-US" sz="900" spc="-1" strike="noStrike">
+                <a:solidFill>
+                  <a:srgbClr val="78ffc8"/>
+                </a:solidFill>
+                <a:latin typeface="Consolas"/>
+                <a:ea typeface="DejaVu Sans"/>
+              </a:rPr>
+              <a:t>        </a:t>
+            </a:r>
+            <a:r>
+              <a:rPr b="0" lang="en-US" sz="900" spc="-1" strike="noStrike">
+                <a:solidFill>
+                  <a:srgbClr val="78ffc8"/>
+                </a:solidFill>
+                <a:latin typeface="Consolas"/>
+                <a:ea typeface="DejaVu Sans"/>
+              </a:rPr>
+              <a:t>// --- PERIOD ÖRNEĞİ (Tarih Farkı) ---</a:t>
+            </a:r>
+            <a:endParaRPr b="0" lang="en-US" sz="900" spc="-1" strike="noStrike">
+              <a:solidFill>
+                <a:srgbClr val="ffffff"/>
+              </a:solidFill>
+              <a:latin typeface="Arial"/>
+            </a:endParaRPr>
+          </a:p>
+          <a:p>
+            <a:pPr algn="ctr">
+              <a:lnSpc>
+                <a:spcPct val="100000"/>
+              </a:lnSpc>
+            </a:pPr>
+            <a:r>
+              <a:rPr b="0" lang="en-US" sz="900" spc="-1" strike="noStrike">
+                <a:solidFill>
+                  <a:srgbClr val="78ffc8"/>
+                </a:solidFill>
+                <a:latin typeface="Consolas"/>
+                <a:ea typeface="DejaVu Sans"/>
+              </a:rPr>
+              <a:t>        </a:t>
+            </a:r>
+            <a:r>
+              <a:rPr b="0" lang="en-US" sz="900" spc="-1" strike="noStrike">
+                <a:solidFill>
+                  <a:srgbClr val="78ffc8"/>
+                </a:solidFill>
+                <a:latin typeface="Consolas"/>
+                <a:ea typeface="DejaVu Sans"/>
+              </a:rPr>
+              <a:t>LocalDate oldDate = LocalDate.of(2022, 5, 10);</a:t>
+            </a:r>
+            <a:endParaRPr b="0" lang="en-US" sz="900" spc="-1" strike="noStrike">
+              <a:solidFill>
+                <a:srgbClr val="ffffff"/>
+              </a:solidFill>
+              <a:latin typeface="Arial"/>
+            </a:endParaRPr>
+          </a:p>
+          <a:p>
+            <a:pPr algn="ctr">
+              <a:lnSpc>
+                <a:spcPct val="100000"/>
+              </a:lnSpc>
+            </a:pPr>
+            <a:r>
+              <a:rPr b="0" lang="en-US" sz="900" spc="-1" strike="noStrike">
+                <a:solidFill>
+                  <a:srgbClr val="78ffc8"/>
+                </a:solidFill>
+                <a:latin typeface="Consolas"/>
+                <a:ea typeface="DejaVu Sans"/>
+              </a:rPr>
+              <a:t>        </a:t>
+            </a:r>
+            <a:r>
+              <a:rPr b="0" lang="en-US" sz="900" spc="-1" strike="noStrike">
+                <a:solidFill>
+                  <a:srgbClr val="78ffc8"/>
+                </a:solidFill>
+                <a:latin typeface="Consolas"/>
+                <a:ea typeface="DejaVu Sans"/>
+              </a:rPr>
+              <a:t>LocalDate currentDate = LocalDate.now(); // Örn: 28 Nisan 2024</a:t>
+            </a:r>
+            <a:endParaRPr b="0" lang="en-US" sz="900" spc="-1" strike="noStrike">
+              <a:solidFill>
+                <a:srgbClr val="ffffff"/>
+              </a:solidFill>
+              <a:latin typeface="Arial"/>
+            </a:endParaRPr>
+          </a:p>
+          <a:p>
+            <a:pPr algn="ctr">
+              <a:lnSpc>
+                <a:spcPct val="100000"/>
+              </a:lnSpc>
+            </a:pPr>
+            <a:r>
+              <a:rPr b="0" lang="en-US" sz="900" spc="-1" strike="noStrike">
+                <a:solidFill>
+                  <a:srgbClr val="78ffc8"/>
+                </a:solidFill>
+                <a:latin typeface="Consolas"/>
+                <a:ea typeface="DejaVu Sans"/>
+              </a:rPr>
+              <a:t>        </a:t>
+            </a:r>
+            <a:r>
+              <a:rPr b="0" lang="en-US" sz="900" spc="-1" strike="noStrike">
+                <a:solidFill>
+                  <a:srgbClr val="78ffc8"/>
+                </a:solidFill>
+                <a:latin typeface="Consolas"/>
+                <a:ea typeface="DejaVu Sans"/>
+              </a:rPr>
+              <a:t>Period period = Period.between(oldDate, currentDate);</a:t>
+            </a:r>
+            <a:endParaRPr b="0" lang="en-US" sz="900" spc="-1" strike="noStrike">
+              <a:solidFill>
+                <a:srgbClr val="ffffff"/>
+              </a:solidFill>
+              <a:latin typeface="Arial"/>
+            </a:endParaRPr>
+          </a:p>
+          <a:p>
+            <a:pPr algn="ctr">
+              <a:lnSpc>
+                <a:spcPct val="100000"/>
+              </a:lnSpc>
+            </a:pPr>
+            <a:r>
+              <a:rPr b="0" lang="en-US" sz="900" spc="-1" strike="noStrike">
+                <a:solidFill>
+                  <a:srgbClr val="78ffc8"/>
+                </a:solidFill>
+                <a:latin typeface="Consolas"/>
+                <a:ea typeface="DejaVu Sans"/>
+              </a:rPr>
+              <a:t>        </a:t>
+            </a:r>
+            <a:r>
+              <a:rPr b="0" lang="en-US" sz="900" spc="-1" strike="noStrike">
+                <a:solidFill>
+                  <a:srgbClr val="78ffc8"/>
+                </a:solidFill>
+                <a:latin typeface="Consolas"/>
+                <a:ea typeface="DejaVu Sans"/>
+              </a:rPr>
+              <a:t>System.out.println("Tarih Farkı: " + period.getYears() + " yıl, " </a:t>
+            </a:r>
+            <a:endParaRPr b="0" lang="en-US" sz="900" spc="-1" strike="noStrike">
+              <a:solidFill>
+                <a:srgbClr val="ffffff"/>
+              </a:solidFill>
+              <a:latin typeface="Arial"/>
+            </a:endParaRPr>
+          </a:p>
+          <a:p>
+            <a:pPr algn="ctr">
+              <a:lnSpc>
+                <a:spcPct val="100000"/>
+              </a:lnSpc>
+            </a:pPr>
+            <a:r>
+              <a:rPr b="0" lang="en-US" sz="900" spc="-1" strike="noStrike">
+                <a:solidFill>
+                  <a:srgbClr val="78ffc8"/>
+                </a:solidFill>
+                <a:latin typeface="Consolas"/>
+                <a:ea typeface="DejaVu Sans"/>
+              </a:rPr>
+              <a:t>                           </a:t>
+            </a:r>
+            <a:r>
+              <a:rPr b="0" lang="en-US" sz="900" spc="-1" strike="noStrike">
+                <a:solidFill>
+                  <a:srgbClr val="78ffc8"/>
+                </a:solidFill>
+                <a:latin typeface="Consolas"/>
+                <a:ea typeface="DejaVu Sans"/>
+              </a:rPr>
+              <a:t>+ period.getMonths() + " ay, " </a:t>
+            </a:r>
+            <a:endParaRPr b="0" lang="en-US" sz="900" spc="-1" strike="noStrike">
+              <a:solidFill>
+                <a:srgbClr val="ffffff"/>
+              </a:solidFill>
+              <a:latin typeface="Arial"/>
+            </a:endParaRPr>
+          </a:p>
+          <a:p>
+            <a:pPr algn="ctr">
+              <a:lnSpc>
+                <a:spcPct val="100000"/>
+              </a:lnSpc>
+            </a:pPr>
+            <a:r>
+              <a:rPr b="0" lang="en-US" sz="900" spc="-1" strike="noStrike">
+                <a:solidFill>
+                  <a:srgbClr val="78ffc8"/>
+                </a:solidFill>
+                <a:latin typeface="Consolas"/>
+                <a:ea typeface="DejaVu Sans"/>
+              </a:rPr>
+              <a:t>                           </a:t>
+            </a:r>
+            <a:r>
+              <a:rPr b="0" lang="en-US" sz="900" spc="-1" strike="noStrike">
+                <a:solidFill>
+                  <a:srgbClr val="78ffc8"/>
+                </a:solidFill>
+                <a:latin typeface="Consolas"/>
+                <a:ea typeface="DejaVu Sans"/>
+              </a:rPr>
+              <a:t>+ period.getDays() + " gün");</a:t>
+            </a:r>
+            <a:endParaRPr b="0" lang="en-US" sz="900" spc="-1" strike="noStrike">
+              <a:solidFill>
+                <a:srgbClr val="ffffff"/>
+              </a:solidFill>
+              <a:latin typeface="Arial"/>
+            </a:endParaRPr>
+          </a:p>
+          <a:p>
+            <a:pPr algn="ctr">
+              <a:lnSpc>
+                <a:spcPct val="100000"/>
+              </a:lnSpc>
+            </a:pPr>
+            <a:r>
+              <a:rPr b="0" lang="en-US" sz="900" spc="-1" strike="noStrike">
+                <a:solidFill>
+                  <a:srgbClr val="78ffc8"/>
+                </a:solidFill>
+                <a:latin typeface="Consolas"/>
+                <a:ea typeface="DejaVu Sans"/>
+              </a:rPr>
+              <a:t>        </a:t>
+            </a:r>
+            <a:r>
+              <a:rPr b="0" lang="en-US" sz="900" spc="-1" strike="noStrike">
+                <a:solidFill>
+                  <a:srgbClr val="78ffc8"/>
+                </a:solidFill>
+                <a:latin typeface="Consolas"/>
+                <a:ea typeface="DejaVu Sans"/>
+              </a:rPr>
+              <a:t>// --- DURATION ÖRNEĞİ (Saat Farkı) ---</a:t>
+            </a:r>
+            <a:endParaRPr b="0" lang="en-US" sz="900" spc="-1" strike="noStrike">
+              <a:solidFill>
+                <a:srgbClr val="ffffff"/>
+              </a:solidFill>
+              <a:latin typeface="Arial"/>
+            </a:endParaRPr>
+          </a:p>
+          <a:p>
+            <a:pPr algn="ctr">
+              <a:lnSpc>
+                <a:spcPct val="100000"/>
+              </a:lnSpc>
+            </a:pPr>
+            <a:r>
+              <a:rPr b="0" lang="en-US" sz="900" spc="-1" strike="noStrike">
+                <a:solidFill>
+                  <a:srgbClr val="78ffc8"/>
+                </a:solidFill>
+                <a:latin typeface="Consolas"/>
+                <a:ea typeface="DejaVu Sans"/>
+              </a:rPr>
+              <a:t>        </a:t>
+            </a:r>
+            <a:r>
+              <a:rPr b="0" lang="en-US" sz="900" spc="-1" strike="noStrike">
+                <a:solidFill>
+                  <a:srgbClr val="78ffc8"/>
+                </a:solidFill>
+                <a:latin typeface="Consolas"/>
+                <a:ea typeface="DejaVu Sans"/>
+              </a:rPr>
+              <a:t>LocalTime startTime = LocalTime.of(9, 30);</a:t>
+            </a:r>
+            <a:endParaRPr b="0" lang="en-US" sz="900" spc="-1" strike="noStrike">
+              <a:solidFill>
+                <a:srgbClr val="ffffff"/>
+              </a:solidFill>
+              <a:latin typeface="Arial"/>
+            </a:endParaRPr>
+          </a:p>
+          <a:p>
+            <a:pPr algn="ctr">
+              <a:lnSpc>
+                <a:spcPct val="100000"/>
+              </a:lnSpc>
+            </a:pPr>
+            <a:r>
+              <a:rPr b="0" lang="en-US" sz="900" spc="-1" strike="noStrike">
+                <a:solidFill>
+                  <a:srgbClr val="78ffc8"/>
+                </a:solidFill>
+                <a:latin typeface="Consolas"/>
+                <a:ea typeface="DejaVu Sans"/>
+              </a:rPr>
+              <a:t>        </a:t>
+            </a:r>
+            <a:r>
+              <a:rPr b="0" lang="en-US" sz="900" spc="-1" strike="noStrike">
+                <a:solidFill>
+                  <a:srgbClr val="78ffc8"/>
+                </a:solidFill>
+                <a:latin typeface="Consolas"/>
+                <a:ea typeface="DejaVu Sans"/>
+              </a:rPr>
+              <a:t>LocalTime endTime = LocalTime.of(17, 15);</a:t>
+            </a:r>
+            <a:endParaRPr b="0" lang="en-US" sz="900" spc="-1" strike="noStrike">
+              <a:solidFill>
+                <a:srgbClr val="ffffff"/>
+              </a:solidFill>
+              <a:latin typeface="Arial"/>
+            </a:endParaRPr>
+          </a:p>
+          <a:p>
+            <a:pPr algn="ctr">
+              <a:lnSpc>
+                <a:spcPct val="100000"/>
+              </a:lnSpc>
+            </a:pPr>
+            <a:r>
+              <a:rPr b="0" lang="en-US" sz="900" spc="-1" strike="noStrike">
+                <a:solidFill>
+                  <a:srgbClr val="78ffc8"/>
+                </a:solidFill>
+                <a:latin typeface="Consolas"/>
+                <a:ea typeface="DejaVu Sans"/>
+              </a:rPr>
+              <a:t>        </a:t>
+            </a:r>
+            <a:r>
+              <a:rPr b="0" lang="en-US" sz="900" spc="-1" strike="noStrike">
+                <a:solidFill>
+                  <a:srgbClr val="78ffc8"/>
+                </a:solidFill>
+                <a:latin typeface="Consolas"/>
+                <a:ea typeface="DejaVu Sans"/>
+              </a:rPr>
+              <a:t>Duration duration = Duration.between(startTime, endTime);</a:t>
+            </a:r>
+            <a:endParaRPr b="0" lang="en-US" sz="900" spc="-1" strike="noStrike">
+              <a:solidFill>
+                <a:srgbClr val="ffffff"/>
+              </a:solidFill>
+              <a:latin typeface="Arial"/>
+            </a:endParaRPr>
+          </a:p>
+          <a:p>
+            <a:pPr algn="ctr">
+              <a:lnSpc>
+                <a:spcPct val="100000"/>
+              </a:lnSpc>
+            </a:pPr>
+            <a:r>
+              <a:rPr b="0" lang="en-US" sz="900" spc="-1" strike="noStrike">
+                <a:solidFill>
+                  <a:srgbClr val="78ffc8"/>
+                </a:solidFill>
+                <a:latin typeface="Consolas"/>
+                <a:ea typeface="DejaVu Sans"/>
+              </a:rPr>
+              <a:t>        </a:t>
+            </a:r>
+            <a:r>
+              <a:rPr b="0" lang="en-US" sz="900" spc="-1" strike="noStrike">
+                <a:solidFill>
+                  <a:srgbClr val="78ffc8"/>
+                </a:solidFill>
+                <a:latin typeface="Consolas"/>
+                <a:ea typeface="DejaVu Sans"/>
+              </a:rPr>
+              <a:t>System.out.println("Geçen Süre: " + duration.toHours() + " saat, " </a:t>
+            </a:r>
+            <a:endParaRPr b="0" lang="en-US" sz="900" spc="-1" strike="noStrike">
+              <a:solidFill>
+                <a:srgbClr val="ffffff"/>
+              </a:solidFill>
+              <a:latin typeface="Arial"/>
+            </a:endParaRPr>
+          </a:p>
+          <a:p>
+            <a:pPr algn="ctr">
+              <a:lnSpc>
+                <a:spcPct val="100000"/>
+              </a:lnSpc>
+            </a:pPr>
+            <a:r>
+              <a:rPr b="0" lang="en-US" sz="900" spc="-1" strike="noStrike">
+                <a:solidFill>
+                  <a:srgbClr val="78ffc8"/>
+                </a:solidFill>
+                <a:latin typeface="Consolas"/>
+                <a:ea typeface="DejaVu Sans"/>
+              </a:rPr>
+              <a:t>                           </a:t>
+            </a:r>
+            <a:r>
+              <a:rPr b="0" lang="en-US" sz="900" spc="-1" strike="noStrike">
+                <a:solidFill>
+                  <a:srgbClr val="78ffc8"/>
+                </a:solidFill>
+                <a:latin typeface="Consolas"/>
+                <a:ea typeface="DejaVu Sans"/>
+              </a:rPr>
+              <a:t>+ (duration.toMinutes() % 60) + " dakika");</a:t>
+            </a:r>
+            <a:endParaRPr b="0" lang="en-US" sz="900" spc="-1" strike="noStrike">
+              <a:solidFill>
+                <a:srgbClr val="ffffff"/>
+              </a:solidFill>
+              <a:latin typeface="Arial"/>
+            </a:endParaRPr>
+          </a:p>
+          <a:p>
+            <a:pPr algn="ctr">
+              <a:lnSpc>
+                <a:spcPct val="100000"/>
+              </a:lnSpc>
+            </a:pPr>
+            <a:r>
+              <a:rPr b="0" lang="en-US" sz="900" spc="-1" strike="noStrike">
+                <a:solidFill>
+                  <a:srgbClr val="78ffc8"/>
+                </a:solidFill>
+                <a:latin typeface="Consolas"/>
+                <a:ea typeface="DejaVu Sans"/>
+              </a:rPr>
+              <a:t>    </a:t>
+            </a:r>
+            <a:r>
+              <a:rPr b="0" lang="en-US" sz="900" spc="-1" strike="noStrike">
+                <a:solidFill>
+                  <a:srgbClr val="78ffc8"/>
+                </a:solidFill>
+                <a:latin typeface="Consolas"/>
+                <a:ea typeface="DejaVu Sans"/>
+              </a:rPr>
+              <a:t>}</a:t>
+            </a:r>
+            <a:endParaRPr b="0" lang="en-US" sz="900" spc="-1" strike="noStrike">
+              <a:solidFill>
+                <a:srgbClr val="ffffff"/>
+              </a:solidFill>
+              <a:latin typeface="Arial"/>
+            </a:endParaRPr>
+          </a:p>
+          <a:p>
+            <a:pPr algn="ctr">
+              <a:lnSpc>
+                <a:spcPct val="100000"/>
+              </a:lnSpc>
+            </a:pPr>
+            <a:r>
+              <a:rPr b="0" lang="en-US" sz="900" spc="-1" strike="noStrike">
+                <a:solidFill>
+                  <a:srgbClr val="78ffc8"/>
+                </a:solidFill>
+                <a:latin typeface="Consolas"/>
+                <a:ea typeface="DejaVu Sans"/>
+              </a:rPr>
+              <a:t>}</a:t>
+            </a:r>
+            <a:endParaRPr b="0" lang="en-US" sz="900" spc="-1" strike="noStrike">
+              <a:solidFill>
+                <a:srgbClr val="ffffff"/>
+              </a:solidFill>
+              <a:latin typeface="Arial"/>
+            </a:endParaRPr>
+          </a:p>
+        </p:txBody>
+      </p:sp>
+      <p:sp>
+        <p:nvSpPr>
+          <p:cNvPr id="196" name="TextBox 20"/>
           <p:cNvSpPr/>
           <p:nvPr/>
         </p:nvSpPr>

--- a/Java/Java #4/TR/Java #4.pptx
+++ b/Java/Java #4/TR/Java #4.pptx
@@ -11,6 +11,7 @@
     <p:sldId id="259" r:id="rId6"/>
     <p:sldId id="260" r:id="rId7"/>
     <p:sldId id="261" r:id="rId8"/>
+    <p:sldId id="262" r:id="rId9"/>
   </p:sldIdLst>
   <p:sldSz cx="9144000" cy="6858000"/>
   <p:notesSz cx="7772400" cy="10058400"/>
@@ -68,7 +69,7 @@
         <p:txBody>
           <a:bodyPr/>
           <a:p>
-            <a:fld id="{41B16E91-23CA-4444-88AA-8270CB3AE394}" type="slidenum">
+            <a:fld id="{9B3F3B74-97F7-4199-9632-8CA0BEAD45EF}" type="slidenum">
               <a:t>&lt;#&gt;</a:t>
             </a:fld>
           </a:p>
@@ -277,7 +278,7 @@
         <p:txBody>
           <a:bodyPr/>
           <a:p>
-            <a:fld id="{EB567FFF-7AA3-470F-920E-53C15DDE13A9}" type="slidenum">
+            <a:fld id="{7A77F00C-EF4E-4D8E-8597-34F9525EBFF8}" type="slidenum">
               <a:t>&lt;#&gt;</a:t>
             </a:fld>
           </a:p>
@@ -572,7 +573,7 @@
         <p:txBody>
           <a:bodyPr/>
           <a:p>
-            <a:fld id="{5F0F8A3F-4ED0-43C1-8110-60455F75BEA3}" type="slidenum">
+            <a:fld id="{4DB28D56-F192-4F0B-9225-CC970A390777}" type="slidenum">
               <a:t>&lt;#&gt;</a:t>
             </a:fld>
           </a:p>
@@ -953,7 +954,7 @@
         <p:txBody>
           <a:bodyPr/>
           <a:p>
-            <a:fld id="{F1C296EC-524A-43F2-AB46-99152196EBBC}" type="slidenum">
+            <a:fld id="{71BA9899-E4BC-491A-9C5B-7E5C602FC229}" type="slidenum">
               <a:t>&lt;#&gt;</a:t>
             </a:fld>
           </a:p>
@@ -1116,7 +1117,7 @@
         <p:txBody>
           <a:bodyPr/>
           <a:p>
-            <a:fld id="{4D4C5257-92F3-44B3-9D57-787C5D5CEA96}" type="slidenum">
+            <a:fld id="{CD3ADB13-1409-4DE9-B9E1-6CB9AD87E9AB}" type="slidenum">
               <a:t>&lt;#&gt;</a:t>
             </a:fld>
           </a:p>
@@ -1282,7 +1283,7 @@
         <p:txBody>
           <a:bodyPr/>
           <a:p>
-            <a:fld id="{BB93F601-373A-48EC-813F-13C84A917A23}" type="slidenum">
+            <a:fld id="{DB7466FD-C044-428D-B9D5-879506E94008}" type="slidenum">
               <a:t>&lt;#&gt;</a:t>
             </a:fld>
           </a:p>
@@ -1491,7 +1492,7 @@
         <p:txBody>
           <a:bodyPr/>
           <a:p>
-            <a:fld id="{E4BA1044-C756-4778-B9BB-AE0CDCD6DDF6}" type="slidenum">
+            <a:fld id="{1FBBE019-0BF9-42C9-BB32-0E89BFD179E0}" type="slidenum">
               <a:t>&lt;#&gt;</a:t>
             </a:fld>
           </a:p>
@@ -1614,7 +1615,7 @@
         <p:txBody>
           <a:bodyPr/>
           <a:p>
-            <a:fld id="{6926C590-CE1B-41D2-BC1B-43446608AC4F}" type="slidenum">
+            <a:fld id="{28E291BA-7B2A-45B1-BE96-0D65E478DBD2}" type="slidenum">
               <a:t>&lt;#&gt;</a:t>
             </a:fld>
           </a:p>
@@ -1735,7 +1736,7 @@
         <p:txBody>
           <a:bodyPr/>
           <a:p>
-            <a:fld id="{E0424883-C7C4-4F12-8D43-96DC2ECA5D87}" type="slidenum">
+            <a:fld id="{57BAB726-E871-4FE1-814D-E07E6A81EB56}" type="slidenum">
               <a:t>&lt;#&gt;</a:t>
             </a:fld>
           </a:p>
@@ -1987,7 +1988,7 @@
         <p:txBody>
           <a:bodyPr/>
           <a:p>
-            <a:fld id="{55EF66D6-687F-4E42-8C6D-0F4023F9157F}" type="slidenum">
+            <a:fld id="{DD0B4D58-4CDC-46B2-901D-7E8BF2A44739}" type="slidenum">
               <a:t>&lt;#&gt;</a:t>
             </a:fld>
           </a:p>
@@ -2239,7 +2240,7 @@
         <p:txBody>
           <a:bodyPr/>
           <a:p>
-            <a:fld id="{D70ED2C8-A00C-4559-8A7D-B884A3654D5A}" type="slidenum">
+            <a:fld id="{4FBD1679-1907-4207-8521-E1B3D64907A3}" type="slidenum">
               <a:t>&lt;#&gt;</a:t>
             </a:fld>
           </a:p>
@@ -2491,7 +2492,7 @@
         <p:txBody>
           <a:bodyPr/>
           <a:p>
-            <a:fld id="{7B5848CC-7E00-4037-A765-8CD4F98A1759}" type="slidenum">
+            <a:fld id="{7F45747F-8D53-47D7-B99A-D168CC60CB09}" type="slidenum">
               <a:t>&lt;#&gt;</a:t>
             </a:fld>
           </a:p>
@@ -2560,7 +2561,7 @@
         <p:spPr>
           <a:xfrm>
             <a:off x="3124080" y="6356520"/>
-            <a:ext cx="2892600" cy="362160"/>
+            <a:ext cx="2892240" cy="361800"/>
           </a:xfrm>
           <a:prstGeom prst="rect">
             <a:avLst/>
@@ -2632,7 +2633,7 @@
         <p:spPr>
           <a:xfrm>
             <a:off x="6553080" y="6356520"/>
-            <a:ext cx="2130840" cy="362160"/>
+            <a:ext cx="2130480" cy="361800"/>
           </a:xfrm>
           <a:prstGeom prst="rect">
             <a:avLst/>
@@ -2673,7 +2674,7 @@
                 <a:tab algn="l" pos="0"/>
               </a:tabLst>
             </a:pPr>
-            <a:fld id="{1ABF933E-74EE-4B6C-AD9B-0CDBA8862101}" type="slidenum">
+            <a:fld id="{82720101-7306-4A27-975F-DE4382067A35}" type="slidenum">
               <a:rPr b="0" lang="en-US" sz="1200" spc="-1" strike="noStrike">
                 <a:solidFill>
                   <a:srgbClr val="8b8b8b"/>
@@ -2704,7 +2705,7 @@
         <p:spPr>
           <a:xfrm>
             <a:off x="457200" y="6356520"/>
-            <a:ext cx="2130840" cy="362160"/>
+            <a:ext cx="2130480" cy="361800"/>
           </a:xfrm>
           <a:prstGeom prst="rect">
             <a:avLst/>
@@ -3071,7 +3072,7 @@
         <p:spPr>
           <a:xfrm>
             <a:off x="0" y="0"/>
-            <a:ext cx="12186000" cy="6855120"/>
+            <a:ext cx="12185640" cy="6854760"/>
           </a:xfrm>
           <a:prstGeom prst="rect">
             <a:avLst/>
@@ -3131,7 +3132,7 @@
         <p:spPr>
           <a:xfrm>
             <a:off x="0" y="0"/>
-            <a:ext cx="15480" cy="6855120"/>
+            <a:ext cx="15120" cy="6854760"/>
           </a:xfrm>
           <a:prstGeom prst="rect">
             <a:avLst/>
@@ -3191,7 +3192,7 @@
         <p:spPr>
           <a:xfrm>
             <a:off x="914400" y="0"/>
-            <a:ext cx="15480" cy="6855120"/>
+            <a:ext cx="15120" cy="6854760"/>
           </a:xfrm>
           <a:prstGeom prst="rect">
             <a:avLst/>
@@ -3251,7 +3252,7 @@
         <p:spPr>
           <a:xfrm>
             <a:off x="1828800" y="0"/>
-            <a:ext cx="15480" cy="6855120"/>
+            <a:ext cx="15120" cy="6854760"/>
           </a:xfrm>
           <a:prstGeom prst="rect">
             <a:avLst/>
@@ -3311,7 +3312,7 @@
         <p:spPr>
           <a:xfrm>
             <a:off x="2743200" y="0"/>
-            <a:ext cx="15480" cy="6855120"/>
+            <a:ext cx="15120" cy="6854760"/>
           </a:xfrm>
           <a:prstGeom prst="rect">
             <a:avLst/>
@@ -3371,7 +3372,7 @@
         <p:spPr>
           <a:xfrm>
             <a:off x="3657600" y="0"/>
-            <a:ext cx="15480" cy="6855120"/>
+            <a:ext cx="15120" cy="6854760"/>
           </a:xfrm>
           <a:prstGeom prst="rect">
             <a:avLst/>
@@ -3431,7 +3432,7 @@
         <p:spPr>
           <a:xfrm>
             <a:off x="4572000" y="0"/>
-            <a:ext cx="15480" cy="6855120"/>
+            <a:ext cx="15120" cy="6854760"/>
           </a:xfrm>
           <a:prstGeom prst="rect">
             <a:avLst/>
@@ -3491,7 +3492,7 @@
         <p:spPr>
           <a:xfrm>
             <a:off x="5486400" y="0"/>
-            <a:ext cx="15480" cy="6855120"/>
+            <a:ext cx="15120" cy="6854760"/>
           </a:xfrm>
           <a:prstGeom prst="rect">
             <a:avLst/>
@@ -3551,7 +3552,7 @@
         <p:spPr>
           <a:xfrm>
             <a:off x="6400800" y="0"/>
-            <a:ext cx="15480" cy="6855120"/>
+            <a:ext cx="15120" cy="6854760"/>
           </a:xfrm>
           <a:prstGeom prst="rect">
             <a:avLst/>
@@ -3611,7 +3612,7 @@
         <p:spPr>
           <a:xfrm>
             <a:off x="7315200" y="0"/>
-            <a:ext cx="15480" cy="6855120"/>
+            <a:ext cx="15120" cy="6854760"/>
           </a:xfrm>
           <a:prstGeom prst="rect">
             <a:avLst/>
@@ -3671,7 +3672,7 @@
         <p:spPr>
           <a:xfrm>
             <a:off x="8229600" y="0"/>
-            <a:ext cx="15480" cy="6855120"/>
+            <a:ext cx="15120" cy="6854760"/>
           </a:xfrm>
           <a:prstGeom prst="rect">
             <a:avLst/>
@@ -3731,7 +3732,7 @@
         <p:spPr>
           <a:xfrm>
             <a:off x="9144000" y="0"/>
-            <a:ext cx="15480" cy="6855120"/>
+            <a:ext cx="15120" cy="6854760"/>
           </a:xfrm>
           <a:prstGeom prst="rect">
             <a:avLst/>
@@ -3791,7 +3792,7 @@
         <p:spPr>
           <a:xfrm>
             <a:off x="10058400" y="0"/>
-            <a:ext cx="15480" cy="6855120"/>
+            <a:ext cx="15120" cy="6854760"/>
           </a:xfrm>
           <a:prstGeom prst="rect">
             <a:avLst/>
@@ -3851,7 +3852,7 @@
         <p:spPr>
           <a:xfrm>
             <a:off x="10972800" y="0"/>
-            <a:ext cx="15480" cy="6855120"/>
+            <a:ext cx="15120" cy="6854760"/>
           </a:xfrm>
           <a:prstGeom prst="rect">
             <a:avLst/>
@@ -3911,7 +3912,7 @@
         <p:spPr>
           <a:xfrm>
             <a:off x="11887200" y="0"/>
-            <a:ext cx="15480" cy="6855120"/>
+            <a:ext cx="15120" cy="6854760"/>
           </a:xfrm>
           <a:prstGeom prst="rect">
             <a:avLst/>
@@ -3971,7 +3972,7 @@
         <p:spPr>
           <a:xfrm>
             <a:off x="0" y="0"/>
-            <a:ext cx="317160" cy="6855120"/>
+            <a:ext cx="316800" cy="6854760"/>
           </a:xfrm>
           <a:prstGeom prst="rect">
             <a:avLst/>
@@ -4031,7 +4032,7 @@
         <p:spPr>
           <a:xfrm>
             <a:off x="9875520" y="365760"/>
-            <a:ext cx="2008800" cy="500040"/>
+            <a:ext cx="2008440" cy="499680"/>
           </a:xfrm>
           <a:prstGeom prst="roundRect">
             <a:avLst>
@@ -4282,7 +4283,7 @@
         <p:spPr>
           <a:xfrm>
             <a:off x="987480" y="3182040"/>
-            <a:ext cx="3288960" cy="2740320"/>
+            <a:ext cx="3288600" cy="2739960"/>
           </a:xfrm>
           <a:prstGeom prst="roundRect">
             <a:avLst>
@@ -4344,7 +4345,7 @@
         <p:spPr>
           <a:xfrm>
             <a:off x="914400" y="3108960"/>
-            <a:ext cx="3288960" cy="2740320"/>
+            <a:ext cx="3288600" cy="2739960"/>
           </a:xfrm>
           <a:prstGeom prst="roundRect">
             <a:avLst>
@@ -4478,7 +4479,7 @@
         <p:spPr>
           <a:xfrm>
             <a:off x="4507920" y="3182040"/>
-            <a:ext cx="3288960" cy="2740320"/>
+            <a:ext cx="3288600" cy="2739960"/>
           </a:xfrm>
           <a:prstGeom prst="roundRect">
             <a:avLst>
@@ -4540,7 +4541,7 @@
         <p:spPr>
           <a:xfrm>
             <a:off x="4434840" y="3108960"/>
-            <a:ext cx="3288960" cy="2740320"/>
+            <a:ext cx="3288600" cy="2739960"/>
           </a:xfrm>
           <a:prstGeom prst="roundRect">
             <a:avLst>
@@ -4798,7 +4799,7 @@
         <p:spPr>
           <a:xfrm>
             <a:off x="8028360" y="3182040"/>
-            <a:ext cx="3288960" cy="2740320"/>
+            <a:ext cx="3288600" cy="2739960"/>
           </a:xfrm>
           <a:prstGeom prst="roundRect">
             <a:avLst>
@@ -4860,7 +4861,7 @@
         <p:spPr>
           <a:xfrm>
             <a:off x="7955280" y="2971800"/>
-            <a:ext cx="3930120" cy="3655800"/>
+            <a:ext cx="3929760" cy="3655440"/>
           </a:xfrm>
           <a:prstGeom prst="roundRect">
             <a:avLst>
@@ -5371,7 +5372,7 @@
         <p:spPr>
           <a:xfrm>
             <a:off x="0" y="0"/>
-            <a:ext cx="12186360" cy="6855480"/>
+            <a:ext cx="12186000" cy="6855120"/>
           </a:xfrm>
           <a:prstGeom prst="rect">
             <a:avLst/>
@@ -5431,7 +5432,7 @@
         <p:spPr>
           <a:xfrm>
             <a:off x="0" y="0"/>
-            <a:ext cx="15840" cy="6855480"/>
+            <a:ext cx="15480" cy="6855120"/>
           </a:xfrm>
           <a:prstGeom prst="rect">
             <a:avLst/>
@@ -5491,7 +5492,7 @@
         <p:spPr>
           <a:xfrm>
             <a:off x="914400" y="0"/>
-            <a:ext cx="15840" cy="6855480"/>
+            <a:ext cx="15480" cy="6855120"/>
           </a:xfrm>
           <a:prstGeom prst="rect">
             <a:avLst/>
@@ -5551,7 +5552,7 @@
         <p:spPr>
           <a:xfrm>
             <a:off x="1828800" y="0"/>
-            <a:ext cx="15840" cy="6855480"/>
+            <a:ext cx="15480" cy="6855120"/>
           </a:xfrm>
           <a:prstGeom prst="rect">
             <a:avLst/>
@@ -5611,7 +5612,7 @@
         <p:spPr>
           <a:xfrm>
             <a:off x="2743200" y="0"/>
-            <a:ext cx="15840" cy="6855480"/>
+            <a:ext cx="15480" cy="6855120"/>
           </a:xfrm>
           <a:prstGeom prst="rect">
             <a:avLst/>
@@ -5671,7 +5672,7 @@
         <p:spPr>
           <a:xfrm>
             <a:off x="3657600" y="0"/>
-            <a:ext cx="15840" cy="6855480"/>
+            <a:ext cx="15480" cy="6855120"/>
           </a:xfrm>
           <a:prstGeom prst="rect">
             <a:avLst/>
@@ -5731,7 +5732,7 @@
         <p:spPr>
           <a:xfrm>
             <a:off x="4572000" y="0"/>
-            <a:ext cx="15840" cy="6855480"/>
+            <a:ext cx="15480" cy="6855120"/>
           </a:xfrm>
           <a:prstGeom prst="rect">
             <a:avLst/>
@@ -5791,7 +5792,7 @@
         <p:spPr>
           <a:xfrm>
             <a:off x="5486400" y="0"/>
-            <a:ext cx="15840" cy="6855480"/>
+            <a:ext cx="15480" cy="6855120"/>
           </a:xfrm>
           <a:prstGeom prst="rect">
             <a:avLst/>
@@ -5851,7 +5852,7 @@
         <p:spPr>
           <a:xfrm>
             <a:off x="6400800" y="0"/>
-            <a:ext cx="15840" cy="6855480"/>
+            <a:ext cx="15480" cy="6855120"/>
           </a:xfrm>
           <a:prstGeom prst="rect">
             <a:avLst/>
@@ -5911,7 +5912,7 @@
         <p:spPr>
           <a:xfrm>
             <a:off x="7315200" y="0"/>
-            <a:ext cx="15840" cy="6855480"/>
+            <a:ext cx="15480" cy="6855120"/>
           </a:xfrm>
           <a:prstGeom prst="rect">
             <a:avLst/>
@@ -5971,7 +5972,7 @@
         <p:spPr>
           <a:xfrm>
             <a:off x="8229600" y="0"/>
-            <a:ext cx="15840" cy="6855480"/>
+            <a:ext cx="15480" cy="6855120"/>
           </a:xfrm>
           <a:prstGeom prst="rect">
             <a:avLst/>
@@ -6031,7 +6032,7 @@
         <p:spPr>
           <a:xfrm>
             <a:off x="9144000" y="0"/>
-            <a:ext cx="15840" cy="6855480"/>
+            <a:ext cx="15480" cy="6855120"/>
           </a:xfrm>
           <a:prstGeom prst="rect">
             <a:avLst/>
@@ -6091,7 +6092,7 @@
         <p:spPr>
           <a:xfrm>
             <a:off x="10058400" y="0"/>
-            <a:ext cx="15840" cy="6855480"/>
+            <a:ext cx="15480" cy="6855120"/>
           </a:xfrm>
           <a:prstGeom prst="rect">
             <a:avLst/>
@@ -6151,7 +6152,7 @@
         <p:spPr>
           <a:xfrm>
             <a:off x="10972800" y="0"/>
-            <a:ext cx="15840" cy="6855480"/>
+            <a:ext cx="15480" cy="6855120"/>
           </a:xfrm>
           <a:prstGeom prst="rect">
             <a:avLst/>
@@ -6211,7 +6212,7 @@
         <p:spPr>
           <a:xfrm>
             <a:off x="11887200" y="0"/>
-            <a:ext cx="15840" cy="6855480"/>
+            <a:ext cx="15480" cy="6855120"/>
           </a:xfrm>
           <a:prstGeom prst="rect">
             <a:avLst/>
@@ -6271,7 +6272,7 @@
         <p:spPr>
           <a:xfrm>
             <a:off x="0" y="0"/>
-            <a:ext cx="317520" cy="6855480"/>
+            <a:ext cx="317160" cy="6855120"/>
           </a:xfrm>
           <a:prstGeom prst="rect">
             <a:avLst/>
@@ -6331,7 +6332,7 @@
         <p:spPr>
           <a:xfrm>
             <a:off x="9875520" y="365760"/>
-            <a:ext cx="2009160" cy="500400"/>
+            <a:ext cx="2008800" cy="500040"/>
           </a:xfrm>
           <a:prstGeom prst="roundRect">
             <a:avLst>
@@ -6559,7 +6560,7 @@
         <p:spPr>
           <a:xfrm>
             <a:off x="987480" y="3182040"/>
-            <a:ext cx="3289320" cy="2740680"/>
+            <a:ext cx="3288960" cy="2740320"/>
           </a:xfrm>
           <a:prstGeom prst="roundRect">
             <a:avLst>
@@ -6621,7 +6622,7 @@
         <p:spPr>
           <a:xfrm>
             <a:off x="914400" y="3108960"/>
-            <a:ext cx="3289320" cy="2740680"/>
+            <a:ext cx="3288960" cy="2740320"/>
           </a:xfrm>
           <a:prstGeom prst="roundRect">
             <a:avLst>
@@ -6784,7 +6785,7 @@
         <p:spPr>
           <a:xfrm>
             <a:off x="4507920" y="3182040"/>
-            <a:ext cx="3289320" cy="2740680"/>
+            <a:ext cx="3288960" cy="2740320"/>
           </a:xfrm>
           <a:prstGeom prst="roundRect">
             <a:avLst>
@@ -6846,7 +6847,7 @@
         <p:spPr>
           <a:xfrm>
             <a:off x="4434840" y="3108960"/>
-            <a:ext cx="3289320" cy="2740680"/>
+            <a:ext cx="3288960" cy="2740320"/>
           </a:xfrm>
           <a:prstGeom prst="roundRect">
             <a:avLst>
@@ -7104,7 +7105,7 @@
         <p:spPr>
           <a:xfrm>
             <a:off x="8028360" y="3182040"/>
-            <a:ext cx="3289320" cy="2740680"/>
+            <a:ext cx="3288960" cy="2740320"/>
           </a:xfrm>
           <a:prstGeom prst="roundRect">
             <a:avLst>
@@ -7166,7 +7167,7 @@
         <p:spPr>
           <a:xfrm>
             <a:off x="7955280" y="3108960"/>
-            <a:ext cx="3701880" cy="3061800"/>
+            <a:ext cx="3701520" cy="3061440"/>
           </a:xfrm>
           <a:prstGeom prst="roundRect">
             <a:avLst>
@@ -7611,7 +7612,7 @@
         <p:spPr>
           <a:xfrm>
             <a:off x="0" y="0"/>
-            <a:ext cx="12186360" cy="6855480"/>
+            <a:ext cx="12186000" cy="6855120"/>
           </a:xfrm>
           <a:prstGeom prst="rect">
             <a:avLst/>
@@ -7671,7 +7672,7 @@
         <p:spPr>
           <a:xfrm>
             <a:off x="0" y="0"/>
-            <a:ext cx="15840" cy="6855480"/>
+            <a:ext cx="15480" cy="6855120"/>
           </a:xfrm>
           <a:prstGeom prst="rect">
             <a:avLst/>
@@ -7731,7 +7732,7 @@
         <p:spPr>
           <a:xfrm>
             <a:off x="914400" y="0"/>
-            <a:ext cx="15840" cy="6855480"/>
+            <a:ext cx="15480" cy="6855120"/>
           </a:xfrm>
           <a:prstGeom prst="rect">
             <a:avLst/>
@@ -7791,7 +7792,7 @@
         <p:spPr>
           <a:xfrm>
             <a:off x="1828800" y="0"/>
-            <a:ext cx="15840" cy="6855480"/>
+            <a:ext cx="15480" cy="6855120"/>
           </a:xfrm>
           <a:prstGeom prst="rect">
             <a:avLst/>
@@ -7851,7 +7852,7 @@
         <p:spPr>
           <a:xfrm>
             <a:off x="2743200" y="0"/>
-            <a:ext cx="15840" cy="6855480"/>
+            <a:ext cx="15480" cy="6855120"/>
           </a:xfrm>
           <a:prstGeom prst="rect">
             <a:avLst/>
@@ -7911,7 +7912,7 @@
         <p:spPr>
           <a:xfrm>
             <a:off x="3657600" y="0"/>
-            <a:ext cx="15840" cy="6855480"/>
+            <a:ext cx="15480" cy="6855120"/>
           </a:xfrm>
           <a:prstGeom prst="rect">
             <a:avLst/>
@@ -7971,7 +7972,7 @@
         <p:spPr>
           <a:xfrm>
             <a:off x="4572000" y="0"/>
-            <a:ext cx="15840" cy="6855480"/>
+            <a:ext cx="15480" cy="6855120"/>
           </a:xfrm>
           <a:prstGeom prst="rect">
             <a:avLst/>
@@ -8031,7 +8032,7 @@
         <p:spPr>
           <a:xfrm>
             <a:off x="5486400" y="0"/>
-            <a:ext cx="15840" cy="6855480"/>
+            <a:ext cx="15480" cy="6855120"/>
           </a:xfrm>
           <a:prstGeom prst="rect">
             <a:avLst/>
@@ -8091,7 +8092,7 @@
         <p:spPr>
           <a:xfrm>
             <a:off x="6400800" y="0"/>
-            <a:ext cx="15840" cy="6855480"/>
+            <a:ext cx="15480" cy="6855120"/>
           </a:xfrm>
           <a:prstGeom prst="rect">
             <a:avLst/>
@@ -8151,7 +8152,7 @@
         <p:spPr>
           <a:xfrm>
             <a:off x="7315200" y="0"/>
-            <a:ext cx="15840" cy="6855480"/>
+            <a:ext cx="15480" cy="6855120"/>
           </a:xfrm>
           <a:prstGeom prst="rect">
             <a:avLst/>
@@ -8211,7 +8212,7 @@
         <p:spPr>
           <a:xfrm>
             <a:off x="8229600" y="0"/>
-            <a:ext cx="15840" cy="6855480"/>
+            <a:ext cx="15480" cy="6855120"/>
           </a:xfrm>
           <a:prstGeom prst="rect">
             <a:avLst/>
@@ -8271,7 +8272,7 @@
         <p:spPr>
           <a:xfrm>
             <a:off x="9144000" y="0"/>
-            <a:ext cx="15840" cy="6855480"/>
+            <a:ext cx="15480" cy="6855120"/>
           </a:xfrm>
           <a:prstGeom prst="rect">
             <a:avLst/>
@@ -8331,7 +8332,7 @@
         <p:spPr>
           <a:xfrm>
             <a:off x="10058400" y="0"/>
-            <a:ext cx="15840" cy="6855480"/>
+            <a:ext cx="15480" cy="6855120"/>
           </a:xfrm>
           <a:prstGeom prst="rect">
             <a:avLst/>
@@ -8391,7 +8392,7 @@
         <p:spPr>
           <a:xfrm>
             <a:off x="10972800" y="0"/>
-            <a:ext cx="15840" cy="6855480"/>
+            <a:ext cx="15480" cy="6855120"/>
           </a:xfrm>
           <a:prstGeom prst="rect">
             <a:avLst/>
@@ -8451,7 +8452,7 @@
         <p:spPr>
           <a:xfrm>
             <a:off x="11887200" y="0"/>
-            <a:ext cx="15840" cy="6855480"/>
+            <a:ext cx="15480" cy="6855120"/>
           </a:xfrm>
           <a:prstGeom prst="rect">
             <a:avLst/>
@@ -8511,7 +8512,7 @@
         <p:spPr>
           <a:xfrm>
             <a:off x="0" y="0"/>
-            <a:ext cx="317520" cy="6855480"/>
+            <a:ext cx="317160" cy="6855120"/>
           </a:xfrm>
           <a:prstGeom prst="rect">
             <a:avLst/>
@@ -8571,7 +8572,7 @@
         <p:spPr>
           <a:xfrm>
             <a:off x="9875520" y="365760"/>
-            <a:ext cx="2009160" cy="500400"/>
+            <a:ext cx="2008800" cy="500040"/>
           </a:xfrm>
           <a:prstGeom prst="roundRect">
             <a:avLst>
@@ -8645,7 +8646,7 @@
         <p:spPr>
           <a:xfrm>
             <a:off x="942480" y="914400"/>
-            <a:ext cx="9084600" cy="638280"/>
+            <a:ext cx="9084240" cy="638280"/>
           </a:xfrm>
           <a:prstGeom prst="rect">
             <a:avLst/>
@@ -8699,7 +8700,7 @@
         <p:spPr>
           <a:xfrm>
             <a:off x="1149480" y="1828800"/>
-            <a:ext cx="9189720" cy="576360"/>
+            <a:ext cx="9189360" cy="576360"/>
           </a:xfrm>
           <a:prstGeom prst="rect">
             <a:avLst/>
@@ -8776,7 +8777,7 @@
         <p:spPr>
           <a:xfrm>
             <a:off x="987480" y="3182040"/>
-            <a:ext cx="3289320" cy="2740680"/>
+            <a:ext cx="3288960" cy="2740320"/>
           </a:xfrm>
           <a:prstGeom prst="roundRect">
             <a:avLst>
@@ -8838,7 +8839,7 @@
         <p:spPr>
           <a:xfrm>
             <a:off x="914400" y="3108960"/>
-            <a:ext cx="3289320" cy="3062160"/>
+            <a:ext cx="3288960" cy="3061800"/>
           </a:xfrm>
           <a:prstGeom prst="roundRect">
             <a:avLst>
@@ -9029,7 +9030,7 @@
         <p:spPr>
           <a:xfrm>
             <a:off x="4507920" y="3182040"/>
-            <a:ext cx="3289320" cy="2740680"/>
+            <a:ext cx="3288960" cy="2740320"/>
           </a:xfrm>
           <a:prstGeom prst="roundRect">
             <a:avLst>
@@ -9091,7 +9092,7 @@
         <p:spPr>
           <a:xfrm>
             <a:off x="4434840" y="3108960"/>
-            <a:ext cx="3289320" cy="2740680"/>
+            <a:ext cx="3288960" cy="2740320"/>
           </a:xfrm>
           <a:prstGeom prst="roundRect">
             <a:avLst>
@@ -9349,7 +9350,7 @@
         <p:spPr>
           <a:xfrm>
             <a:off x="8028360" y="3182040"/>
-            <a:ext cx="3289320" cy="2740680"/>
+            <a:ext cx="3288960" cy="2740320"/>
           </a:xfrm>
           <a:prstGeom prst="roundRect">
             <a:avLst>
@@ -9411,7 +9412,7 @@
         <p:spPr>
           <a:xfrm>
             <a:off x="7955280" y="3108960"/>
-            <a:ext cx="3701880" cy="3061800"/>
+            <a:ext cx="3701520" cy="3061440"/>
           </a:xfrm>
           <a:prstGeom prst="roundRect">
             <a:avLst>
@@ -9856,7 +9857,7 @@
         <p:spPr>
           <a:xfrm>
             <a:off x="0" y="0"/>
-            <a:ext cx="12186360" cy="6855480"/>
+            <a:ext cx="12186000" cy="6855120"/>
           </a:xfrm>
           <a:prstGeom prst="rect">
             <a:avLst/>
@@ -9916,7 +9917,7 @@
         <p:spPr>
           <a:xfrm>
             <a:off x="0" y="0"/>
-            <a:ext cx="15840" cy="6855480"/>
+            <a:ext cx="15480" cy="6855120"/>
           </a:xfrm>
           <a:prstGeom prst="rect">
             <a:avLst/>
@@ -9976,7 +9977,7 @@
         <p:spPr>
           <a:xfrm>
             <a:off x="914400" y="0"/>
-            <a:ext cx="15840" cy="6855480"/>
+            <a:ext cx="15480" cy="6855120"/>
           </a:xfrm>
           <a:prstGeom prst="rect">
             <a:avLst/>
@@ -10036,7 +10037,7 @@
         <p:spPr>
           <a:xfrm>
             <a:off x="1828800" y="0"/>
-            <a:ext cx="15840" cy="6855480"/>
+            <a:ext cx="15480" cy="6855120"/>
           </a:xfrm>
           <a:prstGeom prst="rect">
             <a:avLst/>
@@ -10096,7 +10097,7 @@
         <p:spPr>
           <a:xfrm>
             <a:off x="2743200" y="0"/>
-            <a:ext cx="15840" cy="6855480"/>
+            <a:ext cx="15480" cy="6855120"/>
           </a:xfrm>
           <a:prstGeom prst="rect">
             <a:avLst/>
@@ -10156,7 +10157,7 @@
         <p:spPr>
           <a:xfrm>
             <a:off x="3657600" y="0"/>
-            <a:ext cx="15840" cy="6855480"/>
+            <a:ext cx="15480" cy="6855120"/>
           </a:xfrm>
           <a:prstGeom prst="rect">
             <a:avLst/>
@@ -10216,7 +10217,7 @@
         <p:spPr>
           <a:xfrm>
             <a:off x="4572000" y="0"/>
-            <a:ext cx="15840" cy="6855480"/>
+            <a:ext cx="15480" cy="6855120"/>
           </a:xfrm>
           <a:prstGeom prst="rect">
             <a:avLst/>
@@ -10276,7 +10277,7 @@
         <p:spPr>
           <a:xfrm>
             <a:off x="5486400" y="0"/>
-            <a:ext cx="15840" cy="6855480"/>
+            <a:ext cx="15480" cy="6855120"/>
           </a:xfrm>
           <a:prstGeom prst="rect">
             <a:avLst/>
@@ -10336,7 +10337,7 @@
         <p:spPr>
           <a:xfrm>
             <a:off x="6400800" y="0"/>
-            <a:ext cx="15840" cy="6855480"/>
+            <a:ext cx="15480" cy="6855120"/>
           </a:xfrm>
           <a:prstGeom prst="rect">
             <a:avLst/>
@@ -10396,7 +10397,7 @@
         <p:spPr>
           <a:xfrm>
             <a:off x="7315200" y="0"/>
-            <a:ext cx="15840" cy="6855480"/>
+            <a:ext cx="15480" cy="6855120"/>
           </a:xfrm>
           <a:prstGeom prst="rect">
             <a:avLst/>
@@ -10456,7 +10457,7 @@
         <p:spPr>
           <a:xfrm>
             <a:off x="8229600" y="0"/>
-            <a:ext cx="15840" cy="6855480"/>
+            <a:ext cx="15480" cy="6855120"/>
           </a:xfrm>
           <a:prstGeom prst="rect">
             <a:avLst/>
@@ -10516,7 +10517,7 @@
         <p:spPr>
           <a:xfrm>
             <a:off x="9144000" y="0"/>
-            <a:ext cx="15840" cy="6855480"/>
+            <a:ext cx="15480" cy="6855120"/>
           </a:xfrm>
           <a:prstGeom prst="rect">
             <a:avLst/>
@@ -10576,7 +10577,7 @@
         <p:spPr>
           <a:xfrm>
             <a:off x="10058400" y="0"/>
-            <a:ext cx="15840" cy="6855480"/>
+            <a:ext cx="15480" cy="6855120"/>
           </a:xfrm>
           <a:prstGeom prst="rect">
             <a:avLst/>
@@ -10636,7 +10637,7 @@
         <p:spPr>
           <a:xfrm>
             <a:off x="10972800" y="0"/>
-            <a:ext cx="15840" cy="6855480"/>
+            <a:ext cx="15480" cy="6855120"/>
           </a:xfrm>
           <a:prstGeom prst="rect">
             <a:avLst/>
@@ -10696,7 +10697,7 @@
         <p:spPr>
           <a:xfrm>
             <a:off x="11887200" y="0"/>
-            <a:ext cx="15840" cy="6855480"/>
+            <a:ext cx="15480" cy="6855120"/>
           </a:xfrm>
           <a:prstGeom prst="rect">
             <a:avLst/>
@@ -10756,7 +10757,7 @@
         <p:spPr>
           <a:xfrm>
             <a:off x="0" y="0"/>
-            <a:ext cx="317520" cy="6855480"/>
+            <a:ext cx="317160" cy="6855120"/>
           </a:xfrm>
           <a:prstGeom prst="rect">
             <a:avLst/>
@@ -10816,7 +10817,7 @@
         <p:spPr>
           <a:xfrm>
             <a:off x="9875520" y="365760"/>
-            <a:ext cx="2009160" cy="500400"/>
+            <a:ext cx="2008800" cy="500040"/>
           </a:xfrm>
           <a:prstGeom prst="roundRect">
             <a:avLst>
@@ -10890,7 +10891,7 @@
         <p:spPr>
           <a:xfrm>
             <a:off x="2796840" y="914400"/>
-            <a:ext cx="5375520" cy="638280"/>
+            <a:ext cx="5375160" cy="638280"/>
           </a:xfrm>
           <a:prstGeom prst="rect">
             <a:avLst/>
@@ -10944,7 +10945,7 @@
         <p:spPr>
           <a:xfrm>
             <a:off x="1149480" y="1828800"/>
-            <a:ext cx="9189720" cy="576360"/>
+            <a:ext cx="9189360" cy="576360"/>
           </a:xfrm>
           <a:prstGeom prst="rect">
             <a:avLst/>
@@ -11021,7 +11022,7 @@
         <p:spPr>
           <a:xfrm>
             <a:off x="987480" y="3182040"/>
-            <a:ext cx="3289320" cy="2740680"/>
+            <a:ext cx="3288960" cy="2740320"/>
           </a:xfrm>
           <a:prstGeom prst="roundRect">
             <a:avLst>
@@ -11083,7 +11084,7 @@
         <p:spPr>
           <a:xfrm>
             <a:off x="914400" y="3108960"/>
-            <a:ext cx="3289320" cy="3062160"/>
+            <a:ext cx="3288960" cy="3061800"/>
           </a:xfrm>
           <a:prstGeom prst="roundRect">
             <a:avLst>
@@ -11274,7 +11275,7 @@
         <p:spPr>
           <a:xfrm>
             <a:off x="4507920" y="3182040"/>
-            <a:ext cx="3289320" cy="2740680"/>
+            <a:ext cx="3288960" cy="2740320"/>
           </a:xfrm>
           <a:prstGeom prst="roundRect">
             <a:avLst>
@@ -11336,7 +11337,7 @@
         <p:spPr>
           <a:xfrm>
             <a:off x="4434840" y="3108960"/>
-            <a:ext cx="3289320" cy="2740680"/>
+            <a:ext cx="3288960" cy="2740320"/>
           </a:xfrm>
           <a:prstGeom prst="roundRect">
             <a:avLst>
@@ -11548,7 +11549,7 @@
         <p:spPr>
           <a:xfrm>
             <a:off x="8028360" y="3182040"/>
-            <a:ext cx="3289320" cy="2740680"/>
+            <a:ext cx="3288960" cy="2740320"/>
           </a:xfrm>
           <a:prstGeom prst="roundRect">
             <a:avLst>
@@ -11610,7 +11611,7 @@
         <p:spPr>
           <a:xfrm>
             <a:off x="7955280" y="2743200"/>
-            <a:ext cx="3701880" cy="3656880"/>
+            <a:ext cx="3701520" cy="3656520"/>
           </a:xfrm>
           <a:prstGeom prst="roundRect">
             <a:avLst>
@@ -12170,7 +12171,7 @@
         <p:spPr>
           <a:xfrm>
             <a:off x="0" y="0"/>
-            <a:ext cx="12186360" cy="6855480"/>
+            <a:ext cx="12186000" cy="6855120"/>
           </a:xfrm>
           <a:prstGeom prst="rect">
             <a:avLst/>
@@ -12230,7 +12231,7 @@
         <p:spPr>
           <a:xfrm>
             <a:off x="0" y="0"/>
-            <a:ext cx="15840" cy="6855480"/>
+            <a:ext cx="15480" cy="6855120"/>
           </a:xfrm>
           <a:prstGeom prst="rect">
             <a:avLst/>
@@ -12290,7 +12291,7 @@
         <p:spPr>
           <a:xfrm>
             <a:off x="914400" y="0"/>
-            <a:ext cx="15840" cy="6855480"/>
+            <a:ext cx="15480" cy="6855120"/>
           </a:xfrm>
           <a:prstGeom prst="rect">
             <a:avLst/>
@@ -12350,7 +12351,7 @@
         <p:spPr>
           <a:xfrm>
             <a:off x="1828800" y="0"/>
-            <a:ext cx="15840" cy="6855480"/>
+            <a:ext cx="15480" cy="6855120"/>
           </a:xfrm>
           <a:prstGeom prst="rect">
             <a:avLst/>
@@ -12410,7 +12411,7 @@
         <p:spPr>
           <a:xfrm>
             <a:off x="2743200" y="0"/>
-            <a:ext cx="15840" cy="6855480"/>
+            <a:ext cx="15480" cy="6855120"/>
           </a:xfrm>
           <a:prstGeom prst="rect">
             <a:avLst/>
@@ -12470,7 +12471,7 @@
         <p:spPr>
           <a:xfrm>
             <a:off x="3657600" y="0"/>
-            <a:ext cx="15840" cy="6855480"/>
+            <a:ext cx="15480" cy="6855120"/>
           </a:xfrm>
           <a:prstGeom prst="rect">
             <a:avLst/>
@@ -12530,7 +12531,7 @@
         <p:spPr>
           <a:xfrm>
             <a:off x="4572000" y="0"/>
-            <a:ext cx="15840" cy="6855480"/>
+            <a:ext cx="15480" cy="6855120"/>
           </a:xfrm>
           <a:prstGeom prst="rect">
             <a:avLst/>
@@ -12590,7 +12591,7 @@
         <p:spPr>
           <a:xfrm>
             <a:off x="5486400" y="0"/>
-            <a:ext cx="15840" cy="6855480"/>
+            <a:ext cx="15480" cy="6855120"/>
           </a:xfrm>
           <a:prstGeom prst="rect">
             <a:avLst/>
@@ -12650,7 +12651,7 @@
         <p:spPr>
           <a:xfrm>
             <a:off x="6400800" y="0"/>
-            <a:ext cx="15840" cy="6855480"/>
+            <a:ext cx="15480" cy="6855120"/>
           </a:xfrm>
           <a:prstGeom prst="rect">
             <a:avLst/>
@@ -12710,7 +12711,7 @@
         <p:spPr>
           <a:xfrm>
             <a:off x="7315200" y="0"/>
-            <a:ext cx="15840" cy="6855480"/>
+            <a:ext cx="15480" cy="6855120"/>
           </a:xfrm>
           <a:prstGeom prst="rect">
             <a:avLst/>
@@ -12770,7 +12771,7 @@
         <p:spPr>
           <a:xfrm>
             <a:off x="8229600" y="0"/>
-            <a:ext cx="15840" cy="6855480"/>
+            <a:ext cx="15480" cy="6855120"/>
           </a:xfrm>
           <a:prstGeom prst="rect">
             <a:avLst/>
@@ -12830,7 +12831,7 @@
         <p:spPr>
           <a:xfrm>
             <a:off x="9144000" y="0"/>
-            <a:ext cx="15840" cy="6855480"/>
+            <a:ext cx="15480" cy="6855120"/>
           </a:xfrm>
           <a:prstGeom prst="rect">
             <a:avLst/>
@@ -12890,7 +12891,7 @@
         <p:spPr>
           <a:xfrm>
             <a:off x="10058400" y="0"/>
-            <a:ext cx="15840" cy="6855480"/>
+            <a:ext cx="15480" cy="6855120"/>
           </a:xfrm>
           <a:prstGeom prst="rect">
             <a:avLst/>
@@ -12950,7 +12951,7 @@
         <p:spPr>
           <a:xfrm>
             <a:off x="10972800" y="0"/>
-            <a:ext cx="15840" cy="6855480"/>
+            <a:ext cx="15480" cy="6855120"/>
           </a:xfrm>
           <a:prstGeom prst="rect">
             <a:avLst/>
@@ -13010,7 +13011,7 @@
         <p:spPr>
           <a:xfrm>
             <a:off x="11887200" y="0"/>
-            <a:ext cx="15840" cy="6855480"/>
+            <a:ext cx="15480" cy="6855120"/>
           </a:xfrm>
           <a:prstGeom prst="rect">
             <a:avLst/>
@@ -13070,7 +13071,7 @@
         <p:spPr>
           <a:xfrm>
             <a:off x="0" y="0"/>
-            <a:ext cx="317520" cy="6855480"/>
+            <a:ext cx="317160" cy="6855120"/>
           </a:xfrm>
           <a:prstGeom prst="rect">
             <a:avLst/>
@@ -13130,7 +13131,7 @@
         <p:spPr>
           <a:xfrm>
             <a:off x="9875520" y="365760"/>
-            <a:ext cx="2009160" cy="500400"/>
+            <a:ext cx="2008800" cy="500040"/>
           </a:xfrm>
           <a:prstGeom prst="roundRect">
             <a:avLst>
@@ -13258,7 +13259,7 @@
         <p:spPr>
           <a:xfrm>
             <a:off x="1196640" y="1828800"/>
-            <a:ext cx="9094680" cy="576360"/>
+            <a:ext cx="9094320" cy="576360"/>
           </a:xfrm>
           <a:prstGeom prst="rect">
             <a:avLst/>
@@ -13335,7 +13336,7 @@
         <p:spPr>
           <a:xfrm>
             <a:off x="987480" y="3182040"/>
-            <a:ext cx="3289320" cy="2740680"/>
+            <a:ext cx="3288960" cy="2740320"/>
           </a:xfrm>
           <a:prstGeom prst="roundRect">
             <a:avLst>
@@ -13397,7 +13398,7 @@
         <p:spPr>
           <a:xfrm>
             <a:off x="457200" y="2514600"/>
-            <a:ext cx="3746520" cy="4114440"/>
+            <a:ext cx="3746160" cy="4114080"/>
           </a:xfrm>
           <a:prstGeom prst="roundRect">
             <a:avLst>
@@ -13635,7 +13636,7 @@
         <p:spPr>
           <a:xfrm>
             <a:off x="4507920" y="3182040"/>
-            <a:ext cx="3289320" cy="2740680"/>
+            <a:ext cx="3288960" cy="2740320"/>
           </a:xfrm>
           <a:prstGeom prst="roundRect">
             <a:avLst>
@@ -13697,7 +13698,7 @@
         <p:spPr>
           <a:xfrm>
             <a:off x="4434840" y="2971800"/>
-            <a:ext cx="3289320" cy="3427560"/>
+            <a:ext cx="3288960" cy="3427200"/>
           </a:xfrm>
           <a:prstGeom prst="roundRect">
             <a:avLst>
@@ -13916,7 +13917,7 @@
         <p:spPr>
           <a:xfrm>
             <a:off x="8028360" y="3182040"/>
-            <a:ext cx="3289320" cy="2740680"/>
+            <a:ext cx="3288960" cy="2740320"/>
           </a:xfrm>
           <a:prstGeom prst="roundRect">
             <a:avLst>
@@ -13978,7 +13979,7 @@
         <p:spPr>
           <a:xfrm>
             <a:off x="8001000" y="3200400"/>
-            <a:ext cx="3474360" cy="2742840"/>
+            <a:ext cx="3474000" cy="2742480"/>
           </a:xfrm>
           <a:prstGeom prst="roundRect">
             <a:avLst>
@@ -14390,7 +14391,7 @@
         <p:spPr>
           <a:xfrm>
             <a:off x="0" y="0"/>
-            <a:ext cx="12186360" cy="6855480"/>
+            <a:ext cx="12186000" cy="6855120"/>
           </a:xfrm>
           <a:prstGeom prst="rect">
             <a:avLst/>
@@ -14426,6 +14427,11 @@
             <a:noAutofit/>
           </a:bodyPr>
           <a:p>
+            <a:pPr>
+              <a:lnSpc>
+                <a:spcPct val="100000"/>
+              </a:lnSpc>
+            </a:pPr>
             <a:endParaRPr b="0" lang="en-US" sz="1800" spc="-1" strike="noStrike">
               <a:solidFill>
                 <a:schemeClr val="lt1"/>
@@ -14445,7 +14451,7 @@
         <p:spPr>
           <a:xfrm>
             <a:off x="0" y="0"/>
-            <a:ext cx="15840" cy="6855480"/>
+            <a:ext cx="15480" cy="6855120"/>
           </a:xfrm>
           <a:prstGeom prst="rect">
             <a:avLst/>
@@ -14481,6 +14487,11 @@
             <a:noAutofit/>
           </a:bodyPr>
           <a:p>
+            <a:pPr>
+              <a:lnSpc>
+                <a:spcPct val="100000"/>
+              </a:lnSpc>
+            </a:pPr>
             <a:endParaRPr b="0" lang="en-US" sz="1800" spc="-1" strike="noStrike">
               <a:solidFill>
                 <a:schemeClr val="lt1"/>
@@ -14500,7 +14511,7 @@
         <p:spPr>
           <a:xfrm>
             <a:off x="914400" y="0"/>
-            <a:ext cx="15840" cy="6855480"/>
+            <a:ext cx="15480" cy="6855120"/>
           </a:xfrm>
           <a:prstGeom prst="rect">
             <a:avLst/>
@@ -14536,6 +14547,11 @@
             <a:noAutofit/>
           </a:bodyPr>
           <a:p>
+            <a:pPr>
+              <a:lnSpc>
+                <a:spcPct val="100000"/>
+              </a:lnSpc>
+            </a:pPr>
             <a:endParaRPr b="0" lang="en-US" sz="1800" spc="-1" strike="noStrike">
               <a:solidFill>
                 <a:schemeClr val="lt1"/>
@@ -14555,7 +14571,7 @@
         <p:spPr>
           <a:xfrm>
             <a:off x="1828800" y="0"/>
-            <a:ext cx="15840" cy="6855480"/>
+            <a:ext cx="15480" cy="6855120"/>
           </a:xfrm>
           <a:prstGeom prst="rect">
             <a:avLst/>
@@ -14591,6 +14607,11 @@
             <a:noAutofit/>
           </a:bodyPr>
           <a:p>
+            <a:pPr>
+              <a:lnSpc>
+                <a:spcPct val="100000"/>
+              </a:lnSpc>
+            </a:pPr>
             <a:endParaRPr b="0" lang="en-US" sz="1800" spc="-1" strike="noStrike">
               <a:solidFill>
                 <a:schemeClr val="lt1"/>
@@ -14610,7 +14631,7 @@
         <p:spPr>
           <a:xfrm>
             <a:off x="2743200" y="0"/>
-            <a:ext cx="15840" cy="6855480"/>
+            <a:ext cx="15480" cy="6855120"/>
           </a:xfrm>
           <a:prstGeom prst="rect">
             <a:avLst/>
@@ -14646,6 +14667,11 @@
             <a:noAutofit/>
           </a:bodyPr>
           <a:p>
+            <a:pPr>
+              <a:lnSpc>
+                <a:spcPct val="100000"/>
+              </a:lnSpc>
+            </a:pPr>
             <a:endParaRPr b="0" lang="en-US" sz="1800" spc="-1" strike="noStrike">
               <a:solidFill>
                 <a:schemeClr val="lt1"/>
@@ -14665,7 +14691,7 @@
         <p:spPr>
           <a:xfrm>
             <a:off x="3657600" y="0"/>
-            <a:ext cx="15840" cy="6855480"/>
+            <a:ext cx="15480" cy="6855120"/>
           </a:xfrm>
           <a:prstGeom prst="rect">
             <a:avLst/>
@@ -14701,6 +14727,11 @@
             <a:noAutofit/>
           </a:bodyPr>
           <a:p>
+            <a:pPr>
+              <a:lnSpc>
+                <a:spcPct val="100000"/>
+              </a:lnSpc>
+            </a:pPr>
             <a:endParaRPr b="0" lang="en-US" sz="1800" spc="-1" strike="noStrike">
               <a:solidFill>
                 <a:schemeClr val="lt1"/>
@@ -14720,7 +14751,7 @@
         <p:spPr>
           <a:xfrm>
             <a:off x="4572000" y="0"/>
-            <a:ext cx="15840" cy="6855480"/>
+            <a:ext cx="15480" cy="6855120"/>
           </a:xfrm>
           <a:prstGeom prst="rect">
             <a:avLst/>
@@ -14756,6 +14787,11 @@
             <a:noAutofit/>
           </a:bodyPr>
           <a:p>
+            <a:pPr>
+              <a:lnSpc>
+                <a:spcPct val="100000"/>
+              </a:lnSpc>
+            </a:pPr>
             <a:endParaRPr b="0" lang="en-US" sz="1800" spc="-1" strike="noStrike">
               <a:solidFill>
                 <a:schemeClr val="lt1"/>
@@ -14775,7 +14811,7 @@
         <p:spPr>
           <a:xfrm>
             <a:off x="5486400" y="0"/>
-            <a:ext cx="15840" cy="6855480"/>
+            <a:ext cx="15480" cy="6855120"/>
           </a:xfrm>
           <a:prstGeom prst="rect">
             <a:avLst/>
@@ -14811,6 +14847,11 @@
             <a:noAutofit/>
           </a:bodyPr>
           <a:p>
+            <a:pPr>
+              <a:lnSpc>
+                <a:spcPct val="100000"/>
+              </a:lnSpc>
+            </a:pPr>
             <a:endParaRPr b="0" lang="en-US" sz="1800" spc="-1" strike="noStrike">
               <a:solidFill>
                 <a:schemeClr val="lt1"/>
@@ -14830,7 +14871,7 @@
         <p:spPr>
           <a:xfrm>
             <a:off x="6400800" y="0"/>
-            <a:ext cx="15840" cy="6855480"/>
+            <a:ext cx="15480" cy="6855120"/>
           </a:xfrm>
           <a:prstGeom prst="rect">
             <a:avLst/>
@@ -14866,6 +14907,11 @@
             <a:noAutofit/>
           </a:bodyPr>
           <a:p>
+            <a:pPr>
+              <a:lnSpc>
+                <a:spcPct val="100000"/>
+              </a:lnSpc>
+            </a:pPr>
             <a:endParaRPr b="0" lang="en-US" sz="1800" spc="-1" strike="noStrike">
               <a:solidFill>
                 <a:schemeClr val="lt1"/>
@@ -14885,7 +14931,7 @@
         <p:spPr>
           <a:xfrm>
             <a:off x="7315200" y="0"/>
-            <a:ext cx="15840" cy="6855480"/>
+            <a:ext cx="15480" cy="6855120"/>
           </a:xfrm>
           <a:prstGeom prst="rect">
             <a:avLst/>
@@ -14921,6 +14967,11 @@
             <a:noAutofit/>
           </a:bodyPr>
           <a:p>
+            <a:pPr>
+              <a:lnSpc>
+                <a:spcPct val="100000"/>
+              </a:lnSpc>
+            </a:pPr>
             <a:endParaRPr b="0" lang="en-US" sz="1800" spc="-1" strike="noStrike">
               <a:solidFill>
                 <a:schemeClr val="lt1"/>
@@ -14940,7 +14991,7 @@
         <p:spPr>
           <a:xfrm>
             <a:off x="8229600" y="0"/>
-            <a:ext cx="15840" cy="6855480"/>
+            <a:ext cx="15480" cy="6855120"/>
           </a:xfrm>
           <a:prstGeom prst="rect">
             <a:avLst/>
@@ -14976,6 +15027,11 @@
             <a:noAutofit/>
           </a:bodyPr>
           <a:p>
+            <a:pPr>
+              <a:lnSpc>
+                <a:spcPct val="100000"/>
+              </a:lnSpc>
+            </a:pPr>
             <a:endParaRPr b="0" lang="en-US" sz="1800" spc="-1" strike="noStrike">
               <a:solidFill>
                 <a:schemeClr val="lt1"/>
@@ -14995,7 +15051,7 @@
         <p:spPr>
           <a:xfrm>
             <a:off x="9144000" y="0"/>
-            <a:ext cx="15840" cy="6855480"/>
+            <a:ext cx="15480" cy="6855120"/>
           </a:xfrm>
           <a:prstGeom prst="rect">
             <a:avLst/>
@@ -15031,6 +15087,11 @@
             <a:noAutofit/>
           </a:bodyPr>
           <a:p>
+            <a:pPr>
+              <a:lnSpc>
+                <a:spcPct val="100000"/>
+              </a:lnSpc>
+            </a:pPr>
             <a:endParaRPr b="0" lang="en-US" sz="1800" spc="-1" strike="noStrike">
               <a:solidFill>
                 <a:schemeClr val="lt1"/>
@@ -15050,7 +15111,7 @@
         <p:spPr>
           <a:xfrm>
             <a:off x="10058400" y="0"/>
-            <a:ext cx="15840" cy="6855480"/>
+            <a:ext cx="15480" cy="6855120"/>
           </a:xfrm>
           <a:prstGeom prst="rect">
             <a:avLst/>
@@ -15086,6 +15147,11 @@
             <a:noAutofit/>
           </a:bodyPr>
           <a:p>
+            <a:pPr>
+              <a:lnSpc>
+                <a:spcPct val="100000"/>
+              </a:lnSpc>
+            </a:pPr>
             <a:endParaRPr b="0" lang="en-US" sz="1800" spc="-1" strike="noStrike">
               <a:solidFill>
                 <a:schemeClr val="lt1"/>
@@ -15105,7 +15171,7 @@
         <p:spPr>
           <a:xfrm>
             <a:off x="10972800" y="0"/>
-            <a:ext cx="15840" cy="6855480"/>
+            <a:ext cx="15480" cy="6855120"/>
           </a:xfrm>
           <a:prstGeom prst="rect">
             <a:avLst/>
@@ -15141,6 +15207,11 @@
             <a:noAutofit/>
           </a:bodyPr>
           <a:p>
+            <a:pPr>
+              <a:lnSpc>
+                <a:spcPct val="100000"/>
+              </a:lnSpc>
+            </a:pPr>
             <a:endParaRPr b="0" lang="en-US" sz="1800" spc="-1" strike="noStrike">
               <a:solidFill>
                 <a:schemeClr val="lt1"/>
@@ -15160,7 +15231,7 @@
         <p:spPr>
           <a:xfrm>
             <a:off x="11887200" y="0"/>
-            <a:ext cx="15840" cy="6855480"/>
+            <a:ext cx="15480" cy="6855120"/>
           </a:xfrm>
           <a:prstGeom prst="rect">
             <a:avLst/>
@@ -15196,6 +15267,11 @@
             <a:noAutofit/>
           </a:bodyPr>
           <a:p>
+            <a:pPr>
+              <a:lnSpc>
+                <a:spcPct val="100000"/>
+              </a:lnSpc>
+            </a:pPr>
             <a:endParaRPr b="0" lang="en-US" sz="1800" spc="-1" strike="noStrike">
               <a:solidFill>
                 <a:schemeClr val="lt1"/>
@@ -15215,7 +15291,7 @@
         <p:spPr>
           <a:xfrm>
             <a:off x="0" y="0"/>
-            <a:ext cx="317520" cy="6855480"/>
+            <a:ext cx="317160" cy="6855120"/>
           </a:xfrm>
           <a:prstGeom prst="rect">
             <a:avLst/>
@@ -15251,6 +15327,11 @@
             <a:noAutofit/>
           </a:bodyPr>
           <a:p>
+            <a:pPr>
+              <a:lnSpc>
+                <a:spcPct val="100000"/>
+              </a:lnSpc>
+            </a:pPr>
             <a:endParaRPr b="0" lang="en-US" sz="1800" spc="-1" strike="noStrike">
               <a:solidFill>
                 <a:schemeClr val="lt1"/>
@@ -15270,7 +15351,7 @@
         <p:spPr>
           <a:xfrm>
             <a:off x="9875520" y="365760"/>
-            <a:ext cx="2009160" cy="500400"/>
+            <a:ext cx="2008800" cy="500040"/>
           </a:xfrm>
           <a:prstGeom prst="roundRect">
             <a:avLst>
@@ -15344,7 +15425,7 @@
         <p:spPr>
           <a:xfrm>
             <a:off x="1540440" y="914400"/>
-            <a:ext cx="7889400" cy="516960"/>
+            <a:ext cx="7889040" cy="516240"/>
           </a:xfrm>
           <a:prstGeom prst="rect">
             <a:avLst/>
@@ -15398,7 +15479,7 @@
         <p:spPr>
           <a:xfrm>
             <a:off x="880200" y="1600200"/>
-            <a:ext cx="9727560" cy="576360"/>
+            <a:ext cx="9727200" cy="576360"/>
           </a:xfrm>
           <a:prstGeom prst="rect">
             <a:avLst/>
@@ -15475,7 +15556,7 @@
         <p:spPr>
           <a:xfrm>
             <a:off x="987480" y="3182040"/>
-            <a:ext cx="3289320" cy="2740680"/>
+            <a:ext cx="3288960" cy="2740320"/>
           </a:xfrm>
           <a:prstGeom prst="roundRect">
             <a:avLst>
@@ -15513,6 +15594,11 @@
             <a:noAutofit/>
           </a:bodyPr>
           <a:p>
+            <a:pPr>
+              <a:lnSpc>
+                <a:spcPct val="100000"/>
+              </a:lnSpc>
+            </a:pPr>
             <a:endParaRPr b="0" lang="en-US" sz="1800" spc="-1" strike="noStrike">
               <a:solidFill>
                 <a:schemeClr val="lt1"/>
@@ -15532,7 +15618,7 @@
         <p:spPr>
           <a:xfrm>
             <a:off x="457200" y="2514600"/>
-            <a:ext cx="3746520" cy="4114440"/>
+            <a:ext cx="3746160" cy="4114080"/>
           </a:xfrm>
           <a:prstGeom prst="roundRect">
             <a:avLst>
@@ -15693,6 +15779,19 @@
             </a:endParaRPr>
           </a:p>
           <a:p>
+            <a:pPr>
+              <a:lnSpc>
+                <a:spcPct val="100000"/>
+              </a:lnSpc>
+            </a:pPr>
+            <a:endParaRPr b="0" lang="en-US" sz="1300" spc="-1" strike="noStrike">
+              <a:solidFill>
+                <a:srgbClr val="ffffff"/>
+              </a:solidFill>
+              <a:latin typeface="Arial"/>
+            </a:endParaRPr>
+          </a:p>
+          <a:p>
             <a:pPr marL="216000" indent="-216000">
               <a:lnSpc>
                 <a:spcPct val="100000"/>
@@ -15703,6 +15802,29 @@
               <a:buFont typeface="Wingdings" charset="2"/>
               <a:buChar char=""/>
             </a:pPr>
+            <a:r>
+              <a:rPr b="0" lang="en-US" sz="1300" spc="-1" strike="noStrike">
+                <a:solidFill>
+                  <a:schemeClr val="lt1"/>
+                </a:solidFill>
+                <a:latin typeface="Calibri"/>
+                <a:ea typeface="DejaVu Sans"/>
+              </a:rPr>
+              <a:t>Mevcut bir tarihe süre eklemek veya çıkarmak için plus() ve minus() metotlarıyla birlikte kullanılabilirler.</a:t>
+            </a:r>
+            <a:endParaRPr b="0" lang="en-US" sz="1300" spc="-1" strike="noStrike">
+              <a:solidFill>
+                <a:srgbClr val="ffffff"/>
+              </a:solidFill>
+              <a:latin typeface="Arial"/>
+            </a:endParaRPr>
+          </a:p>
+          <a:p>
+            <a:pPr>
+              <a:lnSpc>
+                <a:spcPct val="100000"/>
+              </a:lnSpc>
+            </a:pPr>
             <a:endParaRPr b="0" lang="en-US" sz="1300" spc="-1" strike="noStrike">
               <a:solidFill>
                 <a:srgbClr val="ffffff"/>
@@ -15729,52 +15851,6 @@
                 <a:latin typeface="Calibri"/>
                 <a:ea typeface="DejaVu Sans"/>
               </a:rPr>
-              <a:t>Mevcut bir tarihe süre eklemek veya çıkarmak için plus() ve minus() metotlarıyla birlikte kullanılabilirler.</a:t>
-            </a:r>
-            <a:endParaRPr b="0" lang="en-US" sz="1300" spc="-1" strike="noStrike">
-              <a:solidFill>
-                <a:srgbClr val="ffffff"/>
-              </a:solidFill>
-              <a:latin typeface="Arial"/>
-            </a:endParaRPr>
-          </a:p>
-          <a:p>
-            <a:pPr marL="216000" indent="-216000">
-              <a:lnSpc>
-                <a:spcPct val="100000"/>
-              </a:lnSpc>
-              <a:buClr>
-                <a:srgbClr val="ffffff"/>
-              </a:buClr>
-              <a:buFont typeface="Wingdings" charset="2"/>
-              <a:buChar char=""/>
-            </a:pPr>
-            <a:endParaRPr b="0" lang="en-US" sz="1300" spc="-1" strike="noStrike">
-              <a:solidFill>
-                <a:srgbClr val="ffffff"/>
-              </a:solidFill>
-              <a:latin typeface="Arial"/>
-            </a:endParaRPr>
-          </a:p>
-          <a:p>
-            <a:pPr marL="216000" indent="-216000">
-              <a:lnSpc>
-                <a:spcPct val="100000"/>
-              </a:lnSpc>
-              <a:buClr>
-                <a:srgbClr val="ffffff"/>
-              </a:buClr>
-              <a:buFont typeface="Wingdings" charset="2"/>
-              <a:buChar char=""/>
-            </a:pPr>
-            <a:r>
-              <a:rPr b="0" lang="en-US" sz="1300" spc="-1" strike="noStrike">
-                <a:solidFill>
-                  <a:schemeClr val="lt1"/>
-                </a:solidFill>
-                <a:latin typeface="Calibri"/>
-                <a:ea typeface="DejaVu Sans"/>
-              </a:rPr>
               <a:t>Yaz saati gibi karmaşık durumları yönetirken manuel matematiksel hesaplamalar yerine bu API'leri kullanmak hataları önler.</a:t>
             </a:r>
             <a:endParaRPr b="0" lang="en-US" sz="1300" spc="-1" strike="noStrike">
@@ -15795,7 +15871,7 @@
         <p:spPr>
           <a:xfrm>
             <a:off x="4507920" y="3182040"/>
-            <a:ext cx="3289320" cy="2740680"/>
+            <a:ext cx="3288960" cy="2740320"/>
           </a:xfrm>
           <a:prstGeom prst="roundRect">
             <a:avLst>
@@ -15833,6 +15909,11 @@
             <a:noAutofit/>
           </a:bodyPr>
           <a:p>
+            <a:pPr>
+              <a:lnSpc>
+                <a:spcPct val="100000"/>
+              </a:lnSpc>
+            </a:pPr>
             <a:endParaRPr b="0" lang="en-US" sz="1800" spc="-1" strike="noStrike">
               <a:solidFill>
                 <a:schemeClr val="lt1"/>
@@ -15852,7 +15933,7 @@
         <p:spPr>
           <a:xfrm>
             <a:off x="4434840" y="2514600"/>
-            <a:ext cx="3289320" cy="3884760"/>
+            <a:ext cx="3288960" cy="3884400"/>
           </a:xfrm>
           <a:prstGeom prst="roundRect">
             <a:avLst>
@@ -16068,7 +16149,7 @@
         <p:spPr>
           <a:xfrm>
             <a:off x="8028360" y="3182040"/>
-            <a:ext cx="3289320" cy="2740680"/>
+            <a:ext cx="3288960" cy="2740320"/>
           </a:xfrm>
           <a:prstGeom prst="roundRect">
             <a:avLst>
@@ -16106,6 +16187,11 @@
             <a:noAutofit/>
           </a:bodyPr>
           <a:p>
+            <a:pPr>
+              <a:lnSpc>
+                <a:spcPct val="100000"/>
+              </a:lnSpc>
+            </a:pPr>
             <a:endParaRPr b="0" lang="en-US" sz="1800" spc="-1" strike="noStrike">
               <a:solidFill>
                 <a:schemeClr val="lt1"/>
@@ -16125,7 +16211,7 @@
         <p:spPr>
           <a:xfrm>
             <a:off x="8001000" y="2514600"/>
-            <a:ext cx="3474360" cy="3886200"/>
+            <a:ext cx="3474000" cy="3885840"/>
           </a:xfrm>
           <a:prstGeom prst="roundRect">
             <a:avLst>
@@ -16711,6 +16797,3156 @@
       <p:sp>
         <p:nvSpPr>
           <p:cNvPr id="196" name="TextBox 20"/>
+          <p:cNvSpPr/>
+          <p:nvPr/>
+        </p:nvSpPr>
+        <p:spPr>
+          <a:xfrm>
+            <a:off x="4600080" y="6446520"/>
+            <a:ext cx="3051000" cy="363960"/>
+          </a:xfrm>
+          <a:prstGeom prst="rect">
+            <a:avLst/>
+          </a:prstGeom>
+          <a:noFill/>
+          <a:ln w="0">
+            <a:noFill/>
+          </a:ln>
+        </p:spPr>
+        <p:style>
+          <a:lnRef idx="0"/>
+          <a:fillRef idx="0"/>
+          <a:effectRef idx="0"/>
+          <a:fontRef idx="minor"/>
+        </p:style>
+        <p:txBody>
+          <a:bodyPr wrap="none" lIns="90000" rIns="90000" tIns="45000" bIns="45000" anchor="t">
+            <a:spAutoFit/>
+          </a:bodyPr>
+          <a:p>
+            <a:pPr>
+              <a:lnSpc>
+                <a:spcPct val="100000"/>
+              </a:lnSpc>
+            </a:pPr>
+            <a:r>
+              <a:rPr b="0" lang="en-US" sz="1800" spc="-1" strike="noStrike">
+                <a:solidFill>
+                  <a:srgbClr val="000000"/>
+                </a:solidFill>
+                <a:latin typeface="Calibri"/>
+                <a:ea typeface="DejaVu Sans"/>
+              </a:rPr>
+              <a:t>Java • Ultra Premium Template</a:t>
+            </a:r>
+            <a:endParaRPr b="0" lang="en-US" sz="1800" spc="-1" strike="noStrike">
+              <a:solidFill>
+                <a:srgbClr val="000000"/>
+              </a:solidFill>
+              <a:latin typeface="Arial"/>
+            </a:endParaRPr>
+          </a:p>
+        </p:txBody>
+      </p:sp>
+    </p:spTree>
+  </p:cSld>
+  <mc:AlternateContent>
+    <mc:Choice Requires="p14">
+      <p:transition spd="slow" p14:dur="2000"/>
+    </mc:Choice>
+    <mc:Fallback>
+      <p:transition spd="slow"/>
+    </mc:Fallback>
+  </mc:AlternateContent>
+</p:sld>
+</file>
+
+<file path=ppt/slides/slide7.xml><?xml version="1.0" encoding="utf-8"?>
+<p:sld xmlns:a="http://schemas.openxmlformats.org/drawingml/2006/main" xmlns:p="http://schemas.openxmlformats.org/presentationml/2006/main" xmlns:r="http://schemas.openxmlformats.org/officeDocument/2006/relationships" xmlns:p14="http://schemas.microsoft.com/office/powerpoint/2010/main" xmlns:p15="http://schemas.microsoft.com/office/powerpoint/2012/main" xmlns:mc="http://schemas.openxmlformats.org/markup-compatibility/2006">
+  <p:cSld>
+    <p:spTree>
+      <p:nvGrpSpPr>
+        <p:cNvPr id="1" name=""/>
+        <p:cNvGrpSpPr/>
+        <p:nvPr/>
+      </p:nvGrpSpPr>
+      <p:grpSpPr>
+        <a:xfrm>
+          <a:off x="0" y="0"/>
+          <a:ext cx="0" cy="0"/>
+          <a:chOff x="0" y="0"/>
+          <a:chExt cx="0" cy="0"/>
+        </a:xfrm>
+      </p:grpSpPr>
+      <p:sp>
+        <p:nvSpPr>
+          <p:cNvPr id="197" name="Rectangle 97"/>
+          <p:cNvSpPr/>
+          <p:nvPr/>
+        </p:nvSpPr>
+        <p:spPr>
+          <a:xfrm>
+            <a:off x="0" y="0"/>
+            <a:ext cx="12186000" cy="6855120"/>
+          </a:xfrm>
+          <a:prstGeom prst="rect">
+            <a:avLst/>
+          </a:prstGeom>
+          <a:solidFill>
+            <a:srgbClr val="0b0b0d"/>
+          </a:solidFill>
+          <a:ln>
+            <a:noFill/>
+          </a:ln>
+          <a:effectLst>
+            <a:outerShdw blurRad="39960" dir="5400000" dist="23040" rotWithShape="0">
+              <a:srgbClr val="000000">
+                <a:alpha val="35000"/>
+              </a:srgbClr>
+            </a:outerShdw>
+          </a:effectLst>
+        </p:spPr>
+        <p:style>
+          <a:lnRef idx="1">
+            <a:schemeClr val="accent1"/>
+          </a:lnRef>
+          <a:fillRef idx="3">
+            <a:schemeClr val="accent1"/>
+          </a:fillRef>
+          <a:effectRef idx="2">
+            <a:schemeClr val="accent1"/>
+          </a:effectRef>
+          <a:fontRef idx="minor"/>
+        </p:style>
+        <p:txBody>
+          <a:bodyPr lIns="90000" rIns="90000" tIns="45000" bIns="45000" anchor="ctr">
+            <a:noAutofit/>
+          </a:bodyPr>
+          <a:p>
+            <a:endParaRPr b="0" lang="en-US" sz="1800" spc="-1" strike="noStrike">
+              <a:solidFill>
+                <a:schemeClr val="lt1"/>
+              </a:solidFill>
+              <a:latin typeface="Calibri"/>
+              <a:ea typeface="DejaVu Sans"/>
+            </a:endParaRPr>
+          </a:p>
+        </p:txBody>
+      </p:sp>
+      <p:sp>
+        <p:nvSpPr>
+          <p:cNvPr id="198" name="Rectangle 98"/>
+          <p:cNvSpPr/>
+          <p:nvPr/>
+        </p:nvSpPr>
+        <p:spPr>
+          <a:xfrm>
+            <a:off x="0" y="0"/>
+            <a:ext cx="15480" cy="6855120"/>
+          </a:xfrm>
+          <a:prstGeom prst="rect">
+            <a:avLst/>
+          </a:prstGeom>
+          <a:solidFill>
+            <a:srgbClr val="121216"/>
+          </a:solidFill>
+          <a:ln>
+            <a:noFill/>
+          </a:ln>
+          <a:effectLst>
+            <a:outerShdw blurRad="39960" dir="5400000" dist="23040" rotWithShape="0">
+              <a:srgbClr val="000000">
+                <a:alpha val="35000"/>
+              </a:srgbClr>
+            </a:outerShdw>
+          </a:effectLst>
+        </p:spPr>
+        <p:style>
+          <a:lnRef idx="1">
+            <a:schemeClr val="accent1"/>
+          </a:lnRef>
+          <a:fillRef idx="3">
+            <a:schemeClr val="accent1"/>
+          </a:fillRef>
+          <a:effectRef idx="2">
+            <a:schemeClr val="accent1"/>
+          </a:effectRef>
+          <a:fontRef idx="minor"/>
+        </p:style>
+        <p:txBody>
+          <a:bodyPr lIns="90000" rIns="90000" tIns="45000" bIns="45000" anchor="ctr">
+            <a:noAutofit/>
+          </a:bodyPr>
+          <a:p>
+            <a:endParaRPr b="0" lang="en-US" sz="1800" spc="-1" strike="noStrike">
+              <a:solidFill>
+                <a:schemeClr val="lt1"/>
+              </a:solidFill>
+              <a:latin typeface="Calibri"/>
+              <a:ea typeface="DejaVu Sans"/>
+            </a:endParaRPr>
+          </a:p>
+        </p:txBody>
+      </p:sp>
+      <p:sp>
+        <p:nvSpPr>
+          <p:cNvPr id="199" name="Rectangle 99"/>
+          <p:cNvSpPr/>
+          <p:nvPr/>
+        </p:nvSpPr>
+        <p:spPr>
+          <a:xfrm>
+            <a:off x="914400" y="0"/>
+            <a:ext cx="15480" cy="6855120"/>
+          </a:xfrm>
+          <a:prstGeom prst="rect">
+            <a:avLst/>
+          </a:prstGeom>
+          <a:solidFill>
+            <a:srgbClr val="121216"/>
+          </a:solidFill>
+          <a:ln>
+            <a:noFill/>
+          </a:ln>
+          <a:effectLst>
+            <a:outerShdw blurRad="39960" dir="5400000" dist="23040" rotWithShape="0">
+              <a:srgbClr val="000000">
+                <a:alpha val="35000"/>
+              </a:srgbClr>
+            </a:outerShdw>
+          </a:effectLst>
+        </p:spPr>
+        <p:style>
+          <a:lnRef idx="1">
+            <a:schemeClr val="accent1"/>
+          </a:lnRef>
+          <a:fillRef idx="3">
+            <a:schemeClr val="accent1"/>
+          </a:fillRef>
+          <a:effectRef idx="2">
+            <a:schemeClr val="accent1"/>
+          </a:effectRef>
+          <a:fontRef idx="minor"/>
+        </p:style>
+        <p:txBody>
+          <a:bodyPr lIns="90000" rIns="90000" tIns="45000" bIns="45000" anchor="ctr">
+            <a:noAutofit/>
+          </a:bodyPr>
+          <a:p>
+            <a:endParaRPr b="0" lang="en-US" sz="1800" spc="-1" strike="noStrike">
+              <a:solidFill>
+                <a:schemeClr val="lt1"/>
+              </a:solidFill>
+              <a:latin typeface="Calibri"/>
+              <a:ea typeface="DejaVu Sans"/>
+            </a:endParaRPr>
+          </a:p>
+        </p:txBody>
+      </p:sp>
+      <p:sp>
+        <p:nvSpPr>
+          <p:cNvPr id="200" name="Rectangle 100"/>
+          <p:cNvSpPr/>
+          <p:nvPr/>
+        </p:nvSpPr>
+        <p:spPr>
+          <a:xfrm>
+            <a:off x="1828800" y="0"/>
+            <a:ext cx="15480" cy="6855120"/>
+          </a:xfrm>
+          <a:prstGeom prst="rect">
+            <a:avLst/>
+          </a:prstGeom>
+          <a:solidFill>
+            <a:srgbClr val="121216"/>
+          </a:solidFill>
+          <a:ln>
+            <a:noFill/>
+          </a:ln>
+          <a:effectLst>
+            <a:outerShdw blurRad="39960" dir="5400000" dist="23040" rotWithShape="0">
+              <a:srgbClr val="000000">
+                <a:alpha val="35000"/>
+              </a:srgbClr>
+            </a:outerShdw>
+          </a:effectLst>
+        </p:spPr>
+        <p:style>
+          <a:lnRef idx="1">
+            <a:schemeClr val="accent1"/>
+          </a:lnRef>
+          <a:fillRef idx="3">
+            <a:schemeClr val="accent1"/>
+          </a:fillRef>
+          <a:effectRef idx="2">
+            <a:schemeClr val="accent1"/>
+          </a:effectRef>
+          <a:fontRef idx="minor"/>
+        </p:style>
+        <p:txBody>
+          <a:bodyPr lIns="90000" rIns="90000" tIns="45000" bIns="45000" anchor="ctr">
+            <a:noAutofit/>
+          </a:bodyPr>
+          <a:p>
+            <a:endParaRPr b="0" lang="en-US" sz="1800" spc="-1" strike="noStrike">
+              <a:solidFill>
+                <a:schemeClr val="lt1"/>
+              </a:solidFill>
+              <a:latin typeface="Calibri"/>
+              <a:ea typeface="DejaVu Sans"/>
+            </a:endParaRPr>
+          </a:p>
+        </p:txBody>
+      </p:sp>
+      <p:sp>
+        <p:nvSpPr>
+          <p:cNvPr id="201" name="Rectangle 101"/>
+          <p:cNvSpPr/>
+          <p:nvPr/>
+        </p:nvSpPr>
+        <p:spPr>
+          <a:xfrm>
+            <a:off x="2743200" y="0"/>
+            <a:ext cx="15480" cy="6855120"/>
+          </a:xfrm>
+          <a:prstGeom prst="rect">
+            <a:avLst/>
+          </a:prstGeom>
+          <a:solidFill>
+            <a:srgbClr val="121216"/>
+          </a:solidFill>
+          <a:ln>
+            <a:noFill/>
+          </a:ln>
+          <a:effectLst>
+            <a:outerShdw blurRad="39960" dir="5400000" dist="23040" rotWithShape="0">
+              <a:srgbClr val="000000">
+                <a:alpha val="35000"/>
+              </a:srgbClr>
+            </a:outerShdw>
+          </a:effectLst>
+        </p:spPr>
+        <p:style>
+          <a:lnRef idx="1">
+            <a:schemeClr val="accent1"/>
+          </a:lnRef>
+          <a:fillRef idx="3">
+            <a:schemeClr val="accent1"/>
+          </a:fillRef>
+          <a:effectRef idx="2">
+            <a:schemeClr val="accent1"/>
+          </a:effectRef>
+          <a:fontRef idx="minor"/>
+        </p:style>
+        <p:txBody>
+          <a:bodyPr lIns="90000" rIns="90000" tIns="45000" bIns="45000" anchor="ctr">
+            <a:noAutofit/>
+          </a:bodyPr>
+          <a:p>
+            <a:endParaRPr b="0" lang="en-US" sz="1800" spc="-1" strike="noStrike">
+              <a:solidFill>
+                <a:schemeClr val="lt1"/>
+              </a:solidFill>
+              <a:latin typeface="Calibri"/>
+              <a:ea typeface="DejaVu Sans"/>
+            </a:endParaRPr>
+          </a:p>
+        </p:txBody>
+      </p:sp>
+      <p:sp>
+        <p:nvSpPr>
+          <p:cNvPr id="202" name="Rectangle 102"/>
+          <p:cNvSpPr/>
+          <p:nvPr/>
+        </p:nvSpPr>
+        <p:spPr>
+          <a:xfrm>
+            <a:off x="3657600" y="0"/>
+            <a:ext cx="15480" cy="6855120"/>
+          </a:xfrm>
+          <a:prstGeom prst="rect">
+            <a:avLst/>
+          </a:prstGeom>
+          <a:solidFill>
+            <a:srgbClr val="121216"/>
+          </a:solidFill>
+          <a:ln>
+            <a:noFill/>
+          </a:ln>
+          <a:effectLst>
+            <a:outerShdw blurRad="39960" dir="5400000" dist="23040" rotWithShape="0">
+              <a:srgbClr val="000000">
+                <a:alpha val="35000"/>
+              </a:srgbClr>
+            </a:outerShdw>
+          </a:effectLst>
+        </p:spPr>
+        <p:style>
+          <a:lnRef idx="1">
+            <a:schemeClr val="accent1"/>
+          </a:lnRef>
+          <a:fillRef idx="3">
+            <a:schemeClr val="accent1"/>
+          </a:fillRef>
+          <a:effectRef idx="2">
+            <a:schemeClr val="accent1"/>
+          </a:effectRef>
+          <a:fontRef idx="minor"/>
+        </p:style>
+        <p:txBody>
+          <a:bodyPr lIns="90000" rIns="90000" tIns="45000" bIns="45000" anchor="ctr">
+            <a:noAutofit/>
+          </a:bodyPr>
+          <a:p>
+            <a:endParaRPr b="0" lang="en-US" sz="1800" spc="-1" strike="noStrike">
+              <a:solidFill>
+                <a:schemeClr val="lt1"/>
+              </a:solidFill>
+              <a:latin typeface="Calibri"/>
+              <a:ea typeface="DejaVu Sans"/>
+            </a:endParaRPr>
+          </a:p>
+        </p:txBody>
+      </p:sp>
+      <p:sp>
+        <p:nvSpPr>
+          <p:cNvPr id="203" name="Rectangle 103"/>
+          <p:cNvSpPr/>
+          <p:nvPr/>
+        </p:nvSpPr>
+        <p:spPr>
+          <a:xfrm>
+            <a:off x="4572000" y="0"/>
+            <a:ext cx="15480" cy="6855120"/>
+          </a:xfrm>
+          <a:prstGeom prst="rect">
+            <a:avLst/>
+          </a:prstGeom>
+          <a:solidFill>
+            <a:srgbClr val="121216"/>
+          </a:solidFill>
+          <a:ln>
+            <a:noFill/>
+          </a:ln>
+          <a:effectLst>
+            <a:outerShdw blurRad="39960" dir="5400000" dist="23040" rotWithShape="0">
+              <a:srgbClr val="000000">
+                <a:alpha val="35000"/>
+              </a:srgbClr>
+            </a:outerShdw>
+          </a:effectLst>
+        </p:spPr>
+        <p:style>
+          <a:lnRef idx="1">
+            <a:schemeClr val="accent1"/>
+          </a:lnRef>
+          <a:fillRef idx="3">
+            <a:schemeClr val="accent1"/>
+          </a:fillRef>
+          <a:effectRef idx="2">
+            <a:schemeClr val="accent1"/>
+          </a:effectRef>
+          <a:fontRef idx="minor"/>
+        </p:style>
+        <p:txBody>
+          <a:bodyPr lIns="90000" rIns="90000" tIns="45000" bIns="45000" anchor="ctr">
+            <a:noAutofit/>
+          </a:bodyPr>
+          <a:p>
+            <a:endParaRPr b="0" lang="en-US" sz="1800" spc="-1" strike="noStrike">
+              <a:solidFill>
+                <a:schemeClr val="lt1"/>
+              </a:solidFill>
+              <a:latin typeface="Calibri"/>
+              <a:ea typeface="DejaVu Sans"/>
+            </a:endParaRPr>
+          </a:p>
+        </p:txBody>
+      </p:sp>
+      <p:sp>
+        <p:nvSpPr>
+          <p:cNvPr id="204" name="Rectangle 104"/>
+          <p:cNvSpPr/>
+          <p:nvPr/>
+        </p:nvSpPr>
+        <p:spPr>
+          <a:xfrm>
+            <a:off x="5486400" y="0"/>
+            <a:ext cx="15480" cy="6855120"/>
+          </a:xfrm>
+          <a:prstGeom prst="rect">
+            <a:avLst/>
+          </a:prstGeom>
+          <a:solidFill>
+            <a:srgbClr val="121216"/>
+          </a:solidFill>
+          <a:ln>
+            <a:noFill/>
+          </a:ln>
+          <a:effectLst>
+            <a:outerShdw blurRad="39960" dir="5400000" dist="23040" rotWithShape="0">
+              <a:srgbClr val="000000">
+                <a:alpha val="35000"/>
+              </a:srgbClr>
+            </a:outerShdw>
+          </a:effectLst>
+        </p:spPr>
+        <p:style>
+          <a:lnRef idx="1">
+            <a:schemeClr val="accent1"/>
+          </a:lnRef>
+          <a:fillRef idx="3">
+            <a:schemeClr val="accent1"/>
+          </a:fillRef>
+          <a:effectRef idx="2">
+            <a:schemeClr val="accent1"/>
+          </a:effectRef>
+          <a:fontRef idx="minor"/>
+        </p:style>
+        <p:txBody>
+          <a:bodyPr lIns="90000" rIns="90000" tIns="45000" bIns="45000" anchor="ctr">
+            <a:noAutofit/>
+          </a:bodyPr>
+          <a:p>
+            <a:endParaRPr b="0" lang="en-US" sz="1800" spc="-1" strike="noStrike">
+              <a:solidFill>
+                <a:schemeClr val="lt1"/>
+              </a:solidFill>
+              <a:latin typeface="Calibri"/>
+              <a:ea typeface="DejaVu Sans"/>
+            </a:endParaRPr>
+          </a:p>
+        </p:txBody>
+      </p:sp>
+      <p:sp>
+        <p:nvSpPr>
+          <p:cNvPr id="205" name="Rectangle 105"/>
+          <p:cNvSpPr/>
+          <p:nvPr/>
+        </p:nvSpPr>
+        <p:spPr>
+          <a:xfrm>
+            <a:off x="6400800" y="0"/>
+            <a:ext cx="15480" cy="6855120"/>
+          </a:xfrm>
+          <a:prstGeom prst="rect">
+            <a:avLst/>
+          </a:prstGeom>
+          <a:solidFill>
+            <a:srgbClr val="121216"/>
+          </a:solidFill>
+          <a:ln>
+            <a:noFill/>
+          </a:ln>
+          <a:effectLst>
+            <a:outerShdw blurRad="39960" dir="5400000" dist="23040" rotWithShape="0">
+              <a:srgbClr val="000000">
+                <a:alpha val="35000"/>
+              </a:srgbClr>
+            </a:outerShdw>
+          </a:effectLst>
+        </p:spPr>
+        <p:style>
+          <a:lnRef idx="1">
+            <a:schemeClr val="accent1"/>
+          </a:lnRef>
+          <a:fillRef idx="3">
+            <a:schemeClr val="accent1"/>
+          </a:fillRef>
+          <a:effectRef idx="2">
+            <a:schemeClr val="accent1"/>
+          </a:effectRef>
+          <a:fontRef idx="minor"/>
+        </p:style>
+        <p:txBody>
+          <a:bodyPr lIns="90000" rIns="90000" tIns="45000" bIns="45000" anchor="ctr">
+            <a:noAutofit/>
+          </a:bodyPr>
+          <a:p>
+            <a:endParaRPr b="0" lang="en-US" sz="1800" spc="-1" strike="noStrike">
+              <a:solidFill>
+                <a:schemeClr val="lt1"/>
+              </a:solidFill>
+              <a:latin typeface="Calibri"/>
+              <a:ea typeface="DejaVu Sans"/>
+            </a:endParaRPr>
+          </a:p>
+        </p:txBody>
+      </p:sp>
+      <p:sp>
+        <p:nvSpPr>
+          <p:cNvPr id="206" name="Rectangle 106"/>
+          <p:cNvSpPr/>
+          <p:nvPr/>
+        </p:nvSpPr>
+        <p:spPr>
+          <a:xfrm>
+            <a:off x="7315200" y="0"/>
+            <a:ext cx="15480" cy="6855120"/>
+          </a:xfrm>
+          <a:prstGeom prst="rect">
+            <a:avLst/>
+          </a:prstGeom>
+          <a:solidFill>
+            <a:srgbClr val="121216"/>
+          </a:solidFill>
+          <a:ln>
+            <a:noFill/>
+          </a:ln>
+          <a:effectLst>
+            <a:outerShdw blurRad="39960" dir="5400000" dist="23040" rotWithShape="0">
+              <a:srgbClr val="000000">
+                <a:alpha val="35000"/>
+              </a:srgbClr>
+            </a:outerShdw>
+          </a:effectLst>
+        </p:spPr>
+        <p:style>
+          <a:lnRef idx="1">
+            <a:schemeClr val="accent1"/>
+          </a:lnRef>
+          <a:fillRef idx="3">
+            <a:schemeClr val="accent1"/>
+          </a:fillRef>
+          <a:effectRef idx="2">
+            <a:schemeClr val="accent1"/>
+          </a:effectRef>
+          <a:fontRef idx="minor"/>
+        </p:style>
+        <p:txBody>
+          <a:bodyPr lIns="90000" rIns="90000" tIns="45000" bIns="45000" anchor="ctr">
+            <a:noAutofit/>
+          </a:bodyPr>
+          <a:p>
+            <a:endParaRPr b="0" lang="en-US" sz="1800" spc="-1" strike="noStrike">
+              <a:solidFill>
+                <a:schemeClr val="lt1"/>
+              </a:solidFill>
+              <a:latin typeface="Calibri"/>
+              <a:ea typeface="DejaVu Sans"/>
+            </a:endParaRPr>
+          </a:p>
+        </p:txBody>
+      </p:sp>
+      <p:sp>
+        <p:nvSpPr>
+          <p:cNvPr id="207" name="Rectangle 107"/>
+          <p:cNvSpPr/>
+          <p:nvPr/>
+        </p:nvSpPr>
+        <p:spPr>
+          <a:xfrm>
+            <a:off x="8229600" y="0"/>
+            <a:ext cx="15480" cy="6855120"/>
+          </a:xfrm>
+          <a:prstGeom prst="rect">
+            <a:avLst/>
+          </a:prstGeom>
+          <a:solidFill>
+            <a:srgbClr val="121216"/>
+          </a:solidFill>
+          <a:ln>
+            <a:noFill/>
+          </a:ln>
+          <a:effectLst>
+            <a:outerShdw blurRad="39960" dir="5400000" dist="23040" rotWithShape="0">
+              <a:srgbClr val="000000">
+                <a:alpha val="35000"/>
+              </a:srgbClr>
+            </a:outerShdw>
+          </a:effectLst>
+        </p:spPr>
+        <p:style>
+          <a:lnRef idx="1">
+            <a:schemeClr val="accent1"/>
+          </a:lnRef>
+          <a:fillRef idx="3">
+            <a:schemeClr val="accent1"/>
+          </a:fillRef>
+          <a:effectRef idx="2">
+            <a:schemeClr val="accent1"/>
+          </a:effectRef>
+          <a:fontRef idx="minor"/>
+        </p:style>
+        <p:txBody>
+          <a:bodyPr lIns="90000" rIns="90000" tIns="45000" bIns="45000" anchor="ctr">
+            <a:noAutofit/>
+          </a:bodyPr>
+          <a:p>
+            <a:endParaRPr b="0" lang="en-US" sz="1800" spc="-1" strike="noStrike">
+              <a:solidFill>
+                <a:schemeClr val="lt1"/>
+              </a:solidFill>
+              <a:latin typeface="Calibri"/>
+              <a:ea typeface="DejaVu Sans"/>
+            </a:endParaRPr>
+          </a:p>
+        </p:txBody>
+      </p:sp>
+      <p:sp>
+        <p:nvSpPr>
+          <p:cNvPr id="208" name="Rectangle 108"/>
+          <p:cNvSpPr/>
+          <p:nvPr/>
+        </p:nvSpPr>
+        <p:spPr>
+          <a:xfrm>
+            <a:off x="9144000" y="0"/>
+            <a:ext cx="15480" cy="6855120"/>
+          </a:xfrm>
+          <a:prstGeom prst="rect">
+            <a:avLst/>
+          </a:prstGeom>
+          <a:solidFill>
+            <a:srgbClr val="121216"/>
+          </a:solidFill>
+          <a:ln>
+            <a:noFill/>
+          </a:ln>
+          <a:effectLst>
+            <a:outerShdw blurRad="39960" dir="5400000" dist="23040" rotWithShape="0">
+              <a:srgbClr val="000000">
+                <a:alpha val="35000"/>
+              </a:srgbClr>
+            </a:outerShdw>
+          </a:effectLst>
+        </p:spPr>
+        <p:style>
+          <a:lnRef idx="1">
+            <a:schemeClr val="accent1"/>
+          </a:lnRef>
+          <a:fillRef idx="3">
+            <a:schemeClr val="accent1"/>
+          </a:fillRef>
+          <a:effectRef idx="2">
+            <a:schemeClr val="accent1"/>
+          </a:effectRef>
+          <a:fontRef idx="minor"/>
+        </p:style>
+        <p:txBody>
+          <a:bodyPr lIns="90000" rIns="90000" tIns="45000" bIns="45000" anchor="ctr">
+            <a:noAutofit/>
+          </a:bodyPr>
+          <a:p>
+            <a:endParaRPr b="0" lang="en-US" sz="1800" spc="-1" strike="noStrike">
+              <a:solidFill>
+                <a:schemeClr val="lt1"/>
+              </a:solidFill>
+              <a:latin typeface="Calibri"/>
+              <a:ea typeface="DejaVu Sans"/>
+            </a:endParaRPr>
+          </a:p>
+        </p:txBody>
+      </p:sp>
+      <p:sp>
+        <p:nvSpPr>
+          <p:cNvPr id="209" name="Rectangle 109"/>
+          <p:cNvSpPr/>
+          <p:nvPr/>
+        </p:nvSpPr>
+        <p:spPr>
+          <a:xfrm>
+            <a:off x="10058400" y="0"/>
+            <a:ext cx="15480" cy="6855120"/>
+          </a:xfrm>
+          <a:prstGeom prst="rect">
+            <a:avLst/>
+          </a:prstGeom>
+          <a:solidFill>
+            <a:srgbClr val="121216"/>
+          </a:solidFill>
+          <a:ln>
+            <a:noFill/>
+          </a:ln>
+          <a:effectLst>
+            <a:outerShdw blurRad="39960" dir="5400000" dist="23040" rotWithShape="0">
+              <a:srgbClr val="000000">
+                <a:alpha val="35000"/>
+              </a:srgbClr>
+            </a:outerShdw>
+          </a:effectLst>
+        </p:spPr>
+        <p:style>
+          <a:lnRef idx="1">
+            <a:schemeClr val="accent1"/>
+          </a:lnRef>
+          <a:fillRef idx="3">
+            <a:schemeClr val="accent1"/>
+          </a:fillRef>
+          <a:effectRef idx="2">
+            <a:schemeClr val="accent1"/>
+          </a:effectRef>
+          <a:fontRef idx="minor"/>
+        </p:style>
+        <p:txBody>
+          <a:bodyPr lIns="90000" rIns="90000" tIns="45000" bIns="45000" anchor="ctr">
+            <a:noAutofit/>
+          </a:bodyPr>
+          <a:p>
+            <a:endParaRPr b="0" lang="en-US" sz="1800" spc="-1" strike="noStrike">
+              <a:solidFill>
+                <a:schemeClr val="lt1"/>
+              </a:solidFill>
+              <a:latin typeface="Calibri"/>
+              <a:ea typeface="DejaVu Sans"/>
+            </a:endParaRPr>
+          </a:p>
+        </p:txBody>
+      </p:sp>
+      <p:sp>
+        <p:nvSpPr>
+          <p:cNvPr id="210" name="Rectangle 110"/>
+          <p:cNvSpPr/>
+          <p:nvPr/>
+        </p:nvSpPr>
+        <p:spPr>
+          <a:xfrm>
+            <a:off x="10972800" y="0"/>
+            <a:ext cx="15480" cy="6855120"/>
+          </a:xfrm>
+          <a:prstGeom prst="rect">
+            <a:avLst/>
+          </a:prstGeom>
+          <a:solidFill>
+            <a:srgbClr val="121216"/>
+          </a:solidFill>
+          <a:ln>
+            <a:noFill/>
+          </a:ln>
+          <a:effectLst>
+            <a:outerShdw blurRad="39960" dir="5400000" dist="23040" rotWithShape="0">
+              <a:srgbClr val="000000">
+                <a:alpha val="35000"/>
+              </a:srgbClr>
+            </a:outerShdw>
+          </a:effectLst>
+        </p:spPr>
+        <p:style>
+          <a:lnRef idx="1">
+            <a:schemeClr val="accent1"/>
+          </a:lnRef>
+          <a:fillRef idx="3">
+            <a:schemeClr val="accent1"/>
+          </a:fillRef>
+          <a:effectRef idx="2">
+            <a:schemeClr val="accent1"/>
+          </a:effectRef>
+          <a:fontRef idx="minor"/>
+        </p:style>
+        <p:txBody>
+          <a:bodyPr lIns="90000" rIns="90000" tIns="45000" bIns="45000" anchor="ctr">
+            <a:noAutofit/>
+          </a:bodyPr>
+          <a:p>
+            <a:endParaRPr b="0" lang="en-US" sz="1800" spc="-1" strike="noStrike">
+              <a:solidFill>
+                <a:schemeClr val="lt1"/>
+              </a:solidFill>
+              <a:latin typeface="Calibri"/>
+              <a:ea typeface="DejaVu Sans"/>
+            </a:endParaRPr>
+          </a:p>
+        </p:txBody>
+      </p:sp>
+      <p:sp>
+        <p:nvSpPr>
+          <p:cNvPr id="211" name="Rectangle 111"/>
+          <p:cNvSpPr/>
+          <p:nvPr/>
+        </p:nvSpPr>
+        <p:spPr>
+          <a:xfrm>
+            <a:off x="11887200" y="0"/>
+            <a:ext cx="15480" cy="6855120"/>
+          </a:xfrm>
+          <a:prstGeom prst="rect">
+            <a:avLst/>
+          </a:prstGeom>
+          <a:solidFill>
+            <a:srgbClr val="121216"/>
+          </a:solidFill>
+          <a:ln>
+            <a:noFill/>
+          </a:ln>
+          <a:effectLst>
+            <a:outerShdw blurRad="39960" dir="5400000" dist="23040" rotWithShape="0">
+              <a:srgbClr val="000000">
+                <a:alpha val="35000"/>
+              </a:srgbClr>
+            </a:outerShdw>
+          </a:effectLst>
+        </p:spPr>
+        <p:style>
+          <a:lnRef idx="1">
+            <a:schemeClr val="accent1"/>
+          </a:lnRef>
+          <a:fillRef idx="3">
+            <a:schemeClr val="accent1"/>
+          </a:fillRef>
+          <a:effectRef idx="2">
+            <a:schemeClr val="accent1"/>
+          </a:effectRef>
+          <a:fontRef idx="minor"/>
+        </p:style>
+        <p:txBody>
+          <a:bodyPr lIns="90000" rIns="90000" tIns="45000" bIns="45000" anchor="ctr">
+            <a:noAutofit/>
+          </a:bodyPr>
+          <a:p>
+            <a:endParaRPr b="0" lang="en-US" sz="1800" spc="-1" strike="noStrike">
+              <a:solidFill>
+                <a:schemeClr val="lt1"/>
+              </a:solidFill>
+              <a:latin typeface="Calibri"/>
+              <a:ea typeface="DejaVu Sans"/>
+            </a:endParaRPr>
+          </a:p>
+        </p:txBody>
+      </p:sp>
+      <p:sp>
+        <p:nvSpPr>
+          <p:cNvPr id="212" name="Rectangle 112"/>
+          <p:cNvSpPr/>
+          <p:nvPr/>
+        </p:nvSpPr>
+        <p:spPr>
+          <a:xfrm>
+            <a:off x="0" y="0"/>
+            <a:ext cx="317160" cy="6855120"/>
+          </a:xfrm>
+          <a:prstGeom prst="rect">
+            <a:avLst/>
+          </a:prstGeom>
+          <a:solidFill>
+            <a:srgbClr val="ff8c00"/>
+          </a:solidFill>
+          <a:ln>
+            <a:noFill/>
+          </a:ln>
+          <a:effectLst>
+            <a:outerShdw blurRad="39960" dir="5400000" dist="23040" rotWithShape="0">
+              <a:srgbClr val="000000">
+                <a:alpha val="35000"/>
+              </a:srgbClr>
+            </a:outerShdw>
+          </a:effectLst>
+        </p:spPr>
+        <p:style>
+          <a:lnRef idx="1">
+            <a:schemeClr val="accent1"/>
+          </a:lnRef>
+          <a:fillRef idx="3">
+            <a:schemeClr val="accent1"/>
+          </a:fillRef>
+          <a:effectRef idx="2">
+            <a:schemeClr val="accent1"/>
+          </a:effectRef>
+          <a:fontRef idx="minor"/>
+        </p:style>
+        <p:txBody>
+          <a:bodyPr lIns="90000" rIns="90000" tIns="45000" bIns="45000" anchor="ctr">
+            <a:noAutofit/>
+          </a:bodyPr>
+          <a:p>
+            <a:endParaRPr b="0" lang="en-US" sz="1800" spc="-1" strike="noStrike">
+              <a:solidFill>
+                <a:schemeClr val="lt1"/>
+              </a:solidFill>
+              <a:latin typeface="Calibri"/>
+              <a:ea typeface="DejaVu Sans"/>
+            </a:endParaRPr>
+          </a:p>
+        </p:txBody>
+      </p:sp>
+      <p:sp>
+        <p:nvSpPr>
+          <p:cNvPr id="213" name="Rounded Rectangle 50"/>
+          <p:cNvSpPr/>
+          <p:nvPr/>
+        </p:nvSpPr>
+        <p:spPr>
+          <a:xfrm>
+            <a:off x="9875520" y="365760"/>
+            <a:ext cx="2008800" cy="500040"/>
+          </a:xfrm>
+          <a:prstGeom prst="roundRect">
+            <a:avLst>
+              <a:gd name="adj" fmla="val 16667"/>
+            </a:avLst>
+          </a:prstGeom>
+          <a:solidFill>
+            <a:srgbClr val="1e1e24"/>
+          </a:solidFill>
+          <a:ln>
+            <a:solidFill>
+              <a:srgbClr val="ff8c00"/>
+            </a:solidFill>
+            <a:round/>
+          </a:ln>
+          <a:effectLst>
+            <a:outerShdw blurRad="39960" dir="5400000" dist="23040" rotWithShape="0">
+              <a:srgbClr val="000000">
+                <a:alpha val="35000"/>
+              </a:srgbClr>
+            </a:outerShdw>
+          </a:effectLst>
+        </p:spPr>
+        <p:style>
+          <a:lnRef idx="1">
+            <a:schemeClr val="accent1"/>
+          </a:lnRef>
+          <a:fillRef idx="3">
+            <a:schemeClr val="accent1"/>
+          </a:fillRef>
+          <a:effectRef idx="2">
+            <a:schemeClr val="accent1"/>
+          </a:effectRef>
+          <a:fontRef idx="minor"/>
+        </p:style>
+        <p:txBody>
+          <a:bodyPr lIns="90000" rIns="90000" tIns="45000" bIns="45000" anchor="ctr">
+            <a:noAutofit/>
+          </a:bodyPr>
+          <a:p>
+            <a:pPr algn="ctr">
+              <a:lnSpc>
+                <a:spcPct val="100000"/>
+              </a:lnSpc>
+            </a:pPr>
+            <a:r>
+              <a:rPr b="1" lang="en-US" sz="1400" spc="-1" strike="noStrike">
+                <a:solidFill>
+                  <a:srgbClr val="ffb45a"/>
+                </a:solidFill>
+                <a:latin typeface="Calibri"/>
+                <a:ea typeface="DejaVu Sans"/>
+              </a:rPr>
+              <a:t>JAVA TEMELLERI</a:t>
+            </a:r>
+            <a:endParaRPr b="0" lang="en-US" sz="1400" spc="-1" strike="noStrike">
+              <a:solidFill>
+                <a:srgbClr val="ffffff"/>
+              </a:solidFill>
+              <a:latin typeface="Arial"/>
+            </a:endParaRPr>
+          </a:p>
+        </p:txBody>
+      </p:sp>
+      <p:sp>
+        <p:nvSpPr>
+          <p:cNvPr id="214" name="TextBox 21"/>
+          <p:cNvSpPr/>
+          <p:nvPr/>
+        </p:nvSpPr>
+        <p:spPr>
+          <a:xfrm>
+            <a:off x="2106360" y="914400"/>
+            <a:ext cx="6757200" cy="942840"/>
+          </a:xfrm>
+          <a:prstGeom prst="rect">
+            <a:avLst/>
+          </a:prstGeom>
+          <a:noFill/>
+          <a:ln w="0">
+            <a:noFill/>
+          </a:ln>
+        </p:spPr>
+        <p:style>
+          <a:lnRef idx="0"/>
+          <a:fillRef idx="0"/>
+          <a:effectRef idx="0"/>
+          <a:fontRef idx="minor"/>
+        </p:style>
+        <p:txBody>
+          <a:bodyPr wrap="none" lIns="90000" rIns="90000" tIns="45000" bIns="45000" anchor="t">
+            <a:spAutoFit/>
+          </a:bodyPr>
+          <a:p>
+            <a:pPr>
+              <a:lnSpc>
+                <a:spcPct val="100000"/>
+              </a:lnSpc>
+            </a:pPr>
+            <a:r>
+              <a:rPr b="1" lang="en-US" sz="2800" spc="-1" strike="noStrike">
+                <a:solidFill>
+                  <a:srgbClr val="f5f5f5"/>
+                </a:solidFill>
+                <a:latin typeface="Calibri"/>
+                <a:ea typeface="DejaVu Sans"/>
+              </a:rPr>
+              <a:t>Kapsamlı Java Date &amp; Time Ekosistemi (Özet)</a:t>
+            </a:r>
+            <a:endParaRPr b="0" lang="en-US" sz="2800" spc="-1" strike="noStrike">
+              <a:solidFill>
+                <a:srgbClr val="000000"/>
+              </a:solidFill>
+              <a:latin typeface="Arial"/>
+            </a:endParaRPr>
+          </a:p>
+          <a:p>
+            <a:pPr>
+              <a:lnSpc>
+                <a:spcPct val="100000"/>
+              </a:lnSpc>
+            </a:pPr>
+            <a:endParaRPr b="0" lang="en-US" sz="2800" spc="-1" strike="noStrike">
+              <a:solidFill>
+                <a:srgbClr val="000000"/>
+              </a:solidFill>
+              <a:latin typeface="Arial"/>
+            </a:endParaRPr>
+          </a:p>
+        </p:txBody>
+      </p:sp>
+      <p:sp>
+        <p:nvSpPr>
+          <p:cNvPr id="215" name="TextBox 22"/>
+          <p:cNvSpPr/>
+          <p:nvPr/>
+        </p:nvSpPr>
+        <p:spPr>
+          <a:xfrm>
+            <a:off x="1124280" y="1565280"/>
+            <a:ext cx="9253440" cy="819720"/>
+          </a:xfrm>
+          <a:prstGeom prst="rect">
+            <a:avLst/>
+          </a:prstGeom>
+          <a:noFill/>
+          <a:ln w="0">
+            <a:noFill/>
+          </a:ln>
+        </p:spPr>
+        <p:style>
+          <a:lnRef idx="0"/>
+          <a:fillRef idx="0"/>
+          <a:effectRef idx="0"/>
+          <a:fontRef idx="minor"/>
+        </p:style>
+        <p:txBody>
+          <a:bodyPr wrap="none" lIns="90000" rIns="90000" tIns="45000" bIns="45000" anchor="t">
+            <a:spAutoFit/>
+          </a:bodyPr>
+          <a:p>
+            <a:pPr>
+              <a:lnSpc>
+                <a:spcPct val="100000"/>
+              </a:lnSpc>
+            </a:pPr>
+            <a:r>
+              <a:rPr b="0" lang="en-US" sz="1600" spc="-1" strike="noStrike">
+                <a:solidFill>
+                  <a:srgbClr val="aaaaaa"/>
+                </a:solidFill>
+                <a:latin typeface="Calibri"/>
+                <a:ea typeface="DejaVu Sans"/>
+              </a:rPr>
+              <a:t>Java 8 ile gelen java.time paketi, Java'da bir paradigma değişimidir. İnsan zamanını, </a:t>
+            </a:r>
+            <a:endParaRPr b="0" lang="en-US" sz="1600" spc="-1" strike="noStrike">
+              <a:solidFill>
+                <a:srgbClr val="000000"/>
+              </a:solidFill>
+              <a:latin typeface="Arial"/>
+            </a:endParaRPr>
+          </a:p>
+          <a:p>
+            <a:pPr>
+              <a:lnSpc>
+                <a:spcPct val="100000"/>
+              </a:lnSpc>
+            </a:pPr>
+            <a:r>
+              <a:rPr b="0" lang="en-US" sz="1600" spc="-1" strike="noStrike">
+                <a:solidFill>
+                  <a:srgbClr val="aaaaaa"/>
+                </a:solidFill>
+                <a:latin typeface="Calibri"/>
+                <a:ea typeface="DejaVu Sans"/>
+              </a:rPr>
+              <a:t>makine zamanını ve bunları birbirine bağlayan karmaşık coğrafi kuralları modellemek için </a:t>
+            </a:r>
+            <a:endParaRPr b="0" lang="en-US" sz="1600" spc="-1" strike="noStrike">
+              <a:solidFill>
+                <a:srgbClr val="000000"/>
+              </a:solidFill>
+              <a:latin typeface="Arial"/>
+            </a:endParaRPr>
+          </a:p>
+          <a:p>
+            <a:pPr>
+              <a:lnSpc>
+                <a:spcPct val="100000"/>
+              </a:lnSpc>
+            </a:pPr>
+            <a:r>
+              <a:rPr b="0" lang="en-US" sz="1600" spc="-1" strike="noStrike">
+                <a:solidFill>
+                  <a:srgbClr val="aaaaaa"/>
+                </a:solidFill>
+                <a:latin typeface="Calibri"/>
+                <a:ea typeface="DejaVu Sans"/>
+              </a:rPr>
+              <a:t>değiştirilemez (immutable), iş parçacığı güvenli (thread-safe) ve alan odaklı (domain-driven) bir yaklaşım sunar.</a:t>
+            </a:r>
+            <a:endParaRPr b="0" lang="en-US" sz="1600" spc="-1" strike="noStrike">
+              <a:solidFill>
+                <a:srgbClr val="000000"/>
+              </a:solidFill>
+              <a:latin typeface="Arial"/>
+            </a:endParaRPr>
+          </a:p>
+        </p:txBody>
+      </p:sp>
+      <p:sp>
+        <p:nvSpPr>
+          <p:cNvPr id="216" name="Rounded Rectangle 51"/>
+          <p:cNvSpPr/>
+          <p:nvPr/>
+        </p:nvSpPr>
+        <p:spPr>
+          <a:xfrm>
+            <a:off x="987480" y="3182040"/>
+            <a:ext cx="3288960" cy="2740320"/>
+          </a:xfrm>
+          <a:prstGeom prst="roundRect">
+            <a:avLst>
+              <a:gd name="adj" fmla="val 16667"/>
+            </a:avLst>
+          </a:prstGeom>
+          <a:solidFill>
+            <a:srgbClr val="08080a"/>
+          </a:solidFill>
+          <a:ln>
+            <a:noFill/>
+          </a:ln>
+          <a:effectLst>
+            <a:outerShdw blurRad="39960" dir="5400000" dist="23040" rotWithShape="0">
+              <a:srgbClr val="000000">
+                <a:alpha val="35000"/>
+              </a:srgbClr>
+            </a:outerShdw>
+          </a:effectLst>
+        </p:spPr>
+        <p:style>
+          <a:lnRef idx="1">
+            <a:schemeClr val="accent1"/>
+          </a:lnRef>
+          <a:fillRef idx="3">
+            <a:schemeClr val="accent1"/>
+          </a:fillRef>
+          <a:effectRef idx="2">
+            <a:schemeClr val="accent1"/>
+          </a:effectRef>
+          <a:fontRef idx="minor"/>
+        </p:style>
+        <p:txBody>
+          <a:bodyPr lIns="90000" rIns="90000" tIns="45000" bIns="45000" anchor="ctr">
+            <a:noAutofit/>
+          </a:bodyPr>
+          <a:p>
+            <a:endParaRPr b="0" lang="en-US" sz="1800" spc="-1" strike="noStrike">
+              <a:solidFill>
+                <a:schemeClr val="lt1"/>
+              </a:solidFill>
+              <a:latin typeface="Calibri"/>
+              <a:ea typeface="DejaVu Sans"/>
+            </a:endParaRPr>
+          </a:p>
+        </p:txBody>
+      </p:sp>
+      <p:sp>
+        <p:nvSpPr>
+          <p:cNvPr id="217" name="Rounded Rectangle 52"/>
+          <p:cNvSpPr/>
+          <p:nvPr/>
+        </p:nvSpPr>
+        <p:spPr>
+          <a:xfrm>
+            <a:off x="457200" y="2743200"/>
+            <a:ext cx="3886200" cy="3885480"/>
+          </a:xfrm>
+          <a:prstGeom prst="roundRect">
+            <a:avLst>
+              <a:gd name="adj" fmla="val 16667"/>
+            </a:avLst>
+          </a:prstGeom>
+          <a:solidFill>
+            <a:srgbClr val="16161c"/>
+          </a:solidFill>
+          <a:ln>
+            <a:solidFill>
+              <a:srgbClr val="464655"/>
+            </a:solidFill>
+            <a:round/>
+          </a:ln>
+          <a:effectLst>
+            <a:outerShdw blurRad="39960" dir="5400000" dist="23040" rotWithShape="0">
+              <a:srgbClr val="000000">
+                <a:alpha val="35000"/>
+              </a:srgbClr>
+            </a:outerShdw>
+          </a:effectLst>
+        </p:spPr>
+        <p:style>
+          <a:lnRef idx="1">
+            <a:schemeClr val="accent1"/>
+          </a:lnRef>
+          <a:fillRef idx="3">
+            <a:schemeClr val="accent1"/>
+          </a:fillRef>
+          <a:effectRef idx="2">
+            <a:schemeClr val="accent1"/>
+          </a:effectRef>
+          <a:fontRef idx="minor"/>
+        </p:style>
+        <p:txBody>
+          <a:bodyPr lIns="90000" rIns="90000" tIns="45000" bIns="45000" anchor="ctr">
+            <a:noAutofit/>
+          </a:bodyPr>
+          <a:p>
+            <a:pPr>
+              <a:lnSpc>
+                <a:spcPct val="100000"/>
+              </a:lnSpc>
+            </a:pPr>
+            <a:r>
+              <a:rPr b="1" lang="en-US" sz="1100" spc="-1" strike="noStrike">
+                <a:solidFill>
+                  <a:schemeClr val="lt1"/>
+                </a:solidFill>
+                <a:latin typeface="Calibri"/>
+                <a:ea typeface="DejaVu Sans"/>
+              </a:rPr>
+              <a:t>Boyut 1: </a:t>
+            </a:r>
+            <a:r>
+              <a:rPr b="0" lang="en-US" sz="1100" spc="-1" strike="noStrike">
+                <a:solidFill>
+                  <a:schemeClr val="lt1"/>
+                </a:solidFill>
+                <a:latin typeface="Calibri"/>
+                <a:ea typeface="DejaVu Sans"/>
+              </a:rPr>
+              <a:t>İnsan Zaman Çizelgesi (Coğrafyadan Bağımsız)</a:t>
+            </a:r>
+            <a:endParaRPr b="0" lang="en-US" sz="1100" spc="-1" strike="noStrike">
+              <a:solidFill>
+                <a:srgbClr val="ffffff"/>
+              </a:solidFill>
+              <a:latin typeface="Arial"/>
+            </a:endParaRPr>
+          </a:p>
+          <a:p>
+            <a:pPr>
+              <a:lnSpc>
+                <a:spcPct val="100000"/>
+              </a:lnSpc>
+            </a:pPr>
+            <a:r>
+              <a:rPr b="1" lang="en-US" sz="1100" spc="-1" strike="noStrike">
+                <a:solidFill>
+                  <a:schemeClr val="lt1"/>
+                </a:solidFill>
+                <a:latin typeface="Calibri"/>
+                <a:ea typeface="DejaVu Sans"/>
+              </a:rPr>
+              <a:t>LocalDate, LocalTime, LocalDateTime zamanı tam olarak bir duvar saatinde veya kağıt takvimde gördüğünüz gibi temsil eder. Dünyanın neresinde olduklarını bilmezler.</a:t>
+            </a:r>
+            <a:endParaRPr b="0" lang="en-US" sz="1100" spc="-1" strike="noStrike">
+              <a:solidFill>
+                <a:srgbClr val="ffffff"/>
+              </a:solidFill>
+              <a:latin typeface="Arial"/>
+            </a:endParaRPr>
+          </a:p>
+          <a:p>
+            <a:pPr>
+              <a:lnSpc>
+                <a:spcPct val="100000"/>
+              </a:lnSpc>
+            </a:pPr>
+            <a:endParaRPr b="0" lang="en-US" sz="1100" spc="-1" strike="noStrike">
+              <a:solidFill>
+                <a:srgbClr val="ffffff"/>
+              </a:solidFill>
+              <a:latin typeface="Arial"/>
+            </a:endParaRPr>
+          </a:p>
+          <a:p>
+            <a:pPr>
+              <a:lnSpc>
+                <a:spcPct val="100000"/>
+              </a:lnSpc>
+            </a:pPr>
+            <a:r>
+              <a:rPr b="1" lang="en-US" sz="1100" spc="-1" strike="noStrike">
+                <a:solidFill>
+                  <a:schemeClr val="lt1"/>
+                </a:solidFill>
+                <a:latin typeface="Calibri"/>
+                <a:ea typeface="DejaVu Sans"/>
+              </a:rPr>
+              <a:t>Boyut 2: </a:t>
+            </a:r>
+            <a:r>
+              <a:rPr b="0" lang="en-US" sz="1100" spc="-1" strike="noStrike">
+                <a:solidFill>
+                  <a:schemeClr val="lt1"/>
+                </a:solidFill>
+                <a:latin typeface="Calibri"/>
+                <a:ea typeface="DejaVu Sans"/>
+              </a:rPr>
+              <a:t>Dünya Izgarası (Coğrafi Gerçeklik)</a:t>
+            </a:r>
+            <a:endParaRPr b="0" lang="en-US" sz="1100" spc="-1" strike="noStrike">
+              <a:solidFill>
+                <a:srgbClr val="ffffff"/>
+              </a:solidFill>
+              <a:latin typeface="Arial"/>
+            </a:endParaRPr>
+          </a:p>
+          <a:p>
+            <a:pPr>
+              <a:lnSpc>
+                <a:spcPct val="100000"/>
+              </a:lnSpc>
+            </a:pPr>
+            <a:r>
+              <a:rPr b="1" lang="en-US" sz="1100" spc="-1" strike="noStrike">
+                <a:solidFill>
+                  <a:schemeClr val="lt1"/>
+                </a:solidFill>
+                <a:latin typeface="Calibri"/>
+                <a:ea typeface="DejaVu Sans"/>
+              </a:rPr>
+              <a:t>ZoneId ve ZonedDateTime, insan zaman çizelgesini Dünya üzerindeki belirli bir koordinata sabitler. Yaz Saati (DST) ve UTC farklarının yarattığı karmaşayı otomatik olarak yönetirler.</a:t>
+            </a:r>
+            <a:endParaRPr b="0" lang="en-US" sz="1100" spc="-1" strike="noStrike">
+              <a:solidFill>
+                <a:srgbClr val="ffffff"/>
+              </a:solidFill>
+              <a:latin typeface="Arial"/>
+            </a:endParaRPr>
+          </a:p>
+          <a:p>
+            <a:pPr>
+              <a:lnSpc>
+                <a:spcPct val="100000"/>
+              </a:lnSpc>
+            </a:pPr>
+            <a:endParaRPr b="0" lang="en-US" sz="1100" spc="-1" strike="noStrike">
+              <a:solidFill>
+                <a:srgbClr val="ffffff"/>
+              </a:solidFill>
+              <a:latin typeface="Arial"/>
+            </a:endParaRPr>
+          </a:p>
+          <a:p>
+            <a:pPr>
+              <a:lnSpc>
+                <a:spcPct val="100000"/>
+              </a:lnSpc>
+            </a:pPr>
+            <a:r>
+              <a:rPr b="1" lang="en-US" sz="1100" spc="-1" strike="noStrike">
+                <a:solidFill>
+                  <a:schemeClr val="lt1"/>
+                </a:solidFill>
+                <a:latin typeface="Calibri"/>
+                <a:ea typeface="DejaVu Sans"/>
+              </a:rPr>
+              <a:t>Boyut 3: </a:t>
+            </a:r>
+            <a:r>
+              <a:rPr b="0" lang="en-US" sz="1100" spc="-1" strike="noStrike">
+                <a:solidFill>
+                  <a:schemeClr val="lt1"/>
+                </a:solidFill>
+                <a:latin typeface="Calibri"/>
+                <a:ea typeface="DejaVu Sans"/>
+              </a:rPr>
+              <a:t>Ölçüm (Anlar arasındaki boşluk)</a:t>
+            </a:r>
+            <a:endParaRPr b="0" lang="en-US" sz="1100" spc="-1" strike="noStrike">
+              <a:solidFill>
+                <a:srgbClr val="ffffff"/>
+              </a:solidFill>
+              <a:latin typeface="Arial"/>
+            </a:endParaRPr>
+          </a:p>
+          <a:p>
+            <a:pPr>
+              <a:lnSpc>
+                <a:spcPct val="100000"/>
+              </a:lnSpc>
+            </a:pPr>
+            <a:r>
+              <a:rPr b="1" lang="en-US" sz="1100" spc="-1" strike="noStrike">
+                <a:solidFill>
+                  <a:schemeClr val="lt1"/>
+                </a:solidFill>
+                <a:latin typeface="Calibri"/>
+                <a:ea typeface="DejaVu Sans"/>
+              </a:rPr>
+              <a:t>Zaman sadece noktalardan ibaret değildir; mesafelerdir. Period takvimsel mesafeleri (yıl, ay, gün) ölçerken, Duration saat bazlı mesafeleri (saat, dakika, saniye) ölçer.</a:t>
+            </a:r>
+            <a:endParaRPr b="0" lang="en-US" sz="1100" spc="-1" strike="noStrike">
+              <a:solidFill>
+                <a:srgbClr val="ffffff"/>
+              </a:solidFill>
+              <a:latin typeface="Arial"/>
+            </a:endParaRPr>
+          </a:p>
+          <a:p>
+            <a:pPr>
+              <a:lnSpc>
+                <a:spcPct val="100000"/>
+              </a:lnSpc>
+            </a:pPr>
+            <a:endParaRPr b="0" lang="en-US" sz="1100" spc="-1" strike="noStrike">
+              <a:solidFill>
+                <a:srgbClr val="ffffff"/>
+              </a:solidFill>
+              <a:latin typeface="Arial"/>
+            </a:endParaRPr>
+          </a:p>
+          <a:p>
+            <a:pPr>
+              <a:lnSpc>
+                <a:spcPct val="100000"/>
+              </a:lnSpc>
+            </a:pPr>
+            <a:r>
+              <a:rPr b="1" lang="en-US" sz="1100" spc="-1" strike="noStrike">
+                <a:solidFill>
+                  <a:schemeClr val="lt1"/>
+                </a:solidFill>
+                <a:latin typeface="Calibri"/>
+                <a:ea typeface="DejaVu Sans"/>
+              </a:rPr>
+              <a:t>Boyut 4:</a:t>
+            </a:r>
+            <a:r>
+              <a:rPr b="0" lang="en-US" sz="1100" spc="-1" strike="noStrike">
+                <a:solidFill>
+                  <a:schemeClr val="lt1"/>
+                </a:solidFill>
+                <a:latin typeface="Calibri"/>
+                <a:ea typeface="DejaVu Sans"/>
+              </a:rPr>
+              <a:t> Çeviri Katmanı (Köprü)</a:t>
+            </a:r>
+            <a:endParaRPr b="0" lang="en-US" sz="1100" spc="-1" strike="noStrike">
+              <a:solidFill>
+                <a:srgbClr val="ffffff"/>
+              </a:solidFill>
+              <a:latin typeface="Arial"/>
+            </a:endParaRPr>
+          </a:p>
+          <a:p>
+            <a:pPr>
+              <a:lnSpc>
+                <a:spcPct val="100000"/>
+              </a:lnSpc>
+            </a:pPr>
+            <a:r>
+              <a:rPr b="1" lang="en-US" sz="1100" spc="-1" strike="noStrike">
+                <a:solidFill>
+                  <a:schemeClr val="lt1"/>
+                </a:solidFill>
+                <a:latin typeface="Calibri"/>
+                <a:ea typeface="DejaVu Sans"/>
+              </a:rPr>
+              <a:t>DateTimeFormatter, ham metin (Parsing) ile insan tarafından okunabilen kullanıcı arayüzü çıktıları (Formatting) arasında evrensel bir çevirmen görevi görür.</a:t>
+            </a:r>
+            <a:endParaRPr b="0" lang="en-US" sz="1100" spc="-1" strike="noStrike">
+              <a:solidFill>
+                <a:srgbClr val="ffffff"/>
+              </a:solidFill>
+              <a:latin typeface="Arial"/>
+            </a:endParaRPr>
+          </a:p>
+        </p:txBody>
+      </p:sp>
+      <p:sp>
+        <p:nvSpPr>
+          <p:cNvPr id="218" name="Rounded Rectangle 53"/>
+          <p:cNvSpPr/>
+          <p:nvPr/>
+        </p:nvSpPr>
+        <p:spPr>
+          <a:xfrm>
+            <a:off x="4507920" y="3182040"/>
+            <a:ext cx="3288960" cy="2740320"/>
+          </a:xfrm>
+          <a:prstGeom prst="roundRect">
+            <a:avLst>
+              <a:gd name="adj" fmla="val 16667"/>
+            </a:avLst>
+          </a:prstGeom>
+          <a:solidFill>
+            <a:srgbClr val="08080a"/>
+          </a:solidFill>
+          <a:ln>
+            <a:noFill/>
+          </a:ln>
+          <a:effectLst>
+            <a:outerShdw blurRad="39960" dir="5400000" dist="23040" rotWithShape="0">
+              <a:srgbClr val="000000">
+                <a:alpha val="35000"/>
+              </a:srgbClr>
+            </a:outerShdw>
+          </a:effectLst>
+        </p:spPr>
+        <p:style>
+          <a:lnRef idx="1">
+            <a:schemeClr val="accent1"/>
+          </a:lnRef>
+          <a:fillRef idx="3">
+            <a:schemeClr val="accent1"/>
+          </a:fillRef>
+          <a:effectRef idx="2">
+            <a:schemeClr val="accent1"/>
+          </a:effectRef>
+          <a:fontRef idx="minor"/>
+        </p:style>
+        <p:txBody>
+          <a:bodyPr lIns="90000" rIns="90000" tIns="45000" bIns="45000" anchor="ctr">
+            <a:noAutofit/>
+          </a:bodyPr>
+          <a:p>
+            <a:endParaRPr b="0" lang="en-US" sz="1800" spc="-1" strike="noStrike">
+              <a:solidFill>
+                <a:schemeClr val="lt1"/>
+              </a:solidFill>
+              <a:latin typeface="Calibri"/>
+              <a:ea typeface="DejaVu Sans"/>
+            </a:endParaRPr>
+          </a:p>
+        </p:txBody>
+      </p:sp>
+      <p:sp>
+        <p:nvSpPr>
+          <p:cNvPr id="219" name="Rounded Rectangle 54"/>
+          <p:cNvSpPr/>
+          <p:nvPr/>
+        </p:nvSpPr>
+        <p:spPr>
+          <a:xfrm>
+            <a:off x="4572000" y="2743200"/>
+            <a:ext cx="3429000" cy="3657600"/>
+          </a:xfrm>
+          <a:prstGeom prst="roundRect">
+            <a:avLst>
+              <a:gd name="adj" fmla="val 16667"/>
+            </a:avLst>
+          </a:prstGeom>
+          <a:solidFill>
+            <a:srgbClr val="16161c"/>
+          </a:solidFill>
+          <a:ln>
+            <a:solidFill>
+              <a:srgbClr val="464655"/>
+            </a:solidFill>
+            <a:round/>
+          </a:ln>
+          <a:effectLst>
+            <a:outerShdw blurRad="39960" dir="5400000" dist="23040" rotWithShape="0">
+              <a:srgbClr val="000000">
+                <a:alpha val="35000"/>
+              </a:srgbClr>
+            </a:outerShdw>
+          </a:effectLst>
+        </p:spPr>
+        <p:style>
+          <a:lnRef idx="1">
+            <a:schemeClr val="accent1"/>
+          </a:lnRef>
+          <a:fillRef idx="3">
+            <a:schemeClr val="accent1"/>
+          </a:fillRef>
+          <a:effectRef idx="2">
+            <a:schemeClr val="accent1"/>
+          </a:effectRef>
+          <a:fontRef idx="minor"/>
+        </p:style>
+        <p:txBody>
+          <a:bodyPr lIns="90000" rIns="90000" tIns="45000" bIns="45000" anchor="ctr">
+            <a:noAutofit/>
+          </a:bodyPr>
+          <a:p>
+            <a:pPr>
+              <a:lnSpc>
+                <a:spcPct val="100000"/>
+              </a:lnSpc>
+            </a:pPr>
+            <a:r>
+              <a:rPr b="0" lang="en-US" sz="1100" spc="-1" strike="noStrike">
+                <a:solidFill>
+                  <a:schemeClr val="lt1"/>
+                </a:solidFill>
+                <a:latin typeface="Calibri"/>
+                <a:ea typeface="DejaVu Sans"/>
+              </a:rPr>
+              <a:t>[ Ne tür bir zaman modellemeniz gerekiyor? ]</a:t>
+            </a:r>
+            <a:endParaRPr b="0" lang="en-US" sz="1100" spc="-1" strike="noStrike">
+              <a:solidFill>
+                <a:srgbClr val="ffffff"/>
+              </a:solidFill>
+              <a:latin typeface="Arial"/>
+            </a:endParaRPr>
+          </a:p>
+          <a:p>
+            <a:pPr>
+              <a:lnSpc>
+                <a:spcPct val="100000"/>
+              </a:lnSpc>
+            </a:pPr>
+            <a:r>
+              <a:rPr b="0" lang="en-US" sz="1100" spc="-1" strike="noStrike">
+                <a:solidFill>
+                  <a:schemeClr val="lt1"/>
+                </a:solidFill>
+                <a:latin typeface="Calibri"/>
+                <a:ea typeface="DejaVu Sans"/>
+              </a:rPr>
+              <a:t>├──</a:t>
+            </a:r>
+            <a:r>
+              <a:rPr b="0" lang="en-US" sz="1100" spc="-1" strike="noStrike">
+                <a:solidFill>
+                  <a:schemeClr val="lt1"/>
+                </a:solidFill>
+                <a:latin typeface="Calibri"/>
+                <a:ea typeface="DejaVu Sans"/>
+              </a:rPr>
+              <a:t>&gt; Coğrafya önemli mi? (Küresel Etkinlikler, Uçuşlar)</a:t>
+            </a:r>
+            <a:endParaRPr b="0" lang="en-US" sz="1100" spc="-1" strike="noStrike">
+              <a:solidFill>
+                <a:srgbClr val="ffffff"/>
+              </a:solidFill>
+              <a:latin typeface="Arial"/>
+            </a:endParaRPr>
+          </a:p>
+          <a:p>
+            <a:pPr>
+              <a:lnSpc>
+                <a:spcPct val="100000"/>
+              </a:lnSpc>
+            </a:pPr>
+            <a:r>
+              <a:rPr b="0" lang="en-US" sz="1100" spc="-1" strike="noStrike">
+                <a:solidFill>
+                  <a:schemeClr val="lt1"/>
+                </a:solidFill>
+                <a:latin typeface="Calibri"/>
+                <a:ea typeface="DejaVu Sans"/>
+              </a:rPr>
+              <a:t>│ └── </a:t>
+            </a:r>
+            <a:r>
+              <a:rPr b="0" lang="en-US" sz="1100" spc="-1" strike="noStrike">
+                <a:solidFill>
+                  <a:schemeClr val="lt1"/>
+                </a:solidFill>
+                <a:latin typeface="Calibri"/>
+                <a:ea typeface="DejaVu Sans"/>
+              </a:rPr>
+              <a:t>EVET ─&gt; ZoneId ile bağla ─&gt; ZonedDateTime</a:t>
+            </a:r>
+            <a:endParaRPr b="0" lang="en-US" sz="1100" spc="-1" strike="noStrike">
+              <a:solidFill>
+                <a:srgbClr val="ffffff"/>
+              </a:solidFill>
+              <a:latin typeface="Arial"/>
+            </a:endParaRPr>
+          </a:p>
+          <a:p>
+            <a:pPr>
+              <a:lnSpc>
+                <a:spcPct val="100000"/>
+              </a:lnSpc>
+            </a:pPr>
+            <a:r>
+              <a:rPr b="0" lang="en-US" sz="1100" spc="-1" strike="noStrike">
+                <a:solidFill>
+                  <a:schemeClr val="lt1"/>
+                </a:solidFill>
+                <a:latin typeface="Calibri"/>
+                <a:ea typeface="DejaVu Sans"/>
+              </a:rPr>
+              <a:t>│</a:t>
+            </a:r>
+            <a:endParaRPr b="0" lang="en-US" sz="1100" spc="-1" strike="noStrike">
+              <a:solidFill>
+                <a:srgbClr val="ffffff"/>
+              </a:solidFill>
+              <a:latin typeface="Arial"/>
+            </a:endParaRPr>
+          </a:p>
+          <a:p>
+            <a:pPr>
+              <a:lnSpc>
+                <a:spcPct val="100000"/>
+              </a:lnSpc>
+            </a:pPr>
+            <a:r>
+              <a:rPr b="0" lang="en-US" sz="1100" spc="-1" strike="noStrike">
+                <a:solidFill>
+                  <a:schemeClr val="lt1"/>
+                </a:solidFill>
+                <a:latin typeface="Calibri"/>
+                <a:ea typeface="DejaVu Sans"/>
+              </a:rPr>
+              <a:t>├──</a:t>
+            </a:r>
+            <a:r>
+              <a:rPr b="0" lang="en-US" sz="1100" spc="-1" strike="noStrike">
+                <a:solidFill>
+                  <a:schemeClr val="lt1"/>
+                </a:solidFill>
+                <a:latin typeface="Calibri"/>
+                <a:ea typeface="DejaVu Sans"/>
+              </a:rPr>
+              <a:t>&gt; Sadece yerel/günlük bir kavram mı? (Doğum Günleri, Alarmlar)</a:t>
+            </a:r>
+            <a:endParaRPr b="0" lang="en-US" sz="1100" spc="-1" strike="noStrike">
+              <a:solidFill>
+                <a:srgbClr val="ffffff"/>
+              </a:solidFill>
+              <a:latin typeface="Arial"/>
+            </a:endParaRPr>
+          </a:p>
+          <a:p>
+            <a:pPr>
+              <a:lnSpc>
+                <a:spcPct val="100000"/>
+              </a:lnSpc>
+            </a:pPr>
+            <a:r>
+              <a:rPr b="0" lang="en-US" sz="1100" spc="-1" strike="noStrike">
+                <a:solidFill>
+                  <a:schemeClr val="lt1"/>
+                </a:solidFill>
+                <a:latin typeface="Calibri"/>
+                <a:ea typeface="DejaVu Sans"/>
+              </a:rPr>
+              <a:t>│ ├── </a:t>
+            </a:r>
+            <a:r>
+              <a:rPr b="0" lang="en-US" sz="1100" spc="-1" strike="noStrike">
+                <a:solidFill>
+                  <a:schemeClr val="lt1"/>
+                </a:solidFill>
+                <a:latin typeface="Calibri"/>
+                <a:ea typeface="DejaVu Sans"/>
+              </a:rPr>
+              <a:t>Sadece Tarih mi Lazım? ─&gt; LocalDate</a:t>
+            </a:r>
+            <a:endParaRPr b="0" lang="en-US" sz="1100" spc="-1" strike="noStrike">
+              <a:solidFill>
+                <a:srgbClr val="ffffff"/>
+              </a:solidFill>
+              <a:latin typeface="Arial"/>
+            </a:endParaRPr>
+          </a:p>
+          <a:p>
+            <a:pPr>
+              <a:lnSpc>
+                <a:spcPct val="100000"/>
+              </a:lnSpc>
+            </a:pPr>
+            <a:r>
+              <a:rPr b="0" lang="en-US" sz="1100" spc="-1" strike="noStrike">
+                <a:solidFill>
+                  <a:schemeClr val="lt1"/>
+                </a:solidFill>
+                <a:latin typeface="Calibri"/>
+                <a:ea typeface="DejaVu Sans"/>
+              </a:rPr>
+              <a:t>│ ├── </a:t>
+            </a:r>
+            <a:r>
+              <a:rPr b="0" lang="en-US" sz="1100" spc="-1" strike="noStrike">
+                <a:solidFill>
+                  <a:schemeClr val="lt1"/>
+                </a:solidFill>
+                <a:latin typeface="Calibri"/>
+                <a:ea typeface="DejaVu Sans"/>
+              </a:rPr>
+              <a:t>Sadece Saat mi Lazım? ─&gt; LocalTime</a:t>
+            </a:r>
+            <a:endParaRPr b="0" lang="en-US" sz="1100" spc="-1" strike="noStrike">
+              <a:solidFill>
+                <a:srgbClr val="ffffff"/>
+              </a:solidFill>
+              <a:latin typeface="Arial"/>
+            </a:endParaRPr>
+          </a:p>
+          <a:p>
+            <a:pPr>
+              <a:lnSpc>
+                <a:spcPct val="100000"/>
+              </a:lnSpc>
+            </a:pPr>
+            <a:r>
+              <a:rPr b="0" lang="en-US" sz="1100" spc="-1" strike="noStrike">
+                <a:solidFill>
+                  <a:schemeClr val="lt1"/>
+                </a:solidFill>
+                <a:latin typeface="Calibri"/>
+                <a:ea typeface="DejaVu Sans"/>
+              </a:rPr>
+              <a:t>│ └── </a:t>
+            </a:r>
+            <a:r>
+              <a:rPr b="0" lang="en-US" sz="1100" spc="-1" strike="noStrike">
+                <a:solidFill>
+                  <a:schemeClr val="lt1"/>
+                </a:solidFill>
+                <a:latin typeface="Calibri"/>
+                <a:ea typeface="DejaVu Sans"/>
+              </a:rPr>
+              <a:t>İkisi de mi Lazım? ─&gt; LocalDateTime</a:t>
+            </a:r>
+            <a:endParaRPr b="0" lang="en-US" sz="1100" spc="-1" strike="noStrike">
+              <a:solidFill>
+                <a:srgbClr val="ffffff"/>
+              </a:solidFill>
+              <a:latin typeface="Arial"/>
+            </a:endParaRPr>
+          </a:p>
+          <a:p>
+            <a:pPr>
+              <a:lnSpc>
+                <a:spcPct val="100000"/>
+              </a:lnSpc>
+            </a:pPr>
+            <a:r>
+              <a:rPr b="0" lang="en-US" sz="1100" spc="-1" strike="noStrike">
+                <a:solidFill>
+                  <a:schemeClr val="lt1"/>
+                </a:solidFill>
+                <a:latin typeface="Calibri"/>
+                <a:ea typeface="DejaVu Sans"/>
+              </a:rPr>
+              <a:t>│</a:t>
+            </a:r>
+            <a:endParaRPr b="0" lang="en-US" sz="1100" spc="-1" strike="noStrike">
+              <a:solidFill>
+                <a:srgbClr val="ffffff"/>
+              </a:solidFill>
+              <a:latin typeface="Arial"/>
+            </a:endParaRPr>
+          </a:p>
+          <a:p>
+            <a:pPr>
+              <a:lnSpc>
+                <a:spcPct val="100000"/>
+              </a:lnSpc>
+            </a:pPr>
+            <a:r>
+              <a:rPr b="0" lang="en-US" sz="1100" spc="-1" strike="noStrike">
+                <a:solidFill>
+                  <a:schemeClr val="lt1"/>
+                </a:solidFill>
+                <a:latin typeface="Calibri"/>
+                <a:ea typeface="DejaVu Sans"/>
+              </a:rPr>
+              <a:t>[ İşlem Evresi: Bununla ne yapmak istiyorsunuz? ]</a:t>
+            </a:r>
+            <a:endParaRPr b="0" lang="en-US" sz="1100" spc="-1" strike="noStrike">
+              <a:solidFill>
+                <a:srgbClr val="ffffff"/>
+              </a:solidFill>
+              <a:latin typeface="Arial"/>
+            </a:endParaRPr>
+          </a:p>
+          <a:p>
+            <a:pPr>
+              <a:lnSpc>
+                <a:spcPct val="100000"/>
+              </a:lnSpc>
+            </a:pPr>
+            <a:r>
+              <a:rPr b="0" lang="en-US" sz="1100" spc="-1" strike="noStrike">
+                <a:solidFill>
+                  <a:schemeClr val="lt1"/>
+                </a:solidFill>
+                <a:latin typeface="Calibri"/>
+                <a:ea typeface="DejaVu Sans"/>
+              </a:rPr>
+              <a:t>│</a:t>
+            </a:r>
+            <a:endParaRPr b="0" lang="en-US" sz="1100" spc="-1" strike="noStrike">
+              <a:solidFill>
+                <a:srgbClr val="ffffff"/>
+              </a:solidFill>
+              <a:latin typeface="Arial"/>
+            </a:endParaRPr>
+          </a:p>
+          <a:p>
+            <a:pPr>
+              <a:lnSpc>
+                <a:spcPct val="100000"/>
+              </a:lnSpc>
+            </a:pPr>
+            <a:r>
+              <a:rPr b="0" lang="en-US" sz="1100" spc="-1" strike="noStrike">
+                <a:solidFill>
+                  <a:schemeClr val="lt1"/>
+                </a:solidFill>
+                <a:latin typeface="Calibri"/>
+                <a:ea typeface="DejaVu Sans"/>
+              </a:rPr>
+              <a:t>├──</a:t>
+            </a:r>
+            <a:r>
+              <a:rPr b="0" lang="en-US" sz="1100" spc="-1" strike="noStrike">
+                <a:solidFill>
+                  <a:schemeClr val="lt1"/>
+                </a:solidFill>
+                <a:latin typeface="Calibri"/>
+                <a:ea typeface="DejaVu Sans"/>
+              </a:rPr>
+              <a:t>&gt; Geri Sayım/Mesafe mi hesaplanacak?</a:t>
+            </a:r>
+            <a:endParaRPr b="0" lang="en-US" sz="1100" spc="-1" strike="noStrike">
+              <a:solidFill>
+                <a:srgbClr val="ffffff"/>
+              </a:solidFill>
+              <a:latin typeface="Arial"/>
+            </a:endParaRPr>
+          </a:p>
+          <a:p>
+            <a:pPr>
+              <a:lnSpc>
+                <a:spcPct val="100000"/>
+              </a:lnSpc>
+            </a:pPr>
+            <a:r>
+              <a:rPr b="0" lang="en-US" sz="1100" spc="-1" strike="noStrike">
+                <a:solidFill>
+                  <a:schemeClr val="lt1"/>
+                </a:solidFill>
+                <a:latin typeface="Calibri"/>
+                <a:ea typeface="DejaVu Sans"/>
+              </a:rPr>
+              <a:t>│ ├── </a:t>
+            </a:r>
+            <a:r>
+              <a:rPr b="0" lang="en-US" sz="1100" spc="-1" strike="noStrike">
+                <a:solidFill>
+                  <a:schemeClr val="lt1"/>
+                </a:solidFill>
+                <a:latin typeface="Calibri"/>
+                <a:ea typeface="DejaVu Sans"/>
+              </a:rPr>
+              <a:t>Takvim bazlı mı? ─&gt; Period Kullan</a:t>
+            </a:r>
+            <a:endParaRPr b="0" lang="en-US" sz="1100" spc="-1" strike="noStrike">
+              <a:solidFill>
+                <a:srgbClr val="ffffff"/>
+              </a:solidFill>
+              <a:latin typeface="Arial"/>
+            </a:endParaRPr>
+          </a:p>
+          <a:p>
+            <a:pPr>
+              <a:lnSpc>
+                <a:spcPct val="100000"/>
+              </a:lnSpc>
+            </a:pPr>
+            <a:r>
+              <a:rPr b="0" lang="en-US" sz="1100" spc="-1" strike="noStrike">
+                <a:solidFill>
+                  <a:schemeClr val="lt1"/>
+                </a:solidFill>
+                <a:latin typeface="Calibri"/>
+                <a:ea typeface="DejaVu Sans"/>
+              </a:rPr>
+              <a:t>│ └── </a:t>
+            </a:r>
+            <a:r>
+              <a:rPr b="0" lang="en-US" sz="1100" spc="-1" strike="noStrike">
+                <a:solidFill>
+                  <a:schemeClr val="lt1"/>
+                </a:solidFill>
+                <a:latin typeface="Calibri"/>
+                <a:ea typeface="DejaVu Sans"/>
+              </a:rPr>
+              <a:t>Saat bazlı mı? ─&gt; Duration Kullan</a:t>
+            </a:r>
+            <a:endParaRPr b="0" lang="en-US" sz="1100" spc="-1" strike="noStrike">
+              <a:solidFill>
+                <a:srgbClr val="ffffff"/>
+              </a:solidFill>
+              <a:latin typeface="Arial"/>
+            </a:endParaRPr>
+          </a:p>
+          <a:p>
+            <a:pPr>
+              <a:lnSpc>
+                <a:spcPct val="100000"/>
+              </a:lnSpc>
+            </a:pPr>
+            <a:r>
+              <a:rPr b="0" lang="en-US" sz="1100" spc="-1" strike="noStrike">
+                <a:solidFill>
+                  <a:schemeClr val="lt1"/>
+                </a:solidFill>
+                <a:latin typeface="Calibri"/>
+                <a:ea typeface="DejaVu Sans"/>
+              </a:rPr>
+              <a:t>│</a:t>
+            </a:r>
+            <a:endParaRPr b="0" lang="en-US" sz="1100" spc="-1" strike="noStrike">
+              <a:solidFill>
+                <a:srgbClr val="ffffff"/>
+              </a:solidFill>
+              <a:latin typeface="Arial"/>
+            </a:endParaRPr>
+          </a:p>
+          <a:p>
+            <a:pPr>
+              <a:lnSpc>
+                <a:spcPct val="100000"/>
+              </a:lnSpc>
+            </a:pPr>
+            <a:r>
+              <a:rPr b="0" lang="en-US" sz="1100" spc="-1" strike="noStrike">
+                <a:solidFill>
+                  <a:schemeClr val="lt1"/>
+                </a:solidFill>
+                <a:latin typeface="Calibri"/>
+                <a:ea typeface="DejaVu Sans"/>
+              </a:rPr>
+              <a:t>└──</a:t>
+            </a:r>
+            <a:r>
+              <a:rPr b="0" lang="en-US" sz="1100" spc="-1" strike="noStrike">
+                <a:solidFill>
+                  <a:schemeClr val="lt1"/>
+                </a:solidFill>
+                <a:latin typeface="Calibri"/>
+                <a:ea typeface="DejaVu Sans"/>
+              </a:rPr>
+              <a:t>&gt; Arayüze veya Veritabanına mı gönderilecek?</a:t>
+            </a:r>
+            <a:endParaRPr b="0" lang="en-US" sz="1100" spc="-1" strike="noStrike">
+              <a:solidFill>
+                <a:srgbClr val="ffffff"/>
+              </a:solidFill>
+              <a:latin typeface="Arial"/>
+            </a:endParaRPr>
+          </a:p>
+          <a:p>
+            <a:pPr>
+              <a:lnSpc>
+                <a:spcPct val="100000"/>
+              </a:lnSpc>
+            </a:pPr>
+            <a:r>
+              <a:rPr b="0" lang="en-US" sz="1100" spc="-1" strike="noStrike">
+                <a:solidFill>
+                  <a:schemeClr val="lt1"/>
+                </a:solidFill>
+                <a:latin typeface="Calibri"/>
+                <a:ea typeface="DejaVu Sans"/>
+              </a:rPr>
+              <a:t>└── </a:t>
+            </a:r>
+            <a:r>
+              <a:rPr b="0" lang="en-US" sz="1100" spc="-1" strike="noStrike">
+                <a:solidFill>
+                  <a:schemeClr val="lt1"/>
+                </a:solidFill>
+                <a:latin typeface="Calibri"/>
+                <a:ea typeface="DejaVu Sans"/>
+              </a:rPr>
+              <a:t>DateTimeFormatter ile dönüştür (Formatla / Ayrıştır)</a:t>
+            </a:r>
+            <a:endParaRPr b="0" lang="en-US" sz="1100" spc="-1" strike="noStrike">
+              <a:solidFill>
+                <a:srgbClr val="ffffff"/>
+              </a:solidFill>
+              <a:latin typeface="Arial"/>
+            </a:endParaRPr>
+          </a:p>
+        </p:txBody>
+      </p:sp>
+      <p:sp>
+        <p:nvSpPr>
+          <p:cNvPr id="220" name="Rounded Rectangle 55"/>
+          <p:cNvSpPr/>
+          <p:nvPr/>
+        </p:nvSpPr>
+        <p:spPr>
+          <a:xfrm>
+            <a:off x="8028360" y="3182040"/>
+            <a:ext cx="3288960" cy="2740320"/>
+          </a:xfrm>
+          <a:prstGeom prst="roundRect">
+            <a:avLst>
+              <a:gd name="adj" fmla="val 16667"/>
+            </a:avLst>
+          </a:prstGeom>
+          <a:solidFill>
+            <a:srgbClr val="08080a"/>
+          </a:solidFill>
+          <a:ln>
+            <a:noFill/>
+          </a:ln>
+          <a:effectLst>
+            <a:outerShdw blurRad="39960" dir="5400000" dist="23040" rotWithShape="0">
+              <a:srgbClr val="000000">
+                <a:alpha val="35000"/>
+              </a:srgbClr>
+            </a:outerShdw>
+          </a:effectLst>
+        </p:spPr>
+        <p:style>
+          <a:lnRef idx="1">
+            <a:schemeClr val="accent1"/>
+          </a:lnRef>
+          <a:fillRef idx="3">
+            <a:schemeClr val="accent1"/>
+          </a:fillRef>
+          <a:effectRef idx="2">
+            <a:schemeClr val="accent1"/>
+          </a:effectRef>
+          <a:fontRef idx="minor"/>
+        </p:style>
+        <p:txBody>
+          <a:bodyPr lIns="90000" rIns="90000" tIns="45000" bIns="45000" anchor="ctr">
+            <a:noAutofit/>
+          </a:bodyPr>
+          <a:p>
+            <a:endParaRPr b="0" lang="en-US" sz="1800" spc="-1" strike="noStrike">
+              <a:solidFill>
+                <a:schemeClr val="lt1"/>
+              </a:solidFill>
+              <a:latin typeface="Calibri"/>
+              <a:ea typeface="DejaVu Sans"/>
+            </a:endParaRPr>
+          </a:p>
+        </p:txBody>
+      </p:sp>
+      <p:sp>
+        <p:nvSpPr>
+          <p:cNvPr id="221" name="Rounded Rectangle 56"/>
+          <p:cNvSpPr/>
+          <p:nvPr/>
+        </p:nvSpPr>
+        <p:spPr>
+          <a:xfrm>
+            <a:off x="8229600" y="2514600"/>
+            <a:ext cx="3657600" cy="4114800"/>
+          </a:xfrm>
+          <a:prstGeom prst="roundRect">
+            <a:avLst>
+              <a:gd name="adj" fmla="val 16667"/>
+            </a:avLst>
+          </a:prstGeom>
+          <a:solidFill>
+            <a:srgbClr val="16161c"/>
+          </a:solidFill>
+          <a:ln>
+            <a:solidFill>
+              <a:srgbClr val="464655"/>
+            </a:solidFill>
+            <a:round/>
+          </a:ln>
+          <a:effectLst>
+            <a:outerShdw blurRad="39960" dir="5400000" dist="23040" rotWithShape="0">
+              <a:srgbClr val="000000">
+                <a:alpha val="35000"/>
+              </a:srgbClr>
+            </a:outerShdw>
+          </a:effectLst>
+        </p:spPr>
+        <p:style>
+          <a:lnRef idx="1">
+            <a:schemeClr val="accent1"/>
+          </a:lnRef>
+          <a:fillRef idx="3">
+            <a:schemeClr val="accent1"/>
+          </a:fillRef>
+          <a:effectRef idx="2">
+            <a:schemeClr val="accent1"/>
+          </a:effectRef>
+          <a:fontRef idx="minor"/>
+        </p:style>
+        <p:txBody>
+          <a:bodyPr lIns="90000" rIns="90000" tIns="45000" bIns="45000" anchor="ctr">
+            <a:noAutofit/>
+          </a:bodyPr>
+          <a:p>
+            <a:pPr algn="ctr">
+              <a:lnSpc>
+                <a:spcPct val="100000"/>
+              </a:lnSpc>
+            </a:pPr>
+            <a:r>
+              <a:rPr b="0" lang="en-US" sz="800" spc="-1" strike="noStrike">
+                <a:solidFill>
+                  <a:srgbClr val="78ffc8"/>
+                </a:solidFill>
+                <a:latin typeface="Consolas"/>
+                <a:ea typeface="DejaVu Sans"/>
+              </a:rPr>
+              <a:t>public class ZamanEkoSistemi {</a:t>
+            </a:r>
+            <a:endParaRPr b="0" lang="en-US" sz="800" spc="-1" strike="noStrike">
+              <a:solidFill>
+                <a:srgbClr val="ffffff"/>
+              </a:solidFill>
+              <a:latin typeface="Arial"/>
+            </a:endParaRPr>
+          </a:p>
+          <a:p>
+            <a:pPr algn="ctr">
+              <a:lnSpc>
+                <a:spcPct val="100000"/>
+              </a:lnSpc>
+            </a:pPr>
+            <a:r>
+              <a:rPr b="0" lang="en-US" sz="800" spc="-1" strike="noStrike">
+                <a:solidFill>
+                  <a:srgbClr val="78ffc8"/>
+                </a:solidFill>
+                <a:latin typeface="Consolas"/>
+                <a:ea typeface="DejaVu Sans"/>
+              </a:rPr>
+              <a:t>    </a:t>
+            </a:r>
+            <a:r>
+              <a:rPr b="0" lang="en-US" sz="800" spc="-1" strike="noStrike">
+                <a:solidFill>
+                  <a:srgbClr val="78ffc8"/>
+                </a:solidFill>
+                <a:latin typeface="Consolas"/>
+                <a:ea typeface="DejaVu Sans"/>
+              </a:rPr>
+              <a:t>public static void main(String[] args) {</a:t>
+            </a:r>
+            <a:endParaRPr b="0" lang="en-US" sz="800" spc="-1" strike="noStrike">
+              <a:solidFill>
+                <a:srgbClr val="ffffff"/>
+              </a:solidFill>
+              <a:latin typeface="Arial"/>
+            </a:endParaRPr>
+          </a:p>
+          <a:p>
+            <a:pPr algn="ctr">
+              <a:lnSpc>
+                <a:spcPct val="100000"/>
+              </a:lnSpc>
+            </a:pPr>
+            <a:r>
+              <a:rPr b="0" lang="en-US" sz="800" spc="-1" strike="noStrike">
+                <a:solidFill>
+                  <a:srgbClr val="78ffc8"/>
+                </a:solidFill>
+                <a:latin typeface="Consolas"/>
+                <a:ea typeface="DejaVu Sans"/>
+              </a:rPr>
+              <a:t>        </a:t>
+            </a:r>
+            <a:endParaRPr b="0" lang="en-US" sz="800" spc="-1" strike="noStrike">
+              <a:solidFill>
+                <a:srgbClr val="ffffff"/>
+              </a:solidFill>
+              <a:latin typeface="Arial"/>
+            </a:endParaRPr>
+          </a:p>
+          <a:p>
+            <a:pPr algn="ctr">
+              <a:lnSpc>
+                <a:spcPct val="100000"/>
+              </a:lnSpc>
+            </a:pPr>
+            <a:r>
+              <a:rPr b="0" lang="en-US" sz="800" spc="-1" strike="noStrike">
+                <a:solidFill>
+                  <a:srgbClr val="78ffc8"/>
+                </a:solidFill>
+                <a:latin typeface="Consolas"/>
+                <a:ea typeface="DejaVu Sans"/>
+              </a:rPr>
+              <a:t>        </a:t>
+            </a:r>
+            <a:r>
+              <a:rPr b="0" lang="en-US" sz="800" spc="-1" strike="noStrike">
+                <a:solidFill>
+                  <a:srgbClr val="78ffc8"/>
+                </a:solidFill>
+                <a:latin typeface="Consolas"/>
+                <a:ea typeface="DejaVu Sans"/>
+              </a:rPr>
+              <a:t>// 1. İnsan Zaman Çizelgesi (Yerel)</a:t>
+            </a:r>
+            <a:endParaRPr b="0" lang="en-US" sz="800" spc="-1" strike="noStrike">
+              <a:solidFill>
+                <a:srgbClr val="ffffff"/>
+              </a:solidFill>
+              <a:latin typeface="Arial"/>
+            </a:endParaRPr>
+          </a:p>
+          <a:p>
+            <a:pPr algn="ctr">
+              <a:lnSpc>
+                <a:spcPct val="100000"/>
+              </a:lnSpc>
+            </a:pPr>
+            <a:r>
+              <a:rPr b="0" lang="en-US" sz="800" spc="-1" strike="noStrike">
+                <a:solidFill>
+                  <a:srgbClr val="78ffc8"/>
+                </a:solidFill>
+                <a:latin typeface="Consolas"/>
+                <a:ea typeface="DejaVu Sans"/>
+              </a:rPr>
+              <a:t>        </a:t>
+            </a:r>
+            <a:r>
+              <a:rPr b="0" lang="en-US" sz="800" spc="-1" strike="noStrike">
+                <a:solidFill>
+                  <a:srgbClr val="78ffc8"/>
+                </a:solidFill>
+                <a:latin typeface="Consolas"/>
+                <a:ea typeface="DejaVu Sans"/>
+              </a:rPr>
+              <a:t>LocalDateTime yerelToplanti = LocalDateTime</a:t>
+            </a:r>
+            <a:endParaRPr b="0" lang="en-US" sz="800" spc="-1" strike="noStrike">
+              <a:solidFill>
+                <a:srgbClr val="ffffff"/>
+              </a:solidFill>
+              <a:latin typeface="Arial"/>
+            </a:endParaRPr>
+          </a:p>
+          <a:p>
+            <a:pPr algn="ctr">
+              <a:lnSpc>
+                <a:spcPct val="100000"/>
+              </a:lnSpc>
+            </a:pPr>
+            <a:r>
+              <a:rPr b="0" lang="en-US" sz="800" spc="-1" strike="noStrike">
+                <a:solidFill>
+                  <a:srgbClr val="78ffc8"/>
+                </a:solidFill>
+                <a:latin typeface="Consolas"/>
+                <a:ea typeface="DejaVu Sans"/>
+              </a:rPr>
+              <a:t>                </a:t>
+            </a:r>
+            <a:r>
+              <a:rPr b="0" lang="en-US" sz="800" spc="-1" strike="noStrike">
+                <a:solidFill>
+                  <a:srgbClr val="78ffc8"/>
+                </a:solidFill>
+                <a:latin typeface="Consolas"/>
+                <a:ea typeface="DejaVu Sans"/>
+              </a:rPr>
+              <a:t>.of(2025, 10, 15, 9, 0);</a:t>
+            </a:r>
+            <a:endParaRPr b="0" lang="en-US" sz="800" spc="-1" strike="noStrike">
+              <a:solidFill>
+                <a:srgbClr val="ffffff"/>
+              </a:solidFill>
+              <a:latin typeface="Arial"/>
+            </a:endParaRPr>
+          </a:p>
+          <a:p>
+            <a:pPr algn="ctr">
+              <a:lnSpc>
+                <a:spcPct val="100000"/>
+              </a:lnSpc>
+            </a:pPr>
+            <a:endParaRPr b="0" lang="en-US" sz="800" spc="-1" strike="noStrike">
+              <a:solidFill>
+                <a:srgbClr val="ffffff"/>
+              </a:solidFill>
+              <a:latin typeface="Arial"/>
+            </a:endParaRPr>
+          </a:p>
+          <a:p>
+            <a:pPr algn="ctr">
+              <a:lnSpc>
+                <a:spcPct val="100000"/>
+              </a:lnSpc>
+            </a:pPr>
+            <a:r>
+              <a:rPr b="0" lang="en-US" sz="800" spc="-1" strike="noStrike">
+                <a:solidFill>
+                  <a:srgbClr val="78ffc8"/>
+                </a:solidFill>
+                <a:latin typeface="Consolas"/>
+                <a:ea typeface="DejaVu Sans"/>
+              </a:rPr>
+              <a:t>        </a:t>
+            </a:r>
+            <a:r>
+              <a:rPr b="0" lang="en-US" sz="800" spc="-1" strike="noStrike">
+                <a:solidFill>
+                  <a:srgbClr val="78ffc8"/>
+                </a:solidFill>
+                <a:latin typeface="Consolas"/>
+                <a:ea typeface="DejaVu Sans"/>
+              </a:rPr>
+              <a:t>// 2. Dünya Izgarası (Bölgesel/Zoned)</a:t>
+            </a:r>
+            <a:endParaRPr b="0" lang="en-US" sz="800" spc="-1" strike="noStrike">
+              <a:solidFill>
+                <a:srgbClr val="ffffff"/>
+              </a:solidFill>
+              <a:latin typeface="Arial"/>
+            </a:endParaRPr>
+          </a:p>
+          <a:p>
+            <a:pPr algn="ctr">
+              <a:lnSpc>
+                <a:spcPct val="100000"/>
+              </a:lnSpc>
+            </a:pPr>
+            <a:r>
+              <a:rPr b="0" lang="en-US" sz="800" spc="-1" strike="noStrike">
+                <a:solidFill>
+                  <a:srgbClr val="78ffc8"/>
+                </a:solidFill>
+                <a:latin typeface="Consolas"/>
+                <a:ea typeface="DejaVu Sans"/>
+              </a:rPr>
+              <a:t>        </a:t>
+            </a:r>
+            <a:r>
+              <a:rPr b="0" lang="en-US" sz="800" spc="-1" strike="noStrike">
+                <a:solidFill>
+                  <a:srgbClr val="78ffc8"/>
+                </a:solidFill>
+                <a:latin typeface="Consolas"/>
+                <a:ea typeface="DejaVu Sans"/>
+              </a:rPr>
+              <a:t>ZoneId nyBolgesi = ZoneId.of("America/New_York");</a:t>
+            </a:r>
+            <a:endParaRPr b="0" lang="en-US" sz="800" spc="-1" strike="noStrike">
+              <a:solidFill>
+                <a:srgbClr val="ffffff"/>
+              </a:solidFill>
+              <a:latin typeface="Arial"/>
+            </a:endParaRPr>
+          </a:p>
+          <a:p>
+            <a:pPr algn="ctr">
+              <a:lnSpc>
+                <a:spcPct val="100000"/>
+              </a:lnSpc>
+            </a:pPr>
+            <a:r>
+              <a:rPr b="0" lang="en-US" sz="800" spc="-1" strike="noStrike">
+                <a:solidFill>
+                  <a:srgbClr val="78ffc8"/>
+                </a:solidFill>
+                <a:latin typeface="Consolas"/>
+                <a:ea typeface="DejaVu Sans"/>
+              </a:rPr>
+              <a:t>        </a:t>
+            </a:r>
+            <a:r>
+              <a:rPr b="0" lang="en-US" sz="800" spc="-1" strike="noStrike">
+                <a:solidFill>
+                  <a:srgbClr val="78ffc8"/>
+                </a:solidFill>
+                <a:latin typeface="Consolas"/>
+                <a:ea typeface="DejaVu Sans"/>
+              </a:rPr>
+              <a:t>ZonedDateTime nyToplantisi = ZonedDateTime</a:t>
+            </a:r>
+            <a:endParaRPr b="0" lang="en-US" sz="800" spc="-1" strike="noStrike">
+              <a:solidFill>
+                <a:srgbClr val="ffffff"/>
+              </a:solidFill>
+              <a:latin typeface="Arial"/>
+            </a:endParaRPr>
+          </a:p>
+          <a:p>
+            <a:pPr algn="ctr">
+              <a:lnSpc>
+                <a:spcPct val="100000"/>
+              </a:lnSpc>
+            </a:pPr>
+            <a:r>
+              <a:rPr b="0" lang="en-US" sz="800" spc="-1" strike="noStrike">
+                <a:solidFill>
+                  <a:srgbClr val="78ffc8"/>
+                </a:solidFill>
+                <a:latin typeface="Consolas"/>
+                <a:ea typeface="DejaVu Sans"/>
+              </a:rPr>
+              <a:t>                </a:t>
+            </a:r>
+            <a:r>
+              <a:rPr b="0" lang="en-US" sz="800" spc="-1" strike="noStrike">
+                <a:solidFill>
+                  <a:srgbClr val="78ffc8"/>
+                </a:solidFill>
+                <a:latin typeface="Consolas"/>
+                <a:ea typeface="DejaVu Sans"/>
+              </a:rPr>
+              <a:t>.of(yerelToplanti, nyBolgesi);</a:t>
+            </a:r>
+            <a:endParaRPr b="0" lang="en-US" sz="800" spc="-1" strike="noStrike">
+              <a:solidFill>
+                <a:srgbClr val="ffffff"/>
+              </a:solidFill>
+              <a:latin typeface="Arial"/>
+            </a:endParaRPr>
+          </a:p>
+          <a:p>
+            <a:pPr algn="ctr">
+              <a:lnSpc>
+                <a:spcPct val="100000"/>
+              </a:lnSpc>
+            </a:pPr>
+            <a:endParaRPr b="0" lang="en-US" sz="800" spc="-1" strike="noStrike">
+              <a:solidFill>
+                <a:srgbClr val="ffffff"/>
+              </a:solidFill>
+              <a:latin typeface="Arial"/>
+            </a:endParaRPr>
+          </a:p>
+          <a:p>
+            <a:pPr algn="ctr">
+              <a:lnSpc>
+                <a:spcPct val="100000"/>
+              </a:lnSpc>
+            </a:pPr>
+            <a:r>
+              <a:rPr b="0" lang="en-US" sz="800" spc="-1" strike="noStrike">
+                <a:solidFill>
+                  <a:srgbClr val="78ffc8"/>
+                </a:solidFill>
+                <a:latin typeface="Consolas"/>
+                <a:ea typeface="DejaVu Sans"/>
+              </a:rPr>
+              <a:t>        </a:t>
+            </a:r>
+            <a:r>
+              <a:rPr b="0" lang="en-US" sz="800" spc="-1" strike="noStrike">
+                <a:solidFill>
+                  <a:srgbClr val="78ffc8"/>
+                </a:solidFill>
+                <a:latin typeface="Consolas"/>
+                <a:ea typeface="DejaVu Sans"/>
+              </a:rPr>
+              <a:t>// 3. Çeviri Katmanı (Formatlama)</a:t>
+            </a:r>
+            <a:endParaRPr b="0" lang="en-US" sz="800" spc="-1" strike="noStrike">
+              <a:solidFill>
+                <a:srgbClr val="ffffff"/>
+              </a:solidFill>
+              <a:latin typeface="Arial"/>
+            </a:endParaRPr>
+          </a:p>
+          <a:p>
+            <a:pPr algn="ctr">
+              <a:lnSpc>
+                <a:spcPct val="100000"/>
+              </a:lnSpc>
+            </a:pPr>
+            <a:r>
+              <a:rPr b="0" lang="en-US" sz="800" spc="-1" strike="noStrike">
+                <a:solidFill>
+                  <a:srgbClr val="78ffc8"/>
+                </a:solidFill>
+                <a:latin typeface="Consolas"/>
+                <a:ea typeface="DejaVu Sans"/>
+              </a:rPr>
+              <a:t>        </a:t>
+            </a:r>
+            <a:r>
+              <a:rPr b="0" lang="en-US" sz="800" spc="-1" strike="noStrike">
+                <a:solidFill>
+                  <a:srgbClr val="78ffc8"/>
+                </a:solidFill>
+                <a:latin typeface="Consolas"/>
+                <a:ea typeface="DejaVu Sans"/>
+              </a:rPr>
+              <a:t>DateTimeFormatter format = DateTimeFormatter</a:t>
+            </a:r>
+            <a:endParaRPr b="0" lang="en-US" sz="800" spc="-1" strike="noStrike">
+              <a:solidFill>
+                <a:srgbClr val="ffffff"/>
+              </a:solidFill>
+              <a:latin typeface="Arial"/>
+            </a:endParaRPr>
+          </a:p>
+          <a:p>
+            <a:pPr algn="ctr">
+              <a:lnSpc>
+                <a:spcPct val="100000"/>
+              </a:lnSpc>
+            </a:pPr>
+            <a:r>
+              <a:rPr b="0" lang="en-US" sz="800" spc="-1" strike="noStrike">
+                <a:solidFill>
+                  <a:srgbClr val="78ffc8"/>
+                </a:solidFill>
+                <a:latin typeface="Consolas"/>
+                <a:ea typeface="DejaVu Sans"/>
+              </a:rPr>
+              <a:t>                </a:t>
+            </a:r>
+            <a:r>
+              <a:rPr b="0" lang="en-US" sz="800" spc="-1" strike="noStrike">
+                <a:solidFill>
+                  <a:srgbClr val="78ffc8"/>
+                </a:solidFill>
+                <a:latin typeface="Consolas"/>
+                <a:ea typeface="DejaVu Sans"/>
+              </a:rPr>
+              <a:t>.ofPattern("dd MMM yyyy - HH:mm z");</a:t>
+            </a:r>
+            <a:endParaRPr b="0" lang="en-US" sz="800" spc="-1" strike="noStrike">
+              <a:solidFill>
+                <a:srgbClr val="ffffff"/>
+              </a:solidFill>
+              <a:latin typeface="Arial"/>
+            </a:endParaRPr>
+          </a:p>
+          <a:p>
+            <a:pPr algn="ctr">
+              <a:lnSpc>
+                <a:spcPct val="100000"/>
+              </a:lnSpc>
+            </a:pPr>
+            <a:r>
+              <a:rPr b="0" lang="en-US" sz="800" spc="-1" strike="noStrike">
+                <a:solidFill>
+                  <a:srgbClr val="78ffc8"/>
+                </a:solidFill>
+                <a:latin typeface="Consolas"/>
+                <a:ea typeface="DejaVu Sans"/>
+              </a:rPr>
+              <a:t>        </a:t>
+            </a:r>
+            <a:r>
+              <a:rPr b="0" lang="en-US" sz="800" spc="-1" strike="noStrike">
+                <a:solidFill>
+                  <a:srgbClr val="78ffc8"/>
+                </a:solidFill>
+                <a:latin typeface="Consolas"/>
+                <a:ea typeface="DejaVu Sans"/>
+              </a:rPr>
+              <a:t>System.out.println("Toplantı: " </a:t>
+            </a:r>
+            <a:endParaRPr b="0" lang="en-US" sz="800" spc="-1" strike="noStrike">
+              <a:solidFill>
+                <a:srgbClr val="ffffff"/>
+              </a:solidFill>
+              <a:latin typeface="Arial"/>
+            </a:endParaRPr>
+          </a:p>
+          <a:p>
+            <a:pPr algn="ctr">
+              <a:lnSpc>
+                <a:spcPct val="100000"/>
+              </a:lnSpc>
+            </a:pPr>
+            <a:r>
+              <a:rPr b="0" lang="en-US" sz="800" spc="-1" strike="noStrike">
+                <a:solidFill>
+                  <a:srgbClr val="78ffc8"/>
+                </a:solidFill>
+                <a:latin typeface="Consolas"/>
+                <a:ea typeface="DejaVu Sans"/>
+              </a:rPr>
+              <a:t>                </a:t>
+            </a:r>
+            <a:r>
+              <a:rPr b="0" lang="en-US" sz="800" spc="-1" strike="noStrike">
+                <a:solidFill>
+                  <a:srgbClr val="78ffc8"/>
+                </a:solidFill>
+                <a:latin typeface="Consolas"/>
+                <a:ea typeface="DejaVu Sans"/>
+              </a:rPr>
+              <a:t>+ nyToplantisi.format(format));</a:t>
+            </a:r>
+            <a:endParaRPr b="0" lang="en-US" sz="800" spc="-1" strike="noStrike">
+              <a:solidFill>
+                <a:srgbClr val="ffffff"/>
+              </a:solidFill>
+              <a:latin typeface="Arial"/>
+            </a:endParaRPr>
+          </a:p>
+          <a:p>
+            <a:pPr algn="ctr">
+              <a:lnSpc>
+                <a:spcPct val="100000"/>
+              </a:lnSpc>
+            </a:pPr>
+            <a:endParaRPr b="0" lang="en-US" sz="800" spc="-1" strike="noStrike">
+              <a:solidFill>
+                <a:srgbClr val="ffffff"/>
+              </a:solidFill>
+              <a:latin typeface="Arial"/>
+            </a:endParaRPr>
+          </a:p>
+          <a:p>
+            <a:pPr algn="ctr">
+              <a:lnSpc>
+                <a:spcPct val="100000"/>
+              </a:lnSpc>
+            </a:pPr>
+            <a:r>
+              <a:rPr b="0" lang="en-US" sz="800" spc="-1" strike="noStrike">
+                <a:solidFill>
+                  <a:srgbClr val="78ffc8"/>
+                </a:solidFill>
+                <a:latin typeface="Consolas"/>
+                <a:ea typeface="DejaVu Sans"/>
+              </a:rPr>
+              <a:t>        </a:t>
+            </a:r>
+            <a:r>
+              <a:rPr b="0" lang="en-US" sz="800" spc="-1" strike="noStrike">
+                <a:solidFill>
+                  <a:srgbClr val="78ffc8"/>
+                </a:solidFill>
+                <a:latin typeface="Consolas"/>
+                <a:ea typeface="DejaVu Sans"/>
+              </a:rPr>
+              <a:t>// 4. Ölçüm (Süre/Mesafe)</a:t>
+            </a:r>
+            <a:endParaRPr b="0" lang="en-US" sz="800" spc="-1" strike="noStrike">
+              <a:solidFill>
+                <a:srgbClr val="ffffff"/>
+              </a:solidFill>
+              <a:latin typeface="Arial"/>
+            </a:endParaRPr>
+          </a:p>
+          <a:p>
+            <a:pPr algn="ctr">
+              <a:lnSpc>
+                <a:spcPct val="100000"/>
+              </a:lnSpc>
+            </a:pPr>
+            <a:r>
+              <a:rPr b="0" lang="en-US" sz="800" spc="-1" strike="noStrike">
+                <a:solidFill>
+                  <a:srgbClr val="78ffc8"/>
+                </a:solidFill>
+                <a:latin typeface="Consolas"/>
+                <a:ea typeface="DejaVu Sans"/>
+              </a:rPr>
+              <a:t>        </a:t>
+            </a:r>
+            <a:r>
+              <a:rPr b="0" lang="en-US" sz="800" spc="-1" strike="noStrike">
+                <a:solidFill>
+                  <a:srgbClr val="78ffc8"/>
+                </a:solidFill>
+                <a:latin typeface="Consolas"/>
+                <a:ea typeface="DejaVu Sans"/>
+              </a:rPr>
+              <a:t>ZonedDateTime suAn = ZonedDateTime.now(nyBolgesi);</a:t>
+            </a:r>
+            <a:endParaRPr b="0" lang="en-US" sz="800" spc="-1" strike="noStrike">
+              <a:solidFill>
+                <a:srgbClr val="ffffff"/>
+              </a:solidFill>
+              <a:latin typeface="Arial"/>
+            </a:endParaRPr>
+          </a:p>
+          <a:p>
+            <a:pPr algn="ctr">
+              <a:lnSpc>
+                <a:spcPct val="100000"/>
+              </a:lnSpc>
+            </a:pPr>
+            <a:r>
+              <a:rPr b="0" lang="en-US" sz="800" spc="-1" strike="noStrike">
+                <a:solidFill>
+                  <a:srgbClr val="78ffc8"/>
+                </a:solidFill>
+                <a:latin typeface="Consolas"/>
+                <a:ea typeface="DejaVu Sans"/>
+              </a:rPr>
+              <a:t>        </a:t>
+            </a:r>
+            <a:endParaRPr b="0" lang="en-US" sz="800" spc="-1" strike="noStrike">
+              <a:solidFill>
+                <a:srgbClr val="ffffff"/>
+              </a:solidFill>
+              <a:latin typeface="Arial"/>
+            </a:endParaRPr>
+          </a:p>
+          <a:p>
+            <a:pPr algn="ctr">
+              <a:lnSpc>
+                <a:spcPct val="100000"/>
+              </a:lnSpc>
+            </a:pPr>
+            <a:r>
+              <a:rPr b="0" lang="en-US" sz="800" spc="-1" strike="noStrike">
+                <a:solidFill>
+                  <a:srgbClr val="78ffc8"/>
+                </a:solidFill>
+                <a:latin typeface="Consolas"/>
+                <a:ea typeface="DejaVu Sans"/>
+              </a:rPr>
+              <a:t>        </a:t>
+            </a:r>
+            <a:r>
+              <a:rPr b="0" lang="en-US" sz="800" spc="-1" strike="noStrike">
+                <a:solidFill>
+                  <a:srgbClr val="78ffc8"/>
+                </a:solidFill>
+                <a:latin typeface="Consolas"/>
+                <a:ea typeface="DejaVu Sans"/>
+              </a:rPr>
+              <a:t>if (nyToplantisi.isAfter(suAn)) {</a:t>
+            </a:r>
+            <a:endParaRPr b="0" lang="en-US" sz="800" spc="-1" strike="noStrike">
+              <a:solidFill>
+                <a:srgbClr val="ffffff"/>
+              </a:solidFill>
+              <a:latin typeface="Arial"/>
+            </a:endParaRPr>
+          </a:p>
+          <a:p>
+            <a:pPr algn="ctr">
+              <a:lnSpc>
+                <a:spcPct val="100000"/>
+              </a:lnSpc>
+            </a:pPr>
+            <a:r>
+              <a:rPr b="0" lang="en-US" sz="800" spc="-1" strike="noStrike">
+                <a:solidFill>
+                  <a:srgbClr val="78ffc8"/>
+                </a:solidFill>
+                <a:latin typeface="Consolas"/>
+                <a:ea typeface="DejaVu Sans"/>
+              </a:rPr>
+              <a:t>            </a:t>
+            </a:r>
+            <a:r>
+              <a:rPr b="0" lang="en-US" sz="800" spc="-1" strike="noStrike">
+                <a:solidFill>
+                  <a:srgbClr val="78ffc8"/>
+                </a:solidFill>
+                <a:latin typeface="Consolas"/>
+                <a:ea typeface="DejaVu Sans"/>
+              </a:rPr>
+              <a:t>Duration fark = Duration.between(suAn, nyToplantisi);</a:t>
+            </a:r>
+            <a:endParaRPr b="0" lang="en-US" sz="800" spc="-1" strike="noStrike">
+              <a:solidFill>
+                <a:srgbClr val="ffffff"/>
+              </a:solidFill>
+              <a:latin typeface="Arial"/>
+            </a:endParaRPr>
+          </a:p>
+          <a:p>
+            <a:pPr algn="ctr">
+              <a:lnSpc>
+                <a:spcPct val="100000"/>
+              </a:lnSpc>
+            </a:pPr>
+            <a:r>
+              <a:rPr b="0" lang="en-US" sz="800" spc="-1" strike="noStrike">
+                <a:solidFill>
+                  <a:srgbClr val="78ffc8"/>
+                </a:solidFill>
+                <a:latin typeface="Consolas"/>
+                <a:ea typeface="DejaVu Sans"/>
+              </a:rPr>
+              <a:t>            </a:t>
+            </a:r>
+            <a:r>
+              <a:rPr b="0" lang="en-US" sz="800" spc="-1" strike="noStrike">
+                <a:solidFill>
+                  <a:srgbClr val="78ffc8"/>
+                </a:solidFill>
+                <a:latin typeface="Consolas"/>
+                <a:ea typeface="DejaVu Sans"/>
+              </a:rPr>
+              <a:t>System.out.println(fark.toDays() + " gün kaldı!");</a:t>
+            </a:r>
+            <a:endParaRPr b="0" lang="en-US" sz="800" spc="-1" strike="noStrike">
+              <a:solidFill>
+                <a:srgbClr val="ffffff"/>
+              </a:solidFill>
+              <a:latin typeface="Arial"/>
+            </a:endParaRPr>
+          </a:p>
+          <a:p>
+            <a:pPr algn="ctr">
+              <a:lnSpc>
+                <a:spcPct val="100000"/>
+              </a:lnSpc>
+            </a:pPr>
+            <a:r>
+              <a:rPr b="0" lang="en-US" sz="800" spc="-1" strike="noStrike">
+                <a:solidFill>
+                  <a:srgbClr val="78ffc8"/>
+                </a:solidFill>
+                <a:latin typeface="Consolas"/>
+                <a:ea typeface="DejaVu Sans"/>
+              </a:rPr>
+              <a:t>        </a:t>
+            </a:r>
+            <a:r>
+              <a:rPr b="0" lang="en-US" sz="800" spc="-1" strike="noStrike">
+                <a:solidFill>
+                  <a:srgbClr val="78ffc8"/>
+                </a:solidFill>
+                <a:latin typeface="Consolas"/>
+                <a:ea typeface="DejaVu Sans"/>
+              </a:rPr>
+              <a:t>} else {</a:t>
+            </a:r>
+            <a:endParaRPr b="0" lang="en-US" sz="800" spc="-1" strike="noStrike">
+              <a:solidFill>
+                <a:srgbClr val="ffffff"/>
+              </a:solidFill>
+              <a:latin typeface="Arial"/>
+            </a:endParaRPr>
+          </a:p>
+          <a:p>
+            <a:pPr algn="ctr">
+              <a:lnSpc>
+                <a:spcPct val="100000"/>
+              </a:lnSpc>
+            </a:pPr>
+            <a:r>
+              <a:rPr b="0" lang="en-US" sz="800" spc="-1" strike="noStrike">
+                <a:solidFill>
+                  <a:srgbClr val="78ffc8"/>
+                </a:solidFill>
+                <a:latin typeface="Consolas"/>
+                <a:ea typeface="DejaVu Sans"/>
+              </a:rPr>
+              <a:t>            </a:t>
+            </a:r>
+            <a:r>
+              <a:rPr b="0" lang="en-US" sz="800" spc="-1" strike="noStrike">
+                <a:solidFill>
+                  <a:srgbClr val="78ffc8"/>
+                </a:solidFill>
+                <a:latin typeface="Consolas"/>
+                <a:ea typeface="DejaVu Sans"/>
+              </a:rPr>
+              <a:t>System.out.println("Toplantı tarihi geçmiş.");</a:t>
+            </a:r>
+            <a:endParaRPr b="0" lang="en-US" sz="800" spc="-1" strike="noStrike">
+              <a:solidFill>
+                <a:srgbClr val="ffffff"/>
+              </a:solidFill>
+              <a:latin typeface="Arial"/>
+            </a:endParaRPr>
+          </a:p>
+          <a:p>
+            <a:pPr algn="ctr">
+              <a:lnSpc>
+                <a:spcPct val="100000"/>
+              </a:lnSpc>
+            </a:pPr>
+            <a:r>
+              <a:rPr b="0" lang="en-US" sz="800" spc="-1" strike="noStrike">
+                <a:solidFill>
+                  <a:srgbClr val="78ffc8"/>
+                </a:solidFill>
+                <a:latin typeface="Consolas"/>
+                <a:ea typeface="DejaVu Sans"/>
+              </a:rPr>
+              <a:t>        </a:t>
+            </a:r>
+            <a:r>
+              <a:rPr b="0" lang="en-US" sz="800" spc="-1" strike="noStrike">
+                <a:solidFill>
+                  <a:srgbClr val="78ffc8"/>
+                </a:solidFill>
+                <a:latin typeface="Consolas"/>
+                <a:ea typeface="DejaVu Sans"/>
+              </a:rPr>
+              <a:t>}</a:t>
+            </a:r>
+            <a:endParaRPr b="0" lang="en-US" sz="800" spc="-1" strike="noStrike">
+              <a:solidFill>
+                <a:srgbClr val="ffffff"/>
+              </a:solidFill>
+              <a:latin typeface="Arial"/>
+            </a:endParaRPr>
+          </a:p>
+          <a:p>
+            <a:pPr algn="ctr">
+              <a:lnSpc>
+                <a:spcPct val="100000"/>
+              </a:lnSpc>
+            </a:pPr>
+            <a:r>
+              <a:rPr b="0" lang="en-US" sz="800" spc="-1" strike="noStrike">
+                <a:solidFill>
+                  <a:srgbClr val="78ffc8"/>
+                </a:solidFill>
+                <a:latin typeface="Consolas"/>
+                <a:ea typeface="DejaVu Sans"/>
+              </a:rPr>
+              <a:t>    </a:t>
+            </a:r>
+            <a:r>
+              <a:rPr b="0" lang="en-US" sz="800" spc="-1" strike="noStrike">
+                <a:solidFill>
+                  <a:srgbClr val="78ffc8"/>
+                </a:solidFill>
+                <a:latin typeface="Consolas"/>
+                <a:ea typeface="DejaVu Sans"/>
+              </a:rPr>
+              <a:t>}</a:t>
+            </a:r>
+            <a:endParaRPr b="0" lang="en-US" sz="800" spc="-1" strike="noStrike">
+              <a:solidFill>
+                <a:srgbClr val="ffffff"/>
+              </a:solidFill>
+              <a:latin typeface="Arial"/>
+            </a:endParaRPr>
+          </a:p>
+          <a:p>
+            <a:pPr algn="ctr">
+              <a:lnSpc>
+                <a:spcPct val="100000"/>
+              </a:lnSpc>
+            </a:pPr>
+            <a:r>
+              <a:rPr b="0" lang="en-US" sz="800" spc="-1" strike="noStrike">
+                <a:solidFill>
+                  <a:srgbClr val="78ffc8"/>
+                </a:solidFill>
+                <a:latin typeface="Consolas"/>
+                <a:ea typeface="DejaVu Sans"/>
+              </a:rPr>
+              <a:t>}</a:t>
+            </a:r>
+            <a:endParaRPr b="0" lang="en-US" sz="800" spc="-1" strike="noStrike">
+              <a:solidFill>
+                <a:srgbClr val="ffffff"/>
+              </a:solidFill>
+              <a:latin typeface="Arial"/>
+            </a:endParaRPr>
+          </a:p>
+        </p:txBody>
+      </p:sp>
+      <p:sp>
+        <p:nvSpPr>
+          <p:cNvPr id="222" name="TextBox 23"/>
           <p:cNvSpPr/>
           <p:nvPr/>
         </p:nvSpPr>

--- a/Java/Java #4/TR/Java #4.pptx
+++ b/Java/Java #4/TR/Java #4.pptx
@@ -12,6 +12,7 @@
     <p:sldId id="260" r:id="rId7"/>
     <p:sldId id="261" r:id="rId8"/>
     <p:sldId id="262" r:id="rId9"/>
+    <p:sldId id="263" r:id="rId10"/>
   </p:sldIdLst>
   <p:sldSz cx="9144000" cy="6858000"/>
   <p:notesSz cx="7772400" cy="10058400"/>
@@ -69,7 +70,7 @@
         <p:txBody>
           <a:bodyPr/>
           <a:p>
-            <a:fld id="{9B3F3B74-97F7-4199-9632-8CA0BEAD45EF}" type="slidenum">
+            <a:fld id="{6FE48CFC-E871-4DBE-9CF9-DE661603F2D1}" type="slidenum">
               <a:t>&lt;#&gt;</a:t>
             </a:fld>
           </a:p>
@@ -278,7 +279,7 @@
         <p:txBody>
           <a:bodyPr/>
           <a:p>
-            <a:fld id="{7A77F00C-EF4E-4D8E-8597-34F9525EBFF8}" type="slidenum">
+            <a:fld id="{FFB61840-15E4-47FA-B54A-5565C941364B}" type="slidenum">
               <a:t>&lt;#&gt;</a:t>
             </a:fld>
           </a:p>
@@ -573,7 +574,7 @@
         <p:txBody>
           <a:bodyPr/>
           <a:p>
-            <a:fld id="{4DB28D56-F192-4F0B-9225-CC970A390777}" type="slidenum">
+            <a:fld id="{1665ECAF-ED30-4CD2-B139-46EA7FB56C86}" type="slidenum">
               <a:t>&lt;#&gt;</a:t>
             </a:fld>
           </a:p>
@@ -954,7 +955,7 @@
         <p:txBody>
           <a:bodyPr/>
           <a:p>
-            <a:fld id="{71BA9899-E4BC-491A-9C5B-7E5C602FC229}" type="slidenum">
+            <a:fld id="{558E8BB5-452A-4EDE-8F18-D1FB68E7465A}" type="slidenum">
               <a:t>&lt;#&gt;</a:t>
             </a:fld>
           </a:p>
@@ -1117,7 +1118,7 @@
         <p:txBody>
           <a:bodyPr/>
           <a:p>
-            <a:fld id="{CD3ADB13-1409-4DE9-B9E1-6CB9AD87E9AB}" type="slidenum">
+            <a:fld id="{43A0BE56-8DEF-468A-AF47-24A62642E48F}" type="slidenum">
               <a:t>&lt;#&gt;</a:t>
             </a:fld>
           </a:p>
@@ -1283,7 +1284,7 @@
         <p:txBody>
           <a:bodyPr/>
           <a:p>
-            <a:fld id="{DB7466FD-C044-428D-B9D5-879506E94008}" type="slidenum">
+            <a:fld id="{8D314621-F359-48B2-AE0D-A2DF72BE0379}" type="slidenum">
               <a:t>&lt;#&gt;</a:t>
             </a:fld>
           </a:p>
@@ -1492,7 +1493,7 @@
         <p:txBody>
           <a:bodyPr/>
           <a:p>
-            <a:fld id="{1FBBE019-0BF9-42C9-BB32-0E89BFD179E0}" type="slidenum">
+            <a:fld id="{4E157678-6657-4E7D-8DB7-D056FB4A3F50}" type="slidenum">
               <a:t>&lt;#&gt;</a:t>
             </a:fld>
           </a:p>
@@ -1615,7 +1616,7 @@
         <p:txBody>
           <a:bodyPr/>
           <a:p>
-            <a:fld id="{28E291BA-7B2A-45B1-BE96-0D65E478DBD2}" type="slidenum">
+            <a:fld id="{6DB97325-3FE9-499B-AF25-ED4340EFC5F2}" type="slidenum">
               <a:t>&lt;#&gt;</a:t>
             </a:fld>
           </a:p>
@@ -1736,7 +1737,7 @@
         <p:txBody>
           <a:bodyPr/>
           <a:p>
-            <a:fld id="{57BAB726-E871-4FE1-814D-E07E6A81EB56}" type="slidenum">
+            <a:fld id="{8E8ED87F-D216-4791-9B66-F81078395851}" type="slidenum">
               <a:t>&lt;#&gt;</a:t>
             </a:fld>
           </a:p>
@@ -1988,7 +1989,7 @@
         <p:txBody>
           <a:bodyPr/>
           <a:p>
-            <a:fld id="{DD0B4D58-4CDC-46B2-901D-7E8BF2A44739}" type="slidenum">
+            <a:fld id="{6DA85190-1074-467E-A095-57FE2518C840}" type="slidenum">
               <a:t>&lt;#&gt;</a:t>
             </a:fld>
           </a:p>
@@ -2240,7 +2241,7 @@
         <p:txBody>
           <a:bodyPr/>
           <a:p>
-            <a:fld id="{4FBD1679-1907-4207-8521-E1B3D64907A3}" type="slidenum">
+            <a:fld id="{7470D5AD-A763-4460-9C2B-4E8037A938D0}" type="slidenum">
               <a:t>&lt;#&gt;</a:t>
             </a:fld>
           </a:p>
@@ -2492,7 +2493,7 @@
         <p:txBody>
           <a:bodyPr/>
           <a:p>
-            <a:fld id="{7F45747F-8D53-47D7-B99A-D168CC60CB09}" type="slidenum">
+            <a:fld id="{344C1031-C2E2-44C3-83A6-DA463DB93A3E}" type="slidenum">
               <a:t>&lt;#&gt;</a:t>
             </a:fld>
           </a:p>
@@ -2561,7 +2562,7 @@
         <p:spPr>
           <a:xfrm>
             <a:off x="3124080" y="6356520"/>
-            <a:ext cx="2892240" cy="361800"/>
+            <a:ext cx="2891520" cy="361080"/>
           </a:xfrm>
           <a:prstGeom prst="rect">
             <a:avLst/>
@@ -2633,7 +2634,7 @@
         <p:spPr>
           <a:xfrm>
             <a:off x="6553080" y="6356520"/>
-            <a:ext cx="2130480" cy="361800"/>
+            <a:ext cx="2129760" cy="361080"/>
           </a:xfrm>
           <a:prstGeom prst="rect">
             <a:avLst/>
@@ -2674,7 +2675,7 @@
                 <a:tab algn="l" pos="0"/>
               </a:tabLst>
             </a:pPr>
-            <a:fld id="{82720101-7306-4A27-975F-DE4382067A35}" type="slidenum">
+            <a:fld id="{8DCDB33B-033B-4DAA-93D7-EF0FD568FD89}" type="slidenum">
               <a:rPr b="0" lang="en-US" sz="1200" spc="-1" strike="noStrike">
                 <a:solidFill>
                   <a:srgbClr val="8b8b8b"/>
@@ -2705,7 +2706,7 @@
         <p:spPr>
           <a:xfrm>
             <a:off x="457200" y="6356520"/>
-            <a:ext cx="2130480" cy="361800"/>
+            <a:ext cx="2129760" cy="361080"/>
           </a:xfrm>
           <a:prstGeom prst="rect">
             <a:avLst/>
@@ -3072,7 +3073,7 @@
         <p:spPr>
           <a:xfrm>
             <a:off x="0" y="0"/>
-            <a:ext cx="12185640" cy="6854760"/>
+            <a:ext cx="12184920" cy="6854040"/>
           </a:xfrm>
           <a:prstGeom prst="rect">
             <a:avLst/>
@@ -3132,7 +3133,7 @@
         <p:spPr>
           <a:xfrm>
             <a:off x="0" y="0"/>
-            <a:ext cx="15120" cy="6854760"/>
+            <a:ext cx="14400" cy="6854040"/>
           </a:xfrm>
           <a:prstGeom prst="rect">
             <a:avLst/>
@@ -3192,7 +3193,7 @@
         <p:spPr>
           <a:xfrm>
             <a:off x="914400" y="0"/>
-            <a:ext cx="15120" cy="6854760"/>
+            <a:ext cx="14400" cy="6854040"/>
           </a:xfrm>
           <a:prstGeom prst="rect">
             <a:avLst/>
@@ -3252,7 +3253,7 @@
         <p:spPr>
           <a:xfrm>
             <a:off x="1828800" y="0"/>
-            <a:ext cx="15120" cy="6854760"/>
+            <a:ext cx="14400" cy="6854040"/>
           </a:xfrm>
           <a:prstGeom prst="rect">
             <a:avLst/>
@@ -3312,7 +3313,7 @@
         <p:spPr>
           <a:xfrm>
             <a:off x="2743200" y="0"/>
-            <a:ext cx="15120" cy="6854760"/>
+            <a:ext cx="14400" cy="6854040"/>
           </a:xfrm>
           <a:prstGeom prst="rect">
             <a:avLst/>
@@ -3372,7 +3373,7 @@
         <p:spPr>
           <a:xfrm>
             <a:off x="3657600" y="0"/>
-            <a:ext cx="15120" cy="6854760"/>
+            <a:ext cx="14400" cy="6854040"/>
           </a:xfrm>
           <a:prstGeom prst="rect">
             <a:avLst/>
@@ -3432,7 +3433,7 @@
         <p:spPr>
           <a:xfrm>
             <a:off x="4572000" y="0"/>
-            <a:ext cx="15120" cy="6854760"/>
+            <a:ext cx="14400" cy="6854040"/>
           </a:xfrm>
           <a:prstGeom prst="rect">
             <a:avLst/>
@@ -3492,7 +3493,7 @@
         <p:spPr>
           <a:xfrm>
             <a:off x="5486400" y="0"/>
-            <a:ext cx="15120" cy="6854760"/>
+            <a:ext cx="14400" cy="6854040"/>
           </a:xfrm>
           <a:prstGeom prst="rect">
             <a:avLst/>
@@ -3552,7 +3553,7 @@
         <p:spPr>
           <a:xfrm>
             <a:off x="6400800" y="0"/>
-            <a:ext cx="15120" cy="6854760"/>
+            <a:ext cx="14400" cy="6854040"/>
           </a:xfrm>
           <a:prstGeom prst="rect">
             <a:avLst/>
@@ -3612,7 +3613,7 @@
         <p:spPr>
           <a:xfrm>
             <a:off x="7315200" y="0"/>
-            <a:ext cx="15120" cy="6854760"/>
+            <a:ext cx="14400" cy="6854040"/>
           </a:xfrm>
           <a:prstGeom prst="rect">
             <a:avLst/>
@@ -3672,7 +3673,7 @@
         <p:spPr>
           <a:xfrm>
             <a:off x="8229600" y="0"/>
-            <a:ext cx="15120" cy="6854760"/>
+            <a:ext cx="14400" cy="6854040"/>
           </a:xfrm>
           <a:prstGeom prst="rect">
             <a:avLst/>
@@ -3732,7 +3733,7 @@
         <p:spPr>
           <a:xfrm>
             <a:off x="9144000" y="0"/>
-            <a:ext cx="15120" cy="6854760"/>
+            <a:ext cx="14400" cy="6854040"/>
           </a:xfrm>
           <a:prstGeom prst="rect">
             <a:avLst/>
@@ -3792,7 +3793,7 @@
         <p:spPr>
           <a:xfrm>
             <a:off x="10058400" y="0"/>
-            <a:ext cx="15120" cy="6854760"/>
+            <a:ext cx="14400" cy="6854040"/>
           </a:xfrm>
           <a:prstGeom prst="rect">
             <a:avLst/>
@@ -3852,7 +3853,7 @@
         <p:spPr>
           <a:xfrm>
             <a:off x="10972800" y="0"/>
-            <a:ext cx="15120" cy="6854760"/>
+            <a:ext cx="14400" cy="6854040"/>
           </a:xfrm>
           <a:prstGeom prst="rect">
             <a:avLst/>
@@ -3912,7 +3913,7 @@
         <p:spPr>
           <a:xfrm>
             <a:off x="11887200" y="0"/>
-            <a:ext cx="15120" cy="6854760"/>
+            <a:ext cx="14400" cy="6854040"/>
           </a:xfrm>
           <a:prstGeom prst="rect">
             <a:avLst/>
@@ -3972,7 +3973,7 @@
         <p:spPr>
           <a:xfrm>
             <a:off x="0" y="0"/>
-            <a:ext cx="316800" cy="6854760"/>
+            <a:ext cx="316080" cy="6854040"/>
           </a:xfrm>
           <a:prstGeom prst="rect">
             <a:avLst/>
@@ -4032,7 +4033,7 @@
         <p:spPr>
           <a:xfrm>
             <a:off x="9875520" y="365760"/>
-            <a:ext cx="2008440" cy="499680"/>
+            <a:ext cx="2007720" cy="498960"/>
           </a:xfrm>
           <a:prstGeom prst="roundRect">
             <a:avLst>
@@ -4283,7 +4284,7 @@
         <p:spPr>
           <a:xfrm>
             <a:off x="987480" y="3182040"/>
-            <a:ext cx="3288600" cy="2739960"/>
+            <a:ext cx="3287880" cy="2739240"/>
           </a:xfrm>
           <a:prstGeom prst="roundRect">
             <a:avLst>
@@ -4345,7 +4346,7 @@
         <p:spPr>
           <a:xfrm>
             <a:off x="914400" y="3108960"/>
-            <a:ext cx="3288600" cy="2739960"/>
+            <a:ext cx="3287880" cy="2739240"/>
           </a:xfrm>
           <a:prstGeom prst="roundRect">
             <a:avLst>
@@ -4479,7 +4480,7 @@
         <p:spPr>
           <a:xfrm>
             <a:off x="4507920" y="3182040"/>
-            <a:ext cx="3288600" cy="2739960"/>
+            <a:ext cx="3287880" cy="2739240"/>
           </a:xfrm>
           <a:prstGeom prst="roundRect">
             <a:avLst>
@@ -4541,7 +4542,7 @@
         <p:spPr>
           <a:xfrm>
             <a:off x="4434840" y="3108960"/>
-            <a:ext cx="3288600" cy="2739960"/>
+            <a:ext cx="3287880" cy="2739240"/>
           </a:xfrm>
           <a:prstGeom prst="roundRect">
             <a:avLst>
@@ -4799,7 +4800,7 @@
         <p:spPr>
           <a:xfrm>
             <a:off x="8028360" y="3182040"/>
-            <a:ext cx="3288600" cy="2739960"/>
+            <a:ext cx="3287880" cy="2739240"/>
           </a:xfrm>
           <a:prstGeom prst="roundRect">
             <a:avLst>
@@ -4861,7 +4862,7 @@
         <p:spPr>
           <a:xfrm>
             <a:off x="7955280" y="2971800"/>
-            <a:ext cx="3929760" cy="3655440"/>
+            <a:ext cx="3929040" cy="3654720"/>
           </a:xfrm>
           <a:prstGeom prst="roundRect">
             <a:avLst>
@@ -5372,7 +5373,7 @@
         <p:spPr>
           <a:xfrm>
             <a:off x="0" y="0"/>
-            <a:ext cx="12186000" cy="6855120"/>
+            <a:ext cx="12185280" cy="6854400"/>
           </a:xfrm>
           <a:prstGeom prst="rect">
             <a:avLst/>
@@ -5432,7 +5433,7 @@
         <p:spPr>
           <a:xfrm>
             <a:off x="0" y="0"/>
-            <a:ext cx="15480" cy="6855120"/>
+            <a:ext cx="14760" cy="6854400"/>
           </a:xfrm>
           <a:prstGeom prst="rect">
             <a:avLst/>
@@ -5492,7 +5493,7 @@
         <p:spPr>
           <a:xfrm>
             <a:off x="914400" y="0"/>
-            <a:ext cx="15480" cy="6855120"/>
+            <a:ext cx="14760" cy="6854400"/>
           </a:xfrm>
           <a:prstGeom prst="rect">
             <a:avLst/>
@@ -5552,7 +5553,7 @@
         <p:spPr>
           <a:xfrm>
             <a:off x="1828800" y="0"/>
-            <a:ext cx="15480" cy="6855120"/>
+            <a:ext cx="14760" cy="6854400"/>
           </a:xfrm>
           <a:prstGeom prst="rect">
             <a:avLst/>
@@ -5612,7 +5613,7 @@
         <p:spPr>
           <a:xfrm>
             <a:off x="2743200" y="0"/>
-            <a:ext cx="15480" cy="6855120"/>
+            <a:ext cx="14760" cy="6854400"/>
           </a:xfrm>
           <a:prstGeom prst="rect">
             <a:avLst/>
@@ -5672,7 +5673,7 @@
         <p:spPr>
           <a:xfrm>
             <a:off x="3657600" y="0"/>
-            <a:ext cx="15480" cy="6855120"/>
+            <a:ext cx="14760" cy="6854400"/>
           </a:xfrm>
           <a:prstGeom prst="rect">
             <a:avLst/>
@@ -5732,7 +5733,7 @@
         <p:spPr>
           <a:xfrm>
             <a:off x="4572000" y="0"/>
-            <a:ext cx="15480" cy="6855120"/>
+            <a:ext cx="14760" cy="6854400"/>
           </a:xfrm>
           <a:prstGeom prst="rect">
             <a:avLst/>
@@ -5792,7 +5793,7 @@
         <p:spPr>
           <a:xfrm>
             <a:off x="5486400" y="0"/>
-            <a:ext cx="15480" cy="6855120"/>
+            <a:ext cx="14760" cy="6854400"/>
           </a:xfrm>
           <a:prstGeom prst="rect">
             <a:avLst/>
@@ -5852,7 +5853,7 @@
         <p:spPr>
           <a:xfrm>
             <a:off x="6400800" y="0"/>
-            <a:ext cx="15480" cy="6855120"/>
+            <a:ext cx="14760" cy="6854400"/>
           </a:xfrm>
           <a:prstGeom prst="rect">
             <a:avLst/>
@@ -5912,7 +5913,7 @@
         <p:spPr>
           <a:xfrm>
             <a:off x="7315200" y="0"/>
-            <a:ext cx="15480" cy="6855120"/>
+            <a:ext cx="14760" cy="6854400"/>
           </a:xfrm>
           <a:prstGeom prst="rect">
             <a:avLst/>
@@ -5972,7 +5973,7 @@
         <p:spPr>
           <a:xfrm>
             <a:off x="8229600" y="0"/>
-            <a:ext cx="15480" cy="6855120"/>
+            <a:ext cx="14760" cy="6854400"/>
           </a:xfrm>
           <a:prstGeom prst="rect">
             <a:avLst/>
@@ -6032,7 +6033,7 @@
         <p:spPr>
           <a:xfrm>
             <a:off x="9144000" y="0"/>
-            <a:ext cx="15480" cy="6855120"/>
+            <a:ext cx="14760" cy="6854400"/>
           </a:xfrm>
           <a:prstGeom prst="rect">
             <a:avLst/>
@@ -6092,7 +6093,7 @@
         <p:spPr>
           <a:xfrm>
             <a:off x="10058400" y="0"/>
-            <a:ext cx="15480" cy="6855120"/>
+            <a:ext cx="14760" cy="6854400"/>
           </a:xfrm>
           <a:prstGeom prst="rect">
             <a:avLst/>
@@ -6152,7 +6153,7 @@
         <p:spPr>
           <a:xfrm>
             <a:off x="10972800" y="0"/>
-            <a:ext cx="15480" cy="6855120"/>
+            <a:ext cx="14760" cy="6854400"/>
           </a:xfrm>
           <a:prstGeom prst="rect">
             <a:avLst/>
@@ -6212,7 +6213,7 @@
         <p:spPr>
           <a:xfrm>
             <a:off x="11887200" y="0"/>
-            <a:ext cx="15480" cy="6855120"/>
+            <a:ext cx="14760" cy="6854400"/>
           </a:xfrm>
           <a:prstGeom prst="rect">
             <a:avLst/>
@@ -6272,7 +6273,7 @@
         <p:spPr>
           <a:xfrm>
             <a:off x="0" y="0"/>
-            <a:ext cx="317160" cy="6855120"/>
+            <a:ext cx="316440" cy="6854400"/>
           </a:xfrm>
           <a:prstGeom prst="rect">
             <a:avLst/>
@@ -6332,7 +6333,7 @@
         <p:spPr>
           <a:xfrm>
             <a:off x="9875520" y="365760"/>
-            <a:ext cx="2008800" cy="500040"/>
+            <a:ext cx="2008080" cy="499320"/>
           </a:xfrm>
           <a:prstGeom prst="roundRect">
             <a:avLst>
@@ -6560,7 +6561,7 @@
         <p:spPr>
           <a:xfrm>
             <a:off x="987480" y="3182040"/>
-            <a:ext cx="3288960" cy="2740320"/>
+            <a:ext cx="3288240" cy="2739600"/>
           </a:xfrm>
           <a:prstGeom prst="roundRect">
             <a:avLst>
@@ -6622,7 +6623,7 @@
         <p:spPr>
           <a:xfrm>
             <a:off x="914400" y="3108960"/>
-            <a:ext cx="3288960" cy="2740320"/>
+            <a:ext cx="3288240" cy="2739600"/>
           </a:xfrm>
           <a:prstGeom prst="roundRect">
             <a:avLst>
@@ -6785,7 +6786,7 @@
         <p:spPr>
           <a:xfrm>
             <a:off x="4507920" y="3182040"/>
-            <a:ext cx="3288960" cy="2740320"/>
+            <a:ext cx="3288240" cy="2739600"/>
           </a:xfrm>
           <a:prstGeom prst="roundRect">
             <a:avLst>
@@ -6847,7 +6848,7 @@
         <p:spPr>
           <a:xfrm>
             <a:off x="4434840" y="3108960"/>
-            <a:ext cx="3288960" cy="2740320"/>
+            <a:ext cx="3288240" cy="2739600"/>
           </a:xfrm>
           <a:prstGeom prst="roundRect">
             <a:avLst>
@@ -7105,7 +7106,7 @@
         <p:spPr>
           <a:xfrm>
             <a:off x="8028360" y="3182040"/>
-            <a:ext cx="3288960" cy="2740320"/>
+            <a:ext cx="3288240" cy="2739600"/>
           </a:xfrm>
           <a:prstGeom prst="roundRect">
             <a:avLst>
@@ -7167,7 +7168,7 @@
         <p:spPr>
           <a:xfrm>
             <a:off x="7955280" y="3108960"/>
-            <a:ext cx="3701520" cy="3061440"/>
+            <a:ext cx="3700800" cy="3060720"/>
           </a:xfrm>
           <a:prstGeom prst="roundRect">
             <a:avLst>
@@ -7612,7 +7613,7 @@
         <p:spPr>
           <a:xfrm>
             <a:off x="0" y="0"/>
-            <a:ext cx="12186000" cy="6855120"/>
+            <a:ext cx="12185280" cy="6854400"/>
           </a:xfrm>
           <a:prstGeom prst="rect">
             <a:avLst/>
@@ -7672,7 +7673,7 @@
         <p:spPr>
           <a:xfrm>
             <a:off x="0" y="0"/>
-            <a:ext cx="15480" cy="6855120"/>
+            <a:ext cx="14760" cy="6854400"/>
           </a:xfrm>
           <a:prstGeom prst="rect">
             <a:avLst/>
@@ -7732,7 +7733,7 @@
         <p:spPr>
           <a:xfrm>
             <a:off x="914400" y="0"/>
-            <a:ext cx="15480" cy="6855120"/>
+            <a:ext cx="14760" cy="6854400"/>
           </a:xfrm>
           <a:prstGeom prst="rect">
             <a:avLst/>
@@ -7792,7 +7793,7 @@
         <p:spPr>
           <a:xfrm>
             <a:off x="1828800" y="0"/>
-            <a:ext cx="15480" cy="6855120"/>
+            <a:ext cx="14760" cy="6854400"/>
           </a:xfrm>
           <a:prstGeom prst="rect">
             <a:avLst/>
@@ -7852,7 +7853,7 @@
         <p:spPr>
           <a:xfrm>
             <a:off x="2743200" y="0"/>
-            <a:ext cx="15480" cy="6855120"/>
+            <a:ext cx="14760" cy="6854400"/>
           </a:xfrm>
           <a:prstGeom prst="rect">
             <a:avLst/>
@@ -7912,7 +7913,7 @@
         <p:spPr>
           <a:xfrm>
             <a:off x="3657600" y="0"/>
-            <a:ext cx="15480" cy="6855120"/>
+            <a:ext cx="14760" cy="6854400"/>
           </a:xfrm>
           <a:prstGeom prst="rect">
             <a:avLst/>
@@ -7972,7 +7973,7 @@
         <p:spPr>
           <a:xfrm>
             <a:off x="4572000" y="0"/>
-            <a:ext cx="15480" cy="6855120"/>
+            <a:ext cx="14760" cy="6854400"/>
           </a:xfrm>
           <a:prstGeom prst="rect">
             <a:avLst/>
@@ -8032,7 +8033,7 @@
         <p:spPr>
           <a:xfrm>
             <a:off x="5486400" y="0"/>
-            <a:ext cx="15480" cy="6855120"/>
+            <a:ext cx="14760" cy="6854400"/>
           </a:xfrm>
           <a:prstGeom prst="rect">
             <a:avLst/>
@@ -8092,7 +8093,7 @@
         <p:spPr>
           <a:xfrm>
             <a:off x="6400800" y="0"/>
-            <a:ext cx="15480" cy="6855120"/>
+            <a:ext cx="14760" cy="6854400"/>
           </a:xfrm>
           <a:prstGeom prst="rect">
             <a:avLst/>
@@ -8152,7 +8153,7 @@
         <p:spPr>
           <a:xfrm>
             <a:off x="7315200" y="0"/>
-            <a:ext cx="15480" cy="6855120"/>
+            <a:ext cx="14760" cy="6854400"/>
           </a:xfrm>
           <a:prstGeom prst="rect">
             <a:avLst/>
@@ -8212,7 +8213,7 @@
         <p:spPr>
           <a:xfrm>
             <a:off x="8229600" y="0"/>
-            <a:ext cx="15480" cy="6855120"/>
+            <a:ext cx="14760" cy="6854400"/>
           </a:xfrm>
           <a:prstGeom prst="rect">
             <a:avLst/>
@@ -8272,7 +8273,7 @@
         <p:spPr>
           <a:xfrm>
             <a:off x="9144000" y="0"/>
-            <a:ext cx="15480" cy="6855120"/>
+            <a:ext cx="14760" cy="6854400"/>
           </a:xfrm>
           <a:prstGeom prst="rect">
             <a:avLst/>
@@ -8332,7 +8333,7 @@
         <p:spPr>
           <a:xfrm>
             <a:off x="10058400" y="0"/>
-            <a:ext cx="15480" cy="6855120"/>
+            <a:ext cx="14760" cy="6854400"/>
           </a:xfrm>
           <a:prstGeom prst="rect">
             <a:avLst/>
@@ -8392,7 +8393,7 @@
         <p:spPr>
           <a:xfrm>
             <a:off x="10972800" y="0"/>
-            <a:ext cx="15480" cy="6855120"/>
+            <a:ext cx="14760" cy="6854400"/>
           </a:xfrm>
           <a:prstGeom prst="rect">
             <a:avLst/>
@@ -8452,7 +8453,7 @@
         <p:spPr>
           <a:xfrm>
             <a:off x="11887200" y="0"/>
-            <a:ext cx="15480" cy="6855120"/>
+            <a:ext cx="14760" cy="6854400"/>
           </a:xfrm>
           <a:prstGeom prst="rect">
             <a:avLst/>
@@ -8512,7 +8513,7 @@
         <p:spPr>
           <a:xfrm>
             <a:off x="0" y="0"/>
-            <a:ext cx="317160" cy="6855120"/>
+            <a:ext cx="316440" cy="6854400"/>
           </a:xfrm>
           <a:prstGeom prst="rect">
             <a:avLst/>
@@ -8572,7 +8573,7 @@
         <p:spPr>
           <a:xfrm>
             <a:off x="9875520" y="365760"/>
-            <a:ext cx="2008800" cy="500040"/>
+            <a:ext cx="2008080" cy="499320"/>
           </a:xfrm>
           <a:prstGeom prst="roundRect">
             <a:avLst>
@@ -8777,7 +8778,7 @@
         <p:spPr>
           <a:xfrm>
             <a:off x="987480" y="3182040"/>
-            <a:ext cx="3288960" cy="2740320"/>
+            <a:ext cx="3288240" cy="2739600"/>
           </a:xfrm>
           <a:prstGeom prst="roundRect">
             <a:avLst>
@@ -8839,7 +8840,7 @@
         <p:spPr>
           <a:xfrm>
             <a:off x="914400" y="3108960"/>
-            <a:ext cx="3288960" cy="3061800"/>
+            <a:ext cx="3288240" cy="3061080"/>
           </a:xfrm>
           <a:prstGeom prst="roundRect">
             <a:avLst>
@@ -9030,7 +9031,7 @@
         <p:spPr>
           <a:xfrm>
             <a:off x="4507920" y="3182040"/>
-            <a:ext cx="3288960" cy="2740320"/>
+            <a:ext cx="3288240" cy="2739600"/>
           </a:xfrm>
           <a:prstGeom prst="roundRect">
             <a:avLst>
@@ -9092,7 +9093,7 @@
         <p:spPr>
           <a:xfrm>
             <a:off x="4434840" y="3108960"/>
-            <a:ext cx="3288960" cy="2740320"/>
+            <a:ext cx="3288240" cy="2739600"/>
           </a:xfrm>
           <a:prstGeom prst="roundRect">
             <a:avLst>
@@ -9350,7 +9351,7 @@
         <p:spPr>
           <a:xfrm>
             <a:off x="8028360" y="3182040"/>
-            <a:ext cx="3288960" cy="2740320"/>
+            <a:ext cx="3288240" cy="2739600"/>
           </a:xfrm>
           <a:prstGeom prst="roundRect">
             <a:avLst>
@@ -9412,7 +9413,7 @@
         <p:spPr>
           <a:xfrm>
             <a:off x="7955280" y="3108960"/>
-            <a:ext cx="3701520" cy="3061440"/>
+            <a:ext cx="3700800" cy="3060720"/>
           </a:xfrm>
           <a:prstGeom prst="roundRect">
             <a:avLst>
@@ -9857,7 +9858,7 @@
         <p:spPr>
           <a:xfrm>
             <a:off x="0" y="0"/>
-            <a:ext cx="12186000" cy="6855120"/>
+            <a:ext cx="12185280" cy="6854400"/>
           </a:xfrm>
           <a:prstGeom prst="rect">
             <a:avLst/>
@@ -9917,7 +9918,7 @@
         <p:spPr>
           <a:xfrm>
             <a:off x="0" y="0"/>
-            <a:ext cx="15480" cy="6855120"/>
+            <a:ext cx="14760" cy="6854400"/>
           </a:xfrm>
           <a:prstGeom prst="rect">
             <a:avLst/>
@@ -9977,7 +9978,7 @@
         <p:spPr>
           <a:xfrm>
             <a:off x="914400" y="0"/>
-            <a:ext cx="15480" cy="6855120"/>
+            <a:ext cx="14760" cy="6854400"/>
           </a:xfrm>
           <a:prstGeom prst="rect">
             <a:avLst/>
@@ -10037,7 +10038,7 @@
         <p:spPr>
           <a:xfrm>
             <a:off x="1828800" y="0"/>
-            <a:ext cx="15480" cy="6855120"/>
+            <a:ext cx="14760" cy="6854400"/>
           </a:xfrm>
           <a:prstGeom prst="rect">
             <a:avLst/>
@@ -10097,7 +10098,7 @@
         <p:spPr>
           <a:xfrm>
             <a:off x="2743200" y="0"/>
-            <a:ext cx="15480" cy="6855120"/>
+            <a:ext cx="14760" cy="6854400"/>
           </a:xfrm>
           <a:prstGeom prst="rect">
             <a:avLst/>
@@ -10157,7 +10158,7 @@
         <p:spPr>
           <a:xfrm>
             <a:off x="3657600" y="0"/>
-            <a:ext cx="15480" cy="6855120"/>
+            <a:ext cx="14760" cy="6854400"/>
           </a:xfrm>
           <a:prstGeom prst="rect">
             <a:avLst/>
@@ -10217,7 +10218,7 @@
         <p:spPr>
           <a:xfrm>
             <a:off x="4572000" y="0"/>
-            <a:ext cx="15480" cy="6855120"/>
+            <a:ext cx="14760" cy="6854400"/>
           </a:xfrm>
           <a:prstGeom prst="rect">
             <a:avLst/>
@@ -10277,7 +10278,7 @@
         <p:spPr>
           <a:xfrm>
             <a:off x="5486400" y="0"/>
-            <a:ext cx="15480" cy="6855120"/>
+            <a:ext cx="14760" cy="6854400"/>
           </a:xfrm>
           <a:prstGeom prst="rect">
             <a:avLst/>
@@ -10337,7 +10338,7 @@
         <p:spPr>
           <a:xfrm>
             <a:off x="6400800" y="0"/>
-            <a:ext cx="15480" cy="6855120"/>
+            <a:ext cx="14760" cy="6854400"/>
           </a:xfrm>
           <a:prstGeom prst="rect">
             <a:avLst/>
@@ -10397,7 +10398,7 @@
         <p:spPr>
           <a:xfrm>
             <a:off x="7315200" y="0"/>
-            <a:ext cx="15480" cy="6855120"/>
+            <a:ext cx="14760" cy="6854400"/>
           </a:xfrm>
           <a:prstGeom prst="rect">
             <a:avLst/>
@@ -10457,7 +10458,7 @@
         <p:spPr>
           <a:xfrm>
             <a:off x="8229600" y="0"/>
-            <a:ext cx="15480" cy="6855120"/>
+            <a:ext cx="14760" cy="6854400"/>
           </a:xfrm>
           <a:prstGeom prst="rect">
             <a:avLst/>
@@ -10517,7 +10518,7 @@
         <p:spPr>
           <a:xfrm>
             <a:off x="9144000" y="0"/>
-            <a:ext cx="15480" cy="6855120"/>
+            <a:ext cx="14760" cy="6854400"/>
           </a:xfrm>
           <a:prstGeom prst="rect">
             <a:avLst/>
@@ -10577,7 +10578,7 @@
         <p:spPr>
           <a:xfrm>
             <a:off x="10058400" y="0"/>
-            <a:ext cx="15480" cy="6855120"/>
+            <a:ext cx="14760" cy="6854400"/>
           </a:xfrm>
           <a:prstGeom prst="rect">
             <a:avLst/>
@@ -10637,7 +10638,7 @@
         <p:spPr>
           <a:xfrm>
             <a:off x="10972800" y="0"/>
-            <a:ext cx="15480" cy="6855120"/>
+            <a:ext cx="14760" cy="6854400"/>
           </a:xfrm>
           <a:prstGeom prst="rect">
             <a:avLst/>
@@ -10697,7 +10698,7 @@
         <p:spPr>
           <a:xfrm>
             <a:off x="11887200" y="0"/>
-            <a:ext cx="15480" cy="6855120"/>
+            <a:ext cx="14760" cy="6854400"/>
           </a:xfrm>
           <a:prstGeom prst="rect">
             <a:avLst/>
@@ -10757,7 +10758,7 @@
         <p:spPr>
           <a:xfrm>
             <a:off x="0" y="0"/>
-            <a:ext cx="317160" cy="6855120"/>
+            <a:ext cx="316440" cy="6854400"/>
           </a:xfrm>
           <a:prstGeom prst="rect">
             <a:avLst/>
@@ -10817,7 +10818,7 @@
         <p:spPr>
           <a:xfrm>
             <a:off x="9875520" y="365760"/>
-            <a:ext cx="2008800" cy="500040"/>
+            <a:ext cx="2008080" cy="499320"/>
           </a:xfrm>
           <a:prstGeom prst="roundRect">
             <a:avLst>
@@ -10891,7 +10892,7 @@
         <p:spPr>
           <a:xfrm>
             <a:off x="2796840" y="914400"/>
-            <a:ext cx="5375160" cy="638280"/>
+            <a:ext cx="5374800" cy="638280"/>
           </a:xfrm>
           <a:prstGeom prst="rect">
             <a:avLst/>
@@ -11022,7 +11023,7 @@
         <p:spPr>
           <a:xfrm>
             <a:off x="987480" y="3182040"/>
-            <a:ext cx="3288960" cy="2740320"/>
+            <a:ext cx="3288240" cy="2739600"/>
           </a:xfrm>
           <a:prstGeom prst="roundRect">
             <a:avLst>
@@ -11084,7 +11085,7 @@
         <p:spPr>
           <a:xfrm>
             <a:off x="914400" y="3108960"/>
-            <a:ext cx="3288960" cy="3061800"/>
+            <a:ext cx="3288240" cy="3061080"/>
           </a:xfrm>
           <a:prstGeom prst="roundRect">
             <a:avLst>
@@ -11275,7 +11276,7 @@
         <p:spPr>
           <a:xfrm>
             <a:off x="4507920" y="3182040"/>
-            <a:ext cx="3288960" cy="2740320"/>
+            <a:ext cx="3288240" cy="2739600"/>
           </a:xfrm>
           <a:prstGeom prst="roundRect">
             <a:avLst>
@@ -11337,7 +11338,7 @@
         <p:spPr>
           <a:xfrm>
             <a:off x="4434840" y="3108960"/>
-            <a:ext cx="3288960" cy="2740320"/>
+            <a:ext cx="3288240" cy="2739600"/>
           </a:xfrm>
           <a:prstGeom prst="roundRect">
             <a:avLst>
@@ -11549,7 +11550,7 @@
         <p:spPr>
           <a:xfrm>
             <a:off x="8028360" y="3182040"/>
-            <a:ext cx="3288960" cy="2740320"/>
+            <a:ext cx="3288240" cy="2739600"/>
           </a:xfrm>
           <a:prstGeom prst="roundRect">
             <a:avLst>
@@ -11611,7 +11612,7 @@
         <p:spPr>
           <a:xfrm>
             <a:off x="7955280" y="2743200"/>
-            <a:ext cx="3701520" cy="3656520"/>
+            <a:ext cx="3700800" cy="3655800"/>
           </a:xfrm>
           <a:prstGeom prst="roundRect">
             <a:avLst>
@@ -12171,7 +12172,7 @@
         <p:spPr>
           <a:xfrm>
             <a:off x="0" y="0"/>
-            <a:ext cx="12186000" cy="6855120"/>
+            <a:ext cx="12185280" cy="6854400"/>
           </a:xfrm>
           <a:prstGeom prst="rect">
             <a:avLst/>
@@ -12231,7 +12232,7 @@
         <p:spPr>
           <a:xfrm>
             <a:off x="0" y="0"/>
-            <a:ext cx="15480" cy="6855120"/>
+            <a:ext cx="14760" cy="6854400"/>
           </a:xfrm>
           <a:prstGeom prst="rect">
             <a:avLst/>
@@ -12291,7 +12292,7 @@
         <p:spPr>
           <a:xfrm>
             <a:off x="914400" y="0"/>
-            <a:ext cx="15480" cy="6855120"/>
+            <a:ext cx="14760" cy="6854400"/>
           </a:xfrm>
           <a:prstGeom prst="rect">
             <a:avLst/>
@@ -12351,7 +12352,7 @@
         <p:spPr>
           <a:xfrm>
             <a:off x="1828800" y="0"/>
-            <a:ext cx="15480" cy="6855120"/>
+            <a:ext cx="14760" cy="6854400"/>
           </a:xfrm>
           <a:prstGeom prst="rect">
             <a:avLst/>
@@ -12411,7 +12412,7 @@
         <p:spPr>
           <a:xfrm>
             <a:off x="2743200" y="0"/>
-            <a:ext cx="15480" cy="6855120"/>
+            <a:ext cx="14760" cy="6854400"/>
           </a:xfrm>
           <a:prstGeom prst="rect">
             <a:avLst/>
@@ -12471,7 +12472,7 @@
         <p:spPr>
           <a:xfrm>
             <a:off x="3657600" y="0"/>
-            <a:ext cx="15480" cy="6855120"/>
+            <a:ext cx="14760" cy="6854400"/>
           </a:xfrm>
           <a:prstGeom prst="rect">
             <a:avLst/>
@@ -12531,7 +12532,7 @@
         <p:spPr>
           <a:xfrm>
             <a:off x="4572000" y="0"/>
-            <a:ext cx="15480" cy="6855120"/>
+            <a:ext cx="14760" cy="6854400"/>
           </a:xfrm>
           <a:prstGeom prst="rect">
             <a:avLst/>
@@ -12591,7 +12592,7 @@
         <p:spPr>
           <a:xfrm>
             <a:off x="5486400" y="0"/>
-            <a:ext cx="15480" cy="6855120"/>
+            <a:ext cx="14760" cy="6854400"/>
           </a:xfrm>
           <a:prstGeom prst="rect">
             <a:avLst/>
@@ -12651,7 +12652,7 @@
         <p:spPr>
           <a:xfrm>
             <a:off x="6400800" y="0"/>
-            <a:ext cx="15480" cy="6855120"/>
+            <a:ext cx="14760" cy="6854400"/>
           </a:xfrm>
           <a:prstGeom prst="rect">
             <a:avLst/>
@@ -12711,7 +12712,7 @@
         <p:spPr>
           <a:xfrm>
             <a:off x="7315200" y="0"/>
-            <a:ext cx="15480" cy="6855120"/>
+            <a:ext cx="14760" cy="6854400"/>
           </a:xfrm>
           <a:prstGeom prst="rect">
             <a:avLst/>
@@ -12771,7 +12772,7 @@
         <p:spPr>
           <a:xfrm>
             <a:off x="8229600" y="0"/>
-            <a:ext cx="15480" cy="6855120"/>
+            <a:ext cx="14760" cy="6854400"/>
           </a:xfrm>
           <a:prstGeom prst="rect">
             <a:avLst/>
@@ -12831,7 +12832,7 @@
         <p:spPr>
           <a:xfrm>
             <a:off x="9144000" y="0"/>
-            <a:ext cx="15480" cy="6855120"/>
+            <a:ext cx="14760" cy="6854400"/>
           </a:xfrm>
           <a:prstGeom prst="rect">
             <a:avLst/>
@@ -12891,7 +12892,7 @@
         <p:spPr>
           <a:xfrm>
             <a:off x="10058400" y="0"/>
-            <a:ext cx="15480" cy="6855120"/>
+            <a:ext cx="14760" cy="6854400"/>
           </a:xfrm>
           <a:prstGeom prst="rect">
             <a:avLst/>
@@ -12951,7 +12952,7 @@
         <p:spPr>
           <a:xfrm>
             <a:off x="10972800" y="0"/>
-            <a:ext cx="15480" cy="6855120"/>
+            <a:ext cx="14760" cy="6854400"/>
           </a:xfrm>
           <a:prstGeom prst="rect">
             <a:avLst/>
@@ -13011,7 +13012,7 @@
         <p:spPr>
           <a:xfrm>
             <a:off x="11887200" y="0"/>
-            <a:ext cx="15480" cy="6855120"/>
+            <a:ext cx="14760" cy="6854400"/>
           </a:xfrm>
           <a:prstGeom prst="rect">
             <a:avLst/>
@@ -13071,7 +13072,7 @@
         <p:spPr>
           <a:xfrm>
             <a:off x="0" y="0"/>
-            <a:ext cx="317160" cy="6855120"/>
+            <a:ext cx="316440" cy="6854400"/>
           </a:xfrm>
           <a:prstGeom prst="rect">
             <a:avLst/>
@@ -13131,7 +13132,7 @@
         <p:spPr>
           <a:xfrm>
             <a:off x="9875520" y="365760"/>
-            <a:ext cx="2008800" cy="500040"/>
+            <a:ext cx="2008080" cy="499320"/>
           </a:xfrm>
           <a:prstGeom prst="roundRect">
             <a:avLst>
@@ -13259,7 +13260,7 @@
         <p:spPr>
           <a:xfrm>
             <a:off x="1196640" y="1828800"/>
-            <a:ext cx="9094320" cy="576360"/>
+            <a:ext cx="9093600" cy="576360"/>
           </a:xfrm>
           <a:prstGeom prst="rect">
             <a:avLst/>
@@ -13336,7 +13337,7 @@
         <p:spPr>
           <a:xfrm>
             <a:off x="987480" y="3182040"/>
-            <a:ext cx="3288960" cy="2740320"/>
+            <a:ext cx="3288240" cy="2739600"/>
           </a:xfrm>
           <a:prstGeom prst="roundRect">
             <a:avLst>
@@ -13398,7 +13399,7 @@
         <p:spPr>
           <a:xfrm>
             <a:off x="457200" y="2514600"/>
-            <a:ext cx="3746160" cy="4114080"/>
+            <a:ext cx="3745440" cy="4113360"/>
           </a:xfrm>
           <a:prstGeom prst="roundRect">
             <a:avLst>
@@ -13636,7 +13637,7 @@
         <p:spPr>
           <a:xfrm>
             <a:off x="4507920" y="3182040"/>
-            <a:ext cx="3288960" cy="2740320"/>
+            <a:ext cx="3288240" cy="2739600"/>
           </a:xfrm>
           <a:prstGeom prst="roundRect">
             <a:avLst>
@@ -13698,7 +13699,7 @@
         <p:spPr>
           <a:xfrm>
             <a:off x="4434840" y="2971800"/>
-            <a:ext cx="3288960" cy="3427200"/>
+            <a:ext cx="3288240" cy="3426480"/>
           </a:xfrm>
           <a:prstGeom prst="roundRect">
             <a:avLst>
@@ -13917,7 +13918,7 @@
         <p:spPr>
           <a:xfrm>
             <a:off x="8028360" y="3182040"/>
-            <a:ext cx="3288960" cy="2740320"/>
+            <a:ext cx="3288240" cy="2739600"/>
           </a:xfrm>
           <a:prstGeom prst="roundRect">
             <a:avLst>
@@ -13979,7 +13980,7 @@
         <p:spPr>
           <a:xfrm>
             <a:off x="8001000" y="3200400"/>
-            <a:ext cx="3474000" cy="2742480"/>
+            <a:ext cx="3473280" cy="2741760"/>
           </a:xfrm>
           <a:prstGeom prst="roundRect">
             <a:avLst>
@@ -14391,7 +14392,7 @@
         <p:spPr>
           <a:xfrm>
             <a:off x="0" y="0"/>
-            <a:ext cx="12186000" cy="6855120"/>
+            <a:ext cx="12185280" cy="6854400"/>
           </a:xfrm>
           <a:prstGeom prst="rect">
             <a:avLst/>
@@ -14451,7 +14452,7 @@
         <p:spPr>
           <a:xfrm>
             <a:off x="0" y="0"/>
-            <a:ext cx="15480" cy="6855120"/>
+            <a:ext cx="14760" cy="6854400"/>
           </a:xfrm>
           <a:prstGeom prst="rect">
             <a:avLst/>
@@ -14511,7 +14512,7 @@
         <p:spPr>
           <a:xfrm>
             <a:off x="914400" y="0"/>
-            <a:ext cx="15480" cy="6855120"/>
+            <a:ext cx="14760" cy="6854400"/>
           </a:xfrm>
           <a:prstGeom prst="rect">
             <a:avLst/>
@@ -14571,7 +14572,7 @@
         <p:spPr>
           <a:xfrm>
             <a:off x="1828800" y="0"/>
-            <a:ext cx="15480" cy="6855120"/>
+            <a:ext cx="14760" cy="6854400"/>
           </a:xfrm>
           <a:prstGeom prst="rect">
             <a:avLst/>
@@ -14631,7 +14632,7 @@
         <p:spPr>
           <a:xfrm>
             <a:off x="2743200" y="0"/>
-            <a:ext cx="15480" cy="6855120"/>
+            <a:ext cx="14760" cy="6854400"/>
           </a:xfrm>
           <a:prstGeom prst="rect">
             <a:avLst/>
@@ -14691,7 +14692,7 @@
         <p:spPr>
           <a:xfrm>
             <a:off x="3657600" y="0"/>
-            <a:ext cx="15480" cy="6855120"/>
+            <a:ext cx="14760" cy="6854400"/>
           </a:xfrm>
           <a:prstGeom prst="rect">
             <a:avLst/>
@@ -14751,7 +14752,7 @@
         <p:spPr>
           <a:xfrm>
             <a:off x="4572000" y="0"/>
-            <a:ext cx="15480" cy="6855120"/>
+            <a:ext cx="14760" cy="6854400"/>
           </a:xfrm>
           <a:prstGeom prst="rect">
             <a:avLst/>
@@ -14811,7 +14812,7 @@
         <p:spPr>
           <a:xfrm>
             <a:off x="5486400" y="0"/>
-            <a:ext cx="15480" cy="6855120"/>
+            <a:ext cx="14760" cy="6854400"/>
           </a:xfrm>
           <a:prstGeom prst="rect">
             <a:avLst/>
@@ -14871,7 +14872,7 @@
         <p:spPr>
           <a:xfrm>
             <a:off x="6400800" y="0"/>
-            <a:ext cx="15480" cy="6855120"/>
+            <a:ext cx="14760" cy="6854400"/>
           </a:xfrm>
           <a:prstGeom prst="rect">
             <a:avLst/>
@@ -14931,7 +14932,7 @@
         <p:spPr>
           <a:xfrm>
             <a:off x="7315200" y="0"/>
-            <a:ext cx="15480" cy="6855120"/>
+            <a:ext cx="14760" cy="6854400"/>
           </a:xfrm>
           <a:prstGeom prst="rect">
             <a:avLst/>
@@ -14991,7 +14992,7 @@
         <p:spPr>
           <a:xfrm>
             <a:off x="8229600" y="0"/>
-            <a:ext cx="15480" cy="6855120"/>
+            <a:ext cx="14760" cy="6854400"/>
           </a:xfrm>
           <a:prstGeom prst="rect">
             <a:avLst/>
@@ -15051,7 +15052,7 @@
         <p:spPr>
           <a:xfrm>
             <a:off x="9144000" y="0"/>
-            <a:ext cx="15480" cy="6855120"/>
+            <a:ext cx="14760" cy="6854400"/>
           </a:xfrm>
           <a:prstGeom prst="rect">
             <a:avLst/>
@@ -15111,7 +15112,7 @@
         <p:spPr>
           <a:xfrm>
             <a:off x="10058400" y="0"/>
-            <a:ext cx="15480" cy="6855120"/>
+            <a:ext cx="14760" cy="6854400"/>
           </a:xfrm>
           <a:prstGeom prst="rect">
             <a:avLst/>
@@ -15171,7 +15172,7 @@
         <p:spPr>
           <a:xfrm>
             <a:off x="10972800" y="0"/>
-            <a:ext cx="15480" cy="6855120"/>
+            <a:ext cx="14760" cy="6854400"/>
           </a:xfrm>
           <a:prstGeom prst="rect">
             <a:avLst/>
@@ -15231,7 +15232,7 @@
         <p:spPr>
           <a:xfrm>
             <a:off x="11887200" y="0"/>
-            <a:ext cx="15480" cy="6855120"/>
+            <a:ext cx="14760" cy="6854400"/>
           </a:xfrm>
           <a:prstGeom prst="rect">
             <a:avLst/>
@@ -15291,7 +15292,7 @@
         <p:spPr>
           <a:xfrm>
             <a:off x="0" y="0"/>
-            <a:ext cx="317160" cy="6855120"/>
+            <a:ext cx="316440" cy="6854400"/>
           </a:xfrm>
           <a:prstGeom prst="rect">
             <a:avLst/>
@@ -15351,7 +15352,7 @@
         <p:spPr>
           <a:xfrm>
             <a:off x="9875520" y="365760"/>
-            <a:ext cx="2008800" cy="500040"/>
+            <a:ext cx="2008080" cy="499320"/>
           </a:xfrm>
           <a:prstGeom prst="roundRect">
             <a:avLst>
@@ -15425,7 +15426,7 @@
         <p:spPr>
           <a:xfrm>
             <a:off x="1540440" y="914400"/>
-            <a:ext cx="7889040" cy="516240"/>
+            <a:ext cx="7888320" cy="516240"/>
           </a:xfrm>
           <a:prstGeom prst="rect">
             <a:avLst/>
@@ -15479,7 +15480,7 @@
         <p:spPr>
           <a:xfrm>
             <a:off x="880200" y="1600200"/>
-            <a:ext cx="9727200" cy="576360"/>
+            <a:ext cx="9726480" cy="576360"/>
           </a:xfrm>
           <a:prstGeom prst="rect">
             <a:avLst/>
@@ -15556,7 +15557,7 @@
         <p:spPr>
           <a:xfrm>
             <a:off x="987480" y="3182040"/>
-            <a:ext cx="3288960" cy="2740320"/>
+            <a:ext cx="3288240" cy="2739600"/>
           </a:xfrm>
           <a:prstGeom prst="roundRect">
             <a:avLst>
@@ -15618,7 +15619,7 @@
         <p:spPr>
           <a:xfrm>
             <a:off x="457200" y="2514600"/>
-            <a:ext cx="3746160" cy="4114080"/>
+            <a:ext cx="3745440" cy="4113360"/>
           </a:xfrm>
           <a:prstGeom prst="roundRect">
             <a:avLst>
@@ -15871,7 +15872,7 @@
         <p:spPr>
           <a:xfrm>
             <a:off x="4507920" y="3182040"/>
-            <a:ext cx="3288960" cy="2740320"/>
+            <a:ext cx="3288240" cy="2739600"/>
           </a:xfrm>
           <a:prstGeom prst="roundRect">
             <a:avLst>
@@ -15933,7 +15934,7 @@
         <p:spPr>
           <a:xfrm>
             <a:off x="4434840" y="2514600"/>
-            <a:ext cx="3288960" cy="3884400"/>
+            <a:ext cx="3288240" cy="3883680"/>
           </a:xfrm>
           <a:prstGeom prst="roundRect">
             <a:avLst>
@@ -16149,7 +16150,7 @@
         <p:spPr>
           <a:xfrm>
             <a:off x="8028360" y="3182040"/>
-            <a:ext cx="3288960" cy="2740320"/>
+            <a:ext cx="3288240" cy="2739600"/>
           </a:xfrm>
           <a:prstGeom prst="roundRect">
             <a:avLst>
@@ -16211,7 +16212,7 @@
         <p:spPr>
           <a:xfrm>
             <a:off x="8001000" y="2514600"/>
-            <a:ext cx="3474000" cy="3885840"/>
+            <a:ext cx="3473280" cy="3885120"/>
           </a:xfrm>
           <a:prstGeom prst="roundRect">
             <a:avLst>
@@ -16887,7 +16888,7 @@
         <p:spPr>
           <a:xfrm>
             <a:off x="0" y="0"/>
-            <a:ext cx="12186000" cy="6855120"/>
+            <a:ext cx="12185280" cy="6854400"/>
           </a:xfrm>
           <a:prstGeom prst="rect">
             <a:avLst/>
@@ -16923,6 +16924,11 @@
             <a:noAutofit/>
           </a:bodyPr>
           <a:p>
+            <a:pPr>
+              <a:lnSpc>
+                <a:spcPct val="100000"/>
+              </a:lnSpc>
+            </a:pPr>
             <a:endParaRPr b="0" lang="en-US" sz="1800" spc="-1" strike="noStrike">
               <a:solidFill>
                 <a:schemeClr val="lt1"/>
@@ -16942,7 +16948,7 @@
         <p:spPr>
           <a:xfrm>
             <a:off x="0" y="0"/>
-            <a:ext cx="15480" cy="6855120"/>
+            <a:ext cx="14760" cy="6854400"/>
           </a:xfrm>
           <a:prstGeom prst="rect">
             <a:avLst/>
@@ -16978,6 +16984,11 @@
             <a:noAutofit/>
           </a:bodyPr>
           <a:p>
+            <a:pPr>
+              <a:lnSpc>
+                <a:spcPct val="100000"/>
+              </a:lnSpc>
+            </a:pPr>
             <a:endParaRPr b="0" lang="en-US" sz="1800" spc="-1" strike="noStrike">
               <a:solidFill>
                 <a:schemeClr val="lt1"/>
@@ -16997,7 +17008,7 @@
         <p:spPr>
           <a:xfrm>
             <a:off x="914400" y="0"/>
-            <a:ext cx="15480" cy="6855120"/>
+            <a:ext cx="14760" cy="6854400"/>
           </a:xfrm>
           <a:prstGeom prst="rect">
             <a:avLst/>
@@ -17033,6 +17044,11 @@
             <a:noAutofit/>
           </a:bodyPr>
           <a:p>
+            <a:pPr>
+              <a:lnSpc>
+                <a:spcPct val="100000"/>
+              </a:lnSpc>
+            </a:pPr>
             <a:endParaRPr b="0" lang="en-US" sz="1800" spc="-1" strike="noStrike">
               <a:solidFill>
                 <a:schemeClr val="lt1"/>
@@ -17052,7 +17068,7 @@
         <p:spPr>
           <a:xfrm>
             <a:off x="1828800" y="0"/>
-            <a:ext cx="15480" cy="6855120"/>
+            <a:ext cx="14760" cy="6854400"/>
           </a:xfrm>
           <a:prstGeom prst="rect">
             <a:avLst/>
@@ -17088,6 +17104,11 @@
             <a:noAutofit/>
           </a:bodyPr>
           <a:p>
+            <a:pPr>
+              <a:lnSpc>
+                <a:spcPct val="100000"/>
+              </a:lnSpc>
+            </a:pPr>
             <a:endParaRPr b="0" lang="en-US" sz="1800" spc="-1" strike="noStrike">
               <a:solidFill>
                 <a:schemeClr val="lt1"/>
@@ -17107,7 +17128,7 @@
         <p:spPr>
           <a:xfrm>
             <a:off x="2743200" y="0"/>
-            <a:ext cx="15480" cy="6855120"/>
+            <a:ext cx="14760" cy="6854400"/>
           </a:xfrm>
           <a:prstGeom prst="rect">
             <a:avLst/>
@@ -17143,6 +17164,11 @@
             <a:noAutofit/>
           </a:bodyPr>
           <a:p>
+            <a:pPr>
+              <a:lnSpc>
+                <a:spcPct val="100000"/>
+              </a:lnSpc>
+            </a:pPr>
             <a:endParaRPr b="0" lang="en-US" sz="1800" spc="-1" strike="noStrike">
               <a:solidFill>
                 <a:schemeClr val="lt1"/>
@@ -17162,7 +17188,7 @@
         <p:spPr>
           <a:xfrm>
             <a:off x="3657600" y="0"/>
-            <a:ext cx="15480" cy="6855120"/>
+            <a:ext cx="14760" cy="6854400"/>
           </a:xfrm>
           <a:prstGeom prst="rect">
             <a:avLst/>
@@ -17198,6 +17224,11 @@
             <a:noAutofit/>
           </a:bodyPr>
           <a:p>
+            <a:pPr>
+              <a:lnSpc>
+                <a:spcPct val="100000"/>
+              </a:lnSpc>
+            </a:pPr>
             <a:endParaRPr b="0" lang="en-US" sz="1800" spc="-1" strike="noStrike">
               <a:solidFill>
                 <a:schemeClr val="lt1"/>
@@ -17217,7 +17248,7 @@
         <p:spPr>
           <a:xfrm>
             <a:off x="4572000" y="0"/>
-            <a:ext cx="15480" cy="6855120"/>
+            <a:ext cx="14760" cy="6854400"/>
           </a:xfrm>
           <a:prstGeom prst="rect">
             <a:avLst/>
@@ -17253,6 +17284,11 @@
             <a:noAutofit/>
           </a:bodyPr>
           <a:p>
+            <a:pPr>
+              <a:lnSpc>
+                <a:spcPct val="100000"/>
+              </a:lnSpc>
+            </a:pPr>
             <a:endParaRPr b="0" lang="en-US" sz="1800" spc="-1" strike="noStrike">
               <a:solidFill>
                 <a:schemeClr val="lt1"/>
@@ -17272,7 +17308,7 @@
         <p:spPr>
           <a:xfrm>
             <a:off x="5486400" y="0"/>
-            <a:ext cx="15480" cy="6855120"/>
+            <a:ext cx="14760" cy="6854400"/>
           </a:xfrm>
           <a:prstGeom prst="rect">
             <a:avLst/>
@@ -17308,6 +17344,11 @@
             <a:noAutofit/>
           </a:bodyPr>
           <a:p>
+            <a:pPr>
+              <a:lnSpc>
+                <a:spcPct val="100000"/>
+              </a:lnSpc>
+            </a:pPr>
             <a:endParaRPr b="0" lang="en-US" sz="1800" spc="-1" strike="noStrike">
               <a:solidFill>
                 <a:schemeClr val="lt1"/>
@@ -17327,7 +17368,7 @@
         <p:spPr>
           <a:xfrm>
             <a:off x="6400800" y="0"/>
-            <a:ext cx="15480" cy="6855120"/>
+            <a:ext cx="14760" cy="6854400"/>
           </a:xfrm>
           <a:prstGeom prst="rect">
             <a:avLst/>
@@ -17363,6 +17404,11 @@
             <a:noAutofit/>
           </a:bodyPr>
           <a:p>
+            <a:pPr>
+              <a:lnSpc>
+                <a:spcPct val="100000"/>
+              </a:lnSpc>
+            </a:pPr>
             <a:endParaRPr b="0" lang="en-US" sz="1800" spc="-1" strike="noStrike">
               <a:solidFill>
                 <a:schemeClr val="lt1"/>
@@ -17382,7 +17428,7 @@
         <p:spPr>
           <a:xfrm>
             <a:off x="7315200" y="0"/>
-            <a:ext cx="15480" cy="6855120"/>
+            <a:ext cx="14760" cy="6854400"/>
           </a:xfrm>
           <a:prstGeom prst="rect">
             <a:avLst/>
@@ -17418,6 +17464,11 @@
             <a:noAutofit/>
           </a:bodyPr>
           <a:p>
+            <a:pPr>
+              <a:lnSpc>
+                <a:spcPct val="100000"/>
+              </a:lnSpc>
+            </a:pPr>
             <a:endParaRPr b="0" lang="en-US" sz="1800" spc="-1" strike="noStrike">
               <a:solidFill>
                 <a:schemeClr val="lt1"/>
@@ -17437,7 +17488,7 @@
         <p:spPr>
           <a:xfrm>
             <a:off x="8229600" y="0"/>
-            <a:ext cx="15480" cy="6855120"/>
+            <a:ext cx="14760" cy="6854400"/>
           </a:xfrm>
           <a:prstGeom prst="rect">
             <a:avLst/>
@@ -17473,6 +17524,11 @@
             <a:noAutofit/>
           </a:bodyPr>
           <a:p>
+            <a:pPr>
+              <a:lnSpc>
+                <a:spcPct val="100000"/>
+              </a:lnSpc>
+            </a:pPr>
             <a:endParaRPr b="0" lang="en-US" sz="1800" spc="-1" strike="noStrike">
               <a:solidFill>
                 <a:schemeClr val="lt1"/>
@@ -17492,7 +17548,7 @@
         <p:spPr>
           <a:xfrm>
             <a:off x="9144000" y="0"/>
-            <a:ext cx="15480" cy="6855120"/>
+            <a:ext cx="14760" cy="6854400"/>
           </a:xfrm>
           <a:prstGeom prst="rect">
             <a:avLst/>
@@ -17528,6 +17584,11 @@
             <a:noAutofit/>
           </a:bodyPr>
           <a:p>
+            <a:pPr>
+              <a:lnSpc>
+                <a:spcPct val="100000"/>
+              </a:lnSpc>
+            </a:pPr>
             <a:endParaRPr b="0" lang="en-US" sz="1800" spc="-1" strike="noStrike">
               <a:solidFill>
                 <a:schemeClr val="lt1"/>
@@ -17547,7 +17608,7 @@
         <p:spPr>
           <a:xfrm>
             <a:off x="10058400" y="0"/>
-            <a:ext cx="15480" cy="6855120"/>
+            <a:ext cx="14760" cy="6854400"/>
           </a:xfrm>
           <a:prstGeom prst="rect">
             <a:avLst/>
@@ -17583,6 +17644,11 @@
             <a:noAutofit/>
           </a:bodyPr>
           <a:p>
+            <a:pPr>
+              <a:lnSpc>
+                <a:spcPct val="100000"/>
+              </a:lnSpc>
+            </a:pPr>
             <a:endParaRPr b="0" lang="en-US" sz="1800" spc="-1" strike="noStrike">
               <a:solidFill>
                 <a:schemeClr val="lt1"/>
@@ -17602,7 +17668,7 @@
         <p:spPr>
           <a:xfrm>
             <a:off x="10972800" y="0"/>
-            <a:ext cx="15480" cy="6855120"/>
+            <a:ext cx="14760" cy="6854400"/>
           </a:xfrm>
           <a:prstGeom prst="rect">
             <a:avLst/>
@@ -17638,6 +17704,11 @@
             <a:noAutofit/>
           </a:bodyPr>
           <a:p>
+            <a:pPr>
+              <a:lnSpc>
+                <a:spcPct val="100000"/>
+              </a:lnSpc>
+            </a:pPr>
             <a:endParaRPr b="0" lang="en-US" sz="1800" spc="-1" strike="noStrike">
               <a:solidFill>
                 <a:schemeClr val="lt1"/>
@@ -17657,7 +17728,7 @@
         <p:spPr>
           <a:xfrm>
             <a:off x="11887200" y="0"/>
-            <a:ext cx="15480" cy="6855120"/>
+            <a:ext cx="14760" cy="6854400"/>
           </a:xfrm>
           <a:prstGeom prst="rect">
             <a:avLst/>
@@ -17693,6 +17764,11 @@
             <a:noAutofit/>
           </a:bodyPr>
           <a:p>
+            <a:pPr>
+              <a:lnSpc>
+                <a:spcPct val="100000"/>
+              </a:lnSpc>
+            </a:pPr>
             <a:endParaRPr b="0" lang="en-US" sz="1800" spc="-1" strike="noStrike">
               <a:solidFill>
                 <a:schemeClr val="lt1"/>
@@ -17712,7 +17788,7 @@
         <p:spPr>
           <a:xfrm>
             <a:off x="0" y="0"/>
-            <a:ext cx="317160" cy="6855120"/>
+            <a:ext cx="316440" cy="6854400"/>
           </a:xfrm>
           <a:prstGeom prst="rect">
             <a:avLst/>
@@ -17748,6 +17824,11 @@
             <a:noAutofit/>
           </a:bodyPr>
           <a:p>
+            <a:pPr>
+              <a:lnSpc>
+                <a:spcPct val="100000"/>
+              </a:lnSpc>
+            </a:pPr>
             <a:endParaRPr b="0" lang="en-US" sz="1800" spc="-1" strike="noStrike">
               <a:solidFill>
                 <a:schemeClr val="lt1"/>
@@ -17767,7 +17848,7 @@
         <p:spPr>
           <a:xfrm>
             <a:off x="9875520" y="365760"/>
-            <a:ext cx="2008800" cy="500040"/>
+            <a:ext cx="2008080" cy="499320"/>
           </a:xfrm>
           <a:prstGeom prst="roundRect">
             <a:avLst>
@@ -17841,7 +17922,7 @@
         <p:spPr>
           <a:xfrm>
             <a:off x="2106360" y="914400"/>
-            <a:ext cx="6757200" cy="942840"/>
+            <a:ext cx="6756480" cy="942840"/>
           </a:xfrm>
           <a:prstGeom prst="rect">
             <a:avLst/>
@@ -17908,7 +17989,7 @@
         <p:spPr>
           <a:xfrm>
             <a:off x="1124280" y="1565280"/>
-            <a:ext cx="9253440" cy="819720"/>
+            <a:ext cx="9252720" cy="819720"/>
           </a:xfrm>
           <a:prstGeom prst="rect">
             <a:avLst/>
@@ -18008,7 +18089,7 @@
         <p:spPr>
           <a:xfrm>
             <a:off x="987480" y="3182040"/>
-            <a:ext cx="3288960" cy="2740320"/>
+            <a:ext cx="3288240" cy="2739600"/>
           </a:xfrm>
           <a:prstGeom prst="roundRect">
             <a:avLst>
@@ -18046,6 +18127,11 @@
             <a:noAutofit/>
           </a:bodyPr>
           <a:p>
+            <a:pPr>
+              <a:lnSpc>
+                <a:spcPct val="100000"/>
+              </a:lnSpc>
+            </a:pPr>
             <a:endParaRPr b="0" lang="en-US" sz="1800" spc="-1" strike="noStrike">
               <a:solidFill>
                 <a:schemeClr val="lt1"/>
@@ -18065,7 +18151,7 @@
         <p:spPr>
           <a:xfrm>
             <a:off x="457200" y="2743200"/>
-            <a:ext cx="3886200" cy="3885480"/>
+            <a:ext cx="3885480" cy="3884760"/>
           </a:xfrm>
           <a:prstGeom prst="roundRect">
             <a:avLst>
@@ -18379,7 +18465,7 @@
         <p:spPr>
           <a:xfrm>
             <a:off x="4507920" y="3182040"/>
-            <a:ext cx="3288960" cy="2740320"/>
+            <a:ext cx="3288240" cy="2739600"/>
           </a:xfrm>
           <a:prstGeom prst="roundRect">
             <a:avLst>
@@ -18417,6 +18503,11 @@
             <a:noAutofit/>
           </a:bodyPr>
           <a:p>
+            <a:pPr>
+              <a:lnSpc>
+                <a:spcPct val="100000"/>
+              </a:lnSpc>
+            </a:pPr>
             <a:endParaRPr b="0" lang="en-US" sz="1800" spc="-1" strike="noStrike">
               <a:solidFill>
                 <a:schemeClr val="lt1"/>
@@ -18436,7 +18527,7 @@
         <p:spPr>
           <a:xfrm>
             <a:off x="4572000" y="2743200"/>
-            <a:ext cx="3429000" cy="3657600"/>
+            <a:ext cx="3428280" cy="3656880"/>
           </a:xfrm>
           <a:prstGeom prst="roundRect">
             <a:avLst>
@@ -18988,7 +19079,7 @@
         <p:spPr>
           <a:xfrm>
             <a:off x="8028360" y="3182040"/>
-            <a:ext cx="3288960" cy="2740320"/>
+            <a:ext cx="3288240" cy="2739600"/>
           </a:xfrm>
           <a:prstGeom prst="roundRect">
             <a:avLst>
@@ -19026,6 +19117,11 @@
             <a:noAutofit/>
           </a:bodyPr>
           <a:p>
+            <a:pPr>
+              <a:lnSpc>
+                <a:spcPct val="100000"/>
+              </a:lnSpc>
+            </a:pPr>
             <a:endParaRPr b="0" lang="en-US" sz="1800" spc="-1" strike="noStrike">
               <a:solidFill>
                 <a:schemeClr val="lt1"/>
@@ -19045,7 +19141,7 @@
         <p:spPr>
           <a:xfrm>
             <a:off x="8229600" y="2514600"/>
-            <a:ext cx="3657600" cy="4114800"/>
+            <a:ext cx="3656880" cy="4114080"/>
           </a:xfrm>
           <a:prstGeom prst="roundRect">
             <a:avLst>
@@ -19947,6 +20043,2939 @@
       <p:sp>
         <p:nvSpPr>
           <p:cNvPr id="222" name="TextBox 23"/>
+          <p:cNvSpPr/>
+          <p:nvPr/>
+        </p:nvSpPr>
+        <p:spPr>
+          <a:xfrm>
+            <a:off x="4600080" y="6446520"/>
+            <a:ext cx="3051000" cy="363960"/>
+          </a:xfrm>
+          <a:prstGeom prst="rect">
+            <a:avLst/>
+          </a:prstGeom>
+          <a:noFill/>
+          <a:ln w="0">
+            <a:noFill/>
+          </a:ln>
+        </p:spPr>
+        <p:style>
+          <a:lnRef idx="0"/>
+          <a:fillRef idx="0"/>
+          <a:effectRef idx="0"/>
+          <a:fontRef idx="minor"/>
+        </p:style>
+        <p:txBody>
+          <a:bodyPr wrap="none" lIns="90000" rIns="90000" tIns="45000" bIns="45000" anchor="t">
+            <a:spAutoFit/>
+          </a:bodyPr>
+          <a:p>
+            <a:pPr>
+              <a:lnSpc>
+                <a:spcPct val="100000"/>
+              </a:lnSpc>
+            </a:pPr>
+            <a:r>
+              <a:rPr b="0" lang="en-US" sz="1800" spc="-1" strike="noStrike">
+                <a:solidFill>
+                  <a:srgbClr val="000000"/>
+                </a:solidFill>
+                <a:latin typeface="Calibri"/>
+                <a:ea typeface="DejaVu Sans"/>
+              </a:rPr>
+              <a:t>Java • Ultra Premium Template</a:t>
+            </a:r>
+            <a:endParaRPr b="0" lang="en-US" sz="1800" spc="-1" strike="noStrike">
+              <a:solidFill>
+                <a:srgbClr val="000000"/>
+              </a:solidFill>
+              <a:latin typeface="Arial"/>
+            </a:endParaRPr>
+          </a:p>
+        </p:txBody>
+      </p:sp>
+    </p:spTree>
+  </p:cSld>
+  <mc:AlternateContent>
+    <mc:Choice Requires="p14">
+      <p:transition spd="slow" p14:dur="2000"/>
+    </mc:Choice>
+    <mc:Fallback>
+      <p:transition spd="slow"/>
+    </mc:Fallback>
+  </mc:AlternateContent>
+</p:sld>
+</file>
+
+<file path=ppt/slides/slide8.xml><?xml version="1.0" encoding="utf-8"?>
+<p:sld xmlns:a="http://schemas.openxmlformats.org/drawingml/2006/main" xmlns:p="http://schemas.openxmlformats.org/presentationml/2006/main" xmlns:r="http://schemas.openxmlformats.org/officeDocument/2006/relationships" xmlns:p14="http://schemas.microsoft.com/office/powerpoint/2010/main" xmlns:p15="http://schemas.microsoft.com/office/powerpoint/2012/main" xmlns:mc="http://schemas.openxmlformats.org/markup-compatibility/2006">
+  <p:cSld>
+    <p:spTree>
+      <p:nvGrpSpPr>
+        <p:cNvPr id="1" name=""/>
+        <p:cNvGrpSpPr/>
+        <p:nvPr/>
+      </p:nvGrpSpPr>
+      <p:grpSpPr>
+        <a:xfrm>
+          <a:off x="0" y="0"/>
+          <a:ext cx="0" cy="0"/>
+          <a:chOff x="0" y="0"/>
+          <a:chExt cx="0" cy="0"/>
+        </a:xfrm>
+      </p:grpSpPr>
+      <p:sp>
+        <p:nvSpPr>
+          <p:cNvPr id="223" name="Rectangle 113"/>
+          <p:cNvSpPr/>
+          <p:nvPr/>
+        </p:nvSpPr>
+        <p:spPr>
+          <a:xfrm>
+            <a:off x="0" y="0"/>
+            <a:ext cx="12185280" cy="6854400"/>
+          </a:xfrm>
+          <a:prstGeom prst="rect">
+            <a:avLst/>
+          </a:prstGeom>
+          <a:solidFill>
+            <a:srgbClr val="0b0b0d"/>
+          </a:solidFill>
+          <a:ln>
+            <a:noFill/>
+          </a:ln>
+          <a:effectLst>
+            <a:outerShdw blurRad="39960" dir="5400000" dist="23040" rotWithShape="0">
+              <a:srgbClr val="000000">
+                <a:alpha val="35000"/>
+              </a:srgbClr>
+            </a:outerShdw>
+          </a:effectLst>
+        </p:spPr>
+        <p:style>
+          <a:lnRef idx="1">
+            <a:schemeClr val="accent1"/>
+          </a:lnRef>
+          <a:fillRef idx="3">
+            <a:schemeClr val="accent1"/>
+          </a:fillRef>
+          <a:effectRef idx="2">
+            <a:schemeClr val="accent1"/>
+          </a:effectRef>
+          <a:fontRef idx="minor"/>
+        </p:style>
+        <p:txBody>
+          <a:bodyPr lIns="90000" rIns="90000" tIns="45000" bIns="45000" anchor="ctr">
+            <a:noAutofit/>
+          </a:bodyPr>
+          <a:p>
+            <a:pPr>
+              <a:lnSpc>
+                <a:spcPct val="100000"/>
+              </a:lnSpc>
+            </a:pPr>
+            <a:endParaRPr b="0" lang="en-US" sz="1800" spc="-1" strike="noStrike">
+              <a:solidFill>
+                <a:schemeClr val="lt1"/>
+              </a:solidFill>
+              <a:latin typeface="Calibri"/>
+              <a:ea typeface="DejaVu Sans"/>
+            </a:endParaRPr>
+          </a:p>
+        </p:txBody>
+      </p:sp>
+      <p:sp>
+        <p:nvSpPr>
+          <p:cNvPr id="224" name="Rectangle 114"/>
+          <p:cNvSpPr/>
+          <p:nvPr/>
+        </p:nvSpPr>
+        <p:spPr>
+          <a:xfrm>
+            <a:off x="0" y="0"/>
+            <a:ext cx="14760" cy="6854400"/>
+          </a:xfrm>
+          <a:prstGeom prst="rect">
+            <a:avLst/>
+          </a:prstGeom>
+          <a:solidFill>
+            <a:srgbClr val="121216"/>
+          </a:solidFill>
+          <a:ln>
+            <a:noFill/>
+          </a:ln>
+          <a:effectLst>
+            <a:outerShdw blurRad="39960" dir="5400000" dist="23040" rotWithShape="0">
+              <a:srgbClr val="000000">
+                <a:alpha val="35000"/>
+              </a:srgbClr>
+            </a:outerShdw>
+          </a:effectLst>
+        </p:spPr>
+        <p:style>
+          <a:lnRef idx="1">
+            <a:schemeClr val="accent1"/>
+          </a:lnRef>
+          <a:fillRef idx="3">
+            <a:schemeClr val="accent1"/>
+          </a:fillRef>
+          <a:effectRef idx="2">
+            <a:schemeClr val="accent1"/>
+          </a:effectRef>
+          <a:fontRef idx="minor"/>
+        </p:style>
+        <p:txBody>
+          <a:bodyPr lIns="90000" rIns="90000" tIns="45000" bIns="45000" anchor="ctr">
+            <a:noAutofit/>
+          </a:bodyPr>
+          <a:p>
+            <a:pPr>
+              <a:lnSpc>
+                <a:spcPct val="100000"/>
+              </a:lnSpc>
+            </a:pPr>
+            <a:endParaRPr b="0" lang="en-US" sz="1800" spc="-1" strike="noStrike">
+              <a:solidFill>
+                <a:schemeClr val="lt1"/>
+              </a:solidFill>
+              <a:latin typeface="Calibri"/>
+              <a:ea typeface="DejaVu Sans"/>
+            </a:endParaRPr>
+          </a:p>
+        </p:txBody>
+      </p:sp>
+      <p:sp>
+        <p:nvSpPr>
+          <p:cNvPr id="225" name="Rectangle 115"/>
+          <p:cNvSpPr/>
+          <p:nvPr/>
+        </p:nvSpPr>
+        <p:spPr>
+          <a:xfrm>
+            <a:off x="914400" y="0"/>
+            <a:ext cx="14760" cy="6854400"/>
+          </a:xfrm>
+          <a:prstGeom prst="rect">
+            <a:avLst/>
+          </a:prstGeom>
+          <a:solidFill>
+            <a:srgbClr val="121216"/>
+          </a:solidFill>
+          <a:ln>
+            <a:noFill/>
+          </a:ln>
+          <a:effectLst>
+            <a:outerShdw blurRad="39960" dir="5400000" dist="23040" rotWithShape="0">
+              <a:srgbClr val="000000">
+                <a:alpha val="35000"/>
+              </a:srgbClr>
+            </a:outerShdw>
+          </a:effectLst>
+        </p:spPr>
+        <p:style>
+          <a:lnRef idx="1">
+            <a:schemeClr val="accent1"/>
+          </a:lnRef>
+          <a:fillRef idx="3">
+            <a:schemeClr val="accent1"/>
+          </a:fillRef>
+          <a:effectRef idx="2">
+            <a:schemeClr val="accent1"/>
+          </a:effectRef>
+          <a:fontRef idx="minor"/>
+        </p:style>
+        <p:txBody>
+          <a:bodyPr lIns="90000" rIns="90000" tIns="45000" bIns="45000" anchor="ctr">
+            <a:noAutofit/>
+          </a:bodyPr>
+          <a:p>
+            <a:pPr>
+              <a:lnSpc>
+                <a:spcPct val="100000"/>
+              </a:lnSpc>
+            </a:pPr>
+            <a:endParaRPr b="0" lang="en-US" sz="1800" spc="-1" strike="noStrike">
+              <a:solidFill>
+                <a:schemeClr val="lt1"/>
+              </a:solidFill>
+              <a:latin typeface="Calibri"/>
+              <a:ea typeface="DejaVu Sans"/>
+            </a:endParaRPr>
+          </a:p>
+        </p:txBody>
+      </p:sp>
+      <p:sp>
+        <p:nvSpPr>
+          <p:cNvPr id="226" name="Rectangle 116"/>
+          <p:cNvSpPr/>
+          <p:nvPr/>
+        </p:nvSpPr>
+        <p:spPr>
+          <a:xfrm>
+            <a:off x="1828800" y="0"/>
+            <a:ext cx="14760" cy="6854400"/>
+          </a:xfrm>
+          <a:prstGeom prst="rect">
+            <a:avLst/>
+          </a:prstGeom>
+          <a:solidFill>
+            <a:srgbClr val="121216"/>
+          </a:solidFill>
+          <a:ln>
+            <a:noFill/>
+          </a:ln>
+          <a:effectLst>
+            <a:outerShdw blurRad="39960" dir="5400000" dist="23040" rotWithShape="0">
+              <a:srgbClr val="000000">
+                <a:alpha val="35000"/>
+              </a:srgbClr>
+            </a:outerShdw>
+          </a:effectLst>
+        </p:spPr>
+        <p:style>
+          <a:lnRef idx="1">
+            <a:schemeClr val="accent1"/>
+          </a:lnRef>
+          <a:fillRef idx="3">
+            <a:schemeClr val="accent1"/>
+          </a:fillRef>
+          <a:effectRef idx="2">
+            <a:schemeClr val="accent1"/>
+          </a:effectRef>
+          <a:fontRef idx="minor"/>
+        </p:style>
+        <p:txBody>
+          <a:bodyPr lIns="90000" rIns="90000" tIns="45000" bIns="45000" anchor="ctr">
+            <a:noAutofit/>
+          </a:bodyPr>
+          <a:p>
+            <a:pPr>
+              <a:lnSpc>
+                <a:spcPct val="100000"/>
+              </a:lnSpc>
+            </a:pPr>
+            <a:endParaRPr b="0" lang="en-US" sz="1800" spc="-1" strike="noStrike">
+              <a:solidFill>
+                <a:schemeClr val="lt1"/>
+              </a:solidFill>
+              <a:latin typeface="Calibri"/>
+              <a:ea typeface="DejaVu Sans"/>
+            </a:endParaRPr>
+          </a:p>
+        </p:txBody>
+      </p:sp>
+      <p:sp>
+        <p:nvSpPr>
+          <p:cNvPr id="227" name="Rectangle 117"/>
+          <p:cNvSpPr/>
+          <p:nvPr/>
+        </p:nvSpPr>
+        <p:spPr>
+          <a:xfrm>
+            <a:off x="2743200" y="0"/>
+            <a:ext cx="14760" cy="6854400"/>
+          </a:xfrm>
+          <a:prstGeom prst="rect">
+            <a:avLst/>
+          </a:prstGeom>
+          <a:solidFill>
+            <a:srgbClr val="121216"/>
+          </a:solidFill>
+          <a:ln>
+            <a:noFill/>
+          </a:ln>
+          <a:effectLst>
+            <a:outerShdw blurRad="39960" dir="5400000" dist="23040" rotWithShape="0">
+              <a:srgbClr val="000000">
+                <a:alpha val="35000"/>
+              </a:srgbClr>
+            </a:outerShdw>
+          </a:effectLst>
+        </p:spPr>
+        <p:style>
+          <a:lnRef idx="1">
+            <a:schemeClr val="accent1"/>
+          </a:lnRef>
+          <a:fillRef idx="3">
+            <a:schemeClr val="accent1"/>
+          </a:fillRef>
+          <a:effectRef idx="2">
+            <a:schemeClr val="accent1"/>
+          </a:effectRef>
+          <a:fontRef idx="minor"/>
+        </p:style>
+        <p:txBody>
+          <a:bodyPr lIns="90000" rIns="90000" tIns="45000" bIns="45000" anchor="ctr">
+            <a:noAutofit/>
+          </a:bodyPr>
+          <a:p>
+            <a:pPr>
+              <a:lnSpc>
+                <a:spcPct val="100000"/>
+              </a:lnSpc>
+            </a:pPr>
+            <a:endParaRPr b="0" lang="en-US" sz="1800" spc="-1" strike="noStrike">
+              <a:solidFill>
+                <a:schemeClr val="lt1"/>
+              </a:solidFill>
+              <a:latin typeface="Calibri"/>
+              <a:ea typeface="DejaVu Sans"/>
+            </a:endParaRPr>
+          </a:p>
+        </p:txBody>
+      </p:sp>
+      <p:sp>
+        <p:nvSpPr>
+          <p:cNvPr id="228" name="Rectangle 118"/>
+          <p:cNvSpPr/>
+          <p:nvPr/>
+        </p:nvSpPr>
+        <p:spPr>
+          <a:xfrm>
+            <a:off x="3657600" y="0"/>
+            <a:ext cx="14760" cy="6854400"/>
+          </a:xfrm>
+          <a:prstGeom prst="rect">
+            <a:avLst/>
+          </a:prstGeom>
+          <a:solidFill>
+            <a:srgbClr val="121216"/>
+          </a:solidFill>
+          <a:ln>
+            <a:noFill/>
+          </a:ln>
+          <a:effectLst>
+            <a:outerShdw blurRad="39960" dir="5400000" dist="23040" rotWithShape="0">
+              <a:srgbClr val="000000">
+                <a:alpha val="35000"/>
+              </a:srgbClr>
+            </a:outerShdw>
+          </a:effectLst>
+        </p:spPr>
+        <p:style>
+          <a:lnRef idx="1">
+            <a:schemeClr val="accent1"/>
+          </a:lnRef>
+          <a:fillRef idx="3">
+            <a:schemeClr val="accent1"/>
+          </a:fillRef>
+          <a:effectRef idx="2">
+            <a:schemeClr val="accent1"/>
+          </a:effectRef>
+          <a:fontRef idx="minor"/>
+        </p:style>
+        <p:txBody>
+          <a:bodyPr lIns="90000" rIns="90000" tIns="45000" bIns="45000" anchor="ctr">
+            <a:noAutofit/>
+          </a:bodyPr>
+          <a:p>
+            <a:pPr>
+              <a:lnSpc>
+                <a:spcPct val="100000"/>
+              </a:lnSpc>
+            </a:pPr>
+            <a:endParaRPr b="0" lang="en-US" sz="1800" spc="-1" strike="noStrike">
+              <a:solidFill>
+                <a:schemeClr val="lt1"/>
+              </a:solidFill>
+              <a:latin typeface="Calibri"/>
+              <a:ea typeface="DejaVu Sans"/>
+            </a:endParaRPr>
+          </a:p>
+        </p:txBody>
+      </p:sp>
+      <p:sp>
+        <p:nvSpPr>
+          <p:cNvPr id="229" name="Rectangle 119"/>
+          <p:cNvSpPr/>
+          <p:nvPr/>
+        </p:nvSpPr>
+        <p:spPr>
+          <a:xfrm>
+            <a:off x="4572000" y="0"/>
+            <a:ext cx="14760" cy="6854400"/>
+          </a:xfrm>
+          <a:prstGeom prst="rect">
+            <a:avLst/>
+          </a:prstGeom>
+          <a:solidFill>
+            <a:srgbClr val="121216"/>
+          </a:solidFill>
+          <a:ln>
+            <a:noFill/>
+          </a:ln>
+          <a:effectLst>
+            <a:outerShdw blurRad="39960" dir="5400000" dist="23040" rotWithShape="0">
+              <a:srgbClr val="000000">
+                <a:alpha val="35000"/>
+              </a:srgbClr>
+            </a:outerShdw>
+          </a:effectLst>
+        </p:spPr>
+        <p:style>
+          <a:lnRef idx="1">
+            <a:schemeClr val="accent1"/>
+          </a:lnRef>
+          <a:fillRef idx="3">
+            <a:schemeClr val="accent1"/>
+          </a:fillRef>
+          <a:effectRef idx="2">
+            <a:schemeClr val="accent1"/>
+          </a:effectRef>
+          <a:fontRef idx="minor"/>
+        </p:style>
+        <p:txBody>
+          <a:bodyPr lIns="90000" rIns="90000" tIns="45000" bIns="45000" anchor="ctr">
+            <a:noAutofit/>
+          </a:bodyPr>
+          <a:p>
+            <a:pPr>
+              <a:lnSpc>
+                <a:spcPct val="100000"/>
+              </a:lnSpc>
+            </a:pPr>
+            <a:endParaRPr b="0" lang="en-US" sz="1800" spc="-1" strike="noStrike">
+              <a:solidFill>
+                <a:schemeClr val="lt1"/>
+              </a:solidFill>
+              <a:latin typeface="Calibri"/>
+              <a:ea typeface="DejaVu Sans"/>
+            </a:endParaRPr>
+          </a:p>
+        </p:txBody>
+      </p:sp>
+      <p:sp>
+        <p:nvSpPr>
+          <p:cNvPr id="230" name="Rectangle 120"/>
+          <p:cNvSpPr/>
+          <p:nvPr/>
+        </p:nvSpPr>
+        <p:spPr>
+          <a:xfrm>
+            <a:off x="5486400" y="0"/>
+            <a:ext cx="14760" cy="6854400"/>
+          </a:xfrm>
+          <a:prstGeom prst="rect">
+            <a:avLst/>
+          </a:prstGeom>
+          <a:solidFill>
+            <a:srgbClr val="121216"/>
+          </a:solidFill>
+          <a:ln>
+            <a:noFill/>
+          </a:ln>
+          <a:effectLst>
+            <a:outerShdw blurRad="39960" dir="5400000" dist="23040" rotWithShape="0">
+              <a:srgbClr val="000000">
+                <a:alpha val="35000"/>
+              </a:srgbClr>
+            </a:outerShdw>
+          </a:effectLst>
+        </p:spPr>
+        <p:style>
+          <a:lnRef idx="1">
+            <a:schemeClr val="accent1"/>
+          </a:lnRef>
+          <a:fillRef idx="3">
+            <a:schemeClr val="accent1"/>
+          </a:fillRef>
+          <a:effectRef idx="2">
+            <a:schemeClr val="accent1"/>
+          </a:effectRef>
+          <a:fontRef idx="minor"/>
+        </p:style>
+        <p:txBody>
+          <a:bodyPr lIns="90000" rIns="90000" tIns="45000" bIns="45000" anchor="ctr">
+            <a:noAutofit/>
+          </a:bodyPr>
+          <a:p>
+            <a:pPr>
+              <a:lnSpc>
+                <a:spcPct val="100000"/>
+              </a:lnSpc>
+            </a:pPr>
+            <a:endParaRPr b="0" lang="en-US" sz="1800" spc="-1" strike="noStrike">
+              <a:solidFill>
+                <a:schemeClr val="lt1"/>
+              </a:solidFill>
+              <a:latin typeface="Calibri"/>
+              <a:ea typeface="DejaVu Sans"/>
+            </a:endParaRPr>
+          </a:p>
+        </p:txBody>
+      </p:sp>
+      <p:sp>
+        <p:nvSpPr>
+          <p:cNvPr id="231" name="Rectangle 121"/>
+          <p:cNvSpPr/>
+          <p:nvPr/>
+        </p:nvSpPr>
+        <p:spPr>
+          <a:xfrm>
+            <a:off x="6400800" y="0"/>
+            <a:ext cx="14760" cy="6854400"/>
+          </a:xfrm>
+          <a:prstGeom prst="rect">
+            <a:avLst/>
+          </a:prstGeom>
+          <a:solidFill>
+            <a:srgbClr val="121216"/>
+          </a:solidFill>
+          <a:ln>
+            <a:noFill/>
+          </a:ln>
+          <a:effectLst>
+            <a:outerShdw blurRad="39960" dir="5400000" dist="23040" rotWithShape="0">
+              <a:srgbClr val="000000">
+                <a:alpha val="35000"/>
+              </a:srgbClr>
+            </a:outerShdw>
+          </a:effectLst>
+        </p:spPr>
+        <p:style>
+          <a:lnRef idx="1">
+            <a:schemeClr val="accent1"/>
+          </a:lnRef>
+          <a:fillRef idx="3">
+            <a:schemeClr val="accent1"/>
+          </a:fillRef>
+          <a:effectRef idx="2">
+            <a:schemeClr val="accent1"/>
+          </a:effectRef>
+          <a:fontRef idx="minor"/>
+        </p:style>
+        <p:txBody>
+          <a:bodyPr lIns="90000" rIns="90000" tIns="45000" bIns="45000" anchor="ctr">
+            <a:noAutofit/>
+          </a:bodyPr>
+          <a:p>
+            <a:pPr>
+              <a:lnSpc>
+                <a:spcPct val="100000"/>
+              </a:lnSpc>
+            </a:pPr>
+            <a:endParaRPr b="0" lang="en-US" sz="1800" spc="-1" strike="noStrike">
+              <a:solidFill>
+                <a:schemeClr val="lt1"/>
+              </a:solidFill>
+              <a:latin typeface="Calibri"/>
+              <a:ea typeface="DejaVu Sans"/>
+            </a:endParaRPr>
+          </a:p>
+        </p:txBody>
+      </p:sp>
+      <p:sp>
+        <p:nvSpPr>
+          <p:cNvPr id="232" name="Rectangle 122"/>
+          <p:cNvSpPr/>
+          <p:nvPr/>
+        </p:nvSpPr>
+        <p:spPr>
+          <a:xfrm>
+            <a:off x="7315200" y="0"/>
+            <a:ext cx="14760" cy="6854400"/>
+          </a:xfrm>
+          <a:prstGeom prst="rect">
+            <a:avLst/>
+          </a:prstGeom>
+          <a:solidFill>
+            <a:srgbClr val="121216"/>
+          </a:solidFill>
+          <a:ln>
+            <a:noFill/>
+          </a:ln>
+          <a:effectLst>
+            <a:outerShdw blurRad="39960" dir="5400000" dist="23040" rotWithShape="0">
+              <a:srgbClr val="000000">
+                <a:alpha val="35000"/>
+              </a:srgbClr>
+            </a:outerShdw>
+          </a:effectLst>
+        </p:spPr>
+        <p:style>
+          <a:lnRef idx="1">
+            <a:schemeClr val="accent1"/>
+          </a:lnRef>
+          <a:fillRef idx="3">
+            <a:schemeClr val="accent1"/>
+          </a:fillRef>
+          <a:effectRef idx="2">
+            <a:schemeClr val="accent1"/>
+          </a:effectRef>
+          <a:fontRef idx="minor"/>
+        </p:style>
+        <p:txBody>
+          <a:bodyPr lIns="90000" rIns="90000" tIns="45000" bIns="45000" anchor="ctr">
+            <a:noAutofit/>
+          </a:bodyPr>
+          <a:p>
+            <a:pPr>
+              <a:lnSpc>
+                <a:spcPct val="100000"/>
+              </a:lnSpc>
+            </a:pPr>
+            <a:endParaRPr b="0" lang="en-US" sz="1800" spc="-1" strike="noStrike">
+              <a:solidFill>
+                <a:schemeClr val="lt1"/>
+              </a:solidFill>
+              <a:latin typeface="Calibri"/>
+              <a:ea typeface="DejaVu Sans"/>
+            </a:endParaRPr>
+          </a:p>
+        </p:txBody>
+      </p:sp>
+      <p:sp>
+        <p:nvSpPr>
+          <p:cNvPr id="233" name="Rectangle 123"/>
+          <p:cNvSpPr/>
+          <p:nvPr/>
+        </p:nvSpPr>
+        <p:spPr>
+          <a:xfrm>
+            <a:off x="8229600" y="0"/>
+            <a:ext cx="14760" cy="6854400"/>
+          </a:xfrm>
+          <a:prstGeom prst="rect">
+            <a:avLst/>
+          </a:prstGeom>
+          <a:solidFill>
+            <a:srgbClr val="121216"/>
+          </a:solidFill>
+          <a:ln>
+            <a:noFill/>
+          </a:ln>
+          <a:effectLst>
+            <a:outerShdw blurRad="39960" dir="5400000" dist="23040" rotWithShape="0">
+              <a:srgbClr val="000000">
+                <a:alpha val="35000"/>
+              </a:srgbClr>
+            </a:outerShdw>
+          </a:effectLst>
+        </p:spPr>
+        <p:style>
+          <a:lnRef idx="1">
+            <a:schemeClr val="accent1"/>
+          </a:lnRef>
+          <a:fillRef idx="3">
+            <a:schemeClr val="accent1"/>
+          </a:fillRef>
+          <a:effectRef idx="2">
+            <a:schemeClr val="accent1"/>
+          </a:effectRef>
+          <a:fontRef idx="minor"/>
+        </p:style>
+        <p:txBody>
+          <a:bodyPr lIns="90000" rIns="90000" tIns="45000" bIns="45000" anchor="ctr">
+            <a:noAutofit/>
+          </a:bodyPr>
+          <a:p>
+            <a:pPr>
+              <a:lnSpc>
+                <a:spcPct val="100000"/>
+              </a:lnSpc>
+            </a:pPr>
+            <a:endParaRPr b="0" lang="en-US" sz="1800" spc="-1" strike="noStrike">
+              <a:solidFill>
+                <a:schemeClr val="lt1"/>
+              </a:solidFill>
+              <a:latin typeface="Calibri"/>
+              <a:ea typeface="DejaVu Sans"/>
+            </a:endParaRPr>
+          </a:p>
+        </p:txBody>
+      </p:sp>
+      <p:sp>
+        <p:nvSpPr>
+          <p:cNvPr id="234" name="Rectangle 124"/>
+          <p:cNvSpPr/>
+          <p:nvPr/>
+        </p:nvSpPr>
+        <p:spPr>
+          <a:xfrm>
+            <a:off x="9144000" y="0"/>
+            <a:ext cx="14760" cy="6854400"/>
+          </a:xfrm>
+          <a:prstGeom prst="rect">
+            <a:avLst/>
+          </a:prstGeom>
+          <a:solidFill>
+            <a:srgbClr val="121216"/>
+          </a:solidFill>
+          <a:ln>
+            <a:noFill/>
+          </a:ln>
+          <a:effectLst>
+            <a:outerShdw blurRad="39960" dir="5400000" dist="23040" rotWithShape="0">
+              <a:srgbClr val="000000">
+                <a:alpha val="35000"/>
+              </a:srgbClr>
+            </a:outerShdw>
+          </a:effectLst>
+        </p:spPr>
+        <p:style>
+          <a:lnRef idx="1">
+            <a:schemeClr val="accent1"/>
+          </a:lnRef>
+          <a:fillRef idx="3">
+            <a:schemeClr val="accent1"/>
+          </a:fillRef>
+          <a:effectRef idx="2">
+            <a:schemeClr val="accent1"/>
+          </a:effectRef>
+          <a:fontRef idx="minor"/>
+        </p:style>
+        <p:txBody>
+          <a:bodyPr lIns="90000" rIns="90000" tIns="45000" bIns="45000" anchor="ctr">
+            <a:noAutofit/>
+          </a:bodyPr>
+          <a:p>
+            <a:pPr>
+              <a:lnSpc>
+                <a:spcPct val="100000"/>
+              </a:lnSpc>
+            </a:pPr>
+            <a:endParaRPr b="0" lang="en-US" sz="1800" spc="-1" strike="noStrike">
+              <a:solidFill>
+                <a:schemeClr val="lt1"/>
+              </a:solidFill>
+              <a:latin typeface="Calibri"/>
+              <a:ea typeface="DejaVu Sans"/>
+            </a:endParaRPr>
+          </a:p>
+        </p:txBody>
+      </p:sp>
+      <p:sp>
+        <p:nvSpPr>
+          <p:cNvPr id="235" name="Rectangle 125"/>
+          <p:cNvSpPr/>
+          <p:nvPr/>
+        </p:nvSpPr>
+        <p:spPr>
+          <a:xfrm>
+            <a:off x="10058400" y="0"/>
+            <a:ext cx="14760" cy="6854400"/>
+          </a:xfrm>
+          <a:prstGeom prst="rect">
+            <a:avLst/>
+          </a:prstGeom>
+          <a:solidFill>
+            <a:srgbClr val="121216"/>
+          </a:solidFill>
+          <a:ln>
+            <a:noFill/>
+          </a:ln>
+          <a:effectLst>
+            <a:outerShdw blurRad="39960" dir="5400000" dist="23040" rotWithShape="0">
+              <a:srgbClr val="000000">
+                <a:alpha val="35000"/>
+              </a:srgbClr>
+            </a:outerShdw>
+          </a:effectLst>
+        </p:spPr>
+        <p:style>
+          <a:lnRef idx="1">
+            <a:schemeClr val="accent1"/>
+          </a:lnRef>
+          <a:fillRef idx="3">
+            <a:schemeClr val="accent1"/>
+          </a:fillRef>
+          <a:effectRef idx="2">
+            <a:schemeClr val="accent1"/>
+          </a:effectRef>
+          <a:fontRef idx="minor"/>
+        </p:style>
+        <p:txBody>
+          <a:bodyPr lIns="90000" rIns="90000" tIns="45000" bIns="45000" anchor="ctr">
+            <a:noAutofit/>
+          </a:bodyPr>
+          <a:p>
+            <a:pPr>
+              <a:lnSpc>
+                <a:spcPct val="100000"/>
+              </a:lnSpc>
+            </a:pPr>
+            <a:endParaRPr b="0" lang="en-US" sz="1800" spc="-1" strike="noStrike">
+              <a:solidFill>
+                <a:schemeClr val="lt1"/>
+              </a:solidFill>
+              <a:latin typeface="Calibri"/>
+              <a:ea typeface="DejaVu Sans"/>
+            </a:endParaRPr>
+          </a:p>
+        </p:txBody>
+      </p:sp>
+      <p:sp>
+        <p:nvSpPr>
+          <p:cNvPr id="236" name="Rectangle 126"/>
+          <p:cNvSpPr/>
+          <p:nvPr/>
+        </p:nvSpPr>
+        <p:spPr>
+          <a:xfrm>
+            <a:off x="10972800" y="0"/>
+            <a:ext cx="14760" cy="6854400"/>
+          </a:xfrm>
+          <a:prstGeom prst="rect">
+            <a:avLst/>
+          </a:prstGeom>
+          <a:solidFill>
+            <a:srgbClr val="121216"/>
+          </a:solidFill>
+          <a:ln>
+            <a:noFill/>
+          </a:ln>
+          <a:effectLst>
+            <a:outerShdw blurRad="39960" dir="5400000" dist="23040" rotWithShape="0">
+              <a:srgbClr val="000000">
+                <a:alpha val="35000"/>
+              </a:srgbClr>
+            </a:outerShdw>
+          </a:effectLst>
+        </p:spPr>
+        <p:style>
+          <a:lnRef idx="1">
+            <a:schemeClr val="accent1"/>
+          </a:lnRef>
+          <a:fillRef idx="3">
+            <a:schemeClr val="accent1"/>
+          </a:fillRef>
+          <a:effectRef idx="2">
+            <a:schemeClr val="accent1"/>
+          </a:effectRef>
+          <a:fontRef idx="minor"/>
+        </p:style>
+        <p:txBody>
+          <a:bodyPr lIns="90000" rIns="90000" tIns="45000" bIns="45000" anchor="ctr">
+            <a:noAutofit/>
+          </a:bodyPr>
+          <a:p>
+            <a:pPr>
+              <a:lnSpc>
+                <a:spcPct val="100000"/>
+              </a:lnSpc>
+            </a:pPr>
+            <a:endParaRPr b="0" lang="en-US" sz="1800" spc="-1" strike="noStrike">
+              <a:solidFill>
+                <a:schemeClr val="lt1"/>
+              </a:solidFill>
+              <a:latin typeface="Calibri"/>
+              <a:ea typeface="DejaVu Sans"/>
+            </a:endParaRPr>
+          </a:p>
+        </p:txBody>
+      </p:sp>
+      <p:sp>
+        <p:nvSpPr>
+          <p:cNvPr id="237" name="Rectangle 127"/>
+          <p:cNvSpPr/>
+          <p:nvPr/>
+        </p:nvSpPr>
+        <p:spPr>
+          <a:xfrm>
+            <a:off x="11887200" y="0"/>
+            <a:ext cx="14760" cy="6854400"/>
+          </a:xfrm>
+          <a:prstGeom prst="rect">
+            <a:avLst/>
+          </a:prstGeom>
+          <a:solidFill>
+            <a:srgbClr val="121216"/>
+          </a:solidFill>
+          <a:ln>
+            <a:noFill/>
+          </a:ln>
+          <a:effectLst>
+            <a:outerShdw blurRad="39960" dir="5400000" dist="23040" rotWithShape="0">
+              <a:srgbClr val="000000">
+                <a:alpha val="35000"/>
+              </a:srgbClr>
+            </a:outerShdw>
+          </a:effectLst>
+        </p:spPr>
+        <p:style>
+          <a:lnRef idx="1">
+            <a:schemeClr val="accent1"/>
+          </a:lnRef>
+          <a:fillRef idx="3">
+            <a:schemeClr val="accent1"/>
+          </a:fillRef>
+          <a:effectRef idx="2">
+            <a:schemeClr val="accent1"/>
+          </a:effectRef>
+          <a:fontRef idx="minor"/>
+        </p:style>
+        <p:txBody>
+          <a:bodyPr lIns="90000" rIns="90000" tIns="45000" bIns="45000" anchor="ctr">
+            <a:noAutofit/>
+          </a:bodyPr>
+          <a:p>
+            <a:pPr>
+              <a:lnSpc>
+                <a:spcPct val="100000"/>
+              </a:lnSpc>
+            </a:pPr>
+            <a:endParaRPr b="0" lang="en-US" sz="1800" spc="-1" strike="noStrike">
+              <a:solidFill>
+                <a:schemeClr val="lt1"/>
+              </a:solidFill>
+              <a:latin typeface="Calibri"/>
+              <a:ea typeface="DejaVu Sans"/>
+            </a:endParaRPr>
+          </a:p>
+        </p:txBody>
+      </p:sp>
+      <p:sp>
+        <p:nvSpPr>
+          <p:cNvPr id="238" name="Rectangle 128"/>
+          <p:cNvSpPr/>
+          <p:nvPr/>
+        </p:nvSpPr>
+        <p:spPr>
+          <a:xfrm>
+            <a:off x="0" y="0"/>
+            <a:ext cx="316440" cy="6854400"/>
+          </a:xfrm>
+          <a:prstGeom prst="rect">
+            <a:avLst/>
+          </a:prstGeom>
+          <a:solidFill>
+            <a:srgbClr val="ff8c00"/>
+          </a:solidFill>
+          <a:ln>
+            <a:noFill/>
+          </a:ln>
+          <a:effectLst>
+            <a:outerShdw blurRad="39960" dir="5400000" dist="23040" rotWithShape="0">
+              <a:srgbClr val="000000">
+                <a:alpha val="35000"/>
+              </a:srgbClr>
+            </a:outerShdw>
+          </a:effectLst>
+        </p:spPr>
+        <p:style>
+          <a:lnRef idx="1">
+            <a:schemeClr val="accent1"/>
+          </a:lnRef>
+          <a:fillRef idx="3">
+            <a:schemeClr val="accent1"/>
+          </a:fillRef>
+          <a:effectRef idx="2">
+            <a:schemeClr val="accent1"/>
+          </a:effectRef>
+          <a:fontRef idx="minor"/>
+        </p:style>
+        <p:txBody>
+          <a:bodyPr lIns="90000" rIns="90000" tIns="45000" bIns="45000" anchor="ctr">
+            <a:noAutofit/>
+          </a:bodyPr>
+          <a:p>
+            <a:pPr>
+              <a:lnSpc>
+                <a:spcPct val="100000"/>
+              </a:lnSpc>
+            </a:pPr>
+            <a:endParaRPr b="0" lang="en-US" sz="1800" spc="-1" strike="noStrike">
+              <a:solidFill>
+                <a:schemeClr val="lt1"/>
+              </a:solidFill>
+              <a:latin typeface="Calibri"/>
+              <a:ea typeface="DejaVu Sans"/>
+            </a:endParaRPr>
+          </a:p>
+        </p:txBody>
+      </p:sp>
+      <p:sp>
+        <p:nvSpPr>
+          <p:cNvPr id="239" name="Rounded Rectangle 57"/>
+          <p:cNvSpPr/>
+          <p:nvPr/>
+        </p:nvSpPr>
+        <p:spPr>
+          <a:xfrm>
+            <a:off x="9875520" y="365760"/>
+            <a:ext cx="2008080" cy="499320"/>
+          </a:xfrm>
+          <a:prstGeom prst="roundRect">
+            <a:avLst>
+              <a:gd name="adj" fmla="val 16667"/>
+            </a:avLst>
+          </a:prstGeom>
+          <a:solidFill>
+            <a:srgbClr val="1e1e24"/>
+          </a:solidFill>
+          <a:ln>
+            <a:solidFill>
+              <a:srgbClr val="ff8c00"/>
+            </a:solidFill>
+            <a:round/>
+          </a:ln>
+          <a:effectLst>
+            <a:outerShdw blurRad="39960" dir="5400000" dist="23040" rotWithShape="0">
+              <a:srgbClr val="000000">
+                <a:alpha val="35000"/>
+              </a:srgbClr>
+            </a:outerShdw>
+          </a:effectLst>
+        </p:spPr>
+        <p:style>
+          <a:lnRef idx="1">
+            <a:schemeClr val="accent1"/>
+          </a:lnRef>
+          <a:fillRef idx="3">
+            <a:schemeClr val="accent1"/>
+          </a:fillRef>
+          <a:effectRef idx="2">
+            <a:schemeClr val="accent1"/>
+          </a:effectRef>
+          <a:fontRef idx="minor"/>
+        </p:style>
+        <p:txBody>
+          <a:bodyPr lIns="90000" rIns="90000" tIns="45000" bIns="45000" anchor="ctr">
+            <a:noAutofit/>
+          </a:bodyPr>
+          <a:p>
+            <a:pPr algn="ctr">
+              <a:lnSpc>
+                <a:spcPct val="100000"/>
+              </a:lnSpc>
+            </a:pPr>
+            <a:r>
+              <a:rPr b="1" lang="en-US" sz="1400" spc="-1" strike="noStrike">
+                <a:solidFill>
+                  <a:srgbClr val="ffb45a"/>
+                </a:solidFill>
+                <a:latin typeface="Calibri"/>
+                <a:ea typeface="DejaVu Sans"/>
+              </a:rPr>
+              <a:t>JAVA TEMELLERI</a:t>
+            </a:r>
+            <a:endParaRPr b="0" lang="en-US" sz="1400" spc="-1" strike="noStrike">
+              <a:solidFill>
+                <a:srgbClr val="ffffff"/>
+              </a:solidFill>
+              <a:latin typeface="Arial"/>
+            </a:endParaRPr>
+          </a:p>
+        </p:txBody>
+      </p:sp>
+      <p:sp>
+        <p:nvSpPr>
+          <p:cNvPr id="240" name="TextBox 24"/>
+          <p:cNvSpPr/>
+          <p:nvPr/>
+        </p:nvSpPr>
+        <p:spPr>
+          <a:xfrm>
+            <a:off x="2324520" y="914400"/>
+            <a:ext cx="6319800" cy="638280"/>
+          </a:xfrm>
+          <a:prstGeom prst="rect">
+            <a:avLst/>
+          </a:prstGeom>
+          <a:noFill/>
+          <a:ln w="0">
+            <a:noFill/>
+          </a:ln>
+        </p:spPr>
+        <p:style>
+          <a:lnRef idx="0"/>
+          <a:fillRef idx="0"/>
+          <a:effectRef idx="0"/>
+          <a:fontRef idx="minor"/>
+        </p:style>
+        <p:txBody>
+          <a:bodyPr wrap="none" lIns="90000" rIns="90000" tIns="45000" bIns="45000" anchor="t">
+            <a:spAutoFit/>
+          </a:bodyPr>
+          <a:p>
+            <a:pPr>
+              <a:lnSpc>
+                <a:spcPct val="100000"/>
+              </a:lnSpc>
+            </a:pPr>
+            <a:r>
+              <a:rPr b="1" lang="en-US" sz="3600" spc="-1" strike="noStrike">
+                <a:solidFill>
+                  <a:srgbClr val="f5f5f5"/>
+                </a:solidFill>
+                <a:latin typeface="Calibri"/>
+                <a:ea typeface="DejaVu Sans"/>
+              </a:rPr>
+              <a:t>Java'da Temel Operatörlere Giriş</a:t>
+            </a:r>
+            <a:endParaRPr b="0" lang="en-US" sz="3600" spc="-1" strike="noStrike">
+              <a:solidFill>
+                <a:srgbClr val="000000"/>
+              </a:solidFill>
+              <a:latin typeface="Arial"/>
+            </a:endParaRPr>
+          </a:p>
+        </p:txBody>
+      </p:sp>
+      <p:sp>
+        <p:nvSpPr>
+          <p:cNvPr id="241" name="TextBox 25"/>
+          <p:cNvSpPr/>
+          <p:nvPr/>
+        </p:nvSpPr>
+        <p:spPr>
+          <a:xfrm>
+            <a:off x="2448360" y="1828800"/>
+            <a:ext cx="6590520" cy="819720"/>
+          </a:xfrm>
+          <a:prstGeom prst="rect">
+            <a:avLst/>
+          </a:prstGeom>
+          <a:noFill/>
+          <a:ln w="0">
+            <a:noFill/>
+          </a:ln>
+        </p:spPr>
+        <p:style>
+          <a:lnRef idx="0"/>
+          <a:fillRef idx="0"/>
+          <a:effectRef idx="0"/>
+          <a:fontRef idx="minor"/>
+        </p:style>
+        <p:txBody>
+          <a:bodyPr wrap="none" lIns="90000" rIns="90000" tIns="45000" bIns="45000" anchor="t">
+            <a:spAutoFit/>
+          </a:bodyPr>
+          <a:p>
+            <a:pPr>
+              <a:lnSpc>
+                <a:spcPct val="100000"/>
+              </a:lnSpc>
+            </a:pPr>
+            <a:r>
+              <a:rPr b="0" lang="en-US" sz="1600" spc="-1" strike="noStrike">
+                <a:solidFill>
+                  <a:srgbClr val="aaaaaa"/>
+                </a:solidFill>
+                <a:latin typeface="Calibri"/>
+                <a:ea typeface="DejaVu Sans"/>
+              </a:rPr>
+              <a:t>Java'da operatörler, değişkenler ve değerler üzerinde matematiksel, mantıksal </a:t>
+            </a:r>
+            <a:endParaRPr b="0" lang="en-US" sz="1600" spc="-1" strike="noStrike">
+              <a:solidFill>
+                <a:srgbClr val="000000"/>
+              </a:solidFill>
+              <a:latin typeface="Arial"/>
+            </a:endParaRPr>
+          </a:p>
+          <a:p>
+            <a:pPr>
+              <a:lnSpc>
+                <a:spcPct val="100000"/>
+              </a:lnSpc>
+            </a:pPr>
+            <a:r>
+              <a:rPr b="0" lang="en-US" sz="1600" spc="-1" strike="noStrike">
+                <a:solidFill>
+                  <a:srgbClr val="aaaaaa"/>
+                </a:solidFill>
+                <a:latin typeface="Calibri"/>
+                <a:ea typeface="DejaVu Sans"/>
+              </a:rPr>
+              <a:t>veya ilişkisel işlemler gerçekleştirmemizi sağlayan özel sembollerdir.</a:t>
+            </a:r>
+            <a:endParaRPr b="0" lang="en-US" sz="1600" spc="-1" strike="noStrike">
+              <a:solidFill>
+                <a:srgbClr val="000000"/>
+              </a:solidFill>
+              <a:latin typeface="Arial"/>
+            </a:endParaRPr>
+          </a:p>
+          <a:p>
+            <a:pPr>
+              <a:lnSpc>
+                <a:spcPct val="100000"/>
+              </a:lnSpc>
+            </a:pPr>
+            <a:r>
+              <a:rPr b="0" lang="en-US" sz="1600" spc="-1" strike="noStrike">
+                <a:solidFill>
+                  <a:srgbClr val="aaaaaa"/>
+                </a:solidFill>
+                <a:latin typeface="Calibri"/>
+                <a:ea typeface="DejaVu Sans"/>
+              </a:rPr>
+              <a:t> </a:t>
+            </a:r>
+            <a:r>
+              <a:rPr b="0" lang="en-US" sz="1600" spc="-1" strike="noStrike">
+                <a:solidFill>
+                  <a:srgbClr val="aaaaaa"/>
+                </a:solidFill>
+                <a:latin typeface="Calibri"/>
+                <a:ea typeface="DejaVu Sans"/>
+              </a:rPr>
+              <a:t>İşlem gören verilere ise "Operand" denir.</a:t>
+            </a:r>
+            <a:endParaRPr b="0" lang="en-US" sz="1600" spc="-1" strike="noStrike">
+              <a:solidFill>
+                <a:srgbClr val="000000"/>
+              </a:solidFill>
+              <a:latin typeface="Arial"/>
+            </a:endParaRPr>
+          </a:p>
+        </p:txBody>
+      </p:sp>
+      <p:sp>
+        <p:nvSpPr>
+          <p:cNvPr id="242" name="Rounded Rectangle 58"/>
+          <p:cNvSpPr/>
+          <p:nvPr/>
+        </p:nvSpPr>
+        <p:spPr>
+          <a:xfrm>
+            <a:off x="987480" y="3182040"/>
+            <a:ext cx="3288240" cy="2739600"/>
+          </a:xfrm>
+          <a:prstGeom prst="roundRect">
+            <a:avLst>
+              <a:gd name="adj" fmla="val 16667"/>
+            </a:avLst>
+          </a:prstGeom>
+          <a:solidFill>
+            <a:srgbClr val="08080a"/>
+          </a:solidFill>
+          <a:ln>
+            <a:noFill/>
+          </a:ln>
+          <a:effectLst>
+            <a:outerShdw blurRad="39960" dir="5400000" dist="23040" rotWithShape="0">
+              <a:srgbClr val="000000">
+                <a:alpha val="35000"/>
+              </a:srgbClr>
+            </a:outerShdw>
+          </a:effectLst>
+        </p:spPr>
+        <p:style>
+          <a:lnRef idx="1">
+            <a:schemeClr val="accent1"/>
+          </a:lnRef>
+          <a:fillRef idx="3">
+            <a:schemeClr val="accent1"/>
+          </a:fillRef>
+          <a:effectRef idx="2">
+            <a:schemeClr val="accent1"/>
+          </a:effectRef>
+          <a:fontRef idx="minor"/>
+        </p:style>
+        <p:txBody>
+          <a:bodyPr lIns="90000" rIns="90000" tIns="45000" bIns="45000" anchor="ctr">
+            <a:noAutofit/>
+          </a:bodyPr>
+          <a:p>
+            <a:pPr>
+              <a:lnSpc>
+                <a:spcPct val="100000"/>
+              </a:lnSpc>
+            </a:pPr>
+            <a:endParaRPr b="0" lang="en-US" sz="1800" spc="-1" strike="noStrike">
+              <a:solidFill>
+                <a:schemeClr val="lt1"/>
+              </a:solidFill>
+              <a:latin typeface="Calibri"/>
+              <a:ea typeface="DejaVu Sans"/>
+            </a:endParaRPr>
+          </a:p>
+        </p:txBody>
+      </p:sp>
+      <p:sp>
+        <p:nvSpPr>
+          <p:cNvPr id="243" name="Rounded Rectangle 59"/>
+          <p:cNvSpPr/>
+          <p:nvPr/>
+        </p:nvSpPr>
+        <p:spPr>
+          <a:xfrm>
+            <a:off x="914400" y="3108960"/>
+            <a:ext cx="3288240" cy="3291480"/>
+          </a:xfrm>
+          <a:prstGeom prst="roundRect">
+            <a:avLst>
+              <a:gd name="adj" fmla="val 16667"/>
+            </a:avLst>
+          </a:prstGeom>
+          <a:solidFill>
+            <a:srgbClr val="16161c"/>
+          </a:solidFill>
+          <a:ln>
+            <a:solidFill>
+              <a:srgbClr val="464655"/>
+            </a:solidFill>
+            <a:round/>
+          </a:ln>
+          <a:effectLst>
+            <a:outerShdw blurRad="39960" dir="5400000" dist="23040" rotWithShape="0">
+              <a:srgbClr val="000000">
+                <a:alpha val="35000"/>
+              </a:srgbClr>
+            </a:outerShdw>
+          </a:effectLst>
+        </p:spPr>
+        <p:style>
+          <a:lnRef idx="1">
+            <a:schemeClr val="accent1"/>
+          </a:lnRef>
+          <a:fillRef idx="3">
+            <a:schemeClr val="accent1"/>
+          </a:fillRef>
+          <a:effectRef idx="2">
+            <a:schemeClr val="accent1"/>
+          </a:effectRef>
+          <a:fontRef idx="minor"/>
+        </p:style>
+        <p:txBody>
+          <a:bodyPr lIns="90000" rIns="90000" tIns="45000" bIns="45000" anchor="ctr">
+            <a:noAutofit/>
+          </a:bodyPr>
+          <a:p>
+            <a:pPr>
+              <a:lnSpc>
+                <a:spcPct val="100000"/>
+              </a:lnSpc>
+            </a:pPr>
+            <a:r>
+              <a:rPr b="1" lang="en-US" sz="1300" spc="-1" strike="noStrike">
+                <a:solidFill>
+                  <a:schemeClr val="lt1"/>
+                </a:solidFill>
+                <a:latin typeface="Calibri"/>
+                <a:ea typeface="DejaVu Sans"/>
+              </a:rPr>
+              <a:t>Temel Terimler:</a:t>
+            </a:r>
+            <a:endParaRPr b="0" lang="en-US" sz="1300" spc="-1" strike="noStrike">
+              <a:solidFill>
+                <a:srgbClr val="ffffff"/>
+              </a:solidFill>
+              <a:latin typeface="Arial"/>
+            </a:endParaRPr>
+          </a:p>
+          <a:p>
+            <a:pPr>
+              <a:lnSpc>
+                <a:spcPct val="100000"/>
+              </a:lnSpc>
+            </a:pPr>
+            <a:r>
+              <a:rPr b="1" lang="en-US" sz="1300" spc="-1" strike="noStrike">
+                <a:solidFill>
+                  <a:schemeClr val="lt1"/>
+                </a:solidFill>
+                <a:latin typeface="Calibri"/>
+                <a:ea typeface="DejaVu Sans"/>
+              </a:rPr>
+              <a:t>Operatör: </a:t>
+            </a:r>
+            <a:r>
+              <a:rPr b="0" lang="en-US" sz="1300" spc="-1" strike="noStrike">
+                <a:solidFill>
+                  <a:schemeClr val="lt1"/>
+                </a:solidFill>
+                <a:latin typeface="Calibri"/>
+                <a:ea typeface="DejaVu Sans"/>
+              </a:rPr>
+              <a:t>İşlemi yapan sembol (+, *, =).</a:t>
+            </a:r>
+            <a:endParaRPr b="0" lang="en-US" sz="1300" spc="-1" strike="noStrike">
+              <a:solidFill>
+                <a:srgbClr val="ffffff"/>
+              </a:solidFill>
+              <a:latin typeface="Arial"/>
+            </a:endParaRPr>
+          </a:p>
+          <a:p>
+            <a:pPr>
+              <a:lnSpc>
+                <a:spcPct val="100000"/>
+              </a:lnSpc>
+            </a:pPr>
+            <a:r>
+              <a:rPr b="1" lang="en-US" sz="1300" spc="-1" strike="noStrike">
+                <a:solidFill>
+                  <a:schemeClr val="lt1"/>
+                </a:solidFill>
+                <a:latin typeface="Calibri"/>
+                <a:ea typeface="DejaVu Sans"/>
+              </a:rPr>
+              <a:t>Operand: </a:t>
+            </a:r>
+            <a:r>
+              <a:rPr b="0" lang="en-US" sz="1300" spc="-1" strike="noStrike">
+                <a:solidFill>
+                  <a:schemeClr val="lt1"/>
+                </a:solidFill>
+                <a:latin typeface="Calibri"/>
+                <a:ea typeface="DejaVu Sans"/>
+              </a:rPr>
+              <a:t>İşleme giren veri (x, 5).</a:t>
+            </a:r>
+            <a:endParaRPr b="0" lang="en-US" sz="1300" spc="-1" strike="noStrike">
+              <a:solidFill>
+                <a:srgbClr val="ffffff"/>
+              </a:solidFill>
+              <a:latin typeface="Arial"/>
+            </a:endParaRPr>
+          </a:p>
+          <a:p>
+            <a:pPr>
+              <a:lnSpc>
+                <a:spcPct val="100000"/>
+              </a:lnSpc>
+            </a:pPr>
+            <a:r>
+              <a:rPr b="0" lang="en-US" sz="1300" spc="-1" strike="noStrike">
+                <a:solidFill>
+                  <a:schemeClr val="lt1"/>
+                </a:solidFill>
+                <a:latin typeface="Calibri"/>
+                <a:ea typeface="DejaVu Sans"/>
+              </a:rPr>
+              <a:t>(Örn: x + 5 ifadesinde + operatör, x ve 5 operanddır.)</a:t>
+            </a:r>
+            <a:endParaRPr b="0" lang="en-US" sz="1300" spc="-1" strike="noStrike">
+              <a:solidFill>
+                <a:srgbClr val="ffffff"/>
+              </a:solidFill>
+              <a:latin typeface="Arial"/>
+            </a:endParaRPr>
+          </a:p>
+          <a:p>
+            <a:pPr>
+              <a:lnSpc>
+                <a:spcPct val="100000"/>
+              </a:lnSpc>
+            </a:pPr>
+            <a:endParaRPr b="0" lang="en-US" sz="1300" spc="-1" strike="noStrike">
+              <a:solidFill>
+                <a:srgbClr val="ffffff"/>
+              </a:solidFill>
+              <a:latin typeface="Arial"/>
+            </a:endParaRPr>
+          </a:p>
+          <a:p>
+            <a:pPr>
+              <a:lnSpc>
+                <a:spcPct val="100000"/>
+              </a:lnSpc>
+            </a:pPr>
+            <a:r>
+              <a:rPr b="1" lang="en-US" sz="1300" spc="-1" strike="noStrike">
+                <a:solidFill>
+                  <a:schemeClr val="lt1"/>
+                </a:solidFill>
+                <a:latin typeface="Calibri"/>
+                <a:ea typeface="DejaVu Sans"/>
+              </a:rPr>
+              <a:t>Sık Kullanılan Operatör Türleri:</a:t>
+            </a:r>
+            <a:endParaRPr b="0" lang="en-US" sz="1300" spc="-1" strike="noStrike">
+              <a:solidFill>
+                <a:srgbClr val="ffffff"/>
+              </a:solidFill>
+              <a:latin typeface="Arial"/>
+            </a:endParaRPr>
+          </a:p>
+          <a:p>
+            <a:pPr>
+              <a:lnSpc>
+                <a:spcPct val="100000"/>
+              </a:lnSpc>
+            </a:pPr>
+            <a:r>
+              <a:rPr b="0" lang="en-US" sz="1300" spc="-1" strike="noStrike">
+                <a:solidFill>
+                  <a:schemeClr val="lt1"/>
+                </a:solidFill>
+                <a:latin typeface="Calibri"/>
+                <a:ea typeface="DejaVu Sans"/>
+              </a:rPr>
+              <a:t>Aritmetik:</a:t>
+            </a:r>
+            <a:r>
+              <a:rPr b="1" lang="en-US" sz="1300" spc="-1" strike="noStrike">
+                <a:solidFill>
+                  <a:schemeClr val="lt1"/>
+                </a:solidFill>
+                <a:latin typeface="Calibri"/>
+                <a:ea typeface="DejaVu Sans"/>
+              </a:rPr>
+              <a:t> Matematiksel hesaplar yapar (+, -, *, /, % mod alma).</a:t>
+            </a:r>
+            <a:endParaRPr b="0" lang="en-US" sz="1300" spc="-1" strike="noStrike">
+              <a:solidFill>
+                <a:srgbClr val="ffffff"/>
+              </a:solidFill>
+              <a:latin typeface="Arial"/>
+            </a:endParaRPr>
+          </a:p>
+          <a:p>
+            <a:pPr>
+              <a:lnSpc>
+                <a:spcPct val="100000"/>
+              </a:lnSpc>
+            </a:pPr>
+            <a:r>
+              <a:rPr b="0" lang="en-US" sz="1300" spc="-1" strike="noStrike">
+                <a:solidFill>
+                  <a:schemeClr val="lt1"/>
+                </a:solidFill>
+                <a:latin typeface="Calibri"/>
+                <a:ea typeface="DejaVu Sans"/>
+              </a:rPr>
+              <a:t>İlişkisel:</a:t>
+            </a:r>
+            <a:r>
+              <a:rPr b="1" lang="en-US" sz="1300" spc="-1" strike="noStrike">
+                <a:solidFill>
+                  <a:schemeClr val="lt1"/>
+                </a:solidFill>
+                <a:latin typeface="Calibri"/>
+                <a:ea typeface="DejaVu Sans"/>
+              </a:rPr>
+              <a:t> İki değeri karşılaştırır, geriye true veya false döner (==, !=, &gt;, &lt;).</a:t>
+            </a:r>
+            <a:endParaRPr b="0" lang="en-US" sz="1300" spc="-1" strike="noStrike">
+              <a:solidFill>
+                <a:srgbClr val="ffffff"/>
+              </a:solidFill>
+              <a:latin typeface="Arial"/>
+            </a:endParaRPr>
+          </a:p>
+          <a:p>
+            <a:pPr>
+              <a:lnSpc>
+                <a:spcPct val="100000"/>
+              </a:lnSpc>
+            </a:pPr>
+            <a:r>
+              <a:rPr b="0" lang="en-US" sz="1300" spc="-1" strike="noStrike">
+                <a:solidFill>
+                  <a:schemeClr val="lt1"/>
+                </a:solidFill>
+                <a:latin typeface="Calibri"/>
+                <a:ea typeface="DejaVu Sans"/>
+              </a:rPr>
+              <a:t>Mantıksal:</a:t>
+            </a:r>
+            <a:r>
+              <a:rPr b="1" lang="en-US" sz="1300" spc="-1" strike="noStrike">
+                <a:solidFill>
+                  <a:schemeClr val="lt1"/>
+                </a:solidFill>
+                <a:latin typeface="Calibri"/>
+                <a:ea typeface="DejaVu Sans"/>
+              </a:rPr>
+              <a:t> Koşulları birbirine bağlar (&amp;&amp; VE, || VEYA, ! DEĞİL).</a:t>
+            </a:r>
+            <a:endParaRPr b="0" lang="en-US" sz="1300" spc="-1" strike="noStrike">
+              <a:solidFill>
+                <a:srgbClr val="ffffff"/>
+              </a:solidFill>
+              <a:latin typeface="Arial"/>
+            </a:endParaRPr>
+          </a:p>
+          <a:p>
+            <a:pPr>
+              <a:lnSpc>
+                <a:spcPct val="100000"/>
+              </a:lnSpc>
+            </a:pPr>
+            <a:r>
+              <a:rPr b="0" lang="en-US" sz="1300" spc="-1" strike="noStrike">
+                <a:solidFill>
+                  <a:schemeClr val="lt1"/>
+                </a:solidFill>
+                <a:latin typeface="Calibri"/>
+                <a:ea typeface="DejaVu Sans"/>
+              </a:rPr>
+              <a:t>Atama:</a:t>
+            </a:r>
+            <a:r>
+              <a:rPr b="1" lang="en-US" sz="1300" spc="-1" strike="noStrike">
+                <a:solidFill>
+                  <a:schemeClr val="lt1"/>
+                </a:solidFill>
+                <a:latin typeface="Calibri"/>
+                <a:ea typeface="DejaVu Sans"/>
+              </a:rPr>
+              <a:t> Sağdaki değeri soldaki değişkene aktarır (=, +=, *=).</a:t>
+            </a:r>
+            <a:endParaRPr b="0" lang="en-US" sz="1300" spc="-1" strike="noStrike">
+              <a:solidFill>
+                <a:srgbClr val="ffffff"/>
+              </a:solidFill>
+              <a:latin typeface="Arial"/>
+            </a:endParaRPr>
+          </a:p>
+        </p:txBody>
+      </p:sp>
+      <p:sp>
+        <p:nvSpPr>
+          <p:cNvPr id="244" name="Rounded Rectangle 60"/>
+          <p:cNvSpPr/>
+          <p:nvPr/>
+        </p:nvSpPr>
+        <p:spPr>
+          <a:xfrm>
+            <a:off x="4507920" y="3182040"/>
+            <a:ext cx="3288240" cy="2739600"/>
+          </a:xfrm>
+          <a:prstGeom prst="roundRect">
+            <a:avLst>
+              <a:gd name="adj" fmla="val 16667"/>
+            </a:avLst>
+          </a:prstGeom>
+          <a:solidFill>
+            <a:srgbClr val="08080a"/>
+          </a:solidFill>
+          <a:ln>
+            <a:noFill/>
+          </a:ln>
+          <a:effectLst>
+            <a:outerShdw blurRad="39960" dir="5400000" dist="23040" rotWithShape="0">
+              <a:srgbClr val="000000">
+                <a:alpha val="35000"/>
+              </a:srgbClr>
+            </a:outerShdw>
+          </a:effectLst>
+        </p:spPr>
+        <p:style>
+          <a:lnRef idx="1">
+            <a:schemeClr val="accent1"/>
+          </a:lnRef>
+          <a:fillRef idx="3">
+            <a:schemeClr val="accent1"/>
+          </a:fillRef>
+          <a:effectRef idx="2">
+            <a:schemeClr val="accent1"/>
+          </a:effectRef>
+          <a:fontRef idx="minor"/>
+        </p:style>
+        <p:txBody>
+          <a:bodyPr lIns="90000" rIns="90000" tIns="45000" bIns="45000" anchor="ctr">
+            <a:noAutofit/>
+          </a:bodyPr>
+          <a:p>
+            <a:pPr>
+              <a:lnSpc>
+                <a:spcPct val="100000"/>
+              </a:lnSpc>
+            </a:pPr>
+            <a:endParaRPr b="0" lang="en-US" sz="1800" spc="-1" strike="noStrike">
+              <a:solidFill>
+                <a:schemeClr val="lt1"/>
+              </a:solidFill>
+              <a:latin typeface="Calibri"/>
+              <a:ea typeface="DejaVu Sans"/>
+            </a:endParaRPr>
+          </a:p>
+        </p:txBody>
+      </p:sp>
+      <p:sp>
+        <p:nvSpPr>
+          <p:cNvPr id="245" name="Rounded Rectangle 61"/>
+          <p:cNvSpPr/>
+          <p:nvPr/>
+        </p:nvSpPr>
+        <p:spPr>
+          <a:xfrm>
+            <a:off x="4434840" y="2971800"/>
+            <a:ext cx="3288240" cy="3428640"/>
+          </a:xfrm>
+          <a:prstGeom prst="roundRect">
+            <a:avLst>
+              <a:gd name="adj" fmla="val 16667"/>
+            </a:avLst>
+          </a:prstGeom>
+          <a:solidFill>
+            <a:srgbClr val="16161c"/>
+          </a:solidFill>
+          <a:ln>
+            <a:solidFill>
+              <a:srgbClr val="464655"/>
+            </a:solidFill>
+            <a:round/>
+          </a:ln>
+          <a:effectLst>
+            <a:outerShdw blurRad="39960" dir="5400000" dist="23040" rotWithShape="0">
+              <a:srgbClr val="000000">
+                <a:alpha val="35000"/>
+              </a:srgbClr>
+            </a:outerShdw>
+          </a:effectLst>
+        </p:spPr>
+        <p:style>
+          <a:lnRef idx="1">
+            <a:schemeClr val="accent1"/>
+          </a:lnRef>
+          <a:fillRef idx="3">
+            <a:schemeClr val="accent1"/>
+          </a:fillRef>
+          <a:effectRef idx="2">
+            <a:schemeClr val="accent1"/>
+          </a:effectRef>
+          <a:fontRef idx="minor"/>
+        </p:style>
+        <p:txBody>
+          <a:bodyPr lIns="90000" rIns="90000" tIns="45000" bIns="45000" anchor="ctr">
+            <a:noAutofit/>
+          </a:bodyPr>
+          <a:p>
+            <a:pPr>
+              <a:lnSpc>
+                <a:spcPct val="100000"/>
+              </a:lnSpc>
+            </a:pPr>
+            <a:r>
+              <a:rPr b="0" lang="en-US" sz="1500" spc="-1" strike="noStrike">
+                <a:solidFill>
+                  <a:schemeClr val="lt1"/>
+                </a:solidFill>
+                <a:latin typeface="Calibri"/>
+                <a:ea typeface="DejaVu Sans"/>
+              </a:rPr>
+              <a:t>[ Operatör İşlem Mantığı ]</a:t>
+            </a:r>
+            <a:endParaRPr b="0" lang="en-US" sz="1500" spc="-1" strike="noStrike">
+              <a:solidFill>
+                <a:srgbClr val="ffffff"/>
+              </a:solidFill>
+              <a:latin typeface="Arial"/>
+            </a:endParaRPr>
+          </a:p>
+          <a:p>
+            <a:pPr>
+              <a:lnSpc>
+                <a:spcPct val="100000"/>
+              </a:lnSpc>
+            </a:pPr>
+            <a:r>
+              <a:rPr b="0" lang="en-US" sz="1500" spc="-1" strike="noStrike">
+                <a:solidFill>
+                  <a:schemeClr val="lt1"/>
+                </a:solidFill>
+                <a:latin typeface="Calibri"/>
+                <a:ea typeface="DejaVu Sans"/>
+              </a:rPr>
+              <a:t>├──</a:t>
+            </a:r>
+            <a:r>
+              <a:rPr b="0" lang="en-US" sz="1500" spc="-1" strike="noStrike">
+                <a:solidFill>
+                  <a:schemeClr val="lt1"/>
+                </a:solidFill>
+                <a:latin typeface="Calibri"/>
+                <a:ea typeface="DejaVu Sans"/>
+              </a:rPr>
+              <a:t>&gt; 1. Veriler (Operandlar) Hafızada Tanımlanır</a:t>
+            </a:r>
+            <a:endParaRPr b="0" lang="en-US" sz="1500" spc="-1" strike="noStrike">
+              <a:solidFill>
+                <a:srgbClr val="ffffff"/>
+              </a:solidFill>
+              <a:latin typeface="Arial"/>
+            </a:endParaRPr>
+          </a:p>
+          <a:p>
+            <a:pPr>
+              <a:lnSpc>
+                <a:spcPct val="100000"/>
+              </a:lnSpc>
+            </a:pPr>
+            <a:r>
+              <a:rPr b="0" lang="en-US" sz="1500" spc="-1" strike="noStrike">
+                <a:solidFill>
+                  <a:schemeClr val="lt1"/>
+                </a:solidFill>
+                <a:latin typeface="Calibri"/>
+                <a:ea typeface="DejaVu Sans"/>
+              </a:rPr>
+              <a:t>│ └── </a:t>
+            </a:r>
+            <a:r>
+              <a:rPr b="0" lang="en-US" sz="1500" spc="-1" strike="noStrike">
+                <a:solidFill>
+                  <a:schemeClr val="lt1"/>
+                </a:solidFill>
+                <a:latin typeface="Calibri"/>
+                <a:ea typeface="DejaVu Sans"/>
+              </a:rPr>
+              <a:t>Örn: int x = 10; int y = 5;</a:t>
+            </a:r>
+            <a:endParaRPr b="0" lang="en-US" sz="1500" spc="-1" strike="noStrike">
+              <a:solidFill>
+                <a:srgbClr val="ffffff"/>
+              </a:solidFill>
+              <a:latin typeface="Arial"/>
+            </a:endParaRPr>
+          </a:p>
+          <a:p>
+            <a:pPr>
+              <a:lnSpc>
+                <a:spcPct val="100000"/>
+              </a:lnSpc>
+            </a:pPr>
+            <a:r>
+              <a:rPr b="0" lang="en-US" sz="1500" spc="-1" strike="noStrike">
+                <a:solidFill>
+                  <a:schemeClr val="lt1"/>
+                </a:solidFill>
+                <a:latin typeface="Calibri"/>
+                <a:ea typeface="DejaVu Sans"/>
+              </a:rPr>
+              <a:t>│</a:t>
+            </a:r>
+            <a:endParaRPr b="0" lang="en-US" sz="1500" spc="-1" strike="noStrike">
+              <a:solidFill>
+                <a:srgbClr val="ffffff"/>
+              </a:solidFill>
+              <a:latin typeface="Arial"/>
+            </a:endParaRPr>
+          </a:p>
+          <a:p>
+            <a:pPr>
+              <a:lnSpc>
+                <a:spcPct val="100000"/>
+              </a:lnSpc>
+            </a:pPr>
+            <a:r>
+              <a:rPr b="0" lang="en-US" sz="1500" spc="-1" strike="noStrike">
+                <a:solidFill>
+                  <a:schemeClr val="lt1"/>
+                </a:solidFill>
+                <a:latin typeface="Calibri"/>
+                <a:ea typeface="DejaVu Sans"/>
+              </a:rPr>
+              <a:t>├──</a:t>
+            </a:r>
+            <a:r>
+              <a:rPr b="0" lang="en-US" sz="1500" spc="-1" strike="noStrike">
+                <a:solidFill>
+                  <a:schemeClr val="lt1"/>
+                </a:solidFill>
+                <a:latin typeface="Calibri"/>
+                <a:ea typeface="DejaVu Sans"/>
+              </a:rPr>
+              <a:t>&gt; 2. İfade (Expression) Değerlendirilir</a:t>
+            </a:r>
+            <a:endParaRPr b="0" lang="en-US" sz="1500" spc="-1" strike="noStrike">
+              <a:solidFill>
+                <a:srgbClr val="ffffff"/>
+              </a:solidFill>
+              <a:latin typeface="Arial"/>
+            </a:endParaRPr>
+          </a:p>
+          <a:p>
+            <a:pPr>
+              <a:lnSpc>
+                <a:spcPct val="100000"/>
+              </a:lnSpc>
+            </a:pPr>
+            <a:r>
+              <a:rPr b="0" lang="en-US" sz="1500" spc="-1" strike="noStrike">
+                <a:solidFill>
+                  <a:schemeClr val="lt1"/>
+                </a:solidFill>
+                <a:latin typeface="Calibri"/>
+                <a:ea typeface="DejaVu Sans"/>
+              </a:rPr>
+              <a:t>│ ├── </a:t>
+            </a:r>
+            <a:r>
+              <a:rPr b="0" lang="en-US" sz="1500" spc="-1" strike="noStrike">
+                <a:solidFill>
+                  <a:schemeClr val="lt1"/>
+                </a:solidFill>
+                <a:latin typeface="Calibri"/>
+                <a:ea typeface="DejaVu Sans"/>
+              </a:rPr>
+              <a:t>Aritmetik: x + y (Sonuç: 15)</a:t>
+            </a:r>
+            <a:endParaRPr b="0" lang="en-US" sz="1500" spc="-1" strike="noStrike">
+              <a:solidFill>
+                <a:srgbClr val="ffffff"/>
+              </a:solidFill>
+              <a:latin typeface="Arial"/>
+            </a:endParaRPr>
+          </a:p>
+          <a:p>
+            <a:pPr>
+              <a:lnSpc>
+                <a:spcPct val="100000"/>
+              </a:lnSpc>
+            </a:pPr>
+            <a:r>
+              <a:rPr b="0" lang="en-US" sz="1500" spc="-1" strike="noStrike">
+                <a:solidFill>
+                  <a:schemeClr val="lt1"/>
+                </a:solidFill>
+                <a:latin typeface="Calibri"/>
+                <a:ea typeface="DejaVu Sans"/>
+              </a:rPr>
+              <a:t>│ └── </a:t>
+            </a:r>
+            <a:r>
+              <a:rPr b="0" lang="en-US" sz="1500" spc="-1" strike="noStrike">
+                <a:solidFill>
+                  <a:schemeClr val="lt1"/>
+                </a:solidFill>
+                <a:latin typeface="Calibri"/>
+                <a:ea typeface="DejaVu Sans"/>
+              </a:rPr>
+              <a:t>Mantıksal: x &gt; y (Sonuç: true)</a:t>
+            </a:r>
+            <a:endParaRPr b="0" lang="en-US" sz="1500" spc="-1" strike="noStrike">
+              <a:solidFill>
+                <a:srgbClr val="ffffff"/>
+              </a:solidFill>
+              <a:latin typeface="Arial"/>
+            </a:endParaRPr>
+          </a:p>
+          <a:p>
+            <a:pPr>
+              <a:lnSpc>
+                <a:spcPct val="100000"/>
+              </a:lnSpc>
+            </a:pPr>
+            <a:r>
+              <a:rPr b="0" lang="en-US" sz="1500" spc="-1" strike="noStrike">
+                <a:solidFill>
+                  <a:schemeClr val="lt1"/>
+                </a:solidFill>
+                <a:latin typeface="Calibri"/>
+                <a:ea typeface="DejaVu Sans"/>
+              </a:rPr>
+              <a:t>│</a:t>
+            </a:r>
+            <a:endParaRPr b="0" lang="en-US" sz="1500" spc="-1" strike="noStrike">
+              <a:solidFill>
+                <a:srgbClr val="ffffff"/>
+              </a:solidFill>
+              <a:latin typeface="Arial"/>
+            </a:endParaRPr>
+          </a:p>
+          <a:p>
+            <a:pPr>
+              <a:lnSpc>
+                <a:spcPct val="100000"/>
+              </a:lnSpc>
+            </a:pPr>
+            <a:r>
+              <a:rPr b="0" lang="en-US" sz="1500" spc="-1" strike="noStrike">
+                <a:solidFill>
+                  <a:schemeClr val="lt1"/>
+                </a:solidFill>
+                <a:latin typeface="Calibri"/>
+                <a:ea typeface="DejaVu Sans"/>
+              </a:rPr>
+              <a:t>├──</a:t>
+            </a:r>
+            <a:r>
+              <a:rPr b="0" lang="en-US" sz="1500" spc="-1" strike="noStrike">
+                <a:solidFill>
+                  <a:schemeClr val="lt1"/>
+                </a:solidFill>
+                <a:latin typeface="Calibri"/>
+                <a:ea typeface="DejaVu Sans"/>
+              </a:rPr>
+              <a:t>&gt; 3. Atama Operatörü Çalışır (=)</a:t>
+            </a:r>
+            <a:endParaRPr b="0" lang="en-US" sz="1500" spc="-1" strike="noStrike">
+              <a:solidFill>
+                <a:srgbClr val="ffffff"/>
+              </a:solidFill>
+              <a:latin typeface="Arial"/>
+            </a:endParaRPr>
+          </a:p>
+          <a:p>
+            <a:pPr>
+              <a:lnSpc>
+                <a:spcPct val="100000"/>
+              </a:lnSpc>
+            </a:pPr>
+            <a:r>
+              <a:rPr b="0" lang="en-US" sz="1500" spc="-1" strike="noStrike">
+                <a:solidFill>
+                  <a:schemeClr val="lt1"/>
+                </a:solidFill>
+                <a:latin typeface="Calibri"/>
+                <a:ea typeface="DejaVu Sans"/>
+              </a:rPr>
+              <a:t>│ └── </a:t>
+            </a:r>
+            <a:r>
+              <a:rPr b="0" lang="en-US" sz="1500" spc="-1" strike="noStrike">
+                <a:solidFill>
+                  <a:schemeClr val="lt1"/>
+                </a:solidFill>
+                <a:latin typeface="Calibri"/>
+                <a:ea typeface="DejaVu Sans"/>
+              </a:rPr>
+              <a:t>Hesaplanan sonuç yeni bir değişkene yazılır</a:t>
+            </a:r>
+            <a:endParaRPr b="0" lang="en-US" sz="1500" spc="-1" strike="noStrike">
+              <a:solidFill>
+                <a:srgbClr val="ffffff"/>
+              </a:solidFill>
+              <a:latin typeface="Arial"/>
+            </a:endParaRPr>
+          </a:p>
+          <a:p>
+            <a:pPr>
+              <a:lnSpc>
+                <a:spcPct val="100000"/>
+              </a:lnSpc>
+            </a:pPr>
+            <a:r>
+              <a:rPr b="0" lang="en-US" sz="1500" spc="-1" strike="noStrike">
+                <a:solidFill>
+                  <a:schemeClr val="lt1"/>
+                </a:solidFill>
+                <a:latin typeface="Calibri"/>
+                <a:ea typeface="DejaVu Sans"/>
+              </a:rPr>
+              <a:t>│</a:t>
+            </a:r>
+            <a:endParaRPr b="0" lang="en-US" sz="1500" spc="-1" strike="noStrike">
+              <a:solidFill>
+                <a:srgbClr val="ffffff"/>
+              </a:solidFill>
+              <a:latin typeface="Arial"/>
+            </a:endParaRPr>
+          </a:p>
+          <a:p>
+            <a:pPr>
+              <a:lnSpc>
+                <a:spcPct val="100000"/>
+              </a:lnSpc>
+            </a:pPr>
+            <a:r>
+              <a:rPr b="0" lang="en-US" sz="1500" spc="-1" strike="noStrike">
+                <a:solidFill>
+                  <a:schemeClr val="lt1"/>
+                </a:solidFill>
+                <a:latin typeface="Calibri"/>
+                <a:ea typeface="DejaVu Sans"/>
+              </a:rPr>
+              <a:t>└──</a:t>
+            </a:r>
+            <a:r>
+              <a:rPr b="0" lang="en-US" sz="1500" spc="-1" strike="noStrike">
+                <a:solidFill>
+                  <a:schemeClr val="lt1"/>
+                </a:solidFill>
+                <a:latin typeface="Calibri"/>
+                <a:ea typeface="DejaVu Sans"/>
+              </a:rPr>
+              <a:t>&gt; 4. Sonuç Çıktı Olarak Kullanılır</a:t>
+            </a:r>
+            <a:endParaRPr b="0" lang="en-US" sz="1500" spc="-1" strike="noStrike">
+              <a:solidFill>
+                <a:srgbClr val="ffffff"/>
+              </a:solidFill>
+              <a:latin typeface="Arial"/>
+            </a:endParaRPr>
+          </a:p>
+        </p:txBody>
+      </p:sp>
+      <p:sp>
+        <p:nvSpPr>
+          <p:cNvPr id="246" name="Rounded Rectangle 62"/>
+          <p:cNvSpPr/>
+          <p:nvPr/>
+        </p:nvSpPr>
+        <p:spPr>
+          <a:xfrm>
+            <a:off x="8028360" y="3182040"/>
+            <a:ext cx="3288240" cy="2739600"/>
+          </a:xfrm>
+          <a:prstGeom prst="roundRect">
+            <a:avLst>
+              <a:gd name="adj" fmla="val 16667"/>
+            </a:avLst>
+          </a:prstGeom>
+          <a:solidFill>
+            <a:srgbClr val="08080a"/>
+          </a:solidFill>
+          <a:ln>
+            <a:noFill/>
+          </a:ln>
+          <a:effectLst>
+            <a:outerShdw blurRad="39960" dir="5400000" dist="23040" rotWithShape="0">
+              <a:srgbClr val="000000">
+                <a:alpha val="35000"/>
+              </a:srgbClr>
+            </a:outerShdw>
+          </a:effectLst>
+        </p:spPr>
+        <p:style>
+          <a:lnRef idx="1">
+            <a:schemeClr val="accent1"/>
+          </a:lnRef>
+          <a:fillRef idx="3">
+            <a:schemeClr val="accent1"/>
+          </a:fillRef>
+          <a:effectRef idx="2">
+            <a:schemeClr val="accent1"/>
+          </a:effectRef>
+          <a:fontRef idx="minor"/>
+        </p:style>
+        <p:txBody>
+          <a:bodyPr lIns="90000" rIns="90000" tIns="45000" bIns="45000" anchor="ctr">
+            <a:noAutofit/>
+          </a:bodyPr>
+          <a:p>
+            <a:pPr>
+              <a:lnSpc>
+                <a:spcPct val="100000"/>
+              </a:lnSpc>
+            </a:pPr>
+            <a:endParaRPr b="0" lang="en-US" sz="1800" spc="-1" strike="noStrike">
+              <a:solidFill>
+                <a:schemeClr val="lt1"/>
+              </a:solidFill>
+              <a:latin typeface="Calibri"/>
+              <a:ea typeface="DejaVu Sans"/>
+            </a:endParaRPr>
+          </a:p>
+        </p:txBody>
+      </p:sp>
+      <p:sp>
+        <p:nvSpPr>
+          <p:cNvPr id="247" name="Rounded Rectangle 63"/>
+          <p:cNvSpPr/>
+          <p:nvPr/>
+        </p:nvSpPr>
+        <p:spPr>
+          <a:xfrm>
+            <a:off x="7955280" y="2743200"/>
+            <a:ext cx="3700800" cy="3655800"/>
+          </a:xfrm>
+          <a:prstGeom prst="roundRect">
+            <a:avLst>
+              <a:gd name="adj" fmla="val 16667"/>
+            </a:avLst>
+          </a:prstGeom>
+          <a:solidFill>
+            <a:srgbClr val="16161c"/>
+          </a:solidFill>
+          <a:ln>
+            <a:solidFill>
+              <a:srgbClr val="464655"/>
+            </a:solidFill>
+            <a:round/>
+          </a:ln>
+          <a:effectLst>
+            <a:outerShdw blurRad="39960" dir="5400000" dist="23040" rotWithShape="0">
+              <a:srgbClr val="000000">
+                <a:alpha val="35000"/>
+              </a:srgbClr>
+            </a:outerShdw>
+          </a:effectLst>
+        </p:spPr>
+        <p:style>
+          <a:lnRef idx="1">
+            <a:schemeClr val="accent1"/>
+          </a:lnRef>
+          <a:fillRef idx="3">
+            <a:schemeClr val="accent1"/>
+          </a:fillRef>
+          <a:effectRef idx="2">
+            <a:schemeClr val="accent1"/>
+          </a:effectRef>
+          <a:fontRef idx="minor"/>
+        </p:style>
+        <p:txBody>
+          <a:bodyPr lIns="90000" rIns="90000" tIns="45000" bIns="45000" anchor="ctr">
+            <a:noAutofit/>
+          </a:bodyPr>
+          <a:p>
+            <a:pPr algn="ctr">
+              <a:lnSpc>
+                <a:spcPct val="100000"/>
+              </a:lnSpc>
+            </a:pPr>
+            <a:r>
+              <a:rPr b="0" lang="en-US" sz="900" spc="-1" strike="noStrike">
+                <a:solidFill>
+                  <a:srgbClr val="78ffc8"/>
+                </a:solidFill>
+                <a:latin typeface="Consolas"/>
+                <a:ea typeface="DejaVu Sans"/>
+              </a:rPr>
+              <a:t>public class OperatorGiris {</a:t>
+            </a:r>
+            <a:endParaRPr b="0" lang="en-US" sz="900" spc="-1" strike="noStrike">
+              <a:solidFill>
+                <a:srgbClr val="ffffff"/>
+              </a:solidFill>
+              <a:latin typeface="Arial"/>
+            </a:endParaRPr>
+          </a:p>
+          <a:p>
+            <a:pPr algn="ctr">
+              <a:lnSpc>
+                <a:spcPct val="100000"/>
+              </a:lnSpc>
+            </a:pPr>
+            <a:r>
+              <a:rPr b="0" lang="en-US" sz="900" spc="-1" strike="noStrike">
+                <a:solidFill>
+                  <a:srgbClr val="78ffc8"/>
+                </a:solidFill>
+                <a:latin typeface="Consolas"/>
+                <a:ea typeface="DejaVu Sans"/>
+              </a:rPr>
+              <a:t>    </a:t>
+            </a:r>
+            <a:r>
+              <a:rPr b="0" lang="en-US" sz="900" spc="-1" strike="noStrike">
+                <a:solidFill>
+                  <a:srgbClr val="78ffc8"/>
+                </a:solidFill>
+                <a:latin typeface="Consolas"/>
+                <a:ea typeface="DejaVu Sans"/>
+              </a:rPr>
+              <a:t>public static void main(String[] args) {</a:t>
+            </a:r>
+            <a:endParaRPr b="0" lang="en-US" sz="900" spc="-1" strike="noStrike">
+              <a:solidFill>
+                <a:srgbClr val="ffffff"/>
+              </a:solidFill>
+              <a:latin typeface="Arial"/>
+            </a:endParaRPr>
+          </a:p>
+          <a:p>
+            <a:pPr algn="ctr">
+              <a:lnSpc>
+                <a:spcPct val="100000"/>
+              </a:lnSpc>
+            </a:pPr>
+            <a:r>
+              <a:rPr b="0" lang="en-US" sz="900" spc="-1" strike="noStrike">
+                <a:solidFill>
+                  <a:srgbClr val="78ffc8"/>
+                </a:solidFill>
+                <a:latin typeface="Consolas"/>
+                <a:ea typeface="DejaVu Sans"/>
+              </a:rPr>
+              <a:t>        </a:t>
+            </a:r>
+            <a:r>
+              <a:rPr b="0" lang="en-US" sz="900" spc="-1" strike="noStrike">
+                <a:solidFill>
+                  <a:srgbClr val="78ffc8"/>
+                </a:solidFill>
+                <a:latin typeface="Consolas"/>
+                <a:ea typeface="DejaVu Sans"/>
+              </a:rPr>
+              <a:t>// 1. Atama (Assignment) Operatörü</a:t>
+            </a:r>
+            <a:endParaRPr b="0" lang="en-US" sz="900" spc="-1" strike="noStrike">
+              <a:solidFill>
+                <a:srgbClr val="ffffff"/>
+              </a:solidFill>
+              <a:latin typeface="Arial"/>
+            </a:endParaRPr>
+          </a:p>
+          <a:p>
+            <a:pPr algn="ctr">
+              <a:lnSpc>
+                <a:spcPct val="100000"/>
+              </a:lnSpc>
+            </a:pPr>
+            <a:r>
+              <a:rPr b="0" lang="en-US" sz="900" spc="-1" strike="noStrike">
+                <a:solidFill>
+                  <a:srgbClr val="78ffc8"/>
+                </a:solidFill>
+                <a:latin typeface="Consolas"/>
+                <a:ea typeface="DejaVu Sans"/>
+              </a:rPr>
+              <a:t>        </a:t>
+            </a:r>
+            <a:r>
+              <a:rPr b="0" lang="en-US" sz="900" spc="-1" strike="noStrike">
+                <a:solidFill>
+                  <a:srgbClr val="78ffc8"/>
+                </a:solidFill>
+                <a:latin typeface="Consolas"/>
+                <a:ea typeface="DejaVu Sans"/>
+              </a:rPr>
+              <a:t>int a = 15;</a:t>
+            </a:r>
+            <a:endParaRPr b="0" lang="en-US" sz="900" spc="-1" strike="noStrike">
+              <a:solidFill>
+                <a:srgbClr val="ffffff"/>
+              </a:solidFill>
+              <a:latin typeface="Arial"/>
+            </a:endParaRPr>
+          </a:p>
+          <a:p>
+            <a:pPr algn="ctr">
+              <a:lnSpc>
+                <a:spcPct val="100000"/>
+              </a:lnSpc>
+            </a:pPr>
+            <a:r>
+              <a:rPr b="0" lang="en-US" sz="900" spc="-1" strike="noStrike">
+                <a:solidFill>
+                  <a:srgbClr val="78ffc8"/>
+                </a:solidFill>
+                <a:latin typeface="Consolas"/>
+                <a:ea typeface="DejaVu Sans"/>
+              </a:rPr>
+              <a:t>        </a:t>
+            </a:r>
+            <a:r>
+              <a:rPr b="0" lang="en-US" sz="900" spc="-1" strike="noStrike">
+                <a:solidFill>
+                  <a:srgbClr val="78ffc8"/>
+                </a:solidFill>
+                <a:latin typeface="Consolas"/>
+                <a:ea typeface="DejaVu Sans"/>
+              </a:rPr>
+              <a:t>int b = 4;</a:t>
+            </a:r>
+            <a:endParaRPr b="0" lang="en-US" sz="900" spc="-1" strike="noStrike">
+              <a:solidFill>
+                <a:srgbClr val="ffffff"/>
+              </a:solidFill>
+              <a:latin typeface="Arial"/>
+            </a:endParaRPr>
+          </a:p>
+          <a:p>
+            <a:pPr algn="ctr">
+              <a:lnSpc>
+                <a:spcPct val="100000"/>
+              </a:lnSpc>
+            </a:pPr>
+            <a:r>
+              <a:rPr b="0" lang="en-US" sz="900" spc="-1" strike="noStrike">
+                <a:solidFill>
+                  <a:srgbClr val="78ffc8"/>
+                </a:solidFill>
+                <a:latin typeface="Consolas"/>
+                <a:ea typeface="DejaVu Sans"/>
+              </a:rPr>
+              <a:t>        </a:t>
+            </a:r>
+            <a:r>
+              <a:rPr b="0" lang="en-US" sz="900" spc="-1" strike="noStrike">
+                <a:solidFill>
+                  <a:srgbClr val="78ffc8"/>
+                </a:solidFill>
+                <a:latin typeface="Consolas"/>
+                <a:ea typeface="DejaVu Sans"/>
+              </a:rPr>
+              <a:t>// 2. Aritmetik (Arithmetic) Operatörler</a:t>
+            </a:r>
+            <a:endParaRPr b="0" lang="en-US" sz="900" spc="-1" strike="noStrike">
+              <a:solidFill>
+                <a:srgbClr val="ffffff"/>
+              </a:solidFill>
+              <a:latin typeface="Arial"/>
+            </a:endParaRPr>
+          </a:p>
+          <a:p>
+            <a:pPr algn="ctr">
+              <a:lnSpc>
+                <a:spcPct val="100000"/>
+              </a:lnSpc>
+            </a:pPr>
+            <a:r>
+              <a:rPr b="0" lang="en-US" sz="900" spc="-1" strike="noStrike">
+                <a:solidFill>
+                  <a:srgbClr val="78ffc8"/>
+                </a:solidFill>
+                <a:latin typeface="Consolas"/>
+                <a:ea typeface="DejaVu Sans"/>
+              </a:rPr>
+              <a:t>        </a:t>
+            </a:r>
+            <a:r>
+              <a:rPr b="0" lang="en-US" sz="900" spc="-1" strike="noStrike">
+                <a:solidFill>
+                  <a:srgbClr val="78ffc8"/>
+                </a:solidFill>
+                <a:latin typeface="Consolas"/>
+                <a:ea typeface="DejaVu Sans"/>
+              </a:rPr>
+              <a:t>int toplam = a + b;   // 19</a:t>
+            </a:r>
+            <a:endParaRPr b="0" lang="en-US" sz="900" spc="-1" strike="noStrike">
+              <a:solidFill>
+                <a:srgbClr val="ffffff"/>
+              </a:solidFill>
+              <a:latin typeface="Arial"/>
+            </a:endParaRPr>
+          </a:p>
+          <a:p>
+            <a:pPr algn="ctr">
+              <a:lnSpc>
+                <a:spcPct val="100000"/>
+              </a:lnSpc>
+            </a:pPr>
+            <a:r>
+              <a:rPr b="0" lang="en-US" sz="900" spc="-1" strike="noStrike">
+                <a:solidFill>
+                  <a:srgbClr val="78ffc8"/>
+                </a:solidFill>
+                <a:latin typeface="Consolas"/>
+                <a:ea typeface="DejaVu Sans"/>
+              </a:rPr>
+              <a:t>        </a:t>
+            </a:r>
+            <a:r>
+              <a:rPr b="0" lang="en-US" sz="900" spc="-1" strike="noStrike">
+                <a:solidFill>
+                  <a:srgbClr val="78ffc8"/>
+                </a:solidFill>
+                <a:latin typeface="Consolas"/>
+                <a:ea typeface="DejaVu Sans"/>
+              </a:rPr>
+              <a:t>int kalan = a % b;    // 3 (Modülüs - kalanı bulur)</a:t>
+            </a:r>
+            <a:endParaRPr b="0" lang="en-US" sz="900" spc="-1" strike="noStrike">
+              <a:solidFill>
+                <a:srgbClr val="ffffff"/>
+              </a:solidFill>
+              <a:latin typeface="Arial"/>
+            </a:endParaRPr>
+          </a:p>
+          <a:p>
+            <a:pPr algn="ctr">
+              <a:lnSpc>
+                <a:spcPct val="100000"/>
+              </a:lnSpc>
+            </a:pPr>
+            <a:r>
+              <a:rPr b="0" lang="en-US" sz="900" spc="-1" strike="noStrike">
+                <a:solidFill>
+                  <a:srgbClr val="78ffc8"/>
+                </a:solidFill>
+                <a:latin typeface="Consolas"/>
+                <a:ea typeface="DejaVu Sans"/>
+              </a:rPr>
+              <a:t>        </a:t>
+            </a:r>
+            <a:endParaRPr b="0" lang="en-US" sz="900" spc="-1" strike="noStrike">
+              <a:solidFill>
+                <a:srgbClr val="ffffff"/>
+              </a:solidFill>
+              <a:latin typeface="Arial"/>
+            </a:endParaRPr>
+          </a:p>
+          <a:p>
+            <a:pPr algn="ctr">
+              <a:lnSpc>
+                <a:spcPct val="100000"/>
+              </a:lnSpc>
+            </a:pPr>
+            <a:r>
+              <a:rPr b="0" lang="en-US" sz="900" spc="-1" strike="noStrike">
+                <a:solidFill>
+                  <a:srgbClr val="78ffc8"/>
+                </a:solidFill>
+                <a:latin typeface="Consolas"/>
+                <a:ea typeface="DejaVu Sans"/>
+              </a:rPr>
+              <a:t>        </a:t>
+            </a:r>
+            <a:r>
+              <a:rPr b="0" lang="en-US" sz="900" spc="-1" strike="noStrike">
+                <a:solidFill>
+                  <a:srgbClr val="78ffc8"/>
+                </a:solidFill>
+                <a:latin typeface="Consolas"/>
+                <a:ea typeface="DejaVu Sans"/>
+              </a:rPr>
+              <a:t>// 3. İlişkisel (Relational) Operatörler</a:t>
+            </a:r>
+            <a:endParaRPr b="0" lang="en-US" sz="900" spc="-1" strike="noStrike">
+              <a:solidFill>
+                <a:srgbClr val="ffffff"/>
+              </a:solidFill>
+              <a:latin typeface="Arial"/>
+            </a:endParaRPr>
+          </a:p>
+          <a:p>
+            <a:pPr algn="ctr">
+              <a:lnSpc>
+                <a:spcPct val="100000"/>
+              </a:lnSpc>
+            </a:pPr>
+            <a:r>
+              <a:rPr b="0" lang="en-US" sz="900" spc="-1" strike="noStrike">
+                <a:solidFill>
+                  <a:srgbClr val="78ffc8"/>
+                </a:solidFill>
+                <a:latin typeface="Consolas"/>
+                <a:ea typeface="DejaVu Sans"/>
+              </a:rPr>
+              <a:t>        </a:t>
+            </a:r>
+            <a:r>
+              <a:rPr b="0" lang="en-US" sz="900" spc="-1" strike="noStrike">
+                <a:solidFill>
+                  <a:srgbClr val="78ffc8"/>
+                </a:solidFill>
+                <a:latin typeface="Consolas"/>
+                <a:ea typeface="DejaVu Sans"/>
+              </a:rPr>
+              <a:t>boolean buyukMu = (a &gt; b);  // true</a:t>
+            </a:r>
+            <a:endParaRPr b="0" lang="en-US" sz="900" spc="-1" strike="noStrike">
+              <a:solidFill>
+                <a:srgbClr val="ffffff"/>
+              </a:solidFill>
+              <a:latin typeface="Arial"/>
+            </a:endParaRPr>
+          </a:p>
+          <a:p>
+            <a:pPr algn="ctr">
+              <a:lnSpc>
+                <a:spcPct val="100000"/>
+              </a:lnSpc>
+            </a:pPr>
+            <a:r>
+              <a:rPr b="0" lang="en-US" sz="900" spc="-1" strike="noStrike">
+                <a:solidFill>
+                  <a:srgbClr val="78ffc8"/>
+                </a:solidFill>
+                <a:latin typeface="Consolas"/>
+                <a:ea typeface="DejaVu Sans"/>
+              </a:rPr>
+              <a:t>        </a:t>
+            </a:r>
+            <a:r>
+              <a:rPr b="0" lang="en-US" sz="900" spc="-1" strike="noStrike">
+                <a:solidFill>
+                  <a:srgbClr val="78ffc8"/>
+                </a:solidFill>
+                <a:latin typeface="Consolas"/>
+                <a:ea typeface="DejaVu Sans"/>
+              </a:rPr>
+              <a:t>boolean esitMi = (a == b);  // false</a:t>
+            </a:r>
+            <a:endParaRPr b="0" lang="en-US" sz="900" spc="-1" strike="noStrike">
+              <a:solidFill>
+                <a:srgbClr val="ffffff"/>
+              </a:solidFill>
+              <a:latin typeface="Arial"/>
+            </a:endParaRPr>
+          </a:p>
+          <a:p>
+            <a:pPr algn="ctr">
+              <a:lnSpc>
+                <a:spcPct val="100000"/>
+              </a:lnSpc>
+            </a:pPr>
+            <a:r>
+              <a:rPr b="0" lang="en-US" sz="900" spc="-1" strike="noStrike">
+                <a:solidFill>
+                  <a:srgbClr val="78ffc8"/>
+                </a:solidFill>
+                <a:latin typeface="Consolas"/>
+                <a:ea typeface="DejaVu Sans"/>
+              </a:rPr>
+              <a:t>        </a:t>
+            </a:r>
+            <a:endParaRPr b="0" lang="en-US" sz="900" spc="-1" strike="noStrike">
+              <a:solidFill>
+                <a:srgbClr val="ffffff"/>
+              </a:solidFill>
+              <a:latin typeface="Arial"/>
+            </a:endParaRPr>
+          </a:p>
+          <a:p>
+            <a:pPr algn="ctr">
+              <a:lnSpc>
+                <a:spcPct val="100000"/>
+              </a:lnSpc>
+            </a:pPr>
+            <a:r>
+              <a:rPr b="0" lang="en-US" sz="900" spc="-1" strike="noStrike">
+                <a:solidFill>
+                  <a:srgbClr val="78ffc8"/>
+                </a:solidFill>
+                <a:latin typeface="Consolas"/>
+                <a:ea typeface="DejaVu Sans"/>
+              </a:rPr>
+              <a:t>        </a:t>
+            </a:r>
+            <a:r>
+              <a:rPr b="0" lang="en-US" sz="900" spc="-1" strike="noStrike">
+                <a:solidFill>
+                  <a:srgbClr val="78ffc8"/>
+                </a:solidFill>
+                <a:latin typeface="Consolas"/>
+                <a:ea typeface="DejaVu Sans"/>
+              </a:rPr>
+              <a:t>// 4. Mantıksal (Logical) Operatörler</a:t>
+            </a:r>
+            <a:endParaRPr b="0" lang="en-US" sz="900" spc="-1" strike="noStrike">
+              <a:solidFill>
+                <a:srgbClr val="ffffff"/>
+              </a:solidFill>
+              <a:latin typeface="Arial"/>
+            </a:endParaRPr>
+          </a:p>
+          <a:p>
+            <a:pPr algn="ctr">
+              <a:lnSpc>
+                <a:spcPct val="100000"/>
+              </a:lnSpc>
+            </a:pPr>
+            <a:r>
+              <a:rPr b="0" lang="en-US" sz="900" spc="-1" strike="noStrike">
+                <a:solidFill>
+                  <a:srgbClr val="78ffc8"/>
+                </a:solidFill>
+                <a:latin typeface="Consolas"/>
+                <a:ea typeface="DejaVu Sans"/>
+              </a:rPr>
+              <a:t>        </a:t>
+            </a:r>
+            <a:r>
+              <a:rPr b="0" lang="en-US" sz="900" spc="-1" strike="noStrike">
+                <a:solidFill>
+                  <a:srgbClr val="78ffc8"/>
+                </a:solidFill>
+                <a:latin typeface="Consolas"/>
+                <a:ea typeface="DejaVu Sans"/>
+              </a:rPr>
+              <a:t>// "a 10'dan büyük VE b çift sayı mı?"</a:t>
+            </a:r>
+            <a:endParaRPr b="0" lang="en-US" sz="900" spc="-1" strike="noStrike">
+              <a:solidFill>
+                <a:srgbClr val="ffffff"/>
+              </a:solidFill>
+              <a:latin typeface="Arial"/>
+            </a:endParaRPr>
+          </a:p>
+          <a:p>
+            <a:pPr algn="ctr">
+              <a:lnSpc>
+                <a:spcPct val="100000"/>
+              </a:lnSpc>
+            </a:pPr>
+            <a:r>
+              <a:rPr b="0" lang="en-US" sz="900" spc="-1" strike="noStrike">
+                <a:solidFill>
+                  <a:srgbClr val="78ffc8"/>
+                </a:solidFill>
+                <a:latin typeface="Consolas"/>
+                <a:ea typeface="DejaVu Sans"/>
+              </a:rPr>
+              <a:t>        </a:t>
+            </a:r>
+            <a:r>
+              <a:rPr b="0" lang="en-US" sz="900" spc="-1" strike="noStrike">
+                <a:solidFill>
+                  <a:srgbClr val="78ffc8"/>
+                </a:solidFill>
+                <a:latin typeface="Consolas"/>
+                <a:ea typeface="DejaVu Sans"/>
+              </a:rPr>
+              <a:t>boolean sonuc = (a &gt; 10) &amp;&amp; (b % 2 == 0); // true</a:t>
+            </a:r>
+            <a:endParaRPr b="0" lang="en-US" sz="900" spc="-1" strike="noStrike">
+              <a:solidFill>
+                <a:srgbClr val="ffffff"/>
+              </a:solidFill>
+              <a:latin typeface="Arial"/>
+            </a:endParaRPr>
+          </a:p>
+          <a:p>
+            <a:pPr algn="ctr">
+              <a:lnSpc>
+                <a:spcPct val="100000"/>
+              </a:lnSpc>
+            </a:pPr>
+            <a:r>
+              <a:rPr b="0" lang="en-US" sz="900" spc="-1" strike="noStrike">
+                <a:solidFill>
+                  <a:srgbClr val="78ffc8"/>
+                </a:solidFill>
+                <a:latin typeface="Consolas"/>
+                <a:ea typeface="DejaVu Sans"/>
+              </a:rPr>
+              <a:t>        </a:t>
+            </a:r>
+            <a:endParaRPr b="0" lang="en-US" sz="900" spc="-1" strike="noStrike">
+              <a:solidFill>
+                <a:srgbClr val="ffffff"/>
+              </a:solidFill>
+              <a:latin typeface="Arial"/>
+            </a:endParaRPr>
+          </a:p>
+          <a:p>
+            <a:pPr algn="ctr">
+              <a:lnSpc>
+                <a:spcPct val="100000"/>
+              </a:lnSpc>
+            </a:pPr>
+            <a:r>
+              <a:rPr b="0" lang="en-US" sz="900" spc="-1" strike="noStrike">
+                <a:solidFill>
+                  <a:srgbClr val="78ffc8"/>
+                </a:solidFill>
+                <a:latin typeface="Consolas"/>
+                <a:ea typeface="DejaVu Sans"/>
+              </a:rPr>
+              <a:t>        </a:t>
+            </a:r>
+            <a:r>
+              <a:rPr b="0" lang="en-US" sz="900" spc="-1" strike="noStrike">
+                <a:solidFill>
+                  <a:srgbClr val="78ffc8"/>
+                </a:solidFill>
+                <a:latin typeface="Consolas"/>
+                <a:ea typeface="DejaVu Sans"/>
+              </a:rPr>
+              <a:t>System.out.println("Toplam: " + toplam);</a:t>
+            </a:r>
+            <a:endParaRPr b="0" lang="en-US" sz="900" spc="-1" strike="noStrike">
+              <a:solidFill>
+                <a:srgbClr val="ffffff"/>
+              </a:solidFill>
+              <a:latin typeface="Arial"/>
+            </a:endParaRPr>
+          </a:p>
+          <a:p>
+            <a:pPr algn="ctr">
+              <a:lnSpc>
+                <a:spcPct val="100000"/>
+              </a:lnSpc>
+            </a:pPr>
+            <a:r>
+              <a:rPr b="0" lang="en-US" sz="900" spc="-1" strike="noStrike">
+                <a:solidFill>
+                  <a:srgbClr val="78ffc8"/>
+                </a:solidFill>
+                <a:latin typeface="Consolas"/>
+                <a:ea typeface="DejaVu Sans"/>
+              </a:rPr>
+              <a:t>        </a:t>
+            </a:r>
+            <a:r>
+              <a:rPr b="0" lang="en-US" sz="900" spc="-1" strike="noStrike">
+                <a:solidFill>
+                  <a:srgbClr val="78ffc8"/>
+                </a:solidFill>
+                <a:latin typeface="Consolas"/>
+                <a:ea typeface="DejaVu Sans"/>
+              </a:rPr>
+              <a:t>System.out.println("Kalan: " + kalan);</a:t>
+            </a:r>
+            <a:endParaRPr b="0" lang="en-US" sz="900" spc="-1" strike="noStrike">
+              <a:solidFill>
+                <a:srgbClr val="ffffff"/>
+              </a:solidFill>
+              <a:latin typeface="Arial"/>
+            </a:endParaRPr>
+          </a:p>
+          <a:p>
+            <a:pPr algn="ctr">
+              <a:lnSpc>
+                <a:spcPct val="100000"/>
+              </a:lnSpc>
+            </a:pPr>
+            <a:r>
+              <a:rPr b="0" lang="en-US" sz="900" spc="-1" strike="noStrike">
+                <a:solidFill>
+                  <a:srgbClr val="78ffc8"/>
+                </a:solidFill>
+                <a:latin typeface="Consolas"/>
+                <a:ea typeface="DejaVu Sans"/>
+              </a:rPr>
+              <a:t>        </a:t>
+            </a:r>
+            <a:r>
+              <a:rPr b="0" lang="en-US" sz="900" spc="-1" strike="noStrike">
+                <a:solidFill>
+                  <a:srgbClr val="78ffc8"/>
+                </a:solidFill>
+                <a:latin typeface="Consolas"/>
+                <a:ea typeface="DejaVu Sans"/>
+              </a:rPr>
+              <a:t>System.out.println("Mantıksal Sonuç: " + sonuc);</a:t>
+            </a:r>
+            <a:endParaRPr b="0" lang="en-US" sz="900" spc="-1" strike="noStrike">
+              <a:solidFill>
+                <a:srgbClr val="ffffff"/>
+              </a:solidFill>
+              <a:latin typeface="Arial"/>
+            </a:endParaRPr>
+          </a:p>
+          <a:p>
+            <a:pPr algn="ctr">
+              <a:lnSpc>
+                <a:spcPct val="100000"/>
+              </a:lnSpc>
+            </a:pPr>
+            <a:r>
+              <a:rPr b="0" lang="en-US" sz="900" spc="-1" strike="noStrike">
+                <a:solidFill>
+                  <a:srgbClr val="78ffc8"/>
+                </a:solidFill>
+                <a:latin typeface="Consolas"/>
+                <a:ea typeface="DejaVu Sans"/>
+              </a:rPr>
+              <a:t>    </a:t>
+            </a:r>
+            <a:r>
+              <a:rPr b="0" lang="en-US" sz="900" spc="-1" strike="noStrike">
+                <a:solidFill>
+                  <a:srgbClr val="78ffc8"/>
+                </a:solidFill>
+                <a:latin typeface="Consolas"/>
+                <a:ea typeface="DejaVu Sans"/>
+              </a:rPr>
+              <a:t>}</a:t>
+            </a:r>
+            <a:endParaRPr b="0" lang="en-US" sz="900" spc="-1" strike="noStrike">
+              <a:solidFill>
+                <a:srgbClr val="ffffff"/>
+              </a:solidFill>
+              <a:latin typeface="Arial"/>
+            </a:endParaRPr>
+          </a:p>
+          <a:p>
+            <a:pPr algn="ctr">
+              <a:lnSpc>
+                <a:spcPct val="100000"/>
+              </a:lnSpc>
+            </a:pPr>
+            <a:r>
+              <a:rPr b="0" lang="en-US" sz="900" spc="-1" strike="noStrike">
+                <a:solidFill>
+                  <a:srgbClr val="78ffc8"/>
+                </a:solidFill>
+                <a:latin typeface="Consolas"/>
+                <a:ea typeface="DejaVu Sans"/>
+              </a:rPr>
+              <a:t>}</a:t>
+            </a:r>
+            <a:endParaRPr b="0" lang="en-US" sz="900" spc="-1" strike="noStrike">
+              <a:solidFill>
+                <a:srgbClr val="ffffff"/>
+              </a:solidFill>
+              <a:latin typeface="Arial"/>
+            </a:endParaRPr>
+          </a:p>
+        </p:txBody>
+      </p:sp>
+      <p:sp>
+        <p:nvSpPr>
+          <p:cNvPr id="248" name="TextBox 27"/>
           <p:cNvSpPr/>
           <p:nvPr/>
         </p:nvSpPr>

--- a/Java/Java #4/TR/Java #4.pptx
+++ b/Java/Java #4/TR/Java #4.pptx
@@ -13,6 +13,7 @@
     <p:sldId id="261" r:id="rId8"/>
     <p:sldId id="262" r:id="rId9"/>
     <p:sldId id="263" r:id="rId10"/>
+    <p:sldId id="264" r:id="rId11"/>
   </p:sldIdLst>
   <p:sldSz cx="9144000" cy="6858000"/>
   <p:notesSz cx="7772400" cy="10058400"/>
@@ -70,7 +71,7 @@
         <p:txBody>
           <a:bodyPr/>
           <a:p>
-            <a:fld id="{6FE48CFC-E871-4DBE-9CF9-DE661603F2D1}" type="slidenum">
+            <a:fld id="{90A4F1A9-6680-4A7A-8DAA-A3229BFE61B3}" type="slidenum">
               <a:t>&lt;#&gt;</a:t>
             </a:fld>
           </a:p>
@@ -279,7 +280,7 @@
         <p:txBody>
           <a:bodyPr/>
           <a:p>
-            <a:fld id="{FFB61840-15E4-47FA-B54A-5565C941364B}" type="slidenum">
+            <a:fld id="{8769EF85-4C7E-4FD5-A296-5A513A53A5CD}" type="slidenum">
               <a:t>&lt;#&gt;</a:t>
             </a:fld>
           </a:p>
@@ -574,7 +575,7 @@
         <p:txBody>
           <a:bodyPr/>
           <a:p>
-            <a:fld id="{1665ECAF-ED30-4CD2-B139-46EA7FB56C86}" type="slidenum">
+            <a:fld id="{C6C31CDE-D0A6-4450-B0B5-D5C2E62EDF76}" type="slidenum">
               <a:t>&lt;#&gt;</a:t>
             </a:fld>
           </a:p>
@@ -955,7 +956,7 @@
         <p:txBody>
           <a:bodyPr/>
           <a:p>
-            <a:fld id="{558E8BB5-452A-4EDE-8F18-D1FB68E7465A}" type="slidenum">
+            <a:fld id="{7C86C56A-E079-4397-95F8-A5609B4CD2D3}" type="slidenum">
               <a:t>&lt;#&gt;</a:t>
             </a:fld>
           </a:p>
@@ -1118,7 +1119,7 @@
         <p:txBody>
           <a:bodyPr/>
           <a:p>
-            <a:fld id="{43A0BE56-8DEF-468A-AF47-24A62642E48F}" type="slidenum">
+            <a:fld id="{4B5FB84C-E1BB-467B-8E54-806869CE122C}" type="slidenum">
               <a:t>&lt;#&gt;</a:t>
             </a:fld>
           </a:p>
@@ -1284,7 +1285,7 @@
         <p:txBody>
           <a:bodyPr/>
           <a:p>
-            <a:fld id="{8D314621-F359-48B2-AE0D-A2DF72BE0379}" type="slidenum">
+            <a:fld id="{B2D285B4-BB54-4B0F-A57A-AC6CE4FD471E}" type="slidenum">
               <a:t>&lt;#&gt;</a:t>
             </a:fld>
           </a:p>
@@ -1493,7 +1494,7 @@
         <p:txBody>
           <a:bodyPr/>
           <a:p>
-            <a:fld id="{4E157678-6657-4E7D-8DB7-D056FB4A3F50}" type="slidenum">
+            <a:fld id="{292542BC-3140-4864-A53D-94545D79EB74}" type="slidenum">
               <a:t>&lt;#&gt;</a:t>
             </a:fld>
           </a:p>
@@ -1616,7 +1617,7 @@
         <p:txBody>
           <a:bodyPr/>
           <a:p>
-            <a:fld id="{6DB97325-3FE9-499B-AF25-ED4340EFC5F2}" type="slidenum">
+            <a:fld id="{393A55C6-EFBD-403C-B196-3D9CBFC6ABB2}" type="slidenum">
               <a:t>&lt;#&gt;</a:t>
             </a:fld>
           </a:p>
@@ -1737,7 +1738,7 @@
         <p:txBody>
           <a:bodyPr/>
           <a:p>
-            <a:fld id="{8E8ED87F-D216-4791-9B66-F81078395851}" type="slidenum">
+            <a:fld id="{D57EE482-835E-4FB9-B244-5339A37A1837}" type="slidenum">
               <a:t>&lt;#&gt;</a:t>
             </a:fld>
           </a:p>
@@ -1989,7 +1990,7 @@
         <p:txBody>
           <a:bodyPr/>
           <a:p>
-            <a:fld id="{6DA85190-1074-467E-A095-57FE2518C840}" type="slidenum">
+            <a:fld id="{20377F3F-1D39-498C-9136-30148ABF5DC9}" type="slidenum">
               <a:t>&lt;#&gt;</a:t>
             </a:fld>
           </a:p>
@@ -2241,7 +2242,7 @@
         <p:txBody>
           <a:bodyPr/>
           <a:p>
-            <a:fld id="{7470D5AD-A763-4460-9C2B-4E8037A938D0}" type="slidenum">
+            <a:fld id="{B41D8123-92D7-4DF8-8676-C15ED8F660CC}" type="slidenum">
               <a:t>&lt;#&gt;</a:t>
             </a:fld>
           </a:p>
@@ -2493,7 +2494,7 @@
         <p:txBody>
           <a:bodyPr/>
           <a:p>
-            <a:fld id="{344C1031-C2E2-44C3-83A6-DA463DB93A3E}" type="slidenum">
+            <a:fld id="{B39C71E0-4E19-4D21-BA1C-5CDFF6F4E9E2}" type="slidenum">
               <a:t>&lt;#&gt;</a:t>
             </a:fld>
           </a:p>
@@ -2562,7 +2563,7 @@
         <p:spPr>
           <a:xfrm>
             <a:off x="3124080" y="6356520"/>
-            <a:ext cx="2891520" cy="361080"/>
+            <a:ext cx="2891160" cy="360720"/>
           </a:xfrm>
           <a:prstGeom prst="rect">
             <a:avLst/>
@@ -2634,7 +2635,7 @@
         <p:spPr>
           <a:xfrm>
             <a:off x="6553080" y="6356520"/>
-            <a:ext cx="2129760" cy="361080"/>
+            <a:ext cx="2129400" cy="360720"/>
           </a:xfrm>
           <a:prstGeom prst="rect">
             <a:avLst/>
@@ -2675,7 +2676,7 @@
                 <a:tab algn="l" pos="0"/>
               </a:tabLst>
             </a:pPr>
-            <a:fld id="{8DCDB33B-033B-4DAA-93D7-EF0FD568FD89}" type="slidenum">
+            <a:fld id="{BDE87841-B79F-4071-9FA7-EFEA7C78C69F}" type="slidenum">
               <a:rPr b="0" lang="en-US" sz="1200" spc="-1" strike="noStrike">
                 <a:solidFill>
                   <a:srgbClr val="8b8b8b"/>
@@ -2706,7 +2707,7 @@
         <p:spPr>
           <a:xfrm>
             <a:off x="457200" y="6356520"/>
-            <a:ext cx="2129760" cy="361080"/>
+            <a:ext cx="2129400" cy="360720"/>
           </a:xfrm>
           <a:prstGeom prst="rect">
             <a:avLst/>
@@ -3073,7 +3074,7 @@
         <p:spPr>
           <a:xfrm>
             <a:off x="0" y="0"/>
-            <a:ext cx="12184920" cy="6854040"/>
+            <a:ext cx="12184560" cy="6853680"/>
           </a:xfrm>
           <a:prstGeom prst="rect">
             <a:avLst/>
@@ -3133,7 +3134,7 @@
         <p:spPr>
           <a:xfrm>
             <a:off x="0" y="0"/>
-            <a:ext cx="14400" cy="6854040"/>
+            <a:ext cx="14040" cy="6853680"/>
           </a:xfrm>
           <a:prstGeom prst="rect">
             <a:avLst/>
@@ -3193,7 +3194,7 @@
         <p:spPr>
           <a:xfrm>
             <a:off x="914400" y="0"/>
-            <a:ext cx="14400" cy="6854040"/>
+            <a:ext cx="14040" cy="6853680"/>
           </a:xfrm>
           <a:prstGeom prst="rect">
             <a:avLst/>
@@ -3253,7 +3254,7 @@
         <p:spPr>
           <a:xfrm>
             <a:off x="1828800" y="0"/>
-            <a:ext cx="14400" cy="6854040"/>
+            <a:ext cx="14040" cy="6853680"/>
           </a:xfrm>
           <a:prstGeom prst="rect">
             <a:avLst/>
@@ -3313,7 +3314,7 @@
         <p:spPr>
           <a:xfrm>
             <a:off x="2743200" y="0"/>
-            <a:ext cx="14400" cy="6854040"/>
+            <a:ext cx="14040" cy="6853680"/>
           </a:xfrm>
           <a:prstGeom prst="rect">
             <a:avLst/>
@@ -3373,7 +3374,7 @@
         <p:spPr>
           <a:xfrm>
             <a:off x="3657600" y="0"/>
-            <a:ext cx="14400" cy="6854040"/>
+            <a:ext cx="14040" cy="6853680"/>
           </a:xfrm>
           <a:prstGeom prst="rect">
             <a:avLst/>
@@ -3433,7 +3434,7 @@
         <p:spPr>
           <a:xfrm>
             <a:off x="4572000" y="0"/>
-            <a:ext cx="14400" cy="6854040"/>
+            <a:ext cx="14040" cy="6853680"/>
           </a:xfrm>
           <a:prstGeom prst="rect">
             <a:avLst/>
@@ -3493,7 +3494,7 @@
         <p:spPr>
           <a:xfrm>
             <a:off x="5486400" y="0"/>
-            <a:ext cx="14400" cy="6854040"/>
+            <a:ext cx="14040" cy="6853680"/>
           </a:xfrm>
           <a:prstGeom prst="rect">
             <a:avLst/>
@@ -3553,7 +3554,7 @@
         <p:spPr>
           <a:xfrm>
             <a:off x="6400800" y="0"/>
-            <a:ext cx="14400" cy="6854040"/>
+            <a:ext cx="14040" cy="6853680"/>
           </a:xfrm>
           <a:prstGeom prst="rect">
             <a:avLst/>
@@ -3613,7 +3614,7 @@
         <p:spPr>
           <a:xfrm>
             <a:off x="7315200" y="0"/>
-            <a:ext cx="14400" cy="6854040"/>
+            <a:ext cx="14040" cy="6853680"/>
           </a:xfrm>
           <a:prstGeom prst="rect">
             <a:avLst/>
@@ -3673,7 +3674,7 @@
         <p:spPr>
           <a:xfrm>
             <a:off x="8229600" y="0"/>
-            <a:ext cx="14400" cy="6854040"/>
+            <a:ext cx="14040" cy="6853680"/>
           </a:xfrm>
           <a:prstGeom prst="rect">
             <a:avLst/>
@@ -3733,7 +3734,7 @@
         <p:spPr>
           <a:xfrm>
             <a:off x="9144000" y="0"/>
-            <a:ext cx="14400" cy="6854040"/>
+            <a:ext cx="14040" cy="6853680"/>
           </a:xfrm>
           <a:prstGeom prst="rect">
             <a:avLst/>
@@ -3793,7 +3794,7 @@
         <p:spPr>
           <a:xfrm>
             <a:off x="10058400" y="0"/>
-            <a:ext cx="14400" cy="6854040"/>
+            <a:ext cx="14040" cy="6853680"/>
           </a:xfrm>
           <a:prstGeom prst="rect">
             <a:avLst/>
@@ -3853,7 +3854,7 @@
         <p:spPr>
           <a:xfrm>
             <a:off x="10972800" y="0"/>
-            <a:ext cx="14400" cy="6854040"/>
+            <a:ext cx="14040" cy="6853680"/>
           </a:xfrm>
           <a:prstGeom prst="rect">
             <a:avLst/>
@@ -3913,7 +3914,7 @@
         <p:spPr>
           <a:xfrm>
             <a:off x="11887200" y="0"/>
-            <a:ext cx="14400" cy="6854040"/>
+            <a:ext cx="14040" cy="6853680"/>
           </a:xfrm>
           <a:prstGeom prst="rect">
             <a:avLst/>
@@ -3973,7 +3974,7 @@
         <p:spPr>
           <a:xfrm>
             <a:off x="0" y="0"/>
-            <a:ext cx="316080" cy="6854040"/>
+            <a:ext cx="315720" cy="6853680"/>
           </a:xfrm>
           <a:prstGeom prst="rect">
             <a:avLst/>
@@ -4033,7 +4034,7 @@
         <p:spPr>
           <a:xfrm>
             <a:off x="9875520" y="365760"/>
-            <a:ext cx="2007720" cy="498960"/>
+            <a:ext cx="2007360" cy="498600"/>
           </a:xfrm>
           <a:prstGeom prst="roundRect">
             <a:avLst>
@@ -4284,7 +4285,7 @@
         <p:spPr>
           <a:xfrm>
             <a:off x="987480" y="3182040"/>
-            <a:ext cx="3287880" cy="2739240"/>
+            <a:ext cx="3287520" cy="2738880"/>
           </a:xfrm>
           <a:prstGeom prst="roundRect">
             <a:avLst>
@@ -4346,7 +4347,7 @@
         <p:spPr>
           <a:xfrm>
             <a:off x="914400" y="3108960"/>
-            <a:ext cx="3287880" cy="2739240"/>
+            <a:ext cx="3287520" cy="2738880"/>
           </a:xfrm>
           <a:prstGeom prst="roundRect">
             <a:avLst>
@@ -4480,7 +4481,7 @@
         <p:spPr>
           <a:xfrm>
             <a:off x="4507920" y="3182040"/>
-            <a:ext cx="3287880" cy="2739240"/>
+            <a:ext cx="3287520" cy="2738880"/>
           </a:xfrm>
           <a:prstGeom prst="roundRect">
             <a:avLst>
@@ -4542,7 +4543,7 @@
         <p:spPr>
           <a:xfrm>
             <a:off x="4434840" y="3108960"/>
-            <a:ext cx="3287880" cy="2739240"/>
+            <a:ext cx="3287520" cy="2738880"/>
           </a:xfrm>
           <a:prstGeom prst="roundRect">
             <a:avLst>
@@ -4800,7 +4801,7 @@
         <p:spPr>
           <a:xfrm>
             <a:off x="8028360" y="3182040"/>
-            <a:ext cx="3287880" cy="2739240"/>
+            <a:ext cx="3287520" cy="2738880"/>
           </a:xfrm>
           <a:prstGeom prst="roundRect">
             <a:avLst>
@@ -4862,7 +4863,7 @@
         <p:spPr>
           <a:xfrm>
             <a:off x="7955280" y="2971800"/>
-            <a:ext cx="3929040" cy="3654720"/>
+            <a:ext cx="3928680" cy="3654360"/>
           </a:xfrm>
           <a:prstGeom prst="roundRect">
             <a:avLst>
@@ -5373,7 +5374,7 @@
         <p:spPr>
           <a:xfrm>
             <a:off x="0" y="0"/>
-            <a:ext cx="12185280" cy="6854400"/>
+            <a:ext cx="12184920" cy="6854040"/>
           </a:xfrm>
           <a:prstGeom prst="rect">
             <a:avLst/>
@@ -5433,7 +5434,7 @@
         <p:spPr>
           <a:xfrm>
             <a:off x="0" y="0"/>
-            <a:ext cx="14760" cy="6854400"/>
+            <a:ext cx="14400" cy="6854040"/>
           </a:xfrm>
           <a:prstGeom prst="rect">
             <a:avLst/>
@@ -5493,7 +5494,7 @@
         <p:spPr>
           <a:xfrm>
             <a:off x="914400" y="0"/>
-            <a:ext cx="14760" cy="6854400"/>
+            <a:ext cx="14400" cy="6854040"/>
           </a:xfrm>
           <a:prstGeom prst="rect">
             <a:avLst/>
@@ -5553,7 +5554,7 @@
         <p:spPr>
           <a:xfrm>
             <a:off x="1828800" y="0"/>
-            <a:ext cx="14760" cy="6854400"/>
+            <a:ext cx="14400" cy="6854040"/>
           </a:xfrm>
           <a:prstGeom prst="rect">
             <a:avLst/>
@@ -5613,7 +5614,7 @@
         <p:spPr>
           <a:xfrm>
             <a:off x="2743200" y="0"/>
-            <a:ext cx="14760" cy="6854400"/>
+            <a:ext cx="14400" cy="6854040"/>
           </a:xfrm>
           <a:prstGeom prst="rect">
             <a:avLst/>
@@ -5673,7 +5674,7 @@
         <p:spPr>
           <a:xfrm>
             <a:off x="3657600" y="0"/>
-            <a:ext cx="14760" cy="6854400"/>
+            <a:ext cx="14400" cy="6854040"/>
           </a:xfrm>
           <a:prstGeom prst="rect">
             <a:avLst/>
@@ -5733,7 +5734,7 @@
         <p:spPr>
           <a:xfrm>
             <a:off x="4572000" y="0"/>
-            <a:ext cx="14760" cy="6854400"/>
+            <a:ext cx="14400" cy="6854040"/>
           </a:xfrm>
           <a:prstGeom prst="rect">
             <a:avLst/>
@@ -5793,7 +5794,7 @@
         <p:spPr>
           <a:xfrm>
             <a:off x="5486400" y="0"/>
-            <a:ext cx="14760" cy="6854400"/>
+            <a:ext cx="14400" cy="6854040"/>
           </a:xfrm>
           <a:prstGeom prst="rect">
             <a:avLst/>
@@ -5853,7 +5854,7 @@
         <p:spPr>
           <a:xfrm>
             <a:off x="6400800" y="0"/>
-            <a:ext cx="14760" cy="6854400"/>
+            <a:ext cx="14400" cy="6854040"/>
           </a:xfrm>
           <a:prstGeom prst="rect">
             <a:avLst/>
@@ -5913,7 +5914,7 @@
         <p:spPr>
           <a:xfrm>
             <a:off x="7315200" y="0"/>
-            <a:ext cx="14760" cy="6854400"/>
+            <a:ext cx="14400" cy="6854040"/>
           </a:xfrm>
           <a:prstGeom prst="rect">
             <a:avLst/>
@@ -5973,7 +5974,7 @@
         <p:spPr>
           <a:xfrm>
             <a:off x="8229600" y="0"/>
-            <a:ext cx="14760" cy="6854400"/>
+            <a:ext cx="14400" cy="6854040"/>
           </a:xfrm>
           <a:prstGeom prst="rect">
             <a:avLst/>
@@ -6033,7 +6034,7 @@
         <p:spPr>
           <a:xfrm>
             <a:off x="9144000" y="0"/>
-            <a:ext cx="14760" cy="6854400"/>
+            <a:ext cx="14400" cy="6854040"/>
           </a:xfrm>
           <a:prstGeom prst="rect">
             <a:avLst/>
@@ -6093,7 +6094,7 @@
         <p:spPr>
           <a:xfrm>
             <a:off x="10058400" y="0"/>
-            <a:ext cx="14760" cy="6854400"/>
+            <a:ext cx="14400" cy="6854040"/>
           </a:xfrm>
           <a:prstGeom prst="rect">
             <a:avLst/>
@@ -6153,7 +6154,7 @@
         <p:spPr>
           <a:xfrm>
             <a:off x="10972800" y="0"/>
-            <a:ext cx="14760" cy="6854400"/>
+            <a:ext cx="14400" cy="6854040"/>
           </a:xfrm>
           <a:prstGeom prst="rect">
             <a:avLst/>
@@ -6213,7 +6214,7 @@
         <p:spPr>
           <a:xfrm>
             <a:off x="11887200" y="0"/>
-            <a:ext cx="14760" cy="6854400"/>
+            <a:ext cx="14400" cy="6854040"/>
           </a:xfrm>
           <a:prstGeom prst="rect">
             <a:avLst/>
@@ -6273,7 +6274,7 @@
         <p:spPr>
           <a:xfrm>
             <a:off x="0" y="0"/>
-            <a:ext cx="316440" cy="6854400"/>
+            <a:ext cx="316080" cy="6854040"/>
           </a:xfrm>
           <a:prstGeom prst="rect">
             <a:avLst/>
@@ -6333,7 +6334,7 @@
         <p:spPr>
           <a:xfrm>
             <a:off x="9875520" y="365760"/>
-            <a:ext cx="2008080" cy="499320"/>
+            <a:ext cx="2007720" cy="498960"/>
           </a:xfrm>
           <a:prstGeom prst="roundRect">
             <a:avLst>
@@ -6561,7 +6562,7 @@
         <p:spPr>
           <a:xfrm>
             <a:off x="987480" y="3182040"/>
-            <a:ext cx="3288240" cy="2739600"/>
+            <a:ext cx="3287880" cy="2739240"/>
           </a:xfrm>
           <a:prstGeom prst="roundRect">
             <a:avLst>
@@ -6623,7 +6624,7 @@
         <p:spPr>
           <a:xfrm>
             <a:off x="914400" y="3108960"/>
-            <a:ext cx="3288240" cy="2739600"/>
+            <a:ext cx="3287880" cy="2739240"/>
           </a:xfrm>
           <a:prstGeom prst="roundRect">
             <a:avLst>
@@ -6786,7 +6787,7 @@
         <p:spPr>
           <a:xfrm>
             <a:off x="4507920" y="3182040"/>
-            <a:ext cx="3288240" cy="2739600"/>
+            <a:ext cx="3287880" cy="2739240"/>
           </a:xfrm>
           <a:prstGeom prst="roundRect">
             <a:avLst>
@@ -6848,7 +6849,7 @@
         <p:spPr>
           <a:xfrm>
             <a:off x="4434840" y="3108960"/>
-            <a:ext cx="3288240" cy="2739600"/>
+            <a:ext cx="3287880" cy="2739240"/>
           </a:xfrm>
           <a:prstGeom prst="roundRect">
             <a:avLst>
@@ -7106,7 +7107,7 @@
         <p:spPr>
           <a:xfrm>
             <a:off x="8028360" y="3182040"/>
-            <a:ext cx="3288240" cy="2739600"/>
+            <a:ext cx="3287880" cy="2739240"/>
           </a:xfrm>
           <a:prstGeom prst="roundRect">
             <a:avLst>
@@ -7168,7 +7169,7 @@
         <p:spPr>
           <a:xfrm>
             <a:off x="7955280" y="3108960"/>
-            <a:ext cx="3700800" cy="3060720"/>
+            <a:ext cx="3700440" cy="3060360"/>
           </a:xfrm>
           <a:prstGeom prst="roundRect">
             <a:avLst>
@@ -7613,7 +7614,7 @@
         <p:spPr>
           <a:xfrm>
             <a:off x="0" y="0"/>
-            <a:ext cx="12185280" cy="6854400"/>
+            <a:ext cx="12184920" cy="6854040"/>
           </a:xfrm>
           <a:prstGeom prst="rect">
             <a:avLst/>
@@ -7673,7 +7674,7 @@
         <p:spPr>
           <a:xfrm>
             <a:off x="0" y="0"/>
-            <a:ext cx="14760" cy="6854400"/>
+            <a:ext cx="14400" cy="6854040"/>
           </a:xfrm>
           <a:prstGeom prst="rect">
             <a:avLst/>
@@ -7733,7 +7734,7 @@
         <p:spPr>
           <a:xfrm>
             <a:off x="914400" y="0"/>
-            <a:ext cx="14760" cy="6854400"/>
+            <a:ext cx="14400" cy="6854040"/>
           </a:xfrm>
           <a:prstGeom prst="rect">
             <a:avLst/>
@@ -7793,7 +7794,7 @@
         <p:spPr>
           <a:xfrm>
             <a:off x="1828800" y="0"/>
-            <a:ext cx="14760" cy="6854400"/>
+            <a:ext cx="14400" cy="6854040"/>
           </a:xfrm>
           <a:prstGeom prst="rect">
             <a:avLst/>
@@ -7853,7 +7854,7 @@
         <p:spPr>
           <a:xfrm>
             <a:off x="2743200" y="0"/>
-            <a:ext cx="14760" cy="6854400"/>
+            <a:ext cx="14400" cy="6854040"/>
           </a:xfrm>
           <a:prstGeom prst="rect">
             <a:avLst/>
@@ -7913,7 +7914,7 @@
         <p:spPr>
           <a:xfrm>
             <a:off x="3657600" y="0"/>
-            <a:ext cx="14760" cy="6854400"/>
+            <a:ext cx="14400" cy="6854040"/>
           </a:xfrm>
           <a:prstGeom prst="rect">
             <a:avLst/>
@@ -7973,7 +7974,7 @@
         <p:spPr>
           <a:xfrm>
             <a:off x="4572000" y="0"/>
-            <a:ext cx="14760" cy="6854400"/>
+            <a:ext cx="14400" cy="6854040"/>
           </a:xfrm>
           <a:prstGeom prst="rect">
             <a:avLst/>
@@ -8033,7 +8034,7 @@
         <p:spPr>
           <a:xfrm>
             <a:off x="5486400" y="0"/>
-            <a:ext cx="14760" cy="6854400"/>
+            <a:ext cx="14400" cy="6854040"/>
           </a:xfrm>
           <a:prstGeom prst="rect">
             <a:avLst/>
@@ -8093,7 +8094,7 @@
         <p:spPr>
           <a:xfrm>
             <a:off x="6400800" y="0"/>
-            <a:ext cx="14760" cy="6854400"/>
+            <a:ext cx="14400" cy="6854040"/>
           </a:xfrm>
           <a:prstGeom prst="rect">
             <a:avLst/>
@@ -8153,7 +8154,7 @@
         <p:spPr>
           <a:xfrm>
             <a:off x="7315200" y="0"/>
-            <a:ext cx="14760" cy="6854400"/>
+            <a:ext cx="14400" cy="6854040"/>
           </a:xfrm>
           <a:prstGeom prst="rect">
             <a:avLst/>
@@ -8213,7 +8214,7 @@
         <p:spPr>
           <a:xfrm>
             <a:off x="8229600" y="0"/>
-            <a:ext cx="14760" cy="6854400"/>
+            <a:ext cx="14400" cy="6854040"/>
           </a:xfrm>
           <a:prstGeom prst="rect">
             <a:avLst/>
@@ -8273,7 +8274,7 @@
         <p:spPr>
           <a:xfrm>
             <a:off x="9144000" y="0"/>
-            <a:ext cx="14760" cy="6854400"/>
+            <a:ext cx="14400" cy="6854040"/>
           </a:xfrm>
           <a:prstGeom prst="rect">
             <a:avLst/>
@@ -8333,7 +8334,7 @@
         <p:spPr>
           <a:xfrm>
             <a:off x="10058400" y="0"/>
-            <a:ext cx="14760" cy="6854400"/>
+            <a:ext cx="14400" cy="6854040"/>
           </a:xfrm>
           <a:prstGeom prst="rect">
             <a:avLst/>
@@ -8393,7 +8394,7 @@
         <p:spPr>
           <a:xfrm>
             <a:off x="10972800" y="0"/>
-            <a:ext cx="14760" cy="6854400"/>
+            <a:ext cx="14400" cy="6854040"/>
           </a:xfrm>
           <a:prstGeom prst="rect">
             <a:avLst/>
@@ -8453,7 +8454,7 @@
         <p:spPr>
           <a:xfrm>
             <a:off x="11887200" y="0"/>
-            <a:ext cx="14760" cy="6854400"/>
+            <a:ext cx="14400" cy="6854040"/>
           </a:xfrm>
           <a:prstGeom prst="rect">
             <a:avLst/>
@@ -8513,7 +8514,7 @@
         <p:spPr>
           <a:xfrm>
             <a:off x="0" y="0"/>
-            <a:ext cx="316440" cy="6854400"/>
+            <a:ext cx="316080" cy="6854040"/>
           </a:xfrm>
           <a:prstGeom prst="rect">
             <a:avLst/>
@@ -8573,7 +8574,7 @@
         <p:spPr>
           <a:xfrm>
             <a:off x="9875520" y="365760"/>
-            <a:ext cx="2008080" cy="499320"/>
+            <a:ext cx="2007720" cy="498960"/>
           </a:xfrm>
           <a:prstGeom prst="roundRect">
             <a:avLst>
@@ -8778,7 +8779,7 @@
         <p:spPr>
           <a:xfrm>
             <a:off x="987480" y="3182040"/>
-            <a:ext cx="3288240" cy="2739600"/>
+            <a:ext cx="3287880" cy="2739240"/>
           </a:xfrm>
           <a:prstGeom prst="roundRect">
             <a:avLst>
@@ -8840,7 +8841,7 @@
         <p:spPr>
           <a:xfrm>
             <a:off x="914400" y="3108960"/>
-            <a:ext cx="3288240" cy="3061080"/>
+            <a:ext cx="3287880" cy="3060720"/>
           </a:xfrm>
           <a:prstGeom prst="roundRect">
             <a:avLst>
@@ -9031,7 +9032,7 @@
         <p:spPr>
           <a:xfrm>
             <a:off x="4507920" y="3182040"/>
-            <a:ext cx="3288240" cy="2739600"/>
+            <a:ext cx="3287880" cy="2739240"/>
           </a:xfrm>
           <a:prstGeom prst="roundRect">
             <a:avLst>
@@ -9093,7 +9094,7 @@
         <p:spPr>
           <a:xfrm>
             <a:off x="4434840" y="3108960"/>
-            <a:ext cx="3288240" cy="2739600"/>
+            <a:ext cx="3287880" cy="2739240"/>
           </a:xfrm>
           <a:prstGeom prst="roundRect">
             <a:avLst>
@@ -9351,7 +9352,7 @@
         <p:spPr>
           <a:xfrm>
             <a:off x="8028360" y="3182040"/>
-            <a:ext cx="3288240" cy="2739600"/>
+            <a:ext cx="3287880" cy="2739240"/>
           </a:xfrm>
           <a:prstGeom prst="roundRect">
             <a:avLst>
@@ -9413,7 +9414,7 @@
         <p:spPr>
           <a:xfrm>
             <a:off x="7955280" y="3108960"/>
-            <a:ext cx="3700800" cy="3060720"/>
+            <a:ext cx="3700440" cy="3060360"/>
           </a:xfrm>
           <a:prstGeom prst="roundRect">
             <a:avLst>
@@ -9858,7 +9859,7 @@
         <p:spPr>
           <a:xfrm>
             <a:off x="0" y="0"/>
-            <a:ext cx="12185280" cy="6854400"/>
+            <a:ext cx="12184920" cy="6854040"/>
           </a:xfrm>
           <a:prstGeom prst="rect">
             <a:avLst/>
@@ -9918,7 +9919,7 @@
         <p:spPr>
           <a:xfrm>
             <a:off x="0" y="0"/>
-            <a:ext cx="14760" cy="6854400"/>
+            <a:ext cx="14400" cy="6854040"/>
           </a:xfrm>
           <a:prstGeom prst="rect">
             <a:avLst/>
@@ -9978,7 +9979,7 @@
         <p:spPr>
           <a:xfrm>
             <a:off x="914400" y="0"/>
-            <a:ext cx="14760" cy="6854400"/>
+            <a:ext cx="14400" cy="6854040"/>
           </a:xfrm>
           <a:prstGeom prst="rect">
             <a:avLst/>
@@ -10038,7 +10039,7 @@
         <p:spPr>
           <a:xfrm>
             <a:off x="1828800" y="0"/>
-            <a:ext cx="14760" cy="6854400"/>
+            <a:ext cx="14400" cy="6854040"/>
           </a:xfrm>
           <a:prstGeom prst="rect">
             <a:avLst/>
@@ -10098,7 +10099,7 @@
         <p:spPr>
           <a:xfrm>
             <a:off x="2743200" y="0"/>
-            <a:ext cx="14760" cy="6854400"/>
+            <a:ext cx="14400" cy="6854040"/>
           </a:xfrm>
           <a:prstGeom prst="rect">
             <a:avLst/>
@@ -10158,7 +10159,7 @@
         <p:spPr>
           <a:xfrm>
             <a:off x="3657600" y="0"/>
-            <a:ext cx="14760" cy="6854400"/>
+            <a:ext cx="14400" cy="6854040"/>
           </a:xfrm>
           <a:prstGeom prst="rect">
             <a:avLst/>
@@ -10218,7 +10219,7 @@
         <p:spPr>
           <a:xfrm>
             <a:off x="4572000" y="0"/>
-            <a:ext cx="14760" cy="6854400"/>
+            <a:ext cx="14400" cy="6854040"/>
           </a:xfrm>
           <a:prstGeom prst="rect">
             <a:avLst/>
@@ -10278,7 +10279,7 @@
         <p:spPr>
           <a:xfrm>
             <a:off x="5486400" y="0"/>
-            <a:ext cx="14760" cy="6854400"/>
+            <a:ext cx="14400" cy="6854040"/>
           </a:xfrm>
           <a:prstGeom prst="rect">
             <a:avLst/>
@@ -10338,7 +10339,7 @@
         <p:spPr>
           <a:xfrm>
             <a:off x="6400800" y="0"/>
-            <a:ext cx="14760" cy="6854400"/>
+            <a:ext cx="14400" cy="6854040"/>
           </a:xfrm>
           <a:prstGeom prst="rect">
             <a:avLst/>
@@ -10398,7 +10399,7 @@
         <p:spPr>
           <a:xfrm>
             <a:off x="7315200" y="0"/>
-            <a:ext cx="14760" cy="6854400"/>
+            <a:ext cx="14400" cy="6854040"/>
           </a:xfrm>
           <a:prstGeom prst="rect">
             <a:avLst/>
@@ -10458,7 +10459,7 @@
         <p:spPr>
           <a:xfrm>
             <a:off x="8229600" y="0"/>
-            <a:ext cx="14760" cy="6854400"/>
+            <a:ext cx="14400" cy="6854040"/>
           </a:xfrm>
           <a:prstGeom prst="rect">
             <a:avLst/>
@@ -10518,7 +10519,7 @@
         <p:spPr>
           <a:xfrm>
             <a:off x="9144000" y="0"/>
-            <a:ext cx="14760" cy="6854400"/>
+            <a:ext cx="14400" cy="6854040"/>
           </a:xfrm>
           <a:prstGeom prst="rect">
             <a:avLst/>
@@ -10578,7 +10579,7 @@
         <p:spPr>
           <a:xfrm>
             <a:off x="10058400" y="0"/>
-            <a:ext cx="14760" cy="6854400"/>
+            <a:ext cx="14400" cy="6854040"/>
           </a:xfrm>
           <a:prstGeom prst="rect">
             <a:avLst/>
@@ -10638,7 +10639,7 @@
         <p:spPr>
           <a:xfrm>
             <a:off x="10972800" y="0"/>
-            <a:ext cx="14760" cy="6854400"/>
+            <a:ext cx="14400" cy="6854040"/>
           </a:xfrm>
           <a:prstGeom prst="rect">
             <a:avLst/>
@@ -10698,7 +10699,7 @@
         <p:spPr>
           <a:xfrm>
             <a:off x="11887200" y="0"/>
-            <a:ext cx="14760" cy="6854400"/>
+            <a:ext cx="14400" cy="6854040"/>
           </a:xfrm>
           <a:prstGeom prst="rect">
             <a:avLst/>
@@ -10758,7 +10759,7 @@
         <p:spPr>
           <a:xfrm>
             <a:off x="0" y="0"/>
-            <a:ext cx="316440" cy="6854400"/>
+            <a:ext cx="316080" cy="6854040"/>
           </a:xfrm>
           <a:prstGeom prst="rect">
             <a:avLst/>
@@ -10818,7 +10819,7 @@
         <p:spPr>
           <a:xfrm>
             <a:off x="9875520" y="365760"/>
-            <a:ext cx="2008080" cy="499320"/>
+            <a:ext cx="2007720" cy="498960"/>
           </a:xfrm>
           <a:prstGeom prst="roundRect">
             <a:avLst>
@@ -11023,7 +11024,7 @@
         <p:spPr>
           <a:xfrm>
             <a:off x="987480" y="3182040"/>
-            <a:ext cx="3288240" cy="2739600"/>
+            <a:ext cx="3287880" cy="2739240"/>
           </a:xfrm>
           <a:prstGeom prst="roundRect">
             <a:avLst>
@@ -11085,7 +11086,7 @@
         <p:spPr>
           <a:xfrm>
             <a:off x="914400" y="3108960"/>
-            <a:ext cx="3288240" cy="3061080"/>
+            <a:ext cx="3287880" cy="3060720"/>
           </a:xfrm>
           <a:prstGeom prst="roundRect">
             <a:avLst>
@@ -11276,7 +11277,7 @@
         <p:spPr>
           <a:xfrm>
             <a:off x="4507920" y="3182040"/>
-            <a:ext cx="3288240" cy="2739600"/>
+            <a:ext cx="3287880" cy="2739240"/>
           </a:xfrm>
           <a:prstGeom prst="roundRect">
             <a:avLst>
@@ -11338,7 +11339,7 @@
         <p:spPr>
           <a:xfrm>
             <a:off x="4434840" y="3108960"/>
-            <a:ext cx="3288240" cy="2739600"/>
+            <a:ext cx="3287880" cy="2739240"/>
           </a:xfrm>
           <a:prstGeom prst="roundRect">
             <a:avLst>
@@ -11550,7 +11551,7 @@
         <p:spPr>
           <a:xfrm>
             <a:off x="8028360" y="3182040"/>
-            <a:ext cx="3288240" cy="2739600"/>
+            <a:ext cx="3287880" cy="2739240"/>
           </a:xfrm>
           <a:prstGeom prst="roundRect">
             <a:avLst>
@@ -11612,7 +11613,7 @@
         <p:spPr>
           <a:xfrm>
             <a:off x="7955280" y="2743200"/>
-            <a:ext cx="3700800" cy="3655800"/>
+            <a:ext cx="3700440" cy="3655440"/>
           </a:xfrm>
           <a:prstGeom prst="roundRect">
             <a:avLst>
@@ -12172,7 +12173,7 @@
         <p:spPr>
           <a:xfrm>
             <a:off x="0" y="0"/>
-            <a:ext cx="12185280" cy="6854400"/>
+            <a:ext cx="12184920" cy="6854040"/>
           </a:xfrm>
           <a:prstGeom prst="rect">
             <a:avLst/>
@@ -12232,7 +12233,7 @@
         <p:spPr>
           <a:xfrm>
             <a:off x="0" y="0"/>
-            <a:ext cx="14760" cy="6854400"/>
+            <a:ext cx="14400" cy="6854040"/>
           </a:xfrm>
           <a:prstGeom prst="rect">
             <a:avLst/>
@@ -12292,7 +12293,7 @@
         <p:spPr>
           <a:xfrm>
             <a:off x="914400" y="0"/>
-            <a:ext cx="14760" cy="6854400"/>
+            <a:ext cx="14400" cy="6854040"/>
           </a:xfrm>
           <a:prstGeom prst="rect">
             <a:avLst/>
@@ -12352,7 +12353,7 @@
         <p:spPr>
           <a:xfrm>
             <a:off x="1828800" y="0"/>
-            <a:ext cx="14760" cy="6854400"/>
+            <a:ext cx="14400" cy="6854040"/>
           </a:xfrm>
           <a:prstGeom prst="rect">
             <a:avLst/>
@@ -12412,7 +12413,7 @@
         <p:spPr>
           <a:xfrm>
             <a:off x="2743200" y="0"/>
-            <a:ext cx="14760" cy="6854400"/>
+            <a:ext cx="14400" cy="6854040"/>
           </a:xfrm>
           <a:prstGeom prst="rect">
             <a:avLst/>
@@ -12472,7 +12473,7 @@
         <p:spPr>
           <a:xfrm>
             <a:off x="3657600" y="0"/>
-            <a:ext cx="14760" cy="6854400"/>
+            <a:ext cx="14400" cy="6854040"/>
           </a:xfrm>
           <a:prstGeom prst="rect">
             <a:avLst/>
@@ -12532,7 +12533,7 @@
         <p:spPr>
           <a:xfrm>
             <a:off x="4572000" y="0"/>
-            <a:ext cx="14760" cy="6854400"/>
+            <a:ext cx="14400" cy="6854040"/>
           </a:xfrm>
           <a:prstGeom prst="rect">
             <a:avLst/>
@@ -12592,7 +12593,7 @@
         <p:spPr>
           <a:xfrm>
             <a:off x="5486400" y="0"/>
-            <a:ext cx="14760" cy="6854400"/>
+            <a:ext cx="14400" cy="6854040"/>
           </a:xfrm>
           <a:prstGeom prst="rect">
             <a:avLst/>
@@ -12652,7 +12653,7 @@
         <p:spPr>
           <a:xfrm>
             <a:off x="6400800" y="0"/>
-            <a:ext cx="14760" cy="6854400"/>
+            <a:ext cx="14400" cy="6854040"/>
           </a:xfrm>
           <a:prstGeom prst="rect">
             <a:avLst/>
@@ -12712,7 +12713,7 @@
         <p:spPr>
           <a:xfrm>
             <a:off x="7315200" y="0"/>
-            <a:ext cx="14760" cy="6854400"/>
+            <a:ext cx="14400" cy="6854040"/>
           </a:xfrm>
           <a:prstGeom prst="rect">
             <a:avLst/>
@@ -12772,7 +12773,7 @@
         <p:spPr>
           <a:xfrm>
             <a:off x="8229600" y="0"/>
-            <a:ext cx="14760" cy="6854400"/>
+            <a:ext cx="14400" cy="6854040"/>
           </a:xfrm>
           <a:prstGeom prst="rect">
             <a:avLst/>
@@ -12832,7 +12833,7 @@
         <p:spPr>
           <a:xfrm>
             <a:off x="9144000" y="0"/>
-            <a:ext cx="14760" cy="6854400"/>
+            <a:ext cx="14400" cy="6854040"/>
           </a:xfrm>
           <a:prstGeom prst="rect">
             <a:avLst/>
@@ -12892,7 +12893,7 @@
         <p:spPr>
           <a:xfrm>
             <a:off x="10058400" y="0"/>
-            <a:ext cx="14760" cy="6854400"/>
+            <a:ext cx="14400" cy="6854040"/>
           </a:xfrm>
           <a:prstGeom prst="rect">
             <a:avLst/>
@@ -12952,7 +12953,7 @@
         <p:spPr>
           <a:xfrm>
             <a:off x="10972800" y="0"/>
-            <a:ext cx="14760" cy="6854400"/>
+            <a:ext cx="14400" cy="6854040"/>
           </a:xfrm>
           <a:prstGeom prst="rect">
             <a:avLst/>
@@ -13012,7 +13013,7 @@
         <p:spPr>
           <a:xfrm>
             <a:off x="11887200" y="0"/>
-            <a:ext cx="14760" cy="6854400"/>
+            <a:ext cx="14400" cy="6854040"/>
           </a:xfrm>
           <a:prstGeom prst="rect">
             <a:avLst/>
@@ -13072,7 +13073,7 @@
         <p:spPr>
           <a:xfrm>
             <a:off x="0" y="0"/>
-            <a:ext cx="316440" cy="6854400"/>
+            <a:ext cx="316080" cy="6854040"/>
           </a:xfrm>
           <a:prstGeom prst="rect">
             <a:avLst/>
@@ -13132,7 +13133,7 @@
         <p:spPr>
           <a:xfrm>
             <a:off x="9875520" y="365760"/>
-            <a:ext cx="2008080" cy="499320"/>
+            <a:ext cx="2007720" cy="498960"/>
           </a:xfrm>
           <a:prstGeom prst="roundRect">
             <a:avLst>
@@ -13337,7 +13338,7 @@
         <p:spPr>
           <a:xfrm>
             <a:off x="987480" y="3182040"/>
-            <a:ext cx="3288240" cy="2739600"/>
+            <a:ext cx="3287880" cy="2739240"/>
           </a:xfrm>
           <a:prstGeom prst="roundRect">
             <a:avLst>
@@ -13399,7 +13400,7 @@
         <p:spPr>
           <a:xfrm>
             <a:off x="457200" y="2514600"/>
-            <a:ext cx="3745440" cy="4113360"/>
+            <a:ext cx="3745080" cy="4113000"/>
           </a:xfrm>
           <a:prstGeom prst="roundRect">
             <a:avLst>
@@ -13637,7 +13638,7 @@
         <p:spPr>
           <a:xfrm>
             <a:off x="4507920" y="3182040"/>
-            <a:ext cx="3288240" cy="2739600"/>
+            <a:ext cx="3287880" cy="2739240"/>
           </a:xfrm>
           <a:prstGeom prst="roundRect">
             <a:avLst>
@@ -13699,7 +13700,7 @@
         <p:spPr>
           <a:xfrm>
             <a:off x="4434840" y="2971800"/>
-            <a:ext cx="3288240" cy="3426480"/>
+            <a:ext cx="3287880" cy="3426120"/>
           </a:xfrm>
           <a:prstGeom prst="roundRect">
             <a:avLst>
@@ -13918,7 +13919,7 @@
         <p:spPr>
           <a:xfrm>
             <a:off x="8028360" y="3182040"/>
-            <a:ext cx="3288240" cy="2739600"/>
+            <a:ext cx="3287880" cy="2739240"/>
           </a:xfrm>
           <a:prstGeom prst="roundRect">
             <a:avLst>
@@ -13980,7 +13981,7 @@
         <p:spPr>
           <a:xfrm>
             <a:off x="8001000" y="3200400"/>
-            <a:ext cx="3473280" cy="2741760"/>
+            <a:ext cx="3472920" cy="2741400"/>
           </a:xfrm>
           <a:prstGeom prst="roundRect">
             <a:avLst>
@@ -14392,7 +14393,7 @@
         <p:spPr>
           <a:xfrm>
             <a:off x="0" y="0"/>
-            <a:ext cx="12185280" cy="6854400"/>
+            <a:ext cx="12184920" cy="6854040"/>
           </a:xfrm>
           <a:prstGeom prst="rect">
             <a:avLst/>
@@ -14452,7 +14453,7 @@
         <p:spPr>
           <a:xfrm>
             <a:off x="0" y="0"/>
-            <a:ext cx="14760" cy="6854400"/>
+            <a:ext cx="14400" cy="6854040"/>
           </a:xfrm>
           <a:prstGeom prst="rect">
             <a:avLst/>
@@ -14512,7 +14513,7 @@
         <p:spPr>
           <a:xfrm>
             <a:off x="914400" y="0"/>
-            <a:ext cx="14760" cy="6854400"/>
+            <a:ext cx="14400" cy="6854040"/>
           </a:xfrm>
           <a:prstGeom prst="rect">
             <a:avLst/>
@@ -14572,7 +14573,7 @@
         <p:spPr>
           <a:xfrm>
             <a:off x="1828800" y="0"/>
-            <a:ext cx="14760" cy="6854400"/>
+            <a:ext cx="14400" cy="6854040"/>
           </a:xfrm>
           <a:prstGeom prst="rect">
             <a:avLst/>
@@ -14632,7 +14633,7 @@
         <p:spPr>
           <a:xfrm>
             <a:off x="2743200" y="0"/>
-            <a:ext cx="14760" cy="6854400"/>
+            <a:ext cx="14400" cy="6854040"/>
           </a:xfrm>
           <a:prstGeom prst="rect">
             <a:avLst/>
@@ -14692,7 +14693,7 @@
         <p:spPr>
           <a:xfrm>
             <a:off x="3657600" y="0"/>
-            <a:ext cx="14760" cy="6854400"/>
+            <a:ext cx="14400" cy="6854040"/>
           </a:xfrm>
           <a:prstGeom prst="rect">
             <a:avLst/>
@@ -14752,7 +14753,7 @@
         <p:spPr>
           <a:xfrm>
             <a:off x="4572000" y="0"/>
-            <a:ext cx="14760" cy="6854400"/>
+            <a:ext cx="14400" cy="6854040"/>
           </a:xfrm>
           <a:prstGeom prst="rect">
             <a:avLst/>
@@ -14812,7 +14813,7 @@
         <p:spPr>
           <a:xfrm>
             <a:off x="5486400" y="0"/>
-            <a:ext cx="14760" cy="6854400"/>
+            <a:ext cx="14400" cy="6854040"/>
           </a:xfrm>
           <a:prstGeom prst="rect">
             <a:avLst/>
@@ -14872,7 +14873,7 @@
         <p:spPr>
           <a:xfrm>
             <a:off x="6400800" y="0"/>
-            <a:ext cx="14760" cy="6854400"/>
+            <a:ext cx="14400" cy="6854040"/>
           </a:xfrm>
           <a:prstGeom prst="rect">
             <a:avLst/>
@@ -14932,7 +14933,7 @@
         <p:spPr>
           <a:xfrm>
             <a:off x="7315200" y="0"/>
-            <a:ext cx="14760" cy="6854400"/>
+            <a:ext cx="14400" cy="6854040"/>
           </a:xfrm>
           <a:prstGeom prst="rect">
             <a:avLst/>
@@ -14992,7 +14993,7 @@
         <p:spPr>
           <a:xfrm>
             <a:off x="8229600" y="0"/>
-            <a:ext cx="14760" cy="6854400"/>
+            <a:ext cx="14400" cy="6854040"/>
           </a:xfrm>
           <a:prstGeom prst="rect">
             <a:avLst/>
@@ -15052,7 +15053,7 @@
         <p:spPr>
           <a:xfrm>
             <a:off x="9144000" y="0"/>
-            <a:ext cx="14760" cy="6854400"/>
+            <a:ext cx="14400" cy="6854040"/>
           </a:xfrm>
           <a:prstGeom prst="rect">
             <a:avLst/>
@@ -15112,7 +15113,7 @@
         <p:spPr>
           <a:xfrm>
             <a:off x="10058400" y="0"/>
-            <a:ext cx="14760" cy="6854400"/>
+            <a:ext cx="14400" cy="6854040"/>
           </a:xfrm>
           <a:prstGeom prst="rect">
             <a:avLst/>
@@ -15172,7 +15173,7 @@
         <p:spPr>
           <a:xfrm>
             <a:off x="10972800" y="0"/>
-            <a:ext cx="14760" cy="6854400"/>
+            <a:ext cx="14400" cy="6854040"/>
           </a:xfrm>
           <a:prstGeom prst="rect">
             <a:avLst/>
@@ -15232,7 +15233,7 @@
         <p:spPr>
           <a:xfrm>
             <a:off x="11887200" y="0"/>
-            <a:ext cx="14760" cy="6854400"/>
+            <a:ext cx="14400" cy="6854040"/>
           </a:xfrm>
           <a:prstGeom prst="rect">
             <a:avLst/>
@@ -15292,7 +15293,7 @@
         <p:spPr>
           <a:xfrm>
             <a:off x="0" y="0"/>
-            <a:ext cx="316440" cy="6854400"/>
+            <a:ext cx="316080" cy="6854040"/>
           </a:xfrm>
           <a:prstGeom prst="rect">
             <a:avLst/>
@@ -15352,7 +15353,7 @@
         <p:spPr>
           <a:xfrm>
             <a:off x="9875520" y="365760"/>
-            <a:ext cx="2008080" cy="499320"/>
+            <a:ext cx="2007720" cy="498960"/>
           </a:xfrm>
           <a:prstGeom prst="roundRect">
             <a:avLst>
@@ -15426,7 +15427,7 @@
         <p:spPr>
           <a:xfrm>
             <a:off x="1540440" y="914400"/>
-            <a:ext cx="7888320" cy="516240"/>
+            <a:ext cx="7887960" cy="516240"/>
           </a:xfrm>
           <a:prstGeom prst="rect">
             <a:avLst/>
@@ -15480,7 +15481,7 @@
         <p:spPr>
           <a:xfrm>
             <a:off x="880200" y="1600200"/>
-            <a:ext cx="9726480" cy="576360"/>
+            <a:ext cx="9726120" cy="576360"/>
           </a:xfrm>
           <a:prstGeom prst="rect">
             <a:avLst/>
@@ -15557,7 +15558,7 @@
         <p:spPr>
           <a:xfrm>
             <a:off x="987480" y="3182040"/>
-            <a:ext cx="3288240" cy="2739600"/>
+            <a:ext cx="3287880" cy="2739240"/>
           </a:xfrm>
           <a:prstGeom prst="roundRect">
             <a:avLst>
@@ -15619,7 +15620,7 @@
         <p:spPr>
           <a:xfrm>
             <a:off x="457200" y="2514600"/>
-            <a:ext cx="3745440" cy="4113360"/>
+            <a:ext cx="3745080" cy="4113000"/>
           </a:xfrm>
           <a:prstGeom prst="roundRect">
             <a:avLst>
@@ -15872,7 +15873,7 @@
         <p:spPr>
           <a:xfrm>
             <a:off x="4507920" y="3182040"/>
-            <a:ext cx="3288240" cy="2739600"/>
+            <a:ext cx="3287880" cy="2739240"/>
           </a:xfrm>
           <a:prstGeom prst="roundRect">
             <a:avLst>
@@ -15934,7 +15935,7 @@
         <p:spPr>
           <a:xfrm>
             <a:off x="4434840" y="2514600"/>
-            <a:ext cx="3288240" cy="3883680"/>
+            <a:ext cx="3287880" cy="3883320"/>
           </a:xfrm>
           <a:prstGeom prst="roundRect">
             <a:avLst>
@@ -16150,7 +16151,7 @@
         <p:spPr>
           <a:xfrm>
             <a:off x="8028360" y="3182040"/>
-            <a:ext cx="3288240" cy="2739600"/>
+            <a:ext cx="3287880" cy="2739240"/>
           </a:xfrm>
           <a:prstGeom prst="roundRect">
             <a:avLst>
@@ -16212,7 +16213,7 @@
         <p:spPr>
           <a:xfrm>
             <a:off x="8001000" y="2514600"/>
-            <a:ext cx="3473280" cy="3885120"/>
+            <a:ext cx="3472920" cy="3884760"/>
           </a:xfrm>
           <a:prstGeom prst="roundRect">
             <a:avLst>
@@ -16888,7 +16889,7 @@
         <p:spPr>
           <a:xfrm>
             <a:off x="0" y="0"/>
-            <a:ext cx="12185280" cy="6854400"/>
+            <a:ext cx="12184920" cy="6854040"/>
           </a:xfrm>
           <a:prstGeom prst="rect">
             <a:avLst/>
@@ -16948,7 +16949,7 @@
         <p:spPr>
           <a:xfrm>
             <a:off x="0" y="0"/>
-            <a:ext cx="14760" cy="6854400"/>
+            <a:ext cx="14400" cy="6854040"/>
           </a:xfrm>
           <a:prstGeom prst="rect">
             <a:avLst/>
@@ -17008,7 +17009,7 @@
         <p:spPr>
           <a:xfrm>
             <a:off x="914400" y="0"/>
-            <a:ext cx="14760" cy="6854400"/>
+            <a:ext cx="14400" cy="6854040"/>
           </a:xfrm>
           <a:prstGeom prst="rect">
             <a:avLst/>
@@ -17068,7 +17069,7 @@
         <p:spPr>
           <a:xfrm>
             <a:off x="1828800" y="0"/>
-            <a:ext cx="14760" cy="6854400"/>
+            <a:ext cx="14400" cy="6854040"/>
           </a:xfrm>
           <a:prstGeom prst="rect">
             <a:avLst/>
@@ -17128,7 +17129,7 @@
         <p:spPr>
           <a:xfrm>
             <a:off x="2743200" y="0"/>
-            <a:ext cx="14760" cy="6854400"/>
+            <a:ext cx="14400" cy="6854040"/>
           </a:xfrm>
           <a:prstGeom prst="rect">
             <a:avLst/>
@@ -17188,7 +17189,7 @@
         <p:spPr>
           <a:xfrm>
             <a:off x="3657600" y="0"/>
-            <a:ext cx="14760" cy="6854400"/>
+            <a:ext cx="14400" cy="6854040"/>
           </a:xfrm>
           <a:prstGeom prst="rect">
             <a:avLst/>
@@ -17248,7 +17249,7 @@
         <p:spPr>
           <a:xfrm>
             <a:off x="4572000" y="0"/>
-            <a:ext cx="14760" cy="6854400"/>
+            <a:ext cx="14400" cy="6854040"/>
           </a:xfrm>
           <a:prstGeom prst="rect">
             <a:avLst/>
@@ -17308,7 +17309,7 @@
         <p:spPr>
           <a:xfrm>
             <a:off x="5486400" y="0"/>
-            <a:ext cx="14760" cy="6854400"/>
+            <a:ext cx="14400" cy="6854040"/>
           </a:xfrm>
           <a:prstGeom prst="rect">
             <a:avLst/>
@@ -17368,7 +17369,7 @@
         <p:spPr>
           <a:xfrm>
             <a:off x="6400800" y="0"/>
-            <a:ext cx="14760" cy="6854400"/>
+            <a:ext cx="14400" cy="6854040"/>
           </a:xfrm>
           <a:prstGeom prst="rect">
             <a:avLst/>
@@ -17428,7 +17429,7 @@
         <p:spPr>
           <a:xfrm>
             <a:off x="7315200" y="0"/>
-            <a:ext cx="14760" cy="6854400"/>
+            <a:ext cx="14400" cy="6854040"/>
           </a:xfrm>
           <a:prstGeom prst="rect">
             <a:avLst/>
@@ -17488,7 +17489,7 @@
         <p:spPr>
           <a:xfrm>
             <a:off x="8229600" y="0"/>
-            <a:ext cx="14760" cy="6854400"/>
+            <a:ext cx="14400" cy="6854040"/>
           </a:xfrm>
           <a:prstGeom prst="rect">
             <a:avLst/>
@@ -17548,7 +17549,7 @@
         <p:spPr>
           <a:xfrm>
             <a:off x="9144000" y="0"/>
-            <a:ext cx="14760" cy="6854400"/>
+            <a:ext cx="14400" cy="6854040"/>
           </a:xfrm>
           <a:prstGeom prst="rect">
             <a:avLst/>
@@ -17608,7 +17609,7 @@
         <p:spPr>
           <a:xfrm>
             <a:off x="10058400" y="0"/>
-            <a:ext cx="14760" cy="6854400"/>
+            <a:ext cx="14400" cy="6854040"/>
           </a:xfrm>
           <a:prstGeom prst="rect">
             <a:avLst/>
@@ -17668,7 +17669,7 @@
         <p:spPr>
           <a:xfrm>
             <a:off x="10972800" y="0"/>
-            <a:ext cx="14760" cy="6854400"/>
+            <a:ext cx="14400" cy="6854040"/>
           </a:xfrm>
           <a:prstGeom prst="rect">
             <a:avLst/>
@@ -17728,7 +17729,7 @@
         <p:spPr>
           <a:xfrm>
             <a:off x="11887200" y="0"/>
-            <a:ext cx="14760" cy="6854400"/>
+            <a:ext cx="14400" cy="6854040"/>
           </a:xfrm>
           <a:prstGeom prst="rect">
             <a:avLst/>
@@ -17788,7 +17789,7 @@
         <p:spPr>
           <a:xfrm>
             <a:off x="0" y="0"/>
-            <a:ext cx="316440" cy="6854400"/>
+            <a:ext cx="316080" cy="6854040"/>
           </a:xfrm>
           <a:prstGeom prst="rect">
             <a:avLst/>
@@ -17848,7 +17849,7 @@
         <p:spPr>
           <a:xfrm>
             <a:off x="9875520" y="365760"/>
-            <a:ext cx="2008080" cy="499320"/>
+            <a:ext cx="2007720" cy="498960"/>
           </a:xfrm>
           <a:prstGeom prst="roundRect">
             <a:avLst>
@@ -17922,7 +17923,7 @@
         <p:spPr>
           <a:xfrm>
             <a:off x="2106360" y="914400"/>
-            <a:ext cx="6756480" cy="942840"/>
+            <a:ext cx="6756120" cy="942840"/>
           </a:xfrm>
           <a:prstGeom prst="rect">
             <a:avLst/>
@@ -17989,7 +17990,7 @@
         <p:spPr>
           <a:xfrm>
             <a:off x="1124280" y="1565280"/>
-            <a:ext cx="9252720" cy="819720"/>
+            <a:ext cx="9252360" cy="819720"/>
           </a:xfrm>
           <a:prstGeom prst="rect">
             <a:avLst/>
@@ -18089,7 +18090,7 @@
         <p:spPr>
           <a:xfrm>
             <a:off x="987480" y="3182040"/>
-            <a:ext cx="3288240" cy="2739600"/>
+            <a:ext cx="3287880" cy="2739240"/>
           </a:xfrm>
           <a:prstGeom prst="roundRect">
             <a:avLst>
@@ -18151,7 +18152,7 @@
         <p:spPr>
           <a:xfrm>
             <a:off x="457200" y="2743200"/>
-            <a:ext cx="3885480" cy="3884760"/>
+            <a:ext cx="3885120" cy="3884400"/>
           </a:xfrm>
           <a:prstGeom prst="roundRect">
             <a:avLst>
@@ -18465,7 +18466,7 @@
         <p:spPr>
           <a:xfrm>
             <a:off x="4507920" y="3182040"/>
-            <a:ext cx="3288240" cy="2739600"/>
+            <a:ext cx="3287880" cy="2739240"/>
           </a:xfrm>
           <a:prstGeom prst="roundRect">
             <a:avLst>
@@ -18527,7 +18528,7 @@
         <p:spPr>
           <a:xfrm>
             <a:off x="4572000" y="2743200"/>
-            <a:ext cx="3428280" cy="3656880"/>
+            <a:ext cx="3427920" cy="3656520"/>
           </a:xfrm>
           <a:prstGeom prst="roundRect">
             <a:avLst>
@@ -19079,7 +19080,7 @@
         <p:spPr>
           <a:xfrm>
             <a:off x="8028360" y="3182040"/>
-            <a:ext cx="3288240" cy="2739600"/>
+            <a:ext cx="3287880" cy="2739240"/>
           </a:xfrm>
           <a:prstGeom prst="roundRect">
             <a:avLst>
@@ -19141,7 +19142,7 @@
         <p:spPr>
           <a:xfrm>
             <a:off x="8229600" y="2514600"/>
-            <a:ext cx="3656880" cy="4114080"/>
+            <a:ext cx="3656520" cy="4113720"/>
           </a:xfrm>
           <a:prstGeom prst="roundRect">
             <a:avLst>
@@ -20133,7 +20134,7 @@
         <p:spPr>
           <a:xfrm>
             <a:off x="0" y="0"/>
-            <a:ext cx="12185280" cy="6854400"/>
+            <a:ext cx="12184920" cy="6854040"/>
           </a:xfrm>
           <a:prstGeom prst="rect">
             <a:avLst/>
@@ -20193,7 +20194,7 @@
         <p:spPr>
           <a:xfrm>
             <a:off x="0" y="0"/>
-            <a:ext cx="14760" cy="6854400"/>
+            <a:ext cx="14400" cy="6854040"/>
           </a:xfrm>
           <a:prstGeom prst="rect">
             <a:avLst/>
@@ -20253,7 +20254,7 @@
         <p:spPr>
           <a:xfrm>
             <a:off x="914400" y="0"/>
-            <a:ext cx="14760" cy="6854400"/>
+            <a:ext cx="14400" cy="6854040"/>
           </a:xfrm>
           <a:prstGeom prst="rect">
             <a:avLst/>
@@ -20313,7 +20314,7 @@
         <p:spPr>
           <a:xfrm>
             <a:off x="1828800" y="0"/>
-            <a:ext cx="14760" cy="6854400"/>
+            <a:ext cx="14400" cy="6854040"/>
           </a:xfrm>
           <a:prstGeom prst="rect">
             <a:avLst/>
@@ -20373,7 +20374,7 @@
         <p:spPr>
           <a:xfrm>
             <a:off x="2743200" y="0"/>
-            <a:ext cx="14760" cy="6854400"/>
+            <a:ext cx="14400" cy="6854040"/>
           </a:xfrm>
           <a:prstGeom prst="rect">
             <a:avLst/>
@@ -20433,7 +20434,7 @@
         <p:spPr>
           <a:xfrm>
             <a:off x="3657600" y="0"/>
-            <a:ext cx="14760" cy="6854400"/>
+            <a:ext cx="14400" cy="6854040"/>
           </a:xfrm>
           <a:prstGeom prst="rect">
             <a:avLst/>
@@ -20493,7 +20494,7 @@
         <p:spPr>
           <a:xfrm>
             <a:off x="4572000" y="0"/>
-            <a:ext cx="14760" cy="6854400"/>
+            <a:ext cx="14400" cy="6854040"/>
           </a:xfrm>
           <a:prstGeom prst="rect">
             <a:avLst/>
@@ -20553,7 +20554,7 @@
         <p:spPr>
           <a:xfrm>
             <a:off x="5486400" y="0"/>
-            <a:ext cx="14760" cy="6854400"/>
+            <a:ext cx="14400" cy="6854040"/>
           </a:xfrm>
           <a:prstGeom prst="rect">
             <a:avLst/>
@@ -20613,7 +20614,7 @@
         <p:spPr>
           <a:xfrm>
             <a:off x="6400800" y="0"/>
-            <a:ext cx="14760" cy="6854400"/>
+            <a:ext cx="14400" cy="6854040"/>
           </a:xfrm>
           <a:prstGeom prst="rect">
             <a:avLst/>
@@ -20673,7 +20674,7 @@
         <p:spPr>
           <a:xfrm>
             <a:off x="7315200" y="0"/>
-            <a:ext cx="14760" cy="6854400"/>
+            <a:ext cx="14400" cy="6854040"/>
           </a:xfrm>
           <a:prstGeom prst="rect">
             <a:avLst/>
@@ -20733,7 +20734,7 @@
         <p:spPr>
           <a:xfrm>
             <a:off x="8229600" y="0"/>
-            <a:ext cx="14760" cy="6854400"/>
+            <a:ext cx="14400" cy="6854040"/>
           </a:xfrm>
           <a:prstGeom prst="rect">
             <a:avLst/>
@@ -20793,7 +20794,7 @@
         <p:spPr>
           <a:xfrm>
             <a:off x="9144000" y="0"/>
-            <a:ext cx="14760" cy="6854400"/>
+            <a:ext cx="14400" cy="6854040"/>
           </a:xfrm>
           <a:prstGeom prst="rect">
             <a:avLst/>
@@ -20853,7 +20854,7 @@
         <p:spPr>
           <a:xfrm>
             <a:off x="10058400" y="0"/>
-            <a:ext cx="14760" cy="6854400"/>
+            <a:ext cx="14400" cy="6854040"/>
           </a:xfrm>
           <a:prstGeom prst="rect">
             <a:avLst/>
@@ -20913,7 +20914,7 @@
         <p:spPr>
           <a:xfrm>
             <a:off x="10972800" y="0"/>
-            <a:ext cx="14760" cy="6854400"/>
+            <a:ext cx="14400" cy="6854040"/>
           </a:xfrm>
           <a:prstGeom prst="rect">
             <a:avLst/>
@@ -20973,7 +20974,7 @@
         <p:spPr>
           <a:xfrm>
             <a:off x="11887200" y="0"/>
-            <a:ext cx="14760" cy="6854400"/>
+            <a:ext cx="14400" cy="6854040"/>
           </a:xfrm>
           <a:prstGeom prst="rect">
             <a:avLst/>
@@ -21033,7 +21034,7 @@
         <p:spPr>
           <a:xfrm>
             <a:off x="0" y="0"/>
-            <a:ext cx="316440" cy="6854400"/>
+            <a:ext cx="316080" cy="6854040"/>
           </a:xfrm>
           <a:prstGeom prst="rect">
             <a:avLst/>
@@ -21093,7 +21094,7 @@
         <p:spPr>
           <a:xfrm>
             <a:off x="9875520" y="365760"/>
-            <a:ext cx="2008080" cy="499320"/>
+            <a:ext cx="2007720" cy="498960"/>
           </a:xfrm>
           <a:prstGeom prst="roundRect">
             <a:avLst>
@@ -21221,7 +21222,7 @@
         <p:spPr>
           <a:xfrm>
             <a:off x="2448360" y="1828800"/>
-            <a:ext cx="6590520" cy="819720"/>
+            <a:ext cx="6590160" cy="819720"/>
           </a:xfrm>
           <a:prstGeom prst="rect">
             <a:avLst/>
@@ -21331,7 +21332,7 @@
         <p:spPr>
           <a:xfrm>
             <a:off x="987480" y="3182040"/>
-            <a:ext cx="3288240" cy="2739600"/>
+            <a:ext cx="3287880" cy="2739240"/>
           </a:xfrm>
           <a:prstGeom prst="roundRect">
             <a:avLst>
@@ -21393,7 +21394,7 @@
         <p:spPr>
           <a:xfrm>
             <a:off x="914400" y="3108960"/>
-            <a:ext cx="3288240" cy="3291480"/>
+            <a:ext cx="3287880" cy="3291120"/>
           </a:xfrm>
           <a:prstGeom prst="roundRect">
             <a:avLst>
@@ -21724,7 +21725,7 @@
         <p:spPr>
           <a:xfrm>
             <a:off x="4507920" y="3182040"/>
-            <a:ext cx="3288240" cy="2739600"/>
+            <a:ext cx="3287880" cy="2739240"/>
           </a:xfrm>
           <a:prstGeom prst="roundRect">
             <a:avLst>
@@ -21786,7 +21787,7 @@
         <p:spPr>
           <a:xfrm>
             <a:off x="4434840" y="2971800"/>
-            <a:ext cx="3288240" cy="3428640"/>
+            <a:ext cx="3287880" cy="3428280"/>
           </a:xfrm>
           <a:prstGeom prst="roundRect">
             <a:avLst>
@@ -22193,7 +22194,7 @@
         <p:spPr>
           <a:xfrm>
             <a:off x="8028360" y="3182040"/>
-            <a:ext cx="3288240" cy="2739600"/>
+            <a:ext cx="3287880" cy="2739240"/>
           </a:xfrm>
           <a:prstGeom prst="roundRect">
             <a:avLst>
@@ -22255,7 +22256,7 @@
         <p:spPr>
           <a:xfrm>
             <a:off x="7955280" y="2743200"/>
-            <a:ext cx="3700800" cy="3655800"/>
+            <a:ext cx="3700440" cy="3655440"/>
           </a:xfrm>
           <a:prstGeom prst="roundRect">
             <a:avLst>
@@ -22976,6 +22977,2665 @@
       <p:sp>
         <p:nvSpPr>
           <p:cNvPr id="248" name="TextBox 27"/>
+          <p:cNvSpPr/>
+          <p:nvPr/>
+        </p:nvSpPr>
+        <p:spPr>
+          <a:xfrm>
+            <a:off x="4600080" y="6446520"/>
+            <a:ext cx="3051000" cy="363960"/>
+          </a:xfrm>
+          <a:prstGeom prst="rect">
+            <a:avLst/>
+          </a:prstGeom>
+          <a:noFill/>
+          <a:ln w="0">
+            <a:noFill/>
+          </a:ln>
+        </p:spPr>
+        <p:style>
+          <a:lnRef idx="0"/>
+          <a:fillRef idx="0"/>
+          <a:effectRef idx="0"/>
+          <a:fontRef idx="minor"/>
+        </p:style>
+        <p:txBody>
+          <a:bodyPr wrap="none" lIns="90000" rIns="90000" tIns="45000" bIns="45000" anchor="t">
+            <a:spAutoFit/>
+          </a:bodyPr>
+          <a:p>
+            <a:pPr>
+              <a:lnSpc>
+                <a:spcPct val="100000"/>
+              </a:lnSpc>
+            </a:pPr>
+            <a:r>
+              <a:rPr b="0" lang="en-US" sz="1800" spc="-1" strike="noStrike">
+                <a:solidFill>
+                  <a:srgbClr val="000000"/>
+                </a:solidFill>
+                <a:latin typeface="Calibri"/>
+                <a:ea typeface="DejaVu Sans"/>
+              </a:rPr>
+              <a:t>Java • Ultra Premium Template</a:t>
+            </a:r>
+            <a:endParaRPr b="0" lang="en-US" sz="1800" spc="-1" strike="noStrike">
+              <a:solidFill>
+                <a:srgbClr val="000000"/>
+              </a:solidFill>
+              <a:latin typeface="Arial"/>
+            </a:endParaRPr>
+          </a:p>
+        </p:txBody>
+      </p:sp>
+    </p:spTree>
+  </p:cSld>
+  <mc:AlternateContent>
+    <mc:Choice Requires="p14">
+      <p:transition spd="slow" p14:dur="2000"/>
+    </mc:Choice>
+    <mc:Fallback>
+      <p:transition spd="slow"/>
+    </mc:Fallback>
+  </mc:AlternateContent>
+</p:sld>
+</file>
+
+<file path=ppt/slides/slide9.xml><?xml version="1.0" encoding="utf-8"?>
+<p:sld xmlns:a="http://schemas.openxmlformats.org/drawingml/2006/main" xmlns:p="http://schemas.openxmlformats.org/presentationml/2006/main" xmlns:r="http://schemas.openxmlformats.org/officeDocument/2006/relationships" xmlns:p14="http://schemas.microsoft.com/office/powerpoint/2010/main" xmlns:p15="http://schemas.microsoft.com/office/powerpoint/2012/main" xmlns:mc="http://schemas.openxmlformats.org/markup-compatibility/2006">
+  <p:cSld>
+    <p:spTree>
+      <p:nvGrpSpPr>
+        <p:cNvPr id="1" name=""/>
+        <p:cNvGrpSpPr/>
+        <p:nvPr/>
+      </p:nvGrpSpPr>
+      <p:grpSpPr>
+        <a:xfrm>
+          <a:off x="0" y="0"/>
+          <a:ext cx="0" cy="0"/>
+          <a:chOff x="0" y="0"/>
+          <a:chExt cx="0" cy="0"/>
+        </a:xfrm>
+      </p:grpSpPr>
+      <p:sp>
+        <p:nvSpPr>
+          <p:cNvPr id="249" name="Rectangle 129"/>
+          <p:cNvSpPr/>
+          <p:nvPr/>
+        </p:nvSpPr>
+        <p:spPr>
+          <a:xfrm>
+            <a:off x="0" y="0"/>
+            <a:ext cx="12184920" cy="6854040"/>
+          </a:xfrm>
+          <a:prstGeom prst="rect">
+            <a:avLst/>
+          </a:prstGeom>
+          <a:solidFill>
+            <a:srgbClr val="0b0b0d"/>
+          </a:solidFill>
+          <a:ln>
+            <a:noFill/>
+          </a:ln>
+          <a:effectLst>
+            <a:outerShdw blurRad="39960" dir="5400000" dist="23040" rotWithShape="0">
+              <a:srgbClr val="000000">
+                <a:alpha val="35000"/>
+              </a:srgbClr>
+            </a:outerShdw>
+          </a:effectLst>
+        </p:spPr>
+        <p:style>
+          <a:lnRef idx="1">
+            <a:schemeClr val="accent1"/>
+          </a:lnRef>
+          <a:fillRef idx="3">
+            <a:schemeClr val="accent1"/>
+          </a:fillRef>
+          <a:effectRef idx="2">
+            <a:schemeClr val="accent1"/>
+          </a:effectRef>
+          <a:fontRef idx="minor"/>
+        </p:style>
+        <p:txBody>
+          <a:bodyPr lIns="90000" rIns="90000" tIns="45000" bIns="45000" anchor="ctr">
+            <a:noAutofit/>
+          </a:bodyPr>
+          <a:p>
+            <a:endParaRPr b="0" lang="en-US" sz="1800" spc="-1" strike="noStrike">
+              <a:solidFill>
+                <a:schemeClr val="lt1"/>
+              </a:solidFill>
+              <a:latin typeface="Calibri"/>
+              <a:ea typeface="DejaVu Sans"/>
+            </a:endParaRPr>
+          </a:p>
+        </p:txBody>
+      </p:sp>
+      <p:sp>
+        <p:nvSpPr>
+          <p:cNvPr id="250" name="Rectangle 130"/>
+          <p:cNvSpPr/>
+          <p:nvPr/>
+        </p:nvSpPr>
+        <p:spPr>
+          <a:xfrm>
+            <a:off x="0" y="0"/>
+            <a:ext cx="14400" cy="6854040"/>
+          </a:xfrm>
+          <a:prstGeom prst="rect">
+            <a:avLst/>
+          </a:prstGeom>
+          <a:solidFill>
+            <a:srgbClr val="121216"/>
+          </a:solidFill>
+          <a:ln>
+            <a:noFill/>
+          </a:ln>
+          <a:effectLst>
+            <a:outerShdw blurRad="39960" dir="5400000" dist="23040" rotWithShape="0">
+              <a:srgbClr val="000000">
+                <a:alpha val="35000"/>
+              </a:srgbClr>
+            </a:outerShdw>
+          </a:effectLst>
+        </p:spPr>
+        <p:style>
+          <a:lnRef idx="1">
+            <a:schemeClr val="accent1"/>
+          </a:lnRef>
+          <a:fillRef idx="3">
+            <a:schemeClr val="accent1"/>
+          </a:fillRef>
+          <a:effectRef idx="2">
+            <a:schemeClr val="accent1"/>
+          </a:effectRef>
+          <a:fontRef idx="minor"/>
+        </p:style>
+        <p:txBody>
+          <a:bodyPr lIns="90000" rIns="90000" tIns="45000" bIns="45000" anchor="ctr">
+            <a:noAutofit/>
+          </a:bodyPr>
+          <a:p>
+            <a:endParaRPr b="0" lang="en-US" sz="1800" spc="-1" strike="noStrike">
+              <a:solidFill>
+                <a:schemeClr val="lt1"/>
+              </a:solidFill>
+              <a:latin typeface="Calibri"/>
+              <a:ea typeface="DejaVu Sans"/>
+            </a:endParaRPr>
+          </a:p>
+        </p:txBody>
+      </p:sp>
+      <p:sp>
+        <p:nvSpPr>
+          <p:cNvPr id="251" name="Rectangle 131"/>
+          <p:cNvSpPr/>
+          <p:nvPr/>
+        </p:nvSpPr>
+        <p:spPr>
+          <a:xfrm>
+            <a:off x="914400" y="0"/>
+            <a:ext cx="14400" cy="6854040"/>
+          </a:xfrm>
+          <a:prstGeom prst="rect">
+            <a:avLst/>
+          </a:prstGeom>
+          <a:solidFill>
+            <a:srgbClr val="121216"/>
+          </a:solidFill>
+          <a:ln>
+            <a:noFill/>
+          </a:ln>
+          <a:effectLst>
+            <a:outerShdw blurRad="39960" dir="5400000" dist="23040" rotWithShape="0">
+              <a:srgbClr val="000000">
+                <a:alpha val="35000"/>
+              </a:srgbClr>
+            </a:outerShdw>
+          </a:effectLst>
+        </p:spPr>
+        <p:style>
+          <a:lnRef idx="1">
+            <a:schemeClr val="accent1"/>
+          </a:lnRef>
+          <a:fillRef idx="3">
+            <a:schemeClr val="accent1"/>
+          </a:fillRef>
+          <a:effectRef idx="2">
+            <a:schemeClr val="accent1"/>
+          </a:effectRef>
+          <a:fontRef idx="minor"/>
+        </p:style>
+        <p:txBody>
+          <a:bodyPr lIns="90000" rIns="90000" tIns="45000" bIns="45000" anchor="ctr">
+            <a:noAutofit/>
+          </a:bodyPr>
+          <a:p>
+            <a:endParaRPr b="0" lang="en-US" sz="1800" spc="-1" strike="noStrike">
+              <a:solidFill>
+                <a:schemeClr val="lt1"/>
+              </a:solidFill>
+              <a:latin typeface="Calibri"/>
+              <a:ea typeface="DejaVu Sans"/>
+            </a:endParaRPr>
+          </a:p>
+        </p:txBody>
+      </p:sp>
+      <p:sp>
+        <p:nvSpPr>
+          <p:cNvPr id="252" name="Rectangle 132"/>
+          <p:cNvSpPr/>
+          <p:nvPr/>
+        </p:nvSpPr>
+        <p:spPr>
+          <a:xfrm>
+            <a:off x="1828800" y="0"/>
+            <a:ext cx="14400" cy="6854040"/>
+          </a:xfrm>
+          <a:prstGeom prst="rect">
+            <a:avLst/>
+          </a:prstGeom>
+          <a:solidFill>
+            <a:srgbClr val="121216"/>
+          </a:solidFill>
+          <a:ln>
+            <a:noFill/>
+          </a:ln>
+          <a:effectLst>
+            <a:outerShdw blurRad="39960" dir="5400000" dist="23040" rotWithShape="0">
+              <a:srgbClr val="000000">
+                <a:alpha val="35000"/>
+              </a:srgbClr>
+            </a:outerShdw>
+          </a:effectLst>
+        </p:spPr>
+        <p:style>
+          <a:lnRef idx="1">
+            <a:schemeClr val="accent1"/>
+          </a:lnRef>
+          <a:fillRef idx="3">
+            <a:schemeClr val="accent1"/>
+          </a:fillRef>
+          <a:effectRef idx="2">
+            <a:schemeClr val="accent1"/>
+          </a:effectRef>
+          <a:fontRef idx="minor"/>
+        </p:style>
+        <p:txBody>
+          <a:bodyPr lIns="90000" rIns="90000" tIns="45000" bIns="45000" anchor="ctr">
+            <a:noAutofit/>
+          </a:bodyPr>
+          <a:p>
+            <a:endParaRPr b="0" lang="en-US" sz="1800" spc="-1" strike="noStrike">
+              <a:solidFill>
+                <a:schemeClr val="lt1"/>
+              </a:solidFill>
+              <a:latin typeface="Calibri"/>
+              <a:ea typeface="DejaVu Sans"/>
+            </a:endParaRPr>
+          </a:p>
+        </p:txBody>
+      </p:sp>
+      <p:sp>
+        <p:nvSpPr>
+          <p:cNvPr id="253" name="Rectangle 133"/>
+          <p:cNvSpPr/>
+          <p:nvPr/>
+        </p:nvSpPr>
+        <p:spPr>
+          <a:xfrm>
+            <a:off x="2743200" y="0"/>
+            <a:ext cx="14400" cy="6854040"/>
+          </a:xfrm>
+          <a:prstGeom prst="rect">
+            <a:avLst/>
+          </a:prstGeom>
+          <a:solidFill>
+            <a:srgbClr val="121216"/>
+          </a:solidFill>
+          <a:ln>
+            <a:noFill/>
+          </a:ln>
+          <a:effectLst>
+            <a:outerShdw blurRad="39960" dir="5400000" dist="23040" rotWithShape="0">
+              <a:srgbClr val="000000">
+                <a:alpha val="35000"/>
+              </a:srgbClr>
+            </a:outerShdw>
+          </a:effectLst>
+        </p:spPr>
+        <p:style>
+          <a:lnRef idx="1">
+            <a:schemeClr val="accent1"/>
+          </a:lnRef>
+          <a:fillRef idx="3">
+            <a:schemeClr val="accent1"/>
+          </a:fillRef>
+          <a:effectRef idx="2">
+            <a:schemeClr val="accent1"/>
+          </a:effectRef>
+          <a:fontRef idx="minor"/>
+        </p:style>
+        <p:txBody>
+          <a:bodyPr lIns="90000" rIns="90000" tIns="45000" bIns="45000" anchor="ctr">
+            <a:noAutofit/>
+          </a:bodyPr>
+          <a:p>
+            <a:endParaRPr b="0" lang="en-US" sz="1800" spc="-1" strike="noStrike">
+              <a:solidFill>
+                <a:schemeClr val="lt1"/>
+              </a:solidFill>
+              <a:latin typeface="Calibri"/>
+              <a:ea typeface="DejaVu Sans"/>
+            </a:endParaRPr>
+          </a:p>
+        </p:txBody>
+      </p:sp>
+      <p:sp>
+        <p:nvSpPr>
+          <p:cNvPr id="254" name="Rectangle 134"/>
+          <p:cNvSpPr/>
+          <p:nvPr/>
+        </p:nvSpPr>
+        <p:spPr>
+          <a:xfrm>
+            <a:off x="3657600" y="0"/>
+            <a:ext cx="14400" cy="6854040"/>
+          </a:xfrm>
+          <a:prstGeom prst="rect">
+            <a:avLst/>
+          </a:prstGeom>
+          <a:solidFill>
+            <a:srgbClr val="121216"/>
+          </a:solidFill>
+          <a:ln>
+            <a:noFill/>
+          </a:ln>
+          <a:effectLst>
+            <a:outerShdw blurRad="39960" dir="5400000" dist="23040" rotWithShape="0">
+              <a:srgbClr val="000000">
+                <a:alpha val="35000"/>
+              </a:srgbClr>
+            </a:outerShdw>
+          </a:effectLst>
+        </p:spPr>
+        <p:style>
+          <a:lnRef idx="1">
+            <a:schemeClr val="accent1"/>
+          </a:lnRef>
+          <a:fillRef idx="3">
+            <a:schemeClr val="accent1"/>
+          </a:fillRef>
+          <a:effectRef idx="2">
+            <a:schemeClr val="accent1"/>
+          </a:effectRef>
+          <a:fontRef idx="minor"/>
+        </p:style>
+        <p:txBody>
+          <a:bodyPr lIns="90000" rIns="90000" tIns="45000" bIns="45000" anchor="ctr">
+            <a:noAutofit/>
+          </a:bodyPr>
+          <a:p>
+            <a:endParaRPr b="0" lang="en-US" sz="1800" spc="-1" strike="noStrike">
+              <a:solidFill>
+                <a:schemeClr val="lt1"/>
+              </a:solidFill>
+              <a:latin typeface="Calibri"/>
+              <a:ea typeface="DejaVu Sans"/>
+            </a:endParaRPr>
+          </a:p>
+        </p:txBody>
+      </p:sp>
+      <p:sp>
+        <p:nvSpPr>
+          <p:cNvPr id="255" name="Rectangle 135"/>
+          <p:cNvSpPr/>
+          <p:nvPr/>
+        </p:nvSpPr>
+        <p:spPr>
+          <a:xfrm>
+            <a:off x="4572000" y="0"/>
+            <a:ext cx="14400" cy="6854040"/>
+          </a:xfrm>
+          <a:prstGeom prst="rect">
+            <a:avLst/>
+          </a:prstGeom>
+          <a:solidFill>
+            <a:srgbClr val="121216"/>
+          </a:solidFill>
+          <a:ln>
+            <a:noFill/>
+          </a:ln>
+          <a:effectLst>
+            <a:outerShdw blurRad="39960" dir="5400000" dist="23040" rotWithShape="0">
+              <a:srgbClr val="000000">
+                <a:alpha val="35000"/>
+              </a:srgbClr>
+            </a:outerShdw>
+          </a:effectLst>
+        </p:spPr>
+        <p:style>
+          <a:lnRef idx="1">
+            <a:schemeClr val="accent1"/>
+          </a:lnRef>
+          <a:fillRef idx="3">
+            <a:schemeClr val="accent1"/>
+          </a:fillRef>
+          <a:effectRef idx="2">
+            <a:schemeClr val="accent1"/>
+          </a:effectRef>
+          <a:fontRef idx="minor"/>
+        </p:style>
+        <p:txBody>
+          <a:bodyPr lIns="90000" rIns="90000" tIns="45000" bIns="45000" anchor="ctr">
+            <a:noAutofit/>
+          </a:bodyPr>
+          <a:p>
+            <a:endParaRPr b="0" lang="en-US" sz="1800" spc="-1" strike="noStrike">
+              <a:solidFill>
+                <a:schemeClr val="lt1"/>
+              </a:solidFill>
+              <a:latin typeface="Calibri"/>
+              <a:ea typeface="DejaVu Sans"/>
+            </a:endParaRPr>
+          </a:p>
+        </p:txBody>
+      </p:sp>
+      <p:sp>
+        <p:nvSpPr>
+          <p:cNvPr id="256" name="Rectangle 136"/>
+          <p:cNvSpPr/>
+          <p:nvPr/>
+        </p:nvSpPr>
+        <p:spPr>
+          <a:xfrm>
+            <a:off x="5486400" y="0"/>
+            <a:ext cx="14400" cy="6854040"/>
+          </a:xfrm>
+          <a:prstGeom prst="rect">
+            <a:avLst/>
+          </a:prstGeom>
+          <a:solidFill>
+            <a:srgbClr val="121216"/>
+          </a:solidFill>
+          <a:ln>
+            <a:noFill/>
+          </a:ln>
+          <a:effectLst>
+            <a:outerShdw blurRad="39960" dir="5400000" dist="23040" rotWithShape="0">
+              <a:srgbClr val="000000">
+                <a:alpha val="35000"/>
+              </a:srgbClr>
+            </a:outerShdw>
+          </a:effectLst>
+        </p:spPr>
+        <p:style>
+          <a:lnRef idx="1">
+            <a:schemeClr val="accent1"/>
+          </a:lnRef>
+          <a:fillRef idx="3">
+            <a:schemeClr val="accent1"/>
+          </a:fillRef>
+          <a:effectRef idx="2">
+            <a:schemeClr val="accent1"/>
+          </a:effectRef>
+          <a:fontRef idx="minor"/>
+        </p:style>
+        <p:txBody>
+          <a:bodyPr lIns="90000" rIns="90000" tIns="45000" bIns="45000" anchor="ctr">
+            <a:noAutofit/>
+          </a:bodyPr>
+          <a:p>
+            <a:endParaRPr b="0" lang="en-US" sz="1800" spc="-1" strike="noStrike">
+              <a:solidFill>
+                <a:schemeClr val="lt1"/>
+              </a:solidFill>
+              <a:latin typeface="Calibri"/>
+              <a:ea typeface="DejaVu Sans"/>
+            </a:endParaRPr>
+          </a:p>
+        </p:txBody>
+      </p:sp>
+      <p:sp>
+        <p:nvSpPr>
+          <p:cNvPr id="257" name="Rectangle 137"/>
+          <p:cNvSpPr/>
+          <p:nvPr/>
+        </p:nvSpPr>
+        <p:spPr>
+          <a:xfrm>
+            <a:off x="6400800" y="0"/>
+            <a:ext cx="14400" cy="6854040"/>
+          </a:xfrm>
+          <a:prstGeom prst="rect">
+            <a:avLst/>
+          </a:prstGeom>
+          <a:solidFill>
+            <a:srgbClr val="121216"/>
+          </a:solidFill>
+          <a:ln>
+            <a:noFill/>
+          </a:ln>
+          <a:effectLst>
+            <a:outerShdw blurRad="39960" dir="5400000" dist="23040" rotWithShape="0">
+              <a:srgbClr val="000000">
+                <a:alpha val="35000"/>
+              </a:srgbClr>
+            </a:outerShdw>
+          </a:effectLst>
+        </p:spPr>
+        <p:style>
+          <a:lnRef idx="1">
+            <a:schemeClr val="accent1"/>
+          </a:lnRef>
+          <a:fillRef idx="3">
+            <a:schemeClr val="accent1"/>
+          </a:fillRef>
+          <a:effectRef idx="2">
+            <a:schemeClr val="accent1"/>
+          </a:effectRef>
+          <a:fontRef idx="minor"/>
+        </p:style>
+        <p:txBody>
+          <a:bodyPr lIns="90000" rIns="90000" tIns="45000" bIns="45000" anchor="ctr">
+            <a:noAutofit/>
+          </a:bodyPr>
+          <a:p>
+            <a:endParaRPr b="0" lang="en-US" sz="1800" spc="-1" strike="noStrike">
+              <a:solidFill>
+                <a:schemeClr val="lt1"/>
+              </a:solidFill>
+              <a:latin typeface="Calibri"/>
+              <a:ea typeface="DejaVu Sans"/>
+            </a:endParaRPr>
+          </a:p>
+        </p:txBody>
+      </p:sp>
+      <p:sp>
+        <p:nvSpPr>
+          <p:cNvPr id="258" name="Rectangle 138"/>
+          <p:cNvSpPr/>
+          <p:nvPr/>
+        </p:nvSpPr>
+        <p:spPr>
+          <a:xfrm>
+            <a:off x="7315200" y="0"/>
+            <a:ext cx="14400" cy="6854040"/>
+          </a:xfrm>
+          <a:prstGeom prst="rect">
+            <a:avLst/>
+          </a:prstGeom>
+          <a:solidFill>
+            <a:srgbClr val="121216"/>
+          </a:solidFill>
+          <a:ln>
+            <a:noFill/>
+          </a:ln>
+          <a:effectLst>
+            <a:outerShdw blurRad="39960" dir="5400000" dist="23040" rotWithShape="0">
+              <a:srgbClr val="000000">
+                <a:alpha val="35000"/>
+              </a:srgbClr>
+            </a:outerShdw>
+          </a:effectLst>
+        </p:spPr>
+        <p:style>
+          <a:lnRef idx="1">
+            <a:schemeClr val="accent1"/>
+          </a:lnRef>
+          <a:fillRef idx="3">
+            <a:schemeClr val="accent1"/>
+          </a:fillRef>
+          <a:effectRef idx="2">
+            <a:schemeClr val="accent1"/>
+          </a:effectRef>
+          <a:fontRef idx="minor"/>
+        </p:style>
+        <p:txBody>
+          <a:bodyPr lIns="90000" rIns="90000" tIns="45000" bIns="45000" anchor="ctr">
+            <a:noAutofit/>
+          </a:bodyPr>
+          <a:p>
+            <a:endParaRPr b="0" lang="en-US" sz="1800" spc="-1" strike="noStrike">
+              <a:solidFill>
+                <a:schemeClr val="lt1"/>
+              </a:solidFill>
+              <a:latin typeface="Calibri"/>
+              <a:ea typeface="DejaVu Sans"/>
+            </a:endParaRPr>
+          </a:p>
+        </p:txBody>
+      </p:sp>
+      <p:sp>
+        <p:nvSpPr>
+          <p:cNvPr id="259" name="Rectangle 139"/>
+          <p:cNvSpPr/>
+          <p:nvPr/>
+        </p:nvSpPr>
+        <p:spPr>
+          <a:xfrm>
+            <a:off x="8229600" y="0"/>
+            <a:ext cx="14400" cy="6854040"/>
+          </a:xfrm>
+          <a:prstGeom prst="rect">
+            <a:avLst/>
+          </a:prstGeom>
+          <a:solidFill>
+            <a:srgbClr val="121216"/>
+          </a:solidFill>
+          <a:ln>
+            <a:noFill/>
+          </a:ln>
+          <a:effectLst>
+            <a:outerShdw blurRad="39960" dir="5400000" dist="23040" rotWithShape="0">
+              <a:srgbClr val="000000">
+                <a:alpha val="35000"/>
+              </a:srgbClr>
+            </a:outerShdw>
+          </a:effectLst>
+        </p:spPr>
+        <p:style>
+          <a:lnRef idx="1">
+            <a:schemeClr val="accent1"/>
+          </a:lnRef>
+          <a:fillRef idx="3">
+            <a:schemeClr val="accent1"/>
+          </a:fillRef>
+          <a:effectRef idx="2">
+            <a:schemeClr val="accent1"/>
+          </a:effectRef>
+          <a:fontRef idx="minor"/>
+        </p:style>
+        <p:txBody>
+          <a:bodyPr lIns="90000" rIns="90000" tIns="45000" bIns="45000" anchor="ctr">
+            <a:noAutofit/>
+          </a:bodyPr>
+          <a:p>
+            <a:endParaRPr b="0" lang="en-US" sz="1800" spc="-1" strike="noStrike">
+              <a:solidFill>
+                <a:schemeClr val="lt1"/>
+              </a:solidFill>
+              <a:latin typeface="Calibri"/>
+              <a:ea typeface="DejaVu Sans"/>
+            </a:endParaRPr>
+          </a:p>
+        </p:txBody>
+      </p:sp>
+      <p:sp>
+        <p:nvSpPr>
+          <p:cNvPr id="260" name="Rectangle 140"/>
+          <p:cNvSpPr/>
+          <p:nvPr/>
+        </p:nvSpPr>
+        <p:spPr>
+          <a:xfrm>
+            <a:off x="9144000" y="0"/>
+            <a:ext cx="14400" cy="6854040"/>
+          </a:xfrm>
+          <a:prstGeom prst="rect">
+            <a:avLst/>
+          </a:prstGeom>
+          <a:solidFill>
+            <a:srgbClr val="121216"/>
+          </a:solidFill>
+          <a:ln>
+            <a:noFill/>
+          </a:ln>
+          <a:effectLst>
+            <a:outerShdw blurRad="39960" dir="5400000" dist="23040" rotWithShape="0">
+              <a:srgbClr val="000000">
+                <a:alpha val="35000"/>
+              </a:srgbClr>
+            </a:outerShdw>
+          </a:effectLst>
+        </p:spPr>
+        <p:style>
+          <a:lnRef idx="1">
+            <a:schemeClr val="accent1"/>
+          </a:lnRef>
+          <a:fillRef idx="3">
+            <a:schemeClr val="accent1"/>
+          </a:fillRef>
+          <a:effectRef idx="2">
+            <a:schemeClr val="accent1"/>
+          </a:effectRef>
+          <a:fontRef idx="minor"/>
+        </p:style>
+        <p:txBody>
+          <a:bodyPr lIns="90000" rIns="90000" tIns="45000" bIns="45000" anchor="ctr">
+            <a:noAutofit/>
+          </a:bodyPr>
+          <a:p>
+            <a:endParaRPr b="0" lang="en-US" sz="1800" spc="-1" strike="noStrike">
+              <a:solidFill>
+                <a:schemeClr val="lt1"/>
+              </a:solidFill>
+              <a:latin typeface="Calibri"/>
+              <a:ea typeface="DejaVu Sans"/>
+            </a:endParaRPr>
+          </a:p>
+        </p:txBody>
+      </p:sp>
+      <p:sp>
+        <p:nvSpPr>
+          <p:cNvPr id="261" name="Rectangle 141"/>
+          <p:cNvSpPr/>
+          <p:nvPr/>
+        </p:nvSpPr>
+        <p:spPr>
+          <a:xfrm>
+            <a:off x="10058400" y="0"/>
+            <a:ext cx="14400" cy="6854040"/>
+          </a:xfrm>
+          <a:prstGeom prst="rect">
+            <a:avLst/>
+          </a:prstGeom>
+          <a:solidFill>
+            <a:srgbClr val="121216"/>
+          </a:solidFill>
+          <a:ln>
+            <a:noFill/>
+          </a:ln>
+          <a:effectLst>
+            <a:outerShdw blurRad="39960" dir="5400000" dist="23040" rotWithShape="0">
+              <a:srgbClr val="000000">
+                <a:alpha val="35000"/>
+              </a:srgbClr>
+            </a:outerShdw>
+          </a:effectLst>
+        </p:spPr>
+        <p:style>
+          <a:lnRef idx="1">
+            <a:schemeClr val="accent1"/>
+          </a:lnRef>
+          <a:fillRef idx="3">
+            <a:schemeClr val="accent1"/>
+          </a:fillRef>
+          <a:effectRef idx="2">
+            <a:schemeClr val="accent1"/>
+          </a:effectRef>
+          <a:fontRef idx="minor"/>
+        </p:style>
+        <p:txBody>
+          <a:bodyPr lIns="90000" rIns="90000" tIns="45000" bIns="45000" anchor="ctr">
+            <a:noAutofit/>
+          </a:bodyPr>
+          <a:p>
+            <a:endParaRPr b="0" lang="en-US" sz="1800" spc="-1" strike="noStrike">
+              <a:solidFill>
+                <a:schemeClr val="lt1"/>
+              </a:solidFill>
+              <a:latin typeface="Calibri"/>
+              <a:ea typeface="DejaVu Sans"/>
+            </a:endParaRPr>
+          </a:p>
+        </p:txBody>
+      </p:sp>
+      <p:sp>
+        <p:nvSpPr>
+          <p:cNvPr id="262" name="Rectangle 142"/>
+          <p:cNvSpPr/>
+          <p:nvPr/>
+        </p:nvSpPr>
+        <p:spPr>
+          <a:xfrm>
+            <a:off x="10972800" y="0"/>
+            <a:ext cx="14400" cy="6854040"/>
+          </a:xfrm>
+          <a:prstGeom prst="rect">
+            <a:avLst/>
+          </a:prstGeom>
+          <a:solidFill>
+            <a:srgbClr val="121216"/>
+          </a:solidFill>
+          <a:ln>
+            <a:noFill/>
+          </a:ln>
+          <a:effectLst>
+            <a:outerShdw blurRad="39960" dir="5400000" dist="23040" rotWithShape="0">
+              <a:srgbClr val="000000">
+                <a:alpha val="35000"/>
+              </a:srgbClr>
+            </a:outerShdw>
+          </a:effectLst>
+        </p:spPr>
+        <p:style>
+          <a:lnRef idx="1">
+            <a:schemeClr val="accent1"/>
+          </a:lnRef>
+          <a:fillRef idx="3">
+            <a:schemeClr val="accent1"/>
+          </a:fillRef>
+          <a:effectRef idx="2">
+            <a:schemeClr val="accent1"/>
+          </a:effectRef>
+          <a:fontRef idx="minor"/>
+        </p:style>
+        <p:txBody>
+          <a:bodyPr lIns="90000" rIns="90000" tIns="45000" bIns="45000" anchor="ctr">
+            <a:noAutofit/>
+          </a:bodyPr>
+          <a:p>
+            <a:endParaRPr b="0" lang="en-US" sz="1800" spc="-1" strike="noStrike">
+              <a:solidFill>
+                <a:schemeClr val="lt1"/>
+              </a:solidFill>
+              <a:latin typeface="Calibri"/>
+              <a:ea typeface="DejaVu Sans"/>
+            </a:endParaRPr>
+          </a:p>
+        </p:txBody>
+      </p:sp>
+      <p:sp>
+        <p:nvSpPr>
+          <p:cNvPr id="263" name="Rectangle 143"/>
+          <p:cNvSpPr/>
+          <p:nvPr/>
+        </p:nvSpPr>
+        <p:spPr>
+          <a:xfrm>
+            <a:off x="11887200" y="0"/>
+            <a:ext cx="14400" cy="6854040"/>
+          </a:xfrm>
+          <a:prstGeom prst="rect">
+            <a:avLst/>
+          </a:prstGeom>
+          <a:solidFill>
+            <a:srgbClr val="121216"/>
+          </a:solidFill>
+          <a:ln>
+            <a:noFill/>
+          </a:ln>
+          <a:effectLst>
+            <a:outerShdw blurRad="39960" dir="5400000" dist="23040" rotWithShape="0">
+              <a:srgbClr val="000000">
+                <a:alpha val="35000"/>
+              </a:srgbClr>
+            </a:outerShdw>
+          </a:effectLst>
+        </p:spPr>
+        <p:style>
+          <a:lnRef idx="1">
+            <a:schemeClr val="accent1"/>
+          </a:lnRef>
+          <a:fillRef idx="3">
+            <a:schemeClr val="accent1"/>
+          </a:fillRef>
+          <a:effectRef idx="2">
+            <a:schemeClr val="accent1"/>
+          </a:effectRef>
+          <a:fontRef idx="minor"/>
+        </p:style>
+        <p:txBody>
+          <a:bodyPr lIns="90000" rIns="90000" tIns="45000" bIns="45000" anchor="ctr">
+            <a:noAutofit/>
+          </a:bodyPr>
+          <a:p>
+            <a:endParaRPr b="0" lang="en-US" sz="1800" spc="-1" strike="noStrike">
+              <a:solidFill>
+                <a:schemeClr val="lt1"/>
+              </a:solidFill>
+              <a:latin typeface="Calibri"/>
+              <a:ea typeface="DejaVu Sans"/>
+            </a:endParaRPr>
+          </a:p>
+        </p:txBody>
+      </p:sp>
+      <p:sp>
+        <p:nvSpPr>
+          <p:cNvPr id="264" name="Rectangle 144"/>
+          <p:cNvSpPr/>
+          <p:nvPr/>
+        </p:nvSpPr>
+        <p:spPr>
+          <a:xfrm>
+            <a:off x="0" y="0"/>
+            <a:ext cx="316080" cy="6854040"/>
+          </a:xfrm>
+          <a:prstGeom prst="rect">
+            <a:avLst/>
+          </a:prstGeom>
+          <a:solidFill>
+            <a:srgbClr val="ff8c00"/>
+          </a:solidFill>
+          <a:ln>
+            <a:noFill/>
+          </a:ln>
+          <a:effectLst>
+            <a:outerShdw blurRad="39960" dir="5400000" dist="23040" rotWithShape="0">
+              <a:srgbClr val="000000">
+                <a:alpha val="35000"/>
+              </a:srgbClr>
+            </a:outerShdw>
+          </a:effectLst>
+        </p:spPr>
+        <p:style>
+          <a:lnRef idx="1">
+            <a:schemeClr val="accent1"/>
+          </a:lnRef>
+          <a:fillRef idx="3">
+            <a:schemeClr val="accent1"/>
+          </a:fillRef>
+          <a:effectRef idx="2">
+            <a:schemeClr val="accent1"/>
+          </a:effectRef>
+          <a:fontRef idx="minor"/>
+        </p:style>
+        <p:txBody>
+          <a:bodyPr lIns="90000" rIns="90000" tIns="45000" bIns="45000" anchor="ctr">
+            <a:noAutofit/>
+          </a:bodyPr>
+          <a:p>
+            <a:endParaRPr b="0" lang="en-US" sz="1800" spc="-1" strike="noStrike">
+              <a:solidFill>
+                <a:schemeClr val="lt1"/>
+              </a:solidFill>
+              <a:latin typeface="Calibri"/>
+              <a:ea typeface="DejaVu Sans"/>
+            </a:endParaRPr>
+          </a:p>
+        </p:txBody>
+      </p:sp>
+      <p:sp>
+        <p:nvSpPr>
+          <p:cNvPr id="265" name="Rounded Rectangle 64"/>
+          <p:cNvSpPr/>
+          <p:nvPr/>
+        </p:nvSpPr>
+        <p:spPr>
+          <a:xfrm>
+            <a:off x="9875520" y="365760"/>
+            <a:ext cx="2007720" cy="498960"/>
+          </a:xfrm>
+          <a:prstGeom prst="roundRect">
+            <a:avLst>
+              <a:gd name="adj" fmla="val 16667"/>
+            </a:avLst>
+          </a:prstGeom>
+          <a:solidFill>
+            <a:srgbClr val="1e1e24"/>
+          </a:solidFill>
+          <a:ln>
+            <a:solidFill>
+              <a:srgbClr val="ff8c00"/>
+            </a:solidFill>
+            <a:round/>
+          </a:ln>
+          <a:effectLst>
+            <a:outerShdw blurRad="39960" dir="5400000" dist="23040" rotWithShape="0">
+              <a:srgbClr val="000000">
+                <a:alpha val="35000"/>
+              </a:srgbClr>
+            </a:outerShdw>
+          </a:effectLst>
+        </p:spPr>
+        <p:style>
+          <a:lnRef idx="1">
+            <a:schemeClr val="accent1"/>
+          </a:lnRef>
+          <a:fillRef idx="3">
+            <a:schemeClr val="accent1"/>
+          </a:fillRef>
+          <a:effectRef idx="2">
+            <a:schemeClr val="accent1"/>
+          </a:effectRef>
+          <a:fontRef idx="minor"/>
+        </p:style>
+        <p:txBody>
+          <a:bodyPr lIns="90000" rIns="90000" tIns="45000" bIns="45000" anchor="ctr">
+            <a:noAutofit/>
+          </a:bodyPr>
+          <a:p>
+            <a:pPr algn="ctr">
+              <a:lnSpc>
+                <a:spcPct val="100000"/>
+              </a:lnSpc>
+            </a:pPr>
+            <a:r>
+              <a:rPr b="1" lang="en-US" sz="1400" spc="-1" strike="noStrike">
+                <a:solidFill>
+                  <a:srgbClr val="ffb45a"/>
+                </a:solidFill>
+                <a:latin typeface="Calibri"/>
+                <a:ea typeface="DejaVu Sans"/>
+              </a:rPr>
+              <a:t>JAVA TEMELLERI</a:t>
+            </a:r>
+            <a:endParaRPr b="0" lang="en-US" sz="1400" spc="-1" strike="noStrike">
+              <a:solidFill>
+                <a:srgbClr val="ffffff"/>
+              </a:solidFill>
+              <a:latin typeface="Arial"/>
+            </a:endParaRPr>
+          </a:p>
+        </p:txBody>
+      </p:sp>
+      <p:sp>
+        <p:nvSpPr>
+          <p:cNvPr id="266" name="TextBox 28"/>
+          <p:cNvSpPr/>
+          <p:nvPr/>
+        </p:nvSpPr>
+        <p:spPr>
+          <a:xfrm>
+            <a:off x="2585880" y="914400"/>
+            <a:ext cx="5797080" cy="1186920"/>
+          </a:xfrm>
+          <a:prstGeom prst="rect">
+            <a:avLst/>
+          </a:prstGeom>
+          <a:noFill/>
+          <a:ln w="0">
+            <a:noFill/>
+          </a:ln>
+        </p:spPr>
+        <p:style>
+          <a:lnRef idx="0"/>
+          <a:fillRef idx="0"/>
+          <a:effectRef idx="0"/>
+          <a:fontRef idx="minor"/>
+        </p:style>
+        <p:txBody>
+          <a:bodyPr wrap="none" lIns="90000" rIns="90000" tIns="45000" bIns="45000" anchor="t">
+            <a:spAutoFit/>
+          </a:bodyPr>
+          <a:p>
+            <a:pPr>
+              <a:lnSpc>
+                <a:spcPct val="100000"/>
+              </a:lnSpc>
+            </a:pPr>
+            <a:r>
+              <a:rPr b="1" lang="en-US" sz="3600" spc="-1" strike="noStrike">
+                <a:solidFill>
+                  <a:srgbClr val="f5f5f5"/>
+                </a:solidFill>
+                <a:latin typeface="Calibri"/>
+                <a:ea typeface="DejaVu Sans"/>
+              </a:rPr>
+              <a:t>Java'da Aritmetik Operatörler</a:t>
+            </a:r>
+            <a:endParaRPr b="0" lang="en-US" sz="3600" spc="-1" strike="noStrike">
+              <a:solidFill>
+                <a:srgbClr val="000000"/>
+              </a:solidFill>
+              <a:latin typeface="Arial"/>
+            </a:endParaRPr>
+          </a:p>
+          <a:p>
+            <a:pPr>
+              <a:lnSpc>
+                <a:spcPct val="100000"/>
+              </a:lnSpc>
+            </a:pPr>
+            <a:endParaRPr b="0" lang="en-US" sz="3600" spc="-1" strike="noStrike">
+              <a:solidFill>
+                <a:srgbClr val="000000"/>
+              </a:solidFill>
+              <a:latin typeface="Arial"/>
+            </a:endParaRPr>
+          </a:p>
+        </p:txBody>
+      </p:sp>
+      <p:sp>
+        <p:nvSpPr>
+          <p:cNvPr id="267" name="TextBox 29"/>
+          <p:cNvSpPr/>
+          <p:nvPr/>
+        </p:nvSpPr>
+        <p:spPr>
+          <a:xfrm>
+            <a:off x="2057400" y="1694880"/>
+            <a:ext cx="7455240" cy="819720"/>
+          </a:xfrm>
+          <a:prstGeom prst="rect">
+            <a:avLst/>
+          </a:prstGeom>
+          <a:noFill/>
+          <a:ln w="0">
+            <a:noFill/>
+          </a:ln>
+        </p:spPr>
+        <p:style>
+          <a:lnRef idx="0"/>
+          <a:fillRef idx="0"/>
+          <a:effectRef idx="0"/>
+          <a:fontRef idx="minor"/>
+        </p:style>
+        <p:txBody>
+          <a:bodyPr wrap="none" lIns="90000" rIns="90000" tIns="45000" bIns="45000" anchor="t">
+            <a:spAutoFit/>
+          </a:bodyPr>
+          <a:p>
+            <a:pPr>
+              <a:lnSpc>
+                <a:spcPct val="100000"/>
+              </a:lnSpc>
+            </a:pPr>
+            <a:r>
+              <a:rPr b="0" lang="en-US" sz="1600" spc="-1" strike="noStrike">
+                <a:solidFill>
+                  <a:srgbClr val="aaaaaa"/>
+                </a:solidFill>
+                <a:latin typeface="Calibri"/>
+                <a:ea typeface="DejaVu Sans"/>
+              </a:rPr>
+              <a:t>Aritmetik operatörler, sayılar üzerinde toplama, çıkarma, çarpma gibi temel </a:t>
+            </a:r>
+            <a:endParaRPr b="0" lang="en-US" sz="1600" spc="-1" strike="noStrike">
+              <a:solidFill>
+                <a:srgbClr val="000000"/>
+              </a:solidFill>
+              <a:latin typeface="Arial"/>
+            </a:endParaRPr>
+          </a:p>
+          <a:p>
+            <a:pPr>
+              <a:lnSpc>
+                <a:spcPct val="100000"/>
+              </a:lnSpc>
+            </a:pPr>
+            <a:r>
+              <a:rPr b="0" lang="en-US" sz="1600" spc="-1" strike="noStrike">
+                <a:solidFill>
+                  <a:srgbClr val="aaaaaa"/>
+                </a:solidFill>
+                <a:latin typeface="Calibri"/>
+                <a:ea typeface="DejaVu Sans"/>
+              </a:rPr>
+              <a:t>matematiksel işlemleri gerçekleştirmek için kullanılır. Klasik matematikteki işlem önceliği </a:t>
+            </a:r>
+            <a:endParaRPr b="0" lang="en-US" sz="1600" spc="-1" strike="noStrike">
+              <a:solidFill>
+                <a:srgbClr val="000000"/>
+              </a:solidFill>
+              <a:latin typeface="Arial"/>
+            </a:endParaRPr>
+          </a:p>
+          <a:p>
+            <a:pPr>
+              <a:lnSpc>
+                <a:spcPct val="100000"/>
+              </a:lnSpc>
+            </a:pPr>
+            <a:r>
+              <a:rPr b="0" lang="en-US" sz="1600" spc="-1" strike="noStrike">
+                <a:solidFill>
+                  <a:srgbClr val="aaaaaa"/>
+                </a:solidFill>
+                <a:latin typeface="Calibri"/>
+                <a:ea typeface="DejaVu Sans"/>
+              </a:rPr>
+              <a:t>(çarpma/bölmenin toplamadan önce yapılması) Java'da da aynen geçerlidir.</a:t>
+            </a:r>
+            <a:endParaRPr b="0" lang="en-US" sz="1600" spc="-1" strike="noStrike">
+              <a:solidFill>
+                <a:srgbClr val="000000"/>
+              </a:solidFill>
+              <a:latin typeface="Arial"/>
+            </a:endParaRPr>
+          </a:p>
+        </p:txBody>
+      </p:sp>
+      <p:sp>
+        <p:nvSpPr>
+          <p:cNvPr id="268" name="Rounded Rectangle 65"/>
+          <p:cNvSpPr/>
+          <p:nvPr/>
+        </p:nvSpPr>
+        <p:spPr>
+          <a:xfrm>
+            <a:off x="987480" y="3182040"/>
+            <a:ext cx="3287880" cy="2739240"/>
+          </a:xfrm>
+          <a:prstGeom prst="roundRect">
+            <a:avLst>
+              <a:gd name="adj" fmla="val 16667"/>
+            </a:avLst>
+          </a:prstGeom>
+          <a:solidFill>
+            <a:srgbClr val="08080a"/>
+          </a:solidFill>
+          <a:ln>
+            <a:noFill/>
+          </a:ln>
+          <a:effectLst>
+            <a:outerShdw blurRad="39960" dir="5400000" dist="23040" rotWithShape="0">
+              <a:srgbClr val="000000">
+                <a:alpha val="35000"/>
+              </a:srgbClr>
+            </a:outerShdw>
+          </a:effectLst>
+        </p:spPr>
+        <p:style>
+          <a:lnRef idx="1">
+            <a:schemeClr val="accent1"/>
+          </a:lnRef>
+          <a:fillRef idx="3">
+            <a:schemeClr val="accent1"/>
+          </a:fillRef>
+          <a:effectRef idx="2">
+            <a:schemeClr val="accent1"/>
+          </a:effectRef>
+          <a:fontRef idx="minor"/>
+        </p:style>
+        <p:txBody>
+          <a:bodyPr lIns="90000" rIns="90000" tIns="45000" bIns="45000" anchor="ctr">
+            <a:noAutofit/>
+          </a:bodyPr>
+          <a:p>
+            <a:endParaRPr b="0" lang="en-US" sz="1800" spc="-1" strike="noStrike">
+              <a:solidFill>
+                <a:schemeClr val="lt1"/>
+              </a:solidFill>
+              <a:latin typeface="Calibri"/>
+              <a:ea typeface="DejaVu Sans"/>
+            </a:endParaRPr>
+          </a:p>
+        </p:txBody>
+      </p:sp>
+      <p:sp>
+        <p:nvSpPr>
+          <p:cNvPr id="269" name="Rounded Rectangle 66"/>
+          <p:cNvSpPr/>
+          <p:nvPr/>
+        </p:nvSpPr>
+        <p:spPr>
+          <a:xfrm>
+            <a:off x="914400" y="3108960"/>
+            <a:ext cx="3287880" cy="3291120"/>
+          </a:xfrm>
+          <a:prstGeom prst="roundRect">
+            <a:avLst>
+              <a:gd name="adj" fmla="val 16667"/>
+            </a:avLst>
+          </a:prstGeom>
+          <a:solidFill>
+            <a:srgbClr val="16161c"/>
+          </a:solidFill>
+          <a:ln>
+            <a:solidFill>
+              <a:srgbClr val="464655"/>
+            </a:solidFill>
+            <a:round/>
+          </a:ln>
+          <a:effectLst>
+            <a:outerShdw blurRad="39960" dir="5400000" dist="23040" rotWithShape="0">
+              <a:srgbClr val="000000">
+                <a:alpha val="35000"/>
+              </a:srgbClr>
+            </a:outerShdw>
+          </a:effectLst>
+        </p:spPr>
+        <p:style>
+          <a:lnRef idx="1">
+            <a:schemeClr val="accent1"/>
+          </a:lnRef>
+          <a:fillRef idx="3">
+            <a:schemeClr val="accent1"/>
+          </a:fillRef>
+          <a:effectRef idx="2">
+            <a:schemeClr val="accent1"/>
+          </a:effectRef>
+          <a:fontRef idx="minor"/>
+        </p:style>
+        <p:txBody>
+          <a:bodyPr lIns="90000" rIns="90000" tIns="45000" bIns="45000" anchor="ctr">
+            <a:noAutofit/>
+          </a:bodyPr>
+          <a:p>
+            <a:pPr marL="216000" indent="-216000">
+              <a:lnSpc>
+                <a:spcPct val="100000"/>
+              </a:lnSpc>
+              <a:buClr>
+                <a:srgbClr val="ffffff"/>
+              </a:buClr>
+              <a:buFont typeface="Wingdings" charset="2"/>
+              <a:buChar char=""/>
+            </a:pPr>
+            <a:r>
+              <a:rPr b="0" lang="en-US" sz="1500" spc="-1" strike="noStrike">
+                <a:solidFill>
+                  <a:schemeClr val="lt1"/>
+                </a:solidFill>
+                <a:latin typeface="Calibri"/>
+                <a:ea typeface="DejaVu Sans"/>
+              </a:rPr>
+              <a:t>+ (Toplama):</a:t>
+            </a:r>
+            <a:r>
+              <a:rPr b="1" lang="en-US" sz="1500" spc="-1" strike="noStrike">
+                <a:solidFill>
+                  <a:schemeClr val="lt1"/>
+                </a:solidFill>
+                <a:latin typeface="Calibri"/>
+                <a:ea typeface="DejaVu Sans"/>
+              </a:rPr>
+              <a:t> Sayıları toplar. (Ayrıca metinleri birleştirir).</a:t>
+            </a:r>
+            <a:endParaRPr b="0" lang="en-US" sz="1500" spc="-1" strike="noStrike">
+              <a:solidFill>
+                <a:srgbClr val="ffffff"/>
+              </a:solidFill>
+              <a:latin typeface="Arial"/>
+            </a:endParaRPr>
+          </a:p>
+          <a:p>
+            <a:pPr marL="216000" indent="-216000">
+              <a:lnSpc>
+                <a:spcPct val="100000"/>
+              </a:lnSpc>
+              <a:buClr>
+                <a:srgbClr val="ffffff"/>
+              </a:buClr>
+              <a:buFont typeface="Wingdings" charset="2"/>
+              <a:buChar char=""/>
+            </a:pPr>
+            <a:r>
+              <a:rPr b="0" lang="en-US" sz="1500" spc="-1" strike="noStrike">
+                <a:solidFill>
+                  <a:schemeClr val="lt1"/>
+                </a:solidFill>
+                <a:latin typeface="Calibri"/>
+                <a:ea typeface="DejaVu Sans"/>
+              </a:rPr>
+              <a:t>- (Çıkarma):</a:t>
+            </a:r>
+            <a:r>
+              <a:rPr b="1" lang="en-US" sz="1500" spc="-1" strike="noStrike">
+                <a:solidFill>
+                  <a:schemeClr val="lt1"/>
+                </a:solidFill>
+                <a:latin typeface="Calibri"/>
+                <a:ea typeface="DejaVu Sans"/>
+              </a:rPr>
+              <a:t> Sağdaki sayıyı soldakinden çıkarır.</a:t>
+            </a:r>
+            <a:endParaRPr b="0" lang="en-US" sz="1500" spc="-1" strike="noStrike">
+              <a:solidFill>
+                <a:srgbClr val="ffffff"/>
+              </a:solidFill>
+              <a:latin typeface="Arial"/>
+            </a:endParaRPr>
+          </a:p>
+          <a:p>
+            <a:pPr marL="216000" indent="-216000">
+              <a:lnSpc>
+                <a:spcPct val="100000"/>
+              </a:lnSpc>
+              <a:buClr>
+                <a:srgbClr val="ffffff"/>
+              </a:buClr>
+              <a:buFont typeface="Wingdings" charset="2"/>
+              <a:buChar char=""/>
+            </a:pPr>
+            <a:r>
+              <a:rPr b="0" lang="en-US" sz="1500" spc="-1" strike="noStrike">
+                <a:solidFill>
+                  <a:schemeClr val="lt1"/>
+                </a:solidFill>
+                <a:latin typeface="Calibri"/>
+                <a:ea typeface="DejaVu Sans"/>
+              </a:rPr>
+              <a:t>* (Çarpma):</a:t>
+            </a:r>
+            <a:r>
+              <a:rPr b="1" lang="en-US" sz="1500" spc="-1" strike="noStrike">
+                <a:solidFill>
+                  <a:schemeClr val="lt1"/>
+                </a:solidFill>
+                <a:latin typeface="Calibri"/>
+                <a:ea typeface="DejaVu Sans"/>
+              </a:rPr>
+              <a:t> İki değeri çarpar.</a:t>
+            </a:r>
+            <a:endParaRPr b="0" lang="en-US" sz="1500" spc="-1" strike="noStrike">
+              <a:solidFill>
+                <a:srgbClr val="ffffff"/>
+              </a:solidFill>
+              <a:latin typeface="Arial"/>
+            </a:endParaRPr>
+          </a:p>
+          <a:p>
+            <a:pPr marL="216000" indent="-216000">
+              <a:lnSpc>
+                <a:spcPct val="100000"/>
+              </a:lnSpc>
+              <a:buClr>
+                <a:srgbClr val="ffffff"/>
+              </a:buClr>
+              <a:buFont typeface="Wingdings" charset="2"/>
+              <a:buChar char=""/>
+            </a:pPr>
+            <a:r>
+              <a:rPr b="0" lang="en-US" sz="1500" spc="-1" strike="noStrike">
+                <a:solidFill>
+                  <a:schemeClr val="lt1"/>
+                </a:solidFill>
+                <a:latin typeface="Calibri"/>
+                <a:ea typeface="DejaVu Sans"/>
+              </a:rPr>
+              <a:t>/ (Bölme):</a:t>
+            </a:r>
+            <a:r>
+              <a:rPr b="1" lang="en-US" sz="1500" spc="-1" strike="noStrike">
+                <a:solidFill>
+                  <a:schemeClr val="lt1"/>
+                </a:solidFill>
+                <a:latin typeface="Calibri"/>
+                <a:ea typeface="DejaVu Sans"/>
+              </a:rPr>
+              <a:t> Bölüm sonucunu verir. (Not: İki tam sayı bölünürse sonuç da tam sayı olur, ondalık kısım atılır. Örn: 5 / 2 = 2)</a:t>
+            </a:r>
+            <a:endParaRPr b="0" lang="en-US" sz="1500" spc="-1" strike="noStrike">
+              <a:solidFill>
+                <a:srgbClr val="ffffff"/>
+              </a:solidFill>
+              <a:latin typeface="Arial"/>
+            </a:endParaRPr>
+          </a:p>
+          <a:p>
+            <a:pPr marL="216000" indent="-216000">
+              <a:lnSpc>
+                <a:spcPct val="100000"/>
+              </a:lnSpc>
+              <a:buClr>
+                <a:srgbClr val="ffffff"/>
+              </a:buClr>
+              <a:buFont typeface="Wingdings" charset="2"/>
+              <a:buChar char=""/>
+            </a:pPr>
+            <a:r>
+              <a:rPr b="1" lang="en-US" sz="1500" spc="-1" strike="noStrike">
+                <a:solidFill>
+                  <a:schemeClr val="lt1"/>
+                </a:solidFill>
+                <a:latin typeface="Calibri"/>
+                <a:ea typeface="DejaVu Sans"/>
+              </a:rPr>
+              <a:t> </a:t>
+            </a:r>
+            <a:r>
+              <a:rPr b="0" lang="en-US" sz="1500" spc="-1" strike="noStrike">
+                <a:solidFill>
+                  <a:schemeClr val="lt1"/>
+                </a:solidFill>
+                <a:latin typeface="Calibri"/>
+                <a:ea typeface="DejaVu Sans"/>
+              </a:rPr>
+              <a:t>% (Mod Alma):</a:t>
+            </a:r>
+            <a:r>
+              <a:rPr b="1" lang="en-US" sz="1500" spc="-1" strike="noStrike">
+                <a:solidFill>
+                  <a:schemeClr val="lt1"/>
+                </a:solidFill>
+                <a:latin typeface="Calibri"/>
+                <a:ea typeface="DejaVu Sans"/>
+              </a:rPr>
+              <a:t> Bölme işleminden kalan sayıyı verir. Çift/tek sayı bulmada çok sık kullanılır.</a:t>
+            </a:r>
+            <a:endParaRPr b="0" lang="en-US" sz="1500" spc="-1" strike="noStrike">
+              <a:solidFill>
+                <a:srgbClr val="ffffff"/>
+              </a:solidFill>
+              <a:latin typeface="Arial"/>
+            </a:endParaRPr>
+          </a:p>
+        </p:txBody>
+      </p:sp>
+      <p:sp>
+        <p:nvSpPr>
+          <p:cNvPr id="270" name="Rounded Rectangle 67"/>
+          <p:cNvSpPr/>
+          <p:nvPr/>
+        </p:nvSpPr>
+        <p:spPr>
+          <a:xfrm>
+            <a:off x="4507920" y="3182040"/>
+            <a:ext cx="3287880" cy="2739240"/>
+          </a:xfrm>
+          <a:prstGeom prst="roundRect">
+            <a:avLst>
+              <a:gd name="adj" fmla="val 16667"/>
+            </a:avLst>
+          </a:prstGeom>
+          <a:solidFill>
+            <a:srgbClr val="08080a"/>
+          </a:solidFill>
+          <a:ln>
+            <a:noFill/>
+          </a:ln>
+          <a:effectLst>
+            <a:outerShdw blurRad="39960" dir="5400000" dist="23040" rotWithShape="0">
+              <a:srgbClr val="000000">
+                <a:alpha val="35000"/>
+              </a:srgbClr>
+            </a:outerShdw>
+          </a:effectLst>
+        </p:spPr>
+        <p:style>
+          <a:lnRef idx="1">
+            <a:schemeClr val="accent1"/>
+          </a:lnRef>
+          <a:fillRef idx="3">
+            <a:schemeClr val="accent1"/>
+          </a:fillRef>
+          <a:effectRef idx="2">
+            <a:schemeClr val="accent1"/>
+          </a:effectRef>
+          <a:fontRef idx="minor"/>
+        </p:style>
+        <p:txBody>
+          <a:bodyPr lIns="90000" rIns="90000" tIns="45000" bIns="45000" anchor="ctr">
+            <a:noAutofit/>
+          </a:bodyPr>
+          <a:p>
+            <a:endParaRPr b="0" lang="en-US" sz="1800" spc="-1" strike="noStrike">
+              <a:solidFill>
+                <a:schemeClr val="lt1"/>
+              </a:solidFill>
+              <a:latin typeface="Calibri"/>
+              <a:ea typeface="DejaVu Sans"/>
+            </a:endParaRPr>
+          </a:p>
+        </p:txBody>
+      </p:sp>
+      <p:sp>
+        <p:nvSpPr>
+          <p:cNvPr id="271" name="Rounded Rectangle 68"/>
+          <p:cNvSpPr/>
+          <p:nvPr/>
+        </p:nvSpPr>
+        <p:spPr>
+          <a:xfrm>
+            <a:off x="4434840" y="2971800"/>
+            <a:ext cx="3287880" cy="3428280"/>
+          </a:xfrm>
+          <a:prstGeom prst="roundRect">
+            <a:avLst>
+              <a:gd name="adj" fmla="val 16667"/>
+            </a:avLst>
+          </a:prstGeom>
+          <a:solidFill>
+            <a:srgbClr val="16161c"/>
+          </a:solidFill>
+          <a:ln>
+            <a:solidFill>
+              <a:srgbClr val="464655"/>
+            </a:solidFill>
+            <a:round/>
+          </a:ln>
+          <a:effectLst>
+            <a:outerShdw blurRad="39960" dir="5400000" dist="23040" rotWithShape="0">
+              <a:srgbClr val="000000">
+                <a:alpha val="35000"/>
+              </a:srgbClr>
+            </a:outerShdw>
+          </a:effectLst>
+        </p:spPr>
+        <p:style>
+          <a:lnRef idx="1">
+            <a:schemeClr val="accent1"/>
+          </a:lnRef>
+          <a:fillRef idx="3">
+            <a:schemeClr val="accent1"/>
+          </a:fillRef>
+          <a:effectRef idx="2">
+            <a:schemeClr val="accent1"/>
+          </a:effectRef>
+          <a:fontRef idx="minor"/>
+        </p:style>
+        <p:txBody>
+          <a:bodyPr lIns="90000" rIns="90000" tIns="45000" bIns="45000" anchor="ctr">
+            <a:noAutofit/>
+          </a:bodyPr>
+          <a:p>
+            <a:pPr>
+              <a:lnSpc>
+                <a:spcPct val="100000"/>
+              </a:lnSpc>
+            </a:pPr>
+            <a:r>
+              <a:rPr b="0" lang="en-US" sz="1500" spc="-1" strike="noStrike">
+                <a:solidFill>
+                  <a:schemeClr val="lt1"/>
+                </a:solidFill>
+                <a:latin typeface="Calibri"/>
+                <a:ea typeface="DejaVu Sans"/>
+              </a:rPr>
+              <a:t>[ İşlem Önceliği (Operator Precedence) ]</a:t>
+            </a:r>
+            <a:endParaRPr b="0" lang="en-US" sz="1500" spc="-1" strike="noStrike">
+              <a:solidFill>
+                <a:srgbClr val="ffffff"/>
+              </a:solidFill>
+              <a:latin typeface="Arial"/>
+            </a:endParaRPr>
+          </a:p>
+          <a:p>
+            <a:pPr>
+              <a:lnSpc>
+                <a:spcPct val="100000"/>
+              </a:lnSpc>
+            </a:pPr>
+            <a:r>
+              <a:rPr b="0" lang="en-US" sz="1500" spc="-1" strike="noStrike">
+                <a:solidFill>
+                  <a:schemeClr val="lt1"/>
+                </a:solidFill>
+                <a:latin typeface="Calibri"/>
+                <a:ea typeface="DejaVu Sans"/>
+              </a:rPr>
+              <a:t>├──</a:t>
+            </a:r>
+            <a:r>
+              <a:rPr b="0" lang="en-US" sz="1500" spc="-1" strike="noStrike">
+                <a:solidFill>
+                  <a:schemeClr val="lt1"/>
+                </a:solidFill>
+                <a:latin typeface="Calibri"/>
+                <a:ea typeface="DejaVu Sans"/>
+              </a:rPr>
+              <a:t>&gt; 1. Parantez İçleri ()</a:t>
+            </a:r>
+            <a:endParaRPr b="0" lang="en-US" sz="1500" spc="-1" strike="noStrike">
+              <a:solidFill>
+                <a:srgbClr val="ffffff"/>
+              </a:solidFill>
+              <a:latin typeface="Arial"/>
+            </a:endParaRPr>
+          </a:p>
+          <a:p>
+            <a:pPr>
+              <a:lnSpc>
+                <a:spcPct val="100000"/>
+              </a:lnSpc>
+            </a:pPr>
+            <a:r>
+              <a:rPr b="0" lang="en-US" sz="1500" spc="-1" strike="noStrike">
+                <a:solidFill>
+                  <a:schemeClr val="lt1"/>
+                </a:solidFill>
+                <a:latin typeface="Calibri"/>
+                <a:ea typeface="DejaVu Sans"/>
+              </a:rPr>
+              <a:t>│ └── </a:t>
+            </a:r>
+            <a:r>
+              <a:rPr b="0" lang="en-US" sz="1500" spc="-1" strike="noStrike">
+                <a:solidFill>
+                  <a:schemeClr val="lt1"/>
+                </a:solidFill>
+                <a:latin typeface="Calibri"/>
+                <a:ea typeface="DejaVu Sans"/>
+              </a:rPr>
+              <a:t>Her zaman ilk olarak hesaplanır.</a:t>
+            </a:r>
+            <a:endParaRPr b="0" lang="en-US" sz="1500" spc="-1" strike="noStrike">
+              <a:solidFill>
+                <a:srgbClr val="ffffff"/>
+              </a:solidFill>
+              <a:latin typeface="Arial"/>
+            </a:endParaRPr>
+          </a:p>
+          <a:p>
+            <a:pPr>
+              <a:lnSpc>
+                <a:spcPct val="100000"/>
+              </a:lnSpc>
+            </a:pPr>
+            <a:r>
+              <a:rPr b="0" lang="en-US" sz="1500" spc="-1" strike="noStrike">
+                <a:solidFill>
+                  <a:schemeClr val="lt1"/>
+                </a:solidFill>
+                <a:latin typeface="Calibri"/>
+                <a:ea typeface="DejaVu Sans"/>
+              </a:rPr>
+              <a:t>│</a:t>
+            </a:r>
+            <a:endParaRPr b="0" lang="en-US" sz="1500" spc="-1" strike="noStrike">
+              <a:solidFill>
+                <a:srgbClr val="ffffff"/>
+              </a:solidFill>
+              <a:latin typeface="Arial"/>
+            </a:endParaRPr>
+          </a:p>
+          <a:p>
+            <a:pPr>
+              <a:lnSpc>
+                <a:spcPct val="100000"/>
+              </a:lnSpc>
+            </a:pPr>
+            <a:r>
+              <a:rPr b="0" lang="en-US" sz="1500" spc="-1" strike="noStrike">
+                <a:solidFill>
+                  <a:schemeClr val="lt1"/>
+                </a:solidFill>
+                <a:latin typeface="Calibri"/>
+                <a:ea typeface="DejaVu Sans"/>
+              </a:rPr>
+              <a:t>├──</a:t>
+            </a:r>
+            <a:r>
+              <a:rPr b="0" lang="en-US" sz="1500" spc="-1" strike="noStrike">
+                <a:solidFill>
+                  <a:schemeClr val="lt1"/>
+                </a:solidFill>
+                <a:latin typeface="Calibri"/>
+                <a:ea typeface="DejaVu Sans"/>
+              </a:rPr>
+              <a:t>&gt; 2. Artırma / Azaltma ++, --</a:t>
+            </a:r>
+            <a:endParaRPr b="0" lang="en-US" sz="1500" spc="-1" strike="noStrike">
+              <a:solidFill>
+                <a:srgbClr val="ffffff"/>
+              </a:solidFill>
+              <a:latin typeface="Arial"/>
+            </a:endParaRPr>
+          </a:p>
+          <a:p>
+            <a:pPr>
+              <a:lnSpc>
+                <a:spcPct val="100000"/>
+              </a:lnSpc>
+            </a:pPr>
+            <a:r>
+              <a:rPr b="0" lang="en-US" sz="1500" spc="-1" strike="noStrike">
+                <a:solidFill>
+                  <a:schemeClr val="lt1"/>
+                </a:solidFill>
+                <a:latin typeface="Calibri"/>
+                <a:ea typeface="DejaVu Sans"/>
+              </a:rPr>
+              <a:t>│</a:t>
+            </a:r>
+            <a:endParaRPr b="0" lang="en-US" sz="1500" spc="-1" strike="noStrike">
+              <a:solidFill>
+                <a:srgbClr val="ffffff"/>
+              </a:solidFill>
+              <a:latin typeface="Arial"/>
+            </a:endParaRPr>
+          </a:p>
+          <a:p>
+            <a:pPr>
+              <a:lnSpc>
+                <a:spcPct val="100000"/>
+              </a:lnSpc>
+            </a:pPr>
+            <a:r>
+              <a:rPr b="0" lang="en-US" sz="1500" spc="-1" strike="noStrike">
+                <a:solidFill>
+                  <a:schemeClr val="lt1"/>
+                </a:solidFill>
+                <a:latin typeface="Calibri"/>
+                <a:ea typeface="DejaVu Sans"/>
+              </a:rPr>
+              <a:t>├──</a:t>
+            </a:r>
+            <a:r>
+              <a:rPr b="0" lang="en-US" sz="1500" spc="-1" strike="noStrike">
+                <a:solidFill>
+                  <a:schemeClr val="lt1"/>
+                </a:solidFill>
+                <a:latin typeface="Calibri"/>
+                <a:ea typeface="DejaVu Sans"/>
+              </a:rPr>
+              <a:t>&gt; 3. Çarpma, Bölme, Mod *, /, %</a:t>
+            </a:r>
+            <a:endParaRPr b="0" lang="en-US" sz="1500" spc="-1" strike="noStrike">
+              <a:solidFill>
+                <a:srgbClr val="ffffff"/>
+              </a:solidFill>
+              <a:latin typeface="Arial"/>
+            </a:endParaRPr>
+          </a:p>
+          <a:p>
+            <a:pPr>
+              <a:lnSpc>
+                <a:spcPct val="100000"/>
+              </a:lnSpc>
+            </a:pPr>
+            <a:r>
+              <a:rPr b="0" lang="en-US" sz="1500" spc="-1" strike="noStrike">
+                <a:solidFill>
+                  <a:schemeClr val="lt1"/>
+                </a:solidFill>
+                <a:latin typeface="Calibri"/>
+                <a:ea typeface="DejaVu Sans"/>
+              </a:rPr>
+              <a:t>│ └── </a:t>
+            </a:r>
+            <a:r>
+              <a:rPr b="0" lang="en-US" sz="1500" spc="-1" strike="noStrike">
+                <a:solidFill>
+                  <a:schemeClr val="lt1"/>
+                </a:solidFill>
+                <a:latin typeface="Calibri"/>
+                <a:ea typeface="DejaVu Sans"/>
+              </a:rPr>
+              <a:t>(Soldan sağa doğru değerlendirilir)</a:t>
+            </a:r>
+            <a:endParaRPr b="0" lang="en-US" sz="1500" spc="-1" strike="noStrike">
+              <a:solidFill>
+                <a:srgbClr val="ffffff"/>
+              </a:solidFill>
+              <a:latin typeface="Arial"/>
+            </a:endParaRPr>
+          </a:p>
+          <a:p>
+            <a:pPr>
+              <a:lnSpc>
+                <a:spcPct val="100000"/>
+              </a:lnSpc>
+            </a:pPr>
+            <a:r>
+              <a:rPr b="0" lang="en-US" sz="1500" spc="-1" strike="noStrike">
+                <a:solidFill>
+                  <a:schemeClr val="lt1"/>
+                </a:solidFill>
+                <a:latin typeface="Calibri"/>
+                <a:ea typeface="DejaVu Sans"/>
+              </a:rPr>
+              <a:t>│</a:t>
+            </a:r>
+            <a:endParaRPr b="0" lang="en-US" sz="1500" spc="-1" strike="noStrike">
+              <a:solidFill>
+                <a:srgbClr val="ffffff"/>
+              </a:solidFill>
+              <a:latin typeface="Arial"/>
+            </a:endParaRPr>
+          </a:p>
+          <a:p>
+            <a:pPr>
+              <a:lnSpc>
+                <a:spcPct val="100000"/>
+              </a:lnSpc>
+            </a:pPr>
+            <a:r>
+              <a:rPr b="0" lang="en-US" sz="1500" spc="-1" strike="noStrike">
+                <a:solidFill>
+                  <a:schemeClr val="lt1"/>
+                </a:solidFill>
+                <a:latin typeface="Calibri"/>
+                <a:ea typeface="DejaVu Sans"/>
+              </a:rPr>
+              <a:t>└──</a:t>
+            </a:r>
+            <a:r>
+              <a:rPr b="0" lang="en-US" sz="1500" spc="-1" strike="noStrike">
+                <a:solidFill>
+                  <a:schemeClr val="lt1"/>
+                </a:solidFill>
+                <a:latin typeface="Calibri"/>
+                <a:ea typeface="DejaVu Sans"/>
+              </a:rPr>
+              <a:t>&gt; 4. Toplama ve Çıkarma +, -</a:t>
+            </a:r>
+            <a:endParaRPr b="0" lang="en-US" sz="1500" spc="-1" strike="noStrike">
+              <a:solidFill>
+                <a:srgbClr val="ffffff"/>
+              </a:solidFill>
+              <a:latin typeface="Arial"/>
+            </a:endParaRPr>
+          </a:p>
+          <a:p>
+            <a:pPr>
+              <a:lnSpc>
+                <a:spcPct val="100000"/>
+              </a:lnSpc>
+            </a:pPr>
+            <a:r>
+              <a:rPr b="0" lang="en-US" sz="1500" spc="-1" strike="noStrike">
+                <a:solidFill>
+                  <a:schemeClr val="lt1"/>
+                </a:solidFill>
+                <a:latin typeface="Calibri"/>
+                <a:ea typeface="DejaVu Sans"/>
+              </a:rPr>
+              <a:t>└── </a:t>
+            </a:r>
+            <a:r>
+              <a:rPr b="0" lang="en-US" sz="1500" spc="-1" strike="noStrike">
+                <a:solidFill>
+                  <a:schemeClr val="lt1"/>
+                </a:solidFill>
+                <a:latin typeface="Calibri"/>
+                <a:ea typeface="DejaVu Sans"/>
+              </a:rPr>
+              <a:t>(En son değerlendirilir)</a:t>
+            </a:r>
+            <a:endParaRPr b="0" lang="en-US" sz="1500" spc="-1" strike="noStrike">
+              <a:solidFill>
+                <a:srgbClr val="ffffff"/>
+              </a:solidFill>
+              <a:latin typeface="Arial"/>
+            </a:endParaRPr>
+          </a:p>
+        </p:txBody>
+      </p:sp>
+      <p:sp>
+        <p:nvSpPr>
+          <p:cNvPr id="272" name="Rounded Rectangle 69"/>
+          <p:cNvSpPr/>
+          <p:nvPr/>
+        </p:nvSpPr>
+        <p:spPr>
+          <a:xfrm>
+            <a:off x="8028360" y="3182040"/>
+            <a:ext cx="3287880" cy="2739240"/>
+          </a:xfrm>
+          <a:prstGeom prst="roundRect">
+            <a:avLst>
+              <a:gd name="adj" fmla="val 16667"/>
+            </a:avLst>
+          </a:prstGeom>
+          <a:solidFill>
+            <a:srgbClr val="08080a"/>
+          </a:solidFill>
+          <a:ln>
+            <a:noFill/>
+          </a:ln>
+          <a:effectLst>
+            <a:outerShdw blurRad="39960" dir="5400000" dist="23040" rotWithShape="0">
+              <a:srgbClr val="000000">
+                <a:alpha val="35000"/>
+              </a:srgbClr>
+            </a:outerShdw>
+          </a:effectLst>
+        </p:spPr>
+        <p:style>
+          <a:lnRef idx="1">
+            <a:schemeClr val="accent1"/>
+          </a:lnRef>
+          <a:fillRef idx="3">
+            <a:schemeClr val="accent1"/>
+          </a:fillRef>
+          <a:effectRef idx="2">
+            <a:schemeClr val="accent1"/>
+          </a:effectRef>
+          <a:fontRef idx="minor"/>
+        </p:style>
+        <p:txBody>
+          <a:bodyPr lIns="90000" rIns="90000" tIns="45000" bIns="45000" anchor="ctr">
+            <a:noAutofit/>
+          </a:bodyPr>
+          <a:p>
+            <a:endParaRPr b="0" lang="en-US" sz="1800" spc="-1" strike="noStrike">
+              <a:solidFill>
+                <a:schemeClr val="lt1"/>
+              </a:solidFill>
+              <a:latin typeface="Calibri"/>
+              <a:ea typeface="DejaVu Sans"/>
+            </a:endParaRPr>
+          </a:p>
+        </p:txBody>
+      </p:sp>
+      <p:sp>
+        <p:nvSpPr>
+          <p:cNvPr id="273" name="Rounded Rectangle 70"/>
+          <p:cNvSpPr/>
+          <p:nvPr/>
+        </p:nvSpPr>
+        <p:spPr>
+          <a:xfrm>
+            <a:off x="8003880" y="2971800"/>
+            <a:ext cx="3426120" cy="3426840"/>
+          </a:xfrm>
+          <a:prstGeom prst="roundRect">
+            <a:avLst>
+              <a:gd name="adj" fmla="val 16667"/>
+            </a:avLst>
+          </a:prstGeom>
+          <a:solidFill>
+            <a:srgbClr val="16161c"/>
+          </a:solidFill>
+          <a:ln>
+            <a:solidFill>
+              <a:srgbClr val="464655"/>
+            </a:solidFill>
+            <a:round/>
+          </a:ln>
+          <a:effectLst>
+            <a:outerShdw blurRad="39960" dir="5400000" dist="23040" rotWithShape="0">
+              <a:srgbClr val="000000">
+                <a:alpha val="35000"/>
+              </a:srgbClr>
+            </a:outerShdw>
+          </a:effectLst>
+        </p:spPr>
+        <p:style>
+          <a:lnRef idx="1">
+            <a:schemeClr val="accent1"/>
+          </a:lnRef>
+          <a:fillRef idx="3">
+            <a:schemeClr val="accent1"/>
+          </a:fillRef>
+          <a:effectRef idx="2">
+            <a:schemeClr val="accent1"/>
+          </a:effectRef>
+          <a:fontRef idx="minor"/>
+        </p:style>
+        <p:txBody>
+          <a:bodyPr lIns="90000" rIns="90000" tIns="45000" bIns="45000" anchor="ctr">
+            <a:noAutofit/>
+          </a:bodyPr>
+          <a:p>
+            <a:pPr algn="ctr">
+              <a:lnSpc>
+                <a:spcPct val="100000"/>
+              </a:lnSpc>
+            </a:pPr>
+            <a:r>
+              <a:rPr b="0" lang="en-US" sz="900" spc="-1" strike="noStrike">
+                <a:solidFill>
+                  <a:srgbClr val="78ffc8"/>
+                </a:solidFill>
+                <a:latin typeface="Consolas"/>
+                <a:ea typeface="DejaVu Sans"/>
+              </a:rPr>
+              <a:t>public class AritmetikIslemler {</a:t>
+            </a:r>
+            <a:endParaRPr b="0" lang="en-US" sz="900" spc="-1" strike="noStrike">
+              <a:solidFill>
+                <a:srgbClr val="ffffff"/>
+              </a:solidFill>
+              <a:latin typeface="Arial"/>
+            </a:endParaRPr>
+          </a:p>
+          <a:p>
+            <a:pPr algn="ctr">
+              <a:lnSpc>
+                <a:spcPct val="100000"/>
+              </a:lnSpc>
+            </a:pPr>
+            <a:r>
+              <a:rPr b="0" lang="en-US" sz="900" spc="-1" strike="noStrike">
+                <a:solidFill>
+                  <a:srgbClr val="78ffc8"/>
+                </a:solidFill>
+                <a:latin typeface="Consolas"/>
+                <a:ea typeface="DejaVu Sans"/>
+              </a:rPr>
+              <a:t>    </a:t>
+            </a:r>
+            <a:r>
+              <a:rPr b="0" lang="en-US" sz="900" spc="-1" strike="noStrike">
+                <a:solidFill>
+                  <a:srgbClr val="78ffc8"/>
+                </a:solidFill>
+                <a:latin typeface="Consolas"/>
+                <a:ea typeface="DejaVu Sans"/>
+              </a:rPr>
+              <a:t>public static void main(String[] args) {</a:t>
+            </a:r>
+            <a:endParaRPr b="0" lang="en-US" sz="900" spc="-1" strike="noStrike">
+              <a:solidFill>
+                <a:srgbClr val="ffffff"/>
+              </a:solidFill>
+              <a:latin typeface="Arial"/>
+            </a:endParaRPr>
+          </a:p>
+          <a:p>
+            <a:pPr algn="ctr">
+              <a:lnSpc>
+                <a:spcPct val="100000"/>
+              </a:lnSpc>
+            </a:pPr>
+            <a:r>
+              <a:rPr b="0" lang="en-US" sz="900" spc="-1" strike="noStrike">
+                <a:solidFill>
+                  <a:srgbClr val="78ffc8"/>
+                </a:solidFill>
+                <a:latin typeface="Consolas"/>
+                <a:ea typeface="DejaVu Sans"/>
+              </a:rPr>
+              <a:t>        </a:t>
+            </a:r>
+            <a:r>
+              <a:rPr b="0" lang="en-US" sz="900" spc="-1" strike="noStrike">
+                <a:solidFill>
+                  <a:srgbClr val="78ffc8"/>
+                </a:solidFill>
+                <a:latin typeface="Consolas"/>
+                <a:ea typeface="DejaVu Sans"/>
+              </a:rPr>
+              <a:t>int a = 10;</a:t>
+            </a:r>
+            <a:endParaRPr b="0" lang="en-US" sz="900" spc="-1" strike="noStrike">
+              <a:solidFill>
+                <a:srgbClr val="ffffff"/>
+              </a:solidFill>
+              <a:latin typeface="Arial"/>
+            </a:endParaRPr>
+          </a:p>
+          <a:p>
+            <a:pPr algn="ctr">
+              <a:lnSpc>
+                <a:spcPct val="100000"/>
+              </a:lnSpc>
+            </a:pPr>
+            <a:r>
+              <a:rPr b="0" lang="en-US" sz="900" spc="-1" strike="noStrike">
+                <a:solidFill>
+                  <a:srgbClr val="78ffc8"/>
+                </a:solidFill>
+                <a:latin typeface="Consolas"/>
+                <a:ea typeface="DejaVu Sans"/>
+              </a:rPr>
+              <a:t>        </a:t>
+            </a:r>
+            <a:r>
+              <a:rPr b="0" lang="en-US" sz="900" spc="-1" strike="noStrike">
+                <a:solidFill>
+                  <a:srgbClr val="78ffc8"/>
+                </a:solidFill>
+                <a:latin typeface="Consolas"/>
+                <a:ea typeface="DejaVu Sans"/>
+              </a:rPr>
+              <a:t>int b = 3;</a:t>
+            </a:r>
+            <a:endParaRPr b="0" lang="en-US" sz="900" spc="-1" strike="noStrike">
+              <a:solidFill>
+                <a:srgbClr val="ffffff"/>
+              </a:solidFill>
+              <a:latin typeface="Arial"/>
+            </a:endParaRPr>
+          </a:p>
+          <a:p>
+            <a:pPr algn="ctr">
+              <a:lnSpc>
+                <a:spcPct val="100000"/>
+              </a:lnSpc>
+            </a:pPr>
+            <a:r>
+              <a:rPr b="0" lang="en-US" sz="900" spc="-1" strike="noStrike">
+                <a:solidFill>
+                  <a:srgbClr val="78ffc8"/>
+                </a:solidFill>
+                <a:latin typeface="Consolas"/>
+                <a:ea typeface="DejaVu Sans"/>
+              </a:rPr>
+              <a:t>        </a:t>
+            </a:r>
+            <a:r>
+              <a:rPr b="0" lang="en-US" sz="900" spc="-1" strike="noStrike">
+                <a:solidFill>
+                  <a:srgbClr val="78ffc8"/>
+                </a:solidFill>
+                <a:latin typeface="Consolas"/>
+                <a:ea typeface="DejaVu Sans"/>
+              </a:rPr>
+              <a:t>// Temel İşlemler</a:t>
+            </a:r>
+            <a:endParaRPr b="0" lang="en-US" sz="900" spc="-1" strike="noStrike">
+              <a:solidFill>
+                <a:srgbClr val="ffffff"/>
+              </a:solidFill>
+              <a:latin typeface="Arial"/>
+            </a:endParaRPr>
+          </a:p>
+          <a:p>
+            <a:pPr algn="ctr">
+              <a:lnSpc>
+                <a:spcPct val="100000"/>
+              </a:lnSpc>
+            </a:pPr>
+            <a:r>
+              <a:rPr b="0" lang="en-US" sz="900" spc="-1" strike="noStrike">
+                <a:solidFill>
+                  <a:srgbClr val="78ffc8"/>
+                </a:solidFill>
+                <a:latin typeface="Consolas"/>
+                <a:ea typeface="DejaVu Sans"/>
+              </a:rPr>
+              <a:t>        </a:t>
+            </a:r>
+            <a:r>
+              <a:rPr b="0" lang="en-US" sz="900" spc="-1" strike="noStrike">
+                <a:solidFill>
+                  <a:srgbClr val="78ffc8"/>
+                </a:solidFill>
+                <a:latin typeface="Consolas"/>
+                <a:ea typeface="DejaVu Sans"/>
+              </a:rPr>
+              <a:t>int toplam = a + b; // 13</a:t>
+            </a:r>
+            <a:endParaRPr b="0" lang="en-US" sz="900" spc="-1" strike="noStrike">
+              <a:solidFill>
+                <a:srgbClr val="ffffff"/>
+              </a:solidFill>
+              <a:latin typeface="Arial"/>
+            </a:endParaRPr>
+          </a:p>
+          <a:p>
+            <a:pPr algn="ctr">
+              <a:lnSpc>
+                <a:spcPct val="100000"/>
+              </a:lnSpc>
+            </a:pPr>
+            <a:r>
+              <a:rPr b="0" lang="en-US" sz="900" spc="-1" strike="noStrike">
+                <a:solidFill>
+                  <a:srgbClr val="78ffc8"/>
+                </a:solidFill>
+                <a:latin typeface="Consolas"/>
+                <a:ea typeface="DejaVu Sans"/>
+              </a:rPr>
+              <a:t>        </a:t>
+            </a:r>
+            <a:r>
+              <a:rPr b="0" lang="en-US" sz="900" spc="-1" strike="noStrike">
+                <a:solidFill>
+                  <a:srgbClr val="78ffc8"/>
+                </a:solidFill>
+                <a:latin typeface="Consolas"/>
+                <a:ea typeface="DejaVu Sans"/>
+              </a:rPr>
+              <a:t>int bolum = a / b;  // 3 (Ondalık kısım silinir)</a:t>
+            </a:r>
+            <a:endParaRPr b="0" lang="en-US" sz="900" spc="-1" strike="noStrike">
+              <a:solidFill>
+                <a:srgbClr val="ffffff"/>
+              </a:solidFill>
+              <a:latin typeface="Arial"/>
+            </a:endParaRPr>
+          </a:p>
+          <a:p>
+            <a:pPr algn="ctr">
+              <a:lnSpc>
+                <a:spcPct val="100000"/>
+              </a:lnSpc>
+            </a:pPr>
+            <a:r>
+              <a:rPr b="0" lang="en-US" sz="900" spc="-1" strike="noStrike">
+                <a:solidFill>
+                  <a:srgbClr val="78ffc8"/>
+                </a:solidFill>
+                <a:latin typeface="Consolas"/>
+                <a:ea typeface="DejaVu Sans"/>
+              </a:rPr>
+              <a:t>        </a:t>
+            </a:r>
+            <a:r>
+              <a:rPr b="0" lang="en-US" sz="900" spc="-1" strike="noStrike">
+                <a:solidFill>
+                  <a:srgbClr val="78ffc8"/>
+                </a:solidFill>
+                <a:latin typeface="Consolas"/>
+                <a:ea typeface="DejaVu Sans"/>
+              </a:rPr>
+              <a:t>int kalan = a % b;  // 1 (10'un 3'e bölümünden kalan)</a:t>
+            </a:r>
+            <a:endParaRPr b="0" lang="en-US" sz="900" spc="-1" strike="noStrike">
+              <a:solidFill>
+                <a:srgbClr val="ffffff"/>
+              </a:solidFill>
+              <a:latin typeface="Arial"/>
+            </a:endParaRPr>
+          </a:p>
+          <a:p>
+            <a:pPr algn="ctr">
+              <a:lnSpc>
+                <a:spcPct val="100000"/>
+              </a:lnSpc>
+            </a:pPr>
+            <a:r>
+              <a:rPr b="0" lang="en-US" sz="900" spc="-1" strike="noStrike">
+                <a:solidFill>
+                  <a:srgbClr val="78ffc8"/>
+                </a:solidFill>
+                <a:latin typeface="Consolas"/>
+                <a:ea typeface="DejaVu Sans"/>
+              </a:rPr>
+              <a:t>        </a:t>
+            </a:r>
+            <a:r>
+              <a:rPr b="0" lang="en-US" sz="900" spc="-1" strike="noStrike">
+                <a:solidFill>
+                  <a:srgbClr val="78ffc8"/>
+                </a:solidFill>
+                <a:latin typeface="Consolas"/>
+                <a:ea typeface="DejaVu Sans"/>
+              </a:rPr>
+              <a:t>// İşlem Önceliği</a:t>
+            </a:r>
+            <a:endParaRPr b="0" lang="en-US" sz="900" spc="-1" strike="noStrike">
+              <a:solidFill>
+                <a:srgbClr val="ffffff"/>
+              </a:solidFill>
+              <a:latin typeface="Arial"/>
+            </a:endParaRPr>
+          </a:p>
+          <a:p>
+            <a:pPr algn="ctr">
+              <a:lnSpc>
+                <a:spcPct val="100000"/>
+              </a:lnSpc>
+            </a:pPr>
+            <a:r>
+              <a:rPr b="0" lang="en-US" sz="900" spc="-1" strike="noStrike">
+                <a:solidFill>
+                  <a:srgbClr val="78ffc8"/>
+                </a:solidFill>
+                <a:latin typeface="Consolas"/>
+                <a:ea typeface="DejaVu Sans"/>
+              </a:rPr>
+              <a:t>        </a:t>
+            </a:r>
+            <a:r>
+              <a:rPr b="0" lang="en-US" sz="900" spc="-1" strike="noStrike">
+                <a:solidFill>
+                  <a:srgbClr val="78ffc8"/>
+                </a:solidFill>
+                <a:latin typeface="Consolas"/>
+                <a:ea typeface="DejaVu Sans"/>
+              </a:rPr>
+              <a:t>int islemsiz = a + b * 2;   // 16 (Önce çarpma)</a:t>
+            </a:r>
+            <a:endParaRPr b="0" lang="en-US" sz="900" spc="-1" strike="noStrike">
+              <a:solidFill>
+                <a:srgbClr val="ffffff"/>
+              </a:solidFill>
+              <a:latin typeface="Arial"/>
+            </a:endParaRPr>
+          </a:p>
+          <a:p>
+            <a:pPr algn="ctr">
+              <a:lnSpc>
+                <a:spcPct val="100000"/>
+              </a:lnSpc>
+            </a:pPr>
+            <a:r>
+              <a:rPr b="0" lang="en-US" sz="900" spc="-1" strike="noStrike">
+                <a:solidFill>
+                  <a:srgbClr val="78ffc8"/>
+                </a:solidFill>
+                <a:latin typeface="Consolas"/>
+                <a:ea typeface="DejaVu Sans"/>
+              </a:rPr>
+              <a:t>        </a:t>
+            </a:r>
+            <a:r>
+              <a:rPr b="0" lang="en-US" sz="900" spc="-1" strike="noStrike">
+                <a:solidFill>
+                  <a:srgbClr val="78ffc8"/>
+                </a:solidFill>
+                <a:latin typeface="Consolas"/>
+                <a:ea typeface="DejaVu Sans"/>
+              </a:rPr>
+              <a:t>int islemli = (a + b) * 2;  // 26 (Önce parantez)</a:t>
+            </a:r>
+            <a:endParaRPr b="0" lang="en-US" sz="900" spc="-1" strike="noStrike">
+              <a:solidFill>
+                <a:srgbClr val="ffffff"/>
+              </a:solidFill>
+              <a:latin typeface="Arial"/>
+            </a:endParaRPr>
+          </a:p>
+          <a:p>
+            <a:pPr algn="ctr">
+              <a:lnSpc>
+                <a:spcPct val="100000"/>
+              </a:lnSpc>
+            </a:pPr>
+            <a:r>
+              <a:rPr b="0" lang="en-US" sz="900" spc="-1" strike="noStrike">
+                <a:solidFill>
+                  <a:srgbClr val="78ffc8"/>
+                </a:solidFill>
+                <a:latin typeface="Consolas"/>
+                <a:ea typeface="DejaVu Sans"/>
+              </a:rPr>
+              <a:t>        </a:t>
+            </a:r>
+            <a:r>
+              <a:rPr b="0" lang="en-US" sz="900" spc="-1" strike="noStrike">
+                <a:solidFill>
+                  <a:srgbClr val="78ffc8"/>
+                </a:solidFill>
+                <a:latin typeface="Consolas"/>
+                <a:ea typeface="DejaVu Sans"/>
+              </a:rPr>
+              <a:t>// Artırma Operatörü (Increment)</a:t>
+            </a:r>
+            <a:endParaRPr b="0" lang="en-US" sz="900" spc="-1" strike="noStrike">
+              <a:solidFill>
+                <a:srgbClr val="ffffff"/>
+              </a:solidFill>
+              <a:latin typeface="Arial"/>
+            </a:endParaRPr>
+          </a:p>
+          <a:p>
+            <a:pPr algn="ctr">
+              <a:lnSpc>
+                <a:spcPct val="100000"/>
+              </a:lnSpc>
+            </a:pPr>
+            <a:r>
+              <a:rPr b="0" lang="en-US" sz="900" spc="-1" strike="noStrike">
+                <a:solidFill>
+                  <a:srgbClr val="78ffc8"/>
+                </a:solidFill>
+                <a:latin typeface="Consolas"/>
+                <a:ea typeface="DejaVu Sans"/>
+              </a:rPr>
+              <a:t>        </a:t>
+            </a:r>
+            <a:r>
+              <a:rPr b="0" lang="en-US" sz="900" spc="-1" strike="noStrike">
+                <a:solidFill>
+                  <a:srgbClr val="78ffc8"/>
+                </a:solidFill>
+                <a:latin typeface="Consolas"/>
+                <a:ea typeface="DejaVu Sans"/>
+              </a:rPr>
+              <a:t>int sayac = 5;</a:t>
+            </a:r>
+            <a:endParaRPr b="0" lang="en-US" sz="900" spc="-1" strike="noStrike">
+              <a:solidFill>
+                <a:srgbClr val="ffffff"/>
+              </a:solidFill>
+              <a:latin typeface="Arial"/>
+            </a:endParaRPr>
+          </a:p>
+          <a:p>
+            <a:pPr algn="ctr">
+              <a:lnSpc>
+                <a:spcPct val="100000"/>
+              </a:lnSpc>
+            </a:pPr>
+            <a:r>
+              <a:rPr b="0" lang="en-US" sz="900" spc="-1" strike="noStrike">
+                <a:solidFill>
+                  <a:srgbClr val="78ffc8"/>
+                </a:solidFill>
+                <a:latin typeface="Consolas"/>
+                <a:ea typeface="DejaVu Sans"/>
+              </a:rPr>
+              <a:t>        </a:t>
+            </a:r>
+            <a:r>
+              <a:rPr b="0" lang="en-US" sz="900" spc="-1" strike="noStrike">
+                <a:solidFill>
+                  <a:srgbClr val="78ffc8"/>
+                </a:solidFill>
+                <a:latin typeface="Consolas"/>
+                <a:ea typeface="DejaVu Sans"/>
+              </a:rPr>
+              <a:t>sayac++; // sayac'ın yeni değeri 6 oldu</a:t>
+            </a:r>
+            <a:endParaRPr b="0" lang="en-US" sz="900" spc="-1" strike="noStrike">
+              <a:solidFill>
+                <a:srgbClr val="ffffff"/>
+              </a:solidFill>
+              <a:latin typeface="Arial"/>
+            </a:endParaRPr>
+          </a:p>
+          <a:p>
+            <a:pPr algn="ctr">
+              <a:lnSpc>
+                <a:spcPct val="100000"/>
+              </a:lnSpc>
+            </a:pPr>
+            <a:r>
+              <a:rPr b="0" lang="en-US" sz="900" spc="-1" strike="noStrike">
+                <a:solidFill>
+                  <a:srgbClr val="78ffc8"/>
+                </a:solidFill>
+                <a:latin typeface="Consolas"/>
+                <a:ea typeface="DejaVu Sans"/>
+              </a:rPr>
+              <a:t>        </a:t>
+            </a:r>
+            <a:r>
+              <a:rPr b="0" lang="en-US" sz="900" spc="-1" strike="noStrike">
+                <a:solidFill>
+                  <a:srgbClr val="78ffc8"/>
+                </a:solidFill>
+                <a:latin typeface="Consolas"/>
+                <a:ea typeface="DejaVu Sans"/>
+              </a:rPr>
+              <a:t>System.out.println("Bölüm: " + bolum);</a:t>
+            </a:r>
+            <a:endParaRPr b="0" lang="en-US" sz="900" spc="-1" strike="noStrike">
+              <a:solidFill>
+                <a:srgbClr val="ffffff"/>
+              </a:solidFill>
+              <a:latin typeface="Arial"/>
+            </a:endParaRPr>
+          </a:p>
+          <a:p>
+            <a:pPr algn="ctr">
+              <a:lnSpc>
+                <a:spcPct val="100000"/>
+              </a:lnSpc>
+            </a:pPr>
+            <a:r>
+              <a:rPr b="0" lang="en-US" sz="900" spc="-1" strike="noStrike">
+                <a:solidFill>
+                  <a:srgbClr val="78ffc8"/>
+                </a:solidFill>
+                <a:latin typeface="Consolas"/>
+                <a:ea typeface="DejaVu Sans"/>
+              </a:rPr>
+              <a:t>        </a:t>
+            </a:r>
+            <a:r>
+              <a:rPr b="0" lang="en-US" sz="900" spc="-1" strike="noStrike">
+                <a:solidFill>
+                  <a:srgbClr val="78ffc8"/>
+                </a:solidFill>
+                <a:latin typeface="Consolas"/>
+                <a:ea typeface="DejaVu Sans"/>
+              </a:rPr>
+              <a:t>System.out.println("Mod (Kalan): " + kalan);</a:t>
+            </a:r>
+            <a:endParaRPr b="0" lang="en-US" sz="900" spc="-1" strike="noStrike">
+              <a:solidFill>
+                <a:srgbClr val="ffffff"/>
+              </a:solidFill>
+              <a:latin typeface="Arial"/>
+            </a:endParaRPr>
+          </a:p>
+          <a:p>
+            <a:pPr algn="ctr">
+              <a:lnSpc>
+                <a:spcPct val="100000"/>
+              </a:lnSpc>
+            </a:pPr>
+            <a:r>
+              <a:rPr b="0" lang="en-US" sz="900" spc="-1" strike="noStrike">
+                <a:solidFill>
+                  <a:srgbClr val="78ffc8"/>
+                </a:solidFill>
+                <a:latin typeface="Consolas"/>
+                <a:ea typeface="DejaVu Sans"/>
+              </a:rPr>
+              <a:t>        </a:t>
+            </a:r>
+            <a:r>
+              <a:rPr b="0" lang="en-US" sz="900" spc="-1" strike="noStrike">
+                <a:solidFill>
+                  <a:srgbClr val="78ffc8"/>
+                </a:solidFill>
+                <a:latin typeface="Consolas"/>
+                <a:ea typeface="DejaVu Sans"/>
+              </a:rPr>
+              <a:t>System.out.println("Sayaç: " + sayac);</a:t>
+            </a:r>
+            <a:endParaRPr b="0" lang="en-US" sz="900" spc="-1" strike="noStrike">
+              <a:solidFill>
+                <a:srgbClr val="ffffff"/>
+              </a:solidFill>
+              <a:latin typeface="Arial"/>
+            </a:endParaRPr>
+          </a:p>
+          <a:p>
+            <a:pPr algn="ctr">
+              <a:lnSpc>
+                <a:spcPct val="100000"/>
+              </a:lnSpc>
+            </a:pPr>
+            <a:r>
+              <a:rPr b="0" lang="en-US" sz="900" spc="-1" strike="noStrike">
+                <a:solidFill>
+                  <a:srgbClr val="78ffc8"/>
+                </a:solidFill>
+                <a:latin typeface="Consolas"/>
+                <a:ea typeface="DejaVu Sans"/>
+              </a:rPr>
+              <a:t>    </a:t>
+            </a:r>
+            <a:r>
+              <a:rPr b="0" lang="en-US" sz="900" spc="-1" strike="noStrike">
+                <a:solidFill>
+                  <a:srgbClr val="78ffc8"/>
+                </a:solidFill>
+                <a:latin typeface="Consolas"/>
+                <a:ea typeface="DejaVu Sans"/>
+              </a:rPr>
+              <a:t>}</a:t>
+            </a:r>
+            <a:endParaRPr b="0" lang="en-US" sz="900" spc="-1" strike="noStrike">
+              <a:solidFill>
+                <a:srgbClr val="ffffff"/>
+              </a:solidFill>
+              <a:latin typeface="Arial"/>
+            </a:endParaRPr>
+          </a:p>
+          <a:p>
+            <a:pPr algn="ctr">
+              <a:lnSpc>
+                <a:spcPct val="100000"/>
+              </a:lnSpc>
+            </a:pPr>
+            <a:r>
+              <a:rPr b="0" lang="en-US" sz="900" spc="-1" strike="noStrike">
+                <a:solidFill>
+                  <a:srgbClr val="78ffc8"/>
+                </a:solidFill>
+                <a:latin typeface="Consolas"/>
+                <a:ea typeface="DejaVu Sans"/>
+              </a:rPr>
+              <a:t>}</a:t>
+            </a:r>
+            <a:endParaRPr b="0" lang="en-US" sz="900" spc="-1" strike="noStrike">
+              <a:solidFill>
+                <a:srgbClr val="ffffff"/>
+              </a:solidFill>
+              <a:latin typeface="Arial"/>
+            </a:endParaRPr>
+          </a:p>
+        </p:txBody>
+      </p:sp>
+      <p:sp>
+        <p:nvSpPr>
+          <p:cNvPr id="274" name="TextBox 30"/>
           <p:cNvSpPr/>
           <p:nvPr/>
         </p:nvSpPr>

--- a/Java/Java #4/TR/Java #4.pptx
+++ b/Java/Java #4/TR/Java #4.pptx
@@ -14,6 +14,7 @@
     <p:sldId id="262" r:id="rId9"/>
     <p:sldId id="263" r:id="rId10"/>
     <p:sldId id="264" r:id="rId11"/>
+    <p:sldId id="265" r:id="rId12"/>
   </p:sldIdLst>
   <p:sldSz cx="9144000" cy="6858000"/>
   <p:notesSz cx="7772400" cy="10058400"/>
@@ -71,7 +72,7 @@
         <p:txBody>
           <a:bodyPr/>
           <a:p>
-            <a:fld id="{90A4F1A9-6680-4A7A-8DAA-A3229BFE61B3}" type="slidenum">
+            <a:fld id="{876465FC-4EB4-463A-B04E-BDAE1ABF9BBD}" type="slidenum">
               <a:t>&lt;#&gt;</a:t>
             </a:fld>
           </a:p>
@@ -280,7 +281,7 @@
         <p:txBody>
           <a:bodyPr/>
           <a:p>
-            <a:fld id="{8769EF85-4C7E-4FD5-A296-5A513A53A5CD}" type="slidenum">
+            <a:fld id="{BAFDFF68-30F2-4F2B-8149-16CA9DD98657}" type="slidenum">
               <a:t>&lt;#&gt;</a:t>
             </a:fld>
           </a:p>
@@ -575,7 +576,7 @@
         <p:txBody>
           <a:bodyPr/>
           <a:p>
-            <a:fld id="{C6C31CDE-D0A6-4450-B0B5-D5C2E62EDF76}" type="slidenum">
+            <a:fld id="{4107DA32-34B7-4339-A7C2-1B2D97036505}" type="slidenum">
               <a:t>&lt;#&gt;</a:t>
             </a:fld>
           </a:p>
@@ -956,7 +957,7 @@
         <p:txBody>
           <a:bodyPr/>
           <a:p>
-            <a:fld id="{7C86C56A-E079-4397-95F8-A5609B4CD2D3}" type="slidenum">
+            <a:fld id="{F929B28F-A611-4190-9DC8-D969EF9F44EC}" type="slidenum">
               <a:t>&lt;#&gt;</a:t>
             </a:fld>
           </a:p>
@@ -1119,7 +1120,7 @@
         <p:txBody>
           <a:bodyPr/>
           <a:p>
-            <a:fld id="{4B5FB84C-E1BB-467B-8E54-806869CE122C}" type="slidenum">
+            <a:fld id="{C8E6D648-746A-407F-A83A-CA408DDD5405}" type="slidenum">
               <a:t>&lt;#&gt;</a:t>
             </a:fld>
           </a:p>
@@ -1285,7 +1286,7 @@
         <p:txBody>
           <a:bodyPr/>
           <a:p>
-            <a:fld id="{B2D285B4-BB54-4B0F-A57A-AC6CE4FD471E}" type="slidenum">
+            <a:fld id="{D65D78F5-2EFC-4E52-A3E0-39699A32159F}" type="slidenum">
               <a:t>&lt;#&gt;</a:t>
             </a:fld>
           </a:p>
@@ -1494,7 +1495,7 @@
         <p:txBody>
           <a:bodyPr/>
           <a:p>
-            <a:fld id="{292542BC-3140-4864-A53D-94545D79EB74}" type="slidenum">
+            <a:fld id="{9F0206CA-451D-48BB-8262-C1B42A24BE5B}" type="slidenum">
               <a:t>&lt;#&gt;</a:t>
             </a:fld>
           </a:p>
@@ -1617,7 +1618,7 @@
         <p:txBody>
           <a:bodyPr/>
           <a:p>
-            <a:fld id="{393A55C6-EFBD-403C-B196-3D9CBFC6ABB2}" type="slidenum">
+            <a:fld id="{6C61DA5E-5DE7-4F73-BE7E-AF7BD7F8F9AE}" type="slidenum">
               <a:t>&lt;#&gt;</a:t>
             </a:fld>
           </a:p>
@@ -1738,7 +1739,7 @@
         <p:txBody>
           <a:bodyPr/>
           <a:p>
-            <a:fld id="{D57EE482-835E-4FB9-B244-5339A37A1837}" type="slidenum">
+            <a:fld id="{1F01B6C7-1295-49CB-9E1B-C314EA28DC51}" type="slidenum">
               <a:t>&lt;#&gt;</a:t>
             </a:fld>
           </a:p>
@@ -1990,7 +1991,7 @@
         <p:txBody>
           <a:bodyPr/>
           <a:p>
-            <a:fld id="{20377F3F-1D39-498C-9136-30148ABF5DC9}" type="slidenum">
+            <a:fld id="{61A016C1-EEEA-435B-92C2-A90E53AF24CF}" type="slidenum">
               <a:t>&lt;#&gt;</a:t>
             </a:fld>
           </a:p>
@@ -2242,7 +2243,7 @@
         <p:txBody>
           <a:bodyPr/>
           <a:p>
-            <a:fld id="{B41D8123-92D7-4DF8-8676-C15ED8F660CC}" type="slidenum">
+            <a:fld id="{68F2C2EF-FA4C-47F9-8BDE-E598CA400CDD}" type="slidenum">
               <a:t>&lt;#&gt;</a:t>
             </a:fld>
           </a:p>
@@ -2494,7 +2495,7 @@
         <p:txBody>
           <a:bodyPr/>
           <a:p>
-            <a:fld id="{B39C71E0-4E19-4D21-BA1C-5CDFF6F4E9E2}" type="slidenum">
+            <a:fld id="{0DEAA288-23CE-47C4-93D2-1D87A9A47690}" type="slidenum">
               <a:t>&lt;#&gt;</a:t>
             </a:fld>
           </a:p>
@@ -2563,7 +2564,7 @@
         <p:spPr>
           <a:xfrm>
             <a:off x="3124080" y="6356520"/>
-            <a:ext cx="2891160" cy="360720"/>
+            <a:ext cx="2890800" cy="360360"/>
           </a:xfrm>
           <a:prstGeom prst="rect">
             <a:avLst/>
@@ -2635,7 +2636,7 @@
         <p:spPr>
           <a:xfrm>
             <a:off x="6553080" y="6356520"/>
-            <a:ext cx="2129400" cy="360720"/>
+            <a:ext cx="2129040" cy="360360"/>
           </a:xfrm>
           <a:prstGeom prst="rect">
             <a:avLst/>
@@ -2676,7 +2677,7 @@
                 <a:tab algn="l" pos="0"/>
               </a:tabLst>
             </a:pPr>
-            <a:fld id="{BDE87841-B79F-4071-9FA7-EFEA7C78C69F}" type="slidenum">
+            <a:fld id="{C38CA5F1-6299-4A76-9B31-C3B8851694DE}" type="slidenum">
               <a:rPr b="0" lang="en-US" sz="1200" spc="-1" strike="noStrike">
                 <a:solidFill>
                   <a:srgbClr val="8b8b8b"/>
@@ -2707,7 +2708,7 @@
         <p:spPr>
           <a:xfrm>
             <a:off x="457200" y="6356520"/>
-            <a:ext cx="2129400" cy="360720"/>
+            <a:ext cx="2129040" cy="360360"/>
           </a:xfrm>
           <a:prstGeom prst="rect">
             <a:avLst/>
@@ -3074,7 +3075,7 @@
         <p:spPr>
           <a:xfrm>
             <a:off x="0" y="0"/>
-            <a:ext cx="12184560" cy="6853680"/>
+            <a:ext cx="12184200" cy="6853320"/>
           </a:xfrm>
           <a:prstGeom prst="rect">
             <a:avLst/>
@@ -3134,7 +3135,7 @@
         <p:spPr>
           <a:xfrm>
             <a:off x="0" y="0"/>
-            <a:ext cx="14040" cy="6853680"/>
+            <a:ext cx="13680" cy="6853320"/>
           </a:xfrm>
           <a:prstGeom prst="rect">
             <a:avLst/>
@@ -3194,7 +3195,7 @@
         <p:spPr>
           <a:xfrm>
             <a:off x="914400" y="0"/>
-            <a:ext cx="14040" cy="6853680"/>
+            <a:ext cx="13680" cy="6853320"/>
           </a:xfrm>
           <a:prstGeom prst="rect">
             <a:avLst/>
@@ -3254,7 +3255,7 @@
         <p:spPr>
           <a:xfrm>
             <a:off x="1828800" y="0"/>
-            <a:ext cx="14040" cy="6853680"/>
+            <a:ext cx="13680" cy="6853320"/>
           </a:xfrm>
           <a:prstGeom prst="rect">
             <a:avLst/>
@@ -3314,7 +3315,7 @@
         <p:spPr>
           <a:xfrm>
             <a:off x="2743200" y="0"/>
-            <a:ext cx="14040" cy="6853680"/>
+            <a:ext cx="13680" cy="6853320"/>
           </a:xfrm>
           <a:prstGeom prst="rect">
             <a:avLst/>
@@ -3374,7 +3375,7 @@
         <p:spPr>
           <a:xfrm>
             <a:off x="3657600" y="0"/>
-            <a:ext cx="14040" cy="6853680"/>
+            <a:ext cx="13680" cy="6853320"/>
           </a:xfrm>
           <a:prstGeom prst="rect">
             <a:avLst/>
@@ -3434,7 +3435,7 @@
         <p:spPr>
           <a:xfrm>
             <a:off x="4572000" y="0"/>
-            <a:ext cx="14040" cy="6853680"/>
+            <a:ext cx="13680" cy="6853320"/>
           </a:xfrm>
           <a:prstGeom prst="rect">
             <a:avLst/>
@@ -3494,7 +3495,7 @@
         <p:spPr>
           <a:xfrm>
             <a:off x="5486400" y="0"/>
-            <a:ext cx="14040" cy="6853680"/>
+            <a:ext cx="13680" cy="6853320"/>
           </a:xfrm>
           <a:prstGeom prst="rect">
             <a:avLst/>
@@ -3554,7 +3555,7 @@
         <p:spPr>
           <a:xfrm>
             <a:off x="6400800" y="0"/>
-            <a:ext cx="14040" cy="6853680"/>
+            <a:ext cx="13680" cy="6853320"/>
           </a:xfrm>
           <a:prstGeom prst="rect">
             <a:avLst/>
@@ -3614,7 +3615,7 @@
         <p:spPr>
           <a:xfrm>
             <a:off x="7315200" y="0"/>
-            <a:ext cx="14040" cy="6853680"/>
+            <a:ext cx="13680" cy="6853320"/>
           </a:xfrm>
           <a:prstGeom prst="rect">
             <a:avLst/>
@@ -3674,7 +3675,7 @@
         <p:spPr>
           <a:xfrm>
             <a:off x="8229600" y="0"/>
-            <a:ext cx="14040" cy="6853680"/>
+            <a:ext cx="13680" cy="6853320"/>
           </a:xfrm>
           <a:prstGeom prst="rect">
             <a:avLst/>
@@ -3734,7 +3735,7 @@
         <p:spPr>
           <a:xfrm>
             <a:off x="9144000" y="0"/>
-            <a:ext cx="14040" cy="6853680"/>
+            <a:ext cx="13680" cy="6853320"/>
           </a:xfrm>
           <a:prstGeom prst="rect">
             <a:avLst/>
@@ -3794,7 +3795,7 @@
         <p:spPr>
           <a:xfrm>
             <a:off x="10058400" y="0"/>
-            <a:ext cx="14040" cy="6853680"/>
+            <a:ext cx="13680" cy="6853320"/>
           </a:xfrm>
           <a:prstGeom prst="rect">
             <a:avLst/>
@@ -3854,7 +3855,7 @@
         <p:spPr>
           <a:xfrm>
             <a:off x="10972800" y="0"/>
-            <a:ext cx="14040" cy="6853680"/>
+            <a:ext cx="13680" cy="6853320"/>
           </a:xfrm>
           <a:prstGeom prst="rect">
             <a:avLst/>
@@ -3914,7 +3915,7 @@
         <p:spPr>
           <a:xfrm>
             <a:off x="11887200" y="0"/>
-            <a:ext cx="14040" cy="6853680"/>
+            <a:ext cx="13680" cy="6853320"/>
           </a:xfrm>
           <a:prstGeom prst="rect">
             <a:avLst/>
@@ -3974,7 +3975,7 @@
         <p:spPr>
           <a:xfrm>
             <a:off x="0" y="0"/>
-            <a:ext cx="315720" cy="6853680"/>
+            <a:ext cx="315360" cy="6853320"/>
           </a:xfrm>
           <a:prstGeom prst="rect">
             <a:avLst/>
@@ -4034,7 +4035,7 @@
         <p:spPr>
           <a:xfrm>
             <a:off x="9875520" y="365760"/>
-            <a:ext cx="2007360" cy="498600"/>
+            <a:ext cx="2007000" cy="498240"/>
           </a:xfrm>
           <a:prstGeom prst="roundRect">
             <a:avLst>
@@ -4285,7 +4286,7 @@
         <p:spPr>
           <a:xfrm>
             <a:off x="987480" y="3182040"/>
-            <a:ext cx="3287520" cy="2738880"/>
+            <a:ext cx="3287160" cy="2738520"/>
           </a:xfrm>
           <a:prstGeom prst="roundRect">
             <a:avLst>
@@ -4347,7 +4348,7 @@
         <p:spPr>
           <a:xfrm>
             <a:off x="914400" y="3108960"/>
-            <a:ext cx="3287520" cy="2738880"/>
+            <a:ext cx="3287160" cy="2738520"/>
           </a:xfrm>
           <a:prstGeom prst="roundRect">
             <a:avLst>
@@ -4481,7 +4482,7 @@
         <p:spPr>
           <a:xfrm>
             <a:off x="4507920" y="3182040"/>
-            <a:ext cx="3287520" cy="2738880"/>
+            <a:ext cx="3287160" cy="2738520"/>
           </a:xfrm>
           <a:prstGeom prst="roundRect">
             <a:avLst>
@@ -4543,7 +4544,7 @@
         <p:spPr>
           <a:xfrm>
             <a:off x="4434840" y="3108960"/>
-            <a:ext cx="3287520" cy="2738880"/>
+            <a:ext cx="3287160" cy="2738520"/>
           </a:xfrm>
           <a:prstGeom prst="roundRect">
             <a:avLst>
@@ -4801,7 +4802,7 @@
         <p:spPr>
           <a:xfrm>
             <a:off x="8028360" y="3182040"/>
-            <a:ext cx="3287520" cy="2738880"/>
+            <a:ext cx="3287160" cy="2738520"/>
           </a:xfrm>
           <a:prstGeom prst="roundRect">
             <a:avLst>
@@ -4863,7 +4864,7 @@
         <p:spPr>
           <a:xfrm>
             <a:off x="7955280" y="2971800"/>
-            <a:ext cx="3928680" cy="3654360"/>
+            <a:ext cx="3928320" cy="3654000"/>
           </a:xfrm>
           <a:prstGeom prst="roundRect">
             <a:avLst>
@@ -5284,6 +5285,2570 @@
       <p:sp>
         <p:nvSpPr>
           <p:cNvPr id="66" name="TextBox 26"/>
+          <p:cNvSpPr/>
+          <p:nvPr/>
+        </p:nvSpPr>
+        <p:spPr>
+          <a:xfrm>
+            <a:off x="4600080" y="6446520"/>
+            <a:ext cx="3051000" cy="363960"/>
+          </a:xfrm>
+          <a:prstGeom prst="rect">
+            <a:avLst/>
+          </a:prstGeom>
+          <a:noFill/>
+          <a:ln w="0">
+            <a:noFill/>
+          </a:ln>
+        </p:spPr>
+        <p:style>
+          <a:lnRef idx="0"/>
+          <a:fillRef idx="0"/>
+          <a:effectRef idx="0"/>
+          <a:fontRef idx="minor"/>
+        </p:style>
+        <p:txBody>
+          <a:bodyPr wrap="none" lIns="90000" rIns="90000" tIns="45000" bIns="45000" anchor="t">
+            <a:spAutoFit/>
+          </a:bodyPr>
+          <a:p>
+            <a:pPr>
+              <a:lnSpc>
+                <a:spcPct val="100000"/>
+              </a:lnSpc>
+            </a:pPr>
+            <a:r>
+              <a:rPr b="0" lang="en-US" sz="1800" spc="-1" strike="noStrike">
+                <a:solidFill>
+                  <a:srgbClr val="000000"/>
+                </a:solidFill>
+                <a:latin typeface="Calibri"/>
+                <a:ea typeface="DejaVu Sans"/>
+              </a:rPr>
+              <a:t>Java • Ultra Premium Template</a:t>
+            </a:r>
+            <a:endParaRPr b="0" lang="en-US" sz="1800" spc="-1" strike="noStrike">
+              <a:solidFill>
+                <a:srgbClr val="000000"/>
+              </a:solidFill>
+              <a:latin typeface="Arial"/>
+            </a:endParaRPr>
+          </a:p>
+        </p:txBody>
+      </p:sp>
+    </p:spTree>
+  </p:cSld>
+  <mc:AlternateContent>
+    <mc:Choice Requires="p14">
+      <p:transition spd="slow" p14:dur="2000"/>
+    </mc:Choice>
+    <mc:Fallback>
+      <p:transition spd="slow"/>
+    </mc:Fallback>
+  </mc:AlternateContent>
+</p:sld>
+</file>
+
+<file path=ppt/slides/slide10.xml><?xml version="1.0" encoding="utf-8"?>
+<p:sld xmlns:a="http://schemas.openxmlformats.org/drawingml/2006/main" xmlns:p="http://schemas.openxmlformats.org/presentationml/2006/main" xmlns:r="http://schemas.openxmlformats.org/officeDocument/2006/relationships" xmlns:p14="http://schemas.microsoft.com/office/powerpoint/2010/main" xmlns:p15="http://schemas.microsoft.com/office/powerpoint/2012/main" xmlns:mc="http://schemas.openxmlformats.org/markup-compatibility/2006">
+  <p:cSld>
+    <p:spTree>
+      <p:nvGrpSpPr>
+        <p:cNvPr id="1" name=""/>
+        <p:cNvGrpSpPr/>
+        <p:nvPr/>
+      </p:nvGrpSpPr>
+      <p:grpSpPr>
+        <a:xfrm>
+          <a:off x="0" y="0"/>
+          <a:ext cx="0" cy="0"/>
+          <a:chOff x="0" y="0"/>
+          <a:chExt cx="0" cy="0"/>
+        </a:xfrm>
+      </p:grpSpPr>
+      <p:sp>
+        <p:nvSpPr>
+          <p:cNvPr id="275" name="Rectangle 145"/>
+          <p:cNvSpPr/>
+          <p:nvPr/>
+        </p:nvSpPr>
+        <p:spPr>
+          <a:xfrm>
+            <a:off x="0" y="0"/>
+            <a:ext cx="12184560" cy="6853680"/>
+          </a:xfrm>
+          <a:prstGeom prst="rect">
+            <a:avLst/>
+          </a:prstGeom>
+          <a:solidFill>
+            <a:srgbClr val="0b0b0d"/>
+          </a:solidFill>
+          <a:ln>
+            <a:noFill/>
+          </a:ln>
+          <a:effectLst>
+            <a:outerShdw blurRad="39960" dir="5400000" dist="23040" rotWithShape="0">
+              <a:srgbClr val="000000">
+                <a:alpha val="35000"/>
+              </a:srgbClr>
+            </a:outerShdw>
+          </a:effectLst>
+        </p:spPr>
+        <p:style>
+          <a:lnRef idx="1">
+            <a:schemeClr val="accent1"/>
+          </a:lnRef>
+          <a:fillRef idx="3">
+            <a:schemeClr val="accent1"/>
+          </a:fillRef>
+          <a:effectRef idx="2">
+            <a:schemeClr val="accent1"/>
+          </a:effectRef>
+          <a:fontRef idx="minor"/>
+        </p:style>
+        <p:txBody>
+          <a:bodyPr lIns="90000" rIns="90000" tIns="45000" bIns="45000" anchor="ctr">
+            <a:noAutofit/>
+          </a:bodyPr>
+          <a:p>
+            <a:endParaRPr b="0" lang="en-US" sz="1800" spc="-1" strike="noStrike">
+              <a:solidFill>
+                <a:schemeClr val="lt1"/>
+              </a:solidFill>
+              <a:latin typeface="Calibri"/>
+              <a:ea typeface="DejaVu Sans"/>
+            </a:endParaRPr>
+          </a:p>
+        </p:txBody>
+      </p:sp>
+      <p:sp>
+        <p:nvSpPr>
+          <p:cNvPr id="276" name="Rectangle 146"/>
+          <p:cNvSpPr/>
+          <p:nvPr/>
+        </p:nvSpPr>
+        <p:spPr>
+          <a:xfrm>
+            <a:off x="0" y="0"/>
+            <a:ext cx="14040" cy="6853680"/>
+          </a:xfrm>
+          <a:prstGeom prst="rect">
+            <a:avLst/>
+          </a:prstGeom>
+          <a:solidFill>
+            <a:srgbClr val="121216"/>
+          </a:solidFill>
+          <a:ln>
+            <a:noFill/>
+          </a:ln>
+          <a:effectLst>
+            <a:outerShdw blurRad="39960" dir="5400000" dist="23040" rotWithShape="0">
+              <a:srgbClr val="000000">
+                <a:alpha val="35000"/>
+              </a:srgbClr>
+            </a:outerShdw>
+          </a:effectLst>
+        </p:spPr>
+        <p:style>
+          <a:lnRef idx="1">
+            <a:schemeClr val="accent1"/>
+          </a:lnRef>
+          <a:fillRef idx="3">
+            <a:schemeClr val="accent1"/>
+          </a:fillRef>
+          <a:effectRef idx="2">
+            <a:schemeClr val="accent1"/>
+          </a:effectRef>
+          <a:fontRef idx="minor"/>
+        </p:style>
+        <p:txBody>
+          <a:bodyPr lIns="90000" rIns="90000" tIns="45000" bIns="45000" anchor="ctr">
+            <a:noAutofit/>
+          </a:bodyPr>
+          <a:p>
+            <a:endParaRPr b="0" lang="en-US" sz="1800" spc="-1" strike="noStrike">
+              <a:solidFill>
+                <a:schemeClr val="lt1"/>
+              </a:solidFill>
+              <a:latin typeface="Calibri"/>
+              <a:ea typeface="DejaVu Sans"/>
+            </a:endParaRPr>
+          </a:p>
+        </p:txBody>
+      </p:sp>
+      <p:sp>
+        <p:nvSpPr>
+          <p:cNvPr id="277" name="Rectangle 147"/>
+          <p:cNvSpPr/>
+          <p:nvPr/>
+        </p:nvSpPr>
+        <p:spPr>
+          <a:xfrm>
+            <a:off x="914400" y="0"/>
+            <a:ext cx="14040" cy="6853680"/>
+          </a:xfrm>
+          <a:prstGeom prst="rect">
+            <a:avLst/>
+          </a:prstGeom>
+          <a:solidFill>
+            <a:srgbClr val="121216"/>
+          </a:solidFill>
+          <a:ln>
+            <a:noFill/>
+          </a:ln>
+          <a:effectLst>
+            <a:outerShdw blurRad="39960" dir="5400000" dist="23040" rotWithShape="0">
+              <a:srgbClr val="000000">
+                <a:alpha val="35000"/>
+              </a:srgbClr>
+            </a:outerShdw>
+          </a:effectLst>
+        </p:spPr>
+        <p:style>
+          <a:lnRef idx="1">
+            <a:schemeClr val="accent1"/>
+          </a:lnRef>
+          <a:fillRef idx="3">
+            <a:schemeClr val="accent1"/>
+          </a:fillRef>
+          <a:effectRef idx="2">
+            <a:schemeClr val="accent1"/>
+          </a:effectRef>
+          <a:fontRef idx="minor"/>
+        </p:style>
+        <p:txBody>
+          <a:bodyPr lIns="90000" rIns="90000" tIns="45000" bIns="45000" anchor="ctr">
+            <a:noAutofit/>
+          </a:bodyPr>
+          <a:p>
+            <a:endParaRPr b="0" lang="en-US" sz="1800" spc="-1" strike="noStrike">
+              <a:solidFill>
+                <a:schemeClr val="lt1"/>
+              </a:solidFill>
+              <a:latin typeface="Calibri"/>
+              <a:ea typeface="DejaVu Sans"/>
+            </a:endParaRPr>
+          </a:p>
+        </p:txBody>
+      </p:sp>
+      <p:sp>
+        <p:nvSpPr>
+          <p:cNvPr id="278" name="Rectangle 148"/>
+          <p:cNvSpPr/>
+          <p:nvPr/>
+        </p:nvSpPr>
+        <p:spPr>
+          <a:xfrm>
+            <a:off x="1828800" y="0"/>
+            <a:ext cx="14040" cy="6853680"/>
+          </a:xfrm>
+          <a:prstGeom prst="rect">
+            <a:avLst/>
+          </a:prstGeom>
+          <a:solidFill>
+            <a:srgbClr val="121216"/>
+          </a:solidFill>
+          <a:ln>
+            <a:noFill/>
+          </a:ln>
+          <a:effectLst>
+            <a:outerShdw blurRad="39960" dir="5400000" dist="23040" rotWithShape="0">
+              <a:srgbClr val="000000">
+                <a:alpha val="35000"/>
+              </a:srgbClr>
+            </a:outerShdw>
+          </a:effectLst>
+        </p:spPr>
+        <p:style>
+          <a:lnRef idx="1">
+            <a:schemeClr val="accent1"/>
+          </a:lnRef>
+          <a:fillRef idx="3">
+            <a:schemeClr val="accent1"/>
+          </a:fillRef>
+          <a:effectRef idx="2">
+            <a:schemeClr val="accent1"/>
+          </a:effectRef>
+          <a:fontRef idx="minor"/>
+        </p:style>
+        <p:txBody>
+          <a:bodyPr lIns="90000" rIns="90000" tIns="45000" bIns="45000" anchor="ctr">
+            <a:noAutofit/>
+          </a:bodyPr>
+          <a:p>
+            <a:endParaRPr b="0" lang="en-US" sz="1800" spc="-1" strike="noStrike">
+              <a:solidFill>
+                <a:schemeClr val="lt1"/>
+              </a:solidFill>
+              <a:latin typeface="Calibri"/>
+              <a:ea typeface="DejaVu Sans"/>
+            </a:endParaRPr>
+          </a:p>
+        </p:txBody>
+      </p:sp>
+      <p:sp>
+        <p:nvSpPr>
+          <p:cNvPr id="279" name="Rectangle 149"/>
+          <p:cNvSpPr/>
+          <p:nvPr/>
+        </p:nvSpPr>
+        <p:spPr>
+          <a:xfrm>
+            <a:off x="2743200" y="0"/>
+            <a:ext cx="14040" cy="6853680"/>
+          </a:xfrm>
+          <a:prstGeom prst="rect">
+            <a:avLst/>
+          </a:prstGeom>
+          <a:solidFill>
+            <a:srgbClr val="121216"/>
+          </a:solidFill>
+          <a:ln>
+            <a:noFill/>
+          </a:ln>
+          <a:effectLst>
+            <a:outerShdw blurRad="39960" dir="5400000" dist="23040" rotWithShape="0">
+              <a:srgbClr val="000000">
+                <a:alpha val="35000"/>
+              </a:srgbClr>
+            </a:outerShdw>
+          </a:effectLst>
+        </p:spPr>
+        <p:style>
+          <a:lnRef idx="1">
+            <a:schemeClr val="accent1"/>
+          </a:lnRef>
+          <a:fillRef idx="3">
+            <a:schemeClr val="accent1"/>
+          </a:fillRef>
+          <a:effectRef idx="2">
+            <a:schemeClr val="accent1"/>
+          </a:effectRef>
+          <a:fontRef idx="minor"/>
+        </p:style>
+        <p:txBody>
+          <a:bodyPr lIns="90000" rIns="90000" tIns="45000" bIns="45000" anchor="ctr">
+            <a:noAutofit/>
+          </a:bodyPr>
+          <a:p>
+            <a:endParaRPr b="0" lang="en-US" sz="1800" spc="-1" strike="noStrike">
+              <a:solidFill>
+                <a:schemeClr val="lt1"/>
+              </a:solidFill>
+              <a:latin typeface="Calibri"/>
+              <a:ea typeface="DejaVu Sans"/>
+            </a:endParaRPr>
+          </a:p>
+        </p:txBody>
+      </p:sp>
+      <p:sp>
+        <p:nvSpPr>
+          <p:cNvPr id="280" name="Rectangle 150"/>
+          <p:cNvSpPr/>
+          <p:nvPr/>
+        </p:nvSpPr>
+        <p:spPr>
+          <a:xfrm>
+            <a:off x="3657600" y="0"/>
+            <a:ext cx="14040" cy="6853680"/>
+          </a:xfrm>
+          <a:prstGeom prst="rect">
+            <a:avLst/>
+          </a:prstGeom>
+          <a:solidFill>
+            <a:srgbClr val="121216"/>
+          </a:solidFill>
+          <a:ln>
+            <a:noFill/>
+          </a:ln>
+          <a:effectLst>
+            <a:outerShdw blurRad="39960" dir="5400000" dist="23040" rotWithShape="0">
+              <a:srgbClr val="000000">
+                <a:alpha val="35000"/>
+              </a:srgbClr>
+            </a:outerShdw>
+          </a:effectLst>
+        </p:spPr>
+        <p:style>
+          <a:lnRef idx="1">
+            <a:schemeClr val="accent1"/>
+          </a:lnRef>
+          <a:fillRef idx="3">
+            <a:schemeClr val="accent1"/>
+          </a:fillRef>
+          <a:effectRef idx="2">
+            <a:schemeClr val="accent1"/>
+          </a:effectRef>
+          <a:fontRef idx="minor"/>
+        </p:style>
+        <p:txBody>
+          <a:bodyPr lIns="90000" rIns="90000" tIns="45000" bIns="45000" anchor="ctr">
+            <a:noAutofit/>
+          </a:bodyPr>
+          <a:p>
+            <a:endParaRPr b="0" lang="en-US" sz="1800" spc="-1" strike="noStrike">
+              <a:solidFill>
+                <a:schemeClr val="lt1"/>
+              </a:solidFill>
+              <a:latin typeface="Calibri"/>
+              <a:ea typeface="DejaVu Sans"/>
+            </a:endParaRPr>
+          </a:p>
+        </p:txBody>
+      </p:sp>
+      <p:sp>
+        <p:nvSpPr>
+          <p:cNvPr id="281" name="Rectangle 151"/>
+          <p:cNvSpPr/>
+          <p:nvPr/>
+        </p:nvSpPr>
+        <p:spPr>
+          <a:xfrm>
+            <a:off x="4572000" y="0"/>
+            <a:ext cx="14040" cy="6853680"/>
+          </a:xfrm>
+          <a:prstGeom prst="rect">
+            <a:avLst/>
+          </a:prstGeom>
+          <a:solidFill>
+            <a:srgbClr val="121216"/>
+          </a:solidFill>
+          <a:ln>
+            <a:noFill/>
+          </a:ln>
+          <a:effectLst>
+            <a:outerShdw blurRad="39960" dir="5400000" dist="23040" rotWithShape="0">
+              <a:srgbClr val="000000">
+                <a:alpha val="35000"/>
+              </a:srgbClr>
+            </a:outerShdw>
+          </a:effectLst>
+        </p:spPr>
+        <p:style>
+          <a:lnRef idx="1">
+            <a:schemeClr val="accent1"/>
+          </a:lnRef>
+          <a:fillRef idx="3">
+            <a:schemeClr val="accent1"/>
+          </a:fillRef>
+          <a:effectRef idx="2">
+            <a:schemeClr val="accent1"/>
+          </a:effectRef>
+          <a:fontRef idx="minor"/>
+        </p:style>
+        <p:txBody>
+          <a:bodyPr lIns="90000" rIns="90000" tIns="45000" bIns="45000" anchor="ctr">
+            <a:noAutofit/>
+          </a:bodyPr>
+          <a:p>
+            <a:endParaRPr b="0" lang="en-US" sz="1800" spc="-1" strike="noStrike">
+              <a:solidFill>
+                <a:schemeClr val="lt1"/>
+              </a:solidFill>
+              <a:latin typeface="Calibri"/>
+              <a:ea typeface="DejaVu Sans"/>
+            </a:endParaRPr>
+          </a:p>
+        </p:txBody>
+      </p:sp>
+      <p:sp>
+        <p:nvSpPr>
+          <p:cNvPr id="282" name="Rectangle 152"/>
+          <p:cNvSpPr/>
+          <p:nvPr/>
+        </p:nvSpPr>
+        <p:spPr>
+          <a:xfrm>
+            <a:off x="5486400" y="0"/>
+            <a:ext cx="14040" cy="6853680"/>
+          </a:xfrm>
+          <a:prstGeom prst="rect">
+            <a:avLst/>
+          </a:prstGeom>
+          <a:solidFill>
+            <a:srgbClr val="121216"/>
+          </a:solidFill>
+          <a:ln>
+            <a:noFill/>
+          </a:ln>
+          <a:effectLst>
+            <a:outerShdw blurRad="39960" dir="5400000" dist="23040" rotWithShape="0">
+              <a:srgbClr val="000000">
+                <a:alpha val="35000"/>
+              </a:srgbClr>
+            </a:outerShdw>
+          </a:effectLst>
+        </p:spPr>
+        <p:style>
+          <a:lnRef idx="1">
+            <a:schemeClr val="accent1"/>
+          </a:lnRef>
+          <a:fillRef idx="3">
+            <a:schemeClr val="accent1"/>
+          </a:fillRef>
+          <a:effectRef idx="2">
+            <a:schemeClr val="accent1"/>
+          </a:effectRef>
+          <a:fontRef idx="minor"/>
+        </p:style>
+        <p:txBody>
+          <a:bodyPr lIns="90000" rIns="90000" tIns="45000" bIns="45000" anchor="ctr">
+            <a:noAutofit/>
+          </a:bodyPr>
+          <a:p>
+            <a:endParaRPr b="0" lang="en-US" sz="1800" spc="-1" strike="noStrike">
+              <a:solidFill>
+                <a:schemeClr val="lt1"/>
+              </a:solidFill>
+              <a:latin typeface="Calibri"/>
+              <a:ea typeface="DejaVu Sans"/>
+            </a:endParaRPr>
+          </a:p>
+        </p:txBody>
+      </p:sp>
+      <p:sp>
+        <p:nvSpPr>
+          <p:cNvPr id="283" name="Rectangle 153"/>
+          <p:cNvSpPr/>
+          <p:nvPr/>
+        </p:nvSpPr>
+        <p:spPr>
+          <a:xfrm>
+            <a:off x="6400800" y="0"/>
+            <a:ext cx="14040" cy="6853680"/>
+          </a:xfrm>
+          <a:prstGeom prst="rect">
+            <a:avLst/>
+          </a:prstGeom>
+          <a:solidFill>
+            <a:srgbClr val="121216"/>
+          </a:solidFill>
+          <a:ln>
+            <a:noFill/>
+          </a:ln>
+          <a:effectLst>
+            <a:outerShdw blurRad="39960" dir="5400000" dist="23040" rotWithShape="0">
+              <a:srgbClr val="000000">
+                <a:alpha val="35000"/>
+              </a:srgbClr>
+            </a:outerShdw>
+          </a:effectLst>
+        </p:spPr>
+        <p:style>
+          <a:lnRef idx="1">
+            <a:schemeClr val="accent1"/>
+          </a:lnRef>
+          <a:fillRef idx="3">
+            <a:schemeClr val="accent1"/>
+          </a:fillRef>
+          <a:effectRef idx="2">
+            <a:schemeClr val="accent1"/>
+          </a:effectRef>
+          <a:fontRef idx="minor"/>
+        </p:style>
+        <p:txBody>
+          <a:bodyPr lIns="90000" rIns="90000" tIns="45000" bIns="45000" anchor="ctr">
+            <a:noAutofit/>
+          </a:bodyPr>
+          <a:p>
+            <a:endParaRPr b="0" lang="en-US" sz="1800" spc="-1" strike="noStrike">
+              <a:solidFill>
+                <a:schemeClr val="lt1"/>
+              </a:solidFill>
+              <a:latin typeface="Calibri"/>
+              <a:ea typeface="DejaVu Sans"/>
+            </a:endParaRPr>
+          </a:p>
+        </p:txBody>
+      </p:sp>
+      <p:sp>
+        <p:nvSpPr>
+          <p:cNvPr id="284" name="Rectangle 154"/>
+          <p:cNvSpPr/>
+          <p:nvPr/>
+        </p:nvSpPr>
+        <p:spPr>
+          <a:xfrm>
+            <a:off x="7315200" y="0"/>
+            <a:ext cx="14040" cy="6853680"/>
+          </a:xfrm>
+          <a:prstGeom prst="rect">
+            <a:avLst/>
+          </a:prstGeom>
+          <a:solidFill>
+            <a:srgbClr val="121216"/>
+          </a:solidFill>
+          <a:ln>
+            <a:noFill/>
+          </a:ln>
+          <a:effectLst>
+            <a:outerShdw blurRad="39960" dir="5400000" dist="23040" rotWithShape="0">
+              <a:srgbClr val="000000">
+                <a:alpha val="35000"/>
+              </a:srgbClr>
+            </a:outerShdw>
+          </a:effectLst>
+        </p:spPr>
+        <p:style>
+          <a:lnRef idx="1">
+            <a:schemeClr val="accent1"/>
+          </a:lnRef>
+          <a:fillRef idx="3">
+            <a:schemeClr val="accent1"/>
+          </a:fillRef>
+          <a:effectRef idx="2">
+            <a:schemeClr val="accent1"/>
+          </a:effectRef>
+          <a:fontRef idx="minor"/>
+        </p:style>
+        <p:txBody>
+          <a:bodyPr lIns="90000" rIns="90000" tIns="45000" bIns="45000" anchor="ctr">
+            <a:noAutofit/>
+          </a:bodyPr>
+          <a:p>
+            <a:endParaRPr b="0" lang="en-US" sz="1800" spc="-1" strike="noStrike">
+              <a:solidFill>
+                <a:schemeClr val="lt1"/>
+              </a:solidFill>
+              <a:latin typeface="Calibri"/>
+              <a:ea typeface="DejaVu Sans"/>
+            </a:endParaRPr>
+          </a:p>
+        </p:txBody>
+      </p:sp>
+      <p:sp>
+        <p:nvSpPr>
+          <p:cNvPr id="285" name="Rectangle 155"/>
+          <p:cNvSpPr/>
+          <p:nvPr/>
+        </p:nvSpPr>
+        <p:spPr>
+          <a:xfrm>
+            <a:off x="8229600" y="0"/>
+            <a:ext cx="14040" cy="6853680"/>
+          </a:xfrm>
+          <a:prstGeom prst="rect">
+            <a:avLst/>
+          </a:prstGeom>
+          <a:solidFill>
+            <a:srgbClr val="121216"/>
+          </a:solidFill>
+          <a:ln>
+            <a:noFill/>
+          </a:ln>
+          <a:effectLst>
+            <a:outerShdw blurRad="39960" dir="5400000" dist="23040" rotWithShape="0">
+              <a:srgbClr val="000000">
+                <a:alpha val="35000"/>
+              </a:srgbClr>
+            </a:outerShdw>
+          </a:effectLst>
+        </p:spPr>
+        <p:style>
+          <a:lnRef idx="1">
+            <a:schemeClr val="accent1"/>
+          </a:lnRef>
+          <a:fillRef idx="3">
+            <a:schemeClr val="accent1"/>
+          </a:fillRef>
+          <a:effectRef idx="2">
+            <a:schemeClr val="accent1"/>
+          </a:effectRef>
+          <a:fontRef idx="minor"/>
+        </p:style>
+        <p:txBody>
+          <a:bodyPr lIns="90000" rIns="90000" tIns="45000" bIns="45000" anchor="ctr">
+            <a:noAutofit/>
+          </a:bodyPr>
+          <a:p>
+            <a:endParaRPr b="0" lang="en-US" sz="1800" spc="-1" strike="noStrike">
+              <a:solidFill>
+                <a:schemeClr val="lt1"/>
+              </a:solidFill>
+              <a:latin typeface="Calibri"/>
+              <a:ea typeface="DejaVu Sans"/>
+            </a:endParaRPr>
+          </a:p>
+        </p:txBody>
+      </p:sp>
+      <p:sp>
+        <p:nvSpPr>
+          <p:cNvPr id="286" name="Rectangle 156"/>
+          <p:cNvSpPr/>
+          <p:nvPr/>
+        </p:nvSpPr>
+        <p:spPr>
+          <a:xfrm>
+            <a:off x="9144000" y="0"/>
+            <a:ext cx="14040" cy="6853680"/>
+          </a:xfrm>
+          <a:prstGeom prst="rect">
+            <a:avLst/>
+          </a:prstGeom>
+          <a:solidFill>
+            <a:srgbClr val="121216"/>
+          </a:solidFill>
+          <a:ln>
+            <a:noFill/>
+          </a:ln>
+          <a:effectLst>
+            <a:outerShdw blurRad="39960" dir="5400000" dist="23040" rotWithShape="0">
+              <a:srgbClr val="000000">
+                <a:alpha val="35000"/>
+              </a:srgbClr>
+            </a:outerShdw>
+          </a:effectLst>
+        </p:spPr>
+        <p:style>
+          <a:lnRef idx="1">
+            <a:schemeClr val="accent1"/>
+          </a:lnRef>
+          <a:fillRef idx="3">
+            <a:schemeClr val="accent1"/>
+          </a:fillRef>
+          <a:effectRef idx="2">
+            <a:schemeClr val="accent1"/>
+          </a:effectRef>
+          <a:fontRef idx="minor"/>
+        </p:style>
+        <p:txBody>
+          <a:bodyPr lIns="90000" rIns="90000" tIns="45000" bIns="45000" anchor="ctr">
+            <a:noAutofit/>
+          </a:bodyPr>
+          <a:p>
+            <a:endParaRPr b="0" lang="en-US" sz="1800" spc="-1" strike="noStrike">
+              <a:solidFill>
+                <a:schemeClr val="lt1"/>
+              </a:solidFill>
+              <a:latin typeface="Calibri"/>
+              <a:ea typeface="DejaVu Sans"/>
+            </a:endParaRPr>
+          </a:p>
+        </p:txBody>
+      </p:sp>
+      <p:sp>
+        <p:nvSpPr>
+          <p:cNvPr id="287" name="Rectangle 157"/>
+          <p:cNvSpPr/>
+          <p:nvPr/>
+        </p:nvSpPr>
+        <p:spPr>
+          <a:xfrm>
+            <a:off x="10058400" y="0"/>
+            <a:ext cx="14040" cy="6853680"/>
+          </a:xfrm>
+          <a:prstGeom prst="rect">
+            <a:avLst/>
+          </a:prstGeom>
+          <a:solidFill>
+            <a:srgbClr val="121216"/>
+          </a:solidFill>
+          <a:ln>
+            <a:noFill/>
+          </a:ln>
+          <a:effectLst>
+            <a:outerShdw blurRad="39960" dir="5400000" dist="23040" rotWithShape="0">
+              <a:srgbClr val="000000">
+                <a:alpha val="35000"/>
+              </a:srgbClr>
+            </a:outerShdw>
+          </a:effectLst>
+        </p:spPr>
+        <p:style>
+          <a:lnRef idx="1">
+            <a:schemeClr val="accent1"/>
+          </a:lnRef>
+          <a:fillRef idx="3">
+            <a:schemeClr val="accent1"/>
+          </a:fillRef>
+          <a:effectRef idx="2">
+            <a:schemeClr val="accent1"/>
+          </a:effectRef>
+          <a:fontRef idx="minor"/>
+        </p:style>
+        <p:txBody>
+          <a:bodyPr lIns="90000" rIns="90000" tIns="45000" bIns="45000" anchor="ctr">
+            <a:noAutofit/>
+          </a:bodyPr>
+          <a:p>
+            <a:endParaRPr b="0" lang="en-US" sz="1800" spc="-1" strike="noStrike">
+              <a:solidFill>
+                <a:schemeClr val="lt1"/>
+              </a:solidFill>
+              <a:latin typeface="Calibri"/>
+              <a:ea typeface="DejaVu Sans"/>
+            </a:endParaRPr>
+          </a:p>
+        </p:txBody>
+      </p:sp>
+      <p:sp>
+        <p:nvSpPr>
+          <p:cNvPr id="288" name="Rectangle 158"/>
+          <p:cNvSpPr/>
+          <p:nvPr/>
+        </p:nvSpPr>
+        <p:spPr>
+          <a:xfrm>
+            <a:off x="10972800" y="0"/>
+            <a:ext cx="14040" cy="6853680"/>
+          </a:xfrm>
+          <a:prstGeom prst="rect">
+            <a:avLst/>
+          </a:prstGeom>
+          <a:solidFill>
+            <a:srgbClr val="121216"/>
+          </a:solidFill>
+          <a:ln>
+            <a:noFill/>
+          </a:ln>
+          <a:effectLst>
+            <a:outerShdw blurRad="39960" dir="5400000" dist="23040" rotWithShape="0">
+              <a:srgbClr val="000000">
+                <a:alpha val="35000"/>
+              </a:srgbClr>
+            </a:outerShdw>
+          </a:effectLst>
+        </p:spPr>
+        <p:style>
+          <a:lnRef idx="1">
+            <a:schemeClr val="accent1"/>
+          </a:lnRef>
+          <a:fillRef idx="3">
+            <a:schemeClr val="accent1"/>
+          </a:fillRef>
+          <a:effectRef idx="2">
+            <a:schemeClr val="accent1"/>
+          </a:effectRef>
+          <a:fontRef idx="minor"/>
+        </p:style>
+        <p:txBody>
+          <a:bodyPr lIns="90000" rIns="90000" tIns="45000" bIns="45000" anchor="ctr">
+            <a:noAutofit/>
+          </a:bodyPr>
+          <a:p>
+            <a:endParaRPr b="0" lang="en-US" sz="1800" spc="-1" strike="noStrike">
+              <a:solidFill>
+                <a:schemeClr val="lt1"/>
+              </a:solidFill>
+              <a:latin typeface="Calibri"/>
+              <a:ea typeface="DejaVu Sans"/>
+            </a:endParaRPr>
+          </a:p>
+        </p:txBody>
+      </p:sp>
+      <p:sp>
+        <p:nvSpPr>
+          <p:cNvPr id="289" name="Rectangle 159"/>
+          <p:cNvSpPr/>
+          <p:nvPr/>
+        </p:nvSpPr>
+        <p:spPr>
+          <a:xfrm>
+            <a:off x="11887200" y="0"/>
+            <a:ext cx="14040" cy="6853680"/>
+          </a:xfrm>
+          <a:prstGeom prst="rect">
+            <a:avLst/>
+          </a:prstGeom>
+          <a:solidFill>
+            <a:srgbClr val="121216"/>
+          </a:solidFill>
+          <a:ln>
+            <a:noFill/>
+          </a:ln>
+          <a:effectLst>
+            <a:outerShdw blurRad="39960" dir="5400000" dist="23040" rotWithShape="0">
+              <a:srgbClr val="000000">
+                <a:alpha val="35000"/>
+              </a:srgbClr>
+            </a:outerShdw>
+          </a:effectLst>
+        </p:spPr>
+        <p:style>
+          <a:lnRef idx="1">
+            <a:schemeClr val="accent1"/>
+          </a:lnRef>
+          <a:fillRef idx="3">
+            <a:schemeClr val="accent1"/>
+          </a:fillRef>
+          <a:effectRef idx="2">
+            <a:schemeClr val="accent1"/>
+          </a:effectRef>
+          <a:fontRef idx="minor"/>
+        </p:style>
+        <p:txBody>
+          <a:bodyPr lIns="90000" rIns="90000" tIns="45000" bIns="45000" anchor="ctr">
+            <a:noAutofit/>
+          </a:bodyPr>
+          <a:p>
+            <a:endParaRPr b="0" lang="en-US" sz="1800" spc="-1" strike="noStrike">
+              <a:solidFill>
+                <a:schemeClr val="lt1"/>
+              </a:solidFill>
+              <a:latin typeface="Calibri"/>
+              <a:ea typeface="DejaVu Sans"/>
+            </a:endParaRPr>
+          </a:p>
+        </p:txBody>
+      </p:sp>
+      <p:sp>
+        <p:nvSpPr>
+          <p:cNvPr id="290" name="Rectangle 160"/>
+          <p:cNvSpPr/>
+          <p:nvPr/>
+        </p:nvSpPr>
+        <p:spPr>
+          <a:xfrm>
+            <a:off x="0" y="0"/>
+            <a:ext cx="315720" cy="6853680"/>
+          </a:xfrm>
+          <a:prstGeom prst="rect">
+            <a:avLst/>
+          </a:prstGeom>
+          <a:solidFill>
+            <a:srgbClr val="ff8c00"/>
+          </a:solidFill>
+          <a:ln>
+            <a:noFill/>
+          </a:ln>
+          <a:effectLst>
+            <a:outerShdw blurRad="39960" dir="5400000" dist="23040" rotWithShape="0">
+              <a:srgbClr val="000000">
+                <a:alpha val="35000"/>
+              </a:srgbClr>
+            </a:outerShdw>
+          </a:effectLst>
+        </p:spPr>
+        <p:style>
+          <a:lnRef idx="1">
+            <a:schemeClr val="accent1"/>
+          </a:lnRef>
+          <a:fillRef idx="3">
+            <a:schemeClr val="accent1"/>
+          </a:fillRef>
+          <a:effectRef idx="2">
+            <a:schemeClr val="accent1"/>
+          </a:effectRef>
+          <a:fontRef idx="minor"/>
+        </p:style>
+        <p:txBody>
+          <a:bodyPr lIns="90000" rIns="90000" tIns="45000" bIns="45000" anchor="ctr">
+            <a:noAutofit/>
+          </a:bodyPr>
+          <a:p>
+            <a:endParaRPr b="0" lang="en-US" sz="1800" spc="-1" strike="noStrike">
+              <a:solidFill>
+                <a:schemeClr val="lt1"/>
+              </a:solidFill>
+              <a:latin typeface="Calibri"/>
+              <a:ea typeface="DejaVu Sans"/>
+            </a:endParaRPr>
+          </a:p>
+        </p:txBody>
+      </p:sp>
+      <p:sp>
+        <p:nvSpPr>
+          <p:cNvPr id="291" name="Rounded Rectangle 71"/>
+          <p:cNvSpPr/>
+          <p:nvPr/>
+        </p:nvSpPr>
+        <p:spPr>
+          <a:xfrm>
+            <a:off x="9875520" y="365760"/>
+            <a:ext cx="2007360" cy="498600"/>
+          </a:xfrm>
+          <a:prstGeom prst="roundRect">
+            <a:avLst>
+              <a:gd name="adj" fmla="val 16667"/>
+            </a:avLst>
+          </a:prstGeom>
+          <a:solidFill>
+            <a:srgbClr val="1e1e24"/>
+          </a:solidFill>
+          <a:ln>
+            <a:solidFill>
+              <a:srgbClr val="ff8c00"/>
+            </a:solidFill>
+            <a:round/>
+          </a:ln>
+          <a:effectLst>
+            <a:outerShdw blurRad="39960" dir="5400000" dist="23040" rotWithShape="0">
+              <a:srgbClr val="000000">
+                <a:alpha val="35000"/>
+              </a:srgbClr>
+            </a:outerShdw>
+          </a:effectLst>
+        </p:spPr>
+        <p:style>
+          <a:lnRef idx="1">
+            <a:schemeClr val="accent1"/>
+          </a:lnRef>
+          <a:fillRef idx="3">
+            <a:schemeClr val="accent1"/>
+          </a:fillRef>
+          <a:effectRef idx="2">
+            <a:schemeClr val="accent1"/>
+          </a:effectRef>
+          <a:fontRef idx="minor"/>
+        </p:style>
+        <p:txBody>
+          <a:bodyPr lIns="90000" rIns="90000" tIns="45000" bIns="45000" anchor="ctr">
+            <a:noAutofit/>
+          </a:bodyPr>
+          <a:p>
+            <a:pPr algn="ctr">
+              <a:lnSpc>
+                <a:spcPct val="100000"/>
+              </a:lnSpc>
+            </a:pPr>
+            <a:r>
+              <a:rPr b="1" lang="en-US" sz="1400" spc="-1" strike="noStrike">
+                <a:solidFill>
+                  <a:srgbClr val="ffb45a"/>
+                </a:solidFill>
+                <a:latin typeface="Calibri"/>
+                <a:ea typeface="DejaVu Sans"/>
+              </a:rPr>
+              <a:t>JAVA TEMELLERI</a:t>
+            </a:r>
+            <a:endParaRPr b="0" lang="en-US" sz="1400" spc="-1" strike="noStrike">
+              <a:solidFill>
+                <a:srgbClr val="ffffff"/>
+              </a:solidFill>
+              <a:latin typeface="Arial"/>
+            </a:endParaRPr>
+          </a:p>
+        </p:txBody>
+      </p:sp>
+      <p:sp>
+        <p:nvSpPr>
+          <p:cNvPr id="292" name="TextBox 31"/>
+          <p:cNvSpPr/>
+          <p:nvPr/>
+        </p:nvSpPr>
+        <p:spPr>
+          <a:xfrm>
+            <a:off x="959040" y="914400"/>
+            <a:ext cx="9050760" cy="1186920"/>
+          </a:xfrm>
+          <a:prstGeom prst="rect">
+            <a:avLst/>
+          </a:prstGeom>
+          <a:noFill/>
+          <a:ln w="0">
+            <a:noFill/>
+          </a:ln>
+        </p:spPr>
+        <p:style>
+          <a:lnRef idx="0"/>
+          <a:fillRef idx="0"/>
+          <a:effectRef idx="0"/>
+          <a:fontRef idx="minor"/>
+        </p:style>
+        <p:txBody>
+          <a:bodyPr wrap="none" lIns="90000" rIns="90000" tIns="45000" bIns="45000" anchor="t">
+            <a:spAutoFit/>
+          </a:bodyPr>
+          <a:p>
+            <a:pPr>
+              <a:lnSpc>
+                <a:spcPct val="100000"/>
+              </a:lnSpc>
+            </a:pPr>
+            <a:r>
+              <a:rPr b="1" lang="en-US" sz="3600" spc="-1" strike="noStrike">
+                <a:solidFill>
+                  <a:srgbClr val="f5f5f5"/>
+                </a:solidFill>
+                <a:latin typeface="Calibri"/>
+                <a:ea typeface="DejaVu Sans"/>
+              </a:rPr>
+              <a:t>Aritmetik Operatörler (Bölüm 2: Prefix/Postfix)</a:t>
+            </a:r>
+            <a:endParaRPr b="0" lang="en-US" sz="3600" spc="-1" strike="noStrike">
+              <a:solidFill>
+                <a:srgbClr val="000000"/>
+              </a:solidFill>
+              <a:latin typeface="Arial"/>
+            </a:endParaRPr>
+          </a:p>
+          <a:p>
+            <a:pPr>
+              <a:lnSpc>
+                <a:spcPct val="100000"/>
+              </a:lnSpc>
+            </a:pPr>
+            <a:endParaRPr b="0" lang="en-US" sz="3600" spc="-1" strike="noStrike">
+              <a:solidFill>
+                <a:srgbClr val="000000"/>
+              </a:solidFill>
+              <a:latin typeface="Arial"/>
+            </a:endParaRPr>
+          </a:p>
+        </p:txBody>
+      </p:sp>
+      <p:sp>
+        <p:nvSpPr>
+          <p:cNvPr id="293" name="TextBox 32"/>
+          <p:cNvSpPr/>
+          <p:nvPr/>
+        </p:nvSpPr>
+        <p:spPr>
+          <a:xfrm>
+            <a:off x="1267200" y="1694880"/>
+            <a:ext cx="9035640" cy="819720"/>
+          </a:xfrm>
+          <a:prstGeom prst="rect">
+            <a:avLst/>
+          </a:prstGeom>
+          <a:noFill/>
+          <a:ln w="0">
+            <a:noFill/>
+          </a:ln>
+        </p:spPr>
+        <p:style>
+          <a:lnRef idx="0"/>
+          <a:fillRef idx="0"/>
+          <a:effectRef idx="0"/>
+          <a:fontRef idx="minor"/>
+        </p:style>
+        <p:txBody>
+          <a:bodyPr wrap="none" lIns="90000" rIns="90000" tIns="45000" bIns="45000" anchor="t">
+            <a:spAutoFit/>
+          </a:bodyPr>
+          <a:p>
+            <a:pPr>
+              <a:lnSpc>
+                <a:spcPct val="100000"/>
+              </a:lnSpc>
+            </a:pPr>
+            <a:r>
+              <a:rPr b="0" lang="en-US" sz="1600" spc="-1" strike="noStrike">
+                <a:solidFill>
+                  <a:srgbClr val="aaaaaa"/>
+                </a:solidFill>
+                <a:latin typeface="Calibri"/>
+                <a:ea typeface="DejaVu Sans"/>
+              </a:rPr>
+              <a:t>Aritmetik işlemlerde en sık yapılan hatalar artırma/azaltma (++, --) operatörlerinin konumundan ve tam sayı </a:t>
+            </a:r>
+            <a:endParaRPr b="0" lang="en-US" sz="1600" spc="-1" strike="noStrike">
+              <a:solidFill>
+                <a:srgbClr val="000000"/>
+              </a:solidFill>
+              <a:latin typeface="Arial"/>
+            </a:endParaRPr>
+          </a:p>
+          <a:p>
+            <a:pPr>
+              <a:lnSpc>
+                <a:spcPct val="100000"/>
+              </a:lnSpc>
+            </a:pPr>
+            <a:r>
+              <a:rPr b="0" lang="en-US" sz="1600" spc="-1" strike="noStrike">
+                <a:solidFill>
+                  <a:srgbClr val="aaaaaa"/>
+                </a:solidFill>
+                <a:latin typeface="Calibri"/>
+                <a:ea typeface="DejaVu Sans"/>
+              </a:rPr>
+              <a:t>bölmesinden kaynaklanır. Operatörün değişkenin sağında veya solunda olması, </a:t>
+            </a:r>
+            <a:endParaRPr b="0" lang="en-US" sz="1600" spc="-1" strike="noStrike">
+              <a:solidFill>
+                <a:srgbClr val="000000"/>
+              </a:solidFill>
+              <a:latin typeface="Arial"/>
+            </a:endParaRPr>
+          </a:p>
+          <a:p>
+            <a:pPr>
+              <a:lnSpc>
+                <a:spcPct val="100000"/>
+              </a:lnSpc>
+            </a:pPr>
+            <a:r>
+              <a:rPr b="0" lang="en-US" sz="1600" spc="-1" strike="noStrike">
+                <a:solidFill>
+                  <a:srgbClr val="aaaaaa"/>
+                </a:solidFill>
+                <a:latin typeface="Calibri"/>
+                <a:ea typeface="DejaVu Sans"/>
+              </a:rPr>
+              <a:t>kodun çalışma sırasını tamamen değiştirir.</a:t>
+            </a:r>
+            <a:endParaRPr b="0" lang="en-US" sz="1600" spc="-1" strike="noStrike">
+              <a:solidFill>
+                <a:srgbClr val="000000"/>
+              </a:solidFill>
+              <a:latin typeface="Arial"/>
+            </a:endParaRPr>
+          </a:p>
+        </p:txBody>
+      </p:sp>
+      <p:sp>
+        <p:nvSpPr>
+          <p:cNvPr id="294" name="Rounded Rectangle 72"/>
+          <p:cNvSpPr/>
+          <p:nvPr/>
+        </p:nvSpPr>
+        <p:spPr>
+          <a:xfrm>
+            <a:off x="987480" y="3182040"/>
+            <a:ext cx="3287520" cy="2738880"/>
+          </a:xfrm>
+          <a:prstGeom prst="roundRect">
+            <a:avLst>
+              <a:gd name="adj" fmla="val 16667"/>
+            </a:avLst>
+          </a:prstGeom>
+          <a:solidFill>
+            <a:srgbClr val="08080a"/>
+          </a:solidFill>
+          <a:ln>
+            <a:noFill/>
+          </a:ln>
+          <a:effectLst>
+            <a:outerShdw blurRad="39960" dir="5400000" dist="23040" rotWithShape="0">
+              <a:srgbClr val="000000">
+                <a:alpha val="35000"/>
+              </a:srgbClr>
+            </a:outerShdw>
+          </a:effectLst>
+        </p:spPr>
+        <p:style>
+          <a:lnRef idx="1">
+            <a:schemeClr val="accent1"/>
+          </a:lnRef>
+          <a:fillRef idx="3">
+            <a:schemeClr val="accent1"/>
+          </a:fillRef>
+          <a:effectRef idx="2">
+            <a:schemeClr val="accent1"/>
+          </a:effectRef>
+          <a:fontRef idx="minor"/>
+        </p:style>
+        <p:txBody>
+          <a:bodyPr lIns="90000" rIns="90000" tIns="45000" bIns="45000" anchor="ctr">
+            <a:noAutofit/>
+          </a:bodyPr>
+          <a:p>
+            <a:endParaRPr b="0" lang="en-US" sz="1800" spc="-1" strike="noStrike">
+              <a:solidFill>
+                <a:schemeClr val="lt1"/>
+              </a:solidFill>
+              <a:latin typeface="Calibri"/>
+              <a:ea typeface="DejaVu Sans"/>
+            </a:endParaRPr>
+          </a:p>
+        </p:txBody>
+      </p:sp>
+      <p:sp>
+        <p:nvSpPr>
+          <p:cNvPr id="295" name="Rounded Rectangle 73"/>
+          <p:cNvSpPr/>
+          <p:nvPr/>
+        </p:nvSpPr>
+        <p:spPr>
+          <a:xfrm>
+            <a:off x="685800" y="2743200"/>
+            <a:ext cx="3516120" cy="3656520"/>
+          </a:xfrm>
+          <a:prstGeom prst="roundRect">
+            <a:avLst>
+              <a:gd name="adj" fmla="val 16667"/>
+            </a:avLst>
+          </a:prstGeom>
+          <a:solidFill>
+            <a:srgbClr val="16161c"/>
+          </a:solidFill>
+          <a:ln>
+            <a:solidFill>
+              <a:srgbClr val="464655"/>
+            </a:solidFill>
+            <a:round/>
+          </a:ln>
+          <a:effectLst>
+            <a:outerShdw blurRad="39960" dir="5400000" dist="23040" rotWithShape="0">
+              <a:srgbClr val="000000">
+                <a:alpha val="35000"/>
+              </a:srgbClr>
+            </a:outerShdw>
+          </a:effectLst>
+        </p:spPr>
+        <p:style>
+          <a:lnRef idx="1">
+            <a:schemeClr val="accent1"/>
+          </a:lnRef>
+          <a:fillRef idx="3">
+            <a:schemeClr val="accent1"/>
+          </a:fillRef>
+          <a:effectRef idx="2">
+            <a:schemeClr val="accent1"/>
+          </a:effectRef>
+          <a:fontRef idx="minor"/>
+        </p:style>
+        <p:txBody>
+          <a:bodyPr lIns="90000" rIns="90000" tIns="45000" bIns="45000" anchor="ctr">
+            <a:noAutofit/>
+          </a:bodyPr>
+          <a:p>
+            <a:pPr>
+              <a:lnSpc>
+                <a:spcPct val="100000"/>
+              </a:lnSpc>
+            </a:pPr>
+            <a:r>
+              <a:rPr b="1" lang="en-US" sz="1300" spc="-1" strike="noStrike">
+                <a:solidFill>
+                  <a:schemeClr val="lt1"/>
+                </a:solidFill>
+                <a:latin typeface="Calibri"/>
+                <a:ea typeface="DejaVu Sans"/>
+              </a:rPr>
+              <a:t>1. Prefix ve Postfix Mantığı:</a:t>
+            </a:r>
+            <a:endParaRPr b="0" lang="en-US" sz="1300" spc="-1" strike="noStrike">
+              <a:solidFill>
+                <a:srgbClr val="ffffff"/>
+              </a:solidFill>
+              <a:latin typeface="Arial"/>
+            </a:endParaRPr>
+          </a:p>
+          <a:p>
+            <a:pPr>
+              <a:lnSpc>
+                <a:spcPct val="100000"/>
+              </a:lnSpc>
+            </a:pPr>
+            <a:r>
+              <a:rPr b="1" lang="en-US" sz="1300" spc="-1" strike="noStrike">
+                <a:solidFill>
+                  <a:schemeClr val="lt1"/>
+                </a:solidFill>
+                <a:latin typeface="Calibri"/>
+                <a:ea typeface="DejaVu Sans"/>
+              </a:rPr>
+              <a:t>Prefix (Önden - ++a)</a:t>
+            </a:r>
+            <a:r>
+              <a:rPr b="0" lang="en-US" sz="1300" spc="-1" strike="noStrike">
+                <a:solidFill>
+                  <a:schemeClr val="lt1"/>
+                </a:solidFill>
+                <a:latin typeface="Calibri"/>
+                <a:ea typeface="DejaVu Sans"/>
+              </a:rPr>
+              <a:t>: Önce değişkenin değerini 1 artırır, sonra o satırdaki diğer işlemleri yapar.</a:t>
+            </a:r>
+            <a:endParaRPr b="0" lang="en-US" sz="1300" spc="-1" strike="noStrike">
+              <a:solidFill>
+                <a:srgbClr val="ffffff"/>
+              </a:solidFill>
+              <a:latin typeface="Arial"/>
+            </a:endParaRPr>
+          </a:p>
+          <a:p>
+            <a:pPr>
+              <a:lnSpc>
+                <a:spcPct val="100000"/>
+              </a:lnSpc>
+            </a:pPr>
+            <a:r>
+              <a:rPr b="0" lang="en-US" sz="1300" spc="-1" strike="noStrike">
+                <a:solidFill>
+                  <a:schemeClr val="lt1"/>
+                </a:solidFill>
+                <a:latin typeface="Calibri"/>
+                <a:ea typeface="DejaVu Sans"/>
+              </a:rPr>
+              <a:t> </a:t>
+            </a:r>
+            <a:r>
+              <a:rPr b="1" lang="en-US" sz="1300" spc="-1" strike="noStrike">
+                <a:solidFill>
+                  <a:schemeClr val="lt1"/>
+                </a:solidFill>
+                <a:latin typeface="Calibri"/>
+                <a:ea typeface="DejaVu Sans"/>
+              </a:rPr>
+              <a:t>Postfix (Sondan - a++):</a:t>
+            </a:r>
+            <a:r>
+              <a:rPr b="0" lang="en-US" sz="1300" spc="-1" strike="noStrike">
+                <a:solidFill>
+                  <a:schemeClr val="lt1"/>
+                </a:solidFill>
+                <a:latin typeface="Calibri"/>
+                <a:ea typeface="DejaVu Sans"/>
+              </a:rPr>
+              <a:t> Önce değişkenin mevcut değerini kullanır (işleme sokar), satır bittikten sonra değerini 1 artırır.</a:t>
+            </a:r>
+            <a:endParaRPr b="0" lang="en-US" sz="1300" spc="-1" strike="noStrike">
+              <a:solidFill>
+                <a:srgbClr val="ffffff"/>
+              </a:solidFill>
+              <a:latin typeface="Arial"/>
+            </a:endParaRPr>
+          </a:p>
+          <a:p>
+            <a:pPr>
+              <a:lnSpc>
+                <a:spcPct val="100000"/>
+              </a:lnSpc>
+            </a:pPr>
+            <a:endParaRPr b="0" lang="en-US" sz="1300" spc="-1" strike="noStrike">
+              <a:solidFill>
+                <a:srgbClr val="ffffff"/>
+              </a:solidFill>
+              <a:latin typeface="Arial"/>
+            </a:endParaRPr>
+          </a:p>
+          <a:p>
+            <a:pPr>
+              <a:lnSpc>
+                <a:spcPct val="100000"/>
+              </a:lnSpc>
+            </a:pPr>
+            <a:r>
+              <a:rPr b="1" lang="en-US" sz="1300" spc="-1" strike="noStrike">
+                <a:solidFill>
+                  <a:schemeClr val="lt1"/>
+                </a:solidFill>
+                <a:latin typeface="Calibri"/>
+                <a:ea typeface="DejaVu Sans"/>
+              </a:rPr>
+              <a:t>2. Bölme İşlemi Tuzakları:</a:t>
+            </a:r>
+            <a:endParaRPr b="0" lang="en-US" sz="1300" spc="-1" strike="noStrike">
+              <a:solidFill>
+                <a:srgbClr val="ffffff"/>
+              </a:solidFill>
+              <a:latin typeface="Arial"/>
+            </a:endParaRPr>
+          </a:p>
+          <a:p>
+            <a:pPr marL="216000" indent="-216000">
+              <a:lnSpc>
+                <a:spcPct val="100000"/>
+              </a:lnSpc>
+              <a:buClr>
+                <a:srgbClr val="ffffff"/>
+              </a:buClr>
+              <a:buFont typeface="Wingdings" charset="2"/>
+              <a:buChar char=""/>
+            </a:pPr>
+            <a:r>
+              <a:rPr b="0" lang="en-US" sz="1300" spc="-1" strike="noStrike">
+                <a:solidFill>
+                  <a:schemeClr val="lt1"/>
+                </a:solidFill>
+                <a:latin typeface="Calibri"/>
+                <a:ea typeface="DejaVu Sans"/>
+              </a:rPr>
+              <a:t>İki tam sayı (int) bölünürse, Java ondalık kısmı yuvarlamaz, direkt çöpe atar. (Örn: 5 / 2 = 2 olur).</a:t>
+            </a:r>
+            <a:endParaRPr b="0" lang="en-US" sz="1300" spc="-1" strike="noStrike">
+              <a:solidFill>
+                <a:srgbClr val="ffffff"/>
+              </a:solidFill>
+              <a:latin typeface="Arial"/>
+            </a:endParaRPr>
+          </a:p>
+          <a:p>
+            <a:pPr marL="216000" indent="-216000">
+              <a:lnSpc>
+                <a:spcPct val="100000"/>
+              </a:lnSpc>
+              <a:buClr>
+                <a:srgbClr val="ffffff"/>
+              </a:buClr>
+              <a:buFont typeface="Wingdings" charset="2"/>
+              <a:buChar char=""/>
+            </a:pPr>
+            <a:r>
+              <a:rPr b="0" lang="en-US" sz="1300" spc="-1" strike="noStrike">
+                <a:solidFill>
+                  <a:schemeClr val="lt1"/>
+                </a:solidFill>
+                <a:latin typeface="Calibri"/>
+                <a:ea typeface="DejaVu Sans"/>
+              </a:rPr>
+              <a:t>Küsuratlı sonucu tam olarak alabilmek için, işleme giren sayılardan en az birinin ondalıklı (double veya float) olması gerekir. (Örn: 5.0 / 2 = 2.5).</a:t>
+            </a:r>
+            <a:endParaRPr b="0" lang="en-US" sz="1300" spc="-1" strike="noStrike">
+              <a:solidFill>
+                <a:srgbClr val="ffffff"/>
+              </a:solidFill>
+              <a:latin typeface="Arial"/>
+            </a:endParaRPr>
+          </a:p>
+        </p:txBody>
+      </p:sp>
+      <p:sp>
+        <p:nvSpPr>
+          <p:cNvPr id="296" name="Rounded Rectangle 74"/>
+          <p:cNvSpPr/>
+          <p:nvPr/>
+        </p:nvSpPr>
+        <p:spPr>
+          <a:xfrm>
+            <a:off x="4507920" y="3182040"/>
+            <a:ext cx="3287520" cy="2738880"/>
+          </a:xfrm>
+          <a:prstGeom prst="roundRect">
+            <a:avLst>
+              <a:gd name="adj" fmla="val 16667"/>
+            </a:avLst>
+          </a:prstGeom>
+          <a:solidFill>
+            <a:srgbClr val="08080a"/>
+          </a:solidFill>
+          <a:ln>
+            <a:noFill/>
+          </a:ln>
+          <a:effectLst>
+            <a:outerShdw blurRad="39960" dir="5400000" dist="23040" rotWithShape="0">
+              <a:srgbClr val="000000">
+                <a:alpha val="35000"/>
+              </a:srgbClr>
+            </a:outerShdw>
+          </a:effectLst>
+        </p:spPr>
+        <p:style>
+          <a:lnRef idx="1">
+            <a:schemeClr val="accent1"/>
+          </a:lnRef>
+          <a:fillRef idx="3">
+            <a:schemeClr val="accent1"/>
+          </a:fillRef>
+          <a:effectRef idx="2">
+            <a:schemeClr val="accent1"/>
+          </a:effectRef>
+          <a:fontRef idx="minor"/>
+        </p:style>
+        <p:txBody>
+          <a:bodyPr lIns="90000" rIns="90000" tIns="45000" bIns="45000" anchor="ctr">
+            <a:noAutofit/>
+          </a:bodyPr>
+          <a:p>
+            <a:endParaRPr b="0" lang="en-US" sz="1800" spc="-1" strike="noStrike">
+              <a:solidFill>
+                <a:schemeClr val="lt1"/>
+              </a:solidFill>
+              <a:latin typeface="Calibri"/>
+              <a:ea typeface="DejaVu Sans"/>
+            </a:endParaRPr>
+          </a:p>
+        </p:txBody>
+      </p:sp>
+      <p:sp>
+        <p:nvSpPr>
+          <p:cNvPr id="297" name="Rounded Rectangle 75"/>
+          <p:cNvSpPr/>
+          <p:nvPr/>
+        </p:nvSpPr>
+        <p:spPr>
+          <a:xfrm>
+            <a:off x="4434840" y="2971800"/>
+            <a:ext cx="3287520" cy="3427920"/>
+          </a:xfrm>
+          <a:prstGeom prst="roundRect">
+            <a:avLst>
+              <a:gd name="adj" fmla="val 16667"/>
+            </a:avLst>
+          </a:prstGeom>
+          <a:solidFill>
+            <a:srgbClr val="16161c"/>
+          </a:solidFill>
+          <a:ln>
+            <a:solidFill>
+              <a:srgbClr val="464655"/>
+            </a:solidFill>
+            <a:round/>
+          </a:ln>
+          <a:effectLst>
+            <a:outerShdw blurRad="39960" dir="5400000" dist="23040" rotWithShape="0">
+              <a:srgbClr val="000000">
+                <a:alpha val="35000"/>
+              </a:srgbClr>
+            </a:outerShdw>
+          </a:effectLst>
+        </p:spPr>
+        <p:style>
+          <a:lnRef idx="1">
+            <a:schemeClr val="accent1"/>
+          </a:lnRef>
+          <a:fillRef idx="3">
+            <a:schemeClr val="accent1"/>
+          </a:fillRef>
+          <a:effectRef idx="2">
+            <a:schemeClr val="accent1"/>
+          </a:effectRef>
+          <a:fontRef idx="minor"/>
+        </p:style>
+        <p:txBody>
+          <a:bodyPr lIns="90000" rIns="90000" tIns="45000" bIns="45000" anchor="ctr">
+            <a:noAutofit/>
+          </a:bodyPr>
+          <a:p>
+            <a:pPr>
+              <a:lnSpc>
+                <a:spcPct val="100000"/>
+              </a:lnSpc>
+            </a:pPr>
+            <a:r>
+              <a:rPr b="0" lang="en-US" sz="1500" spc="-1" strike="noStrike">
+                <a:solidFill>
+                  <a:schemeClr val="lt1"/>
+                </a:solidFill>
+                <a:latin typeface="Calibri"/>
+                <a:ea typeface="DejaVu Sans"/>
+              </a:rPr>
+              <a:t>[ Prefix vs Postfix Çalışma Akışı ]</a:t>
+            </a:r>
+            <a:endParaRPr b="0" lang="en-US" sz="1500" spc="-1" strike="noStrike">
+              <a:solidFill>
+                <a:srgbClr val="ffffff"/>
+              </a:solidFill>
+              <a:latin typeface="Arial"/>
+            </a:endParaRPr>
+          </a:p>
+          <a:p>
+            <a:pPr>
+              <a:lnSpc>
+                <a:spcPct val="100000"/>
+              </a:lnSpc>
+            </a:pPr>
+            <a:r>
+              <a:rPr b="0" lang="en-US" sz="1500" spc="-1" strike="noStrike">
+                <a:solidFill>
+                  <a:schemeClr val="lt1"/>
+                </a:solidFill>
+                <a:latin typeface="Calibri"/>
+                <a:ea typeface="DejaVu Sans"/>
+              </a:rPr>
+              <a:t>Değişken Tanımı: int x = 5;</a:t>
+            </a:r>
+            <a:endParaRPr b="0" lang="en-US" sz="1500" spc="-1" strike="noStrike">
+              <a:solidFill>
+                <a:srgbClr val="ffffff"/>
+              </a:solidFill>
+              <a:latin typeface="Arial"/>
+            </a:endParaRPr>
+          </a:p>
+          <a:p>
+            <a:pPr>
+              <a:lnSpc>
+                <a:spcPct val="100000"/>
+              </a:lnSpc>
+            </a:pPr>
+            <a:r>
+              <a:rPr b="0" lang="en-US" sz="1500" spc="-1" strike="noStrike">
+                <a:solidFill>
+                  <a:schemeClr val="lt1"/>
+                </a:solidFill>
+                <a:latin typeface="Calibri"/>
+                <a:ea typeface="DejaVu Sans"/>
+              </a:rPr>
+              <a:t>├──</a:t>
+            </a:r>
+            <a:r>
+              <a:rPr b="0" lang="en-US" sz="1500" spc="-1" strike="noStrike">
+                <a:solidFill>
+                  <a:schemeClr val="lt1"/>
+                </a:solidFill>
+                <a:latin typeface="Calibri"/>
+                <a:ea typeface="DejaVu Sans"/>
+              </a:rPr>
+              <a:t>&gt; Prefix Kullanım: int y = ++x;</a:t>
+            </a:r>
+            <a:endParaRPr b="0" lang="en-US" sz="1500" spc="-1" strike="noStrike">
+              <a:solidFill>
+                <a:srgbClr val="ffffff"/>
+              </a:solidFill>
+              <a:latin typeface="Arial"/>
+            </a:endParaRPr>
+          </a:p>
+          <a:p>
+            <a:pPr>
+              <a:lnSpc>
+                <a:spcPct val="100000"/>
+              </a:lnSpc>
+            </a:pPr>
+            <a:r>
+              <a:rPr b="0" lang="en-US" sz="1500" spc="-1" strike="noStrike">
+                <a:solidFill>
+                  <a:schemeClr val="lt1"/>
+                </a:solidFill>
+                <a:latin typeface="Calibri"/>
+                <a:ea typeface="DejaVu Sans"/>
+              </a:rPr>
+              <a:t>│ </a:t>
+            </a:r>
+            <a:r>
+              <a:rPr b="0" lang="en-US" sz="1500" spc="-1" strike="noStrike">
+                <a:solidFill>
+                  <a:schemeClr val="lt1"/>
+                </a:solidFill>
+                <a:latin typeface="Calibri"/>
+                <a:ea typeface="DejaVu Sans"/>
+              </a:rPr>
+              <a:t>1. Adım: x'in değerini artır (x=6 olur)</a:t>
+            </a:r>
+            <a:endParaRPr b="0" lang="en-US" sz="1500" spc="-1" strike="noStrike">
+              <a:solidFill>
+                <a:srgbClr val="ffffff"/>
+              </a:solidFill>
+              <a:latin typeface="Arial"/>
+            </a:endParaRPr>
+          </a:p>
+          <a:p>
+            <a:pPr>
+              <a:lnSpc>
+                <a:spcPct val="100000"/>
+              </a:lnSpc>
+            </a:pPr>
+            <a:r>
+              <a:rPr b="0" lang="en-US" sz="1500" spc="-1" strike="noStrike">
+                <a:solidFill>
+                  <a:schemeClr val="lt1"/>
+                </a:solidFill>
+                <a:latin typeface="Calibri"/>
+                <a:ea typeface="DejaVu Sans"/>
+              </a:rPr>
+              <a:t>│ </a:t>
+            </a:r>
+            <a:r>
+              <a:rPr b="0" lang="en-US" sz="1500" spc="-1" strike="noStrike">
+                <a:solidFill>
+                  <a:schemeClr val="lt1"/>
+                </a:solidFill>
+                <a:latin typeface="Calibri"/>
+                <a:ea typeface="DejaVu Sans"/>
+              </a:rPr>
+              <a:t>2. Adım: Yeni x değerini y'ye ata</a:t>
+            </a:r>
+            <a:endParaRPr b="0" lang="en-US" sz="1500" spc="-1" strike="noStrike">
+              <a:solidFill>
+                <a:srgbClr val="ffffff"/>
+              </a:solidFill>
+              <a:latin typeface="Arial"/>
+            </a:endParaRPr>
+          </a:p>
+          <a:p>
+            <a:pPr>
+              <a:lnSpc>
+                <a:spcPct val="100000"/>
+              </a:lnSpc>
+            </a:pPr>
+            <a:r>
+              <a:rPr b="0" lang="en-US" sz="1500" spc="-1" strike="noStrike">
+                <a:solidFill>
+                  <a:schemeClr val="lt1"/>
+                </a:solidFill>
+                <a:latin typeface="Calibri"/>
+                <a:ea typeface="DejaVu Sans"/>
+              </a:rPr>
+              <a:t>│ </a:t>
+            </a:r>
+            <a:r>
+              <a:rPr b="0" lang="en-US" sz="1500" spc="-1" strike="noStrike">
+                <a:solidFill>
+                  <a:schemeClr val="lt1"/>
+                </a:solidFill>
+                <a:latin typeface="Calibri"/>
+                <a:ea typeface="DejaVu Sans"/>
+              </a:rPr>
+              <a:t>Sonuç: x = 6, y = 6</a:t>
+            </a:r>
+            <a:endParaRPr b="0" lang="en-US" sz="1500" spc="-1" strike="noStrike">
+              <a:solidFill>
+                <a:srgbClr val="ffffff"/>
+              </a:solidFill>
+              <a:latin typeface="Arial"/>
+            </a:endParaRPr>
+          </a:p>
+          <a:p>
+            <a:pPr>
+              <a:lnSpc>
+                <a:spcPct val="100000"/>
+              </a:lnSpc>
+            </a:pPr>
+            <a:r>
+              <a:rPr b="0" lang="en-US" sz="1500" spc="-1" strike="noStrike">
+                <a:solidFill>
+                  <a:schemeClr val="lt1"/>
+                </a:solidFill>
+                <a:latin typeface="Calibri"/>
+                <a:ea typeface="DejaVu Sans"/>
+              </a:rPr>
+              <a:t>│</a:t>
+            </a:r>
+            <a:endParaRPr b="0" lang="en-US" sz="1500" spc="-1" strike="noStrike">
+              <a:solidFill>
+                <a:srgbClr val="ffffff"/>
+              </a:solidFill>
+              <a:latin typeface="Arial"/>
+            </a:endParaRPr>
+          </a:p>
+          <a:p>
+            <a:pPr>
+              <a:lnSpc>
+                <a:spcPct val="100000"/>
+              </a:lnSpc>
+            </a:pPr>
+            <a:r>
+              <a:rPr b="0" lang="en-US" sz="1500" spc="-1" strike="noStrike">
+                <a:solidFill>
+                  <a:schemeClr val="lt1"/>
+                </a:solidFill>
+                <a:latin typeface="Calibri"/>
+                <a:ea typeface="DejaVu Sans"/>
+              </a:rPr>
+              <a:t>└──</a:t>
+            </a:r>
+            <a:r>
+              <a:rPr b="0" lang="en-US" sz="1500" spc="-1" strike="noStrike">
+                <a:solidFill>
+                  <a:schemeClr val="lt1"/>
+                </a:solidFill>
+                <a:latin typeface="Calibri"/>
+                <a:ea typeface="DejaVu Sans"/>
+              </a:rPr>
+              <a:t>&gt; Postfix Kullanım: int z = x++;</a:t>
+            </a:r>
+            <a:endParaRPr b="0" lang="en-US" sz="1500" spc="-1" strike="noStrike">
+              <a:solidFill>
+                <a:srgbClr val="ffffff"/>
+              </a:solidFill>
+              <a:latin typeface="Arial"/>
+            </a:endParaRPr>
+          </a:p>
+          <a:p>
+            <a:pPr>
+              <a:lnSpc>
+                <a:spcPct val="100000"/>
+              </a:lnSpc>
+            </a:pPr>
+            <a:r>
+              <a:rPr b="0" lang="en-US" sz="1500" spc="-1" strike="noStrike">
+                <a:solidFill>
+                  <a:schemeClr val="lt1"/>
+                </a:solidFill>
+                <a:latin typeface="Calibri"/>
+                <a:ea typeface="DejaVu Sans"/>
+              </a:rPr>
+              <a:t>1. Adım: Mevcut x değerini z'ye ata (z=5)</a:t>
+            </a:r>
+            <a:endParaRPr b="0" lang="en-US" sz="1500" spc="-1" strike="noStrike">
+              <a:solidFill>
+                <a:srgbClr val="ffffff"/>
+              </a:solidFill>
+              <a:latin typeface="Arial"/>
+            </a:endParaRPr>
+          </a:p>
+          <a:p>
+            <a:pPr>
+              <a:lnSpc>
+                <a:spcPct val="100000"/>
+              </a:lnSpc>
+            </a:pPr>
+            <a:r>
+              <a:rPr b="0" lang="en-US" sz="1500" spc="-1" strike="noStrike">
+                <a:solidFill>
+                  <a:schemeClr val="lt1"/>
+                </a:solidFill>
+                <a:latin typeface="Calibri"/>
+                <a:ea typeface="DejaVu Sans"/>
+              </a:rPr>
+              <a:t>2. Adım: x'in değerini artır (x=6 olur)</a:t>
+            </a:r>
+            <a:endParaRPr b="0" lang="en-US" sz="1500" spc="-1" strike="noStrike">
+              <a:solidFill>
+                <a:srgbClr val="ffffff"/>
+              </a:solidFill>
+              <a:latin typeface="Arial"/>
+            </a:endParaRPr>
+          </a:p>
+          <a:p>
+            <a:pPr>
+              <a:lnSpc>
+                <a:spcPct val="100000"/>
+              </a:lnSpc>
+            </a:pPr>
+            <a:r>
+              <a:rPr b="0" lang="en-US" sz="1500" spc="-1" strike="noStrike">
+                <a:solidFill>
+                  <a:schemeClr val="lt1"/>
+                </a:solidFill>
+                <a:latin typeface="Calibri"/>
+                <a:ea typeface="DejaVu Sans"/>
+              </a:rPr>
+              <a:t>Sonuç: x = 6, z = 5</a:t>
+            </a:r>
+            <a:endParaRPr b="0" lang="en-US" sz="1500" spc="-1" strike="noStrike">
+              <a:solidFill>
+                <a:srgbClr val="ffffff"/>
+              </a:solidFill>
+              <a:latin typeface="Arial"/>
+            </a:endParaRPr>
+          </a:p>
+        </p:txBody>
+      </p:sp>
+      <p:sp>
+        <p:nvSpPr>
+          <p:cNvPr id="298" name="Rounded Rectangle 76"/>
+          <p:cNvSpPr/>
+          <p:nvPr/>
+        </p:nvSpPr>
+        <p:spPr>
+          <a:xfrm>
+            <a:off x="8028360" y="3182040"/>
+            <a:ext cx="3287520" cy="2738880"/>
+          </a:xfrm>
+          <a:prstGeom prst="roundRect">
+            <a:avLst>
+              <a:gd name="adj" fmla="val 16667"/>
+            </a:avLst>
+          </a:prstGeom>
+          <a:solidFill>
+            <a:srgbClr val="08080a"/>
+          </a:solidFill>
+          <a:ln>
+            <a:noFill/>
+          </a:ln>
+          <a:effectLst>
+            <a:outerShdw blurRad="39960" dir="5400000" dist="23040" rotWithShape="0">
+              <a:srgbClr val="000000">
+                <a:alpha val="35000"/>
+              </a:srgbClr>
+            </a:outerShdw>
+          </a:effectLst>
+        </p:spPr>
+        <p:style>
+          <a:lnRef idx="1">
+            <a:schemeClr val="accent1"/>
+          </a:lnRef>
+          <a:fillRef idx="3">
+            <a:schemeClr val="accent1"/>
+          </a:fillRef>
+          <a:effectRef idx="2">
+            <a:schemeClr val="accent1"/>
+          </a:effectRef>
+          <a:fontRef idx="minor"/>
+        </p:style>
+        <p:txBody>
+          <a:bodyPr lIns="90000" rIns="90000" tIns="45000" bIns="45000" anchor="ctr">
+            <a:noAutofit/>
+          </a:bodyPr>
+          <a:p>
+            <a:endParaRPr b="0" lang="en-US" sz="1800" spc="-1" strike="noStrike">
+              <a:solidFill>
+                <a:schemeClr val="lt1"/>
+              </a:solidFill>
+              <a:latin typeface="Calibri"/>
+              <a:ea typeface="DejaVu Sans"/>
+            </a:endParaRPr>
+          </a:p>
+        </p:txBody>
+      </p:sp>
+      <p:sp>
+        <p:nvSpPr>
+          <p:cNvPr id="299" name="Rounded Rectangle 77"/>
+          <p:cNvSpPr/>
+          <p:nvPr/>
+        </p:nvSpPr>
+        <p:spPr>
+          <a:xfrm>
+            <a:off x="8003880" y="2743200"/>
+            <a:ext cx="3425760" cy="3655080"/>
+          </a:xfrm>
+          <a:prstGeom prst="roundRect">
+            <a:avLst>
+              <a:gd name="adj" fmla="val 16667"/>
+            </a:avLst>
+          </a:prstGeom>
+          <a:solidFill>
+            <a:srgbClr val="16161c"/>
+          </a:solidFill>
+          <a:ln>
+            <a:solidFill>
+              <a:srgbClr val="464655"/>
+            </a:solidFill>
+            <a:round/>
+          </a:ln>
+          <a:effectLst>
+            <a:outerShdw blurRad="39960" dir="5400000" dist="23040" rotWithShape="0">
+              <a:srgbClr val="000000">
+                <a:alpha val="35000"/>
+              </a:srgbClr>
+            </a:outerShdw>
+          </a:effectLst>
+        </p:spPr>
+        <p:style>
+          <a:lnRef idx="1">
+            <a:schemeClr val="accent1"/>
+          </a:lnRef>
+          <a:fillRef idx="3">
+            <a:schemeClr val="accent1"/>
+          </a:fillRef>
+          <a:effectRef idx="2">
+            <a:schemeClr val="accent1"/>
+          </a:effectRef>
+          <a:fontRef idx="minor"/>
+        </p:style>
+        <p:txBody>
+          <a:bodyPr lIns="90000" rIns="90000" tIns="45000" bIns="45000" anchor="ctr">
+            <a:noAutofit/>
+          </a:bodyPr>
+          <a:p>
+            <a:pPr algn="ctr">
+              <a:lnSpc>
+                <a:spcPct val="100000"/>
+              </a:lnSpc>
+            </a:pPr>
+            <a:r>
+              <a:rPr b="0" lang="en-US" sz="900" spc="-1" strike="noStrike">
+                <a:solidFill>
+                  <a:srgbClr val="78ffc8"/>
+                </a:solidFill>
+                <a:latin typeface="Consolas"/>
+                <a:ea typeface="DejaVu Sans"/>
+              </a:rPr>
+              <a:t>public class AritmetikDetay {</a:t>
+            </a:r>
+            <a:endParaRPr b="0" lang="en-US" sz="900" spc="-1" strike="noStrike">
+              <a:solidFill>
+                <a:srgbClr val="ffffff"/>
+              </a:solidFill>
+              <a:latin typeface="Arial"/>
+            </a:endParaRPr>
+          </a:p>
+          <a:p>
+            <a:pPr algn="ctr">
+              <a:lnSpc>
+                <a:spcPct val="100000"/>
+              </a:lnSpc>
+            </a:pPr>
+            <a:r>
+              <a:rPr b="0" lang="en-US" sz="900" spc="-1" strike="noStrike">
+                <a:solidFill>
+                  <a:srgbClr val="78ffc8"/>
+                </a:solidFill>
+                <a:latin typeface="Consolas"/>
+                <a:ea typeface="DejaVu Sans"/>
+              </a:rPr>
+              <a:t>    </a:t>
+            </a:r>
+            <a:r>
+              <a:rPr b="0" lang="en-US" sz="900" spc="-1" strike="noStrike">
+                <a:solidFill>
+                  <a:srgbClr val="78ffc8"/>
+                </a:solidFill>
+                <a:latin typeface="Consolas"/>
+                <a:ea typeface="DejaVu Sans"/>
+              </a:rPr>
+              <a:t>public static void main(String[] args) {</a:t>
+            </a:r>
+            <a:endParaRPr b="0" lang="en-US" sz="900" spc="-1" strike="noStrike">
+              <a:solidFill>
+                <a:srgbClr val="ffffff"/>
+              </a:solidFill>
+              <a:latin typeface="Arial"/>
+            </a:endParaRPr>
+          </a:p>
+          <a:p>
+            <a:pPr algn="ctr">
+              <a:lnSpc>
+                <a:spcPct val="100000"/>
+              </a:lnSpc>
+            </a:pPr>
+            <a:r>
+              <a:rPr b="0" lang="en-US" sz="900" spc="-1" strike="noStrike">
+                <a:solidFill>
+                  <a:srgbClr val="78ffc8"/>
+                </a:solidFill>
+                <a:latin typeface="Consolas"/>
+                <a:ea typeface="DejaVu Sans"/>
+              </a:rPr>
+              <a:t>        </a:t>
+            </a:r>
+            <a:r>
+              <a:rPr b="0" lang="en-US" sz="900" spc="-1" strike="noStrike">
+                <a:solidFill>
+                  <a:srgbClr val="78ffc8"/>
+                </a:solidFill>
+                <a:latin typeface="Consolas"/>
+                <a:ea typeface="DejaVu Sans"/>
+              </a:rPr>
+              <a:t>// 1. PREFIX (Önce Artır, Sonra Kullan)</a:t>
+            </a:r>
+            <a:endParaRPr b="0" lang="en-US" sz="900" spc="-1" strike="noStrike">
+              <a:solidFill>
+                <a:srgbClr val="ffffff"/>
+              </a:solidFill>
+              <a:latin typeface="Arial"/>
+            </a:endParaRPr>
+          </a:p>
+          <a:p>
+            <a:pPr algn="ctr">
+              <a:lnSpc>
+                <a:spcPct val="100000"/>
+              </a:lnSpc>
+            </a:pPr>
+            <a:r>
+              <a:rPr b="0" lang="en-US" sz="900" spc="-1" strike="noStrike">
+                <a:solidFill>
+                  <a:srgbClr val="78ffc8"/>
+                </a:solidFill>
+                <a:latin typeface="Consolas"/>
+                <a:ea typeface="DejaVu Sans"/>
+              </a:rPr>
+              <a:t>        </a:t>
+            </a:r>
+            <a:r>
+              <a:rPr b="0" lang="en-US" sz="900" spc="-1" strike="noStrike">
+                <a:solidFill>
+                  <a:srgbClr val="78ffc8"/>
+                </a:solidFill>
+                <a:latin typeface="Consolas"/>
+                <a:ea typeface="DejaVu Sans"/>
+              </a:rPr>
+              <a:t>int a = 5;</a:t>
+            </a:r>
+            <a:endParaRPr b="0" lang="en-US" sz="900" spc="-1" strike="noStrike">
+              <a:solidFill>
+                <a:srgbClr val="ffffff"/>
+              </a:solidFill>
+              <a:latin typeface="Arial"/>
+            </a:endParaRPr>
+          </a:p>
+          <a:p>
+            <a:pPr algn="ctr">
+              <a:lnSpc>
+                <a:spcPct val="100000"/>
+              </a:lnSpc>
+            </a:pPr>
+            <a:r>
+              <a:rPr b="0" lang="en-US" sz="900" spc="-1" strike="noStrike">
+                <a:solidFill>
+                  <a:srgbClr val="78ffc8"/>
+                </a:solidFill>
+                <a:latin typeface="Consolas"/>
+                <a:ea typeface="DejaVu Sans"/>
+              </a:rPr>
+              <a:t>        </a:t>
+            </a:r>
+            <a:r>
+              <a:rPr b="0" lang="en-US" sz="900" spc="-1" strike="noStrike">
+                <a:solidFill>
+                  <a:srgbClr val="78ffc8"/>
+                </a:solidFill>
+                <a:latin typeface="Consolas"/>
+                <a:ea typeface="DejaVu Sans"/>
+              </a:rPr>
+              <a:t>int b = ++a; // a=6 olur, b'ye 6 atanır</a:t>
+            </a:r>
+            <a:endParaRPr b="0" lang="en-US" sz="900" spc="-1" strike="noStrike">
+              <a:solidFill>
+                <a:srgbClr val="ffffff"/>
+              </a:solidFill>
+              <a:latin typeface="Arial"/>
+            </a:endParaRPr>
+          </a:p>
+          <a:p>
+            <a:pPr algn="ctr">
+              <a:lnSpc>
+                <a:spcPct val="100000"/>
+              </a:lnSpc>
+            </a:pPr>
+            <a:r>
+              <a:rPr b="0" lang="en-US" sz="900" spc="-1" strike="noStrike">
+                <a:solidFill>
+                  <a:srgbClr val="78ffc8"/>
+                </a:solidFill>
+                <a:latin typeface="Consolas"/>
+                <a:ea typeface="DejaVu Sans"/>
+              </a:rPr>
+              <a:t>        </a:t>
+            </a:r>
+            <a:r>
+              <a:rPr b="0" lang="en-US" sz="900" spc="-1" strike="noStrike">
+                <a:solidFill>
+                  <a:srgbClr val="78ffc8"/>
+                </a:solidFill>
+                <a:latin typeface="Consolas"/>
+                <a:ea typeface="DejaVu Sans"/>
+              </a:rPr>
+              <a:t>// 2. POSTFIX (Önce Kullan, Sonra Artır)</a:t>
+            </a:r>
+            <a:endParaRPr b="0" lang="en-US" sz="900" spc="-1" strike="noStrike">
+              <a:solidFill>
+                <a:srgbClr val="ffffff"/>
+              </a:solidFill>
+              <a:latin typeface="Arial"/>
+            </a:endParaRPr>
+          </a:p>
+          <a:p>
+            <a:pPr algn="ctr">
+              <a:lnSpc>
+                <a:spcPct val="100000"/>
+              </a:lnSpc>
+            </a:pPr>
+            <a:r>
+              <a:rPr b="0" lang="en-US" sz="900" spc="-1" strike="noStrike">
+                <a:solidFill>
+                  <a:srgbClr val="78ffc8"/>
+                </a:solidFill>
+                <a:latin typeface="Consolas"/>
+                <a:ea typeface="DejaVu Sans"/>
+              </a:rPr>
+              <a:t>        </a:t>
+            </a:r>
+            <a:r>
+              <a:rPr b="0" lang="en-US" sz="900" spc="-1" strike="noStrike">
+                <a:solidFill>
+                  <a:srgbClr val="78ffc8"/>
+                </a:solidFill>
+                <a:latin typeface="Consolas"/>
+                <a:ea typeface="DejaVu Sans"/>
+              </a:rPr>
+              <a:t>int x = 5;</a:t>
+            </a:r>
+            <a:endParaRPr b="0" lang="en-US" sz="900" spc="-1" strike="noStrike">
+              <a:solidFill>
+                <a:srgbClr val="ffffff"/>
+              </a:solidFill>
+              <a:latin typeface="Arial"/>
+            </a:endParaRPr>
+          </a:p>
+          <a:p>
+            <a:pPr algn="ctr">
+              <a:lnSpc>
+                <a:spcPct val="100000"/>
+              </a:lnSpc>
+            </a:pPr>
+            <a:r>
+              <a:rPr b="0" lang="en-US" sz="900" spc="-1" strike="noStrike">
+                <a:solidFill>
+                  <a:srgbClr val="78ffc8"/>
+                </a:solidFill>
+                <a:latin typeface="Consolas"/>
+                <a:ea typeface="DejaVu Sans"/>
+              </a:rPr>
+              <a:t>        </a:t>
+            </a:r>
+            <a:r>
+              <a:rPr b="0" lang="en-US" sz="900" spc="-1" strike="noStrike">
+                <a:solidFill>
+                  <a:srgbClr val="78ffc8"/>
+                </a:solidFill>
+                <a:latin typeface="Consolas"/>
+                <a:ea typeface="DejaVu Sans"/>
+              </a:rPr>
+              <a:t>int y = x++; // y'ye 5 atanır, sonra x=6 olur</a:t>
+            </a:r>
+            <a:endParaRPr b="0" lang="en-US" sz="900" spc="-1" strike="noStrike">
+              <a:solidFill>
+                <a:srgbClr val="ffffff"/>
+              </a:solidFill>
+              <a:latin typeface="Arial"/>
+            </a:endParaRPr>
+          </a:p>
+          <a:p>
+            <a:pPr algn="ctr">
+              <a:lnSpc>
+                <a:spcPct val="100000"/>
+              </a:lnSpc>
+            </a:pPr>
+            <a:r>
+              <a:rPr b="0" lang="en-US" sz="900" spc="-1" strike="noStrike">
+                <a:solidFill>
+                  <a:srgbClr val="78ffc8"/>
+                </a:solidFill>
+                <a:latin typeface="Consolas"/>
+                <a:ea typeface="DejaVu Sans"/>
+              </a:rPr>
+              <a:t>        </a:t>
+            </a:r>
+            <a:r>
+              <a:rPr b="0" lang="en-US" sz="900" spc="-1" strike="noStrike">
+                <a:solidFill>
+                  <a:srgbClr val="78ffc8"/>
+                </a:solidFill>
+                <a:latin typeface="Consolas"/>
+                <a:ea typeface="DejaVu Sans"/>
+              </a:rPr>
+              <a:t>// 3. TAM SAYI BÖLMESİ (Integer Division)</a:t>
+            </a:r>
+            <a:endParaRPr b="0" lang="en-US" sz="900" spc="-1" strike="noStrike">
+              <a:solidFill>
+                <a:srgbClr val="ffffff"/>
+              </a:solidFill>
+              <a:latin typeface="Arial"/>
+            </a:endParaRPr>
+          </a:p>
+          <a:p>
+            <a:pPr algn="ctr">
+              <a:lnSpc>
+                <a:spcPct val="100000"/>
+              </a:lnSpc>
+            </a:pPr>
+            <a:r>
+              <a:rPr b="0" lang="en-US" sz="900" spc="-1" strike="noStrike">
+                <a:solidFill>
+                  <a:srgbClr val="78ffc8"/>
+                </a:solidFill>
+                <a:latin typeface="Consolas"/>
+                <a:ea typeface="DejaVu Sans"/>
+              </a:rPr>
+              <a:t>        </a:t>
+            </a:r>
+            <a:r>
+              <a:rPr b="0" lang="en-US" sz="900" spc="-1" strike="noStrike">
+                <a:solidFill>
+                  <a:srgbClr val="78ffc8"/>
+                </a:solidFill>
+                <a:latin typeface="Consolas"/>
+                <a:ea typeface="DejaVu Sans"/>
+              </a:rPr>
+              <a:t>int yanlisBolme = 5 / 2;     // Sonuç: 2</a:t>
+            </a:r>
+            <a:endParaRPr b="0" lang="en-US" sz="900" spc="-1" strike="noStrike">
+              <a:solidFill>
+                <a:srgbClr val="ffffff"/>
+              </a:solidFill>
+              <a:latin typeface="Arial"/>
+            </a:endParaRPr>
+          </a:p>
+          <a:p>
+            <a:pPr algn="ctr">
+              <a:lnSpc>
+                <a:spcPct val="100000"/>
+              </a:lnSpc>
+            </a:pPr>
+            <a:r>
+              <a:rPr b="0" lang="en-US" sz="900" spc="-1" strike="noStrike">
+                <a:solidFill>
+                  <a:srgbClr val="78ffc8"/>
+                </a:solidFill>
+                <a:latin typeface="Consolas"/>
+                <a:ea typeface="DejaVu Sans"/>
+              </a:rPr>
+              <a:t>        </a:t>
+            </a:r>
+            <a:r>
+              <a:rPr b="0" lang="en-US" sz="900" spc="-1" strike="noStrike">
+                <a:solidFill>
+                  <a:srgbClr val="78ffc8"/>
+                </a:solidFill>
+                <a:latin typeface="Consolas"/>
+                <a:ea typeface="DejaVu Sans"/>
+              </a:rPr>
+              <a:t>double doubleHata = 5 / 2;   // Sonuç: 2.0</a:t>
+            </a:r>
+            <a:endParaRPr b="0" lang="en-US" sz="900" spc="-1" strike="noStrike">
+              <a:solidFill>
+                <a:srgbClr val="ffffff"/>
+              </a:solidFill>
+              <a:latin typeface="Arial"/>
+            </a:endParaRPr>
+          </a:p>
+          <a:p>
+            <a:pPr algn="ctr">
+              <a:lnSpc>
+                <a:spcPct val="100000"/>
+              </a:lnSpc>
+            </a:pPr>
+            <a:r>
+              <a:rPr b="0" lang="en-US" sz="900" spc="-1" strike="noStrike">
+                <a:solidFill>
+                  <a:srgbClr val="78ffc8"/>
+                </a:solidFill>
+                <a:latin typeface="Consolas"/>
+                <a:ea typeface="DejaVu Sans"/>
+              </a:rPr>
+              <a:t>        </a:t>
+            </a:r>
+            <a:r>
+              <a:rPr b="0" lang="en-US" sz="900" spc="-1" strike="noStrike">
+                <a:solidFill>
+                  <a:srgbClr val="78ffc8"/>
+                </a:solidFill>
+                <a:latin typeface="Consolas"/>
+                <a:ea typeface="DejaVu Sans"/>
+              </a:rPr>
+              <a:t>double dogruBolme = 5.0 / 2; // Sonuç: 2.5</a:t>
+            </a:r>
+            <a:endParaRPr b="0" lang="en-US" sz="900" spc="-1" strike="noStrike">
+              <a:solidFill>
+                <a:srgbClr val="ffffff"/>
+              </a:solidFill>
+              <a:latin typeface="Arial"/>
+            </a:endParaRPr>
+          </a:p>
+          <a:p>
+            <a:pPr algn="ctr">
+              <a:lnSpc>
+                <a:spcPct val="100000"/>
+              </a:lnSpc>
+            </a:pPr>
+            <a:r>
+              <a:rPr b="0" lang="en-US" sz="900" spc="-1" strike="noStrike">
+                <a:solidFill>
+                  <a:srgbClr val="78ffc8"/>
+                </a:solidFill>
+                <a:latin typeface="Consolas"/>
+                <a:ea typeface="DejaVu Sans"/>
+              </a:rPr>
+              <a:t>        </a:t>
+            </a:r>
+            <a:r>
+              <a:rPr b="0" lang="en-US" sz="900" spc="-1" strike="noStrike">
+                <a:solidFill>
+                  <a:srgbClr val="78ffc8"/>
+                </a:solidFill>
+                <a:latin typeface="Consolas"/>
+                <a:ea typeface="DejaVu Sans"/>
+              </a:rPr>
+              <a:t>System.out.println("Prefix b: " + b);</a:t>
+            </a:r>
+            <a:endParaRPr b="0" lang="en-US" sz="900" spc="-1" strike="noStrike">
+              <a:solidFill>
+                <a:srgbClr val="ffffff"/>
+              </a:solidFill>
+              <a:latin typeface="Arial"/>
+            </a:endParaRPr>
+          </a:p>
+          <a:p>
+            <a:pPr algn="ctr">
+              <a:lnSpc>
+                <a:spcPct val="100000"/>
+              </a:lnSpc>
+            </a:pPr>
+            <a:r>
+              <a:rPr b="0" lang="en-US" sz="900" spc="-1" strike="noStrike">
+                <a:solidFill>
+                  <a:srgbClr val="78ffc8"/>
+                </a:solidFill>
+                <a:latin typeface="Consolas"/>
+                <a:ea typeface="DejaVu Sans"/>
+              </a:rPr>
+              <a:t>        </a:t>
+            </a:r>
+            <a:r>
+              <a:rPr b="0" lang="en-US" sz="900" spc="-1" strike="noStrike">
+                <a:solidFill>
+                  <a:srgbClr val="78ffc8"/>
+                </a:solidFill>
+                <a:latin typeface="Consolas"/>
+                <a:ea typeface="DejaVu Sans"/>
+              </a:rPr>
+              <a:t>System.out.println("Postfix y: " + y);</a:t>
+            </a:r>
+            <a:endParaRPr b="0" lang="en-US" sz="900" spc="-1" strike="noStrike">
+              <a:solidFill>
+                <a:srgbClr val="ffffff"/>
+              </a:solidFill>
+              <a:latin typeface="Arial"/>
+            </a:endParaRPr>
+          </a:p>
+          <a:p>
+            <a:pPr algn="ctr">
+              <a:lnSpc>
+                <a:spcPct val="100000"/>
+              </a:lnSpc>
+            </a:pPr>
+            <a:r>
+              <a:rPr b="0" lang="en-US" sz="900" spc="-1" strike="noStrike">
+                <a:solidFill>
+                  <a:srgbClr val="78ffc8"/>
+                </a:solidFill>
+                <a:latin typeface="Consolas"/>
+                <a:ea typeface="DejaVu Sans"/>
+              </a:rPr>
+              <a:t>        </a:t>
+            </a:r>
+            <a:r>
+              <a:rPr b="0" lang="en-US" sz="900" spc="-1" strike="noStrike">
+                <a:solidFill>
+                  <a:srgbClr val="78ffc8"/>
+                </a:solidFill>
+                <a:latin typeface="Consolas"/>
+                <a:ea typeface="DejaVu Sans"/>
+              </a:rPr>
+              <a:t>System.out.println("Doğru Bölme: " + dogruBolme);</a:t>
+            </a:r>
+            <a:endParaRPr b="0" lang="en-US" sz="900" spc="-1" strike="noStrike">
+              <a:solidFill>
+                <a:srgbClr val="ffffff"/>
+              </a:solidFill>
+              <a:latin typeface="Arial"/>
+            </a:endParaRPr>
+          </a:p>
+          <a:p>
+            <a:pPr algn="ctr">
+              <a:lnSpc>
+                <a:spcPct val="100000"/>
+              </a:lnSpc>
+            </a:pPr>
+            <a:r>
+              <a:rPr b="0" lang="en-US" sz="900" spc="-1" strike="noStrike">
+                <a:solidFill>
+                  <a:srgbClr val="78ffc8"/>
+                </a:solidFill>
+                <a:latin typeface="Consolas"/>
+                <a:ea typeface="DejaVu Sans"/>
+              </a:rPr>
+              <a:t>    </a:t>
+            </a:r>
+            <a:r>
+              <a:rPr b="0" lang="en-US" sz="900" spc="-1" strike="noStrike">
+                <a:solidFill>
+                  <a:srgbClr val="78ffc8"/>
+                </a:solidFill>
+                <a:latin typeface="Consolas"/>
+                <a:ea typeface="DejaVu Sans"/>
+              </a:rPr>
+              <a:t>}</a:t>
+            </a:r>
+            <a:endParaRPr b="0" lang="en-US" sz="900" spc="-1" strike="noStrike">
+              <a:solidFill>
+                <a:srgbClr val="ffffff"/>
+              </a:solidFill>
+              <a:latin typeface="Arial"/>
+            </a:endParaRPr>
+          </a:p>
+          <a:p>
+            <a:pPr algn="ctr">
+              <a:lnSpc>
+                <a:spcPct val="100000"/>
+              </a:lnSpc>
+            </a:pPr>
+            <a:r>
+              <a:rPr b="0" lang="en-US" sz="900" spc="-1" strike="noStrike">
+                <a:solidFill>
+                  <a:srgbClr val="78ffc8"/>
+                </a:solidFill>
+                <a:latin typeface="Consolas"/>
+                <a:ea typeface="DejaVu Sans"/>
+              </a:rPr>
+              <a:t>}</a:t>
+            </a:r>
+            <a:endParaRPr b="0" lang="en-US" sz="900" spc="-1" strike="noStrike">
+              <a:solidFill>
+                <a:srgbClr val="ffffff"/>
+              </a:solidFill>
+              <a:latin typeface="Arial"/>
+            </a:endParaRPr>
+          </a:p>
+        </p:txBody>
+      </p:sp>
+      <p:sp>
+        <p:nvSpPr>
+          <p:cNvPr id="300" name="TextBox 33"/>
           <p:cNvSpPr/>
           <p:nvPr/>
         </p:nvSpPr>
@@ -5374,7 +7939,7 @@
         <p:spPr>
           <a:xfrm>
             <a:off x="0" y="0"/>
-            <a:ext cx="12184920" cy="6854040"/>
+            <a:ext cx="12184560" cy="6853680"/>
           </a:xfrm>
           <a:prstGeom prst="rect">
             <a:avLst/>
@@ -5434,7 +7999,7 @@
         <p:spPr>
           <a:xfrm>
             <a:off x="0" y="0"/>
-            <a:ext cx="14400" cy="6854040"/>
+            <a:ext cx="14040" cy="6853680"/>
           </a:xfrm>
           <a:prstGeom prst="rect">
             <a:avLst/>
@@ -5494,7 +8059,7 @@
         <p:spPr>
           <a:xfrm>
             <a:off x="914400" y="0"/>
-            <a:ext cx="14400" cy="6854040"/>
+            <a:ext cx="14040" cy="6853680"/>
           </a:xfrm>
           <a:prstGeom prst="rect">
             <a:avLst/>
@@ -5554,7 +8119,7 @@
         <p:spPr>
           <a:xfrm>
             <a:off x="1828800" y="0"/>
-            <a:ext cx="14400" cy="6854040"/>
+            <a:ext cx="14040" cy="6853680"/>
           </a:xfrm>
           <a:prstGeom prst="rect">
             <a:avLst/>
@@ -5614,7 +8179,7 @@
         <p:spPr>
           <a:xfrm>
             <a:off x="2743200" y="0"/>
-            <a:ext cx="14400" cy="6854040"/>
+            <a:ext cx="14040" cy="6853680"/>
           </a:xfrm>
           <a:prstGeom prst="rect">
             <a:avLst/>
@@ -5674,7 +8239,7 @@
         <p:spPr>
           <a:xfrm>
             <a:off x="3657600" y="0"/>
-            <a:ext cx="14400" cy="6854040"/>
+            <a:ext cx="14040" cy="6853680"/>
           </a:xfrm>
           <a:prstGeom prst="rect">
             <a:avLst/>
@@ -5734,7 +8299,7 @@
         <p:spPr>
           <a:xfrm>
             <a:off x="4572000" y="0"/>
-            <a:ext cx="14400" cy="6854040"/>
+            <a:ext cx="14040" cy="6853680"/>
           </a:xfrm>
           <a:prstGeom prst="rect">
             <a:avLst/>
@@ -5794,7 +8359,7 @@
         <p:spPr>
           <a:xfrm>
             <a:off x="5486400" y="0"/>
-            <a:ext cx="14400" cy="6854040"/>
+            <a:ext cx="14040" cy="6853680"/>
           </a:xfrm>
           <a:prstGeom prst="rect">
             <a:avLst/>
@@ -5854,7 +8419,7 @@
         <p:spPr>
           <a:xfrm>
             <a:off x="6400800" y="0"/>
-            <a:ext cx="14400" cy="6854040"/>
+            <a:ext cx="14040" cy="6853680"/>
           </a:xfrm>
           <a:prstGeom prst="rect">
             <a:avLst/>
@@ -5914,7 +8479,7 @@
         <p:spPr>
           <a:xfrm>
             <a:off x="7315200" y="0"/>
-            <a:ext cx="14400" cy="6854040"/>
+            <a:ext cx="14040" cy="6853680"/>
           </a:xfrm>
           <a:prstGeom prst="rect">
             <a:avLst/>
@@ -5974,7 +8539,7 @@
         <p:spPr>
           <a:xfrm>
             <a:off x="8229600" y="0"/>
-            <a:ext cx="14400" cy="6854040"/>
+            <a:ext cx="14040" cy="6853680"/>
           </a:xfrm>
           <a:prstGeom prst="rect">
             <a:avLst/>
@@ -6034,7 +8599,7 @@
         <p:spPr>
           <a:xfrm>
             <a:off x="9144000" y="0"/>
-            <a:ext cx="14400" cy="6854040"/>
+            <a:ext cx="14040" cy="6853680"/>
           </a:xfrm>
           <a:prstGeom prst="rect">
             <a:avLst/>
@@ -6094,7 +8659,7 @@
         <p:spPr>
           <a:xfrm>
             <a:off x="10058400" y="0"/>
-            <a:ext cx="14400" cy="6854040"/>
+            <a:ext cx="14040" cy="6853680"/>
           </a:xfrm>
           <a:prstGeom prst="rect">
             <a:avLst/>
@@ -6154,7 +8719,7 @@
         <p:spPr>
           <a:xfrm>
             <a:off x="10972800" y="0"/>
-            <a:ext cx="14400" cy="6854040"/>
+            <a:ext cx="14040" cy="6853680"/>
           </a:xfrm>
           <a:prstGeom prst="rect">
             <a:avLst/>
@@ -6214,7 +8779,7 @@
         <p:spPr>
           <a:xfrm>
             <a:off x="11887200" y="0"/>
-            <a:ext cx="14400" cy="6854040"/>
+            <a:ext cx="14040" cy="6853680"/>
           </a:xfrm>
           <a:prstGeom prst="rect">
             <a:avLst/>
@@ -6274,7 +8839,7 @@
         <p:spPr>
           <a:xfrm>
             <a:off x="0" y="0"/>
-            <a:ext cx="316080" cy="6854040"/>
+            <a:ext cx="315720" cy="6853680"/>
           </a:xfrm>
           <a:prstGeom prst="rect">
             <a:avLst/>
@@ -6334,7 +8899,7 @@
         <p:spPr>
           <a:xfrm>
             <a:off x="9875520" y="365760"/>
-            <a:ext cx="2007720" cy="498960"/>
+            <a:ext cx="2007360" cy="498600"/>
           </a:xfrm>
           <a:prstGeom prst="roundRect">
             <a:avLst>
@@ -6562,7 +9127,7 @@
         <p:spPr>
           <a:xfrm>
             <a:off x="987480" y="3182040"/>
-            <a:ext cx="3287880" cy="2739240"/>
+            <a:ext cx="3287520" cy="2738880"/>
           </a:xfrm>
           <a:prstGeom prst="roundRect">
             <a:avLst>
@@ -6624,7 +9189,7 @@
         <p:spPr>
           <a:xfrm>
             <a:off x="914400" y="3108960"/>
-            <a:ext cx="3287880" cy="2739240"/>
+            <a:ext cx="3287520" cy="2738880"/>
           </a:xfrm>
           <a:prstGeom prst="roundRect">
             <a:avLst>
@@ -6787,7 +9352,7 @@
         <p:spPr>
           <a:xfrm>
             <a:off x="4507920" y="3182040"/>
-            <a:ext cx="3287880" cy="2739240"/>
+            <a:ext cx="3287520" cy="2738880"/>
           </a:xfrm>
           <a:prstGeom prst="roundRect">
             <a:avLst>
@@ -6849,7 +9414,7 @@
         <p:spPr>
           <a:xfrm>
             <a:off x="4434840" y="3108960"/>
-            <a:ext cx="3287880" cy="2739240"/>
+            <a:ext cx="3287520" cy="2738880"/>
           </a:xfrm>
           <a:prstGeom prst="roundRect">
             <a:avLst>
@@ -7107,7 +9672,7 @@
         <p:spPr>
           <a:xfrm>
             <a:off x="8028360" y="3182040"/>
-            <a:ext cx="3287880" cy="2739240"/>
+            <a:ext cx="3287520" cy="2738880"/>
           </a:xfrm>
           <a:prstGeom prst="roundRect">
             <a:avLst>
@@ -7169,7 +9734,7 @@
         <p:spPr>
           <a:xfrm>
             <a:off x="7955280" y="3108960"/>
-            <a:ext cx="3700440" cy="3060360"/>
+            <a:ext cx="3700080" cy="3060000"/>
           </a:xfrm>
           <a:prstGeom prst="roundRect">
             <a:avLst>
@@ -7614,7 +10179,7 @@
         <p:spPr>
           <a:xfrm>
             <a:off x="0" y="0"/>
-            <a:ext cx="12184920" cy="6854040"/>
+            <a:ext cx="12184560" cy="6853680"/>
           </a:xfrm>
           <a:prstGeom prst="rect">
             <a:avLst/>
@@ -7674,7 +10239,7 @@
         <p:spPr>
           <a:xfrm>
             <a:off x="0" y="0"/>
-            <a:ext cx="14400" cy="6854040"/>
+            <a:ext cx="14040" cy="6853680"/>
           </a:xfrm>
           <a:prstGeom prst="rect">
             <a:avLst/>
@@ -7734,7 +10299,7 @@
         <p:spPr>
           <a:xfrm>
             <a:off x="914400" y="0"/>
-            <a:ext cx="14400" cy="6854040"/>
+            <a:ext cx="14040" cy="6853680"/>
           </a:xfrm>
           <a:prstGeom prst="rect">
             <a:avLst/>
@@ -7794,7 +10359,7 @@
         <p:spPr>
           <a:xfrm>
             <a:off x="1828800" y="0"/>
-            <a:ext cx="14400" cy="6854040"/>
+            <a:ext cx="14040" cy="6853680"/>
           </a:xfrm>
           <a:prstGeom prst="rect">
             <a:avLst/>
@@ -7854,7 +10419,7 @@
         <p:spPr>
           <a:xfrm>
             <a:off x="2743200" y="0"/>
-            <a:ext cx="14400" cy="6854040"/>
+            <a:ext cx="14040" cy="6853680"/>
           </a:xfrm>
           <a:prstGeom prst="rect">
             <a:avLst/>
@@ -7914,7 +10479,7 @@
         <p:spPr>
           <a:xfrm>
             <a:off x="3657600" y="0"/>
-            <a:ext cx="14400" cy="6854040"/>
+            <a:ext cx="14040" cy="6853680"/>
           </a:xfrm>
           <a:prstGeom prst="rect">
             <a:avLst/>
@@ -7974,7 +10539,7 @@
         <p:spPr>
           <a:xfrm>
             <a:off x="4572000" y="0"/>
-            <a:ext cx="14400" cy="6854040"/>
+            <a:ext cx="14040" cy="6853680"/>
           </a:xfrm>
           <a:prstGeom prst="rect">
             <a:avLst/>
@@ -8034,7 +10599,7 @@
         <p:spPr>
           <a:xfrm>
             <a:off x="5486400" y="0"/>
-            <a:ext cx="14400" cy="6854040"/>
+            <a:ext cx="14040" cy="6853680"/>
           </a:xfrm>
           <a:prstGeom prst="rect">
             <a:avLst/>
@@ -8094,7 +10659,7 @@
         <p:spPr>
           <a:xfrm>
             <a:off x="6400800" y="0"/>
-            <a:ext cx="14400" cy="6854040"/>
+            <a:ext cx="14040" cy="6853680"/>
           </a:xfrm>
           <a:prstGeom prst="rect">
             <a:avLst/>
@@ -8154,7 +10719,7 @@
         <p:spPr>
           <a:xfrm>
             <a:off x="7315200" y="0"/>
-            <a:ext cx="14400" cy="6854040"/>
+            <a:ext cx="14040" cy="6853680"/>
           </a:xfrm>
           <a:prstGeom prst="rect">
             <a:avLst/>
@@ -8214,7 +10779,7 @@
         <p:spPr>
           <a:xfrm>
             <a:off x="8229600" y="0"/>
-            <a:ext cx="14400" cy="6854040"/>
+            <a:ext cx="14040" cy="6853680"/>
           </a:xfrm>
           <a:prstGeom prst="rect">
             <a:avLst/>
@@ -8274,7 +10839,7 @@
         <p:spPr>
           <a:xfrm>
             <a:off x="9144000" y="0"/>
-            <a:ext cx="14400" cy="6854040"/>
+            <a:ext cx="14040" cy="6853680"/>
           </a:xfrm>
           <a:prstGeom prst="rect">
             <a:avLst/>
@@ -8334,7 +10899,7 @@
         <p:spPr>
           <a:xfrm>
             <a:off x="10058400" y="0"/>
-            <a:ext cx="14400" cy="6854040"/>
+            <a:ext cx="14040" cy="6853680"/>
           </a:xfrm>
           <a:prstGeom prst="rect">
             <a:avLst/>
@@ -8394,7 +10959,7 @@
         <p:spPr>
           <a:xfrm>
             <a:off x="10972800" y="0"/>
-            <a:ext cx="14400" cy="6854040"/>
+            <a:ext cx="14040" cy="6853680"/>
           </a:xfrm>
           <a:prstGeom prst="rect">
             <a:avLst/>
@@ -8454,7 +11019,7 @@
         <p:spPr>
           <a:xfrm>
             <a:off x="11887200" y="0"/>
-            <a:ext cx="14400" cy="6854040"/>
+            <a:ext cx="14040" cy="6853680"/>
           </a:xfrm>
           <a:prstGeom prst="rect">
             <a:avLst/>
@@ -8514,7 +11079,7 @@
         <p:spPr>
           <a:xfrm>
             <a:off x="0" y="0"/>
-            <a:ext cx="316080" cy="6854040"/>
+            <a:ext cx="315720" cy="6853680"/>
           </a:xfrm>
           <a:prstGeom prst="rect">
             <a:avLst/>
@@ -8574,7 +11139,7 @@
         <p:spPr>
           <a:xfrm>
             <a:off x="9875520" y="365760"/>
-            <a:ext cx="2007720" cy="498960"/>
+            <a:ext cx="2007360" cy="498600"/>
           </a:xfrm>
           <a:prstGeom prst="roundRect">
             <a:avLst>
@@ -8779,7 +11344,7 @@
         <p:spPr>
           <a:xfrm>
             <a:off x="987480" y="3182040"/>
-            <a:ext cx="3287880" cy="2739240"/>
+            <a:ext cx="3287520" cy="2738880"/>
           </a:xfrm>
           <a:prstGeom prst="roundRect">
             <a:avLst>
@@ -8841,7 +11406,7 @@
         <p:spPr>
           <a:xfrm>
             <a:off x="914400" y="3108960"/>
-            <a:ext cx="3287880" cy="3060720"/>
+            <a:ext cx="3287520" cy="3060360"/>
           </a:xfrm>
           <a:prstGeom prst="roundRect">
             <a:avLst>
@@ -9032,7 +11597,7 @@
         <p:spPr>
           <a:xfrm>
             <a:off x="4507920" y="3182040"/>
-            <a:ext cx="3287880" cy="2739240"/>
+            <a:ext cx="3287520" cy="2738880"/>
           </a:xfrm>
           <a:prstGeom prst="roundRect">
             <a:avLst>
@@ -9094,7 +11659,7 @@
         <p:spPr>
           <a:xfrm>
             <a:off x="4434840" y="3108960"/>
-            <a:ext cx="3287880" cy="2739240"/>
+            <a:ext cx="3287520" cy="2738880"/>
           </a:xfrm>
           <a:prstGeom prst="roundRect">
             <a:avLst>
@@ -9352,7 +11917,7 @@
         <p:spPr>
           <a:xfrm>
             <a:off x="8028360" y="3182040"/>
-            <a:ext cx="3287880" cy="2739240"/>
+            <a:ext cx="3287520" cy="2738880"/>
           </a:xfrm>
           <a:prstGeom prst="roundRect">
             <a:avLst>
@@ -9414,7 +11979,7 @@
         <p:spPr>
           <a:xfrm>
             <a:off x="7955280" y="3108960"/>
-            <a:ext cx="3700440" cy="3060360"/>
+            <a:ext cx="3700080" cy="3060000"/>
           </a:xfrm>
           <a:prstGeom prst="roundRect">
             <a:avLst>
@@ -9859,7 +12424,7 @@
         <p:spPr>
           <a:xfrm>
             <a:off x="0" y="0"/>
-            <a:ext cx="12184920" cy="6854040"/>
+            <a:ext cx="12184560" cy="6853680"/>
           </a:xfrm>
           <a:prstGeom prst="rect">
             <a:avLst/>
@@ -9919,7 +12484,7 @@
         <p:spPr>
           <a:xfrm>
             <a:off x="0" y="0"/>
-            <a:ext cx="14400" cy="6854040"/>
+            <a:ext cx="14040" cy="6853680"/>
           </a:xfrm>
           <a:prstGeom prst="rect">
             <a:avLst/>
@@ -9979,7 +12544,7 @@
         <p:spPr>
           <a:xfrm>
             <a:off x="914400" y="0"/>
-            <a:ext cx="14400" cy="6854040"/>
+            <a:ext cx="14040" cy="6853680"/>
           </a:xfrm>
           <a:prstGeom prst="rect">
             <a:avLst/>
@@ -10039,7 +12604,7 @@
         <p:spPr>
           <a:xfrm>
             <a:off x="1828800" y="0"/>
-            <a:ext cx="14400" cy="6854040"/>
+            <a:ext cx="14040" cy="6853680"/>
           </a:xfrm>
           <a:prstGeom prst="rect">
             <a:avLst/>
@@ -10099,7 +12664,7 @@
         <p:spPr>
           <a:xfrm>
             <a:off x="2743200" y="0"/>
-            <a:ext cx="14400" cy="6854040"/>
+            <a:ext cx="14040" cy="6853680"/>
           </a:xfrm>
           <a:prstGeom prst="rect">
             <a:avLst/>
@@ -10159,7 +12724,7 @@
         <p:spPr>
           <a:xfrm>
             <a:off x="3657600" y="0"/>
-            <a:ext cx="14400" cy="6854040"/>
+            <a:ext cx="14040" cy="6853680"/>
           </a:xfrm>
           <a:prstGeom prst="rect">
             <a:avLst/>
@@ -10219,7 +12784,7 @@
         <p:spPr>
           <a:xfrm>
             <a:off x="4572000" y="0"/>
-            <a:ext cx="14400" cy="6854040"/>
+            <a:ext cx="14040" cy="6853680"/>
           </a:xfrm>
           <a:prstGeom prst="rect">
             <a:avLst/>
@@ -10279,7 +12844,7 @@
         <p:spPr>
           <a:xfrm>
             <a:off x="5486400" y="0"/>
-            <a:ext cx="14400" cy="6854040"/>
+            <a:ext cx="14040" cy="6853680"/>
           </a:xfrm>
           <a:prstGeom prst="rect">
             <a:avLst/>
@@ -10339,7 +12904,7 @@
         <p:spPr>
           <a:xfrm>
             <a:off x="6400800" y="0"/>
-            <a:ext cx="14400" cy="6854040"/>
+            <a:ext cx="14040" cy="6853680"/>
           </a:xfrm>
           <a:prstGeom prst="rect">
             <a:avLst/>
@@ -10399,7 +12964,7 @@
         <p:spPr>
           <a:xfrm>
             <a:off x="7315200" y="0"/>
-            <a:ext cx="14400" cy="6854040"/>
+            <a:ext cx="14040" cy="6853680"/>
           </a:xfrm>
           <a:prstGeom prst="rect">
             <a:avLst/>
@@ -10459,7 +13024,7 @@
         <p:spPr>
           <a:xfrm>
             <a:off x="8229600" y="0"/>
-            <a:ext cx="14400" cy="6854040"/>
+            <a:ext cx="14040" cy="6853680"/>
           </a:xfrm>
           <a:prstGeom prst="rect">
             <a:avLst/>
@@ -10519,7 +13084,7 @@
         <p:spPr>
           <a:xfrm>
             <a:off x="9144000" y="0"/>
-            <a:ext cx="14400" cy="6854040"/>
+            <a:ext cx="14040" cy="6853680"/>
           </a:xfrm>
           <a:prstGeom prst="rect">
             <a:avLst/>
@@ -10579,7 +13144,7 @@
         <p:spPr>
           <a:xfrm>
             <a:off x="10058400" y="0"/>
-            <a:ext cx="14400" cy="6854040"/>
+            <a:ext cx="14040" cy="6853680"/>
           </a:xfrm>
           <a:prstGeom prst="rect">
             <a:avLst/>
@@ -10639,7 +13204,7 @@
         <p:spPr>
           <a:xfrm>
             <a:off x="10972800" y="0"/>
-            <a:ext cx="14400" cy="6854040"/>
+            <a:ext cx="14040" cy="6853680"/>
           </a:xfrm>
           <a:prstGeom prst="rect">
             <a:avLst/>
@@ -10699,7 +13264,7 @@
         <p:spPr>
           <a:xfrm>
             <a:off x="11887200" y="0"/>
-            <a:ext cx="14400" cy="6854040"/>
+            <a:ext cx="14040" cy="6853680"/>
           </a:xfrm>
           <a:prstGeom prst="rect">
             <a:avLst/>
@@ -10759,7 +13324,7 @@
         <p:spPr>
           <a:xfrm>
             <a:off x="0" y="0"/>
-            <a:ext cx="316080" cy="6854040"/>
+            <a:ext cx="315720" cy="6853680"/>
           </a:xfrm>
           <a:prstGeom prst="rect">
             <a:avLst/>
@@ -10819,7 +13384,7 @@
         <p:spPr>
           <a:xfrm>
             <a:off x="9875520" y="365760"/>
-            <a:ext cx="2007720" cy="498960"/>
+            <a:ext cx="2007360" cy="498600"/>
           </a:xfrm>
           <a:prstGeom prst="roundRect">
             <a:avLst>
@@ -11024,7 +13589,7 @@
         <p:spPr>
           <a:xfrm>
             <a:off x="987480" y="3182040"/>
-            <a:ext cx="3287880" cy="2739240"/>
+            <a:ext cx="3287520" cy="2738880"/>
           </a:xfrm>
           <a:prstGeom prst="roundRect">
             <a:avLst>
@@ -11086,7 +13651,7 @@
         <p:spPr>
           <a:xfrm>
             <a:off x="914400" y="3108960"/>
-            <a:ext cx="3287880" cy="3060720"/>
+            <a:ext cx="3287520" cy="3060360"/>
           </a:xfrm>
           <a:prstGeom prst="roundRect">
             <a:avLst>
@@ -11277,7 +13842,7 @@
         <p:spPr>
           <a:xfrm>
             <a:off x="4507920" y="3182040"/>
-            <a:ext cx="3287880" cy="2739240"/>
+            <a:ext cx="3287520" cy="2738880"/>
           </a:xfrm>
           <a:prstGeom prst="roundRect">
             <a:avLst>
@@ -11339,7 +13904,7 @@
         <p:spPr>
           <a:xfrm>
             <a:off x="4434840" y="3108960"/>
-            <a:ext cx="3287880" cy="2739240"/>
+            <a:ext cx="3287520" cy="2738880"/>
           </a:xfrm>
           <a:prstGeom prst="roundRect">
             <a:avLst>
@@ -11551,7 +14116,7 @@
         <p:spPr>
           <a:xfrm>
             <a:off x="8028360" y="3182040"/>
-            <a:ext cx="3287880" cy="2739240"/>
+            <a:ext cx="3287520" cy="2738880"/>
           </a:xfrm>
           <a:prstGeom prst="roundRect">
             <a:avLst>
@@ -11613,7 +14178,7 @@
         <p:spPr>
           <a:xfrm>
             <a:off x="7955280" y="2743200"/>
-            <a:ext cx="3700440" cy="3655440"/>
+            <a:ext cx="3700080" cy="3655080"/>
           </a:xfrm>
           <a:prstGeom prst="roundRect">
             <a:avLst>
@@ -12173,7 +14738,7 @@
         <p:spPr>
           <a:xfrm>
             <a:off x="0" y="0"/>
-            <a:ext cx="12184920" cy="6854040"/>
+            <a:ext cx="12184560" cy="6853680"/>
           </a:xfrm>
           <a:prstGeom prst="rect">
             <a:avLst/>
@@ -12233,7 +14798,7 @@
         <p:spPr>
           <a:xfrm>
             <a:off x="0" y="0"/>
-            <a:ext cx="14400" cy="6854040"/>
+            <a:ext cx="14040" cy="6853680"/>
           </a:xfrm>
           <a:prstGeom prst="rect">
             <a:avLst/>
@@ -12293,7 +14858,7 @@
         <p:spPr>
           <a:xfrm>
             <a:off x="914400" y="0"/>
-            <a:ext cx="14400" cy="6854040"/>
+            <a:ext cx="14040" cy="6853680"/>
           </a:xfrm>
           <a:prstGeom prst="rect">
             <a:avLst/>
@@ -12353,7 +14918,7 @@
         <p:spPr>
           <a:xfrm>
             <a:off x="1828800" y="0"/>
-            <a:ext cx="14400" cy="6854040"/>
+            <a:ext cx="14040" cy="6853680"/>
           </a:xfrm>
           <a:prstGeom prst="rect">
             <a:avLst/>
@@ -12413,7 +14978,7 @@
         <p:spPr>
           <a:xfrm>
             <a:off x="2743200" y="0"/>
-            <a:ext cx="14400" cy="6854040"/>
+            <a:ext cx="14040" cy="6853680"/>
           </a:xfrm>
           <a:prstGeom prst="rect">
             <a:avLst/>
@@ -12473,7 +15038,7 @@
         <p:spPr>
           <a:xfrm>
             <a:off x="3657600" y="0"/>
-            <a:ext cx="14400" cy="6854040"/>
+            <a:ext cx="14040" cy="6853680"/>
           </a:xfrm>
           <a:prstGeom prst="rect">
             <a:avLst/>
@@ -12533,7 +15098,7 @@
         <p:spPr>
           <a:xfrm>
             <a:off x="4572000" y="0"/>
-            <a:ext cx="14400" cy="6854040"/>
+            <a:ext cx="14040" cy="6853680"/>
           </a:xfrm>
           <a:prstGeom prst="rect">
             <a:avLst/>
@@ -12593,7 +15158,7 @@
         <p:spPr>
           <a:xfrm>
             <a:off x="5486400" y="0"/>
-            <a:ext cx="14400" cy="6854040"/>
+            <a:ext cx="14040" cy="6853680"/>
           </a:xfrm>
           <a:prstGeom prst="rect">
             <a:avLst/>
@@ -12653,7 +15218,7 @@
         <p:spPr>
           <a:xfrm>
             <a:off x="6400800" y="0"/>
-            <a:ext cx="14400" cy="6854040"/>
+            <a:ext cx="14040" cy="6853680"/>
           </a:xfrm>
           <a:prstGeom prst="rect">
             <a:avLst/>
@@ -12713,7 +15278,7 @@
         <p:spPr>
           <a:xfrm>
             <a:off x="7315200" y="0"/>
-            <a:ext cx="14400" cy="6854040"/>
+            <a:ext cx="14040" cy="6853680"/>
           </a:xfrm>
           <a:prstGeom prst="rect">
             <a:avLst/>
@@ -12773,7 +15338,7 @@
         <p:spPr>
           <a:xfrm>
             <a:off x="8229600" y="0"/>
-            <a:ext cx="14400" cy="6854040"/>
+            <a:ext cx="14040" cy="6853680"/>
           </a:xfrm>
           <a:prstGeom prst="rect">
             <a:avLst/>
@@ -12833,7 +15398,7 @@
         <p:spPr>
           <a:xfrm>
             <a:off x="9144000" y="0"/>
-            <a:ext cx="14400" cy="6854040"/>
+            <a:ext cx="14040" cy="6853680"/>
           </a:xfrm>
           <a:prstGeom prst="rect">
             <a:avLst/>
@@ -12893,7 +15458,7 @@
         <p:spPr>
           <a:xfrm>
             <a:off x="10058400" y="0"/>
-            <a:ext cx="14400" cy="6854040"/>
+            <a:ext cx="14040" cy="6853680"/>
           </a:xfrm>
           <a:prstGeom prst="rect">
             <a:avLst/>
@@ -12953,7 +15518,7 @@
         <p:spPr>
           <a:xfrm>
             <a:off x="10972800" y="0"/>
-            <a:ext cx="14400" cy="6854040"/>
+            <a:ext cx="14040" cy="6853680"/>
           </a:xfrm>
           <a:prstGeom prst="rect">
             <a:avLst/>
@@ -13013,7 +15578,7 @@
         <p:spPr>
           <a:xfrm>
             <a:off x="11887200" y="0"/>
-            <a:ext cx="14400" cy="6854040"/>
+            <a:ext cx="14040" cy="6853680"/>
           </a:xfrm>
           <a:prstGeom prst="rect">
             <a:avLst/>
@@ -13073,7 +15638,7 @@
         <p:spPr>
           <a:xfrm>
             <a:off x="0" y="0"/>
-            <a:ext cx="316080" cy="6854040"/>
+            <a:ext cx="315720" cy="6853680"/>
           </a:xfrm>
           <a:prstGeom prst="rect">
             <a:avLst/>
@@ -13133,7 +15698,7 @@
         <p:spPr>
           <a:xfrm>
             <a:off x="9875520" y="365760"/>
-            <a:ext cx="2007720" cy="498960"/>
+            <a:ext cx="2007360" cy="498600"/>
           </a:xfrm>
           <a:prstGeom prst="roundRect">
             <a:avLst>
@@ -13338,7 +15903,7 @@
         <p:spPr>
           <a:xfrm>
             <a:off x="987480" y="3182040"/>
-            <a:ext cx="3287880" cy="2739240"/>
+            <a:ext cx="3287520" cy="2738880"/>
           </a:xfrm>
           <a:prstGeom prst="roundRect">
             <a:avLst>
@@ -13400,7 +15965,7 @@
         <p:spPr>
           <a:xfrm>
             <a:off x="457200" y="2514600"/>
-            <a:ext cx="3745080" cy="4113000"/>
+            <a:ext cx="3744720" cy="4112640"/>
           </a:xfrm>
           <a:prstGeom prst="roundRect">
             <a:avLst>
@@ -13638,7 +16203,7 @@
         <p:spPr>
           <a:xfrm>
             <a:off x="4507920" y="3182040"/>
-            <a:ext cx="3287880" cy="2739240"/>
+            <a:ext cx="3287520" cy="2738880"/>
           </a:xfrm>
           <a:prstGeom prst="roundRect">
             <a:avLst>
@@ -13700,7 +16265,7 @@
         <p:spPr>
           <a:xfrm>
             <a:off x="4434840" y="2971800"/>
-            <a:ext cx="3287880" cy="3426120"/>
+            <a:ext cx="3287520" cy="3425760"/>
           </a:xfrm>
           <a:prstGeom prst="roundRect">
             <a:avLst>
@@ -13919,7 +16484,7 @@
         <p:spPr>
           <a:xfrm>
             <a:off x="8028360" y="3182040"/>
-            <a:ext cx="3287880" cy="2739240"/>
+            <a:ext cx="3287520" cy="2738880"/>
           </a:xfrm>
           <a:prstGeom prst="roundRect">
             <a:avLst>
@@ -13981,7 +16546,7 @@
         <p:spPr>
           <a:xfrm>
             <a:off x="8001000" y="3200400"/>
-            <a:ext cx="3472920" cy="2741400"/>
+            <a:ext cx="3472560" cy="2741040"/>
           </a:xfrm>
           <a:prstGeom prst="roundRect">
             <a:avLst>
@@ -14393,7 +16958,7 @@
         <p:spPr>
           <a:xfrm>
             <a:off x="0" y="0"/>
-            <a:ext cx="12184920" cy="6854040"/>
+            <a:ext cx="12184560" cy="6853680"/>
           </a:xfrm>
           <a:prstGeom prst="rect">
             <a:avLst/>
@@ -14453,7 +17018,7 @@
         <p:spPr>
           <a:xfrm>
             <a:off x="0" y="0"/>
-            <a:ext cx="14400" cy="6854040"/>
+            <a:ext cx="14040" cy="6853680"/>
           </a:xfrm>
           <a:prstGeom prst="rect">
             <a:avLst/>
@@ -14513,7 +17078,7 @@
         <p:spPr>
           <a:xfrm>
             <a:off x="914400" y="0"/>
-            <a:ext cx="14400" cy="6854040"/>
+            <a:ext cx="14040" cy="6853680"/>
           </a:xfrm>
           <a:prstGeom prst="rect">
             <a:avLst/>
@@ -14573,7 +17138,7 @@
         <p:spPr>
           <a:xfrm>
             <a:off x="1828800" y="0"/>
-            <a:ext cx="14400" cy="6854040"/>
+            <a:ext cx="14040" cy="6853680"/>
           </a:xfrm>
           <a:prstGeom prst="rect">
             <a:avLst/>
@@ -14633,7 +17198,7 @@
         <p:spPr>
           <a:xfrm>
             <a:off x="2743200" y="0"/>
-            <a:ext cx="14400" cy="6854040"/>
+            <a:ext cx="14040" cy="6853680"/>
           </a:xfrm>
           <a:prstGeom prst="rect">
             <a:avLst/>
@@ -14693,7 +17258,7 @@
         <p:spPr>
           <a:xfrm>
             <a:off x="3657600" y="0"/>
-            <a:ext cx="14400" cy="6854040"/>
+            <a:ext cx="14040" cy="6853680"/>
           </a:xfrm>
           <a:prstGeom prst="rect">
             <a:avLst/>
@@ -14753,7 +17318,7 @@
         <p:spPr>
           <a:xfrm>
             <a:off x="4572000" y="0"/>
-            <a:ext cx="14400" cy="6854040"/>
+            <a:ext cx="14040" cy="6853680"/>
           </a:xfrm>
           <a:prstGeom prst="rect">
             <a:avLst/>
@@ -14813,7 +17378,7 @@
         <p:spPr>
           <a:xfrm>
             <a:off x="5486400" y="0"/>
-            <a:ext cx="14400" cy="6854040"/>
+            <a:ext cx="14040" cy="6853680"/>
           </a:xfrm>
           <a:prstGeom prst="rect">
             <a:avLst/>
@@ -14873,7 +17438,7 @@
         <p:spPr>
           <a:xfrm>
             <a:off x="6400800" y="0"/>
-            <a:ext cx="14400" cy="6854040"/>
+            <a:ext cx="14040" cy="6853680"/>
           </a:xfrm>
           <a:prstGeom prst="rect">
             <a:avLst/>
@@ -14933,7 +17498,7 @@
         <p:spPr>
           <a:xfrm>
             <a:off x="7315200" y="0"/>
-            <a:ext cx="14400" cy="6854040"/>
+            <a:ext cx="14040" cy="6853680"/>
           </a:xfrm>
           <a:prstGeom prst="rect">
             <a:avLst/>
@@ -14993,7 +17558,7 @@
         <p:spPr>
           <a:xfrm>
             <a:off x="8229600" y="0"/>
-            <a:ext cx="14400" cy="6854040"/>
+            <a:ext cx="14040" cy="6853680"/>
           </a:xfrm>
           <a:prstGeom prst="rect">
             <a:avLst/>
@@ -15053,7 +17618,7 @@
         <p:spPr>
           <a:xfrm>
             <a:off x="9144000" y="0"/>
-            <a:ext cx="14400" cy="6854040"/>
+            <a:ext cx="14040" cy="6853680"/>
           </a:xfrm>
           <a:prstGeom prst="rect">
             <a:avLst/>
@@ -15113,7 +17678,7 @@
         <p:spPr>
           <a:xfrm>
             <a:off x="10058400" y="0"/>
-            <a:ext cx="14400" cy="6854040"/>
+            <a:ext cx="14040" cy="6853680"/>
           </a:xfrm>
           <a:prstGeom prst="rect">
             <a:avLst/>
@@ -15173,7 +17738,7 @@
         <p:spPr>
           <a:xfrm>
             <a:off x="10972800" y="0"/>
-            <a:ext cx="14400" cy="6854040"/>
+            <a:ext cx="14040" cy="6853680"/>
           </a:xfrm>
           <a:prstGeom prst="rect">
             <a:avLst/>
@@ -15233,7 +17798,7 @@
         <p:spPr>
           <a:xfrm>
             <a:off x="11887200" y="0"/>
-            <a:ext cx="14400" cy="6854040"/>
+            <a:ext cx="14040" cy="6853680"/>
           </a:xfrm>
           <a:prstGeom prst="rect">
             <a:avLst/>
@@ -15293,7 +17858,7 @@
         <p:spPr>
           <a:xfrm>
             <a:off x="0" y="0"/>
-            <a:ext cx="316080" cy="6854040"/>
+            <a:ext cx="315720" cy="6853680"/>
           </a:xfrm>
           <a:prstGeom prst="rect">
             <a:avLst/>
@@ -15353,7 +17918,7 @@
         <p:spPr>
           <a:xfrm>
             <a:off x="9875520" y="365760"/>
-            <a:ext cx="2007720" cy="498960"/>
+            <a:ext cx="2007360" cy="498600"/>
           </a:xfrm>
           <a:prstGeom prst="roundRect">
             <a:avLst>
@@ -15558,7 +18123,7 @@
         <p:spPr>
           <a:xfrm>
             <a:off x="987480" y="3182040"/>
-            <a:ext cx="3287880" cy="2739240"/>
+            <a:ext cx="3287520" cy="2738880"/>
           </a:xfrm>
           <a:prstGeom prst="roundRect">
             <a:avLst>
@@ -15620,7 +18185,7 @@
         <p:spPr>
           <a:xfrm>
             <a:off x="457200" y="2514600"/>
-            <a:ext cx="3745080" cy="4113000"/>
+            <a:ext cx="3744720" cy="4112640"/>
           </a:xfrm>
           <a:prstGeom prst="roundRect">
             <a:avLst>
@@ -15873,7 +18438,7 @@
         <p:spPr>
           <a:xfrm>
             <a:off x="4507920" y="3182040"/>
-            <a:ext cx="3287880" cy="2739240"/>
+            <a:ext cx="3287520" cy="2738880"/>
           </a:xfrm>
           <a:prstGeom prst="roundRect">
             <a:avLst>
@@ -15935,7 +18500,7 @@
         <p:spPr>
           <a:xfrm>
             <a:off x="4434840" y="2514600"/>
-            <a:ext cx="3287880" cy="3883320"/>
+            <a:ext cx="3287520" cy="3882960"/>
           </a:xfrm>
           <a:prstGeom prst="roundRect">
             <a:avLst>
@@ -16151,7 +18716,7 @@
         <p:spPr>
           <a:xfrm>
             <a:off x="8028360" y="3182040"/>
-            <a:ext cx="3287880" cy="2739240"/>
+            <a:ext cx="3287520" cy="2738880"/>
           </a:xfrm>
           <a:prstGeom prst="roundRect">
             <a:avLst>
@@ -16213,7 +18778,7 @@
         <p:spPr>
           <a:xfrm>
             <a:off x="8001000" y="2514600"/>
-            <a:ext cx="3472920" cy="3884760"/>
+            <a:ext cx="3472560" cy="3884400"/>
           </a:xfrm>
           <a:prstGeom prst="roundRect">
             <a:avLst>
@@ -16889,7 +19454,7 @@
         <p:spPr>
           <a:xfrm>
             <a:off x="0" y="0"/>
-            <a:ext cx="12184920" cy="6854040"/>
+            <a:ext cx="12184560" cy="6853680"/>
           </a:xfrm>
           <a:prstGeom prst="rect">
             <a:avLst/>
@@ -16949,7 +19514,7 @@
         <p:spPr>
           <a:xfrm>
             <a:off x="0" y="0"/>
-            <a:ext cx="14400" cy="6854040"/>
+            <a:ext cx="14040" cy="6853680"/>
           </a:xfrm>
           <a:prstGeom prst="rect">
             <a:avLst/>
@@ -17009,7 +19574,7 @@
         <p:spPr>
           <a:xfrm>
             <a:off x="914400" y="0"/>
-            <a:ext cx="14400" cy="6854040"/>
+            <a:ext cx="14040" cy="6853680"/>
           </a:xfrm>
           <a:prstGeom prst="rect">
             <a:avLst/>
@@ -17069,7 +19634,7 @@
         <p:spPr>
           <a:xfrm>
             <a:off x="1828800" y="0"/>
-            <a:ext cx="14400" cy="6854040"/>
+            <a:ext cx="14040" cy="6853680"/>
           </a:xfrm>
           <a:prstGeom prst="rect">
             <a:avLst/>
@@ -17129,7 +19694,7 @@
         <p:spPr>
           <a:xfrm>
             <a:off x="2743200" y="0"/>
-            <a:ext cx="14400" cy="6854040"/>
+            <a:ext cx="14040" cy="6853680"/>
           </a:xfrm>
           <a:prstGeom prst="rect">
             <a:avLst/>
@@ -17189,7 +19754,7 @@
         <p:spPr>
           <a:xfrm>
             <a:off x="3657600" y="0"/>
-            <a:ext cx="14400" cy="6854040"/>
+            <a:ext cx="14040" cy="6853680"/>
           </a:xfrm>
           <a:prstGeom prst="rect">
             <a:avLst/>
@@ -17249,7 +19814,7 @@
         <p:spPr>
           <a:xfrm>
             <a:off x="4572000" y="0"/>
-            <a:ext cx="14400" cy="6854040"/>
+            <a:ext cx="14040" cy="6853680"/>
           </a:xfrm>
           <a:prstGeom prst="rect">
             <a:avLst/>
@@ -17309,7 +19874,7 @@
         <p:spPr>
           <a:xfrm>
             <a:off x="5486400" y="0"/>
-            <a:ext cx="14400" cy="6854040"/>
+            <a:ext cx="14040" cy="6853680"/>
           </a:xfrm>
           <a:prstGeom prst="rect">
             <a:avLst/>
@@ -17369,7 +19934,7 @@
         <p:spPr>
           <a:xfrm>
             <a:off x="6400800" y="0"/>
-            <a:ext cx="14400" cy="6854040"/>
+            <a:ext cx="14040" cy="6853680"/>
           </a:xfrm>
           <a:prstGeom prst="rect">
             <a:avLst/>
@@ -17429,7 +19994,7 @@
         <p:spPr>
           <a:xfrm>
             <a:off x="7315200" y="0"/>
-            <a:ext cx="14400" cy="6854040"/>
+            <a:ext cx="14040" cy="6853680"/>
           </a:xfrm>
           <a:prstGeom prst="rect">
             <a:avLst/>
@@ -17489,7 +20054,7 @@
         <p:spPr>
           <a:xfrm>
             <a:off x="8229600" y="0"/>
-            <a:ext cx="14400" cy="6854040"/>
+            <a:ext cx="14040" cy="6853680"/>
           </a:xfrm>
           <a:prstGeom prst="rect">
             <a:avLst/>
@@ -17549,7 +20114,7 @@
         <p:spPr>
           <a:xfrm>
             <a:off x="9144000" y="0"/>
-            <a:ext cx="14400" cy="6854040"/>
+            <a:ext cx="14040" cy="6853680"/>
           </a:xfrm>
           <a:prstGeom prst="rect">
             <a:avLst/>
@@ -17609,7 +20174,7 @@
         <p:spPr>
           <a:xfrm>
             <a:off x="10058400" y="0"/>
-            <a:ext cx="14400" cy="6854040"/>
+            <a:ext cx="14040" cy="6853680"/>
           </a:xfrm>
           <a:prstGeom prst="rect">
             <a:avLst/>
@@ -17669,7 +20234,7 @@
         <p:spPr>
           <a:xfrm>
             <a:off x="10972800" y="0"/>
-            <a:ext cx="14400" cy="6854040"/>
+            <a:ext cx="14040" cy="6853680"/>
           </a:xfrm>
           <a:prstGeom prst="rect">
             <a:avLst/>
@@ -17729,7 +20294,7 @@
         <p:spPr>
           <a:xfrm>
             <a:off x="11887200" y="0"/>
-            <a:ext cx="14400" cy="6854040"/>
+            <a:ext cx="14040" cy="6853680"/>
           </a:xfrm>
           <a:prstGeom prst="rect">
             <a:avLst/>
@@ -17789,7 +20354,7 @@
         <p:spPr>
           <a:xfrm>
             <a:off x="0" y="0"/>
-            <a:ext cx="316080" cy="6854040"/>
+            <a:ext cx="315720" cy="6853680"/>
           </a:xfrm>
           <a:prstGeom prst="rect">
             <a:avLst/>
@@ -17849,7 +20414,7 @@
         <p:spPr>
           <a:xfrm>
             <a:off x="9875520" y="365760"/>
-            <a:ext cx="2007720" cy="498960"/>
+            <a:ext cx="2007360" cy="498600"/>
           </a:xfrm>
           <a:prstGeom prst="roundRect">
             <a:avLst>
@@ -17923,7 +20488,7 @@
         <p:spPr>
           <a:xfrm>
             <a:off x="2106360" y="914400"/>
-            <a:ext cx="6756120" cy="942840"/>
+            <a:ext cx="6755760" cy="942840"/>
           </a:xfrm>
           <a:prstGeom prst="rect">
             <a:avLst/>
@@ -17990,7 +20555,7 @@
         <p:spPr>
           <a:xfrm>
             <a:off x="1124280" y="1565280"/>
-            <a:ext cx="9252360" cy="819720"/>
+            <a:ext cx="9252000" cy="819720"/>
           </a:xfrm>
           <a:prstGeom prst="rect">
             <a:avLst/>
@@ -18090,7 +20655,7 @@
         <p:spPr>
           <a:xfrm>
             <a:off x="987480" y="3182040"/>
-            <a:ext cx="3287880" cy="2739240"/>
+            <a:ext cx="3287520" cy="2738880"/>
           </a:xfrm>
           <a:prstGeom prst="roundRect">
             <a:avLst>
@@ -18152,7 +20717,7 @@
         <p:spPr>
           <a:xfrm>
             <a:off x="457200" y="2743200"/>
-            <a:ext cx="3885120" cy="3884400"/>
+            <a:ext cx="3884760" cy="3884040"/>
           </a:xfrm>
           <a:prstGeom prst="roundRect">
             <a:avLst>
@@ -18466,7 +21031,7 @@
         <p:spPr>
           <a:xfrm>
             <a:off x="4507920" y="3182040"/>
-            <a:ext cx="3287880" cy="2739240"/>
+            <a:ext cx="3287520" cy="2738880"/>
           </a:xfrm>
           <a:prstGeom prst="roundRect">
             <a:avLst>
@@ -18528,7 +21093,7 @@
         <p:spPr>
           <a:xfrm>
             <a:off x="4572000" y="2743200"/>
-            <a:ext cx="3427920" cy="3656520"/>
+            <a:ext cx="3427560" cy="3656160"/>
           </a:xfrm>
           <a:prstGeom prst="roundRect">
             <a:avLst>
@@ -19080,7 +21645,7 @@
         <p:spPr>
           <a:xfrm>
             <a:off x="8028360" y="3182040"/>
-            <a:ext cx="3287880" cy="2739240"/>
+            <a:ext cx="3287520" cy="2738880"/>
           </a:xfrm>
           <a:prstGeom prst="roundRect">
             <a:avLst>
@@ -19142,7 +21707,7 @@
         <p:spPr>
           <a:xfrm>
             <a:off x="8229600" y="2514600"/>
-            <a:ext cx="3656520" cy="4113720"/>
+            <a:ext cx="3656160" cy="4113360"/>
           </a:xfrm>
           <a:prstGeom prst="roundRect">
             <a:avLst>
@@ -20134,7 +22699,7 @@
         <p:spPr>
           <a:xfrm>
             <a:off x="0" y="0"/>
-            <a:ext cx="12184920" cy="6854040"/>
+            <a:ext cx="12184560" cy="6853680"/>
           </a:xfrm>
           <a:prstGeom prst="rect">
             <a:avLst/>
@@ -20194,7 +22759,7 @@
         <p:spPr>
           <a:xfrm>
             <a:off x="0" y="0"/>
-            <a:ext cx="14400" cy="6854040"/>
+            <a:ext cx="14040" cy="6853680"/>
           </a:xfrm>
           <a:prstGeom prst="rect">
             <a:avLst/>
@@ -20254,7 +22819,7 @@
         <p:spPr>
           <a:xfrm>
             <a:off x="914400" y="0"/>
-            <a:ext cx="14400" cy="6854040"/>
+            <a:ext cx="14040" cy="6853680"/>
           </a:xfrm>
           <a:prstGeom prst="rect">
             <a:avLst/>
@@ -20314,7 +22879,7 @@
         <p:spPr>
           <a:xfrm>
             <a:off x="1828800" y="0"/>
-            <a:ext cx="14400" cy="6854040"/>
+            <a:ext cx="14040" cy="6853680"/>
           </a:xfrm>
           <a:prstGeom prst="rect">
             <a:avLst/>
@@ -20374,7 +22939,7 @@
         <p:spPr>
           <a:xfrm>
             <a:off x="2743200" y="0"/>
-            <a:ext cx="14400" cy="6854040"/>
+            <a:ext cx="14040" cy="6853680"/>
           </a:xfrm>
           <a:prstGeom prst="rect">
             <a:avLst/>
@@ -20434,7 +22999,7 @@
         <p:spPr>
           <a:xfrm>
             <a:off x="3657600" y="0"/>
-            <a:ext cx="14400" cy="6854040"/>
+            <a:ext cx="14040" cy="6853680"/>
           </a:xfrm>
           <a:prstGeom prst="rect">
             <a:avLst/>
@@ -20494,7 +23059,7 @@
         <p:spPr>
           <a:xfrm>
             <a:off x="4572000" y="0"/>
-            <a:ext cx="14400" cy="6854040"/>
+            <a:ext cx="14040" cy="6853680"/>
           </a:xfrm>
           <a:prstGeom prst="rect">
             <a:avLst/>
@@ -20554,7 +23119,7 @@
         <p:spPr>
           <a:xfrm>
             <a:off x="5486400" y="0"/>
-            <a:ext cx="14400" cy="6854040"/>
+            <a:ext cx="14040" cy="6853680"/>
           </a:xfrm>
           <a:prstGeom prst="rect">
             <a:avLst/>
@@ -20614,7 +23179,7 @@
         <p:spPr>
           <a:xfrm>
             <a:off x="6400800" y="0"/>
-            <a:ext cx="14400" cy="6854040"/>
+            <a:ext cx="14040" cy="6853680"/>
           </a:xfrm>
           <a:prstGeom prst="rect">
             <a:avLst/>
@@ -20674,7 +23239,7 @@
         <p:spPr>
           <a:xfrm>
             <a:off x="7315200" y="0"/>
-            <a:ext cx="14400" cy="6854040"/>
+            <a:ext cx="14040" cy="6853680"/>
           </a:xfrm>
           <a:prstGeom prst="rect">
             <a:avLst/>
@@ -20734,7 +23299,7 @@
         <p:spPr>
           <a:xfrm>
             <a:off x="8229600" y="0"/>
-            <a:ext cx="14400" cy="6854040"/>
+            <a:ext cx="14040" cy="6853680"/>
           </a:xfrm>
           <a:prstGeom prst="rect">
             <a:avLst/>
@@ -20794,7 +23359,7 @@
         <p:spPr>
           <a:xfrm>
             <a:off x="9144000" y="0"/>
-            <a:ext cx="14400" cy="6854040"/>
+            <a:ext cx="14040" cy="6853680"/>
           </a:xfrm>
           <a:prstGeom prst="rect">
             <a:avLst/>
@@ -20854,7 +23419,7 @@
         <p:spPr>
           <a:xfrm>
             <a:off x="10058400" y="0"/>
-            <a:ext cx="14400" cy="6854040"/>
+            <a:ext cx="14040" cy="6853680"/>
           </a:xfrm>
           <a:prstGeom prst="rect">
             <a:avLst/>
@@ -20914,7 +23479,7 @@
         <p:spPr>
           <a:xfrm>
             <a:off x="10972800" y="0"/>
-            <a:ext cx="14400" cy="6854040"/>
+            <a:ext cx="14040" cy="6853680"/>
           </a:xfrm>
           <a:prstGeom prst="rect">
             <a:avLst/>
@@ -20974,7 +23539,7 @@
         <p:spPr>
           <a:xfrm>
             <a:off x="11887200" y="0"/>
-            <a:ext cx="14400" cy="6854040"/>
+            <a:ext cx="14040" cy="6853680"/>
           </a:xfrm>
           <a:prstGeom prst="rect">
             <a:avLst/>
@@ -21034,7 +23599,7 @@
         <p:spPr>
           <a:xfrm>
             <a:off x="0" y="0"/>
-            <a:ext cx="316080" cy="6854040"/>
+            <a:ext cx="315720" cy="6853680"/>
           </a:xfrm>
           <a:prstGeom prst="rect">
             <a:avLst/>
@@ -21094,7 +23659,7 @@
         <p:spPr>
           <a:xfrm>
             <a:off x="9875520" y="365760"/>
-            <a:ext cx="2007720" cy="498960"/>
+            <a:ext cx="2007360" cy="498600"/>
           </a:xfrm>
           <a:prstGeom prst="roundRect">
             <a:avLst>
@@ -21222,7 +23787,7 @@
         <p:spPr>
           <a:xfrm>
             <a:off x="2448360" y="1828800"/>
-            <a:ext cx="6590160" cy="819720"/>
+            <a:ext cx="6589800" cy="819720"/>
           </a:xfrm>
           <a:prstGeom prst="rect">
             <a:avLst/>
@@ -21332,7 +23897,7 @@
         <p:spPr>
           <a:xfrm>
             <a:off x="987480" y="3182040"/>
-            <a:ext cx="3287880" cy="2739240"/>
+            <a:ext cx="3287520" cy="2738880"/>
           </a:xfrm>
           <a:prstGeom prst="roundRect">
             <a:avLst>
@@ -21394,7 +23959,7 @@
         <p:spPr>
           <a:xfrm>
             <a:off x="914400" y="3108960"/>
-            <a:ext cx="3287880" cy="3291120"/>
+            <a:ext cx="3287520" cy="3290760"/>
           </a:xfrm>
           <a:prstGeom prst="roundRect">
             <a:avLst>
@@ -21725,7 +24290,7 @@
         <p:spPr>
           <a:xfrm>
             <a:off x="4507920" y="3182040"/>
-            <a:ext cx="3287880" cy="2739240"/>
+            <a:ext cx="3287520" cy="2738880"/>
           </a:xfrm>
           <a:prstGeom prst="roundRect">
             <a:avLst>
@@ -21787,7 +24352,7 @@
         <p:spPr>
           <a:xfrm>
             <a:off x="4434840" y="2971800"/>
-            <a:ext cx="3287880" cy="3428280"/>
+            <a:ext cx="3287520" cy="3427920"/>
           </a:xfrm>
           <a:prstGeom prst="roundRect">
             <a:avLst>
@@ -22194,7 +24759,7 @@
         <p:spPr>
           <a:xfrm>
             <a:off x="8028360" y="3182040"/>
-            <a:ext cx="3287880" cy="2739240"/>
+            <a:ext cx="3287520" cy="2738880"/>
           </a:xfrm>
           <a:prstGeom prst="roundRect">
             <a:avLst>
@@ -22256,7 +24821,7 @@
         <p:spPr>
           <a:xfrm>
             <a:off x="7955280" y="2743200"/>
-            <a:ext cx="3700440" cy="3655440"/>
+            <a:ext cx="3700080" cy="3655080"/>
           </a:xfrm>
           <a:prstGeom prst="roundRect">
             <a:avLst>
@@ -23067,7 +25632,7 @@
         <p:spPr>
           <a:xfrm>
             <a:off x="0" y="0"/>
-            <a:ext cx="12184920" cy="6854040"/>
+            <a:ext cx="12184560" cy="6853680"/>
           </a:xfrm>
           <a:prstGeom prst="rect">
             <a:avLst/>
@@ -23103,6 +25668,11 @@
             <a:noAutofit/>
           </a:bodyPr>
           <a:p>
+            <a:pPr>
+              <a:lnSpc>
+                <a:spcPct val="100000"/>
+              </a:lnSpc>
+            </a:pPr>
             <a:endParaRPr b="0" lang="en-US" sz="1800" spc="-1" strike="noStrike">
               <a:solidFill>
                 <a:schemeClr val="lt1"/>
@@ -23122,7 +25692,7 @@
         <p:spPr>
           <a:xfrm>
             <a:off x="0" y="0"/>
-            <a:ext cx="14400" cy="6854040"/>
+            <a:ext cx="14040" cy="6853680"/>
           </a:xfrm>
           <a:prstGeom prst="rect">
             <a:avLst/>
@@ -23158,6 +25728,11 @@
             <a:noAutofit/>
           </a:bodyPr>
           <a:p>
+            <a:pPr>
+              <a:lnSpc>
+                <a:spcPct val="100000"/>
+              </a:lnSpc>
+            </a:pPr>
             <a:endParaRPr b="0" lang="en-US" sz="1800" spc="-1" strike="noStrike">
               <a:solidFill>
                 <a:schemeClr val="lt1"/>
@@ -23177,7 +25752,7 @@
         <p:spPr>
           <a:xfrm>
             <a:off x="914400" y="0"/>
-            <a:ext cx="14400" cy="6854040"/>
+            <a:ext cx="14040" cy="6853680"/>
           </a:xfrm>
           <a:prstGeom prst="rect">
             <a:avLst/>
@@ -23213,6 +25788,11 @@
             <a:noAutofit/>
           </a:bodyPr>
           <a:p>
+            <a:pPr>
+              <a:lnSpc>
+                <a:spcPct val="100000"/>
+              </a:lnSpc>
+            </a:pPr>
             <a:endParaRPr b="0" lang="en-US" sz="1800" spc="-1" strike="noStrike">
               <a:solidFill>
                 <a:schemeClr val="lt1"/>
@@ -23232,7 +25812,7 @@
         <p:spPr>
           <a:xfrm>
             <a:off x="1828800" y="0"/>
-            <a:ext cx="14400" cy="6854040"/>
+            <a:ext cx="14040" cy="6853680"/>
           </a:xfrm>
           <a:prstGeom prst="rect">
             <a:avLst/>
@@ -23268,6 +25848,11 @@
             <a:noAutofit/>
           </a:bodyPr>
           <a:p>
+            <a:pPr>
+              <a:lnSpc>
+                <a:spcPct val="100000"/>
+              </a:lnSpc>
+            </a:pPr>
             <a:endParaRPr b="0" lang="en-US" sz="1800" spc="-1" strike="noStrike">
               <a:solidFill>
                 <a:schemeClr val="lt1"/>
@@ -23287,7 +25872,7 @@
         <p:spPr>
           <a:xfrm>
             <a:off x="2743200" y="0"/>
-            <a:ext cx="14400" cy="6854040"/>
+            <a:ext cx="14040" cy="6853680"/>
           </a:xfrm>
           <a:prstGeom prst="rect">
             <a:avLst/>
@@ -23323,6 +25908,11 @@
             <a:noAutofit/>
           </a:bodyPr>
           <a:p>
+            <a:pPr>
+              <a:lnSpc>
+                <a:spcPct val="100000"/>
+              </a:lnSpc>
+            </a:pPr>
             <a:endParaRPr b="0" lang="en-US" sz="1800" spc="-1" strike="noStrike">
               <a:solidFill>
                 <a:schemeClr val="lt1"/>
@@ -23342,7 +25932,7 @@
         <p:spPr>
           <a:xfrm>
             <a:off x="3657600" y="0"/>
-            <a:ext cx="14400" cy="6854040"/>
+            <a:ext cx="14040" cy="6853680"/>
           </a:xfrm>
           <a:prstGeom prst="rect">
             <a:avLst/>
@@ -23378,6 +25968,11 @@
             <a:noAutofit/>
           </a:bodyPr>
           <a:p>
+            <a:pPr>
+              <a:lnSpc>
+                <a:spcPct val="100000"/>
+              </a:lnSpc>
+            </a:pPr>
             <a:endParaRPr b="0" lang="en-US" sz="1800" spc="-1" strike="noStrike">
               <a:solidFill>
                 <a:schemeClr val="lt1"/>
@@ -23397,7 +25992,7 @@
         <p:spPr>
           <a:xfrm>
             <a:off x="4572000" y="0"/>
-            <a:ext cx="14400" cy="6854040"/>
+            <a:ext cx="14040" cy="6853680"/>
           </a:xfrm>
           <a:prstGeom prst="rect">
             <a:avLst/>
@@ -23433,6 +26028,11 @@
             <a:noAutofit/>
           </a:bodyPr>
           <a:p>
+            <a:pPr>
+              <a:lnSpc>
+                <a:spcPct val="100000"/>
+              </a:lnSpc>
+            </a:pPr>
             <a:endParaRPr b="0" lang="en-US" sz="1800" spc="-1" strike="noStrike">
               <a:solidFill>
                 <a:schemeClr val="lt1"/>
@@ -23452,7 +26052,7 @@
         <p:spPr>
           <a:xfrm>
             <a:off x="5486400" y="0"/>
-            <a:ext cx="14400" cy="6854040"/>
+            <a:ext cx="14040" cy="6853680"/>
           </a:xfrm>
           <a:prstGeom prst="rect">
             <a:avLst/>
@@ -23488,6 +26088,11 @@
             <a:noAutofit/>
           </a:bodyPr>
           <a:p>
+            <a:pPr>
+              <a:lnSpc>
+                <a:spcPct val="100000"/>
+              </a:lnSpc>
+            </a:pPr>
             <a:endParaRPr b="0" lang="en-US" sz="1800" spc="-1" strike="noStrike">
               <a:solidFill>
                 <a:schemeClr val="lt1"/>
@@ -23507,7 +26112,7 @@
         <p:spPr>
           <a:xfrm>
             <a:off x="6400800" y="0"/>
-            <a:ext cx="14400" cy="6854040"/>
+            <a:ext cx="14040" cy="6853680"/>
           </a:xfrm>
           <a:prstGeom prst="rect">
             <a:avLst/>
@@ -23543,6 +26148,11 @@
             <a:noAutofit/>
           </a:bodyPr>
           <a:p>
+            <a:pPr>
+              <a:lnSpc>
+                <a:spcPct val="100000"/>
+              </a:lnSpc>
+            </a:pPr>
             <a:endParaRPr b="0" lang="en-US" sz="1800" spc="-1" strike="noStrike">
               <a:solidFill>
                 <a:schemeClr val="lt1"/>
@@ -23562,7 +26172,7 @@
         <p:spPr>
           <a:xfrm>
             <a:off x="7315200" y="0"/>
-            <a:ext cx="14400" cy="6854040"/>
+            <a:ext cx="14040" cy="6853680"/>
           </a:xfrm>
           <a:prstGeom prst="rect">
             <a:avLst/>
@@ -23598,6 +26208,11 @@
             <a:noAutofit/>
           </a:bodyPr>
           <a:p>
+            <a:pPr>
+              <a:lnSpc>
+                <a:spcPct val="100000"/>
+              </a:lnSpc>
+            </a:pPr>
             <a:endParaRPr b="0" lang="en-US" sz="1800" spc="-1" strike="noStrike">
               <a:solidFill>
                 <a:schemeClr val="lt1"/>
@@ -23617,7 +26232,7 @@
         <p:spPr>
           <a:xfrm>
             <a:off x="8229600" y="0"/>
-            <a:ext cx="14400" cy="6854040"/>
+            <a:ext cx="14040" cy="6853680"/>
           </a:xfrm>
           <a:prstGeom prst="rect">
             <a:avLst/>
@@ -23653,6 +26268,11 @@
             <a:noAutofit/>
           </a:bodyPr>
           <a:p>
+            <a:pPr>
+              <a:lnSpc>
+                <a:spcPct val="100000"/>
+              </a:lnSpc>
+            </a:pPr>
             <a:endParaRPr b="0" lang="en-US" sz="1800" spc="-1" strike="noStrike">
               <a:solidFill>
                 <a:schemeClr val="lt1"/>
@@ -23672,7 +26292,7 @@
         <p:spPr>
           <a:xfrm>
             <a:off x="9144000" y="0"/>
-            <a:ext cx="14400" cy="6854040"/>
+            <a:ext cx="14040" cy="6853680"/>
           </a:xfrm>
           <a:prstGeom prst="rect">
             <a:avLst/>
@@ -23708,6 +26328,11 @@
             <a:noAutofit/>
           </a:bodyPr>
           <a:p>
+            <a:pPr>
+              <a:lnSpc>
+                <a:spcPct val="100000"/>
+              </a:lnSpc>
+            </a:pPr>
             <a:endParaRPr b="0" lang="en-US" sz="1800" spc="-1" strike="noStrike">
               <a:solidFill>
                 <a:schemeClr val="lt1"/>
@@ -23727,7 +26352,7 @@
         <p:spPr>
           <a:xfrm>
             <a:off x="10058400" y="0"/>
-            <a:ext cx="14400" cy="6854040"/>
+            <a:ext cx="14040" cy="6853680"/>
           </a:xfrm>
           <a:prstGeom prst="rect">
             <a:avLst/>
@@ -23763,6 +26388,11 @@
             <a:noAutofit/>
           </a:bodyPr>
           <a:p>
+            <a:pPr>
+              <a:lnSpc>
+                <a:spcPct val="100000"/>
+              </a:lnSpc>
+            </a:pPr>
             <a:endParaRPr b="0" lang="en-US" sz="1800" spc="-1" strike="noStrike">
               <a:solidFill>
                 <a:schemeClr val="lt1"/>
@@ -23782,7 +26412,7 @@
         <p:spPr>
           <a:xfrm>
             <a:off x="10972800" y="0"/>
-            <a:ext cx="14400" cy="6854040"/>
+            <a:ext cx="14040" cy="6853680"/>
           </a:xfrm>
           <a:prstGeom prst="rect">
             <a:avLst/>
@@ -23818,6 +26448,11 @@
             <a:noAutofit/>
           </a:bodyPr>
           <a:p>
+            <a:pPr>
+              <a:lnSpc>
+                <a:spcPct val="100000"/>
+              </a:lnSpc>
+            </a:pPr>
             <a:endParaRPr b="0" lang="en-US" sz="1800" spc="-1" strike="noStrike">
               <a:solidFill>
                 <a:schemeClr val="lt1"/>
@@ -23837,7 +26472,7 @@
         <p:spPr>
           <a:xfrm>
             <a:off x="11887200" y="0"/>
-            <a:ext cx="14400" cy="6854040"/>
+            <a:ext cx="14040" cy="6853680"/>
           </a:xfrm>
           <a:prstGeom prst="rect">
             <a:avLst/>
@@ -23873,6 +26508,11 @@
             <a:noAutofit/>
           </a:bodyPr>
           <a:p>
+            <a:pPr>
+              <a:lnSpc>
+                <a:spcPct val="100000"/>
+              </a:lnSpc>
+            </a:pPr>
             <a:endParaRPr b="0" lang="en-US" sz="1800" spc="-1" strike="noStrike">
               <a:solidFill>
                 <a:schemeClr val="lt1"/>
@@ -23892,7 +26532,7 @@
         <p:spPr>
           <a:xfrm>
             <a:off x="0" y="0"/>
-            <a:ext cx="316080" cy="6854040"/>
+            <a:ext cx="315720" cy="6853680"/>
           </a:xfrm>
           <a:prstGeom prst="rect">
             <a:avLst/>
@@ -23928,6 +26568,11 @@
             <a:noAutofit/>
           </a:bodyPr>
           <a:p>
+            <a:pPr>
+              <a:lnSpc>
+                <a:spcPct val="100000"/>
+              </a:lnSpc>
+            </a:pPr>
             <a:endParaRPr b="0" lang="en-US" sz="1800" spc="-1" strike="noStrike">
               <a:solidFill>
                 <a:schemeClr val="lt1"/>
@@ -23947,7 +26592,7 @@
         <p:spPr>
           <a:xfrm>
             <a:off x="9875520" y="365760"/>
-            <a:ext cx="2007720" cy="498960"/>
+            <a:ext cx="2007360" cy="498600"/>
           </a:xfrm>
           <a:prstGeom prst="roundRect">
             <a:avLst>
@@ -24021,7 +26666,7 @@
         <p:spPr>
           <a:xfrm>
             <a:off x="2585880" y="914400"/>
-            <a:ext cx="5797080" cy="1186920"/>
+            <a:ext cx="5796720" cy="1186920"/>
           </a:xfrm>
           <a:prstGeom prst="rect">
             <a:avLst/>
@@ -24088,7 +26733,7 @@
         <p:spPr>
           <a:xfrm>
             <a:off x="2057400" y="1694880"/>
-            <a:ext cx="7455240" cy="819720"/>
+            <a:ext cx="7454880" cy="819720"/>
           </a:xfrm>
           <a:prstGeom prst="rect">
             <a:avLst/>
@@ -24188,7 +26833,7 @@
         <p:spPr>
           <a:xfrm>
             <a:off x="987480" y="3182040"/>
-            <a:ext cx="3287880" cy="2739240"/>
+            <a:ext cx="3287520" cy="2738880"/>
           </a:xfrm>
           <a:prstGeom prst="roundRect">
             <a:avLst>
@@ -24226,6 +26871,11 @@
             <a:noAutofit/>
           </a:bodyPr>
           <a:p>
+            <a:pPr>
+              <a:lnSpc>
+                <a:spcPct val="100000"/>
+              </a:lnSpc>
+            </a:pPr>
             <a:endParaRPr b="0" lang="en-US" sz="1800" spc="-1" strike="noStrike">
               <a:solidFill>
                 <a:schemeClr val="lt1"/>
@@ -24245,7 +26895,7 @@
         <p:spPr>
           <a:xfrm>
             <a:off x="914400" y="3108960"/>
-            <a:ext cx="3287880" cy="3291120"/>
+            <a:ext cx="3287520" cy="3290760"/>
           </a:xfrm>
           <a:prstGeom prst="roundRect">
             <a:avLst>
@@ -24496,7 +27146,7 @@
         <p:spPr>
           <a:xfrm>
             <a:off x="4507920" y="3182040"/>
-            <a:ext cx="3287880" cy="2739240"/>
+            <a:ext cx="3287520" cy="2738880"/>
           </a:xfrm>
           <a:prstGeom prst="roundRect">
             <a:avLst>
@@ -24534,6 +27184,11 @@
             <a:noAutofit/>
           </a:bodyPr>
           <a:p>
+            <a:pPr>
+              <a:lnSpc>
+                <a:spcPct val="100000"/>
+              </a:lnSpc>
+            </a:pPr>
             <a:endParaRPr b="0" lang="en-US" sz="1800" spc="-1" strike="noStrike">
               <a:solidFill>
                 <a:schemeClr val="lt1"/>
@@ -24553,7 +27208,7 @@
         <p:spPr>
           <a:xfrm>
             <a:off x="4434840" y="2971800"/>
-            <a:ext cx="3287880" cy="3428280"/>
+            <a:ext cx="3287520" cy="3427920"/>
           </a:xfrm>
           <a:prstGeom prst="roundRect">
             <a:avLst>
@@ -24927,7 +27582,7 @@
         <p:spPr>
           <a:xfrm>
             <a:off x="8028360" y="3182040"/>
-            <a:ext cx="3287880" cy="2739240"/>
+            <a:ext cx="3287520" cy="2738880"/>
           </a:xfrm>
           <a:prstGeom prst="roundRect">
             <a:avLst>
@@ -24965,6 +27620,11 @@
             <a:noAutofit/>
           </a:bodyPr>
           <a:p>
+            <a:pPr>
+              <a:lnSpc>
+                <a:spcPct val="100000"/>
+              </a:lnSpc>
+            </a:pPr>
             <a:endParaRPr b="0" lang="en-US" sz="1800" spc="-1" strike="noStrike">
               <a:solidFill>
                 <a:schemeClr val="lt1"/>
@@ -24984,7 +27644,7 @@
         <p:spPr>
           <a:xfrm>
             <a:off x="8003880" y="2971800"/>
-            <a:ext cx="3426120" cy="3426840"/>
+            <a:ext cx="3425760" cy="3426480"/>
           </a:xfrm>
           <a:prstGeom prst="roundRect">
             <a:avLst>

--- a/Java/Java #4/TR/Java #4.pptx
+++ b/Java/Java #4/TR/Java #4.pptx
@@ -15,6 +15,7 @@
     <p:sldId id="263" r:id="rId10"/>
     <p:sldId id="264" r:id="rId11"/>
     <p:sldId id="265" r:id="rId12"/>
+    <p:sldId id="266" r:id="rId13"/>
   </p:sldIdLst>
   <p:sldSz cx="9144000" cy="6858000"/>
   <p:notesSz cx="7772400" cy="10058400"/>
@@ -72,7 +73,7 @@
         <p:txBody>
           <a:bodyPr/>
           <a:p>
-            <a:fld id="{876465FC-4EB4-463A-B04E-BDAE1ABF9BBD}" type="slidenum">
+            <a:fld id="{7339FDC7-29F5-4896-AA46-FE6D294844BD}" type="slidenum">
               <a:t>&lt;#&gt;</a:t>
             </a:fld>
           </a:p>
@@ -281,7 +282,7 @@
         <p:txBody>
           <a:bodyPr/>
           <a:p>
-            <a:fld id="{BAFDFF68-30F2-4F2B-8149-16CA9DD98657}" type="slidenum">
+            <a:fld id="{686E0FF3-92EA-49CB-9BC1-F6A7E05217C5}" type="slidenum">
               <a:t>&lt;#&gt;</a:t>
             </a:fld>
           </a:p>
@@ -576,7 +577,7 @@
         <p:txBody>
           <a:bodyPr/>
           <a:p>
-            <a:fld id="{4107DA32-34B7-4339-A7C2-1B2D97036505}" type="slidenum">
+            <a:fld id="{9B82DC62-3CB3-43BB-8741-3D6615EA43AD}" type="slidenum">
               <a:t>&lt;#&gt;</a:t>
             </a:fld>
           </a:p>
@@ -957,7 +958,7 @@
         <p:txBody>
           <a:bodyPr/>
           <a:p>
-            <a:fld id="{F929B28F-A611-4190-9DC8-D969EF9F44EC}" type="slidenum">
+            <a:fld id="{437AD881-B599-4176-B5A9-ECF00BE0C9AD}" type="slidenum">
               <a:t>&lt;#&gt;</a:t>
             </a:fld>
           </a:p>
@@ -1120,7 +1121,7 @@
         <p:txBody>
           <a:bodyPr/>
           <a:p>
-            <a:fld id="{C8E6D648-746A-407F-A83A-CA408DDD5405}" type="slidenum">
+            <a:fld id="{0D52F0FE-BC0C-43B7-87E5-0A94205AC9CC}" type="slidenum">
               <a:t>&lt;#&gt;</a:t>
             </a:fld>
           </a:p>
@@ -1286,7 +1287,7 @@
         <p:txBody>
           <a:bodyPr/>
           <a:p>
-            <a:fld id="{D65D78F5-2EFC-4E52-A3E0-39699A32159F}" type="slidenum">
+            <a:fld id="{9D9D8F09-8642-41E6-A288-55EBCCFA0D22}" type="slidenum">
               <a:t>&lt;#&gt;</a:t>
             </a:fld>
           </a:p>
@@ -1495,7 +1496,7 @@
         <p:txBody>
           <a:bodyPr/>
           <a:p>
-            <a:fld id="{9F0206CA-451D-48BB-8262-C1B42A24BE5B}" type="slidenum">
+            <a:fld id="{A32020FA-7E23-4585-83DF-9EA21C9FA6BC}" type="slidenum">
               <a:t>&lt;#&gt;</a:t>
             </a:fld>
           </a:p>
@@ -1618,7 +1619,7 @@
         <p:txBody>
           <a:bodyPr/>
           <a:p>
-            <a:fld id="{6C61DA5E-5DE7-4F73-BE7E-AF7BD7F8F9AE}" type="slidenum">
+            <a:fld id="{38CDEF14-1089-46DD-B164-B0BEB2CB8A47}" type="slidenum">
               <a:t>&lt;#&gt;</a:t>
             </a:fld>
           </a:p>
@@ -1739,7 +1740,7 @@
         <p:txBody>
           <a:bodyPr/>
           <a:p>
-            <a:fld id="{1F01B6C7-1295-49CB-9E1B-C314EA28DC51}" type="slidenum">
+            <a:fld id="{6343E858-6FC8-4413-82A3-8A0149978457}" type="slidenum">
               <a:t>&lt;#&gt;</a:t>
             </a:fld>
           </a:p>
@@ -1991,7 +1992,7 @@
         <p:txBody>
           <a:bodyPr/>
           <a:p>
-            <a:fld id="{61A016C1-EEEA-435B-92C2-A90E53AF24CF}" type="slidenum">
+            <a:fld id="{DE69D41F-0F2E-4DD7-A102-F9F50DAC1D0E}" type="slidenum">
               <a:t>&lt;#&gt;</a:t>
             </a:fld>
           </a:p>
@@ -2243,7 +2244,7 @@
         <p:txBody>
           <a:bodyPr/>
           <a:p>
-            <a:fld id="{68F2C2EF-FA4C-47F9-8BDE-E598CA400CDD}" type="slidenum">
+            <a:fld id="{92388C69-3E85-4746-8B74-F2E3FB75449C}" type="slidenum">
               <a:t>&lt;#&gt;</a:t>
             </a:fld>
           </a:p>
@@ -2495,7 +2496,7 @@
         <p:txBody>
           <a:bodyPr/>
           <a:p>
-            <a:fld id="{0DEAA288-23CE-47C4-93D2-1D87A9A47690}" type="slidenum">
+            <a:fld id="{1453F8B6-8997-4F4B-A41D-8EAA3847B3CD}" type="slidenum">
               <a:t>&lt;#&gt;</a:t>
             </a:fld>
           </a:p>
@@ -2564,7 +2565,7 @@
         <p:spPr>
           <a:xfrm>
             <a:off x="3124080" y="6356520"/>
-            <a:ext cx="2890800" cy="360360"/>
+            <a:ext cx="2890440" cy="360000"/>
           </a:xfrm>
           <a:prstGeom prst="rect">
             <a:avLst/>
@@ -2636,7 +2637,7 @@
         <p:spPr>
           <a:xfrm>
             <a:off x="6553080" y="6356520"/>
-            <a:ext cx="2129040" cy="360360"/>
+            <a:ext cx="2128680" cy="360000"/>
           </a:xfrm>
           <a:prstGeom prst="rect">
             <a:avLst/>
@@ -2677,7 +2678,7 @@
                 <a:tab algn="l" pos="0"/>
               </a:tabLst>
             </a:pPr>
-            <a:fld id="{C38CA5F1-6299-4A76-9B31-C3B8851694DE}" type="slidenum">
+            <a:fld id="{2F1DAC1C-0B93-4A26-9A36-34B4ECAE47AC}" type="slidenum">
               <a:rPr b="0" lang="en-US" sz="1200" spc="-1" strike="noStrike">
                 <a:solidFill>
                   <a:srgbClr val="8b8b8b"/>
@@ -2708,7 +2709,7 @@
         <p:spPr>
           <a:xfrm>
             <a:off x="457200" y="6356520"/>
-            <a:ext cx="2129040" cy="360360"/>
+            <a:ext cx="2128680" cy="360000"/>
           </a:xfrm>
           <a:prstGeom prst="rect">
             <a:avLst/>
@@ -3075,7 +3076,7 @@
         <p:spPr>
           <a:xfrm>
             <a:off x="0" y="0"/>
-            <a:ext cx="12184200" cy="6853320"/>
+            <a:ext cx="12183840" cy="6852960"/>
           </a:xfrm>
           <a:prstGeom prst="rect">
             <a:avLst/>
@@ -3135,7 +3136,7 @@
         <p:spPr>
           <a:xfrm>
             <a:off x="0" y="0"/>
-            <a:ext cx="13680" cy="6853320"/>
+            <a:ext cx="13320" cy="6852960"/>
           </a:xfrm>
           <a:prstGeom prst="rect">
             <a:avLst/>
@@ -3195,7 +3196,7 @@
         <p:spPr>
           <a:xfrm>
             <a:off x="914400" y="0"/>
-            <a:ext cx="13680" cy="6853320"/>
+            <a:ext cx="13320" cy="6852960"/>
           </a:xfrm>
           <a:prstGeom prst="rect">
             <a:avLst/>
@@ -3255,7 +3256,7 @@
         <p:spPr>
           <a:xfrm>
             <a:off x="1828800" y="0"/>
-            <a:ext cx="13680" cy="6853320"/>
+            <a:ext cx="13320" cy="6852960"/>
           </a:xfrm>
           <a:prstGeom prst="rect">
             <a:avLst/>
@@ -3315,7 +3316,7 @@
         <p:spPr>
           <a:xfrm>
             <a:off x="2743200" y="0"/>
-            <a:ext cx="13680" cy="6853320"/>
+            <a:ext cx="13320" cy="6852960"/>
           </a:xfrm>
           <a:prstGeom prst="rect">
             <a:avLst/>
@@ -3375,7 +3376,7 @@
         <p:spPr>
           <a:xfrm>
             <a:off x="3657600" y="0"/>
-            <a:ext cx="13680" cy="6853320"/>
+            <a:ext cx="13320" cy="6852960"/>
           </a:xfrm>
           <a:prstGeom prst="rect">
             <a:avLst/>
@@ -3435,7 +3436,7 @@
         <p:spPr>
           <a:xfrm>
             <a:off x="4572000" y="0"/>
-            <a:ext cx="13680" cy="6853320"/>
+            <a:ext cx="13320" cy="6852960"/>
           </a:xfrm>
           <a:prstGeom prst="rect">
             <a:avLst/>
@@ -3495,7 +3496,7 @@
         <p:spPr>
           <a:xfrm>
             <a:off x="5486400" y="0"/>
-            <a:ext cx="13680" cy="6853320"/>
+            <a:ext cx="13320" cy="6852960"/>
           </a:xfrm>
           <a:prstGeom prst="rect">
             <a:avLst/>
@@ -3555,7 +3556,7 @@
         <p:spPr>
           <a:xfrm>
             <a:off x="6400800" y="0"/>
-            <a:ext cx="13680" cy="6853320"/>
+            <a:ext cx="13320" cy="6852960"/>
           </a:xfrm>
           <a:prstGeom prst="rect">
             <a:avLst/>
@@ -3615,7 +3616,7 @@
         <p:spPr>
           <a:xfrm>
             <a:off x="7315200" y="0"/>
-            <a:ext cx="13680" cy="6853320"/>
+            <a:ext cx="13320" cy="6852960"/>
           </a:xfrm>
           <a:prstGeom prst="rect">
             <a:avLst/>
@@ -3675,7 +3676,7 @@
         <p:spPr>
           <a:xfrm>
             <a:off x="8229600" y="0"/>
-            <a:ext cx="13680" cy="6853320"/>
+            <a:ext cx="13320" cy="6852960"/>
           </a:xfrm>
           <a:prstGeom prst="rect">
             <a:avLst/>
@@ -3735,7 +3736,7 @@
         <p:spPr>
           <a:xfrm>
             <a:off x="9144000" y="0"/>
-            <a:ext cx="13680" cy="6853320"/>
+            <a:ext cx="13320" cy="6852960"/>
           </a:xfrm>
           <a:prstGeom prst="rect">
             <a:avLst/>
@@ -3795,7 +3796,7 @@
         <p:spPr>
           <a:xfrm>
             <a:off x="10058400" y="0"/>
-            <a:ext cx="13680" cy="6853320"/>
+            <a:ext cx="13320" cy="6852960"/>
           </a:xfrm>
           <a:prstGeom prst="rect">
             <a:avLst/>
@@ -3855,7 +3856,7 @@
         <p:spPr>
           <a:xfrm>
             <a:off x="10972800" y="0"/>
-            <a:ext cx="13680" cy="6853320"/>
+            <a:ext cx="13320" cy="6852960"/>
           </a:xfrm>
           <a:prstGeom prst="rect">
             <a:avLst/>
@@ -3915,7 +3916,7 @@
         <p:spPr>
           <a:xfrm>
             <a:off x="11887200" y="0"/>
-            <a:ext cx="13680" cy="6853320"/>
+            <a:ext cx="13320" cy="6852960"/>
           </a:xfrm>
           <a:prstGeom prst="rect">
             <a:avLst/>
@@ -3975,7 +3976,7 @@
         <p:spPr>
           <a:xfrm>
             <a:off x="0" y="0"/>
-            <a:ext cx="315360" cy="6853320"/>
+            <a:ext cx="315000" cy="6852960"/>
           </a:xfrm>
           <a:prstGeom prst="rect">
             <a:avLst/>
@@ -4035,7 +4036,7 @@
         <p:spPr>
           <a:xfrm>
             <a:off x="9875520" y="365760"/>
-            <a:ext cx="2007000" cy="498240"/>
+            <a:ext cx="2006640" cy="497880"/>
           </a:xfrm>
           <a:prstGeom prst="roundRect">
             <a:avLst>
@@ -4286,7 +4287,7 @@
         <p:spPr>
           <a:xfrm>
             <a:off x="987480" y="3182040"/>
-            <a:ext cx="3287160" cy="2738520"/>
+            <a:ext cx="3286800" cy="2738160"/>
           </a:xfrm>
           <a:prstGeom prst="roundRect">
             <a:avLst>
@@ -4348,7 +4349,7 @@
         <p:spPr>
           <a:xfrm>
             <a:off x="914400" y="3108960"/>
-            <a:ext cx="3287160" cy="2738520"/>
+            <a:ext cx="3286800" cy="2738160"/>
           </a:xfrm>
           <a:prstGeom prst="roundRect">
             <a:avLst>
@@ -4482,7 +4483,7 @@
         <p:spPr>
           <a:xfrm>
             <a:off x="4507920" y="3182040"/>
-            <a:ext cx="3287160" cy="2738520"/>
+            <a:ext cx="3286800" cy="2738160"/>
           </a:xfrm>
           <a:prstGeom prst="roundRect">
             <a:avLst>
@@ -4544,7 +4545,7 @@
         <p:spPr>
           <a:xfrm>
             <a:off x="4434840" y="3108960"/>
-            <a:ext cx="3287160" cy="2738520"/>
+            <a:ext cx="3286800" cy="2738160"/>
           </a:xfrm>
           <a:prstGeom prst="roundRect">
             <a:avLst>
@@ -4802,7 +4803,7 @@
         <p:spPr>
           <a:xfrm>
             <a:off x="8028360" y="3182040"/>
-            <a:ext cx="3287160" cy="2738520"/>
+            <a:ext cx="3286800" cy="2738160"/>
           </a:xfrm>
           <a:prstGeom prst="roundRect">
             <a:avLst>
@@ -4864,7 +4865,7 @@
         <p:spPr>
           <a:xfrm>
             <a:off x="7955280" y="2971800"/>
-            <a:ext cx="3928320" cy="3654000"/>
+            <a:ext cx="3927960" cy="3653640"/>
           </a:xfrm>
           <a:prstGeom prst="roundRect">
             <a:avLst>
@@ -5375,7 +5376,7 @@
         <p:spPr>
           <a:xfrm>
             <a:off x="0" y="0"/>
-            <a:ext cx="12184560" cy="6853680"/>
+            <a:ext cx="12184200" cy="6853320"/>
           </a:xfrm>
           <a:prstGeom prst="rect">
             <a:avLst/>
@@ -5411,6 +5412,11 @@
             <a:noAutofit/>
           </a:bodyPr>
           <a:p>
+            <a:pPr>
+              <a:lnSpc>
+                <a:spcPct val="100000"/>
+              </a:lnSpc>
+            </a:pPr>
             <a:endParaRPr b="0" lang="en-US" sz="1800" spc="-1" strike="noStrike">
               <a:solidFill>
                 <a:schemeClr val="lt1"/>
@@ -5430,7 +5436,7 @@
         <p:spPr>
           <a:xfrm>
             <a:off x="0" y="0"/>
-            <a:ext cx="14040" cy="6853680"/>
+            <a:ext cx="13680" cy="6853320"/>
           </a:xfrm>
           <a:prstGeom prst="rect">
             <a:avLst/>
@@ -5466,6 +5472,11 @@
             <a:noAutofit/>
           </a:bodyPr>
           <a:p>
+            <a:pPr>
+              <a:lnSpc>
+                <a:spcPct val="100000"/>
+              </a:lnSpc>
+            </a:pPr>
             <a:endParaRPr b="0" lang="en-US" sz="1800" spc="-1" strike="noStrike">
               <a:solidFill>
                 <a:schemeClr val="lt1"/>
@@ -5485,7 +5496,7 @@
         <p:spPr>
           <a:xfrm>
             <a:off x="914400" y="0"/>
-            <a:ext cx="14040" cy="6853680"/>
+            <a:ext cx="13680" cy="6853320"/>
           </a:xfrm>
           <a:prstGeom prst="rect">
             <a:avLst/>
@@ -5521,6 +5532,11 @@
             <a:noAutofit/>
           </a:bodyPr>
           <a:p>
+            <a:pPr>
+              <a:lnSpc>
+                <a:spcPct val="100000"/>
+              </a:lnSpc>
+            </a:pPr>
             <a:endParaRPr b="0" lang="en-US" sz="1800" spc="-1" strike="noStrike">
               <a:solidFill>
                 <a:schemeClr val="lt1"/>
@@ -5540,7 +5556,7 @@
         <p:spPr>
           <a:xfrm>
             <a:off x="1828800" y="0"/>
-            <a:ext cx="14040" cy="6853680"/>
+            <a:ext cx="13680" cy="6853320"/>
           </a:xfrm>
           <a:prstGeom prst="rect">
             <a:avLst/>
@@ -5576,6 +5592,11 @@
             <a:noAutofit/>
           </a:bodyPr>
           <a:p>
+            <a:pPr>
+              <a:lnSpc>
+                <a:spcPct val="100000"/>
+              </a:lnSpc>
+            </a:pPr>
             <a:endParaRPr b="0" lang="en-US" sz="1800" spc="-1" strike="noStrike">
               <a:solidFill>
                 <a:schemeClr val="lt1"/>
@@ -5595,7 +5616,7 @@
         <p:spPr>
           <a:xfrm>
             <a:off x="2743200" y="0"/>
-            <a:ext cx="14040" cy="6853680"/>
+            <a:ext cx="13680" cy="6853320"/>
           </a:xfrm>
           <a:prstGeom prst="rect">
             <a:avLst/>
@@ -5631,6 +5652,11 @@
             <a:noAutofit/>
           </a:bodyPr>
           <a:p>
+            <a:pPr>
+              <a:lnSpc>
+                <a:spcPct val="100000"/>
+              </a:lnSpc>
+            </a:pPr>
             <a:endParaRPr b="0" lang="en-US" sz="1800" spc="-1" strike="noStrike">
               <a:solidFill>
                 <a:schemeClr val="lt1"/>
@@ -5650,7 +5676,7 @@
         <p:spPr>
           <a:xfrm>
             <a:off x="3657600" y="0"/>
-            <a:ext cx="14040" cy="6853680"/>
+            <a:ext cx="13680" cy="6853320"/>
           </a:xfrm>
           <a:prstGeom prst="rect">
             <a:avLst/>
@@ -5686,6 +5712,11 @@
             <a:noAutofit/>
           </a:bodyPr>
           <a:p>
+            <a:pPr>
+              <a:lnSpc>
+                <a:spcPct val="100000"/>
+              </a:lnSpc>
+            </a:pPr>
             <a:endParaRPr b="0" lang="en-US" sz="1800" spc="-1" strike="noStrike">
               <a:solidFill>
                 <a:schemeClr val="lt1"/>
@@ -5705,7 +5736,7 @@
         <p:spPr>
           <a:xfrm>
             <a:off x="4572000" y="0"/>
-            <a:ext cx="14040" cy="6853680"/>
+            <a:ext cx="13680" cy="6853320"/>
           </a:xfrm>
           <a:prstGeom prst="rect">
             <a:avLst/>
@@ -5741,6 +5772,11 @@
             <a:noAutofit/>
           </a:bodyPr>
           <a:p>
+            <a:pPr>
+              <a:lnSpc>
+                <a:spcPct val="100000"/>
+              </a:lnSpc>
+            </a:pPr>
             <a:endParaRPr b="0" lang="en-US" sz="1800" spc="-1" strike="noStrike">
               <a:solidFill>
                 <a:schemeClr val="lt1"/>
@@ -5760,7 +5796,7 @@
         <p:spPr>
           <a:xfrm>
             <a:off x="5486400" y="0"/>
-            <a:ext cx="14040" cy="6853680"/>
+            <a:ext cx="13680" cy="6853320"/>
           </a:xfrm>
           <a:prstGeom prst="rect">
             <a:avLst/>
@@ -5796,6 +5832,11 @@
             <a:noAutofit/>
           </a:bodyPr>
           <a:p>
+            <a:pPr>
+              <a:lnSpc>
+                <a:spcPct val="100000"/>
+              </a:lnSpc>
+            </a:pPr>
             <a:endParaRPr b="0" lang="en-US" sz="1800" spc="-1" strike="noStrike">
               <a:solidFill>
                 <a:schemeClr val="lt1"/>
@@ -5815,7 +5856,7 @@
         <p:spPr>
           <a:xfrm>
             <a:off x="6400800" y="0"/>
-            <a:ext cx="14040" cy="6853680"/>
+            <a:ext cx="13680" cy="6853320"/>
           </a:xfrm>
           <a:prstGeom prst="rect">
             <a:avLst/>
@@ -5851,6 +5892,11 @@
             <a:noAutofit/>
           </a:bodyPr>
           <a:p>
+            <a:pPr>
+              <a:lnSpc>
+                <a:spcPct val="100000"/>
+              </a:lnSpc>
+            </a:pPr>
             <a:endParaRPr b="0" lang="en-US" sz="1800" spc="-1" strike="noStrike">
               <a:solidFill>
                 <a:schemeClr val="lt1"/>
@@ -5870,7 +5916,7 @@
         <p:spPr>
           <a:xfrm>
             <a:off x="7315200" y="0"/>
-            <a:ext cx="14040" cy="6853680"/>
+            <a:ext cx="13680" cy="6853320"/>
           </a:xfrm>
           <a:prstGeom prst="rect">
             <a:avLst/>
@@ -5906,6 +5952,11 @@
             <a:noAutofit/>
           </a:bodyPr>
           <a:p>
+            <a:pPr>
+              <a:lnSpc>
+                <a:spcPct val="100000"/>
+              </a:lnSpc>
+            </a:pPr>
             <a:endParaRPr b="0" lang="en-US" sz="1800" spc="-1" strike="noStrike">
               <a:solidFill>
                 <a:schemeClr val="lt1"/>
@@ -5925,7 +5976,7 @@
         <p:spPr>
           <a:xfrm>
             <a:off x="8229600" y="0"/>
-            <a:ext cx="14040" cy="6853680"/>
+            <a:ext cx="13680" cy="6853320"/>
           </a:xfrm>
           <a:prstGeom prst="rect">
             <a:avLst/>
@@ -5961,6 +6012,11 @@
             <a:noAutofit/>
           </a:bodyPr>
           <a:p>
+            <a:pPr>
+              <a:lnSpc>
+                <a:spcPct val="100000"/>
+              </a:lnSpc>
+            </a:pPr>
             <a:endParaRPr b="0" lang="en-US" sz="1800" spc="-1" strike="noStrike">
               <a:solidFill>
                 <a:schemeClr val="lt1"/>
@@ -5980,7 +6036,7 @@
         <p:spPr>
           <a:xfrm>
             <a:off x="9144000" y="0"/>
-            <a:ext cx="14040" cy="6853680"/>
+            <a:ext cx="13680" cy="6853320"/>
           </a:xfrm>
           <a:prstGeom prst="rect">
             <a:avLst/>
@@ -6016,6 +6072,11 @@
             <a:noAutofit/>
           </a:bodyPr>
           <a:p>
+            <a:pPr>
+              <a:lnSpc>
+                <a:spcPct val="100000"/>
+              </a:lnSpc>
+            </a:pPr>
             <a:endParaRPr b="0" lang="en-US" sz="1800" spc="-1" strike="noStrike">
               <a:solidFill>
                 <a:schemeClr val="lt1"/>
@@ -6035,7 +6096,7 @@
         <p:spPr>
           <a:xfrm>
             <a:off x="10058400" y="0"/>
-            <a:ext cx="14040" cy="6853680"/>
+            <a:ext cx="13680" cy="6853320"/>
           </a:xfrm>
           <a:prstGeom prst="rect">
             <a:avLst/>
@@ -6071,6 +6132,11 @@
             <a:noAutofit/>
           </a:bodyPr>
           <a:p>
+            <a:pPr>
+              <a:lnSpc>
+                <a:spcPct val="100000"/>
+              </a:lnSpc>
+            </a:pPr>
             <a:endParaRPr b="0" lang="en-US" sz="1800" spc="-1" strike="noStrike">
               <a:solidFill>
                 <a:schemeClr val="lt1"/>
@@ -6090,7 +6156,7 @@
         <p:spPr>
           <a:xfrm>
             <a:off x="10972800" y="0"/>
-            <a:ext cx="14040" cy="6853680"/>
+            <a:ext cx="13680" cy="6853320"/>
           </a:xfrm>
           <a:prstGeom prst="rect">
             <a:avLst/>
@@ -6126,6 +6192,11 @@
             <a:noAutofit/>
           </a:bodyPr>
           <a:p>
+            <a:pPr>
+              <a:lnSpc>
+                <a:spcPct val="100000"/>
+              </a:lnSpc>
+            </a:pPr>
             <a:endParaRPr b="0" lang="en-US" sz="1800" spc="-1" strike="noStrike">
               <a:solidFill>
                 <a:schemeClr val="lt1"/>
@@ -6145,7 +6216,7 @@
         <p:spPr>
           <a:xfrm>
             <a:off x="11887200" y="0"/>
-            <a:ext cx="14040" cy="6853680"/>
+            <a:ext cx="13680" cy="6853320"/>
           </a:xfrm>
           <a:prstGeom prst="rect">
             <a:avLst/>
@@ -6181,6 +6252,11 @@
             <a:noAutofit/>
           </a:bodyPr>
           <a:p>
+            <a:pPr>
+              <a:lnSpc>
+                <a:spcPct val="100000"/>
+              </a:lnSpc>
+            </a:pPr>
             <a:endParaRPr b="0" lang="en-US" sz="1800" spc="-1" strike="noStrike">
               <a:solidFill>
                 <a:schemeClr val="lt1"/>
@@ -6200,7 +6276,7 @@
         <p:spPr>
           <a:xfrm>
             <a:off x="0" y="0"/>
-            <a:ext cx="315720" cy="6853680"/>
+            <a:ext cx="315360" cy="6853320"/>
           </a:xfrm>
           <a:prstGeom prst="rect">
             <a:avLst/>
@@ -6236,6 +6312,11 @@
             <a:noAutofit/>
           </a:bodyPr>
           <a:p>
+            <a:pPr>
+              <a:lnSpc>
+                <a:spcPct val="100000"/>
+              </a:lnSpc>
+            </a:pPr>
             <a:endParaRPr b="0" lang="en-US" sz="1800" spc="-1" strike="noStrike">
               <a:solidFill>
                 <a:schemeClr val="lt1"/>
@@ -6255,7 +6336,7 @@
         <p:spPr>
           <a:xfrm>
             <a:off x="9875520" y="365760"/>
-            <a:ext cx="2007360" cy="498600"/>
+            <a:ext cx="2007000" cy="498240"/>
           </a:xfrm>
           <a:prstGeom prst="roundRect">
             <a:avLst>
@@ -6396,7 +6477,7 @@
         <p:spPr>
           <a:xfrm>
             <a:off x="1267200" y="1694880"/>
-            <a:ext cx="9035640" cy="819720"/>
+            <a:ext cx="9035280" cy="819720"/>
           </a:xfrm>
           <a:prstGeom prst="rect">
             <a:avLst/>
@@ -6496,7 +6577,7 @@
         <p:spPr>
           <a:xfrm>
             <a:off x="987480" y="3182040"/>
-            <a:ext cx="3287520" cy="2738880"/>
+            <a:ext cx="3287160" cy="2738520"/>
           </a:xfrm>
           <a:prstGeom prst="roundRect">
             <a:avLst>
@@ -6534,6 +6615,11 @@
             <a:noAutofit/>
           </a:bodyPr>
           <a:p>
+            <a:pPr>
+              <a:lnSpc>
+                <a:spcPct val="100000"/>
+              </a:lnSpc>
+            </a:pPr>
             <a:endParaRPr b="0" lang="en-US" sz="1800" spc="-1" strike="noStrike">
               <a:solidFill>
                 <a:schemeClr val="lt1"/>
@@ -6553,7 +6639,7 @@
         <p:spPr>
           <a:xfrm>
             <a:off x="685800" y="2743200"/>
-            <a:ext cx="3516120" cy="3656520"/>
+            <a:ext cx="3515760" cy="3656160"/>
           </a:xfrm>
           <a:prstGeom prst="roundRect">
             <a:avLst>
@@ -6795,7 +6881,7 @@
         <p:spPr>
           <a:xfrm>
             <a:off x="4507920" y="3182040"/>
-            <a:ext cx="3287520" cy="2738880"/>
+            <a:ext cx="3287160" cy="2738520"/>
           </a:xfrm>
           <a:prstGeom prst="roundRect">
             <a:avLst>
@@ -6833,6 +6919,11 @@
             <a:noAutofit/>
           </a:bodyPr>
           <a:p>
+            <a:pPr>
+              <a:lnSpc>
+                <a:spcPct val="100000"/>
+              </a:lnSpc>
+            </a:pPr>
             <a:endParaRPr b="0" lang="en-US" sz="1800" spc="-1" strike="noStrike">
               <a:solidFill>
                 <a:schemeClr val="lt1"/>
@@ -6852,7 +6943,7 @@
         <p:spPr>
           <a:xfrm>
             <a:off x="4434840" y="2971800"/>
-            <a:ext cx="3287520" cy="3427920"/>
+            <a:ext cx="3287160" cy="3427560"/>
           </a:xfrm>
           <a:prstGeom prst="roundRect">
             <a:avLst>
@@ -7206,7 +7297,7 @@
         <p:spPr>
           <a:xfrm>
             <a:off x="8028360" y="3182040"/>
-            <a:ext cx="3287520" cy="2738880"/>
+            <a:ext cx="3287160" cy="2738520"/>
           </a:xfrm>
           <a:prstGeom prst="roundRect">
             <a:avLst>
@@ -7244,6 +7335,11 @@
             <a:noAutofit/>
           </a:bodyPr>
           <a:p>
+            <a:pPr>
+              <a:lnSpc>
+                <a:spcPct val="100000"/>
+              </a:lnSpc>
+            </a:pPr>
             <a:endParaRPr b="0" lang="en-US" sz="1800" spc="-1" strike="noStrike">
               <a:solidFill>
                 <a:schemeClr val="lt1"/>
@@ -7263,7 +7359,7 @@
         <p:spPr>
           <a:xfrm>
             <a:off x="8003880" y="2743200"/>
-            <a:ext cx="3425760" cy="3655080"/>
+            <a:ext cx="3425400" cy="3654720"/>
           </a:xfrm>
           <a:prstGeom prst="roundRect">
             <a:avLst>
@@ -7849,6 +7945,2641 @@
       <p:sp>
         <p:nvSpPr>
           <p:cNvPr id="300" name="TextBox 33"/>
+          <p:cNvSpPr/>
+          <p:nvPr/>
+        </p:nvSpPr>
+        <p:spPr>
+          <a:xfrm>
+            <a:off x="4600080" y="6446520"/>
+            <a:ext cx="3051000" cy="363960"/>
+          </a:xfrm>
+          <a:prstGeom prst="rect">
+            <a:avLst/>
+          </a:prstGeom>
+          <a:noFill/>
+          <a:ln w="0">
+            <a:noFill/>
+          </a:ln>
+        </p:spPr>
+        <p:style>
+          <a:lnRef idx="0"/>
+          <a:fillRef idx="0"/>
+          <a:effectRef idx="0"/>
+          <a:fontRef idx="minor"/>
+        </p:style>
+        <p:txBody>
+          <a:bodyPr wrap="none" lIns="90000" rIns="90000" tIns="45000" bIns="45000" anchor="t">
+            <a:spAutoFit/>
+          </a:bodyPr>
+          <a:p>
+            <a:pPr>
+              <a:lnSpc>
+                <a:spcPct val="100000"/>
+              </a:lnSpc>
+            </a:pPr>
+            <a:r>
+              <a:rPr b="0" lang="en-US" sz="1800" spc="-1" strike="noStrike">
+                <a:solidFill>
+                  <a:srgbClr val="000000"/>
+                </a:solidFill>
+                <a:latin typeface="Calibri"/>
+                <a:ea typeface="DejaVu Sans"/>
+              </a:rPr>
+              <a:t>Java • Ultra Premium Template</a:t>
+            </a:r>
+            <a:endParaRPr b="0" lang="en-US" sz="1800" spc="-1" strike="noStrike">
+              <a:solidFill>
+                <a:srgbClr val="000000"/>
+              </a:solidFill>
+              <a:latin typeface="Arial"/>
+            </a:endParaRPr>
+          </a:p>
+        </p:txBody>
+      </p:sp>
+    </p:spTree>
+  </p:cSld>
+  <mc:AlternateContent>
+    <mc:Choice Requires="p14">
+      <p:transition spd="slow" p14:dur="2000"/>
+    </mc:Choice>
+    <mc:Fallback>
+      <p:transition spd="slow"/>
+    </mc:Fallback>
+  </mc:AlternateContent>
+</p:sld>
+</file>
+
+<file path=ppt/slides/slide11.xml><?xml version="1.0" encoding="utf-8"?>
+<p:sld xmlns:a="http://schemas.openxmlformats.org/drawingml/2006/main" xmlns:p="http://schemas.openxmlformats.org/presentationml/2006/main" xmlns:r="http://schemas.openxmlformats.org/officeDocument/2006/relationships" xmlns:p14="http://schemas.microsoft.com/office/powerpoint/2010/main" xmlns:p15="http://schemas.microsoft.com/office/powerpoint/2012/main" xmlns:mc="http://schemas.openxmlformats.org/markup-compatibility/2006">
+  <p:cSld>
+    <p:spTree>
+      <p:nvGrpSpPr>
+        <p:cNvPr id="1" name=""/>
+        <p:cNvGrpSpPr/>
+        <p:nvPr/>
+      </p:nvGrpSpPr>
+      <p:grpSpPr>
+        <a:xfrm>
+          <a:off x="0" y="0"/>
+          <a:ext cx="0" cy="0"/>
+          <a:chOff x="0" y="0"/>
+          <a:chExt cx="0" cy="0"/>
+        </a:xfrm>
+      </p:grpSpPr>
+      <p:sp>
+        <p:nvSpPr>
+          <p:cNvPr id="301" name="Rectangle 161"/>
+          <p:cNvSpPr/>
+          <p:nvPr/>
+        </p:nvSpPr>
+        <p:spPr>
+          <a:xfrm>
+            <a:off x="0" y="0"/>
+            <a:ext cx="12184200" cy="6853320"/>
+          </a:xfrm>
+          <a:prstGeom prst="rect">
+            <a:avLst/>
+          </a:prstGeom>
+          <a:solidFill>
+            <a:srgbClr val="0b0b0d"/>
+          </a:solidFill>
+          <a:ln>
+            <a:noFill/>
+          </a:ln>
+          <a:effectLst>
+            <a:outerShdw blurRad="39960" dir="5400000" dist="23040" rotWithShape="0">
+              <a:srgbClr val="000000">
+                <a:alpha val="35000"/>
+              </a:srgbClr>
+            </a:outerShdw>
+          </a:effectLst>
+        </p:spPr>
+        <p:style>
+          <a:lnRef idx="1">
+            <a:schemeClr val="accent1"/>
+          </a:lnRef>
+          <a:fillRef idx="3">
+            <a:schemeClr val="accent1"/>
+          </a:fillRef>
+          <a:effectRef idx="2">
+            <a:schemeClr val="accent1"/>
+          </a:effectRef>
+          <a:fontRef idx="minor"/>
+        </p:style>
+        <p:txBody>
+          <a:bodyPr lIns="90000" rIns="90000" tIns="45000" bIns="45000" anchor="ctr">
+            <a:noAutofit/>
+          </a:bodyPr>
+          <a:p>
+            <a:endParaRPr b="0" lang="en-US" sz="1800" spc="-1" strike="noStrike">
+              <a:solidFill>
+                <a:schemeClr val="lt1"/>
+              </a:solidFill>
+              <a:latin typeface="Calibri"/>
+              <a:ea typeface="DejaVu Sans"/>
+            </a:endParaRPr>
+          </a:p>
+        </p:txBody>
+      </p:sp>
+      <p:sp>
+        <p:nvSpPr>
+          <p:cNvPr id="302" name="Rectangle 162"/>
+          <p:cNvSpPr/>
+          <p:nvPr/>
+        </p:nvSpPr>
+        <p:spPr>
+          <a:xfrm>
+            <a:off x="0" y="0"/>
+            <a:ext cx="13680" cy="6853320"/>
+          </a:xfrm>
+          <a:prstGeom prst="rect">
+            <a:avLst/>
+          </a:prstGeom>
+          <a:solidFill>
+            <a:srgbClr val="121216"/>
+          </a:solidFill>
+          <a:ln>
+            <a:noFill/>
+          </a:ln>
+          <a:effectLst>
+            <a:outerShdw blurRad="39960" dir="5400000" dist="23040" rotWithShape="0">
+              <a:srgbClr val="000000">
+                <a:alpha val="35000"/>
+              </a:srgbClr>
+            </a:outerShdw>
+          </a:effectLst>
+        </p:spPr>
+        <p:style>
+          <a:lnRef idx="1">
+            <a:schemeClr val="accent1"/>
+          </a:lnRef>
+          <a:fillRef idx="3">
+            <a:schemeClr val="accent1"/>
+          </a:fillRef>
+          <a:effectRef idx="2">
+            <a:schemeClr val="accent1"/>
+          </a:effectRef>
+          <a:fontRef idx="minor"/>
+        </p:style>
+        <p:txBody>
+          <a:bodyPr lIns="90000" rIns="90000" tIns="45000" bIns="45000" anchor="ctr">
+            <a:noAutofit/>
+          </a:bodyPr>
+          <a:p>
+            <a:endParaRPr b="0" lang="en-US" sz="1800" spc="-1" strike="noStrike">
+              <a:solidFill>
+                <a:schemeClr val="lt1"/>
+              </a:solidFill>
+              <a:latin typeface="Calibri"/>
+              <a:ea typeface="DejaVu Sans"/>
+            </a:endParaRPr>
+          </a:p>
+        </p:txBody>
+      </p:sp>
+      <p:sp>
+        <p:nvSpPr>
+          <p:cNvPr id="303" name="Rectangle 163"/>
+          <p:cNvSpPr/>
+          <p:nvPr/>
+        </p:nvSpPr>
+        <p:spPr>
+          <a:xfrm>
+            <a:off x="914400" y="0"/>
+            <a:ext cx="13680" cy="6853320"/>
+          </a:xfrm>
+          <a:prstGeom prst="rect">
+            <a:avLst/>
+          </a:prstGeom>
+          <a:solidFill>
+            <a:srgbClr val="121216"/>
+          </a:solidFill>
+          <a:ln>
+            <a:noFill/>
+          </a:ln>
+          <a:effectLst>
+            <a:outerShdw blurRad="39960" dir="5400000" dist="23040" rotWithShape="0">
+              <a:srgbClr val="000000">
+                <a:alpha val="35000"/>
+              </a:srgbClr>
+            </a:outerShdw>
+          </a:effectLst>
+        </p:spPr>
+        <p:style>
+          <a:lnRef idx="1">
+            <a:schemeClr val="accent1"/>
+          </a:lnRef>
+          <a:fillRef idx="3">
+            <a:schemeClr val="accent1"/>
+          </a:fillRef>
+          <a:effectRef idx="2">
+            <a:schemeClr val="accent1"/>
+          </a:effectRef>
+          <a:fontRef idx="minor"/>
+        </p:style>
+        <p:txBody>
+          <a:bodyPr lIns="90000" rIns="90000" tIns="45000" bIns="45000" anchor="ctr">
+            <a:noAutofit/>
+          </a:bodyPr>
+          <a:p>
+            <a:endParaRPr b="0" lang="en-US" sz="1800" spc="-1" strike="noStrike">
+              <a:solidFill>
+                <a:schemeClr val="lt1"/>
+              </a:solidFill>
+              <a:latin typeface="Calibri"/>
+              <a:ea typeface="DejaVu Sans"/>
+            </a:endParaRPr>
+          </a:p>
+        </p:txBody>
+      </p:sp>
+      <p:sp>
+        <p:nvSpPr>
+          <p:cNvPr id="304" name="Rectangle 164"/>
+          <p:cNvSpPr/>
+          <p:nvPr/>
+        </p:nvSpPr>
+        <p:spPr>
+          <a:xfrm>
+            <a:off x="1828800" y="0"/>
+            <a:ext cx="13680" cy="6853320"/>
+          </a:xfrm>
+          <a:prstGeom prst="rect">
+            <a:avLst/>
+          </a:prstGeom>
+          <a:solidFill>
+            <a:srgbClr val="121216"/>
+          </a:solidFill>
+          <a:ln>
+            <a:noFill/>
+          </a:ln>
+          <a:effectLst>
+            <a:outerShdw blurRad="39960" dir="5400000" dist="23040" rotWithShape="0">
+              <a:srgbClr val="000000">
+                <a:alpha val="35000"/>
+              </a:srgbClr>
+            </a:outerShdw>
+          </a:effectLst>
+        </p:spPr>
+        <p:style>
+          <a:lnRef idx="1">
+            <a:schemeClr val="accent1"/>
+          </a:lnRef>
+          <a:fillRef idx="3">
+            <a:schemeClr val="accent1"/>
+          </a:fillRef>
+          <a:effectRef idx="2">
+            <a:schemeClr val="accent1"/>
+          </a:effectRef>
+          <a:fontRef idx="minor"/>
+        </p:style>
+        <p:txBody>
+          <a:bodyPr lIns="90000" rIns="90000" tIns="45000" bIns="45000" anchor="ctr">
+            <a:noAutofit/>
+          </a:bodyPr>
+          <a:p>
+            <a:endParaRPr b="0" lang="en-US" sz="1800" spc="-1" strike="noStrike">
+              <a:solidFill>
+                <a:schemeClr val="lt1"/>
+              </a:solidFill>
+              <a:latin typeface="Calibri"/>
+              <a:ea typeface="DejaVu Sans"/>
+            </a:endParaRPr>
+          </a:p>
+        </p:txBody>
+      </p:sp>
+      <p:sp>
+        <p:nvSpPr>
+          <p:cNvPr id="305" name="Rectangle 165"/>
+          <p:cNvSpPr/>
+          <p:nvPr/>
+        </p:nvSpPr>
+        <p:spPr>
+          <a:xfrm>
+            <a:off x="2743200" y="0"/>
+            <a:ext cx="13680" cy="6853320"/>
+          </a:xfrm>
+          <a:prstGeom prst="rect">
+            <a:avLst/>
+          </a:prstGeom>
+          <a:solidFill>
+            <a:srgbClr val="121216"/>
+          </a:solidFill>
+          <a:ln>
+            <a:noFill/>
+          </a:ln>
+          <a:effectLst>
+            <a:outerShdw blurRad="39960" dir="5400000" dist="23040" rotWithShape="0">
+              <a:srgbClr val="000000">
+                <a:alpha val="35000"/>
+              </a:srgbClr>
+            </a:outerShdw>
+          </a:effectLst>
+        </p:spPr>
+        <p:style>
+          <a:lnRef idx="1">
+            <a:schemeClr val="accent1"/>
+          </a:lnRef>
+          <a:fillRef idx="3">
+            <a:schemeClr val="accent1"/>
+          </a:fillRef>
+          <a:effectRef idx="2">
+            <a:schemeClr val="accent1"/>
+          </a:effectRef>
+          <a:fontRef idx="minor"/>
+        </p:style>
+        <p:txBody>
+          <a:bodyPr lIns="90000" rIns="90000" tIns="45000" bIns="45000" anchor="ctr">
+            <a:noAutofit/>
+          </a:bodyPr>
+          <a:p>
+            <a:endParaRPr b="0" lang="en-US" sz="1800" spc="-1" strike="noStrike">
+              <a:solidFill>
+                <a:schemeClr val="lt1"/>
+              </a:solidFill>
+              <a:latin typeface="Calibri"/>
+              <a:ea typeface="DejaVu Sans"/>
+            </a:endParaRPr>
+          </a:p>
+        </p:txBody>
+      </p:sp>
+      <p:sp>
+        <p:nvSpPr>
+          <p:cNvPr id="306" name="Rectangle 166"/>
+          <p:cNvSpPr/>
+          <p:nvPr/>
+        </p:nvSpPr>
+        <p:spPr>
+          <a:xfrm>
+            <a:off x="3657600" y="0"/>
+            <a:ext cx="13680" cy="6853320"/>
+          </a:xfrm>
+          <a:prstGeom prst="rect">
+            <a:avLst/>
+          </a:prstGeom>
+          <a:solidFill>
+            <a:srgbClr val="121216"/>
+          </a:solidFill>
+          <a:ln>
+            <a:noFill/>
+          </a:ln>
+          <a:effectLst>
+            <a:outerShdw blurRad="39960" dir="5400000" dist="23040" rotWithShape="0">
+              <a:srgbClr val="000000">
+                <a:alpha val="35000"/>
+              </a:srgbClr>
+            </a:outerShdw>
+          </a:effectLst>
+        </p:spPr>
+        <p:style>
+          <a:lnRef idx="1">
+            <a:schemeClr val="accent1"/>
+          </a:lnRef>
+          <a:fillRef idx="3">
+            <a:schemeClr val="accent1"/>
+          </a:fillRef>
+          <a:effectRef idx="2">
+            <a:schemeClr val="accent1"/>
+          </a:effectRef>
+          <a:fontRef idx="minor"/>
+        </p:style>
+        <p:txBody>
+          <a:bodyPr lIns="90000" rIns="90000" tIns="45000" bIns="45000" anchor="ctr">
+            <a:noAutofit/>
+          </a:bodyPr>
+          <a:p>
+            <a:endParaRPr b="0" lang="en-US" sz="1800" spc="-1" strike="noStrike">
+              <a:solidFill>
+                <a:schemeClr val="lt1"/>
+              </a:solidFill>
+              <a:latin typeface="Calibri"/>
+              <a:ea typeface="DejaVu Sans"/>
+            </a:endParaRPr>
+          </a:p>
+        </p:txBody>
+      </p:sp>
+      <p:sp>
+        <p:nvSpPr>
+          <p:cNvPr id="307" name="Rectangle 167"/>
+          <p:cNvSpPr/>
+          <p:nvPr/>
+        </p:nvSpPr>
+        <p:spPr>
+          <a:xfrm>
+            <a:off x="4572000" y="0"/>
+            <a:ext cx="13680" cy="6853320"/>
+          </a:xfrm>
+          <a:prstGeom prst="rect">
+            <a:avLst/>
+          </a:prstGeom>
+          <a:solidFill>
+            <a:srgbClr val="121216"/>
+          </a:solidFill>
+          <a:ln>
+            <a:noFill/>
+          </a:ln>
+          <a:effectLst>
+            <a:outerShdw blurRad="39960" dir="5400000" dist="23040" rotWithShape="0">
+              <a:srgbClr val="000000">
+                <a:alpha val="35000"/>
+              </a:srgbClr>
+            </a:outerShdw>
+          </a:effectLst>
+        </p:spPr>
+        <p:style>
+          <a:lnRef idx="1">
+            <a:schemeClr val="accent1"/>
+          </a:lnRef>
+          <a:fillRef idx="3">
+            <a:schemeClr val="accent1"/>
+          </a:fillRef>
+          <a:effectRef idx="2">
+            <a:schemeClr val="accent1"/>
+          </a:effectRef>
+          <a:fontRef idx="minor"/>
+        </p:style>
+        <p:txBody>
+          <a:bodyPr lIns="90000" rIns="90000" tIns="45000" bIns="45000" anchor="ctr">
+            <a:noAutofit/>
+          </a:bodyPr>
+          <a:p>
+            <a:endParaRPr b="0" lang="en-US" sz="1800" spc="-1" strike="noStrike">
+              <a:solidFill>
+                <a:schemeClr val="lt1"/>
+              </a:solidFill>
+              <a:latin typeface="Calibri"/>
+              <a:ea typeface="DejaVu Sans"/>
+            </a:endParaRPr>
+          </a:p>
+        </p:txBody>
+      </p:sp>
+      <p:sp>
+        <p:nvSpPr>
+          <p:cNvPr id="308" name="Rectangle 168"/>
+          <p:cNvSpPr/>
+          <p:nvPr/>
+        </p:nvSpPr>
+        <p:spPr>
+          <a:xfrm>
+            <a:off x="5486400" y="0"/>
+            <a:ext cx="13680" cy="6853320"/>
+          </a:xfrm>
+          <a:prstGeom prst="rect">
+            <a:avLst/>
+          </a:prstGeom>
+          <a:solidFill>
+            <a:srgbClr val="121216"/>
+          </a:solidFill>
+          <a:ln>
+            <a:noFill/>
+          </a:ln>
+          <a:effectLst>
+            <a:outerShdw blurRad="39960" dir="5400000" dist="23040" rotWithShape="0">
+              <a:srgbClr val="000000">
+                <a:alpha val="35000"/>
+              </a:srgbClr>
+            </a:outerShdw>
+          </a:effectLst>
+        </p:spPr>
+        <p:style>
+          <a:lnRef idx="1">
+            <a:schemeClr val="accent1"/>
+          </a:lnRef>
+          <a:fillRef idx="3">
+            <a:schemeClr val="accent1"/>
+          </a:fillRef>
+          <a:effectRef idx="2">
+            <a:schemeClr val="accent1"/>
+          </a:effectRef>
+          <a:fontRef idx="minor"/>
+        </p:style>
+        <p:txBody>
+          <a:bodyPr lIns="90000" rIns="90000" tIns="45000" bIns="45000" anchor="ctr">
+            <a:noAutofit/>
+          </a:bodyPr>
+          <a:p>
+            <a:endParaRPr b="0" lang="en-US" sz="1800" spc="-1" strike="noStrike">
+              <a:solidFill>
+                <a:schemeClr val="lt1"/>
+              </a:solidFill>
+              <a:latin typeface="Calibri"/>
+              <a:ea typeface="DejaVu Sans"/>
+            </a:endParaRPr>
+          </a:p>
+        </p:txBody>
+      </p:sp>
+      <p:sp>
+        <p:nvSpPr>
+          <p:cNvPr id="309" name="Rectangle 169"/>
+          <p:cNvSpPr/>
+          <p:nvPr/>
+        </p:nvSpPr>
+        <p:spPr>
+          <a:xfrm>
+            <a:off x="6400800" y="0"/>
+            <a:ext cx="13680" cy="6853320"/>
+          </a:xfrm>
+          <a:prstGeom prst="rect">
+            <a:avLst/>
+          </a:prstGeom>
+          <a:solidFill>
+            <a:srgbClr val="121216"/>
+          </a:solidFill>
+          <a:ln>
+            <a:noFill/>
+          </a:ln>
+          <a:effectLst>
+            <a:outerShdw blurRad="39960" dir="5400000" dist="23040" rotWithShape="0">
+              <a:srgbClr val="000000">
+                <a:alpha val="35000"/>
+              </a:srgbClr>
+            </a:outerShdw>
+          </a:effectLst>
+        </p:spPr>
+        <p:style>
+          <a:lnRef idx="1">
+            <a:schemeClr val="accent1"/>
+          </a:lnRef>
+          <a:fillRef idx="3">
+            <a:schemeClr val="accent1"/>
+          </a:fillRef>
+          <a:effectRef idx="2">
+            <a:schemeClr val="accent1"/>
+          </a:effectRef>
+          <a:fontRef idx="minor"/>
+        </p:style>
+        <p:txBody>
+          <a:bodyPr lIns="90000" rIns="90000" tIns="45000" bIns="45000" anchor="ctr">
+            <a:noAutofit/>
+          </a:bodyPr>
+          <a:p>
+            <a:endParaRPr b="0" lang="en-US" sz="1800" spc="-1" strike="noStrike">
+              <a:solidFill>
+                <a:schemeClr val="lt1"/>
+              </a:solidFill>
+              <a:latin typeface="Calibri"/>
+              <a:ea typeface="DejaVu Sans"/>
+            </a:endParaRPr>
+          </a:p>
+        </p:txBody>
+      </p:sp>
+      <p:sp>
+        <p:nvSpPr>
+          <p:cNvPr id="310" name="Rectangle 170"/>
+          <p:cNvSpPr/>
+          <p:nvPr/>
+        </p:nvSpPr>
+        <p:spPr>
+          <a:xfrm>
+            <a:off x="7315200" y="0"/>
+            <a:ext cx="13680" cy="6853320"/>
+          </a:xfrm>
+          <a:prstGeom prst="rect">
+            <a:avLst/>
+          </a:prstGeom>
+          <a:solidFill>
+            <a:srgbClr val="121216"/>
+          </a:solidFill>
+          <a:ln>
+            <a:noFill/>
+          </a:ln>
+          <a:effectLst>
+            <a:outerShdw blurRad="39960" dir="5400000" dist="23040" rotWithShape="0">
+              <a:srgbClr val="000000">
+                <a:alpha val="35000"/>
+              </a:srgbClr>
+            </a:outerShdw>
+          </a:effectLst>
+        </p:spPr>
+        <p:style>
+          <a:lnRef idx="1">
+            <a:schemeClr val="accent1"/>
+          </a:lnRef>
+          <a:fillRef idx="3">
+            <a:schemeClr val="accent1"/>
+          </a:fillRef>
+          <a:effectRef idx="2">
+            <a:schemeClr val="accent1"/>
+          </a:effectRef>
+          <a:fontRef idx="minor"/>
+        </p:style>
+        <p:txBody>
+          <a:bodyPr lIns="90000" rIns="90000" tIns="45000" bIns="45000" anchor="ctr">
+            <a:noAutofit/>
+          </a:bodyPr>
+          <a:p>
+            <a:endParaRPr b="0" lang="en-US" sz="1800" spc="-1" strike="noStrike">
+              <a:solidFill>
+                <a:schemeClr val="lt1"/>
+              </a:solidFill>
+              <a:latin typeface="Calibri"/>
+              <a:ea typeface="DejaVu Sans"/>
+            </a:endParaRPr>
+          </a:p>
+        </p:txBody>
+      </p:sp>
+      <p:sp>
+        <p:nvSpPr>
+          <p:cNvPr id="311" name="Rectangle 171"/>
+          <p:cNvSpPr/>
+          <p:nvPr/>
+        </p:nvSpPr>
+        <p:spPr>
+          <a:xfrm>
+            <a:off x="8229600" y="0"/>
+            <a:ext cx="13680" cy="6853320"/>
+          </a:xfrm>
+          <a:prstGeom prst="rect">
+            <a:avLst/>
+          </a:prstGeom>
+          <a:solidFill>
+            <a:srgbClr val="121216"/>
+          </a:solidFill>
+          <a:ln>
+            <a:noFill/>
+          </a:ln>
+          <a:effectLst>
+            <a:outerShdw blurRad="39960" dir="5400000" dist="23040" rotWithShape="0">
+              <a:srgbClr val="000000">
+                <a:alpha val="35000"/>
+              </a:srgbClr>
+            </a:outerShdw>
+          </a:effectLst>
+        </p:spPr>
+        <p:style>
+          <a:lnRef idx="1">
+            <a:schemeClr val="accent1"/>
+          </a:lnRef>
+          <a:fillRef idx="3">
+            <a:schemeClr val="accent1"/>
+          </a:fillRef>
+          <a:effectRef idx="2">
+            <a:schemeClr val="accent1"/>
+          </a:effectRef>
+          <a:fontRef idx="minor"/>
+        </p:style>
+        <p:txBody>
+          <a:bodyPr lIns="90000" rIns="90000" tIns="45000" bIns="45000" anchor="ctr">
+            <a:noAutofit/>
+          </a:bodyPr>
+          <a:p>
+            <a:endParaRPr b="0" lang="en-US" sz="1800" spc="-1" strike="noStrike">
+              <a:solidFill>
+                <a:schemeClr val="lt1"/>
+              </a:solidFill>
+              <a:latin typeface="Calibri"/>
+              <a:ea typeface="DejaVu Sans"/>
+            </a:endParaRPr>
+          </a:p>
+        </p:txBody>
+      </p:sp>
+      <p:sp>
+        <p:nvSpPr>
+          <p:cNvPr id="312" name="Rectangle 172"/>
+          <p:cNvSpPr/>
+          <p:nvPr/>
+        </p:nvSpPr>
+        <p:spPr>
+          <a:xfrm>
+            <a:off x="9144000" y="0"/>
+            <a:ext cx="13680" cy="6853320"/>
+          </a:xfrm>
+          <a:prstGeom prst="rect">
+            <a:avLst/>
+          </a:prstGeom>
+          <a:solidFill>
+            <a:srgbClr val="121216"/>
+          </a:solidFill>
+          <a:ln>
+            <a:noFill/>
+          </a:ln>
+          <a:effectLst>
+            <a:outerShdw blurRad="39960" dir="5400000" dist="23040" rotWithShape="0">
+              <a:srgbClr val="000000">
+                <a:alpha val="35000"/>
+              </a:srgbClr>
+            </a:outerShdw>
+          </a:effectLst>
+        </p:spPr>
+        <p:style>
+          <a:lnRef idx="1">
+            <a:schemeClr val="accent1"/>
+          </a:lnRef>
+          <a:fillRef idx="3">
+            <a:schemeClr val="accent1"/>
+          </a:fillRef>
+          <a:effectRef idx="2">
+            <a:schemeClr val="accent1"/>
+          </a:effectRef>
+          <a:fontRef idx="minor"/>
+        </p:style>
+        <p:txBody>
+          <a:bodyPr lIns="90000" rIns="90000" tIns="45000" bIns="45000" anchor="ctr">
+            <a:noAutofit/>
+          </a:bodyPr>
+          <a:p>
+            <a:endParaRPr b="0" lang="en-US" sz="1800" spc="-1" strike="noStrike">
+              <a:solidFill>
+                <a:schemeClr val="lt1"/>
+              </a:solidFill>
+              <a:latin typeface="Calibri"/>
+              <a:ea typeface="DejaVu Sans"/>
+            </a:endParaRPr>
+          </a:p>
+        </p:txBody>
+      </p:sp>
+      <p:sp>
+        <p:nvSpPr>
+          <p:cNvPr id="313" name="Rectangle 173"/>
+          <p:cNvSpPr/>
+          <p:nvPr/>
+        </p:nvSpPr>
+        <p:spPr>
+          <a:xfrm>
+            <a:off x="10058400" y="0"/>
+            <a:ext cx="13680" cy="6853320"/>
+          </a:xfrm>
+          <a:prstGeom prst="rect">
+            <a:avLst/>
+          </a:prstGeom>
+          <a:solidFill>
+            <a:srgbClr val="121216"/>
+          </a:solidFill>
+          <a:ln>
+            <a:noFill/>
+          </a:ln>
+          <a:effectLst>
+            <a:outerShdw blurRad="39960" dir="5400000" dist="23040" rotWithShape="0">
+              <a:srgbClr val="000000">
+                <a:alpha val="35000"/>
+              </a:srgbClr>
+            </a:outerShdw>
+          </a:effectLst>
+        </p:spPr>
+        <p:style>
+          <a:lnRef idx="1">
+            <a:schemeClr val="accent1"/>
+          </a:lnRef>
+          <a:fillRef idx="3">
+            <a:schemeClr val="accent1"/>
+          </a:fillRef>
+          <a:effectRef idx="2">
+            <a:schemeClr val="accent1"/>
+          </a:effectRef>
+          <a:fontRef idx="minor"/>
+        </p:style>
+        <p:txBody>
+          <a:bodyPr lIns="90000" rIns="90000" tIns="45000" bIns="45000" anchor="ctr">
+            <a:noAutofit/>
+          </a:bodyPr>
+          <a:p>
+            <a:endParaRPr b="0" lang="en-US" sz="1800" spc="-1" strike="noStrike">
+              <a:solidFill>
+                <a:schemeClr val="lt1"/>
+              </a:solidFill>
+              <a:latin typeface="Calibri"/>
+              <a:ea typeface="DejaVu Sans"/>
+            </a:endParaRPr>
+          </a:p>
+        </p:txBody>
+      </p:sp>
+      <p:sp>
+        <p:nvSpPr>
+          <p:cNvPr id="314" name="Rectangle 174"/>
+          <p:cNvSpPr/>
+          <p:nvPr/>
+        </p:nvSpPr>
+        <p:spPr>
+          <a:xfrm>
+            <a:off x="10972800" y="0"/>
+            <a:ext cx="13680" cy="6853320"/>
+          </a:xfrm>
+          <a:prstGeom prst="rect">
+            <a:avLst/>
+          </a:prstGeom>
+          <a:solidFill>
+            <a:srgbClr val="121216"/>
+          </a:solidFill>
+          <a:ln>
+            <a:noFill/>
+          </a:ln>
+          <a:effectLst>
+            <a:outerShdw blurRad="39960" dir="5400000" dist="23040" rotWithShape="0">
+              <a:srgbClr val="000000">
+                <a:alpha val="35000"/>
+              </a:srgbClr>
+            </a:outerShdw>
+          </a:effectLst>
+        </p:spPr>
+        <p:style>
+          <a:lnRef idx="1">
+            <a:schemeClr val="accent1"/>
+          </a:lnRef>
+          <a:fillRef idx="3">
+            <a:schemeClr val="accent1"/>
+          </a:fillRef>
+          <a:effectRef idx="2">
+            <a:schemeClr val="accent1"/>
+          </a:effectRef>
+          <a:fontRef idx="minor"/>
+        </p:style>
+        <p:txBody>
+          <a:bodyPr lIns="90000" rIns="90000" tIns="45000" bIns="45000" anchor="ctr">
+            <a:noAutofit/>
+          </a:bodyPr>
+          <a:p>
+            <a:endParaRPr b="0" lang="en-US" sz="1800" spc="-1" strike="noStrike">
+              <a:solidFill>
+                <a:schemeClr val="lt1"/>
+              </a:solidFill>
+              <a:latin typeface="Calibri"/>
+              <a:ea typeface="DejaVu Sans"/>
+            </a:endParaRPr>
+          </a:p>
+        </p:txBody>
+      </p:sp>
+      <p:sp>
+        <p:nvSpPr>
+          <p:cNvPr id="315" name="Rectangle 175"/>
+          <p:cNvSpPr/>
+          <p:nvPr/>
+        </p:nvSpPr>
+        <p:spPr>
+          <a:xfrm>
+            <a:off x="11887200" y="0"/>
+            <a:ext cx="13680" cy="6853320"/>
+          </a:xfrm>
+          <a:prstGeom prst="rect">
+            <a:avLst/>
+          </a:prstGeom>
+          <a:solidFill>
+            <a:srgbClr val="121216"/>
+          </a:solidFill>
+          <a:ln>
+            <a:noFill/>
+          </a:ln>
+          <a:effectLst>
+            <a:outerShdw blurRad="39960" dir="5400000" dist="23040" rotWithShape="0">
+              <a:srgbClr val="000000">
+                <a:alpha val="35000"/>
+              </a:srgbClr>
+            </a:outerShdw>
+          </a:effectLst>
+        </p:spPr>
+        <p:style>
+          <a:lnRef idx="1">
+            <a:schemeClr val="accent1"/>
+          </a:lnRef>
+          <a:fillRef idx="3">
+            <a:schemeClr val="accent1"/>
+          </a:fillRef>
+          <a:effectRef idx="2">
+            <a:schemeClr val="accent1"/>
+          </a:effectRef>
+          <a:fontRef idx="minor"/>
+        </p:style>
+        <p:txBody>
+          <a:bodyPr lIns="90000" rIns="90000" tIns="45000" bIns="45000" anchor="ctr">
+            <a:noAutofit/>
+          </a:bodyPr>
+          <a:p>
+            <a:endParaRPr b="0" lang="en-US" sz="1800" spc="-1" strike="noStrike">
+              <a:solidFill>
+                <a:schemeClr val="lt1"/>
+              </a:solidFill>
+              <a:latin typeface="Calibri"/>
+              <a:ea typeface="DejaVu Sans"/>
+            </a:endParaRPr>
+          </a:p>
+        </p:txBody>
+      </p:sp>
+      <p:sp>
+        <p:nvSpPr>
+          <p:cNvPr id="316" name="Rectangle 176"/>
+          <p:cNvSpPr/>
+          <p:nvPr/>
+        </p:nvSpPr>
+        <p:spPr>
+          <a:xfrm>
+            <a:off x="0" y="0"/>
+            <a:ext cx="315360" cy="6853320"/>
+          </a:xfrm>
+          <a:prstGeom prst="rect">
+            <a:avLst/>
+          </a:prstGeom>
+          <a:solidFill>
+            <a:srgbClr val="ff8c00"/>
+          </a:solidFill>
+          <a:ln>
+            <a:noFill/>
+          </a:ln>
+          <a:effectLst>
+            <a:outerShdw blurRad="39960" dir="5400000" dist="23040" rotWithShape="0">
+              <a:srgbClr val="000000">
+                <a:alpha val="35000"/>
+              </a:srgbClr>
+            </a:outerShdw>
+          </a:effectLst>
+        </p:spPr>
+        <p:style>
+          <a:lnRef idx="1">
+            <a:schemeClr val="accent1"/>
+          </a:lnRef>
+          <a:fillRef idx="3">
+            <a:schemeClr val="accent1"/>
+          </a:fillRef>
+          <a:effectRef idx="2">
+            <a:schemeClr val="accent1"/>
+          </a:effectRef>
+          <a:fontRef idx="minor"/>
+        </p:style>
+        <p:txBody>
+          <a:bodyPr lIns="90000" rIns="90000" tIns="45000" bIns="45000" anchor="ctr">
+            <a:noAutofit/>
+          </a:bodyPr>
+          <a:p>
+            <a:endParaRPr b="0" lang="en-US" sz="1800" spc="-1" strike="noStrike">
+              <a:solidFill>
+                <a:schemeClr val="lt1"/>
+              </a:solidFill>
+              <a:latin typeface="Calibri"/>
+              <a:ea typeface="DejaVu Sans"/>
+            </a:endParaRPr>
+          </a:p>
+        </p:txBody>
+      </p:sp>
+      <p:sp>
+        <p:nvSpPr>
+          <p:cNvPr id="317" name="Rounded Rectangle 78"/>
+          <p:cNvSpPr/>
+          <p:nvPr/>
+        </p:nvSpPr>
+        <p:spPr>
+          <a:xfrm>
+            <a:off x="9875520" y="365760"/>
+            <a:ext cx="2007000" cy="498240"/>
+          </a:xfrm>
+          <a:prstGeom prst="roundRect">
+            <a:avLst>
+              <a:gd name="adj" fmla="val 16667"/>
+            </a:avLst>
+          </a:prstGeom>
+          <a:solidFill>
+            <a:srgbClr val="1e1e24"/>
+          </a:solidFill>
+          <a:ln>
+            <a:solidFill>
+              <a:srgbClr val="ff8c00"/>
+            </a:solidFill>
+            <a:round/>
+          </a:ln>
+          <a:effectLst>
+            <a:outerShdw blurRad="39960" dir="5400000" dist="23040" rotWithShape="0">
+              <a:srgbClr val="000000">
+                <a:alpha val="35000"/>
+              </a:srgbClr>
+            </a:outerShdw>
+          </a:effectLst>
+        </p:spPr>
+        <p:style>
+          <a:lnRef idx="1">
+            <a:schemeClr val="accent1"/>
+          </a:lnRef>
+          <a:fillRef idx="3">
+            <a:schemeClr val="accent1"/>
+          </a:fillRef>
+          <a:effectRef idx="2">
+            <a:schemeClr val="accent1"/>
+          </a:effectRef>
+          <a:fontRef idx="minor"/>
+        </p:style>
+        <p:txBody>
+          <a:bodyPr lIns="90000" rIns="90000" tIns="45000" bIns="45000" anchor="ctr">
+            <a:noAutofit/>
+          </a:bodyPr>
+          <a:p>
+            <a:pPr algn="ctr">
+              <a:lnSpc>
+                <a:spcPct val="100000"/>
+              </a:lnSpc>
+            </a:pPr>
+            <a:r>
+              <a:rPr b="1" lang="en-US" sz="1400" spc="-1" strike="noStrike">
+                <a:solidFill>
+                  <a:srgbClr val="ffb45a"/>
+                </a:solidFill>
+                <a:latin typeface="Calibri"/>
+                <a:ea typeface="DejaVu Sans"/>
+              </a:rPr>
+              <a:t>JAVA TEMELLERI</a:t>
+            </a:r>
+            <a:endParaRPr b="0" lang="en-US" sz="1400" spc="-1" strike="noStrike">
+              <a:solidFill>
+                <a:srgbClr val="ffffff"/>
+              </a:solidFill>
+              <a:latin typeface="Arial"/>
+            </a:endParaRPr>
+          </a:p>
+        </p:txBody>
+      </p:sp>
+      <p:sp>
+        <p:nvSpPr>
+          <p:cNvPr id="318" name="TextBox 34"/>
+          <p:cNvSpPr/>
+          <p:nvPr/>
+        </p:nvSpPr>
+        <p:spPr>
+          <a:xfrm>
+            <a:off x="1221120" y="914400"/>
+            <a:ext cx="8526600" cy="516960"/>
+          </a:xfrm>
+          <a:prstGeom prst="rect">
+            <a:avLst/>
+          </a:prstGeom>
+          <a:noFill/>
+          <a:ln w="0">
+            <a:noFill/>
+          </a:ln>
+        </p:spPr>
+        <p:style>
+          <a:lnRef idx="0"/>
+          <a:fillRef idx="0"/>
+          <a:effectRef idx="0"/>
+          <a:fontRef idx="minor"/>
+        </p:style>
+        <p:txBody>
+          <a:bodyPr wrap="none" lIns="90000" rIns="90000" tIns="45000" bIns="45000" anchor="t">
+            <a:spAutoFit/>
+          </a:bodyPr>
+          <a:p>
+            <a:pPr>
+              <a:lnSpc>
+                <a:spcPct val="100000"/>
+              </a:lnSpc>
+            </a:pPr>
+            <a:r>
+              <a:rPr b="1" lang="en-US" sz="2800" spc="-1" strike="noStrike">
+                <a:solidFill>
+                  <a:srgbClr val="f5f5f5"/>
+                </a:solidFill>
+                <a:latin typeface="Calibri"/>
+                <a:ea typeface="DejaVu Sans"/>
+              </a:rPr>
+              <a:t>Aritmetik Operatörler (Bölüm 3: Kısaltmalar ve Metinler)</a:t>
+            </a:r>
+            <a:endParaRPr b="0" lang="en-US" sz="2800" spc="-1" strike="noStrike">
+              <a:solidFill>
+                <a:srgbClr val="000000"/>
+              </a:solidFill>
+              <a:latin typeface="Arial"/>
+            </a:endParaRPr>
+          </a:p>
+        </p:txBody>
+      </p:sp>
+      <p:sp>
+        <p:nvSpPr>
+          <p:cNvPr id="319" name="TextBox 35"/>
+          <p:cNvSpPr/>
+          <p:nvPr/>
+        </p:nvSpPr>
+        <p:spPr>
+          <a:xfrm>
+            <a:off x="1353600" y="1694880"/>
+            <a:ext cx="8861760" cy="819720"/>
+          </a:xfrm>
+          <a:prstGeom prst="rect">
+            <a:avLst/>
+          </a:prstGeom>
+          <a:noFill/>
+          <a:ln w="0">
+            <a:noFill/>
+          </a:ln>
+        </p:spPr>
+        <p:style>
+          <a:lnRef idx="0"/>
+          <a:fillRef idx="0"/>
+          <a:effectRef idx="0"/>
+          <a:fontRef idx="minor"/>
+        </p:style>
+        <p:txBody>
+          <a:bodyPr wrap="none" lIns="90000" rIns="90000" tIns="45000" bIns="45000" anchor="t">
+            <a:spAutoFit/>
+          </a:bodyPr>
+          <a:p>
+            <a:pPr>
+              <a:lnSpc>
+                <a:spcPct val="100000"/>
+              </a:lnSpc>
+            </a:pPr>
+            <a:r>
+              <a:rPr b="0" lang="en-US" sz="1600" spc="-1" strike="noStrike">
+                <a:solidFill>
+                  <a:srgbClr val="aaaaaa"/>
+                </a:solidFill>
+                <a:latin typeface="Calibri"/>
+                <a:ea typeface="DejaVu Sans"/>
+              </a:rPr>
+              <a:t>Java, matematik ve atama işlemlerini tek adımda birleştirerek kodu temiz tutan kısayol operatörleri sunar. </a:t>
+            </a:r>
+            <a:endParaRPr b="0" lang="en-US" sz="1600" spc="-1" strike="noStrike">
+              <a:solidFill>
+                <a:srgbClr val="000000"/>
+              </a:solidFill>
+              <a:latin typeface="Arial"/>
+            </a:endParaRPr>
+          </a:p>
+          <a:p>
+            <a:pPr>
+              <a:lnSpc>
+                <a:spcPct val="100000"/>
+              </a:lnSpc>
+            </a:pPr>
+            <a:r>
+              <a:rPr b="0" lang="en-US" sz="1600" spc="-1" strike="noStrike">
+                <a:solidFill>
+                  <a:srgbClr val="aaaaaa"/>
+                </a:solidFill>
+                <a:latin typeface="Calibri"/>
+                <a:ea typeface="DejaVu Sans"/>
+              </a:rPr>
+              <a:t>Ayrıca + operatörünün çift kimliği vardır: Sayılar için toplama yaparken, </a:t>
+            </a:r>
+            <a:endParaRPr b="0" lang="en-US" sz="1600" spc="-1" strike="noStrike">
+              <a:solidFill>
+                <a:srgbClr val="000000"/>
+              </a:solidFill>
+              <a:latin typeface="Arial"/>
+            </a:endParaRPr>
+          </a:p>
+          <a:p>
+            <a:pPr>
+              <a:lnSpc>
+                <a:spcPct val="100000"/>
+              </a:lnSpc>
+            </a:pPr>
+            <a:r>
+              <a:rPr b="0" lang="en-US" sz="1600" spc="-1" strike="noStrike">
+                <a:solidFill>
+                  <a:srgbClr val="aaaaaa"/>
+                </a:solidFill>
+                <a:latin typeface="Calibri"/>
+                <a:ea typeface="DejaVu Sans"/>
+              </a:rPr>
+              <a:t>String'ler (metinler) için "yapıştırıcı" (birleştirme) görevi görür.</a:t>
+            </a:r>
+            <a:endParaRPr b="0" lang="en-US" sz="1600" spc="-1" strike="noStrike">
+              <a:solidFill>
+                <a:srgbClr val="000000"/>
+              </a:solidFill>
+              <a:latin typeface="Arial"/>
+            </a:endParaRPr>
+          </a:p>
+        </p:txBody>
+      </p:sp>
+      <p:sp>
+        <p:nvSpPr>
+          <p:cNvPr id="320" name="Rounded Rectangle 79"/>
+          <p:cNvSpPr/>
+          <p:nvPr/>
+        </p:nvSpPr>
+        <p:spPr>
+          <a:xfrm>
+            <a:off x="987480" y="3182040"/>
+            <a:ext cx="3287160" cy="2738520"/>
+          </a:xfrm>
+          <a:prstGeom prst="roundRect">
+            <a:avLst>
+              <a:gd name="adj" fmla="val 16667"/>
+            </a:avLst>
+          </a:prstGeom>
+          <a:solidFill>
+            <a:srgbClr val="08080a"/>
+          </a:solidFill>
+          <a:ln>
+            <a:noFill/>
+          </a:ln>
+          <a:effectLst>
+            <a:outerShdw blurRad="39960" dir="5400000" dist="23040" rotWithShape="0">
+              <a:srgbClr val="000000">
+                <a:alpha val="35000"/>
+              </a:srgbClr>
+            </a:outerShdw>
+          </a:effectLst>
+        </p:spPr>
+        <p:style>
+          <a:lnRef idx="1">
+            <a:schemeClr val="accent1"/>
+          </a:lnRef>
+          <a:fillRef idx="3">
+            <a:schemeClr val="accent1"/>
+          </a:fillRef>
+          <a:effectRef idx="2">
+            <a:schemeClr val="accent1"/>
+          </a:effectRef>
+          <a:fontRef idx="minor"/>
+        </p:style>
+        <p:txBody>
+          <a:bodyPr lIns="90000" rIns="90000" tIns="45000" bIns="45000" anchor="ctr">
+            <a:noAutofit/>
+          </a:bodyPr>
+          <a:p>
+            <a:endParaRPr b="0" lang="en-US" sz="1800" spc="-1" strike="noStrike">
+              <a:solidFill>
+                <a:schemeClr val="lt1"/>
+              </a:solidFill>
+              <a:latin typeface="Calibri"/>
+              <a:ea typeface="DejaVu Sans"/>
+            </a:endParaRPr>
+          </a:p>
+        </p:txBody>
+      </p:sp>
+      <p:sp>
+        <p:nvSpPr>
+          <p:cNvPr id="321" name="Rounded Rectangle 80"/>
+          <p:cNvSpPr/>
+          <p:nvPr/>
+        </p:nvSpPr>
+        <p:spPr>
+          <a:xfrm>
+            <a:off x="685800" y="2743200"/>
+            <a:ext cx="3515760" cy="3656160"/>
+          </a:xfrm>
+          <a:prstGeom prst="roundRect">
+            <a:avLst>
+              <a:gd name="adj" fmla="val 16667"/>
+            </a:avLst>
+          </a:prstGeom>
+          <a:solidFill>
+            <a:srgbClr val="16161c"/>
+          </a:solidFill>
+          <a:ln>
+            <a:solidFill>
+              <a:srgbClr val="464655"/>
+            </a:solidFill>
+            <a:round/>
+          </a:ln>
+          <a:effectLst>
+            <a:outerShdw blurRad="39960" dir="5400000" dist="23040" rotWithShape="0">
+              <a:srgbClr val="000000">
+                <a:alpha val="35000"/>
+              </a:srgbClr>
+            </a:outerShdw>
+          </a:effectLst>
+        </p:spPr>
+        <p:style>
+          <a:lnRef idx="1">
+            <a:schemeClr val="accent1"/>
+          </a:lnRef>
+          <a:fillRef idx="3">
+            <a:schemeClr val="accent1"/>
+          </a:fillRef>
+          <a:effectRef idx="2">
+            <a:schemeClr val="accent1"/>
+          </a:effectRef>
+          <a:fontRef idx="minor"/>
+        </p:style>
+        <p:txBody>
+          <a:bodyPr lIns="90000" rIns="90000" tIns="45000" bIns="45000" anchor="ctr">
+            <a:noAutofit/>
+          </a:bodyPr>
+          <a:p>
+            <a:pPr>
+              <a:lnSpc>
+                <a:spcPct val="100000"/>
+              </a:lnSpc>
+            </a:pPr>
+            <a:r>
+              <a:rPr b="1" lang="en-US" sz="1400" spc="-1" strike="noStrike">
+                <a:solidFill>
+                  <a:schemeClr val="lt1"/>
+                </a:solidFill>
+                <a:latin typeface="Calibri"/>
+                <a:ea typeface="DejaVu Sans"/>
+              </a:rPr>
+              <a:t>1. Bileşik Atama (Compound):</a:t>
+            </a:r>
+            <a:endParaRPr b="0" lang="en-US" sz="1400" spc="-1" strike="noStrike">
+              <a:solidFill>
+                <a:srgbClr val="ffffff"/>
+              </a:solidFill>
+              <a:latin typeface="Arial"/>
+            </a:endParaRPr>
+          </a:p>
+          <a:p>
+            <a:pPr marL="216000" indent="-216000">
+              <a:lnSpc>
+                <a:spcPct val="100000"/>
+              </a:lnSpc>
+              <a:buClr>
+                <a:srgbClr val="ffffff"/>
+              </a:buClr>
+              <a:buFont typeface="Wingdings" charset="2"/>
+              <a:buChar char=""/>
+            </a:pPr>
+            <a:r>
+              <a:rPr b="0" lang="en-US" sz="1400" spc="-1" strike="noStrike">
+                <a:solidFill>
+                  <a:schemeClr val="lt1"/>
+                </a:solidFill>
+                <a:latin typeface="Calibri"/>
+                <a:ea typeface="DejaVu Sans"/>
+              </a:rPr>
+              <a:t>Aritmetik işlem ve atamayı birleştirir: +=, -=, *=, /=, %=.</a:t>
+            </a:r>
+            <a:endParaRPr b="0" lang="en-US" sz="1400" spc="-1" strike="noStrike">
+              <a:solidFill>
+                <a:srgbClr val="ffffff"/>
+              </a:solidFill>
+              <a:latin typeface="Arial"/>
+            </a:endParaRPr>
+          </a:p>
+          <a:p>
+            <a:pPr marL="216000" indent="-216000">
+              <a:lnSpc>
+                <a:spcPct val="100000"/>
+              </a:lnSpc>
+              <a:buClr>
+                <a:srgbClr val="ffffff"/>
+              </a:buClr>
+              <a:buFont typeface="Wingdings" charset="2"/>
+              <a:buChar char=""/>
+            </a:pPr>
+            <a:r>
+              <a:rPr b="0" lang="en-US" sz="1400" spc="-1" strike="noStrike">
+                <a:solidFill>
+                  <a:schemeClr val="lt1"/>
+                </a:solidFill>
+                <a:latin typeface="Calibri"/>
+                <a:ea typeface="DejaVu Sans"/>
+              </a:rPr>
+              <a:t>Örn: x += 5 ifadesi, tam olarak x = x + 5 işleminin kısaltmasıdır.</a:t>
+            </a:r>
+            <a:endParaRPr b="0" lang="en-US" sz="1400" spc="-1" strike="noStrike">
+              <a:solidFill>
+                <a:srgbClr val="ffffff"/>
+              </a:solidFill>
+              <a:latin typeface="Arial"/>
+            </a:endParaRPr>
+          </a:p>
+          <a:p>
+            <a:pPr marL="216000" indent="-216000">
+              <a:lnSpc>
+                <a:spcPct val="100000"/>
+              </a:lnSpc>
+              <a:buClr>
+                <a:srgbClr val="ffffff"/>
+              </a:buClr>
+              <a:buFont typeface="Wingdings" charset="2"/>
+              <a:buChar char=""/>
+            </a:pPr>
+            <a:r>
+              <a:rPr b="0" lang="en-US" sz="1400" spc="-1" strike="noStrike">
+                <a:solidFill>
+                  <a:schemeClr val="lt1"/>
+                </a:solidFill>
+                <a:latin typeface="Calibri"/>
+                <a:ea typeface="DejaVu Sans"/>
+              </a:rPr>
+              <a:t>İpucu: Arka planda otomatik tip dönüşümü (casting) yaparlar (hata fırlatmazlar).</a:t>
+            </a:r>
+            <a:endParaRPr b="0" lang="en-US" sz="1400" spc="-1" strike="noStrike">
+              <a:solidFill>
+                <a:srgbClr val="ffffff"/>
+              </a:solidFill>
+              <a:latin typeface="Arial"/>
+            </a:endParaRPr>
+          </a:p>
+          <a:p>
+            <a:pPr marL="216000" indent="-216000">
+              <a:lnSpc>
+                <a:spcPct val="100000"/>
+              </a:lnSpc>
+              <a:buClr>
+                <a:srgbClr val="ffffff"/>
+              </a:buClr>
+              <a:buFont typeface="Wingdings" charset="2"/>
+              <a:buChar char=""/>
+            </a:pPr>
+            <a:endParaRPr b="0" lang="en-US" sz="1400" spc="-1" strike="noStrike">
+              <a:solidFill>
+                <a:srgbClr val="ffffff"/>
+              </a:solidFill>
+              <a:latin typeface="Arial"/>
+            </a:endParaRPr>
+          </a:p>
+          <a:p>
+            <a:pPr>
+              <a:lnSpc>
+                <a:spcPct val="100000"/>
+              </a:lnSpc>
+            </a:pPr>
+            <a:r>
+              <a:rPr b="1" lang="en-US" sz="1400" spc="-1" strike="noStrike">
+                <a:solidFill>
+                  <a:schemeClr val="lt1"/>
+                </a:solidFill>
+                <a:latin typeface="Calibri"/>
+                <a:ea typeface="DejaVu Sans"/>
+              </a:rPr>
+              <a:t>2. + Operatörünün İki Yüzü:</a:t>
+            </a:r>
+            <a:endParaRPr b="0" lang="en-US" sz="1400" spc="-1" strike="noStrike">
+              <a:solidFill>
+                <a:srgbClr val="ffffff"/>
+              </a:solidFill>
+              <a:latin typeface="Arial"/>
+            </a:endParaRPr>
+          </a:p>
+          <a:p>
+            <a:pPr marL="216000" indent="-216000">
+              <a:lnSpc>
+                <a:spcPct val="100000"/>
+              </a:lnSpc>
+              <a:buClr>
+                <a:srgbClr val="ffffff"/>
+              </a:buClr>
+              <a:buFont typeface="Wingdings" charset="2"/>
+              <a:buChar char=""/>
+            </a:pPr>
+            <a:r>
+              <a:rPr b="0" lang="en-US" sz="1400" spc="-1" strike="noStrike">
+                <a:solidFill>
+                  <a:schemeClr val="lt1"/>
+                </a:solidFill>
+                <a:latin typeface="Calibri"/>
+                <a:ea typeface="DejaVu Sans"/>
+              </a:rPr>
+              <a:t>Sayı + Sayı = Matematik (Toplama).</a:t>
+            </a:r>
+            <a:endParaRPr b="0" lang="en-US" sz="1400" spc="-1" strike="noStrike">
+              <a:solidFill>
+                <a:srgbClr val="ffffff"/>
+              </a:solidFill>
+              <a:latin typeface="Arial"/>
+            </a:endParaRPr>
+          </a:p>
+          <a:p>
+            <a:pPr marL="216000" indent="-216000">
+              <a:lnSpc>
+                <a:spcPct val="100000"/>
+              </a:lnSpc>
+              <a:buClr>
+                <a:srgbClr val="ffffff"/>
+              </a:buClr>
+              <a:buFont typeface="Wingdings" charset="2"/>
+              <a:buChar char=""/>
+            </a:pPr>
+            <a:r>
+              <a:rPr b="0" lang="en-US" sz="1400" spc="-1" strike="noStrike">
+                <a:solidFill>
+                  <a:schemeClr val="lt1"/>
+                </a:solidFill>
+                <a:latin typeface="Calibri"/>
+                <a:ea typeface="DejaVu Sans"/>
+              </a:rPr>
+              <a:t>String + Herhangi Bir Şey = Metin (Birleştirme - Concatenation).</a:t>
+            </a:r>
+            <a:endParaRPr b="0" lang="en-US" sz="1400" spc="-1" strike="noStrike">
+              <a:solidFill>
+                <a:srgbClr val="ffffff"/>
+              </a:solidFill>
+              <a:latin typeface="Arial"/>
+            </a:endParaRPr>
+          </a:p>
+          <a:p>
+            <a:pPr marL="216000" indent="-216000">
+              <a:lnSpc>
+                <a:spcPct val="100000"/>
+              </a:lnSpc>
+              <a:buClr>
+                <a:srgbClr val="ffffff"/>
+              </a:buClr>
+              <a:buFont typeface="Wingdings" charset="2"/>
+              <a:buChar char=""/>
+            </a:pPr>
+            <a:r>
+              <a:rPr b="0" lang="en-US" sz="1400" spc="-1" strike="noStrike">
+                <a:solidFill>
+                  <a:schemeClr val="lt1"/>
+                </a:solidFill>
+                <a:latin typeface="Calibri"/>
+                <a:ea typeface="DejaVu Sans"/>
+              </a:rPr>
+              <a:t>İşlemler kesinlikle Soldan Sağa akar. Eğer işlem bir String ile başlarsa, sağındaki her şey metne dönüşür!</a:t>
+            </a:r>
+            <a:endParaRPr b="0" lang="en-US" sz="1400" spc="-1" strike="noStrike">
+              <a:solidFill>
+                <a:srgbClr val="ffffff"/>
+              </a:solidFill>
+              <a:latin typeface="Arial"/>
+            </a:endParaRPr>
+          </a:p>
+        </p:txBody>
+      </p:sp>
+      <p:sp>
+        <p:nvSpPr>
+          <p:cNvPr id="322" name="Rounded Rectangle 81"/>
+          <p:cNvSpPr/>
+          <p:nvPr/>
+        </p:nvSpPr>
+        <p:spPr>
+          <a:xfrm>
+            <a:off x="4507920" y="3182040"/>
+            <a:ext cx="3287160" cy="2738520"/>
+          </a:xfrm>
+          <a:prstGeom prst="roundRect">
+            <a:avLst>
+              <a:gd name="adj" fmla="val 16667"/>
+            </a:avLst>
+          </a:prstGeom>
+          <a:solidFill>
+            <a:srgbClr val="08080a"/>
+          </a:solidFill>
+          <a:ln>
+            <a:noFill/>
+          </a:ln>
+          <a:effectLst>
+            <a:outerShdw blurRad="39960" dir="5400000" dist="23040" rotWithShape="0">
+              <a:srgbClr val="000000">
+                <a:alpha val="35000"/>
+              </a:srgbClr>
+            </a:outerShdw>
+          </a:effectLst>
+        </p:spPr>
+        <p:style>
+          <a:lnRef idx="1">
+            <a:schemeClr val="accent1"/>
+          </a:lnRef>
+          <a:fillRef idx="3">
+            <a:schemeClr val="accent1"/>
+          </a:fillRef>
+          <a:effectRef idx="2">
+            <a:schemeClr val="accent1"/>
+          </a:effectRef>
+          <a:fontRef idx="minor"/>
+        </p:style>
+        <p:txBody>
+          <a:bodyPr lIns="90000" rIns="90000" tIns="45000" bIns="45000" anchor="ctr">
+            <a:noAutofit/>
+          </a:bodyPr>
+          <a:p>
+            <a:endParaRPr b="0" lang="en-US" sz="1800" spc="-1" strike="noStrike">
+              <a:solidFill>
+                <a:schemeClr val="lt1"/>
+              </a:solidFill>
+              <a:latin typeface="Calibri"/>
+              <a:ea typeface="DejaVu Sans"/>
+            </a:endParaRPr>
+          </a:p>
+        </p:txBody>
+      </p:sp>
+      <p:sp>
+        <p:nvSpPr>
+          <p:cNvPr id="323" name="Rounded Rectangle 82"/>
+          <p:cNvSpPr/>
+          <p:nvPr/>
+        </p:nvSpPr>
+        <p:spPr>
+          <a:xfrm>
+            <a:off x="4434840" y="2971800"/>
+            <a:ext cx="3287160" cy="3427560"/>
+          </a:xfrm>
+          <a:prstGeom prst="roundRect">
+            <a:avLst>
+              <a:gd name="adj" fmla="val 16667"/>
+            </a:avLst>
+          </a:prstGeom>
+          <a:solidFill>
+            <a:srgbClr val="16161c"/>
+          </a:solidFill>
+          <a:ln>
+            <a:solidFill>
+              <a:srgbClr val="464655"/>
+            </a:solidFill>
+            <a:round/>
+          </a:ln>
+          <a:effectLst>
+            <a:outerShdw blurRad="39960" dir="5400000" dist="23040" rotWithShape="0">
+              <a:srgbClr val="000000">
+                <a:alpha val="35000"/>
+              </a:srgbClr>
+            </a:outerShdw>
+          </a:effectLst>
+        </p:spPr>
+        <p:style>
+          <a:lnRef idx="1">
+            <a:schemeClr val="accent1"/>
+          </a:lnRef>
+          <a:fillRef idx="3">
+            <a:schemeClr val="accent1"/>
+          </a:fillRef>
+          <a:effectRef idx="2">
+            <a:schemeClr val="accent1"/>
+          </a:effectRef>
+          <a:fontRef idx="minor"/>
+        </p:style>
+        <p:txBody>
+          <a:bodyPr lIns="90000" rIns="90000" tIns="45000" bIns="45000" anchor="ctr">
+            <a:noAutofit/>
+          </a:bodyPr>
+          <a:p>
+            <a:pPr>
+              <a:lnSpc>
+                <a:spcPct val="100000"/>
+              </a:lnSpc>
+            </a:pPr>
+            <a:r>
+              <a:rPr b="0" lang="en-US" sz="1600" spc="-1" strike="noStrike">
+                <a:solidFill>
+                  <a:schemeClr val="lt1"/>
+                </a:solidFill>
+                <a:latin typeface="Calibri"/>
+                <a:ea typeface="DejaVu Sans"/>
+              </a:rPr>
+              <a:t>[ + İşleminin Soldan Sağa Akışı ]</a:t>
+            </a:r>
+            <a:endParaRPr b="0" lang="en-US" sz="1600" spc="-1" strike="noStrike">
+              <a:solidFill>
+                <a:srgbClr val="ffffff"/>
+              </a:solidFill>
+              <a:latin typeface="Arial"/>
+            </a:endParaRPr>
+          </a:p>
+          <a:p>
+            <a:pPr>
+              <a:lnSpc>
+                <a:spcPct val="100000"/>
+              </a:lnSpc>
+            </a:pPr>
+            <a:r>
+              <a:rPr b="0" lang="en-US" sz="1600" spc="-1" strike="noStrike">
+                <a:solidFill>
+                  <a:schemeClr val="lt1"/>
+                </a:solidFill>
+                <a:latin typeface="Calibri"/>
+                <a:ea typeface="DejaVu Sans"/>
+              </a:rPr>
+              <a:t>├──</a:t>
+            </a:r>
+            <a:r>
+              <a:rPr b="0" lang="en-US" sz="1600" spc="-1" strike="noStrike">
+                <a:solidFill>
+                  <a:schemeClr val="lt1"/>
+                </a:solidFill>
+                <a:latin typeface="Calibri"/>
+                <a:ea typeface="DejaVu Sans"/>
+              </a:rPr>
+              <a:t>&gt; Senaryo 1: 10 + 5 + "A"</a:t>
+            </a:r>
+            <a:endParaRPr b="0" lang="en-US" sz="1600" spc="-1" strike="noStrike">
+              <a:solidFill>
+                <a:srgbClr val="ffffff"/>
+              </a:solidFill>
+              <a:latin typeface="Arial"/>
+            </a:endParaRPr>
+          </a:p>
+          <a:p>
+            <a:pPr>
+              <a:lnSpc>
+                <a:spcPct val="100000"/>
+              </a:lnSpc>
+            </a:pPr>
+            <a:r>
+              <a:rPr b="0" lang="en-US" sz="1600" spc="-1" strike="noStrike">
+                <a:solidFill>
+                  <a:schemeClr val="lt1"/>
+                </a:solidFill>
+                <a:latin typeface="Calibri"/>
+                <a:ea typeface="DejaVu Sans"/>
+              </a:rPr>
+              <a:t>│ </a:t>
+            </a:r>
+            <a:r>
+              <a:rPr b="0" lang="en-US" sz="1600" spc="-1" strike="noStrike">
+                <a:solidFill>
+                  <a:schemeClr val="lt1"/>
+                </a:solidFill>
+                <a:latin typeface="Calibri"/>
+                <a:ea typeface="DejaVu Sans"/>
+              </a:rPr>
+              <a:t>1. Adım: Matematik! 10 + 5 = 15</a:t>
+            </a:r>
+            <a:endParaRPr b="0" lang="en-US" sz="1600" spc="-1" strike="noStrike">
+              <a:solidFill>
+                <a:srgbClr val="ffffff"/>
+              </a:solidFill>
+              <a:latin typeface="Arial"/>
+            </a:endParaRPr>
+          </a:p>
+          <a:p>
+            <a:pPr>
+              <a:lnSpc>
+                <a:spcPct val="100000"/>
+              </a:lnSpc>
+            </a:pPr>
+            <a:r>
+              <a:rPr b="0" lang="en-US" sz="1600" spc="-1" strike="noStrike">
+                <a:solidFill>
+                  <a:schemeClr val="lt1"/>
+                </a:solidFill>
+                <a:latin typeface="Calibri"/>
+                <a:ea typeface="DejaVu Sans"/>
+              </a:rPr>
+              <a:t>│ </a:t>
+            </a:r>
+            <a:r>
+              <a:rPr b="0" lang="en-US" sz="1600" spc="-1" strike="noStrike">
+                <a:solidFill>
+                  <a:schemeClr val="lt1"/>
+                </a:solidFill>
+                <a:latin typeface="Calibri"/>
+                <a:ea typeface="DejaVu Sans"/>
+              </a:rPr>
+              <a:t>2. Adım: Metin! 15 + "A" = "15A"</a:t>
+            </a:r>
+            <a:endParaRPr b="0" lang="en-US" sz="1600" spc="-1" strike="noStrike">
+              <a:solidFill>
+                <a:srgbClr val="ffffff"/>
+              </a:solidFill>
+              <a:latin typeface="Arial"/>
+            </a:endParaRPr>
+          </a:p>
+          <a:p>
+            <a:pPr>
+              <a:lnSpc>
+                <a:spcPct val="100000"/>
+              </a:lnSpc>
+            </a:pPr>
+            <a:r>
+              <a:rPr b="0" lang="en-US" sz="1600" spc="-1" strike="noStrike">
+                <a:solidFill>
+                  <a:schemeClr val="lt1"/>
+                </a:solidFill>
+                <a:latin typeface="Calibri"/>
+                <a:ea typeface="DejaVu Sans"/>
+              </a:rPr>
+              <a:t>│ </a:t>
+            </a:r>
+            <a:r>
+              <a:rPr b="0" lang="en-US" sz="1600" spc="-1" strike="noStrike">
+                <a:solidFill>
+                  <a:schemeClr val="lt1"/>
+                </a:solidFill>
+                <a:latin typeface="Calibri"/>
+                <a:ea typeface="DejaVu Sans"/>
+              </a:rPr>
+              <a:t>Sonuç: "15A"</a:t>
+            </a:r>
+            <a:endParaRPr b="0" lang="en-US" sz="1600" spc="-1" strike="noStrike">
+              <a:solidFill>
+                <a:srgbClr val="ffffff"/>
+              </a:solidFill>
+              <a:latin typeface="Arial"/>
+            </a:endParaRPr>
+          </a:p>
+          <a:p>
+            <a:pPr>
+              <a:lnSpc>
+                <a:spcPct val="100000"/>
+              </a:lnSpc>
+            </a:pPr>
+            <a:r>
+              <a:rPr b="0" lang="en-US" sz="1600" spc="-1" strike="noStrike">
+                <a:solidFill>
+                  <a:schemeClr val="lt1"/>
+                </a:solidFill>
+                <a:latin typeface="Calibri"/>
+                <a:ea typeface="DejaVu Sans"/>
+              </a:rPr>
+              <a:t>│</a:t>
+            </a:r>
+            <a:endParaRPr b="0" lang="en-US" sz="1600" spc="-1" strike="noStrike">
+              <a:solidFill>
+                <a:srgbClr val="ffffff"/>
+              </a:solidFill>
+              <a:latin typeface="Arial"/>
+            </a:endParaRPr>
+          </a:p>
+          <a:p>
+            <a:pPr>
+              <a:lnSpc>
+                <a:spcPct val="100000"/>
+              </a:lnSpc>
+            </a:pPr>
+            <a:r>
+              <a:rPr b="0" lang="en-US" sz="1600" spc="-1" strike="noStrike">
+                <a:solidFill>
+                  <a:schemeClr val="lt1"/>
+                </a:solidFill>
+                <a:latin typeface="Calibri"/>
+                <a:ea typeface="DejaVu Sans"/>
+              </a:rPr>
+              <a:t>└──</a:t>
+            </a:r>
+            <a:r>
+              <a:rPr b="0" lang="en-US" sz="1600" spc="-1" strike="noStrike">
+                <a:solidFill>
+                  <a:schemeClr val="lt1"/>
+                </a:solidFill>
+                <a:latin typeface="Calibri"/>
+                <a:ea typeface="DejaVu Sans"/>
+              </a:rPr>
+              <a:t>&gt; Senaryo 2: "A" + 10 + 5</a:t>
+            </a:r>
+            <a:endParaRPr b="0" lang="en-US" sz="1600" spc="-1" strike="noStrike">
+              <a:solidFill>
+                <a:srgbClr val="ffffff"/>
+              </a:solidFill>
+              <a:latin typeface="Arial"/>
+            </a:endParaRPr>
+          </a:p>
+          <a:p>
+            <a:pPr>
+              <a:lnSpc>
+                <a:spcPct val="100000"/>
+              </a:lnSpc>
+            </a:pPr>
+            <a:r>
+              <a:rPr b="0" lang="en-US" sz="1600" spc="-1" strike="noStrike">
+                <a:solidFill>
+                  <a:schemeClr val="lt1"/>
+                </a:solidFill>
+                <a:latin typeface="Calibri"/>
+                <a:ea typeface="DejaVu Sans"/>
+              </a:rPr>
+              <a:t>1. Adım: Metin! "A" + 10 = "A10"</a:t>
+            </a:r>
+            <a:endParaRPr b="0" lang="en-US" sz="1600" spc="-1" strike="noStrike">
+              <a:solidFill>
+                <a:srgbClr val="ffffff"/>
+              </a:solidFill>
+              <a:latin typeface="Arial"/>
+            </a:endParaRPr>
+          </a:p>
+          <a:p>
+            <a:pPr>
+              <a:lnSpc>
+                <a:spcPct val="100000"/>
+              </a:lnSpc>
+            </a:pPr>
+            <a:r>
+              <a:rPr b="0" lang="en-US" sz="1600" spc="-1" strike="noStrike">
+                <a:solidFill>
+                  <a:schemeClr val="lt1"/>
+                </a:solidFill>
+                <a:latin typeface="Calibri"/>
+                <a:ea typeface="DejaVu Sans"/>
+              </a:rPr>
+              <a:t>2. Adım: Metin! "A10" + 5 = "A105"</a:t>
+            </a:r>
+            <a:endParaRPr b="0" lang="en-US" sz="1600" spc="-1" strike="noStrike">
+              <a:solidFill>
+                <a:srgbClr val="ffffff"/>
+              </a:solidFill>
+              <a:latin typeface="Arial"/>
+            </a:endParaRPr>
+          </a:p>
+          <a:p>
+            <a:pPr>
+              <a:lnSpc>
+                <a:spcPct val="100000"/>
+              </a:lnSpc>
+            </a:pPr>
+            <a:r>
+              <a:rPr b="0" lang="en-US" sz="1600" spc="-1" strike="noStrike">
+                <a:solidFill>
+                  <a:schemeClr val="lt1"/>
+                </a:solidFill>
+                <a:latin typeface="Calibri"/>
+                <a:ea typeface="DejaVu Sans"/>
+              </a:rPr>
+              <a:t>Sonuç: "A105" (A15 DEĞİL!)</a:t>
+            </a:r>
+            <a:endParaRPr b="0" lang="en-US" sz="1600" spc="-1" strike="noStrike">
+              <a:solidFill>
+                <a:srgbClr val="ffffff"/>
+              </a:solidFill>
+              <a:latin typeface="Arial"/>
+            </a:endParaRPr>
+          </a:p>
+        </p:txBody>
+      </p:sp>
+      <p:sp>
+        <p:nvSpPr>
+          <p:cNvPr id="324" name="Rounded Rectangle 83"/>
+          <p:cNvSpPr/>
+          <p:nvPr/>
+        </p:nvSpPr>
+        <p:spPr>
+          <a:xfrm>
+            <a:off x="8028360" y="3182040"/>
+            <a:ext cx="3287160" cy="2738520"/>
+          </a:xfrm>
+          <a:prstGeom prst="roundRect">
+            <a:avLst>
+              <a:gd name="adj" fmla="val 16667"/>
+            </a:avLst>
+          </a:prstGeom>
+          <a:solidFill>
+            <a:srgbClr val="08080a"/>
+          </a:solidFill>
+          <a:ln>
+            <a:noFill/>
+          </a:ln>
+          <a:effectLst>
+            <a:outerShdw blurRad="39960" dir="5400000" dist="23040" rotWithShape="0">
+              <a:srgbClr val="000000">
+                <a:alpha val="35000"/>
+              </a:srgbClr>
+            </a:outerShdw>
+          </a:effectLst>
+        </p:spPr>
+        <p:style>
+          <a:lnRef idx="1">
+            <a:schemeClr val="accent1"/>
+          </a:lnRef>
+          <a:fillRef idx="3">
+            <a:schemeClr val="accent1"/>
+          </a:fillRef>
+          <a:effectRef idx="2">
+            <a:schemeClr val="accent1"/>
+          </a:effectRef>
+          <a:fontRef idx="minor"/>
+        </p:style>
+        <p:txBody>
+          <a:bodyPr lIns="90000" rIns="90000" tIns="45000" bIns="45000" anchor="ctr">
+            <a:noAutofit/>
+          </a:bodyPr>
+          <a:p>
+            <a:endParaRPr b="0" lang="en-US" sz="1800" spc="-1" strike="noStrike">
+              <a:solidFill>
+                <a:schemeClr val="lt1"/>
+              </a:solidFill>
+              <a:latin typeface="Calibri"/>
+              <a:ea typeface="DejaVu Sans"/>
+            </a:endParaRPr>
+          </a:p>
+        </p:txBody>
+      </p:sp>
+      <p:sp>
+        <p:nvSpPr>
+          <p:cNvPr id="325" name="Rounded Rectangle 84"/>
+          <p:cNvSpPr/>
+          <p:nvPr/>
+        </p:nvSpPr>
+        <p:spPr>
+          <a:xfrm>
+            <a:off x="8001000" y="2971800"/>
+            <a:ext cx="3314520" cy="3429000"/>
+          </a:xfrm>
+          <a:prstGeom prst="roundRect">
+            <a:avLst>
+              <a:gd name="adj" fmla="val 16667"/>
+            </a:avLst>
+          </a:prstGeom>
+          <a:solidFill>
+            <a:srgbClr val="16161c"/>
+          </a:solidFill>
+          <a:ln>
+            <a:solidFill>
+              <a:srgbClr val="464655"/>
+            </a:solidFill>
+            <a:round/>
+          </a:ln>
+          <a:effectLst>
+            <a:outerShdw blurRad="39960" dir="5400000" dist="23040" rotWithShape="0">
+              <a:srgbClr val="000000">
+                <a:alpha val="35000"/>
+              </a:srgbClr>
+            </a:outerShdw>
+          </a:effectLst>
+        </p:spPr>
+        <p:style>
+          <a:lnRef idx="1">
+            <a:schemeClr val="accent1"/>
+          </a:lnRef>
+          <a:fillRef idx="3">
+            <a:schemeClr val="accent1"/>
+          </a:fillRef>
+          <a:effectRef idx="2">
+            <a:schemeClr val="accent1"/>
+          </a:effectRef>
+          <a:fontRef idx="minor"/>
+        </p:style>
+        <p:txBody>
+          <a:bodyPr lIns="90000" rIns="90000" tIns="45000" bIns="45000" anchor="ctr">
+            <a:noAutofit/>
+          </a:bodyPr>
+          <a:p>
+            <a:pPr algn="ctr">
+              <a:lnSpc>
+                <a:spcPct val="100000"/>
+              </a:lnSpc>
+            </a:pPr>
+            <a:r>
+              <a:rPr b="0" lang="en-US" sz="900" spc="-1" strike="noStrike">
+                <a:solidFill>
+                  <a:srgbClr val="78ffc8"/>
+                </a:solidFill>
+                <a:latin typeface="Consolas"/>
+                <a:ea typeface="DejaVu Sans"/>
+              </a:rPr>
+              <a:t>public class AritmetikTuzaklar {</a:t>
+            </a:r>
+            <a:endParaRPr b="0" lang="en-US" sz="900" spc="-1" strike="noStrike">
+              <a:solidFill>
+                <a:srgbClr val="ffffff"/>
+              </a:solidFill>
+              <a:latin typeface="Arial"/>
+            </a:endParaRPr>
+          </a:p>
+          <a:p>
+            <a:pPr algn="ctr">
+              <a:lnSpc>
+                <a:spcPct val="100000"/>
+              </a:lnSpc>
+            </a:pPr>
+            <a:r>
+              <a:rPr b="0" lang="en-US" sz="900" spc="-1" strike="noStrike">
+                <a:solidFill>
+                  <a:srgbClr val="78ffc8"/>
+                </a:solidFill>
+                <a:latin typeface="Consolas"/>
+                <a:ea typeface="DejaVu Sans"/>
+              </a:rPr>
+              <a:t>    </a:t>
+            </a:r>
+            <a:r>
+              <a:rPr b="0" lang="en-US" sz="900" spc="-1" strike="noStrike">
+                <a:solidFill>
+                  <a:srgbClr val="78ffc8"/>
+                </a:solidFill>
+                <a:latin typeface="Consolas"/>
+                <a:ea typeface="DejaVu Sans"/>
+              </a:rPr>
+              <a:t>public static void main(String[] args) {</a:t>
+            </a:r>
+            <a:endParaRPr b="0" lang="en-US" sz="900" spc="-1" strike="noStrike">
+              <a:solidFill>
+                <a:srgbClr val="ffffff"/>
+              </a:solidFill>
+              <a:latin typeface="Arial"/>
+            </a:endParaRPr>
+          </a:p>
+          <a:p>
+            <a:pPr algn="ctr">
+              <a:lnSpc>
+                <a:spcPct val="100000"/>
+              </a:lnSpc>
+            </a:pPr>
+            <a:r>
+              <a:rPr b="0" lang="en-US" sz="900" spc="-1" strike="noStrike">
+                <a:solidFill>
+                  <a:srgbClr val="78ffc8"/>
+                </a:solidFill>
+                <a:latin typeface="Consolas"/>
+                <a:ea typeface="DejaVu Sans"/>
+              </a:rPr>
+              <a:t>        </a:t>
+            </a:r>
+            <a:r>
+              <a:rPr b="0" lang="en-US" sz="900" spc="-1" strike="noStrike">
+                <a:solidFill>
+                  <a:srgbClr val="78ffc8"/>
+                </a:solidFill>
+                <a:latin typeface="Consolas"/>
+                <a:ea typeface="DejaVu Sans"/>
+              </a:rPr>
+              <a:t>// 1. BİLEŞİK ATAMA</a:t>
+            </a:r>
+            <a:endParaRPr b="0" lang="en-US" sz="900" spc="-1" strike="noStrike">
+              <a:solidFill>
+                <a:srgbClr val="ffffff"/>
+              </a:solidFill>
+              <a:latin typeface="Arial"/>
+            </a:endParaRPr>
+          </a:p>
+          <a:p>
+            <a:pPr algn="ctr">
+              <a:lnSpc>
+                <a:spcPct val="100000"/>
+              </a:lnSpc>
+            </a:pPr>
+            <a:r>
+              <a:rPr b="0" lang="en-US" sz="900" spc="-1" strike="noStrike">
+                <a:solidFill>
+                  <a:srgbClr val="78ffc8"/>
+                </a:solidFill>
+                <a:latin typeface="Consolas"/>
+                <a:ea typeface="DejaVu Sans"/>
+              </a:rPr>
+              <a:t>        </a:t>
+            </a:r>
+            <a:r>
+              <a:rPr b="0" lang="en-US" sz="900" spc="-1" strike="noStrike">
+                <a:solidFill>
+                  <a:srgbClr val="78ffc8"/>
+                </a:solidFill>
+                <a:latin typeface="Consolas"/>
+                <a:ea typeface="DejaVu Sans"/>
+              </a:rPr>
+              <a:t>int skor = 50;</a:t>
+            </a:r>
+            <a:endParaRPr b="0" lang="en-US" sz="900" spc="-1" strike="noStrike">
+              <a:solidFill>
+                <a:srgbClr val="ffffff"/>
+              </a:solidFill>
+              <a:latin typeface="Arial"/>
+            </a:endParaRPr>
+          </a:p>
+          <a:p>
+            <a:pPr algn="ctr">
+              <a:lnSpc>
+                <a:spcPct val="100000"/>
+              </a:lnSpc>
+            </a:pPr>
+            <a:r>
+              <a:rPr b="0" lang="en-US" sz="900" spc="-1" strike="noStrike">
+                <a:solidFill>
+                  <a:srgbClr val="78ffc8"/>
+                </a:solidFill>
+                <a:latin typeface="Consolas"/>
+                <a:ea typeface="DejaVu Sans"/>
+              </a:rPr>
+              <a:t>        </a:t>
+            </a:r>
+            <a:r>
+              <a:rPr b="0" lang="en-US" sz="900" spc="-1" strike="noStrike">
+                <a:solidFill>
+                  <a:srgbClr val="78ffc8"/>
+                </a:solidFill>
+                <a:latin typeface="Consolas"/>
+                <a:ea typeface="DejaVu Sans"/>
+              </a:rPr>
+              <a:t>skor += 10; // skor = skor + 10 (60)</a:t>
+            </a:r>
+            <a:endParaRPr b="0" lang="en-US" sz="900" spc="-1" strike="noStrike">
+              <a:solidFill>
+                <a:srgbClr val="ffffff"/>
+              </a:solidFill>
+              <a:latin typeface="Arial"/>
+            </a:endParaRPr>
+          </a:p>
+          <a:p>
+            <a:pPr algn="ctr">
+              <a:lnSpc>
+                <a:spcPct val="100000"/>
+              </a:lnSpc>
+            </a:pPr>
+            <a:r>
+              <a:rPr b="0" lang="en-US" sz="900" spc="-1" strike="noStrike">
+                <a:solidFill>
+                  <a:srgbClr val="78ffc8"/>
+                </a:solidFill>
+                <a:latin typeface="Consolas"/>
+                <a:ea typeface="DejaVu Sans"/>
+              </a:rPr>
+              <a:t>        </a:t>
+            </a:r>
+            <a:r>
+              <a:rPr b="0" lang="en-US" sz="900" spc="-1" strike="noStrike">
+                <a:solidFill>
+                  <a:srgbClr val="78ffc8"/>
+                </a:solidFill>
+                <a:latin typeface="Consolas"/>
+                <a:ea typeface="DejaVu Sans"/>
+              </a:rPr>
+              <a:t>skor /= 2;  // skor = skor / 2  (30)</a:t>
+            </a:r>
+            <a:endParaRPr b="0" lang="en-US" sz="900" spc="-1" strike="noStrike">
+              <a:solidFill>
+                <a:srgbClr val="ffffff"/>
+              </a:solidFill>
+              <a:latin typeface="Arial"/>
+            </a:endParaRPr>
+          </a:p>
+          <a:p>
+            <a:pPr algn="ctr">
+              <a:lnSpc>
+                <a:spcPct val="100000"/>
+              </a:lnSpc>
+            </a:pPr>
+            <a:r>
+              <a:rPr b="0" lang="en-US" sz="900" spc="-1" strike="noStrike">
+                <a:solidFill>
+                  <a:srgbClr val="78ffc8"/>
+                </a:solidFill>
+                <a:latin typeface="Consolas"/>
+                <a:ea typeface="DejaVu Sans"/>
+              </a:rPr>
+              <a:t>        </a:t>
+            </a:r>
+            <a:r>
+              <a:rPr b="0" lang="en-US" sz="900" spc="-1" strike="noStrike">
+                <a:solidFill>
+                  <a:srgbClr val="78ffc8"/>
+                </a:solidFill>
+                <a:latin typeface="Consolas"/>
+                <a:ea typeface="DejaVu Sans"/>
+              </a:rPr>
+              <a:t>// 2. METİN BİRLEŞTİRME TUZAKLARI</a:t>
+            </a:r>
+            <a:endParaRPr b="0" lang="en-US" sz="900" spc="-1" strike="noStrike">
+              <a:solidFill>
+                <a:srgbClr val="ffffff"/>
+              </a:solidFill>
+              <a:latin typeface="Arial"/>
+            </a:endParaRPr>
+          </a:p>
+          <a:p>
+            <a:pPr algn="ctr">
+              <a:lnSpc>
+                <a:spcPct val="100000"/>
+              </a:lnSpc>
+            </a:pPr>
+            <a:r>
+              <a:rPr b="0" lang="en-US" sz="900" spc="-1" strike="noStrike">
+                <a:solidFill>
+                  <a:srgbClr val="78ffc8"/>
+                </a:solidFill>
+                <a:latin typeface="Consolas"/>
+                <a:ea typeface="DejaVu Sans"/>
+              </a:rPr>
+              <a:t>        </a:t>
+            </a:r>
+            <a:r>
+              <a:rPr b="0" lang="en-US" sz="900" spc="-1" strike="noStrike">
+                <a:solidFill>
+                  <a:srgbClr val="78ffc8"/>
+                </a:solidFill>
+                <a:latin typeface="Consolas"/>
+                <a:ea typeface="DejaVu Sans"/>
+              </a:rPr>
+              <a:t>int x = 5;</a:t>
+            </a:r>
+            <a:endParaRPr b="0" lang="en-US" sz="900" spc="-1" strike="noStrike">
+              <a:solidFill>
+                <a:srgbClr val="ffffff"/>
+              </a:solidFill>
+              <a:latin typeface="Arial"/>
+            </a:endParaRPr>
+          </a:p>
+          <a:p>
+            <a:pPr algn="ctr">
+              <a:lnSpc>
+                <a:spcPct val="100000"/>
+              </a:lnSpc>
+            </a:pPr>
+            <a:r>
+              <a:rPr b="0" lang="en-US" sz="900" spc="-1" strike="noStrike">
+                <a:solidFill>
+                  <a:srgbClr val="78ffc8"/>
+                </a:solidFill>
+                <a:latin typeface="Consolas"/>
+                <a:ea typeface="DejaVu Sans"/>
+              </a:rPr>
+              <a:t>        </a:t>
+            </a:r>
+            <a:r>
+              <a:rPr b="0" lang="en-US" sz="900" spc="-1" strike="noStrike">
+                <a:solidFill>
+                  <a:srgbClr val="78ffc8"/>
+                </a:solidFill>
+                <a:latin typeface="Consolas"/>
+                <a:ea typeface="DejaVu Sans"/>
+              </a:rPr>
+              <a:t>int y = 5;</a:t>
+            </a:r>
+            <a:endParaRPr b="0" lang="en-US" sz="900" spc="-1" strike="noStrike">
+              <a:solidFill>
+                <a:srgbClr val="ffffff"/>
+              </a:solidFill>
+              <a:latin typeface="Arial"/>
+            </a:endParaRPr>
+          </a:p>
+          <a:p>
+            <a:pPr algn="ctr">
+              <a:lnSpc>
+                <a:spcPct val="100000"/>
+              </a:lnSpc>
+            </a:pPr>
+            <a:r>
+              <a:rPr b="0" lang="en-US" sz="900" spc="-1" strike="noStrike">
+                <a:solidFill>
+                  <a:srgbClr val="78ffc8"/>
+                </a:solidFill>
+                <a:latin typeface="Consolas"/>
+                <a:ea typeface="DejaVu Sans"/>
+              </a:rPr>
+              <a:t>        </a:t>
+            </a:r>
+            <a:r>
+              <a:rPr b="0" lang="en-US" sz="900" spc="-1" strike="noStrike">
+                <a:solidFill>
+                  <a:srgbClr val="78ffc8"/>
+                </a:solidFill>
+                <a:latin typeface="Consolas"/>
+                <a:ea typeface="DejaVu Sans"/>
+              </a:rPr>
+              <a:t>// Sayıyla başlar -&gt; Önce Matematik</a:t>
+            </a:r>
+            <a:endParaRPr b="0" lang="en-US" sz="900" spc="-1" strike="noStrike">
+              <a:solidFill>
+                <a:srgbClr val="ffffff"/>
+              </a:solidFill>
+              <a:latin typeface="Arial"/>
+            </a:endParaRPr>
+          </a:p>
+          <a:p>
+            <a:pPr algn="ctr">
+              <a:lnSpc>
+                <a:spcPct val="100000"/>
+              </a:lnSpc>
+            </a:pPr>
+            <a:r>
+              <a:rPr b="0" lang="en-US" sz="900" spc="-1" strike="noStrike">
+                <a:solidFill>
+                  <a:srgbClr val="78ffc8"/>
+                </a:solidFill>
+                <a:latin typeface="Consolas"/>
+                <a:ea typeface="DejaVu Sans"/>
+              </a:rPr>
+              <a:t>        </a:t>
+            </a:r>
+            <a:r>
+              <a:rPr b="0" lang="en-US" sz="900" spc="-1" strike="noStrike">
+                <a:solidFill>
+                  <a:srgbClr val="78ffc8"/>
+                </a:solidFill>
+                <a:latin typeface="Consolas"/>
+                <a:ea typeface="DejaVu Sans"/>
+              </a:rPr>
+              <a:t>String str1 = x + y + " Java"; // "10 Java"</a:t>
+            </a:r>
+            <a:endParaRPr b="0" lang="en-US" sz="900" spc="-1" strike="noStrike">
+              <a:solidFill>
+                <a:srgbClr val="ffffff"/>
+              </a:solidFill>
+              <a:latin typeface="Arial"/>
+            </a:endParaRPr>
+          </a:p>
+          <a:p>
+            <a:pPr algn="ctr">
+              <a:lnSpc>
+                <a:spcPct val="100000"/>
+              </a:lnSpc>
+            </a:pPr>
+            <a:r>
+              <a:rPr b="0" lang="en-US" sz="900" spc="-1" strike="noStrike">
+                <a:solidFill>
+                  <a:srgbClr val="78ffc8"/>
+                </a:solidFill>
+                <a:latin typeface="Consolas"/>
+                <a:ea typeface="DejaVu Sans"/>
+              </a:rPr>
+              <a:t>        </a:t>
+            </a:r>
+            <a:r>
+              <a:rPr b="0" lang="en-US" sz="900" spc="-1" strike="noStrike">
+                <a:solidFill>
+                  <a:srgbClr val="78ffc8"/>
+                </a:solidFill>
+                <a:latin typeface="Consolas"/>
+                <a:ea typeface="DejaVu Sans"/>
+              </a:rPr>
+              <a:t>// Metinle başlar -&gt; Hepsi Metin olur!</a:t>
+            </a:r>
+            <a:endParaRPr b="0" lang="en-US" sz="900" spc="-1" strike="noStrike">
+              <a:solidFill>
+                <a:srgbClr val="ffffff"/>
+              </a:solidFill>
+              <a:latin typeface="Arial"/>
+            </a:endParaRPr>
+          </a:p>
+          <a:p>
+            <a:pPr algn="ctr">
+              <a:lnSpc>
+                <a:spcPct val="100000"/>
+              </a:lnSpc>
+            </a:pPr>
+            <a:r>
+              <a:rPr b="0" lang="en-US" sz="900" spc="-1" strike="noStrike">
+                <a:solidFill>
+                  <a:srgbClr val="78ffc8"/>
+                </a:solidFill>
+                <a:latin typeface="Consolas"/>
+                <a:ea typeface="DejaVu Sans"/>
+              </a:rPr>
+              <a:t>        </a:t>
+            </a:r>
+            <a:r>
+              <a:rPr b="0" lang="en-US" sz="900" spc="-1" strike="noStrike">
+                <a:solidFill>
+                  <a:srgbClr val="78ffc8"/>
+                </a:solidFill>
+                <a:latin typeface="Consolas"/>
+                <a:ea typeface="DejaVu Sans"/>
+              </a:rPr>
+              <a:t>String str2 = "Java " + x + y; // "Java 55"</a:t>
+            </a:r>
+            <a:endParaRPr b="0" lang="en-US" sz="900" spc="-1" strike="noStrike">
+              <a:solidFill>
+                <a:srgbClr val="ffffff"/>
+              </a:solidFill>
+              <a:latin typeface="Arial"/>
+            </a:endParaRPr>
+          </a:p>
+          <a:p>
+            <a:pPr algn="ctr">
+              <a:lnSpc>
+                <a:spcPct val="100000"/>
+              </a:lnSpc>
+            </a:pPr>
+            <a:r>
+              <a:rPr b="0" lang="en-US" sz="900" spc="-1" strike="noStrike">
+                <a:solidFill>
+                  <a:srgbClr val="78ffc8"/>
+                </a:solidFill>
+                <a:latin typeface="Consolas"/>
+                <a:ea typeface="DejaVu Sans"/>
+              </a:rPr>
+              <a:t>        </a:t>
+            </a:r>
+            <a:r>
+              <a:rPr b="0" lang="en-US" sz="900" spc="-1" strike="noStrike">
+                <a:solidFill>
+                  <a:srgbClr val="78ffc8"/>
+                </a:solidFill>
+                <a:latin typeface="Consolas"/>
+                <a:ea typeface="DejaVu Sans"/>
+              </a:rPr>
+              <a:t>// Parantez matematiği öne alır</a:t>
+            </a:r>
+            <a:endParaRPr b="0" lang="en-US" sz="900" spc="-1" strike="noStrike">
+              <a:solidFill>
+                <a:srgbClr val="ffffff"/>
+              </a:solidFill>
+              <a:latin typeface="Arial"/>
+            </a:endParaRPr>
+          </a:p>
+          <a:p>
+            <a:pPr algn="ctr">
+              <a:lnSpc>
+                <a:spcPct val="100000"/>
+              </a:lnSpc>
+            </a:pPr>
+            <a:r>
+              <a:rPr b="0" lang="en-US" sz="900" spc="-1" strike="noStrike">
+                <a:solidFill>
+                  <a:srgbClr val="78ffc8"/>
+                </a:solidFill>
+                <a:latin typeface="Consolas"/>
+                <a:ea typeface="DejaVu Sans"/>
+              </a:rPr>
+              <a:t>        </a:t>
+            </a:r>
+            <a:r>
+              <a:rPr b="0" lang="en-US" sz="900" spc="-1" strike="noStrike">
+                <a:solidFill>
+                  <a:srgbClr val="78ffc8"/>
+                </a:solidFill>
+                <a:latin typeface="Consolas"/>
+                <a:ea typeface="DejaVu Sans"/>
+              </a:rPr>
+              <a:t>String str3 = "Java " + (x+y); // "Java 10"</a:t>
+            </a:r>
+            <a:endParaRPr b="0" lang="en-US" sz="900" spc="-1" strike="noStrike">
+              <a:solidFill>
+                <a:srgbClr val="ffffff"/>
+              </a:solidFill>
+              <a:latin typeface="Arial"/>
+            </a:endParaRPr>
+          </a:p>
+          <a:p>
+            <a:pPr algn="ctr">
+              <a:lnSpc>
+                <a:spcPct val="100000"/>
+              </a:lnSpc>
+            </a:pPr>
+            <a:r>
+              <a:rPr b="0" lang="en-US" sz="900" spc="-1" strike="noStrike">
+                <a:solidFill>
+                  <a:srgbClr val="78ffc8"/>
+                </a:solidFill>
+                <a:latin typeface="Consolas"/>
+                <a:ea typeface="DejaVu Sans"/>
+              </a:rPr>
+              <a:t>        </a:t>
+            </a:r>
+            <a:r>
+              <a:rPr b="0" lang="en-US" sz="900" spc="-1" strike="noStrike">
+                <a:solidFill>
+                  <a:srgbClr val="78ffc8"/>
+                </a:solidFill>
+                <a:latin typeface="Consolas"/>
+                <a:ea typeface="DejaVu Sans"/>
+              </a:rPr>
+              <a:t>System.out.println("Son Skor: " + skor);</a:t>
+            </a:r>
+            <a:endParaRPr b="0" lang="en-US" sz="900" spc="-1" strike="noStrike">
+              <a:solidFill>
+                <a:srgbClr val="ffffff"/>
+              </a:solidFill>
+              <a:latin typeface="Arial"/>
+            </a:endParaRPr>
+          </a:p>
+          <a:p>
+            <a:pPr algn="ctr">
+              <a:lnSpc>
+                <a:spcPct val="100000"/>
+              </a:lnSpc>
+            </a:pPr>
+            <a:r>
+              <a:rPr b="0" lang="en-US" sz="900" spc="-1" strike="noStrike">
+                <a:solidFill>
+                  <a:srgbClr val="78ffc8"/>
+                </a:solidFill>
+                <a:latin typeface="Consolas"/>
+                <a:ea typeface="DejaVu Sans"/>
+              </a:rPr>
+              <a:t>        </a:t>
+            </a:r>
+            <a:r>
+              <a:rPr b="0" lang="en-US" sz="900" spc="-1" strike="noStrike">
+                <a:solidFill>
+                  <a:srgbClr val="78ffc8"/>
+                </a:solidFill>
+                <a:latin typeface="Consolas"/>
+                <a:ea typeface="DejaVu Sans"/>
+              </a:rPr>
+              <a:t>System.out.println("Str2 Sonuç: " + str2);</a:t>
+            </a:r>
+            <a:endParaRPr b="0" lang="en-US" sz="900" spc="-1" strike="noStrike">
+              <a:solidFill>
+                <a:srgbClr val="ffffff"/>
+              </a:solidFill>
+              <a:latin typeface="Arial"/>
+            </a:endParaRPr>
+          </a:p>
+          <a:p>
+            <a:pPr algn="ctr">
+              <a:lnSpc>
+                <a:spcPct val="100000"/>
+              </a:lnSpc>
+            </a:pPr>
+            <a:r>
+              <a:rPr b="0" lang="en-US" sz="900" spc="-1" strike="noStrike">
+                <a:solidFill>
+                  <a:srgbClr val="78ffc8"/>
+                </a:solidFill>
+                <a:latin typeface="Consolas"/>
+                <a:ea typeface="DejaVu Sans"/>
+              </a:rPr>
+              <a:t>    </a:t>
+            </a:r>
+            <a:r>
+              <a:rPr b="0" lang="en-US" sz="900" spc="-1" strike="noStrike">
+                <a:solidFill>
+                  <a:srgbClr val="78ffc8"/>
+                </a:solidFill>
+                <a:latin typeface="Consolas"/>
+                <a:ea typeface="DejaVu Sans"/>
+              </a:rPr>
+              <a:t>}</a:t>
+            </a:r>
+            <a:endParaRPr b="0" lang="en-US" sz="900" spc="-1" strike="noStrike">
+              <a:solidFill>
+                <a:srgbClr val="ffffff"/>
+              </a:solidFill>
+              <a:latin typeface="Arial"/>
+            </a:endParaRPr>
+          </a:p>
+          <a:p>
+            <a:pPr algn="ctr">
+              <a:lnSpc>
+                <a:spcPct val="100000"/>
+              </a:lnSpc>
+            </a:pPr>
+            <a:r>
+              <a:rPr b="0" lang="en-US" sz="900" spc="-1" strike="noStrike">
+                <a:solidFill>
+                  <a:srgbClr val="78ffc8"/>
+                </a:solidFill>
+                <a:latin typeface="Consolas"/>
+                <a:ea typeface="DejaVu Sans"/>
+              </a:rPr>
+              <a:t>}</a:t>
+            </a:r>
+            <a:endParaRPr b="0" lang="en-US" sz="900" spc="-1" strike="noStrike">
+              <a:solidFill>
+                <a:srgbClr val="ffffff"/>
+              </a:solidFill>
+              <a:latin typeface="Arial"/>
+            </a:endParaRPr>
+          </a:p>
+        </p:txBody>
+      </p:sp>
+      <p:sp>
+        <p:nvSpPr>
+          <p:cNvPr id="326" name="TextBox 36"/>
           <p:cNvSpPr/>
           <p:nvPr/>
         </p:nvSpPr>
@@ -7939,7 +10670,7 @@
         <p:spPr>
           <a:xfrm>
             <a:off x="0" y="0"/>
-            <a:ext cx="12184560" cy="6853680"/>
+            <a:ext cx="12184200" cy="6853320"/>
           </a:xfrm>
           <a:prstGeom prst="rect">
             <a:avLst/>
@@ -7999,7 +10730,7 @@
         <p:spPr>
           <a:xfrm>
             <a:off x="0" y="0"/>
-            <a:ext cx="14040" cy="6853680"/>
+            <a:ext cx="13680" cy="6853320"/>
           </a:xfrm>
           <a:prstGeom prst="rect">
             <a:avLst/>
@@ -8059,7 +10790,7 @@
         <p:spPr>
           <a:xfrm>
             <a:off x="914400" y="0"/>
-            <a:ext cx="14040" cy="6853680"/>
+            <a:ext cx="13680" cy="6853320"/>
           </a:xfrm>
           <a:prstGeom prst="rect">
             <a:avLst/>
@@ -8119,7 +10850,7 @@
         <p:spPr>
           <a:xfrm>
             <a:off x="1828800" y="0"/>
-            <a:ext cx="14040" cy="6853680"/>
+            <a:ext cx="13680" cy="6853320"/>
           </a:xfrm>
           <a:prstGeom prst="rect">
             <a:avLst/>
@@ -8179,7 +10910,7 @@
         <p:spPr>
           <a:xfrm>
             <a:off x="2743200" y="0"/>
-            <a:ext cx="14040" cy="6853680"/>
+            <a:ext cx="13680" cy="6853320"/>
           </a:xfrm>
           <a:prstGeom prst="rect">
             <a:avLst/>
@@ -8239,7 +10970,7 @@
         <p:spPr>
           <a:xfrm>
             <a:off x="3657600" y="0"/>
-            <a:ext cx="14040" cy="6853680"/>
+            <a:ext cx="13680" cy="6853320"/>
           </a:xfrm>
           <a:prstGeom prst="rect">
             <a:avLst/>
@@ -8299,7 +11030,7 @@
         <p:spPr>
           <a:xfrm>
             <a:off x="4572000" y="0"/>
-            <a:ext cx="14040" cy="6853680"/>
+            <a:ext cx="13680" cy="6853320"/>
           </a:xfrm>
           <a:prstGeom prst="rect">
             <a:avLst/>
@@ -8359,7 +11090,7 @@
         <p:spPr>
           <a:xfrm>
             <a:off x="5486400" y="0"/>
-            <a:ext cx="14040" cy="6853680"/>
+            <a:ext cx="13680" cy="6853320"/>
           </a:xfrm>
           <a:prstGeom prst="rect">
             <a:avLst/>
@@ -8419,7 +11150,7 @@
         <p:spPr>
           <a:xfrm>
             <a:off x="6400800" y="0"/>
-            <a:ext cx="14040" cy="6853680"/>
+            <a:ext cx="13680" cy="6853320"/>
           </a:xfrm>
           <a:prstGeom prst="rect">
             <a:avLst/>
@@ -8479,7 +11210,7 @@
         <p:spPr>
           <a:xfrm>
             <a:off x="7315200" y="0"/>
-            <a:ext cx="14040" cy="6853680"/>
+            <a:ext cx="13680" cy="6853320"/>
           </a:xfrm>
           <a:prstGeom prst="rect">
             <a:avLst/>
@@ -8539,7 +11270,7 @@
         <p:spPr>
           <a:xfrm>
             <a:off x="8229600" y="0"/>
-            <a:ext cx="14040" cy="6853680"/>
+            <a:ext cx="13680" cy="6853320"/>
           </a:xfrm>
           <a:prstGeom prst="rect">
             <a:avLst/>
@@ -8599,7 +11330,7 @@
         <p:spPr>
           <a:xfrm>
             <a:off x="9144000" y="0"/>
-            <a:ext cx="14040" cy="6853680"/>
+            <a:ext cx="13680" cy="6853320"/>
           </a:xfrm>
           <a:prstGeom prst="rect">
             <a:avLst/>
@@ -8659,7 +11390,7 @@
         <p:spPr>
           <a:xfrm>
             <a:off x="10058400" y="0"/>
-            <a:ext cx="14040" cy="6853680"/>
+            <a:ext cx="13680" cy="6853320"/>
           </a:xfrm>
           <a:prstGeom prst="rect">
             <a:avLst/>
@@ -8719,7 +11450,7 @@
         <p:spPr>
           <a:xfrm>
             <a:off x="10972800" y="0"/>
-            <a:ext cx="14040" cy="6853680"/>
+            <a:ext cx="13680" cy="6853320"/>
           </a:xfrm>
           <a:prstGeom prst="rect">
             <a:avLst/>
@@ -8779,7 +11510,7 @@
         <p:spPr>
           <a:xfrm>
             <a:off x="11887200" y="0"/>
-            <a:ext cx="14040" cy="6853680"/>
+            <a:ext cx="13680" cy="6853320"/>
           </a:xfrm>
           <a:prstGeom prst="rect">
             <a:avLst/>
@@ -8839,7 +11570,7 @@
         <p:spPr>
           <a:xfrm>
             <a:off x="0" y="0"/>
-            <a:ext cx="315720" cy="6853680"/>
+            <a:ext cx="315360" cy="6853320"/>
           </a:xfrm>
           <a:prstGeom prst="rect">
             <a:avLst/>
@@ -8899,7 +11630,7 @@
         <p:spPr>
           <a:xfrm>
             <a:off x="9875520" y="365760"/>
-            <a:ext cx="2007360" cy="498600"/>
+            <a:ext cx="2007000" cy="498240"/>
           </a:xfrm>
           <a:prstGeom prst="roundRect">
             <a:avLst>
@@ -9127,7 +11858,7 @@
         <p:spPr>
           <a:xfrm>
             <a:off x="987480" y="3182040"/>
-            <a:ext cx="3287520" cy="2738880"/>
+            <a:ext cx="3287160" cy="2738520"/>
           </a:xfrm>
           <a:prstGeom prst="roundRect">
             <a:avLst>
@@ -9189,7 +11920,7 @@
         <p:spPr>
           <a:xfrm>
             <a:off x="914400" y="3108960"/>
-            <a:ext cx="3287520" cy="2738880"/>
+            <a:ext cx="3287160" cy="2738520"/>
           </a:xfrm>
           <a:prstGeom prst="roundRect">
             <a:avLst>
@@ -9352,7 +12083,7 @@
         <p:spPr>
           <a:xfrm>
             <a:off x="4507920" y="3182040"/>
-            <a:ext cx="3287520" cy="2738880"/>
+            <a:ext cx="3287160" cy="2738520"/>
           </a:xfrm>
           <a:prstGeom prst="roundRect">
             <a:avLst>
@@ -9414,7 +12145,7 @@
         <p:spPr>
           <a:xfrm>
             <a:off x="4434840" y="3108960"/>
-            <a:ext cx="3287520" cy="2738880"/>
+            <a:ext cx="3287160" cy="2738520"/>
           </a:xfrm>
           <a:prstGeom prst="roundRect">
             <a:avLst>
@@ -9672,7 +12403,7 @@
         <p:spPr>
           <a:xfrm>
             <a:off x="8028360" y="3182040"/>
-            <a:ext cx="3287520" cy="2738880"/>
+            <a:ext cx="3287160" cy="2738520"/>
           </a:xfrm>
           <a:prstGeom prst="roundRect">
             <a:avLst>
@@ -9734,7 +12465,7 @@
         <p:spPr>
           <a:xfrm>
             <a:off x="7955280" y="3108960"/>
-            <a:ext cx="3700080" cy="3060000"/>
+            <a:ext cx="3699720" cy="3059640"/>
           </a:xfrm>
           <a:prstGeom prst="roundRect">
             <a:avLst>
@@ -10179,7 +12910,7 @@
         <p:spPr>
           <a:xfrm>
             <a:off x="0" y="0"/>
-            <a:ext cx="12184560" cy="6853680"/>
+            <a:ext cx="12184200" cy="6853320"/>
           </a:xfrm>
           <a:prstGeom prst="rect">
             <a:avLst/>
@@ -10239,7 +12970,7 @@
         <p:spPr>
           <a:xfrm>
             <a:off x="0" y="0"/>
-            <a:ext cx="14040" cy="6853680"/>
+            <a:ext cx="13680" cy="6853320"/>
           </a:xfrm>
           <a:prstGeom prst="rect">
             <a:avLst/>
@@ -10299,7 +13030,7 @@
         <p:spPr>
           <a:xfrm>
             <a:off x="914400" y="0"/>
-            <a:ext cx="14040" cy="6853680"/>
+            <a:ext cx="13680" cy="6853320"/>
           </a:xfrm>
           <a:prstGeom prst="rect">
             <a:avLst/>
@@ -10359,7 +13090,7 @@
         <p:spPr>
           <a:xfrm>
             <a:off x="1828800" y="0"/>
-            <a:ext cx="14040" cy="6853680"/>
+            <a:ext cx="13680" cy="6853320"/>
           </a:xfrm>
           <a:prstGeom prst="rect">
             <a:avLst/>
@@ -10419,7 +13150,7 @@
         <p:spPr>
           <a:xfrm>
             <a:off x="2743200" y="0"/>
-            <a:ext cx="14040" cy="6853680"/>
+            <a:ext cx="13680" cy="6853320"/>
           </a:xfrm>
           <a:prstGeom prst="rect">
             <a:avLst/>
@@ -10479,7 +13210,7 @@
         <p:spPr>
           <a:xfrm>
             <a:off x="3657600" y="0"/>
-            <a:ext cx="14040" cy="6853680"/>
+            <a:ext cx="13680" cy="6853320"/>
           </a:xfrm>
           <a:prstGeom prst="rect">
             <a:avLst/>
@@ -10539,7 +13270,7 @@
         <p:spPr>
           <a:xfrm>
             <a:off x="4572000" y="0"/>
-            <a:ext cx="14040" cy="6853680"/>
+            <a:ext cx="13680" cy="6853320"/>
           </a:xfrm>
           <a:prstGeom prst="rect">
             <a:avLst/>
@@ -10599,7 +13330,7 @@
         <p:spPr>
           <a:xfrm>
             <a:off x="5486400" y="0"/>
-            <a:ext cx="14040" cy="6853680"/>
+            <a:ext cx="13680" cy="6853320"/>
           </a:xfrm>
           <a:prstGeom prst="rect">
             <a:avLst/>
@@ -10659,7 +13390,7 @@
         <p:spPr>
           <a:xfrm>
             <a:off x="6400800" y="0"/>
-            <a:ext cx="14040" cy="6853680"/>
+            <a:ext cx="13680" cy="6853320"/>
           </a:xfrm>
           <a:prstGeom prst="rect">
             <a:avLst/>
@@ -10719,7 +13450,7 @@
         <p:spPr>
           <a:xfrm>
             <a:off x="7315200" y="0"/>
-            <a:ext cx="14040" cy="6853680"/>
+            <a:ext cx="13680" cy="6853320"/>
           </a:xfrm>
           <a:prstGeom prst="rect">
             <a:avLst/>
@@ -10779,7 +13510,7 @@
         <p:spPr>
           <a:xfrm>
             <a:off x="8229600" y="0"/>
-            <a:ext cx="14040" cy="6853680"/>
+            <a:ext cx="13680" cy="6853320"/>
           </a:xfrm>
           <a:prstGeom prst="rect">
             <a:avLst/>
@@ -10839,7 +13570,7 @@
         <p:spPr>
           <a:xfrm>
             <a:off x="9144000" y="0"/>
-            <a:ext cx="14040" cy="6853680"/>
+            <a:ext cx="13680" cy="6853320"/>
           </a:xfrm>
           <a:prstGeom prst="rect">
             <a:avLst/>
@@ -10899,7 +13630,7 @@
         <p:spPr>
           <a:xfrm>
             <a:off x="10058400" y="0"/>
-            <a:ext cx="14040" cy="6853680"/>
+            <a:ext cx="13680" cy="6853320"/>
           </a:xfrm>
           <a:prstGeom prst="rect">
             <a:avLst/>
@@ -10959,7 +13690,7 @@
         <p:spPr>
           <a:xfrm>
             <a:off x="10972800" y="0"/>
-            <a:ext cx="14040" cy="6853680"/>
+            <a:ext cx="13680" cy="6853320"/>
           </a:xfrm>
           <a:prstGeom prst="rect">
             <a:avLst/>
@@ -11019,7 +13750,7 @@
         <p:spPr>
           <a:xfrm>
             <a:off x="11887200" y="0"/>
-            <a:ext cx="14040" cy="6853680"/>
+            <a:ext cx="13680" cy="6853320"/>
           </a:xfrm>
           <a:prstGeom prst="rect">
             <a:avLst/>
@@ -11079,7 +13810,7 @@
         <p:spPr>
           <a:xfrm>
             <a:off x="0" y="0"/>
-            <a:ext cx="315720" cy="6853680"/>
+            <a:ext cx="315360" cy="6853320"/>
           </a:xfrm>
           <a:prstGeom prst="rect">
             <a:avLst/>
@@ -11139,7 +13870,7 @@
         <p:spPr>
           <a:xfrm>
             <a:off x="9875520" y="365760"/>
-            <a:ext cx="2007360" cy="498600"/>
+            <a:ext cx="2007000" cy="498240"/>
           </a:xfrm>
           <a:prstGeom prst="roundRect">
             <a:avLst>
@@ -11344,7 +14075,7 @@
         <p:spPr>
           <a:xfrm>
             <a:off x="987480" y="3182040"/>
-            <a:ext cx="3287520" cy="2738880"/>
+            <a:ext cx="3287160" cy="2738520"/>
           </a:xfrm>
           <a:prstGeom prst="roundRect">
             <a:avLst>
@@ -11406,7 +14137,7 @@
         <p:spPr>
           <a:xfrm>
             <a:off x="914400" y="3108960"/>
-            <a:ext cx="3287520" cy="3060360"/>
+            <a:ext cx="3287160" cy="3060000"/>
           </a:xfrm>
           <a:prstGeom prst="roundRect">
             <a:avLst>
@@ -11597,7 +14328,7 @@
         <p:spPr>
           <a:xfrm>
             <a:off x="4507920" y="3182040"/>
-            <a:ext cx="3287520" cy="2738880"/>
+            <a:ext cx="3287160" cy="2738520"/>
           </a:xfrm>
           <a:prstGeom prst="roundRect">
             <a:avLst>
@@ -11659,7 +14390,7 @@
         <p:spPr>
           <a:xfrm>
             <a:off x="4434840" y="3108960"/>
-            <a:ext cx="3287520" cy="2738880"/>
+            <a:ext cx="3287160" cy="2738520"/>
           </a:xfrm>
           <a:prstGeom prst="roundRect">
             <a:avLst>
@@ -11917,7 +14648,7 @@
         <p:spPr>
           <a:xfrm>
             <a:off x="8028360" y="3182040"/>
-            <a:ext cx="3287520" cy="2738880"/>
+            <a:ext cx="3287160" cy="2738520"/>
           </a:xfrm>
           <a:prstGeom prst="roundRect">
             <a:avLst>
@@ -11979,7 +14710,7 @@
         <p:spPr>
           <a:xfrm>
             <a:off x="7955280" y="3108960"/>
-            <a:ext cx="3700080" cy="3060000"/>
+            <a:ext cx="3699720" cy="3059640"/>
           </a:xfrm>
           <a:prstGeom prst="roundRect">
             <a:avLst>
@@ -12424,7 +15155,7 @@
         <p:spPr>
           <a:xfrm>
             <a:off x="0" y="0"/>
-            <a:ext cx="12184560" cy="6853680"/>
+            <a:ext cx="12184200" cy="6853320"/>
           </a:xfrm>
           <a:prstGeom prst="rect">
             <a:avLst/>
@@ -12484,7 +15215,7 @@
         <p:spPr>
           <a:xfrm>
             <a:off x="0" y="0"/>
-            <a:ext cx="14040" cy="6853680"/>
+            <a:ext cx="13680" cy="6853320"/>
           </a:xfrm>
           <a:prstGeom prst="rect">
             <a:avLst/>
@@ -12544,7 +15275,7 @@
         <p:spPr>
           <a:xfrm>
             <a:off x="914400" y="0"/>
-            <a:ext cx="14040" cy="6853680"/>
+            <a:ext cx="13680" cy="6853320"/>
           </a:xfrm>
           <a:prstGeom prst="rect">
             <a:avLst/>
@@ -12604,7 +15335,7 @@
         <p:spPr>
           <a:xfrm>
             <a:off x="1828800" y="0"/>
-            <a:ext cx="14040" cy="6853680"/>
+            <a:ext cx="13680" cy="6853320"/>
           </a:xfrm>
           <a:prstGeom prst="rect">
             <a:avLst/>
@@ -12664,7 +15395,7 @@
         <p:spPr>
           <a:xfrm>
             <a:off x="2743200" y="0"/>
-            <a:ext cx="14040" cy="6853680"/>
+            <a:ext cx="13680" cy="6853320"/>
           </a:xfrm>
           <a:prstGeom prst="rect">
             <a:avLst/>
@@ -12724,7 +15455,7 @@
         <p:spPr>
           <a:xfrm>
             <a:off x="3657600" y="0"/>
-            <a:ext cx="14040" cy="6853680"/>
+            <a:ext cx="13680" cy="6853320"/>
           </a:xfrm>
           <a:prstGeom prst="rect">
             <a:avLst/>
@@ -12784,7 +15515,7 @@
         <p:spPr>
           <a:xfrm>
             <a:off x="4572000" y="0"/>
-            <a:ext cx="14040" cy="6853680"/>
+            <a:ext cx="13680" cy="6853320"/>
           </a:xfrm>
           <a:prstGeom prst="rect">
             <a:avLst/>
@@ -12844,7 +15575,7 @@
         <p:spPr>
           <a:xfrm>
             <a:off x="5486400" y="0"/>
-            <a:ext cx="14040" cy="6853680"/>
+            <a:ext cx="13680" cy="6853320"/>
           </a:xfrm>
           <a:prstGeom prst="rect">
             <a:avLst/>
@@ -12904,7 +15635,7 @@
         <p:spPr>
           <a:xfrm>
             <a:off x="6400800" y="0"/>
-            <a:ext cx="14040" cy="6853680"/>
+            <a:ext cx="13680" cy="6853320"/>
           </a:xfrm>
           <a:prstGeom prst="rect">
             <a:avLst/>
@@ -12964,7 +15695,7 @@
         <p:spPr>
           <a:xfrm>
             <a:off x="7315200" y="0"/>
-            <a:ext cx="14040" cy="6853680"/>
+            <a:ext cx="13680" cy="6853320"/>
           </a:xfrm>
           <a:prstGeom prst="rect">
             <a:avLst/>
@@ -13024,7 +15755,7 @@
         <p:spPr>
           <a:xfrm>
             <a:off x="8229600" y="0"/>
-            <a:ext cx="14040" cy="6853680"/>
+            <a:ext cx="13680" cy="6853320"/>
           </a:xfrm>
           <a:prstGeom prst="rect">
             <a:avLst/>
@@ -13084,7 +15815,7 @@
         <p:spPr>
           <a:xfrm>
             <a:off x="9144000" y="0"/>
-            <a:ext cx="14040" cy="6853680"/>
+            <a:ext cx="13680" cy="6853320"/>
           </a:xfrm>
           <a:prstGeom prst="rect">
             <a:avLst/>
@@ -13144,7 +15875,7 @@
         <p:spPr>
           <a:xfrm>
             <a:off x="10058400" y="0"/>
-            <a:ext cx="14040" cy="6853680"/>
+            <a:ext cx="13680" cy="6853320"/>
           </a:xfrm>
           <a:prstGeom prst="rect">
             <a:avLst/>
@@ -13204,7 +15935,7 @@
         <p:spPr>
           <a:xfrm>
             <a:off x="10972800" y="0"/>
-            <a:ext cx="14040" cy="6853680"/>
+            <a:ext cx="13680" cy="6853320"/>
           </a:xfrm>
           <a:prstGeom prst="rect">
             <a:avLst/>
@@ -13264,7 +15995,7 @@
         <p:spPr>
           <a:xfrm>
             <a:off x="11887200" y="0"/>
-            <a:ext cx="14040" cy="6853680"/>
+            <a:ext cx="13680" cy="6853320"/>
           </a:xfrm>
           <a:prstGeom prst="rect">
             <a:avLst/>
@@ -13324,7 +16055,7 @@
         <p:spPr>
           <a:xfrm>
             <a:off x="0" y="0"/>
-            <a:ext cx="315720" cy="6853680"/>
+            <a:ext cx="315360" cy="6853320"/>
           </a:xfrm>
           <a:prstGeom prst="rect">
             <a:avLst/>
@@ -13384,7 +16115,7 @@
         <p:spPr>
           <a:xfrm>
             <a:off x="9875520" y="365760"/>
-            <a:ext cx="2007360" cy="498600"/>
+            <a:ext cx="2007000" cy="498240"/>
           </a:xfrm>
           <a:prstGeom prst="roundRect">
             <a:avLst>
@@ -13589,7 +16320,7 @@
         <p:spPr>
           <a:xfrm>
             <a:off x="987480" y="3182040"/>
-            <a:ext cx="3287520" cy="2738880"/>
+            <a:ext cx="3287160" cy="2738520"/>
           </a:xfrm>
           <a:prstGeom prst="roundRect">
             <a:avLst>
@@ -13651,7 +16382,7 @@
         <p:spPr>
           <a:xfrm>
             <a:off x="914400" y="3108960"/>
-            <a:ext cx="3287520" cy="3060360"/>
+            <a:ext cx="3287160" cy="3060000"/>
           </a:xfrm>
           <a:prstGeom prst="roundRect">
             <a:avLst>
@@ -13842,7 +16573,7 @@
         <p:spPr>
           <a:xfrm>
             <a:off x="4507920" y="3182040"/>
-            <a:ext cx="3287520" cy="2738880"/>
+            <a:ext cx="3287160" cy="2738520"/>
           </a:xfrm>
           <a:prstGeom prst="roundRect">
             <a:avLst>
@@ -13904,7 +16635,7 @@
         <p:spPr>
           <a:xfrm>
             <a:off x="4434840" y="3108960"/>
-            <a:ext cx="3287520" cy="2738880"/>
+            <a:ext cx="3287160" cy="2738520"/>
           </a:xfrm>
           <a:prstGeom prst="roundRect">
             <a:avLst>
@@ -14116,7 +16847,7 @@
         <p:spPr>
           <a:xfrm>
             <a:off x="8028360" y="3182040"/>
-            <a:ext cx="3287520" cy="2738880"/>
+            <a:ext cx="3287160" cy="2738520"/>
           </a:xfrm>
           <a:prstGeom prst="roundRect">
             <a:avLst>
@@ -14178,7 +16909,7 @@
         <p:spPr>
           <a:xfrm>
             <a:off x="7955280" y="2743200"/>
-            <a:ext cx="3700080" cy="3655080"/>
+            <a:ext cx="3699720" cy="3654720"/>
           </a:xfrm>
           <a:prstGeom prst="roundRect">
             <a:avLst>
@@ -14738,7 +17469,7 @@
         <p:spPr>
           <a:xfrm>
             <a:off x="0" y="0"/>
-            <a:ext cx="12184560" cy="6853680"/>
+            <a:ext cx="12184200" cy="6853320"/>
           </a:xfrm>
           <a:prstGeom prst="rect">
             <a:avLst/>
@@ -14798,7 +17529,7 @@
         <p:spPr>
           <a:xfrm>
             <a:off x="0" y="0"/>
-            <a:ext cx="14040" cy="6853680"/>
+            <a:ext cx="13680" cy="6853320"/>
           </a:xfrm>
           <a:prstGeom prst="rect">
             <a:avLst/>
@@ -14858,7 +17589,7 @@
         <p:spPr>
           <a:xfrm>
             <a:off x="914400" y="0"/>
-            <a:ext cx="14040" cy="6853680"/>
+            <a:ext cx="13680" cy="6853320"/>
           </a:xfrm>
           <a:prstGeom prst="rect">
             <a:avLst/>
@@ -14918,7 +17649,7 @@
         <p:spPr>
           <a:xfrm>
             <a:off x="1828800" y="0"/>
-            <a:ext cx="14040" cy="6853680"/>
+            <a:ext cx="13680" cy="6853320"/>
           </a:xfrm>
           <a:prstGeom prst="rect">
             <a:avLst/>
@@ -14978,7 +17709,7 @@
         <p:spPr>
           <a:xfrm>
             <a:off x="2743200" y="0"/>
-            <a:ext cx="14040" cy="6853680"/>
+            <a:ext cx="13680" cy="6853320"/>
           </a:xfrm>
           <a:prstGeom prst="rect">
             <a:avLst/>
@@ -15038,7 +17769,7 @@
         <p:spPr>
           <a:xfrm>
             <a:off x="3657600" y="0"/>
-            <a:ext cx="14040" cy="6853680"/>
+            <a:ext cx="13680" cy="6853320"/>
           </a:xfrm>
           <a:prstGeom prst="rect">
             <a:avLst/>
@@ -15098,7 +17829,7 @@
         <p:spPr>
           <a:xfrm>
             <a:off x="4572000" y="0"/>
-            <a:ext cx="14040" cy="6853680"/>
+            <a:ext cx="13680" cy="6853320"/>
           </a:xfrm>
           <a:prstGeom prst="rect">
             <a:avLst/>
@@ -15158,7 +17889,7 @@
         <p:spPr>
           <a:xfrm>
             <a:off x="5486400" y="0"/>
-            <a:ext cx="14040" cy="6853680"/>
+            <a:ext cx="13680" cy="6853320"/>
           </a:xfrm>
           <a:prstGeom prst="rect">
             <a:avLst/>
@@ -15218,7 +17949,7 @@
         <p:spPr>
           <a:xfrm>
             <a:off x="6400800" y="0"/>
-            <a:ext cx="14040" cy="6853680"/>
+            <a:ext cx="13680" cy="6853320"/>
           </a:xfrm>
           <a:prstGeom prst="rect">
             <a:avLst/>
@@ -15278,7 +18009,7 @@
         <p:spPr>
           <a:xfrm>
             <a:off x="7315200" y="0"/>
-            <a:ext cx="14040" cy="6853680"/>
+            <a:ext cx="13680" cy="6853320"/>
           </a:xfrm>
           <a:prstGeom prst="rect">
             <a:avLst/>
@@ -15338,7 +18069,7 @@
         <p:spPr>
           <a:xfrm>
             <a:off x="8229600" y="0"/>
-            <a:ext cx="14040" cy="6853680"/>
+            <a:ext cx="13680" cy="6853320"/>
           </a:xfrm>
           <a:prstGeom prst="rect">
             <a:avLst/>
@@ -15398,7 +18129,7 @@
         <p:spPr>
           <a:xfrm>
             <a:off x="9144000" y="0"/>
-            <a:ext cx="14040" cy="6853680"/>
+            <a:ext cx="13680" cy="6853320"/>
           </a:xfrm>
           <a:prstGeom prst="rect">
             <a:avLst/>
@@ -15458,7 +18189,7 @@
         <p:spPr>
           <a:xfrm>
             <a:off x="10058400" y="0"/>
-            <a:ext cx="14040" cy="6853680"/>
+            <a:ext cx="13680" cy="6853320"/>
           </a:xfrm>
           <a:prstGeom prst="rect">
             <a:avLst/>
@@ -15518,7 +18249,7 @@
         <p:spPr>
           <a:xfrm>
             <a:off x="10972800" y="0"/>
-            <a:ext cx="14040" cy="6853680"/>
+            <a:ext cx="13680" cy="6853320"/>
           </a:xfrm>
           <a:prstGeom prst="rect">
             <a:avLst/>
@@ -15578,7 +18309,7 @@
         <p:spPr>
           <a:xfrm>
             <a:off x="11887200" y="0"/>
-            <a:ext cx="14040" cy="6853680"/>
+            <a:ext cx="13680" cy="6853320"/>
           </a:xfrm>
           <a:prstGeom prst="rect">
             <a:avLst/>
@@ -15638,7 +18369,7 @@
         <p:spPr>
           <a:xfrm>
             <a:off x="0" y="0"/>
-            <a:ext cx="315720" cy="6853680"/>
+            <a:ext cx="315360" cy="6853320"/>
           </a:xfrm>
           <a:prstGeom prst="rect">
             <a:avLst/>
@@ -15698,7 +18429,7 @@
         <p:spPr>
           <a:xfrm>
             <a:off x="9875520" y="365760"/>
-            <a:ext cx="2007360" cy="498600"/>
+            <a:ext cx="2007000" cy="498240"/>
           </a:xfrm>
           <a:prstGeom prst="roundRect">
             <a:avLst>
@@ -15903,7 +18634,7 @@
         <p:spPr>
           <a:xfrm>
             <a:off x="987480" y="3182040"/>
-            <a:ext cx="3287520" cy="2738880"/>
+            <a:ext cx="3287160" cy="2738520"/>
           </a:xfrm>
           <a:prstGeom prst="roundRect">
             <a:avLst>
@@ -15965,7 +18696,7 @@
         <p:spPr>
           <a:xfrm>
             <a:off x="457200" y="2514600"/>
-            <a:ext cx="3744720" cy="4112640"/>
+            <a:ext cx="3744360" cy="4112280"/>
           </a:xfrm>
           <a:prstGeom prst="roundRect">
             <a:avLst>
@@ -16203,7 +18934,7 @@
         <p:spPr>
           <a:xfrm>
             <a:off x="4507920" y="3182040"/>
-            <a:ext cx="3287520" cy="2738880"/>
+            <a:ext cx="3287160" cy="2738520"/>
           </a:xfrm>
           <a:prstGeom prst="roundRect">
             <a:avLst>
@@ -16265,7 +18996,7 @@
         <p:spPr>
           <a:xfrm>
             <a:off x="4434840" y="2971800"/>
-            <a:ext cx="3287520" cy="3425760"/>
+            <a:ext cx="3287160" cy="3425400"/>
           </a:xfrm>
           <a:prstGeom prst="roundRect">
             <a:avLst>
@@ -16484,7 +19215,7 @@
         <p:spPr>
           <a:xfrm>
             <a:off x="8028360" y="3182040"/>
-            <a:ext cx="3287520" cy="2738880"/>
+            <a:ext cx="3287160" cy="2738520"/>
           </a:xfrm>
           <a:prstGeom prst="roundRect">
             <a:avLst>
@@ -16546,7 +19277,7 @@
         <p:spPr>
           <a:xfrm>
             <a:off x="8001000" y="3200400"/>
-            <a:ext cx="3472560" cy="2741040"/>
+            <a:ext cx="3472200" cy="2740680"/>
           </a:xfrm>
           <a:prstGeom prst="roundRect">
             <a:avLst>
@@ -16958,7 +19689,7 @@
         <p:spPr>
           <a:xfrm>
             <a:off x="0" y="0"/>
-            <a:ext cx="12184560" cy="6853680"/>
+            <a:ext cx="12184200" cy="6853320"/>
           </a:xfrm>
           <a:prstGeom prst="rect">
             <a:avLst/>
@@ -17018,7 +19749,7 @@
         <p:spPr>
           <a:xfrm>
             <a:off x="0" y="0"/>
-            <a:ext cx="14040" cy="6853680"/>
+            <a:ext cx="13680" cy="6853320"/>
           </a:xfrm>
           <a:prstGeom prst="rect">
             <a:avLst/>
@@ -17078,7 +19809,7 @@
         <p:spPr>
           <a:xfrm>
             <a:off x="914400" y="0"/>
-            <a:ext cx="14040" cy="6853680"/>
+            <a:ext cx="13680" cy="6853320"/>
           </a:xfrm>
           <a:prstGeom prst="rect">
             <a:avLst/>
@@ -17138,7 +19869,7 @@
         <p:spPr>
           <a:xfrm>
             <a:off x="1828800" y="0"/>
-            <a:ext cx="14040" cy="6853680"/>
+            <a:ext cx="13680" cy="6853320"/>
           </a:xfrm>
           <a:prstGeom prst="rect">
             <a:avLst/>
@@ -17198,7 +19929,7 @@
         <p:spPr>
           <a:xfrm>
             <a:off x="2743200" y="0"/>
-            <a:ext cx="14040" cy="6853680"/>
+            <a:ext cx="13680" cy="6853320"/>
           </a:xfrm>
           <a:prstGeom prst="rect">
             <a:avLst/>
@@ -17258,7 +19989,7 @@
         <p:spPr>
           <a:xfrm>
             <a:off x="3657600" y="0"/>
-            <a:ext cx="14040" cy="6853680"/>
+            <a:ext cx="13680" cy="6853320"/>
           </a:xfrm>
           <a:prstGeom prst="rect">
             <a:avLst/>
@@ -17318,7 +20049,7 @@
         <p:spPr>
           <a:xfrm>
             <a:off x="4572000" y="0"/>
-            <a:ext cx="14040" cy="6853680"/>
+            <a:ext cx="13680" cy="6853320"/>
           </a:xfrm>
           <a:prstGeom prst="rect">
             <a:avLst/>
@@ -17378,7 +20109,7 @@
         <p:spPr>
           <a:xfrm>
             <a:off x="5486400" y="0"/>
-            <a:ext cx="14040" cy="6853680"/>
+            <a:ext cx="13680" cy="6853320"/>
           </a:xfrm>
           <a:prstGeom prst="rect">
             <a:avLst/>
@@ -17438,7 +20169,7 @@
         <p:spPr>
           <a:xfrm>
             <a:off x="6400800" y="0"/>
-            <a:ext cx="14040" cy="6853680"/>
+            <a:ext cx="13680" cy="6853320"/>
           </a:xfrm>
           <a:prstGeom prst="rect">
             <a:avLst/>
@@ -17498,7 +20229,7 @@
         <p:spPr>
           <a:xfrm>
             <a:off x="7315200" y="0"/>
-            <a:ext cx="14040" cy="6853680"/>
+            <a:ext cx="13680" cy="6853320"/>
           </a:xfrm>
           <a:prstGeom prst="rect">
             <a:avLst/>
@@ -17558,7 +20289,7 @@
         <p:spPr>
           <a:xfrm>
             <a:off x="8229600" y="0"/>
-            <a:ext cx="14040" cy="6853680"/>
+            <a:ext cx="13680" cy="6853320"/>
           </a:xfrm>
           <a:prstGeom prst="rect">
             <a:avLst/>
@@ -17618,7 +20349,7 @@
         <p:spPr>
           <a:xfrm>
             <a:off x="9144000" y="0"/>
-            <a:ext cx="14040" cy="6853680"/>
+            <a:ext cx="13680" cy="6853320"/>
           </a:xfrm>
           <a:prstGeom prst="rect">
             <a:avLst/>
@@ -17678,7 +20409,7 @@
         <p:spPr>
           <a:xfrm>
             <a:off x="10058400" y="0"/>
-            <a:ext cx="14040" cy="6853680"/>
+            <a:ext cx="13680" cy="6853320"/>
           </a:xfrm>
           <a:prstGeom prst="rect">
             <a:avLst/>
@@ -17738,7 +20469,7 @@
         <p:spPr>
           <a:xfrm>
             <a:off x="10972800" y="0"/>
-            <a:ext cx="14040" cy="6853680"/>
+            <a:ext cx="13680" cy="6853320"/>
           </a:xfrm>
           <a:prstGeom prst="rect">
             <a:avLst/>
@@ -17798,7 +20529,7 @@
         <p:spPr>
           <a:xfrm>
             <a:off x="11887200" y="0"/>
-            <a:ext cx="14040" cy="6853680"/>
+            <a:ext cx="13680" cy="6853320"/>
           </a:xfrm>
           <a:prstGeom prst="rect">
             <a:avLst/>
@@ -17858,7 +20589,7 @@
         <p:spPr>
           <a:xfrm>
             <a:off x="0" y="0"/>
-            <a:ext cx="315720" cy="6853680"/>
+            <a:ext cx="315360" cy="6853320"/>
           </a:xfrm>
           <a:prstGeom prst="rect">
             <a:avLst/>
@@ -17918,7 +20649,7 @@
         <p:spPr>
           <a:xfrm>
             <a:off x="9875520" y="365760"/>
-            <a:ext cx="2007360" cy="498600"/>
+            <a:ext cx="2007000" cy="498240"/>
           </a:xfrm>
           <a:prstGeom prst="roundRect">
             <a:avLst>
@@ -18123,7 +20854,7 @@
         <p:spPr>
           <a:xfrm>
             <a:off x="987480" y="3182040"/>
-            <a:ext cx="3287520" cy="2738880"/>
+            <a:ext cx="3287160" cy="2738520"/>
           </a:xfrm>
           <a:prstGeom prst="roundRect">
             <a:avLst>
@@ -18185,7 +20916,7 @@
         <p:spPr>
           <a:xfrm>
             <a:off x="457200" y="2514600"/>
-            <a:ext cx="3744720" cy="4112640"/>
+            <a:ext cx="3744360" cy="4112280"/>
           </a:xfrm>
           <a:prstGeom prst="roundRect">
             <a:avLst>
@@ -18438,7 +21169,7 @@
         <p:spPr>
           <a:xfrm>
             <a:off x="4507920" y="3182040"/>
-            <a:ext cx="3287520" cy="2738880"/>
+            <a:ext cx="3287160" cy="2738520"/>
           </a:xfrm>
           <a:prstGeom prst="roundRect">
             <a:avLst>
@@ -18500,7 +21231,7 @@
         <p:spPr>
           <a:xfrm>
             <a:off x="4434840" y="2514600"/>
-            <a:ext cx="3287520" cy="3882960"/>
+            <a:ext cx="3287160" cy="3882600"/>
           </a:xfrm>
           <a:prstGeom prst="roundRect">
             <a:avLst>
@@ -18716,7 +21447,7 @@
         <p:spPr>
           <a:xfrm>
             <a:off x="8028360" y="3182040"/>
-            <a:ext cx="3287520" cy="2738880"/>
+            <a:ext cx="3287160" cy="2738520"/>
           </a:xfrm>
           <a:prstGeom prst="roundRect">
             <a:avLst>
@@ -18778,7 +21509,7 @@
         <p:spPr>
           <a:xfrm>
             <a:off x="8001000" y="2514600"/>
-            <a:ext cx="3472560" cy="3884400"/>
+            <a:ext cx="3472200" cy="3884040"/>
           </a:xfrm>
           <a:prstGeom prst="roundRect">
             <a:avLst>
@@ -19454,7 +22185,7 @@
         <p:spPr>
           <a:xfrm>
             <a:off x="0" y="0"/>
-            <a:ext cx="12184560" cy="6853680"/>
+            <a:ext cx="12184200" cy="6853320"/>
           </a:xfrm>
           <a:prstGeom prst="rect">
             <a:avLst/>
@@ -19514,7 +22245,7 @@
         <p:spPr>
           <a:xfrm>
             <a:off x="0" y="0"/>
-            <a:ext cx="14040" cy="6853680"/>
+            <a:ext cx="13680" cy="6853320"/>
           </a:xfrm>
           <a:prstGeom prst="rect">
             <a:avLst/>
@@ -19574,7 +22305,7 @@
         <p:spPr>
           <a:xfrm>
             <a:off x="914400" y="0"/>
-            <a:ext cx="14040" cy="6853680"/>
+            <a:ext cx="13680" cy="6853320"/>
           </a:xfrm>
           <a:prstGeom prst="rect">
             <a:avLst/>
@@ -19634,7 +22365,7 @@
         <p:spPr>
           <a:xfrm>
             <a:off x="1828800" y="0"/>
-            <a:ext cx="14040" cy="6853680"/>
+            <a:ext cx="13680" cy="6853320"/>
           </a:xfrm>
           <a:prstGeom prst="rect">
             <a:avLst/>
@@ -19694,7 +22425,7 @@
         <p:spPr>
           <a:xfrm>
             <a:off x="2743200" y="0"/>
-            <a:ext cx="14040" cy="6853680"/>
+            <a:ext cx="13680" cy="6853320"/>
           </a:xfrm>
           <a:prstGeom prst="rect">
             <a:avLst/>
@@ -19754,7 +22485,7 @@
         <p:spPr>
           <a:xfrm>
             <a:off x="3657600" y="0"/>
-            <a:ext cx="14040" cy="6853680"/>
+            <a:ext cx="13680" cy="6853320"/>
           </a:xfrm>
           <a:prstGeom prst="rect">
             <a:avLst/>
@@ -19814,7 +22545,7 @@
         <p:spPr>
           <a:xfrm>
             <a:off x="4572000" y="0"/>
-            <a:ext cx="14040" cy="6853680"/>
+            <a:ext cx="13680" cy="6853320"/>
           </a:xfrm>
           <a:prstGeom prst="rect">
             <a:avLst/>
@@ -19874,7 +22605,7 @@
         <p:spPr>
           <a:xfrm>
             <a:off x="5486400" y="0"/>
-            <a:ext cx="14040" cy="6853680"/>
+            <a:ext cx="13680" cy="6853320"/>
           </a:xfrm>
           <a:prstGeom prst="rect">
             <a:avLst/>
@@ -19934,7 +22665,7 @@
         <p:spPr>
           <a:xfrm>
             <a:off x="6400800" y="0"/>
-            <a:ext cx="14040" cy="6853680"/>
+            <a:ext cx="13680" cy="6853320"/>
           </a:xfrm>
           <a:prstGeom prst="rect">
             <a:avLst/>
@@ -19994,7 +22725,7 @@
         <p:spPr>
           <a:xfrm>
             <a:off x="7315200" y="0"/>
-            <a:ext cx="14040" cy="6853680"/>
+            <a:ext cx="13680" cy="6853320"/>
           </a:xfrm>
           <a:prstGeom prst="rect">
             <a:avLst/>
@@ -20054,7 +22785,7 @@
         <p:spPr>
           <a:xfrm>
             <a:off x="8229600" y="0"/>
-            <a:ext cx="14040" cy="6853680"/>
+            <a:ext cx="13680" cy="6853320"/>
           </a:xfrm>
           <a:prstGeom prst="rect">
             <a:avLst/>
@@ -20114,7 +22845,7 @@
         <p:spPr>
           <a:xfrm>
             <a:off x="9144000" y="0"/>
-            <a:ext cx="14040" cy="6853680"/>
+            <a:ext cx="13680" cy="6853320"/>
           </a:xfrm>
           <a:prstGeom prst="rect">
             <a:avLst/>
@@ -20174,7 +22905,7 @@
         <p:spPr>
           <a:xfrm>
             <a:off x="10058400" y="0"/>
-            <a:ext cx="14040" cy="6853680"/>
+            <a:ext cx="13680" cy="6853320"/>
           </a:xfrm>
           <a:prstGeom prst="rect">
             <a:avLst/>
@@ -20234,7 +22965,7 @@
         <p:spPr>
           <a:xfrm>
             <a:off x="10972800" y="0"/>
-            <a:ext cx="14040" cy="6853680"/>
+            <a:ext cx="13680" cy="6853320"/>
           </a:xfrm>
           <a:prstGeom prst="rect">
             <a:avLst/>
@@ -20294,7 +23025,7 @@
         <p:spPr>
           <a:xfrm>
             <a:off x="11887200" y="0"/>
-            <a:ext cx="14040" cy="6853680"/>
+            <a:ext cx="13680" cy="6853320"/>
           </a:xfrm>
           <a:prstGeom prst="rect">
             <a:avLst/>
@@ -20354,7 +23085,7 @@
         <p:spPr>
           <a:xfrm>
             <a:off x="0" y="0"/>
-            <a:ext cx="315720" cy="6853680"/>
+            <a:ext cx="315360" cy="6853320"/>
           </a:xfrm>
           <a:prstGeom prst="rect">
             <a:avLst/>
@@ -20414,7 +23145,7 @@
         <p:spPr>
           <a:xfrm>
             <a:off x="9875520" y="365760"/>
-            <a:ext cx="2007360" cy="498600"/>
+            <a:ext cx="2007000" cy="498240"/>
           </a:xfrm>
           <a:prstGeom prst="roundRect">
             <a:avLst>
@@ -20655,7 +23386,7 @@
         <p:spPr>
           <a:xfrm>
             <a:off x="987480" y="3182040"/>
-            <a:ext cx="3287520" cy="2738880"/>
+            <a:ext cx="3287160" cy="2738520"/>
           </a:xfrm>
           <a:prstGeom prst="roundRect">
             <a:avLst>
@@ -20717,7 +23448,7 @@
         <p:spPr>
           <a:xfrm>
             <a:off x="457200" y="2743200"/>
-            <a:ext cx="3884760" cy="3884040"/>
+            <a:ext cx="3884400" cy="3883680"/>
           </a:xfrm>
           <a:prstGeom prst="roundRect">
             <a:avLst>
@@ -21031,7 +23762,7 @@
         <p:spPr>
           <a:xfrm>
             <a:off x="4507920" y="3182040"/>
-            <a:ext cx="3287520" cy="2738880"/>
+            <a:ext cx="3287160" cy="2738520"/>
           </a:xfrm>
           <a:prstGeom prst="roundRect">
             <a:avLst>
@@ -21093,7 +23824,7 @@
         <p:spPr>
           <a:xfrm>
             <a:off x="4572000" y="2743200"/>
-            <a:ext cx="3427560" cy="3656160"/>
+            <a:ext cx="3427200" cy="3655800"/>
           </a:xfrm>
           <a:prstGeom prst="roundRect">
             <a:avLst>
@@ -21645,7 +24376,7 @@
         <p:spPr>
           <a:xfrm>
             <a:off x="8028360" y="3182040"/>
-            <a:ext cx="3287520" cy="2738880"/>
+            <a:ext cx="3287160" cy="2738520"/>
           </a:xfrm>
           <a:prstGeom prst="roundRect">
             <a:avLst>
@@ -21707,7 +24438,7 @@
         <p:spPr>
           <a:xfrm>
             <a:off x="8229600" y="2514600"/>
-            <a:ext cx="3656160" cy="4113360"/>
+            <a:ext cx="3655800" cy="4113000"/>
           </a:xfrm>
           <a:prstGeom prst="roundRect">
             <a:avLst>
@@ -22699,7 +25430,7 @@
         <p:spPr>
           <a:xfrm>
             <a:off x="0" y="0"/>
-            <a:ext cx="12184560" cy="6853680"/>
+            <a:ext cx="12184200" cy="6853320"/>
           </a:xfrm>
           <a:prstGeom prst="rect">
             <a:avLst/>
@@ -22759,7 +25490,7 @@
         <p:spPr>
           <a:xfrm>
             <a:off x="0" y="0"/>
-            <a:ext cx="14040" cy="6853680"/>
+            <a:ext cx="13680" cy="6853320"/>
           </a:xfrm>
           <a:prstGeom prst="rect">
             <a:avLst/>
@@ -22819,7 +25550,7 @@
         <p:spPr>
           <a:xfrm>
             <a:off x="914400" y="0"/>
-            <a:ext cx="14040" cy="6853680"/>
+            <a:ext cx="13680" cy="6853320"/>
           </a:xfrm>
           <a:prstGeom prst="rect">
             <a:avLst/>
@@ -22879,7 +25610,7 @@
         <p:spPr>
           <a:xfrm>
             <a:off x="1828800" y="0"/>
-            <a:ext cx="14040" cy="6853680"/>
+            <a:ext cx="13680" cy="6853320"/>
           </a:xfrm>
           <a:prstGeom prst="rect">
             <a:avLst/>
@@ -22939,7 +25670,7 @@
         <p:spPr>
           <a:xfrm>
             <a:off x="2743200" y="0"/>
-            <a:ext cx="14040" cy="6853680"/>
+            <a:ext cx="13680" cy="6853320"/>
           </a:xfrm>
           <a:prstGeom prst="rect">
             <a:avLst/>
@@ -22999,7 +25730,7 @@
         <p:spPr>
           <a:xfrm>
             <a:off x="3657600" y="0"/>
-            <a:ext cx="14040" cy="6853680"/>
+            <a:ext cx="13680" cy="6853320"/>
           </a:xfrm>
           <a:prstGeom prst="rect">
             <a:avLst/>
@@ -23059,7 +25790,7 @@
         <p:spPr>
           <a:xfrm>
             <a:off x="4572000" y="0"/>
-            <a:ext cx="14040" cy="6853680"/>
+            <a:ext cx="13680" cy="6853320"/>
           </a:xfrm>
           <a:prstGeom prst="rect">
             <a:avLst/>
@@ -23119,7 +25850,7 @@
         <p:spPr>
           <a:xfrm>
             <a:off x="5486400" y="0"/>
-            <a:ext cx="14040" cy="6853680"/>
+            <a:ext cx="13680" cy="6853320"/>
           </a:xfrm>
           <a:prstGeom prst="rect">
             <a:avLst/>
@@ -23179,7 +25910,7 @@
         <p:spPr>
           <a:xfrm>
             <a:off x="6400800" y="0"/>
-            <a:ext cx="14040" cy="6853680"/>
+            <a:ext cx="13680" cy="6853320"/>
           </a:xfrm>
           <a:prstGeom prst="rect">
             <a:avLst/>
@@ -23239,7 +25970,7 @@
         <p:spPr>
           <a:xfrm>
             <a:off x="7315200" y="0"/>
-            <a:ext cx="14040" cy="6853680"/>
+            <a:ext cx="13680" cy="6853320"/>
           </a:xfrm>
           <a:prstGeom prst="rect">
             <a:avLst/>
@@ -23299,7 +26030,7 @@
         <p:spPr>
           <a:xfrm>
             <a:off x="8229600" y="0"/>
-            <a:ext cx="14040" cy="6853680"/>
+            <a:ext cx="13680" cy="6853320"/>
           </a:xfrm>
           <a:prstGeom prst="rect">
             <a:avLst/>
@@ -23359,7 +26090,7 @@
         <p:spPr>
           <a:xfrm>
             <a:off x="9144000" y="0"/>
-            <a:ext cx="14040" cy="6853680"/>
+            <a:ext cx="13680" cy="6853320"/>
           </a:xfrm>
           <a:prstGeom prst="rect">
             <a:avLst/>
@@ -23419,7 +26150,7 @@
         <p:spPr>
           <a:xfrm>
             <a:off x="10058400" y="0"/>
-            <a:ext cx="14040" cy="6853680"/>
+            <a:ext cx="13680" cy="6853320"/>
           </a:xfrm>
           <a:prstGeom prst="rect">
             <a:avLst/>
@@ -23479,7 +26210,7 @@
         <p:spPr>
           <a:xfrm>
             <a:off x="10972800" y="0"/>
-            <a:ext cx="14040" cy="6853680"/>
+            <a:ext cx="13680" cy="6853320"/>
           </a:xfrm>
           <a:prstGeom prst="rect">
             <a:avLst/>
@@ -23539,7 +26270,7 @@
         <p:spPr>
           <a:xfrm>
             <a:off x="11887200" y="0"/>
-            <a:ext cx="14040" cy="6853680"/>
+            <a:ext cx="13680" cy="6853320"/>
           </a:xfrm>
           <a:prstGeom prst="rect">
             <a:avLst/>
@@ -23599,7 +26330,7 @@
         <p:spPr>
           <a:xfrm>
             <a:off x="0" y="0"/>
-            <a:ext cx="315720" cy="6853680"/>
+            <a:ext cx="315360" cy="6853320"/>
           </a:xfrm>
           <a:prstGeom prst="rect">
             <a:avLst/>
@@ -23659,7 +26390,7 @@
         <p:spPr>
           <a:xfrm>
             <a:off x="9875520" y="365760"/>
-            <a:ext cx="2007360" cy="498600"/>
+            <a:ext cx="2007000" cy="498240"/>
           </a:xfrm>
           <a:prstGeom prst="roundRect">
             <a:avLst>
@@ -23787,7 +26518,7 @@
         <p:spPr>
           <a:xfrm>
             <a:off x="2448360" y="1828800"/>
-            <a:ext cx="6589800" cy="819720"/>
+            <a:ext cx="6589440" cy="819720"/>
           </a:xfrm>
           <a:prstGeom prst="rect">
             <a:avLst/>
@@ -23897,7 +26628,7 @@
         <p:spPr>
           <a:xfrm>
             <a:off x="987480" y="3182040"/>
-            <a:ext cx="3287520" cy="2738880"/>
+            <a:ext cx="3287160" cy="2738520"/>
           </a:xfrm>
           <a:prstGeom prst="roundRect">
             <a:avLst>
@@ -23959,7 +26690,7 @@
         <p:spPr>
           <a:xfrm>
             <a:off x="914400" y="3108960"/>
-            <a:ext cx="3287520" cy="3290760"/>
+            <a:ext cx="3287160" cy="3290400"/>
           </a:xfrm>
           <a:prstGeom prst="roundRect">
             <a:avLst>
@@ -24290,7 +27021,7 @@
         <p:spPr>
           <a:xfrm>
             <a:off x="4507920" y="3182040"/>
-            <a:ext cx="3287520" cy="2738880"/>
+            <a:ext cx="3287160" cy="2738520"/>
           </a:xfrm>
           <a:prstGeom prst="roundRect">
             <a:avLst>
@@ -24352,7 +27083,7 @@
         <p:spPr>
           <a:xfrm>
             <a:off x="4434840" y="2971800"/>
-            <a:ext cx="3287520" cy="3427920"/>
+            <a:ext cx="3287160" cy="3427560"/>
           </a:xfrm>
           <a:prstGeom prst="roundRect">
             <a:avLst>
@@ -24759,7 +27490,7 @@
         <p:spPr>
           <a:xfrm>
             <a:off x="8028360" y="3182040"/>
-            <a:ext cx="3287520" cy="2738880"/>
+            <a:ext cx="3287160" cy="2738520"/>
           </a:xfrm>
           <a:prstGeom prst="roundRect">
             <a:avLst>
@@ -24821,7 +27552,7 @@
         <p:spPr>
           <a:xfrm>
             <a:off x="7955280" y="2743200"/>
-            <a:ext cx="3700080" cy="3655080"/>
+            <a:ext cx="3699720" cy="3654720"/>
           </a:xfrm>
           <a:prstGeom prst="roundRect">
             <a:avLst>
@@ -25632,7 +28363,7 @@
         <p:spPr>
           <a:xfrm>
             <a:off x="0" y="0"/>
-            <a:ext cx="12184560" cy="6853680"/>
+            <a:ext cx="12184200" cy="6853320"/>
           </a:xfrm>
           <a:prstGeom prst="rect">
             <a:avLst/>
@@ -25692,7 +28423,7 @@
         <p:spPr>
           <a:xfrm>
             <a:off x="0" y="0"/>
-            <a:ext cx="14040" cy="6853680"/>
+            <a:ext cx="13680" cy="6853320"/>
           </a:xfrm>
           <a:prstGeom prst="rect">
             <a:avLst/>
@@ -25752,7 +28483,7 @@
         <p:spPr>
           <a:xfrm>
             <a:off x="914400" y="0"/>
-            <a:ext cx="14040" cy="6853680"/>
+            <a:ext cx="13680" cy="6853320"/>
           </a:xfrm>
           <a:prstGeom prst="rect">
             <a:avLst/>
@@ -25812,7 +28543,7 @@
         <p:spPr>
           <a:xfrm>
             <a:off x="1828800" y="0"/>
-            <a:ext cx="14040" cy="6853680"/>
+            <a:ext cx="13680" cy="6853320"/>
           </a:xfrm>
           <a:prstGeom prst="rect">
             <a:avLst/>
@@ -25872,7 +28603,7 @@
         <p:spPr>
           <a:xfrm>
             <a:off x="2743200" y="0"/>
-            <a:ext cx="14040" cy="6853680"/>
+            <a:ext cx="13680" cy="6853320"/>
           </a:xfrm>
           <a:prstGeom prst="rect">
             <a:avLst/>
@@ -25932,7 +28663,7 @@
         <p:spPr>
           <a:xfrm>
             <a:off x="3657600" y="0"/>
-            <a:ext cx="14040" cy="6853680"/>
+            <a:ext cx="13680" cy="6853320"/>
           </a:xfrm>
           <a:prstGeom prst="rect">
             <a:avLst/>
@@ -25992,7 +28723,7 @@
         <p:spPr>
           <a:xfrm>
             <a:off x="4572000" y="0"/>
-            <a:ext cx="14040" cy="6853680"/>
+            <a:ext cx="13680" cy="6853320"/>
           </a:xfrm>
           <a:prstGeom prst="rect">
             <a:avLst/>
@@ -26052,7 +28783,7 @@
         <p:spPr>
           <a:xfrm>
             <a:off x="5486400" y="0"/>
-            <a:ext cx="14040" cy="6853680"/>
+            <a:ext cx="13680" cy="6853320"/>
           </a:xfrm>
           <a:prstGeom prst="rect">
             <a:avLst/>
@@ -26112,7 +28843,7 @@
         <p:spPr>
           <a:xfrm>
             <a:off x="6400800" y="0"/>
-            <a:ext cx="14040" cy="6853680"/>
+            <a:ext cx="13680" cy="6853320"/>
           </a:xfrm>
           <a:prstGeom prst="rect">
             <a:avLst/>
@@ -26172,7 +28903,7 @@
         <p:spPr>
           <a:xfrm>
             <a:off x="7315200" y="0"/>
-            <a:ext cx="14040" cy="6853680"/>
+            <a:ext cx="13680" cy="6853320"/>
           </a:xfrm>
           <a:prstGeom prst="rect">
             <a:avLst/>
@@ -26232,7 +28963,7 @@
         <p:spPr>
           <a:xfrm>
             <a:off x="8229600" y="0"/>
-            <a:ext cx="14040" cy="6853680"/>
+            <a:ext cx="13680" cy="6853320"/>
           </a:xfrm>
           <a:prstGeom prst="rect">
             <a:avLst/>
@@ -26292,7 +29023,7 @@
         <p:spPr>
           <a:xfrm>
             <a:off x="9144000" y="0"/>
-            <a:ext cx="14040" cy="6853680"/>
+            <a:ext cx="13680" cy="6853320"/>
           </a:xfrm>
           <a:prstGeom prst="rect">
             <a:avLst/>
@@ -26352,7 +29083,7 @@
         <p:spPr>
           <a:xfrm>
             <a:off x="10058400" y="0"/>
-            <a:ext cx="14040" cy="6853680"/>
+            <a:ext cx="13680" cy="6853320"/>
           </a:xfrm>
           <a:prstGeom prst="rect">
             <a:avLst/>
@@ -26412,7 +29143,7 @@
         <p:spPr>
           <a:xfrm>
             <a:off x="10972800" y="0"/>
-            <a:ext cx="14040" cy="6853680"/>
+            <a:ext cx="13680" cy="6853320"/>
           </a:xfrm>
           <a:prstGeom prst="rect">
             <a:avLst/>
@@ -26472,7 +29203,7 @@
         <p:spPr>
           <a:xfrm>
             <a:off x="11887200" y="0"/>
-            <a:ext cx="14040" cy="6853680"/>
+            <a:ext cx="13680" cy="6853320"/>
           </a:xfrm>
           <a:prstGeom prst="rect">
             <a:avLst/>
@@ -26532,7 +29263,7 @@
         <p:spPr>
           <a:xfrm>
             <a:off x="0" y="0"/>
-            <a:ext cx="315720" cy="6853680"/>
+            <a:ext cx="315360" cy="6853320"/>
           </a:xfrm>
           <a:prstGeom prst="rect">
             <a:avLst/>
@@ -26592,7 +29323,7 @@
         <p:spPr>
           <a:xfrm>
             <a:off x="9875520" y="365760"/>
-            <a:ext cx="2007360" cy="498600"/>
+            <a:ext cx="2007000" cy="498240"/>
           </a:xfrm>
           <a:prstGeom prst="roundRect">
             <a:avLst>
@@ -26666,7 +29397,7 @@
         <p:spPr>
           <a:xfrm>
             <a:off x="2585880" y="914400"/>
-            <a:ext cx="5796720" cy="1186920"/>
+            <a:ext cx="5796360" cy="1186920"/>
           </a:xfrm>
           <a:prstGeom prst="rect">
             <a:avLst/>
@@ -26733,7 +29464,7 @@
         <p:spPr>
           <a:xfrm>
             <a:off x="2057400" y="1694880"/>
-            <a:ext cx="7454880" cy="819720"/>
+            <a:ext cx="7454520" cy="819720"/>
           </a:xfrm>
           <a:prstGeom prst="rect">
             <a:avLst/>
@@ -26833,7 +29564,7 @@
         <p:spPr>
           <a:xfrm>
             <a:off x="987480" y="3182040"/>
-            <a:ext cx="3287520" cy="2738880"/>
+            <a:ext cx="3287160" cy="2738520"/>
           </a:xfrm>
           <a:prstGeom prst="roundRect">
             <a:avLst>
@@ -26895,7 +29626,7 @@
         <p:spPr>
           <a:xfrm>
             <a:off x="914400" y="3108960"/>
-            <a:ext cx="3287520" cy="3290760"/>
+            <a:ext cx="3287160" cy="3290400"/>
           </a:xfrm>
           <a:prstGeom prst="roundRect">
             <a:avLst>
@@ -27146,7 +29877,7 @@
         <p:spPr>
           <a:xfrm>
             <a:off x="4507920" y="3182040"/>
-            <a:ext cx="3287520" cy="2738880"/>
+            <a:ext cx="3287160" cy="2738520"/>
           </a:xfrm>
           <a:prstGeom prst="roundRect">
             <a:avLst>
@@ -27208,7 +29939,7 @@
         <p:spPr>
           <a:xfrm>
             <a:off x="4434840" y="2971800"/>
-            <a:ext cx="3287520" cy="3427920"/>
+            <a:ext cx="3287160" cy="3427560"/>
           </a:xfrm>
           <a:prstGeom prst="roundRect">
             <a:avLst>
@@ -27582,7 +30313,7 @@
         <p:spPr>
           <a:xfrm>
             <a:off x="8028360" y="3182040"/>
-            <a:ext cx="3287520" cy="2738880"/>
+            <a:ext cx="3287160" cy="2738520"/>
           </a:xfrm>
           <a:prstGeom prst="roundRect">
             <a:avLst>
@@ -27644,7 +30375,7 @@
         <p:spPr>
           <a:xfrm>
             <a:off x="8003880" y="2971800"/>
-            <a:ext cx="3425760" cy="3426480"/>
+            <a:ext cx="3425400" cy="3426120"/>
           </a:xfrm>
           <a:prstGeom prst="roundRect">
             <a:avLst>

--- a/Java/Java #4/TR/Java #4.pptx
+++ b/Java/Java #4/TR/Java #4.pptx
@@ -16,6 +16,7 @@
     <p:sldId id="264" r:id="rId11"/>
     <p:sldId id="265" r:id="rId12"/>
     <p:sldId id="266" r:id="rId13"/>
+    <p:sldId id="267" r:id="rId14"/>
   </p:sldIdLst>
   <p:sldSz cx="9144000" cy="6858000"/>
   <p:notesSz cx="7772400" cy="10058400"/>
@@ -73,7 +74,7 @@
         <p:txBody>
           <a:bodyPr/>
           <a:p>
-            <a:fld id="{7339FDC7-29F5-4896-AA46-FE6D294844BD}" type="slidenum">
+            <a:fld id="{647D8083-9DC8-4256-8FAE-9D98B579219B}" type="slidenum">
               <a:t>&lt;#&gt;</a:t>
             </a:fld>
           </a:p>
@@ -282,7 +283,7 @@
         <p:txBody>
           <a:bodyPr/>
           <a:p>
-            <a:fld id="{686E0FF3-92EA-49CB-9BC1-F6A7E05217C5}" type="slidenum">
+            <a:fld id="{13DC755D-AEEE-4072-9C12-2AA6A774C886}" type="slidenum">
               <a:t>&lt;#&gt;</a:t>
             </a:fld>
           </a:p>
@@ -577,7 +578,7 @@
         <p:txBody>
           <a:bodyPr/>
           <a:p>
-            <a:fld id="{9B82DC62-3CB3-43BB-8741-3D6615EA43AD}" type="slidenum">
+            <a:fld id="{469AE3E4-42C8-4D3A-9FD7-EE44C6C96CC4}" type="slidenum">
               <a:t>&lt;#&gt;</a:t>
             </a:fld>
           </a:p>
@@ -958,7 +959,7 @@
         <p:txBody>
           <a:bodyPr/>
           <a:p>
-            <a:fld id="{437AD881-B599-4176-B5A9-ECF00BE0C9AD}" type="slidenum">
+            <a:fld id="{4E949483-FF49-4FD2-8065-965029678C0C}" type="slidenum">
               <a:t>&lt;#&gt;</a:t>
             </a:fld>
           </a:p>
@@ -1121,7 +1122,7 @@
         <p:txBody>
           <a:bodyPr/>
           <a:p>
-            <a:fld id="{0D52F0FE-BC0C-43B7-87E5-0A94205AC9CC}" type="slidenum">
+            <a:fld id="{1A58710C-93CD-4D1F-A2A5-1293B2FD6379}" type="slidenum">
               <a:t>&lt;#&gt;</a:t>
             </a:fld>
           </a:p>
@@ -1287,7 +1288,7 @@
         <p:txBody>
           <a:bodyPr/>
           <a:p>
-            <a:fld id="{9D9D8F09-8642-41E6-A288-55EBCCFA0D22}" type="slidenum">
+            <a:fld id="{A87076A1-9225-45B5-B0CD-6D507989B139}" type="slidenum">
               <a:t>&lt;#&gt;</a:t>
             </a:fld>
           </a:p>
@@ -1496,7 +1497,7 @@
         <p:txBody>
           <a:bodyPr/>
           <a:p>
-            <a:fld id="{A32020FA-7E23-4585-83DF-9EA21C9FA6BC}" type="slidenum">
+            <a:fld id="{BBBC3DAC-4B3E-497E-8D39-D45612E4BD2F}" type="slidenum">
               <a:t>&lt;#&gt;</a:t>
             </a:fld>
           </a:p>
@@ -1619,7 +1620,7 @@
         <p:txBody>
           <a:bodyPr/>
           <a:p>
-            <a:fld id="{38CDEF14-1089-46DD-B164-B0BEB2CB8A47}" type="slidenum">
+            <a:fld id="{890144CE-E437-4766-B7E8-A7E0BA73003E}" type="slidenum">
               <a:t>&lt;#&gt;</a:t>
             </a:fld>
           </a:p>
@@ -1740,7 +1741,7 @@
         <p:txBody>
           <a:bodyPr/>
           <a:p>
-            <a:fld id="{6343E858-6FC8-4413-82A3-8A0149978457}" type="slidenum">
+            <a:fld id="{A37E65AE-EF17-4C9C-B269-027D558F22A3}" type="slidenum">
               <a:t>&lt;#&gt;</a:t>
             </a:fld>
           </a:p>
@@ -1992,7 +1993,7 @@
         <p:txBody>
           <a:bodyPr/>
           <a:p>
-            <a:fld id="{DE69D41F-0F2E-4DD7-A102-F9F50DAC1D0E}" type="slidenum">
+            <a:fld id="{8D446B2F-E52D-43EF-9FBF-8D774C4A5B32}" type="slidenum">
               <a:t>&lt;#&gt;</a:t>
             </a:fld>
           </a:p>
@@ -2244,7 +2245,7 @@
         <p:txBody>
           <a:bodyPr/>
           <a:p>
-            <a:fld id="{92388C69-3E85-4746-8B74-F2E3FB75449C}" type="slidenum">
+            <a:fld id="{BA1096FB-B25D-4A90-8732-320AB54477D5}" type="slidenum">
               <a:t>&lt;#&gt;</a:t>
             </a:fld>
           </a:p>
@@ -2496,7 +2497,7 @@
         <p:txBody>
           <a:bodyPr/>
           <a:p>
-            <a:fld id="{1453F8B6-8997-4F4B-A41D-8EAA3847B3CD}" type="slidenum">
+            <a:fld id="{8665550D-56B0-4569-ACBD-A9B65A01D71C}" type="slidenum">
               <a:t>&lt;#&gt;</a:t>
             </a:fld>
           </a:p>
@@ -2565,7 +2566,7 @@
         <p:spPr>
           <a:xfrm>
             <a:off x="3124080" y="6356520"/>
-            <a:ext cx="2890440" cy="360000"/>
+            <a:ext cx="2890080" cy="359640"/>
           </a:xfrm>
           <a:prstGeom prst="rect">
             <a:avLst/>
@@ -2637,7 +2638,7 @@
         <p:spPr>
           <a:xfrm>
             <a:off x="6553080" y="6356520"/>
-            <a:ext cx="2128680" cy="360000"/>
+            <a:ext cx="2128320" cy="359640"/>
           </a:xfrm>
           <a:prstGeom prst="rect">
             <a:avLst/>
@@ -2678,7 +2679,7 @@
                 <a:tab algn="l" pos="0"/>
               </a:tabLst>
             </a:pPr>
-            <a:fld id="{2F1DAC1C-0B93-4A26-9A36-34B4ECAE47AC}" type="slidenum">
+            <a:fld id="{9ABCF920-B0AF-499A-93A7-42B6B49A27B6}" type="slidenum">
               <a:rPr b="0" lang="en-US" sz="1200" spc="-1" strike="noStrike">
                 <a:solidFill>
                   <a:srgbClr val="8b8b8b"/>
@@ -2709,7 +2710,7 @@
         <p:spPr>
           <a:xfrm>
             <a:off x="457200" y="6356520"/>
-            <a:ext cx="2128680" cy="360000"/>
+            <a:ext cx="2128320" cy="359640"/>
           </a:xfrm>
           <a:prstGeom prst="rect">
             <a:avLst/>
@@ -3076,7 +3077,7 @@
         <p:spPr>
           <a:xfrm>
             <a:off x="0" y="0"/>
-            <a:ext cx="12183840" cy="6852960"/>
+            <a:ext cx="12183480" cy="6852600"/>
           </a:xfrm>
           <a:prstGeom prst="rect">
             <a:avLst/>
@@ -3136,7 +3137,7 @@
         <p:spPr>
           <a:xfrm>
             <a:off x="0" y="0"/>
-            <a:ext cx="13320" cy="6852960"/>
+            <a:ext cx="12960" cy="6852600"/>
           </a:xfrm>
           <a:prstGeom prst="rect">
             <a:avLst/>
@@ -3196,7 +3197,7 @@
         <p:spPr>
           <a:xfrm>
             <a:off x="914400" y="0"/>
-            <a:ext cx="13320" cy="6852960"/>
+            <a:ext cx="12960" cy="6852600"/>
           </a:xfrm>
           <a:prstGeom prst="rect">
             <a:avLst/>
@@ -3256,7 +3257,7 @@
         <p:spPr>
           <a:xfrm>
             <a:off x="1828800" y="0"/>
-            <a:ext cx="13320" cy="6852960"/>
+            <a:ext cx="12960" cy="6852600"/>
           </a:xfrm>
           <a:prstGeom prst="rect">
             <a:avLst/>
@@ -3316,7 +3317,7 @@
         <p:spPr>
           <a:xfrm>
             <a:off x="2743200" y="0"/>
-            <a:ext cx="13320" cy="6852960"/>
+            <a:ext cx="12960" cy="6852600"/>
           </a:xfrm>
           <a:prstGeom prst="rect">
             <a:avLst/>
@@ -3376,7 +3377,7 @@
         <p:spPr>
           <a:xfrm>
             <a:off x="3657600" y="0"/>
-            <a:ext cx="13320" cy="6852960"/>
+            <a:ext cx="12960" cy="6852600"/>
           </a:xfrm>
           <a:prstGeom prst="rect">
             <a:avLst/>
@@ -3436,7 +3437,7 @@
         <p:spPr>
           <a:xfrm>
             <a:off x="4572000" y="0"/>
-            <a:ext cx="13320" cy="6852960"/>
+            <a:ext cx="12960" cy="6852600"/>
           </a:xfrm>
           <a:prstGeom prst="rect">
             <a:avLst/>
@@ -3496,7 +3497,7 @@
         <p:spPr>
           <a:xfrm>
             <a:off x="5486400" y="0"/>
-            <a:ext cx="13320" cy="6852960"/>
+            <a:ext cx="12960" cy="6852600"/>
           </a:xfrm>
           <a:prstGeom prst="rect">
             <a:avLst/>
@@ -3556,7 +3557,7 @@
         <p:spPr>
           <a:xfrm>
             <a:off x="6400800" y="0"/>
-            <a:ext cx="13320" cy="6852960"/>
+            <a:ext cx="12960" cy="6852600"/>
           </a:xfrm>
           <a:prstGeom prst="rect">
             <a:avLst/>
@@ -3616,7 +3617,7 @@
         <p:spPr>
           <a:xfrm>
             <a:off x="7315200" y="0"/>
-            <a:ext cx="13320" cy="6852960"/>
+            <a:ext cx="12960" cy="6852600"/>
           </a:xfrm>
           <a:prstGeom prst="rect">
             <a:avLst/>
@@ -3676,7 +3677,7 @@
         <p:spPr>
           <a:xfrm>
             <a:off x="8229600" y="0"/>
-            <a:ext cx="13320" cy="6852960"/>
+            <a:ext cx="12960" cy="6852600"/>
           </a:xfrm>
           <a:prstGeom prst="rect">
             <a:avLst/>
@@ -3736,7 +3737,7 @@
         <p:spPr>
           <a:xfrm>
             <a:off x="9144000" y="0"/>
-            <a:ext cx="13320" cy="6852960"/>
+            <a:ext cx="12960" cy="6852600"/>
           </a:xfrm>
           <a:prstGeom prst="rect">
             <a:avLst/>
@@ -3796,7 +3797,7 @@
         <p:spPr>
           <a:xfrm>
             <a:off x="10058400" y="0"/>
-            <a:ext cx="13320" cy="6852960"/>
+            <a:ext cx="12960" cy="6852600"/>
           </a:xfrm>
           <a:prstGeom prst="rect">
             <a:avLst/>
@@ -3856,7 +3857,7 @@
         <p:spPr>
           <a:xfrm>
             <a:off x="10972800" y="0"/>
-            <a:ext cx="13320" cy="6852960"/>
+            <a:ext cx="12960" cy="6852600"/>
           </a:xfrm>
           <a:prstGeom prst="rect">
             <a:avLst/>
@@ -3916,7 +3917,7 @@
         <p:spPr>
           <a:xfrm>
             <a:off x="11887200" y="0"/>
-            <a:ext cx="13320" cy="6852960"/>
+            <a:ext cx="12960" cy="6852600"/>
           </a:xfrm>
           <a:prstGeom prst="rect">
             <a:avLst/>
@@ -3976,7 +3977,7 @@
         <p:spPr>
           <a:xfrm>
             <a:off x="0" y="0"/>
-            <a:ext cx="315000" cy="6852960"/>
+            <a:ext cx="314640" cy="6852600"/>
           </a:xfrm>
           <a:prstGeom prst="rect">
             <a:avLst/>
@@ -4036,7 +4037,7 @@
         <p:spPr>
           <a:xfrm>
             <a:off x="9875520" y="365760"/>
-            <a:ext cx="2006640" cy="497880"/>
+            <a:ext cx="2006280" cy="497520"/>
           </a:xfrm>
           <a:prstGeom prst="roundRect">
             <a:avLst>
@@ -4287,7 +4288,7 @@
         <p:spPr>
           <a:xfrm>
             <a:off x="987480" y="3182040"/>
-            <a:ext cx="3286800" cy="2738160"/>
+            <a:ext cx="3286440" cy="2737800"/>
           </a:xfrm>
           <a:prstGeom prst="roundRect">
             <a:avLst>
@@ -4349,7 +4350,7 @@
         <p:spPr>
           <a:xfrm>
             <a:off x="914400" y="3108960"/>
-            <a:ext cx="3286800" cy="2738160"/>
+            <a:ext cx="3286440" cy="2737800"/>
           </a:xfrm>
           <a:prstGeom prst="roundRect">
             <a:avLst>
@@ -4483,7 +4484,7 @@
         <p:spPr>
           <a:xfrm>
             <a:off x="4507920" y="3182040"/>
-            <a:ext cx="3286800" cy="2738160"/>
+            <a:ext cx="3286440" cy="2737800"/>
           </a:xfrm>
           <a:prstGeom prst="roundRect">
             <a:avLst>
@@ -4545,7 +4546,7 @@
         <p:spPr>
           <a:xfrm>
             <a:off x="4434840" y="3108960"/>
-            <a:ext cx="3286800" cy="2738160"/>
+            <a:ext cx="3286440" cy="2737800"/>
           </a:xfrm>
           <a:prstGeom prst="roundRect">
             <a:avLst>
@@ -4803,7 +4804,7 @@
         <p:spPr>
           <a:xfrm>
             <a:off x="8028360" y="3182040"/>
-            <a:ext cx="3286800" cy="2738160"/>
+            <a:ext cx="3286440" cy="2737800"/>
           </a:xfrm>
           <a:prstGeom prst="roundRect">
             <a:avLst>
@@ -4865,7 +4866,7 @@
         <p:spPr>
           <a:xfrm>
             <a:off x="7955280" y="2971800"/>
-            <a:ext cx="3927960" cy="3653640"/>
+            <a:ext cx="3927600" cy="3653280"/>
           </a:xfrm>
           <a:prstGeom prst="roundRect">
             <a:avLst>
@@ -5376,7 +5377,7 @@
         <p:spPr>
           <a:xfrm>
             <a:off x="0" y="0"/>
-            <a:ext cx="12184200" cy="6853320"/>
+            <a:ext cx="12183840" cy="6852960"/>
           </a:xfrm>
           <a:prstGeom prst="rect">
             <a:avLst/>
@@ -5436,7 +5437,7 @@
         <p:spPr>
           <a:xfrm>
             <a:off x="0" y="0"/>
-            <a:ext cx="13680" cy="6853320"/>
+            <a:ext cx="13320" cy="6852960"/>
           </a:xfrm>
           <a:prstGeom prst="rect">
             <a:avLst/>
@@ -5496,7 +5497,7 @@
         <p:spPr>
           <a:xfrm>
             <a:off x="914400" y="0"/>
-            <a:ext cx="13680" cy="6853320"/>
+            <a:ext cx="13320" cy="6852960"/>
           </a:xfrm>
           <a:prstGeom prst="rect">
             <a:avLst/>
@@ -5556,7 +5557,7 @@
         <p:spPr>
           <a:xfrm>
             <a:off x="1828800" y="0"/>
-            <a:ext cx="13680" cy="6853320"/>
+            <a:ext cx="13320" cy="6852960"/>
           </a:xfrm>
           <a:prstGeom prst="rect">
             <a:avLst/>
@@ -5616,7 +5617,7 @@
         <p:spPr>
           <a:xfrm>
             <a:off x="2743200" y="0"/>
-            <a:ext cx="13680" cy="6853320"/>
+            <a:ext cx="13320" cy="6852960"/>
           </a:xfrm>
           <a:prstGeom prst="rect">
             <a:avLst/>
@@ -5676,7 +5677,7 @@
         <p:spPr>
           <a:xfrm>
             <a:off x="3657600" y="0"/>
-            <a:ext cx="13680" cy="6853320"/>
+            <a:ext cx="13320" cy="6852960"/>
           </a:xfrm>
           <a:prstGeom prst="rect">
             <a:avLst/>
@@ -5736,7 +5737,7 @@
         <p:spPr>
           <a:xfrm>
             <a:off x="4572000" y="0"/>
-            <a:ext cx="13680" cy="6853320"/>
+            <a:ext cx="13320" cy="6852960"/>
           </a:xfrm>
           <a:prstGeom prst="rect">
             <a:avLst/>
@@ -5796,7 +5797,7 @@
         <p:spPr>
           <a:xfrm>
             <a:off x="5486400" y="0"/>
-            <a:ext cx="13680" cy="6853320"/>
+            <a:ext cx="13320" cy="6852960"/>
           </a:xfrm>
           <a:prstGeom prst="rect">
             <a:avLst/>
@@ -5856,7 +5857,7 @@
         <p:spPr>
           <a:xfrm>
             <a:off x="6400800" y="0"/>
-            <a:ext cx="13680" cy="6853320"/>
+            <a:ext cx="13320" cy="6852960"/>
           </a:xfrm>
           <a:prstGeom prst="rect">
             <a:avLst/>
@@ -5916,7 +5917,7 @@
         <p:spPr>
           <a:xfrm>
             <a:off x="7315200" y="0"/>
-            <a:ext cx="13680" cy="6853320"/>
+            <a:ext cx="13320" cy="6852960"/>
           </a:xfrm>
           <a:prstGeom prst="rect">
             <a:avLst/>
@@ -5976,7 +5977,7 @@
         <p:spPr>
           <a:xfrm>
             <a:off x="8229600" y="0"/>
-            <a:ext cx="13680" cy="6853320"/>
+            <a:ext cx="13320" cy="6852960"/>
           </a:xfrm>
           <a:prstGeom prst="rect">
             <a:avLst/>
@@ -6036,7 +6037,7 @@
         <p:spPr>
           <a:xfrm>
             <a:off x="9144000" y="0"/>
-            <a:ext cx="13680" cy="6853320"/>
+            <a:ext cx="13320" cy="6852960"/>
           </a:xfrm>
           <a:prstGeom prst="rect">
             <a:avLst/>
@@ -6096,7 +6097,7 @@
         <p:spPr>
           <a:xfrm>
             <a:off x="10058400" y="0"/>
-            <a:ext cx="13680" cy="6853320"/>
+            <a:ext cx="13320" cy="6852960"/>
           </a:xfrm>
           <a:prstGeom prst="rect">
             <a:avLst/>
@@ -6156,7 +6157,7 @@
         <p:spPr>
           <a:xfrm>
             <a:off x="10972800" y="0"/>
-            <a:ext cx="13680" cy="6853320"/>
+            <a:ext cx="13320" cy="6852960"/>
           </a:xfrm>
           <a:prstGeom prst="rect">
             <a:avLst/>
@@ -6216,7 +6217,7 @@
         <p:spPr>
           <a:xfrm>
             <a:off x="11887200" y="0"/>
-            <a:ext cx="13680" cy="6853320"/>
+            <a:ext cx="13320" cy="6852960"/>
           </a:xfrm>
           <a:prstGeom prst="rect">
             <a:avLst/>
@@ -6276,7 +6277,7 @@
         <p:spPr>
           <a:xfrm>
             <a:off x="0" y="0"/>
-            <a:ext cx="315360" cy="6853320"/>
+            <a:ext cx="315000" cy="6852960"/>
           </a:xfrm>
           <a:prstGeom prst="rect">
             <a:avLst/>
@@ -6336,7 +6337,7 @@
         <p:spPr>
           <a:xfrm>
             <a:off x="9875520" y="365760"/>
-            <a:ext cx="2007000" cy="498240"/>
+            <a:ext cx="2006640" cy="497880"/>
           </a:xfrm>
           <a:prstGeom prst="roundRect">
             <a:avLst>
@@ -6477,7 +6478,7 @@
         <p:spPr>
           <a:xfrm>
             <a:off x="1267200" y="1694880"/>
-            <a:ext cx="9035280" cy="819720"/>
+            <a:ext cx="9034920" cy="819720"/>
           </a:xfrm>
           <a:prstGeom prst="rect">
             <a:avLst/>
@@ -6577,7 +6578,7 @@
         <p:spPr>
           <a:xfrm>
             <a:off x="987480" y="3182040"/>
-            <a:ext cx="3287160" cy="2738520"/>
+            <a:ext cx="3286800" cy="2738160"/>
           </a:xfrm>
           <a:prstGeom prst="roundRect">
             <a:avLst>
@@ -6639,7 +6640,7 @@
         <p:spPr>
           <a:xfrm>
             <a:off x="685800" y="2743200"/>
-            <a:ext cx="3515760" cy="3656160"/>
+            <a:ext cx="3515400" cy="3655800"/>
           </a:xfrm>
           <a:prstGeom prst="roundRect">
             <a:avLst>
@@ -6881,7 +6882,7 @@
         <p:spPr>
           <a:xfrm>
             <a:off x="4507920" y="3182040"/>
-            <a:ext cx="3287160" cy="2738520"/>
+            <a:ext cx="3286800" cy="2738160"/>
           </a:xfrm>
           <a:prstGeom prst="roundRect">
             <a:avLst>
@@ -6943,7 +6944,7 @@
         <p:spPr>
           <a:xfrm>
             <a:off x="4434840" y="2971800"/>
-            <a:ext cx="3287160" cy="3427560"/>
+            <a:ext cx="3286800" cy="3427200"/>
           </a:xfrm>
           <a:prstGeom prst="roundRect">
             <a:avLst>
@@ -7297,7 +7298,7 @@
         <p:spPr>
           <a:xfrm>
             <a:off x="8028360" y="3182040"/>
-            <a:ext cx="3287160" cy="2738520"/>
+            <a:ext cx="3286800" cy="2738160"/>
           </a:xfrm>
           <a:prstGeom prst="roundRect">
             <a:avLst>
@@ -7359,7 +7360,7 @@
         <p:spPr>
           <a:xfrm>
             <a:off x="8003880" y="2743200"/>
-            <a:ext cx="3425400" cy="3654720"/>
+            <a:ext cx="3425040" cy="3654360"/>
           </a:xfrm>
           <a:prstGeom prst="roundRect">
             <a:avLst>
@@ -8035,7 +8036,7 @@
         <p:spPr>
           <a:xfrm>
             <a:off x="0" y="0"/>
-            <a:ext cx="12184200" cy="6853320"/>
+            <a:ext cx="12183840" cy="6852960"/>
           </a:xfrm>
           <a:prstGeom prst="rect">
             <a:avLst/>
@@ -8071,6 +8072,11 @@
             <a:noAutofit/>
           </a:bodyPr>
           <a:p>
+            <a:pPr>
+              <a:lnSpc>
+                <a:spcPct val="100000"/>
+              </a:lnSpc>
+            </a:pPr>
             <a:endParaRPr b="0" lang="en-US" sz="1800" spc="-1" strike="noStrike">
               <a:solidFill>
                 <a:schemeClr val="lt1"/>
@@ -8090,7 +8096,7 @@
         <p:spPr>
           <a:xfrm>
             <a:off x="0" y="0"/>
-            <a:ext cx="13680" cy="6853320"/>
+            <a:ext cx="13320" cy="6852960"/>
           </a:xfrm>
           <a:prstGeom prst="rect">
             <a:avLst/>
@@ -8126,6 +8132,11 @@
             <a:noAutofit/>
           </a:bodyPr>
           <a:p>
+            <a:pPr>
+              <a:lnSpc>
+                <a:spcPct val="100000"/>
+              </a:lnSpc>
+            </a:pPr>
             <a:endParaRPr b="0" lang="en-US" sz="1800" spc="-1" strike="noStrike">
               <a:solidFill>
                 <a:schemeClr val="lt1"/>
@@ -8145,7 +8156,7 @@
         <p:spPr>
           <a:xfrm>
             <a:off x="914400" y="0"/>
-            <a:ext cx="13680" cy="6853320"/>
+            <a:ext cx="13320" cy="6852960"/>
           </a:xfrm>
           <a:prstGeom prst="rect">
             <a:avLst/>
@@ -8181,6 +8192,11 @@
             <a:noAutofit/>
           </a:bodyPr>
           <a:p>
+            <a:pPr>
+              <a:lnSpc>
+                <a:spcPct val="100000"/>
+              </a:lnSpc>
+            </a:pPr>
             <a:endParaRPr b="0" lang="en-US" sz="1800" spc="-1" strike="noStrike">
               <a:solidFill>
                 <a:schemeClr val="lt1"/>
@@ -8200,7 +8216,7 @@
         <p:spPr>
           <a:xfrm>
             <a:off x="1828800" y="0"/>
-            <a:ext cx="13680" cy="6853320"/>
+            <a:ext cx="13320" cy="6852960"/>
           </a:xfrm>
           <a:prstGeom prst="rect">
             <a:avLst/>
@@ -8236,6 +8252,11 @@
             <a:noAutofit/>
           </a:bodyPr>
           <a:p>
+            <a:pPr>
+              <a:lnSpc>
+                <a:spcPct val="100000"/>
+              </a:lnSpc>
+            </a:pPr>
             <a:endParaRPr b="0" lang="en-US" sz="1800" spc="-1" strike="noStrike">
               <a:solidFill>
                 <a:schemeClr val="lt1"/>
@@ -8255,7 +8276,7 @@
         <p:spPr>
           <a:xfrm>
             <a:off x="2743200" y="0"/>
-            <a:ext cx="13680" cy="6853320"/>
+            <a:ext cx="13320" cy="6852960"/>
           </a:xfrm>
           <a:prstGeom prst="rect">
             <a:avLst/>
@@ -8291,6 +8312,11 @@
             <a:noAutofit/>
           </a:bodyPr>
           <a:p>
+            <a:pPr>
+              <a:lnSpc>
+                <a:spcPct val="100000"/>
+              </a:lnSpc>
+            </a:pPr>
             <a:endParaRPr b="0" lang="en-US" sz="1800" spc="-1" strike="noStrike">
               <a:solidFill>
                 <a:schemeClr val="lt1"/>
@@ -8310,7 +8336,7 @@
         <p:spPr>
           <a:xfrm>
             <a:off x="3657600" y="0"/>
-            <a:ext cx="13680" cy="6853320"/>
+            <a:ext cx="13320" cy="6852960"/>
           </a:xfrm>
           <a:prstGeom prst="rect">
             <a:avLst/>
@@ -8346,6 +8372,11 @@
             <a:noAutofit/>
           </a:bodyPr>
           <a:p>
+            <a:pPr>
+              <a:lnSpc>
+                <a:spcPct val="100000"/>
+              </a:lnSpc>
+            </a:pPr>
             <a:endParaRPr b="0" lang="en-US" sz="1800" spc="-1" strike="noStrike">
               <a:solidFill>
                 <a:schemeClr val="lt1"/>
@@ -8365,7 +8396,7 @@
         <p:spPr>
           <a:xfrm>
             <a:off x="4572000" y="0"/>
-            <a:ext cx="13680" cy="6853320"/>
+            <a:ext cx="13320" cy="6852960"/>
           </a:xfrm>
           <a:prstGeom prst="rect">
             <a:avLst/>
@@ -8401,6 +8432,11 @@
             <a:noAutofit/>
           </a:bodyPr>
           <a:p>
+            <a:pPr>
+              <a:lnSpc>
+                <a:spcPct val="100000"/>
+              </a:lnSpc>
+            </a:pPr>
             <a:endParaRPr b="0" lang="en-US" sz="1800" spc="-1" strike="noStrike">
               <a:solidFill>
                 <a:schemeClr val="lt1"/>
@@ -8420,7 +8456,7 @@
         <p:spPr>
           <a:xfrm>
             <a:off x="5486400" y="0"/>
-            <a:ext cx="13680" cy="6853320"/>
+            <a:ext cx="13320" cy="6852960"/>
           </a:xfrm>
           <a:prstGeom prst="rect">
             <a:avLst/>
@@ -8456,6 +8492,11 @@
             <a:noAutofit/>
           </a:bodyPr>
           <a:p>
+            <a:pPr>
+              <a:lnSpc>
+                <a:spcPct val="100000"/>
+              </a:lnSpc>
+            </a:pPr>
             <a:endParaRPr b="0" lang="en-US" sz="1800" spc="-1" strike="noStrike">
               <a:solidFill>
                 <a:schemeClr val="lt1"/>
@@ -8475,7 +8516,7 @@
         <p:spPr>
           <a:xfrm>
             <a:off x="6400800" y="0"/>
-            <a:ext cx="13680" cy="6853320"/>
+            <a:ext cx="13320" cy="6852960"/>
           </a:xfrm>
           <a:prstGeom prst="rect">
             <a:avLst/>
@@ -8511,6 +8552,11 @@
             <a:noAutofit/>
           </a:bodyPr>
           <a:p>
+            <a:pPr>
+              <a:lnSpc>
+                <a:spcPct val="100000"/>
+              </a:lnSpc>
+            </a:pPr>
             <a:endParaRPr b="0" lang="en-US" sz="1800" spc="-1" strike="noStrike">
               <a:solidFill>
                 <a:schemeClr val="lt1"/>
@@ -8530,7 +8576,7 @@
         <p:spPr>
           <a:xfrm>
             <a:off x="7315200" y="0"/>
-            <a:ext cx="13680" cy="6853320"/>
+            <a:ext cx="13320" cy="6852960"/>
           </a:xfrm>
           <a:prstGeom prst="rect">
             <a:avLst/>
@@ -8566,6 +8612,11 @@
             <a:noAutofit/>
           </a:bodyPr>
           <a:p>
+            <a:pPr>
+              <a:lnSpc>
+                <a:spcPct val="100000"/>
+              </a:lnSpc>
+            </a:pPr>
             <a:endParaRPr b="0" lang="en-US" sz="1800" spc="-1" strike="noStrike">
               <a:solidFill>
                 <a:schemeClr val="lt1"/>
@@ -8585,7 +8636,7 @@
         <p:spPr>
           <a:xfrm>
             <a:off x="8229600" y="0"/>
-            <a:ext cx="13680" cy="6853320"/>
+            <a:ext cx="13320" cy="6852960"/>
           </a:xfrm>
           <a:prstGeom prst="rect">
             <a:avLst/>
@@ -8621,6 +8672,11 @@
             <a:noAutofit/>
           </a:bodyPr>
           <a:p>
+            <a:pPr>
+              <a:lnSpc>
+                <a:spcPct val="100000"/>
+              </a:lnSpc>
+            </a:pPr>
             <a:endParaRPr b="0" lang="en-US" sz="1800" spc="-1" strike="noStrike">
               <a:solidFill>
                 <a:schemeClr val="lt1"/>
@@ -8640,7 +8696,7 @@
         <p:spPr>
           <a:xfrm>
             <a:off x="9144000" y="0"/>
-            <a:ext cx="13680" cy="6853320"/>
+            <a:ext cx="13320" cy="6852960"/>
           </a:xfrm>
           <a:prstGeom prst="rect">
             <a:avLst/>
@@ -8676,6 +8732,11 @@
             <a:noAutofit/>
           </a:bodyPr>
           <a:p>
+            <a:pPr>
+              <a:lnSpc>
+                <a:spcPct val="100000"/>
+              </a:lnSpc>
+            </a:pPr>
             <a:endParaRPr b="0" lang="en-US" sz="1800" spc="-1" strike="noStrike">
               <a:solidFill>
                 <a:schemeClr val="lt1"/>
@@ -8695,7 +8756,7 @@
         <p:spPr>
           <a:xfrm>
             <a:off x="10058400" y="0"/>
-            <a:ext cx="13680" cy="6853320"/>
+            <a:ext cx="13320" cy="6852960"/>
           </a:xfrm>
           <a:prstGeom prst="rect">
             <a:avLst/>
@@ -8731,6 +8792,11 @@
             <a:noAutofit/>
           </a:bodyPr>
           <a:p>
+            <a:pPr>
+              <a:lnSpc>
+                <a:spcPct val="100000"/>
+              </a:lnSpc>
+            </a:pPr>
             <a:endParaRPr b="0" lang="en-US" sz="1800" spc="-1" strike="noStrike">
               <a:solidFill>
                 <a:schemeClr val="lt1"/>
@@ -8750,7 +8816,7 @@
         <p:spPr>
           <a:xfrm>
             <a:off x="10972800" y="0"/>
-            <a:ext cx="13680" cy="6853320"/>
+            <a:ext cx="13320" cy="6852960"/>
           </a:xfrm>
           <a:prstGeom prst="rect">
             <a:avLst/>
@@ -8786,6 +8852,11 @@
             <a:noAutofit/>
           </a:bodyPr>
           <a:p>
+            <a:pPr>
+              <a:lnSpc>
+                <a:spcPct val="100000"/>
+              </a:lnSpc>
+            </a:pPr>
             <a:endParaRPr b="0" lang="en-US" sz="1800" spc="-1" strike="noStrike">
               <a:solidFill>
                 <a:schemeClr val="lt1"/>
@@ -8805,7 +8876,7 @@
         <p:spPr>
           <a:xfrm>
             <a:off x="11887200" y="0"/>
-            <a:ext cx="13680" cy="6853320"/>
+            <a:ext cx="13320" cy="6852960"/>
           </a:xfrm>
           <a:prstGeom prst="rect">
             <a:avLst/>
@@ -8841,6 +8912,11 @@
             <a:noAutofit/>
           </a:bodyPr>
           <a:p>
+            <a:pPr>
+              <a:lnSpc>
+                <a:spcPct val="100000"/>
+              </a:lnSpc>
+            </a:pPr>
             <a:endParaRPr b="0" lang="en-US" sz="1800" spc="-1" strike="noStrike">
               <a:solidFill>
                 <a:schemeClr val="lt1"/>
@@ -8860,7 +8936,7 @@
         <p:spPr>
           <a:xfrm>
             <a:off x="0" y="0"/>
-            <a:ext cx="315360" cy="6853320"/>
+            <a:ext cx="315000" cy="6852960"/>
           </a:xfrm>
           <a:prstGeom prst="rect">
             <a:avLst/>
@@ -8896,6 +8972,11 @@
             <a:noAutofit/>
           </a:bodyPr>
           <a:p>
+            <a:pPr>
+              <a:lnSpc>
+                <a:spcPct val="100000"/>
+              </a:lnSpc>
+            </a:pPr>
             <a:endParaRPr b="0" lang="en-US" sz="1800" spc="-1" strike="noStrike">
               <a:solidFill>
                 <a:schemeClr val="lt1"/>
@@ -8915,7 +8996,7 @@
         <p:spPr>
           <a:xfrm>
             <a:off x="9875520" y="365760"/>
-            <a:ext cx="2007000" cy="498240"/>
+            <a:ext cx="2006640" cy="497880"/>
           </a:xfrm>
           <a:prstGeom prst="roundRect">
             <a:avLst>
@@ -8989,7 +9070,7 @@
         <p:spPr>
           <a:xfrm>
             <a:off x="1221120" y="914400"/>
-            <a:ext cx="8526600" cy="516960"/>
+            <a:ext cx="8526240" cy="516240"/>
           </a:xfrm>
           <a:prstGeom prst="rect">
             <a:avLst/>
@@ -9043,7 +9124,7 @@
         <p:spPr>
           <a:xfrm>
             <a:off x="1353600" y="1694880"/>
-            <a:ext cx="8861760" cy="819720"/>
+            <a:ext cx="8861400" cy="819720"/>
           </a:xfrm>
           <a:prstGeom prst="rect">
             <a:avLst/>
@@ -9143,7 +9224,7 @@
         <p:spPr>
           <a:xfrm>
             <a:off x="987480" y="3182040"/>
-            <a:ext cx="3287160" cy="2738520"/>
+            <a:ext cx="3286800" cy="2738160"/>
           </a:xfrm>
           <a:prstGeom prst="roundRect">
             <a:avLst>
@@ -9181,6 +9262,11 @@
             <a:noAutofit/>
           </a:bodyPr>
           <a:p>
+            <a:pPr>
+              <a:lnSpc>
+                <a:spcPct val="100000"/>
+              </a:lnSpc>
+            </a:pPr>
             <a:endParaRPr b="0" lang="en-US" sz="1800" spc="-1" strike="noStrike">
               <a:solidFill>
                 <a:schemeClr val="lt1"/>
@@ -9200,7 +9286,7 @@
         <p:spPr>
           <a:xfrm>
             <a:off x="685800" y="2743200"/>
-            <a:ext cx="3515760" cy="3656160"/>
+            <a:ext cx="3515400" cy="3655800"/>
           </a:xfrm>
           <a:prstGeom prst="roundRect">
             <a:avLst>
@@ -9348,6 +9434,42 @@
             </a:endParaRPr>
           </a:p>
           <a:p>
+            <a:pPr>
+              <a:lnSpc>
+                <a:spcPct val="100000"/>
+              </a:lnSpc>
+            </a:pPr>
+            <a:endParaRPr b="0" lang="en-US" sz="1400" spc="-1" strike="noStrike">
+              <a:solidFill>
+                <a:srgbClr val="ffffff"/>
+              </a:solidFill>
+              <a:latin typeface="Arial"/>
+            </a:endParaRPr>
+          </a:p>
+          <a:p>
+            <a:pPr>
+              <a:lnSpc>
+                <a:spcPct val="100000"/>
+              </a:lnSpc>
+            </a:pPr>
+            <a:r>
+              <a:rPr b="1" lang="en-US" sz="1400" spc="-1" strike="noStrike">
+                <a:solidFill>
+                  <a:schemeClr val="lt1"/>
+                </a:solidFill>
+                <a:latin typeface="Calibri"/>
+                <a:ea typeface="DejaVu Sans"/>
+              </a:rPr>
+              <a:t>2. + Operatörünün İki Yüzü:</a:t>
+            </a:r>
+            <a:endParaRPr b="0" lang="en-US" sz="1400" spc="-1" strike="noStrike">
+              <a:solidFill>
+                <a:srgbClr val="ffffff"/>
+              </a:solidFill>
+              <a:latin typeface="Arial"/>
+            </a:endParaRPr>
+          </a:p>
+          <a:p>
             <a:pPr marL="216000" indent="-216000">
               <a:lnSpc>
                 <a:spcPct val="100000"/>
@@ -9358,28 +9480,15 @@
               <a:buFont typeface="Wingdings" charset="2"/>
               <a:buChar char=""/>
             </a:pPr>
-            <a:endParaRPr b="0" lang="en-US" sz="1400" spc="-1" strike="noStrike">
-              <a:solidFill>
-                <a:srgbClr val="ffffff"/>
-              </a:solidFill>
-              <a:latin typeface="Arial"/>
-            </a:endParaRPr>
-          </a:p>
-          <a:p>
-            <a:pPr>
-              <a:lnSpc>
-                <a:spcPct val="100000"/>
-              </a:lnSpc>
-            </a:pPr>
-            <a:r>
-              <a:rPr b="1" lang="en-US" sz="1400" spc="-1" strike="noStrike">
+            <a:r>
+              <a:rPr b="0" lang="en-US" sz="1400" spc="-1" strike="noStrike">
                 <a:solidFill>
                   <a:schemeClr val="lt1"/>
                 </a:solidFill>
                 <a:latin typeface="Calibri"/>
                 <a:ea typeface="DejaVu Sans"/>
               </a:rPr>
-              <a:t>2. + Operatörünün İki Yüzü:</a:t>
+              <a:t>Sayı + Sayı = Matematik (Toplama).</a:t>
             </a:r>
             <a:endParaRPr b="0" lang="en-US" sz="1400" spc="-1" strike="noStrike">
               <a:solidFill>
@@ -9407,7 +9516,7 @@
                 <a:latin typeface="Calibri"/>
                 <a:ea typeface="DejaVu Sans"/>
               </a:rPr>
-              <a:t>Sayı + Sayı = Matematik (Toplama).</a:t>
+              <a:t>String + Herhangi Bir Şey = Metin (Birleştirme - Concatenation).</a:t>
             </a:r>
             <a:endParaRPr b="0" lang="en-US" sz="1400" spc="-1" strike="noStrike">
               <a:solidFill>
@@ -9435,34 +9544,6 @@
                 <a:latin typeface="Calibri"/>
                 <a:ea typeface="DejaVu Sans"/>
               </a:rPr>
-              <a:t>String + Herhangi Bir Şey = Metin (Birleştirme - Concatenation).</a:t>
-            </a:r>
-            <a:endParaRPr b="0" lang="en-US" sz="1400" spc="-1" strike="noStrike">
-              <a:solidFill>
-                <a:srgbClr val="ffffff"/>
-              </a:solidFill>
-              <a:latin typeface="Arial"/>
-            </a:endParaRPr>
-          </a:p>
-          <a:p>
-            <a:pPr marL="216000" indent="-216000">
-              <a:lnSpc>
-                <a:spcPct val="100000"/>
-              </a:lnSpc>
-              <a:buClr>
-                <a:srgbClr val="ffffff"/>
-              </a:buClr>
-              <a:buFont typeface="Wingdings" charset="2"/>
-              <a:buChar char=""/>
-            </a:pPr>
-            <a:r>
-              <a:rPr b="0" lang="en-US" sz="1400" spc="-1" strike="noStrike">
-                <a:solidFill>
-                  <a:schemeClr val="lt1"/>
-                </a:solidFill>
-                <a:latin typeface="Calibri"/>
-                <a:ea typeface="DejaVu Sans"/>
-              </a:rPr>
               <a:t>İşlemler kesinlikle Soldan Sağa akar. Eğer işlem bir String ile başlarsa, sağındaki her şey metne dönüşür!</a:t>
             </a:r>
             <a:endParaRPr b="0" lang="en-US" sz="1400" spc="-1" strike="noStrike">
@@ -9483,7 +9564,7 @@
         <p:spPr>
           <a:xfrm>
             <a:off x="4507920" y="3182040"/>
-            <a:ext cx="3287160" cy="2738520"/>
+            <a:ext cx="3286800" cy="2738160"/>
           </a:xfrm>
           <a:prstGeom prst="roundRect">
             <a:avLst>
@@ -9521,6 +9602,11 @@
             <a:noAutofit/>
           </a:bodyPr>
           <a:p>
+            <a:pPr>
+              <a:lnSpc>
+                <a:spcPct val="100000"/>
+              </a:lnSpc>
+            </a:pPr>
             <a:endParaRPr b="0" lang="en-US" sz="1800" spc="-1" strike="noStrike">
               <a:solidFill>
                 <a:schemeClr val="lt1"/>
@@ -9540,7 +9626,7 @@
         <p:spPr>
           <a:xfrm>
             <a:off x="4434840" y="2971800"/>
-            <a:ext cx="3287160" cy="3427560"/>
+            <a:ext cx="3286800" cy="3427200"/>
           </a:xfrm>
           <a:prstGeom prst="roundRect">
             <a:avLst>
@@ -9871,7 +9957,7 @@
         <p:spPr>
           <a:xfrm>
             <a:off x="8028360" y="3182040"/>
-            <a:ext cx="3287160" cy="2738520"/>
+            <a:ext cx="3286800" cy="2738160"/>
           </a:xfrm>
           <a:prstGeom prst="roundRect">
             <a:avLst>
@@ -9909,6 +9995,11 @@
             <a:noAutofit/>
           </a:bodyPr>
           <a:p>
+            <a:pPr>
+              <a:lnSpc>
+                <a:spcPct val="100000"/>
+              </a:lnSpc>
+            </a:pPr>
             <a:endParaRPr b="0" lang="en-US" sz="1800" spc="-1" strike="noStrike">
               <a:solidFill>
                 <a:schemeClr val="lt1"/>
@@ -9928,7 +10019,7 @@
         <p:spPr>
           <a:xfrm>
             <a:off x="8001000" y="2971800"/>
-            <a:ext cx="3314520" cy="3429000"/>
+            <a:ext cx="3314160" cy="3428640"/>
           </a:xfrm>
           <a:prstGeom prst="roundRect">
             <a:avLst>
@@ -10580,6 +10671,2738 @@
       <p:sp>
         <p:nvSpPr>
           <p:cNvPr id="326" name="TextBox 36"/>
+          <p:cNvSpPr/>
+          <p:nvPr/>
+        </p:nvSpPr>
+        <p:spPr>
+          <a:xfrm>
+            <a:off x="4600080" y="6446520"/>
+            <a:ext cx="3051000" cy="363960"/>
+          </a:xfrm>
+          <a:prstGeom prst="rect">
+            <a:avLst/>
+          </a:prstGeom>
+          <a:noFill/>
+          <a:ln w="0">
+            <a:noFill/>
+          </a:ln>
+        </p:spPr>
+        <p:style>
+          <a:lnRef idx="0"/>
+          <a:fillRef idx="0"/>
+          <a:effectRef idx="0"/>
+          <a:fontRef idx="minor"/>
+        </p:style>
+        <p:txBody>
+          <a:bodyPr wrap="none" lIns="90000" rIns="90000" tIns="45000" bIns="45000" anchor="t">
+            <a:spAutoFit/>
+          </a:bodyPr>
+          <a:p>
+            <a:pPr>
+              <a:lnSpc>
+                <a:spcPct val="100000"/>
+              </a:lnSpc>
+            </a:pPr>
+            <a:r>
+              <a:rPr b="0" lang="en-US" sz="1800" spc="-1" strike="noStrike">
+                <a:solidFill>
+                  <a:srgbClr val="000000"/>
+                </a:solidFill>
+                <a:latin typeface="Calibri"/>
+                <a:ea typeface="DejaVu Sans"/>
+              </a:rPr>
+              <a:t>Java • Ultra Premium Template</a:t>
+            </a:r>
+            <a:endParaRPr b="0" lang="en-US" sz="1800" spc="-1" strike="noStrike">
+              <a:solidFill>
+                <a:srgbClr val="000000"/>
+              </a:solidFill>
+              <a:latin typeface="Arial"/>
+            </a:endParaRPr>
+          </a:p>
+        </p:txBody>
+      </p:sp>
+    </p:spTree>
+  </p:cSld>
+  <mc:AlternateContent>
+    <mc:Choice Requires="p14">
+      <p:transition spd="slow" p14:dur="2000"/>
+    </mc:Choice>
+    <mc:Fallback>
+      <p:transition spd="slow"/>
+    </mc:Fallback>
+  </mc:AlternateContent>
+</p:sld>
+</file>
+
+<file path=ppt/slides/slide12.xml><?xml version="1.0" encoding="utf-8"?>
+<p:sld xmlns:a="http://schemas.openxmlformats.org/drawingml/2006/main" xmlns:p="http://schemas.openxmlformats.org/presentationml/2006/main" xmlns:r="http://schemas.openxmlformats.org/officeDocument/2006/relationships" xmlns:p14="http://schemas.microsoft.com/office/powerpoint/2010/main" xmlns:p15="http://schemas.microsoft.com/office/powerpoint/2012/main" xmlns:mc="http://schemas.openxmlformats.org/markup-compatibility/2006">
+  <p:cSld>
+    <p:spTree>
+      <p:nvGrpSpPr>
+        <p:cNvPr id="1" name=""/>
+        <p:cNvGrpSpPr/>
+        <p:nvPr/>
+      </p:nvGrpSpPr>
+      <p:grpSpPr>
+        <a:xfrm>
+          <a:off x="0" y="0"/>
+          <a:ext cx="0" cy="0"/>
+          <a:chOff x="0" y="0"/>
+          <a:chExt cx="0" cy="0"/>
+        </a:xfrm>
+      </p:grpSpPr>
+      <p:sp>
+        <p:nvSpPr>
+          <p:cNvPr id="327" name="Rectangle 177"/>
+          <p:cNvSpPr/>
+          <p:nvPr/>
+        </p:nvSpPr>
+        <p:spPr>
+          <a:xfrm>
+            <a:off x="0" y="0"/>
+            <a:ext cx="12183840" cy="6852960"/>
+          </a:xfrm>
+          <a:prstGeom prst="rect">
+            <a:avLst/>
+          </a:prstGeom>
+          <a:solidFill>
+            <a:srgbClr val="0b0b0d"/>
+          </a:solidFill>
+          <a:ln>
+            <a:noFill/>
+          </a:ln>
+          <a:effectLst>
+            <a:outerShdw blurRad="39960" dir="5400000" dist="23040" rotWithShape="0">
+              <a:srgbClr val="000000">
+                <a:alpha val="35000"/>
+              </a:srgbClr>
+            </a:outerShdw>
+          </a:effectLst>
+        </p:spPr>
+        <p:style>
+          <a:lnRef idx="1">
+            <a:schemeClr val="accent1"/>
+          </a:lnRef>
+          <a:fillRef idx="3">
+            <a:schemeClr val="accent1"/>
+          </a:fillRef>
+          <a:effectRef idx="2">
+            <a:schemeClr val="accent1"/>
+          </a:effectRef>
+          <a:fontRef idx="minor"/>
+        </p:style>
+        <p:txBody>
+          <a:bodyPr lIns="90000" rIns="90000" tIns="45000" bIns="45000" anchor="ctr">
+            <a:noAutofit/>
+          </a:bodyPr>
+          <a:p>
+            <a:endParaRPr b="0" lang="en-US" sz="1800" spc="-1" strike="noStrike">
+              <a:solidFill>
+                <a:schemeClr val="lt1"/>
+              </a:solidFill>
+              <a:latin typeface="Calibri"/>
+              <a:ea typeface="DejaVu Sans"/>
+            </a:endParaRPr>
+          </a:p>
+        </p:txBody>
+      </p:sp>
+      <p:sp>
+        <p:nvSpPr>
+          <p:cNvPr id="328" name="Rectangle 178"/>
+          <p:cNvSpPr/>
+          <p:nvPr/>
+        </p:nvSpPr>
+        <p:spPr>
+          <a:xfrm>
+            <a:off x="0" y="0"/>
+            <a:ext cx="13320" cy="6852960"/>
+          </a:xfrm>
+          <a:prstGeom prst="rect">
+            <a:avLst/>
+          </a:prstGeom>
+          <a:solidFill>
+            <a:srgbClr val="121216"/>
+          </a:solidFill>
+          <a:ln>
+            <a:noFill/>
+          </a:ln>
+          <a:effectLst>
+            <a:outerShdw blurRad="39960" dir="5400000" dist="23040" rotWithShape="0">
+              <a:srgbClr val="000000">
+                <a:alpha val="35000"/>
+              </a:srgbClr>
+            </a:outerShdw>
+          </a:effectLst>
+        </p:spPr>
+        <p:style>
+          <a:lnRef idx="1">
+            <a:schemeClr val="accent1"/>
+          </a:lnRef>
+          <a:fillRef idx="3">
+            <a:schemeClr val="accent1"/>
+          </a:fillRef>
+          <a:effectRef idx="2">
+            <a:schemeClr val="accent1"/>
+          </a:effectRef>
+          <a:fontRef idx="minor"/>
+        </p:style>
+        <p:txBody>
+          <a:bodyPr lIns="90000" rIns="90000" tIns="45000" bIns="45000" anchor="ctr">
+            <a:noAutofit/>
+          </a:bodyPr>
+          <a:p>
+            <a:endParaRPr b="0" lang="en-US" sz="1800" spc="-1" strike="noStrike">
+              <a:solidFill>
+                <a:schemeClr val="lt1"/>
+              </a:solidFill>
+              <a:latin typeface="Calibri"/>
+              <a:ea typeface="DejaVu Sans"/>
+            </a:endParaRPr>
+          </a:p>
+        </p:txBody>
+      </p:sp>
+      <p:sp>
+        <p:nvSpPr>
+          <p:cNvPr id="329" name="Rectangle 179"/>
+          <p:cNvSpPr/>
+          <p:nvPr/>
+        </p:nvSpPr>
+        <p:spPr>
+          <a:xfrm>
+            <a:off x="914400" y="0"/>
+            <a:ext cx="13320" cy="6852960"/>
+          </a:xfrm>
+          <a:prstGeom prst="rect">
+            <a:avLst/>
+          </a:prstGeom>
+          <a:solidFill>
+            <a:srgbClr val="121216"/>
+          </a:solidFill>
+          <a:ln>
+            <a:noFill/>
+          </a:ln>
+          <a:effectLst>
+            <a:outerShdw blurRad="39960" dir="5400000" dist="23040" rotWithShape="0">
+              <a:srgbClr val="000000">
+                <a:alpha val="35000"/>
+              </a:srgbClr>
+            </a:outerShdw>
+          </a:effectLst>
+        </p:spPr>
+        <p:style>
+          <a:lnRef idx="1">
+            <a:schemeClr val="accent1"/>
+          </a:lnRef>
+          <a:fillRef idx="3">
+            <a:schemeClr val="accent1"/>
+          </a:fillRef>
+          <a:effectRef idx="2">
+            <a:schemeClr val="accent1"/>
+          </a:effectRef>
+          <a:fontRef idx="minor"/>
+        </p:style>
+        <p:txBody>
+          <a:bodyPr lIns="90000" rIns="90000" tIns="45000" bIns="45000" anchor="ctr">
+            <a:noAutofit/>
+          </a:bodyPr>
+          <a:p>
+            <a:endParaRPr b="0" lang="en-US" sz="1800" spc="-1" strike="noStrike">
+              <a:solidFill>
+                <a:schemeClr val="lt1"/>
+              </a:solidFill>
+              <a:latin typeface="Calibri"/>
+              <a:ea typeface="DejaVu Sans"/>
+            </a:endParaRPr>
+          </a:p>
+        </p:txBody>
+      </p:sp>
+      <p:sp>
+        <p:nvSpPr>
+          <p:cNvPr id="330" name="Rectangle 180"/>
+          <p:cNvSpPr/>
+          <p:nvPr/>
+        </p:nvSpPr>
+        <p:spPr>
+          <a:xfrm>
+            <a:off x="1828800" y="0"/>
+            <a:ext cx="13320" cy="6852960"/>
+          </a:xfrm>
+          <a:prstGeom prst="rect">
+            <a:avLst/>
+          </a:prstGeom>
+          <a:solidFill>
+            <a:srgbClr val="121216"/>
+          </a:solidFill>
+          <a:ln>
+            <a:noFill/>
+          </a:ln>
+          <a:effectLst>
+            <a:outerShdw blurRad="39960" dir="5400000" dist="23040" rotWithShape="0">
+              <a:srgbClr val="000000">
+                <a:alpha val="35000"/>
+              </a:srgbClr>
+            </a:outerShdw>
+          </a:effectLst>
+        </p:spPr>
+        <p:style>
+          <a:lnRef idx="1">
+            <a:schemeClr val="accent1"/>
+          </a:lnRef>
+          <a:fillRef idx="3">
+            <a:schemeClr val="accent1"/>
+          </a:fillRef>
+          <a:effectRef idx="2">
+            <a:schemeClr val="accent1"/>
+          </a:effectRef>
+          <a:fontRef idx="minor"/>
+        </p:style>
+        <p:txBody>
+          <a:bodyPr lIns="90000" rIns="90000" tIns="45000" bIns="45000" anchor="ctr">
+            <a:noAutofit/>
+          </a:bodyPr>
+          <a:p>
+            <a:endParaRPr b="0" lang="en-US" sz="1800" spc="-1" strike="noStrike">
+              <a:solidFill>
+                <a:schemeClr val="lt1"/>
+              </a:solidFill>
+              <a:latin typeface="Calibri"/>
+              <a:ea typeface="DejaVu Sans"/>
+            </a:endParaRPr>
+          </a:p>
+        </p:txBody>
+      </p:sp>
+      <p:sp>
+        <p:nvSpPr>
+          <p:cNvPr id="331" name="Rectangle 181"/>
+          <p:cNvSpPr/>
+          <p:nvPr/>
+        </p:nvSpPr>
+        <p:spPr>
+          <a:xfrm>
+            <a:off x="2743200" y="0"/>
+            <a:ext cx="13320" cy="6852960"/>
+          </a:xfrm>
+          <a:prstGeom prst="rect">
+            <a:avLst/>
+          </a:prstGeom>
+          <a:solidFill>
+            <a:srgbClr val="121216"/>
+          </a:solidFill>
+          <a:ln>
+            <a:noFill/>
+          </a:ln>
+          <a:effectLst>
+            <a:outerShdw blurRad="39960" dir="5400000" dist="23040" rotWithShape="0">
+              <a:srgbClr val="000000">
+                <a:alpha val="35000"/>
+              </a:srgbClr>
+            </a:outerShdw>
+          </a:effectLst>
+        </p:spPr>
+        <p:style>
+          <a:lnRef idx="1">
+            <a:schemeClr val="accent1"/>
+          </a:lnRef>
+          <a:fillRef idx="3">
+            <a:schemeClr val="accent1"/>
+          </a:fillRef>
+          <a:effectRef idx="2">
+            <a:schemeClr val="accent1"/>
+          </a:effectRef>
+          <a:fontRef idx="minor"/>
+        </p:style>
+        <p:txBody>
+          <a:bodyPr lIns="90000" rIns="90000" tIns="45000" bIns="45000" anchor="ctr">
+            <a:noAutofit/>
+          </a:bodyPr>
+          <a:p>
+            <a:endParaRPr b="0" lang="en-US" sz="1800" spc="-1" strike="noStrike">
+              <a:solidFill>
+                <a:schemeClr val="lt1"/>
+              </a:solidFill>
+              <a:latin typeface="Calibri"/>
+              <a:ea typeface="DejaVu Sans"/>
+            </a:endParaRPr>
+          </a:p>
+        </p:txBody>
+      </p:sp>
+      <p:sp>
+        <p:nvSpPr>
+          <p:cNvPr id="332" name="Rectangle 182"/>
+          <p:cNvSpPr/>
+          <p:nvPr/>
+        </p:nvSpPr>
+        <p:spPr>
+          <a:xfrm>
+            <a:off x="3657600" y="0"/>
+            <a:ext cx="13320" cy="6852960"/>
+          </a:xfrm>
+          <a:prstGeom prst="rect">
+            <a:avLst/>
+          </a:prstGeom>
+          <a:solidFill>
+            <a:srgbClr val="121216"/>
+          </a:solidFill>
+          <a:ln>
+            <a:noFill/>
+          </a:ln>
+          <a:effectLst>
+            <a:outerShdw blurRad="39960" dir="5400000" dist="23040" rotWithShape="0">
+              <a:srgbClr val="000000">
+                <a:alpha val="35000"/>
+              </a:srgbClr>
+            </a:outerShdw>
+          </a:effectLst>
+        </p:spPr>
+        <p:style>
+          <a:lnRef idx="1">
+            <a:schemeClr val="accent1"/>
+          </a:lnRef>
+          <a:fillRef idx="3">
+            <a:schemeClr val="accent1"/>
+          </a:fillRef>
+          <a:effectRef idx="2">
+            <a:schemeClr val="accent1"/>
+          </a:effectRef>
+          <a:fontRef idx="minor"/>
+        </p:style>
+        <p:txBody>
+          <a:bodyPr lIns="90000" rIns="90000" tIns="45000" bIns="45000" anchor="ctr">
+            <a:noAutofit/>
+          </a:bodyPr>
+          <a:p>
+            <a:endParaRPr b="0" lang="en-US" sz="1800" spc="-1" strike="noStrike">
+              <a:solidFill>
+                <a:schemeClr val="lt1"/>
+              </a:solidFill>
+              <a:latin typeface="Calibri"/>
+              <a:ea typeface="DejaVu Sans"/>
+            </a:endParaRPr>
+          </a:p>
+        </p:txBody>
+      </p:sp>
+      <p:sp>
+        <p:nvSpPr>
+          <p:cNvPr id="333" name="Rectangle 183"/>
+          <p:cNvSpPr/>
+          <p:nvPr/>
+        </p:nvSpPr>
+        <p:spPr>
+          <a:xfrm>
+            <a:off x="4572000" y="0"/>
+            <a:ext cx="13320" cy="6852960"/>
+          </a:xfrm>
+          <a:prstGeom prst="rect">
+            <a:avLst/>
+          </a:prstGeom>
+          <a:solidFill>
+            <a:srgbClr val="121216"/>
+          </a:solidFill>
+          <a:ln>
+            <a:noFill/>
+          </a:ln>
+          <a:effectLst>
+            <a:outerShdw blurRad="39960" dir="5400000" dist="23040" rotWithShape="0">
+              <a:srgbClr val="000000">
+                <a:alpha val="35000"/>
+              </a:srgbClr>
+            </a:outerShdw>
+          </a:effectLst>
+        </p:spPr>
+        <p:style>
+          <a:lnRef idx="1">
+            <a:schemeClr val="accent1"/>
+          </a:lnRef>
+          <a:fillRef idx="3">
+            <a:schemeClr val="accent1"/>
+          </a:fillRef>
+          <a:effectRef idx="2">
+            <a:schemeClr val="accent1"/>
+          </a:effectRef>
+          <a:fontRef idx="minor"/>
+        </p:style>
+        <p:txBody>
+          <a:bodyPr lIns="90000" rIns="90000" tIns="45000" bIns="45000" anchor="ctr">
+            <a:noAutofit/>
+          </a:bodyPr>
+          <a:p>
+            <a:endParaRPr b="0" lang="en-US" sz="1800" spc="-1" strike="noStrike">
+              <a:solidFill>
+                <a:schemeClr val="lt1"/>
+              </a:solidFill>
+              <a:latin typeface="Calibri"/>
+              <a:ea typeface="DejaVu Sans"/>
+            </a:endParaRPr>
+          </a:p>
+        </p:txBody>
+      </p:sp>
+      <p:sp>
+        <p:nvSpPr>
+          <p:cNvPr id="334" name="Rectangle 184"/>
+          <p:cNvSpPr/>
+          <p:nvPr/>
+        </p:nvSpPr>
+        <p:spPr>
+          <a:xfrm>
+            <a:off x="5486400" y="0"/>
+            <a:ext cx="13320" cy="6852960"/>
+          </a:xfrm>
+          <a:prstGeom prst="rect">
+            <a:avLst/>
+          </a:prstGeom>
+          <a:solidFill>
+            <a:srgbClr val="121216"/>
+          </a:solidFill>
+          <a:ln>
+            <a:noFill/>
+          </a:ln>
+          <a:effectLst>
+            <a:outerShdw blurRad="39960" dir="5400000" dist="23040" rotWithShape="0">
+              <a:srgbClr val="000000">
+                <a:alpha val="35000"/>
+              </a:srgbClr>
+            </a:outerShdw>
+          </a:effectLst>
+        </p:spPr>
+        <p:style>
+          <a:lnRef idx="1">
+            <a:schemeClr val="accent1"/>
+          </a:lnRef>
+          <a:fillRef idx="3">
+            <a:schemeClr val="accent1"/>
+          </a:fillRef>
+          <a:effectRef idx="2">
+            <a:schemeClr val="accent1"/>
+          </a:effectRef>
+          <a:fontRef idx="minor"/>
+        </p:style>
+        <p:txBody>
+          <a:bodyPr lIns="90000" rIns="90000" tIns="45000" bIns="45000" anchor="ctr">
+            <a:noAutofit/>
+          </a:bodyPr>
+          <a:p>
+            <a:endParaRPr b="0" lang="en-US" sz="1800" spc="-1" strike="noStrike">
+              <a:solidFill>
+                <a:schemeClr val="lt1"/>
+              </a:solidFill>
+              <a:latin typeface="Calibri"/>
+              <a:ea typeface="DejaVu Sans"/>
+            </a:endParaRPr>
+          </a:p>
+        </p:txBody>
+      </p:sp>
+      <p:sp>
+        <p:nvSpPr>
+          <p:cNvPr id="335" name="Rectangle 185"/>
+          <p:cNvSpPr/>
+          <p:nvPr/>
+        </p:nvSpPr>
+        <p:spPr>
+          <a:xfrm>
+            <a:off x="6400800" y="0"/>
+            <a:ext cx="13320" cy="6852960"/>
+          </a:xfrm>
+          <a:prstGeom prst="rect">
+            <a:avLst/>
+          </a:prstGeom>
+          <a:solidFill>
+            <a:srgbClr val="121216"/>
+          </a:solidFill>
+          <a:ln>
+            <a:noFill/>
+          </a:ln>
+          <a:effectLst>
+            <a:outerShdw blurRad="39960" dir="5400000" dist="23040" rotWithShape="0">
+              <a:srgbClr val="000000">
+                <a:alpha val="35000"/>
+              </a:srgbClr>
+            </a:outerShdw>
+          </a:effectLst>
+        </p:spPr>
+        <p:style>
+          <a:lnRef idx="1">
+            <a:schemeClr val="accent1"/>
+          </a:lnRef>
+          <a:fillRef idx="3">
+            <a:schemeClr val="accent1"/>
+          </a:fillRef>
+          <a:effectRef idx="2">
+            <a:schemeClr val="accent1"/>
+          </a:effectRef>
+          <a:fontRef idx="minor"/>
+        </p:style>
+        <p:txBody>
+          <a:bodyPr lIns="90000" rIns="90000" tIns="45000" bIns="45000" anchor="ctr">
+            <a:noAutofit/>
+          </a:bodyPr>
+          <a:p>
+            <a:endParaRPr b="0" lang="en-US" sz="1800" spc="-1" strike="noStrike">
+              <a:solidFill>
+                <a:schemeClr val="lt1"/>
+              </a:solidFill>
+              <a:latin typeface="Calibri"/>
+              <a:ea typeface="DejaVu Sans"/>
+            </a:endParaRPr>
+          </a:p>
+        </p:txBody>
+      </p:sp>
+      <p:sp>
+        <p:nvSpPr>
+          <p:cNvPr id="336" name="Rectangle 186"/>
+          <p:cNvSpPr/>
+          <p:nvPr/>
+        </p:nvSpPr>
+        <p:spPr>
+          <a:xfrm>
+            <a:off x="7315200" y="0"/>
+            <a:ext cx="13320" cy="6852960"/>
+          </a:xfrm>
+          <a:prstGeom prst="rect">
+            <a:avLst/>
+          </a:prstGeom>
+          <a:solidFill>
+            <a:srgbClr val="121216"/>
+          </a:solidFill>
+          <a:ln>
+            <a:noFill/>
+          </a:ln>
+          <a:effectLst>
+            <a:outerShdw blurRad="39960" dir="5400000" dist="23040" rotWithShape="0">
+              <a:srgbClr val="000000">
+                <a:alpha val="35000"/>
+              </a:srgbClr>
+            </a:outerShdw>
+          </a:effectLst>
+        </p:spPr>
+        <p:style>
+          <a:lnRef idx="1">
+            <a:schemeClr val="accent1"/>
+          </a:lnRef>
+          <a:fillRef idx="3">
+            <a:schemeClr val="accent1"/>
+          </a:fillRef>
+          <a:effectRef idx="2">
+            <a:schemeClr val="accent1"/>
+          </a:effectRef>
+          <a:fontRef idx="minor"/>
+        </p:style>
+        <p:txBody>
+          <a:bodyPr lIns="90000" rIns="90000" tIns="45000" bIns="45000" anchor="ctr">
+            <a:noAutofit/>
+          </a:bodyPr>
+          <a:p>
+            <a:endParaRPr b="0" lang="en-US" sz="1800" spc="-1" strike="noStrike">
+              <a:solidFill>
+                <a:schemeClr val="lt1"/>
+              </a:solidFill>
+              <a:latin typeface="Calibri"/>
+              <a:ea typeface="DejaVu Sans"/>
+            </a:endParaRPr>
+          </a:p>
+        </p:txBody>
+      </p:sp>
+      <p:sp>
+        <p:nvSpPr>
+          <p:cNvPr id="337" name="Rectangle 187"/>
+          <p:cNvSpPr/>
+          <p:nvPr/>
+        </p:nvSpPr>
+        <p:spPr>
+          <a:xfrm>
+            <a:off x="8229600" y="0"/>
+            <a:ext cx="13320" cy="6852960"/>
+          </a:xfrm>
+          <a:prstGeom prst="rect">
+            <a:avLst/>
+          </a:prstGeom>
+          <a:solidFill>
+            <a:srgbClr val="121216"/>
+          </a:solidFill>
+          <a:ln>
+            <a:noFill/>
+          </a:ln>
+          <a:effectLst>
+            <a:outerShdw blurRad="39960" dir="5400000" dist="23040" rotWithShape="0">
+              <a:srgbClr val="000000">
+                <a:alpha val="35000"/>
+              </a:srgbClr>
+            </a:outerShdw>
+          </a:effectLst>
+        </p:spPr>
+        <p:style>
+          <a:lnRef idx="1">
+            <a:schemeClr val="accent1"/>
+          </a:lnRef>
+          <a:fillRef idx="3">
+            <a:schemeClr val="accent1"/>
+          </a:fillRef>
+          <a:effectRef idx="2">
+            <a:schemeClr val="accent1"/>
+          </a:effectRef>
+          <a:fontRef idx="minor"/>
+        </p:style>
+        <p:txBody>
+          <a:bodyPr lIns="90000" rIns="90000" tIns="45000" bIns="45000" anchor="ctr">
+            <a:noAutofit/>
+          </a:bodyPr>
+          <a:p>
+            <a:endParaRPr b="0" lang="en-US" sz="1800" spc="-1" strike="noStrike">
+              <a:solidFill>
+                <a:schemeClr val="lt1"/>
+              </a:solidFill>
+              <a:latin typeface="Calibri"/>
+              <a:ea typeface="DejaVu Sans"/>
+            </a:endParaRPr>
+          </a:p>
+        </p:txBody>
+      </p:sp>
+      <p:sp>
+        <p:nvSpPr>
+          <p:cNvPr id="338" name="Rectangle 188"/>
+          <p:cNvSpPr/>
+          <p:nvPr/>
+        </p:nvSpPr>
+        <p:spPr>
+          <a:xfrm>
+            <a:off x="9144000" y="0"/>
+            <a:ext cx="13320" cy="6852960"/>
+          </a:xfrm>
+          <a:prstGeom prst="rect">
+            <a:avLst/>
+          </a:prstGeom>
+          <a:solidFill>
+            <a:srgbClr val="121216"/>
+          </a:solidFill>
+          <a:ln>
+            <a:noFill/>
+          </a:ln>
+          <a:effectLst>
+            <a:outerShdw blurRad="39960" dir="5400000" dist="23040" rotWithShape="0">
+              <a:srgbClr val="000000">
+                <a:alpha val="35000"/>
+              </a:srgbClr>
+            </a:outerShdw>
+          </a:effectLst>
+        </p:spPr>
+        <p:style>
+          <a:lnRef idx="1">
+            <a:schemeClr val="accent1"/>
+          </a:lnRef>
+          <a:fillRef idx="3">
+            <a:schemeClr val="accent1"/>
+          </a:fillRef>
+          <a:effectRef idx="2">
+            <a:schemeClr val="accent1"/>
+          </a:effectRef>
+          <a:fontRef idx="minor"/>
+        </p:style>
+        <p:txBody>
+          <a:bodyPr lIns="90000" rIns="90000" tIns="45000" bIns="45000" anchor="ctr">
+            <a:noAutofit/>
+          </a:bodyPr>
+          <a:p>
+            <a:endParaRPr b="0" lang="en-US" sz="1800" spc="-1" strike="noStrike">
+              <a:solidFill>
+                <a:schemeClr val="lt1"/>
+              </a:solidFill>
+              <a:latin typeface="Calibri"/>
+              <a:ea typeface="DejaVu Sans"/>
+            </a:endParaRPr>
+          </a:p>
+        </p:txBody>
+      </p:sp>
+      <p:sp>
+        <p:nvSpPr>
+          <p:cNvPr id="339" name="Rectangle 189"/>
+          <p:cNvSpPr/>
+          <p:nvPr/>
+        </p:nvSpPr>
+        <p:spPr>
+          <a:xfrm>
+            <a:off x="10058400" y="0"/>
+            <a:ext cx="13320" cy="6852960"/>
+          </a:xfrm>
+          <a:prstGeom prst="rect">
+            <a:avLst/>
+          </a:prstGeom>
+          <a:solidFill>
+            <a:srgbClr val="121216"/>
+          </a:solidFill>
+          <a:ln>
+            <a:noFill/>
+          </a:ln>
+          <a:effectLst>
+            <a:outerShdw blurRad="39960" dir="5400000" dist="23040" rotWithShape="0">
+              <a:srgbClr val="000000">
+                <a:alpha val="35000"/>
+              </a:srgbClr>
+            </a:outerShdw>
+          </a:effectLst>
+        </p:spPr>
+        <p:style>
+          <a:lnRef idx="1">
+            <a:schemeClr val="accent1"/>
+          </a:lnRef>
+          <a:fillRef idx="3">
+            <a:schemeClr val="accent1"/>
+          </a:fillRef>
+          <a:effectRef idx="2">
+            <a:schemeClr val="accent1"/>
+          </a:effectRef>
+          <a:fontRef idx="minor"/>
+        </p:style>
+        <p:txBody>
+          <a:bodyPr lIns="90000" rIns="90000" tIns="45000" bIns="45000" anchor="ctr">
+            <a:noAutofit/>
+          </a:bodyPr>
+          <a:p>
+            <a:endParaRPr b="0" lang="en-US" sz="1800" spc="-1" strike="noStrike">
+              <a:solidFill>
+                <a:schemeClr val="lt1"/>
+              </a:solidFill>
+              <a:latin typeface="Calibri"/>
+              <a:ea typeface="DejaVu Sans"/>
+            </a:endParaRPr>
+          </a:p>
+        </p:txBody>
+      </p:sp>
+      <p:sp>
+        <p:nvSpPr>
+          <p:cNvPr id="340" name="Rectangle 190"/>
+          <p:cNvSpPr/>
+          <p:nvPr/>
+        </p:nvSpPr>
+        <p:spPr>
+          <a:xfrm>
+            <a:off x="10972800" y="0"/>
+            <a:ext cx="13320" cy="6852960"/>
+          </a:xfrm>
+          <a:prstGeom prst="rect">
+            <a:avLst/>
+          </a:prstGeom>
+          <a:solidFill>
+            <a:srgbClr val="121216"/>
+          </a:solidFill>
+          <a:ln>
+            <a:noFill/>
+          </a:ln>
+          <a:effectLst>
+            <a:outerShdw blurRad="39960" dir="5400000" dist="23040" rotWithShape="0">
+              <a:srgbClr val="000000">
+                <a:alpha val="35000"/>
+              </a:srgbClr>
+            </a:outerShdw>
+          </a:effectLst>
+        </p:spPr>
+        <p:style>
+          <a:lnRef idx="1">
+            <a:schemeClr val="accent1"/>
+          </a:lnRef>
+          <a:fillRef idx="3">
+            <a:schemeClr val="accent1"/>
+          </a:fillRef>
+          <a:effectRef idx="2">
+            <a:schemeClr val="accent1"/>
+          </a:effectRef>
+          <a:fontRef idx="minor"/>
+        </p:style>
+        <p:txBody>
+          <a:bodyPr lIns="90000" rIns="90000" tIns="45000" bIns="45000" anchor="ctr">
+            <a:noAutofit/>
+          </a:bodyPr>
+          <a:p>
+            <a:endParaRPr b="0" lang="en-US" sz="1800" spc="-1" strike="noStrike">
+              <a:solidFill>
+                <a:schemeClr val="lt1"/>
+              </a:solidFill>
+              <a:latin typeface="Calibri"/>
+              <a:ea typeface="DejaVu Sans"/>
+            </a:endParaRPr>
+          </a:p>
+        </p:txBody>
+      </p:sp>
+      <p:sp>
+        <p:nvSpPr>
+          <p:cNvPr id="341" name="Rectangle 191"/>
+          <p:cNvSpPr/>
+          <p:nvPr/>
+        </p:nvSpPr>
+        <p:spPr>
+          <a:xfrm>
+            <a:off x="11887200" y="0"/>
+            <a:ext cx="13320" cy="6852960"/>
+          </a:xfrm>
+          <a:prstGeom prst="rect">
+            <a:avLst/>
+          </a:prstGeom>
+          <a:solidFill>
+            <a:srgbClr val="121216"/>
+          </a:solidFill>
+          <a:ln>
+            <a:noFill/>
+          </a:ln>
+          <a:effectLst>
+            <a:outerShdw blurRad="39960" dir="5400000" dist="23040" rotWithShape="0">
+              <a:srgbClr val="000000">
+                <a:alpha val="35000"/>
+              </a:srgbClr>
+            </a:outerShdw>
+          </a:effectLst>
+        </p:spPr>
+        <p:style>
+          <a:lnRef idx="1">
+            <a:schemeClr val="accent1"/>
+          </a:lnRef>
+          <a:fillRef idx="3">
+            <a:schemeClr val="accent1"/>
+          </a:fillRef>
+          <a:effectRef idx="2">
+            <a:schemeClr val="accent1"/>
+          </a:effectRef>
+          <a:fontRef idx="minor"/>
+        </p:style>
+        <p:txBody>
+          <a:bodyPr lIns="90000" rIns="90000" tIns="45000" bIns="45000" anchor="ctr">
+            <a:noAutofit/>
+          </a:bodyPr>
+          <a:p>
+            <a:endParaRPr b="0" lang="en-US" sz="1800" spc="-1" strike="noStrike">
+              <a:solidFill>
+                <a:schemeClr val="lt1"/>
+              </a:solidFill>
+              <a:latin typeface="Calibri"/>
+              <a:ea typeface="DejaVu Sans"/>
+            </a:endParaRPr>
+          </a:p>
+        </p:txBody>
+      </p:sp>
+      <p:sp>
+        <p:nvSpPr>
+          <p:cNvPr id="342" name="Rectangle 192"/>
+          <p:cNvSpPr/>
+          <p:nvPr/>
+        </p:nvSpPr>
+        <p:spPr>
+          <a:xfrm>
+            <a:off x="0" y="0"/>
+            <a:ext cx="315000" cy="6852960"/>
+          </a:xfrm>
+          <a:prstGeom prst="rect">
+            <a:avLst/>
+          </a:prstGeom>
+          <a:solidFill>
+            <a:srgbClr val="ff8c00"/>
+          </a:solidFill>
+          <a:ln>
+            <a:noFill/>
+          </a:ln>
+          <a:effectLst>
+            <a:outerShdw blurRad="39960" dir="5400000" dist="23040" rotWithShape="0">
+              <a:srgbClr val="000000">
+                <a:alpha val="35000"/>
+              </a:srgbClr>
+            </a:outerShdw>
+          </a:effectLst>
+        </p:spPr>
+        <p:style>
+          <a:lnRef idx="1">
+            <a:schemeClr val="accent1"/>
+          </a:lnRef>
+          <a:fillRef idx="3">
+            <a:schemeClr val="accent1"/>
+          </a:fillRef>
+          <a:effectRef idx="2">
+            <a:schemeClr val="accent1"/>
+          </a:effectRef>
+          <a:fontRef idx="minor"/>
+        </p:style>
+        <p:txBody>
+          <a:bodyPr lIns="90000" rIns="90000" tIns="45000" bIns="45000" anchor="ctr">
+            <a:noAutofit/>
+          </a:bodyPr>
+          <a:p>
+            <a:endParaRPr b="0" lang="en-US" sz="1800" spc="-1" strike="noStrike">
+              <a:solidFill>
+                <a:schemeClr val="lt1"/>
+              </a:solidFill>
+              <a:latin typeface="Calibri"/>
+              <a:ea typeface="DejaVu Sans"/>
+            </a:endParaRPr>
+          </a:p>
+        </p:txBody>
+      </p:sp>
+      <p:sp>
+        <p:nvSpPr>
+          <p:cNvPr id="343" name="Rounded Rectangle 85"/>
+          <p:cNvSpPr/>
+          <p:nvPr/>
+        </p:nvSpPr>
+        <p:spPr>
+          <a:xfrm>
+            <a:off x="9875520" y="365760"/>
+            <a:ext cx="2006640" cy="497880"/>
+          </a:xfrm>
+          <a:prstGeom prst="roundRect">
+            <a:avLst>
+              <a:gd name="adj" fmla="val 16667"/>
+            </a:avLst>
+          </a:prstGeom>
+          <a:solidFill>
+            <a:srgbClr val="1e1e24"/>
+          </a:solidFill>
+          <a:ln>
+            <a:solidFill>
+              <a:srgbClr val="ff8c00"/>
+            </a:solidFill>
+            <a:round/>
+          </a:ln>
+          <a:effectLst>
+            <a:outerShdw blurRad="39960" dir="5400000" dist="23040" rotWithShape="0">
+              <a:srgbClr val="000000">
+                <a:alpha val="35000"/>
+              </a:srgbClr>
+            </a:outerShdw>
+          </a:effectLst>
+        </p:spPr>
+        <p:style>
+          <a:lnRef idx="1">
+            <a:schemeClr val="accent1"/>
+          </a:lnRef>
+          <a:fillRef idx="3">
+            <a:schemeClr val="accent1"/>
+          </a:fillRef>
+          <a:effectRef idx="2">
+            <a:schemeClr val="accent1"/>
+          </a:effectRef>
+          <a:fontRef idx="minor"/>
+        </p:style>
+        <p:txBody>
+          <a:bodyPr lIns="90000" rIns="90000" tIns="45000" bIns="45000" anchor="ctr">
+            <a:noAutofit/>
+          </a:bodyPr>
+          <a:p>
+            <a:pPr algn="ctr">
+              <a:lnSpc>
+                <a:spcPct val="100000"/>
+              </a:lnSpc>
+            </a:pPr>
+            <a:r>
+              <a:rPr b="1" lang="en-US" sz="1400" spc="-1" strike="noStrike">
+                <a:solidFill>
+                  <a:srgbClr val="ffb45a"/>
+                </a:solidFill>
+                <a:latin typeface="Calibri"/>
+                <a:ea typeface="DejaVu Sans"/>
+              </a:rPr>
+              <a:t>JAVA TEMELLERI</a:t>
+            </a:r>
+            <a:endParaRPr b="0" lang="en-US" sz="1400" spc="-1" strike="noStrike">
+              <a:solidFill>
+                <a:srgbClr val="ffffff"/>
+              </a:solidFill>
+              <a:latin typeface="Arial"/>
+            </a:endParaRPr>
+          </a:p>
+        </p:txBody>
+      </p:sp>
+      <p:sp>
+        <p:nvSpPr>
+          <p:cNvPr id="344" name="TextBox 37"/>
+          <p:cNvSpPr/>
+          <p:nvPr/>
+        </p:nvSpPr>
+        <p:spPr>
+          <a:xfrm>
+            <a:off x="2731320" y="914400"/>
+            <a:ext cx="5505840" cy="516960"/>
+          </a:xfrm>
+          <a:prstGeom prst="rect">
+            <a:avLst/>
+          </a:prstGeom>
+          <a:noFill/>
+          <a:ln w="0">
+            <a:noFill/>
+          </a:ln>
+        </p:spPr>
+        <p:style>
+          <a:lnRef idx="0"/>
+          <a:fillRef idx="0"/>
+          <a:effectRef idx="0"/>
+          <a:fontRef idx="minor"/>
+        </p:style>
+        <p:txBody>
+          <a:bodyPr wrap="none" lIns="90000" rIns="90000" tIns="45000" bIns="45000" anchor="t">
+            <a:spAutoFit/>
+          </a:bodyPr>
+          <a:p>
+            <a:pPr>
+              <a:lnSpc>
+                <a:spcPct val="100000"/>
+              </a:lnSpc>
+            </a:pPr>
+            <a:r>
+              <a:rPr b="1" lang="en-US" sz="2800" spc="-1" strike="noStrike">
+                <a:solidFill>
+                  <a:srgbClr val="f5f5f5"/>
+                </a:solidFill>
+                <a:latin typeface="Calibri"/>
+                <a:ea typeface="DejaVu Sans"/>
+              </a:rPr>
+              <a:t>Aritmetik Operatörler: İnce Detaylar</a:t>
+            </a:r>
+            <a:endParaRPr b="0" lang="en-US" sz="2800" spc="-1" strike="noStrike">
+              <a:solidFill>
+                <a:srgbClr val="000000"/>
+              </a:solidFill>
+              <a:latin typeface="Arial"/>
+            </a:endParaRPr>
+          </a:p>
+        </p:txBody>
+      </p:sp>
+      <p:sp>
+        <p:nvSpPr>
+          <p:cNvPr id="345" name="TextBox 38"/>
+          <p:cNvSpPr/>
+          <p:nvPr/>
+        </p:nvSpPr>
+        <p:spPr>
+          <a:xfrm>
+            <a:off x="674280" y="1694880"/>
+            <a:ext cx="10219680" cy="576360"/>
+          </a:xfrm>
+          <a:prstGeom prst="rect">
+            <a:avLst/>
+          </a:prstGeom>
+          <a:noFill/>
+          <a:ln w="0">
+            <a:noFill/>
+          </a:ln>
+        </p:spPr>
+        <p:style>
+          <a:lnRef idx="0"/>
+          <a:fillRef idx="0"/>
+          <a:effectRef idx="0"/>
+          <a:fontRef idx="minor"/>
+        </p:style>
+        <p:txBody>
+          <a:bodyPr wrap="none" lIns="90000" rIns="90000" tIns="45000" bIns="45000" anchor="t">
+            <a:spAutoFit/>
+          </a:bodyPr>
+          <a:p>
+            <a:pPr>
+              <a:lnSpc>
+                <a:spcPct val="100000"/>
+              </a:lnSpc>
+            </a:pPr>
+            <a:r>
+              <a:rPr b="0" lang="en-US" sz="1600" spc="-1" strike="noStrike">
+                <a:solidFill>
+                  <a:srgbClr val="aaaaaa"/>
+                </a:solidFill>
+                <a:latin typeface="Calibri"/>
+                <a:ea typeface="DejaVu Sans"/>
+              </a:rPr>
+              <a:t>Aritmetik işlemlerde veri tiplerinin arka planda nasıl davrandığını bilmek kritik hataları önler. Sıfıra bölünme tepkileri, </a:t>
+            </a:r>
+            <a:endParaRPr b="0" lang="en-US" sz="1600" spc="-1" strike="noStrike">
+              <a:solidFill>
+                <a:srgbClr val="000000"/>
+              </a:solidFill>
+              <a:latin typeface="Arial"/>
+            </a:endParaRPr>
+          </a:p>
+          <a:p>
+            <a:pPr>
+              <a:lnSpc>
+                <a:spcPct val="100000"/>
+              </a:lnSpc>
+            </a:pPr>
+            <a:r>
+              <a:rPr b="0" lang="en-US" sz="1600" spc="-1" strike="noStrike">
+                <a:solidFill>
+                  <a:srgbClr val="aaaaaa"/>
+                </a:solidFill>
+                <a:latin typeface="Calibri"/>
+                <a:ea typeface="DejaVu Sans"/>
+              </a:rPr>
+              <a:t>karakterlerin sayılara dönüşmesi ve küçük veri tiplerinin işlemler sırasında otomatik olarak büyümesi en bilinen tuzaklardır.</a:t>
+            </a:r>
+            <a:endParaRPr b="0" lang="en-US" sz="1600" spc="-1" strike="noStrike">
+              <a:solidFill>
+                <a:srgbClr val="000000"/>
+              </a:solidFill>
+              <a:latin typeface="Arial"/>
+            </a:endParaRPr>
+          </a:p>
+        </p:txBody>
+      </p:sp>
+      <p:sp>
+        <p:nvSpPr>
+          <p:cNvPr id="346" name="Rounded Rectangle 86"/>
+          <p:cNvSpPr/>
+          <p:nvPr/>
+        </p:nvSpPr>
+        <p:spPr>
+          <a:xfrm>
+            <a:off x="987480" y="3182040"/>
+            <a:ext cx="3286800" cy="2738160"/>
+          </a:xfrm>
+          <a:prstGeom prst="roundRect">
+            <a:avLst>
+              <a:gd name="adj" fmla="val 16667"/>
+            </a:avLst>
+          </a:prstGeom>
+          <a:solidFill>
+            <a:srgbClr val="08080a"/>
+          </a:solidFill>
+          <a:ln>
+            <a:noFill/>
+          </a:ln>
+          <a:effectLst>
+            <a:outerShdw blurRad="39960" dir="5400000" dist="23040" rotWithShape="0">
+              <a:srgbClr val="000000">
+                <a:alpha val="35000"/>
+              </a:srgbClr>
+            </a:outerShdw>
+          </a:effectLst>
+        </p:spPr>
+        <p:style>
+          <a:lnRef idx="1">
+            <a:schemeClr val="accent1"/>
+          </a:lnRef>
+          <a:fillRef idx="3">
+            <a:schemeClr val="accent1"/>
+          </a:fillRef>
+          <a:effectRef idx="2">
+            <a:schemeClr val="accent1"/>
+          </a:effectRef>
+          <a:fontRef idx="minor"/>
+        </p:style>
+        <p:txBody>
+          <a:bodyPr lIns="90000" rIns="90000" tIns="45000" bIns="45000" anchor="ctr">
+            <a:noAutofit/>
+          </a:bodyPr>
+          <a:p>
+            <a:endParaRPr b="0" lang="en-US" sz="1800" spc="-1" strike="noStrike">
+              <a:solidFill>
+                <a:schemeClr val="lt1"/>
+              </a:solidFill>
+              <a:latin typeface="Calibri"/>
+              <a:ea typeface="DejaVu Sans"/>
+            </a:endParaRPr>
+          </a:p>
+        </p:txBody>
+      </p:sp>
+      <p:sp>
+        <p:nvSpPr>
+          <p:cNvPr id="347" name="Rounded Rectangle 87"/>
+          <p:cNvSpPr/>
+          <p:nvPr/>
+        </p:nvSpPr>
+        <p:spPr>
+          <a:xfrm>
+            <a:off x="685800" y="2743200"/>
+            <a:ext cx="3515400" cy="3655800"/>
+          </a:xfrm>
+          <a:prstGeom prst="roundRect">
+            <a:avLst>
+              <a:gd name="adj" fmla="val 16667"/>
+            </a:avLst>
+          </a:prstGeom>
+          <a:solidFill>
+            <a:srgbClr val="16161c"/>
+          </a:solidFill>
+          <a:ln>
+            <a:solidFill>
+              <a:srgbClr val="464655"/>
+            </a:solidFill>
+            <a:round/>
+          </a:ln>
+          <a:effectLst>
+            <a:outerShdw blurRad="39960" dir="5400000" dist="23040" rotWithShape="0">
+              <a:srgbClr val="000000">
+                <a:alpha val="35000"/>
+              </a:srgbClr>
+            </a:outerShdw>
+          </a:effectLst>
+        </p:spPr>
+        <p:style>
+          <a:lnRef idx="1">
+            <a:schemeClr val="accent1"/>
+          </a:lnRef>
+          <a:fillRef idx="3">
+            <a:schemeClr val="accent1"/>
+          </a:fillRef>
+          <a:effectRef idx="2">
+            <a:schemeClr val="accent1"/>
+          </a:effectRef>
+          <a:fontRef idx="minor"/>
+        </p:style>
+        <p:txBody>
+          <a:bodyPr lIns="90000" rIns="90000" tIns="45000" bIns="45000" anchor="ctr">
+            <a:noAutofit/>
+          </a:bodyPr>
+          <a:p>
+            <a:pPr>
+              <a:lnSpc>
+                <a:spcPct val="100000"/>
+              </a:lnSpc>
+            </a:pPr>
+            <a:r>
+              <a:rPr b="1" lang="en-US" sz="1400" spc="-1" strike="noStrike">
+                <a:solidFill>
+                  <a:schemeClr val="lt1"/>
+                </a:solidFill>
+                <a:latin typeface="Calibri"/>
+                <a:ea typeface="DejaVu Sans"/>
+              </a:rPr>
+              <a:t>1. Sıfıra Bölünme (Zero Division):</a:t>
+            </a:r>
+            <a:endParaRPr b="0" lang="en-US" sz="1400" spc="-1" strike="noStrike">
+              <a:solidFill>
+                <a:srgbClr val="ffffff"/>
+              </a:solidFill>
+              <a:latin typeface="Arial"/>
+            </a:endParaRPr>
+          </a:p>
+          <a:p>
+            <a:pPr marL="216000" indent="-216000">
+              <a:lnSpc>
+                <a:spcPct val="100000"/>
+              </a:lnSpc>
+              <a:buClr>
+                <a:srgbClr val="ffffff"/>
+              </a:buClr>
+              <a:buFont typeface="Wingdings" charset="2"/>
+              <a:buChar char=""/>
+            </a:pPr>
+            <a:r>
+              <a:rPr b="0" lang="en-US" sz="1400" spc="-1" strike="noStrike">
+                <a:solidFill>
+                  <a:schemeClr val="lt1"/>
+                </a:solidFill>
+                <a:latin typeface="Calibri"/>
+                <a:ea typeface="DejaVu Sans"/>
+              </a:rPr>
+              <a:t>Tam sayılar (int) 0'a bölünürse program çöker (ArithmeticException).</a:t>
+            </a:r>
+            <a:endParaRPr b="0" lang="en-US" sz="1400" spc="-1" strike="noStrike">
+              <a:solidFill>
+                <a:srgbClr val="ffffff"/>
+              </a:solidFill>
+              <a:latin typeface="Arial"/>
+            </a:endParaRPr>
+          </a:p>
+          <a:p>
+            <a:pPr marL="216000" indent="-216000">
+              <a:lnSpc>
+                <a:spcPct val="100000"/>
+              </a:lnSpc>
+              <a:buClr>
+                <a:srgbClr val="ffffff"/>
+              </a:buClr>
+              <a:buFont typeface="Wingdings" charset="2"/>
+              <a:buChar char=""/>
+            </a:pPr>
+            <a:r>
+              <a:rPr b="0" lang="en-US" sz="1400" spc="-1" strike="noStrike">
+                <a:solidFill>
+                  <a:schemeClr val="lt1"/>
+                </a:solidFill>
+                <a:latin typeface="Calibri"/>
+                <a:ea typeface="DejaVu Sans"/>
+              </a:rPr>
+              <a:t>Ondalıklılar (double) 0'a bölünürse çökmez, Infinity (Sonsuz) veya NaN (Sayı Değil) verir.</a:t>
+            </a:r>
+            <a:endParaRPr b="0" lang="en-US" sz="1400" spc="-1" strike="noStrike">
+              <a:solidFill>
+                <a:srgbClr val="ffffff"/>
+              </a:solidFill>
+              <a:latin typeface="Arial"/>
+            </a:endParaRPr>
+          </a:p>
+          <a:p>
+            <a:pPr>
+              <a:lnSpc>
+                <a:spcPct val="100000"/>
+              </a:lnSpc>
+            </a:pPr>
+            <a:r>
+              <a:rPr b="1" lang="en-US" sz="1400" spc="-1" strike="noStrike">
+                <a:solidFill>
+                  <a:schemeClr val="lt1"/>
+                </a:solidFill>
+                <a:latin typeface="Calibri"/>
+                <a:ea typeface="DejaVu Sans"/>
+              </a:rPr>
+              <a:t>2. Karakter (Char) Matematiği:</a:t>
+            </a:r>
+            <a:endParaRPr b="0" lang="en-US" sz="1400" spc="-1" strike="noStrike">
+              <a:solidFill>
+                <a:srgbClr val="ffffff"/>
+              </a:solidFill>
+              <a:latin typeface="Arial"/>
+            </a:endParaRPr>
+          </a:p>
+          <a:p>
+            <a:pPr>
+              <a:lnSpc>
+                <a:spcPct val="100000"/>
+              </a:lnSpc>
+            </a:pPr>
+            <a:r>
+              <a:rPr b="0" lang="en-US" sz="1400" spc="-1" strike="noStrike">
+                <a:solidFill>
+                  <a:schemeClr val="lt1"/>
+                </a:solidFill>
+                <a:latin typeface="Calibri"/>
+                <a:ea typeface="DejaVu Sans"/>
+              </a:rPr>
+              <a:t>char tipleri arka planda sayı (ASCII değeri) tutar. İki char toplanırsa yan yana yazılmazlar, sayısal değerleri toplanır. (Örn: 'A' = 65).</a:t>
+            </a:r>
+            <a:endParaRPr b="0" lang="en-US" sz="1400" spc="-1" strike="noStrike">
+              <a:solidFill>
+                <a:srgbClr val="ffffff"/>
+              </a:solidFill>
+              <a:latin typeface="Arial"/>
+            </a:endParaRPr>
+          </a:p>
+          <a:p>
+            <a:pPr>
+              <a:lnSpc>
+                <a:spcPct val="100000"/>
+              </a:lnSpc>
+            </a:pPr>
+            <a:r>
+              <a:rPr b="1" lang="en-US" sz="1400" spc="-1" strike="noStrike">
+                <a:solidFill>
+                  <a:schemeClr val="lt1"/>
+                </a:solidFill>
+                <a:latin typeface="Calibri"/>
+                <a:ea typeface="DejaVu Sans"/>
+              </a:rPr>
+              <a:t>3. Gizli Tip Terfisi (Promotion):</a:t>
+            </a:r>
+            <a:endParaRPr b="0" lang="en-US" sz="1400" spc="-1" strike="noStrike">
+              <a:solidFill>
+                <a:srgbClr val="ffffff"/>
+              </a:solidFill>
+              <a:latin typeface="Arial"/>
+            </a:endParaRPr>
+          </a:p>
+          <a:p>
+            <a:pPr>
+              <a:lnSpc>
+                <a:spcPct val="100000"/>
+              </a:lnSpc>
+            </a:pPr>
+            <a:r>
+              <a:rPr b="0" lang="en-US" sz="1400" spc="-1" strike="noStrike">
+                <a:solidFill>
+                  <a:schemeClr val="lt1"/>
+                </a:solidFill>
+                <a:latin typeface="Calibri"/>
+                <a:ea typeface="DejaVu Sans"/>
+              </a:rPr>
+              <a:t>İki byte veya short değişken toplanırken sonuç otomatik olarak int tipine yükseltilir. Sonucu direkt byte'a atamak hata verir!</a:t>
+            </a:r>
+            <a:endParaRPr b="0" lang="en-US" sz="1400" spc="-1" strike="noStrike">
+              <a:solidFill>
+                <a:srgbClr val="ffffff"/>
+              </a:solidFill>
+              <a:latin typeface="Arial"/>
+            </a:endParaRPr>
+          </a:p>
+        </p:txBody>
+      </p:sp>
+      <p:sp>
+        <p:nvSpPr>
+          <p:cNvPr id="348" name="Rounded Rectangle 88"/>
+          <p:cNvSpPr/>
+          <p:nvPr/>
+        </p:nvSpPr>
+        <p:spPr>
+          <a:xfrm>
+            <a:off x="4507920" y="3182040"/>
+            <a:ext cx="3286800" cy="2738160"/>
+          </a:xfrm>
+          <a:prstGeom prst="roundRect">
+            <a:avLst>
+              <a:gd name="adj" fmla="val 16667"/>
+            </a:avLst>
+          </a:prstGeom>
+          <a:solidFill>
+            <a:srgbClr val="08080a"/>
+          </a:solidFill>
+          <a:ln>
+            <a:noFill/>
+          </a:ln>
+          <a:effectLst>
+            <a:outerShdw blurRad="39960" dir="5400000" dist="23040" rotWithShape="0">
+              <a:srgbClr val="000000">
+                <a:alpha val="35000"/>
+              </a:srgbClr>
+            </a:outerShdw>
+          </a:effectLst>
+        </p:spPr>
+        <p:style>
+          <a:lnRef idx="1">
+            <a:schemeClr val="accent1"/>
+          </a:lnRef>
+          <a:fillRef idx="3">
+            <a:schemeClr val="accent1"/>
+          </a:fillRef>
+          <a:effectRef idx="2">
+            <a:schemeClr val="accent1"/>
+          </a:effectRef>
+          <a:fontRef idx="minor"/>
+        </p:style>
+        <p:txBody>
+          <a:bodyPr lIns="90000" rIns="90000" tIns="45000" bIns="45000" anchor="ctr">
+            <a:noAutofit/>
+          </a:bodyPr>
+          <a:p>
+            <a:endParaRPr b="0" lang="en-US" sz="1800" spc="-1" strike="noStrike">
+              <a:solidFill>
+                <a:schemeClr val="lt1"/>
+              </a:solidFill>
+              <a:latin typeface="Calibri"/>
+              <a:ea typeface="DejaVu Sans"/>
+            </a:endParaRPr>
+          </a:p>
+        </p:txBody>
+      </p:sp>
+      <p:sp>
+        <p:nvSpPr>
+          <p:cNvPr id="349" name="Rounded Rectangle 89"/>
+          <p:cNvSpPr/>
+          <p:nvPr/>
+        </p:nvSpPr>
+        <p:spPr>
+          <a:xfrm>
+            <a:off x="4434840" y="2971800"/>
+            <a:ext cx="3286800" cy="3427200"/>
+          </a:xfrm>
+          <a:prstGeom prst="roundRect">
+            <a:avLst>
+              <a:gd name="adj" fmla="val 16667"/>
+            </a:avLst>
+          </a:prstGeom>
+          <a:solidFill>
+            <a:srgbClr val="16161c"/>
+          </a:solidFill>
+          <a:ln>
+            <a:solidFill>
+              <a:srgbClr val="464655"/>
+            </a:solidFill>
+            <a:round/>
+          </a:ln>
+          <a:effectLst>
+            <a:outerShdw blurRad="39960" dir="5400000" dist="23040" rotWithShape="0">
+              <a:srgbClr val="000000">
+                <a:alpha val="35000"/>
+              </a:srgbClr>
+            </a:outerShdw>
+          </a:effectLst>
+        </p:spPr>
+        <p:style>
+          <a:lnRef idx="1">
+            <a:schemeClr val="accent1"/>
+          </a:lnRef>
+          <a:fillRef idx="3">
+            <a:schemeClr val="accent1"/>
+          </a:fillRef>
+          <a:effectRef idx="2">
+            <a:schemeClr val="accent1"/>
+          </a:effectRef>
+          <a:fontRef idx="minor"/>
+        </p:style>
+        <p:txBody>
+          <a:bodyPr lIns="90000" rIns="90000" tIns="45000" bIns="45000" anchor="ctr">
+            <a:noAutofit/>
+          </a:bodyPr>
+          <a:p>
+            <a:pPr>
+              <a:lnSpc>
+                <a:spcPct val="100000"/>
+              </a:lnSpc>
+            </a:pPr>
+            <a:r>
+              <a:rPr b="0" lang="en-US" sz="1600" spc="-1" strike="noStrike">
+                <a:solidFill>
+                  <a:schemeClr val="lt1"/>
+                </a:solidFill>
+                <a:latin typeface="Calibri"/>
+                <a:ea typeface="DejaVu Sans"/>
+              </a:rPr>
+              <a:t>[ Arka Plandaki Veri Dönüşümleri ]</a:t>
+            </a:r>
+            <a:endParaRPr b="0" lang="en-US" sz="1600" spc="-1" strike="noStrike">
+              <a:solidFill>
+                <a:srgbClr val="ffffff"/>
+              </a:solidFill>
+              <a:latin typeface="Arial"/>
+            </a:endParaRPr>
+          </a:p>
+          <a:p>
+            <a:pPr>
+              <a:lnSpc>
+                <a:spcPct val="100000"/>
+              </a:lnSpc>
+            </a:pPr>
+            <a:r>
+              <a:rPr b="0" lang="en-US" sz="1600" spc="-1" strike="noStrike">
+                <a:solidFill>
+                  <a:schemeClr val="lt1"/>
+                </a:solidFill>
+                <a:latin typeface="Calibri"/>
+                <a:ea typeface="DejaVu Sans"/>
+              </a:rPr>
+              <a:t>├──</a:t>
+            </a:r>
+            <a:r>
+              <a:rPr b="0" lang="en-US" sz="1600" spc="-1" strike="noStrike">
+                <a:solidFill>
+                  <a:schemeClr val="lt1"/>
+                </a:solidFill>
+                <a:latin typeface="Calibri"/>
+                <a:ea typeface="DejaVu Sans"/>
+              </a:rPr>
+              <a:t>&gt; Sıfıra Bölünme</a:t>
+            </a:r>
+            <a:endParaRPr b="0" lang="en-US" sz="1600" spc="-1" strike="noStrike">
+              <a:solidFill>
+                <a:srgbClr val="ffffff"/>
+              </a:solidFill>
+              <a:latin typeface="Arial"/>
+            </a:endParaRPr>
+          </a:p>
+          <a:p>
+            <a:pPr>
+              <a:lnSpc>
+                <a:spcPct val="100000"/>
+              </a:lnSpc>
+            </a:pPr>
+            <a:r>
+              <a:rPr b="0" lang="en-US" sz="1600" spc="-1" strike="noStrike">
+                <a:solidFill>
+                  <a:schemeClr val="lt1"/>
+                </a:solidFill>
+                <a:latin typeface="Calibri"/>
+                <a:ea typeface="DejaVu Sans"/>
+              </a:rPr>
+              <a:t>│ ├── </a:t>
+            </a:r>
+            <a:r>
+              <a:rPr b="0" lang="en-US" sz="1600" spc="-1" strike="noStrike">
+                <a:solidFill>
+                  <a:schemeClr val="lt1"/>
+                </a:solidFill>
+                <a:latin typeface="Calibri"/>
+                <a:ea typeface="DejaVu Sans"/>
+              </a:rPr>
+              <a:t>5 / 0 ➔ HATA! (Crash)</a:t>
+            </a:r>
+            <a:endParaRPr b="0" lang="en-US" sz="1600" spc="-1" strike="noStrike">
+              <a:solidFill>
+                <a:srgbClr val="ffffff"/>
+              </a:solidFill>
+              <a:latin typeface="Arial"/>
+            </a:endParaRPr>
+          </a:p>
+          <a:p>
+            <a:pPr>
+              <a:lnSpc>
+                <a:spcPct val="100000"/>
+              </a:lnSpc>
+            </a:pPr>
+            <a:r>
+              <a:rPr b="0" lang="en-US" sz="1600" spc="-1" strike="noStrike">
+                <a:solidFill>
+                  <a:schemeClr val="lt1"/>
+                </a:solidFill>
+                <a:latin typeface="Calibri"/>
+                <a:ea typeface="DejaVu Sans"/>
+              </a:rPr>
+              <a:t>│ ├── </a:t>
+            </a:r>
+            <a:r>
+              <a:rPr b="0" lang="en-US" sz="1600" spc="-1" strike="noStrike">
+                <a:solidFill>
+                  <a:schemeClr val="lt1"/>
+                </a:solidFill>
+                <a:latin typeface="Calibri"/>
+                <a:ea typeface="DejaVu Sans"/>
+              </a:rPr>
+              <a:t>5.0 / 0 ➔ Sonuç: Infinity</a:t>
+            </a:r>
+            <a:endParaRPr b="0" lang="en-US" sz="1600" spc="-1" strike="noStrike">
+              <a:solidFill>
+                <a:srgbClr val="ffffff"/>
+              </a:solidFill>
+              <a:latin typeface="Arial"/>
+            </a:endParaRPr>
+          </a:p>
+          <a:p>
+            <a:pPr>
+              <a:lnSpc>
+                <a:spcPct val="100000"/>
+              </a:lnSpc>
+            </a:pPr>
+            <a:r>
+              <a:rPr b="0" lang="en-US" sz="1600" spc="-1" strike="noStrike">
+                <a:solidFill>
+                  <a:schemeClr val="lt1"/>
+                </a:solidFill>
+                <a:latin typeface="Calibri"/>
+                <a:ea typeface="DejaVu Sans"/>
+              </a:rPr>
+              <a:t>│ └── </a:t>
+            </a:r>
+            <a:r>
+              <a:rPr b="0" lang="en-US" sz="1600" spc="-1" strike="noStrike">
+                <a:solidFill>
+                  <a:schemeClr val="lt1"/>
+                </a:solidFill>
+                <a:latin typeface="Calibri"/>
+                <a:ea typeface="DejaVu Sans"/>
+              </a:rPr>
+              <a:t>0.0 / 0 ➔ Sonuç: NaN</a:t>
+            </a:r>
+            <a:endParaRPr b="0" lang="en-US" sz="1600" spc="-1" strike="noStrike">
+              <a:solidFill>
+                <a:srgbClr val="ffffff"/>
+              </a:solidFill>
+              <a:latin typeface="Arial"/>
+            </a:endParaRPr>
+          </a:p>
+          <a:p>
+            <a:pPr>
+              <a:lnSpc>
+                <a:spcPct val="100000"/>
+              </a:lnSpc>
+            </a:pPr>
+            <a:r>
+              <a:rPr b="0" lang="en-US" sz="1600" spc="-1" strike="noStrike">
+                <a:solidFill>
+                  <a:schemeClr val="lt1"/>
+                </a:solidFill>
+                <a:latin typeface="Calibri"/>
+                <a:ea typeface="DejaVu Sans"/>
+              </a:rPr>
+              <a:t>│</a:t>
+            </a:r>
+            <a:endParaRPr b="0" lang="en-US" sz="1600" spc="-1" strike="noStrike">
+              <a:solidFill>
+                <a:srgbClr val="ffffff"/>
+              </a:solidFill>
+              <a:latin typeface="Arial"/>
+            </a:endParaRPr>
+          </a:p>
+          <a:p>
+            <a:pPr>
+              <a:lnSpc>
+                <a:spcPct val="100000"/>
+              </a:lnSpc>
+            </a:pPr>
+            <a:r>
+              <a:rPr b="0" lang="en-US" sz="1600" spc="-1" strike="noStrike">
+                <a:solidFill>
+                  <a:schemeClr val="lt1"/>
+                </a:solidFill>
+                <a:latin typeface="Calibri"/>
+                <a:ea typeface="DejaVu Sans"/>
+              </a:rPr>
+              <a:t>├──</a:t>
+            </a:r>
+            <a:r>
+              <a:rPr b="0" lang="en-US" sz="1600" spc="-1" strike="noStrike">
+                <a:solidFill>
+                  <a:schemeClr val="lt1"/>
+                </a:solidFill>
+                <a:latin typeface="Calibri"/>
+                <a:ea typeface="DejaVu Sans"/>
+              </a:rPr>
+              <a:t>&gt; Char İşlemleri</a:t>
+            </a:r>
+            <a:endParaRPr b="0" lang="en-US" sz="1600" spc="-1" strike="noStrike">
+              <a:solidFill>
+                <a:srgbClr val="ffffff"/>
+              </a:solidFill>
+              <a:latin typeface="Arial"/>
+            </a:endParaRPr>
+          </a:p>
+          <a:p>
+            <a:pPr>
+              <a:lnSpc>
+                <a:spcPct val="100000"/>
+              </a:lnSpc>
+            </a:pPr>
+            <a:r>
+              <a:rPr b="0" lang="en-US" sz="1600" spc="-1" strike="noStrike">
+                <a:solidFill>
+                  <a:schemeClr val="lt1"/>
+                </a:solidFill>
+                <a:latin typeface="Calibri"/>
+                <a:ea typeface="DejaVu Sans"/>
+              </a:rPr>
+              <a:t>│ └── </a:t>
+            </a:r>
+            <a:r>
+              <a:rPr b="0" lang="en-US" sz="1600" spc="-1" strike="noStrike">
+                <a:solidFill>
+                  <a:schemeClr val="lt1"/>
+                </a:solidFill>
+                <a:latin typeface="Calibri"/>
+                <a:ea typeface="DejaVu Sans"/>
+              </a:rPr>
+              <a:t>'A' + 1 ➔ 65 + 1 = 66</a:t>
+            </a:r>
+            <a:endParaRPr b="0" lang="en-US" sz="1600" spc="-1" strike="noStrike">
+              <a:solidFill>
+                <a:srgbClr val="ffffff"/>
+              </a:solidFill>
+              <a:latin typeface="Arial"/>
+            </a:endParaRPr>
+          </a:p>
+          <a:p>
+            <a:pPr>
+              <a:lnSpc>
+                <a:spcPct val="100000"/>
+              </a:lnSpc>
+            </a:pPr>
+            <a:r>
+              <a:rPr b="0" lang="en-US" sz="1600" spc="-1" strike="noStrike">
+                <a:solidFill>
+                  <a:schemeClr val="lt1"/>
+                </a:solidFill>
+                <a:latin typeface="Calibri"/>
+                <a:ea typeface="DejaVu Sans"/>
+              </a:rPr>
+              <a:t>│</a:t>
+            </a:r>
+            <a:endParaRPr b="0" lang="en-US" sz="1600" spc="-1" strike="noStrike">
+              <a:solidFill>
+                <a:srgbClr val="ffffff"/>
+              </a:solidFill>
+              <a:latin typeface="Arial"/>
+            </a:endParaRPr>
+          </a:p>
+          <a:p>
+            <a:pPr>
+              <a:lnSpc>
+                <a:spcPct val="100000"/>
+              </a:lnSpc>
+            </a:pPr>
+            <a:r>
+              <a:rPr b="0" lang="en-US" sz="1600" spc="-1" strike="noStrike">
+                <a:solidFill>
+                  <a:schemeClr val="lt1"/>
+                </a:solidFill>
+                <a:latin typeface="Calibri"/>
+                <a:ea typeface="DejaVu Sans"/>
+              </a:rPr>
+              <a:t>└──</a:t>
+            </a:r>
+            <a:r>
+              <a:rPr b="0" lang="en-US" sz="1600" spc="-1" strike="noStrike">
+                <a:solidFill>
+                  <a:schemeClr val="lt1"/>
+                </a:solidFill>
+                <a:latin typeface="Calibri"/>
+                <a:ea typeface="DejaVu Sans"/>
+              </a:rPr>
+              <a:t>&gt; Byte Toplaması</a:t>
+            </a:r>
+            <a:endParaRPr b="0" lang="en-US" sz="1600" spc="-1" strike="noStrike">
+              <a:solidFill>
+                <a:srgbClr val="ffffff"/>
+              </a:solidFill>
+              <a:latin typeface="Arial"/>
+            </a:endParaRPr>
+          </a:p>
+          <a:p>
+            <a:pPr>
+              <a:lnSpc>
+                <a:spcPct val="100000"/>
+              </a:lnSpc>
+            </a:pPr>
+            <a:r>
+              <a:rPr b="0" lang="en-US" sz="1600" spc="-1" strike="noStrike">
+                <a:solidFill>
+                  <a:schemeClr val="lt1"/>
+                </a:solidFill>
+                <a:latin typeface="Calibri"/>
+                <a:ea typeface="DejaVu Sans"/>
+              </a:rPr>
+              <a:t>├── </a:t>
+            </a:r>
+            <a:r>
+              <a:rPr b="0" lang="en-US" sz="1600" spc="-1" strike="noStrike">
+                <a:solidFill>
+                  <a:schemeClr val="lt1"/>
+                </a:solidFill>
+                <a:latin typeface="Calibri"/>
+                <a:ea typeface="DejaVu Sans"/>
+              </a:rPr>
+              <a:t>byte x = 10; byte y = 20;</a:t>
+            </a:r>
+            <a:endParaRPr b="0" lang="en-US" sz="1600" spc="-1" strike="noStrike">
+              <a:solidFill>
+                <a:srgbClr val="ffffff"/>
+              </a:solidFill>
+              <a:latin typeface="Arial"/>
+            </a:endParaRPr>
+          </a:p>
+          <a:p>
+            <a:pPr>
+              <a:lnSpc>
+                <a:spcPct val="100000"/>
+              </a:lnSpc>
+            </a:pPr>
+            <a:r>
+              <a:rPr b="0" lang="en-US" sz="1600" spc="-1" strike="noStrike">
+                <a:solidFill>
+                  <a:schemeClr val="lt1"/>
+                </a:solidFill>
+                <a:latin typeface="Calibri"/>
+                <a:ea typeface="DejaVu Sans"/>
+              </a:rPr>
+              <a:t>└── </a:t>
+            </a:r>
+            <a:r>
+              <a:rPr b="0" lang="en-US" sz="1600" spc="-1" strike="noStrike">
+                <a:solidFill>
+                  <a:schemeClr val="lt1"/>
+                </a:solidFill>
+                <a:latin typeface="Calibri"/>
+                <a:ea typeface="DejaVu Sans"/>
+              </a:rPr>
+              <a:t>byte z = x + y; ➔ HATA! (Sonuç int olur)</a:t>
+            </a:r>
+            <a:endParaRPr b="0" lang="en-US" sz="1600" spc="-1" strike="noStrike">
+              <a:solidFill>
+                <a:srgbClr val="ffffff"/>
+              </a:solidFill>
+              <a:latin typeface="Arial"/>
+            </a:endParaRPr>
+          </a:p>
+        </p:txBody>
+      </p:sp>
+      <p:sp>
+        <p:nvSpPr>
+          <p:cNvPr id="350" name="Rounded Rectangle 90"/>
+          <p:cNvSpPr/>
+          <p:nvPr/>
+        </p:nvSpPr>
+        <p:spPr>
+          <a:xfrm>
+            <a:off x="8028360" y="3182040"/>
+            <a:ext cx="3286800" cy="2738160"/>
+          </a:xfrm>
+          <a:prstGeom prst="roundRect">
+            <a:avLst>
+              <a:gd name="adj" fmla="val 16667"/>
+            </a:avLst>
+          </a:prstGeom>
+          <a:solidFill>
+            <a:srgbClr val="08080a"/>
+          </a:solidFill>
+          <a:ln>
+            <a:noFill/>
+          </a:ln>
+          <a:effectLst>
+            <a:outerShdw blurRad="39960" dir="5400000" dist="23040" rotWithShape="0">
+              <a:srgbClr val="000000">
+                <a:alpha val="35000"/>
+              </a:srgbClr>
+            </a:outerShdw>
+          </a:effectLst>
+        </p:spPr>
+        <p:style>
+          <a:lnRef idx="1">
+            <a:schemeClr val="accent1"/>
+          </a:lnRef>
+          <a:fillRef idx="3">
+            <a:schemeClr val="accent1"/>
+          </a:fillRef>
+          <a:effectRef idx="2">
+            <a:schemeClr val="accent1"/>
+          </a:effectRef>
+          <a:fontRef idx="minor"/>
+        </p:style>
+        <p:txBody>
+          <a:bodyPr lIns="90000" rIns="90000" tIns="45000" bIns="45000" anchor="ctr">
+            <a:noAutofit/>
+          </a:bodyPr>
+          <a:p>
+            <a:endParaRPr b="0" lang="en-US" sz="1800" spc="-1" strike="noStrike">
+              <a:solidFill>
+                <a:schemeClr val="lt1"/>
+              </a:solidFill>
+              <a:latin typeface="Calibri"/>
+              <a:ea typeface="DejaVu Sans"/>
+            </a:endParaRPr>
+          </a:p>
+        </p:txBody>
+      </p:sp>
+      <p:sp>
+        <p:nvSpPr>
+          <p:cNvPr id="351" name="Rounded Rectangle 91"/>
+          <p:cNvSpPr/>
+          <p:nvPr/>
+        </p:nvSpPr>
+        <p:spPr>
+          <a:xfrm>
+            <a:off x="8001000" y="2514600"/>
+            <a:ext cx="3657600" cy="3885840"/>
+          </a:xfrm>
+          <a:prstGeom prst="roundRect">
+            <a:avLst>
+              <a:gd name="adj" fmla="val 16667"/>
+            </a:avLst>
+          </a:prstGeom>
+          <a:solidFill>
+            <a:srgbClr val="16161c"/>
+          </a:solidFill>
+          <a:ln>
+            <a:solidFill>
+              <a:srgbClr val="464655"/>
+            </a:solidFill>
+            <a:round/>
+          </a:ln>
+          <a:effectLst>
+            <a:outerShdw blurRad="39960" dir="5400000" dist="23040" rotWithShape="0">
+              <a:srgbClr val="000000">
+                <a:alpha val="35000"/>
+              </a:srgbClr>
+            </a:outerShdw>
+          </a:effectLst>
+        </p:spPr>
+        <p:style>
+          <a:lnRef idx="1">
+            <a:schemeClr val="accent1"/>
+          </a:lnRef>
+          <a:fillRef idx="3">
+            <a:schemeClr val="accent1"/>
+          </a:fillRef>
+          <a:effectRef idx="2">
+            <a:schemeClr val="accent1"/>
+          </a:effectRef>
+          <a:fontRef idx="minor"/>
+        </p:style>
+        <p:txBody>
+          <a:bodyPr lIns="90000" rIns="90000" tIns="45000" bIns="45000" anchor="ctr">
+            <a:noAutofit/>
+          </a:bodyPr>
+          <a:p>
+            <a:pPr algn="ctr">
+              <a:lnSpc>
+                <a:spcPct val="100000"/>
+              </a:lnSpc>
+            </a:pPr>
+            <a:r>
+              <a:rPr b="0" lang="en-US" sz="900" spc="-1" strike="noStrike">
+                <a:solidFill>
+                  <a:srgbClr val="78ffc8"/>
+                </a:solidFill>
+                <a:latin typeface="Consolas"/>
+                <a:ea typeface="DejaVu Sans"/>
+              </a:rPr>
+              <a:t>public class AritmetikDetaylar {</a:t>
+            </a:r>
+            <a:endParaRPr b="0" lang="en-US" sz="900" spc="-1" strike="noStrike">
+              <a:solidFill>
+                <a:srgbClr val="ffffff"/>
+              </a:solidFill>
+              <a:latin typeface="Arial"/>
+            </a:endParaRPr>
+          </a:p>
+          <a:p>
+            <a:pPr algn="ctr">
+              <a:lnSpc>
+                <a:spcPct val="100000"/>
+              </a:lnSpc>
+            </a:pPr>
+            <a:r>
+              <a:rPr b="0" lang="en-US" sz="900" spc="-1" strike="noStrike">
+                <a:solidFill>
+                  <a:srgbClr val="78ffc8"/>
+                </a:solidFill>
+                <a:latin typeface="Consolas"/>
+                <a:ea typeface="DejaVu Sans"/>
+              </a:rPr>
+              <a:t>    </a:t>
+            </a:r>
+            <a:r>
+              <a:rPr b="0" lang="en-US" sz="900" spc="-1" strike="noStrike">
+                <a:solidFill>
+                  <a:srgbClr val="78ffc8"/>
+                </a:solidFill>
+                <a:latin typeface="Consolas"/>
+                <a:ea typeface="DejaVu Sans"/>
+              </a:rPr>
+              <a:t>public static void main(String[] args) {</a:t>
+            </a:r>
+            <a:endParaRPr b="0" lang="en-US" sz="900" spc="-1" strike="noStrike">
+              <a:solidFill>
+                <a:srgbClr val="ffffff"/>
+              </a:solidFill>
+              <a:latin typeface="Arial"/>
+            </a:endParaRPr>
+          </a:p>
+          <a:p>
+            <a:pPr algn="ctr">
+              <a:lnSpc>
+                <a:spcPct val="100000"/>
+              </a:lnSpc>
+            </a:pPr>
+            <a:endParaRPr b="0" lang="en-US" sz="900" spc="-1" strike="noStrike">
+              <a:solidFill>
+                <a:srgbClr val="ffffff"/>
+              </a:solidFill>
+              <a:latin typeface="Arial"/>
+            </a:endParaRPr>
+          </a:p>
+          <a:p>
+            <a:pPr algn="ctr">
+              <a:lnSpc>
+                <a:spcPct val="100000"/>
+              </a:lnSpc>
+            </a:pPr>
+            <a:r>
+              <a:rPr b="0" lang="en-US" sz="900" spc="-1" strike="noStrike">
+                <a:solidFill>
+                  <a:srgbClr val="78ffc8"/>
+                </a:solidFill>
+                <a:latin typeface="Consolas"/>
+                <a:ea typeface="DejaVu Sans"/>
+              </a:rPr>
+              <a:t>        </a:t>
+            </a:r>
+            <a:r>
+              <a:rPr b="0" lang="en-US" sz="900" spc="-1" strike="noStrike">
+                <a:solidFill>
+                  <a:srgbClr val="78ffc8"/>
+                </a:solidFill>
+                <a:latin typeface="Consolas"/>
+                <a:ea typeface="DejaVu Sans"/>
+              </a:rPr>
+              <a:t>// 1. SIFIRA BÖLÜNME TUZAĞI</a:t>
+            </a:r>
+            <a:endParaRPr b="0" lang="en-US" sz="900" spc="-1" strike="noStrike">
+              <a:solidFill>
+                <a:srgbClr val="ffffff"/>
+              </a:solidFill>
+              <a:latin typeface="Arial"/>
+            </a:endParaRPr>
+          </a:p>
+          <a:p>
+            <a:pPr algn="ctr">
+              <a:lnSpc>
+                <a:spcPct val="100000"/>
+              </a:lnSpc>
+            </a:pPr>
+            <a:r>
+              <a:rPr b="0" lang="en-US" sz="900" spc="-1" strike="noStrike">
+                <a:solidFill>
+                  <a:srgbClr val="78ffc8"/>
+                </a:solidFill>
+                <a:latin typeface="Consolas"/>
+                <a:ea typeface="DejaVu Sans"/>
+              </a:rPr>
+              <a:t>        </a:t>
+            </a:r>
+            <a:r>
+              <a:rPr b="0" lang="en-US" sz="900" spc="-1" strike="noStrike">
+                <a:solidFill>
+                  <a:srgbClr val="78ffc8"/>
+                </a:solidFill>
+                <a:latin typeface="Consolas"/>
+                <a:ea typeface="DejaVu Sans"/>
+              </a:rPr>
+              <a:t>// int hata = 5 / 0; // Kodu çökertir!</a:t>
+            </a:r>
+            <a:endParaRPr b="0" lang="en-US" sz="900" spc="-1" strike="noStrike">
+              <a:solidFill>
+                <a:srgbClr val="ffffff"/>
+              </a:solidFill>
+              <a:latin typeface="Arial"/>
+            </a:endParaRPr>
+          </a:p>
+          <a:p>
+            <a:pPr algn="ctr">
+              <a:lnSpc>
+                <a:spcPct val="100000"/>
+              </a:lnSpc>
+            </a:pPr>
+            <a:r>
+              <a:rPr b="0" lang="en-US" sz="900" spc="-1" strike="noStrike">
+                <a:solidFill>
+                  <a:srgbClr val="78ffc8"/>
+                </a:solidFill>
+                <a:latin typeface="Consolas"/>
+                <a:ea typeface="DejaVu Sans"/>
+              </a:rPr>
+              <a:t>        </a:t>
+            </a:r>
+            <a:r>
+              <a:rPr b="0" lang="en-US" sz="900" spc="-1" strike="noStrike">
+                <a:solidFill>
+                  <a:srgbClr val="78ffc8"/>
+                </a:solidFill>
+                <a:latin typeface="Consolas"/>
+                <a:ea typeface="DejaVu Sans"/>
+              </a:rPr>
+              <a:t>double sonsuz = 5.0 / 0; // Infinity</a:t>
+            </a:r>
+            <a:endParaRPr b="0" lang="en-US" sz="900" spc="-1" strike="noStrike">
+              <a:solidFill>
+                <a:srgbClr val="ffffff"/>
+              </a:solidFill>
+              <a:latin typeface="Arial"/>
+            </a:endParaRPr>
+          </a:p>
+          <a:p>
+            <a:pPr algn="ctr">
+              <a:lnSpc>
+                <a:spcPct val="100000"/>
+              </a:lnSpc>
+            </a:pPr>
+            <a:r>
+              <a:rPr b="0" lang="en-US" sz="900" spc="-1" strike="noStrike">
+                <a:solidFill>
+                  <a:srgbClr val="78ffc8"/>
+                </a:solidFill>
+                <a:latin typeface="Consolas"/>
+                <a:ea typeface="DejaVu Sans"/>
+              </a:rPr>
+              <a:t>        </a:t>
+            </a:r>
+            <a:r>
+              <a:rPr b="0" lang="en-US" sz="900" spc="-1" strike="noStrike">
+                <a:solidFill>
+                  <a:srgbClr val="78ffc8"/>
+                </a:solidFill>
+                <a:latin typeface="Consolas"/>
+                <a:ea typeface="DejaVu Sans"/>
+              </a:rPr>
+              <a:t>double belirsiz = 0.0 / 0.0; // NaN</a:t>
+            </a:r>
+            <a:endParaRPr b="0" lang="en-US" sz="900" spc="-1" strike="noStrike">
+              <a:solidFill>
+                <a:srgbClr val="ffffff"/>
+              </a:solidFill>
+              <a:latin typeface="Arial"/>
+            </a:endParaRPr>
+          </a:p>
+          <a:p>
+            <a:pPr algn="ctr">
+              <a:lnSpc>
+                <a:spcPct val="100000"/>
+              </a:lnSpc>
+            </a:pPr>
+            <a:endParaRPr b="0" lang="en-US" sz="900" spc="-1" strike="noStrike">
+              <a:solidFill>
+                <a:srgbClr val="ffffff"/>
+              </a:solidFill>
+              <a:latin typeface="Arial"/>
+            </a:endParaRPr>
+          </a:p>
+          <a:p>
+            <a:pPr algn="ctr">
+              <a:lnSpc>
+                <a:spcPct val="100000"/>
+              </a:lnSpc>
+            </a:pPr>
+            <a:r>
+              <a:rPr b="0" lang="en-US" sz="900" spc="-1" strike="noStrike">
+                <a:solidFill>
+                  <a:srgbClr val="78ffc8"/>
+                </a:solidFill>
+                <a:latin typeface="Consolas"/>
+                <a:ea typeface="DejaVu Sans"/>
+              </a:rPr>
+              <a:t>        </a:t>
+            </a:r>
+            <a:r>
+              <a:rPr b="0" lang="en-US" sz="900" spc="-1" strike="noStrike">
+                <a:solidFill>
+                  <a:srgbClr val="78ffc8"/>
+                </a:solidFill>
+                <a:latin typeface="Consolas"/>
+                <a:ea typeface="DejaVu Sans"/>
+              </a:rPr>
+              <a:t>// 2. CHAR (KARAKTER) MATEMATİĞİ</a:t>
+            </a:r>
+            <a:endParaRPr b="0" lang="en-US" sz="900" spc="-1" strike="noStrike">
+              <a:solidFill>
+                <a:srgbClr val="ffffff"/>
+              </a:solidFill>
+              <a:latin typeface="Arial"/>
+            </a:endParaRPr>
+          </a:p>
+          <a:p>
+            <a:pPr algn="ctr">
+              <a:lnSpc>
+                <a:spcPct val="100000"/>
+              </a:lnSpc>
+            </a:pPr>
+            <a:r>
+              <a:rPr b="0" lang="en-US" sz="900" spc="-1" strike="noStrike">
+                <a:solidFill>
+                  <a:srgbClr val="78ffc8"/>
+                </a:solidFill>
+                <a:latin typeface="Consolas"/>
+                <a:ea typeface="DejaVu Sans"/>
+              </a:rPr>
+              <a:t>        </a:t>
+            </a:r>
+            <a:r>
+              <a:rPr b="0" lang="en-US" sz="900" spc="-1" strike="noStrike">
+                <a:solidFill>
+                  <a:srgbClr val="78ffc8"/>
+                </a:solidFill>
+                <a:latin typeface="Consolas"/>
+                <a:ea typeface="DejaVu Sans"/>
+              </a:rPr>
+              <a:t>char harf = 'A'; // ASCII değeri 65</a:t>
+            </a:r>
+            <a:endParaRPr b="0" lang="en-US" sz="900" spc="-1" strike="noStrike">
+              <a:solidFill>
+                <a:srgbClr val="ffffff"/>
+              </a:solidFill>
+              <a:latin typeface="Arial"/>
+            </a:endParaRPr>
+          </a:p>
+          <a:p>
+            <a:pPr algn="ctr">
+              <a:lnSpc>
+                <a:spcPct val="100000"/>
+              </a:lnSpc>
+            </a:pPr>
+            <a:r>
+              <a:rPr b="0" lang="en-US" sz="900" spc="-1" strike="noStrike">
+                <a:solidFill>
+                  <a:srgbClr val="78ffc8"/>
+                </a:solidFill>
+                <a:latin typeface="Consolas"/>
+                <a:ea typeface="DejaVu Sans"/>
+              </a:rPr>
+              <a:t>        </a:t>
+            </a:r>
+            <a:r>
+              <a:rPr b="0" lang="en-US" sz="900" spc="-1" strike="noStrike">
+                <a:solidFill>
+                  <a:srgbClr val="78ffc8"/>
+                </a:solidFill>
+                <a:latin typeface="Consolas"/>
+                <a:ea typeface="DejaVu Sans"/>
+              </a:rPr>
+              <a:t>int charToplami = harf + 5; // Sonuç: 70</a:t>
+            </a:r>
+            <a:endParaRPr b="0" lang="en-US" sz="900" spc="-1" strike="noStrike">
+              <a:solidFill>
+                <a:srgbClr val="ffffff"/>
+              </a:solidFill>
+              <a:latin typeface="Arial"/>
+            </a:endParaRPr>
+          </a:p>
+          <a:p>
+            <a:pPr algn="ctr">
+              <a:lnSpc>
+                <a:spcPct val="100000"/>
+              </a:lnSpc>
+            </a:pPr>
+            <a:r>
+              <a:rPr b="0" lang="en-US" sz="900" spc="-1" strike="noStrike">
+                <a:solidFill>
+                  <a:srgbClr val="78ffc8"/>
+                </a:solidFill>
+                <a:latin typeface="Consolas"/>
+                <a:ea typeface="DejaVu Sans"/>
+              </a:rPr>
+              <a:t>        </a:t>
+            </a:r>
+            <a:r>
+              <a:rPr b="0" lang="en-US" sz="900" spc="-1" strike="noStrike">
+                <a:solidFill>
+                  <a:srgbClr val="78ffc8"/>
+                </a:solidFill>
+                <a:latin typeface="Consolas"/>
+                <a:ea typeface="DejaVu Sans"/>
+              </a:rPr>
+              <a:t>char siradakiHarf = (char) (harf + 1); // 'B'</a:t>
+            </a:r>
+            <a:endParaRPr b="0" lang="en-US" sz="900" spc="-1" strike="noStrike">
+              <a:solidFill>
+                <a:srgbClr val="ffffff"/>
+              </a:solidFill>
+              <a:latin typeface="Arial"/>
+            </a:endParaRPr>
+          </a:p>
+          <a:p>
+            <a:pPr algn="ctr">
+              <a:lnSpc>
+                <a:spcPct val="100000"/>
+              </a:lnSpc>
+            </a:pPr>
+            <a:endParaRPr b="0" lang="en-US" sz="900" spc="-1" strike="noStrike">
+              <a:solidFill>
+                <a:srgbClr val="ffffff"/>
+              </a:solidFill>
+              <a:latin typeface="Arial"/>
+            </a:endParaRPr>
+          </a:p>
+          <a:p>
+            <a:pPr algn="ctr">
+              <a:lnSpc>
+                <a:spcPct val="100000"/>
+              </a:lnSpc>
+            </a:pPr>
+            <a:r>
+              <a:rPr b="0" lang="en-US" sz="900" spc="-1" strike="noStrike">
+                <a:solidFill>
+                  <a:srgbClr val="78ffc8"/>
+                </a:solidFill>
+                <a:latin typeface="Consolas"/>
+                <a:ea typeface="DejaVu Sans"/>
+              </a:rPr>
+              <a:t>        </a:t>
+            </a:r>
+            <a:r>
+              <a:rPr b="0" lang="en-US" sz="900" spc="-1" strike="noStrike">
+                <a:solidFill>
+                  <a:srgbClr val="78ffc8"/>
+                </a:solidFill>
+                <a:latin typeface="Consolas"/>
+                <a:ea typeface="DejaVu Sans"/>
+              </a:rPr>
+              <a:t>// 3. GİZLİ INT TERFİSİ</a:t>
+            </a:r>
+            <a:endParaRPr b="0" lang="en-US" sz="900" spc="-1" strike="noStrike">
+              <a:solidFill>
+                <a:srgbClr val="ffffff"/>
+              </a:solidFill>
+              <a:latin typeface="Arial"/>
+            </a:endParaRPr>
+          </a:p>
+          <a:p>
+            <a:pPr algn="ctr">
+              <a:lnSpc>
+                <a:spcPct val="100000"/>
+              </a:lnSpc>
+            </a:pPr>
+            <a:r>
+              <a:rPr b="0" lang="en-US" sz="900" spc="-1" strike="noStrike">
+                <a:solidFill>
+                  <a:srgbClr val="78ffc8"/>
+                </a:solidFill>
+                <a:latin typeface="Consolas"/>
+                <a:ea typeface="DejaVu Sans"/>
+              </a:rPr>
+              <a:t>        </a:t>
+            </a:r>
+            <a:r>
+              <a:rPr b="0" lang="en-US" sz="900" spc="-1" strike="noStrike">
+                <a:solidFill>
+                  <a:srgbClr val="78ffc8"/>
+                </a:solidFill>
+                <a:latin typeface="Consolas"/>
+                <a:ea typeface="DejaVu Sans"/>
+              </a:rPr>
+              <a:t>byte b1 = 10;</a:t>
+            </a:r>
+            <a:endParaRPr b="0" lang="en-US" sz="900" spc="-1" strike="noStrike">
+              <a:solidFill>
+                <a:srgbClr val="ffffff"/>
+              </a:solidFill>
+              <a:latin typeface="Arial"/>
+            </a:endParaRPr>
+          </a:p>
+          <a:p>
+            <a:pPr algn="ctr">
+              <a:lnSpc>
+                <a:spcPct val="100000"/>
+              </a:lnSpc>
+            </a:pPr>
+            <a:r>
+              <a:rPr b="0" lang="en-US" sz="900" spc="-1" strike="noStrike">
+                <a:solidFill>
+                  <a:srgbClr val="78ffc8"/>
+                </a:solidFill>
+                <a:latin typeface="Consolas"/>
+                <a:ea typeface="DejaVu Sans"/>
+              </a:rPr>
+              <a:t>        </a:t>
+            </a:r>
+            <a:r>
+              <a:rPr b="0" lang="en-US" sz="900" spc="-1" strike="noStrike">
+                <a:solidFill>
+                  <a:srgbClr val="78ffc8"/>
+                </a:solidFill>
+                <a:latin typeface="Consolas"/>
+                <a:ea typeface="DejaVu Sans"/>
+              </a:rPr>
+              <a:t>byte b2 = 20;</a:t>
+            </a:r>
+            <a:endParaRPr b="0" lang="en-US" sz="900" spc="-1" strike="noStrike">
+              <a:solidFill>
+                <a:srgbClr val="ffffff"/>
+              </a:solidFill>
+              <a:latin typeface="Arial"/>
+            </a:endParaRPr>
+          </a:p>
+          <a:p>
+            <a:pPr algn="ctr">
+              <a:lnSpc>
+                <a:spcPct val="100000"/>
+              </a:lnSpc>
+            </a:pPr>
+            <a:r>
+              <a:rPr b="0" lang="en-US" sz="900" spc="-1" strike="noStrike">
+                <a:solidFill>
+                  <a:srgbClr val="78ffc8"/>
+                </a:solidFill>
+                <a:latin typeface="Consolas"/>
+                <a:ea typeface="DejaVu Sans"/>
+              </a:rPr>
+              <a:t>        </a:t>
+            </a:r>
+            <a:r>
+              <a:rPr b="0" lang="en-US" sz="900" spc="-1" strike="noStrike">
+                <a:solidFill>
+                  <a:srgbClr val="78ffc8"/>
+                </a:solidFill>
+                <a:latin typeface="Consolas"/>
+                <a:ea typeface="DejaVu Sans"/>
+              </a:rPr>
+              <a:t>// byte b3 = b1 + b2; // Derleme Hatası!</a:t>
+            </a:r>
+            <a:endParaRPr b="0" lang="en-US" sz="900" spc="-1" strike="noStrike">
+              <a:solidFill>
+                <a:srgbClr val="ffffff"/>
+              </a:solidFill>
+              <a:latin typeface="Arial"/>
+            </a:endParaRPr>
+          </a:p>
+          <a:p>
+            <a:pPr algn="ctr">
+              <a:lnSpc>
+                <a:spcPct val="100000"/>
+              </a:lnSpc>
+            </a:pPr>
+            <a:r>
+              <a:rPr b="0" lang="en-US" sz="900" spc="-1" strike="noStrike">
+                <a:solidFill>
+                  <a:srgbClr val="78ffc8"/>
+                </a:solidFill>
+                <a:latin typeface="Consolas"/>
+                <a:ea typeface="DejaVu Sans"/>
+              </a:rPr>
+              <a:t>        </a:t>
+            </a:r>
+            <a:r>
+              <a:rPr b="0" lang="en-US" sz="900" spc="-1" strike="noStrike">
+                <a:solidFill>
+                  <a:srgbClr val="78ffc8"/>
+                </a:solidFill>
+                <a:latin typeface="Consolas"/>
+                <a:ea typeface="DejaVu Sans"/>
+              </a:rPr>
+              <a:t>int toplam = b1 + b2; // Doğrusu budur</a:t>
+            </a:r>
+            <a:endParaRPr b="0" lang="en-US" sz="900" spc="-1" strike="noStrike">
+              <a:solidFill>
+                <a:srgbClr val="ffffff"/>
+              </a:solidFill>
+              <a:latin typeface="Arial"/>
+            </a:endParaRPr>
+          </a:p>
+          <a:p>
+            <a:pPr algn="ctr">
+              <a:lnSpc>
+                <a:spcPct val="100000"/>
+              </a:lnSpc>
+            </a:pPr>
+            <a:r>
+              <a:rPr b="0" lang="en-US" sz="900" spc="-1" strike="noStrike">
+                <a:solidFill>
+                  <a:srgbClr val="78ffc8"/>
+                </a:solidFill>
+                <a:latin typeface="Consolas"/>
+                <a:ea typeface="DejaVu Sans"/>
+              </a:rPr>
+              <a:t>        </a:t>
+            </a:r>
+            <a:endParaRPr b="0" lang="en-US" sz="900" spc="-1" strike="noStrike">
+              <a:solidFill>
+                <a:srgbClr val="ffffff"/>
+              </a:solidFill>
+              <a:latin typeface="Arial"/>
+            </a:endParaRPr>
+          </a:p>
+          <a:p>
+            <a:pPr algn="ctr">
+              <a:lnSpc>
+                <a:spcPct val="100000"/>
+              </a:lnSpc>
+            </a:pPr>
+            <a:r>
+              <a:rPr b="0" lang="en-US" sz="900" spc="-1" strike="noStrike">
+                <a:solidFill>
+                  <a:srgbClr val="78ffc8"/>
+                </a:solidFill>
+                <a:latin typeface="Consolas"/>
+                <a:ea typeface="DejaVu Sans"/>
+              </a:rPr>
+              <a:t>        </a:t>
+            </a:r>
+            <a:r>
+              <a:rPr b="0" lang="en-US" sz="900" spc="-1" strike="noStrike">
+                <a:solidFill>
+                  <a:srgbClr val="78ffc8"/>
+                </a:solidFill>
+                <a:latin typeface="Consolas"/>
+                <a:ea typeface="DejaVu Sans"/>
+              </a:rPr>
+              <a:t>System.out.println("5.0 / 0 = " + sonsuz);</a:t>
+            </a:r>
+            <a:endParaRPr b="0" lang="en-US" sz="900" spc="-1" strike="noStrike">
+              <a:solidFill>
+                <a:srgbClr val="ffffff"/>
+              </a:solidFill>
+              <a:latin typeface="Arial"/>
+            </a:endParaRPr>
+          </a:p>
+          <a:p>
+            <a:pPr algn="ctr">
+              <a:lnSpc>
+                <a:spcPct val="100000"/>
+              </a:lnSpc>
+            </a:pPr>
+            <a:r>
+              <a:rPr b="0" lang="en-US" sz="900" spc="-1" strike="noStrike">
+                <a:solidFill>
+                  <a:srgbClr val="78ffc8"/>
+                </a:solidFill>
+                <a:latin typeface="Consolas"/>
+                <a:ea typeface="DejaVu Sans"/>
+              </a:rPr>
+              <a:t>        </a:t>
+            </a:r>
+            <a:r>
+              <a:rPr b="0" lang="en-US" sz="900" spc="-1" strike="noStrike">
+                <a:solidFill>
+                  <a:srgbClr val="78ffc8"/>
+                </a:solidFill>
+                <a:latin typeface="Consolas"/>
+                <a:ea typeface="DejaVu Sans"/>
+              </a:rPr>
+              <a:t>System.out.println("0.0 / 0.0 = " + belirsiz);</a:t>
+            </a:r>
+            <a:endParaRPr b="0" lang="en-US" sz="900" spc="-1" strike="noStrike">
+              <a:solidFill>
+                <a:srgbClr val="ffffff"/>
+              </a:solidFill>
+              <a:latin typeface="Arial"/>
+            </a:endParaRPr>
+          </a:p>
+          <a:p>
+            <a:pPr algn="ctr">
+              <a:lnSpc>
+                <a:spcPct val="100000"/>
+              </a:lnSpc>
+            </a:pPr>
+            <a:r>
+              <a:rPr b="0" lang="en-US" sz="900" spc="-1" strike="noStrike">
+                <a:solidFill>
+                  <a:srgbClr val="78ffc8"/>
+                </a:solidFill>
+                <a:latin typeface="Consolas"/>
+                <a:ea typeface="DejaVu Sans"/>
+              </a:rPr>
+              <a:t>        </a:t>
+            </a:r>
+            <a:r>
+              <a:rPr b="0" lang="en-US" sz="900" spc="-1" strike="noStrike">
+                <a:solidFill>
+                  <a:srgbClr val="78ffc8"/>
+                </a:solidFill>
+                <a:latin typeface="Consolas"/>
+                <a:ea typeface="DejaVu Sans"/>
+              </a:rPr>
+              <a:t>System.out.println("Harf + 5 = " + charToplami);</a:t>
+            </a:r>
+            <a:endParaRPr b="0" lang="en-US" sz="900" spc="-1" strike="noStrike">
+              <a:solidFill>
+                <a:srgbClr val="ffffff"/>
+              </a:solidFill>
+              <a:latin typeface="Arial"/>
+            </a:endParaRPr>
+          </a:p>
+          <a:p>
+            <a:pPr algn="ctr">
+              <a:lnSpc>
+                <a:spcPct val="100000"/>
+              </a:lnSpc>
+            </a:pPr>
+            <a:r>
+              <a:rPr b="0" lang="en-US" sz="900" spc="-1" strike="noStrike">
+                <a:solidFill>
+                  <a:srgbClr val="78ffc8"/>
+                </a:solidFill>
+                <a:latin typeface="Consolas"/>
+                <a:ea typeface="DejaVu Sans"/>
+              </a:rPr>
+              <a:t>    </a:t>
+            </a:r>
+            <a:r>
+              <a:rPr b="0" lang="en-US" sz="900" spc="-1" strike="noStrike">
+                <a:solidFill>
+                  <a:srgbClr val="78ffc8"/>
+                </a:solidFill>
+                <a:latin typeface="Consolas"/>
+                <a:ea typeface="DejaVu Sans"/>
+              </a:rPr>
+              <a:t>}</a:t>
+            </a:r>
+            <a:endParaRPr b="0" lang="en-US" sz="900" spc="-1" strike="noStrike">
+              <a:solidFill>
+                <a:srgbClr val="ffffff"/>
+              </a:solidFill>
+              <a:latin typeface="Arial"/>
+            </a:endParaRPr>
+          </a:p>
+          <a:p>
+            <a:pPr algn="ctr">
+              <a:lnSpc>
+                <a:spcPct val="100000"/>
+              </a:lnSpc>
+            </a:pPr>
+            <a:r>
+              <a:rPr b="0" lang="en-US" sz="900" spc="-1" strike="noStrike">
+                <a:solidFill>
+                  <a:srgbClr val="78ffc8"/>
+                </a:solidFill>
+                <a:latin typeface="Consolas"/>
+                <a:ea typeface="DejaVu Sans"/>
+              </a:rPr>
+              <a:t>}</a:t>
+            </a:r>
+            <a:endParaRPr b="0" lang="en-US" sz="900" spc="-1" strike="noStrike">
+              <a:solidFill>
+                <a:srgbClr val="ffffff"/>
+              </a:solidFill>
+              <a:latin typeface="Arial"/>
+            </a:endParaRPr>
+          </a:p>
+        </p:txBody>
+      </p:sp>
+      <p:sp>
+        <p:nvSpPr>
+          <p:cNvPr id="352" name="TextBox 39"/>
           <p:cNvSpPr/>
           <p:nvPr/>
         </p:nvSpPr>
@@ -10670,7 +13493,7 @@
         <p:spPr>
           <a:xfrm>
             <a:off x="0" y="0"/>
-            <a:ext cx="12184200" cy="6853320"/>
+            <a:ext cx="12183840" cy="6852960"/>
           </a:xfrm>
           <a:prstGeom prst="rect">
             <a:avLst/>
@@ -10730,7 +13553,7 @@
         <p:spPr>
           <a:xfrm>
             <a:off x="0" y="0"/>
-            <a:ext cx="13680" cy="6853320"/>
+            <a:ext cx="13320" cy="6852960"/>
           </a:xfrm>
           <a:prstGeom prst="rect">
             <a:avLst/>
@@ -10790,7 +13613,7 @@
         <p:spPr>
           <a:xfrm>
             <a:off x="914400" y="0"/>
-            <a:ext cx="13680" cy="6853320"/>
+            <a:ext cx="13320" cy="6852960"/>
           </a:xfrm>
           <a:prstGeom prst="rect">
             <a:avLst/>
@@ -10850,7 +13673,7 @@
         <p:spPr>
           <a:xfrm>
             <a:off x="1828800" y="0"/>
-            <a:ext cx="13680" cy="6853320"/>
+            <a:ext cx="13320" cy="6852960"/>
           </a:xfrm>
           <a:prstGeom prst="rect">
             <a:avLst/>
@@ -10910,7 +13733,7 @@
         <p:spPr>
           <a:xfrm>
             <a:off x="2743200" y="0"/>
-            <a:ext cx="13680" cy="6853320"/>
+            <a:ext cx="13320" cy="6852960"/>
           </a:xfrm>
           <a:prstGeom prst="rect">
             <a:avLst/>
@@ -10970,7 +13793,7 @@
         <p:spPr>
           <a:xfrm>
             <a:off x="3657600" y="0"/>
-            <a:ext cx="13680" cy="6853320"/>
+            <a:ext cx="13320" cy="6852960"/>
           </a:xfrm>
           <a:prstGeom prst="rect">
             <a:avLst/>
@@ -11030,7 +13853,7 @@
         <p:spPr>
           <a:xfrm>
             <a:off x="4572000" y="0"/>
-            <a:ext cx="13680" cy="6853320"/>
+            <a:ext cx="13320" cy="6852960"/>
           </a:xfrm>
           <a:prstGeom prst="rect">
             <a:avLst/>
@@ -11090,7 +13913,7 @@
         <p:spPr>
           <a:xfrm>
             <a:off x="5486400" y="0"/>
-            <a:ext cx="13680" cy="6853320"/>
+            <a:ext cx="13320" cy="6852960"/>
           </a:xfrm>
           <a:prstGeom prst="rect">
             <a:avLst/>
@@ -11150,7 +13973,7 @@
         <p:spPr>
           <a:xfrm>
             <a:off x="6400800" y="0"/>
-            <a:ext cx="13680" cy="6853320"/>
+            <a:ext cx="13320" cy="6852960"/>
           </a:xfrm>
           <a:prstGeom prst="rect">
             <a:avLst/>
@@ -11210,7 +14033,7 @@
         <p:spPr>
           <a:xfrm>
             <a:off x="7315200" y="0"/>
-            <a:ext cx="13680" cy="6853320"/>
+            <a:ext cx="13320" cy="6852960"/>
           </a:xfrm>
           <a:prstGeom prst="rect">
             <a:avLst/>
@@ -11270,7 +14093,7 @@
         <p:spPr>
           <a:xfrm>
             <a:off x="8229600" y="0"/>
-            <a:ext cx="13680" cy="6853320"/>
+            <a:ext cx="13320" cy="6852960"/>
           </a:xfrm>
           <a:prstGeom prst="rect">
             <a:avLst/>
@@ -11330,7 +14153,7 @@
         <p:spPr>
           <a:xfrm>
             <a:off x="9144000" y="0"/>
-            <a:ext cx="13680" cy="6853320"/>
+            <a:ext cx="13320" cy="6852960"/>
           </a:xfrm>
           <a:prstGeom prst="rect">
             <a:avLst/>
@@ -11390,7 +14213,7 @@
         <p:spPr>
           <a:xfrm>
             <a:off x="10058400" y="0"/>
-            <a:ext cx="13680" cy="6853320"/>
+            <a:ext cx="13320" cy="6852960"/>
           </a:xfrm>
           <a:prstGeom prst="rect">
             <a:avLst/>
@@ -11450,7 +14273,7 @@
         <p:spPr>
           <a:xfrm>
             <a:off x="10972800" y="0"/>
-            <a:ext cx="13680" cy="6853320"/>
+            <a:ext cx="13320" cy="6852960"/>
           </a:xfrm>
           <a:prstGeom prst="rect">
             <a:avLst/>
@@ -11510,7 +14333,7 @@
         <p:spPr>
           <a:xfrm>
             <a:off x="11887200" y="0"/>
-            <a:ext cx="13680" cy="6853320"/>
+            <a:ext cx="13320" cy="6852960"/>
           </a:xfrm>
           <a:prstGeom prst="rect">
             <a:avLst/>
@@ -11570,7 +14393,7 @@
         <p:spPr>
           <a:xfrm>
             <a:off x="0" y="0"/>
-            <a:ext cx="315360" cy="6853320"/>
+            <a:ext cx="315000" cy="6852960"/>
           </a:xfrm>
           <a:prstGeom prst="rect">
             <a:avLst/>
@@ -11630,7 +14453,7 @@
         <p:spPr>
           <a:xfrm>
             <a:off x="9875520" y="365760"/>
-            <a:ext cx="2007000" cy="498240"/>
+            <a:ext cx="2006640" cy="497880"/>
           </a:xfrm>
           <a:prstGeom prst="roundRect">
             <a:avLst>
@@ -11858,7 +14681,7 @@
         <p:spPr>
           <a:xfrm>
             <a:off x="987480" y="3182040"/>
-            <a:ext cx="3287160" cy="2738520"/>
+            <a:ext cx="3286800" cy="2738160"/>
           </a:xfrm>
           <a:prstGeom prst="roundRect">
             <a:avLst>
@@ -11920,7 +14743,7 @@
         <p:spPr>
           <a:xfrm>
             <a:off x="914400" y="3108960"/>
-            <a:ext cx="3287160" cy="2738520"/>
+            <a:ext cx="3286800" cy="2738160"/>
           </a:xfrm>
           <a:prstGeom prst="roundRect">
             <a:avLst>
@@ -12083,7 +14906,7 @@
         <p:spPr>
           <a:xfrm>
             <a:off x="4507920" y="3182040"/>
-            <a:ext cx="3287160" cy="2738520"/>
+            <a:ext cx="3286800" cy="2738160"/>
           </a:xfrm>
           <a:prstGeom prst="roundRect">
             <a:avLst>
@@ -12145,7 +14968,7 @@
         <p:spPr>
           <a:xfrm>
             <a:off x="4434840" y="3108960"/>
-            <a:ext cx="3287160" cy="2738520"/>
+            <a:ext cx="3286800" cy="2738160"/>
           </a:xfrm>
           <a:prstGeom prst="roundRect">
             <a:avLst>
@@ -12403,7 +15226,7 @@
         <p:spPr>
           <a:xfrm>
             <a:off x="8028360" y="3182040"/>
-            <a:ext cx="3287160" cy="2738520"/>
+            <a:ext cx="3286800" cy="2738160"/>
           </a:xfrm>
           <a:prstGeom prst="roundRect">
             <a:avLst>
@@ -12465,7 +15288,7 @@
         <p:spPr>
           <a:xfrm>
             <a:off x="7955280" y="3108960"/>
-            <a:ext cx="3699720" cy="3059640"/>
+            <a:ext cx="3699360" cy="3059280"/>
           </a:xfrm>
           <a:prstGeom prst="roundRect">
             <a:avLst>
@@ -12910,7 +15733,7 @@
         <p:spPr>
           <a:xfrm>
             <a:off x="0" y="0"/>
-            <a:ext cx="12184200" cy="6853320"/>
+            <a:ext cx="12183840" cy="6852960"/>
           </a:xfrm>
           <a:prstGeom prst="rect">
             <a:avLst/>
@@ -12970,7 +15793,7 @@
         <p:spPr>
           <a:xfrm>
             <a:off x="0" y="0"/>
-            <a:ext cx="13680" cy="6853320"/>
+            <a:ext cx="13320" cy="6852960"/>
           </a:xfrm>
           <a:prstGeom prst="rect">
             <a:avLst/>
@@ -13030,7 +15853,7 @@
         <p:spPr>
           <a:xfrm>
             <a:off x="914400" y="0"/>
-            <a:ext cx="13680" cy="6853320"/>
+            <a:ext cx="13320" cy="6852960"/>
           </a:xfrm>
           <a:prstGeom prst="rect">
             <a:avLst/>
@@ -13090,7 +15913,7 @@
         <p:spPr>
           <a:xfrm>
             <a:off x="1828800" y="0"/>
-            <a:ext cx="13680" cy="6853320"/>
+            <a:ext cx="13320" cy="6852960"/>
           </a:xfrm>
           <a:prstGeom prst="rect">
             <a:avLst/>
@@ -13150,7 +15973,7 @@
         <p:spPr>
           <a:xfrm>
             <a:off x="2743200" y="0"/>
-            <a:ext cx="13680" cy="6853320"/>
+            <a:ext cx="13320" cy="6852960"/>
           </a:xfrm>
           <a:prstGeom prst="rect">
             <a:avLst/>
@@ -13210,7 +16033,7 @@
         <p:spPr>
           <a:xfrm>
             <a:off x="3657600" y="0"/>
-            <a:ext cx="13680" cy="6853320"/>
+            <a:ext cx="13320" cy="6852960"/>
           </a:xfrm>
           <a:prstGeom prst="rect">
             <a:avLst/>
@@ -13270,7 +16093,7 @@
         <p:spPr>
           <a:xfrm>
             <a:off x="4572000" y="0"/>
-            <a:ext cx="13680" cy="6853320"/>
+            <a:ext cx="13320" cy="6852960"/>
           </a:xfrm>
           <a:prstGeom prst="rect">
             <a:avLst/>
@@ -13330,7 +16153,7 @@
         <p:spPr>
           <a:xfrm>
             <a:off x="5486400" y="0"/>
-            <a:ext cx="13680" cy="6853320"/>
+            <a:ext cx="13320" cy="6852960"/>
           </a:xfrm>
           <a:prstGeom prst="rect">
             <a:avLst/>
@@ -13390,7 +16213,7 @@
         <p:spPr>
           <a:xfrm>
             <a:off x="6400800" y="0"/>
-            <a:ext cx="13680" cy="6853320"/>
+            <a:ext cx="13320" cy="6852960"/>
           </a:xfrm>
           <a:prstGeom prst="rect">
             <a:avLst/>
@@ -13450,7 +16273,7 @@
         <p:spPr>
           <a:xfrm>
             <a:off x="7315200" y="0"/>
-            <a:ext cx="13680" cy="6853320"/>
+            <a:ext cx="13320" cy="6852960"/>
           </a:xfrm>
           <a:prstGeom prst="rect">
             <a:avLst/>
@@ -13510,7 +16333,7 @@
         <p:spPr>
           <a:xfrm>
             <a:off x="8229600" y="0"/>
-            <a:ext cx="13680" cy="6853320"/>
+            <a:ext cx="13320" cy="6852960"/>
           </a:xfrm>
           <a:prstGeom prst="rect">
             <a:avLst/>
@@ -13570,7 +16393,7 @@
         <p:spPr>
           <a:xfrm>
             <a:off x="9144000" y="0"/>
-            <a:ext cx="13680" cy="6853320"/>
+            <a:ext cx="13320" cy="6852960"/>
           </a:xfrm>
           <a:prstGeom prst="rect">
             <a:avLst/>
@@ -13630,7 +16453,7 @@
         <p:spPr>
           <a:xfrm>
             <a:off x="10058400" y="0"/>
-            <a:ext cx="13680" cy="6853320"/>
+            <a:ext cx="13320" cy="6852960"/>
           </a:xfrm>
           <a:prstGeom prst="rect">
             <a:avLst/>
@@ -13690,7 +16513,7 @@
         <p:spPr>
           <a:xfrm>
             <a:off x="10972800" y="0"/>
-            <a:ext cx="13680" cy="6853320"/>
+            <a:ext cx="13320" cy="6852960"/>
           </a:xfrm>
           <a:prstGeom prst="rect">
             <a:avLst/>
@@ -13750,7 +16573,7 @@
         <p:spPr>
           <a:xfrm>
             <a:off x="11887200" y="0"/>
-            <a:ext cx="13680" cy="6853320"/>
+            <a:ext cx="13320" cy="6852960"/>
           </a:xfrm>
           <a:prstGeom prst="rect">
             <a:avLst/>
@@ -13810,7 +16633,7 @@
         <p:spPr>
           <a:xfrm>
             <a:off x="0" y="0"/>
-            <a:ext cx="315360" cy="6853320"/>
+            <a:ext cx="315000" cy="6852960"/>
           </a:xfrm>
           <a:prstGeom prst="rect">
             <a:avLst/>
@@ -13870,7 +16693,7 @@
         <p:spPr>
           <a:xfrm>
             <a:off x="9875520" y="365760"/>
-            <a:ext cx="2007000" cy="498240"/>
+            <a:ext cx="2006640" cy="497880"/>
           </a:xfrm>
           <a:prstGeom prst="roundRect">
             <a:avLst>
@@ -14075,7 +16898,7 @@
         <p:spPr>
           <a:xfrm>
             <a:off x="987480" y="3182040"/>
-            <a:ext cx="3287160" cy="2738520"/>
+            <a:ext cx="3286800" cy="2738160"/>
           </a:xfrm>
           <a:prstGeom prst="roundRect">
             <a:avLst>
@@ -14137,7 +16960,7 @@
         <p:spPr>
           <a:xfrm>
             <a:off x="914400" y="3108960"/>
-            <a:ext cx="3287160" cy="3060000"/>
+            <a:ext cx="3286800" cy="3059640"/>
           </a:xfrm>
           <a:prstGeom prst="roundRect">
             <a:avLst>
@@ -14328,7 +17151,7 @@
         <p:spPr>
           <a:xfrm>
             <a:off x="4507920" y="3182040"/>
-            <a:ext cx="3287160" cy="2738520"/>
+            <a:ext cx="3286800" cy="2738160"/>
           </a:xfrm>
           <a:prstGeom prst="roundRect">
             <a:avLst>
@@ -14390,7 +17213,7 @@
         <p:spPr>
           <a:xfrm>
             <a:off x="4434840" y="3108960"/>
-            <a:ext cx="3287160" cy="2738520"/>
+            <a:ext cx="3286800" cy="2738160"/>
           </a:xfrm>
           <a:prstGeom prst="roundRect">
             <a:avLst>
@@ -14648,7 +17471,7 @@
         <p:spPr>
           <a:xfrm>
             <a:off x="8028360" y="3182040"/>
-            <a:ext cx="3287160" cy="2738520"/>
+            <a:ext cx="3286800" cy="2738160"/>
           </a:xfrm>
           <a:prstGeom prst="roundRect">
             <a:avLst>
@@ -14710,7 +17533,7 @@
         <p:spPr>
           <a:xfrm>
             <a:off x="7955280" y="3108960"/>
-            <a:ext cx="3699720" cy="3059640"/>
+            <a:ext cx="3699360" cy="3059280"/>
           </a:xfrm>
           <a:prstGeom prst="roundRect">
             <a:avLst>
@@ -15155,7 +17978,7 @@
         <p:spPr>
           <a:xfrm>
             <a:off x="0" y="0"/>
-            <a:ext cx="12184200" cy="6853320"/>
+            <a:ext cx="12183840" cy="6852960"/>
           </a:xfrm>
           <a:prstGeom prst="rect">
             <a:avLst/>
@@ -15215,7 +18038,7 @@
         <p:spPr>
           <a:xfrm>
             <a:off x="0" y="0"/>
-            <a:ext cx="13680" cy="6853320"/>
+            <a:ext cx="13320" cy="6852960"/>
           </a:xfrm>
           <a:prstGeom prst="rect">
             <a:avLst/>
@@ -15275,7 +18098,7 @@
         <p:spPr>
           <a:xfrm>
             <a:off x="914400" y="0"/>
-            <a:ext cx="13680" cy="6853320"/>
+            <a:ext cx="13320" cy="6852960"/>
           </a:xfrm>
           <a:prstGeom prst="rect">
             <a:avLst/>
@@ -15335,7 +18158,7 @@
         <p:spPr>
           <a:xfrm>
             <a:off x="1828800" y="0"/>
-            <a:ext cx="13680" cy="6853320"/>
+            <a:ext cx="13320" cy="6852960"/>
           </a:xfrm>
           <a:prstGeom prst="rect">
             <a:avLst/>
@@ -15395,7 +18218,7 @@
         <p:spPr>
           <a:xfrm>
             <a:off x="2743200" y="0"/>
-            <a:ext cx="13680" cy="6853320"/>
+            <a:ext cx="13320" cy="6852960"/>
           </a:xfrm>
           <a:prstGeom prst="rect">
             <a:avLst/>
@@ -15455,7 +18278,7 @@
         <p:spPr>
           <a:xfrm>
             <a:off x="3657600" y="0"/>
-            <a:ext cx="13680" cy="6853320"/>
+            <a:ext cx="13320" cy="6852960"/>
           </a:xfrm>
           <a:prstGeom prst="rect">
             <a:avLst/>
@@ -15515,7 +18338,7 @@
         <p:spPr>
           <a:xfrm>
             <a:off x="4572000" y="0"/>
-            <a:ext cx="13680" cy="6853320"/>
+            <a:ext cx="13320" cy="6852960"/>
           </a:xfrm>
           <a:prstGeom prst="rect">
             <a:avLst/>
@@ -15575,7 +18398,7 @@
         <p:spPr>
           <a:xfrm>
             <a:off x="5486400" y="0"/>
-            <a:ext cx="13680" cy="6853320"/>
+            <a:ext cx="13320" cy="6852960"/>
           </a:xfrm>
           <a:prstGeom prst="rect">
             <a:avLst/>
@@ -15635,7 +18458,7 @@
         <p:spPr>
           <a:xfrm>
             <a:off x="6400800" y="0"/>
-            <a:ext cx="13680" cy="6853320"/>
+            <a:ext cx="13320" cy="6852960"/>
           </a:xfrm>
           <a:prstGeom prst="rect">
             <a:avLst/>
@@ -15695,7 +18518,7 @@
         <p:spPr>
           <a:xfrm>
             <a:off x="7315200" y="0"/>
-            <a:ext cx="13680" cy="6853320"/>
+            <a:ext cx="13320" cy="6852960"/>
           </a:xfrm>
           <a:prstGeom prst="rect">
             <a:avLst/>
@@ -15755,7 +18578,7 @@
         <p:spPr>
           <a:xfrm>
             <a:off x="8229600" y="0"/>
-            <a:ext cx="13680" cy="6853320"/>
+            <a:ext cx="13320" cy="6852960"/>
           </a:xfrm>
           <a:prstGeom prst="rect">
             <a:avLst/>
@@ -15815,7 +18638,7 @@
         <p:spPr>
           <a:xfrm>
             <a:off x="9144000" y="0"/>
-            <a:ext cx="13680" cy="6853320"/>
+            <a:ext cx="13320" cy="6852960"/>
           </a:xfrm>
           <a:prstGeom prst="rect">
             <a:avLst/>
@@ -15875,7 +18698,7 @@
         <p:spPr>
           <a:xfrm>
             <a:off x="10058400" y="0"/>
-            <a:ext cx="13680" cy="6853320"/>
+            <a:ext cx="13320" cy="6852960"/>
           </a:xfrm>
           <a:prstGeom prst="rect">
             <a:avLst/>
@@ -15935,7 +18758,7 @@
         <p:spPr>
           <a:xfrm>
             <a:off x="10972800" y="0"/>
-            <a:ext cx="13680" cy="6853320"/>
+            <a:ext cx="13320" cy="6852960"/>
           </a:xfrm>
           <a:prstGeom prst="rect">
             <a:avLst/>
@@ -15995,7 +18818,7 @@
         <p:spPr>
           <a:xfrm>
             <a:off x="11887200" y="0"/>
-            <a:ext cx="13680" cy="6853320"/>
+            <a:ext cx="13320" cy="6852960"/>
           </a:xfrm>
           <a:prstGeom prst="rect">
             <a:avLst/>
@@ -16055,7 +18878,7 @@
         <p:spPr>
           <a:xfrm>
             <a:off x="0" y="0"/>
-            <a:ext cx="315360" cy="6853320"/>
+            <a:ext cx="315000" cy="6852960"/>
           </a:xfrm>
           <a:prstGeom prst="rect">
             <a:avLst/>
@@ -16115,7 +18938,7 @@
         <p:spPr>
           <a:xfrm>
             <a:off x="9875520" y="365760"/>
-            <a:ext cx="2007000" cy="498240"/>
+            <a:ext cx="2006640" cy="497880"/>
           </a:xfrm>
           <a:prstGeom prst="roundRect">
             <a:avLst>
@@ -16320,7 +19143,7 @@
         <p:spPr>
           <a:xfrm>
             <a:off x="987480" y="3182040"/>
-            <a:ext cx="3287160" cy="2738520"/>
+            <a:ext cx="3286800" cy="2738160"/>
           </a:xfrm>
           <a:prstGeom prst="roundRect">
             <a:avLst>
@@ -16382,7 +19205,7 @@
         <p:spPr>
           <a:xfrm>
             <a:off x="914400" y="3108960"/>
-            <a:ext cx="3287160" cy="3060000"/>
+            <a:ext cx="3286800" cy="3059640"/>
           </a:xfrm>
           <a:prstGeom prst="roundRect">
             <a:avLst>
@@ -16573,7 +19396,7 @@
         <p:spPr>
           <a:xfrm>
             <a:off x="4507920" y="3182040"/>
-            <a:ext cx="3287160" cy="2738520"/>
+            <a:ext cx="3286800" cy="2738160"/>
           </a:xfrm>
           <a:prstGeom prst="roundRect">
             <a:avLst>
@@ -16635,7 +19458,7 @@
         <p:spPr>
           <a:xfrm>
             <a:off x="4434840" y="3108960"/>
-            <a:ext cx="3287160" cy="2738520"/>
+            <a:ext cx="3286800" cy="2738160"/>
           </a:xfrm>
           <a:prstGeom prst="roundRect">
             <a:avLst>
@@ -16847,7 +19670,7 @@
         <p:spPr>
           <a:xfrm>
             <a:off x="8028360" y="3182040"/>
-            <a:ext cx="3287160" cy="2738520"/>
+            <a:ext cx="3286800" cy="2738160"/>
           </a:xfrm>
           <a:prstGeom prst="roundRect">
             <a:avLst>
@@ -16909,7 +19732,7 @@
         <p:spPr>
           <a:xfrm>
             <a:off x="7955280" y="2743200"/>
-            <a:ext cx="3699720" cy="3654720"/>
+            <a:ext cx="3699360" cy="3654360"/>
           </a:xfrm>
           <a:prstGeom prst="roundRect">
             <a:avLst>
@@ -17469,7 +20292,7 @@
         <p:spPr>
           <a:xfrm>
             <a:off x="0" y="0"/>
-            <a:ext cx="12184200" cy="6853320"/>
+            <a:ext cx="12183840" cy="6852960"/>
           </a:xfrm>
           <a:prstGeom prst="rect">
             <a:avLst/>
@@ -17529,7 +20352,7 @@
         <p:spPr>
           <a:xfrm>
             <a:off x="0" y="0"/>
-            <a:ext cx="13680" cy="6853320"/>
+            <a:ext cx="13320" cy="6852960"/>
           </a:xfrm>
           <a:prstGeom prst="rect">
             <a:avLst/>
@@ -17589,7 +20412,7 @@
         <p:spPr>
           <a:xfrm>
             <a:off x="914400" y="0"/>
-            <a:ext cx="13680" cy="6853320"/>
+            <a:ext cx="13320" cy="6852960"/>
           </a:xfrm>
           <a:prstGeom prst="rect">
             <a:avLst/>
@@ -17649,7 +20472,7 @@
         <p:spPr>
           <a:xfrm>
             <a:off x="1828800" y="0"/>
-            <a:ext cx="13680" cy="6853320"/>
+            <a:ext cx="13320" cy="6852960"/>
           </a:xfrm>
           <a:prstGeom prst="rect">
             <a:avLst/>
@@ -17709,7 +20532,7 @@
         <p:spPr>
           <a:xfrm>
             <a:off x="2743200" y="0"/>
-            <a:ext cx="13680" cy="6853320"/>
+            <a:ext cx="13320" cy="6852960"/>
           </a:xfrm>
           <a:prstGeom prst="rect">
             <a:avLst/>
@@ -17769,7 +20592,7 @@
         <p:spPr>
           <a:xfrm>
             <a:off x="3657600" y="0"/>
-            <a:ext cx="13680" cy="6853320"/>
+            <a:ext cx="13320" cy="6852960"/>
           </a:xfrm>
           <a:prstGeom prst="rect">
             <a:avLst/>
@@ -17829,7 +20652,7 @@
         <p:spPr>
           <a:xfrm>
             <a:off x="4572000" y="0"/>
-            <a:ext cx="13680" cy="6853320"/>
+            <a:ext cx="13320" cy="6852960"/>
           </a:xfrm>
           <a:prstGeom prst="rect">
             <a:avLst/>
@@ -17889,7 +20712,7 @@
         <p:spPr>
           <a:xfrm>
             <a:off x="5486400" y="0"/>
-            <a:ext cx="13680" cy="6853320"/>
+            <a:ext cx="13320" cy="6852960"/>
           </a:xfrm>
           <a:prstGeom prst="rect">
             <a:avLst/>
@@ -17949,7 +20772,7 @@
         <p:spPr>
           <a:xfrm>
             <a:off x="6400800" y="0"/>
-            <a:ext cx="13680" cy="6853320"/>
+            <a:ext cx="13320" cy="6852960"/>
           </a:xfrm>
           <a:prstGeom prst="rect">
             <a:avLst/>
@@ -18009,7 +20832,7 @@
         <p:spPr>
           <a:xfrm>
             <a:off x="7315200" y="0"/>
-            <a:ext cx="13680" cy="6853320"/>
+            <a:ext cx="13320" cy="6852960"/>
           </a:xfrm>
           <a:prstGeom prst="rect">
             <a:avLst/>
@@ -18069,7 +20892,7 @@
         <p:spPr>
           <a:xfrm>
             <a:off x="8229600" y="0"/>
-            <a:ext cx="13680" cy="6853320"/>
+            <a:ext cx="13320" cy="6852960"/>
           </a:xfrm>
           <a:prstGeom prst="rect">
             <a:avLst/>
@@ -18129,7 +20952,7 @@
         <p:spPr>
           <a:xfrm>
             <a:off x="9144000" y="0"/>
-            <a:ext cx="13680" cy="6853320"/>
+            <a:ext cx="13320" cy="6852960"/>
           </a:xfrm>
           <a:prstGeom prst="rect">
             <a:avLst/>
@@ -18189,7 +21012,7 @@
         <p:spPr>
           <a:xfrm>
             <a:off x="10058400" y="0"/>
-            <a:ext cx="13680" cy="6853320"/>
+            <a:ext cx="13320" cy="6852960"/>
           </a:xfrm>
           <a:prstGeom prst="rect">
             <a:avLst/>
@@ -18249,7 +21072,7 @@
         <p:spPr>
           <a:xfrm>
             <a:off x="10972800" y="0"/>
-            <a:ext cx="13680" cy="6853320"/>
+            <a:ext cx="13320" cy="6852960"/>
           </a:xfrm>
           <a:prstGeom prst="rect">
             <a:avLst/>
@@ -18309,7 +21132,7 @@
         <p:spPr>
           <a:xfrm>
             <a:off x="11887200" y="0"/>
-            <a:ext cx="13680" cy="6853320"/>
+            <a:ext cx="13320" cy="6852960"/>
           </a:xfrm>
           <a:prstGeom prst="rect">
             <a:avLst/>
@@ -18369,7 +21192,7 @@
         <p:spPr>
           <a:xfrm>
             <a:off x="0" y="0"/>
-            <a:ext cx="315360" cy="6853320"/>
+            <a:ext cx="315000" cy="6852960"/>
           </a:xfrm>
           <a:prstGeom prst="rect">
             <a:avLst/>
@@ -18429,7 +21252,7 @@
         <p:spPr>
           <a:xfrm>
             <a:off x="9875520" y="365760"/>
-            <a:ext cx="2007000" cy="498240"/>
+            <a:ext cx="2006640" cy="497880"/>
           </a:xfrm>
           <a:prstGeom prst="roundRect">
             <a:avLst>
@@ -18634,7 +21457,7 @@
         <p:spPr>
           <a:xfrm>
             <a:off x="987480" y="3182040"/>
-            <a:ext cx="3287160" cy="2738520"/>
+            <a:ext cx="3286800" cy="2738160"/>
           </a:xfrm>
           <a:prstGeom prst="roundRect">
             <a:avLst>
@@ -18696,7 +21519,7 @@
         <p:spPr>
           <a:xfrm>
             <a:off x="457200" y="2514600"/>
-            <a:ext cx="3744360" cy="4112280"/>
+            <a:ext cx="3744000" cy="4111920"/>
           </a:xfrm>
           <a:prstGeom prst="roundRect">
             <a:avLst>
@@ -18934,7 +21757,7 @@
         <p:spPr>
           <a:xfrm>
             <a:off x="4507920" y="3182040"/>
-            <a:ext cx="3287160" cy="2738520"/>
+            <a:ext cx="3286800" cy="2738160"/>
           </a:xfrm>
           <a:prstGeom prst="roundRect">
             <a:avLst>
@@ -18996,7 +21819,7 @@
         <p:spPr>
           <a:xfrm>
             <a:off x="4434840" y="2971800"/>
-            <a:ext cx="3287160" cy="3425400"/>
+            <a:ext cx="3286800" cy="3425040"/>
           </a:xfrm>
           <a:prstGeom prst="roundRect">
             <a:avLst>
@@ -19215,7 +22038,7 @@
         <p:spPr>
           <a:xfrm>
             <a:off x="8028360" y="3182040"/>
-            <a:ext cx="3287160" cy="2738520"/>
+            <a:ext cx="3286800" cy="2738160"/>
           </a:xfrm>
           <a:prstGeom prst="roundRect">
             <a:avLst>
@@ -19277,7 +22100,7 @@
         <p:spPr>
           <a:xfrm>
             <a:off x="8001000" y="3200400"/>
-            <a:ext cx="3472200" cy="2740680"/>
+            <a:ext cx="3471840" cy="2740320"/>
           </a:xfrm>
           <a:prstGeom prst="roundRect">
             <a:avLst>
@@ -19689,7 +22512,7 @@
         <p:spPr>
           <a:xfrm>
             <a:off x="0" y="0"/>
-            <a:ext cx="12184200" cy="6853320"/>
+            <a:ext cx="12183840" cy="6852960"/>
           </a:xfrm>
           <a:prstGeom prst="rect">
             <a:avLst/>
@@ -19749,7 +22572,7 @@
         <p:spPr>
           <a:xfrm>
             <a:off x="0" y="0"/>
-            <a:ext cx="13680" cy="6853320"/>
+            <a:ext cx="13320" cy="6852960"/>
           </a:xfrm>
           <a:prstGeom prst="rect">
             <a:avLst/>
@@ -19809,7 +22632,7 @@
         <p:spPr>
           <a:xfrm>
             <a:off x="914400" y="0"/>
-            <a:ext cx="13680" cy="6853320"/>
+            <a:ext cx="13320" cy="6852960"/>
           </a:xfrm>
           <a:prstGeom prst="rect">
             <a:avLst/>
@@ -19869,7 +22692,7 @@
         <p:spPr>
           <a:xfrm>
             <a:off x="1828800" y="0"/>
-            <a:ext cx="13680" cy="6853320"/>
+            <a:ext cx="13320" cy="6852960"/>
           </a:xfrm>
           <a:prstGeom prst="rect">
             <a:avLst/>
@@ -19929,7 +22752,7 @@
         <p:spPr>
           <a:xfrm>
             <a:off x="2743200" y="0"/>
-            <a:ext cx="13680" cy="6853320"/>
+            <a:ext cx="13320" cy="6852960"/>
           </a:xfrm>
           <a:prstGeom prst="rect">
             <a:avLst/>
@@ -19989,7 +22812,7 @@
         <p:spPr>
           <a:xfrm>
             <a:off x="3657600" y="0"/>
-            <a:ext cx="13680" cy="6853320"/>
+            <a:ext cx="13320" cy="6852960"/>
           </a:xfrm>
           <a:prstGeom prst="rect">
             <a:avLst/>
@@ -20049,7 +22872,7 @@
         <p:spPr>
           <a:xfrm>
             <a:off x="4572000" y="0"/>
-            <a:ext cx="13680" cy="6853320"/>
+            <a:ext cx="13320" cy="6852960"/>
           </a:xfrm>
           <a:prstGeom prst="rect">
             <a:avLst/>
@@ -20109,7 +22932,7 @@
         <p:spPr>
           <a:xfrm>
             <a:off x="5486400" y="0"/>
-            <a:ext cx="13680" cy="6853320"/>
+            <a:ext cx="13320" cy="6852960"/>
           </a:xfrm>
           <a:prstGeom prst="rect">
             <a:avLst/>
@@ -20169,7 +22992,7 @@
         <p:spPr>
           <a:xfrm>
             <a:off x="6400800" y="0"/>
-            <a:ext cx="13680" cy="6853320"/>
+            <a:ext cx="13320" cy="6852960"/>
           </a:xfrm>
           <a:prstGeom prst="rect">
             <a:avLst/>
@@ -20229,7 +23052,7 @@
         <p:spPr>
           <a:xfrm>
             <a:off x="7315200" y="0"/>
-            <a:ext cx="13680" cy="6853320"/>
+            <a:ext cx="13320" cy="6852960"/>
           </a:xfrm>
           <a:prstGeom prst="rect">
             <a:avLst/>
@@ -20289,7 +23112,7 @@
         <p:spPr>
           <a:xfrm>
             <a:off x="8229600" y="0"/>
-            <a:ext cx="13680" cy="6853320"/>
+            <a:ext cx="13320" cy="6852960"/>
           </a:xfrm>
           <a:prstGeom prst="rect">
             <a:avLst/>
@@ -20349,7 +23172,7 @@
         <p:spPr>
           <a:xfrm>
             <a:off x="9144000" y="0"/>
-            <a:ext cx="13680" cy="6853320"/>
+            <a:ext cx="13320" cy="6852960"/>
           </a:xfrm>
           <a:prstGeom prst="rect">
             <a:avLst/>
@@ -20409,7 +23232,7 @@
         <p:spPr>
           <a:xfrm>
             <a:off x="10058400" y="0"/>
-            <a:ext cx="13680" cy="6853320"/>
+            <a:ext cx="13320" cy="6852960"/>
           </a:xfrm>
           <a:prstGeom prst="rect">
             <a:avLst/>
@@ -20469,7 +23292,7 @@
         <p:spPr>
           <a:xfrm>
             <a:off x="10972800" y="0"/>
-            <a:ext cx="13680" cy="6853320"/>
+            <a:ext cx="13320" cy="6852960"/>
           </a:xfrm>
           <a:prstGeom prst="rect">
             <a:avLst/>
@@ -20529,7 +23352,7 @@
         <p:spPr>
           <a:xfrm>
             <a:off x="11887200" y="0"/>
-            <a:ext cx="13680" cy="6853320"/>
+            <a:ext cx="13320" cy="6852960"/>
           </a:xfrm>
           <a:prstGeom prst="rect">
             <a:avLst/>
@@ -20589,7 +23412,7 @@
         <p:spPr>
           <a:xfrm>
             <a:off x="0" y="0"/>
-            <a:ext cx="315360" cy="6853320"/>
+            <a:ext cx="315000" cy="6852960"/>
           </a:xfrm>
           <a:prstGeom prst="rect">
             <a:avLst/>
@@ -20649,7 +23472,7 @@
         <p:spPr>
           <a:xfrm>
             <a:off x="9875520" y="365760"/>
-            <a:ext cx="2007000" cy="498240"/>
+            <a:ext cx="2006640" cy="497880"/>
           </a:xfrm>
           <a:prstGeom prst="roundRect">
             <a:avLst>
@@ -20854,7 +23677,7 @@
         <p:spPr>
           <a:xfrm>
             <a:off x="987480" y="3182040"/>
-            <a:ext cx="3287160" cy="2738520"/>
+            <a:ext cx="3286800" cy="2738160"/>
           </a:xfrm>
           <a:prstGeom prst="roundRect">
             <a:avLst>
@@ -20916,7 +23739,7 @@
         <p:spPr>
           <a:xfrm>
             <a:off x="457200" y="2514600"/>
-            <a:ext cx="3744360" cy="4112280"/>
+            <a:ext cx="3744000" cy="4111920"/>
           </a:xfrm>
           <a:prstGeom prst="roundRect">
             <a:avLst>
@@ -21169,7 +23992,7 @@
         <p:spPr>
           <a:xfrm>
             <a:off x="4507920" y="3182040"/>
-            <a:ext cx="3287160" cy="2738520"/>
+            <a:ext cx="3286800" cy="2738160"/>
           </a:xfrm>
           <a:prstGeom prst="roundRect">
             <a:avLst>
@@ -21231,7 +24054,7 @@
         <p:spPr>
           <a:xfrm>
             <a:off x="4434840" y="2514600"/>
-            <a:ext cx="3287160" cy="3882600"/>
+            <a:ext cx="3286800" cy="3882240"/>
           </a:xfrm>
           <a:prstGeom prst="roundRect">
             <a:avLst>
@@ -21447,7 +24270,7 @@
         <p:spPr>
           <a:xfrm>
             <a:off x="8028360" y="3182040"/>
-            <a:ext cx="3287160" cy="2738520"/>
+            <a:ext cx="3286800" cy="2738160"/>
           </a:xfrm>
           <a:prstGeom prst="roundRect">
             <a:avLst>
@@ -21509,7 +24332,7 @@
         <p:spPr>
           <a:xfrm>
             <a:off x="8001000" y="2514600"/>
-            <a:ext cx="3472200" cy="3884040"/>
+            <a:ext cx="3471840" cy="3883680"/>
           </a:xfrm>
           <a:prstGeom prst="roundRect">
             <a:avLst>
@@ -22185,7 +25008,7 @@
         <p:spPr>
           <a:xfrm>
             <a:off x="0" y="0"/>
-            <a:ext cx="12184200" cy="6853320"/>
+            <a:ext cx="12183840" cy="6852960"/>
           </a:xfrm>
           <a:prstGeom prst="rect">
             <a:avLst/>
@@ -22245,7 +25068,7 @@
         <p:spPr>
           <a:xfrm>
             <a:off x="0" y="0"/>
-            <a:ext cx="13680" cy="6853320"/>
+            <a:ext cx="13320" cy="6852960"/>
           </a:xfrm>
           <a:prstGeom prst="rect">
             <a:avLst/>
@@ -22305,7 +25128,7 @@
         <p:spPr>
           <a:xfrm>
             <a:off x="914400" y="0"/>
-            <a:ext cx="13680" cy="6853320"/>
+            <a:ext cx="13320" cy="6852960"/>
           </a:xfrm>
           <a:prstGeom prst="rect">
             <a:avLst/>
@@ -22365,7 +25188,7 @@
         <p:spPr>
           <a:xfrm>
             <a:off x="1828800" y="0"/>
-            <a:ext cx="13680" cy="6853320"/>
+            <a:ext cx="13320" cy="6852960"/>
           </a:xfrm>
           <a:prstGeom prst="rect">
             <a:avLst/>
@@ -22425,7 +25248,7 @@
         <p:spPr>
           <a:xfrm>
             <a:off x="2743200" y="0"/>
-            <a:ext cx="13680" cy="6853320"/>
+            <a:ext cx="13320" cy="6852960"/>
           </a:xfrm>
           <a:prstGeom prst="rect">
             <a:avLst/>
@@ -22485,7 +25308,7 @@
         <p:spPr>
           <a:xfrm>
             <a:off x="3657600" y="0"/>
-            <a:ext cx="13680" cy="6853320"/>
+            <a:ext cx="13320" cy="6852960"/>
           </a:xfrm>
           <a:prstGeom prst="rect">
             <a:avLst/>
@@ -22545,7 +25368,7 @@
         <p:spPr>
           <a:xfrm>
             <a:off x="4572000" y="0"/>
-            <a:ext cx="13680" cy="6853320"/>
+            <a:ext cx="13320" cy="6852960"/>
           </a:xfrm>
           <a:prstGeom prst="rect">
             <a:avLst/>
@@ -22605,7 +25428,7 @@
         <p:spPr>
           <a:xfrm>
             <a:off x="5486400" y="0"/>
-            <a:ext cx="13680" cy="6853320"/>
+            <a:ext cx="13320" cy="6852960"/>
           </a:xfrm>
           <a:prstGeom prst="rect">
             <a:avLst/>
@@ -22665,7 +25488,7 @@
         <p:spPr>
           <a:xfrm>
             <a:off x="6400800" y="0"/>
-            <a:ext cx="13680" cy="6853320"/>
+            <a:ext cx="13320" cy="6852960"/>
           </a:xfrm>
           <a:prstGeom prst="rect">
             <a:avLst/>
@@ -22725,7 +25548,7 @@
         <p:spPr>
           <a:xfrm>
             <a:off x="7315200" y="0"/>
-            <a:ext cx="13680" cy="6853320"/>
+            <a:ext cx="13320" cy="6852960"/>
           </a:xfrm>
           <a:prstGeom prst="rect">
             <a:avLst/>
@@ -22785,7 +25608,7 @@
         <p:spPr>
           <a:xfrm>
             <a:off x="8229600" y="0"/>
-            <a:ext cx="13680" cy="6853320"/>
+            <a:ext cx="13320" cy="6852960"/>
           </a:xfrm>
           <a:prstGeom prst="rect">
             <a:avLst/>
@@ -22845,7 +25668,7 @@
         <p:spPr>
           <a:xfrm>
             <a:off x="9144000" y="0"/>
-            <a:ext cx="13680" cy="6853320"/>
+            <a:ext cx="13320" cy="6852960"/>
           </a:xfrm>
           <a:prstGeom prst="rect">
             <a:avLst/>
@@ -22905,7 +25728,7 @@
         <p:spPr>
           <a:xfrm>
             <a:off x="10058400" y="0"/>
-            <a:ext cx="13680" cy="6853320"/>
+            <a:ext cx="13320" cy="6852960"/>
           </a:xfrm>
           <a:prstGeom prst="rect">
             <a:avLst/>
@@ -22965,7 +25788,7 @@
         <p:spPr>
           <a:xfrm>
             <a:off x="10972800" y="0"/>
-            <a:ext cx="13680" cy="6853320"/>
+            <a:ext cx="13320" cy="6852960"/>
           </a:xfrm>
           <a:prstGeom prst="rect">
             <a:avLst/>
@@ -23025,7 +25848,7 @@
         <p:spPr>
           <a:xfrm>
             <a:off x="11887200" y="0"/>
-            <a:ext cx="13680" cy="6853320"/>
+            <a:ext cx="13320" cy="6852960"/>
           </a:xfrm>
           <a:prstGeom prst="rect">
             <a:avLst/>
@@ -23085,7 +25908,7 @@
         <p:spPr>
           <a:xfrm>
             <a:off x="0" y="0"/>
-            <a:ext cx="315360" cy="6853320"/>
+            <a:ext cx="315000" cy="6852960"/>
           </a:xfrm>
           <a:prstGeom prst="rect">
             <a:avLst/>
@@ -23145,7 +25968,7 @@
         <p:spPr>
           <a:xfrm>
             <a:off x="9875520" y="365760"/>
-            <a:ext cx="2007000" cy="498240"/>
+            <a:ext cx="2006640" cy="497880"/>
           </a:xfrm>
           <a:prstGeom prst="roundRect">
             <a:avLst>
@@ -23386,7 +26209,7 @@
         <p:spPr>
           <a:xfrm>
             <a:off x="987480" y="3182040"/>
-            <a:ext cx="3287160" cy="2738520"/>
+            <a:ext cx="3286800" cy="2738160"/>
           </a:xfrm>
           <a:prstGeom prst="roundRect">
             <a:avLst>
@@ -23448,7 +26271,7 @@
         <p:spPr>
           <a:xfrm>
             <a:off x="457200" y="2743200"/>
-            <a:ext cx="3884400" cy="3883680"/>
+            <a:ext cx="3884040" cy="3883320"/>
           </a:xfrm>
           <a:prstGeom prst="roundRect">
             <a:avLst>
@@ -23762,7 +26585,7 @@
         <p:spPr>
           <a:xfrm>
             <a:off x="4507920" y="3182040"/>
-            <a:ext cx="3287160" cy="2738520"/>
+            <a:ext cx="3286800" cy="2738160"/>
           </a:xfrm>
           <a:prstGeom prst="roundRect">
             <a:avLst>
@@ -23824,7 +26647,7 @@
         <p:spPr>
           <a:xfrm>
             <a:off x="4572000" y="2743200"/>
-            <a:ext cx="3427200" cy="3655800"/>
+            <a:ext cx="3426840" cy="3655440"/>
           </a:xfrm>
           <a:prstGeom prst="roundRect">
             <a:avLst>
@@ -24376,7 +27199,7 @@
         <p:spPr>
           <a:xfrm>
             <a:off x="8028360" y="3182040"/>
-            <a:ext cx="3287160" cy="2738520"/>
+            <a:ext cx="3286800" cy="2738160"/>
           </a:xfrm>
           <a:prstGeom prst="roundRect">
             <a:avLst>
@@ -24438,7 +27261,7 @@
         <p:spPr>
           <a:xfrm>
             <a:off x="8229600" y="2514600"/>
-            <a:ext cx="3655800" cy="4113000"/>
+            <a:ext cx="3655440" cy="4112640"/>
           </a:xfrm>
           <a:prstGeom prst="roundRect">
             <a:avLst>
@@ -25430,7 +28253,7 @@
         <p:spPr>
           <a:xfrm>
             <a:off x="0" y="0"/>
-            <a:ext cx="12184200" cy="6853320"/>
+            <a:ext cx="12183840" cy="6852960"/>
           </a:xfrm>
           <a:prstGeom prst="rect">
             <a:avLst/>
@@ -25490,7 +28313,7 @@
         <p:spPr>
           <a:xfrm>
             <a:off x="0" y="0"/>
-            <a:ext cx="13680" cy="6853320"/>
+            <a:ext cx="13320" cy="6852960"/>
           </a:xfrm>
           <a:prstGeom prst="rect">
             <a:avLst/>
@@ -25550,7 +28373,7 @@
         <p:spPr>
           <a:xfrm>
             <a:off x="914400" y="0"/>
-            <a:ext cx="13680" cy="6853320"/>
+            <a:ext cx="13320" cy="6852960"/>
           </a:xfrm>
           <a:prstGeom prst="rect">
             <a:avLst/>
@@ -25610,7 +28433,7 @@
         <p:spPr>
           <a:xfrm>
             <a:off x="1828800" y="0"/>
-            <a:ext cx="13680" cy="6853320"/>
+            <a:ext cx="13320" cy="6852960"/>
           </a:xfrm>
           <a:prstGeom prst="rect">
             <a:avLst/>
@@ -25670,7 +28493,7 @@
         <p:spPr>
           <a:xfrm>
             <a:off x="2743200" y="0"/>
-            <a:ext cx="13680" cy="6853320"/>
+            <a:ext cx="13320" cy="6852960"/>
           </a:xfrm>
           <a:prstGeom prst="rect">
             <a:avLst/>
@@ -25730,7 +28553,7 @@
         <p:spPr>
           <a:xfrm>
             <a:off x="3657600" y="0"/>
-            <a:ext cx="13680" cy="6853320"/>
+            <a:ext cx="13320" cy="6852960"/>
           </a:xfrm>
           <a:prstGeom prst="rect">
             <a:avLst/>
@@ -25790,7 +28613,7 @@
         <p:spPr>
           <a:xfrm>
             <a:off x="4572000" y="0"/>
-            <a:ext cx="13680" cy="6853320"/>
+            <a:ext cx="13320" cy="6852960"/>
           </a:xfrm>
           <a:prstGeom prst="rect">
             <a:avLst/>
@@ -25850,7 +28673,7 @@
         <p:spPr>
           <a:xfrm>
             <a:off x="5486400" y="0"/>
-            <a:ext cx="13680" cy="6853320"/>
+            <a:ext cx="13320" cy="6852960"/>
           </a:xfrm>
           <a:prstGeom prst="rect">
             <a:avLst/>
@@ -25910,7 +28733,7 @@
         <p:spPr>
           <a:xfrm>
             <a:off x="6400800" y="0"/>
-            <a:ext cx="13680" cy="6853320"/>
+            <a:ext cx="13320" cy="6852960"/>
           </a:xfrm>
           <a:prstGeom prst="rect">
             <a:avLst/>
@@ -25970,7 +28793,7 @@
         <p:spPr>
           <a:xfrm>
             <a:off x="7315200" y="0"/>
-            <a:ext cx="13680" cy="6853320"/>
+            <a:ext cx="13320" cy="6852960"/>
           </a:xfrm>
           <a:prstGeom prst="rect">
             <a:avLst/>
@@ -26030,7 +28853,7 @@
         <p:spPr>
           <a:xfrm>
             <a:off x="8229600" y="0"/>
-            <a:ext cx="13680" cy="6853320"/>
+            <a:ext cx="13320" cy="6852960"/>
           </a:xfrm>
           <a:prstGeom prst="rect">
             <a:avLst/>
@@ -26090,7 +28913,7 @@
         <p:spPr>
           <a:xfrm>
             <a:off x="9144000" y="0"/>
-            <a:ext cx="13680" cy="6853320"/>
+            <a:ext cx="13320" cy="6852960"/>
           </a:xfrm>
           <a:prstGeom prst="rect">
             <a:avLst/>
@@ -26150,7 +28973,7 @@
         <p:spPr>
           <a:xfrm>
             <a:off x="10058400" y="0"/>
-            <a:ext cx="13680" cy="6853320"/>
+            <a:ext cx="13320" cy="6852960"/>
           </a:xfrm>
           <a:prstGeom prst="rect">
             <a:avLst/>
@@ -26210,7 +29033,7 @@
         <p:spPr>
           <a:xfrm>
             <a:off x="10972800" y="0"/>
-            <a:ext cx="13680" cy="6853320"/>
+            <a:ext cx="13320" cy="6852960"/>
           </a:xfrm>
           <a:prstGeom prst="rect">
             <a:avLst/>
@@ -26270,7 +29093,7 @@
         <p:spPr>
           <a:xfrm>
             <a:off x="11887200" y="0"/>
-            <a:ext cx="13680" cy="6853320"/>
+            <a:ext cx="13320" cy="6852960"/>
           </a:xfrm>
           <a:prstGeom prst="rect">
             <a:avLst/>
@@ -26330,7 +29153,7 @@
         <p:spPr>
           <a:xfrm>
             <a:off x="0" y="0"/>
-            <a:ext cx="315360" cy="6853320"/>
+            <a:ext cx="315000" cy="6852960"/>
           </a:xfrm>
           <a:prstGeom prst="rect">
             <a:avLst/>
@@ -26390,7 +29213,7 @@
         <p:spPr>
           <a:xfrm>
             <a:off x="9875520" y="365760"/>
-            <a:ext cx="2007000" cy="498240"/>
+            <a:ext cx="2006640" cy="497880"/>
           </a:xfrm>
           <a:prstGeom prst="roundRect">
             <a:avLst>
@@ -26628,7 +29451,7 @@
         <p:spPr>
           <a:xfrm>
             <a:off x="987480" y="3182040"/>
-            <a:ext cx="3287160" cy="2738520"/>
+            <a:ext cx="3286800" cy="2738160"/>
           </a:xfrm>
           <a:prstGeom prst="roundRect">
             <a:avLst>
@@ -26690,7 +29513,7 @@
         <p:spPr>
           <a:xfrm>
             <a:off x="914400" y="3108960"/>
-            <a:ext cx="3287160" cy="3290400"/>
+            <a:ext cx="3286800" cy="3290040"/>
           </a:xfrm>
           <a:prstGeom prst="roundRect">
             <a:avLst>
@@ -27021,7 +29844,7 @@
         <p:spPr>
           <a:xfrm>
             <a:off x="4507920" y="3182040"/>
-            <a:ext cx="3287160" cy="2738520"/>
+            <a:ext cx="3286800" cy="2738160"/>
           </a:xfrm>
           <a:prstGeom prst="roundRect">
             <a:avLst>
@@ -27083,7 +29906,7 @@
         <p:spPr>
           <a:xfrm>
             <a:off x="4434840" y="2971800"/>
-            <a:ext cx="3287160" cy="3427560"/>
+            <a:ext cx="3286800" cy="3427200"/>
           </a:xfrm>
           <a:prstGeom prst="roundRect">
             <a:avLst>
@@ -27490,7 +30313,7 @@
         <p:spPr>
           <a:xfrm>
             <a:off x="8028360" y="3182040"/>
-            <a:ext cx="3287160" cy="2738520"/>
+            <a:ext cx="3286800" cy="2738160"/>
           </a:xfrm>
           <a:prstGeom prst="roundRect">
             <a:avLst>
@@ -27552,7 +30375,7 @@
         <p:spPr>
           <a:xfrm>
             <a:off x="7955280" y="2743200"/>
-            <a:ext cx="3699720" cy="3654720"/>
+            <a:ext cx="3699360" cy="3654360"/>
           </a:xfrm>
           <a:prstGeom prst="roundRect">
             <a:avLst>
@@ -28363,7 +31186,7 @@
         <p:spPr>
           <a:xfrm>
             <a:off x="0" y="0"/>
-            <a:ext cx="12184200" cy="6853320"/>
+            <a:ext cx="12183840" cy="6852960"/>
           </a:xfrm>
           <a:prstGeom prst="rect">
             <a:avLst/>
@@ -28423,7 +31246,7 @@
         <p:spPr>
           <a:xfrm>
             <a:off x="0" y="0"/>
-            <a:ext cx="13680" cy="6853320"/>
+            <a:ext cx="13320" cy="6852960"/>
           </a:xfrm>
           <a:prstGeom prst="rect">
             <a:avLst/>
@@ -28483,7 +31306,7 @@
         <p:spPr>
           <a:xfrm>
             <a:off x="914400" y="0"/>
-            <a:ext cx="13680" cy="6853320"/>
+            <a:ext cx="13320" cy="6852960"/>
           </a:xfrm>
           <a:prstGeom prst="rect">
             <a:avLst/>
@@ -28543,7 +31366,7 @@
         <p:spPr>
           <a:xfrm>
             <a:off x="1828800" y="0"/>
-            <a:ext cx="13680" cy="6853320"/>
+            <a:ext cx="13320" cy="6852960"/>
           </a:xfrm>
           <a:prstGeom prst="rect">
             <a:avLst/>
@@ -28603,7 +31426,7 @@
         <p:spPr>
           <a:xfrm>
             <a:off x="2743200" y="0"/>
-            <a:ext cx="13680" cy="6853320"/>
+            <a:ext cx="13320" cy="6852960"/>
           </a:xfrm>
           <a:prstGeom prst="rect">
             <a:avLst/>
@@ -28663,7 +31486,7 @@
         <p:spPr>
           <a:xfrm>
             <a:off x="3657600" y="0"/>
-            <a:ext cx="13680" cy="6853320"/>
+            <a:ext cx="13320" cy="6852960"/>
           </a:xfrm>
           <a:prstGeom prst="rect">
             <a:avLst/>
@@ -28723,7 +31546,7 @@
         <p:spPr>
           <a:xfrm>
             <a:off x="4572000" y="0"/>
-            <a:ext cx="13680" cy="6853320"/>
+            <a:ext cx="13320" cy="6852960"/>
           </a:xfrm>
           <a:prstGeom prst="rect">
             <a:avLst/>
@@ -28783,7 +31606,7 @@
         <p:spPr>
           <a:xfrm>
             <a:off x="5486400" y="0"/>
-            <a:ext cx="13680" cy="6853320"/>
+            <a:ext cx="13320" cy="6852960"/>
           </a:xfrm>
           <a:prstGeom prst="rect">
             <a:avLst/>
@@ -28843,7 +31666,7 @@
         <p:spPr>
           <a:xfrm>
             <a:off x="6400800" y="0"/>
-            <a:ext cx="13680" cy="6853320"/>
+            <a:ext cx="13320" cy="6852960"/>
           </a:xfrm>
           <a:prstGeom prst="rect">
             <a:avLst/>
@@ -28903,7 +31726,7 @@
         <p:spPr>
           <a:xfrm>
             <a:off x="7315200" y="0"/>
-            <a:ext cx="13680" cy="6853320"/>
+            <a:ext cx="13320" cy="6852960"/>
           </a:xfrm>
           <a:prstGeom prst="rect">
             <a:avLst/>
@@ -28963,7 +31786,7 @@
         <p:spPr>
           <a:xfrm>
             <a:off x="8229600" y="0"/>
-            <a:ext cx="13680" cy="6853320"/>
+            <a:ext cx="13320" cy="6852960"/>
           </a:xfrm>
           <a:prstGeom prst="rect">
             <a:avLst/>
@@ -29023,7 +31846,7 @@
         <p:spPr>
           <a:xfrm>
             <a:off x="9144000" y="0"/>
-            <a:ext cx="13680" cy="6853320"/>
+            <a:ext cx="13320" cy="6852960"/>
           </a:xfrm>
           <a:prstGeom prst="rect">
             <a:avLst/>
@@ -29083,7 +31906,7 @@
         <p:spPr>
           <a:xfrm>
             <a:off x="10058400" y="0"/>
-            <a:ext cx="13680" cy="6853320"/>
+            <a:ext cx="13320" cy="6852960"/>
           </a:xfrm>
           <a:prstGeom prst="rect">
             <a:avLst/>
@@ -29143,7 +31966,7 @@
         <p:spPr>
           <a:xfrm>
             <a:off x="10972800" y="0"/>
-            <a:ext cx="13680" cy="6853320"/>
+            <a:ext cx="13320" cy="6852960"/>
           </a:xfrm>
           <a:prstGeom prst="rect">
             <a:avLst/>
@@ -29203,7 +32026,7 @@
         <p:spPr>
           <a:xfrm>
             <a:off x="11887200" y="0"/>
-            <a:ext cx="13680" cy="6853320"/>
+            <a:ext cx="13320" cy="6852960"/>
           </a:xfrm>
           <a:prstGeom prst="rect">
             <a:avLst/>
@@ -29263,7 +32086,7 @@
         <p:spPr>
           <a:xfrm>
             <a:off x="0" y="0"/>
-            <a:ext cx="315360" cy="6853320"/>
+            <a:ext cx="315000" cy="6852960"/>
           </a:xfrm>
           <a:prstGeom prst="rect">
             <a:avLst/>
@@ -29323,7 +32146,7 @@
         <p:spPr>
           <a:xfrm>
             <a:off x="9875520" y="365760"/>
-            <a:ext cx="2007000" cy="498240"/>
+            <a:ext cx="2006640" cy="497880"/>
           </a:xfrm>
           <a:prstGeom prst="roundRect">
             <a:avLst>
@@ -29397,7 +32220,7 @@
         <p:spPr>
           <a:xfrm>
             <a:off x="2585880" y="914400"/>
-            <a:ext cx="5796360" cy="1186920"/>
+            <a:ext cx="5796000" cy="1186920"/>
           </a:xfrm>
           <a:prstGeom prst="rect">
             <a:avLst/>
@@ -29464,7 +32287,7 @@
         <p:spPr>
           <a:xfrm>
             <a:off x="2057400" y="1694880"/>
-            <a:ext cx="7454520" cy="819720"/>
+            <a:ext cx="7454160" cy="819720"/>
           </a:xfrm>
           <a:prstGeom prst="rect">
             <a:avLst/>
@@ -29564,7 +32387,7 @@
         <p:spPr>
           <a:xfrm>
             <a:off x="987480" y="3182040"/>
-            <a:ext cx="3287160" cy="2738520"/>
+            <a:ext cx="3286800" cy="2738160"/>
           </a:xfrm>
           <a:prstGeom prst="roundRect">
             <a:avLst>
@@ -29626,7 +32449,7 @@
         <p:spPr>
           <a:xfrm>
             <a:off x="914400" y="3108960"/>
-            <a:ext cx="3287160" cy="3290400"/>
+            <a:ext cx="3286800" cy="3290040"/>
           </a:xfrm>
           <a:prstGeom prst="roundRect">
             <a:avLst>
@@ -29877,7 +32700,7 @@
         <p:spPr>
           <a:xfrm>
             <a:off x="4507920" y="3182040"/>
-            <a:ext cx="3287160" cy="2738520"/>
+            <a:ext cx="3286800" cy="2738160"/>
           </a:xfrm>
           <a:prstGeom prst="roundRect">
             <a:avLst>
@@ -29939,7 +32762,7 @@
         <p:spPr>
           <a:xfrm>
             <a:off x="4434840" y="2971800"/>
-            <a:ext cx="3287160" cy="3427560"/>
+            <a:ext cx="3286800" cy="3427200"/>
           </a:xfrm>
           <a:prstGeom prst="roundRect">
             <a:avLst>
@@ -30313,7 +33136,7 @@
         <p:spPr>
           <a:xfrm>
             <a:off x="8028360" y="3182040"/>
-            <a:ext cx="3287160" cy="2738520"/>
+            <a:ext cx="3286800" cy="2738160"/>
           </a:xfrm>
           <a:prstGeom prst="roundRect">
             <a:avLst>
@@ -30375,7 +33198,7 @@
         <p:spPr>
           <a:xfrm>
             <a:off x="8003880" y="2971800"/>
-            <a:ext cx="3425400" cy="3426120"/>
+            <a:ext cx="3425040" cy="3425760"/>
           </a:xfrm>
           <a:prstGeom prst="roundRect">
             <a:avLst>

--- a/Java/Java #4/TR/Java #4.pptx
+++ b/Java/Java #4/TR/Java #4.pptx
@@ -17,6 +17,7 @@
     <p:sldId id="265" r:id="rId12"/>
     <p:sldId id="266" r:id="rId13"/>
     <p:sldId id="267" r:id="rId14"/>
+    <p:sldId id="268" r:id="rId15"/>
   </p:sldIdLst>
   <p:sldSz cx="9144000" cy="6858000"/>
   <p:notesSz cx="7772400" cy="10058400"/>
@@ -74,7 +75,7 @@
         <p:txBody>
           <a:bodyPr/>
           <a:p>
-            <a:fld id="{647D8083-9DC8-4256-8FAE-9D98B579219B}" type="slidenum">
+            <a:fld id="{65901510-D1FC-4A6B-8F25-693ED1BF9D12}" type="slidenum">
               <a:t>&lt;#&gt;</a:t>
             </a:fld>
           </a:p>
@@ -283,7 +284,7 @@
         <p:txBody>
           <a:bodyPr/>
           <a:p>
-            <a:fld id="{13DC755D-AEEE-4072-9C12-2AA6A774C886}" type="slidenum">
+            <a:fld id="{5EDCB66D-D019-4E66-A087-177272247274}" type="slidenum">
               <a:t>&lt;#&gt;</a:t>
             </a:fld>
           </a:p>
@@ -578,7 +579,7 @@
         <p:txBody>
           <a:bodyPr/>
           <a:p>
-            <a:fld id="{469AE3E4-42C8-4D3A-9FD7-EE44C6C96CC4}" type="slidenum">
+            <a:fld id="{5EDEF6EC-4A78-4DE2-96D1-5182BC608E5D}" type="slidenum">
               <a:t>&lt;#&gt;</a:t>
             </a:fld>
           </a:p>
@@ -959,7 +960,7 @@
         <p:txBody>
           <a:bodyPr/>
           <a:p>
-            <a:fld id="{4E949483-FF49-4FD2-8065-965029678C0C}" type="slidenum">
+            <a:fld id="{9C098612-606C-4912-A7D3-B5E1E6BD663C}" type="slidenum">
               <a:t>&lt;#&gt;</a:t>
             </a:fld>
           </a:p>
@@ -1122,7 +1123,7 @@
         <p:txBody>
           <a:bodyPr/>
           <a:p>
-            <a:fld id="{1A58710C-93CD-4D1F-A2A5-1293B2FD6379}" type="slidenum">
+            <a:fld id="{EEA6B7B7-B74B-4A3F-98E6-244814D62266}" type="slidenum">
               <a:t>&lt;#&gt;</a:t>
             </a:fld>
           </a:p>
@@ -1288,7 +1289,7 @@
         <p:txBody>
           <a:bodyPr/>
           <a:p>
-            <a:fld id="{A87076A1-9225-45B5-B0CD-6D507989B139}" type="slidenum">
+            <a:fld id="{AAD586F9-D76E-4C2F-9371-9E5BA53C5B26}" type="slidenum">
               <a:t>&lt;#&gt;</a:t>
             </a:fld>
           </a:p>
@@ -1497,7 +1498,7 @@
         <p:txBody>
           <a:bodyPr/>
           <a:p>
-            <a:fld id="{BBBC3DAC-4B3E-497E-8D39-D45612E4BD2F}" type="slidenum">
+            <a:fld id="{1A4BF6BF-4454-4101-9CE3-FC77AD5EAE63}" type="slidenum">
               <a:t>&lt;#&gt;</a:t>
             </a:fld>
           </a:p>
@@ -1620,7 +1621,7 @@
         <p:txBody>
           <a:bodyPr/>
           <a:p>
-            <a:fld id="{890144CE-E437-4766-B7E8-A7E0BA73003E}" type="slidenum">
+            <a:fld id="{25B27D6C-908C-471C-8274-A968BCA89A59}" type="slidenum">
               <a:t>&lt;#&gt;</a:t>
             </a:fld>
           </a:p>
@@ -1741,7 +1742,7 @@
         <p:txBody>
           <a:bodyPr/>
           <a:p>
-            <a:fld id="{A37E65AE-EF17-4C9C-B269-027D558F22A3}" type="slidenum">
+            <a:fld id="{5FC79A1B-BEA7-4F3E-B4C8-F8AFCDB19D26}" type="slidenum">
               <a:t>&lt;#&gt;</a:t>
             </a:fld>
           </a:p>
@@ -1993,7 +1994,7 @@
         <p:txBody>
           <a:bodyPr/>
           <a:p>
-            <a:fld id="{8D446B2F-E52D-43EF-9FBF-8D774C4A5B32}" type="slidenum">
+            <a:fld id="{F5849B0B-6B42-4637-8CAD-0842E0AAAD4B}" type="slidenum">
               <a:t>&lt;#&gt;</a:t>
             </a:fld>
           </a:p>
@@ -2245,7 +2246,7 @@
         <p:txBody>
           <a:bodyPr/>
           <a:p>
-            <a:fld id="{BA1096FB-B25D-4A90-8732-320AB54477D5}" type="slidenum">
+            <a:fld id="{7D5685E4-3972-4A8A-8A1A-A0BE31AAB879}" type="slidenum">
               <a:t>&lt;#&gt;</a:t>
             </a:fld>
           </a:p>
@@ -2497,7 +2498,7 @@
         <p:txBody>
           <a:bodyPr/>
           <a:p>
-            <a:fld id="{8665550D-56B0-4569-ACBD-A9B65A01D71C}" type="slidenum">
+            <a:fld id="{C73677C4-93FE-4EB6-B273-B4F32ED6C864}" type="slidenum">
               <a:t>&lt;#&gt;</a:t>
             </a:fld>
           </a:p>
@@ -2566,7 +2567,7 @@
         <p:spPr>
           <a:xfrm>
             <a:off x="3124080" y="6356520"/>
-            <a:ext cx="2890080" cy="359640"/>
+            <a:ext cx="2889720" cy="359280"/>
           </a:xfrm>
           <a:prstGeom prst="rect">
             <a:avLst/>
@@ -2638,7 +2639,7 @@
         <p:spPr>
           <a:xfrm>
             <a:off x="6553080" y="6356520"/>
-            <a:ext cx="2128320" cy="359640"/>
+            <a:ext cx="2127960" cy="359280"/>
           </a:xfrm>
           <a:prstGeom prst="rect">
             <a:avLst/>
@@ -2679,7 +2680,7 @@
                 <a:tab algn="l" pos="0"/>
               </a:tabLst>
             </a:pPr>
-            <a:fld id="{9ABCF920-B0AF-499A-93A7-42B6B49A27B6}" type="slidenum">
+            <a:fld id="{4A278ED2-0ADA-457B-BD9D-F465CD8B977C}" type="slidenum">
               <a:rPr b="0" lang="en-US" sz="1200" spc="-1" strike="noStrike">
                 <a:solidFill>
                   <a:srgbClr val="8b8b8b"/>
@@ -2710,7 +2711,7 @@
         <p:spPr>
           <a:xfrm>
             <a:off x="457200" y="6356520"/>
-            <a:ext cx="2128320" cy="359640"/>
+            <a:ext cx="2127960" cy="359280"/>
           </a:xfrm>
           <a:prstGeom prst="rect">
             <a:avLst/>
@@ -3077,7 +3078,7 @@
         <p:spPr>
           <a:xfrm>
             <a:off x="0" y="0"/>
-            <a:ext cx="12183480" cy="6852600"/>
+            <a:ext cx="12183120" cy="6852240"/>
           </a:xfrm>
           <a:prstGeom prst="rect">
             <a:avLst/>
@@ -3137,7 +3138,7 @@
         <p:spPr>
           <a:xfrm>
             <a:off x="0" y="0"/>
-            <a:ext cx="12960" cy="6852600"/>
+            <a:ext cx="12600" cy="6852240"/>
           </a:xfrm>
           <a:prstGeom prst="rect">
             <a:avLst/>
@@ -3197,7 +3198,7 @@
         <p:spPr>
           <a:xfrm>
             <a:off x="914400" y="0"/>
-            <a:ext cx="12960" cy="6852600"/>
+            <a:ext cx="12600" cy="6852240"/>
           </a:xfrm>
           <a:prstGeom prst="rect">
             <a:avLst/>
@@ -3257,7 +3258,7 @@
         <p:spPr>
           <a:xfrm>
             <a:off x="1828800" y="0"/>
-            <a:ext cx="12960" cy="6852600"/>
+            <a:ext cx="12600" cy="6852240"/>
           </a:xfrm>
           <a:prstGeom prst="rect">
             <a:avLst/>
@@ -3317,7 +3318,7 @@
         <p:spPr>
           <a:xfrm>
             <a:off x="2743200" y="0"/>
-            <a:ext cx="12960" cy="6852600"/>
+            <a:ext cx="12600" cy="6852240"/>
           </a:xfrm>
           <a:prstGeom prst="rect">
             <a:avLst/>
@@ -3377,7 +3378,7 @@
         <p:spPr>
           <a:xfrm>
             <a:off x="3657600" y="0"/>
-            <a:ext cx="12960" cy="6852600"/>
+            <a:ext cx="12600" cy="6852240"/>
           </a:xfrm>
           <a:prstGeom prst="rect">
             <a:avLst/>
@@ -3437,7 +3438,7 @@
         <p:spPr>
           <a:xfrm>
             <a:off x="4572000" y="0"/>
-            <a:ext cx="12960" cy="6852600"/>
+            <a:ext cx="12600" cy="6852240"/>
           </a:xfrm>
           <a:prstGeom prst="rect">
             <a:avLst/>
@@ -3497,7 +3498,7 @@
         <p:spPr>
           <a:xfrm>
             <a:off x="5486400" y="0"/>
-            <a:ext cx="12960" cy="6852600"/>
+            <a:ext cx="12600" cy="6852240"/>
           </a:xfrm>
           <a:prstGeom prst="rect">
             <a:avLst/>
@@ -3557,7 +3558,7 @@
         <p:spPr>
           <a:xfrm>
             <a:off x="6400800" y="0"/>
-            <a:ext cx="12960" cy="6852600"/>
+            <a:ext cx="12600" cy="6852240"/>
           </a:xfrm>
           <a:prstGeom prst="rect">
             <a:avLst/>
@@ -3617,7 +3618,7 @@
         <p:spPr>
           <a:xfrm>
             <a:off x="7315200" y="0"/>
-            <a:ext cx="12960" cy="6852600"/>
+            <a:ext cx="12600" cy="6852240"/>
           </a:xfrm>
           <a:prstGeom prst="rect">
             <a:avLst/>
@@ -3677,7 +3678,7 @@
         <p:spPr>
           <a:xfrm>
             <a:off x="8229600" y="0"/>
-            <a:ext cx="12960" cy="6852600"/>
+            <a:ext cx="12600" cy="6852240"/>
           </a:xfrm>
           <a:prstGeom prst="rect">
             <a:avLst/>
@@ -3737,7 +3738,7 @@
         <p:spPr>
           <a:xfrm>
             <a:off x="9144000" y="0"/>
-            <a:ext cx="12960" cy="6852600"/>
+            <a:ext cx="12600" cy="6852240"/>
           </a:xfrm>
           <a:prstGeom prst="rect">
             <a:avLst/>
@@ -3797,7 +3798,7 @@
         <p:spPr>
           <a:xfrm>
             <a:off x="10058400" y="0"/>
-            <a:ext cx="12960" cy="6852600"/>
+            <a:ext cx="12600" cy="6852240"/>
           </a:xfrm>
           <a:prstGeom prst="rect">
             <a:avLst/>
@@ -3857,7 +3858,7 @@
         <p:spPr>
           <a:xfrm>
             <a:off x="10972800" y="0"/>
-            <a:ext cx="12960" cy="6852600"/>
+            <a:ext cx="12600" cy="6852240"/>
           </a:xfrm>
           <a:prstGeom prst="rect">
             <a:avLst/>
@@ -3917,7 +3918,7 @@
         <p:spPr>
           <a:xfrm>
             <a:off x="11887200" y="0"/>
-            <a:ext cx="12960" cy="6852600"/>
+            <a:ext cx="12600" cy="6852240"/>
           </a:xfrm>
           <a:prstGeom prst="rect">
             <a:avLst/>
@@ -3977,7 +3978,7 @@
         <p:spPr>
           <a:xfrm>
             <a:off x="0" y="0"/>
-            <a:ext cx="314640" cy="6852600"/>
+            <a:ext cx="314280" cy="6852240"/>
           </a:xfrm>
           <a:prstGeom prst="rect">
             <a:avLst/>
@@ -4037,7 +4038,7 @@
         <p:spPr>
           <a:xfrm>
             <a:off x="9875520" y="365760"/>
-            <a:ext cx="2006280" cy="497520"/>
+            <a:ext cx="2005920" cy="497160"/>
           </a:xfrm>
           <a:prstGeom prst="roundRect">
             <a:avLst>
@@ -4288,7 +4289,7 @@
         <p:spPr>
           <a:xfrm>
             <a:off x="987480" y="3182040"/>
-            <a:ext cx="3286440" cy="2737800"/>
+            <a:ext cx="3286080" cy="2737440"/>
           </a:xfrm>
           <a:prstGeom prst="roundRect">
             <a:avLst>
@@ -4350,7 +4351,7 @@
         <p:spPr>
           <a:xfrm>
             <a:off x="914400" y="3108960"/>
-            <a:ext cx="3286440" cy="2737800"/>
+            <a:ext cx="3286080" cy="2737440"/>
           </a:xfrm>
           <a:prstGeom prst="roundRect">
             <a:avLst>
@@ -4484,7 +4485,7 @@
         <p:spPr>
           <a:xfrm>
             <a:off x="4507920" y="3182040"/>
-            <a:ext cx="3286440" cy="2737800"/>
+            <a:ext cx="3286080" cy="2737440"/>
           </a:xfrm>
           <a:prstGeom prst="roundRect">
             <a:avLst>
@@ -4546,7 +4547,7 @@
         <p:spPr>
           <a:xfrm>
             <a:off x="4434840" y="3108960"/>
-            <a:ext cx="3286440" cy="2737800"/>
+            <a:ext cx="3286080" cy="2737440"/>
           </a:xfrm>
           <a:prstGeom prst="roundRect">
             <a:avLst>
@@ -4804,7 +4805,7 @@
         <p:spPr>
           <a:xfrm>
             <a:off x="8028360" y="3182040"/>
-            <a:ext cx="3286440" cy="2737800"/>
+            <a:ext cx="3286080" cy="2737440"/>
           </a:xfrm>
           <a:prstGeom prst="roundRect">
             <a:avLst>
@@ -4866,7 +4867,7 @@
         <p:spPr>
           <a:xfrm>
             <a:off x="7955280" y="2971800"/>
-            <a:ext cx="3927600" cy="3653280"/>
+            <a:ext cx="3927240" cy="3652920"/>
           </a:xfrm>
           <a:prstGeom prst="roundRect">
             <a:avLst>
@@ -5377,7 +5378,7 @@
         <p:spPr>
           <a:xfrm>
             <a:off x="0" y="0"/>
-            <a:ext cx="12183840" cy="6852960"/>
+            <a:ext cx="12183480" cy="6852600"/>
           </a:xfrm>
           <a:prstGeom prst="rect">
             <a:avLst/>
@@ -5437,7 +5438,7 @@
         <p:spPr>
           <a:xfrm>
             <a:off x="0" y="0"/>
-            <a:ext cx="13320" cy="6852960"/>
+            <a:ext cx="12960" cy="6852600"/>
           </a:xfrm>
           <a:prstGeom prst="rect">
             <a:avLst/>
@@ -5497,7 +5498,7 @@
         <p:spPr>
           <a:xfrm>
             <a:off x="914400" y="0"/>
-            <a:ext cx="13320" cy="6852960"/>
+            <a:ext cx="12960" cy="6852600"/>
           </a:xfrm>
           <a:prstGeom prst="rect">
             <a:avLst/>
@@ -5557,7 +5558,7 @@
         <p:spPr>
           <a:xfrm>
             <a:off x="1828800" y="0"/>
-            <a:ext cx="13320" cy="6852960"/>
+            <a:ext cx="12960" cy="6852600"/>
           </a:xfrm>
           <a:prstGeom prst="rect">
             <a:avLst/>
@@ -5617,7 +5618,7 @@
         <p:spPr>
           <a:xfrm>
             <a:off x="2743200" y="0"/>
-            <a:ext cx="13320" cy="6852960"/>
+            <a:ext cx="12960" cy="6852600"/>
           </a:xfrm>
           <a:prstGeom prst="rect">
             <a:avLst/>
@@ -5677,7 +5678,7 @@
         <p:spPr>
           <a:xfrm>
             <a:off x="3657600" y="0"/>
-            <a:ext cx="13320" cy="6852960"/>
+            <a:ext cx="12960" cy="6852600"/>
           </a:xfrm>
           <a:prstGeom prst="rect">
             <a:avLst/>
@@ -5737,7 +5738,7 @@
         <p:spPr>
           <a:xfrm>
             <a:off x="4572000" y="0"/>
-            <a:ext cx="13320" cy="6852960"/>
+            <a:ext cx="12960" cy="6852600"/>
           </a:xfrm>
           <a:prstGeom prst="rect">
             <a:avLst/>
@@ -5797,7 +5798,7 @@
         <p:spPr>
           <a:xfrm>
             <a:off x="5486400" y="0"/>
-            <a:ext cx="13320" cy="6852960"/>
+            <a:ext cx="12960" cy="6852600"/>
           </a:xfrm>
           <a:prstGeom prst="rect">
             <a:avLst/>
@@ -5857,7 +5858,7 @@
         <p:spPr>
           <a:xfrm>
             <a:off x="6400800" y="0"/>
-            <a:ext cx="13320" cy="6852960"/>
+            <a:ext cx="12960" cy="6852600"/>
           </a:xfrm>
           <a:prstGeom prst="rect">
             <a:avLst/>
@@ -5917,7 +5918,7 @@
         <p:spPr>
           <a:xfrm>
             <a:off x="7315200" y="0"/>
-            <a:ext cx="13320" cy="6852960"/>
+            <a:ext cx="12960" cy="6852600"/>
           </a:xfrm>
           <a:prstGeom prst="rect">
             <a:avLst/>
@@ -5977,7 +5978,7 @@
         <p:spPr>
           <a:xfrm>
             <a:off x="8229600" y="0"/>
-            <a:ext cx="13320" cy="6852960"/>
+            <a:ext cx="12960" cy="6852600"/>
           </a:xfrm>
           <a:prstGeom prst="rect">
             <a:avLst/>
@@ -6037,7 +6038,7 @@
         <p:spPr>
           <a:xfrm>
             <a:off x="9144000" y="0"/>
-            <a:ext cx="13320" cy="6852960"/>
+            <a:ext cx="12960" cy="6852600"/>
           </a:xfrm>
           <a:prstGeom prst="rect">
             <a:avLst/>
@@ -6097,7 +6098,7 @@
         <p:spPr>
           <a:xfrm>
             <a:off x="10058400" y="0"/>
-            <a:ext cx="13320" cy="6852960"/>
+            <a:ext cx="12960" cy="6852600"/>
           </a:xfrm>
           <a:prstGeom prst="rect">
             <a:avLst/>
@@ -6157,7 +6158,7 @@
         <p:spPr>
           <a:xfrm>
             <a:off x="10972800" y="0"/>
-            <a:ext cx="13320" cy="6852960"/>
+            <a:ext cx="12960" cy="6852600"/>
           </a:xfrm>
           <a:prstGeom prst="rect">
             <a:avLst/>
@@ -6217,7 +6218,7 @@
         <p:spPr>
           <a:xfrm>
             <a:off x="11887200" y="0"/>
-            <a:ext cx="13320" cy="6852960"/>
+            <a:ext cx="12960" cy="6852600"/>
           </a:xfrm>
           <a:prstGeom prst="rect">
             <a:avLst/>
@@ -6277,7 +6278,7 @@
         <p:spPr>
           <a:xfrm>
             <a:off x="0" y="0"/>
-            <a:ext cx="315000" cy="6852960"/>
+            <a:ext cx="314640" cy="6852600"/>
           </a:xfrm>
           <a:prstGeom prst="rect">
             <a:avLst/>
@@ -6337,7 +6338,7 @@
         <p:spPr>
           <a:xfrm>
             <a:off x="9875520" y="365760"/>
-            <a:ext cx="2006640" cy="497880"/>
+            <a:ext cx="2006280" cy="497520"/>
           </a:xfrm>
           <a:prstGeom prst="roundRect">
             <a:avLst>
@@ -6478,7 +6479,7 @@
         <p:spPr>
           <a:xfrm>
             <a:off x="1267200" y="1694880"/>
-            <a:ext cx="9034920" cy="819720"/>
+            <a:ext cx="9034560" cy="819720"/>
           </a:xfrm>
           <a:prstGeom prst="rect">
             <a:avLst/>
@@ -6578,7 +6579,7 @@
         <p:spPr>
           <a:xfrm>
             <a:off x="987480" y="3182040"/>
-            <a:ext cx="3286800" cy="2738160"/>
+            <a:ext cx="3286440" cy="2737800"/>
           </a:xfrm>
           <a:prstGeom prst="roundRect">
             <a:avLst>
@@ -6640,7 +6641,7 @@
         <p:spPr>
           <a:xfrm>
             <a:off x="685800" y="2743200"/>
-            <a:ext cx="3515400" cy="3655800"/>
+            <a:ext cx="3515040" cy="3655440"/>
           </a:xfrm>
           <a:prstGeom prst="roundRect">
             <a:avLst>
@@ -6882,7 +6883,7 @@
         <p:spPr>
           <a:xfrm>
             <a:off x="4507920" y="3182040"/>
-            <a:ext cx="3286800" cy="2738160"/>
+            <a:ext cx="3286440" cy="2737800"/>
           </a:xfrm>
           <a:prstGeom prst="roundRect">
             <a:avLst>
@@ -6944,7 +6945,7 @@
         <p:spPr>
           <a:xfrm>
             <a:off x="4434840" y="2971800"/>
-            <a:ext cx="3286800" cy="3427200"/>
+            <a:ext cx="3286440" cy="3426840"/>
           </a:xfrm>
           <a:prstGeom prst="roundRect">
             <a:avLst>
@@ -7298,7 +7299,7 @@
         <p:spPr>
           <a:xfrm>
             <a:off x="8028360" y="3182040"/>
-            <a:ext cx="3286800" cy="2738160"/>
+            <a:ext cx="3286440" cy="2737800"/>
           </a:xfrm>
           <a:prstGeom prst="roundRect">
             <a:avLst>
@@ -7360,7 +7361,7 @@
         <p:spPr>
           <a:xfrm>
             <a:off x="8003880" y="2743200"/>
-            <a:ext cx="3425040" cy="3654360"/>
+            <a:ext cx="3424680" cy="3654000"/>
           </a:xfrm>
           <a:prstGeom prst="roundRect">
             <a:avLst>
@@ -8036,7 +8037,7 @@
         <p:spPr>
           <a:xfrm>
             <a:off x="0" y="0"/>
-            <a:ext cx="12183840" cy="6852960"/>
+            <a:ext cx="12183480" cy="6852600"/>
           </a:xfrm>
           <a:prstGeom prst="rect">
             <a:avLst/>
@@ -8096,7 +8097,7 @@
         <p:spPr>
           <a:xfrm>
             <a:off x="0" y="0"/>
-            <a:ext cx="13320" cy="6852960"/>
+            <a:ext cx="12960" cy="6852600"/>
           </a:xfrm>
           <a:prstGeom prst="rect">
             <a:avLst/>
@@ -8156,7 +8157,7 @@
         <p:spPr>
           <a:xfrm>
             <a:off x="914400" y="0"/>
-            <a:ext cx="13320" cy="6852960"/>
+            <a:ext cx="12960" cy="6852600"/>
           </a:xfrm>
           <a:prstGeom prst="rect">
             <a:avLst/>
@@ -8216,7 +8217,7 @@
         <p:spPr>
           <a:xfrm>
             <a:off x="1828800" y="0"/>
-            <a:ext cx="13320" cy="6852960"/>
+            <a:ext cx="12960" cy="6852600"/>
           </a:xfrm>
           <a:prstGeom prst="rect">
             <a:avLst/>
@@ -8276,7 +8277,7 @@
         <p:spPr>
           <a:xfrm>
             <a:off x="2743200" y="0"/>
-            <a:ext cx="13320" cy="6852960"/>
+            <a:ext cx="12960" cy="6852600"/>
           </a:xfrm>
           <a:prstGeom prst="rect">
             <a:avLst/>
@@ -8336,7 +8337,7 @@
         <p:spPr>
           <a:xfrm>
             <a:off x="3657600" y="0"/>
-            <a:ext cx="13320" cy="6852960"/>
+            <a:ext cx="12960" cy="6852600"/>
           </a:xfrm>
           <a:prstGeom prst="rect">
             <a:avLst/>
@@ -8396,7 +8397,7 @@
         <p:spPr>
           <a:xfrm>
             <a:off x="4572000" y="0"/>
-            <a:ext cx="13320" cy="6852960"/>
+            <a:ext cx="12960" cy="6852600"/>
           </a:xfrm>
           <a:prstGeom prst="rect">
             <a:avLst/>
@@ -8456,7 +8457,7 @@
         <p:spPr>
           <a:xfrm>
             <a:off x="5486400" y="0"/>
-            <a:ext cx="13320" cy="6852960"/>
+            <a:ext cx="12960" cy="6852600"/>
           </a:xfrm>
           <a:prstGeom prst="rect">
             <a:avLst/>
@@ -8516,7 +8517,7 @@
         <p:spPr>
           <a:xfrm>
             <a:off x="6400800" y="0"/>
-            <a:ext cx="13320" cy="6852960"/>
+            <a:ext cx="12960" cy="6852600"/>
           </a:xfrm>
           <a:prstGeom prst="rect">
             <a:avLst/>
@@ -8576,7 +8577,7 @@
         <p:spPr>
           <a:xfrm>
             <a:off x="7315200" y="0"/>
-            <a:ext cx="13320" cy="6852960"/>
+            <a:ext cx="12960" cy="6852600"/>
           </a:xfrm>
           <a:prstGeom prst="rect">
             <a:avLst/>
@@ -8636,7 +8637,7 @@
         <p:spPr>
           <a:xfrm>
             <a:off x="8229600" y="0"/>
-            <a:ext cx="13320" cy="6852960"/>
+            <a:ext cx="12960" cy="6852600"/>
           </a:xfrm>
           <a:prstGeom prst="rect">
             <a:avLst/>
@@ -8696,7 +8697,7 @@
         <p:spPr>
           <a:xfrm>
             <a:off x="9144000" y="0"/>
-            <a:ext cx="13320" cy="6852960"/>
+            <a:ext cx="12960" cy="6852600"/>
           </a:xfrm>
           <a:prstGeom prst="rect">
             <a:avLst/>
@@ -8756,7 +8757,7 @@
         <p:spPr>
           <a:xfrm>
             <a:off x="10058400" y="0"/>
-            <a:ext cx="13320" cy="6852960"/>
+            <a:ext cx="12960" cy="6852600"/>
           </a:xfrm>
           <a:prstGeom prst="rect">
             <a:avLst/>
@@ -8816,7 +8817,7 @@
         <p:spPr>
           <a:xfrm>
             <a:off x="10972800" y="0"/>
-            <a:ext cx="13320" cy="6852960"/>
+            <a:ext cx="12960" cy="6852600"/>
           </a:xfrm>
           <a:prstGeom prst="rect">
             <a:avLst/>
@@ -8876,7 +8877,7 @@
         <p:spPr>
           <a:xfrm>
             <a:off x="11887200" y="0"/>
-            <a:ext cx="13320" cy="6852960"/>
+            <a:ext cx="12960" cy="6852600"/>
           </a:xfrm>
           <a:prstGeom prst="rect">
             <a:avLst/>
@@ -8936,7 +8937,7 @@
         <p:spPr>
           <a:xfrm>
             <a:off x="0" y="0"/>
-            <a:ext cx="315000" cy="6852960"/>
+            <a:ext cx="314640" cy="6852600"/>
           </a:xfrm>
           <a:prstGeom prst="rect">
             <a:avLst/>
@@ -8996,7 +8997,7 @@
         <p:spPr>
           <a:xfrm>
             <a:off x="9875520" y="365760"/>
-            <a:ext cx="2006640" cy="497880"/>
+            <a:ext cx="2006280" cy="497520"/>
           </a:xfrm>
           <a:prstGeom prst="roundRect">
             <a:avLst>
@@ -9070,7 +9071,7 @@
         <p:spPr>
           <a:xfrm>
             <a:off x="1221120" y="914400"/>
-            <a:ext cx="8526240" cy="516240"/>
+            <a:ext cx="8525880" cy="516240"/>
           </a:xfrm>
           <a:prstGeom prst="rect">
             <a:avLst/>
@@ -9124,7 +9125,7 @@
         <p:spPr>
           <a:xfrm>
             <a:off x="1353600" y="1694880"/>
-            <a:ext cx="8861400" cy="819720"/>
+            <a:ext cx="8861040" cy="819720"/>
           </a:xfrm>
           <a:prstGeom prst="rect">
             <a:avLst/>
@@ -9224,7 +9225,7 @@
         <p:spPr>
           <a:xfrm>
             <a:off x="987480" y="3182040"/>
-            <a:ext cx="3286800" cy="2738160"/>
+            <a:ext cx="3286440" cy="2737800"/>
           </a:xfrm>
           <a:prstGeom prst="roundRect">
             <a:avLst>
@@ -9286,7 +9287,7 @@
         <p:spPr>
           <a:xfrm>
             <a:off x="685800" y="2743200"/>
-            <a:ext cx="3515400" cy="3655800"/>
+            <a:ext cx="3515040" cy="3655440"/>
           </a:xfrm>
           <a:prstGeom prst="roundRect">
             <a:avLst>
@@ -9564,7 +9565,7 @@
         <p:spPr>
           <a:xfrm>
             <a:off x="4507920" y="3182040"/>
-            <a:ext cx="3286800" cy="2738160"/>
+            <a:ext cx="3286440" cy="2737800"/>
           </a:xfrm>
           <a:prstGeom prst="roundRect">
             <a:avLst>
@@ -9626,7 +9627,7 @@
         <p:spPr>
           <a:xfrm>
             <a:off x="4434840" y="2971800"/>
-            <a:ext cx="3286800" cy="3427200"/>
+            <a:ext cx="3286440" cy="3426840"/>
           </a:xfrm>
           <a:prstGeom prst="roundRect">
             <a:avLst>
@@ -9957,7 +9958,7 @@
         <p:spPr>
           <a:xfrm>
             <a:off x="8028360" y="3182040"/>
-            <a:ext cx="3286800" cy="2738160"/>
+            <a:ext cx="3286440" cy="2737800"/>
           </a:xfrm>
           <a:prstGeom prst="roundRect">
             <a:avLst>
@@ -10019,7 +10020,7 @@
         <p:spPr>
           <a:xfrm>
             <a:off x="8001000" y="2971800"/>
-            <a:ext cx="3314160" cy="3428640"/>
+            <a:ext cx="3313800" cy="3428280"/>
           </a:xfrm>
           <a:prstGeom prst="roundRect">
             <a:avLst>
@@ -10761,7 +10762,7 @@
         <p:spPr>
           <a:xfrm>
             <a:off x="0" y="0"/>
-            <a:ext cx="12183840" cy="6852960"/>
+            <a:ext cx="12183480" cy="6852600"/>
           </a:xfrm>
           <a:prstGeom prst="rect">
             <a:avLst/>
@@ -10797,6 +10798,11 @@
             <a:noAutofit/>
           </a:bodyPr>
           <a:p>
+            <a:pPr>
+              <a:lnSpc>
+                <a:spcPct val="100000"/>
+              </a:lnSpc>
+            </a:pPr>
             <a:endParaRPr b="0" lang="en-US" sz="1800" spc="-1" strike="noStrike">
               <a:solidFill>
                 <a:schemeClr val="lt1"/>
@@ -10816,7 +10822,7 @@
         <p:spPr>
           <a:xfrm>
             <a:off x="0" y="0"/>
-            <a:ext cx="13320" cy="6852960"/>
+            <a:ext cx="12960" cy="6852600"/>
           </a:xfrm>
           <a:prstGeom prst="rect">
             <a:avLst/>
@@ -10852,6 +10858,11 @@
             <a:noAutofit/>
           </a:bodyPr>
           <a:p>
+            <a:pPr>
+              <a:lnSpc>
+                <a:spcPct val="100000"/>
+              </a:lnSpc>
+            </a:pPr>
             <a:endParaRPr b="0" lang="en-US" sz="1800" spc="-1" strike="noStrike">
               <a:solidFill>
                 <a:schemeClr val="lt1"/>
@@ -10871,7 +10882,7 @@
         <p:spPr>
           <a:xfrm>
             <a:off x="914400" y="0"/>
-            <a:ext cx="13320" cy="6852960"/>
+            <a:ext cx="12960" cy="6852600"/>
           </a:xfrm>
           <a:prstGeom prst="rect">
             <a:avLst/>
@@ -10907,6 +10918,11 @@
             <a:noAutofit/>
           </a:bodyPr>
           <a:p>
+            <a:pPr>
+              <a:lnSpc>
+                <a:spcPct val="100000"/>
+              </a:lnSpc>
+            </a:pPr>
             <a:endParaRPr b="0" lang="en-US" sz="1800" spc="-1" strike="noStrike">
               <a:solidFill>
                 <a:schemeClr val="lt1"/>
@@ -10926,7 +10942,7 @@
         <p:spPr>
           <a:xfrm>
             <a:off x="1828800" y="0"/>
-            <a:ext cx="13320" cy="6852960"/>
+            <a:ext cx="12960" cy="6852600"/>
           </a:xfrm>
           <a:prstGeom prst="rect">
             <a:avLst/>
@@ -10962,6 +10978,11 @@
             <a:noAutofit/>
           </a:bodyPr>
           <a:p>
+            <a:pPr>
+              <a:lnSpc>
+                <a:spcPct val="100000"/>
+              </a:lnSpc>
+            </a:pPr>
             <a:endParaRPr b="0" lang="en-US" sz="1800" spc="-1" strike="noStrike">
               <a:solidFill>
                 <a:schemeClr val="lt1"/>
@@ -10981,7 +11002,7 @@
         <p:spPr>
           <a:xfrm>
             <a:off x="2743200" y="0"/>
-            <a:ext cx="13320" cy="6852960"/>
+            <a:ext cx="12960" cy="6852600"/>
           </a:xfrm>
           <a:prstGeom prst="rect">
             <a:avLst/>
@@ -11017,6 +11038,11 @@
             <a:noAutofit/>
           </a:bodyPr>
           <a:p>
+            <a:pPr>
+              <a:lnSpc>
+                <a:spcPct val="100000"/>
+              </a:lnSpc>
+            </a:pPr>
             <a:endParaRPr b="0" lang="en-US" sz="1800" spc="-1" strike="noStrike">
               <a:solidFill>
                 <a:schemeClr val="lt1"/>
@@ -11036,7 +11062,7 @@
         <p:spPr>
           <a:xfrm>
             <a:off x="3657600" y="0"/>
-            <a:ext cx="13320" cy="6852960"/>
+            <a:ext cx="12960" cy="6852600"/>
           </a:xfrm>
           <a:prstGeom prst="rect">
             <a:avLst/>
@@ -11072,6 +11098,11 @@
             <a:noAutofit/>
           </a:bodyPr>
           <a:p>
+            <a:pPr>
+              <a:lnSpc>
+                <a:spcPct val="100000"/>
+              </a:lnSpc>
+            </a:pPr>
             <a:endParaRPr b="0" lang="en-US" sz="1800" spc="-1" strike="noStrike">
               <a:solidFill>
                 <a:schemeClr val="lt1"/>
@@ -11091,7 +11122,7 @@
         <p:spPr>
           <a:xfrm>
             <a:off x="4572000" y="0"/>
-            <a:ext cx="13320" cy="6852960"/>
+            <a:ext cx="12960" cy="6852600"/>
           </a:xfrm>
           <a:prstGeom prst="rect">
             <a:avLst/>
@@ -11127,6 +11158,11 @@
             <a:noAutofit/>
           </a:bodyPr>
           <a:p>
+            <a:pPr>
+              <a:lnSpc>
+                <a:spcPct val="100000"/>
+              </a:lnSpc>
+            </a:pPr>
             <a:endParaRPr b="0" lang="en-US" sz="1800" spc="-1" strike="noStrike">
               <a:solidFill>
                 <a:schemeClr val="lt1"/>
@@ -11146,7 +11182,7 @@
         <p:spPr>
           <a:xfrm>
             <a:off x="5486400" y="0"/>
-            <a:ext cx="13320" cy="6852960"/>
+            <a:ext cx="12960" cy="6852600"/>
           </a:xfrm>
           <a:prstGeom prst="rect">
             <a:avLst/>
@@ -11182,6 +11218,11 @@
             <a:noAutofit/>
           </a:bodyPr>
           <a:p>
+            <a:pPr>
+              <a:lnSpc>
+                <a:spcPct val="100000"/>
+              </a:lnSpc>
+            </a:pPr>
             <a:endParaRPr b="0" lang="en-US" sz="1800" spc="-1" strike="noStrike">
               <a:solidFill>
                 <a:schemeClr val="lt1"/>
@@ -11201,7 +11242,7 @@
         <p:spPr>
           <a:xfrm>
             <a:off x="6400800" y="0"/>
-            <a:ext cx="13320" cy="6852960"/>
+            <a:ext cx="12960" cy="6852600"/>
           </a:xfrm>
           <a:prstGeom prst="rect">
             <a:avLst/>
@@ -11237,6 +11278,11 @@
             <a:noAutofit/>
           </a:bodyPr>
           <a:p>
+            <a:pPr>
+              <a:lnSpc>
+                <a:spcPct val="100000"/>
+              </a:lnSpc>
+            </a:pPr>
             <a:endParaRPr b="0" lang="en-US" sz="1800" spc="-1" strike="noStrike">
               <a:solidFill>
                 <a:schemeClr val="lt1"/>
@@ -11256,7 +11302,7 @@
         <p:spPr>
           <a:xfrm>
             <a:off x="7315200" y="0"/>
-            <a:ext cx="13320" cy="6852960"/>
+            <a:ext cx="12960" cy="6852600"/>
           </a:xfrm>
           <a:prstGeom prst="rect">
             <a:avLst/>
@@ -11292,6 +11338,11 @@
             <a:noAutofit/>
           </a:bodyPr>
           <a:p>
+            <a:pPr>
+              <a:lnSpc>
+                <a:spcPct val="100000"/>
+              </a:lnSpc>
+            </a:pPr>
             <a:endParaRPr b="0" lang="en-US" sz="1800" spc="-1" strike="noStrike">
               <a:solidFill>
                 <a:schemeClr val="lt1"/>
@@ -11311,7 +11362,7 @@
         <p:spPr>
           <a:xfrm>
             <a:off x="8229600" y="0"/>
-            <a:ext cx="13320" cy="6852960"/>
+            <a:ext cx="12960" cy="6852600"/>
           </a:xfrm>
           <a:prstGeom prst="rect">
             <a:avLst/>
@@ -11347,6 +11398,11 @@
             <a:noAutofit/>
           </a:bodyPr>
           <a:p>
+            <a:pPr>
+              <a:lnSpc>
+                <a:spcPct val="100000"/>
+              </a:lnSpc>
+            </a:pPr>
             <a:endParaRPr b="0" lang="en-US" sz="1800" spc="-1" strike="noStrike">
               <a:solidFill>
                 <a:schemeClr val="lt1"/>
@@ -11366,7 +11422,7 @@
         <p:spPr>
           <a:xfrm>
             <a:off x="9144000" y="0"/>
-            <a:ext cx="13320" cy="6852960"/>
+            <a:ext cx="12960" cy="6852600"/>
           </a:xfrm>
           <a:prstGeom prst="rect">
             <a:avLst/>
@@ -11402,6 +11458,11 @@
             <a:noAutofit/>
           </a:bodyPr>
           <a:p>
+            <a:pPr>
+              <a:lnSpc>
+                <a:spcPct val="100000"/>
+              </a:lnSpc>
+            </a:pPr>
             <a:endParaRPr b="0" lang="en-US" sz="1800" spc="-1" strike="noStrike">
               <a:solidFill>
                 <a:schemeClr val="lt1"/>
@@ -11421,7 +11482,7 @@
         <p:spPr>
           <a:xfrm>
             <a:off x="10058400" y="0"/>
-            <a:ext cx="13320" cy="6852960"/>
+            <a:ext cx="12960" cy="6852600"/>
           </a:xfrm>
           <a:prstGeom prst="rect">
             <a:avLst/>
@@ -11457,6 +11518,11 @@
             <a:noAutofit/>
           </a:bodyPr>
           <a:p>
+            <a:pPr>
+              <a:lnSpc>
+                <a:spcPct val="100000"/>
+              </a:lnSpc>
+            </a:pPr>
             <a:endParaRPr b="0" lang="en-US" sz="1800" spc="-1" strike="noStrike">
               <a:solidFill>
                 <a:schemeClr val="lt1"/>
@@ -11476,7 +11542,7 @@
         <p:spPr>
           <a:xfrm>
             <a:off x="10972800" y="0"/>
-            <a:ext cx="13320" cy="6852960"/>
+            <a:ext cx="12960" cy="6852600"/>
           </a:xfrm>
           <a:prstGeom prst="rect">
             <a:avLst/>
@@ -11512,6 +11578,11 @@
             <a:noAutofit/>
           </a:bodyPr>
           <a:p>
+            <a:pPr>
+              <a:lnSpc>
+                <a:spcPct val="100000"/>
+              </a:lnSpc>
+            </a:pPr>
             <a:endParaRPr b="0" lang="en-US" sz="1800" spc="-1" strike="noStrike">
               <a:solidFill>
                 <a:schemeClr val="lt1"/>
@@ -11531,7 +11602,7 @@
         <p:spPr>
           <a:xfrm>
             <a:off x="11887200" y="0"/>
-            <a:ext cx="13320" cy="6852960"/>
+            <a:ext cx="12960" cy="6852600"/>
           </a:xfrm>
           <a:prstGeom prst="rect">
             <a:avLst/>
@@ -11567,6 +11638,11 @@
             <a:noAutofit/>
           </a:bodyPr>
           <a:p>
+            <a:pPr>
+              <a:lnSpc>
+                <a:spcPct val="100000"/>
+              </a:lnSpc>
+            </a:pPr>
             <a:endParaRPr b="0" lang="en-US" sz="1800" spc="-1" strike="noStrike">
               <a:solidFill>
                 <a:schemeClr val="lt1"/>
@@ -11586,7 +11662,7 @@
         <p:spPr>
           <a:xfrm>
             <a:off x="0" y="0"/>
-            <a:ext cx="315000" cy="6852960"/>
+            <a:ext cx="314640" cy="6852600"/>
           </a:xfrm>
           <a:prstGeom prst="rect">
             <a:avLst/>
@@ -11622,6 +11698,11 @@
             <a:noAutofit/>
           </a:bodyPr>
           <a:p>
+            <a:pPr>
+              <a:lnSpc>
+                <a:spcPct val="100000"/>
+              </a:lnSpc>
+            </a:pPr>
             <a:endParaRPr b="0" lang="en-US" sz="1800" spc="-1" strike="noStrike">
               <a:solidFill>
                 <a:schemeClr val="lt1"/>
@@ -11641,7 +11722,7 @@
         <p:spPr>
           <a:xfrm>
             <a:off x="9875520" y="365760"/>
-            <a:ext cx="2006640" cy="497880"/>
+            <a:ext cx="2006280" cy="497520"/>
           </a:xfrm>
           <a:prstGeom prst="roundRect">
             <a:avLst>
@@ -11715,7 +11796,7 @@
         <p:spPr>
           <a:xfrm>
             <a:off x="2731320" y="914400"/>
-            <a:ext cx="5505840" cy="516960"/>
+            <a:ext cx="5505480" cy="516240"/>
           </a:xfrm>
           <a:prstGeom prst="rect">
             <a:avLst/>
@@ -11769,7 +11850,7 @@
         <p:spPr>
           <a:xfrm>
             <a:off x="674280" y="1694880"/>
-            <a:ext cx="10219680" cy="576360"/>
+            <a:ext cx="10219320" cy="576360"/>
           </a:xfrm>
           <a:prstGeom prst="rect">
             <a:avLst/>
@@ -11846,7 +11927,7 @@
         <p:spPr>
           <a:xfrm>
             <a:off x="987480" y="3182040"/>
-            <a:ext cx="3286800" cy="2738160"/>
+            <a:ext cx="3286440" cy="2737800"/>
           </a:xfrm>
           <a:prstGeom prst="roundRect">
             <a:avLst>
@@ -11884,6 +11965,11 @@
             <a:noAutofit/>
           </a:bodyPr>
           <a:p>
+            <a:pPr>
+              <a:lnSpc>
+                <a:spcPct val="100000"/>
+              </a:lnSpc>
+            </a:pPr>
             <a:endParaRPr b="0" lang="en-US" sz="1800" spc="-1" strike="noStrike">
               <a:solidFill>
                 <a:schemeClr val="lt1"/>
@@ -11903,7 +11989,7 @@
         <p:spPr>
           <a:xfrm>
             <a:off x="685800" y="2743200"/>
-            <a:ext cx="3515400" cy="3655800"/>
+            <a:ext cx="3515040" cy="3655440"/>
           </a:xfrm>
           <a:prstGeom prst="roundRect">
             <a:avLst>
@@ -12125,7 +12211,7 @@
         <p:spPr>
           <a:xfrm>
             <a:off x="4507920" y="3182040"/>
-            <a:ext cx="3286800" cy="2738160"/>
+            <a:ext cx="3286440" cy="2737800"/>
           </a:xfrm>
           <a:prstGeom prst="roundRect">
             <a:avLst>
@@ -12163,6 +12249,11 @@
             <a:noAutofit/>
           </a:bodyPr>
           <a:p>
+            <a:pPr>
+              <a:lnSpc>
+                <a:spcPct val="100000"/>
+              </a:lnSpc>
+            </a:pPr>
             <a:endParaRPr b="0" lang="en-US" sz="1800" spc="-1" strike="noStrike">
               <a:solidFill>
                 <a:schemeClr val="lt1"/>
@@ -12182,7 +12273,7 @@
         <p:spPr>
           <a:xfrm>
             <a:off x="4434840" y="2971800"/>
-            <a:ext cx="3286800" cy="3427200"/>
+            <a:ext cx="3286440" cy="3426840"/>
           </a:xfrm>
           <a:prstGeom prst="roundRect">
             <a:avLst>
@@ -12599,7 +12690,7 @@
         <p:spPr>
           <a:xfrm>
             <a:off x="8028360" y="3182040"/>
-            <a:ext cx="3286800" cy="2738160"/>
+            <a:ext cx="3286440" cy="2737800"/>
           </a:xfrm>
           <a:prstGeom prst="roundRect">
             <a:avLst>
@@ -12637,6 +12728,11 @@
             <a:noAutofit/>
           </a:bodyPr>
           <a:p>
+            <a:pPr>
+              <a:lnSpc>
+                <a:spcPct val="100000"/>
+              </a:lnSpc>
+            </a:pPr>
             <a:endParaRPr b="0" lang="en-US" sz="1800" spc="-1" strike="noStrike">
               <a:solidFill>
                 <a:schemeClr val="lt1"/>
@@ -12656,7 +12752,7 @@
         <p:spPr>
           <a:xfrm>
             <a:off x="8001000" y="2514600"/>
-            <a:ext cx="3657600" cy="3885840"/>
+            <a:ext cx="3657240" cy="3885480"/>
           </a:xfrm>
           <a:prstGeom prst="roundRect">
             <a:avLst>
@@ -13403,6 +13499,2893 @@
       <p:sp>
         <p:nvSpPr>
           <p:cNvPr id="352" name="TextBox 39"/>
+          <p:cNvSpPr/>
+          <p:nvPr/>
+        </p:nvSpPr>
+        <p:spPr>
+          <a:xfrm>
+            <a:off x="4600080" y="6446520"/>
+            <a:ext cx="3051000" cy="363960"/>
+          </a:xfrm>
+          <a:prstGeom prst="rect">
+            <a:avLst/>
+          </a:prstGeom>
+          <a:noFill/>
+          <a:ln w="0">
+            <a:noFill/>
+          </a:ln>
+        </p:spPr>
+        <p:style>
+          <a:lnRef idx="0"/>
+          <a:fillRef idx="0"/>
+          <a:effectRef idx="0"/>
+          <a:fontRef idx="minor"/>
+        </p:style>
+        <p:txBody>
+          <a:bodyPr wrap="none" lIns="90000" rIns="90000" tIns="45000" bIns="45000" anchor="t">
+            <a:spAutoFit/>
+          </a:bodyPr>
+          <a:p>
+            <a:pPr>
+              <a:lnSpc>
+                <a:spcPct val="100000"/>
+              </a:lnSpc>
+            </a:pPr>
+            <a:r>
+              <a:rPr b="0" lang="en-US" sz="1800" spc="-1" strike="noStrike">
+                <a:solidFill>
+                  <a:srgbClr val="000000"/>
+                </a:solidFill>
+                <a:latin typeface="Calibri"/>
+                <a:ea typeface="DejaVu Sans"/>
+              </a:rPr>
+              <a:t>Java • Ultra Premium Template</a:t>
+            </a:r>
+            <a:endParaRPr b="0" lang="en-US" sz="1800" spc="-1" strike="noStrike">
+              <a:solidFill>
+                <a:srgbClr val="000000"/>
+              </a:solidFill>
+              <a:latin typeface="Arial"/>
+            </a:endParaRPr>
+          </a:p>
+        </p:txBody>
+      </p:sp>
+    </p:spTree>
+  </p:cSld>
+  <mc:AlternateContent>
+    <mc:Choice Requires="p14">
+      <p:transition spd="slow" p14:dur="2000"/>
+    </mc:Choice>
+    <mc:Fallback>
+      <p:transition spd="slow"/>
+    </mc:Fallback>
+  </mc:AlternateContent>
+</p:sld>
+</file>
+
+<file path=ppt/slides/slide13.xml><?xml version="1.0" encoding="utf-8"?>
+<p:sld xmlns:a="http://schemas.openxmlformats.org/drawingml/2006/main" xmlns:p="http://schemas.openxmlformats.org/presentationml/2006/main" xmlns:r="http://schemas.openxmlformats.org/officeDocument/2006/relationships" xmlns:p14="http://schemas.microsoft.com/office/powerpoint/2010/main" xmlns:p15="http://schemas.microsoft.com/office/powerpoint/2012/main" xmlns:mc="http://schemas.openxmlformats.org/markup-compatibility/2006">
+  <p:cSld>
+    <p:spTree>
+      <p:nvGrpSpPr>
+        <p:cNvPr id="1" name=""/>
+        <p:cNvGrpSpPr/>
+        <p:nvPr/>
+      </p:nvGrpSpPr>
+      <p:grpSpPr>
+        <a:xfrm>
+          <a:off x="0" y="0"/>
+          <a:ext cx="0" cy="0"/>
+          <a:chOff x="0" y="0"/>
+          <a:chExt cx="0" cy="0"/>
+        </a:xfrm>
+      </p:grpSpPr>
+      <p:sp>
+        <p:nvSpPr>
+          <p:cNvPr id="353" name="Rectangle 193"/>
+          <p:cNvSpPr/>
+          <p:nvPr/>
+        </p:nvSpPr>
+        <p:spPr>
+          <a:xfrm>
+            <a:off x="0" y="0"/>
+            <a:ext cx="12183480" cy="6852600"/>
+          </a:xfrm>
+          <a:prstGeom prst="rect">
+            <a:avLst/>
+          </a:prstGeom>
+          <a:solidFill>
+            <a:srgbClr val="0b0b0d"/>
+          </a:solidFill>
+          <a:ln>
+            <a:noFill/>
+          </a:ln>
+          <a:effectLst>
+            <a:outerShdw blurRad="39960" dir="5400000" dist="23040" rotWithShape="0">
+              <a:srgbClr val="000000">
+                <a:alpha val="35000"/>
+              </a:srgbClr>
+            </a:outerShdw>
+          </a:effectLst>
+        </p:spPr>
+        <p:style>
+          <a:lnRef idx="1">
+            <a:schemeClr val="accent1"/>
+          </a:lnRef>
+          <a:fillRef idx="3">
+            <a:schemeClr val="accent1"/>
+          </a:fillRef>
+          <a:effectRef idx="2">
+            <a:schemeClr val="accent1"/>
+          </a:effectRef>
+          <a:fontRef idx="minor"/>
+        </p:style>
+        <p:txBody>
+          <a:bodyPr lIns="90000" rIns="90000" tIns="45000" bIns="45000" anchor="ctr">
+            <a:noAutofit/>
+          </a:bodyPr>
+          <a:p>
+            <a:endParaRPr b="0" lang="en-US" sz="1800" spc="-1" strike="noStrike">
+              <a:solidFill>
+                <a:schemeClr val="lt1"/>
+              </a:solidFill>
+              <a:latin typeface="Calibri"/>
+              <a:ea typeface="DejaVu Sans"/>
+            </a:endParaRPr>
+          </a:p>
+        </p:txBody>
+      </p:sp>
+      <p:sp>
+        <p:nvSpPr>
+          <p:cNvPr id="354" name="Rectangle 194"/>
+          <p:cNvSpPr/>
+          <p:nvPr/>
+        </p:nvSpPr>
+        <p:spPr>
+          <a:xfrm>
+            <a:off x="0" y="0"/>
+            <a:ext cx="12960" cy="6852600"/>
+          </a:xfrm>
+          <a:prstGeom prst="rect">
+            <a:avLst/>
+          </a:prstGeom>
+          <a:solidFill>
+            <a:srgbClr val="121216"/>
+          </a:solidFill>
+          <a:ln>
+            <a:noFill/>
+          </a:ln>
+          <a:effectLst>
+            <a:outerShdw blurRad="39960" dir="5400000" dist="23040" rotWithShape="0">
+              <a:srgbClr val="000000">
+                <a:alpha val="35000"/>
+              </a:srgbClr>
+            </a:outerShdw>
+          </a:effectLst>
+        </p:spPr>
+        <p:style>
+          <a:lnRef idx="1">
+            <a:schemeClr val="accent1"/>
+          </a:lnRef>
+          <a:fillRef idx="3">
+            <a:schemeClr val="accent1"/>
+          </a:fillRef>
+          <a:effectRef idx="2">
+            <a:schemeClr val="accent1"/>
+          </a:effectRef>
+          <a:fontRef idx="minor"/>
+        </p:style>
+        <p:txBody>
+          <a:bodyPr lIns="90000" rIns="90000" tIns="45000" bIns="45000" anchor="ctr">
+            <a:noAutofit/>
+          </a:bodyPr>
+          <a:p>
+            <a:endParaRPr b="0" lang="en-US" sz="1800" spc="-1" strike="noStrike">
+              <a:solidFill>
+                <a:schemeClr val="lt1"/>
+              </a:solidFill>
+              <a:latin typeface="Calibri"/>
+              <a:ea typeface="DejaVu Sans"/>
+            </a:endParaRPr>
+          </a:p>
+        </p:txBody>
+      </p:sp>
+      <p:sp>
+        <p:nvSpPr>
+          <p:cNvPr id="355" name="Rectangle 195"/>
+          <p:cNvSpPr/>
+          <p:nvPr/>
+        </p:nvSpPr>
+        <p:spPr>
+          <a:xfrm>
+            <a:off x="914400" y="0"/>
+            <a:ext cx="12960" cy="6852600"/>
+          </a:xfrm>
+          <a:prstGeom prst="rect">
+            <a:avLst/>
+          </a:prstGeom>
+          <a:solidFill>
+            <a:srgbClr val="121216"/>
+          </a:solidFill>
+          <a:ln>
+            <a:noFill/>
+          </a:ln>
+          <a:effectLst>
+            <a:outerShdw blurRad="39960" dir="5400000" dist="23040" rotWithShape="0">
+              <a:srgbClr val="000000">
+                <a:alpha val="35000"/>
+              </a:srgbClr>
+            </a:outerShdw>
+          </a:effectLst>
+        </p:spPr>
+        <p:style>
+          <a:lnRef idx="1">
+            <a:schemeClr val="accent1"/>
+          </a:lnRef>
+          <a:fillRef idx="3">
+            <a:schemeClr val="accent1"/>
+          </a:fillRef>
+          <a:effectRef idx="2">
+            <a:schemeClr val="accent1"/>
+          </a:effectRef>
+          <a:fontRef idx="minor"/>
+        </p:style>
+        <p:txBody>
+          <a:bodyPr lIns="90000" rIns="90000" tIns="45000" bIns="45000" anchor="ctr">
+            <a:noAutofit/>
+          </a:bodyPr>
+          <a:p>
+            <a:endParaRPr b="0" lang="en-US" sz="1800" spc="-1" strike="noStrike">
+              <a:solidFill>
+                <a:schemeClr val="lt1"/>
+              </a:solidFill>
+              <a:latin typeface="Calibri"/>
+              <a:ea typeface="DejaVu Sans"/>
+            </a:endParaRPr>
+          </a:p>
+        </p:txBody>
+      </p:sp>
+      <p:sp>
+        <p:nvSpPr>
+          <p:cNvPr id="356" name="Rectangle 196"/>
+          <p:cNvSpPr/>
+          <p:nvPr/>
+        </p:nvSpPr>
+        <p:spPr>
+          <a:xfrm>
+            <a:off x="1828800" y="0"/>
+            <a:ext cx="12960" cy="6852600"/>
+          </a:xfrm>
+          <a:prstGeom prst="rect">
+            <a:avLst/>
+          </a:prstGeom>
+          <a:solidFill>
+            <a:srgbClr val="121216"/>
+          </a:solidFill>
+          <a:ln>
+            <a:noFill/>
+          </a:ln>
+          <a:effectLst>
+            <a:outerShdw blurRad="39960" dir="5400000" dist="23040" rotWithShape="0">
+              <a:srgbClr val="000000">
+                <a:alpha val="35000"/>
+              </a:srgbClr>
+            </a:outerShdw>
+          </a:effectLst>
+        </p:spPr>
+        <p:style>
+          <a:lnRef idx="1">
+            <a:schemeClr val="accent1"/>
+          </a:lnRef>
+          <a:fillRef idx="3">
+            <a:schemeClr val="accent1"/>
+          </a:fillRef>
+          <a:effectRef idx="2">
+            <a:schemeClr val="accent1"/>
+          </a:effectRef>
+          <a:fontRef idx="minor"/>
+        </p:style>
+        <p:txBody>
+          <a:bodyPr lIns="90000" rIns="90000" tIns="45000" bIns="45000" anchor="ctr">
+            <a:noAutofit/>
+          </a:bodyPr>
+          <a:p>
+            <a:endParaRPr b="0" lang="en-US" sz="1800" spc="-1" strike="noStrike">
+              <a:solidFill>
+                <a:schemeClr val="lt1"/>
+              </a:solidFill>
+              <a:latin typeface="Calibri"/>
+              <a:ea typeface="DejaVu Sans"/>
+            </a:endParaRPr>
+          </a:p>
+        </p:txBody>
+      </p:sp>
+      <p:sp>
+        <p:nvSpPr>
+          <p:cNvPr id="357" name="Rectangle 197"/>
+          <p:cNvSpPr/>
+          <p:nvPr/>
+        </p:nvSpPr>
+        <p:spPr>
+          <a:xfrm>
+            <a:off x="2743200" y="0"/>
+            <a:ext cx="12960" cy="6852600"/>
+          </a:xfrm>
+          <a:prstGeom prst="rect">
+            <a:avLst/>
+          </a:prstGeom>
+          <a:solidFill>
+            <a:srgbClr val="121216"/>
+          </a:solidFill>
+          <a:ln>
+            <a:noFill/>
+          </a:ln>
+          <a:effectLst>
+            <a:outerShdw blurRad="39960" dir="5400000" dist="23040" rotWithShape="0">
+              <a:srgbClr val="000000">
+                <a:alpha val="35000"/>
+              </a:srgbClr>
+            </a:outerShdw>
+          </a:effectLst>
+        </p:spPr>
+        <p:style>
+          <a:lnRef idx="1">
+            <a:schemeClr val="accent1"/>
+          </a:lnRef>
+          <a:fillRef idx="3">
+            <a:schemeClr val="accent1"/>
+          </a:fillRef>
+          <a:effectRef idx="2">
+            <a:schemeClr val="accent1"/>
+          </a:effectRef>
+          <a:fontRef idx="minor"/>
+        </p:style>
+        <p:txBody>
+          <a:bodyPr lIns="90000" rIns="90000" tIns="45000" bIns="45000" anchor="ctr">
+            <a:noAutofit/>
+          </a:bodyPr>
+          <a:p>
+            <a:endParaRPr b="0" lang="en-US" sz="1800" spc="-1" strike="noStrike">
+              <a:solidFill>
+                <a:schemeClr val="lt1"/>
+              </a:solidFill>
+              <a:latin typeface="Calibri"/>
+              <a:ea typeface="DejaVu Sans"/>
+            </a:endParaRPr>
+          </a:p>
+        </p:txBody>
+      </p:sp>
+      <p:sp>
+        <p:nvSpPr>
+          <p:cNvPr id="358" name="Rectangle 198"/>
+          <p:cNvSpPr/>
+          <p:nvPr/>
+        </p:nvSpPr>
+        <p:spPr>
+          <a:xfrm>
+            <a:off x="3657600" y="0"/>
+            <a:ext cx="12960" cy="6852600"/>
+          </a:xfrm>
+          <a:prstGeom prst="rect">
+            <a:avLst/>
+          </a:prstGeom>
+          <a:solidFill>
+            <a:srgbClr val="121216"/>
+          </a:solidFill>
+          <a:ln>
+            <a:noFill/>
+          </a:ln>
+          <a:effectLst>
+            <a:outerShdw blurRad="39960" dir="5400000" dist="23040" rotWithShape="0">
+              <a:srgbClr val="000000">
+                <a:alpha val="35000"/>
+              </a:srgbClr>
+            </a:outerShdw>
+          </a:effectLst>
+        </p:spPr>
+        <p:style>
+          <a:lnRef idx="1">
+            <a:schemeClr val="accent1"/>
+          </a:lnRef>
+          <a:fillRef idx="3">
+            <a:schemeClr val="accent1"/>
+          </a:fillRef>
+          <a:effectRef idx="2">
+            <a:schemeClr val="accent1"/>
+          </a:effectRef>
+          <a:fontRef idx="minor"/>
+        </p:style>
+        <p:txBody>
+          <a:bodyPr lIns="90000" rIns="90000" tIns="45000" bIns="45000" anchor="ctr">
+            <a:noAutofit/>
+          </a:bodyPr>
+          <a:p>
+            <a:endParaRPr b="0" lang="en-US" sz="1800" spc="-1" strike="noStrike">
+              <a:solidFill>
+                <a:schemeClr val="lt1"/>
+              </a:solidFill>
+              <a:latin typeface="Calibri"/>
+              <a:ea typeface="DejaVu Sans"/>
+            </a:endParaRPr>
+          </a:p>
+        </p:txBody>
+      </p:sp>
+      <p:sp>
+        <p:nvSpPr>
+          <p:cNvPr id="359" name="Rectangle 199"/>
+          <p:cNvSpPr/>
+          <p:nvPr/>
+        </p:nvSpPr>
+        <p:spPr>
+          <a:xfrm>
+            <a:off x="4572000" y="0"/>
+            <a:ext cx="12960" cy="6852600"/>
+          </a:xfrm>
+          <a:prstGeom prst="rect">
+            <a:avLst/>
+          </a:prstGeom>
+          <a:solidFill>
+            <a:srgbClr val="121216"/>
+          </a:solidFill>
+          <a:ln>
+            <a:noFill/>
+          </a:ln>
+          <a:effectLst>
+            <a:outerShdw blurRad="39960" dir="5400000" dist="23040" rotWithShape="0">
+              <a:srgbClr val="000000">
+                <a:alpha val="35000"/>
+              </a:srgbClr>
+            </a:outerShdw>
+          </a:effectLst>
+        </p:spPr>
+        <p:style>
+          <a:lnRef idx="1">
+            <a:schemeClr val="accent1"/>
+          </a:lnRef>
+          <a:fillRef idx="3">
+            <a:schemeClr val="accent1"/>
+          </a:fillRef>
+          <a:effectRef idx="2">
+            <a:schemeClr val="accent1"/>
+          </a:effectRef>
+          <a:fontRef idx="minor"/>
+        </p:style>
+        <p:txBody>
+          <a:bodyPr lIns="90000" rIns="90000" tIns="45000" bIns="45000" anchor="ctr">
+            <a:noAutofit/>
+          </a:bodyPr>
+          <a:p>
+            <a:endParaRPr b="0" lang="en-US" sz="1800" spc="-1" strike="noStrike">
+              <a:solidFill>
+                <a:schemeClr val="lt1"/>
+              </a:solidFill>
+              <a:latin typeface="Calibri"/>
+              <a:ea typeface="DejaVu Sans"/>
+            </a:endParaRPr>
+          </a:p>
+        </p:txBody>
+      </p:sp>
+      <p:sp>
+        <p:nvSpPr>
+          <p:cNvPr id="360" name="Rectangle 200"/>
+          <p:cNvSpPr/>
+          <p:nvPr/>
+        </p:nvSpPr>
+        <p:spPr>
+          <a:xfrm>
+            <a:off x="5486400" y="0"/>
+            <a:ext cx="12960" cy="6852600"/>
+          </a:xfrm>
+          <a:prstGeom prst="rect">
+            <a:avLst/>
+          </a:prstGeom>
+          <a:solidFill>
+            <a:srgbClr val="121216"/>
+          </a:solidFill>
+          <a:ln>
+            <a:noFill/>
+          </a:ln>
+          <a:effectLst>
+            <a:outerShdw blurRad="39960" dir="5400000" dist="23040" rotWithShape="0">
+              <a:srgbClr val="000000">
+                <a:alpha val="35000"/>
+              </a:srgbClr>
+            </a:outerShdw>
+          </a:effectLst>
+        </p:spPr>
+        <p:style>
+          <a:lnRef idx="1">
+            <a:schemeClr val="accent1"/>
+          </a:lnRef>
+          <a:fillRef idx="3">
+            <a:schemeClr val="accent1"/>
+          </a:fillRef>
+          <a:effectRef idx="2">
+            <a:schemeClr val="accent1"/>
+          </a:effectRef>
+          <a:fontRef idx="minor"/>
+        </p:style>
+        <p:txBody>
+          <a:bodyPr lIns="90000" rIns="90000" tIns="45000" bIns="45000" anchor="ctr">
+            <a:noAutofit/>
+          </a:bodyPr>
+          <a:p>
+            <a:endParaRPr b="0" lang="en-US" sz="1800" spc="-1" strike="noStrike">
+              <a:solidFill>
+                <a:schemeClr val="lt1"/>
+              </a:solidFill>
+              <a:latin typeface="Calibri"/>
+              <a:ea typeface="DejaVu Sans"/>
+            </a:endParaRPr>
+          </a:p>
+        </p:txBody>
+      </p:sp>
+      <p:sp>
+        <p:nvSpPr>
+          <p:cNvPr id="361" name="Rectangle 201"/>
+          <p:cNvSpPr/>
+          <p:nvPr/>
+        </p:nvSpPr>
+        <p:spPr>
+          <a:xfrm>
+            <a:off x="6400800" y="0"/>
+            <a:ext cx="12960" cy="6852600"/>
+          </a:xfrm>
+          <a:prstGeom prst="rect">
+            <a:avLst/>
+          </a:prstGeom>
+          <a:solidFill>
+            <a:srgbClr val="121216"/>
+          </a:solidFill>
+          <a:ln>
+            <a:noFill/>
+          </a:ln>
+          <a:effectLst>
+            <a:outerShdw blurRad="39960" dir="5400000" dist="23040" rotWithShape="0">
+              <a:srgbClr val="000000">
+                <a:alpha val="35000"/>
+              </a:srgbClr>
+            </a:outerShdw>
+          </a:effectLst>
+        </p:spPr>
+        <p:style>
+          <a:lnRef idx="1">
+            <a:schemeClr val="accent1"/>
+          </a:lnRef>
+          <a:fillRef idx="3">
+            <a:schemeClr val="accent1"/>
+          </a:fillRef>
+          <a:effectRef idx="2">
+            <a:schemeClr val="accent1"/>
+          </a:effectRef>
+          <a:fontRef idx="minor"/>
+        </p:style>
+        <p:txBody>
+          <a:bodyPr lIns="90000" rIns="90000" tIns="45000" bIns="45000" anchor="ctr">
+            <a:noAutofit/>
+          </a:bodyPr>
+          <a:p>
+            <a:endParaRPr b="0" lang="en-US" sz="1800" spc="-1" strike="noStrike">
+              <a:solidFill>
+                <a:schemeClr val="lt1"/>
+              </a:solidFill>
+              <a:latin typeface="Calibri"/>
+              <a:ea typeface="DejaVu Sans"/>
+            </a:endParaRPr>
+          </a:p>
+        </p:txBody>
+      </p:sp>
+      <p:sp>
+        <p:nvSpPr>
+          <p:cNvPr id="362" name="Rectangle 202"/>
+          <p:cNvSpPr/>
+          <p:nvPr/>
+        </p:nvSpPr>
+        <p:spPr>
+          <a:xfrm>
+            <a:off x="7315200" y="0"/>
+            <a:ext cx="12960" cy="6852600"/>
+          </a:xfrm>
+          <a:prstGeom prst="rect">
+            <a:avLst/>
+          </a:prstGeom>
+          <a:solidFill>
+            <a:srgbClr val="121216"/>
+          </a:solidFill>
+          <a:ln>
+            <a:noFill/>
+          </a:ln>
+          <a:effectLst>
+            <a:outerShdw blurRad="39960" dir="5400000" dist="23040" rotWithShape="0">
+              <a:srgbClr val="000000">
+                <a:alpha val="35000"/>
+              </a:srgbClr>
+            </a:outerShdw>
+          </a:effectLst>
+        </p:spPr>
+        <p:style>
+          <a:lnRef idx="1">
+            <a:schemeClr val="accent1"/>
+          </a:lnRef>
+          <a:fillRef idx="3">
+            <a:schemeClr val="accent1"/>
+          </a:fillRef>
+          <a:effectRef idx="2">
+            <a:schemeClr val="accent1"/>
+          </a:effectRef>
+          <a:fontRef idx="minor"/>
+        </p:style>
+        <p:txBody>
+          <a:bodyPr lIns="90000" rIns="90000" tIns="45000" bIns="45000" anchor="ctr">
+            <a:noAutofit/>
+          </a:bodyPr>
+          <a:p>
+            <a:endParaRPr b="0" lang="en-US" sz="1800" spc="-1" strike="noStrike">
+              <a:solidFill>
+                <a:schemeClr val="lt1"/>
+              </a:solidFill>
+              <a:latin typeface="Calibri"/>
+              <a:ea typeface="DejaVu Sans"/>
+            </a:endParaRPr>
+          </a:p>
+        </p:txBody>
+      </p:sp>
+      <p:sp>
+        <p:nvSpPr>
+          <p:cNvPr id="363" name="Rectangle 203"/>
+          <p:cNvSpPr/>
+          <p:nvPr/>
+        </p:nvSpPr>
+        <p:spPr>
+          <a:xfrm>
+            <a:off x="8229600" y="0"/>
+            <a:ext cx="12960" cy="6852600"/>
+          </a:xfrm>
+          <a:prstGeom prst="rect">
+            <a:avLst/>
+          </a:prstGeom>
+          <a:solidFill>
+            <a:srgbClr val="121216"/>
+          </a:solidFill>
+          <a:ln>
+            <a:noFill/>
+          </a:ln>
+          <a:effectLst>
+            <a:outerShdw blurRad="39960" dir="5400000" dist="23040" rotWithShape="0">
+              <a:srgbClr val="000000">
+                <a:alpha val="35000"/>
+              </a:srgbClr>
+            </a:outerShdw>
+          </a:effectLst>
+        </p:spPr>
+        <p:style>
+          <a:lnRef idx="1">
+            <a:schemeClr val="accent1"/>
+          </a:lnRef>
+          <a:fillRef idx="3">
+            <a:schemeClr val="accent1"/>
+          </a:fillRef>
+          <a:effectRef idx="2">
+            <a:schemeClr val="accent1"/>
+          </a:effectRef>
+          <a:fontRef idx="minor"/>
+        </p:style>
+        <p:txBody>
+          <a:bodyPr lIns="90000" rIns="90000" tIns="45000" bIns="45000" anchor="ctr">
+            <a:noAutofit/>
+          </a:bodyPr>
+          <a:p>
+            <a:endParaRPr b="0" lang="en-US" sz="1800" spc="-1" strike="noStrike">
+              <a:solidFill>
+                <a:schemeClr val="lt1"/>
+              </a:solidFill>
+              <a:latin typeface="Calibri"/>
+              <a:ea typeface="DejaVu Sans"/>
+            </a:endParaRPr>
+          </a:p>
+        </p:txBody>
+      </p:sp>
+      <p:sp>
+        <p:nvSpPr>
+          <p:cNvPr id="364" name="Rectangle 204"/>
+          <p:cNvSpPr/>
+          <p:nvPr/>
+        </p:nvSpPr>
+        <p:spPr>
+          <a:xfrm>
+            <a:off x="9144000" y="0"/>
+            <a:ext cx="12960" cy="6852600"/>
+          </a:xfrm>
+          <a:prstGeom prst="rect">
+            <a:avLst/>
+          </a:prstGeom>
+          <a:solidFill>
+            <a:srgbClr val="121216"/>
+          </a:solidFill>
+          <a:ln>
+            <a:noFill/>
+          </a:ln>
+          <a:effectLst>
+            <a:outerShdw blurRad="39960" dir="5400000" dist="23040" rotWithShape="0">
+              <a:srgbClr val="000000">
+                <a:alpha val="35000"/>
+              </a:srgbClr>
+            </a:outerShdw>
+          </a:effectLst>
+        </p:spPr>
+        <p:style>
+          <a:lnRef idx="1">
+            <a:schemeClr val="accent1"/>
+          </a:lnRef>
+          <a:fillRef idx="3">
+            <a:schemeClr val="accent1"/>
+          </a:fillRef>
+          <a:effectRef idx="2">
+            <a:schemeClr val="accent1"/>
+          </a:effectRef>
+          <a:fontRef idx="minor"/>
+        </p:style>
+        <p:txBody>
+          <a:bodyPr lIns="90000" rIns="90000" tIns="45000" bIns="45000" anchor="ctr">
+            <a:noAutofit/>
+          </a:bodyPr>
+          <a:p>
+            <a:endParaRPr b="0" lang="en-US" sz="1800" spc="-1" strike="noStrike">
+              <a:solidFill>
+                <a:schemeClr val="lt1"/>
+              </a:solidFill>
+              <a:latin typeface="Calibri"/>
+              <a:ea typeface="DejaVu Sans"/>
+            </a:endParaRPr>
+          </a:p>
+        </p:txBody>
+      </p:sp>
+      <p:sp>
+        <p:nvSpPr>
+          <p:cNvPr id="365" name="Rectangle 205"/>
+          <p:cNvSpPr/>
+          <p:nvPr/>
+        </p:nvSpPr>
+        <p:spPr>
+          <a:xfrm>
+            <a:off x="10058400" y="0"/>
+            <a:ext cx="12960" cy="6852600"/>
+          </a:xfrm>
+          <a:prstGeom prst="rect">
+            <a:avLst/>
+          </a:prstGeom>
+          <a:solidFill>
+            <a:srgbClr val="121216"/>
+          </a:solidFill>
+          <a:ln>
+            <a:noFill/>
+          </a:ln>
+          <a:effectLst>
+            <a:outerShdw blurRad="39960" dir="5400000" dist="23040" rotWithShape="0">
+              <a:srgbClr val="000000">
+                <a:alpha val="35000"/>
+              </a:srgbClr>
+            </a:outerShdw>
+          </a:effectLst>
+        </p:spPr>
+        <p:style>
+          <a:lnRef idx="1">
+            <a:schemeClr val="accent1"/>
+          </a:lnRef>
+          <a:fillRef idx="3">
+            <a:schemeClr val="accent1"/>
+          </a:fillRef>
+          <a:effectRef idx="2">
+            <a:schemeClr val="accent1"/>
+          </a:effectRef>
+          <a:fontRef idx="minor"/>
+        </p:style>
+        <p:txBody>
+          <a:bodyPr lIns="90000" rIns="90000" tIns="45000" bIns="45000" anchor="ctr">
+            <a:noAutofit/>
+          </a:bodyPr>
+          <a:p>
+            <a:endParaRPr b="0" lang="en-US" sz="1800" spc="-1" strike="noStrike">
+              <a:solidFill>
+                <a:schemeClr val="lt1"/>
+              </a:solidFill>
+              <a:latin typeface="Calibri"/>
+              <a:ea typeface="DejaVu Sans"/>
+            </a:endParaRPr>
+          </a:p>
+        </p:txBody>
+      </p:sp>
+      <p:sp>
+        <p:nvSpPr>
+          <p:cNvPr id="366" name="Rectangle 206"/>
+          <p:cNvSpPr/>
+          <p:nvPr/>
+        </p:nvSpPr>
+        <p:spPr>
+          <a:xfrm>
+            <a:off x="10972800" y="0"/>
+            <a:ext cx="12960" cy="6852600"/>
+          </a:xfrm>
+          <a:prstGeom prst="rect">
+            <a:avLst/>
+          </a:prstGeom>
+          <a:solidFill>
+            <a:srgbClr val="121216"/>
+          </a:solidFill>
+          <a:ln>
+            <a:noFill/>
+          </a:ln>
+          <a:effectLst>
+            <a:outerShdw blurRad="39960" dir="5400000" dist="23040" rotWithShape="0">
+              <a:srgbClr val="000000">
+                <a:alpha val="35000"/>
+              </a:srgbClr>
+            </a:outerShdw>
+          </a:effectLst>
+        </p:spPr>
+        <p:style>
+          <a:lnRef idx="1">
+            <a:schemeClr val="accent1"/>
+          </a:lnRef>
+          <a:fillRef idx="3">
+            <a:schemeClr val="accent1"/>
+          </a:fillRef>
+          <a:effectRef idx="2">
+            <a:schemeClr val="accent1"/>
+          </a:effectRef>
+          <a:fontRef idx="minor"/>
+        </p:style>
+        <p:txBody>
+          <a:bodyPr lIns="90000" rIns="90000" tIns="45000" bIns="45000" anchor="ctr">
+            <a:noAutofit/>
+          </a:bodyPr>
+          <a:p>
+            <a:endParaRPr b="0" lang="en-US" sz="1800" spc="-1" strike="noStrike">
+              <a:solidFill>
+                <a:schemeClr val="lt1"/>
+              </a:solidFill>
+              <a:latin typeface="Calibri"/>
+              <a:ea typeface="DejaVu Sans"/>
+            </a:endParaRPr>
+          </a:p>
+        </p:txBody>
+      </p:sp>
+      <p:sp>
+        <p:nvSpPr>
+          <p:cNvPr id="367" name="Rectangle 207"/>
+          <p:cNvSpPr/>
+          <p:nvPr/>
+        </p:nvSpPr>
+        <p:spPr>
+          <a:xfrm>
+            <a:off x="11887200" y="0"/>
+            <a:ext cx="12960" cy="6852600"/>
+          </a:xfrm>
+          <a:prstGeom prst="rect">
+            <a:avLst/>
+          </a:prstGeom>
+          <a:solidFill>
+            <a:srgbClr val="121216"/>
+          </a:solidFill>
+          <a:ln>
+            <a:noFill/>
+          </a:ln>
+          <a:effectLst>
+            <a:outerShdw blurRad="39960" dir="5400000" dist="23040" rotWithShape="0">
+              <a:srgbClr val="000000">
+                <a:alpha val="35000"/>
+              </a:srgbClr>
+            </a:outerShdw>
+          </a:effectLst>
+        </p:spPr>
+        <p:style>
+          <a:lnRef idx="1">
+            <a:schemeClr val="accent1"/>
+          </a:lnRef>
+          <a:fillRef idx="3">
+            <a:schemeClr val="accent1"/>
+          </a:fillRef>
+          <a:effectRef idx="2">
+            <a:schemeClr val="accent1"/>
+          </a:effectRef>
+          <a:fontRef idx="minor"/>
+        </p:style>
+        <p:txBody>
+          <a:bodyPr lIns="90000" rIns="90000" tIns="45000" bIns="45000" anchor="ctr">
+            <a:noAutofit/>
+          </a:bodyPr>
+          <a:p>
+            <a:endParaRPr b="0" lang="en-US" sz="1800" spc="-1" strike="noStrike">
+              <a:solidFill>
+                <a:schemeClr val="lt1"/>
+              </a:solidFill>
+              <a:latin typeface="Calibri"/>
+              <a:ea typeface="DejaVu Sans"/>
+            </a:endParaRPr>
+          </a:p>
+        </p:txBody>
+      </p:sp>
+      <p:sp>
+        <p:nvSpPr>
+          <p:cNvPr id="368" name="Rectangle 208"/>
+          <p:cNvSpPr/>
+          <p:nvPr/>
+        </p:nvSpPr>
+        <p:spPr>
+          <a:xfrm>
+            <a:off x="0" y="0"/>
+            <a:ext cx="314640" cy="6852600"/>
+          </a:xfrm>
+          <a:prstGeom prst="rect">
+            <a:avLst/>
+          </a:prstGeom>
+          <a:solidFill>
+            <a:srgbClr val="ff8c00"/>
+          </a:solidFill>
+          <a:ln>
+            <a:noFill/>
+          </a:ln>
+          <a:effectLst>
+            <a:outerShdw blurRad="39960" dir="5400000" dist="23040" rotWithShape="0">
+              <a:srgbClr val="000000">
+                <a:alpha val="35000"/>
+              </a:srgbClr>
+            </a:outerShdw>
+          </a:effectLst>
+        </p:spPr>
+        <p:style>
+          <a:lnRef idx="1">
+            <a:schemeClr val="accent1"/>
+          </a:lnRef>
+          <a:fillRef idx="3">
+            <a:schemeClr val="accent1"/>
+          </a:fillRef>
+          <a:effectRef idx="2">
+            <a:schemeClr val="accent1"/>
+          </a:effectRef>
+          <a:fontRef idx="minor"/>
+        </p:style>
+        <p:txBody>
+          <a:bodyPr lIns="90000" rIns="90000" tIns="45000" bIns="45000" anchor="ctr">
+            <a:noAutofit/>
+          </a:bodyPr>
+          <a:p>
+            <a:endParaRPr b="0" lang="en-US" sz="1800" spc="-1" strike="noStrike">
+              <a:solidFill>
+                <a:schemeClr val="lt1"/>
+              </a:solidFill>
+              <a:latin typeface="Calibri"/>
+              <a:ea typeface="DejaVu Sans"/>
+            </a:endParaRPr>
+          </a:p>
+        </p:txBody>
+      </p:sp>
+      <p:sp>
+        <p:nvSpPr>
+          <p:cNvPr id="369" name="Rounded Rectangle 92"/>
+          <p:cNvSpPr/>
+          <p:nvPr/>
+        </p:nvSpPr>
+        <p:spPr>
+          <a:xfrm>
+            <a:off x="9875520" y="365760"/>
+            <a:ext cx="2006280" cy="497520"/>
+          </a:xfrm>
+          <a:prstGeom prst="roundRect">
+            <a:avLst>
+              <a:gd name="adj" fmla="val 16667"/>
+            </a:avLst>
+          </a:prstGeom>
+          <a:solidFill>
+            <a:srgbClr val="1e1e24"/>
+          </a:solidFill>
+          <a:ln>
+            <a:solidFill>
+              <a:srgbClr val="ff8c00"/>
+            </a:solidFill>
+            <a:round/>
+          </a:ln>
+          <a:effectLst>
+            <a:outerShdw blurRad="39960" dir="5400000" dist="23040" rotWithShape="0">
+              <a:srgbClr val="000000">
+                <a:alpha val="35000"/>
+              </a:srgbClr>
+            </a:outerShdw>
+          </a:effectLst>
+        </p:spPr>
+        <p:style>
+          <a:lnRef idx="1">
+            <a:schemeClr val="accent1"/>
+          </a:lnRef>
+          <a:fillRef idx="3">
+            <a:schemeClr val="accent1"/>
+          </a:fillRef>
+          <a:effectRef idx="2">
+            <a:schemeClr val="accent1"/>
+          </a:effectRef>
+          <a:fontRef idx="minor"/>
+        </p:style>
+        <p:txBody>
+          <a:bodyPr lIns="90000" rIns="90000" tIns="45000" bIns="45000" anchor="ctr">
+            <a:noAutofit/>
+          </a:bodyPr>
+          <a:p>
+            <a:pPr algn="ctr">
+              <a:lnSpc>
+                <a:spcPct val="100000"/>
+              </a:lnSpc>
+            </a:pPr>
+            <a:r>
+              <a:rPr b="1" lang="en-US" sz="1400" spc="-1" strike="noStrike">
+                <a:solidFill>
+                  <a:srgbClr val="ffb45a"/>
+                </a:solidFill>
+                <a:latin typeface="Calibri"/>
+                <a:ea typeface="DejaVu Sans"/>
+              </a:rPr>
+              <a:t>JAVA TEMELLERI</a:t>
+            </a:r>
+            <a:endParaRPr b="0" lang="en-US" sz="1400" spc="-1" strike="noStrike">
+              <a:solidFill>
+                <a:srgbClr val="ffffff"/>
+              </a:solidFill>
+              <a:latin typeface="Arial"/>
+            </a:endParaRPr>
+          </a:p>
+        </p:txBody>
+      </p:sp>
+      <p:sp>
+        <p:nvSpPr>
+          <p:cNvPr id="370" name="TextBox 40"/>
+          <p:cNvSpPr/>
+          <p:nvPr/>
+        </p:nvSpPr>
+        <p:spPr>
+          <a:xfrm>
+            <a:off x="1557360" y="732600"/>
+            <a:ext cx="7853040" cy="639000"/>
+          </a:xfrm>
+          <a:prstGeom prst="rect">
+            <a:avLst/>
+          </a:prstGeom>
+          <a:noFill/>
+          <a:ln w="0">
+            <a:noFill/>
+          </a:ln>
+        </p:spPr>
+        <p:style>
+          <a:lnRef idx="0"/>
+          <a:fillRef idx="0"/>
+          <a:effectRef idx="0"/>
+          <a:fontRef idx="minor"/>
+        </p:style>
+        <p:txBody>
+          <a:bodyPr wrap="none" lIns="90000" rIns="90000" tIns="45000" bIns="45000" anchor="t">
+            <a:spAutoFit/>
+          </a:bodyPr>
+          <a:p>
+            <a:pPr>
+              <a:lnSpc>
+                <a:spcPct val="100000"/>
+              </a:lnSpc>
+            </a:pPr>
+            <a:r>
+              <a:rPr b="1" lang="en-US" sz="3600" spc="-1" strike="noStrike">
+                <a:solidFill>
+                  <a:srgbClr val="f5f5f5"/>
+                </a:solidFill>
+                <a:latin typeface="Calibri"/>
+                <a:ea typeface="DejaVu Sans"/>
+              </a:rPr>
+              <a:t>Gerçek Hayat Örneği: Restoran Adisyonu</a:t>
+            </a:r>
+            <a:endParaRPr b="0" lang="en-US" sz="3600" spc="-1" strike="noStrike">
+              <a:solidFill>
+                <a:srgbClr val="000000"/>
+              </a:solidFill>
+              <a:latin typeface="Arial"/>
+            </a:endParaRPr>
+          </a:p>
+        </p:txBody>
+      </p:sp>
+      <p:sp>
+        <p:nvSpPr>
+          <p:cNvPr id="371" name="TextBox 41"/>
+          <p:cNvSpPr/>
+          <p:nvPr/>
+        </p:nvSpPr>
+        <p:spPr>
+          <a:xfrm>
+            <a:off x="1082520" y="1600200"/>
+            <a:ext cx="9402840" cy="819720"/>
+          </a:xfrm>
+          <a:prstGeom prst="rect">
+            <a:avLst/>
+          </a:prstGeom>
+          <a:noFill/>
+          <a:ln w="0">
+            <a:noFill/>
+          </a:ln>
+        </p:spPr>
+        <p:style>
+          <a:lnRef idx="0"/>
+          <a:fillRef idx="0"/>
+          <a:effectRef idx="0"/>
+          <a:fontRef idx="minor"/>
+        </p:style>
+        <p:txBody>
+          <a:bodyPr wrap="none" lIns="90000" rIns="90000" tIns="45000" bIns="45000" anchor="t">
+            <a:spAutoFit/>
+          </a:bodyPr>
+          <a:p>
+            <a:pPr>
+              <a:lnSpc>
+                <a:spcPct val="100000"/>
+              </a:lnSpc>
+            </a:pPr>
+            <a:r>
+              <a:rPr b="0" lang="en-US" sz="1600" spc="-1" strike="noStrike">
+                <a:solidFill>
+                  <a:srgbClr val="aaaaaa"/>
+                </a:solidFill>
+                <a:latin typeface="Calibri"/>
+                <a:ea typeface="DejaVu Sans"/>
+              </a:rPr>
+              <a:t>Gerçek dünya uygulamalarında aritmetik operatörler iş mantığının </a:t>
+            </a:r>
+            <a:endParaRPr b="0" lang="en-US" sz="1600" spc="-1" strike="noStrike">
+              <a:solidFill>
+                <a:srgbClr val="000000"/>
+              </a:solidFill>
+              <a:latin typeface="Arial"/>
+            </a:endParaRPr>
+          </a:p>
+          <a:p>
+            <a:pPr>
+              <a:lnSpc>
+                <a:spcPct val="100000"/>
+              </a:lnSpc>
+            </a:pPr>
+            <a:r>
+              <a:rPr b="0" lang="en-US" sz="1600" spc="-1" strike="noStrike">
+                <a:solidFill>
+                  <a:srgbClr val="aaaaaa"/>
+                </a:solidFill>
+                <a:latin typeface="Calibri"/>
+                <a:ea typeface="DejaVu Sans"/>
+              </a:rPr>
+              <a:t>motorudur. Bir restoran hesabını hesaplayan, indirim uygulayan, </a:t>
+            </a:r>
+            <a:endParaRPr b="0" lang="en-US" sz="1600" spc="-1" strike="noStrike">
+              <a:solidFill>
+                <a:srgbClr val="000000"/>
+              </a:solidFill>
+              <a:latin typeface="Arial"/>
+            </a:endParaRPr>
+          </a:p>
+          <a:p>
+            <a:pPr>
+              <a:lnSpc>
+                <a:spcPct val="100000"/>
+              </a:lnSpc>
+            </a:pPr>
+            <a:r>
+              <a:rPr b="0" lang="en-US" sz="1600" spc="-1" strike="noStrike">
+                <a:solidFill>
+                  <a:srgbClr val="aaaaaa"/>
+                </a:solidFill>
+                <a:latin typeface="Calibri"/>
+                <a:ea typeface="DejaVu Sans"/>
+              </a:rPr>
+              <a:t>bileşik operatörlerle vergi/bahşiş ekleyen ve son tutarı arkadaşlar arasında bölen mini bir uygulama tasarlayalım.</a:t>
+            </a:r>
+            <a:endParaRPr b="0" lang="en-US" sz="1600" spc="-1" strike="noStrike">
+              <a:solidFill>
+                <a:srgbClr val="000000"/>
+              </a:solidFill>
+              <a:latin typeface="Arial"/>
+            </a:endParaRPr>
+          </a:p>
+        </p:txBody>
+      </p:sp>
+      <p:sp>
+        <p:nvSpPr>
+          <p:cNvPr id="372" name="Rounded Rectangle 93"/>
+          <p:cNvSpPr/>
+          <p:nvPr/>
+        </p:nvSpPr>
+        <p:spPr>
+          <a:xfrm>
+            <a:off x="987480" y="3182040"/>
+            <a:ext cx="3286440" cy="2737800"/>
+          </a:xfrm>
+          <a:prstGeom prst="roundRect">
+            <a:avLst>
+              <a:gd name="adj" fmla="val 16667"/>
+            </a:avLst>
+          </a:prstGeom>
+          <a:solidFill>
+            <a:srgbClr val="08080a"/>
+          </a:solidFill>
+          <a:ln>
+            <a:noFill/>
+          </a:ln>
+          <a:effectLst>
+            <a:outerShdw blurRad="39960" dir="5400000" dist="23040" rotWithShape="0">
+              <a:srgbClr val="000000">
+                <a:alpha val="35000"/>
+              </a:srgbClr>
+            </a:outerShdw>
+          </a:effectLst>
+        </p:spPr>
+        <p:style>
+          <a:lnRef idx="1">
+            <a:schemeClr val="accent1"/>
+          </a:lnRef>
+          <a:fillRef idx="3">
+            <a:schemeClr val="accent1"/>
+          </a:fillRef>
+          <a:effectRef idx="2">
+            <a:schemeClr val="accent1"/>
+          </a:effectRef>
+          <a:fontRef idx="minor"/>
+        </p:style>
+        <p:txBody>
+          <a:bodyPr lIns="90000" rIns="90000" tIns="45000" bIns="45000" anchor="ctr">
+            <a:noAutofit/>
+          </a:bodyPr>
+          <a:p>
+            <a:endParaRPr b="0" lang="en-US" sz="1800" spc="-1" strike="noStrike">
+              <a:solidFill>
+                <a:schemeClr val="lt1"/>
+              </a:solidFill>
+              <a:latin typeface="Calibri"/>
+              <a:ea typeface="DejaVu Sans"/>
+            </a:endParaRPr>
+          </a:p>
+        </p:txBody>
+      </p:sp>
+      <p:sp>
+        <p:nvSpPr>
+          <p:cNvPr id="373" name="Rounded Rectangle 94"/>
+          <p:cNvSpPr/>
+          <p:nvPr/>
+        </p:nvSpPr>
+        <p:spPr>
+          <a:xfrm>
+            <a:off x="685800" y="2971800"/>
+            <a:ext cx="3200400" cy="3429000"/>
+          </a:xfrm>
+          <a:prstGeom prst="roundRect">
+            <a:avLst>
+              <a:gd name="adj" fmla="val 16667"/>
+            </a:avLst>
+          </a:prstGeom>
+          <a:solidFill>
+            <a:srgbClr val="16161c"/>
+          </a:solidFill>
+          <a:ln>
+            <a:solidFill>
+              <a:srgbClr val="464655"/>
+            </a:solidFill>
+            <a:round/>
+          </a:ln>
+          <a:effectLst>
+            <a:outerShdw blurRad="39960" dir="5400000" dist="23040" rotWithShape="0">
+              <a:srgbClr val="000000">
+                <a:alpha val="35000"/>
+              </a:srgbClr>
+            </a:outerShdw>
+          </a:effectLst>
+        </p:spPr>
+        <p:style>
+          <a:lnRef idx="1">
+            <a:schemeClr val="accent1"/>
+          </a:lnRef>
+          <a:fillRef idx="3">
+            <a:schemeClr val="accent1"/>
+          </a:fillRef>
+          <a:effectRef idx="2">
+            <a:schemeClr val="accent1"/>
+          </a:effectRef>
+          <a:fontRef idx="minor"/>
+        </p:style>
+        <p:txBody>
+          <a:bodyPr lIns="90000" rIns="90000" tIns="45000" bIns="45000" anchor="ctr">
+            <a:noAutofit/>
+          </a:bodyPr>
+          <a:p>
+            <a:pPr>
+              <a:lnSpc>
+                <a:spcPct val="100000"/>
+              </a:lnSpc>
+            </a:pPr>
+            <a:r>
+              <a:rPr b="1" lang="en-US" sz="1400" spc="-1" strike="noStrike">
+                <a:solidFill>
+                  <a:schemeClr val="lt1"/>
+                </a:solidFill>
+                <a:latin typeface="Calibri"/>
+                <a:ea typeface="DejaVu Sans"/>
+              </a:rPr>
+              <a:t>Operatörleri İş Kurallarına Eşleme:</a:t>
+            </a:r>
+            <a:endParaRPr b="0" lang="en-US" sz="1400" spc="-1" strike="noStrike">
+              <a:solidFill>
+                <a:srgbClr val="ffffff"/>
+              </a:solidFill>
+              <a:latin typeface="Arial"/>
+            </a:endParaRPr>
+          </a:p>
+          <a:p>
+            <a:pPr marL="216000" indent="-216000">
+              <a:lnSpc>
+                <a:spcPct val="100000"/>
+              </a:lnSpc>
+              <a:buClr>
+                <a:srgbClr val="ffffff"/>
+              </a:buClr>
+              <a:buFont typeface="Wingdings" charset="2"/>
+              <a:buChar char=""/>
+            </a:pPr>
+            <a:r>
+              <a:rPr b="0" lang="en-US" sz="1400" spc="-1" strike="noStrike">
+                <a:solidFill>
+                  <a:schemeClr val="lt1"/>
+                </a:solidFill>
+                <a:latin typeface="Calibri"/>
+                <a:ea typeface="DejaVu Sans"/>
+              </a:rPr>
+              <a:t>Biriktirme (+=):</a:t>
+            </a:r>
+            <a:r>
+              <a:rPr b="1" lang="en-US" sz="1400" spc="-1" strike="noStrike">
+                <a:solidFill>
+                  <a:schemeClr val="lt1"/>
+                </a:solidFill>
+                <a:latin typeface="Calibri"/>
+                <a:ea typeface="DejaVu Sans"/>
+              </a:rPr>
+              <a:t> Sepete veya dijital adisyona birden fazla ürün eklemek için kullanılır.</a:t>
+            </a:r>
+            <a:endParaRPr b="0" lang="en-US" sz="1400" spc="-1" strike="noStrike">
+              <a:solidFill>
+                <a:srgbClr val="ffffff"/>
+              </a:solidFill>
+              <a:latin typeface="Arial"/>
+            </a:endParaRPr>
+          </a:p>
+          <a:p>
+            <a:pPr marL="216000" indent="-216000">
+              <a:lnSpc>
+                <a:spcPct val="100000"/>
+              </a:lnSpc>
+              <a:buClr>
+                <a:srgbClr val="ffffff"/>
+              </a:buClr>
+              <a:buFont typeface="Wingdings" charset="2"/>
+              <a:buChar char=""/>
+            </a:pPr>
+            <a:r>
+              <a:rPr b="0" lang="en-US" sz="1400" spc="-1" strike="noStrike">
+                <a:solidFill>
+                  <a:schemeClr val="lt1"/>
+                </a:solidFill>
+                <a:latin typeface="Calibri"/>
+                <a:ea typeface="DejaVu Sans"/>
+              </a:rPr>
+              <a:t>İndirimler (-=):</a:t>
+            </a:r>
+            <a:r>
+              <a:rPr b="1" lang="en-US" sz="1400" spc="-1" strike="noStrike">
+                <a:solidFill>
+                  <a:schemeClr val="lt1"/>
+                </a:solidFill>
+                <a:latin typeface="Calibri"/>
+                <a:ea typeface="DejaVu Sans"/>
+              </a:rPr>
+              <a:t> Kupon veya promosyon indirimlerini toplamdan düşmek için kullanılır.</a:t>
+            </a:r>
+            <a:endParaRPr b="0" lang="en-US" sz="1400" spc="-1" strike="noStrike">
+              <a:solidFill>
+                <a:srgbClr val="ffffff"/>
+              </a:solidFill>
+              <a:latin typeface="Arial"/>
+            </a:endParaRPr>
+          </a:p>
+          <a:p>
+            <a:pPr marL="216000" indent="-216000">
+              <a:lnSpc>
+                <a:spcPct val="100000"/>
+              </a:lnSpc>
+              <a:buClr>
+                <a:srgbClr val="ffffff"/>
+              </a:buClr>
+              <a:buFont typeface="Wingdings" charset="2"/>
+              <a:buChar char=""/>
+            </a:pPr>
+            <a:r>
+              <a:rPr b="0" lang="en-US" sz="1400" spc="-1" strike="noStrike">
+                <a:solidFill>
+                  <a:schemeClr val="lt1"/>
+                </a:solidFill>
+                <a:latin typeface="Calibri"/>
+                <a:ea typeface="DejaVu Sans"/>
+              </a:rPr>
+              <a:t>Vergi &amp; Bahşiş (*=):</a:t>
+            </a:r>
+            <a:r>
+              <a:rPr b="1" lang="en-US" sz="1400" spc="-1" strike="noStrike">
+                <a:solidFill>
+                  <a:schemeClr val="lt1"/>
+                </a:solidFill>
+                <a:latin typeface="Calibri"/>
+                <a:ea typeface="DejaVu Sans"/>
+              </a:rPr>
+              <a:t> Yüzde uygulamak için kullanılır. Mevcut hesabı 1.25 ile çarpmak, toplama anında %25 ekler.</a:t>
+            </a:r>
+            <a:endParaRPr b="0" lang="en-US" sz="1400" spc="-1" strike="noStrike">
+              <a:solidFill>
+                <a:srgbClr val="ffffff"/>
+              </a:solidFill>
+              <a:latin typeface="Arial"/>
+            </a:endParaRPr>
+          </a:p>
+          <a:p>
+            <a:pPr marL="216000" indent="-216000">
+              <a:lnSpc>
+                <a:spcPct val="100000"/>
+              </a:lnSpc>
+              <a:buClr>
+                <a:srgbClr val="ffffff"/>
+              </a:buClr>
+              <a:buFont typeface="Wingdings" charset="2"/>
+              <a:buChar char=""/>
+            </a:pPr>
+            <a:r>
+              <a:rPr b="0" lang="en-US" sz="1400" spc="-1" strike="noStrike">
+                <a:solidFill>
+                  <a:schemeClr val="lt1"/>
+                </a:solidFill>
+                <a:latin typeface="Calibri"/>
+                <a:ea typeface="DejaVu Sans"/>
+              </a:rPr>
+              <a:t>Adil Bölüşüm (/):</a:t>
+            </a:r>
+            <a:r>
+              <a:rPr b="1" lang="en-US" sz="1400" spc="-1" strike="noStrike">
+                <a:solidFill>
+                  <a:schemeClr val="lt1"/>
+                </a:solidFill>
+                <a:latin typeface="Calibri"/>
+                <a:ea typeface="DejaVu Sans"/>
+              </a:rPr>
+              <a:t> Çıkan nihai tutarı misafir sayısına bölmek için kullanılır.</a:t>
+            </a:r>
+            <a:endParaRPr b="0" lang="en-US" sz="1400" spc="-1" strike="noStrike">
+              <a:solidFill>
+                <a:srgbClr val="ffffff"/>
+              </a:solidFill>
+              <a:latin typeface="Arial"/>
+            </a:endParaRPr>
+          </a:p>
+        </p:txBody>
+      </p:sp>
+      <p:sp>
+        <p:nvSpPr>
+          <p:cNvPr id="374" name="Rounded Rectangle 95"/>
+          <p:cNvSpPr/>
+          <p:nvPr/>
+        </p:nvSpPr>
+        <p:spPr>
+          <a:xfrm>
+            <a:off x="4507920" y="3182040"/>
+            <a:ext cx="3286440" cy="2737800"/>
+          </a:xfrm>
+          <a:prstGeom prst="roundRect">
+            <a:avLst>
+              <a:gd name="adj" fmla="val 16667"/>
+            </a:avLst>
+          </a:prstGeom>
+          <a:solidFill>
+            <a:srgbClr val="08080a"/>
+          </a:solidFill>
+          <a:ln>
+            <a:noFill/>
+          </a:ln>
+          <a:effectLst>
+            <a:outerShdw blurRad="39960" dir="5400000" dist="23040" rotWithShape="0">
+              <a:srgbClr val="000000">
+                <a:alpha val="35000"/>
+              </a:srgbClr>
+            </a:outerShdw>
+          </a:effectLst>
+        </p:spPr>
+        <p:style>
+          <a:lnRef idx="1">
+            <a:schemeClr val="accent1"/>
+          </a:lnRef>
+          <a:fillRef idx="3">
+            <a:schemeClr val="accent1"/>
+          </a:fillRef>
+          <a:effectRef idx="2">
+            <a:schemeClr val="accent1"/>
+          </a:effectRef>
+          <a:fontRef idx="minor"/>
+        </p:style>
+        <p:txBody>
+          <a:bodyPr lIns="90000" rIns="90000" tIns="45000" bIns="45000" anchor="ctr">
+            <a:noAutofit/>
+          </a:bodyPr>
+          <a:p>
+            <a:endParaRPr b="0" lang="en-US" sz="1800" spc="-1" strike="noStrike">
+              <a:solidFill>
+                <a:schemeClr val="lt1"/>
+              </a:solidFill>
+              <a:latin typeface="Calibri"/>
+              <a:ea typeface="DejaVu Sans"/>
+            </a:endParaRPr>
+          </a:p>
+        </p:txBody>
+      </p:sp>
+      <p:sp>
+        <p:nvSpPr>
+          <p:cNvPr id="375" name="Rounded Rectangle 96"/>
+          <p:cNvSpPr/>
+          <p:nvPr/>
+        </p:nvSpPr>
+        <p:spPr>
+          <a:xfrm>
+            <a:off x="4257360" y="2971800"/>
+            <a:ext cx="3286440" cy="3426840"/>
+          </a:xfrm>
+          <a:prstGeom prst="roundRect">
+            <a:avLst>
+              <a:gd name="adj" fmla="val 16667"/>
+            </a:avLst>
+          </a:prstGeom>
+          <a:solidFill>
+            <a:srgbClr val="16161c"/>
+          </a:solidFill>
+          <a:ln>
+            <a:solidFill>
+              <a:srgbClr val="464655"/>
+            </a:solidFill>
+            <a:round/>
+          </a:ln>
+          <a:effectLst>
+            <a:outerShdw blurRad="39960" dir="5400000" dist="23040" rotWithShape="0">
+              <a:srgbClr val="000000">
+                <a:alpha val="35000"/>
+              </a:srgbClr>
+            </a:outerShdw>
+          </a:effectLst>
+        </p:spPr>
+        <p:style>
+          <a:lnRef idx="1">
+            <a:schemeClr val="accent1"/>
+          </a:lnRef>
+          <a:fillRef idx="3">
+            <a:schemeClr val="accent1"/>
+          </a:fillRef>
+          <a:effectRef idx="2">
+            <a:schemeClr val="accent1"/>
+          </a:effectRef>
+          <a:fontRef idx="minor"/>
+        </p:style>
+        <p:txBody>
+          <a:bodyPr lIns="90000" rIns="90000" tIns="45000" bIns="45000" anchor="ctr">
+            <a:noAutofit/>
+          </a:bodyPr>
+          <a:p>
+            <a:pPr>
+              <a:lnSpc>
+                <a:spcPct val="100000"/>
+              </a:lnSpc>
+            </a:pPr>
+            <a:r>
+              <a:rPr b="0" lang="en-US" sz="1400" spc="-1" strike="noStrike">
+                <a:solidFill>
+                  <a:schemeClr val="lt1"/>
+                </a:solidFill>
+                <a:latin typeface="Calibri"/>
+                <a:ea typeface="DejaVu Sans"/>
+              </a:rPr>
+              <a:t>[ Adisyon ve Hesap Akışı ]</a:t>
+            </a:r>
+            <a:endParaRPr b="0" lang="en-US" sz="1400" spc="-1" strike="noStrike">
+              <a:solidFill>
+                <a:srgbClr val="ffffff"/>
+              </a:solidFill>
+              <a:latin typeface="Arial"/>
+            </a:endParaRPr>
+          </a:p>
+          <a:p>
+            <a:pPr>
+              <a:lnSpc>
+                <a:spcPct val="100000"/>
+              </a:lnSpc>
+            </a:pPr>
+            <a:r>
+              <a:rPr b="0" lang="en-US" sz="1400" spc="-1" strike="noStrike">
+                <a:solidFill>
+                  <a:schemeClr val="lt1"/>
+                </a:solidFill>
+                <a:latin typeface="Calibri"/>
+                <a:ea typeface="DejaVu Sans"/>
+              </a:rPr>
+              <a:t>├──</a:t>
+            </a:r>
+            <a:r>
+              <a:rPr b="0" lang="en-US" sz="1400" spc="-1" strike="noStrike">
+                <a:solidFill>
+                  <a:schemeClr val="lt1"/>
+                </a:solidFill>
+                <a:latin typeface="Calibri"/>
+                <a:ea typeface="DejaVu Sans"/>
+              </a:rPr>
+              <a:t>&gt; 1. Masayı Aç</a:t>
+            </a:r>
+            <a:endParaRPr b="0" lang="en-US" sz="1400" spc="-1" strike="noStrike">
+              <a:solidFill>
+                <a:srgbClr val="ffffff"/>
+              </a:solidFill>
+              <a:latin typeface="Arial"/>
+            </a:endParaRPr>
+          </a:p>
+          <a:p>
+            <a:pPr>
+              <a:lnSpc>
+                <a:spcPct val="100000"/>
+              </a:lnSpc>
+            </a:pPr>
+            <a:r>
+              <a:rPr b="0" lang="en-US" sz="1400" spc="-1" strike="noStrike">
+                <a:solidFill>
+                  <a:schemeClr val="lt1"/>
+                </a:solidFill>
+                <a:latin typeface="Calibri"/>
+                <a:ea typeface="DejaVu Sans"/>
+              </a:rPr>
+              <a:t>│ └── </a:t>
+            </a:r>
+            <a:r>
+              <a:rPr b="0" lang="en-US" sz="1400" spc="-1" strike="noStrike">
+                <a:solidFill>
+                  <a:schemeClr val="lt1"/>
+                </a:solidFill>
+                <a:latin typeface="Calibri"/>
+                <a:ea typeface="DejaVu Sans"/>
+              </a:rPr>
+              <a:t>hesap = 0.0</a:t>
+            </a:r>
+            <a:endParaRPr b="0" lang="en-US" sz="1400" spc="-1" strike="noStrike">
+              <a:solidFill>
+                <a:srgbClr val="ffffff"/>
+              </a:solidFill>
+              <a:latin typeface="Arial"/>
+            </a:endParaRPr>
+          </a:p>
+          <a:p>
+            <a:pPr>
+              <a:lnSpc>
+                <a:spcPct val="100000"/>
+              </a:lnSpc>
+            </a:pPr>
+            <a:r>
+              <a:rPr b="0" lang="en-US" sz="1400" spc="-1" strike="noStrike">
+                <a:solidFill>
+                  <a:schemeClr val="lt1"/>
+                </a:solidFill>
+                <a:latin typeface="Calibri"/>
+                <a:ea typeface="DejaVu Sans"/>
+              </a:rPr>
+              <a:t>│</a:t>
+            </a:r>
+            <a:endParaRPr b="0" lang="en-US" sz="1400" spc="-1" strike="noStrike">
+              <a:solidFill>
+                <a:srgbClr val="ffffff"/>
+              </a:solidFill>
+              <a:latin typeface="Arial"/>
+            </a:endParaRPr>
+          </a:p>
+          <a:p>
+            <a:pPr>
+              <a:lnSpc>
+                <a:spcPct val="100000"/>
+              </a:lnSpc>
+            </a:pPr>
+            <a:r>
+              <a:rPr b="0" lang="en-US" sz="1400" spc="-1" strike="noStrike">
+                <a:solidFill>
+                  <a:schemeClr val="lt1"/>
+                </a:solidFill>
+                <a:latin typeface="Calibri"/>
+                <a:ea typeface="DejaVu Sans"/>
+              </a:rPr>
+              <a:t>├──</a:t>
+            </a:r>
+            <a:r>
+              <a:rPr b="0" lang="en-US" sz="1400" spc="-1" strike="noStrike">
+                <a:solidFill>
+                  <a:schemeClr val="lt1"/>
+                </a:solidFill>
+                <a:latin typeface="Calibri"/>
+                <a:ea typeface="DejaVu Sans"/>
+              </a:rPr>
+              <a:t>&gt; 2. Siparişleri Ekle (Biriktir)</a:t>
+            </a:r>
+            <a:endParaRPr b="0" lang="en-US" sz="1400" spc="-1" strike="noStrike">
+              <a:solidFill>
+                <a:srgbClr val="ffffff"/>
+              </a:solidFill>
+              <a:latin typeface="Arial"/>
+            </a:endParaRPr>
+          </a:p>
+          <a:p>
+            <a:pPr>
+              <a:lnSpc>
+                <a:spcPct val="100000"/>
+              </a:lnSpc>
+            </a:pPr>
+            <a:r>
+              <a:rPr b="0" lang="en-US" sz="1400" spc="-1" strike="noStrike">
+                <a:solidFill>
+                  <a:schemeClr val="lt1"/>
+                </a:solidFill>
+                <a:latin typeface="Calibri"/>
+                <a:ea typeface="DejaVu Sans"/>
+              </a:rPr>
+              <a:t>│ └── </a:t>
+            </a:r>
+            <a:r>
+              <a:rPr b="0" lang="en-US" sz="1400" spc="-1" strike="noStrike">
+                <a:solidFill>
+                  <a:schemeClr val="lt1"/>
+                </a:solidFill>
+                <a:latin typeface="Calibri"/>
+                <a:ea typeface="DejaVu Sans"/>
+              </a:rPr>
+              <a:t>hesap += urunFiyati</a:t>
+            </a:r>
+            <a:endParaRPr b="0" lang="en-US" sz="1400" spc="-1" strike="noStrike">
+              <a:solidFill>
+                <a:srgbClr val="ffffff"/>
+              </a:solidFill>
+              <a:latin typeface="Arial"/>
+            </a:endParaRPr>
+          </a:p>
+          <a:p>
+            <a:pPr>
+              <a:lnSpc>
+                <a:spcPct val="100000"/>
+              </a:lnSpc>
+            </a:pPr>
+            <a:r>
+              <a:rPr b="0" lang="en-US" sz="1400" spc="-1" strike="noStrike">
+                <a:solidFill>
+                  <a:schemeClr val="lt1"/>
+                </a:solidFill>
+                <a:latin typeface="Calibri"/>
+                <a:ea typeface="DejaVu Sans"/>
+              </a:rPr>
+              <a:t>│</a:t>
+            </a:r>
+            <a:endParaRPr b="0" lang="en-US" sz="1400" spc="-1" strike="noStrike">
+              <a:solidFill>
+                <a:srgbClr val="ffffff"/>
+              </a:solidFill>
+              <a:latin typeface="Arial"/>
+            </a:endParaRPr>
+          </a:p>
+          <a:p>
+            <a:pPr>
+              <a:lnSpc>
+                <a:spcPct val="100000"/>
+              </a:lnSpc>
+            </a:pPr>
+            <a:r>
+              <a:rPr b="0" lang="en-US" sz="1400" spc="-1" strike="noStrike">
+                <a:solidFill>
+                  <a:schemeClr val="lt1"/>
+                </a:solidFill>
+                <a:latin typeface="Calibri"/>
+                <a:ea typeface="DejaVu Sans"/>
+              </a:rPr>
+              <a:t>├──</a:t>
+            </a:r>
+            <a:r>
+              <a:rPr b="0" lang="en-US" sz="1400" spc="-1" strike="noStrike">
+                <a:solidFill>
+                  <a:schemeClr val="lt1"/>
+                </a:solidFill>
+                <a:latin typeface="Calibri"/>
+                <a:ea typeface="DejaVu Sans"/>
+              </a:rPr>
+              <a:t>&gt; 3. Kupon / İndirim Uygula</a:t>
+            </a:r>
+            <a:endParaRPr b="0" lang="en-US" sz="1400" spc="-1" strike="noStrike">
+              <a:solidFill>
+                <a:srgbClr val="ffffff"/>
+              </a:solidFill>
+              <a:latin typeface="Arial"/>
+            </a:endParaRPr>
+          </a:p>
+          <a:p>
+            <a:pPr>
+              <a:lnSpc>
+                <a:spcPct val="100000"/>
+              </a:lnSpc>
+            </a:pPr>
+            <a:r>
+              <a:rPr b="0" lang="en-US" sz="1400" spc="-1" strike="noStrike">
+                <a:solidFill>
+                  <a:schemeClr val="lt1"/>
+                </a:solidFill>
+                <a:latin typeface="Calibri"/>
+                <a:ea typeface="DejaVu Sans"/>
+              </a:rPr>
+              <a:t>│ └── </a:t>
+            </a:r>
+            <a:r>
+              <a:rPr b="0" lang="en-US" sz="1400" spc="-1" strike="noStrike">
+                <a:solidFill>
+                  <a:schemeClr val="lt1"/>
+                </a:solidFill>
+                <a:latin typeface="Calibri"/>
+                <a:ea typeface="DejaVu Sans"/>
+              </a:rPr>
+              <a:t>hesap -= indirim</a:t>
+            </a:r>
+            <a:endParaRPr b="0" lang="en-US" sz="1400" spc="-1" strike="noStrike">
+              <a:solidFill>
+                <a:srgbClr val="ffffff"/>
+              </a:solidFill>
+              <a:latin typeface="Arial"/>
+            </a:endParaRPr>
+          </a:p>
+          <a:p>
+            <a:pPr>
+              <a:lnSpc>
+                <a:spcPct val="100000"/>
+              </a:lnSpc>
+            </a:pPr>
+            <a:r>
+              <a:rPr b="0" lang="en-US" sz="1400" spc="-1" strike="noStrike">
+                <a:solidFill>
+                  <a:schemeClr val="lt1"/>
+                </a:solidFill>
+                <a:latin typeface="Calibri"/>
+                <a:ea typeface="DejaVu Sans"/>
+              </a:rPr>
+              <a:t>│</a:t>
+            </a:r>
+            <a:endParaRPr b="0" lang="en-US" sz="1400" spc="-1" strike="noStrike">
+              <a:solidFill>
+                <a:srgbClr val="ffffff"/>
+              </a:solidFill>
+              <a:latin typeface="Arial"/>
+            </a:endParaRPr>
+          </a:p>
+          <a:p>
+            <a:pPr>
+              <a:lnSpc>
+                <a:spcPct val="100000"/>
+              </a:lnSpc>
+            </a:pPr>
+            <a:r>
+              <a:rPr b="0" lang="en-US" sz="1400" spc="-1" strike="noStrike">
+                <a:solidFill>
+                  <a:schemeClr val="lt1"/>
+                </a:solidFill>
+                <a:latin typeface="Calibri"/>
+                <a:ea typeface="DejaVu Sans"/>
+              </a:rPr>
+              <a:t>├──</a:t>
+            </a:r>
+            <a:r>
+              <a:rPr b="0" lang="en-US" sz="1400" spc="-1" strike="noStrike">
+                <a:solidFill>
+                  <a:schemeClr val="lt1"/>
+                </a:solidFill>
+                <a:latin typeface="Calibri"/>
+                <a:ea typeface="DejaVu Sans"/>
+              </a:rPr>
+              <a:t>&gt; 4. Vergi &amp; Bahşiş Ekle</a:t>
+            </a:r>
+            <a:endParaRPr b="0" lang="en-US" sz="1400" spc="-1" strike="noStrike">
+              <a:solidFill>
+                <a:srgbClr val="ffffff"/>
+              </a:solidFill>
+              <a:latin typeface="Arial"/>
+            </a:endParaRPr>
+          </a:p>
+          <a:p>
+            <a:pPr>
+              <a:lnSpc>
+                <a:spcPct val="100000"/>
+              </a:lnSpc>
+            </a:pPr>
+            <a:r>
+              <a:rPr b="0" lang="en-US" sz="1400" spc="-1" strike="noStrike">
+                <a:solidFill>
+                  <a:schemeClr val="lt1"/>
+                </a:solidFill>
+                <a:latin typeface="Calibri"/>
+                <a:ea typeface="DejaVu Sans"/>
+              </a:rPr>
+              <a:t>│ └── </a:t>
+            </a:r>
+            <a:r>
+              <a:rPr b="0" lang="en-US" sz="1400" spc="-1" strike="noStrike">
+                <a:solidFill>
+                  <a:schemeClr val="lt1"/>
+                </a:solidFill>
+                <a:latin typeface="Calibri"/>
+                <a:ea typeface="DejaVu Sans"/>
+              </a:rPr>
+              <a:t>hesap *= 1.25 (%25 ekler)</a:t>
+            </a:r>
+            <a:endParaRPr b="0" lang="en-US" sz="1400" spc="-1" strike="noStrike">
+              <a:solidFill>
+                <a:srgbClr val="ffffff"/>
+              </a:solidFill>
+              <a:latin typeface="Arial"/>
+            </a:endParaRPr>
+          </a:p>
+          <a:p>
+            <a:pPr>
+              <a:lnSpc>
+                <a:spcPct val="100000"/>
+              </a:lnSpc>
+            </a:pPr>
+            <a:r>
+              <a:rPr b="0" lang="en-US" sz="1400" spc="-1" strike="noStrike">
+                <a:solidFill>
+                  <a:schemeClr val="lt1"/>
+                </a:solidFill>
+                <a:latin typeface="Calibri"/>
+                <a:ea typeface="DejaVu Sans"/>
+              </a:rPr>
+              <a:t>│</a:t>
+            </a:r>
+            <a:endParaRPr b="0" lang="en-US" sz="1400" spc="-1" strike="noStrike">
+              <a:solidFill>
+                <a:srgbClr val="ffffff"/>
+              </a:solidFill>
+              <a:latin typeface="Arial"/>
+            </a:endParaRPr>
+          </a:p>
+          <a:p>
+            <a:pPr>
+              <a:lnSpc>
+                <a:spcPct val="100000"/>
+              </a:lnSpc>
+            </a:pPr>
+            <a:r>
+              <a:rPr b="0" lang="en-US" sz="1400" spc="-1" strike="noStrike">
+                <a:solidFill>
+                  <a:schemeClr val="lt1"/>
+                </a:solidFill>
+                <a:latin typeface="Calibri"/>
+                <a:ea typeface="DejaVu Sans"/>
+              </a:rPr>
+              <a:t>└──</a:t>
+            </a:r>
+            <a:r>
+              <a:rPr b="0" lang="en-US" sz="1400" spc="-1" strike="noStrike">
+                <a:solidFill>
+                  <a:schemeClr val="lt1"/>
+                </a:solidFill>
+                <a:latin typeface="Calibri"/>
+                <a:ea typeface="DejaVu Sans"/>
+              </a:rPr>
+              <a:t>&gt; 5. Hesabı Misafirlere Böl</a:t>
+            </a:r>
+            <a:endParaRPr b="0" lang="en-US" sz="1400" spc="-1" strike="noStrike">
+              <a:solidFill>
+                <a:srgbClr val="ffffff"/>
+              </a:solidFill>
+              <a:latin typeface="Arial"/>
+            </a:endParaRPr>
+          </a:p>
+          <a:p>
+            <a:pPr>
+              <a:lnSpc>
+                <a:spcPct val="100000"/>
+              </a:lnSpc>
+            </a:pPr>
+            <a:r>
+              <a:rPr b="0" lang="en-US" sz="1400" spc="-1" strike="noStrike">
+                <a:solidFill>
+                  <a:schemeClr val="lt1"/>
+                </a:solidFill>
+                <a:latin typeface="Calibri"/>
+                <a:ea typeface="DejaVu Sans"/>
+              </a:rPr>
+              <a:t>└── </a:t>
+            </a:r>
+            <a:r>
+              <a:rPr b="0" lang="en-US" sz="1400" spc="-1" strike="noStrike">
+                <a:solidFill>
+                  <a:schemeClr val="lt1"/>
+                </a:solidFill>
+                <a:latin typeface="Calibri"/>
+                <a:ea typeface="DejaVu Sans"/>
+              </a:rPr>
+              <a:t>kisiBasi = hesap / kisiSayisi</a:t>
+            </a:r>
+            <a:endParaRPr b="0" lang="en-US" sz="1400" spc="-1" strike="noStrike">
+              <a:solidFill>
+                <a:srgbClr val="ffffff"/>
+              </a:solidFill>
+              <a:latin typeface="Arial"/>
+            </a:endParaRPr>
+          </a:p>
+        </p:txBody>
+      </p:sp>
+      <p:sp>
+        <p:nvSpPr>
+          <p:cNvPr id="376" name="Rounded Rectangle 97"/>
+          <p:cNvSpPr/>
+          <p:nvPr/>
+        </p:nvSpPr>
+        <p:spPr>
+          <a:xfrm>
+            <a:off x="8028360" y="3182040"/>
+            <a:ext cx="3286440" cy="2737800"/>
+          </a:xfrm>
+          <a:prstGeom prst="roundRect">
+            <a:avLst>
+              <a:gd name="adj" fmla="val 16667"/>
+            </a:avLst>
+          </a:prstGeom>
+          <a:solidFill>
+            <a:srgbClr val="08080a"/>
+          </a:solidFill>
+          <a:ln>
+            <a:noFill/>
+          </a:ln>
+          <a:effectLst>
+            <a:outerShdw blurRad="39960" dir="5400000" dist="23040" rotWithShape="0">
+              <a:srgbClr val="000000">
+                <a:alpha val="35000"/>
+              </a:srgbClr>
+            </a:outerShdw>
+          </a:effectLst>
+        </p:spPr>
+        <p:style>
+          <a:lnRef idx="1">
+            <a:schemeClr val="accent1"/>
+          </a:lnRef>
+          <a:fillRef idx="3">
+            <a:schemeClr val="accent1"/>
+          </a:fillRef>
+          <a:effectRef idx="2">
+            <a:schemeClr val="accent1"/>
+          </a:effectRef>
+          <a:fontRef idx="minor"/>
+        </p:style>
+        <p:txBody>
+          <a:bodyPr lIns="90000" rIns="90000" tIns="45000" bIns="45000" anchor="ctr">
+            <a:noAutofit/>
+          </a:bodyPr>
+          <a:p>
+            <a:endParaRPr b="0" lang="en-US" sz="1800" spc="-1" strike="noStrike">
+              <a:solidFill>
+                <a:schemeClr val="lt1"/>
+              </a:solidFill>
+              <a:latin typeface="Calibri"/>
+              <a:ea typeface="DejaVu Sans"/>
+            </a:endParaRPr>
+          </a:p>
+        </p:txBody>
+      </p:sp>
+      <p:sp>
+        <p:nvSpPr>
+          <p:cNvPr id="377" name="Rounded Rectangle 98"/>
+          <p:cNvSpPr/>
+          <p:nvPr/>
+        </p:nvSpPr>
+        <p:spPr>
+          <a:xfrm>
+            <a:off x="8001000" y="2514600"/>
+            <a:ext cx="3427920" cy="3886200"/>
+          </a:xfrm>
+          <a:prstGeom prst="roundRect">
+            <a:avLst>
+              <a:gd name="adj" fmla="val 16667"/>
+            </a:avLst>
+          </a:prstGeom>
+          <a:solidFill>
+            <a:srgbClr val="16161c"/>
+          </a:solidFill>
+          <a:ln>
+            <a:solidFill>
+              <a:srgbClr val="464655"/>
+            </a:solidFill>
+            <a:round/>
+          </a:ln>
+          <a:effectLst>
+            <a:outerShdw blurRad="39960" dir="5400000" dist="23040" rotWithShape="0">
+              <a:srgbClr val="000000">
+                <a:alpha val="35000"/>
+              </a:srgbClr>
+            </a:outerShdw>
+          </a:effectLst>
+        </p:spPr>
+        <p:style>
+          <a:lnRef idx="1">
+            <a:schemeClr val="accent1"/>
+          </a:lnRef>
+          <a:fillRef idx="3">
+            <a:schemeClr val="accent1"/>
+          </a:fillRef>
+          <a:effectRef idx="2">
+            <a:schemeClr val="accent1"/>
+          </a:effectRef>
+          <a:fontRef idx="minor"/>
+        </p:style>
+        <p:txBody>
+          <a:bodyPr lIns="90000" rIns="90000" tIns="45000" bIns="45000" anchor="ctr">
+            <a:noAutofit/>
+          </a:bodyPr>
+          <a:p>
+            <a:pPr algn="ctr">
+              <a:lnSpc>
+                <a:spcPct val="100000"/>
+              </a:lnSpc>
+            </a:pPr>
+            <a:r>
+              <a:rPr b="0" lang="en-US" sz="860" spc="-1" strike="noStrike">
+                <a:solidFill>
+                  <a:srgbClr val="78ffc8"/>
+                </a:solidFill>
+                <a:latin typeface="Consolas"/>
+                <a:ea typeface="DejaVu Sans"/>
+              </a:rPr>
+              <a:t>public class RestoranHesabi {</a:t>
+            </a:r>
+            <a:endParaRPr b="0" lang="en-US" sz="860" spc="-1" strike="noStrike">
+              <a:solidFill>
+                <a:srgbClr val="ffffff"/>
+              </a:solidFill>
+              <a:latin typeface="Arial"/>
+            </a:endParaRPr>
+          </a:p>
+          <a:p>
+            <a:pPr algn="ctr">
+              <a:lnSpc>
+                <a:spcPct val="100000"/>
+              </a:lnSpc>
+            </a:pPr>
+            <a:r>
+              <a:rPr b="0" lang="en-US" sz="860" spc="-1" strike="noStrike">
+                <a:solidFill>
+                  <a:srgbClr val="78ffc8"/>
+                </a:solidFill>
+                <a:latin typeface="Consolas"/>
+                <a:ea typeface="DejaVu Sans"/>
+              </a:rPr>
+              <a:t>    </a:t>
+            </a:r>
+            <a:r>
+              <a:rPr b="0" lang="en-US" sz="860" spc="-1" strike="noStrike">
+                <a:solidFill>
+                  <a:srgbClr val="78ffc8"/>
+                </a:solidFill>
+                <a:latin typeface="Consolas"/>
+                <a:ea typeface="DejaVu Sans"/>
+              </a:rPr>
+              <a:t>public static void main(String[] args) {</a:t>
+            </a:r>
+            <a:endParaRPr b="0" lang="en-US" sz="860" spc="-1" strike="noStrike">
+              <a:solidFill>
+                <a:srgbClr val="ffffff"/>
+              </a:solidFill>
+              <a:latin typeface="Arial"/>
+            </a:endParaRPr>
+          </a:p>
+          <a:p>
+            <a:pPr algn="ctr">
+              <a:lnSpc>
+                <a:spcPct val="100000"/>
+              </a:lnSpc>
+            </a:pPr>
+            <a:endParaRPr b="0" lang="en-US" sz="860" spc="-1" strike="noStrike">
+              <a:solidFill>
+                <a:srgbClr val="ffffff"/>
+              </a:solidFill>
+              <a:latin typeface="Arial"/>
+            </a:endParaRPr>
+          </a:p>
+          <a:p>
+            <a:pPr algn="ctr">
+              <a:lnSpc>
+                <a:spcPct val="100000"/>
+              </a:lnSpc>
+            </a:pPr>
+            <a:r>
+              <a:rPr b="0" lang="en-US" sz="860" spc="-1" strike="noStrike">
+                <a:solidFill>
+                  <a:srgbClr val="78ffc8"/>
+                </a:solidFill>
+                <a:latin typeface="Consolas"/>
+                <a:ea typeface="DejaVu Sans"/>
+              </a:rPr>
+              <a:t>        </a:t>
+            </a:r>
+            <a:r>
+              <a:rPr b="0" lang="en-US" sz="860" spc="-1" strike="noStrike">
+                <a:solidFill>
+                  <a:srgbClr val="78ffc8"/>
+                </a:solidFill>
+                <a:latin typeface="Consolas"/>
+                <a:ea typeface="DejaVu Sans"/>
+              </a:rPr>
+              <a:t>// 1. Başlangıç Durumu</a:t>
+            </a:r>
+            <a:endParaRPr b="0" lang="en-US" sz="860" spc="-1" strike="noStrike">
+              <a:solidFill>
+                <a:srgbClr val="ffffff"/>
+              </a:solidFill>
+              <a:latin typeface="Arial"/>
+            </a:endParaRPr>
+          </a:p>
+          <a:p>
+            <a:pPr algn="ctr">
+              <a:lnSpc>
+                <a:spcPct val="100000"/>
+              </a:lnSpc>
+            </a:pPr>
+            <a:r>
+              <a:rPr b="0" lang="en-US" sz="860" spc="-1" strike="noStrike">
+                <a:solidFill>
+                  <a:srgbClr val="78ffc8"/>
+                </a:solidFill>
+                <a:latin typeface="Consolas"/>
+                <a:ea typeface="DejaVu Sans"/>
+              </a:rPr>
+              <a:t>        </a:t>
+            </a:r>
+            <a:r>
+              <a:rPr b="0" lang="en-US" sz="860" spc="-1" strike="noStrike">
+                <a:solidFill>
+                  <a:srgbClr val="78ffc8"/>
+                </a:solidFill>
+                <a:latin typeface="Consolas"/>
+                <a:ea typeface="DejaVu Sans"/>
+              </a:rPr>
+              <a:t>double hesap = 0.0;</a:t>
+            </a:r>
+            <a:endParaRPr b="0" lang="en-US" sz="860" spc="-1" strike="noStrike">
+              <a:solidFill>
+                <a:srgbClr val="ffffff"/>
+              </a:solidFill>
+              <a:latin typeface="Arial"/>
+            </a:endParaRPr>
+          </a:p>
+          <a:p>
+            <a:pPr algn="ctr">
+              <a:lnSpc>
+                <a:spcPct val="100000"/>
+              </a:lnSpc>
+            </a:pPr>
+            <a:r>
+              <a:rPr b="0" lang="en-US" sz="860" spc="-1" strike="noStrike">
+                <a:solidFill>
+                  <a:srgbClr val="78ffc8"/>
+                </a:solidFill>
+                <a:latin typeface="Consolas"/>
+                <a:ea typeface="DejaVu Sans"/>
+              </a:rPr>
+              <a:t>        </a:t>
+            </a:r>
+            <a:r>
+              <a:rPr b="0" lang="en-US" sz="860" spc="-1" strike="noStrike">
+                <a:solidFill>
+                  <a:srgbClr val="78ffc8"/>
+                </a:solidFill>
+                <a:latin typeface="Consolas"/>
+                <a:ea typeface="DejaVu Sans"/>
+              </a:rPr>
+              <a:t>int kisi = 3;</a:t>
+            </a:r>
+            <a:endParaRPr b="0" lang="en-US" sz="860" spc="-1" strike="noStrike">
+              <a:solidFill>
+                <a:srgbClr val="ffffff"/>
+              </a:solidFill>
+              <a:latin typeface="Arial"/>
+            </a:endParaRPr>
+          </a:p>
+          <a:p>
+            <a:pPr algn="ctr">
+              <a:lnSpc>
+                <a:spcPct val="100000"/>
+              </a:lnSpc>
+            </a:pPr>
+            <a:endParaRPr b="0" lang="en-US" sz="860" spc="-1" strike="noStrike">
+              <a:solidFill>
+                <a:srgbClr val="ffffff"/>
+              </a:solidFill>
+              <a:latin typeface="Arial"/>
+            </a:endParaRPr>
+          </a:p>
+          <a:p>
+            <a:pPr algn="ctr">
+              <a:lnSpc>
+                <a:spcPct val="100000"/>
+              </a:lnSpc>
+            </a:pPr>
+            <a:r>
+              <a:rPr b="0" lang="en-US" sz="860" spc="-1" strike="noStrike">
+                <a:solidFill>
+                  <a:srgbClr val="78ffc8"/>
+                </a:solidFill>
+                <a:latin typeface="Consolas"/>
+                <a:ea typeface="DejaVu Sans"/>
+              </a:rPr>
+              <a:t>        </a:t>
+            </a:r>
+            <a:r>
+              <a:rPr b="0" lang="en-US" sz="860" spc="-1" strike="noStrike">
+                <a:solidFill>
+                  <a:srgbClr val="78ffc8"/>
+                </a:solidFill>
+                <a:latin typeface="Consolas"/>
+                <a:ea typeface="DejaVu Sans"/>
+              </a:rPr>
+              <a:t>// 2. Sipariş Ekle (Bileşik Toplama)</a:t>
+            </a:r>
+            <a:endParaRPr b="0" lang="en-US" sz="860" spc="-1" strike="noStrike">
+              <a:solidFill>
+                <a:srgbClr val="ffffff"/>
+              </a:solidFill>
+              <a:latin typeface="Arial"/>
+            </a:endParaRPr>
+          </a:p>
+          <a:p>
+            <a:pPr algn="ctr">
+              <a:lnSpc>
+                <a:spcPct val="100000"/>
+              </a:lnSpc>
+            </a:pPr>
+            <a:r>
+              <a:rPr b="0" lang="en-US" sz="860" spc="-1" strike="noStrike">
+                <a:solidFill>
+                  <a:srgbClr val="78ffc8"/>
+                </a:solidFill>
+                <a:latin typeface="Consolas"/>
+                <a:ea typeface="DejaVu Sans"/>
+              </a:rPr>
+              <a:t>        </a:t>
+            </a:r>
+            <a:r>
+              <a:rPr b="0" lang="en-US" sz="860" spc="-1" strike="noStrike">
+                <a:solidFill>
+                  <a:srgbClr val="78ffc8"/>
+                </a:solidFill>
+                <a:latin typeface="Consolas"/>
+                <a:ea typeface="DejaVu Sans"/>
+              </a:rPr>
+              <a:t>hesap += 25.50; // Pizza</a:t>
+            </a:r>
+            <a:endParaRPr b="0" lang="en-US" sz="860" spc="-1" strike="noStrike">
+              <a:solidFill>
+                <a:srgbClr val="ffffff"/>
+              </a:solidFill>
+              <a:latin typeface="Arial"/>
+            </a:endParaRPr>
+          </a:p>
+          <a:p>
+            <a:pPr algn="ctr">
+              <a:lnSpc>
+                <a:spcPct val="100000"/>
+              </a:lnSpc>
+            </a:pPr>
+            <a:r>
+              <a:rPr b="0" lang="en-US" sz="860" spc="-1" strike="noStrike">
+                <a:solidFill>
+                  <a:srgbClr val="78ffc8"/>
+                </a:solidFill>
+                <a:latin typeface="Consolas"/>
+                <a:ea typeface="DejaVu Sans"/>
+              </a:rPr>
+              <a:t>        </a:t>
+            </a:r>
+            <a:r>
+              <a:rPr b="0" lang="en-US" sz="860" spc="-1" strike="noStrike">
+                <a:solidFill>
+                  <a:srgbClr val="78ffc8"/>
+                </a:solidFill>
+                <a:latin typeface="Consolas"/>
+                <a:ea typeface="DejaVu Sans"/>
+              </a:rPr>
+              <a:t>hesap += 14.00; // Makarna</a:t>
+            </a:r>
+            <a:endParaRPr b="0" lang="en-US" sz="860" spc="-1" strike="noStrike">
+              <a:solidFill>
+                <a:srgbClr val="ffffff"/>
+              </a:solidFill>
+              <a:latin typeface="Arial"/>
+            </a:endParaRPr>
+          </a:p>
+          <a:p>
+            <a:pPr algn="ctr">
+              <a:lnSpc>
+                <a:spcPct val="100000"/>
+              </a:lnSpc>
+            </a:pPr>
+            <a:r>
+              <a:rPr b="0" lang="en-US" sz="860" spc="-1" strike="noStrike">
+                <a:solidFill>
+                  <a:srgbClr val="78ffc8"/>
+                </a:solidFill>
+                <a:latin typeface="Consolas"/>
+                <a:ea typeface="DejaVu Sans"/>
+              </a:rPr>
+              <a:t>        </a:t>
+            </a:r>
+            <a:r>
+              <a:rPr b="0" lang="en-US" sz="860" spc="-1" strike="noStrike">
+                <a:solidFill>
+                  <a:srgbClr val="78ffc8"/>
+                </a:solidFill>
+                <a:latin typeface="Consolas"/>
+                <a:ea typeface="DejaVu Sans"/>
+              </a:rPr>
+              <a:t>hesap += 10.50; // İçecekler</a:t>
+            </a:r>
+            <a:endParaRPr b="0" lang="en-US" sz="860" spc="-1" strike="noStrike">
+              <a:solidFill>
+                <a:srgbClr val="ffffff"/>
+              </a:solidFill>
+              <a:latin typeface="Arial"/>
+            </a:endParaRPr>
+          </a:p>
+          <a:p>
+            <a:pPr algn="ctr">
+              <a:lnSpc>
+                <a:spcPct val="100000"/>
+              </a:lnSpc>
+            </a:pPr>
+            <a:r>
+              <a:rPr b="0" lang="en-US" sz="860" spc="-1" strike="noStrike">
+                <a:solidFill>
+                  <a:srgbClr val="78ffc8"/>
+                </a:solidFill>
+                <a:latin typeface="Consolas"/>
+                <a:ea typeface="DejaVu Sans"/>
+              </a:rPr>
+              <a:t>        </a:t>
+            </a:r>
+            <a:r>
+              <a:rPr b="0" lang="en-US" sz="860" spc="-1" strike="noStrike">
+                <a:solidFill>
+                  <a:srgbClr val="78ffc8"/>
+                </a:solidFill>
+                <a:latin typeface="Consolas"/>
+                <a:ea typeface="DejaVu Sans"/>
+              </a:rPr>
+              <a:t>// Ara toplam şu an 50.00</a:t>
+            </a:r>
+            <a:endParaRPr b="0" lang="en-US" sz="860" spc="-1" strike="noStrike">
+              <a:solidFill>
+                <a:srgbClr val="ffffff"/>
+              </a:solidFill>
+              <a:latin typeface="Arial"/>
+            </a:endParaRPr>
+          </a:p>
+          <a:p>
+            <a:pPr algn="ctr">
+              <a:lnSpc>
+                <a:spcPct val="100000"/>
+              </a:lnSpc>
+            </a:pPr>
+            <a:endParaRPr b="0" lang="en-US" sz="860" spc="-1" strike="noStrike">
+              <a:solidFill>
+                <a:srgbClr val="ffffff"/>
+              </a:solidFill>
+              <a:latin typeface="Arial"/>
+            </a:endParaRPr>
+          </a:p>
+          <a:p>
+            <a:pPr algn="ctr">
+              <a:lnSpc>
+                <a:spcPct val="100000"/>
+              </a:lnSpc>
+            </a:pPr>
+            <a:r>
+              <a:rPr b="0" lang="en-US" sz="860" spc="-1" strike="noStrike">
+                <a:solidFill>
+                  <a:srgbClr val="78ffc8"/>
+                </a:solidFill>
+                <a:latin typeface="Consolas"/>
+                <a:ea typeface="DejaVu Sans"/>
+              </a:rPr>
+              <a:t>        </a:t>
+            </a:r>
+            <a:r>
+              <a:rPr b="0" lang="en-US" sz="860" spc="-1" strike="noStrike">
+                <a:solidFill>
+                  <a:srgbClr val="78ffc8"/>
+                </a:solidFill>
+                <a:latin typeface="Consolas"/>
+                <a:ea typeface="DejaVu Sans"/>
+              </a:rPr>
+              <a:t>// 3. 5 TL'lik Kupon Uygula</a:t>
+            </a:r>
+            <a:endParaRPr b="0" lang="en-US" sz="860" spc="-1" strike="noStrike">
+              <a:solidFill>
+                <a:srgbClr val="ffffff"/>
+              </a:solidFill>
+              <a:latin typeface="Arial"/>
+            </a:endParaRPr>
+          </a:p>
+          <a:p>
+            <a:pPr algn="ctr">
+              <a:lnSpc>
+                <a:spcPct val="100000"/>
+              </a:lnSpc>
+            </a:pPr>
+            <a:r>
+              <a:rPr b="0" lang="en-US" sz="860" spc="-1" strike="noStrike">
+                <a:solidFill>
+                  <a:srgbClr val="78ffc8"/>
+                </a:solidFill>
+                <a:latin typeface="Consolas"/>
+                <a:ea typeface="DejaVu Sans"/>
+              </a:rPr>
+              <a:t>        </a:t>
+            </a:r>
+            <a:r>
+              <a:rPr b="0" lang="en-US" sz="860" spc="-1" strike="noStrike">
+                <a:solidFill>
+                  <a:srgbClr val="78ffc8"/>
+                </a:solidFill>
+                <a:latin typeface="Consolas"/>
+                <a:ea typeface="DejaVu Sans"/>
+              </a:rPr>
+              <a:t>hesap -= 5.00;  // Ara toplam: 45.00</a:t>
+            </a:r>
+            <a:endParaRPr b="0" lang="en-US" sz="860" spc="-1" strike="noStrike">
+              <a:solidFill>
+                <a:srgbClr val="ffffff"/>
+              </a:solidFill>
+              <a:latin typeface="Arial"/>
+            </a:endParaRPr>
+          </a:p>
+          <a:p>
+            <a:pPr algn="ctr">
+              <a:lnSpc>
+                <a:spcPct val="100000"/>
+              </a:lnSpc>
+            </a:pPr>
+            <a:endParaRPr b="0" lang="en-US" sz="860" spc="-1" strike="noStrike">
+              <a:solidFill>
+                <a:srgbClr val="ffffff"/>
+              </a:solidFill>
+              <a:latin typeface="Arial"/>
+            </a:endParaRPr>
+          </a:p>
+          <a:p>
+            <a:pPr algn="ctr">
+              <a:lnSpc>
+                <a:spcPct val="100000"/>
+              </a:lnSpc>
+            </a:pPr>
+            <a:r>
+              <a:rPr b="0" lang="en-US" sz="860" spc="-1" strike="noStrike">
+                <a:solidFill>
+                  <a:srgbClr val="78ffc8"/>
+                </a:solidFill>
+                <a:latin typeface="Consolas"/>
+                <a:ea typeface="DejaVu Sans"/>
+              </a:rPr>
+              <a:t>        </a:t>
+            </a:r>
+            <a:r>
+              <a:rPr b="0" lang="en-US" sz="860" spc="-1" strike="noStrike">
+                <a:solidFill>
+                  <a:srgbClr val="78ffc8"/>
+                </a:solidFill>
+                <a:latin typeface="Consolas"/>
+                <a:ea typeface="DejaVu Sans"/>
+              </a:rPr>
+              <a:t>// 4. %25 Vergi ve Bahşiş Ekle</a:t>
+            </a:r>
+            <a:endParaRPr b="0" lang="en-US" sz="860" spc="-1" strike="noStrike">
+              <a:solidFill>
+                <a:srgbClr val="ffffff"/>
+              </a:solidFill>
+              <a:latin typeface="Arial"/>
+            </a:endParaRPr>
+          </a:p>
+          <a:p>
+            <a:pPr algn="ctr">
+              <a:lnSpc>
+                <a:spcPct val="100000"/>
+              </a:lnSpc>
+            </a:pPr>
+            <a:r>
+              <a:rPr b="0" lang="en-US" sz="860" spc="-1" strike="noStrike">
+                <a:solidFill>
+                  <a:srgbClr val="78ffc8"/>
+                </a:solidFill>
+                <a:latin typeface="Consolas"/>
+                <a:ea typeface="DejaVu Sans"/>
+              </a:rPr>
+              <a:t>        </a:t>
+            </a:r>
+            <a:r>
+              <a:rPr b="0" lang="en-US" sz="860" spc="-1" strike="noStrike">
+                <a:solidFill>
+                  <a:srgbClr val="78ffc8"/>
+                </a:solidFill>
+                <a:latin typeface="Consolas"/>
+                <a:ea typeface="DejaVu Sans"/>
+              </a:rPr>
+              <a:t>// Mevcut hesabı 1.25 ile çarparız</a:t>
+            </a:r>
+            <a:endParaRPr b="0" lang="en-US" sz="860" spc="-1" strike="noStrike">
+              <a:solidFill>
+                <a:srgbClr val="ffffff"/>
+              </a:solidFill>
+              <a:latin typeface="Arial"/>
+            </a:endParaRPr>
+          </a:p>
+          <a:p>
+            <a:pPr algn="ctr">
+              <a:lnSpc>
+                <a:spcPct val="100000"/>
+              </a:lnSpc>
+            </a:pPr>
+            <a:r>
+              <a:rPr b="0" lang="en-US" sz="860" spc="-1" strike="noStrike">
+                <a:solidFill>
+                  <a:srgbClr val="78ffc8"/>
+                </a:solidFill>
+                <a:latin typeface="Consolas"/>
+                <a:ea typeface="DejaVu Sans"/>
+              </a:rPr>
+              <a:t>        </a:t>
+            </a:r>
+            <a:r>
+              <a:rPr b="0" lang="en-US" sz="860" spc="-1" strike="noStrike">
+                <a:solidFill>
+                  <a:srgbClr val="78ffc8"/>
+                </a:solidFill>
+                <a:latin typeface="Consolas"/>
+                <a:ea typeface="DejaVu Sans"/>
+              </a:rPr>
+              <a:t>hesap *= 1.25;  // Son toplam: 56.25</a:t>
+            </a:r>
+            <a:endParaRPr b="0" lang="en-US" sz="860" spc="-1" strike="noStrike">
+              <a:solidFill>
+                <a:srgbClr val="ffffff"/>
+              </a:solidFill>
+              <a:latin typeface="Arial"/>
+            </a:endParaRPr>
+          </a:p>
+          <a:p>
+            <a:pPr algn="ctr">
+              <a:lnSpc>
+                <a:spcPct val="100000"/>
+              </a:lnSpc>
+            </a:pPr>
+            <a:endParaRPr b="0" lang="en-US" sz="860" spc="-1" strike="noStrike">
+              <a:solidFill>
+                <a:srgbClr val="ffffff"/>
+              </a:solidFill>
+              <a:latin typeface="Arial"/>
+            </a:endParaRPr>
+          </a:p>
+          <a:p>
+            <a:pPr algn="ctr">
+              <a:lnSpc>
+                <a:spcPct val="100000"/>
+              </a:lnSpc>
+            </a:pPr>
+            <a:r>
+              <a:rPr b="0" lang="en-US" sz="860" spc="-1" strike="noStrike">
+                <a:solidFill>
+                  <a:srgbClr val="78ffc8"/>
+                </a:solidFill>
+                <a:latin typeface="Consolas"/>
+                <a:ea typeface="DejaVu Sans"/>
+              </a:rPr>
+              <a:t>        </a:t>
+            </a:r>
+            <a:r>
+              <a:rPr b="0" lang="en-US" sz="860" spc="-1" strike="noStrike">
+                <a:solidFill>
+                  <a:srgbClr val="78ffc8"/>
+                </a:solidFill>
+                <a:latin typeface="Consolas"/>
+                <a:ea typeface="DejaVu Sans"/>
+              </a:rPr>
+              <a:t>// 5. Hesabı kişiler arasında böl</a:t>
+            </a:r>
+            <a:endParaRPr b="0" lang="en-US" sz="860" spc="-1" strike="noStrike">
+              <a:solidFill>
+                <a:srgbClr val="ffffff"/>
+              </a:solidFill>
+              <a:latin typeface="Arial"/>
+            </a:endParaRPr>
+          </a:p>
+          <a:p>
+            <a:pPr algn="ctr">
+              <a:lnSpc>
+                <a:spcPct val="100000"/>
+              </a:lnSpc>
+            </a:pPr>
+            <a:r>
+              <a:rPr b="0" lang="en-US" sz="860" spc="-1" strike="noStrike">
+                <a:solidFill>
+                  <a:srgbClr val="78ffc8"/>
+                </a:solidFill>
+                <a:latin typeface="Consolas"/>
+                <a:ea typeface="DejaVu Sans"/>
+              </a:rPr>
+              <a:t>        </a:t>
+            </a:r>
+            <a:r>
+              <a:rPr b="0" lang="en-US" sz="860" spc="-1" strike="noStrike">
+                <a:solidFill>
+                  <a:srgbClr val="78ffc8"/>
+                </a:solidFill>
+                <a:latin typeface="Consolas"/>
+                <a:ea typeface="DejaVu Sans"/>
+              </a:rPr>
+              <a:t>double kisiBasi = hesap / kisi;</a:t>
+            </a:r>
+            <a:endParaRPr b="0" lang="en-US" sz="860" spc="-1" strike="noStrike">
+              <a:solidFill>
+                <a:srgbClr val="ffffff"/>
+              </a:solidFill>
+              <a:latin typeface="Arial"/>
+            </a:endParaRPr>
+          </a:p>
+          <a:p>
+            <a:pPr algn="ctr">
+              <a:lnSpc>
+                <a:spcPct val="100000"/>
+              </a:lnSpc>
+            </a:pPr>
+            <a:endParaRPr b="0" lang="en-US" sz="860" spc="-1" strike="noStrike">
+              <a:solidFill>
+                <a:srgbClr val="ffffff"/>
+              </a:solidFill>
+              <a:latin typeface="Arial"/>
+            </a:endParaRPr>
+          </a:p>
+          <a:p>
+            <a:pPr algn="ctr">
+              <a:lnSpc>
+                <a:spcPct val="100000"/>
+              </a:lnSpc>
+            </a:pPr>
+            <a:r>
+              <a:rPr b="0" lang="en-US" sz="860" spc="-1" strike="noStrike">
+                <a:solidFill>
+                  <a:srgbClr val="78ffc8"/>
+                </a:solidFill>
+                <a:latin typeface="Consolas"/>
+                <a:ea typeface="DejaVu Sans"/>
+              </a:rPr>
+              <a:t>        </a:t>
+            </a:r>
+            <a:r>
+              <a:rPr b="0" lang="en-US" sz="860" spc="-1" strike="noStrike">
+                <a:solidFill>
+                  <a:srgbClr val="78ffc8"/>
+                </a:solidFill>
+                <a:latin typeface="Consolas"/>
+                <a:ea typeface="DejaVu Sans"/>
+              </a:rPr>
+              <a:t>System.out.println("Toplam: " + hesap + " TL");</a:t>
+            </a:r>
+            <a:endParaRPr b="0" lang="en-US" sz="860" spc="-1" strike="noStrike">
+              <a:solidFill>
+                <a:srgbClr val="ffffff"/>
+              </a:solidFill>
+              <a:latin typeface="Arial"/>
+            </a:endParaRPr>
+          </a:p>
+          <a:p>
+            <a:pPr algn="ctr">
+              <a:lnSpc>
+                <a:spcPct val="100000"/>
+              </a:lnSpc>
+            </a:pPr>
+            <a:r>
+              <a:rPr b="0" lang="en-US" sz="860" spc="-1" strike="noStrike">
+                <a:solidFill>
+                  <a:srgbClr val="78ffc8"/>
+                </a:solidFill>
+                <a:latin typeface="Consolas"/>
+                <a:ea typeface="DejaVu Sans"/>
+              </a:rPr>
+              <a:t>        </a:t>
+            </a:r>
+            <a:r>
+              <a:rPr b="0" lang="en-US" sz="860" spc="-1" strike="noStrike">
+                <a:solidFill>
+                  <a:srgbClr val="78ffc8"/>
+                </a:solidFill>
+                <a:latin typeface="Consolas"/>
+                <a:ea typeface="DejaVu Sans"/>
+              </a:rPr>
+              <a:t>System.out.println("Kişi Başı: " + kisiBasi + " TL");</a:t>
+            </a:r>
+            <a:endParaRPr b="0" lang="en-US" sz="860" spc="-1" strike="noStrike">
+              <a:solidFill>
+                <a:srgbClr val="ffffff"/>
+              </a:solidFill>
+              <a:latin typeface="Arial"/>
+            </a:endParaRPr>
+          </a:p>
+          <a:p>
+            <a:pPr algn="ctr">
+              <a:lnSpc>
+                <a:spcPct val="100000"/>
+              </a:lnSpc>
+            </a:pPr>
+            <a:r>
+              <a:rPr b="0" lang="en-US" sz="860" spc="-1" strike="noStrike">
+                <a:solidFill>
+                  <a:srgbClr val="78ffc8"/>
+                </a:solidFill>
+                <a:latin typeface="Consolas"/>
+                <a:ea typeface="DejaVu Sans"/>
+              </a:rPr>
+              <a:t>    </a:t>
+            </a:r>
+            <a:r>
+              <a:rPr b="0" lang="en-US" sz="860" spc="-1" strike="noStrike">
+                <a:solidFill>
+                  <a:srgbClr val="78ffc8"/>
+                </a:solidFill>
+                <a:latin typeface="Consolas"/>
+                <a:ea typeface="DejaVu Sans"/>
+              </a:rPr>
+              <a:t>}</a:t>
+            </a:r>
+            <a:endParaRPr b="0" lang="en-US" sz="860" spc="-1" strike="noStrike">
+              <a:solidFill>
+                <a:srgbClr val="ffffff"/>
+              </a:solidFill>
+              <a:latin typeface="Arial"/>
+            </a:endParaRPr>
+          </a:p>
+          <a:p>
+            <a:pPr algn="ctr">
+              <a:lnSpc>
+                <a:spcPct val="100000"/>
+              </a:lnSpc>
+            </a:pPr>
+            <a:r>
+              <a:rPr b="0" lang="en-US" sz="860" spc="-1" strike="noStrike">
+                <a:solidFill>
+                  <a:srgbClr val="78ffc8"/>
+                </a:solidFill>
+                <a:latin typeface="Consolas"/>
+                <a:ea typeface="DejaVu Sans"/>
+              </a:rPr>
+              <a:t>}</a:t>
+            </a:r>
+            <a:endParaRPr b="0" lang="en-US" sz="860" spc="-1" strike="noStrike">
+              <a:solidFill>
+                <a:srgbClr val="ffffff"/>
+              </a:solidFill>
+              <a:latin typeface="Arial"/>
+            </a:endParaRPr>
+          </a:p>
+        </p:txBody>
+      </p:sp>
+      <p:sp>
+        <p:nvSpPr>
+          <p:cNvPr id="378" name="TextBox 42"/>
           <p:cNvSpPr/>
           <p:nvPr/>
         </p:nvSpPr>
@@ -13493,7 +16476,7 @@
         <p:spPr>
           <a:xfrm>
             <a:off x="0" y="0"/>
-            <a:ext cx="12183840" cy="6852960"/>
+            <a:ext cx="12183480" cy="6852600"/>
           </a:xfrm>
           <a:prstGeom prst="rect">
             <a:avLst/>
@@ -13553,7 +16536,7 @@
         <p:spPr>
           <a:xfrm>
             <a:off x="0" y="0"/>
-            <a:ext cx="13320" cy="6852960"/>
+            <a:ext cx="12960" cy="6852600"/>
           </a:xfrm>
           <a:prstGeom prst="rect">
             <a:avLst/>
@@ -13613,7 +16596,7 @@
         <p:spPr>
           <a:xfrm>
             <a:off x="914400" y="0"/>
-            <a:ext cx="13320" cy="6852960"/>
+            <a:ext cx="12960" cy="6852600"/>
           </a:xfrm>
           <a:prstGeom prst="rect">
             <a:avLst/>
@@ -13673,7 +16656,7 @@
         <p:spPr>
           <a:xfrm>
             <a:off x="1828800" y="0"/>
-            <a:ext cx="13320" cy="6852960"/>
+            <a:ext cx="12960" cy="6852600"/>
           </a:xfrm>
           <a:prstGeom prst="rect">
             <a:avLst/>
@@ -13733,7 +16716,7 @@
         <p:spPr>
           <a:xfrm>
             <a:off x="2743200" y="0"/>
-            <a:ext cx="13320" cy="6852960"/>
+            <a:ext cx="12960" cy="6852600"/>
           </a:xfrm>
           <a:prstGeom prst="rect">
             <a:avLst/>
@@ -13793,7 +16776,7 @@
         <p:spPr>
           <a:xfrm>
             <a:off x="3657600" y="0"/>
-            <a:ext cx="13320" cy="6852960"/>
+            <a:ext cx="12960" cy="6852600"/>
           </a:xfrm>
           <a:prstGeom prst="rect">
             <a:avLst/>
@@ -13853,7 +16836,7 @@
         <p:spPr>
           <a:xfrm>
             <a:off x="4572000" y="0"/>
-            <a:ext cx="13320" cy="6852960"/>
+            <a:ext cx="12960" cy="6852600"/>
           </a:xfrm>
           <a:prstGeom prst="rect">
             <a:avLst/>
@@ -13913,7 +16896,7 @@
         <p:spPr>
           <a:xfrm>
             <a:off x="5486400" y="0"/>
-            <a:ext cx="13320" cy="6852960"/>
+            <a:ext cx="12960" cy="6852600"/>
           </a:xfrm>
           <a:prstGeom prst="rect">
             <a:avLst/>
@@ -13973,7 +16956,7 @@
         <p:spPr>
           <a:xfrm>
             <a:off x="6400800" y="0"/>
-            <a:ext cx="13320" cy="6852960"/>
+            <a:ext cx="12960" cy="6852600"/>
           </a:xfrm>
           <a:prstGeom prst="rect">
             <a:avLst/>
@@ -14033,7 +17016,7 @@
         <p:spPr>
           <a:xfrm>
             <a:off x="7315200" y="0"/>
-            <a:ext cx="13320" cy="6852960"/>
+            <a:ext cx="12960" cy="6852600"/>
           </a:xfrm>
           <a:prstGeom prst="rect">
             <a:avLst/>
@@ -14093,7 +17076,7 @@
         <p:spPr>
           <a:xfrm>
             <a:off x="8229600" y="0"/>
-            <a:ext cx="13320" cy="6852960"/>
+            <a:ext cx="12960" cy="6852600"/>
           </a:xfrm>
           <a:prstGeom prst="rect">
             <a:avLst/>
@@ -14153,7 +17136,7 @@
         <p:spPr>
           <a:xfrm>
             <a:off x="9144000" y="0"/>
-            <a:ext cx="13320" cy="6852960"/>
+            <a:ext cx="12960" cy="6852600"/>
           </a:xfrm>
           <a:prstGeom prst="rect">
             <a:avLst/>
@@ -14213,7 +17196,7 @@
         <p:spPr>
           <a:xfrm>
             <a:off x="10058400" y="0"/>
-            <a:ext cx="13320" cy="6852960"/>
+            <a:ext cx="12960" cy="6852600"/>
           </a:xfrm>
           <a:prstGeom prst="rect">
             <a:avLst/>
@@ -14273,7 +17256,7 @@
         <p:spPr>
           <a:xfrm>
             <a:off x="10972800" y="0"/>
-            <a:ext cx="13320" cy="6852960"/>
+            <a:ext cx="12960" cy="6852600"/>
           </a:xfrm>
           <a:prstGeom prst="rect">
             <a:avLst/>
@@ -14333,7 +17316,7 @@
         <p:spPr>
           <a:xfrm>
             <a:off x="11887200" y="0"/>
-            <a:ext cx="13320" cy="6852960"/>
+            <a:ext cx="12960" cy="6852600"/>
           </a:xfrm>
           <a:prstGeom prst="rect">
             <a:avLst/>
@@ -14393,7 +17376,7 @@
         <p:spPr>
           <a:xfrm>
             <a:off x="0" y="0"/>
-            <a:ext cx="315000" cy="6852960"/>
+            <a:ext cx="314640" cy="6852600"/>
           </a:xfrm>
           <a:prstGeom prst="rect">
             <a:avLst/>
@@ -14453,7 +17436,7 @@
         <p:spPr>
           <a:xfrm>
             <a:off x="9875520" y="365760"/>
-            <a:ext cx="2006640" cy="497880"/>
+            <a:ext cx="2006280" cy="497520"/>
           </a:xfrm>
           <a:prstGeom prst="roundRect">
             <a:avLst>
@@ -14681,7 +17664,7 @@
         <p:spPr>
           <a:xfrm>
             <a:off x="987480" y="3182040"/>
-            <a:ext cx="3286800" cy="2738160"/>
+            <a:ext cx="3286440" cy="2737800"/>
           </a:xfrm>
           <a:prstGeom prst="roundRect">
             <a:avLst>
@@ -14743,7 +17726,7 @@
         <p:spPr>
           <a:xfrm>
             <a:off x="914400" y="3108960"/>
-            <a:ext cx="3286800" cy="2738160"/>
+            <a:ext cx="3286440" cy="2737800"/>
           </a:xfrm>
           <a:prstGeom prst="roundRect">
             <a:avLst>
@@ -14906,7 +17889,7 @@
         <p:spPr>
           <a:xfrm>
             <a:off x="4507920" y="3182040"/>
-            <a:ext cx="3286800" cy="2738160"/>
+            <a:ext cx="3286440" cy="2737800"/>
           </a:xfrm>
           <a:prstGeom prst="roundRect">
             <a:avLst>
@@ -14968,7 +17951,7 @@
         <p:spPr>
           <a:xfrm>
             <a:off x="4434840" y="3108960"/>
-            <a:ext cx="3286800" cy="2738160"/>
+            <a:ext cx="3286440" cy="2737800"/>
           </a:xfrm>
           <a:prstGeom prst="roundRect">
             <a:avLst>
@@ -15226,7 +18209,7 @@
         <p:spPr>
           <a:xfrm>
             <a:off x="8028360" y="3182040"/>
-            <a:ext cx="3286800" cy="2738160"/>
+            <a:ext cx="3286440" cy="2737800"/>
           </a:xfrm>
           <a:prstGeom prst="roundRect">
             <a:avLst>
@@ -15288,7 +18271,7 @@
         <p:spPr>
           <a:xfrm>
             <a:off x="7955280" y="3108960"/>
-            <a:ext cx="3699360" cy="3059280"/>
+            <a:ext cx="3699000" cy="3058920"/>
           </a:xfrm>
           <a:prstGeom prst="roundRect">
             <a:avLst>
@@ -15733,7 +18716,7 @@
         <p:spPr>
           <a:xfrm>
             <a:off x="0" y="0"/>
-            <a:ext cx="12183840" cy="6852960"/>
+            <a:ext cx="12183480" cy="6852600"/>
           </a:xfrm>
           <a:prstGeom prst="rect">
             <a:avLst/>
@@ -15793,7 +18776,7 @@
         <p:spPr>
           <a:xfrm>
             <a:off x="0" y="0"/>
-            <a:ext cx="13320" cy="6852960"/>
+            <a:ext cx="12960" cy="6852600"/>
           </a:xfrm>
           <a:prstGeom prst="rect">
             <a:avLst/>
@@ -15853,7 +18836,7 @@
         <p:spPr>
           <a:xfrm>
             <a:off x="914400" y="0"/>
-            <a:ext cx="13320" cy="6852960"/>
+            <a:ext cx="12960" cy="6852600"/>
           </a:xfrm>
           <a:prstGeom prst="rect">
             <a:avLst/>
@@ -15913,7 +18896,7 @@
         <p:spPr>
           <a:xfrm>
             <a:off x="1828800" y="0"/>
-            <a:ext cx="13320" cy="6852960"/>
+            <a:ext cx="12960" cy="6852600"/>
           </a:xfrm>
           <a:prstGeom prst="rect">
             <a:avLst/>
@@ -15973,7 +18956,7 @@
         <p:spPr>
           <a:xfrm>
             <a:off x="2743200" y="0"/>
-            <a:ext cx="13320" cy="6852960"/>
+            <a:ext cx="12960" cy="6852600"/>
           </a:xfrm>
           <a:prstGeom prst="rect">
             <a:avLst/>
@@ -16033,7 +19016,7 @@
         <p:spPr>
           <a:xfrm>
             <a:off x="3657600" y="0"/>
-            <a:ext cx="13320" cy="6852960"/>
+            <a:ext cx="12960" cy="6852600"/>
           </a:xfrm>
           <a:prstGeom prst="rect">
             <a:avLst/>
@@ -16093,7 +19076,7 @@
         <p:spPr>
           <a:xfrm>
             <a:off x="4572000" y="0"/>
-            <a:ext cx="13320" cy="6852960"/>
+            <a:ext cx="12960" cy="6852600"/>
           </a:xfrm>
           <a:prstGeom prst="rect">
             <a:avLst/>
@@ -16153,7 +19136,7 @@
         <p:spPr>
           <a:xfrm>
             <a:off x="5486400" y="0"/>
-            <a:ext cx="13320" cy="6852960"/>
+            <a:ext cx="12960" cy="6852600"/>
           </a:xfrm>
           <a:prstGeom prst="rect">
             <a:avLst/>
@@ -16213,7 +19196,7 @@
         <p:spPr>
           <a:xfrm>
             <a:off x="6400800" y="0"/>
-            <a:ext cx="13320" cy="6852960"/>
+            <a:ext cx="12960" cy="6852600"/>
           </a:xfrm>
           <a:prstGeom prst="rect">
             <a:avLst/>
@@ -16273,7 +19256,7 @@
         <p:spPr>
           <a:xfrm>
             <a:off x="7315200" y="0"/>
-            <a:ext cx="13320" cy="6852960"/>
+            <a:ext cx="12960" cy="6852600"/>
           </a:xfrm>
           <a:prstGeom prst="rect">
             <a:avLst/>
@@ -16333,7 +19316,7 @@
         <p:spPr>
           <a:xfrm>
             <a:off x="8229600" y="0"/>
-            <a:ext cx="13320" cy="6852960"/>
+            <a:ext cx="12960" cy="6852600"/>
           </a:xfrm>
           <a:prstGeom prst="rect">
             <a:avLst/>
@@ -16393,7 +19376,7 @@
         <p:spPr>
           <a:xfrm>
             <a:off x="9144000" y="0"/>
-            <a:ext cx="13320" cy="6852960"/>
+            <a:ext cx="12960" cy="6852600"/>
           </a:xfrm>
           <a:prstGeom prst="rect">
             <a:avLst/>
@@ -16453,7 +19436,7 @@
         <p:spPr>
           <a:xfrm>
             <a:off x="10058400" y="0"/>
-            <a:ext cx="13320" cy="6852960"/>
+            <a:ext cx="12960" cy="6852600"/>
           </a:xfrm>
           <a:prstGeom prst="rect">
             <a:avLst/>
@@ -16513,7 +19496,7 @@
         <p:spPr>
           <a:xfrm>
             <a:off x="10972800" y="0"/>
-            <a:ext cx="13320" cy="6852960"/>
+            <a:ext cx="12960" cy="6852600"/>
           </a:xfrm>
           <a:prstGeom prst="rect">
             <a:avLst/>
@@ -16573,7 +19556,7 @@
         <p:spPr>
           <a:xfrm>
             <a:off x="11887200" y="0"/>
-            <a:ext cx="13320" cy="6852960"/>
+            <a:ext cx="12960" cy="6852600"/>
           </a:xfrm>
           <a:prstGeom prst="rect">
             <a:avLst/>
@@ -16633,7 +19616,7 @@
         <p:spPr>
           <a:xfrm>
             <a:off x="0" y="0"/>
-            <a:ext cx="315000" cy="6852960"/>
+            <a:ext cx="314640" cy="6852600"/>
           </a:xfrm>
           <a:prstGeom prst="rect">
             <a:avLst/>
@@ -16693,7 +19676,7 @@
         <p:spPr>
           <a:xfrm>
             <a:off x="9875520" y="365760"/>
-            <a:ext cx="2006640" cy="497880"/>
+            <a:ext cx="2006280" cy="497520"/>
           </a:xfrm>
           <a:prstGeom prst="roundRect">
             <a:avLst>
@@ -16898,7 +19881,7 @@
         <p:spPr>
           <a:xfrm>
             <a:off x="987480" y="3182040"/>
-            <a:ext cx="3286800" cy="2738160"/>
+            <a:ext cx="3286440" cy="2737800"/>
           </a:xfrm>
           <a:prstGeom prst="roundRect">
             <a:avLst>
@@ -16960,7 +19943,7 @@
         <p:spPr>
           <a:xfrm>
             <a:off x="914400" y="3108960"/>
-            <a:ext cx="3286800" cy="3059640"/>
+            <a:ext cx="3286440" cy="3059280"/>
           </a:xfrm>
           <a:prstGeom prst="roundRect">
             <a:avLst>
@@ -17151,7 +20134,7 @@
         <p:spPr>
           <a:xfrm>
             <a:off x="4507920" y="3182040"/>
-            <a:ext cx="3286800" cy="2738160"/>
+            <a:ext cx="3286440" cy="2737800"/>
           </a:xfrm>
           <a:prstGeom prst="roundRect">
             <a:avLst>
@@ -17213,7 +20196,7 @@
         <p:spPr>
           <a:xfrm>
             <a:off x="4434840" y="3108960"/>
-            <a:ext cx="3286800" cy="2738160"/>
+            <a:ext cx="3286440" cy="2737800"/>
           </a:xfrm>
           <a:prstGeom prst="roundRect">
             <a:avLst>
@@ -17471,7 +20454,7 @@
         <p:spPr>
           <a:xfrm>
             <a:off x="8028360" y="3182040"/>
-            <a:ext cx="3286800" cy="2738160"/>
+            <a:ext cx="3286440" cy="2737800"/>
           </a:xfrm>
           <a:prstGeom prst="roundRect">
             <a:avLst>
@@ -17533,7 +20516,7 @@
         <p:spPr>
           <a:xfrm>
             <a:off x="7955280" y="3108960"/>
-            <a:ext cx="3699360" cy="3059280"/>
+            <a:ext cx="3699000" cy="3058920"/>
           </a:xfrm>
           <a:prstGeom prst="roundRect">
             <a:avLst>
@@ -17978,7 +20961,7 @@
         <p:spPr>
           <a:xfrm>
             <a:off x="0" y="0"/>
-            <a:ext cx="12183840" cy="6852960"/>
+            <a:ext cx="12183480" cy="6852600"/>
           </a:xfrm>
           <a:prstGeom prst="rect">
             <a:avLst/>
@@ -18038,7 +21021,7 @@
         <p:spPr>
           <a:xfrm>
             <a:off x="0" y="0"/>
-            <a:ext cx="13320" cy="6852960"/>
+            <a:ext cx="12960" cy="6852600"/>
           </a:xfrm>
           <a:prstGeom prst="rect">
             <a:avLst/>
@@ -18098,7 +21081,7 @@
         <p:spPr>
           <a:xfrm>
             <a:off x="914400" y="0"/>
-            <a:ext cx="13320" cy="6852960"/>
+            <a:ext cx="12960" cy="6852600"/>
           </a:xfrm>
           <a:prstGeom prst="rect">
             <a:avLst/>
@@ -18158,7 +21141,7 @@
         <p:spPr>
           <a:xfrm>
             <a:off x="1828800" y="0"/>
-            <a:ext cx="13320" cy="6852960"/>
+            <a:ext cx="12960" cy="6852600"/>
           </a:xfrm>
           <a:prstGeom prst="rect">
             <a:avLst/>
@@ -18218,7 +21201,7 @@
         <p:spPr>
           <a:xfrm>
             <a:off x="2743200" y="0"/>
-            <a:ext cx="13320" cy="6852960"/>
+            <a:ext cx="12960" cy="6852600"/>
           </a:xfrm>
           <a:prstGeom prst="rect">
             <a:avLst/>
@@ -18278,7 +21261,7 @@
         <p:spPr>
           <a:xfrm>
             <a:off x="3657600" y="0"/>
-            <a:ext cx="13320" cy="6852960"/>
+            <a:ext cx="12960" cy="6852600"/>
           </a:xfrm>
           <a:prstGeom prst="rect">
             <a:avLst/>
@@ -18338,7 +21321,7 @@
         <p:spPr>
           <a:xfrm>
             <a:off x="4572000" y="0"/>
-            <a:ext cx="13320" cy="6852960"/>
+            <a:ext cx="12960" cy="6852600"/>
           </a:xfrm>
           <a:prstGeom prst="rect">
             <a:avLst/>
@@ -18398,7 +21381,7 @@
         <p:spPr>
           <a:xfrm>
             <a:off x="5486400" y="0"/>
-            <a:ext cx="13320" cy="6852960"/>
+            <a:ext cx="12960" cy="6852600"/>
           </a:xfrm>
           <a:prstGeom prst="rect">
             <a:avLst/>
@@ -18458,7 +21441,7 @@
         <p:spPr>
           <a:xfrm>
             <a:off x="6400800" y="0"/>
-            <a:ext cx="13320" cy="6852960"/>
+            <a:ext cx="12960" cy="6852600"/>
           </a:xfrm>
           <a:prstGeom prst="rect">
             <a:avLst/>
@@ -18518,7 +21501,7 @@
         <p:spPr>
           <a:xfrm>
             <a:off x="7315200" y="0"/>
-            <a:ext cx="13320" cy="6852960"/>
+            <a:ext cx="12960" cy="6852600"/>
           </a:xfrm>
           <a:prstGeom prst="rect">
             <a:avLst/>
@@ -18578,7 +21561,7 @@
         <p:spPr>
           <a:xfrm>
             <a:off x="8229600" y="0"/>
-            <a:ext cx="13320" cy="6852960"/>
+            <a:ext cx="12960" cy="6852600"/>
           </a:xfrm>
           <a:prstGeom prst="rect">
             <a:avLst/>
@@ -18638,7 +21621,7 @@
         <p:spPr>
           <a:xfrm>
             <a:off x="9144000" y="0"/>
-            <a:ext cx="13320" cy="6852960"/>
+            <a:ext cx="12960" cy="6852600"/>
           </a:xfrm>
           <a:prstGeom prst="rect">
             <a:avLst/>
@@ -18698,7 +21681,7 @@
         <p:spPr>
           <a:xfrm>
             <a:off x="10058400" y="0"/>
-            <a:ext cx="13320" cy="6852960"/>
+            <a:ext cx="12960" cy="6852600"/>
           </a:xfrm>
           <a:prstGeom prst="rect">
             <a:avLst/>
@@ -18758,7 +21741,7 @@
         <p:spPr>
           <a:xfrm>
             <a:off x="10972800" y="0"/>
-            <a:ext cx="13320" cy="6852960"/>
+            <a:ext cx="12960" cy="6852600"/>
           </a:xfrm>
           <a:prstGeom prst="rect">
             <a:avLst/>
@@ -18818,7 +21801,7 @@
         <p:spPr>
           <a:xfrm>
             <a:off x="11887200" y="0"/>
-            <a:ext cx="13320" cy="6852960"/>
+            <a:ext cx="12960" cy="6852600"/>
           </a:xfrm>
           <a:prstGeom prst="rect">
             <a:avLst/>
@@ -18878,7 +21861,7 @@
         <p:spPr>
           <a:xfrm>
             <a:off x="0" y="0"/>
-            <a:ext cx="315000" cy="6852960"/>
+            <a:ext cx="314640" cy="6852600"/>
           </a:xfrm>
           <a:prstGeom prst="rect">
             <a:avLst/>
@@ -18938,7 +21921,7 @@
         <p:spPr>
           <a:xfrm>
             <a:off x="9875520" y="365760"/>
-            <a:ext cx="2006640" cy="497880"/>
+            <a:ext cx="2006280" cy="497520"/>
           </a:xfrm>
           <a:prstGeom prst="roundRect">
             <a:avLst>
@@ -19143,7 +22126,7 @@
         <p:spPr>
           <a:xfrm>
             <a:off x="987480" y="3182040"/>
-            <a:ext cx="3286800" cy="2738160"/>
+            <a:ext cx="3286440" cy="2737800"/>
           </a:xfrm>
           <a:prstGeom prst="roundRect">
             <a:avLst>
@@ -19205,7 +22188,7 @@
         <p:spPr>
           <a:xfrm>
             <a:off x="914400" y="3108960"/>
-            <a:ext cx="3286800" cy="3059640"/>
+            <a:ext cx="3286440" cy="3059280"/>
           </a:xfrm>
           <a:prstGeom prst="roundRect">
             <a:avLst>
@@ -19396,7 +22379,7 @@
         <p:spPr>
           <a:xfrm>
             <a:off x="4507920" y="3182040"/>
-            <a:ext cx="3286800" cy="2738160"/>
+            <a:ext cx="3286440" cy="2737800"/>
           </a:xfrm>
           <a:prstGeom prst="roundRect">
             <a:avLst>
@@ -19458,7 +22441,7 @@
         <p:spPr>
           <a:xfrm>
             <a:off x="4434840" y="3108960"/>
-            <a:ext cx="3286800" cy="2738160"/>
+            <a:ext cx="3286440" cy="2737800"/>
           </a:xfrm>
           <a:prstGeom prst="roundRect">
             <a:avLst>
@@ -19670,7 +22653,7 @@
         <p:spPr>
           <a:xfrm>
             <a:off x="8028360" y="3182040"/>
-            <a:ext cx="3286800" cy="2738160"/>
+            <a:ext cx="3286440" cy="2737800"/>
           </a:xfrm>
           <a:prstGeom prst="roundRect">
             <a:avLst>
@@ -19732,7 +22715,7 @@
         <p:spPr>
           <a:xfrm>
             <a:off x="7955280" y="2743200"/>
-            <a:ext cx="3699360" cy="3654360"/>
+            <a:ext cx="3699000" cy="3654000"/>
           </a:xfrm>
           <a:prstGeom prst="roundRect">
             <a:avLst>
@@ -20292,7 +23275,7 @@
         <p:spPr>
           <a:xfrm>
             <a:off x="0" y="0"/>
-            <a:ext cx="12183840" cy="6852960"/>
+            <a:ext cx="12183480" cy="6852600"/>
           </a:xfrm>
           <a:prstGeom prst="rect">
             <a:avLst/>
@@ -20352,7 +23335,7 @@
         <p:spPr>
           <a:xfrm>
             <a:off x="0" y="0"/>
-            <a:ext cx="13320" cy="6852960"/>
+            <a:ext cx="12960" cy="6852600"/>
           </a:xfrm>
           <a:prstGeom prst="rect">
             <a:avLst/>
@@ -20412,7 +23395,7 @@
         <p:spPr>
           <a:xfrm>
             <a:off x="914400" y="0"/>
-            <a:ext cx="13320" cy="6852960"/>
+            <a:ext cx="12960" cy="6852600"/>
           </a:xfrm>
           <a:prstGeom prst="rect">
             <a:avLst/>
@@ -20472,7 +23455,7 @@
         <p:spPr>
           <a:xfrm>
             <a:off x="1828800" y="0"/>
-            <a:ext cx="13320" cy="6852960"/>
+            <a:ext cx="12960" cy="6852600"/>
           </a:xfrm>
           <a:prstGeom prst="rect">
             <a:avLst/>
@@ -20532,7 +23515,7 @@
         <p:spPr>
           <a:xfrm>
             <a:off x="2743200" y="0"/>
-            <a:ext cx="13320" cy="6852960"/>
+            <a:ext cx="12960" cy="6852600"/>
           </a:xfrm>
           <a:prstGeom prst="rect">
             <a:avLst/>
@@ -20592,7 +23575,7 @@
         <p:spPr>
           <a:xfrm>
             <a:off x="3657600" y="0"/>
-            <a:ext cx="13320" cy="6852960"/>
+            <a:ext cx="12960" cy="6852600"/>
           </a:xfrm>
           <a:prstGeom prst="rect">
             <a:avLst/>
@@ -20652,7 +23635,7 @@
         <p:spPr>
           <a:xfrm>
             <a:off x="4572000" y="0"/>
-            <a:ext cx="13320" cy="6852960"/>
+            <a:ext cx="12960" cy="6852600"/>
           </a:xfrm>
           <a:prstGeom prst="rect">
             <a:avLst/>
@@ -20712,7 +23695,7 @@
         <p:spPr>
           <a:xfrm>
             <a:off x="5486400" y="0"/>
-            <a:ext cx="13320" cy="6852960"/>
+            <a:ext cx="12960" cy="6852600"/>
           </a:xfrm>
           <a:prstGeom prst="rect">
             <a:avLst/>
@@ -20772,7 +23755,7 @@
         <p:spPr>
           <a:xfrm>
             <a:off x="6400800" y="0"/>
-            <a:ext cx="13320" cy="6852960"/>
+            <a:ext cx="12960" cy="6852600"/>
           </a:xfrm>
           <a:prstGeom prst="rect">
             <a:avLst/>
@@ -20832,7 +23815,7 @@
         <p:spPr>
           <a:xfrm>
             <a:off x="7315200" y="0"/>
-            <a:ext cx="13320" cy="6852960"/>
+            <a:ext cx="12960" cy="6852600"/>
           </a:xfrm>
           <a:prstGeom prst="rect">
             <a:avLst/>
@@ -20892,7 +23875,7 @@
         <p:spPr>
           <a:xfrm>
             <a:off x="8229600" y="0"/>
-            <a:ext cx="13320" cy="6852960"/>
+            <a:ext cx="12960" cy="6852600"/>
           </a:xfrm>
           <a:prstGeom prst="rect">
             <a:avLst/>
@@ -20952,7 +23935,7 @@
         <p:spPr>
           <a:xfrm>
             <a:off x="9144000" y="0"/>
-            <a:ext cx="13320" cy="6852960"/>
+            <a:ext cx="12960" cy="6852600"/>
           </a:xfrm>
           <a:prstGeom prst="rect">
             <a:avLst/>
@@ -21012,7 +23995,7 @@
         <p:spPr>
           <a:xfrm>
             <a:off x="10058400" y="0"/>
-            <a:ext cx="13320" cy="6852960"/>
+            <a:ext cx="12960" cy="6852600"/>
           </a:xfrm>
           <a:prstGeom prst="rect">
             <a:avLst/>
@@ -21072,7 +24055,7 @@
         <p:spPr>
           <a:xfrm>
             <a:off x="10972800" y="0"/>
-            <a:ext cx="13320" cy="6852960"/>
+            <a:ext cx="12960" cy="6852600"/>
           </a:xfrm>
           <a:prstGeom prst="rect">
             <a:avLst/>
@@ -21132,7 +24115,7 @@
         <p:spPr>
           <a:xfrm>
             <a:off x="11887200" y="0"/>
-            <a:ext cx="13320" cy="6852960"/>
+            <a:ext cx="12960" cy="6852600"/>
           </a:xfrm>
           <a:prstGeom prst="rect">
             <a:avLst/>
@@ -21192,7 +24175,7 @@
         <p:spPr>
           <a:xfrm>
             <a:off x="0" y="0"/>
-            <a:ext cx="315000" cy="6852960"/>
+            <a:ext cx="314640" cy="6852600"/>
           </a:xfrm>
           <a:prstGeom prst="rect">
             <a:avLst/>
@@ -21252,7 +24235,7 @@
         <p:spPr>
           <a:xfrm>
             <a:off x="9875520" y="365760"/>
-            <a:ext cx="2006640" cy="497880"/>
+            <a:ext cx="2006280" cy="497520"/>
           </a:xfrm>
           <a:prstGeom prst="roundRect">
             <a:avLst>
@@ -21457,7 +24440,7 @@
         <p:spPr>
           <a:xfrm>
             <a:off x="987480" y="3182040"/>
-            <a:ext cx="3286800" cy="2738160"/>
+            <a:ext cx="3286440" cy="2737800"/>
           </a:xfrm>
           <a:prstGeom prst="roundRect">
             <a:avLst>
@@ -21519,7 +24502,7 @@
         <p:spPr>
           <a:xfrm>
             <a:off x="457200" y="2514600"/>
-            <a:ext cx="3744000" cy="4111920"/>
+            <a:ext cx="3743640" cy="4111560"/>
           </a:xfrm>
           <a:prstGeom prst="roundRect">
             <a:avLst>
@@ -21757,7 +24740,7 @@
         <p:spPr>
           <a:xfrm>
             <a:off x="4507920" y="3182040"/>
-            <a:ext cx="3286800" cy="2738160"/>
+            <a:ext cx="3286440" cy="2737800"/>
           </a:xfrm>
           <a:prstGeom prst="roundRect">
             <a:avLst>
@@ -21819,7 +24802,7 @@
         <p:spPr>
           <a:xfrm>
             <a:off x="4434840" y="2971800"/>
-            <a:ext cx="3286800" cy="3425040"/>
+            <a:ext cx="3286440" cy="3424680"/>
           </a:xfrm>
           <a:prstGeom prst="roundRect">
             <a:avLst>
@@ -22038,7 +25021,7 @@
         <p:spPr>
           <a:xfrm>
             <a:off x="8028360" y="3182040"/>
-            <a:ext cx="3286800" cy="2738160"/>
+            <a:ext cx="3286440" cy="2737800"/>
           </a:xfrm>
           <a:prstGeom prst="roundRect">
             <a:avLst>
@@ -22100,7 +25083,7 @@
         <p:spPr>
           <a:xfrm>
             <a:off x="8001000" y="3200400"/>
-            <a:ext cx="3471840" cy="2740320"/>
+            <a:ext cx="3471480" cy="2739960"/>
           </a:xfrm>
           <a:prstGeom prst="roundRect">
             <a:avLst>
@@ -22512,7 +25495,7 @@
         <p:spPr>
           <a:xfrm>
             <a:off x="0" y="0"/>
-            <a:ext cx="12183840" cy="6852960"/>
+            <a:ext cx="12183480" cy="6852600"/>
           </a:xfrm>
           <a:prstGeom prst="rect">
             <a:avLst/>
@@ -22572,7 +25555,7 @@
         <p:spPr>
           <a:xfrm>
             <a:off x="0" y="0"/>
-            <a:ext cx="13320" cy="6852960"/>
+            <a:ext cx="12960" cy="6852600"/>
           </a:xfrm>
           <a:prstGeom prst="rect">
             <a:avLst/>
@@ -22632,7 +25615,7 @@
         <p:spPr>
           <a:xfrm>
             <a:off x="914400" y="0"/>
-            <a:ext cx="13320" cy="6852960"/>
+            <a:ext cx="12960" cy="6852600"/>
           </a:xfrm>
           <a:prstGeom prst="rect">
             <a:avLst/>
@@ -22692,7 +25675,7 @@
         <p:spPr>
           <a:xfrm>
             <a:off x="1828800" y="0"/>
-            <a:ext cx="13320" cy="6852960"/>
+            <a:ext cx="12960" cy="6852600"/>
           </a:xfrm>
           <a:prstGeom prst="rect">
             <a:avLst/>
@@ -22752,7 +25735,7 @@
         <p:spPr>
           <a:xfrm>
             <a:off x="2743200" y="0"/>
-            <a:ext cx="13320" cy="6852960"/>
+            <a:ext cx="12960" cy="6852600"/>
           </a:xfrm>
           <a:prstGeom prst="rect">
             <a:avLst/>
@@ -22812,7 +25795,7 @@
         <p:spPr>
           <a:xfrm>
             <a:off x="3657600" y="0"/>
-            <a:ext cx="13320" cy="6852960"/>
+            <a:ext cx="12960" cy="6852600"/>
           </a:xfrm>
           <a:prstGeom prst="rect">
             <a:avLst/>
@@ -22872,7 +25855,7 @@
         <p:spPr>
           <a:xfrm>
             <a:off x="4572000" y="0"/>
-            <a:ext cx="13320" cy="6852960"/>
+            <a:ext cx="12960" cy="6852600"/>
           </a:xfrm>
           <a:prstGeom prst="rect">
             <a:avLst/>
@@ -22932,7 +25915,7 @@
         <p:spPr>
           <a:xfrm>
             <a:off x="5486400" y="0"/>
-            <a:ext cx="13320" cy="6852960"/>
+            <a:ext cx="12960" cy="6852600"/>
           </a:xfrm>
           <a:prstGeom prst="rect">
             <a:avLst/>
@@ -22992,7 +25975,7 @@
         <p:spPr>
           <a:xfrm>
             <a:off x="6400800" y="0"/>
-            <a:ext cx="13320" cy="6852960"/>
+            <a:ext cx="12960" cy="6852600"/>
           </a:xfrm>
           <a:prstGeom prst="rect">
             <a:avLst/>
@@ -23052,7 +26035,7 @@
         <p:spPr>
           <a:xfrm>
             <a:off x="7315200" y="0"/>
-            <a:ext cx="13320" cy="6852960"/>
+            <a:ext cx="12960" cy="6852600"/>
           </a:xfrm>
           <a:prstGeom prst="rect">
             <a:avLst/>
@@ -23112,7 +26095,7 @@
         <p:spPr>
           <a:xfrm>
             <a:off x="8229600" y="0"/>
-            <a:ext cx="13320" cy="6852960"/>
+            <a:ext cx="12960" cy="6852600"/>
           </a:xfrm>
           <a:prstGeom prst="rect">
             <a:avLst/>
@@ -23172,7 +26155,7 @@
         <p:spPr>
           <a:xfrm>
             <a:off x="9144000" y="0"/>
-            <a:ext cx="13320" cy="6852960"/>
+            <a:ext cx="12960" cy="6852600"/>
           </a:xfrm>
           <a:prstGeom prst="rect">
             <a:avLst/>
@@ -23232,7 +26215,7 @@
         <p:spPr>
           <a:xfrm>
             <a:off x="10058400" y="0"/>
-            <a:ext cx="13320" cy="6852960"/>
+            <a:ext cx="12960" cy="6852600"/>
           </a:xfrm>
           <a:prstGeom prst="rect">
             <a:avLst/>
@@ -23292,7 +26275,7 @@
         <p:spPr>
           <a:xfrm>
             <a:off x="10972800" y="0"/>
-            <a:ext cx="13320" cy="6852960"/>
+            <a:ext cx="12960" cy="6852600"/>
           </a:xfrm>
           <a:prstGeom prst="rect">
             <a:avLst/>
@@ -23352,7 +26335,7 @@
         <p:spPr>
           <a:xfrm>
             <a:off x="11887200" y="0"/>
-            <a:ext cx="13320" cy="6852960"/>
+            <a:ext cx="12960" cy="6852600"/>
           </a:xfrm>
           <a:prstGeom prst="rect">
             <a:avLst/>
@@ -23412,7 +26395,7 @@
         <p:spPr>
           <a:xfrm>
             <a:off x="0" y="0"/>
-            <a:ext cx="315000" cy="6852960"/>
+            <a:ext cx="314640" cy="6852600"/>
           </a:xfrm>
           <a:prstGeom prst="rect">
             <a:avLst/>
@@ -23472,7 +26455,7 @@
         <p:spPr>
           <a:xfrm>
             <a:off x="9875520" y="365760"/>
-            <a:ext cx="2006640" cy="497880"/>
+            <a:ext cx="2006280" cy="497520"/>
           </a:xfrm>
           <a:prstGeom prst="roundRect">
             <a:avLst>
@@ -23677,7 +26660,7 @@
         <p:spPr>
           <a:xfrm>
             <a:off x="987480" y="3182040"/>
-            <a:ext cx="3286800" cy="2738160"/>
+            <a:ext cx="3286440" cy="2737800"/>
           </a:xfrm>
           <a:prstGeom prst="roundRect">
             <a:avLst>
@@ -23739,7 +26722,7 @@
         <p:spPr>
           <a:xfrm>
             <a:off x="457200" y="2514600"/>
-            <a:ext cx="3744000" cy="4111920"/>
+            <a:ext cx="3743640" cy="4111560"/>
           </a:xfrm>
           <a:prstGeom prst="roundRect">
             <a:avLst>
@@ -23992,7 +26975,7 @@
         <p:spPr>
           <a:xfrm>
             <a:off x="4507920" y="3182040"/>
-            <a:ext cx="3286800" cy="2738160"/>
+            <a:ext cx="3286440" cy="2737800"/>
           </a:xfrm>
           <a:prstGeom prst="roundRect">
             <a:avLst>
@@ -24054,7 +27037,7 @@
         <p:spPr>
           <a:xfrm>
             <a:off x="4434840" y="2514600"/>
-            <a:ext cx="3286800" cy="3882240"/>
+            <a:ext cx="3286440" cy="3881880"/>
           </a:xfrm>
           <a:prstGeom prst="roundRect">
             <a:avLst>
@@ -24270,7 +27253,7 @@
         <p:spPr>
           <a:xfrm>
             <a:off x="8028360" y="3182040"/>
-            <a:ext cx="3286800" cy="2738160"/>
+            <a:ext cx="3286440" cy="2737800"/>
           </a:xfrm>
           <a:prstGeom prst="roundRect">
             <a:avLst>
@@ -24332,7 +27315,7 @@
         <p:spPr>
           <a:xfrm>
             <a:off x="8001000" y="2514600"/>
-            <a:ext cx="3471840" cy="3883680"/>
+            <a:ext cx="3471480" cy="3883320"/>
           </a:xfrm>
           <a:prstGeom prst="roundRect">
             <a:avLst>
@@ -25008,7 +27991,7 @@
         <p:spPr>
           <a:xfrm>
             <a:off x="0" y="0"/>
-            <a:ext cx="12183840" cy="6852960"/>
+            <a:ext cx="12183480" cy="6852600"/>
           </a:xfrm>
           <a:prstGeom prst="rect">
             <a:avLst/>
@@ -25068,7 +28051,7 @@
         <p:spPr>
           <a:xfrm>
             <a:off x="0" y="0"/>
-            <a:ext cx="13320" cy="6852960"/>
+            <a:ext cx="12960" cy="6852600"/>
           </a:xfrm>
           <a:prstGeom prst="rect">
             <a:avLst/>
@@ -25128,7 +28111,7 @@
         <p:spPr>
           <a:xfrm>
             <a:off x="914400" y="0"/>
-            <a:ext cx="13320" cy="6852960"/>
+            <a:ext cx="12960" cy="6852600"/>
           </a:xfrm>
           <a:prstGeom prst="rect">
             <a:avLst/>
@@ -25188,7 +28171,7 @@
         <p:spPr>
           <a:xfrm>
             <a:off x="1828800" y="0"/>
-            <a:ext cx="13320" cy="6852960"/>
+            <a:ext cx="12960" cy="6852600"/>
           </a:xfrm>
           <a:prstGeom prst="rect">
             <a:avLst/>
@@ -25248,7 +28231,7 @@
         <p:spPr>
           <a:xfrm>
             <a:off x="2743200" y="0"/>
-            <a:ext cx="13320" cy="6852960"/>
+            <a:ext cx="12960" cy="6852600"/>
           </a:xfrm>
           <a:prstGeom prst="rect">
             <a:avLst/>
@@ -25308,7 +28291,7 @@
         <p:spPr>
           <a:xfrm>
             <a:off x="3657600" y="0"/>
-            <a:ext cx="13320" cy="6852960"/>
+            <a:ext cx="12960" cy="6852600"/>
           </a:xfrm>
           <a:prstGeom prst="rect">
             <a:avLst/>
@@ -25368,7 +28351,7 @@
         <p:spPr>
           <a:xfrm>
             <a:off x="4572000" y="0"/>
-            <a:ext cx="13320" cy="6852960"/>
+            <a:ext cx="12960" cy="6852600"/>
           </a:xfrm>
           <a:prstGeom prst="rect">
             <a:avLst/>
@@ -25428,7 +28411,7 @@
         <p:spPr>
           <a:xfrm>
             <a:off x="5486400" y="0"/>
-            <a:ext cx="13320" cy="6852960"/>
+            <a:ext cx="12960" cy="6852600"/>
           </a:xfrm>
           <a:prstGeom prst="rect">
             <a:avLst/>
@@ -25488,7 +28471,7 @@
         <p:spPr>
           <a:xfrm>
             <a:off x="6400800" y="0"/>
-            <a:ext cx="13320" cy="6852960"/>
+            <a:ext cx="12960" cy="6852600"/>
           </a:xfrm>
           <a:prstGeom prst="rect">
             <a:avLst/>
@@ -25548,7 +28531,7 @@
         <p:spPr>
           <a:xfrm>
             <a:off x="7315200" y="0"/>
-            <a:ext cx="13320" cy="6852960"/>
+            <a:ext cx="12960" cy="6852600"/>
           </a:xfrm>
           <a:prstGeom prst="rect">
             <a:avLst/>
@@ -25608,7 +28591,7 @@
         <p:spPr>
           <a:xfrm>
             <a:off x="8229600" y="0"/>
-            <a:ext cx="13320" cy="6852960"/>
+            <a:ext cx="12960" cy="6852600"/>
           </a:xfrm>
           <a:prstGeom prst="rect">
             <a:avLst/>
@@ -25668,7 +28651,7 @@
         <p:spPr>
           <a:xfrm>
             <a:off x="9144000" y="0"/>
-            <a:ext cx="13320" cy="6852960"/>
+            <a:ext cx="12960" cy="6852600"/>
           </a:xfrm>
           <a:prstGeom prst="rect">
             <a:avLst/>
@@ -25728,7 +28711,7 @@
         <p:spPr>
           <a:xfrm>
             <a:off x="10058400" y="0"/>
-            <a:ext cx="13320" cy="6852960"/>
+            <a:ext cx="12960" cy="6852600"/>
           </a:xfrm>
           <a:prstGeom prst="rect">
             <a:avLst/>
@@ -25788,7 +28771,7 @@
         <p:spPr>
           <a:xfrm>
             <a:off x="10972800" y="0"/>
-            <a:ext cx="13320" cy="6852960"/>
+            <a:ext cx="12960" cy="6852600"/>
           </a:xfrm>
           <a:prstGeom prst="rect">
             <a:avLst/>
@@ -25848,7 +28831,7 @@
         <p:spPr>
           <a:xfrm>
             <a:off x="11887200" y="0"/>
-            <a:ext cx="13320" cy="6852960"/>
+            <a:ext cx="12960" cy="6852600"/>
           </a:xfrm>
           <a:prstGeom prst="rect">
             <a:avLst/>
@@ -25908,7 +28891,7 @@
         <p:spPr>
           <a:xfrm>
             <a:off x="0" y="0"/>
-            <a:ext cx="315000" cy="6852960"/>
+            <a:ext cx="314640" cy="6852600"/>
           </a:xfrm>
           <a:prstGeom prst="rect">
             <a:avLst/>
@@ -25968,7 +28951,7 @@
         <p:spPr>
           <a:xfrm>
             <a:off x="9875520" y="365760"/>
-            <a:ext cx="2006640" cy="497880"/>
+            <a:ext cx="2006280" cy="497520"/>
           </a:xfrm>
           <a:prstGeom prst="roundRect">
             <a:avLst>
@@ -26209,7 +29192,7 @@
         <p:spPr>
           <a:xfrm>
             <a:off x="987480" y="3182040"/>
-            <a:ext cx="3286800" cy="2738160"/>
+            <a:ext cx="3286440" cy="2737800"/>
           </a:xfrm>
           <a:prstGeom prst="roundRect">
             <a:avLst>
@@ -26271,7 +29254,7 @@
         <p:spPr>
           <a:xfrm>
             <a:off x="457200" y="2743200"/>
-            <a:ext cx="3884040" cy="3883320"/>
+            <a:ext cx="3883680" cy="3882960"/>
           </a:xfrm>
           <a:prstGeom prst="roundRect">
             <a:avLst>
@@ -26585,7 +29568,7 @@
         <p:spPr>
           <a:xfrm>
             <a:off x="4507920" y="3182040"/>
-            <a:ext cx="3286800" cy="2738160"/>
+            <a:ext cx="3286440" cy="2737800"/>
           </a:xfrm>
           <a:prstGeom prst="roundRect">
             <a:avLst>
@@ -26647,7 +29630,7 @@
         <p:spPr>
           <a:xfrm>
             <a:off x="4572000" y="2743200"/>
-            <a:ext cx="3426840" cy="3655440"/>
+            <a:ext cx="3426480" cy="3655080"/>
           </a:xfrm>
           <a:prstGeom prst="roundRect">
             <a:avLst>
@@ -27199,7 +30182,7 @@
         <p:spPr>
           <a:xfrm>
             <a:off x="8028360" y="3182040"/>
-            <a:ext cx="3286800" cy="2738160"/>
+            <a:ext cx="3286440" cy="2737800"/>
           </a:xfrm>
           <a:prstGeom prst="roundRect">
             <a:avLst>
@@ -27261,7 +30244,7 @@
         <p:spPr>
           <a:xfrm>
             <a:off x="8229600" y="2514600"/>
-            <a:ext cx="3655440" cy="4112640"/>
+            <a:ext cx="3655080" cy="4112280"/>
           </a:xfrm>
           <a:prstGeom prst="roundRect">
             <a:avLst>
@@ -28253,7 +31236,7 @@
         <p:spPr>
           <a:xfrm>
             <a:off x="0" y="0"/>
-            <a:ext cx="12183840" cy="6852960"/>
+            <a:ext cx="12183480" cy="6852600"/>
           </a:xfrm>
           <a:prstGeom prst="rect">
             <a:avLst/>
@@ -28313,7 +31296,7 @@
         <p:spPr>
           <a:xfrm>
             <a:off x="0" y="0"/>
-            <a:ext cx="13320" cy="6852960"/>
+            <a:ext cx="12960" cy="6852600"/>
           </a:xfrm>
           <a:prstGeom prst="rect">
             <a:avLst/>
@@ -28373,7 +31356,7 @@
         <p:spPr>
           <a:xfrm>
             <a:off x="914400" y="0"/>
-            <a:ext cx="13320" cy="6852960"/>
+            <a:ext cx="12960" cy="6852600"/>
           </a:xfrm>
           <a:prstGeom prst="rect">
             <a:avLst/>
@@ -28433,7 +31416,7 @@
         <p:spPr>
           <a:xfrm>
             <a:off x="1828800" y="0"/>
-            <a:ext cx="13320" cy="6852960"/>
+            <a:ext cx="12960" cy="6852600"/>
           </a:xfrm>
           <a:prstGeom prst="rect">
             <a:avLst/>
@@ -28493,7 +31476,7 @@
         <p:spPr>
           <a:xfrm>
             <a:off x="2743200" y="0"/>
-            <a:ext cx="13320" cy="6852960"/>
+            <a:ext cx="12960" cy="6852600"/>
           </a:xfrm>
           <a:prstGeom prst="rect">
             <a:avLst/>
@@ -28553,7 +31536,7 @@
         <p:spPr>
           <a:xfrm>
             <a:off x="3657600" y="0"/>
-            <a:ext cx="13320" cy="6852960"/>
+            <a:ext cx="12960" cy="6852600"/>
           </a:xfrm>
           <a:prstGeom prst="rect">
             <a:avLst/>
@@ -28613,7 +31596,7 @@
         <p:spPr>
           <a:xfrm>
             <a:off x="4572000" y="0"/>
-            <a:ext cx="13320" cy="6852960"/>
+            <a:ext cx="12960" cy="6852600"/>
           </a:xfrm>
           <a:prstGeom prst="rect">
             <a:avLst/>
@@ -28673,7 +31656,7 @@
         <p:spPr>
           <a:xfrm>
             <a:off x="5486400" y="0"/>
-            <a:ext cx="13320" cy="6852960"/>
+            <a:ext cx="12960" cy="6852600"/>
           </a:xfrm>
           <a:prstGeom prst="rect">
             <a:avLst/>
@@ -28733,7 +31716,7 @@
         <p:spPr>
           <a:xfrm>
             <a:off x="6400800" y="0"/>
-            <a:ext cx="13320" cy="6852960"/>
+            <a:ext cx="12960" cy="6852600"/>
           </a:xfrm>
           <a:prstGeom prst="rect">
             <a:avLst/>
@@ -28793,7 +31776,7 @@
         <p:spPr>
           <a:xfrm>
             <a:off x="7315200" y="0"/>
-            <a:ext cx="13320" cy="6852960"/>
+            <a:ext cx="12960" cy="6852600"/>
           </a:xfrm>
           <a:prstGeom prst="rect">
             <a:avLst/>
@@ -28853,7 +31836,7 @@
         <p:spPr>
           <a:xfrm>
             <a:off x="8229600" y="0"/>
-            <a:ext cx="13320" cy="6852960"/>
+            <a:ext cx="12960" cy="6852600"/>
           </a:xfrm>
           <a:prstGeom prst="rect">
             <a:avLst/>
@@ -28913,7 +31896,7 @@
         <p:spPr>
           <a:xfrm>
             <a:off x="9144000" y="0"/>
-            <a:ext cx="13320" cy="6852960"/>
+            <a:ext cx="12960" cy="6852600"/>
           </a:xfrm>
           <a:prstGeom prst="rect">
             <a:avLst/>
@@ -28973,7 +31956,7 @@
         <p:spPr>
           <a:xfrm>
             <a:off x="10058400" y="0"/>
-            <a:ext cx="13320" cy="6852960"/>
+            <a:ext cx="12960" cy="6852600"/>
           </a:xfrm>
           <a:prstGeom prst="rect">
             <a:avLst/>
@@ -29033,7 +32016,7 @@
         <p:spPr>
           <a:xfrm>
             <a:off x="10972800" y="0"/>
-            <a:ext cx="13320" cy="6852960"/>
+            <a:ext cx="12960" cy="6852600"/>
           </a:xfrm>
           <a:prstGeom prst="rect">
             <a:avLst/>
@@ -29093,7 +32076,7 @@
         <p:spPr>
           <a:xfrm>
             <a:off x="11887200" y="0"/>
-            <a:ext cx="13320" cy="6852960"/>
+            <a:ext cx="12960" cy="6852600"/>
           </a:xfrm>
           <a:prstGeom prst="rect">
             <a:avLst/>
@@ -29153,7 +32136,7 @@
         <p:spPr>
           <a:xfrm>
             <a:off x="0" y="0"/>
-            <a:ext cx="315000" cy="6852960"/>
+            <a:ext cx="314640" cy="6852600"/>
           </a:xfrm>
           <a:prstGeom prst="rect">
             <a:avLst/>
@@ -29213,7 +32196,7 @@
         <p:spPr>
           <a:xfrm>
             <a:off x="9875520" y="365760"/>
-            <a:ext cx="2006640" cy="497880"/>
+            <a:ext cx="2006280" cy="497520"/>
           </a:xfrm>
           <a:prstGeom prst="roundRect">
             <a:avLst>
@@ -29451,7 +32434,7 @@
         <p:spPr>
           <a:xfrm>
             <a:off x="987480" y="3182040"/>
-            <a:ext cx="3286800" cy="2738160"/>
+            <a:ext cx="3286440" cy="2737800"/>
           </a:xfrm>
           <a:prstGeom prst="roundRect">
             <a:avLst>
@@ -29513,7 +32496,7 @@
         <p:spPr>
           <a:xfrm>
             <a:off x="914400" y="3108960"/>
-            <a:ext cx="3286800" cy="3290040"/>
+            <a:ext cx="3286440" cy="3289680"/>
           </a:xfrm>
           <a:prstGeom prst="roundRect">
             <a:avLst>
@@ -29844,7 +32827,7 @@
         <p:spPr>
           <a:xfrm>
             <a:off x="4507920" y="3182040"/>
-            <a:ext cx="3286800" cy="2738160"/>
+            <a:ext cx="3286440" cy="2737800"/>
           </a:xfrm>
           <a:prstGeom prst="roundRect">
             <a:avLst>
@@ -29906,7 +32889,7 @@
         <p:spPr>
           <a:xfrm>
             <a:off x="4434840" y="2971800"/>
-            <a:ext cx="3286800" cy="3427200"/>
+            <a:ext cx="3286440" cy="3426840"/>
           </a:xfrm>
           <a:prstGeom prst="roundRect">
             <a:avLst>
@@ -30313,7 +33296,7 @@
         <p:spPr>
           <a:xfrm>
             <a:off x="8028360" y="3182040"/>
-            <a:ext cx="3286800" cy="2738160"/>
+            <a:ext cx="3286440" cy="2737800"/>
           </a:xfrm>
           <a:prstGeom prst="roundRect">
             <a:avLst>
@@ -30375,7 +33358,7 @@
         <p:spPr>
           <a:xfrm>
             <a:off x="7955280" y="2743200"/>
-            <a:ext cx="3699360" cy="3654360"/>
+            <a:ext cx="3699000" cy="3654000"/>
           </a:xfrm>
           <a:prstGeom prst="roundRect">
             <a:avLst>
@@ -31186,7 +34169,7 @@
         <p:spPr>
           <a:xfrm>
             <a:off x="0" y="0"/>
-            <a:ext cx="12183840" cy="6852960"/>
+            <a:ext cx="12183480" cy="6852600"/>
           </a:xfrm>
           <a:prstGeom prst="rect">
             <a:avLst/>
@@ -31246,7 +34229,7 @@
         <p:spPr>
           <a:xfrm>
             <a:off x="0" y="0"/>
-            <a:ext cx="13320" cy="6852960"/>
+            <a:ext cx="12960" cy="6852600"/>
           </a:xfrm>
           <a:prstGeom prst="rect">
             <a:avLst/>
@@ -31306,7 +34289,7 @@
         <p:spPr>
           <a:xfrm>
             <a:off x="914400" y="0"/>
-            <a:ext cx="13320" cy="6852960"/>
+            <a:ext cx="12960" cy="6852600"/>
           </a:xfrm>
           <a:prstGeom prst="rect">
             <a:avLst/>
@@ -31366,7 +34349,7 @@
         <p:spPr>
           <a:xfrm>
             <a:off x="1828800" y="0"/>
-            <a:ext cx="13320" cy="6852960"/>
+            <a:ext cx="12960" cy="6852600"/>
           </a:xfrm>
           <a:prstGeom prst="rect">
             <a:avLst/>
@@ -31426,7 +34409,7 @@
         <p:spPr>
           <a:xfrm>
             <a:off x="2743200" y="0"/>
-            <a:ext cx="13320" cy="6852960"/>
+            <a:ext cx="12960" cy="6852600"/>
           </a:xfrm>
           <a:prstGeom prst="rect">
             <a:avLst/>
@@ -31486,7 +34469,7 @@
         <p:spPr>
           <a:xfrm>
             <a:off x="3657600" y="0"/>
-            <a:ext cx="13320" cy="6852960"/>
+            <a:ext cx="12960" cy="6852600"/>
           </a:xfrm>
           <a:prstGeom prst="rect">
             <a:avLst/>
@@ -31546,7 +34529,7 @@
         <p:spPr>
           <a:xfrm>
             <a:off x="4572000" y="0"/>
-            <a:ext cx="13320" cy="6852960"/>
+            <a:ext cx="12960" cy="6852600"/>
           </a:xfrm>
           <a:prstGeom prst="rect">
             <a:avLst/>
@@ -31606,7 +34589,7 @@
         <p:spPr>
           <a:xfrm>
             <a:off x="5486400" y="0"/>
-            <a:ext cx="13320" cy="6852960"/>
+            <a:ext cx="12960" cy="6852600"/>
           </a:xfrm>
           <a:prstGeom prst="rect">
             <a:avLst/>
@@ -31666,7 +34649,7 @@
         <p:spPr>
           <a:xfrm>
             <a:off x="6400800" y="0"/>
-            <a:ext cx="13320" cy="6852960"/>
+            <a:ext cx="12960" cy="6852600"/>
           </a:xfrm>
           <a:prstGeom prst="rect">
             <a:avLst/>
@@ -31726,7 +34709,7 @@
         <p:spPr>
           <a:xfrm>
             <a:off x="7315200" y="0"/>
-            <a:ext cx="13320" cy="6852960"/>
+            <a:ext cx="12960" cy="6852600"/>
           </a:xfrm>
           <a:prstGeom prst="rect">
             <a:avLst/>
@@ -31786,7 +34769,7 @@
         <p:spPr>
           <a:xfrm>
             <a:off x="8229600" y="0"/>
-            <a:ext cx="13320" cy="6852960"/>
+            <a:ext cx="12960" cy="6852600"/>
           </a:xfrm>
           <a:prstGeom prst="rect">
             <a:avLst/>
@@ -31846,7 +34829,7 @@
         <p:spPr>
           <a:xfrm>
             <a:off x="9144000" y="0"/>
-            <a:ext cx="13320" cy="6852960"/>
+            <a:ext cx="12960" cy="6852600"/>
           </a:xfrm>
           <a:prstGeom prst="rect">
             <a:avLst/>
@@ -31906,7 +34889,7 @@
         <p:spPr>
           <a:xfrm>
             <a:off x="10058400" y="0"/>
-            <a:ext cx="13320" cy="6852960"/>
+            <a:ext cx="12960" cy="6852600"/>
           </a:xfrm>
           <a:prstGeom prst="rect">
             <a:avLst/>
@@ -31966,7 +34949,7 @@
         <p:spPr>
           <a:xfrm>
             <a:off x="10972800" y="0"/>
-            <a:ext cx="13320" cy="6852960"/>
+            <a:ext cx="12960" cy="6852600"/>
           </a:xfrm>
           <a:prstGeom prst="rect">
             <a:avLst/>
@@ -32026,7 +35009,7 @@
         <p:spPr>
           <a:xfrm>
             <a:off x="11887200" y="0"/>
-            <a:ext cx="13320" cy="6852960"/>
+            <a:ext cx="12960" cy="6852600"/>
           </a:xfrm>
           <a:prstGeom prst="rect">
             <a:avLst/>
@@ -32086,7 +35069,7 @@
         <p:spPr>
           <a:xfrm>
             <a:off x="0" y="0"/>
-            <a:ext cx="315000" cy="6852960"/>
+            <a:ext cx="314640" cy="6852600"/>
           </a:xfrm>
           <a:prstGeom prst="rect">
             <a:avLst/>
@@ -32146,7 +35129,7 @@
         <p:spPr>
           <a:xfrm>
             <a:off x="9875520" y="365760"/>
-            <a:ext cx="2006640" cy="497880"/>
+            <a:ext cx="2006280" cy="497520"/>
           </a:xfrm>
           <a:prstGeom prst="roundRect">
             <a:avLst>
@@ -32220,7 +35203,7 @@
         <p:spPr>
           <a:xfrm>
             <a:off x="2585880" y="914400"/>
-            <a:ext cx="5796000" cy="1186920"/>
+            <a:ext cx="5795640" cy="1186920"/>
           </a:xfrm>
           <a:prstGeom prst="rect">
             <a:avLst/>
@@ -32287,7 +35270,7 @@
         <p:spPr>
           <a:xfrm>
             <a:off x="2057400" y="1694880"/>
-            <a:ext cx="7454160" cy="819720"/>
+            <a:ext cx="7453800" cy="819720"/>
           </a:xfrm>
           <a:prstGeom prst="rect">
             <a:avLst/>
@@ -32387,7 +35370,7 @@
         <p:spPr>
           <a:xfrm>
             <a:off x="987480" y="3182040"/>
-            <a:ext cx="3286800" cy="2738160"/>
+            <a:ext cx="3286440" cy="2737800"/>
           </a:xfrm>
           <a:prstGeom prst="roundRect">
             <a:avLst>
@@ -32449,7 +35432,7 @@
         <p:spPr>
           <a:xfrm>
             <a:off x="914400" y="3108960"/>
-            <a:ext cx="3286800" cy="3290040"/>
+            <a:ext cx="3286440" cy="3289680"/>
           </a:xfrm>
           <a:prstGeom prst="roundRect">
             <a:avLst>
@@ -32700,7 +35683,7 @@
         <p:spPr>
           <a:xfrm>
             <a:off x="4507920" y="3182040"/>
-            <a:ext cx="3286800" cy="2738160"/>
+            <a:ext cx="3286440" cy="2737800"/>
           </a:xfrm>
           <a:prstGeom prst="roundRect">
             <a:avLst>
@@ -32762,7 +35745,7 @@
         <p:spPr>
           <a:xfrm>
             <a:off x="4434840" y="2971800"/>
-            <a:ext cx="3286800" cy="3427200"/>
+            <a:ext cx="3286440" cy="3426840"/>
           </a:xfrm>
           <a:prstGeom prst="roundRect">
             <a:avLst>
@@ -33136,7 +36119,7 @@
         <p:spPr>
           <a:xfrm>
             <a:off x="8028360" y="3182040"/>
-            <a:ext cx="3286800" cy="2738160"/>
+            <a:ext cx="3286440" cy="2737800"/>
           </a:xfrm>
           <a:prstGeom prst="roundRect">
             <a:avLst>
@@ -33198,7 +36181,7 @@
         <p:spPr>
           <a:xfrm>
             <a:off x="8003880" y="2971800"/>
-            <a:ext cx="3425040" cy="3425760"/>
+            <a:ext cx="3424680" cy="3425400"/>
           </a:xfrm>
           <a:prstGeom prst="roundRect">
             <a:avLst>

--- a/Java/Java #4/TR/Java #4.pptx
+++ b/Java/Java #4/TR/Java #4.pptx
@@ -18,6 +18,7 @@
     <p:sldId id="266" r:id="rId13"/>
     <p:sldId id="267" r:id="rId14"/>
     <p:sldId id="268" r:id="rId15"/>
+    <p:sldId id="269" r:id="rId16"/>
   </p:sldIdLst>
   <p:sldSz cx="9144000" cy="6858000"/>
   <p:notesSz cx="7772400" cy="10058400"/>
@@ -75,7 +76,7 @@
         <p:txBody>
           <a:bodyPr/>
           <a:p>
-            <a:fld id="{65901510-D1FC-4A6B-8F25-693ED1BF9D12}" type="slidenum">
+            <a:fld id="{F9BAF519-C3E6-4279-8A72-547B80F1958E}" type="slidenum">
               <a:t>&lt;#&gt;</a:t>
             </a:fld>
           </a:p>
@@ -284,7 +285,7 @@
         <p:txBody>
           <a:bodyPr/>
           <a:p>
-            <a:fld id="{5EDCB66D-D019-4E66-A087-177272247274}" type="slidenum">
+            <a:fld id="{5D9F76C6-AB48-4102-9BF2-EF0727C868DD}" type="slidenum">
               <a:t>&lt;#&gt;</a:t>
             </a:fld>
           </a:p>
@@ -579,7 +580,7 @@
         <p:txBody>
           <a:bodyPr/>
           <a:p>
-            <a:fld id="{5EDEF6EC-4A78-4DE2-96D1-5182BC608E5D}" type="slidenum">
+            <a:fld id="{2287F342-454E-4E4E-A1BB-AE7C03865C44}" type="slidenum">
               <a:t>&lt;#&gt;</a:t>
             </a:fld>
           </a:p>
@@ -960,7 +961,7 @@
         <p:txBody>
           <a:bodyPr/>
           <a:p>
-            <a:fld id="{9C098612-606C-4912-A7D3-B5E1E6BD663C}" type="slidenum">
+            <a:fld id="{68078B31-FB62-414E-AF03-BFE6F72F9E25}" type="slidenum">
               <a:t>&lt;#&gt;</a:t>
             </a:fld>
           </a:p>
@@ -1123,7 +1124,7 @@
         <p:txBody>
           <a:bodyPr/>
           <a:p>
-            <a:fld id="{EEA6B7B7-B74B-4A3F-98E6-244814D62266}" type="slidenum">
+            <a:fld id="{199C5452-4E87-4182-9738-76AB77978777}" type="slidenum">
               <a:t>&lt;#&gt;</a:t>
             </a:fld>
           </a:p>
@@ -1289,7 +1290,7 @@
         <p:txBody>
           <a:bodyPr/>
           <a:p>
-            <a:fld id="{AAD586F9-D76E-4C2F-9371-9E5BA53C5B26}" type="slidenum">
+            <a:fld id="{A52B5BA5-9328-48EF-9A4D-707AABC3D621}" type="slidenum">
               <a:t>&lt;#&gt;</a:t>
             </a:fld>
           </a:p>
@@ -1498,7 +1499,7 @@
         <p:txBody>
           <a:bodyPr/>
           <a:p>
-            <a:fld id="{1A4BF6BF-4454-4101-9CE3-FC77AD5EAE63}" type="slidenum">
+            <a:fld id="{4CF85591-F4D6-42B8-BBBE-445C8EA86513}" type="slidenum">
               <a:t>&lt;#&gt;</a:t>
             </a:fld>
           </a:p>
@@ -1621,7 +1622,7 @@
         <p:txBody>
           <a:bodyPr/>
           <a:p>
-            <a:fld id="{25B27D6C-908C-471C-8274-A968BCA89A59}" type="slidenum">
+            <a:fld id="{5705CDBE-74BC-419D-968D-19877435450F}" type="slidenum">
               <a:t>&lt;#&gt;</a:t>
             </a:fld>
           </a:p>
@@ -1742,7 +1743,7 @@
         <p:txBody>
           <a:bodyPr/>
           <a:p>
-            <a:fld id="{5FC79A1B-BEA7-4F3E-B4C8-F8AFCDB19D26}" type="slidenum">
+            <a:fld id="{7A4FC5D3-1CEE-4572-99AE-DCDA87340B70}" type="slidenum">
               <a:t>&lt;#&gt;</a:t>
             </a:fld>
           </a:p>
@@ -1994,7 +1995,7 @@
         <p:txBody>
           <a:bodyPr/>
           <a:p>
-            <a:fld id="{F5849B0B-6B42-4637-8CAD-0842E0AAAD4B}" type="slidenum">
+            <a:fld id="{B41F00C1-EB83-4598-8B01-BDD3811F4F5D}" type="slidenum">
               <a:t>&lt;#&gt;</a:t>
             </a:fld>
           </a:p>
@@ -2246,7 +2247,7 @@
         <p:txBody>
           <a:bodyPr/>
           <a:p>
-            <a:fld id="{7D5685E4-3972-4A8A-8A1A-A0BE31AAB879}" type="slidenum">
+            <a:fld id="{A75BBAD9-DF20-48FF-977A-CF0FC705D8EB}" type="slidenum">
               <a:t>&lt;#&gt;</a:t>
             </a:fld>
           </a:p>
@@ -2498,7 +2499,7 @@
         <p:txBody>
           <a:bodyPr/>
           <a:p>
-            <a:fld id="{C73677C4-93FE-4EB6-B273-B4F32ED6C864}" type="slidenum">
+            <a:fld id="{053AA3C9-464C-47CE-8F7F-8819CF906CEE}" type="slidenum">
               <a:t>&lt;#&gt;</a:t>
             </a:fld>
           </a:p>
@@ -2567,7 +2568,7 @@
         <p:spPr>
           <a:xfrm>
             <a:off x="3124080" y="6356520"/>
-            <a:ext cx="2889720" cy="359280"/>
+            <a:ext cx="2889360" cy="358920"/>
           </a:xfrm>
           <a:prstGeom prst="rect">
             <a:avLst/>
@@ -2639,7 +2640,7 @@
         <p:spPr>
           <a:xfrm>
             <a:off x="6553080" y="6356520"/>
-            <a:ext cx="2127960" cy="359280"/>
+            <a:ext cx="2127600" cy="358920"/>
           </a:xfrm>
           <a:prstGeom prst="rect">
             <a:avLst/>
@@ -2680,7 +2681,7 @@
                 <a:tab algn="l" pos="0"/>
               </a:tabLst>
             </a:pPr>
-            <a:fld id="{4A278ED2-0ADA-457B-BD9D-F465CD8B977C}" type="slidenum">
+            <a:fld id="{4EBF1FBF-7E8B-4AC2-9C4D-4E843520D5FC}" type="slidenum">
               <a:rPr b="0" lang="en-US" sz="1200" spc="-1" strike="noStrike">
                 <a:solidFill>
                   <a:srgbClr val="8b8b8b"/>
@@ -2711,7 +2712,7 @@
         <p:spPr>
           <a:xfrm>
             <a:off x="457200" y="6356520"/>
-            <a:ext cx="2127960" cy="359280"/>
+            <a:ext cx="2127600" cy="358920"/>
           </a:xfrm>
           <a:prstGeom prst="rect">
             <a:avLst/>
@@ -3078,7 +3079,7 @@
         <p:spPr>
           <a:xfrm>
             <a:off x="0" y="0"/>
-            <a:ext cx="12183120" cy="6852240"/>
+            <a:ext cx="12182760" cy="6851880"/>
           </a:xfrm>
           <a:prstGeom prst="rect">
             <a:avLst/>
@@ -3138,7 +3139,7 @@
         <p:spPr>
           <a:xfrm>
             <a:off x="0" y="0"/>
-            <a:ext cx="12600" cy="6852240"/>
+            <a:ext cx="12240" cy="6851880"/>
           </a:xfrm>
           <a:prstGeom prst="rect">
             <a:avLst/>
@@ -3198,7 +3199,7 @@
         <p:spPr>
           <a:xfrm>
             <a:off x="914400" y="0"/>
-            <a:ext cx="12600" cy="6852240"/>
+            <a:ext cx="12240" cy="6851880"/>
           </a:xfrm>
           <a:prstGeom prst="rect">
             <a:avLst/>
@@ -3258,7 +3259,7 @@
         <p:spPr>
           <a:xfrm>
             <a:off x="1828800" y="0"/>
-            <a:ext cx="12600" cy="6852240"/>
+            <a:ext cx="12240" cy="6851880"/>
           </a:xfrm>
           <a:prstGeom prst="rect">
             <a:avLst/>
@@ -3318,7 +3319,7 @@
         <p:spPr>
           <a:xfrm>
             <a:off x="2743200" y="0"/>
-            <a:ext cx="12600" cy="6852240"/>
+            <a:ext cx="12240" cy="6851880"/>
           </a:xfrm>
           <a:prstGeom prst="rect">
             <a:avLst/>
@@ -3378,7 +3379,7 @@
         <p:spPr>
           <a:xfrm>
             <a:off x="3657600" y="0"/>
-            <a:ext cx="12600" cy="6852240"/>
+            <a:ext cx="12240" cy="6851880"/>
           </a:xfrm>
           <a:prstGeom prst="rect">
             <a:avLst/>
@@ -3438,7 +3439,7 @@
         <p:spPr>
           <a:xfrm>
             <a:off x="4572000" y="0"/>
-            <a:ext cx="12600" cy="6852240"/>
+            <a:ext cx="12240" cy="6851880"/>
           </a:xfrm>
           <a:prstGeom prst="rect">
             <a:avLst/>
@@ -3498,7 +3499,7 @@
         <p:spPr>
           <a:xfrm>
             <a:off x="5486400" y="0"/>
-            <a:ext cx="12600" cy="6852240"/>
+            <a:ext cx="12240" cy="6851880"/>
           </a:xfrm>
           <a:prstGeom prst="rect">
             <a:avLst/>
@@ -3558,7 +3559,7 @@
         <p:spPr>
           <a:xfrm>
             <a:off x="6400800" y="0"/>
-            <a:ext cx="12600" cy="6852240"/>
+            <a:ext cx="12240" cy="6851880"/>
           </a:xfrm>
           <a:prstGeom prst="rect">
             <a:avLst/>
@@ -3618,7 +3619,7 @@
         <p:spPr>
           <a:xfrm>
             <a:off x="7315200" y="0"/>
-            <a:ext cx="12600" cy="6852240"/>
+            <a:ext cx="12240" cy="6851880"/>
           </a:xfrm>
           <a:prstGeom prst="rect">
             <a:avLst/>
@@ -3678,7 +3679,7 @@
         <p:spPr>
           <a:xfrm>
             <a:off x="8229600" y="0"/>
-            <a:ext cx="12600" cy="6852240"/>
+            <a:ext cx="12240" cy="6851880"/>
           </a:xfrm>
           <a:prstGeom prst="rect">
             <a:avLst/>
@@ -3738,7 +3739,7 @@
         <p:spPr>
           <a:xfrm>
             <a:off x="9144000" y="0"/>
-            <a:ext cx="12600" cy="6852240"/>
+            <a:ext cx="12240" cy="6851880"/>
           </a:xfrm>
           <a:prstGeom prst="rect">
             <a:avLst/>
@@ -3798,7 +3799,7 @@
         <p:spPr>
           <a:xfrm>
             <a:off x="10058400" y="0"/>
-            <a:ext cx="12600" cy="6852240"/>
+            <a:ext cx="12240" cy="6851880"/>
           </a:xfrm>
           <a:prstGeom prst="rect">
             <a:avLst/>
@@ -3858,7 +3859,7 @@
         <p:spPr>
           <a:xfrm>
             <a:off x="10972800" y="0"/>
-            <a:ext cx="12600" cy="6852240"/>
+            <a:ext cx="12240" cy="6851880"/>
           </a:xfrm>
           <a:prstGeom prst="rect">
             <a:avLst/>
@@ -3918,7 +3919,7 @@
         <p:spPr>
           <a:xfrm>
             <a:off x="11887200" y="0"/>
-            <a:ext cx="12600" cy="6852240"/>
+            <a:ext cx="12240" cy="6851880"/>
           </a:xfrm>
           <a:prstGeom prst="rect">
             <a:avLst/>
@@ -3978,7 +3979,7 @@
         <p:spPr>
           <a:xfrm>
             <a:off x="0" y="0"/>
-            <a:ext cx="314280" cy="6852240"/>
+            <a:ext cx="313920" cy="6851880"/>
           </a:xfrm>
           <a:prstGeom prst="rect">
             <a:avLst/>
@@ -4038,7 +4039,7 @@
         <p:spPr>
           <a:xfrm>
             <a:off x="9875520" y="365760"/>
-            <a:ext cx="2005920" cy="497160"/>
+            <a:ext cx="2005560" cy="496800"/>
           </a:xfrm>
           <a:prstGeom prst="roundRect">
             <a:avLst>
@@ -4289,7 +4290,7 @@
         <p:spPr>
           <a:xfrm>
             <a:off x="987480" y="3182040"/>
-            <a:ext cx="3286080" cy="2737440"/>
+            <a:ext cx="3285720" cy="2737080"/>
           </a:xfrm>
           <a:prstGeom prst="roundRect">
             <a:avLst>
@@ -4351,7 +4352,7 @@
         <p:spPr>
           <a:xfrm>
             <a:off x="914400" y="3108960"/>
-            <a:ext cx="3286080" cy="2737440"/>
+            <a:ext cx="3285720" cy="2737080"/>
           </a:xfrm>
           <a:prstGeom prst="roundRect">
             <a:avLst>
@@ -4485,7 +4486,7 @@
         <p:spPr>
           <a:xfrm>
             <a:off x="4507920" y="3182040"/>
-            <a:ext cx="3286080" cy="2737440"/>
+            <a:ext cx="3285720" cy="2737080"/>
           </a:xfrm>
           <a:prstGeom prst="roundRect">
             <a:avLst>
@@ -4547,7 +4548,7 @@
         <p:spPr>
           <a:xfrm>
             <a:off x="4434840" y="3108960"/>
-            <a:ext cx="3286080" cy="2737440"/>
+            <a:ext cx="3285720" cy="2737080"/>
           </a:xfrm>
           <a:prstGeom prst="roundRect">
             <a:avLst>
@@ -4805,7 +4806,7 @@
         <p:spPr>
           <a:xfrm>
             <a:off x="8028360" y="3182040"/>
-            <a:ext cx="3286080" cy="2737440"/>
+            <a:ext cx="3285720" cy="2737080"/>
           </a:xfrm>
           <a:prstGeom prst="roundRect">
             <a:avLst>
@@ -4867,7 +4868,7 @@
         <p:spPr>
           <a:xfrm>
             <a:off x="7955280" y="2971800"/>
-            <a:ext cx="3927240" cy="3652920"/>
+            <a:ext cx="3926880" cy="3652560"/>
           </a:xfrm>
           <a:prstGeom prst="roundRect">
             <a:avLst>
@@ -5378,7 +5379,7 @@
         <p:spPr>
           <a:xfrm>
             <a:off x="0" y="0"/>
-            <a:ext cx="12183480" cy="6852600"/>
+            <a:ext cx="12183120" cy="6852240"/>
           </a:xfrm>
           <a:prstGeom prst="rect">
             <a:avLst/>
@@ -5438,7 +5439,7 @@
         <p:spPr>
           <a:xfrm>
             <a:off x="0" y="0"/>
-            <a:ext cx="12960" cy="6852600"/>
+            <a:ext cx="12600" cy="6852240"/>
           </a:xfrm>
           <a:prstGeom prst="rect">
             <a:avLst/>
@@ -5498,7 +5499,7 @@
         <p:spPr>
           <a:xfrm>
             <a:off x="914400" y="0"/>
-            <a:ext cx="12960" cy="6852600"/>
+            <a:ext cx="12600" cy="6852240"/>
           </a:xfrm>
           <a:prstGeom prst="rect">
             <a:avLst/>
@@ -5558,7 +5559,7 @@
         <p:spPr>
           <a:xfrm>
             <a:off x="1828800" y="0"/>
-            <a:ext cx="12960" cy="6852600"/>
+            <a:ext cx="12600" cy="6852240"/>
           </a:xfrm>
           <a:prstGeom prst="rect">
             <a:avLst/>
@@ -5618,7 +5619,7 @@
         <p:spPr>
           <a:xfrm>
             <a:off x="2743200" y="0"/>
-            <a:ext cx="12960" cy="6852600"/>
+            <a:ext cx="12600" cy="6852240"/>
           </a:xfrm>
           <a:prstGeom prst="rect">
             <a:avLst/>
@@ -5678,7 +5679,7 @@
         <p:spPr>
           <a:xfrm>
             <a:off x="3657600" y="0"/>
-            <a:ext cx="12960" cy="6852600"/>
+            <a:ext cx="12600" cy="6852240"/>
           </a:xfrm>
           <a:prstGeom prst="rect">
             <a:avLst/>
@@ -5738,7 +5739,7 @@
         <p:spPr>
           <a:xfrm>
             <a:off x="4572000" y="0"/>
-            <a:ext cx="12960" cy="6852600"/>
+            <a:ext cx="12600" cy="6852240"/>
           </a:xfrm>
           <a:prstGeom prst="rect">
             <a:avLst/>
@@ -5798,7 +5799,7 @@
         <p:spPr>
           <a:xfrm>
             <a:off x="5486400" y="0"/>
-            <a:ext cx="12960" cy="6852600"/>
+            <a:ext cx="12600" cy="6852240"/>
           </a:xfrm>
           <a:prstGeom prst="rect">
             <a:avLst/>
@@ -5858,7 +5859,7 @@
         <p:spPr>
           <a:xfrm>
             <a:off x="6400800" y="0"/>
-            <a:ext cx="12960" cy="6852600"/>
+            <a:ext cx="12600" cy="6852240"/>
           </a:xfrm>
           <a:prstGeom prst="rect">
             <a:avLst/>
@@ -5918,7 +5919,7 @@
         <p:spPr>
           <a:xfrm>
             <a:off x="7315200" y="0"/>
-            <a:ext cx="12960" cy="6852600"/>
+            <a:ext cx="12600" cy="6852240"/>
           </a:xfrm>
           <a:prstGeom prst="rect">
             <a:avLst/>
@@ -5978,7 +5979,7 @@
         <p:spPr>
           <a:xfrm>
             <a:off x="8229600" y="0"/>
-            <a:ext cx="12960" cy="6852600"/>
+            <a:ext cx="12600" cy="6852240"/>
           </a:xfrm>
           <a:prstGeom prst="rect">
             <a:avLst/>
@@ -6038,7 +6039,7 @@
         <p:spPr>
           <a:xfrm>
             <a:off x="9144000" y="0"/>
-            <a:ext cx="12960" cy="6852600"/>
+            <a:ext cx="12600" cy="6852240"/>
           </a:xfrm>
           <a:prstGeom prst="rect">
             <a:avLst/>
@@ -6098,7 +6099,7 @@
         <p:spPr>
           <a:xfrm>
             <a:off x="10058400" y="0"/>
-            <a:ext cx="12960" cy="6852600"/>
+            <a:ext cx="12600" cy="6852240"/>
           </a:xfrm>
           <a:prstGeom prst="rect">
             <a:avLst/>
@@ -6158,7 +6159,7 @@
         <p:spPr>
           <a:xfrm>
             <a:off x="10972800" y="0"/>
-            <a:ext cx="12960" cy="6852600"/>
+            <a:ext cx="12600" cy="6852240"/>
           </a:xfrm>
           <a:prstGeom prst="rect">
             <a:avLst/>
@@ -6218,7 +6219,7 @@
         <p:spPr>
           <a:xfrm>
             <a:off x="11887200" y="0"/>
-            <a:ext cx="12960" cy="6852600"/>
+            <a:ext cx="12600" cy="6852240"/>
           </a:xfrm>
           <a:prstGeom prst="rect">
             <a:avLst/>
@@ -6278,7 +6279,7 @@
         <p:spPr>
           <a:xfrm>
             <a:off x="0" y="0"/>
-            <a:ext cx="314640" cy="6852600"/>
+            <a:ext cx="314280" cy="6852240"/>
           </a:xfrm>
           <a:prstGeom prst="rect">
             <a:avLst/>
@@ -6338,7 +6339,7 @@
         <p:spPr>
           <a:xfrm>
             <a:off x="9875520" y="365760"/>
-            <a:ext cx="2006280" cy="497520"/>
+            <a:ext cx="2005920" cy="497160"/>
           </a:xfrm>
           <a:prstGeom prst="roundRect">
             <a:avLst>
@@ -6479,7 +6480,7 @@
         <p:spPr>
           <a:xfrm>
             <a:off x="1267200" y="1694880"/>
-            <a:ext cx="9034560" cy="819720"/>
+            <a:ext cx="9034200" cy="819720"/>
           </a:xfrm>
           <a:prstGeom prst="rect">
             <a:avLst/>
@@ -6579,7 +6580,7 @@
         <p:spPr>
           <a:xfrm>
             <a:off x="987480" y="3182040"/>
-            <a:ext cx="3286440" cy="2737800"/>
+            <a:ext cx="3286080" cy="2737440"/>
           </a:xfrm>
           <a:prstGeom prst="roundRect">
             <a:avLst>
@@ -6641,7 +6642,7 @@
         <p:spPr>
           <a:xfrm>
             <a:off x="685800" y="2743200"/>
-            <a:ext cx="3515040" cy="3655440"/>
+            <a:ext cx="3514680" cy="3655080"/>
           </a:xfrm>
           <a:prstGeom prst="roundRect">
             <a:avLst>
@@ -6883,7 +6884,7 @@
         <p:spPr>
           <a:xfrm>
             <a:off x="4507920" y="3182040"/>
-            <a:ext cx="3286440" cy="2737800"/>
+            <a:ext cx="3286080" cy="2737440"/>
           </a:xfrm>
           <a:prstGeom prst="roundRect">
             <a:avLst>
@@ -6945,7 +6946,7 @@
         <p:spPr>
           <a:xfrm>
             <a:off x="4434840" y="2971800"/>
-            <a:ext cx="3286440" cy="3426840"/>
+            <a:ext cx="3286080" cy="3426480"/>
           </a:xfrm>
           <a:prstGeom prst="roundRect">
             <a:avLst>
@@ -7299,7 +7300,7 @@
         <p:spPr>
           <a:xfrm>
             <a:off x="8028360" y="3182040"/>
-            <a:ext cx="3286440" cy="2737800"/>
+            <a:ext cx="3286080" cy="2737440"/>
           </a:xfrm>
           <a:prstGeom prst="roundRect">
             <a:avLst>
@@ -7361,7 +7362,7 @@
         <p:spPr>
           <a:xfrm>
             <a:off x="8003880" y="2743200"/>
-            <a:ext cx="3424680" cy="3654000"/>
+            <a:ext cx="3424320" cy="3653640"/>
           </a:xfrm>
           <a:prstGeom prst="roundRect">
             <a:avLst>
@@ -8037,7 +8038,7 @@
         <p:spPr>
           <a:xfrm>
             <a:off x="0" y="0"/>
-            <a:ext cx="12183480" cy="6852600"/>
+            <a:ext cx="12183120" cy="6852240"/>
           </a:xfrm>
           <a:prstGeom prst="rect">
             <a:avLst/>
@@ -8097,7 +8098,7 @@
         <p:spPr>
           <a:xfrm>
             <a:off x="0" y="0"/>
-            <a:ext cx="12960" cy="6852600"/>
+            <a:ext cx="12600" cy="6852240"/>
           </a:xfrm>
           <a:prstGeom prst="rect">
             <a:avLst/>
@@ -8157,7 +8158,7 @@
         <p:spPr>
           <a:xfrm>
             <a:off x="914400" y="0"/>
-            <a:ext cx="12960" cy="6852600"/>
+            <a:ext cx="12600" cy="6852240"/>
           </a:xfrm>
           <a:prstGeom prst="rect">
             <a:avLst/>
@@ -8217,7 +8218,7 @@
         <p:spPr>
           <a:xfrm>
             <a:off x="1828800" y="0"/>
-            <a:ext cx="12960" cy="6852600"/>
+            <a:ext cx="12600" cy="6852240"/>
           </a:xfrm>
           <a:prstGeom prst="rect">
             <a:avLst/>
@@ -8277,7 +8278,7 @@
         <p:spPr>
           <a:xfrm>
             <a:off x="2743200" y="0"/>
-            <a:ext cx="12960" cy="6852600"/>
+            <a:ext cx="12600" cy="6852240"/>
           </a:xfrm>
           <a:prstGeom prst="rect">
             <a:avLst/>
@@ -8337,7 +8338,7 @@
         <p:spPr>
           <a:xfrm>
             <a:off x="3657600" y="0"/>
-            <a:ext cx="12960" cy="6852600"/>
+            <a:ext cx="12600" cy="6852240"/>
           </a:xfrm>
           <a:prstGeom prst="rect">
             <a:avLst/>
@@ -8397,7 +8398,7 @@
         <p:spPr>
           <a:xfrm>
             <a:off x="4572000" y="0"/>
-            <a:ext cx="12960" cy="6852600"/>
+            <a:ext cx="12600" cy="6852240"/>
           </a:xfrm>
           <a:prstGeom prst="rect">
             <a:avLst/>
@@ -8457,7 +8458,7 @@
         <p:spPr>
           <a:xfrm>
             <a:off x="5486400" y="0"/>
-            <a:ext cx="12960" cy="6852600"/>
+            <a:ext cx="12600" cy="6852240"/>
           </a:xfrm>
           <a:prstGeom prst="rect">
             <a:avLst/>
@@ -8517,7 +8518,7 @@
         <p:spPr>
           <a:xfrm>
             <a:off x="6400800" y="0"/>
-            <a:ext cx="12960" cy="6852600"/>
+            <a:ext cx="12600" cy="6852240"/>
           </a:xfrm>
           <a:prstGeom prst="rect">
             <a:avLst/>
@@ -8577,7 +8578,7 @@
         <p:spPr>
           <a:xfrm>
             <a:off x="7315200" y="0"/>
-            <a:ext cx="12960" cy="6852600"/>
+            <a:ext cx="12600" cy="6852240"/>
           </a:xfrm>
           <a:prstGeom prst="rect">
             <a:avLst/>
@@ -8637,7 +8638,7 @@
         <p:spPr>
           <a:xfrm>
             <a:off x="8229600" y="0"/>
-            <a:ext cx="12960" cy="6852600"/>
+            <a:ext cx="12600" cy="6852240"/>
           </a:xfrm>
           <a:prstGeom prst="rect">
             <a:avLst/>
@@ -8697,7 +8698,7 @@
         <p:spPr>
           <a:xfrm>
             <a:off x="9144000" y="0"/>
-            <a:ext cx="12960" cy="6852600"/>
+            <a:ext cx="12600" cy="6852240"/>
           </a:xfrm>
           <a:prstGeom prst="rect">
             <a:avLst/>
@@ -8757,7 +8758,7 @@
         <p:spPr>
           <a:xfrm>
             <a:off x="10058400" y="0"/>
-            <a:ext cx="12960" cy="6852600"/>
+            <a:ext cx="12600" cy="6852240"/>
           </a:xfrm>
           <a:prstGeom prst="rect">
             <a:avLst/>
@@ -8817,7 +8818,7 @@
         <p:spPr>
           <a:xfrm>
             <a:off x="10972800" y="0"/>
-            <a:ext cx="12960" cy="6852600"/>
+            <a:ext cx="12600" cy="6852240"/>
           </a:xfrm>
           <a:prstGeom prst="rect">
             <a:avLst/>
@@ -8877,7 +8878,7 @@
         <p:spPr>
           <a:xfrm>
             <a:off x="11887200" y="0"/>
-            <a:ext cx="12960" cy="6852600"/>
+            <a:ext cx="12600" cy="6852240"/>
           </a:xfrm>
           <a:prstGeom prst="rect">
             <a:avLst/>
@@ -8937,7 +8938,7 @@
         <p:spPr>
           <a:xfrm>
             <a:off x="0" y="0"/>
-            <a:ext cx="314640" cy="6852600"/>
+            <a:ext cx="314280" cy="6852240"/>
           </a:xfrm>
           <a:prstGeom prst="rect">
             <a:avLst/>
@@ -8997,7 +8998,7 @@
         <p:spPr>
           <a:xfrm>
             <a:off x="9875520" y="365760"/>
-            <a:ext cx="2006280" cy="497520"/>
+            <a:ext cx="2005920" cy="497160"/>
           </a:xfrm>
           <a:prstGeom prst="roundRect">
             <a:avLst>
@@ -9071,7 +9072,7 @@
         <p:spPr>
           <a:xfrm>
             <a:off x="1221120" y="914400"/>
-            <a:ext cx="8525880" cy="516240"/>
+            <a:ext cx="8525520" cy="516240"/>
           </a:xfrm>
           <a:prstGeom prst="rect">
             <a:avLst/>
@@ -9125,7 +9126,7 @@
         <p:spPr>
           <a:xfrm>
             <a:off x="1353600" y="1694880"/>
-            <a:ext cx="8861040" cy="819720"/>
+            <a:ext cx="8860680" cy="819720"/>
           </a:xfrm>
           <a:prstGeom prst="rect">
             <a:avLst/>
@@ -9225,7 +9226,7 @@
         <p:spPr>
           <a:xfrm>
             <a:off x="987480" y="3182040"/>
-            <a:ext cx="3286440" cy="2737800"/>
+            <a:ext cx="3286080" cy="2737440"/>
           </a:xfrm>
           <a:prstGeom prst="roundRect">
             <a:avLst>
@@ -9287,7 +9288,7 @@
         <p:spPr>
           <a:xfrm>
             <a:off x="685800" y="2743200"/>
-            <a:ext cx="3515040" cy="3655440"/>
+            <a:ext cx="3514680" cy="3655080"/>
           </a:xfrm>
           <a:prstGeom prst="roundRect">
             <a:avLst>
@@ -9565,7 +9566,7 @@
         <p:spPr>
           <a:xfrm>
             <a:off x="4507920" y="3182040"/>
-            <a:ext cx="3286440" cy="2737800"/>
+            <a:ext cx="3286080" cy="2737440"/>
           </a:xfrm>
           <a:prstGeom prst="roundRect">
             <a:avLst>
@@ -9627,7 +9628,7 @@
         <p:spPr>
           <a:xfrm>
             <a:off x="4434840" y="2971800"/>
-            <a:ext cx="3286440" cy="3426840"/>
+            <a:ext cx="3286080" cy="3426480"/>
           </a:xfrm>
           <a:prstGeom prst="roundRect">
             <a:avLst>
@@ -9958,7 +9959,7 @@
         <p:spPr>
           <a:xfrm>
             <a:off x="8028360" y="3182040"/>
-            <a:ext cx="3286440" cy="2737800"/>
+            <a:ext cx="3286080" cy="2737440"/>
           </a:xfrm>
           <a:prstGeom prst="roundRect">
             <a:avLst>
@@ -10020,7 +10021,7 @@
         <p:spPr>
           <a:xfrm>
             <a:off x="8001000" y="2971800"/>
-            <a:ext cx="3313800" cy="3428280"/>
+            <a:ext cx="3313440" cy="3427920"/>
           </a:xfrm>
           <a:prstGeom prst="roundRect">
             <a:avLst>
@@ -10762,7 +10763,7 @@
         <p:spPr>
           <a:xfrm>
             <a:off x="0" y="0"/>
-            <a:ext cx="12183480" cy="6852600"/>
+            <a:ext cx="12183120" cy="6852240"/>
           </a:xfrm>
           <a:prstGeom prst="rect">
             <a:avLst/>
@@ -10822,7 +10823,7 @@
         <p:spPr>
           <a:xfrm>
             <a:off x="0" y="0"/>
-            <a:ext cx="12960" cy="6852600"/>
+            <a:ext cx="12600" cy="6852240"/>
           </a:xfrm>
           <a:prstGeom prst="rect">
             <a:avLst/>
@@ -10882,7 +10883,7 @@
         <p:spPr>
           <a:xfrm>
             <a:off x="914400" y="0"/>
-            <a:ext cx="12960" cy="6852600"/>
+            <a:ext cx="12600" cy="6852240"/>
           </a:xfrm>
           <a:prstGeom prst="rect">
             <a:avLst/>
@@ -10942,7 +10943,7 @@
         <p:spPr>
           <a:xfrm>
             <a:off x="1828800" y="0"/>
-            <a:ext cx="12960" cy="6852600"/>
+            <a:ext cx="12600" cy="6852240"/>
           </a:xfrm>
           <a:prstGeom prst="rect">
             <a:avLst/>
@@ -11002,7 +11003,7 @@
         <p:spPr>
           <a:xfrm>
             <a:off x="2743200" y="0"/>
-            <a:ext cx="12960" cy="6852600"/>
+            <a:ext cx="12600" cy="6852240"/>
           </a:xfrm>
           <a:prstGeom prst="rect">
             <a:avLst/>
@@ -11062,7 +11063,7 @@
         <p:spPr>
           <a:xfrm>
             <a:off x="3657600" y="0"/>
-            <a:ext cx="12960" cy="6852600"/>
+            <a:ext cx="12600" cy="6852240"/>
           </a:xfrm>
           <a:prstGeom prst="rect">
             <a:avLst/>
@@ -11122,7 +11123,7 @@
         <p:spPr>
           <a:xfrm>
             <a:off x="4572000" y="0"/>
-            <a:ext cx="12960" cy="6852600"/>
+            <a:ext cx="12600" cy="6852240"/>
           </a:xfrm>
           <a:prstGeom prst="rect">
             <a:avLst/>
@@ -11182,7 +11183,7 @@
         <p:spPr>
           <a:xfrm>
             <a:off x="5486400" y="0"/>
-            <a:ext cx="12960" cy="6852600"/>
+            <a:ext cx="12600" cy="6852240"/>
           </a:xfrm>
           <a:prstGeom prst="rect">
             <a:avLst/>
@@ -11242,7 +11243,7 @@
         <p:spPr>
           <a:xfrm>
             <a:off x="6400800" y="0"/>
-            <a:ext cx="12960" cy="6852600"/>
+            <a:ext cx="12600" cy="6852240"/>
           </a:xfrm>
           <a:prstGeom prst="rect">
             <a:avLst/>
@@ -11302,7 +11303,7 @@
         <p:spPr>
           <a:xfrm>
             <a:off x="7315200" y="0"/>
-            <a:ext cx="12960" cy="6852600"/>
+            <a:ext cx="12600" cy="6852240"/>
           </a:xfrm>
           <a:prstGeom prst="rect">
             <a:avLst/>
@@ -11362,7 +11363,7 @@
         <p:spPr>
           <a:xfrm>
             <a:off x="8229600" y="0"/>
-            <a:ext cx="12960" cy="6852600"/>
+            <a:ext cx="12600" cy="6852240"/>
           </a:xfrm>
           <a:prstGeom prst="rect">
             <a:avLst/>
@@ -11422,7 +11423,7 @@
         <p:spPr>
           <a:xfrm>
             <a:off x="9144000" y="0"/>
-            <a:ext cx="12960" cy="6852600"/>
+            <a:ext cx="12600" cy="6852240"/>
           </a:xfrm>
           <a:prstGeom prst="rect">
             <a:avLst/>
@@ -11482,7 +11483,7 @@
         <p:spPr>
           <a:xfrm>
             <a:off x="10058400" y="0"/>
-            <a:ext cx="12960" cy="6852600"/>
+            <a:ext cx="12600" cy="6852240"/>
           </a:xfrm>
           <a:prstGeom prst="rect">
             <a:avLst/>
@@ -11542,7 +11543,7 @@
         <p:spPr>
           <a:xfrm>
             <a:off x="10972800" y="0"/>
-            <a:ext cx="12960" cy="6852600"/>
+            <a:ext cx="12600" cy="6852240"/>
           </a:xfrm>
           <a:prstGeom prst="rect">
             <a:avLst/>
@@ -11602,7 +11603,7 @@
         <p:spPr>
           <a:xfrm>
             <a:off x="11887200" y="0"/>
-            <a:ext cx="12960" cy="6852600"/>
+            <a:ext cx="12600" cy="6852240"/>
           </a:xfrm>
           <a:prstGeom prst="rect">
             <a:avLst/>
@@ -11662,7 +11663,7 @@
         <p:spPr>
           <a:xfrm>
             <a:off x="0" y="0"/>
-            <a:ext cx="314640" cy="6852600"/>
+            <a:ext cx="314280" cy="6852240"/>
           </a:xfrm>
           <a:prstGeom prst="rect">
             <a:avLst/>
@@ -11722,7 +11723,7 @@
         <p:spPr>
           <a:xfrm>
             <a:off x="9875520" y="365760"/>
-            <a:ext cx="2006280" cy="497520"/>
+            <a:ext cx="2005920" cy="497160"/>
           </a:xfrm>
           <a:prstGeom prst="roundRect">
             <a:avLst>
@@ -11796,7 +11797,7 @@
         <p:spPr>
           <a:xfrm>
             <a:off x="2731320" y="914400"/>
-            <a:ext cx="5505480" cy="516240"/>
+            <a:ext cx="5505120" cy="516240"/>
           </a:xfrm>
           <a:prstGeom prst="rect">
             <a:avLst/>
@@ -11850,7 +11851,7 @@
         <p:spPr>
           <a:xfrm>
             <a:off x="674280" y="1694880"/>
-            <a:ext cx="10219320" cy="576360"/>
+            <a:ext cx="10218960" cy="576360"/>
           </a:xfrm>
           <a:prstGeom prst="rect">
             <a:avLst/>
@@ -11927,7 +11928,7 @@
         <p:spPr>
           <a:xfrm>
             <a:off x="987480" y="3182040"/>
-            <a:ext cx="3286440" cy="2737800"/>
+            <a:ext cx="3286080" cy="2737440"/>
           </a:xfrm>
           <a:prstGeom prst="roundRect">
             <a:avLst>
@@ -11989,7 +11990,7 @@
         <p:spPr>
           <a:xfrm>
             <a:off x="685800" y="2743200"/>
-            <a:ext cx="3515040" cy="3655440"/>
+            <a:ext cx="3514680" cy="3655080"/>
           </a:xfrm>
           <a:prstGeom prst="roundRect">
             <a:avLst>
@@ -12211,7 +12212,7 @@
         <p:spPr>
           <a:xfrm>
             <a:off x="4507920" y="3182040"/>
-            <a:ext cx="3286440" cy="2737800"/>
+            <a:ext cx="3286080" cy="2737440"/>
           </a:xfrm>
           <a:prstGeom prst="roundRect">
             <a:avLst>
@@ -12273,7 +12274,7 @@
         <p:spPr>
           <a:xfrm>
             <a:off x="4434840" y="2971800"/>
-            <a:ext cx="3286440" cy="3426840"/>
+            <a:ext cx="3286080" cy="3426480"/>
           </a:xfrm>
           <a:prstGeom prst="roundRect">
             <a:avLst>
@@ -12690,7 +12691,7 @@
         <p:spPr>
           <a:xfrm>
             <a:off x="8028360" y="3182040"/>
-            <a:ext cx="3286440" cy="2737800"/>
+            <a:ext cx="3286080" cy="2737440"/>
           </a:xfrm>
           <a:prstGeom prst="roundRect">
             <a:avLst>
@@ -12752,7 +12753,7 @@
         <p:spPr>
           <a:xfrm>
             <a:off x="8001000" y="2514600"/>
-            <a:ext cx="3657240" cy="3885480"/>
+            <a:ext cx="3656880" cy="3885120"/>
           </a:xfrm>
           <a:prstGeom prst="roundRect">
             <a:avLst>
@@ -13589,7 +13590,7 @@
         <p:spPr>
           <a:xfrm>
             <a:off x="0" y="0"/>
-            <a:ext cx="12183480" cy="6852600"/>
+            <a:ext cx="12183120" cy="6852240"/>
           </a:xfrm>
           <a:prstGeom prst="rect">
             <a:avLst/>
@@ -13625,6 +13626,11 @@
             <a:noAutofit/>
           </a:bodyPr>
           <a:p>
+            <a:pPr>
+              <a:lnSpc>
+                <a:spcPct val="100000"/>
+              </a:lnSpc>
+            </a:pPr>
             <a:endParaRPr b="0" lang="en-US" sz="1800" spc="-1" strike="noStrike">
               <a:solidFill>
                 <a:schemeClr val="lt1"/>
@@ -13644,7 +13650,7 @@
         <p:spPr>
           <a:xfrm>
             <a:off x="0" y="0"/>
-            <a:ext cx="12960" cy="6852600"/>
+            <a:ext cx="12600" cy="6852240"/>
           </a:xfrm>
           <a:prstGeom prst="rect">
             <a:avLst/>
@@ -13680,6 +13686,11 @@
             <a:noAutofit/>
           </a:bodyPr>
           <a:p>
+            <a:pPr>
+              <a:lnSpc>
+                <a:spcPct val="100000"/>
+              </a:lnSpc>
+            </a:pPr>
             <a:endParaRPr b="0" lang="en-US" sz="1800" spc="-1" strike="noStrike">
               <a:solidFill>
                 <a:schemeClr val="lt1"/>
@@ -13699,7 +13710,7 @@
         <p:spPr>
           <a:xfrm>
             <a:off x="914400" y="0"/>
-            <a:ext cx="12960" cy="6852600"/>
+            <a:ext cx="12600" cy="6852240"/>
           </a:xfrm>
           <a:prstGeom prst="rect">
             <a:avLst/>
@@ -13735,6 +13746,11 @@
             <a:noAutofit/>
           </a:bodyPr>
           <a:p>
+            <a:pPr>
+              <a:lnSpc>
+                <a:spcPct val="100000"/>
+              </a:lnSpc>
+            </a:pPr>
             <a:endParaRPr b="0" lang="en-US" sz="1800" spc="-1" strike="noStrike">
               <a:solidFill>
                 <a:schemeClr val="lt1"/>
@@ -13754,7 +13770,7 @@
         <p:spPr>
           <a:xfrm>
             <a:off x="1828800" y="0"/>
-            <a:ext cx="12960" cy="6852600"/>
+            <a:ext cx="12600" cy="6852240"/>
           </a:xfrm>
           <a:prstGeom prst="rect">
             <a:avLst/>
@@ -13790,6 +13806,11 @@
             <a:noAutofit/>
           </a:bodyPr>
           <a:p>
+            <a:pPr>
+              <a:lnSpc>
+                <a:spcPct val="100000"/>
+              </a:lnSpc>
+            </a:pPr>
             <a:endParaRPr b="0" lang="en-US" sz="1800" spc="-1" strike="noStrike">
               <a:solidFill>
                 <a:schemeClr val="lt1"/>
@@ -13809,7 +13830,7 @@
         <p:spPr>
           <a:xfrm>
             <a:off x="2743200" y="0"/>
-            <a:ext cx="12960" cy="6852600"/>
+            <a:ext cx="12600" cy="6852240"/>
           </a:xfrm>
           <a:prstGeom prst="rect">
             <a:avLst/>
@@ -13845,6 +13866,11 @@
             <a:noAutofit/>
           </a:bodyPr>
           <a:p>
+            <a:pPr>
+              <a:lnSpc>
+                <a:spcPct val="100000"/>
+              </a:lnSpc>
+            </a:pPr>
             <a:endParaRPr b="0" lang="en-US" sz="1800" spc="-1" strike="noStrike">
               <a:solidFill>
                 <a:schemeClr val="lt1"/>
@@ -13864,7 +13890,7 @@
         <p:spPr>
           <a:xfrm>
             <a:off x="3657600" y="0"/>
-            <a:ext cx="12960" cy="6852600"/>
+            <a:ext cx="12600" cy="6852240"/>
           </a:xfrm>
           <a:prstGeom prst="rect">
             <a:avLst/>
@@ -13900,6 +13926,11 @@
             <a:noAutofit/>
           </a:bodyPr>
           <a:p>
+            <a:pPr>
+              <a:lnSpc>
+                <a:spcPct val="100000"/>
+              </a:lnSpc>
+            </a:pPr>
             <a:endParaRPr b="0" lang="en-US" sz="1800" spc="-1" strike="noStrike">
               <a:solidFill>
                 <a:schemeClr val="lt1"/>
@@ -13919,7 +13950,7 @@
         <p:spPr>
           <a:xfrm>
             <a:off x="4572000" y="0"/>
-            <a:ext cx="12960" cy="6852600"/>
+            <a:ext cx="12600" cy="6852240"/>
           </a:xfrm>
           <a:prstGeom prst="rect">
             <a:avLst/>
@@ -13955,6 +13986,11 @@
             <a:noAutofit/>
           </a:bodyPr>
           <a:p>
+            <a:pPr>
+              <a:lnSpc>
+                <a:spcPct val="100000"/>
+              </a:lnSpc>
+            </a:pPr>
             <a:endParaRPr b="0" lang="en-US" sz="1800" spc="-1" strike="noStrike">
               <a:solidFill>
                 <a:schemeClr val="lt1"/>
@@ -13974,7 +14010,7 @@
         <p:spPr>
           <a:xfrm>
             <a:off x="5486400" y="0"/>
-            <a:ext cx="12960" cy="6852600"/>
+            <a:ext cx="12600" cy="6852240"/>
           </a:xfrm>
           <a:prstGeom prst="rect">
             <a:avLst/>
@@ -14010,6 +14046,11 @@
             <a:noAutofit/>
           </a:bodyPr>
           <a:p>
+            <a:pPr>
+              <a:lnSpc>
+                <a:spcPct val="100000"/>
+              </a:lnSpc>
+            </a:pPr>
             <a:endParaRPr b="0" lang="en-US" sz="1800" spc="-1" strike="noStrike">
               <a:solidFill>
                 <a:schemeClr val="lt1"/>
@@ -14029,7 +14070,7 @@
         <p:spPr>
           <a:xfrm>
             <a:off x="6400800" y="0"/>
-            <a:ext cx="12960" cy="6852600"/>
+            <a:ext cx="12600" cy="6852240"/>
           </a:xfrm>
           <a:prstGeom prst="rect">
             <a:avLst/>
@@ -14065,6 +14106,11 @@
             <a:noAutofit/>
           </a:bodyPr>
           <a:p>
+            <a:pPr>
+              <a:lnSpc>
+                <a:spcPct val="100000"/>
+              </a:lnSpc>
+            </a:pPr>
             <a:endParaRPr b="0" lang="en-US" sz="1800" spc="-1" strike="noStrike">
               <a:solidFill>
                 <a:schemeClr val="lt1"/>
@@ -14084,7 +14130,7 @@
         <p:spPr>
           <a:xfrm>
             <a:off x="7315200" y="0"/>
-            <a:ext cx="12960" cy="6852600"/>
+            <a:ext cx="12600" cy="6852240"/>
           </a:xfrm>
           <a:prstGeom prst="rect">
             <a:avLst/>
@@ -14120,6 +14166,11 @@
             <a:noAutofit/>
           </a:bodyPr>
           <a:p>
+            <a:pPr>
+              <a:lnSpc>
+                <a:spcPct val="100000"/>
+              </a:lnSpc>
+            </a:pPr>
             <a:endParaRPr b="0" lang="en-US" sz="1800" spc="-1" strike="noStrike">
               <a:solidFill>
                 <a:schemeClr val="lt1"/>
@@ -14139,7 +14190,7 @@
         <p:spPr>
           <a:xfrm>
             <a:off x="8229600" y="0"/>
-            <a:ext cx="12960" cy="6852600"/>
+            <a:ext cx="12600" cy="6852240"/>
           </a:xfrm>
           <a:prstGeom prst="rect">
             <a:avLst/>
@@ -14175,6 +14226,11 @@
             <a:noAutofit/>
           </a:bodyPr>
           <a:p>
+            <a:pPr>
+              <a:lnSpc>
+                <a:spcPct val="100000"/>
+              </a:lnSpc>
+            </a:pPr>
             <a:endParaRPr b="0" lang="en-US" sz="1800" spc="-1" strike="noStrike">
               <a:solidFill>
                 <a:schemeClr val="lt1"/>
@@ -14194,7 +14250,7 @@
         <p:spPr>
           <a:xfrm>
             <a:off x="9144000" y="0"/>
-            <a:ext cx="12960" cy="6852600"/>
+            <a:ext cx="12600" cy="6852240"/>
           </a:xfrm>
           <a:prstGeom prst="rect">
             <a:avLst/>
@@ -14230,6 +14286,11 @@
             <a:noAutofit/>
           </a:bodyPr>
           <a:p>
+            <a:pPr>
+              <a:lnSpc>
+                <a:spcPct val="100000"/>
+              </a:lnSpc>
+            </a:pPr>
             <a:endParaRPr b="0" lang="en-US" sz="1800" spc="-1" strike="noStrike">
               <a:solidFill>
                 <a:schemeClr val="lt1"/>
@@ -14249,7 +14310,7 @@
         <p:spPr>
           <a:xfrm>
             <a:off x="10058400" y="0"/>
-            <a:ext cx="12960" cy="6852600"/>
+            <a:ext cx="12600" cy="6852240"/>
           </a:xfrm>
           <a:prstGeom prst="rect">
             <a:avLst/>
@@ -14285,6 +14346,11 @@
             <a:noAutofit/>
           </a:bodyPr>
           <a:p>
+            <a:pPr>
+              <a:lnSpc>
+                <a:spcPct val="100000"/>
+              </a:lnSpc>
+            </a:pPr>
             <a:endParaRPr b="0" lang="en-US" sz="1800" spc="-1" strike="noStrike">
               <a:solidFill>
                 <a:schemeClr val="lt1"/>
@@ -14304,7 +14370,7 @@
         <p:spPr>
           <a:xfrm>
             <a:off x="10972800" y="0"/>
-            <a:ext cx="12960" cy="6852600"/>
+            <a:ext cx="12600" cy="6852240"/>
           </a:xfrm>
           <a:prstGeom prst="rect">
             <a:avLst/>
@@ -14340,6 +14406,11 @@
             <a:noAutofit/>
           </a:bodyPr>
           <a:p>
+            <a:pPr>
+              <a:lnSpc>
+                <a:spcPct val="100000"/>
+              </a:lnSpc>
+            </a:pPr>
             <a:endParaRPr b="0" lang="en-US" sz="1800" spc="-1" strike="noStrike">
               <a:solidFill>
                 <a:schemeClr val="lt1"/>
@@ -14359,7 +14430,7 @@
         <p:spPr>
           <a:xfrm>
             <a:off x="11887200" y="0"/>
-            <a:ext cx="12960" cy="6852600"/>
+            <a:ext cx="12600" cy="6852240"/>
           </a:xfrm>
           <a:prstGeom prst="rect">
             <a:avLst/>
@@ -14395,6 +14466,11 @@
             <a:noAutofit/>
           </a:bodyPr>
           <a:p>
+            <a:pPr>
+              <a:lnSpc>
+                <a:spcPct val="100000"/>
+              </a:lnSpc>
+            </a:pPr>
             <a:endParaRPr b="0" lang="en-US" sz="1800" spc="-1" strike="noStrike">
               <a:solidFill>
                 <a:schemeClr val="lt1"/>
@@ -14414,7 +14490,7 @@
         <p:spPr>
           <a:xfrm>
             <a:off x="0" y="0"/>
-            <a:ext cx="314640" cy="6852600"/>
+            <a:ext cx="314280" cy="6852240"/>
           </a:xfrm>
           <a:prstGeom prst="rect">
             <a:avLst/>
@@ -14450,6 +14526,11 @@
             <a:noAutofit/>
           </a:bodyPr>
           <a:p>
+            <a:pPr>
+              <a:lnSpc>
+                <a:spcPct val="100000"/>
+              </a:lnSpc>
+            </a:pPr>
             <a:endParaRPr b="0" lang="en-US" sz="1800" spc="-1" strike="noStrike">
               <a:solidFill>
                 <a:schemeClr val="lt1"/>
@@ -14469,7 +14550,7 @@
         <p:spPr>
           <a:xfrm>
             <a:off x="9875520" y="365760"/>
-            <a:ext cx="2006280" cy="497520"/>
+            <a:ext cx="2005920" cy="497160"/>
           </a:xfrm>
           <a:prstGeom prst="roundRect">
             <a:avLst>
@@ -14543,7 +14624,7 @@
         <p:spPr>
           <a:xfrm>
             <a:off x="1557360" y="732600"/>
-            <a:ext cx="7853040" cy="639000"/>
+            <a:ext cx="7852680" cy="638280"/>
           </a:xfrm>
           <a:prstGeom prst="rect">
             <a:avLst/>
@@ -14597,7 +14678,7 @@
         <p:spPr>
           <a:xfrm>
             <a:off x="1082520" y="1600200"/>
-            <a:ext cx="9402840" cy="819720"/>
+            <a:ext cx="9402480" cy="819720"/>
           </a:xfrm>
           <a:prstGeom prst="rect">
             <a:avLst/>
@@ -14697,7 +14778,7 @@
         <p:spPr>
           <a:xfrm>
             <a:off x="987480" y="3182040"/>
-            <a:ext cx="3286440" cy="2737800"/>
+            <a:ext cx="3286080" cy="2737440"/>
           </a:xfrm>
           <a:prstGeom prst="roundRect">
             <a:avLst>
@@ -14735,6 +14816,11 @@
             <a:noAutofit/>
           </a:bodyPr>
           <a:p>
+            <a:pPr>
+              <a:lnSpc>
+                <a:spcPct val="100000"/>
+              </a:lnSpc>
+            </a:pPr>
             <a:endParaRPr b="0" lang="en-US" sz="1800" spc="-1" strike="noStrike">
               <a:solidFill>
                 <a:schemeClr val="lt1"/>
@@ -14754,7 +14840,7 @@
         <p:spPr>
           <a:xfrm>
             <a:off x="685800" y="2971800"/>
-            <a:ext cx="3200400" cy="3429000"/>
+            <a:ext cx="3200040" cy="3428640"/>
           </a:xfrm>
           <a:prstGeom prst="roundRect">
             <a:avLst>
@@ -14980,7 +15066,7 @@
         <p:spPr>
           <a:xfrm>
             <a:off x="4507920" y="3182040"/>
-            <a:ext cx="3286440" cy="2737800"/>
+            <a:ext cx="3286080" cy="2737440"/>
           </a:xfrm>
           <a:prstGeom prst="roundRect">
             <a:avLst>
@@ -15018,6 +15104,11 @@
             <a:noAutofit/>
           </a:bodyPr>
           <a:p>
+            <a:pPr>
+              <a:lnSpc>
+                <a:spcPct val="100000"/>
+              </a:lnSpc>
+            </a:pPr>
             <a:endParaRPr b="0" lang="en-US" sz="1800" spc="-1" strike="noStrike">
               <a:solidFill>
                 <a:schemeClr val="lt1"/>
@@ -15037,7 +15128,7 @@
         <p:spPr>
           <a:xfrm>
             <a:off x="4257360" y="2971800"/>
-            <a:ext cx="3286440" cy="3426840"/>
+            <a:ext cx="3286080" cy="3426480"/>
           </a:xfrm>
           <a:prstGeom prst="roundRect">
             <a:avLst>
@@ -15533,7 +15624,7 @@
         <p:spPr>
           <a:xfrm>
             <a:off x="8028360" y="3182040"/>
-            <a:ext cx="3286440" cy="2737800"/>
+            <a:ext cx="3286080" cy="2737440"/>
           </a:xfrm>
           <a:prstGeom prst="roundRect">
             <a:avLst>
@@ -15571,6 +15662,11 @@
             <a:noAutofit/>
           </a:bodyPr>
           <a:p>
+            <a:pPr>
+              <a:lnSpc>
+                <a:spcPct val="100000"/>
+              </a:lnSpc>
+            </a:pPr>
             <a:endParaRPr b="0" lang="en-US" sz="1800" spc="-1" strike="noStrike">
               <a:solidFill>
                 <a:schemeClr val="lt1"/>
@@ -15590,7 +15686,7 @@
         <p:spPr>
           <a:xfrm>
             <a:off x="8001000" y="2514600"/>
-            <a:ext cx="3427920" cy="3886200"/>
+            <a:ext cx="3427560" cy="3885840"/>
           </a:xfrm>
           <a:prstGeom prst="roundRect">
             <a:avLst>
@@ -16386,6 +16482,2669 @@
       <p:sp>
         <p:nvSpPr>
           <p:cNvPr id="378" name="TextBox 42"/>
+          <p:cNvSpPr/>
+          <p:nvPr/>
+        </p:nvSpPr>
+        <p:spPr>
+          <a:xfrm>
+            <a:off x="4600080" y="6446520"/>
+            <a:ext cx="3051000" cy="363960"/>
+          </a:xfrm>
+          <a:prstGeom prst="rect">
+            <a:avLst/>
+          </a:prstGeom>
+          <a:noFill/>
+          <a:ln w="0">
+            <a:noFill/>
+          </a:ln>
+        </p:spPr>
+        <p:style>
+          <a:lnRef idx="0"/>
+          <a:fillRef idx="0"/>
+          <a:effectRef idx="0"/>
+          <a:fontRef idx="minor"/>
+        </p:style>
+        <p:txBody>
+          <a:bodyPr wrap="none" lIns="90000" rIns="90000" tIns="45000" bIns="45000" anchor="t">
+            <a:spAutoFit/>
+          </a:bodyPr>
+          <a:p>
+            <a:pPr>
+              <a:lnSpc>
+                <a:spcPct val="100000"/>
+              </a:lnSpc>
+            </a:pPr>
+            <a:r>
+              <a:rPr b="0" lang="en-US" sz="1800" spc="-1" strike="noStrike">
+                <a:solidFill>
+                  <a:srgbClr val="000000"/>
+                </a:solidFill>
+                <a:latin typeface="Calibri"/>
+                <a:ea typeface="DejaVu Sans"/>
+              </a:rPr>
+              <a:t>Java • Ultra Premium Template</a:t>
+            </a:r>
+            <a:endParaRPr b="0" lang="en-US" sz="1800" spc="-1" strike="noStrike">
+              <a:solidFill>
+                <a:srgbClr val="000000"/>
+              </a:solidFill>
+              <a:latin typeface="Arial"/>
+            </a:endParaRPr>
+          </a:p>
+        </p:txBody>
+      </p:sp>
+    </p:spTree>
+  </p:cSld>
+  <mc:AlternateContent>
+    <mc:Choice Requires="p14">
+      <p:transition spd="slow" p14:dur="2000"/>
+    </mc:Choice>
+    <mc:Fallback>
+      <p:transition spd="slow"/>
+    </mc:Fallback>
+  </mc:AlternateContent>
+</p:sld>
+</file>
+
+<file path=ppt/slides/slide14.xml><?xml version="1.0" encoding="utf-8"?>
+<p:sld xmlns:a="http://schemas.openxmlformats.org/drawingml/2006/main" xmlns:p="http://schemas.openxmlformats.org/presentationml/2006/main" xmlns:r="http://schemas.openxmlformats.org/officeDocument/2006/relationships" xmlns:p14="http://schemas.microsoft.com/office/powerpoint/2010/main" xmlns:p15="http://schemas.microsoft.com/office/powerpoint/2012/main" xmlns:mc="http://schemas.openxmlformats.org/markup-compatibility/2006">
+  <p:cSld>
+    <p:spTree>
+      <p:nvGrpSpPr>
+        <p:cNvPr id="1" name=""/>
+        <p:cNvGrpSpPr/>
+        <p:nvPr/>
+      </p:nvGrpSpPr>
+      <p:grpSpPr>
+        <a:xfrm>
+          <a:off x="0" y="0"/>
+          <a:ext cx="0" cy="0"/>
+          <a:chOff x="0" y="0"/>
+          <a:chExt cx="0" cy="0"/>
+        </a:xfrm>
+      </p:grpSpPr>
+      <p:sp>
+        <p:nvSpPr>
+          <p:cNvPr id="379" name="Rectangle 209"/>
+          <p:cNvSpPr/>
+          <p:nvPr/>
+        </p:nvSpPr>
+        <p:spPr>
+          <a:xfrm>
+            <a:off x="0" y="0"/>
+            <a:ext cx="12183120" cy="6852240"/>
+          </a:xfrm>
+          <a:prstGeom prst="rect">
+            <a:avLst/>
+          </a:prstGeom>
+          <a:solidFill>
+            <a:srgbClr val="0b0b0d"/>
+          </a:solidFill>
+          <a:ln>
+            <a:noFill/>
+          </a:ln>
+          <a:effectLst>
+            <a:outerShdw blurRad="39960" dir="5400000" dist="23040" rotWithShape="0">
+              <a:srgbClr val="000000">
+                <a:alpha val="35000"/>
+              </a:srgbClr>
+            </a:outerShdw>
+          </a:effectLst>
+        </p:spPr>
+        <p:style>
+          <a:lnRef idx="1">
+            <a:schemeClr val="accent1"/>
+          </a:lnRef>
+          <a:fillRef idx="3">
+            <a:schemeClr val="accent1"/>
+          </a:fillRef>
+          <a:effectRef idx="2">
+            <a:schemeClr val="accent1"/>
+          </a:effectRef>
+          <a:fontRef idx="minor"/>
+        </p:style>
+        <p:txBody>
+          <a:bodyPr lIns="90000" rIns="90000" tIns="45000" bIns="45000" anchor="ctr">
+            <a:noAutofit/>
+          </a:bodyPr>
+          <a:p>
+            <a:endParaRPr b="0" lang="en-US" sz="1800" spc="-1" strike="noStrike">
+              <a:solidFill>
+                <a:schemeClr val="lt1"/>
+              </a:solidFill>
+              <a:latin typeface="Calibri"/>
+              <a:ea typeface="DejaVu Sans"/>
+            </a:endParaRPr>
+          </a:p>
+        </p:txBody>
+      </p:sp>
+      <p:sp>
+        <p:nvSpPr>
+          <p:cNvPr id="380" name="Rectangle 210"/>
+          <p:cNvSpPr/>
+          <p:nvPr/>
+        </p:nvSpPr>
+        <p:spPr>
+          <a:xfrm>
+            <a:off x="0" y="0"/>
+            <a:ext cx="12600" cy="6852240"/>
+          </a:xfrm>
+          <a:prstGeom prst="rect">
+            <a:avLst/>
+          </a:prstGeom>
+          <a:solidFill>
+            <a:srgbClr val="121216"/>
+          </a:solidFill>
+          <a:ln>
+            <a:noFill/>
+          </a:ln>
+          <a:effectLst>
+            <a:outerShdw blurRad="39960" dir="5400000" dist="23040" rotWithShape="0">
+              <a:srgbClr val="000000">
+                <a:alpha val="35000"/>
+              </a:srgbClr>
+            </a:outerShdw>
+          </a:effectLst>
+        </p:spPr>
+        <p:style>
+          <a:lnRef idx="1">
+            <a:schemeClr val="accent1"/>
+          </a:lnRef>
+          <a:fillRef idx="3">
+            <a:schemeClr val="accent1"/>
+          </a:fillRef>
+          <a:effectRef idx="2">
+            <a:schemeClr val="accent1"/>
+          </a:effectRef>
+          <a:fontRef idx="minor"/>
+        </p:style>
+        <p:txBody>
+          <a:bodyPr lIns="90000" rIns="90000" tIns="45000" bIns="45000" anchor="ctr">
+            <a:noAutofit/>
+          </a:bodyPr>
+          <a:p>
+            <a:endParaRPr b="0" lang="en-US" sz="1800" spc="-1" strike="noStrike">
+              <a:solidFill>
+                <a:schemeClr val="lt1"/>
+              </a:solidFill>
+              <a:latin typeface="Calibri"/>
+              <a:ea typeface="DejaVu Sans"/>
+            </a:endParaRPr>
+          </a:p>
+        </p:txBody>
+      </p:sp>
+      <p:sp>
+        <p:nvSpPr>
+          <p:cNvPr id="381" name="Rectangle 211"/>
+          <p:cNvSpPr/>
+          <p:nvPr/>
+        </p:nvSpPr>
+        <p:spPr>
+          <a:xfrm>
+            <a:off x="914400" y="0"/>
+            <a:ext cx="12600" cy="6852240"/>
+          </a:xfrm>
+          <a:prstGeom prst="rect">
+            <a:avLst/>
+          </a:prstGeom>
+          <a:solidFill>
+            <a:srgbClr val="121216"/>
+          </a:solidFill>
+          <a:ln>
+            <a:noFill/>
+          </a:ln>
+          <a:effectLst>
+            <a:outerShdw blurRad="39960" dir="5400000" dist="23040" rotWithShape="0">
+              <a:srgbClr val="000000">
+                <a:alpha val="35000"/>
+              </a:srgbClr>
+            </a:outerShdw>
+          </a:effectLst>
+        </p:spPr>
+        <p:style>
+          <a:lnRef idx="1">
+            <a:schemeClr val="accent1"/>
+          </a:lnRef>
+          <a:fillRef idx="3">
+            <a:schemeClr val="accent1"/>
+          </a:fillRef>
+          <a:effectRef idx="2">
+            <a:schemeClr val="accent1"/>
+          </a:effectRef>
+          <a:fontRef idx="minor"/>
+        </p:style>
+        <p:txBody>
+          <a:bodyPr lIns="90000" rIns="90000" tIns="45000" bIns="45000" anchor="ctr">
+            <a:noAutofit/>
+          </a:bodyPr>
+          <a:p>
+            <a:endParaRPr b="0" lang="en-US" sz="1800" spc="-1" strike="noStrike">
+              <a:solidFill>
+                <a:schemeClr val="lt1"/>
+              </a:solidFill>
+              <a:latin typeface="Calibri"/>
+              <a:ea typeface="DejaVu Sans"/>
+            </a:endParaRPr>
+          </a:p>
+        </p:txBody>
+      </p:sp>
+      <p:sp>
+        <p:nvSpPr>
+          <p:cNvPr id="382" name="Rectangle 212"/>
+          <p:cNvSpPr/>
+          <p:nvPr/>
+        </p:nvSpPr>
+        <p:spPr>
+          <a:xfrm>
+            <a:off x="1828800" y="0"/>
+            <a:ext cx="12600" cy="6852240"/>
+          </a:xfrm>
+          <a:prstGeom prst="rect">
+            <a:avLst/>
+          </a:prstGeom>
+          <a:solidFill>
+            <a:srgbClr val="121216"/>
+          </a:solidFill>
+          <a:ln>
+            <a:noFill/>
+          </a:ln>
+          <a:effectLst>
+            <a:outerShdw blurRad="39960" dir="5400000" dist="23040" rotWithShape="0">
+              <a:srgbClr val="000000">
+                <a:alpha val="35000"/>
+              </a:srgbClr>
+            </a:outerShdw>
+          </a:effectLst>
+        </p:spPr>
+        <p:style>
+          <a:lnRef idx="1">
+            <a:schemeClr val="accent1"/>
+          </a:lnRef>
+          <a:fillRef idx="3">
+            <a:schemeClr val="accent1"/>
+          </a:fillRef>
+          <a:effectRef idx="2">
+            <a:schemeClr val="accent1"/>
+          </a:effectRef>
+          <a:fontRef idx="minor"/>
+        </p:style>
+        <p:txBody>
+          <a:bodyPr lIns="90000" rIns="90000" tIns="45000" bIns="45000" anchor="ctr">
+            <a:noAutofit/>
+          </a:bodyPr>
+          <a:p>
+            <a:endParaRPr b="0" lang="en-US" sz="1800" spc="-1" strike="noStrike">
+              <a:solidFill>
+                <a:schemeClr val="lt1"/>
+              </a:solidFill>
+              <a:latin typeface="Calibri"/>
+              <a:ea typeface="DejaVu Sans"/>
+            </a:endParaRPr>
+          </a:p>
+        </p:txBody>
+      </p:sp>
+      <p:sp>
+        <p:nvSpPr>
+          <p:cNvPr id="383" name="Rectangle 213"/>
+          <p:cNvSpPr/>
+          <p:nvPr/>
+        </p:nvSpPr>
+        <p:spPr>
+          <a:xfrm>
+            <a:off x="2743200" y="0"/>
+            <a:ext cx="12600" cy="6852240"/>
+          </a:xfrm>
+          <a:prstGeom prst="rect">
+            <a:avLst/>
+          </a:prstGeom>
+          <a:solidFill>
+            <a:srgbClr val="121216"/>
+          </a:solidFill>
+          <a:ln>
+            <a:noFill/>
+          </a:ln>
+          <a:effectLst>
+            <a:outerShdw blurRad="39960" dir="5400000" dist="23040" rotWithShape="0">
+              <a:srgbClr val="000000">
+                <a:alpha val="35000"/>
+              </a:srgbClr>
+            </a:outerShdw>
+          </a:effectLst>
+        </p:spPr>
+        <p:style>
+          <a:lnRef idx="1">
+            <a:schemeClr val="accent1"/>
+          </a:lnRef>
+          <a:fillRef idx="3">
+            <a:schemeClr val="accent1"/>
+          </a:fillRef>
+          <a:effectRef idx="2">
+            <a:schemeClr val="accent1"/>
+          </a:effectRef>
+          <a:fontRef idx="minor"/>
+        </p:style>
+        <p:txBody>
+          <a:bodyPr lIns="90000" rIns="90000" tIns="45000" bIns="45000" anchor="ctr">
+            <a:noAutofit/>
+          </a:bodyPr>
+          <a:p>
+            <a:endParaRPr b="0" lang="en-US" sz="1800" spc="-1" strike="noStrike">
+              <a:solidFill>
+                <a:schemeClr val="lt1"/>
+              </a:solidFill>
+              <a:latin typeface="Calibri"/>
+              <a:ea typeface="DejaVu Sans"/>
+            </a:endParaRPr>
+          </a:p>
+        </p:txBody>
+      </p:sp>
+      <p:sp>
+        <p:nvSpPr>
+          <p:cNvPr id="384" name="Rectangle 214"/>
+          <p:cNvSpPr/>
+          <p:nvPr/>
+        </p:nvSpPr>
+        <p:spPr>
+          <a:xfrm>
+            <a:off x="3657600" y="0"/>
+            <a:ext cx="12600" cy="6852240"/>
+          </a:xfrm>
+          <a:prstGeom prst="rect">
+            <a:avLst/>
+          </a:prstGeom>
+          <a:solidFill>
+            <a:srgbClr val="121216"/>
+          </a:solidFill>
+          <a:ln>
+            <a:noFill/>
+          </a:ln>
+          <a:effectLst>
+            <a:outerShdw blurRad="39960" dir="5400000" dist="23040" rotWithShape="0">
+              <a:srgbClr val="000000">
+                <a:alpha val="35000"/>
+              </a:srgbClr>
+            </a:outerShdw>
+          </a:effectLst>
+        </p:spPr>
+        <p:style>
+          <a:lnRef idx="1">
+            <a:schemeClr val="accent1"/>
+          </a:lnRef>
+          <a:fillRef idx="3">
+            <a:schemeClr val="accent1"/>
+          </a:fillRef>
+          <a:effectRef idx="2">
+            <a:schemeClr val="accent1"/>
+          </a:effectRef>
+          <a:fontRef idx="minor"/>
+        </p:style>
+        <p:txBody>
+          <a:bodyPr lIns="90000" rIns="90000" tIns="45000" bIns="45000" anchor="ctr">
+            <a:noAutofit/>
+          </a:bodyPr>
+          <a:p>
+            <a:endParaRPr b="0" lang="en-US" sz="1800" spc="-1" strike="noStrike">
+              <a:solidFill>
+                <a:schemeClr val="lt1"/>
+              </a:solidFill>
+              <a:latin typeface="Calibri"/>
+              <a:ea typeface="DejaVu Sans"/>
+            </a:endParaRPr>
+          </a:p>
+        </p:txBody>
+      </p:sp>
+      <p:sp>
+        <p:nvSpPr>
+          <p:cNvPr id="385" name="Rectangle 215"/>
+          <p:cNvSpPr/>
+          <p:nvPr/>
+        </p:nvSpPr>
+        <p:spPr>
+          <a:xfrm>
+            <a:off x="4572000" y="0"/>
+            <a:ext cx="12600" cy="6852240"/>
+          </a:xfrm>
+          <a:prstGeom prst="rect">
+            <a:avLst/>
+          </a:prstGeom>
+          <a:solidFill>
+            <a:srgbClr val="121216"/>
+          </a:solidFill>
+          <a:ln>
+            <a:noFill/>
+          </a:ln>
+          <a:effectLst>
+            <a:outerShdw blurRad="39960" dir="5400000" dist="23040" rotWithShape="0">
+              <a:srgbClr val="000000">
+                <a:alpha val="35000"/>
+              </a:srgbClr>
+            </a:outerShdw>
+          </a:effectLst>
+        </p:spPr>
+        <p:style>
+          <a:lnRef idx="1">
+            <a:schemeClr val="accent1"/>
+          </a:lnRef>
+          <a:fillRef idx="3">
+            <a:schemeClr val="accent1"/>
+          </a:fillRef>
+          <a:effectRef idx="2">
+            <a:schemeClr val="accent1"/>
+          </a:effectRef>
+          <a:fontRef idx="minor"/>
+        </p:style>
+        <p:txBody>
+          <a:bodyPr lIns="90000" rIns="90000" tIns="45000" bIns="45000" anchor="ctr">
+            <a:noAutofit/>
+          </a:bodyPr>
+          <a:p>
+            <a:endParaRPr b="0" lang="en-US" sz="1800" spc="-1" strike="noStrike">
+              <a:solidFill>
+                <a:schemeClr val="lt1"/>
+              </a:solidFill>
+              <a:latin typeface="Calibri"/>
+              <a:ea typeface="DejaVu Sans"/>
+            </a:endParaRPr>
+          </a:p>
+        </p:txBody>
+      </p:sp>
+      <p:sp>
+        <p:nvSpPr>
+          <p:cNvPr id="386" name="Rectangle 216"/>
+          <p:cNvSpPr/>
+          <p:nvPr/>
+        </p:nvSpPr>
+        <p:spPr>
+          <a:xfrm>
+            <a:off x="5486400" y="0"/>
+            <a:ext cx="12600" cy="6852240"/>
+          </a:xfrm>
+          <a:prstGeom prst="rect">
+            <a:avLst/>
+          </a:prstGeom>
+          <a:solidFill>
+            <a:srgbClr val="121216"/>
+          </a:solidFill>
+          <a:ln>
+            <a:noFill/>
+          </a:ln>
+          <a:effectLst>
+            <a:outerShdw blurRad="39960" dir="5400000" dist="23040" rotWithShape="0">
+              <a:srgbClr val="000000">
+                <a:alpha val="35000"/>
+              </a:srgbClr>
+            </a:outerShdw>
+          </a:effectLst>
+        </p:spPr>
+        <p:style>
+          <a:lnRef idx="1">
+            <a:schemeClr val="accent1"/>
+          </a:lnRef>
+          <a:fillRef idx="3">
+            <a:schemeClr val="accent1"/>
+          </a:fillRef>
+          <a:effectRef idx="2">
+            <a:schemeClr val="accent1"/>
+          </a:effectRef>
+          <a:fontRef idx="minor"/>
+        </p:style>
+        <p:txBody>
+          <a:bodyPr lIns="90000" rIns="90000" tIns="45000" bIns="45000" anchor="ctr">
+            <a:noAutofit/>
+          </a:bodyPr>
+          <a:p>
+            <a:endParaRPr b="0" lang="en-US" sz="1800" spc="-1" strike="noStrike">
+              <a:solidFill>
+                <a:schemeClr val="lt1"/>
+              </a:solidFill>
+              <a:latin typeface="Calibri"/>
+              <a:ea typeface="DejaVu Sans"/>
+            </a:endParaRPr>
+          </a:p>
+        </p:txBody>
+      </p:sp>
+      <p:sp>
+        <p:nvSpPr>
+          <p:cNvPr id="387" name="Rectangle 217"/>
+          <p:cNvSpPr/>
+          <p:nvPr/>
+        </p:nvSpPr>
+        <p:spPr>
+          <a:xfrm>
+            <a:off x="6400800" y="0"/>
+            <a:ext cx="12600" cy="6852240"/>
+          </a:xfrm>
+          <a:prstGeom prst="rect">
+            <a:avLst/>
+          </a:prstGeom>
+          <a:solidFill>
+            <a:srgbClr val="121216"/>
+          </a:solidFill>
+          <a:ln>
+            <a:noFill/>
+          </a:ln>
+          <a:effectLst>
+            <a:outerShdw blurRad="39960" dir="5400000" dist="23040" rotWithShape="0">
+              <a:srgbClr val="000000">
+                <a:alpha val="35000"/>
+              </a:srgbClr>
+            </a:outerShdw>
+          </a:effectLst>
+        </p:spPr>
+        <p:style>
+          <a:lnRef idx="1">
+            <a:schemeClr val="accent1"/>
+          </a:lnRef>
+          <a:fillRef idx="3">
+            <a:schemeClr val="accent1"/>
+          </a:fillRef>
+          <a:effectRef idx="2">
+            <a:schemeClr val="accent1"/>
+          </a:effectRef>
+          <a:fontRef idx="minor"/>
+        </p:style>
+        <p:txBody>
+          <a:bodyPr lIns="90000" rIns="90000" tIns="45000" bIns="45000" anchor="ctr">
+            <a:noAutofit/>
+          </a:bodyPr>
+          <a:p>
+            <a:endParaRPr b="0" lang="en-US" sz="1800" spc="-1" strike="noStrike">
+              <a:solidFill>
+                <a:schemeClr val="lt1"/>
+              </a:solidFill>
+              <a:latin typeface="Calibri"/>
+              <a:ea typeface="DejaVu Sans"/>
+            </a:endParaRPr>
+          </a:p>
+        </p:txBody>
+      </p:sp>
+      <p:sp>
+        <p:nvSpPr>
+          <p:cNvPr id="388" name="Rectangle 218"/>
+          <p:cNvSpPr/>
+          <p:nvPr/>
+        </p:nvSpPr>
+        <p:spPr>
+          <a:xfrm>
+            <a:off x="7315200" y="0"/>
+            <a:ext cx="12600" cy="6852240"/>
+          </a:xfrm>
+          <a:prstGeom prst="rect">
+            <a:avLst/>
+          </a:prstGeom>
+          <a:solidFill>
+            <a:srgbClr val="121216"/>
+          </a:solidFill>
+          <a:ln>
+            <a:noFill/>
+          </a:ln>
+          <a:effectLst>
+            <a:outerShdw blurRad="39960" dir="5400000" dist="23040" rotWithShape="0">
+              <a:srgbClr val="000000">
+                <a:alpha val="35000"/>
+              </a:srgbClr>
+            </a:outerShdw>
+          </a:effectLst>
+        </p:spPr>
+        <p:style>
+          <a:lnRef idx="1">
+            <a:schemeClr val="accent1"/>
+          </a:lnRef>
+          <a:fillRef idx="3">
+            <a:schemeClr val="accent1"/>
+          </a:fillRef>
+          <a:effectRef idx="2">
+            <a:schemeClr val="accent1"/>
+          </a:effectRef>
+          <a:fontRef idx="minor"/>
+        </p:style>
+        <p:txBody>
+          <a:bodyPr lIns="90000" rIns="90000" tIns="45000" bIns="45000" anchor="ctr">
+            <a:noAutofit/>
+          </a:bodyPr>
+          <a:p>
+            <a:endParaRPr b="0" lang="en-US" sz="1800" spc="-1" strike="noStrike">
+              <a:solidFill>
+                <a:schemeClr val="lt1"/>
+              </a:solidFill>
+              <a:latin typeface="Calibri"/>
+              <a:ea typeface="DejaVu Sans"/>
+            </a:endParaRPr>
+          </a:p>
+        </p:txBody>
+      </p:sp>
+      <p:sp>
+        <p:nvSpPr>
+          <p:cNvPr id="389" name="Rectangle 219"/>
+          <p:cNvSpPr/>
+          <p:nvPr/>
+        </p:nvSpPr>
+        <p:spPr>
+          <a:xfrm>
+            <a:off x="8229600" y="0"/>
+            <a:ext cx="12600" cy="6852240"/>
+          </a:xfrm>
+          <a:prstGeom prst="rect">
+            <a:avLst/>
+          </a:prstGeom>
+          <a:solidFill>
+            <a:srgbClr val="121216"/>
+          </a:solidFill>
+          <a:ln>
+            <a:noFill/>
+          </a:ln>
+          <a:effectLst>
+            <a:outerShdw blurRad="39960" dir="5400000" dist="23040" rotWithShape="0">
+              <a:srgbClr val="000000">
+                <a:alpha val="35000"/>
+              </a:srgbClr>
+            </a:outerShdw>
+          </a:effectLst>
+        </p:spPr>
+        <p:style>
+          <a:lnRef idx="1">
+            <a:schemeClr val="accent1"/>
+          </a:lnRef>
+          <a:fillRef idx="3">
+            <a:schemeClr val="accent1"/>
+          </a:fillRef>
+          <a:effectRef idx="2">
+            <a:schemeClr val="accent1"/>
+          </a:effectRef>
+          <a:fontRef idx="minor"/>
+        </p:style>
+        <p:txBody>
+          <a:bodyPr lIns="90000" rIns="90000" tIns="45000" bIns="45000" anchor="ctr">
+            <a:noAutofit/>
+          </a:bodyPr>
+          <a:p>
+            <a:endParaRPr b="0" lang="en-US" sz="1800" spc="-1" strike="noStrike">
+              <a:solidFill>
+                <a:schemeClr val="lt1"/>
+              </a:solidFill>
+              <a:latin typeface="Calibri"/>
+              <a:ea typeface="DejaVu Sans"/>
+            </a:endParaRPr>
+          </a:p>
+        </p:txBody>
+      </p:sp>
+      <p:sp>
+        <p:nvSpPr>
+          <p:cNvPr id="390" name="Rectangle 220"/>
+          <p:cNvSpPr/>
+          <p:nvPr/>
+        </p:nvSpPr>
+        <p:spPr>
+          <a:xfrm>
+            <a:off x="9144000" y="0"/>
+            <a:ext cx="12600" cy="6852240"/>
+          </a:xfrm>
+          <a:prstGeom prst="rect">
+            <a:avLst/>
+          </a:prstGeom>
+          <a:solidFill>
+            <a:srgbClr val="121216"/>
+          </a:solidFill>
+          <a:ln>
+            <a:noFill/>
+          </a:ln>
+          <a:effectLst>
+            <a:outerShdw blurRad="39960" dir="5400000" dist="23040" rotWithShape="0">
+              <a:srgbClr val="000000">
+                <a:alpha val="35000"/>
+              </a:srgbClr>
+            </a:outerShdw>
+          </a:effectLst>
+        </p:spPr>
+        <p:style>
+          <a:lnRef idx="1">
+            <a:schemeClr val="accent1"/>
+          </a:lnRef>
+          <a:fillRef idx="3">
+            <a:schemeClr val="accent1"/>
+          </a:fillRef>
+          <a:effectRef idx="2">
+            <a:schemeClr val="accent1"/>
+          </a:effectRef>
+          <a:fontRef idx="minor"/>
+        </p:style>
+        <p:txBody>
+          <a:bodyPr lIns="90000" rIns="90000" tIns="45000" bIns="45000" anchor="ctr">
+            <a:noAutofit/>
+          </a:bodyPr>
+          <a:p>
+            <a:endParaRPr b="0" lang="en-US" sz="1800" spc="-1" strike="noStrike">
+              <a:solidFill>
+                <a:schemeClr val="lt1"/>
+              </a:solidFill>
+              <a:latin typeface="Calibri"/>
+              <a:ea typeface="DejaVu Sans"/>
+            </a:endParaRPr>
+          </a:p>
+        </p:txBody>
+      </p:sp>
+      <p:sp>
+        <p:nvSpPr>
+          <p:cNvPr id="391" name="Rectangle 221"/>
+          <p:cNvSpPr/>
+          <p:nvPr/>
+        </p:nvSpPr>
+        <p:spPr>
+          <a:xfrm>
+            <a:off x="10058400" y="0"/>
+            <a:ext cx="12600" cy="6852240"/>
+          </a:xfrm>
+          <a:prstGeom prst="rect">
+            <a:avLst/>
+          </a:prstGeom>
+          <a:solidFill>
+            <a:srgbClr val="121216"/>
+          </a:solidFill>
+          <a:ln>
+            <a:noFill/>
+          </a:ln>
+          <a:effectLst>
+            <a:outerShdw blurRad="39960" dir="5400000" dist="23040" rotWithShape="0">
+              <a:srgbClr val="000000">
+                <a:alpha val="35000"/>
+              </a:srgbClr>
+            </a:outerShdw>
+          </a:effectLst>
+        </p:spPr>
+        <p:style>
+          <a:lnRef idx="1">
+            <a:schemeClr val="accent1"/>
+          </a:lnRef>
+          <a:fillRef idx="3">
+            <a:schemeClr val="accent1"/>
+          </a:fillRef>
+          <a:effectRef idx="2">
+            <a:schemeClr val="accent1"/>
+          </a:effectRef>
+          <a:fontRef idx="minor"/>
+        </p:style>
+        <p:txBody>
+          <a:bodyPr lIns="90000" rIns="90000" tIns="45000" bIns="45000" anchor="ctr">
+            <a:noAutofit/>
+          </a:bodyPr>
+          <a:p>
+            <a:endParaRPr b="0" lang="en-US" sz="1800" spc="-1" strike="noStrike">
+              <a:solidFill>
+                <a:schemeClr val="lt1"/>
+              </a:solidFill>
+              <a:latin typeface="Calibri"/>
+              <a:ea typeface="DejaVu Sans"/>
+            </a:endParaRPr>
+          </a:p>
+        </p:txBody>
+      </p:sp>
+      <p:sp>
+        <p:nvSpPr>
+          <p:cNvPr id="392" name="Rectangle 222"/>
+          <p:cNvSpPr/>
+          <p:nvPr/>
+        </p:nvSpPr>
+        <p:spPr>
+          <a:xfrm>
+            <a:off x="10972800" y="0"/>
+            <a:ext cx="12600" cy="6852240"/>
+          </a:xfrm>
+          <a:prstGeom prst="rect">
+            <a:avLst/>
+          </a:prstGeom>
+          <a:solidFill>
+            <a:srgbClr val="121216"/>
+          </a:solidFill>
+          <a:ln>
+            <a:noFill/>
+          </a:ln>
+          <a:effectLst>
+            <a:outerShdw blurRad="39960" dir="5400000" dist="23040" rotWithShape="0">
+              <a:srgbClr val="000000">
+                <a:alpha val="35000"/>
+              </a:srgbClr>
+            </a:outerShdw>
+          </a:effectLst>
+        </p:spPr>
+        <p:style>
+          <a:lnRef idx="1">
+            <a:schemeClr val="accent1"/>
+          </a:lnRef>
+          <a:fillRef idx="3">
+            <a:schemeClr val="accent1"/>
+          </a:fillRef>
+          <a:effectRef idx="2">
+            <a:schemeClr val="accent1"/>
+          </a:effectRef>
+          <a:fontRef idx="minor"/>
+        </p:style>
+        <p:txBody>
+          <a:bodyPr lIns="90000" rIns="90000" tIns="45000" bIns="45000" anchor="ctr">
+            <a:noAutofit/>
+          </a:bodyPr>
+          <a:p>
+            <a:endParaRPr b="0" lang="en-US" sz="1800" spc="-1" strike="noStrike">
+              <a:solidFill>
+                <a:schemeClr val="lt1"/>
+              </a:solidFill>
+              <a:latin typeface="Calibri"/>
+              <a:ea typeface="DejaVu Sans"/>
+            </a:endParaRPr>
+          </a:p>
+        </p:txBody>
+      </p:sp>
+      <p:sp>
+        <p:nvSpPr>
+          <p:cNvPr id="393" name="Rectangle 223"/>
+          <p:cNvSpPr/>
+          <p:nvPr/>
+        </p:nvSpPr>
+        <p:spPr>
+          <a:xfrm>
+            <a:off x="11887200" y="0"/>
+            <a:ext cx="12600" cy="6852240"/>
+          </a:xfrm>
+          <a:prstGeom prst="rect">
+            <a:avLst/>
+          </a:prstGeom>
+          <a:solidFill>
+            <a:srgbClr val="121216"/>
+          </a:solidFill>
+          <a:ln>
+            <a:noFill/>
+          </a:ln>
+          <a:effectLst>
+            <a:outerShdw blurRad="39960" dir="5400000" dist="23040" rotWithShape="0">
+              <a:srgbClr val="000000">
+                <a:alpha val="35000"/>
+              </a:srgbClr>
+            </a:outerShdw>
+          </a:effectLst>
+        </p:spPr>
+        <p:style>
+          <a:lnRef idx="1">
+            <a:schemeClr val="accent1"/>
+          </a:lnRef>
+          <a:fillRef idx="3">
+            <a:schemeClr val="accent1"/>
+          </a:fillRef>
+          <a:effectRef idx="2">
+            <a:schemeClr val="accent1"/>
+          </a:effectRef>
+          <a:fontRef idx="minor"/>
+        </p:style>
+        <p:txBody>
+          <a:bodyPr lIns="90000" rIns="90000" tIns="45000" bIns="45000" anchor="ctr">
+            <a:noAutofit/>
+          </a:bodyPr>
+          <a:p>
+            <a:endParaRPr b="0" lang="en-US" sz="1800" spc="-1" strike="noStrike">
+              <a:solidFill>
+                <a:schemeClr val="lt1"/>
+              </a:solidFill>
+              <a:latin typeface="Calibri"/>
+              <a:ea typeface="DejaVu Sans"/>
+            </a:endParaRPr>
+          </a:p>
+        </p:txBody>
+      </p:sp>
+      <p:sp>
+        <p:nvSpPr>
+          <p:cNvPr id="394" name="Rectangle 224"/>
+          <p:cNvSpPr/>
+          <p:nvPr/>
+        </p:nvSpPr>
+        <p:spPr>
+          <a:xfrm>
+            <a:off x="0" y="0"/>
+            <a:ext cx="314280" cy="6852240"/>
+          </a:xfrm>
+          <a:prstGeom prst="rect">
+            <a:avLst/>
+          </a:prstGeom>
+          <a:solidFill>
+            <a:srgbClr val="ff8c00"/>
+          </a:solidFill>
+          <a:ln>
+            <a:noFill/>
+          </a:ln>
+          <a:effectLst>
+            <a:outerShdw blurRad="39960" dir="5400000" dist="23040" rotWithShape="0">
+              <a:srgbClr val="000000">
+                <a:alpha val="35000"/>
+              </a:srgbClr>
+            </a:outerShdw>
+          </a:effectLst>
+        </p:spPr>
+        <p:style>
+          <a:lnRef idx="1">
+            <a:schemeClr val="accent1"/>
+          </a:lnRef>
+          <a:fillRef idx="3">
+            <a:schemeClr val="accent1"/>
+          </a:fillRef>
+          <a:effectRef idx="2">
+            <a:schemeClr val="accent1"/>
+          </a:effectRef>
+          <a:fontRef idx="minor"/>
+        </p:style>
+        <p:txBody>
+          <a:bodyPr lIns="90000" rIns="90000" tIns="45000" bIns="45000" anchor="ctr">
+            <a:noAutofit/>
+          </a:bodyPr>
+          <a:p>
+            <a:endParaRPr b="0" lang="en-US" sz="1800" spc="-1" strike="noStrike">
+              <a:solidFill>
+                <a:schemeClr val="lt1"/>
+              </a:solidFill>
+              <a:latin typeface="Calibri"/>
+              <a:ea typeface="DejaVu Sans"/>
+            </a:endParaRPr>
+          </a:p>
+        </p:txBody>
+      </p:sp>
+      <p:sp>
+        <p:nvSpPr>
+          <p:cNvPr id="395" name="Rounded Rectangle 99"/>
+          <p:cNvSpPr/>
+          <p:nvPr/>
+        </p:nvSpPr>
+        <p:spPr>
+          <a:xfrm>
+            <a:off x="9875520" y="365760"/>
+            <a:ext cx="2005920" cy="497160"/>
+          </a:xfrm>
+          <a:prstGeom prst="roundRect">
+            <a:avLst>
+              <a:gd name="adj" fmla="val 16667"/>
+            </a:avLst>
+          </a:prstGeom>
+          <a:solidFill>
+            <a:srgbClr val="1e1e24"/>
+          </a:solidFill>
+          <a:ln>
+            <a:solidFill>
+              <a:srgbClr val="ff8c00"/>
+            </a:solidFill>
+            <a:round/>
+          </a:ln>
+          <a:effectLst>
+            <a:outerShdw blurRad="39960" dir="5400000" dist="23040" rotWithShape="0">
+              <a:srgbClr val="000000">
+                <a:alpha val="35000"/>
+              </a:srgbClr>
+            </a:outerShdw>
+          </a:effectLst>
+        </p:spPr>
+        <p:style>
+          <a:lnRef idx="1">
+            <a:schemeClr val="accent1"/>
+          </a:lnRef>
+          <a:fillRef idx="3">
+            <a:schemeClr val="accent1"/>
+          </a:fillRef>
+          <a:effectRef idx="2">
+            <a:schemeClr val="accent1"/>
+          </a:effectRef>
+          <a:fontRef idx="minor"/>
+        </p:style>
+        <p:txBody>
+          <a:bodyPr lIns="90000" rIns="90000" tIns="45000" bIns="45000" anchor="ctr">
+            <a:noAutofit/>
+          </a:bodyPr>
+          <a:p>
+            <a:pPr algn="ctr">
+              <a:lnSpc>
+                <a:spcPct val="100000"/>
+              </a:lnSpc>
+            </a:pPr>
+            <a:r>
+              <a:rPr b="1" lang="en-US" sz="1400" spc="-1" strike="noStrike">
+                <a:solidFill>
+                  <a:srgbClr val="ffb45a"/>
+                </a:solidFill>
+                <a:latin typeface="Calibri"/>
+                <a:ea typeface="DejaVu Sans"/>
+              </a:rPr>
+              <a:t>JAVA TEMELLERI</a:t>
+            </a:r>
+            <a:endParaRPr b="0" lang="en-US" sz="1400" spc="-1" strike="noStrike">
+              <a:solidFill>
+                <a:srgbClr val="ffffff"/>
+              </a:solidFill>
+              <a:latin typeface="Arial"/>
+            </a:endParaRPr>
+          </a:p>
+        </p:txBody>
+      </p:sp>
+      <p:sp>
+        <p:nvSpPr>
+          <p:cNvPr id="396" name="TextBox 43"/>
+          <p:cNvSpPr/>
+          <p:nvPr/>
+        </p:nvSpPr>
+        <p:spPr>
+          <a:xfrm>
+            <a:off x="2174400" y="732600"/>
+            <a:ext cx="6618600" cy="639000"/>
+          </a:xfrm>
+          <a:prstGeom prst="rect">
+            <a:avLst/>
+          </a:prstGeom>
+          <a:noFill/>
+          <a:ln w="0">
+            <a:noFill/>
+          </a:ln>
+        </p:spPr>
+        <p:style>
+          <a:lnRef idx="0"/>
+          <a:fillRef idx="0"/>
+          <a:effectRef idx="0"/>
+          <a:fontRef idx="minor"/>
+        </p:style>
+        <p:txBody>
+          <a:bodyPr wrap="none" lIns="90000" rIns="90000" tIns="45000" bIns="45000" anchor="t">
+            <a:spAutoFit/>
+          </a:bodyPr>
+          <a:p>
+            <a:pPr>
+              <a:lnSpc>
+                <a:spcPct val="100000"/>
+              </a:lnSpc>
+            </a:pPr>
+            <a:r>
+              <a:rPr b="1" lang="en-US" sz="3600" spc="-1" strike="noStrike">
+                <a:solidFill>
+                  <a:srgbClr val="f5f5f5"/>
+                </a:solidFill>
+                <a:latin typeface="Calibri"/>
+                <a:ea typeface="DejaVu Sans"/>
+              </a:rPr>
+              <a:t>Aritmetik Operatörler: Genel Özet</a:t>
+            </a:r>
+            <a:endParaRPr b="0" lang="en-US" sz="3600" spc="-1" strike="noStrike">
+              <a:solidFill>
+                <a:srgbClr val="000000"/>
+              </a:solidFill>
+              <a:latin typeface="Arial"/>
+            </a:endParaRPr>
+          </a:p>
+        </p:txBody>
+      </p:sp>
+      <p:sp>
+        <p:nvSpPr>
+          <p:cNvPr id="397" name="TextBox 44"/>
+          <p:cNvSpPr/>
+          <p:nvPr/>
+        </p:nvSpPr>
+        <p:spPr>
+          <a:xfrm>
+            <a:off x="1950480" y="1600200"/>
+            <a:ext cx="7666920" cy="819720"/>
+          </a:xfrm>
+          <a:prstGeom prst="rect">
+            <a:avLst/>
+          </a:prstGeom>
+          <a:noFill/>
+          <a:ln w="0">
+            <a:noFill/>
+          </a:ln>
+        </p:spPr>
+        <p:style>
+          <a:lnRef idx="0"/>
+          <a:fillRef idx="0"/>
+          <a:effectRef idx="0"/>
+          <a:fontRef idx="minor"/>
+        </p:style>
+        <p:txBody>
+          <a:bodyPr wrap="none" lIns="90000" rIns="90000" tIns="45000" bIns="45000" anchor="t">
+            <a:spAutoFit/>
+          </a:bodyPr>
+          <a:p>
+            <a:pPr>
+              <a:lnSpc>
+                <a:spcPct val="100000"/>
+              </a:lnSpc>
+            </a:pPr>
+            <a:r>
+              <a:rPr b="0" lang="en-US" sz="1600" spc="-1" strike="noStrike">
+                <a:solidFill>
+                  <a:srgbClr val="aaaaaa"/>
+                </a:solidFill>
+                <a:latin typeface="Calibri"/>
+                <a:ea typeface="DejaVu Sans"/>
+              </a:rPr>
+              <a:t>Aritmetik operatörler, Java'daki veri manipülasyonunun ve iş mantığının </a:t>
+            </a:r>
+            <a:endParaRPr b="0" lang="en-US" sz="1600" spc="-1" strike="noStrike">
+              <a:solidFill>
+                <a:srgbClr val="000000"/>
+              </a:solidFill>
+              <a:latin typeface="Arial"/>
+            </a:endParaRPr>
+          </a:p>
+          <a:p>
+            <a:pPr>
+              <a:lnSpc>
+                <a:spcPct val="100000"/>
+              </a:lnSpc>
+            </a:pPr>
+            <a:r>
+              <a:rPr b="0" lang="en-US" sz="1600" spc="-1" strike="noStrike">
+                <a:solidFill>
+                  <a:srgbClr val="aaaaaa"/>
+                </a:solidFill>
+                <a:latin typeface="Calibri"/>
+                <a:ea typeface="DejaVu Sans"/>
+              </a:rPr>
+              <a:t>(business logic) temel taşıdır. Doğru operatörü seçmek, </a:t>
+            </a:r>
+            <a:endParaRPr b="0" lang="en-US" sz="1600" spc="-1" strike="noStrike">
+              <a:solidFill>
+                <a:srgbClr val="000000"/>
+              </a:solidFill>
+              <a:latin typeface="Arial"/>
+            </a:endParaRPr>
+          </a:p>
+          <a:p>
+            <a:pPr>
+              <a:lnSpc>
+                <a:spcPct val="100000"/>
+              </a:lnSpc>
+            </a:pPr>
+            <a:r>
+              <a:rPr b="0" lang="en-US" sz="1600" spc="-1" strike="noStrike">
+                <a:solidFill>
+                  <a:srgbClr val="aaaaaa"/>
+                </a:solidFill>
+                <a:latin typeface="Calibri"/>
+                <a:ea typeface="DejaVu Sans"/>
+              </a:rPr>
+              <a:t>veri tiplerine dikkat etmek ve işlem önceliğini bilmek hatasız kod yazmanın altın kurallarıdır.</a:t>
+            </a:r>
+            <a:endParaRPr b="0" lang="en-US" sz="1600" spc="-1" strike="noStrike">
+              <a:solidFill>
+                <a:srgbClr val="000000"/>
+              </a:solidFill>
+              <a:latin typeface="Arial"/>
+            </a:endParaRPr>
+          </a:p>
+        </p:txBody>
+      </p:sp>
+      <p:sp>
+        <p:nvSpPr>
+          <p:cNvPr id="398" name="Rounded Rectangle 100"/>
+          <p:cNvSpPr/>
+          <p:nvPr/>
+        </p:nvSpPr>
+        <p:spPr>
+          <a:xfrm>
+            <a:off x="987480" y="3182040"/>
+            <a:ext cx="3286080" cy="2737440"/>
+          </a:xfrm>
+          <a:prstGeom prst="roundRect">
+            <a:avLst>
+              <a:gd name="adj" fmla="val 16667"/>
+            </a:avLst>
+          </a:prstGeom>
+          <a:solidFill>
+            <a:srgbClr val="08080a"/>
+          </a:solidFill>
+          <a:ln>
+            <a:noFill/>
+          </a:ln>
+          <a:effectLst>
+            <a:outerShdw blurRad="39960" dir="5400000" dist="23040" rotWithShape="0">
+              <a:srgbClr val="000000">
+                <a:alpha val="35000"/>
+              </a:srgbClr>
+            </a:outerShdw>
+          </a:effectLst>
+        </p:spPr>
+        <p:style>
+          <a:lnRef idx="1">
+            <a:schemeClr val="accent1"/>
+          </a:lnRef>
+          <a:fillRef idx="3">
+            <a:schemeClr val="accent1"/>
+          </a:fillRef>
+          <a:effectRef idx="2">
+            <a:schemeClr val="accent1"/>
+          </a:effectRef>
+          <a:fontRef idx="minor"/>
+        </p:style>
+        <p:txBody>
+          <a:bodyPr lIns="90000" rIns="90000" tIns="45000" bIns="45000" anchor="ctr">
+            <a:noAutofit/>
+          </a:bodyPr>
+          <a:p>
+            <a:endParaRPr b="0" lang="en-US" sz="1800" spc="-1" strike="noStrike">
+              <a:solidFill>
+                <a:schemeClr val="lt1"/>
+              </a:solidFill>
+              <a:latin typeface="Calibri"/>
+              <a:ea typeface="DejaVu Sans"/>
+            </a:endParaRPr>
+          </a:p>
+        </p:txBody>
+      </p:sp>
+      <p:sp>
+        <p:nvSpPr>
+          <p:cNvPr id="399" name="Rounded Rectangle 101"/>
+          <p:cNvSpPr/>
+          <p:nvPr/>
+        </p:nvSpPr>
+        <p:spPr>
+          <a:xfrm>
+            <a:off x="685800" y="2971800"/>
+            <a:ext cx="3200040" cy="3428640"/>
+          </a:xfrm>
+          <a:prstGeom prst="roundRect">
+            <a:avLst>
+              <a:gd name="adj" fmla="val 16667"/>
+            </a:avLst>
+          </a:prstGeom>
+          <a:solidFill>
+            <a:srgbClr val="16161c"/>
+          </a:solidFill>
+          <a:ln>
+            <a:solidFill>
+              <a:srgbClr val="464655"/>
+            </a:solidFill>
+            <a:round/>
+          </a:ln>
+          <a:effectLst>
+            <a:outerShdw blurRad="39960" dir="5400000" dist="23040" rotWithShape="0">
+              <a:srgbClr val="000000">
+                <a:alpha val="35000"/>
+              </a:srgbClr>
+            </a:outerShdw>
+          </a:effectLst>
+        </p:spPr>
+        <p:style>
+          <a:lnRef idx="1">
+            <a:schemeClr val="accent1"/>
+          </a:lnRef>
+          <a:fillRef idx="3">
+            <a:schemeClr val="accent1"/>
+          </a:fillRef>
+          <a:effectRef idx="2">
+            <a:schemeClr val="accent1"/>
+          </a:effectRef>
+          <a:fontRef idx="minor"/>
+        </p:style>
+        <p:txBody>
+          <a:bodyPr lIns="90000" rIns="90000" tIns="45000" bIns="45000" anchor="ctr">
+            <a:noAutofit/>
+          </a:bodyPr>
+          <a:p>
+            <a:pPr>
+              <a:lnSpc>
+                <a:spcPct val="100000"/>
+              </a:lnSpc>
+            </a:pPr>
+            <a:r>
+              <a:rPr b="1" lang="en-US" sz="1400" spc="-1" strike="noStrike">
+                <a:solidFill>
+                  <a:schemeClr val="lt1"/>
+                </a:solidFill>
+                <a:latin typeface="Calibri"/>
+                <a:ea typeface="DejaVu Sans"/>
+              </a:rPr>
+              <a:t>Unutulmaması Gereken Altın Kurallar:</a:t>
+            </a:r>
+            <a:endParaRPr b="0" lang="en-US" sz="1400" spc="-1" strike="noStrike">
+              <a:solidFill>
+                <a:srgbClr val="ffffff"/>
+              </a:solidFill>
+              <a:latin typeface="Arial"/>
+            </a:endParaRPr>
+          </a:p>
+          <a:p>
+            <a:pPr marL="216000" indent="-216000">
+              <a:lnSpc>
+                <a:spcPct val="100000"/>
+              </a:lnSpc>
+              <a:buClr>
+                <a:srgbClr val="ffffff"/>
+              </a:buClr>
+              <a:buFont typeface="Wingdings" charset="2"/>
+              <a:buChar char=""/>
+            </a:pPr>
+            <a:r>
+              <a:rPr b="0" lang="en-US" sz="1400" spc="-1" strike="noStrike">
+                <a:solidFill>
+                  <a:schemeClr val="lt1"/>
+                </a:solidFill>
+                <a:latin typeface="Calibri"/>
+                <a:ea typeface="DejaVu Sans"/>
+              </a:rPr>
+              <a:t>Temel 5'li: +, -, *, / ve % (Mod).</a:t>
+            </a:r>
+            <a:endParaRPr b="0" lang="en-US" sz="1400" spc="-1" strike="noStrike">
+              <a:solidFill>
+                <a:srgbClr val="ffffff"/>
+              </a:solidFill>
+              <a:latin typeface="Arial"/>
+            </a:endParaRPr>
+          </a:p>
+          <a:p>
+            <a:pPr marL="216000" indent="-216000">
+              <a:lnSpc>
+                <a:spcPct val="100000"/>
+              </a:lnSpc>
+              <a:buClr>
+                <a:srgbClr val="ffffff"/>
+              </a:buClr>
+              <a:buFont typeface="Wingdings" charset="2"/>
+              <a:buChar char=""/>
+            </a:pPr>
+            <a:r>
+              <a:rPr b="0" lang="en-US" sz="1400" spc="-1" strike="noStrike">
+                <a:solidFill>
+                  <a:schemeClr val="lt1"/>
+                </a:solidFill>
+                <a:latin typeface="Calibri"/>
+                <a:ea typeface="DejaVu Sans"/>
+              </a:rPr>
+              <a:t>İşlem Önceliği: Çarpma, bölme ve mod işlemleri daima toplama ve çıkarmadan önce yapılır. Parantezler () tüm kuralları ezer.</a:t>
+            </a:r>
+            <a:endParaRPr b="0" lang="en-US" sz="1400" spc="-1" strike="noStrike">
+              <a:solidFill>
+                <a:srgbClr val="ffffff"/>
+              </a:solidFill>
+              <a:latin typeface="Arial"/>
+            </a:endParaRPr>
+          </a:p>
+          <a:p>
+            <a:pPr marL="216000" indent="-216000">
+              <a:lnSpc>
+                <a:spcPct val="100000"/>
+              </a:lnSpc>
+              <a:buClr>
+                <a:srgbClr val="ffffff"/>
+              </a:buClr>
+              <a:buFont typeface="Wingdings" charset="2"/>
+              <a:buChar char=""/>
+            </a:pPr>
+            <a:r>
+              <a:rPr b="0" lang="en-US" sz="1400" spc="-1" strike="noStrike">
+                <a:solidFill>
+                  <a:schemeClr val="lt1"/>
+                </a:solidFill>
+                <a:latin typeface="Calibri"/>
+                <a:ea typeface="DejaVu Sans"/>
+              </a:rPr>
+              <a:t>Bölme Kuralı: İki tam sayının (int) bölümü daima tam sayı çıkar (küsurat atılır). Hassas sonuç için en az biri double olmalıdır.</a:t>
+            </a:r>
+            <a:endParaRPr b="0" lang="en-US" sz="1400" spc="-1" strike="noStrike">
+              <a:solidFill>
+                <a:srgbClr val="ffffff"/>
+              </a:solidFill>
+              <a:latin typeface="Arial"/>
+            </a:endParaRPr>
+          </a:p>
+          <a:p>
+            <a:pPr marL="216000" indent="-216000">
+              <a:lnSpc>
+                <a:spcPct val="100000"/>
+              </a:lnSpc>
+              <a:buClr>
+                <a:srgbClr val="ffffff"/>
+              </a:buClr>
+              <a:buFont typeface="Wingdings" charset="2"/>
+              <a:buChar char=""/>
+            </a:pPr>
+            <a:r>
+              <a:rPr b="0" lang="en-US" sz="1400" spc="-1" strike="noStrike">
+                <a:solidFill>
+                  <a:schemeClr val="lt1"/>
+                </a:solidFill>
+                <a:latin typeface="Calibri"/>
+                <a:ea typeface="DejaVu Sans"/>
+              </a:rPr>
+              <a:t>Kısa Yollar: ++/-- (1 artır/azalt) ve +=/*= (işlemle atamayı birleştir) ifadeleri kodu daha okunabilir kılar.</a:t>
+            </a:r>
+            <a:endParaRPr b="0" lang="en-US" sz="1400" spc="-1" strike="noStrike">
+              <a:solidFill>
+                <a:srgbClr val="ffffff"/>
+              </a:solidFill>
+              <a:latin typeface="Arial"/>
+            </a:endParaRPr>
+          </a:p>
+        </p:txBody>
+      </p:sp>
+      <p:sp>
+        <p:nvSpPr>
+          <p:cNvPr id="400" name="Rounded Rectangle 102"/>
+          <p:cNvSpPr/>
+          <p:nvPr/>
+        </p:nvSpPr>
+        <p:spPr>
+          <a:xfrm>
+            <a:off x="4507920" y="3182040"/>
+            <a:ext cx="3286080" cy="2737440"/>
+          </a:xfrm>
+          <a:prstGeom prst="roundRect">
+            <a:avLst>
+              <a:gd name="adj" fmla="val 16667"/>
+            </a:avLst>
+          </a:prstGeom>
+          <a:solidFill>
+            <a:srgbClr val="08080a"/>
+          </a:solidFill>
+          <a:ln>
+            <a:noFill/>
+          </a:ln>
+          <a:effectLst>
+            <a:outerShdw blurRad="39960" dir="5400000" dist="23040" rotWithShape="0">
+              <a:srgbClr val="000000">
+                <a:alpha val="35000"/>
+              </a:srgbClr>
+            </a:outerShdw>
+          </a:effectLst>
+        </p:spPr>
+        <p:style>
+          <a:lnRef idx="1">
+            <a:schemeClr val="accent1"/>
+          </a:lnRef>
+          <a:fillRef idx="3">
+            <a:schemeClr val="accent1"/>
+          </a:fillRef>
+          <a:effectRef idx="2">
+            <a:schemeClr val="accent1"/>
+          </a:effectRef>
+          <a:fontRef idx="minor"/>
+        </p:style>
+        <p:txBody>
+          <a:bodyPr lIns="90000" rIns="90000" tIns="45000" bIns="45000" anchor="ctr">
+            <a:noAutofit/>
+          </a:bodyPr>
+          <a:p>
+            <a:endParaRPr b="0" lang="en-US" sz="1800" spc="-1" strike="noStrike">
+              <a:solidFill>
+                <a:schemeClr val="lt1"/>
+              </a:solidFill>
+              <a:latin typeface="Calibri"/>
+              <a:ea typeface="DejaVu Sans"/>
+            </a:endParaRPr>
+          </a:p>
+        </p:txBody>
+      </p:sp>
+      <p:sp>
+        <p:nvSpPr>
+          <p:cNvPr id="401" name="Rounded Rectangle 103"/>
+          <p:cNvSpPr/>
+          <p:nvPr/>
+        </p:nvSpPr>
+        <p:spPr>
+          <a:xfrm>
+            <a:off x="4257360" y="2971800"/>
+            <a:ext cx="3286080" cy="3426480"/>
+          </a:xfrm>
+          <a:prstGeom prst="roundRect">
+            <a:avLst>
+              <a:gd name="adj" fmla="val 16667"/>
+            </a:avLst>
+          </a:prstGeom>
+          <a:solidFill>
+            <a:srgbClr val="16161c"/>
+          </a:solidFill>
+          <a:ln>
+            <a:solidFill>
+              <a:srgbClr val="464655"/>
+            </a:solidFill>
+            <a:round/>
+          </a:ln>
+          <a:effectLst>
+            <a:outerShdw blurRad="39960" dir="5400000" dist="23040" rotWithShape="0">
+              <a:srgbClr val="000000">
+                <a:alpha val="35000"/>
+              </a:srgbClr>
+            </a:outerShdw>
+          </a:effectLst>
+        </p:spPr>
+        <p:style>
+          <a:lnRef idx="1">
+            <a:schemeClr val="accent1"/>
+          </a:lnRef>
+          <a:fillRef idx="3">
+            <a:schemeClr val="accent1"/>
+          </a:fillRef>
+          <a:effectRef idx="2">
+            <a:schemeClr val="accent1"/>
+          </a:effectRef>
+          <a:fontRef idx="minor"/>
+        </p:style>
+        <p:txBody>
+          <a:bodyPr lIns="90000" rIns="90000" tIns="45000" bIns="45000" anchor="ctr">
+            <a:noAutofit/>
+          </a:bodyPr>
+          <a:p>
+            <a:pPr>
+              <a:lnSpc>
+                <a:spcPct val="100000"/>
+              </a:lnSpc>
+            </a:pPr>
+            <a:r>
+              <a:rPr b="0" lang="en-US" sz="1300" spc="-1" strike="noStrike">
+                <a:solidFill>
+                  <a:schemeClr val="lt1"/>
+                </a:solidFill>
+                <a:latin typeface="Calibri"/>
+                <a:ea typeface="DejaVu Sans"/>
+              </a:rPr>
+              <a:t>[ Geliştirici Kontrol Listesi ]</a:t>
+            </a:r>
+            <a:endParaRPr b="0" lang="en-US" sz="1300" spc="-1" strike="noStrike">
+              <a:solidFill>
+                <a:srgbClr val="ffffff"/>
+              </a:solidFill>
+              <a:latin typeface="Arial"/>
+            </a:endParaRPr>
+          </a:p>
+          <a:p>
+            <a:pPr>
+              <a:lnSpc>
+                <a:spcPct val="100000"/>
+              </a:lnSpc>
+            </a:pPr>
+            <a:r>
+              <a:rPr b="0" lang="en-US" sz="1300" spc="-1" strike="noStrike">
+                <a:solidFill>
+                  <a:schemeClr val="lt1"/>
+                </a:solidFill>
+                <a:latin typeface="Calibri"/>
+                <a:ea typeface="DejaVu Sans"/>
+              </a:rPr>
+              <a:t>├──</a:t>
+            </a:r>
+            <a:r>
+              <a:rPr b="0" lang="en-US" sz="1300" spc="-1" strike="noStrike">
+                <a:solidFill>
+                  <a:schemeClr val="lt1"/>
+                </a:solidFill>
+                <a:latin typeface="Calibri"/>
+                <a:ea typeface="DejaVu Sans"/>
+              </a:rPr>
+              <a:t>&gt; Çift/Tek sayı kontrolü mü yapacaksın?</a:t>
+            </a:r>
+            <a:endParaRPr b="0" lang="en-US" sz="1300" spc="-1" strike="noStrike">
+              <a:solidFill>
+                <a:srgbClr val="ffffff"/>
+              </a:solidFill>
+              <a:latin typeface="Arial"/>
+            </a:endParaRPr>
+          </a:p>
+          <a:p>
+            <a:pPr>
+              <a:lnSpc>
+                <a:spcPct val="100000"/>
+              </a:lnSpc>
+            </a:pPr>
+            <a:r>
+              <a:rPr b="0" lang="en-US" sz="1300" spc="-1" strike="noStrike">
+                <a:solidFill>
+                  <a:schemeClr val="lt1"/>
+                </a:solidFill>
+                <a:latin typeface="Calibri"/>
+                <a:ea typeface="DejaVu Sans"/>
+              </a:rPr>
+              <a:t>│ └── </a:t>
+            </a:r>
+            <a:r>
+              <a:rPr b="0" lang="en-US" sz="1300" spc="-1" strike="noStrike">
+                <a:solidFill>
+                  <a:schemeClr val="lt1"/>
+                </a:solidFill>
+                <a:latin typeface="Calibri"/>
+                <a:ea typeface="DejaVu Sans"/>
+              </a:rPr>
+              <a:t>Kesinlikle % 2 kullan!</a:t>
+            </a:r>
+            <a:endParaRPr b="0" lang="en-US" sz="1300" spc="-1" strike="noStrike">
+              <a:solidFill>
+                <a:srgbClr val="ffffff"/>
+              </a:solidFill>
+              <a:latin typeface="Arial"/>
+            </a:endParaRPr>
+          </a:p>
+          <a:p>
+            <a:pPr>
+              <a:lnSpc>
+                <a:spcPct val="100000"/>
+              </a:lnSpc>
+            </a:pPr>
+            <a:r>
+              <a:rPr b="0" lang="en-US" sz="1300" spc="-1" strike="noStrike">
+                <a:solidFill>
+                  <a:schemeClr val="lt1"/>
+                </a:solidFill>
+                <a:latin typeface="Calibri"/>
+                <a:ea typeface="DejaVu Sans"/>
+              </a:rPr>
+              <a:t>│</a:t>
+            </a:r>
+            <a:endParaRPr b="0" lang="en-US" sz="1300" spc="-1" strike="noStrike">
+              <a:solidFill>
+                <a:srgbClr val="ffffff"/>
+              </a:solidFill>
+              <a:latin typeface="Arial"/>
+            </a:endParaRPr>
+          </a:p>
+          <a:p>
+            <a:pPr>
+              <a:lnSpc>
+                <a:spcPct val="100000"/>
+              </a:lnSpc>
+            </a:pPr>
+            <a:r>
+              <a:rPr b="0" lang="en-US" sz="1300" spc="-1" strike="noStrike">
+                <a:solidFill>
+                  <a:schemeClr val="lt1"/>
+                </a:solidFill>
+                <a:latin typeface="Calibri"/>
+                <a:ea typeface="DejaVu Sans"/>
+              </a:rPr>
+              <a:t>├──</a:t>
+            </a:r>
+            <a:r>
+              <a:rPr b="0" lang="en-US" sz="1300" spc="-1" strike="noStrike">
+                <a:solidFill>
+                  <a:schemeClr val="lt1"/>
+                </a:solidFill>
+                <a:latin typeface="Calibri"/>
+                <a:ea typeface="DejaVu Sans"/>
+              </a:rPr>
+              <a:t>&gt; Bölme işleminde küsurat lazım mı?</a:t>
+            </a:r>
+            <a:endParaRPr b="0" lang="en-US" sz="1300" spc="-1" strike="noStrike">
+              <a:solidFill>
+                <a:srgbClr val="ffffff"/>
+              </a:solidFill>
+              <a:latin typeface="Arial"/>
+            </a:endParaRPr>
+          </a:p>
+          <a:p>
+            <a:pPr>
+              <a:lnSpc>
+                <a:spcPct val="100000"/>
+              </a:lnSpc>
+            </a:pPr>
+            <a:r>
+              <a:rPr b="0" lang="en-US" sz="1300" spc="-1" strike="noStrike">
+                <a:solidFill>
+                  <a:schemeClr val="lt1"/>
+                </a:solidFill>
+                <a:latin typeface="Calibri"/>
+                <a:ea typeface="DejaVu Sans"/>
+              </a:rPr>
+              <a:t>│ └── </a:t>
+            </a:r>
+            <a:r>
+              <a:rPr b="0" lang="en-US" sz="1300" spc="-1" strike="noStrike">
+                <a:solidFill>
+                  <a:schemeClr val="lt1"/>
+                </a:solidFill>
+                <a:latin typeface="Calibri"/>
+                <a:ea typeface="DejaVu Sans"/>
+              </a:rPr>
+              <a:t>Sayılardan birini double (Örn: 2.0) yap!</a:t>
+            </a:r>
+            <a:endParaRPr b="0" lang="en-US" sz="1300" spc="-1" strike="noStrike">
+              <a:solidFill>
+                <a:srgbClr val="ffffff"/>
+              </a:solidFill>
+              <a:latin typeface="Arial"/>
+            </a:endParaRPr>
+          </a:p>
+          <a:p>
+            <a:pPr>
+              <a:lnSpc>
+                <a:spcPct val="100000"/>
+              </a:lnSpc>
+            </a:pPr>
+            <a:r>
+              <a:rPr b="0" lang="en-US" sz="1300" spc="-1" strike="noStrike">
+                <a:solidFill>
+                  <a:schemeClr val="lt1"/>
+                </a:solidFill>
+                <a:latin typeface="Calibri"/>
+                <a:ea typeface="DejaVu Sans"/>
+              </a:rPr>
+              <a:t>│</a:t>
+            </a:r>
+            <a:endParaRPr b="0" lang="en-US" sz="1300" spc="-1" strike="noStrike">
+              <a:solidFill>
+                <a:srgbClr val="ffffff"/>
+              </a:solidFill>
+              <a:latin typeface="Arial"/>
+            </a:endParaRPr>
+          </a:p>
+          <a:p>
+            <a:pPr>
+              <a:lnSpc>
+                <a:spcPct val="100000"/>
+              </a:lnSpc>
+            </a:pPr>
+            <a:r>
+              <a:rPr b="0" lang="en-US" sz="1300" spc="-1" strike="noStrike">
+                <a:solidFill>
+                  <a:schemeClr val="lt1"/>
+                </a:solidFill>
+                <a:latin typeface="Calibri"/>
+                <a:ea typeface="DejaVu Sans"/>
+              </a:rPr>
+              <a:t>├──</a:t>
+            </a:r>
+            <a:r>
+              <a:rPr b="0" lang="en-US" sz="1300" spc="-1" strike="noStrike">
+                <a:solidFill>
+                  <a:schemeClr val="lt1"/>
+                </a:solidFill>
+                <a:latin typeface="Calibri"/>
+                <a:ea typeface="DejaVu Sans"/>
+              </a:rPr>
+              <a:t>&gt; İşlem sırasını değiştirmek mi istiyorsun?</a:t>
+            </a:r>
+            <a:endParaRPr b="0" lang="en-US" sz="1300" spc="-1" strike="noStrike">
+              <a:solidFill>
+                <a:srgbClr val="ffffff"/>
+              </a:solidFill>
+              <a:latin typeface="Arial"/>
+            </a:endParaRPr>
+          </a:p>
+          <a:p>
+            <a:pPr>
+              <a:lnSpc>
+                <a:spcPct val="100000"/>
+              </a:lnSpc>
+            </a:pPr>
+            <a:r>
+              <a:rPr b="0" lang="en-US" sz="1300" spc="-1" strike="noStrike">
+                <a:solidFill>
+                  <a:schemeClr val="lt1"/>
+                </a:solidFill>
+                <a:latin typeface="Calibri"/>
+                <a:ea typeface="DejaVu Sans"/>
+              </a:rPr>
+              <a:t>│ └── </a:t>
+            </a:r>
+            <a:r>
+              <a:rPr b="0" lang="en-US" sz="1300" spc="-1" strike="noStrike">
+                <a:solidFill>
+                  <a:schemeClr val="lt1"/>
+                </a:solidFill>
+                <a:latin typeface="Calibri"/>
+                <a:ea typeface="DejaVu Sans"/>
+              </a:rPr>
+              <a:t>İşlemi parantez () içine al!</a:t>
+            </a:r>
+            <a:endParaRPr b="0" lang="en-US" sz="1300" spc="-1" strike="noStrike">
+              <a:solidFill>
+                <a:srgbClr val="ffffff"/>
+              </a:solidFill>
+              <a:latin typeface="Arial"/>
+            </a:endParaRPr>
+          </a:p>
+          <a:p>
+            <a:pPr>
+              <a:lnSpc>
+                <a:spcPct val="100000"/>
+              </a:lnSpc>
+            </a:pPr>
+            <a:r>
+              <a:rPr b="0" lang="en-US" sz="1300" spc="-1" strike="noStrike">
+                <a:solidFill>
+                  <a:schemeClr val="lt1"/>
+                </a:solidFill>
+                <a:latin typeface="Calibri"/>
+                <a:ea typeface="DejaVu Sans"/>
+              </a:rPr>
+              <a:t>│</a:t>
+            </a:r>
+            <a:endParaRPr b="0" lang="en-US" sz="1300" spc="-1" strike="noStrike">
+              <a:solidFill>
+                <a:srgbClr val="ffffff"/>
+              </a:solidFill>
+              <a:latin typeface="Arial"/>
+            </a:endParaRPr>
+          </a:p>
+          <a:p>
+            <a:pPr>
+              <a:lnSpc>
+                <a:spcPct val="100000"/>
+              </a:lnSpc>
+            </a:pPr>
+            <a:r>
+              <a:rPr b="0" lang="en-US" sz="1300" spc="-1" strike="noStrike">
+                <a:solidFill>
+                  <a:schemeClr val="lt1"/>
+                </a:solidFill>
+                <a:latin typeface="Calibri"/>
+                <a:ea typeface="DejaVu Sans"/>
+              </a:rPr>
+              <a:t>└──</a:t>
+            </a:r>
+            <a:r>
+              <a:rPr b="0" lang="en-US" sz="1300" spc="-1" strike="noStrike">
+                <a:solidFill>
+                  <a:schemeClr val="lt1"/>
+                </a:solidFill>
+                <a:latin typeface="Calibri"/>
+                <a:ea typeface="DejaVu Sans"/>
+              </a:rPr>
+              <a:t>&gt; Bir değişkenin değerini güncelleyecek misin?</a:t>
+            </a:r>
+            <a:endParaRPr b="0" lang="en-US" sz="1300" spc="-1" strike="noStrike">
+              <a:solidFill>
+                <a:srgbClr val="ffffff"/>
+              </a:solidFill>
+              <a:latin typeface="Arial"/>
+            </a:endParaRPr>
+          </a:p>
+          <a:p>
+            <a:pPr>
+              <a:lnSpc>
+                <a:spcPct val="100000"/>
+              </a:lnSpc>
+            </a:pPr>
+            <a:r>
+              <a:rPr b="0" lang="en-US" sz="1300" spc="-1" strike="noStrike">
+                <a:solidFill>
+                  <a:schemeClr val="lt1"/>
+                </a:solidFill>
+                <a:latin typeface="Calibri"/>
+                <a:ea typeface="DejaVu Sans"/>
+              </a:rPr>
+              <a:t>└── </a:t>
+            </a:r>
+            <a:r>
+              <a:rPr b="0" lang="en-US" sz="1300" spc="-1" strike="noStrike">
+                <a:solidFill>
+                  <a:schemeClr val="lt1"/>
+                </a:solidFill>
+                <a:latin typeface="Calibri"/>
+                <a:ea typeface="DejaVu Sans"/>
+              </a:rPr>
+              <a:t>x = x + 5 yerine x += 5 kullan!</a:t>
+            </a:r>
+            <a:endParaRPr b="0" lang="en-US" sz="1300" spc="-1" strike="noStrike">
+              <a:solidFill>
+                <a:srgbClr val="ffffff"/>
+              </a:solidFill>
+              <a:latin typeface="Arial"/>
+            </a:endParaRPr>
+          </a:p>
+        </p:txBody>
+      </p:sp>
+      <p:sp>
+        <p:nvSpPr>
+          <p:cNvPr id="402" name="Rounded Rectangle 104"/>
+          <p:cNvSpPr/>
+          <p:nvPr/>
+        </p:nvSpPr>
+        <p:spPr>
+          <a:xfrm>
+            <a:off x="8028360" y="3182040"/>
+            <a:ext cx="3286080" cy="2737440"/>
+          </a:xfrm>
+          <a:prstGeom prst="roundRect">
+            <a:avLst>
+              <a:gd name="adj" fmla="val 16667"/>
+            </a:avLst>
+          </a:prstGeom>
+          <a:solidFill>
+            <a:srgbClr val="08080a"/>
+          </a:solidFill>
+          <a:ln>
+            <a:noFill/>
+          </a:ln>
+          <a:effectLst>
+            <a:outerShdw blurRad="39960" dir="5400000" dist="23040" rotWithShape="0">
+              <a:srgbClr val="000000">
+                <a:alpha val="35000"/>
+              </a:srgbClr>
+            </a:outerShdw>
+          </a:effectLst>
+        </p:spPr>
+        <p:style>
+          <a:lnRef idx="1">
+            <a:schemeClr val="accent1"/>
+          </a:lnRef>
+          <a:fillRef idx="3">
+            <a:schemeClr val="accent1"/>
+          </a:fillRef>
+          <a:effectRef idx="2">
+            <a:schemeClr val="accent1"/>
+          </a:effectRef>
+          <a:fontRef idx="minor"/>
+        </p:style>
+        <p:txBody>
+          <a:bodyPr lIns="90000" rIns="90000" tIns="45000" bIns="45000" anchor="ctr">
+            <a:noAutofit/>
+          </a:bodyPr>
+          <a:p>
+            <a:endParaRPr b="0" lang="en-US" sz="1800" spc="-1" strike="noStrike">
+              <a:solidFill>
+                <a:schemeClr val="lt1"/>
+              </a:solidFill>
+              <a:latin typeface="Calibri"/>
+              <a:ea typeface="DejaVu Sans"/>
+            </a:endParaRPr>
+          </a:p>
+        </p:txBody>
+      </p:sp>
+      <p:sp>
+        <p:nvSpPr>
+          <p:cNvPr id="403" name="Rounded Rectangle 105"/>
+          <p:cNvSpPr/>
+          <p:nvPr/>
+        </p:nvSpPr>
+        <p:spPr>
+          <a:xfrm>
+            <a:off x="8001000" y="2514600"/>
+            <a:ext cx="3427560" cy="3885840"/>
+          </a:xfrm>
+          <a:prstGeom prst="roundRect">
+            <a:avLst>
+              <a:gd name="adj" fmla="val 16667"/>
+            </a:avLst>
+          </a:prstGeom>
+          <a:solidFill>
+            <a:srgbClr val="16161c"/>
+          </a:solidFill>
+          <a:ln>
+            <a:solidFill>
+              <a:srgbClr val="464655"/>
+            </a:solidFill>
+            <a:round/>
+          </a:ln>
+          <a:effectLst>
+            <a:outerShdw blurRad="39960" dir="5400000" dist="23040" rotWithShape="0">
+              <a:srgbClr val="000000">
+                <a:alpha val="35000"/>
+              </a:srgbClr>
+            </a:outerShdw>
+          </a:effectLst>
+        </p:spPr>
+        <p:style>
+          <a:lnRef idx="1">
+            <a:schemeClr val="accent1"/>
+          </a:lnRef>
+          <a:fillRef idx="3">
+            <a:schemeClr val="accent1"/>
+          </a:fillRef>
+          <a:effectRef idx="2">
+            <a:schemeClr val="accent1"/>
+          </a:effectRef>
+          <a:fontRef idx="minor"/>
+        </p:style>
+        <p:txBody>
+          <a:bodyPr lIns="90000" rIns="90000" tIns="45000" bIns="45000" anchor="ctr">
+            <a:noAutofit/>
+          </a:bodyPr>
+          <a:p>
+            <a:pPr algn="ctr">
+              <a:lnSpc>
+                <a:spcPct val="100000"/>
+              </a:lnSpc>
+            </a:pPr>
+            <a:r>
+              <a:rPr b="0" lang="en-US" sz="950" spc="-1" strike="noStrike">
+                <a:solidFill>
+                  <a:srgbClr val="78ffc8"/>
+                </a:solidFill>
+                <a:latin typeface="Consolas"/>
+                <a:ea typeface="DejaVu Sans"/>
+              </a:rPr>
+              <a:t>public class AritmetikOzet {</a:t>
+            </a:r>
+            <a:endParaRPr b="0" lang="en-US" sz="950" spc="-1" strike="noStrike">
+              <a:solidFill>
+                <a:srgbClr val="ffffff"/>
+              </a:solidFill>
+              <a:latin typeface="Arial"/>
+            </a:endParaRPr>
+          </a:p>
+          <a:p>
+            <a:pPr algn="ctr">
+              <a:lnSpc>
+                <a:spcPct val="100000"/>
+              </a:lnSpc>
+            </a:pPr>
+            <a:r>
+              <a:rPr b="0" lang="en-US" sz="950" spc="-1" strike="noStrike">
+                <a:solidFill>
+                  <a:srgbClr val="78ffc8"/>
+                </a:solidFill>
+                <a:latin typeface="Consolas"/>
+                <a:ea typeface="DejaVu Sans"/>
+              </a:rPr>
+              <a:t>    </a:t>
+            </a:r>
+            <a:r>
+              <a:rPr b="0" lang="en-US" sz="950" spc="-1" strike="noStrike">
+                <a:solidFill>
+                  <a:srgbClr val="78ffc8"/>
+                </a:solidFill>
+                <a:latin typeface="Consolas"/>
+                <a:ea typeface="DejaVu Sans"/>
+              </a:rPr>
+              <a:t>public static void main(String[] args) {</a:t>
+            </a:r>
+            <a:endParaRPr b="0" lang="en-US" sz="950" spc="-1" strike="noStrike">
+              <a:solidFill>
+                <a:srgbClr val="ffffff"/>
+              </a:solidFill>
+              <a:latin typeface="Arial"/>
+            </a:endParaRPr>
+          </a:p>
+          <a:p>
+            <a:pPr algn="ctr">
+              <a:lnSpc>
+                <a:spcPct val="100000"/>
+              </a:lnSpc>
+            </a:pPr>
+            <a:r>
+              <a:rPr b="0" lang="en-US" sz="950" spc="-1" strike="noStrike">
+                <a:solidFill>
+                  <a:srgbClr val="78ffc8"/>
+                </a:solidFill>
+                <a:latin typeface="Consolas"/>
+                <a:ea typeface="DejaVu Sans"/>
+              </a:rPr>
+              <a:t>        </a:t>
+            </a:r>
+            <a:endParaRPr b="0" lang="en-US" sz="950" spc="-1" strike="noStrike">
+              <a:solidFill>
+                <a:srgbClr val="ffffff"/>
+              </a:solidFill>
+              <a:latin typeface="Arial"/>
+            </a:endParaRPr>
+          </a:p>
+          <a:p>
+            <a:pPr algn="ctr">
+              <a:lnSpc>
+                <a:spcPct val="100000"/>
+              </a:lnSpc>
+            </a:pPr>
+            <a:r>
+              <a:rPr b="0" lang="en-US" sz="950" spc="-1" strike="noStrike">
+                <a:solidFill>
+                  <a:srgbClr val="78ffc8"/>
+                </a:solidFill>
+                <a:latin typeface="Consolas"/>
+                <a:ea typeface="DejaVu Sans"/>
+              </a:rPr>
+              <a:t>        </a:t>
+            </a:r>
+            <a:r>
+              <a:rPr b="0" lang="en-US" sz="950" spc="-1" strike="noStrike">
+                <a:solidFill>
+                  <a:srgbClr val="78ffc8"/>
+                </a:solidFill>
+                <a:latin typeface="Consolas"/>
+                <a:ea typeface="DejaVu Sans"/>
+              </a:rPr>
+              <a:t>int sayi = 10;</a:t>
+            </a:r>
+            <a:endParaRPr b="0" lang="en-US" sz="950" spc="-1" strike="noStrike">
+              <a:solidFill>
+                <a:srgbClr val="ffffff"/>
+              </a:solidFill>
+              <a:latin typeface="Arial"/>
+            </a:endParaRPr>
+          </a:p>
+          <a:p>
+            <a:pPr algn="ctr">
+              <a:lnSpc>
+                <a:spcPct val="100000"/>
+              </a:lnSpc>
+            </a:pPr>
+            <a:r>
+              <a:rPr b="0" lang="en-US" sz="950" spc="-1" strike="noStrike">
+                <a:solidFill>
+                  <a:srgbClr val="78ffc8"/>
+                </a:solidFill>
+                <a:latin typeface="Consolas"/>
+                <a:ea typeface="DejaVu Sans"/>
+              </a:rPr>
+              <a:t>        </a:t>
+            </a:r>
+            <a:endParaRPr b="0" lang="en-US" sz="950" spc="-1" strike="noStrike">
+              <a:solidFill>
+                <a:srgbClr val="ffffff"/>
+              </a:solidFill>
+              <a:latin typeface="Arial"/>
+            </a:endParaRPr>
+          </a:p>
+          <a:p>
+            <a:pPr algn="ctr">
+              <a:lnSpc>
+                <a:spcPct val="100000"/>
+              </a:lnSpc>
+            </a:pPr>
+            <a:r>
+              <a:rPr b="0" lang="en-US" sz="950" spc="-1" strike="noStrike">
+                <a:solidFill>
+                  <a:srgbClr val="78ffc8"/>
+                </a:solidFill>
+                <a:latin typeface="Consolas"/>
+                <a:ea typeface="DejaVu Sans"/>
+              </a:rPr>
+              <a:t>        </a:t>
+            </a:r>
+            <a:r>
+              <a:rPr b="0" lang="en-US" sz="950" spc="-1" strike="noStrike">
+                <a:solidFill>
+                  <a:srgbClr val="78ffc8"/>
+                </a:solidFill>
+                <a:latin typeface="Consolas"/>
+                <a:ea typeface="DejaVu Sans"/>
+              </a:rPr>
+              <a:t>// 1. İşlem Önceliği ve Modulo</a:t>
+            </a:r>
+            <a:endParaRPr b="0" lang="en-US" sz="950" spc="-1" strike="noStrike">
+              <a:solidFill>
+                <a:srgbClr val="ffffff"/>
+              </a:solidFill>
+              <a:latin typeface="Arial"/>
+            </a:endParaRPr>
+          </a:p>
+          <a:p>
+            <a:pPr algn="ctr">
+              <a:lnSpc>
+                <a:spcPct val="100000"/>
+              </a:lnSpc>
+            </a:pPr>
+            <a:r>
+              <a:rPr b="0" lang="en-US" sz="950" spc="-1" strike="noStrike">
+                <a:solidFill>
+                  <a:srgbClr val="78ffc8"/>
+                </a:solidFill>
+                <a:latin typeface="Consolas"/>
+                <a:ea typeface="DejaVu Sans"/>
+              </a:rPr>
+              <a:t>        </a:t>
+            </a:r>
+            <a:r>
+              <a:rPr b="0" lang="en-US" sz="950" spc="-1" strike="noStrike">
+                <a:solidFill>
+                  <a:srgbClr val="78ffc8"/>
+                </a:solidFill>
+                <a:latin typeface="Consolas"/>
+                <a:ea typeface="DejaVu Sans"/>
+              </a:rPr>
+              <a:t>// 15'in 4'e bölümünden kalan = 3</a:t>
+            </a:r>
+            <a:endParaRPr b="0" lang="en-US" sz="950" spc="-1" strike="noStrike">
+              <a:solidFill>
+                <a:srgbClr val="ffffff"/>
+              </a:solidFill>
+              <a:latin typeface="Arial"/>
+            </a:endParaRPr>
+          </a:p>
+          <a:p>
+            <a:pPr algn="ctr">
+              <a:lnSpc>
+                <a:spcPct val="100000"/>
+              </a:lnSpc>
+            </a:pPr>
+            <a:r>
+              <a:rPr b="0" lang="en-US" sz="950" spc="-1" strike="noStrike">
+                <a:solidFill>
+                  <a:srgbClr val="78ffc8"/>
+                </a:solidFill>
+                <a:latin typeface="Consolas"/>
+                <a:ea typeface="DejaVu Sans"/>
+              </a:rPr>
+              <a:t>        </a:t>
+            </a:r>
+            <a:r>
+              <a:rPr b="0" lang="en-US" sz="950" spc="-1" strike="noStrike">
+                <a:solidFill>
+                  <a:srgbClr val="78ffc8"/>
+                </a:solidFill>
+                <a:latin typeface="Consolas"/>
+                <a:ea typeface="DejaVu Sans"/>
+              </a:rPr>
+              <a:t>int sonuc = (sayi + 5) % 4; </a:t>
+            </a:r>
+            <a:endParaRPr b="0" lang="en-US" sz="950" spc="-1" strike="noStrike">
+              <a:solidFill>
+                <a:srgbClr val="ffffff"/>
+              </a:solidFill>
+              <a:latin typeface="Arial"/>
+            </a:endParaRPr>
+          </a:p>
+          <a:p>
+            <a:pPr algn="ctr">
+              <a:lnSpc>
+                <a:spcPct val="100000"/>
+              </a:lnSpc>
+            </a:pPr>
+            <a:r>
+              <a:rPr b="0" lang="en-US" sz="950" spc="-1" strike="noStrike">
+                <a:solidFill>
+                  <a:srgbClr val="78ffc8"/>
+                </a:solidFill>
+                <a:latin typeface="Consolas"/>
+                <a:ea typeface="DejaVu Sans"/>
+              </a:rPr>
+              <a:t>        </a:t>
+            </a:r>
+            <a:endParaRPr b="0" lang="en-US" sz="950" spc="-1" strike="noStrike">
+              <a:solidFill>
+                <a:srgbClr val="ffffff"/>
+              </a:solidFill>
+              <a:latin typeface="Arial"/>
+            </a:endParaRPr>
+          </a:p>
+          <a:p>
+            <a:pPr algn="ctr">
+              <a:lnSpc>
+                <a:spcPct val="100000"/>
+              </a:lnSpc>
+            </a:pPr>
+            <a:r>
+              <a:rPr b="0" lang="en-US" sz="950" spc="-1" strike="noStrike">
+                <a:solidFill>
+                  <a:srgbClr val="78ffc8"/>
+                </a:solidFill>
+                <a:latin typeface="Consolas"/>
+                <a:ea typeface="DejaVu Sans"/>
+              </a:rPr>
+              <a:t>        </a:t>
+            </a:r>
+            <a:r>
+              <a:rPr b="0" lang="en-US" sz="950" spc="-1" strike="noStrike">
+                <a:solidFill>
+                  <a:srgbClr val="78ffc8"/>
+                </a:solidFill>
+                <a:latin typeface="Consolas"/>
+                <a:ea typeface="DejaVu Sans"/>
+              </a:rPr>
+              <a:t>// 2. Ondalıklı Bölme (Hassasiyet)</a:t>
+            </a:r>
+            <a:endParaRPr b="0" lang="en-US" sz="950" spc="-1" strike="noStrike">
+              <a:solidFill>
+                <a:srgbClr val="ffffff"/>
+              </a:solidFill>
+              <a:latin typeface="Arial"/>
+            </a:endParaRPr>
+          </a:p>
+          <a:p>
+            <a:pPr algn="ctr">
+              <a:lnSpc>
+                <a:spcPct val="100000"/>
+              </a:lnSpc>
+            </a:pPr>
+            <a:r>
+              <a:rPr b="0" lang="en-US" sz="950" spc="-1" strike="noStrike">
+                <a:solidFill>
+                  <a:srgbClr val="78ffc8"/>
+                </a:solidFill>
+                <a:latin typeface="Consolas"/>
+                <a:ea typeface="DejaVu Sans"/>
+              </a:rPr>
+              <a:t>        </a:t>
+            </a:r>
+            <a:r>
+              <a:rPr b="0" lang="en-US" sz="950" spc="-1" strike="noStrike">
+                <a:solidFill>
+                  <a:srgbClr val="78ffc8"/>
+                </a:solidFill>
+                <a:latin typeface="Consolas"/>
+                <a:ea typeface="DejaVu Sans"/>
+              </a:rPr>
+              <a:t>// 4.0 yazarak int tuzağından kaçtık</a:t>
+            </a:r>
+            <a:endParaRPr b="0" lang="en-US" sz="950" spc="-1" strike="noStrike">
+              <a:solidFill>
+                <a:srgbClr val="ffffff"/>
+              </a:solidFill>
+              <a:latin typeface="Arial"/>
+            </a:endParaRPr>
+          </a:p>
+          <a:p>
+            <a:pPr algn="ctr">
+              <a:lnSpc>
+                <a:spcPct val="100000"/>
+              </a:lnSpc>
+            </a:pPr>
+            <a:r>
+              <a:rPr b="0" lang="en-US" sz="950" spc="-1" strike="noStrike">
+                <a:solidFill>
+                  <a:srgbClr val="78ffc8"/>
+                </a:solidFill>
+                <a:latin typeface="Consolas"/>
+                <a:ea typeface="DejaVu Sans"/>
+              </a:rPr>
+              <a:t>        </a:t>
+            </a:r>
+            <a:r>
+              <a:rPr b="0" lang="en-US" sz="950" spc="-1" strike="noStrike">
+                <a:solidFill>
+                  <a:srgbClr val="78ffc8"/>
+                </a:solidFill>
+                <a:latin typeface="Consolas"/>
+                <a:ea typeface="DejaVu Sans"/>
+              </a:rPr>
+              <a:t>double bolme = sayi / 4.0; // 2.5</a:t>
+            </a:r>
+            <a:endParaRPr b="0" lang="en-US" sz="950" spc="-1" strike="noStrike">
+              <a:solidFill>
+                <a:srgbClr val="ffffff"/>
+              </a:solidFill>
+              <a:latin typeface="Arial"/>
+            </a:endParaRPr>
+          </a:p>
+          <a:p>
+            <a:pPr algn="ctr">
+              <a:lnSpc>
+                <a:spcPct val="100000"/>
+              </a:lnSpc>
+            </a:pPr>
+            <a:r>
+              <a:rPr b="0" lang="en-US" sz="950" spc="-1" strike="noStrike">
+                <a:solidFill>
+                  <a:srgbClr val="78ffc8"/>
+                </a:solidFill>
+                <a:latin typeface="Consolas"/>
+                <a:ea typeface="DejaVu Sans"/>
+              </a:rPr>
+              <a:t>        </a:t>
+            </a:r>
+            <a:endParaRPr b="0" lang="en-US" sz="950" spc="-1" strike="noStrike">
+              <a:solidFill>
+                <a:srgbClr val="ffffff"/>
+              </a:solidFill>
+              <a:latin typeface="Arial"/>
+            </a:endParaRPr>
+          </a:p>
+          <a:p>
+            <a:pPr algn="ctr">
+              <a:lnSpc>
+                <a:spcPct val="100000"/>
+              </a:lnSpc>
+            </a:pPr>
+            <a:r>
+              <a:rPr b="0" lang="en-US" sz="950" spc="-1" strike="noStrike">
+                <a:solidFill>
+                  <a:srgbClr val="78ffc8"/>
+                </a:solidFill>
+                <a:latin typeface="Consolas"/>
+                <a:ea typeface="DejaVu Sans"/>
+              </a:rPr>
+              <a:t>        </a:t>
+            </a:r>
+            <a:r>
+              <a:rPr b="0" lang="en-US" sz="950" spc="-1" strike="noStrike">
+                <a:solidFill>
+                  <a:srgbClr val="78ffc8"/>
+                </a:solidFill>
+                <a:latin typeface="Consolas"/>
+                <a:ea typeface="DejaVu Sans"/>
+              </a:rPr>
+              <a:t>// 3. Bileşik Atama ve Artırma</a:t>
+            </a:r>
+            <a:endParaRPr b="0" lang="en-US" sz="950" spc="-1" strike="noStrike">
+              <a:solidFill>
+                <a:srgbClr val="ffffff"/>
+              </a:solidFill>
+              <a:latin typeface="Arial"/>
+            </a:endParaRPr>
+          </a:p>
+          <a:p>
+            <a:pPr algn="ctr">
+              <a:lnSpc>
+                <a:spcPct val="100000"/>
+              </a:lnSpc>
+            </a:pPr>
+            <a:r>
+              <a:rPr b="0" lang="en-US" sz="950" spc="-1" strike="noStrike">
+                <a:solidFill>
+                  <a:srgbClr val="78ffc8"/>
+                </a:solidFill>
+                <a:latin typeface="Consolas"/>
+                <a:ea typeface="DejaVu Sans"/>
+              </a:rPr>
+              <a:t>        </a:t>
+            </a:r>
+            <a:r>
+              <a:rPr b="0" lang="en-US" sz="950" spc="-1" strike="noStrike">
+                <a:solidFill>
+                  <a:srgbClr val="78ffc8"/>
+                </a:solidFill>
+                <a:latin typeface="Consolas"/>
+                <a:ea typeface="DejaVu Sans"/>
+              </a:rPr>
+              <a:t>sayi += 5; // 15 oldu</a:t>
+            </a:r>
+            <a:endParaRPr b="0" lang="en-US" sz="950" spc="-1" strike="noStrike">
+              <a:solidFill>
+                <a:srgbClr val="ffffff"/>
+              </a:solidFill>
+              <a:latin typeface="Arial"/>
+            </a:endParaRPr>
+          </a:p>
+          <a:p>
+            <a:pPr algn="ctr">
+              <a:lnSpc>
+                <a:spcPct val="100000"/>
+              </a:lnSpc>
+            </a:pPr>
+            <a:r>
+              <a:rPr b="0" lang="en-US" sz="950" spc="-1" strike="noStrike">
+                <a:solidFill>
+                  <a:srgbClr val="78ffc8"/>
+                </a:solidFill>
+                <a:latin typeface="Consolas"/>
+                <a:ea typeface="DejaVu Sans"/>
+              </a:rPr>
+              <a:t>        </a:t>
+            </a:r>
+            <a:r>
+              <a:rPr b="0" lang="en-US" sz="950" spc="-1" strike="noStrike">
+                <a:solidFill>
+                  <a:srgbClr val="78ffc8"/>
+                </a:solidFill>
+                <a:latin typeface="Consolas"/>
+                <a:ea typeface="DejaVu Sans"/>
+              </a:rPr>
+              <a:t>sayi++;    // 16 oldu</a:t>
+            </a:r>
+            <a:endParaRPr b="0" lang="en-US" sz="950" spc="-1" strike="noStrike">
+              <a:solidFill>
+                <a:srgbClr val="ffffff"/>
+              </a:solidFill>
+              <a:latin typeface="Arial"/>
+            </a:endParaRPr>
+          </a:p>
+          <a:p>
+            <a:pPr algn="ctr">
+              <a:lnSpc>
+                <a:spcPct val="100000"/>
+              </a:lnSpc>
+            </a:pPr>
+            <a:r>
+              <a:rPr b="0" lang="en-US" sz="950" spc="-1" strike="noStrike">
+                <a:solidFill>
+                  <a:srgbClr val="78ffc8"/>
+                </a:solidFill>
+                <a:latin typeface="Consolas"/>
+                <a:ea typeface="DejaVu Sans"/>
+              </a:rPr>
+              <a:t>        </a:t>
+            </a:r>
+            <a:endParaRPr b="0" lang="en-US" sz="950" spc="-1" strike="noStrike">
+              <a:solidFill>
+                <a:srgbClr val="ffffff"/>
+              </a:solidFill>
+              <a:latin typeface="Arial"/>
+            </a:endParaRPr>
+          </a:p>
+          <a:p>
+            <a:pPr algn="ctr">
+              <a:lnSpc>
+                <a:spcPct val="100000"/>
+              </a:lnSpc>
+            </a:pPr>
+            <a:r>
+              <a:rPr b="0" lang="en-US" sz="950" spc="-1" strike="noStrike">
+                <a:solidFill>
+                  <a:srgbClr val="78ffc8"/>
+                </a:solidFill>
+                <a:latin typeface="Consolas"/>
+                <a:ea typeface="DejaVu Sans"/>
+              </a:rPr>
+              <a:t>        </a:t>
+            </a:r>
+            <a:r>
+              <a:rPr b="0" lang="en-US" sz="950" spc="-1" strike="noStrike">
+                <a:solidFill>
+                  <a:srgbClr val="78ffc8"/>
+                </a:solidFill>
+                <a:latin typeface="Consolas"/>
+                <a:ea typeface="DejaVu Sans"/>
+              </a:rPr>
+              <a:t>System.out.println("Mod Sonucu: " + sonuc);</a:t>
+            </a:r>
+            <a:endParaRPr b="0" lang="en-US" sz="950" spc="-1" strike="noStrike">
+              <a:solidFill>
+                <a:srgbClr val="ffffff"/>
+              </a:solidFill>
+              <a:latin typeface="Arial"/>
+            </a:endParaRPr>
+          </a:p>
+          <a:p>
+            <a:pPr algn="ctr">
+              <a:lnSpc>
+                <a:spcPct val="100000"/>
+              </a:lnSpc>
+            </a:pPr>
+            <a:r>
+              <a:rPr b="0" lang="en-US" sz="950" spc="-1" strike="noStrike">
+                <a:solidFill>
+                  <a:srgbClr val="78ffc8"/>
+                </a:solidFill>
+                <a:latin typeface="Consolas"/>
+                <a:ea typeface="DejaVu Sans"/>
+              </a:rPr>
+              <a:t>        </a:t>
+            </a:r>
+            <a:r>
+              <a:rPr b="0" lang="en-US" sz="950" spc="-1" strike="noStrike">
+                <a:solidFill>
+                  <a:srgbClr val="78ffc8"/>
+                </a:solidFill>
+                <a:latin typeface="Consolas"/>
+                <a:ea typeface="DejaVu Sans"/>
+              </a:rPr>
+              <a:t>System.out.println("Bölme: " + bolme);</a:t>
+            </a:r>
+            <a:endParaRPr b="0" lang="en-US" sz="950" spc="-1" strike="noStrike">
+              <a:solidFill>
+                <a:srgbClr val="ffffff"/>
+              </a:solidFill>
+              <a:latin typeface="Arial"/>
+            </a:endParaRPr>
+          </a:p>
+          <a:p>
+            <a:pPr algn="ctr">
+              <a:lnSpc>
+                <a:spcPct val="100000"/>
+              </a:lnSpc>
+            </a:pPr>
+            <a:r>
+              <a:rPr b="0" lang="en-US" sz="950" spc="-1" strike="noStrike">
+                <a:solidFill>
+                  <a:srgbClr val="78ffc8"/>
+                </a:solidFill>
+                <a:latin typeface="Consolas"/>
+                <a:ea typeface="DejaVu Sans"/>
+              </a:rPr>
+              <a:t>        </a:t>
+            </a:r>
+            <a:r>
+              <a:rPr b="0" lang="en-US" sz="950" spc="-1" strike="noStrike">
+                <a:solidFill>
+                  <a:srgbClr val="78ffc8"/>
+                </a:solidFill>
+                <a:latin typeface="Consolas"/>
+                <a:ea typeface="DejaVu Sans"/>
+              </a:rPr>
+              <a:t>System.out.println("Son Durum: " + sayi);</a:t>
+            </a:r>
+            <a:endParaRPr b="0" lang="en-US" sz="950" spc="-1" strike="noStrike">
+              <a:solidFill>
+                <a:srgbClr val="ffffff"/>
+              </a:solidFill>
+              <a:latin typeface="Arial"/>
+            </a:endParaRPr>
+          </a:p>
+          <a:p>
+            <a:pPr algn="ctr">
+              <a:lnSpc>
+                <a:spcPct val="100000"/>
+              </a:lnSpc>
+            </a:pPr>
+            <a:r>
+              <a:rPr b="0" lang="en-US" sz="950" spc="-1" strike="noStrike">
+                <a:solidFill>
+                  <a:srgbClr val="78ffc8"/>
+                </a:solidFill>
+                <a:latin typeface="Consolas"/>
+                <a:ea typeface="DejaVu Sans"/>
+              </a:rPr>
+              <a:t>    </a:t>
+            </a:r>
+            <a:r>
+              <a:rPr b="0" lang="en-US" sz="950" spc="-1" strike="noStrike">
+                <a:solidFill>
+                  <a:srgbClr val="78ffc8"/>
+                </a:solidFill>
+                <a:latin typeface="Consolas"/>
+                <a:ea typeface="DejaVu Sans"/>
+              </a:rPr>
+              <a:t>}</a:t>
+            </a:r>
+            <a:endParaRPr b="0" lang="en-US" sz="950" spc="-1" strike="noStrike">
+              <a:solidFill>
+                <a:srgbClr val="ffffff"/>
+              </a:solidFill>
+              <a:latin typeface="Arial"/>
+            </a:endParaRPr>
+          </a:p>
+          <a:p>
+            <a:pPr algn="ctr">
+              <a:lnSpc>
+                <a:spcPct val="100000"/>
+              </a:lnSpc>
+            </a:pPr>
+            <a:r>
+              <a:rPr b="0" lang="en-US" sz="950" spc="-1" strike="noStrike">
+                <a:solidFill>
+                  <a:srgbClr val="78ffc8"/>
+                </a:solidFill>
+                <a:latin typeface="Consolas"/>
+                <a:ea typeface="DejaVu Sans"/>
+              </a:rPr>
+              <a:t>}</a:t>
+            </a:r>
+            <a:endParaRPr b="0" lang="en-US" sz="950" spc="-1" strike="noStrike">
+              <a:solidFill>
+                <a:srgbClr val="ffffff"/>
+              </a:solidFill>
+              <a:latin typeface="Arial"/>
+            </a:endParaRPr>
+          </a:p>
+        </p:txBody>
+      </p:sp>
+      <p:sp>
+        <p:nvSpPr>
+          <p:cNvPr id="404" name="TextBox 45"/>
           <p:cNvSpPr/>
           <p:nvPr/>
         </p:nvSpPr>
@@ -16476,7 +19235,7 @@
         <p:spPr>
           <a:xfrm>
             <a:off x="0" y="0"/>
-            <a:ext cx="12183480" cy="6852600"/>
+            <a:ext cx="12183120" cy="6852240"/>
           </a:xfrm>
           <a:prstGeom prst="rect">
             <a:avLst/>
@@ -16536,7 +19295,7 @@
         <p:spPr>
           <a:xfrm>
             <a:off x="0" y="0"/>
-            <a:ext cx="12960" cy="6852600"/>
+            <a:ext cx="12600" cy="6852240"/>
           </a:xfrm>
           <a:prstGeom prst="rect">
             <a:avLst/>
@@ -16596,7 +19355,7 @@
         <p:spPr>
           <a:xfrm>
             <a:off x="914400" y="0"/>
-            <a:ext cx="12960" cy="6852600"/>
+            <a:ext cx="12600" cy="6852240"/>
           </a:xfrm>
           <a:prstGeom prst="rect">
             <a:avLst/>
@@ -16656,7 +19415,7 @@
         <p:spPr>
           <a:xfrm>
             <a:off x="1828800" y="0"/>
-            <a:ext cx="12960" cy="6852600"/>
+            <a:ext cx="12600" cy="6852240"/>
           </a:xfrm>
           <a:prstGeom prst="rect">
             <a:avLst/>
@@ -16716,7 +19475,7 @@
         <p:spPr>
           <a:xfrm>
             <a:off x="2743200" y="0"/>
-            <a:ext cx="12960" cy="6852600"/>
+            <a:ext cx="12600" cy="6852240"/>
           </a:xfrm>
           <a:prstGeom prst="rect">
             <a:avLst/>
@@ -16776,7 +19535,7 @@
         <p:spPr>
           <a:xfrm>
             <a:off x="3657600" y="0"/>
-            <a:ext cx="12960" cy="6852600"/>
+            <a:ext cx="12600" cy="6852240"/>
           </a:xfrm>
           <a:prstGeom prst="rect">
             <a:avLst/>
@@ -16836,7 +19595,7 @@
         <p:spPr>
           <a:xfrm>
             <a:off x="4572000" y="0"/>
-            <a:ext cx="12960" cy="6852600"/>
+            <a:ext cx="12600" cy="6852240"/>
           </a:xfrm>
           <a:prstGeom prst="rect">
             <a:avLst/>
@@ -16896,7 +19655,7 @@
         <p:spPr>
           <a:xfrm>
             <a:off x="5486400" y="0"/>
-            <a:ext cx="12960" cy="6852600"/>
+            <a:ext cx="12600" cy="6852240"/>
           </a:xfrm>
           <a:prstGeom prst="rect">
             <a:avLst/>
@@ -16956,7 +19715,7 @@
         <p:spPr>
           <a:xfrm>
             <a:off x="6400800" y="0"/>
-            <a:ext cx="12960" cy="6852600"/>
+            <a:ext cx="12600" cy="6852240"/>
           </a:xfrm>
           <a:prstGeom prst="rect">
             <a:avLst/>
@@ -17016,7 +19775,7 @@
         <p:spPr>
           <a:xfrm>
             <a:off x="7315200" y="0"/>
-            <a:ext cx="12960" cy="6852600"/>
+            <a:ext cx="12600" cy="6852240"/>
           </a:xfrm>
           <a:prstGeom prst="rect">
             <a:avLst/>
@@ -17076,7 +19835,7 @@
         <p:spPr>
           <a:xfrm>
             <a:off x="8229600" y="0"/>
-            <a:ext cx="12960" cy="6852600"/>
+            <a:ext cx="12600" cy="6852240"/>
           </a:xfrm>
           <a:prstGeom prst="rect">
             <a:avLst/>
@@ -17136,7 +19895,7 @@
         <p:spPr>
           <a:xfrm>
             <a:off x="9144000" y="0"/>
-            <a:ext cx="12960" cy="6852600"/>
+            <a:ext cx="12600" cy="6852240"/>
           </a:xfrm>
           <a:prstGeom prst="rect">
             <a:avLst/>
@@ -17196,7 +19955,7 @@
         <p:spPr>
           <a:xfrm>
             <a:off x="10058400" y="0"/>
-            <a:ext cx="12960" cy="6852600"/>
+            <a:ext cx="12600" cy="6852240"/>
           </a:xfrm>
           <a:prstGeom prst="rect">
             <a:avLst/>
@@ -17256,7 +20015,7 @@
         <p:spPr>
           <a:xfrm>
             <a:off x="10972800" y="0"/>
-            <a:ext cx="12960" cy="6852600"/>
+            <a:ext cx="12600" cy="6852240"/>
           </a:xfrm>
           <a:prstGeom prst="rect">
             <a:avLst/>
@@ -17316,7 +20075,7 @@
         <p:spPr>
           <a:xfrm>
             <a:off x="11887200" y="0"/>
-            <a:ext cx="12960" cy="6852600"/>
+            <a:ext cx="12600" cy="6852240"/>
           </a:xfrm>
           <a:prstGeom prst="rect">
             <a:avLst/>
@@ -17376,7 +20135,7 @@
         <p:spPr>
           <a:xfrm>
             <a:off x="0" y="0"/>
-            <a:ext cx="314640" cy="6852600"/>
+            <a:ext cx="314280" cy="6852240"/>
           </a:xfrm>
           <a:prstGeom prst="rect">
             <a:avLst/>
@@ -17436,7 +20195,7 @@
         <p:spPr>
           <a:xfrm>
             <a:off x="9875520" y="365760"/>
-            <a:ext cx="2006280" cy="497520"/>
+            <a:ext cx="2005920" cy="497160"/>
           </a:xfrm>
           <a:prstGeom prst="roundRect">
             <a:avLst>
@@ -17664,7 +20423,7 @@
         <p:spPr>
           <a:xfrm>
             <a:off x="987480" y="3182040"/>
-            <a:ext cx="3286440" cy="2737800"/>
+            <a:ext cx="3286080" cy="2737440"/>
           </a:xfrm>
           <a:prstGeom prst="roundRect">
             <a:avLst>
@@ -17726,7 +20485,7 @@
         <p:spPr>
           <a:xfrm>
             <a:off x="914400" y="3108960"/>
-            <a:ext cx="3286440" cy="2737800"/>
+            <a:ext cx="3286080" cy="2737440"/>
           </a:xfrm>
           <a:prstGeom prst="roundRect">
             <a:avLst>
@@ -17889,7 +20648,7 @@
         <p:spPr>
           <a:xfrm>
             <a:off x="4507920" y="3182040"/>
-            <a:ext cx="3286440" cy="2737800"/>
+            <a:ext cx="3286080" cy="2737440"/>
           </a:xfrm>
           <a:prstGeom prst="roundRect">
             <a:avLst>
@@ -17951,7 +20710,7 @@
         <p:spPr>
           <a:xfrm>
             <a:off x="4434840" y="3108960"/>
-            <a:ext cx="3286440" cy="2737800"/>
+            <a:ext cx="3286080" cy="2737440"/>
           </a:xfrm>
           <a:prstGeom prst="roundRect">
             <a:avLst>
@@ -18209,7 +20968,7 @@
         <p:spPr>
           <a:xfrm>
             <a:off x="8028360" y="3182040"/>
-            <a:ext cx="3286440" cy="2737800"/>
+            <a:ext cx="3286080" cy="2737440"/>
           </a:xfrm>
           <a:prstGeom prst="roundRect">
             <a:avLst>
@@ -18271,7 +21030,7 @@
         <p:spPr>
           <a:xfrm>
             <a:off x="7955280" y="3108960"/>
-            <a:ext cx="3699000" cy="3058920"/>
+            <a:ext cx="3698640" cy="3058560"/>
           </a:xfrm>
           <a:prstGeom prst="roundRect">
             <a:avLst>
@@ -18716,7 +21475,7 @@
         <p:spPr>
           <a:xfrm>
             <a:off x="0" y="0"/>
-            <a:ext cx="12183480" cy="6852600"/>
+            <a:ext cx="12183120" cy="6852240"/>
           </a:xfrm>
           <a:prstGeom prst="rect">
             <a:avLst/>
@@ -18776,7 +21535,7 @@
         <p:spPr>
           <a:xfrm>
             <a:off x="0" y="0"/>
-            <a:ext cx="12960" cy="6852600"/>
+            <a:ext cx="12600" cy="6852240"/>
           </a:xfrm>
           <a:prstGeom prst="rect">
             <a:avLst/>
@@ -18836,7 +21595,7 @@
         <p:spPr>
           <a:xfrm>
             <a:off x="914400" y="0"/>
-            <a:ext cx="12960" cy="6852600"/>
+            <a:ext cx="12600" cy="6852240"/>
           </a:xfrm>
           <a:prstGeom prst="rect">
             <a:avLst/>
@@ -18896,7 +21655,7 @@
         <p:spPr>
           <a:xfrm>
             <a:off x="1828800" y="0"/>
-            <a:ext cx="12960" cy="6852600"/>
+            <a:ext cx="12600" cy="6852240"/>
           </a:xfrm>
           <a:prstGeom prst="rect">
             <a:avLst/>
@@ -18956,7 +21715,7 @@
         <p:spPr>
           <a:xfrm>
             <a:off x="2743200" y="0"/>
-            <a:ext cx="12960" cy="6852600"/>
+            <a:ext cx="12600" cy="6852240"/>
           </a:xfrm>
           <a:prstGeom prst="rect">
             <a:avLst/>
@@ -19016,7 +21775,7 @@
         <p:spPr>
           <a:xfrm>
             <a:off x="3657600" y="0"/>
-            <a:ext cx="12960" cy="6852600"/>
+            <a:ext cx="12600" cy="6852240"/>
           </a:xfrm>
           <a:prstGeom prst="rect">
             <a:avLst/>
@@ -19076,7 +21835,7 @@
         <p:spPr>
           <a:xfrm>
             <a:off x="4572000" y="0"/>
-            <a:ext cx="12960" cy="6852600"/>
+            <a:ext cx="12600" cy="6852240"/>
           </a:xfrm>
           <a:prstGeom prst="rect">
             <a:avLst/>
@@ -19136,7 +21895,7 @@
         <p:spPr>
           <a:xfrm>
             <a:off x="5486400" y="0"/>
-            <a:ext cx="12960" cy="6852600"/>
+            <a:ext cx="12600" cy="6852240"/>
           </a:xfrm>
           <a:prstGeom prst="rect">
             <a:avLst/>
@@ -19196,7 +21955,7 @@
         <p:spPr>
           <a:xfrm>
             <a:off x="6400800" y="0"/>
-            <a:ext cx="12960" cy="6852600"/>
+            <a:ext cx="12600" cy="6852240"/>
           </a:xfrm>
           <a:prstGeom prst="rect">
             <a:avLst/>
@@ -19256,7 +22015,7 @@
         <p:spPr>
           <a:xfrm>
             <a:off x="7315200" y="0"/>
-            <a:ext cx="12960" cy="6852600"/>
+            <a:ext cx="12600" cy="6852240"/>
           </a:xfrm>
           <a:prstGeom prst="rect">
             <a:avLst/>
@@ -19316,7 +22075,7 @@
         <p:spPr>
           <a:xfrm>
             <a:off x="8229600" y="0"/>
-            <a:ext cx="12960" cy="6852600"/>
+            <a:ext cx="12600" cy="6852240"/>
           </a:xfrm>
           <a:prstGeom prst="rect">
             <a:avLst/>
@@ -19376,7 +22135,7 @@
         <p:spPr>
           <a:xfrm>
             <a:off x="9144000" y="0"/>
-            <a:ext cx="12960" cy="6852600"/>
+            <a:ext cx="12600" cy="6852240"/>
           </a:xfrm>
           <a:prstGeom prst="rect">
             <a:avLst/>
@@ -19436,7 +22195,7 @@
         <p:spPr>
           <a:xfrm>
             <a:off x="10058400" y="0"/>
-            <a:ext cx="12960" cy="6852600"/>
+            <a:ext cx="12600" cy="6852240"/>
           </a:xfrm>
           <a:prstGeom prst="rect">
             <a:avLst/>
@@ -19496,7 +22255,7 @@
         <p:spPr>
           <a:xfrm>
             <a:off x="10972800" y="0"/>
-            <a:ext cx="12960" cy="6852600"/>
+            <a:ext cx="12600" cy="6852240"/>
           </a:xfrm>
           <a:prstGeom prst="rect">
             <a:avLst/>
@@ -19556,7 +22315,7 @@
         <p:spPr>
           <a:xfrm>
             <a:off x="11887200" y="0"/>
-            <a:ext cx="12960" cy="6852600"/>
+            <a:ext cx="12600" cy="6852240"/>
           </a:xfrm>
           <a:prstGeom prst="rect">
             <a:avLst/>
@@ -19616,7 +22375,7 @@
         <p:spPr>
           <a:xfrm>
             <a:off x="0" y="0"/>
-            <a:ext cx="314640" cy="6852600"/>
+            <a:ext cx="314280" cy="6852240"/>
           </a:xfrm>
           <a:prstGeom prst="rect">
             <a:avLst/>
@@ -19676,7 +22435,7 @@
         <p:spPr>
           <a:xfrm>
             <a:off x="9875520" y="365760"/>
-            <a:ext cx="2006280" cy="497520"/>
+            <a:ext cx="2005920" cy="497160"/>
           </a:xfrm>
           <a:prstGeom prst="roundRect">
             <a:avLst>
@@ -19881,7 +22640,7 @@
         <p:spPr>
           <a:xfrm>
             <a:off x="987480" y="3182040"/>
-            <a:ext cx="3286440" cy="2737800"/>
+            <a:ext cx="3286080" cy="2737440"/>
           </a:xfrm>
           <a:prstGeom prst="roundRect">
             <a:avLst>
@@ -19943,7 +22702,7 @@
         <p:spPr>
           <a:xfrm>
             <a:off x="914400" y="3108960"/>
-            <a:ext cx="3286440" cy="3059280"/>
+            <a:ext cx="3286080" cy="3058920"/>
           </a:xfrm>
           <a:prstGeom prst="roundRect">
             <a:avLst>
@@ -20134,7 +22893,7 @@
         <p:spPr>
           <a:xfrm>
             <a:off x="4507920" y="3182040"/>
-            <a:ext cx="3286440" cy="2737800"/>
+            <a:ext cx="3286080" cy="2737440"/>
           </a:xfrm>
           <a:prstGeom prst="roundRect">
             <a:avLst>
@@ -20196,7 +22955,7 @@
         <p:spPr>
           <a:xfrm>
             <a:off x="4434840" y="3108960"/>
-            <a:ext cx="3286440" cy="2737800"/>
+            <a:ext cx="3286080" cy="2737440"/>
           </a:xfrm>
           <a:prstGeom prst="roundRect">
             <a:avLst>
@@ -20454,7 +23213,7 @@
         <p:spPr>
           <a:xfrm>
             <a:off x="8028360" y="3182040"/>
-            <a:ext cx="3286440" cy="2737800"/>
+            <a:ext cx="3286080" cy="2737440"/>
           </a:xfrm>
           <a:prstGeom prst="roundRect">
             <a:avLst>
@@ -20516,7 +23275,7 @@
         <p:spPr>
           <a:xfrm>
             <a:off x="7955280" y="3108960"/>
-            <a:ext cx="3699000" cy="3058920"/>
+            <a:ext cx="3698640" cy="3058560"/>
           </a:xfrm>
           <a:prstGeom prst="roundRect">
             <a:avLst>
@@ -20961,7 +23720,7 @@
         <p:spPr>
           <a:xfrm>
             <a:off x="0" y="0"/>
-            <a:ext cx="12183480" cy="6852600"/>
+            <a:ext cx="12183120" cy="6852240"/>
           </a:xfrm>
           <a:prstGeom prst="rect">
             <a:avLst/>
@@ -21021,7 +23780,7 @@
         <p:spPr>
           <a:xfrm>
             <a:off x="0" y="0"/>
-            <a:ext cx="12960" cy="6852600"/>
+            <a:ext cx="12600" cy="6852240"/>
           </a:xfrm>
           <a:prstGeom prst="rect">
             <a:avLst/>
@@ -21081,7 +23840,7 @@
         <p:spPr>
           <a:xfrm>
             <a:off x="914400" y="0"/>
-            <a:ext cx="12960" cy="6852600"/>
+            <a:ext cx="12600" cy="6852240"/>
           </a:xfrm>
           <a:prstGeom prst="rect">
             <a:avLst/>
@@ -21141,7 +23900,7 @@
         <p:spPr>
           <a:xfrm>
             <a:off x="1828800" y="0"/>
-            <a:ext cx="12960" cy="6852600"/>
+            <a:ext cx="12600" cy="6852240"/>
           </a:xfrm>
           <a:prstGeom prst="rect">
             <a:avLst/>
@@ -21201,7 +23960,7 @@
         <p:spPr>
           <a:xfrm>
             <a:off x="2743200" y="0"/>
-            <a:ext cx="12960" cy="6852600"/>
+            <a:ext cx="12600" cy="6852240"/>
           </a:xfrm>
           <a:prstGeom prst="rect">
             <a:avLst/>
@@ -21261,7 +24020,7 @@
         <p:spPr>
           <a:xfrm>
             <a:off x="3657600" y="0"/>
-            <a:ext cx="12960" cy="6852600"/>
+            <a:ext cx="12600" cy="6852240"/>
           </a:xfrm>
           <a:prstGeom prst="rect">
             <a:avLst/>
@@ -21321,7 +24080,7 @@
         <p:spPr>
           <a:xfrm>
             <a:off x="4572000" y="0"/>
-            <a:ext cx="12960" cy="6852600"/>
+            <a:ext cx="12600" cy="6852240"/>
           </a:xfrm>
           <a:prstGeom prst="rect">
             <a:avLst/>
@@ -21381,7 +24140,7 @@
         <p:spPr>
           <a:xfrm>
             <a:off x="5486400" y="0"/>
-            <a:ext cx="12960" cy="6852600"/>
+            <a:ext cx="12600" cy="6852240"/>
           </a:xfrm>
           <a:prstGeom prst="rect">
             <a:avLst/>
@@ -21441,7 +24200,7 @@
         <p:spPr>
           <a:xfrm>
             <a:off x="6400800" y="0"/>
-            <a:ext cx="12960" cy="6852600"/>
+            <a:ext cx="12600" cy="6852240"/>
           </a:xfrm>
           <a:prstGeom prst="rect">
             <a:avLst/>
@@ -21501,7 +24260,7 @@
         <p:spPr>
           <a:xfrm>
             <a:off x="7315200" y="0"/>
-            <a:ext cx="12960" cy="6852600"/>
+            <a:ext cx="12600" cy="6852240"/>
           </a:xfrm>
           <a:prstGeom prst="rect">
             <a:avLst/>
@@ -21561,7 +24320,7 @@
         <p:spPr>
           <a:xfrm>
             <a:off x="8229600" y="0"/>
-            <a:ext cx="12960" cy="6852600"/>
+            <a:ext cx="12600" cy="6852240"/>
           </a:xfrm>
           <a:prstGeom prst="rect">
             <a:avLst/>
@@ -21621,7 +24380,7 @@
         <p:spPr>
           <a:xfrm>
             <a:off x="9144000" y="0"/>
-            <a:ext cx="12960" cy="6852600"/>
+            <a:ext cx="12600" cy="6852240"/>
           </a:xfrm>
           <a:prstGeom prst="rect">
             <a:avLst/>
@@ -21681,7 +24440,7 @@
         <p:spPr>
           <a:xfrm>
             <a:off x="10058400" y="0"/>
-            <a:ext cx="12960" cy="6852600"/>
+            <a:ext cx="12600" cy="6852240"/>
           </a:xfrm>
           <a:prstGeom prst="rect">
             <a:avLst/>
@@ -21741,7 +24500,7 @@
         <p:spPr>
           <a:xfrm>
             <a:off x="10972800" y="0"/>
-            <a:ext cx="12960" cy="6852600"/>
+            <a:ext cx="12600" cy="6852240"/>
           </a:xfrm>
           <a:prstGeom prst="rect">
             <a:avLst/>
@@ -21801,7 +24560,7 @@
         <p:spPr>
           <a:xfrm>
             <a:off x="11887200" y="0"/>
-            <a:ext cx="12960" cy="6852600"/>
+            <a:ext cx="12600" cy="6852240"/>
           </a:xfrm>
           <a:prstGeom prst="rect">
             <a:avLst/>
@@ -21861,7 +24620,7 @@
         <p:spPr>
           <a:xfrm>
             <a:off x="0" y="0"/>
-            <a:ext cx="314640" cy="6852600"/>
+            <a:ext cx="314280" cy="6852240"/>
           </a:xfrm>
           <a:prstGeom prst="rect">
             <a:avLst/>
@@ -21921,7 +24680,7 @@
         <p:spPr>
           <a:xfrm>
             <a:off x="9875520" y="365760"/>
-            <a:ext cx="2006280" cy="497520"/>
+            <a:ext cx="2005920" cy="497160"/>
           </a:xfrm>
           <a:prstGeom prst="roundRect">
             <a:avLst>
@@ -22126,7 +24885,7 @@
         <p:spPr>
           <a:xfrm>
             <a:off x="987480" y="3182040"/>
-            <a:ext cx="3286440" cy="2737800"/>
+            <a:ext cx="3286080" cy="2737440"/>
           </a:xfrm>
           <a:prstGeom prst="roundRect">
             <a:avLst>
@@ -22188,7 +24947,7 @@
         <p:spPr>
           <a:xfrm>
             <a:off x="914400" y="3108960"/>
-            <a:ext cx="3286440" cy="3059280"/>
+            <a:ext cx="3286080" cy="3058920"/>
           </a:xfrm>
           <a:prstGeom prst="roundRect">
             <a:avLst>
@@ -22379,7 +25138,7 @@
         <p:spPr>
           <a:xfrm>
             <a:off x="4507920" y="3182040"/>
-            <a:ext cx="3286440" cy="2737800"/>
+            <a:ext cx="3286080" cy="2737440"/>
           </a:xfrm>
           <a:prstGeom prst="roundRect">
             <a:avLst>
@@ -22441,7 +25200,7 @@
         <p:spPr>
           <a:xfrm>
             <a:off x="4434840" y="3108960"/>
-            <a:ext cx="3286440" cy="2737800"/>
+            <a:ext cx="3286080" cy="2737440"/>
           </a:xfrm>
           <a:prstGeom prst="roundRect">
             <a:avLst>
@@ -22653,7 +25412,7 @@
         <p:spPr>
           <a:xfrm>
             <a:off x="8028360" y="3182040"/>
-            <a:ext cx="3286440" cy="2737800"/>
+            <a:ext cx="3286080" cy="2737440"/>
           </a:xfrm>
           <a:prstGeom prst="roundRect">
             <a:avLst>
@@ -22715,7 +25474,7 @@
         <p:spPr>
           <a:xfrm>
             <a:off x="7955280" y="2743200"/>
-            <a:ext cx="3699000" cy="3654000"/>
+            <a:ext cx="3698640" cy="3653640"/>
           </a:xfrm>
           <a:prstGeom prst="roundRect">
             <a:avLst>
@@ -23275,7 +26034,7 @@
         <p:spPr>
           <a:xfrm>
             <a:off x="0" y="0"/>
-            <a:ext cx="12183480" cy="6852600"/>
+            <a:ext cx="12183120" cy="6852240"/>
           </a:xfrm>
           <a:prstGeom prst="rect">
             <a:avLst/>
@@ -23335,7 +26094,7 @@
         <p:spPr>
           <a:xfrm>
             <a:off x="0" y="0"/>
-            <a:ext cx="12960" cy="6852600"/>
+            <a:ext cx="12600" cy="6852240"/>
           </a:xfrm>
           <a:prstGeom prst="rect">
             <a:avLst/>
@@ -23395,7 +26154,7 @@
         <p:spPr>
           <a:xfrm>
             <a:off x="914400" y="0"/>
-            <a:ext cx="12960" cy="6852600"/>
+            <a:ext cx="12600" cy="6852240"/>
           </a:xfrm>
           <a:prstGeom prst="rect">
             <a:avLst/>
@@ -23455,7 +26214,7 @@
         <p:spPr>
           <a:xfrm>
             <a:off x="1828800" y="0"/>
-            <a:ext cx="12960" cy="6852600"/>
+            <a:ext cx="12600" cy="6852240"/>
           </a:xfrm>
           <a:prstGeom prst="rect">
             <a:avLst/>
@@ -23515,7 +26274,7 @@
         <p:spPr>
           <a:xfrm>
             <a:off x="2743200" y="0"/>
-            <a:ext cx="12960" cy="6852600"/>
+            <a:ext cx="12600" cy="6852240"/>
           </a:xfrm>
           <a:prstGeom prst="rect">
             <a:avLst/>
@@ -23575,7 +26334,7 @@
         <p:spPr>
           <a:xfrm>
             <a:off x="3657600" y="0"/>
-            <a:ext cx="12960" cy="6852600"/>
+            <a:ext cx="12600" cy="6852240"/>
           </a:xfrm>
           <a:prstGeom prst="rect">
             <a:avLst/>
@@ -23635,7 +26394,7 @@
         <p:spPr>
           <a:xfrm>
             <a:off x="4572000" y="0"/>
-            <a:ext cx="12960" cy="6852600"/>
+            <a:ext cx="12600" cy="6852240"/>
           </a:xfrm>
           <a:prstGeom prst="rect">
             <a:avLst/>
@@ -23695,7 +26454,7 @@
         <p:spPr>
           <a:xfrm>
             <a:off x="5486400" y="0"/>
-            <a:ext cx="12960" cy="6852600"/>
+            <a:ext cx="12600" cy="6852240"/>
           </a:xfrm>
           <a:prstGeom prst="rect">
             <a:avLst/>
@@ -23755,7 +26514,7 @@
         <p:spPr>
           <a:xfrm>
             <a:off x="6400800" y="0"/>
-            <a:ext cx="12960" cy="6852600"/>
+            <a:ext cx="12600" cy="6852240"/>
           </a:xfrm>
           <a:prstGeom prst="rect">
             <a:avLst/>
@@ -23815,7 +26574,7 @@
         <p:spPr>
           <a:xfrm>
             <a:off x="7315200" y="0"/>
-            <a:ext cx="12960" cy="6852600"/>
+            <a:ext cx="12600" cy="6852240"/>
           </a:xfrm>
           <a:prstGeom prst="rect">
             <a:avLst/>
@@ -23875,7 +26634,7 @@
         <p:spPr>
           <a:xfrm>
             <a:off x="8229600" y="0"/>
-            <a:ext cx="12960" cy="6852600"/>
+            <a:ext cx="12600" cy="6852240"/>
           </a:xfrm>
           <a:prstGeom prst="rect">
             <a:avLst/>
@@ -23935,7 +26694,7 @@
         <p:spPr>
           <a:xfrm>
             <a:off x="9144000" y="0"/>
-            <a:ext cx="12960" cy="6852600"/>
+            <a:ext cx="12600" cy="6852240"/>
           </a:xfrm>
           <a:prstGeom prst="rect">
             <a:avLst/>
@@ -23995,7 +26754,7 @@
         <p:spPr>
           <a:xfrm>
             <a:off x="10058400" y="0"/>
-            <a:ext cx="12960" cy="6852600"/>
+            <a:ext cx="12600" cy="6852240"/>
           </a:xfrm>
           <a:prstGeom prst="rect">
             <a:avLst/>
@@ -24055,7 +26814,7 @@
         <p:spPr>
           <a:xfrm>
             <a:off x="10972800" y="0"/>
-            <a:ext cx="12960" cy="6852600"/>
+            <a:ext cx="12600" cy="6852240"/>
           </a:xfrm>
           <a:prstGeom prst="rect">
             <a:avLst/>
@@ -24115,7 +26874,7 @@
         <p:spPr>
           <a:xfrm>
             <a:off x="11887200" y="0"/>
-            <a:ext cx="12960" cy="6852600"/>
+            <a:ext cx="12600" cy="6852240"/>
           </a:xfrm>
           <a:prstGeom prst="rect">
             <a:avLst/>
@@ -24175,7 +26934,7 @@
         <p:spPr>
           <a:xfrm>
             <a:off x="0" y="0"/>
-            <a:ext cx="314640" cy="6852600"/>
+            <a:ext cx="314280" cy="6852240"/>
           </a:xfrm>
           <a:prstGeom prst="rect">
             <a:avLst/>
@@ -24235,7 +26994,7 @@
         <p:spPr>
           <a:xfrm>
             <a:off x="9875520" y="365760"/>
-            <a:ext cx="2006280" cy="497520"/>
+            <a:ext cx="2005920" cy="497160"/>
           </a:xfrm>
           <a:prstGeom prst="roundRect">
             <a:avLst>
@@ -24440,7 +27199,7 @@
         <p:spPr>
           <a:xfrm>
             <a:off x="987480" y="3182040"/>
-            <a:ext cx="3286440" cy="2737800"/>
+            <a:ext cx="3286080" cy="2737440"/>
           </a:xfrm>
           <a:prstGeom prst="roundRect">
             <a:avLst>
@@ -24502,7 +27261,7 @@
         <p:spPr>
           <a:xfrm>
             <a:off x="457200" y="2514600"/>
-            <a:ext cx="3743640" cy="4111560"/>
+            <a:ext cx="3743280" cy="4111200"/>
           </a:xfrm>
           <a:prstGeom prst="roundRect">
             <a:avLst>
@@ -24740,7 +27499,7 @@
         <p:spPr>
           <a:xfrm>
             <a:off x="4507920" y="3182040"/>
-            <a:ext cx="3286440" cy="2737800"/>
+            <a:ext cx="3286080" cy="2737440"/>
           </a:xfrm>
           <a:prstGeom prst="roundRect">
             <a:avLst>
@@ -24802,7 +27561,7 @@
         <p:spPr>
           <a:xfrm>
             <a:off x="4434840" y="2971800"/>
-            <a:ext cx="3286440" cy="3424680"/>
+            <a:ext cx="3286080" cy="3424320"/>
           </a:xfrm>
           <a:prstGeom prst="roundRect">
             <a:avLst>
@@ -25021,7 +27780,7 @@
         <p:spPr>
           <a:xfrm>
             <a:off x="8028360" y="3182040"/>
-            <a:ext cx="3286440" cy="2737800"/>
+            <a:ext cx="3286080" cy="2737440"/>
           </a:xfrm>
           <a:prstGeom prst="roundRect">
             <a:avLst>
@@ -25083,7 +27842,7 @@
         <p:spPr>
           <a:xfrm>
             <a:off x="8001000" y="3200400"/>
-            <a:ext cx="3471480" cy="2739960"/>
+            <a:ext cx="3471120" cy="2739600"/>
           </a:xfrm>
           <a:prstGeom prst="roundRect">
             <a:avLst>
@@ -25495,7 +28254,7 @@
         <p:spPr>
           <a:xfrm>
             <a:off x="0" y="0"/>
-            <a:ext cx="12183480" cy="6852600"/>
+            <a:ext cx="12183120" cy="6852240"/>
           </a:xfrm>
           <a:prstGeom prst="rect">
             <a:avLst/>
@@ -25555,7 +28314,7 @@
         <p:spPr>
           <a:xfrm>
             <a:off x="0" y="0"/>
-            <a:ext cx="12960" cy="6852600"/>
+            <a:ext cx="12600" cy="6852240"/>
           </a:xfrm>
           <a:prstGeom prst="rect">
             <a:avLst/>
@@ -25615,7 +28374,7 @@
         <p:spPr>
           <a:xfrm>
             <a:off x="914400" y="0"/>
-            <a:ext cx="12960" cy="6852600"/>
+            <a:ext cx="12600" cy="6852240"/>
           </a:xfrm>
           <a:prstGeom prst="rect">
             <a:avLst/>
@@ -25675,7 +28434,7 @@
         <p:spPr>
           <a:xfrm>
             <a:off x="1828800" y="0"/>
-            <a:ext cx="12960" cy="6852600"/>
+            <a:ext cx="12600" cy="6852240"/>
           </a:xfrm>
           <a:prstGeom prst="rect">
             <a:avLst/>
@@ -25735,7 +28494,7 @@
         <p:spPr>
           <a:xfrm>
             <a:off x="2743200" y="0"/>
-            <a:ext cx="12960" cy="6852600"/>
+            <a:ext cx="12600" cy="6852240"/>
           </a:xfrm>
           <a:prstGeom prst="rect">
             <a:avLst/>
@@ -25795,7 +28554,7 @@
         <p:spPr>
           <a:xfrm>
             <a:off x="3657600" y="0"/>
-            <a:ext cx="12960" cy="6852600"/>
+            <a:ext cx="12600" cy="6852240"/>
           </a:xfrm>
           <a:prstGeom prst="rect">
             <a:avLst/>
@@ -25855,7 +28614,7 @@
         <p:spPr>
           <a:xfrm>
             <a:off x="4572000" y="0"/>
-            <a:ext cx="12960" cy="6852600"/>
+            <a:ext cx="12600" cy="6852240"/>
           </a:xfrm>
           <a:prstGeom prst="rect">
             <a:avLst/>
@@ -25915,7 +28674,7 @@
         <p:spPr>
           <a:xfrm>
             <a:off x="5486400" y="0"/>
-            <a:ext cx="12960" cy="6852600"/>
+            <a:ext cx="12600" cy="6852240"/>
           </a:xfrm>
           <a:prstGeom prst="rect">
             <a:avLst/>
@@ -25975,7 +28734,7 @@
         <p:spPr>
           <a:xfrm>
             <a:off x="6400800" y="0"/>
-            <a:ext cx="12960" cy="6852600"/>
+            <a:ext cx="12600" cy="6852240"/>
           </a:xfrm>
           <a:prstGeom prst="rect">
             <a:avLst/>
@@ -26035,7 +28794,7 @@
         <p:spPr>
           <a:xfrm>
             <a:off x="7315200" y="0"/>
-            <a:ext cx="12960" cy="6852600"/>
+            <a:ext cx="12600" cy="6852240"/>
           </a:xfrm>
           <a:prstGeom prst="rect">
             <a:avLst/>
@@ -26095,7 +28854,7 @@
         <p:spPr>
           <a:xfrm>
             <a:off x="8229600" y="0"/>
-            <a:ext cx="12960" cy="6852600"/>
+            <a:ext cx="12600" cy="6852240"/>
           </a:xfrm>
           <a:prstGeom prst="rect">
             <a:avLst/>
@@ -26155,7 +28914,7 @@
         <p:spPr>
           <a:xfrm>
             <a:off x="9144000" y="0"/>
-            <a:ext cx="12960" cy="6852600"/>
+            <a:ext cx="12600" cy="6852240"/>
           </a:xfrm>
           <a:prstGeom prst="rect">
             <a:avLst/>
@@ -26215,7 +28974,7 @@
         <p:spPr>
           <a:xfrm>
             <a:off x="10058400" y="0"/>
-            <a:ext cx="12960" cy="6852600"/>
+            <a:ext cx="12600" cy="6852240"/>
           </a:xfrm>
           <a:prstGeom prst="rect">
             <a:avLst/>
@@ -26275,7 +29034,7 @@
         <p:spPr>
           <a:xfrm>
             <a:off x="10972800" y="0"/>
-            <a:ext cx="12960" cy="6852600"/>
+            <a:ext cx="12600" cy="6852240"/>
           </a:xfrm>
           <a:prstGeom prst="rect">
             <a:avLst/>
@@ -26335,7 +29094,7 @@
         <p:spPr>
           <a:xfrm>
             <a:off x="11887200" y="0"/>
-            <a:ext cx="12960" cy="6852600"/>
+            <a:ext cx="12600" cy="6852240"/>
           </a:xfrm>
           <a:prstGeom prst="rect">
             <a:avLst/>
@@ -26395,7 +29154,7 @@
         <p:spPr>
           <a:xfrm>
             <a:off x="0" y="0"/>
-            <a:ext cx="314640" cy="6852600"/>
+            <a:ext cx="314280" cy="6852240"/>
           </a:xfrm>
           <a:prstGeom prst="rect">
             <a:avLst/>
@@ -26455,7 +29214,7 @@
         <p:spPr>
           <a:xfrm>
             <a:off x="9875520" y="365760"/>
-            <a:ext cx="2006280" cy="497520"/>
+            <a:ext cx="2005920" cy="497160"/>
           </a:xfrm>
           <a:prstGeom prst="roundRect">
             <a:avLst>
@@ -26660,7 +29419,7 @@
         <p:spPr>
           <a:xfrm>
             <a:off x="987480" y="3182040"/>
-            <a:ext cx="3286440" cy="2737800"/>
+            <a:ext cx="3286080" cy="2737440"/>
           </a:xfrm>
           <a:prstGeom prst="roundRect">
             <a:avLst>
@@ -26722,7 +29481,7 @@
         <p:spPr>
           <a:xfrm>
             <a:off x="457200" y="2514600"/>
-            <a:ext cx="3743640" cy="4111560"/>
+            <a:ext cx="3743280" cy="4111200"/>
           </a:xfrm>
           <a:prstGeom prst="roundRect">
             <a:avLst>
@@ -26975,7 +29734,7 @@
         <p:spPr>
           <a:xfrm>
             <a:off x="4507920" y="3182040"/>
-            <a:ext cx="3286440" cy="2737800"/>
+            <a:ext cx="3286080" cy="2737440"/>
           </a:xfrm>
           <a:prstGeom prst="roundRect">
             <a:avLst>
@@ -27037,7 +29796,7 @@
         <p:spPr>
           <a:xfrm>
             <a:off x="4434840" y="2514600"/>
-            <a:ext cx="3286440" cy="3881880"/>
+            <a:ext cx="3286080" cy="3881520"/>
           </a:xfrm>
           <a:prstGeom prst="roundRect">
             <a:avLst>
@@ -27253,7 +30012,7 @@
         <p:spPr>
           <a:xfrm>
             <a:off x="8028360" y="3182040"/>
-            <a:ext cx="3286440" cy="2737800"/>
+            <a:ext cx="3286080" cy="2737440"/>
           </a:xfrm>
           <a:prstGeom prst="roundRect">
             <a:avLst>
@@ -27315,7 +30074,7 @@
         <p:spPr>
           <a:xfrm>
             <a:off x="8001000" y="2514600"/>
-            <a:ext cx="3471480" cy="3883320"/>
+            <a:ext cx="3471120" cy="3882960"/>
           </a:xfrm>
           <a:prstGeom prst="roundRect">
             <a:avLst>
@@ -27991,7 +30750,7 @@
         <p:spPr>
           <a:xfrm>
             <a:off x="0" y="0"/>
-            <a:ext cx="12183480" cy="6852600"/>
+            <a:ext cx="12183120" cy="6852240"/>
           </a:xfrm>
           <a:prstGeom prst="rect">
             <a:avLst/>
@@ -28051,7 +30810,7 @@
         <p:spPr>
           <a:xfrm>
             <a:off x="0" y="0"/>
-            <a:ext cx="12960" cy="6852600"/>
+            <a:ext cx="12600" cy="6852240"/>
           </a:xfrm>
           <a:prstGeom prst="rect">
             <a:avLst/>
@@ -28111,7 +30870,7 @@
         <p:spPr>
           <a:xfrm>
             <a:off x="914400" y="0"/>
-            <a:ext cx="12960" cy="6852600"/>
+            <a:ext cx="12600" cy="6852240"/>
           </a:xfrm>
           <a:prstGeom prst="rect">
             <a:avLst/>
@@ -28171,7 +30930,7 @@
         <p:spPr>
           <a:xfrm>
             <a:off x="1828800" y="0"/>
-            <a:ext cx="12960" cy="6852600"/>
+            <a:ext cx="12600" cy="6852240"/>
           </a:xfrm>
           <a:prstGeom prst="rect">
             <a:avLst/>
@@ -28231,7 +30990,7 @@
         <p:spPr>
           <a:xfrm>
             <a:off x="2743200" y="0"/>
-            <a:ext cx="12960" cy="6852600"/>
+            <a:ext cx="12600" cy="6852240"/>
           </a:xfrm>
           <a:prstGeom prst="rect">
             <a:avLst/>
@@ -28291,7 +31050,7 @@
         <p:spPr>
           <a:xfrm>
             <a:off x="3657600" y="0"/>
-            <a:ext cx="12960" cy="6852600"/>
+            <a:ext cx="12600" cy="6852240"/>
           </a:xfrm>
           <a:prstGeom prst="rect">
             <a:avLst/>
@@ -28351,7 +31110,7 @@
         <p:spPr>
           <a:xfrm>
             <a:off x="4572000" y="0"/>
-            <a:ext cx="12960" cy="6852600"/>
+            <a:ext cx="12600" cy="6852240"/>
           </a:xfrm>
           <a:prstGeom prst="rect">
             <a:avLst/>
@@ -28411,7 +31170,7 @@
         <p:spPr>
           <a:xfrm>
             <a:off x="5486400" y="0"/>
-            <a:ext cx="12960" cy="6852600"/>
+            <a:ext cx="12600" cy="6852240"/>
           </a:xfrm>
           <a:prstGeom prst="rect">
             <a:avLst/>
@@ -28471,7 +31230,7 @@
         <p:spPr>
           <a:xfrm>
             <a:off x="6400800" y="0"/>
-            <a:ext cx="12960" cy="6852600"/>
+            <a:ext cx="12600" cy="6852240"/>
           </a:xfrm>
           <a:prstGeom prst="rect">
             <a:avLst/>
@@ -28531,7 +31290,7 @@
         <p:spPr>
           <a:xfrm>
             <a:off x="7315200" y="0"/>
-            <a:ext cx="12960" cy="6852600"/>
+            <a:ext cx="12600" cy="6852240"/>
           </a:xfrm>
           <a:prstGeom prst="rect">
             <a:avLst/>
@@ -28591,7 +31350,7 @@
         <p:spPr>
           <a:xfrm>
             <a:off x="8229600" y="0"/>
-            <a:ext cx="12960" cy="6852600"/>
+            <a:ext cx="12600" cy="6852240"/>
           </a:xfrm>
           <a:prstGeom prst="rect">
             <a:avLst/>
@@ -28651,7 +31410,7 @@
         <p:spPr>
           <a:xfrm>
             <a:off x="9144000" y="0"/>
-            <a:ext cx="12960" cy="6852600"/>
+            <a:ext cx="12600" cy="6852240"/>
           </a:xfrm>
           <a:prstGeom prst="rect">
             <a:avLst/>
@@ -28711,7 +31470,7 @@
         <p:spPr>
           <a:xfrm>
             <a:off x="10058400" y="0"/>
-            <a:ext cx="12960" cy="6852600"/>
+            <a:ext cx="12600" cy="6852240"/>
           </a:xfrm>
           <a:prstGeom prst="rect">
             <a:avLst/>
@@ -28771,7 +31530,7 @@
         <p:spPr>
           <a:xfrm>
             <a:off x="10972800" y="0"/>
-            <a:ext cx="12960" cy="6852600"/>
+            <a:ext cx="12600" cy="6852240"/>
           </a:xfrm>
           <a:prstGeom prst="rect">
             <a:avLst/>
@@ -28831,7 +31590,7 @@
         <p:spPr>
           <a:xfrm>
             <a:off x="11887200" y="0"/>
-            <a:ext cx="12960" cy="6852600"/>
+            <a:ext cx="12600" cy="6852240"/>
           </a:xfrm>
           <a:prstGeom prst="rect">
             <a:avLst/>
@@ -28891,7 +31650,7 @@
         <p:spPr>
           <a:xfrm>
             <a:off x="0" y="0"/>
-            <a:ext cx="314640" cy="6852600"/>
+            <a:ext cx="314280" cy="6852240"/>
           </a:xfrm>
           <a:prstGeom prst="rect">
             <a:avLst/>
@@ -28951,7 +31710,7 @@
         <p:spPr>
           <a:xfrm>
             <a:off x="9875520" y="365760"/>
-            <a:ext cx="2006280" cy="497520"/>
+            <a:ext cx="2005920" cy="497160"/>
           </a:xfrm>
           <a:prstGeom prst="roundRect">
             <a:avLst>
@@ -29192,7 +31951,7 @@
         <p:spPr>
           <a:xfrm>
             <a:off x="987480" y="3182040"/>
-            <a:ext cx="3286440" cy="2737800"/>
+            <a:ext cx="3286080" cy="2737440"/>
           </a:xfrm>
           <a:prstGeom prst="roundRect">
             <a:avLst>
@@ -29254,7 +32013,7 @@
         <p:spPr>
           <a:xfrm>
             <a:off x="457200" y="2743200"/>
-            <a:ext cx="3883680" cy="3882960"/>
+            <a:ext cx="3883320" cy="3882600"/>
           </a:xfrm>
           <a:prstGeom prst="roundRect">
             <a:avLst>
@@ -29568,7 +32327,7 @@
         <p:spPr>
           <a:xfrm>
             <a:off x="4507920" y="3182040"/>
-            <a:ext cx="3286440" cy="2737800"/>
+            <a:ext cx="3286080" cy="2737440"/>
           </a:xfrm>
           <a:prstGeom prst="roundRect">
             <a:avLst>
@@ -29630,7 +32389,7 @@
         <p:spPr>
           <a:xfrm>
             <a:off x="4572000" y="2743200"/>
-            <a:ext cx="3426480" cy="3655080"/>
+            <a:ext cx="3426120" cy="3654720"/>
           </a:xfrm>
           <a:prstGeom prst="roundRect">
             <a:avLst>
@@ -30182,7 +32941,7 @@
         <p:spPr>
           <a:xfrm>
             <a:off x="8028360" y="3182040"/>
-            <a:ext cx="3286440" cy="2737800"/>
+            <a:ext cx="3286080" cy="2737440"/>
           </a:xfrm>
           <a:prstGeom prst="roundRect">
             <a:avLst>
@@ -30244,7 +33003,7 @@
         <p:spPr>
           <a:xfrm>
             <a:off x="8229600" y="2514600"/>
-            <a:ext cx="3655080" cy="4112280"/>
+            <a:ext cx="3654720" cy="4111920"/>
           </a:xfrm>
           <a:prstGeom prst="roundRect">
             <a:avLst>
@@ -31236,7 +33995,7 @@
         <p:spPr>
           <a:xfrm>
             <a:off x="0" y="0"/>
-            <a:ext cx="12183480" cy="6852600"/>
+            <a:ext cx="12183120" cy="6852240"/>
           </a:xfrm>
           <a:prstGeom prst="rect">
             <a:avLst/>
@@ -31296,7 +34055,7 @@
         <p:spPr>
           <a:xfrm>
             <a:off x="0" y="0"/>
-            <a:ext cx="12960" cy="6852600"/>
+            <a:ext cx="12600" cy="6852240"/>
           </a:xfrm>
           <a:prstGeom prst="rect">
             <a:avLst/>
@@ -31356,7 +34115,7 @@
         <p:spPr>
           <a:xfrm>
             <a:off x="914400" y="0"/>
-            <a:ext cx="12960" cy="6852600"/>
+            <a:ext cx="12600" cy="6852240"/>
           </a:xfrm>
           <a:prstGeom prst="rect">
             <a:avLst/>
@@ -31416,7 +34175,7 @@
         <p:spPr>
           <a:xfrm>
             <a:off x="1828800" y="0"/>
-            <a:ext cx="12960" cy="6852600"/>
+            <a:ext cx="12600" cy="6852240"/>
           </a:xfrm>
           <a:prstGeom prst="rect">
             <a:avLst/>
@@ -31476,7 +34235,7 @@
         <p:spPr>
           <a:xfrm>
             <a:off x="2743200" y="0"/>
-            <a:ext cx="12960" cy="6852600"/>
+            <a:ext cx="12600" cy="6852240"/>
           </a:xfrm>
           <a:prstGeom prst="rect">
             <a:avLst/>
@@ -31536,7 +34295,7 @@
         <p:spPr>
           <a:xfrm>
             <a:off x="3657600" y="0"/>
-            <a:ext cx="12960" cy="6852600"/>
+            <a:ext cx="12600" cy="6852240"/>
           </a:xfrm>
           <a:prstGeom prst="rect">
             <a:avLst/>
@@ -31596,7 +34355,7 @@
         <p:spPr>
           <a:xfrm>
             <a:off x="4572000" y="0"/>
-            <a:ext cx="12960" cy="6852600"/>
+            <a:ext cx="12600" cy="6852240"/>
           </a:xfrm>
           <a:prstGeom prst="rect">
             <a:avLst/>
@@ -31656,7 +34415,7 @@
         <p:spPr>
           <a:xfrm>
             <a:off x="5486400" y="0"/>
-            <a:ext cx="12960" cy="6852600"/>
+            <a:ext cx="12600" cy="6852240"/>
           </a:xfrm>
           <a:prstGeom prst="rect">
             <a:avLst/>
@@ -31716,7 +34475,7 @@
         <p:spPr>
           <a:xfrm>
             <a:off x="6400800" y="0"/>
-            <a:ext cx="12960" cy="6852600"/>
+            <a:ext cx="12600" cy="6852240"/>
           </a:xfrm>
           <a:prstGeom prst="rect">
             <a:avLst/>
@@ -31776,7 +34535,7 @@
         <p:spPr>
           <a:xfrm>
             <a:off x="7315200" y="0"/>
-            <a:ext cx="12960" cy="6852600"/>
+            <a:ext cx="12600" cy="6852240"/>
           </a:xfrm>
           <a:prstGeom prst="rect">
             <a:avLst/>
@@ -31836,7 +34595,7 @@
         <p:spPr>
           <a:xfrm>
             <a:off x="8229600" y="0"/>
-            <a:ext cx="12960" cy="6852600"/>
+            <a:ext cx="12600" cy="6852240"/>
           </a:xfrm>
           <a:prstGeom prst="rect">
             <a:avLst/>
@@ -31896,7 +34655,7 @@
         <p:spPr>
           <a:xfrm>
             <a:off x="9144000" y="0"/>
-            <a:ext cx="12960" cy="6852600"/>
+            <a:ext cx="12600" cy="6852240"/>
           </a:xfrm>
           <a:prstGeom prst="rect">
             <a:avLst/>
@@ -31956,7 +34715,7 @@
         <p:spPr>
           <a:xfrm>
             <a:off x="10058400" y="0"/>
-            <a:ext cx="12960" cy="6852600"/>
+            <a:ext cx="12600" cy="6852240"/>
           </a:xfrm>
           <a:prstGeom prst="rect">
             <a:avLst/>
@@ -32016,7 +34775,7 @@
         <p:spPr>
           <a:xfrm>
             <a:off x="10972800" y="0"/>
-            <a:ext cx="12960" cy="6852600"/>
+            <a:ext cx="12600" cy="6852240"/>
           </a:xfrm>
           <a:prstGeom prst="rect">
             <a:avLst/>
@@ -32076,7 +34835,7 @@
         <p:spPr>
           <a:xfrm>
             <a:off x="11887200" y="0"/>
-            <a:ext cx="12960" cy="6852600"/>
+            <a:ext cx="12600" cy="6852240"/>
           </a:xfrm>
           <a:prstGeom prst="rect">
             <a:avLst/>
@@ -32136,7 +34895,7 @@
         <p:spPr>
           <a:xfrm>
             <a:off x="0" y="0"/>
-            <a:ext cx="314640" cy="6852600"/>
+            <a:ext cx="314280" cy="6852240"/>
           </a:xfrm>
           <a:prstGeom prst="rect">
             <a:avLst/>
@@ -32196,7 +34955,7 @@
         <p:spPr>
           <a:xfrm>
             <a:off x="9875520" y="365760"/>
-            <a:ext cx="2006280" cy="497520"/>
+            <a:ext cx="2005920" cy="497160"/>
           </a:xfrm>
           <a:prstGeom prst="roundRect">
             <a:avLst>
@@ -32434,7 +35193,7 @@
         <p:spPr>
           <a:xfrm>
             <a:off x="987480" y="3182040"/>
-            <a:ext cx="3286440" cy="2737800"/>
+            <a:ext cx="3286080" cy="2737440"/>
           </a:xfrm>
           <a:prstGeom prst="roundRect">
             <a:avLst>
@@ -32496,7 +35255,7 @@
         <p:spPr>
           <a:xfrm>
             <a:off x="914400" y="3108960"/>
-            <a:ext cx="3286440" cy="3289680"/>
+            <a:ext cx="3286080" cy="3289320"/>
           </a:xfrm>
           <a:prstGeom prst="roundRect">
             <a:avLst>
@@ -32827,7 +35586,7 @@
         <p:spPr>
           <a:xfrm>
             <a:off x="4507920" y="3182040"/>
-            <a:ext cx="3286440" cy="2737800"/>
+            <a:ext cx="3286080" cy="2737440"/>
           </a:xfrm>
           <a:prstGeom prst="roundRect">
             <a:avLst>
@@ -32889,7 +35648,7 @@
         <p:spPr>
           <a:xfrm>
             <a:off x="4434840" y="2971800"/>
-            <a:ext cx="3286440" cy="3426840"/>
+            <a:ext cx="3286080" cy="3426480"/>
           </a:xfrm>
           <a:prstGeom prst="roundRect">
             <a:avLst>
@@ -33296,7 +36055,7 @@
         <p:spPr>
           <a:xfrm>
             <a:off x="8028360" y="3182040"/>
-            <a:ext cx="3286440" cy="2737800"/>
+            <a:ext cx="3286080" cy="2737440"/>
           </a:xfrm>
           <a:prstGeom prst="roundRect">
             <a:avLst>
@@ -33358,7 +36117,7 @@
         <p:spPr>
           <a:xfrm>
             <a:off x="7955280" y="2743200"/>
-            <a:ext cx="3699000" cy="3654000"/>
+            <a:ext cx="3698640" cy="3653640"/>
           </a:xfrm>
           <a:prstGeom prst="roundRect">
             <a:avLst>
@@ -34169,7 +36928,7 @@
         <p:spPr>
           <a:xfrm>
             <a:off x="0" y="0"/>
-            <a:ext cx="12183480" cy="6852600"/>
+            <a:ext cx="12183120" cy="6852240"/>
           </a:xfrm>
           <a:prstGeom prst="rect">
             <a:avLst/>
@@ -34229,7 +36988,7 @@
         <p:spPr>
           <a:xfrm>
             <a:off x="0" y="0"/>
-            <a:ext cx="12960" cy="6852600"/>
+            <a:ext cx="12600" cy="6852240"/>
           </a:xfrm>
           <a:prstGeom prst="rect">
             <a:avLst/>
@@ -34289,7 +37048,7 @@
         <p:spPr>
           <a:xfrm>
             <a:off x="914400" y="0"/>
-            <a:ext cx="12960" cy="6852600"/>
+            <a:ext cx="12600" cy="6852240"/>
           </a:xfrm>
           <a:prstGeom prst="rect">
             <a:avLst/>
@@ -34349,7 +37108,7 @@
         <p:spPr>
           <a:xfrm>
             <a:off x="1828800" y="0"/>
-            <a:ext cx="12960" cy="6852600"/>
+            <a:ext cx="12600" cy="6852240"/>
           </a:xfrm>
           <a:prstGeom prst="rect">
             <a:avLst/>
@@ -34409,7 +37168,7 @@
         <p:spPr>
           <a:xfrm>
             <a:off x="2743200" y="0"/>
-            <a:ext cx="12960" cy="6852600"/>
+            <a:ext cx="12600" cy="6852240"/>
           </a:xfrm>
           <a:prstGeom prst="rect">
             <a:avLst/>
@@ -34469,7 +37228,7 @@
         <p:spPr>
           <a:xfrm>
             <a:off x="3657600" y="0"/>
-            <a:ext cx="12960" cy="6852600"/>
+            <a:ext cx="12600" cy="6852240"/>
           </a:xfrm>
           <a:prstGeom prst="rect">
             <a:avLst/>
@@ -34529,7 +37288,7 @@
         <p:spPr>
           <a:xfrm>
             <a:off x="4572000" y="0"/>
-            <a:ext cx="12960" cy="6852600"/>
+            <a:ext cx="12600" cy="6852240"/>
           </a:xfrm>
           <a:prstGeom prst="rect">
             <a:avLst/>
@@ -34589,7 +37348,7 @@
         <p:spPr>
           <a:xfrm>
             <a:off x="5486400" y="0"/>
-            <a:ext cx="12960" cy="6852600"/>
+            <a:ext cx="12600" cy="6852240"/>
           </a:xfrm>
           <a:prstGeom prst="rect">
             <a:avLst/>
@@ -34649,7 +37408,7 @@
         <p:spPr>
           <a:xfrm>
             <a:off x="6400800" y="0"/>
-            <a:ext cx="12960" cy="6852600"/>
+            <a:ext cx="12600" cy="6852240"/>
           </a:xfrm>
           <a:prstGeom prst="rect">
             <a:avLst/>
@@ -34709,7 +37468,7 @@
         <p:spPr>
           <a:xfrm>
             <a:off x="7315200" y="0"/>
-            <a:ext cx="12960" cy="6852600"/>
+            <a:ext cx="12600" cy="6852240"/>
           </a:xfrm>
           <a:prstGeom prst="rect">
             <a:avLst/>
@@ -34769,7 +37528,7 @@
         <p:spPr>
           <a:xfrm>
             <a:off x="8229600" y="0"/>
-            <a:ext cx="12960" cy="6852600"/>
+            <a:ext cx="12600" cy="6852240"/>
           </a:xfrm>
           <a:prstGeom prst="rect">
             <a:avLst/>
@@ -34829,7 +37588,7 @@
         <p:spPr>
           <a:xfrm>
             <a:off x="9144000" y="0"/>
-            <a:ext cx="12960" cy="6852600"/>
+            <a:ext cx="12600" cy="6852240"/>
           </a:xfrm>
           <a:prstGeom prst="rect">
             <a:avLst/>
@@ -34889,7 +37648,7 @@
         <p:spPr>
           <a:xfrm>
             <a:off x="10058400" y="0"/>
-            <a:ext cx="12960" cy="6852600"/>
+            <a:ext cx="12600" cy="6852240"/>
           </a:xfrm>
           <a:prstGeom prst="rect">
             <a:avLst/>
@@ -34949,7 +37708,7 @@
         <p:spPr>
           <a:xfrm>
             <a:off x="10972800" y="0"/>
-            <a:ext cx="12960" cy="6852600"/>
+            <a:ext cx="12600" cy="6852240"/>
           </a:xfrm>
           <a:prstGeom prst="rect">
             <a:avLst/>
@@ -35009,7 +37768,7 @@
         <p:spPr>
           <a:xfrm>
             <a:off x="11887200" y="0"/>
-            <a:ext cx="12960" cy="6852600"/>
+            <a:ext cx="12600" cy="6852240"/>
           </a:xfrm>
           <a:prstGeom prst="rect">
             <a:avLst/>
@@ -35069,7 +37828,7 @@
         <p:spPr>
           <a:xfrm>
             <a:off x="0" y="0"/>
-            <a:ext cx="314640" cy="6852600"/>
+            <a:ext cx="314280" cy="6852240"/>
           </a:xfrm>
           <a:prstGeom prst="rect">
             <a:avLst/>
@@ -35129,7 +37888,7 @@
         <p:spPr>
           <a:xfrm>
             <a:off x="9875520" y="365760"/>
-            <a:ext cx="2006280" cy="497520"/>
+            <a:ext cx="2005920" cy="497160"/>
           </a:xfrm>
           <a:prstGeom prst="roundRect">
             <a:avLst>
@@ -35370,7 +38129,7 @@
         <p:spPr>
           <a:xfrm>
             <a:off x="987480" y="3182040"/>
-            <a:ext cx="3286440" cy="2737800"/>
+            <a:ext cx="3286080" cy="2737440"/>
           </a:xfrm>
           <a:prstGeom prst="roundRect">
             <a:avLst>
@@ -35432,7 +38191,7 @@
         <p:spPr>
           <a:xfrm>
             <a:off x="914400" y="3108960"/>
-            <a:ext cx="3286440" cy="3289680"/>
+            <a:ext cx="3286080" cy="3289320"/>
           </a:xfrm>
           <a:prstGeom prst="roundRect">
             <a:avLst>
@@ -35683,7 +38442,7 @@
         <p:spPr>
           <a:xfrm>
             <a:off x="4507920" y="3182040"/>
-            <a:ext cx="3286440" cy="2737800"/>
+            <a:ext cx="3286080" cy="2737440"/>
           </a:xfrm>
           <a:prstGeom prst="roundRect">
             <a:avLst>
@@ -35745,7 +38504,7 @@
         <p:spPr>
           <a:xfrm>
             <a:off x="4434840" y="2971800"/>
-            <a:ext cx="3286440" cy="3426840"/>
+            <a:ext cx="3286080" cy="3426480"/>
           </a:xfrm>
           <a:prstGeom prst="roundRect">
             <a:avLst>
@@ -36119,7 +38878,7 @@
         <p:spPr>
           <a:xfrm>
             <a:off x="8028360" y="3182040"/>
-            <a:ext cx="3286440" cy="2737800"/>
+            <a:ext cx="3286080" cy="2737440"/>
           </a:xfrm>
           <a:prstGeom prst="roundRect">
             <a:avLst>
@@ -36181,7 +38940,7 @@
         <p:spPr>
           <a:xfrm>
             <a:off x="8003880" y="2971800"/>
-            <a:ext cx="3424680" cy="3425400"/>
+            <a:ext cx="3424320" cy="3425040"/>
           </a:xfrm>
           <a:prstGeom prst="roundRect">
             <a:avLst>

--- a/Java/Java #4/TR/Java #4.pptx
+++ b/Java/Java #4/TR/Java #4.pptx
@@ -19,6 +19,7 @@
     <p:sldId id="267" r:id="rId14"/>
     <p:sldId id="268" r:id="rId15"/>
     <p:sldId id="269" r:id="rId16"/>
+    <p:sldId id="270" r:id="rId17"/>
   </p:sldIdLst>
   <p:sldSz cx="9144000" cy="6858000"/>
   <p:notesSz cx="7772400" cy="10058400"/>
@@ -76,7 +77,7 @@
         <p:txBody>
           <a:bodyPr/>
           <a:p>
-            <a:fld id="{F9BAF519-C3E6-4279-8A72-547B80F1958E}" type="slidenum">
+            <a:fld id="{D14D3DF3-4C8D-49E0-ABBE-1E32B099C138}" type="slidenum">
               <a:t>&lt;#&gt;</a:t>
             </a:fld>
           </a:p>
@@ -285,7 +286,7 @@
         <p:txBody>
           <a:bodyPr/>
           <a:p>
-            <a:fld id="{5D9F76C6-AB48-4102-9BF2-EF0727C868DD}" type="slidenum">
+            <a:fld id="{795294C0-D64B-40C0-B7C3-E39727C27EA4}" type="slidenum">
               <a:t>&lt;#&gt;</a:t>
             </a:fld>
           </a:p>
@@ -580,7 +581,7 @@
         <p:txBody>
           <a:bodyPr/>
           <a:p>
-            <a:fld id="{2287F342-454E-4E4E-A1BB-AE7C03865C44}" type="slidenum">
+            <a:fld id="{85909F0D-E5F0-42E2-8800-EC195ABD2B37}" type="slidenum">
               <a:t>&lt;#&gt;</a:t>
             </a:fld>
           </a:p>
@@ -961,7 +962,7 @@
         <p:txBody>
           <a:bodyPr/>
           <a:p>
-            <a:fld id="{68078B31-FB62-414E-AF03-BFE6F72F9E25}" type="slidenum">
+            <a:fld id="{B9E533E7-E42A-4775-B791-27A307ADDC44}" type="slidenum">
               <a:t>&lt;#&gt;</a:t>
             </a:fld>
           </a:p>
@@ -1124,7 +1125,7 @@
         <p:txBody>
           <a:bodyPr/>
           <a:p>
-            <a:fld id="{199C5452-4E87-4182-9738-76AB77978777}" type="slidenum">
+            <a:fld id="{5BCC6F00-477E-4462-BFE1-CA58236B3B62}" type="slidenum">
               <a:t>&lt;#&gt;</a:t>
             </a:fld>
           </a:p>
@@ -1290,7 +1291,7 @@
         <p:txBody>
           <a:bodyPr/>
           <a:p>
-            <a:fld id="{A52B5BA5-9328-48EF-9A4D-707AABC3D621}" type="slidenum">
+            <a:fld id="{8B9BD395-F566-4E24-BD74-A23B9B067445}" type="slidenum">
               <a:t>&lt;#&gt;</a:t>
             </a:fld>
           </a:p>
@@ -1499,7 +1500,7 @@
         <p:txBody>
           <a:bodyPr/>
           <a:p>
-            <a:fld id="{4CF85591-F4D6-42B8-BBBE-445C8EA86513}" type="slidenum">
+            <a:fld id="{83954279-C575-4D11-865B-10222475474A}" type="slidenum">
               <a:t>&lt;#&gt;</a:t>
             </a:fld>
           </a:p>
@@ -1622,7 +1623,7 @@
         <p:txBody>
           <a:bodyPr/>
           <a:p>
-            <a:fld id="{5705CDBE-74BC-419D-968D-19877435450F}" type="slidenum">
+            <a:fld id="{E0012634-832C-4D23-93F9-F558538B3411}" type="slidenum">
               <a:t>&lt;#&gt;</a:t>
             </a:fld>
           </a:p>
@@ -1743,7 +1744,7 @@
         <p:txBody>
           <a:bodyPr/>
           <a:p>
-            <a:fld id="{7A4FC5D3-1CEE-4572-99AE-DCDA87340B70}" type="slidenum">
+            <a:fld id="{4947AE09-E8D2-4FA2-A1FC-348D09E402BA}" type="slidenum">
               <a:t>&lt;#&gt;</a:t>
             </a:fld>
           </a:p>
@@ -1995,7 +1996,7 @@
         <p:txBody>
           <a:bodyPr/>
           <a:p>
-            <a:fld id="{B41F00C1-EB83-4598-8B01-BDD3811F4F5D}" type="slidenum">
+            <a:fld id="{5C245C04-2541-4AD0-9626-171C12667ACF}" type="slidenum">
               <a:t>&lt;#&gt;</a:t>
             </a:fld>
           </a:p>
@@ -2247,7 +2248,7 @@
         <p:txBody>
           <a:bodyPr/>
           <a:p>
-            <a:fld id="{A75BBAD9-DF20-48FF-977A-CF0FC705D8EB}" type="slidenum">
+            <a:fld id="{70397F19-543F-4C4F-8369-B1929AEF7179}" type="slidenum">
               <a:t>&lt;#&gt;</a:t>
             </a:fld>
           </a:p>
@@ -2499,7 +2500,7 @@
         <p:txBody>
           <a:bodyPr/>
           <a:p>
-            <a:fld id="{053AA3C9-464C-47CE-8F7F-8819CF906CEE}" type="slidenum">
+            <a:fld id="{650374DC-45E7-450E-A3FF-4B7CCB4CF50D}" type="slidenum">
               <a:t>&lt;#&gt;</a:t>
             </a:fld>
           </a:p>
@@ -2568,7 +2569,7 @@
         <p:spPr>
           <a:xfrm>
             <a:off x="3124080" y="6356520"/>
-            <a:ext cx="2889360" cy="358920"/>
+            <a:ext cx="2889000" cy="358560"/>
           </a:xfrm>
           <a:prstGeom prst="rect">
             <a:avLst/>
@@ -2640,7 +2641,7 @@
         <p:spPr>
           <a:xfrm>
             <a:off x="6553080" y="6356520"/>
-            <a:ext cx="2127600" cy="358920"/>
+            <a:ext cx="2127240" cy="358560"/>
           </a:xfrm>
           <a:prstGeom prst="rect">
             <a:avLst/>
@@ -2681,7 +2682,7 @@
                 <a:tab algn="l" pos="0"/>
               </a:tabLst>
             </a:pPr>
-            <a:fld id="{4EBF1FBF-7E8B-4AC2-9C4D-4E843520D5FC}" type="slidenum">
+            <a:fld id="{6C4CC229-2C63-4202-8F07-2DA12FFBEFCF}" type="slidenum">
               <a:rPr b="0" lang="en-US" sz="1200" spc="-1" strike="noStrike">
                 <a:solidFill>
                   <a:srgbClr val="8b8b8b"/>
@@ -2712,7 +2713,7 @@
         <p:spPr>
           <a:xfrm>
             <a:off x="457200" y="6356520"/>
-            <a:ext cx="2127600" cy="358920"/>
+            <a:ext cx="2127240" cy="358560"/>
           </a:xfrm>
           <a:prstGeom prst="rect">
             <a:avLst/>
@@ -3079,7 +3080,7 @@
         <p:spPr>
           <a:xfrm>
             <a:off x="0" y="0"/>
-            <a:ext cx="12182760" cy="6851880"/>
+            <a:ext cx="12182400" cy="6851520"/>
           </a:xfrm>
           <a:prstGeom prst="rect">
             <a:avLst/>
@@ -3139,7 +3140,7 @@
         <p:spPr>
           <a:xfrm>
             <a:off x="0" y="0"/>
-            <a:ext cx="12240" cy="6851880"/>
+            <a:ext cx="11880" cy="6851520"/>
           </a:xfrm>
           <a:prstGeom prst="rect">
             <a:avLst/>
@@ -3199,7 +3200,7 @@
         <p:spPr>
           <a:xfrm>
             <a:off x="914400" y="0"/>
-            <a:ext cx="12240" cy="6851880"/>
+            <a:ext cx="11880" cy="6851520"/>
           </a:xfrm>
           <a:prstGeom prst="rect">
             <a:avLst/>
@@ -3259,7 +3260,7 @@
         <p:spPr>
           <a:xfrm>
             <a:off x="1828800" y="0"/>
-            <a:ext cx="12240" cy="6851880"/>
+            <a:ext cx="11880" cy="6851520"/>
           </a:xfrm>
           <a:prstGeom prst="rect">
             <a:avLst/>
@@ -3319,7 +3320,7 @@
         <p:spPr>
           <a:xfrm>
             <a:off x="2743200" y="0"/>
-            <a:ext cx="12240" cy="6851880"/>
+            <a:ext cx="11880" cy="6851520"/>
           </a:xfrm>
           <a:prstGeom prst="rect">
             <a:avLst/>
@@ -3379,7 +3380,7 @@
         <p:spPr>
           <a:xfrm>
             <a:off x="3657600" y="0"/>
-            <a:ext cx="12240" cy="6851880"/>
+            <a:ext cx="11880" cy="6851520"/>
           </a:xfrm>
           <a:prstGeom prst="rect">
             <a:avLst/>
@@ -3439,7 +3440,7 @@
         <p:spPr>
           <a:xfrm>
             <a:off x="4572000" y="0"/>
-            <a:ext cx="12240" cy="6851880"/>
+            <a:ext cx="11880" cy="6851520"/>
           </a:xfrm>
           <a:prstGeom prst="rect">
             <a:avLst/>
@@ -3499,7 +3500,7 @@
         <p:spPr>
           <a:xfrm>
             <a:off x="5486400" y="0"/>
-            <a:ext cx="12240" cy="6851880"/>
+            <a:ext cx="11880" cy="6851520"/>
           </a:xfrm>
           <a:prstGeom prst="rect">
             <a:avLst/>
@@ -3559,7 +3560,7 @@
         <p:spPr>
           <a:xfrm>
             <a:off x="6400800" y="0"/>
-            <a:ext cx="12240" cy="6851880"/>
+            <a:ext cx="11880" cy="6851520"/>
           </a:xfrm>
           <a:prstGeom prst="rect">
             <a:avLst/>
@@ -3619,7 +3620,7 @@
         <p:spPr>
           <a:xfrm>
             <a:off x="7315200" y="0"/>
-            <a:ext cx="12240" cy="6851880"/>
+            <a:ext cx="11880" cy="6851520"/>
           </a:xfrm>
           <a:prstGeom prst="rect">
             <a:avLst/>
@@ -3679,7 +3680,7 @@
         <p:spPr>
           <a:xfrm>
             <a:off x="8229600" y="0"/>
-            <a:ext cx="12240" cy="6851880"/>
+            <a:ext cx="11880" cy="6851520"/>
           </a:xfrm>
           <a:prstGeom prst="rect">
             <a:avLst/>
@@ -3739,7 +3740,7 @@
         <p:spPr>
           <a:xfrm>
             <a:off x="9144000" y="0"/>
-            <a:ext cx="12240" cy="6851880"/>
+            <a:ext cx="11880" cy="6851520"/>
           </a:xfrm>
           <a:prstGeom prst="rect">
             <a:avLst/>
@@ -3799,7 +3800,7 @@
         <p:spPr>
           <a:xfrm>
             <a:off x="10058400" y="0"/>
-            <a:ext cx="12240" cy="6851880"/>
+            <a:ext cx="11880" cy="6851520"/>
           </a:xfrm>
           <a:prstGeom prst="rect">
             <a:avLst/>
@@ -3859,7 +3860,7 @@
         <p:spPr>
           <a:xfrm>
             <a:off x="10972800" y="0"/>
-            <a:ext cx="12240" cy="6851880"/>
+            <a:ext cx="11880" cy="6851520"/>
           </a:xfrm>
           <a:prstGeom prst="rect">
             <a:avLst/>
@@ -3919,7 +3920,7 @@
         <p:spPr>
           <a:xfrm>
             <a:off x="11887200" y="0"/>
-            <a:ext cx="12240" cy="6851880"/>
+            <a:ext cx="11880" cy="6851520"/>
           </a:xfrm>
           <a:prstGeom prst="rect">
             <a:avLst/>
@@ -3979,7 +3980,7 @@
         <p:spPr>
           <a:xfrm>
             <a:off x="0" y="0"/>
-            <a:ext cx="313920" cy="6851880"/>
+            <a:ext cx="313560" cy="6851520"/>
           </a:xfrm>
           <a:prstGeom prst="rect">
             <a:avLst/>
@@ -4039,7 +4040,7 @@
         <p:spPr>
           <a:xfrm>
             <a:off x="9875520" y="365760"/>
-            <a:ext cx="2005560" cy="496800"/>
+            <a:ext cx="2005200" cy="496440"/>
           </a:xfrm>
           <a:prstGeom prst="roundRect">
             <a:avLst>
@@ -4290,7 +4291,7 @@
         <p:spPr>
           <a:xfrm>
             <a:off x="987480" y="3182040"/>
-            <a:ext cx="3285720" cy="2737080"/>
+            <a:ext cx="3285360" cy="2736720"/>
           </a:xfrm>
           <a:prstGeom prst="roundRect">
             <a:avLst>
@@ -4352,7 +4353,7 @@
         <p:spPr>
           <a:xfrm>
             <a:off x="914400" y="3108960"/>
-            <a:ext cx="3285720" cy="2737080"/>
+            <a:ext cx="3285360" cy="2736720"/>
           </a:xfrm>
           <a:prstGeom prst="roundRect">
             <a:avLst>
@@ -4486,7 +4487,7 @@
         <p:spPr>
           <a:xfrm>
             <a:off x="4507920" y="3182040"/>
-            <a:ext cx="3285720" cy="2737080"/>
+            <a:ext cx="3285360" cy="2736720"/>
           </a:xfrm>
           <a:prstGeom prst="roundRect">
             <a:avLst>
@@ -4548,7 +4549,7 @@
         <p:spPr>
           <a:xfrm>
             <a:off x="4434840" y="3108960"/>
-            <a:ext cx="3285720" cy="2737080"/>
+            <a:ext cx="3285360" cy="2736720"/>
           </a:xfrm>
           <a:prstGeom prst="roundRect">
             <a:avLst>
@@ -4806,7 +4807,7 @@
         <p:spPr>
           <a:xfrm>
             <a:off x="8028360" y="3182040"/>
-            <a:ext cx="3285720" cy="2737080"/>
+            <a:ext cx="3285360" cy="2736720"/>
           </a:xfrm>
           <a:prstGeom prst="roundRect">
             <a:avLst>
@@ -4868,7 +4869,7 @@
         <p:spPr>
           <a:xfrm>
             <a:off x="7955280" y="2971800"/>
-            <a:ext cx="3926880" cy="3652560"/>
+            <a:ext cx="3926520" cy="3652200"/>
           </a:xfrm>
           <a:prstGeom prst="roundRect">
             <a:avLst>
@@ -5379,7 +5380,7 @@
         <p:spPr>
           <a:xfrm>
             <a:off x="0" y="0"/>
-            <a:ext cx="12183120" cy="6852240"/>
+            <a:ext cx="12182760" cy="6851880"/>
           </a:xfrm>
           <a:prstGeom prst="rect">
             <a:avLst/>
@@ -5439,7 +5440,7 @@
         <p:spPr>
           <a:xfrm>
             <a:off x="0" y="0"/>
-            <a:ext cx="12600" cy="6852240"/>
+            <a:ext cx="12240" cy="6851880"/>
           </a:xfrm>
           <a:prstGeom prst="rect">
             <a:avLst/>
@@ -5499,7 +5500,7 @@
         <p:spPr>
           <a:xfrm>
             <a:off x="914400" y="0"/>
-            <a:ext cx="12600" cy="6852240"/>
+            <a:ext cx="12240" cy="6851880"/>
           </a:xfrm>
           <a:prstGeom prst="rect">
             <a:avLst/>
@@ -5559,7 +5560,7 @@
         <p:spPr>
           <a:xfrm>
             <a:off x="1828800" y="0"/>
-            <a:ext cx="12600" cy="6852240"/>
+            <a:ext cx="12240" cy="6851880"/>
           </a:xfrm>
           <a:prstGeom prst="rect">
             <a:avLst/>
@@ -5619,7 +5620,7 @@
         <p:spPr>
           <a:xfrm>
             <a:off x="2743200" y="0"/>
-            <a:ext cx="12600" cy="6852240"/>
+            <a:ext cx="12240" cy="6851880"/>
           </a:xfrm>
           <a:prstGeom prst="rect">
             <a:avLst/>
@@ -5679,7 +5680,7 @@
         <p:spPr>
           <a:xfrm>
             <a:off x="3657600" y="0"/>
-            <a:ext cx="12600" cy="6852240"/>
+            <a:ext cx="12240" cy="6851880"/>
           </a:xfrm>
           <a:prstGeom prst="rect">
             <a:avLst/>
@@ -5739,7 +5740,7 @@
         <p:spPr>
           <a:xfrm>
             <a:off x="4572000" y="0"/>
-            <a:ext cx="12600" cy="6852240"/>
+            <a:ext cx="12240" cy="6851880"/>
           </a:xfrm>
           <a:prstGeom prst="rect">
             <a:avLst/>
@@ -5799,7 +5800,7 @@
         <p:spPr>
           <a:xfrm>
             <a:off x="5486400" y="0"/>
-            <a:ext cx="12600" cy="6852240"/>
+            <a:ext cx="12240" cy="6851880"/>
           </a:xfrm>
           <a:prstGeom prst="rect">
             <a:avLst/>
@@ -5859,7 +5860,7 @@
         <p:spPr>
           <a:xfrm>
             <a:off x="6400800" y="0"/>
-            <a:ext cx="12600" cy="6852240"/>
+            <a:ext cx="12240" cy="6851880"/>
           </a:xfrm>
           <a:prstGeom prst="rect">
             <a:avLst/>
@@ -5919,7 +5920,7 @@
         <p:spPr>
           <a:xfrm>
             <a:off x="7315200" y="0"/>
-            <a:ext cx="12600" cy="6852240"/>
+            <a:ext cx="12240" cy="6851880"/>
           </a:xfrm>
           <a:prstGeom prst="rect">
             <a:avLst/>
@@ -5979,7 +5980,7 @@
         <p:spPr>
           <a:xfrm>
             <a:off x="8229600" y="0"/>
-            <a:ext cx="12600" cy="6852240"/>
+            <a:ext cx="12240" cy="6851880"/>
           </a:xfrm>
           <a:prstGeom prst="rect">
             <a:avLst/>
@@ -6039,7 +6040,7 @@
         <p:spPr>
           <a:xfrm>
             <a:off x="9144000" y="0"/>
-            <a:ext cx="12600" cy="6852240"/>
+            <a:ext cx="12240" cy="6851880"/>
           </a:xfrm>
           <a:prstGeom prst="rect">
             <a:avLst/>
@@ -6099,7 +6100,7 @@
         <p:spPr>
           <a:xfrm>
             <a:off x="10058400" y="0"/>
-            <a:ext cx="12600" cy="6852240"/>
+            <a:ext cx="12240" cy="6851880"/>
           </a:xfrm>
           <a:prstGeom prst="rect">
             <a:avLst/>
@@ -6159,7 +6160,7 @@
         <p:spPr>
           <a:xfrm>
             <a:off x="10972800" y="0"/>
-            <a:ext cx="12600" cy="6852240"/>
+            <a:ext cx="12240" cy="6851880"/>
           </a:xfrm>
           <a:prstGeom prst="rect">
             <a:avLst/>
@@ -6219,7 +6220,7 @@
         <p:spPr>
           <a:xfrm>
             <a:off x="11887200" y="0"/>
-            <a:ext cx="12600" cy="6852240"/>
+            <a:ext cx="12240" cy="6851880"/>
           </a:xfrm>
           <a:prstGeom prst="rect">
             <a:avLst/>
@@ -6279,7 +6280,7 @@
         <p:spPr>
           <a:xfrm>
             <a:off x="0" y="0"/>
-            <a:ext cx="314280" cy="6852240"/>
+            <a:ext cx="313920" cy="6851880"/>
           </a:xfrm>
           <a:prstGeom prst="rect">
             <a:avLst/>
@@ -6339,7 +6340,7 @@
         <p:spPr>
           <a:xfrm>
             <a:off x="9875520" y="365760"/>
-            <a:ext cx="2005920" cy="497160"/>
+            <a:ext cx="2005560" cy="496800"/>
           </a:xfrm>
           <a:prstGeom prst="roundRect">
             <a:avLst>
@@ -6580,7 +6581,7 @@
         <p:spPr>
           <a:xfrm>
             <a:off x="987480" y="3182040"/>
-            <a:ext cx="3286080" cy="2737440"/>
+            <a:ext cx="3285720" cy="2737080"/>
           </a:xfrm>
           <a:prstGeom prst="roundRect">
             <a:avLst>
@@ -6642,7 +6643,7 @@
         <p:spPr>
           <a:xfrm>
             <a:off x="685800" y="2743200"/>
-            <a:ext cx="3514680" cy="3655080"/>
+            <a:ext cx="3514320" cy="3654720"/>
           </a:xfrm>
           <a:prstGeom prst="roundRect">
             <a:avLst>
@@ -6884,7 +6885,7 @@
         <p:spPr>
           <a:xfrm>
             <a:off x="4507920" y="3182040"/>
-            <a:ext cx="3286080" cy="2737440"/>
+            <a:ext cx="3285720" cy="2737080"/>
           </a:xfrm>
           <a:prstGeom prst="roundRect">
             <a:avLst>
@@ -6946,7 +6947,7 @@
         <p:spPr>
           <a:xfrm>
             <a:off x="4434840" y="2971800"/>
-            <a:ext cx="3286080" cy="3426480"/>
+            <a:ext cx="3285720" cy="3426120"/>
           </a:xfrm>
           <a:prstGeom prst="roundRect">
             <a:avLst>
@@ -7300,7 +7301,7 @@
         <p:spPr>
           <a:xfrm>
             <a:off x="8028360" y="3182040"/>
-            <a:ext cx="3286080" cy="2737440"/>
+            <a:ext cx="3285720" cy="2737080"/>
           </a:xfrm>
           <a:prstGeom prst="roundRect">
             <a:avLst>
@@ -7362,7 +7363,7 @@
         <p:spPr>
           <a:xfrm>
             <a:off x="8003880" y="2743200"/>
-            <a:ext cx="3424320" cy="3653640"/>
+            <a:ext cx="3423960" cy="3653280"/>
           </a:xfrm>
           <a:prstGeom prst="roundRect">
             <a:avLst>
@@ -8038,7 +8039,7 @@
         <p:spPr>
           <a:xfrm>
             <a:off x="0" y="0"/>
-            <a:ext cx="12183120" cy="6852240"/>
+            <a:ext cx="12182760" cy="6851880"/>
           </a:xfrm>
           <a:prstGeom prst="rect">
             <a:avLst/>
@@ -8098,7 +8099,7 @@
         <p:spPr>
           <a:xfrm>
             <a:off x="0" y="0"/>
-            <a:ext cx="12600" cy="6852240"/>
+            <a:ext cx="12240" cy="6851880"/>
           </a:xfrm>
           <a:prstGeom prst="rect">
             <a:avLst/>
@@ -8158,7 +8159,7 @@
         <p:spPr>
           <a:xfrm>
             <a:off x="914400" y="0"/>
-            <a:ext cx="12600" cy="6852240"/>
+            <a:ext cx="12240" cy="6851880"/>
           </a:xfrm>
           <a:prstGeom prst="rect">
             <a:avLst/>
@@ -8218,7 +8219,7 @@
         <p:spPr>
           <a:xfrm>
             <a:off x="1828800" y="0"/>
-            <a:ext cx="12600" cy="6852240"/>
+            <a:ext cx="12240" cy="6851880"/>
           </a:xfrm>
           <a:prstGeom prst="rect">
             <a:avLst/>
@@ -8278,7 +8279,7 @@
         <p:spPr>
           <a:xfrm>
             <a:off x="2743200" y="0"/>
-            <a:ext cx="12600" cy="6852240"/>
+            <a:ext cx="12240" cy="6851880"/>
           </a:xfrm>
           <a:prstGeom prst="rect">
             <a:avLst/>
@@ -8338,7 +8339,7 @@
         <p:spPr>
           <a:xfrm>
             <a:off x="3657600" y="0"/>
-            <a:ext cx="12600" cy="6852240"/>
+            <a:ext cx="12240" cy="6851880"/>
           </a:xfrm>
           <a:prstGeom prst="rect">
             <a:avLst/>
@@ -8398,7 +8399,7 @@
         <p:spPr>
           <a:xfrm>
             <a:off x="4572000" y="0"/>
-            <a:ext cx="12600" cy="6852240"/>
+            <a:ext cx="12240" cy="6851880"/>
           </a:xfrm>
           <a:prstGeom prst="rect">
             <a:avLst/>
@@ -8458,7 +8459,7 @@
         <p:spPr>
           <a:xfrm>
             <a:off x="5486400" y="0"/>
-            <a:ext cx="12600" cy="6852240"/>
+            <a:ext cx="12240" cy="6851880"/>
           </a:xfrm>
           <a:prstGeom prst="rect">
             <a:avLst/>
@@ -8518,7 +8519,7 @@
         <p:spPr>
           <a:xfrm>
             <a:off x="6400800" y="0"/>
-            <a:ext cx="12600" cy="6852240"/>
+            <a:ext cx="12240" cy="6851880"/>
           </a:xfrm>
           <a:prstGeom prst="rect">
             <a:avLst/>
@@ -8578,7 +8579,7 @@
         <p:spPr>
           <a:xfrm>
             <a:off x="7315200" y="0"/>
-            <a:ext cx="12600" cy="6852240"/>
+            <a:ext cx="12240" cy="6851880"/>
           </a:xfrm>
           <a:prstGeom prst="rect">
             <a:avLst/>
@@ -8638,7 +8639,7 @@
         <p:spPr>
           <a:xfrm>
             <a:off x="8229600" y="0"/>
-            <a:ext cx="12600" cy="6852240"/>
+            <a:ext cx="12240" cy="6851880"/>
           </a:xfrm>
           <a:prstGeom prst="rect">
             <a:avLst/>
@@ -8698,7 +8699,7 @@
         <p:spPr>
           <a:xfrm>
             <a:off x="9144000" y="0"/>
-            <a:ext cx="12600" cy="6852240"/>
+            <a:ext cx="12240" cy="6851880"/>
           </a:xfrm>
           <a:prstGeom prst="rect">
             <a:avLst/>
@@ -8758,7 +8759,7 @@
         <p:spPr>
           <a:xfrm>
             <a:off x="10058400" y="0"/>
-            <a:ext cx="12600" cy="6852240"/>
+            <a:ext cx="12240" cy="6851880"/>
           </a:xfrm>
           <a:prstGeom prst="rect">
             <a:avLst/>
@@ -8818,7 +8819,7 @@
         <p:spPr>
           <a:xfrm>
             <a:off x="10972800" y="0"/>
-            <a:ext cx="12600" cy="6852240"/>
+            <a:ext cx="12240" cy="6851880"/>
           </a:xfrm>
           <a:prstGeom prst="rect">
             <a:avLst/>
@@ -8878,7 +8879,7 @@
         <p:spPr>
           <a:xfrm>
             <a:off x="11887200" y="0"/>
-            <a:ext cx="12600" cy="6852240"/>
+            <a:ext cx="12240" cy="6851880"/>
           </a:xfrm>
           <a:prstGeom prst="rect">
             <a:avLst/>
@@ -8938,7 +8939,7 @@
         <p:spPr>
           <a:xfrm>
             <a:off x="0" y="0"/>
-            <a:ext cx="314280" cy="6852240"/>
+            <a:ext cx="313920" cy="6851880"/>
           </a:xfrm>
           <a:prstGeom prst="rect">
             <a:avLst/>
@@ -8998,7 +8999,7 @@
         <p:spPr>
           <a:xfrm>
             <a:off x="9875520" y="365760"/>
-            <a:ext cx="2005920" cy="497160"/>
+            <a:ext cx="2005560" cy="496800"/>
           </a:xfrm>
           <a:prstGeom prst="roundRect">
             <a:avLst>
@@ -9072,7 +9073,7 @@
         <p:spPr>
           <a:xfrm>
             <a:off x="1221120" y="914400"/>
-            <a:ext cx="8525520" cy="516240"/>
+            <a:ext cx="8525160" cy="516240"/>
           </a:xfrm>
           <a:prstGeom prst="rect">
             <a:avLst/>
@@ -9126,7 +9127,7 @@
         <p:spPr>
           <a:xfrm>
             <a:off x="1353600" y="1694880"/>
-            <a:ext cx="8860680" cy="819720"/>
+            <a:ext cx="8860320" cy="819720"/>
           </a:xfrm>
           <a:prstGeom prst="rect">
             <a:avLst/>
@@ -9226,7 +9227,7 @@
         <p:spPr>
           <a:xfrm>
             <a:off x="987480" y="3182040"/>
-            <a:ext cx="3286080" cy="2737440"/>
+            <a:ext cx="3285720" cy="2737080"/>
           </a:xfrm>
           <a:prstGeom prst="roundRect">
             <a:avLst>
@@ -9288,7 +9289,7 @@
         <p:spPr>
           <a:xfrm>
             <a:off x="685800" y="2743200"/>
-            <a:ext cx="3514680" cy="3655080"/>
+            <a:ext cx="3514320" cy="3654720"/>
           </a:xfrm>
           <a:prstGeom prst="roundRect">
             <a:avLst>
@@ -9566,7 +9567,7 @@
         <p:spPr>
           <a:xfrm>
             <a:off x="4507920" y="3182040"/>
-            <a:ext cx="3286080" cy="2737440"/>
+            <a:ext cx="3285720" cy="2737080"/>
           </a:xfrm>
           <a:prstGeom prst="roundRect">
             <a:avLst>
@@ -9628,7 +9629,7 @@
         <p:spPr>
           <a:xfrm>
             <a:off x="4434840" y="2971800"/>
-            <a:ext cx="3286080" cy="3426480"/>
+            <a:ext cx="3285720" cy="3426120"/>
           </a:xfrm>
           <a:prstGeom prst="roundRect">
             <a:avLst>
@@ -9959,7 +9960,7 @@
         <p:spPr>
           <a:xfrm>
             <a:off x="8028360" y="3182040"/>
-            <a:ext cx="3286080" cy="2737440"/>
+            <a:ext cx="3285720" cy="2737080"/>
           </a:xfrm>
           <a:prstGeom prst="roundRect">
             <a:avLst>
@@ -10021,7 +10022,7 @@
         <p:spPr>
           <a:xfrm>
             <a:off x="8001000" y="2971800"/>
-            <a:ext cx="3313440" cy="3427920"/>
+            <a:ext cx="3313080" cy="3427560"/>
           </a:xfrm>
           <a:prstGeom prst="roundRect">
             <a:avLst>
@@ -10763,7 +10764,7 @@
         <p:spPr>
           <a:xfrm>
             <a:off x="0" y="0"/>
-            <a:ext cx="12183120" cy="6852240"/>
+            <a:ext cx="12182760" cy="6851880"/>
           </a:xfrm>
           <a:prstGeom prst="rect">
             <a:avLst/>
@@ -10823,7 +10824,7 @@
         <p:spPr>
           <a:xfrm>
             <a:off x="0" y="0"/>
-            <a:ext cx="12600" cy="6852240"/>
+            <a:ext cx="12240" cy="6851880"/>
           </a:xfrm>
           <a:prstGeom prst="rect">
             <a:avLst/>
@@ -10883,7 +10884,7 @@
         <p:spPr>
           <a:xfrm>
             <a:off x="914400" y="0"/>
-            <a:ext cx="12600" cy="6852240"/>
+            <a:ext cx="12240" cy="6851880"/>
           </a:xfrm>
           <a:prstGeom prst="rect">
             <a:avLst/>
@@ -10943,7 +10944,7 @@
         <p:spPr>
           <a:xfrm>
             <a:off x="1828800" y="0"/>
-            <a:ext cx="12600" cy="6852240"/>
+            <a:ext cx="12240" cy="6851880"/>
           </a:xfrm>
           <a:prstGeom prst="rect">
             <a:avLst/>
@@ -11003,7 +11004,7 @@
         <p:spPr>
           <a:xfrm>
             <a:off x="2743200" y="0"/>
-            <a:ext cx="12600" cy="6852240"/>
+            <a:ext cx="12240" cy="6851880"/>
           </a:xfrm>
           <a:prstGeom prst="rect">
             <a:avLst/>
@@ -11063,7 +11064,7 @@
         <p:spPr>
           <a:xfrm>
             <a:off x="3657600" y="0"/>
-            <a:ext cx="12600" cy="6852240"/>
+            <a:ext cx="12240" cy="6851880"/>
           </a:xfrm>
           <a:prstGeom prst="rect">
             <a:avLst/>
@@ -11123,7 +11124,7 @@
         <p:spPr>
           <a:xfrm>
             <a:off x="4572000" y="0"/>
-            <a:ext cx="12600" cy="6852240"/>
+            <a:ext cx="12240" cy="6851880"/>
           </a:xfrm>
           <a:prstGeom prst="rect">
             <a:avLst/>
@@ -11183,7 +11184,7 @@
         <p:spPr>
           <a:xfrm>
             <a:off x="5486400" y="0"/>
-            <a:ext cx="12600" cy="6852240"/>
+            <a:ext cx="12240" cy="6851880"/>
           </a:xfrm>
           <a:prstGeom prst="rect">
             <a:avLst/>
@@ -11243,7 +11244,7 @@
         <p:spPr>
           <a:xfrm>
             <a:off x="6400800" y="0"/>
-            <a:ext cx="12600" cy="6852240"/>
+            <a:ext cx="12240" cy="6851880"/>
           </a:xfrm>
           <a:prstGeom prst="rect">
             <a:avLst/>
@@ -11303,7 +11304,7 @@
         <p:spPr>
           <a:xfrm>
             <a:off x="7315200" y="0"/>
-            <a:ext cx="12600" cy="6852240"/>
+            <a:ext cx="12240" cy="6851880"/>
           </a:xfrm>
           <a:prstGeom prst="rect">
             <a:avLst/>
@@ -11363,7 +11364,7 @@
         <p:spPr>
           <a:xfrm>
             <a:off x="8229600" y="0"/>
-            <a:ext cx="12600" cy="6852240"/>
+            <a:ext cx="12240" cy="6851880"/>
           </a:xfrm>
           <a:prstGeom prst="rect">
             <a:avLst/>
@@ -11423,7 +11424,7 @@
         <p:spPr>
           <a:xfrm>
             <a:off x="9144000" y="0"/>
-            <a:ext cx="12600" cy="6852240"/>
+            <a:ext cx="12240" cy="6851880"/>
           </a:xfrm>
           <a:prstGeom prst="rect">
             <a:avLst/>
@@ -11483,7 +11484,7 @@
         <p:spPr>
           <a:xfrm>
             <a:off x="10058400" y="0"/>
-            <a:ext cx="12600" cy="6852240"/>
+            <a:ext cx="12240" cy="6851880"/>
           </a:xfrm>
           <a:prstGeom prst="rect">
             <a:avLst/>
@@ -11543,7 +11544,7 @@
         <p:spPr>
           <a:xfrm>
             <a:off x="10972800" y="0"/>
-            <a:ext cx="12600" cy="6852240"/>
+            <a:ext cx="12240" cy="6851880"/>
           </a:xfrm>
           <a:prstGeom prst="rect">
             <a:avLst/>
@@ -11603,7 +11604,7 @@
         <p:spPr>
           <a:xfrm>
             <a:off x="11887200" y="0"/>
-            <a:ext cx="12600" cy="6852240"/>
+            <a:ext cx="12240" cy="6851880"/>
           </a:xfrm>
           <a:prstGeom prst="rect">
             <a:avLst/>
@@ -11663,7 +11664,7 @@
         <p:spPr>
           <a:xfrm>
             <a:off x="0" y="0"/>
-            <a:ext cx="314280" cy="6852240"/>
+            <a:ext cx="313920" cy="6851880"/>
           </a:xfrm>
           <a:prstGeom prst="rect">
             <a:avLst/>
@@ -11723,7 +11724,7 @@
         <p:spPr>
           <a:xfrm>
             <a:off x="9875520" y="365760"/>
-            <a:ext cx="2005920" cy="497160"/>
+            <a:ext cx="2005560" cy="496800"/>
           </a:xfrm>
           <a:prstGeom prst="roundRect">
             <a:avLst>
@@ -11797,7 +11798,7 @@
         <p:spPr>
           <a:xfrm>
             <a:off x="2731320" y="914400"/>
-            <a:ext cx="5505120" cy="516240"/>
+            <a:ext cx="5504760" cy="516240"/>
           </a:xfrm>
           <a:prstGeom prst="rect">
             <a:avLst/>
@@ -11851,7 +11852,7 @@
         <p:spPr>
           <a:xfrm>
             <a:off x="674280" y="1694880"/>
-            <a:ext cx="10218960" cy="576360"/>
+            <a:ext cx="10218600" cy="576360"/>
           </a:xfrm>
           <a:prstGeom prst="rect">
             <a:avLst/>
@@ -11928,7 +11929,7 @@
         <p:spPr>
           <a:xfrm>
             <a:off x="987480" y="3182040"/>
-            <a:ext cx="3286080" cy="2737440"/>
+            <a:ext cx="3285720" cy="2737080"/>
           </a:xfrm>
           <a:prstGeom prst="roundRect">
             <a:avLst>
@@ -11990,7 +11991,7 @@
         <p:spPr>
           <a:xfrm>
             <a:off x="685800" y="2743200"/>
-            <a:ext cx="3514680" cy="3655080"/>
+            <a:ext cx="3514320" cy="3654720"/>
           </a:xfrm>
           <a:prstGeom prst="roundRect">
             <a:avLst>
@@ -12212,7 +12213,7 @@
         <p:spPr>
           <a:xfrm>
             <a:off x="4507920" y="3182040"/>
-            <a:ext cx="3286080" cy="2737440"/>
+            <a:ext cx="3285720" cy="2737080"/>
           </a:xfrm>
           <a:prstGeom prst="roundRect">
             <a:avLst>
@@ -12274,7 +12275,7 @@
         <p:spPr>
           <a:xfrm>
             <a:off x="4434840" y="2971800"/>
-            <a:ext cx="3286080" cy="3426480"/>
+            <a:ext cx="3285720" cy="3426120"/>
           </a:xfrm>
           <a:prstGeom prst="roundRect">
             <a:avLst>
@@ -12691,7 +12692,7 @@
         <p:spPr>
           <a:xfrm>
             <a:off x="8028360" y="3182040"/>
-            <a:ext cx="3286080" cy="2737440"/>
+            <a:ext cx="3285720" cy="2737080"/>
           </a:xfrm>
           <a:prstGeom prst="roundRect">
             <a:avLst>
@@ -12753,7 +12754,7 @@
         <p:spPr>
           <a:xfrm>
             <a:off x="8001000" y="2514600"/>
-            <a:ext cx="3656880" cy="3885120"/>
+            <a:ext cx="3656520" cy="3884760"/>
           </a:xfrm>
           <a:prstGeom prst="roundRect">
             <a:avLst>
@@ -13590,7 +13591,7 @@
         <p:spPr>
           <a:xfrm>
             <a:off x="0" y="0"/>
-            <a:ext cx="12183120" cy="6852240"/>
+            <a:ext cx="12182760" cy="6851880"/>
           </a:xfrm>
           <a:prstGeom prst="rect">
             <a:avLst/>
@@ -13650,7 +13651,7 @@
         <p:spPr>
           <a:xfrm>
             <a:off x="0" y="0"/>
-            <a:ext cx="12600" cy="6852240"/>
+            <a:ext cx="12240" cy="6851880"/>
           </a:xfrm>
           <a:prstGeom prst="rect">
             <a:avLst/>
@@ -13710,7 +13711,7 @@
         <p:spPr>
           <a:xfrm>
             <a:off x="914400" y="0"/>
-            <a:ext cx="12600" cy="6852240"/>
+            <a:ext cx="12240" cy="6851880"/>
           </a:xfrm>
           <a:prstGeom prst="rect">
             <a:avLst/>
@@ -13770,7 +13771,7 @@
         <p:spPr>
           <a:xfrm>
             <a:off x="1828800" y="0"/>
-            <a:ext cx="12600" cy="6852240"/>
+            <a:ext cx="12240" cy="6851880"/>
           </a:xfrm>
           <a:prstGeom prst="rect">
             <a:avLst/>
@@ -13830,7 +13831,7 @@
         <p:spPr>
           <a:xfrm>
             <a:off x="2743200" y="0"/>
-            <a:ext cx="12600" cy="6852240"/>
+            <a:ext cx="12240" cy="6851880"/>
           </a:xfrm>
           <a:prstGeom prst="rect">
             <a:avLst/>
@@ -13890,7 +13891,7 @@
         <p:spPr>
           <a:xfrm>
             <a:off x="3657600" y="0"/>
-            <a:ext cx="12600" cy="6852240"/>
+            <a:ext cx="12240" cy="6851880"/>
           </a:xfrm>
           <a:prstGeom prst="rect">
             <a:avLst/>
@@ -13950,7 +13951,7 @@
         <p:spPr>
           <a:xfrm>
             <a:off x="4572000" y="0"/>
-            <a:ext cx="12600" cy="6852240"/>
+            <a:ext cx="12240" cy="6851880"/>
           </a:xfrm>
           <a:prstGeom prst="rect">
             <a:avLst/>
@@ -14010,7 +14011,7 @@
         <p:spPr>
           <a:xfrm>
             <a:off x="5486400" y="0"/>
-            <a:ext cx="12600" cy="6852240"/>
+            <a:ext cx="12240" cy="6851880"/>
           </a:xfrm>
           <a:prstGeom prst="rect">
             <a:avLst/>
@@ -14070,7 +14071,7 @@
         <p:spPr>
           <a:xfrm>
             <a:off x="6400800" y="0"/>
-            <a:ext cx="12600" cy="6852240"/>
+            <a:ext cx="12240" cy="6851880"/>
           </a:xfrm>
           <a:prstGeom prst="rect">
             <a:avLst/>
@@ -14130,7 +14131,7 @@
         <p:spPr>
           <a:xfrm>
             <a:off x="7315200" y="0"/>
-            <a:ext cx="12600" cy="6852240"/>
+            <a:ext cx="12240" cy="6851880"/>
           </a:xfrm>
           <a:prstGeom prst="rect">
             <a:avLst/>
@@ -14190,7 +14191,7 @@
         <p:spPr>
           <a:xfrm>
             <a:off x="8229600" y="0"/>
-            <a:ext cx="12600" cy="6852240"/>
+            <a:ext cx="12240" cy="6851880"/>
           </a:xfrm>
           <a:prstGeom prst="rect">
             <a:avLst/>
@@ -14250,7 +14251,7 @@
         <p:spPr>
           <a:xfrm>
             <a:off x="9144000" y="0"/>
-            <a:ext cx="12600" cy="6852240"/>
+            <a:ext cx="12240" cy="6851880"/>
           </a:xfrm>
           <a:prstGeom prst="rect">
             <a:avLst/>
@@ -14310,7 +14311,7 @@
         <p:spPr>
           <a:xfrm>
             <a:off x="10058400" y="0"/>
-            <a:ext cx="12600" cy="6852240"/>
+            <a:ext cx="12240" cy="6851880"/>
           </a:xfrm>
           <a:prstGeom prst="rect">
             <a:avLst/>
@@ -14370,7 +14371,7 @@
         <p:spPr>
           <a:xfrm>
             <a:off x="10972800" y="0"/>
-            <a:ext cx="12600" cy="6852240"/>
+            <a:ext cx="12240" cy="6851880"/>
           </a:xfrm>
           <a:prstGeom prst="rect">
             <a:avLst/>
@@ -14430,7 +14431,7 @@
         <p:spPr>
           <a:xfrm>
             <a:off x="11887200" y="0"/>
-            <a:ext cx="12600" cy="6852240"/>
+            <a:ext cx="12240" cy="6851880"/>
           </a:xfrm>
           <a:prstGeom prst="rect">
             <a:avLst/>
@@ -14490,7 +14491,7 @@
         <p:spPr>
           <a:xfrm>
             <a:off x="0" y="0"/>
-            <a:ext cx="314280" cy="6852240"/>
+            <a:ext cx="313920" cy="6851880"/>
           </a:xfrm>
           <a:prstGeom prst="rect">
             <a:avLst/>
@@ -14550,7 +14551,7 @@
         <p:spPr>
           <a:xfrm>
             <a:off x="9875520" y="365760"/>
-            <a:ext cx="2005920" cy="497160"/>
+            <a:ext cx="2005560" cy="496800"/>
           </a:xfrm>
           <a:prstGeom prst="roundRect">
             <a:avLst>
@@ -14624,7 +14625,7 @@
         <p:spPr>
           <a:xfrm>
             <a:off x="1557360" y="732600"/>
-            <a:ext cx="7852680" cy="638280"/>
+            <a:ext cx="7852320" cy="638280"/>
           </a:xfrm>
           <a:prstGeom prst="rect">
             <a:avLst/>
@@ -14678,7 +14679,7 @@
         <p:spPr>
           <a:xfrm>
             <a:off x="1082520" y="1600200"/>
-            <a:ext cx="9402480" cy="819720"/>
+            <a:ext cx="9402120" cy="819720"/>
           </a:xfrm>
           <a:prstGeom prst="rect">
             <a:avLst/>
@@ -14778,7 +14779,7 @@
         <p:spPr>
           <a:xfrm>
             <a:off x="987480" y="3182040"/>
-            <a:ext cx="3286080" cy="2737440"/>
+            <a:ext cx="3285720" cy="2737080"/>
           </a:xfrm>
           <a:prstGeom prst="roundRect">
             <a:avLst>
@@ -14840,7 +14841,7 @@
         <p:spPr>
           <a:xfrm>
             <a:off x="685800" y="2971800"/>
-            <a:ext cx="3200040" cy="3428640"/>
+            <a:ext cx="3199680" cy="3428280"/>
           </a:xfrm>
           <a:prstGeom prst="roundRect">
             <a:avLst>
@@ -15066,7 +15067,7 @@
         <p:spPr>
           <a:xfrm>
             <a:off x="4507920" y="3182040"/>
-            <a:ext cx="3286080" cy="2737440"/>
+            <a:ext cx="3285720" cy="2737080"/>
           </a:xfrm>
           <a:prstGeom prst="roundRect">
             <a:avLst>
@@ -15128,7 +15129,7 @@
         <p:spPr>
           <a:xfrm>
             <a:off x="4257360" y="2971800"/>
-            <a:ext cx="3286080" cy="3426480"/>
+            <a:ext cx="3285720" cy="3426120"/>
           </a:xfrm>
           <a:prstGeom prst="roundRect">
             <a:avLst>
@@ -15624,7 +15625,7 @@
         <p:spPr>
           <a:xfrm>
             <a:off x="8028360" y="3182040"/>
-            <a:ext cx="3286080" cy="2737440"/>
+            <a:ext cx="3285720" cy="2737080"/>
           </a:xfrm>
           <a:prstGeom prst="roundRect">
             <a:avLst>
@@ -15686,7 +15687,7 @@
         <p:spPr>
           <a:xfrm>
             <a:off x="8001000" y="2514600"/>
-            <a:ext cx="3427560" cy="3885840"/>
+            <a:ext cx="3427200" cy="3885480"/>
           </a:xfrm>
           <a:prstGeom prst="roundRect">
             <a:avLst>
@@ -16572,7 +16573,7 @@
         <p:spPr>
           <a:xfrm>
             <a:off x="0" y="0"/>
-            <a:ext cx="12183120" cy="6852240"/>
+            <a:ext cx="12182760" cy="6851880"/>
           </a:xfrm>
           <a:prstGeom prst="rect">
             <a:avLst/>
@@ -16608,6 +16609,11 @@
             <a:noAutofit/>
           </a:bodyPr>
           <a:p>
+            <a:pPr>
+              <a:lnSpc>
+                <a:spcPct val="100000"/>
+              </a:lnSpc>
+            </a:pPr>
             <a:endParaRPr b="0" lang="en-US" sz="1800" spc="-1" strike="noStrike">
               <a:solidFill>
                 <a:schemeClr val="lt1"/>
@@ -16627,7 +16633,7 @@
         <p:spPr>
           <a:xfrm>
             <a:off x="0" y="0"/>
-            <a:ext cx="12600" cy="6852240"/>
+            <a:ext cx="12240" cy="6851880"/>
           </a:xfrm>
           <a:prstGeom prst="rect">
             <a:avLst/>
@@ -16663,6 +16669,11 @@
             <a:noAutofit/>
           </a:bodyPr>
           <a:p>
+            <a:pPr>
+              <a:lnSpc>
+                <a:spcPct val="100000"/>
+              </a:lnSpc>
+            </a:pPr>
             <a:endParaRPr b="0" lang="en-US" sz="1800" spc="-1" strike="noStrike">
               <a:solidFill>
                 <a:schemeClr val="lt1"/>
@@ -16682,7 +16693,7 @@
         <p:spPr>
           <a:xfrm>
             <a:off x="914400" y="0"/>
-            <a:ext cx="12600" cy="6852240"/>
+            <a:ext cx="12240" cy="6851880"/>
           </a:xfrm>
           <a:prstGeom prst="rect">
             <a:avLst/>
@@ -16718,6 +16729,11 @@
             <a:noAutofit/>
           </a:bodyPr>
           <a:p>
+            <a:pPr>
+              <a:lnSpc>
+                <a:spcPct val="100000"/>
+              </a:lnSpc>
+            </a:pPr>
             <a:endParaRPr b="0" lang="en-US" sz="1800" spc="-1" strike="noStrike">
               <a:solidFill>
                 <a:schemeClr val="lt1"/>
@@ -16737,7 +16753,7 @@
         <p:spPr>
           <a:xfrm>
             <a:off x="1828800" y="0"/>
-            <a:ext cx="12600" cy="6852240"/>
+            <a:ext cx="12240" cy="6851880"/>
           </a:xfrm>
           <a:prstGeom prst="rect">
             <a:avLst/>
@@ -16773,6 +16789,11 @@
             <a:noAutofit/>
           </a:bodyPr>
           <a:p>
+            <a:pPr>
+              <a:lnSpc>
+                <a:spcPct val="100000"/>
+              </a:lnSpc>
+            </a:pPr>
             <a:endParaRPr b="0" lang="en-US" sz="1800" spc="-1" strike="noStrike">
               <a:solidFill>
                 <a:schemeClr val="lt1"/>
@@ -16792,7 +16813,7 @@
         <p:spPr>
           <a:xfrm>
             <a:off x="2743200" y="0"/>
-            <a:ext cx="12600" cy="6852240"/>
+            <a:ext cx="12240" cy="6851880"/>
           </a:xfrm>
           <a:prstGeom prst="rect">
             <a:avLst/>
@@ -16828,6 +16849,11 @@
             <a:noAutofit/>
           </a:bodyPr>
           <a:p>
+            <a:pPr>
+              <a:lnSpc>
+                <a:spcPct val="100000"/>
+              </a:lnSpc>
+            </a:pPr>
             <a:endParaRPr b="0" lang="en-US" sz="1800" spc="-1" strike="noStrike">
               <a:solidFill>
                 <a:schemeClr val="lt1"/>
@@ -16847,7 +16873,7 @@
         <p:spPr>
           <a:xfrm>
             <a:off x="3657600" y="0"/>
-            <a:ext cx="12600" cy="6852240"/>
+            <a:ext cx="12240" cy="6851880"/>
           </a:xfrm>
           <a:prstGeom prst="rect">
             <a:avLst/>
@@ -16883,6 +16909,11 @@
             <a:noAutofit/>
           </a:bodyPr>
           <a:p>
+            <a:pPr>
+              <a:lnSpc>
+                <a:spcPct val="100000"/>
+              </a:lnSpc>
+            </a:pPr>
             <a:endParaRPr b="0" lang="en-US" sz="1800" spc="-1" strike="noStrike">
               <a:solidFill>
                 <a:schemeClr val="lt1"/>
@@ -16902,7 +16933,7 @@
         <p:spPr>
           <a:xfrm>
             <a:off x="4572000" y="0"/>
-            <a:ext cx="12600" cy="6852240"/>
+            <a:ext cx="12240" cy="6851880"/>
           </a:xfrm>
           <a:prstGeom prst="rect">
             <a:avLst/>
@@ -16938,6 +16969,11 @@
             <a:noAutofit/>
           </a:bodyPr>
           <a:p>
+            <a:pPr>
+              <a:lnSpc>
+                <a:spcPct val="100000"/>
+              </a:lnSpc>
+            </a:pPr>
             <a:endParaRPr b="0" lang="en-US" sz="1800" spc="-1" strike="noStrike">
               <a:solidFill>
                 <a:schemeClr val="lt1"/>
@@ -16957,7 +16993,7 @@
         <p:spPr>
           <a:xfrm>
             <a:off x="5486400" y="0"/>
-            <a:ext cx="12600" cy="6852240"/>
+            <a:ext cx="12240" cy="6851880"/>
           </a:xfrm>
           <a:prstGeom prst="rect">
             <a:avLst/>
@@ -16993,6 +17029,11 @@
             <a:noAutofit/>
           </a:bodyPr>
           <a:p>
+            <a:pPr>
+              <a:lnSpc>
+                <a:spcPct val="100000"/>
+              </a:lnSpc>
+            </a:pPr>
             <a:endParaRPr b="0" lang="en-US" sz="1800" spc="-1" strike="noStrike">
               <a:solidFill>
                 <a:schemeClr val="lt1"/>
@@ -17012,7 +17053,7 @@
         <p:spPr>
           <a:xfrm>
             <a:off x="6400800" y="0"/>
-            <a:ext cx="12600" cy="6852240"/>
+            <a:ext cx="12240" cy="6851880"/>
           </a:xfrm>
           <a:prstGeom prst="rect">
             <a:avLst/>
@@ -17048,6 +17089,11 @@
             <a:noAutofit/>
           </a:bodyPr>
           <a:p>
+            <a:pPr>
+              <a:lnSpc>
+                <a:spcPct val="100000"/>
+              </a:lnSpc>
+            </a:pPr>
             <a:endParaRPr b="0" lang="en-US" sz="1800" spc="-1" strike="noStrike">
               <a:solidFill>
                 <a:schemeClr val="lt1"/>
@@ -17067,7 +17113,7 @@
         <p:spPr>
           <a:xfrm>
             <a:off x="7315200" y="0"/>
-            <a:ext cx="12600" cy="6852240"/>
+            <a:ext cx="12240" cy="6851880"/>
           </a:xfrm>
           <a:prstGeom prst="rect">
             <a:avLst/>
@@ -17103,6 +17149,11 @@
             <a:noAutofit/>
           </a:bodyPr>
           <a:p>
+            <a:pPr>
+              <a:lnSpc>
+                <a:spcPct val="100000"/>
+              </a:lnSpc>
+            </a:pPr>
             <a:endParaRPr b="0" lang="en-US" sz="1800" spc="-1" strike="noStrike">
               <a:solidFill>
                 <a:schemeClr val="lt1"/>
@@ -17122,7 +17173,7 @@
         <p:spPr>
           <a:xfrm>
             <a:off x="8229600" y="0"/>
-            <a:ext cx="12600" cy="6852240"/>
+            <a:ext cx="12240" cy="6851880"/>
           </a:xfrm>
           <a:prstGeom prst="rect">
             <a:avLst/>
@@ -17158,6 +17209,11 @@
             <a:noAutofit/>
           </a:bodyPr>
           <a:p>
+            <a:pPr>
+              <a:lnSpc>
+                <a:spcPct val="100000"/>
+              </a:lnSpc>
+            </a:pPr>
             <a:endParaRPr b="0" lang="en-US" sz="1800" spc="-1" strike="noStrike">
               <a:solidFill>
                 <a:schemeClr val="lt1"/>
@@ -17177,7 +17233,7 @@
         <p:spPr>
           <a:xfrm>
             <a:off x="9144000" y="0"/>
-            <a:ext cx="12600" cy="6852240"/>
+            <a:ext cx="12240" cy="6851880"/>
           </a:xfrm>
           <a:prstGeom prst="rect">
             <a:avLst/>
@@ -17213,6 +17269,11 @@
             <a:noAutofit/>
           </a:bodyPr>
           <a:p>
+            <a:pPr>
+              <a:lnSpc>
+                <a:spcPct val="100000"/>
+              </a:lnSpc>
+            </a:pPr>
             <a:endParaRPr b="0" lang="en-US" sz="1800" spc="-1" strike="noStrike">
               <a:solidFill>
                 <a:schemeClr val="lt1"/>
@@ -17232,7 +17293,7 @@
         <p:spPr>
           <a:xfrm>
             <a:off x="10058400" y="0"/>
-            <a:ext cx="12600" cy="6852240"/>
+            <a:ext cx="12240" cy="6851880"/>
           </a:xfrm>
           <a:prstGeom prst="rect">
             <a:avLst/>
@@ -17268,6 +17329,11 @@
             <a:noAutofit/>
           </a:bodyPr>
           <a:p>
+            <a:pPr>
+              <a:lnSpc>
+                <a:spcPct val="100000"/>
+              </a:lnSpc>
+            </a:pPr>
             <a:endParaRPr b="0" lang="en-US" sz="1800" spc="-1" strike="noStrike">
               <a:solidFill>
                 <a:schemeClr val="lt1"/>
@@ -17287,7 +17353,7 @@
         <p:spPr>
           <a:xfrm>
             <a:off x="10972800" y="0"/>
-            <a:ext cx="12600" cy="6852240"/>
+            <a:ext cx="12240" cy="6851880"/>
           </a:xfrm>
           <a:prstGeom prst="rect">
             <a:avLst/>
@@ -17323,6 +17389,11 @@
             <a:noAutofit/>
           </a:bodyPr>
           <a:p>
+            <a:pPr>
+              <a:lnSpc>
+                <a:spcPct val="100000"/>
+              </a:lnSpc>
+            </a:pPr>
             <a:endParaRPr b="0" lang="en-US" sz="1800" spc="-1" strike="noStrike">
               <a:solidFill>
                 <a:schemeClr val="lt1"/>
@@ -17342,7 +17413,7 @@
         <p:spPr>
           <a:xfrm>
             <a:off x="11887200" y="0"/>
-            <a:ext cx="12600" cy="6852240"/>
+            <a:ext cx="12240" cy="6851880"/>
           </a:xfrm>
           <a:prstGeom prst="rect">
             <a:avLst/>
@@ -17378,6 +17449,11 @@
             <a:noAutofit/>
           </a:bodyPr>
           <a:p>
+            <a:pPr>
+              <a:lnSpc>
+                <a:spcPct val="100000"/>
+              </a:lnSpc>
+            </a:pPr>
             <a:endParaRPr b="0" lang="en-US" sz="1800" spc="-1" strike="noStrike">
               <a:solidFill>
                 <a:schemeClr val="lt1"/>
@@ -17397,7 +17473,7 @@
         <p:spPr>
           <a:xfrm>
             <a:off x="0" y="0"/>
-            <a:ext cx="314280" cy="6852240"/>
+            <a:ext cx="313920" cy="6851880"/>
           </a:xfrm>
           <a:prstGeom prst="rect">
             <a:avLst/>
@@ -17433,6 +17509,11 @@
             <a:noAutofit/>
           </a:bodyPr>
           <a:p>
+            <a:pPr>
+              <a:lnSpc>
+                <a:spcPct val="100000"/>
+              </a:lnSpc>
+            </a:pPr>
             <a:endParaRPr b="0" lang="en-US" sz="1800" spc="-1" strike="noStrike">
               <a:solidFill>
                 <a:schemeClr val="lt1"/>
@@ -17452,7 +17533,7 @@
         <p:spPr>
           <a:xfrm>
             <a:off x="9875520" y="365760"/>
-            <a:ext cx="2005920" cy="497160"/>
+            <a:ext cx="2005560" cy="496800"/>
           </a:xfrm>
           <a:prstGeom prst="roundRect">
             <a:avLst>
@@ -17526,7 +17607,7 @@
         <p:spPr>
           <a:xfrm>
             <a:off x="2174400" y="732600"/>
-            <a:ext cx="6618600" cy="639000"/>
+            <a:ext cx="6618240" cy="638280"/>
           </a:xfrm>
           <a:prstGeom prst="rect">
             <a:avLst/>
@@ -17580,7 +17661,7 @@
         <p:spPr>
           <a:xfrm>
             <a:off x="1950480" y="1600200"/>
-            <a:ext cx="7666920" cy="819720"/>
+            <a:ext cx="7666560" cy="819720"/>
           </a:xfrm>
           <a:prstGeom prst="rect">
             <a:avLst/>
@@ -17680,7 +17761,7 @@
         <p:spPr>
           <a:xfrm>
             <a:off x="987480" y="3182040"/>
-            <a:ext cx="3286080" cy="2737440"/>
+            <a:ext cx="3285720" cy="2737080"/>
           </a:xfrm>
           <a:prstGeom prst="roundRect">
             <a:avLst>
@@ -17718,6 +17799,11 @@
             <a:noAutofit/>
           </a:bodyPr>
           <a:p>
+            <a:pPr>
+              <a:lnSpc>
+                <a:spcPct val="100000"/>
+              </a:lnSpc>
+            </a:pPr>
             <a:endParaRPr b="0" lang="en-US" sz="1800" spc="-1" strike="noStrike">
               <a:solidFill>
                 <a:schemeClr val="lt1"/>
@@ -17737,7 +17823,7 @@
         <p:spPr>
           <a:xfrm>
             <a:off x="685800" y="2971800"/>
-            <a:ext cx="3200040" cy="3428640"/>
+            <a:ext cx="3199680" cy="3428280"/>
           </a:xfrm>
           <a:prstGeom prst="roundRect">
             <a:avLst>
@@ -17923,7 +18009,7 @@
         <p:spPr>
           <a:xfrm>
             <a:off x="4507920" y="3182040"/>
-            <a:ext cx="3286080" cy="2737440"/>
+            <a:ext cx="3285720" cy="2737080"/>
           </a:xfrm>
           <a:prstGeom prst="roundRect">
             <a:avLst>
@@ -17961,6 +18047,11 @@
             <a:noAutofit/>
           </a:bodyPr>
           <a:p>
+            <a:pPr>
+              <a:lnSpc>
+                <a:spcPct val="100000"/>
+              </a:lnSpc>
+            </a:pPr>
             <a:endParaRPr b="0" lang="en-US" sz="1800" spc="-1" strike="noStrike">
               <a:solidFill>
                 <a:schemeClr val="lt1"/>
@@ -17980,7 +18071,7 @@
         <p:spPr>
           <a:xfrm>
             <a:off x="4257360" y="2971800"/>
-            <a:ext cx="3286080" cy="3426480"/>
+            <a:ext cx="3285720" cy="3426120"/>
           </a:xfrm>
           <a:prstGeom prst="roundRect">
             <a:avLst>
@@ -18387,7 +18478,7 @@
         <p:spPr>
           <a:xfrm>
             <a:off x="8028360" y="3182040"/>
-            <a:ext cx="3286080" cy="2737440"/>
+            <a:ext cx="3285720" cy="2737080"/>
           </a:xfrm>
           <a:prstGeom prst="roundRect">
             <a:avLst>
@@ -18425,6 +18516,11 @@
             <a:noAutofit/>
           </a:bodyPr>
           <a:p>
+            <a:pPr>
+              <a:lnSpc>
+                <a:spcPct val="100000"/>
+              </a:lnSpc>
+            </a:pPr>
             <a:endParaRPr b="0" lang="en-US" sz="1800" spc="-1" strike="noStrike">
               <a:solidFill>
                 <a:schemeClr val="lt1"/>
@@ -18444,7 +18540,7 @@
         <p:spPr>
           <a:xfrm>
             <a:off x="8001000" y="2514600"/>
-            <a:ext cx="3427560" cy="3885840"/>
+            <a:ext cx="3427200" cy="3885480"/>
           </a:xfrm>
           <a:prstGeom prst="roundRect">
             <a:avLst>
@@ -19145,6 +19241,2675 @@
       <p:sp>
         <p:nvSpPr>
           <p:cNvPr id="404" name="TextBox 45"/>
+          <p:cNvSpPr/>
+          <p:nvPr/>
+        </p:nvSpPr>
+        <p:spPr>
+          <a:xfrm>
+            <a:off x="4600080" y="6446520"/>
+            <a:ext cx="3051000" cy="363960"/>
+          </a:xfrm>
+          <a:prstGeom prst="rect">
+            <a:avLst/>
+          </a:prstGeom>
+          <a:noFill/>
+          <a:ln w="0">
+            <a:noFill/>
+          </a:ln>
+        </p:spPr>
+        <p:style>
+          <a:lnRef idx="0"/>
+          <a:fillRef idx="0"/>
+          <a:effectRef idx="0"/>
+          <a:fontRef idx="minor"/>
+        </p:style>
+        <p:txBody>
+          <a:bodyPr wrap="none" lIns="90000" rIns="90000" tIns="45000" bIns="45000" anchor="t">
+            <a:spAutoFit/>
+          </a:bodyPr>
+          <a:p>
+            <a:pPr>
+              <a:lnSpc>
+                <a:spcPct val="100000"/>
+              </a:lnSpc>
+            </a:pPr>
+            <a:r>
+              <a:rPr b="0" lang="en-US" sz="1800" spc="-1" strike="noStrike">
+                <a:solidFill>
+                  <a:srgbClr val="000000"/>
+                </a:solidFill>
+                <a:latin typeface="Calibri"/>
+                <a:ea typeface="DejaVu Sans"/>
+              </a:rPr>
+              <a:t>Java • Ultra Premium Template</a:t>
+            </a:r>
+            <a:endParaRPr b="0" lang="en-US" sz="1800" spc="-1" strike="noStrike">
+              <a:solidFill>
+                <a:srgbClr val="000000"/>
+              </a:solidFill>
+              <a:latin typeface="Arial"/>
+            </a:endParaRPr>
+          </a:p>
+        </p:txBody>
+      </p:sp>
+    </p:spTree>
+  </p:cSld>
+  <mc:AlternateContent>
+    <mc:Choice Requires="p14">
+      <p:transition spd="slow" p14:dur="2000"/>
+    </mc:Choice>
+    <mc:Fallback>
+      <p:transition spd="slow"/>
+    </mc:Fallback>
+  </mc:AlternateContent>
+</p:sld>
+</file>
+
+<file path=ppt/slides/slide15.xml><?xml version="1.0" encoding="utf-8"?>
+<p:sld xmlns:a="http://schemas.openxmlformats.org/drawingml/2006/main" xmlns:p="http://schemas.openxmlformats.org/presentationml/2006/main" xmlns:r="http://schemas.openxmlformats.org/officeDocument/2006/relationships" xmlns:p14="http://schemas.microsoft.com/office/powerpoint/2010/main" xmlns:p15="http://schemas.microsoft.com/office/powerpoint/2012/main" xmlns:mc="http://schemas.openxmlformats.org/markup-compatibility/2006">
+  <p:cSld>
+    <p:spTree>
+      <p:nvGrpSpPr>
+        <p:cNvPr id="1" name=""/>
+        <p:cNvGrpSpPr/>
+        <p:nvPr/>
+      </p:nvGrpSpPr>
+      <p:grpSpPr>
+        <a:xfrm>
+          <a:off x="0" y="0"/>
+          <a:ext cx="0" cy="0"/>
+          <a:chOff x="0" y="0"/>
+          <a:chExt cx="0" cy="0"/>
+        </a:xfrm>
+      </p:grpSpPr>
+      <p:sp>
+        <p:nvSpPr>
+          <p:cNvPr id="405" name="Rectangle 225"/>
+          <p:cNvSpPr/>
+          <p:nvPr/>
+        </p:nvSpPr>
+        <p:spPr>
+          <a:xfrm>
+            <a:off x="0" y="0"/>
+            <a:ext cx="12182760" cy="6851880"/>
+          </a:xfrm>
+          <a:prstGeom prst="rect">
+            <a:avLst/>
+          </a:prstGeom>
+          <a:solidFill>
+            <a:srgbClr val="0b0b0d"/>
+          </a:solidFill>
+          <a:ln>
+            <a:noFill/>
+          </a:ln>
+          <a:effectLst>
+            <a:outerShdw blurRad="39960" dir="5400000" dist="23040" rotWithShape="0">
+              <a:srgbClr val="000000">
+                <a:alpha val="35000"/>
+              </a:srgbClr>
+            </a:outerShdw>
+          </a:effectLst>
+        </p:spPr>
+        <p:style>
+          <a:lnRef idx="1">
+            <a:schemeClr val="accent1"/>
+          </a:lnRef>
+          <a:fillRef idx="3">
+            <a:schemeClr val="accent1"/>
+          </a:fillRef>
+          <a:effectRef idx="2">
+            <a:schemeClr val="accent1"/>
+          </a:effectRef>
+          <a:fontRef idx="minor"/>
+        </p:style>
+        <p:txBody>
+          <a:bodyPr lIns="90000" rIns="90000" tIns="45000" bIns="45000" anchor="ctr">
+            <a:noAutofit/>
+          </a:bodyPr>
+          <a:p>
+            <a:endParaRPr b="0" lang="en-US" sz="1800" spc="-1" strike="noStrike">
+              <a:solidFill>
+                <a:schemeClr val="lt1"/>
+              </a:solidFill>
+              <a:latin typeface="Calibri"/>
+              <a:ea typeface="DejaVu Sans"/>
+            </a:endParaRPr>
+          </a:p>
+        </p:txBody>
+      </p:sp>
+      <p:sp>
+        <p:nvSpPr>
+          <p:cNvPr id="406" name="Rectangle 226"/>
+          <p:cNvSpPr/>
+          <p:nvPr/>
+        </p:nvSpPr>
+        <p:spPr>
+          <a:xfrm>
+            <a:off x="0" y="0"/>
+            <a:ext cx="12240" cy="6851880"/>
+          </a:xfrm>
+          <a:prstGeom prst="rect">
+            <a:avLst/>
+          </a:prstGeom>
+          <a:solidFill>
+            <a:srgbClr val="121216"/>
+          </a:solidFill>
+          <a:ln>
+            <a:noFill/>
+          </a:ln>
+          <a:effectLst>
+            <a:outerShdw blurRad="39960" dir="5400000" dist="23040" rotWithShape="0">
+              <a:srgbClr val="000000">
+                <a:alpha val="35000"/>
+              </a:srgbClr>
+            </a:outerShdw>
+          </a:effectLst>
+        </p:spPr>
+        <p:style>
+          <a:lnRef idx="1">
+            <a:schemeClr val="accent1"/>
+          </a:lnRef>
+          <a:fillRef idx="3">
+            <a:schemeClr val="accent1"/>
+          </a:fillRef>
+          <a:effectRef idx="2">
+            <a:schemeClr val="accent1"/>
+          </a:effectRef>
+          <a:fontRef idx="minor"/>
+        </p:style>
+        <p:txBody>
+          <a:bodyPr lIns="90000" rIns="90000" tIns="45000" bIns="45000" anchor="ctr">
+            <a:noAutofit/>
+          </a:bodyPr>
+          <a:p>
+            <a:endParaRPr b="0" lang="en-US" sz="1800" spc="-1" strike="noStrike">
+              <a:solidFill>
+                <a:schemeClr val="lt1"/>
+              </a:solidFill>
+              <a:latin typeface="Calibri"/>
+              <a:ea typeface="DejaVu Sans"/>
+            </a:endParaRPr>
+          </a:p>
+        </p:txBody>
+      </p:sp>
+      <p:sp>
+        <p:nvSpPr>
+          <p:cNvPr id="407" name="Rectangle 227"/>
+          <p:cNvSpPr/>
+          <p:nvPr/>
+        </p:nvSpPr>
+        <p:spPr>
+          <a:xfrm>
+            <a:off x="914400" y="0"/>
+            <a:ext cx="12240" cy="6851880"/>
+          </a:xfrm>
+          <a:prstGeom prst="rect">
+            <a:avLst/>
+          </a:prstGeom>
+          <a:solidFill>
+            <a:srgbClr val="121216"/>
+          </a:solidFill>
+          <a:ln>
+            <a:noFill/>
+          </a:ln>
+          <a:effectLst>
+            <a:outerShdw blurRad="39960" dir="5400000" dist="23040" rotWithShape="0">
+              <a:srgbClr val="000000">
+                <a:alpha val="35000"/>
+              </a:srgbClr>
+            </a:outerShdw>
+          </a:effectLst>
+        </p:spPr>
+        <p:style>
+          <a:lnRef idx="1">
+            <a:schemeClr val="accent1"/>
+          </a:lnRef>
+          <a:fillRef idx="3">
+            <a:schemeClr val="accent1"/>
+          </a:fillRef>
+          <a:effectRef idx="2">
+            <a:schemeClr val="accent1"/>
+          </a:effectRef>
+          <a:fontRef idx="minor"/>
+        </p:style>
+        <p:txBody>
+          <a:bodyPr lIns="90000" rIns="90000" tIns="45000" bIns="45000" anchor="ctr">
+            <a:noAutofit/>
+          </a:bodyPr>
+          <a:p>
+            <a:endParaRPr b="0" lang="en-US" sz="1800" spc="-1" strike="noStrike">
+              <a:solidFill>
+                <a:schemeClr val="lt1"/>
+              </a:solidFill>
+              <a:latin typeface="Calibri"/>
+              <a:ea typeface="DejaVu Sans"/>
+            </a:endParaRPr>
+          </a:p>
+        </p:txBody>
+      </p:sp>
+      <p:sp>
+        <p:nvSpPr>
+          <p:cNvPr id="408" name="Rectangle 228"/>
+          <p:cNvSpPr/>
+          <p:nvPr/>
+        </p:nvSpPr>
+        <p:spPr>
+          <a:xfrm>
+            <a:off x="1828800" y="0"/>
+            <a:ext cx="12240" cy="6851880"/>
+          </a:xfrm>
+          <a:prstGeom prst="rect">
+            <a:avLst/>
+          </a:prstGeom>
+          <a:solidFill>
+            <a:srgbClr val="121216"/>
+          </a:solidFill>
+          <a:ln>
+            <a:noFill/>
+          </a:ln>
+          <a:effectLst>
+            <a:outerShdw blurRad="39960" dir="5400000" dist="23040" rotWithShape="0">
+              <a:srgbClr val="000000">
+                <a:alpha val="35000"/>
+              </a:srgbClr>
+            </a:outerShdw>
+          </a:effectLst>
+        </p:spPr>
+        <p:style>
+          <a:lnRef idx="1">
+            <a:schemeClr val="accent1"/>
+          </a:lnRef>
+          <a:fillRef idx="3">
+            <a:schemeClr val="accent1"/>
+          </a:fillRef>
+          <a:effectRef idx="2">
+            <a:schemeClr val="accent1"/>
+          </a:effectRef>
+          <a:fontRef idx="minor"/>
+        </p:style>
+        <p:txBody>
+          <a:bodyPr lIns="90000" rIns="90000" tIns="45000" bIns="45000" anchor="ctr">
+            <a:noAutofit/>
+          </a:bodyPr>
+          <a:p>
+            <a:endParaRPr b="0" lang="en-US" sz="1800" spc="-1" strike="noStrike">
+              <a:solidFill>
+                <a:schemeClr val="lt1"/>
+              </a:solidFill>
+              <a:latin typeface="Calibri"/>
+              <a:ea typeface="DejaVu Sans"/>
+            </a:endParaRPr>
+          </a:p>
+        </p:txBody>
+      </p:sp>
+      <p:sp>
+        <p:nvSpPr>
+          <p:cNvPr id="409" name="Rectangle 229"/>
+          <p:cNvSpPr/>
+          <p:nvPr/>
+        </p:nvSpPr>
+        <p:spPr>
+          <a:xfrm>
+            <a:off x="2743200" y="0"/>
+            <a:ext cx="12240" cy="6851880"/>
+          </a:xfrm>
+          <a:prstGeom prst="rect">
+            <a:avLst/>
+          </a:prstGeom>
+          <a:solidFill>
+            <a:srgbClr val="121216"/>
+          </a:solidFill>
+          <a:ln>
+            <a:noFill/>
+          </a:ln>
+          <a:effectLst>
+            <a:outerShdw blurRad="39960" dir="5400000" dist="23040" rotWithShape="0">
+              <a:srgbClr val="000000">
+                <a:alpha val="35000"/>
+              </a:srgbClr>
+            </a:outerShdw>
+          </a:effectLst>
+        </p:spPr>
+        <p:style>
+          <a:lnRef idx="1">
+            <a:schemeClr val="accent1"/>
+          </a:lnRef>
+          <a:fillRef idx="3">
+            <a:schemeClr val="accent1"/>
+          </a:fillRef>
+          <a:effectRef idx="2">
+            <a:schemeClr val="accent1"/>
+          </a:effectRef>
+          <a:fontRef idx="minor"/>
+        </p:style>
+        <p:txBody>
+          <a:bodyPr lIns="90000" rIns="90000" tIns="45000" bIns="45000" anchor="ctr">
+            <a:noAutofit/>
+          </a:bodyPr>
+          <a:p>
+            <a:endParaRPr b="0" lang="en-US" sz="1800" spc="-1" strike="noStrike">
+              <a:solidFill>
+                <a:schemeClr val="lt1"/>
+              </a:solidFill>
+              <a:latin typeface="Calibri"/>
+              <a:ea typeface="DejaVu Sans"/>
+            </a:endParaRPr>
+          </a:p>
+        </p:txBody>
+      </p:sp>
+      <p:sp>
+        <p:nvSpPr>
+          <p:cNvPr id="410" name="Rectangle 230"/>
+          <p:cNvSpPr/>
+          <p:nvPr/>
+        </p:nvSpPr>
+        <p:spPr>
+          <a:xfrm>
+            <a:off x="3657600" y="0"/>
+            <a:ext cx="12240" cy="6851880"/>
+          </a:xfrm>
+          <a:prstGeom prst="rect">
+            <a:avLst/>
+          </a:prstGeom>
+          <a:solidFill>
+            <a:srgbClr val="121216"/>
+          </a:solidFill>
+          <a:ln>
+            <a:noFill/>
+          </a:ln>
+          <a:effectLst>
+            <a:outerShdw blurRad="39960" dir="5400000" dist="23040" rotWithShape="0">
+              <a:srgbClr val="000000">
+                <a:alpha val="35000"/>
+              </a:srgbClr>
+            </a:outerShdw>
+          </a:effectLst>
+        </p:spPr>
+        <p:style>
+          <a:lnRef idx="1">
+            <a:schemeClr val="accent1"/>
+          </a:lnRef>
+          <a:fillRef idx="3">
+            <a:schemeClr val="accent1"/>
+          </a:fillRef>
+          <a:effectRef idx="2">
+            <a:schemeClr val="accent1"/>
+          </a:effectRef>
+          <a:fontRef idx="minor"/>
+        </p:style>
+        <p:txBody>
+          <a:bodyPr lIns="90000" rIns="90000" tIns="45000" bIns="45000" anchor="ctr">
+            <a:noAutofit/>
+          </a:bodyPr>
+          <a:p>
+            <a:endParaRPr b="0" lang="en-US" sz="1800" spc="-1" strike="noStrike">
+              <a:solidFill>
+                <a:schemeClr val="lt1"/>
+              </a:solidFill>
+              <a:latin typeface="Calibri"/>
+              <a:ea typeface="DejaVu Sans"/>
+            </a:endParaRPr>
+          </a:p>
+        </p:txBody>
+      </p:sp>
+      <p:sp>
+        <p:nvSpPr>
+          <p:cNvPr id="411" name="Rectangle 231"/>
+          <p:cNvSpPr/>
+          <p:nvPr/>
+        </p:nvSpPr>
+        <p:spPr>
+          <a:xfrm>
+            <a:off x="4572000" y="0"/>
+            <a:ext cx="12240" cy="6851880"/>
+          </a:xfrm>
+          <a:prstGeom prst="rect">
+            <a:avLst/>
+          </a:prstGeom>
+          <a:solidFill>
+            <a:srgbClr val="121216"/>
+          </a:solidFill>
+          <a:ln>
+            <a:noFill/>
+          </a:ln>
+          <a:effectLst>
+            <a:outerShdw blurRad="39960" dir="5400000" dist="23040" rotWithShape="0">
+              <a:srgbClr val="000000">
+                <a:alpha val="35000"/>
+              </a:srgbClr>
+            </a:outerShdw>
+          </a:effectLst>
+        </p:spPr>
+        <p:style>
+          <a:lnRef idx="1">
+            <a:schemeClr val="accent1"/>
+          </a:lnRef>
+          <a:fillRef idx="3">
+            <a:schemeClr val="accent1"/>
+          </a:fillRef>
+          <a:effectRef idx="2">
+            <a:schemeClr val="accent1"/>
+          </a:effectRef>
+          <a:fontRef idx="minor"/>
+        </p:style>
+        <p:txBody>
+          <a:bodyPr lIns="90000" rIns="90000" tIns="45000" bIns="45000" anchor="ctr">
+            <a:noAutofit/>
+          </a:bodyPr>
+          <a:p>
+            <a:endParaRPr b="0" lang="en-US" sz="1800" spc="-1" strike="noStrike">
+              <a:solidFill>
+                <a:schemeClr val="lt1"/>
+              </a:solidFill>
+              <a:latin typeface="Calibri"/>
+              <a:ea typeface="DejaVu Sans"/>
+            </a:endParaRPr>
+          </a:p>
+        </p:txBody>
+      </p:sp>
+      <p:sp>
+        <p:nvSpPr>
+          <p:cNvPr id="412" name="Rectangle 232"/>
+          <p:cNvSpPr/>
+          <p:nvPr/>
+        </p:nvSpPr>
+        <p:spPr>
+          <a:xfrm>
+            <a:off x="5486400" y="0"/>
+            <a:ext cx="12240" cy="6851880"/>
+          </a:xfrm>
+          <a:prstGeom prst="rect">
+            <a:avLst/>
+          </a:prstGeom>
+          <a:solidFill>
+            <a:srgbClr val="121216"/>
+          </a:solidFill>
+          <a:ln>
+            <a:noFill/>
+          </a:ln>
+          <a:effectLst>
+            <a:outerShdw blurRad="39960" dir="5400000" dist="23040" rotWithShape="0">
+              <a:srgbClr val="000000">
+                <a:alpha val="35000"/>
+              </a:srgbClr>
+            </a:outerShdw>
+          </a:effectLst>
+        </p:spPr>
+        <p:style>
+          <a:lnRef idx="1">
+            <a:schemeClr val="accent1"/>
+          </a:lnRef>
+          <a:fillRef idx="3">
+            <a:schemeClr val="accent1"/>
+          </a:fillRef>
+          <a:effectRef idx="2">
+            <a:schemeClr val="accent1"/>
+          </a:effectRef>
+          <a:fontRef idx="minor"/>
+        </p:style>
+        <p:txBody>
+          <a:bodyPr lIns="90000" rIns="90000" tIns="45000" bIns="45000" anchor="ctr">
+            <a:noAutofit/>
+          </a:bodyPr>
+          <a:p>
+            <a:endParaRPr b="0" lang="en-US" sz="1800" spc="-1" strike="noStrike">
+              <a:solidFill>
+                <a:schemeClr val="lt1"/>
+              </a:solidFill>
+              <a:latin typeface="Calibri"/>
+              <a:ea typeface="DejaVu Sans"/>
+            </a:endParaRPr>
+          </a:p>
+        </p:txBody>
+      </p:sp>
+      <p:sp>
+        <p:nvSpPr>
+          <p:cNvPr id="413" name="Rectangle 233"/>
+          <p:cNvSpPr/>
+          <p:nvPr/>
+        </p:nvSpPr>
+        <p:spPr>
+          <a:xfrm>
+            <a:off x="6400800" y="0"/>
+            <a:ext cx="12240" cy="6851880"/>
+          </a:xfrm>
+          <a:prstGeom prst="rect">
+            <a:avLst/>
+          </a:prstGeom>
+          <a:solidFill>
+            <a:srgbClr val="121216"/>
+          </a:solidFill>
+          <a:ln>
+            <a:noFill/>
+          </a:ln>
+          <a:effectLst>
+            <a:outerShdw blurRad="39960" dir="5400000" dist="23040" rotWithShape="0">
+              <a:srgbClr val="000000">
+                <a:alpha val="35000"/>
+              </a:srgbClr>
+            </a:outerShdw>
+          </a:effectLst>
+        </p:spPr>
+        <p:style>
+          <a:lnRef idx="1">
+            <a:schemeClr val="accent1"/>
+          </a:lnRef>
+          <a:fillRef idx="3">
+            <a:schemeClr val="accent1"/>
+          </a:fillRef>
+          <a:effectRef idx="2">
+            <a:schemeClr val="accent1"/>
+          </a:effectRef>
+          <a:fontRef idx="minor"/>
+        </p:style>
+        <p:txBody>
+          <a:bodyPr lIns="90000" rIns="90000" tIns="45000" bIns="45000" anchor="ctr">
+            <a:noAutofit/>
+          </a:bodyPr>
+          <a:p>
+            <a:endParaRPr b="0" lang="en-US" sz="1800" spc="-1" strike="noStrike">
+              <a:solidFill>
+                <a:schemeClr val="lt1"/>
+              </a:solidFill>
+              <a:latin typeface="Calibri"/>
+              <a:ea typeface="DejaVu Sans"/>
+            </a:endParaRPr>
+          </a:p>
+        </p:txBody>
+      </p:sp>
+      <p:sp>
+        <p:nvSpPr>
+          <p:cNvPr id="414" name="Rectangle 234"/>
+          <p:cNvSpPr/>
+          <p:nvPr/>
+        </p:nvSpPr>
+        <p:spPr>
+          <a:xfrm>
+            <a:off x="7315200" y="0"/>
+            <a:ext cx="12240" cy="6851880"/>
+          </a:xfrm>
+          <a:prstGeom prst="rect">
+            <a:avLst/>
+          </a:prstGeom>
+          <a:solidFill>
+            <a:srgbClr val="121216"/>
+          </a:solidFill>
+          <a:ln>
+            <a:noFill/>
+          </a:ln>
+          <a:effectLst>
+            <a:outerShdw blurRad="39960" dir="5400000" dist="23040" rotWithShape="0">
+              <a:srgbClr val="000000">
+                <a:alpha val="35000"/>
+              </a:srgbClr>
+            </a:outerShdw>
+          </a:effectLst>
+        </p:spPr>
+        <p:style>
+          <a:lnRef idx="1">
+            <a:schemeClr val="accent1"/>
+          </a:lnRef>
+          <a:fillRef idx="3">
+            <a:schemeClr val="accent1"/>
+          </a:fillRef>
+          <a:effectRef idx="2">
+            <a:schemeClr val="accent1"/>
+          </a:effectRef>
+          <a:fontRef idx="minor"/>
+        </p:style>
+        <p:txBody>
+          <a:bodyPr lIns="90000" rIns="90000" tIns="45000" bIns="45000" anchor="ctr">
+            <a:noAutofit/>
+          </a:bodyPr>
+          <a:p>
+            <a:endParaRPr b="0" lang="en-US" sz="1800" spc="-1" strike="noStrike">
+              <a:solidFill>
+                <a:schemeClr val="lt1"/>
+              </a:solidFill>
+              <a:latin typeface="Calibri"/>
+              <a:ea typeface="DejaVu Sans"/>
+            </a:endParaRPr>
+          </a:p>
+        </p:txBody>
+      </p:sp>
+      <p:sp>
+        <p:nvSpPr>
+          <p:cNvPr id="415" name="Rectangle 235"/>
+          <p:cNvSpPr/>
+          <p:nvPr/>
+        </p:nvSpPr>
+        <p:spPr>
+          <a:xfrm>
+            <a:off x="8229600" y="0"/>
+            <a:ext cx="12240" cy="6851880"/>
+          </a:xfrm>
+          <a:prstGeom prst="rect">
+            <a:avLst/>
+          </a:prstGeom>
+          <a:solidFill>
+            <a:srgbClr val="121216"/>
+          </a:solidFill>
+          <a:ln>
+            <a:noFill/>
+          </a:ln>
+          <a:effectLst>
+            <a:outerShdw blurRad="39960" dir="5400000" dist="23040" rotWithShape="0">
+              <a:srgbClr val="000000">
+                <a:alpha val="35000"/>
+              </a:srgbClr>
+            </a:outerShdw>
+          </a:effectLst>
+        </p:spPr>
+        <p:style>
+          <a:lnRef idx="1">
+            <a:schemeClr val="accent1"/>
+          </a:lnRef>
+          <a:fillRef idx="3">
+            <a:schemeClr val="accent1"/>
+          </a:fillRef>
+          <a:effectRef idx="2">
+            <a:schemeClr val="accent1"/>
+          </a:effectRef>
+          <a:fontRef idx="minor"/>
+        </p:style>
+        <p:txBody>
+          <a:bodyPr lIns="90000" rIns="90000" tIns="45000" bIns="45000" anchor="ctr">
+            <a:noAutofit/>
+          </a:bodyPr>
+          <a:p>
+            <a:endParaRPr b="0" lang="en-US" sz="1800" spc="-1" strike="noStrike">
+              <a:solidFill>
+                <a:schemeClr val="lt1"/>
+              </a:solidFill>
+              <a:latin typeface="Calibri"/>
+              <a:ea typeface="DejaVu Sans"/>
+            </a:endParaRPr>
+          </a:p>
+        </p:txBody>
+      </p:sp>
+      <p:sp>
+        <p:nvSpPr>
+          <p:cNvPr id="416" name="Rectangle 236"/>
+          <p:cNvSpPr/>
+          <p:nvPr/>
+        </p:nvSpPr>
+        <p:spPr>
+          <a:xfrm>
+            <a:off x="9144000" y="0"/>
+            <a:ext cx="12240" cy="6851880"/>
+          </a:xfrm>
+          <a:prstGeom prst="rect">
+            <a:avLst/>
+          </a:prstGeom>
+          <a:solidFill>
+            <a:srgbClr val="121216"/>
+          </a:solidFill>
+          <a:ln>
+            <a:noFill/>
+          </a:ln>
+          <a:effectLst>
+            <a:outerShdw blurRad="39960" dir="5400000" dist="23040" rotWithShape="0">
+              <a:srgbClr val="000000">
+                <a:alpha val="35000"/>
+              </a:srgbClr>
+            </a:outerShdw>
+          </a:effectLst>
+        </p:spPr>
+        <p:style>
+          <a:lnRef idx="1">
+            <a:schemeClr val="accent1"/>
+          </a:lnRef>
+          <a:fillRef idx="3">
+            <a:schemeClr val="accent1"/>
+          </a:fillRef>
+          <a:effectRef idx="2">
+            <a:schemeClr val="accent1"/>
+          </a:effectRef>
+          <a:fontRef idx="minor"/>
+        </p:style>
+        <p:txBody>
+          <a:bodyPr lIns="90000" rIns="90000" tIns="45000" bIns="45000" anchor="ctr">
+            <a:noAutofit/>
+          </a:bodyPr>
+          <a:p>
+            <a:endParaRPr b="0" lang="en-US" sz="1800" spc="-1" strike="noStrike">
+              <a:solidFill>
+                <a:schemeClr val="lt1"/>
+              </a:solidFill>
+              <a:latin typeface="Calibri"/>
+              <a:ea typeface="DejaVu Sans"/>
+            </a:endParaRPr>
+          </a:p>
+        </p:txBody>
+      </p:sp>
+      <p:sp>
+        <p:nvSpPr>
+          <p:cNvPr id="417" name="Rectangle 237"/>
+          <p:cNvSpPr/>
+          <p:nvPr/>
+        </p:nvSpPr>
+        <p:spPr>
+          <a:xfrm>
+            <a:off x="10058400" y="0"/>
+            <a:ext cx="12240" cy="6851880"/>
+          </a:xfrm>
+          <a:prstGeom prst="rect">
+            <a:avLst/>
+          </a:prstGeom>
+          <a:solidFill>
+            <a:srgbClr val="121216"/>
+          </a:solidFill>
+          <a:ln>
+            <a:noFill/>
+          </a:ln>
+          <a:effectLst>
+            <a:outerShdw blurRad="39960" dir="5400000" dist="23040" rotWithShape="0">
+              <a:srgbClr val="000000">
+                <a:alpha val="35000"/>
+              </a:srgbClr>
+            </a:outerShdw>
+          </a:effectLst>
+        </p:spPr>
+        <p:style>
+          <a:lnRef idx="1">
+            <a:schemeClr val="accent1"/>
+          </a:lnRef>
+       